--- a/Hyunho_Kook_Master_Defense.pptx
+++ b/Hyunho_Kook_Master_Defense.pptx
@@ -3666,58 +3666,118 @@
         </p:nvSpPr>
         <p:spPr>
           <a:xfrm>
+            <a:off x="457200" y="1600200"/>
+            <a:ext cx="11247120" cy="365760"/>
+          </a:xfrm>
+          <a:prstGeom prst="rect">
+            <a:avLst/>
+          </a:prstGeom>
+          <a:noFill/>
+        </p:spPr>
+        <p:txBody>
+          <a:bodyPr wrap="square" lIns="0" rIns="0" tIns="0" bIns="0">
+            <a:spAutoFit/>
+          </a:bodyPr>
+          <a:lstStyle/>
+          <a:p>
+            <a:pPr>
+              <a:defRPr sz="1400" b="0" i="1">
+                <a:solidFill>
+                  <a:srgbClr val="7A7A7A"/>
+                </a:solidFill>
+                <a:latin typeface="Calibri"/>
+              </a:defRPr>
+            </a:pPr>
+            <a:r>
+              <a:t>Both window width and gradient magnitude must scale correctly with V_thr</a:t>
+            </a:r>
+          </a:p>
+        </p:txBody>
+      </p:sp>
+      <p:pic>
+        <p:nvPicPr>
+          <p:cNvPr id="5" name="Picture 4" descr="second_main.png"/>
+          <p:cNvPicPr>
+            <a:picLocks noChangeAspect="1"/>
+          </p:cNvPicPr>
+          <p:nvPr/>
+        </p:nvPicPr>
+        <p:blipFill>
+          <a:blip r:embed="rId2"/>
+          <a:stretch>
+            <a:fillRect/>
+          </a:stretch>
+        </p:blipFill>
+        <p:spPr>
+          <a:xfrm>
+            <a:off x="4297680" y="1783080"/>
+            <a:ext cx="3675636" cy="4206240"/>
+          </a:xfrm>
+          <a:prstGeom prst="rect">
+            <a:avLst/>
+          </a:prstGeom>
+        </p:spPr>
+      </p:pic>
+      <p:sp>
+        <p:nvSpPr>
+          <p:cNvPr id="6" name="TextBox 5"/>
+          <p:cNvSpPr txBox="1"/>
+          <p:nvPr/>
+        </p:nvSpPr>
+        <p:spPr>
+          <a:xfrm>
+            <a:off x="457200" y="1874519"/>
+            <a:ext cx="3657600" cy="274320"/>
+          </a:xfrm>
+          <a:prstGeom prst="rect">
+            <a:avLst/>
+          </a:prstGeom>
+          <a:noFill/>
+        </p:spPr>
+        <p:txBody>
+          <a:bodyPr wrap="square" lIns="0" rIns="0" tIns="0" bIns="0">
+            <a:spAutoFit/>
+          </a:bodyPr>
+          <a:lstStyle/>
+          <a:p>
+            <a:pPr>
+              <a:defRPr sz="1000" b="0" i="1">
+                <a:solidFill>
+                  <a:srgbClr val="7A7A7A"/>
+                </a:solidFill>
+                <a:latin typeface="Calibri"/>
+              </a:defRPr>
+            </a:pPr>
+            <a:r>
+              <a:t>By V_thr:</a:t>
+            </a:r>
+          </a:p>
+        </p:txBody>
+      </p:sp>
+      <p:sp>
+        <p:nvSpPr>
+          <p:cNvPr id="7" name="TextBox 6"/>
+          <p:cNvSpPr txBox="1"/>
+          <p:nvPr/>
+        </p:nvSpPr>
+        <p:spPr>
+          <a:xfrm>
             <a:off x="457200" y="2194560"/>
-            <a:ext cx="11247120" cy="365760"/>
-          </a:xfrm>
-          <a:prstGeom prst="rect">
-            <a:avLst/>
-          </a:prstGeom>
-          <a:noFill/>
-        </p:spPr>
-        <p:txBody>
-          <a:bodyPr wrap="square" lIns="0" rIns="0" tIns="0" bIns="0">
-            <a:spAutoFit/>
-          </a:bodyPr>
-          <a:lstStyle/>
-          <a:p>
-            <a:pPr>
-              <a:defRPr sz="1200" b="0" i="1">
-                <a:solidFill>
-                  <a:srgbClr val="7A7A7A"/>
-                </a:solidFill>
-                <a:latin typeface="Calibri"/>
-              </a:defRPr>
-            </a:pPr>
-            <a:r>
-              <a:t>Window width × gradient magnitude — both must scale correctly with V_thr.</a:t>
-            </a:r>
-          </a:p>
-        </p:txBody>
-      </p:sp>
-      <p:sp>
-        <p:nvSpPr>
-          <p:cNvPr id="5" name="TextBox 4"/>
-          <p:cNvSpPr txBox="1"/>
-          <p:nvPr/>
-        </p:nvSpPr>
-        <p:spPr>
-          <a:xfrm>
-            <a:off x="1554480" y="2606040"/>
-            <a:ext cx="5029200" cy="274320"/>
-          </a:xfrm>
-          <a:prstGeom prst="rect">
-            <a:avLst/>
-          </a:prstGeom>
-          <a:noFill/>
-        </p:spPr>
-        <p:txBody>
-          <a:bodyPr wrap="square" lIns="0" rIns="0" tIns="0" bIns="0">
-            <a:spAutoFit/>
-          </a:bodyPr>
-          <a:lstStyle/>
-          <a:p>
-            <a:pPr algn="ctr">
-              <a:defRPr sz="1100" b="1" i="0">
+            <a:ext cx="1463040" cy="274320"/>
+          </a:xfrm>
+          <a:prstGeom prst="rect">
+            <a:avLst/>
+          </a:prstGeom>
+          <a:noFill/>
+        </p:spPr>
+        <p:txBody>
+          <a:bodyPr wrap="square" lIns="0" rIns="0" tIns="0" bIns="0">
+            <a:spAutoFit/>
+          </a:bodyPr>
+          <a:lstStyle/>
+          <a:p>
+            <a:pPr>
+              <a:defRPr sz="1000" b="1" i="0">
                 <a:solidFill>
                   <a:srgbClr val="0F2540"/>
                 </a:solidFill>
@@ -3725,7 +3785,7 @@
               </a:defRPr>
             </a:pPr>
             <a:r>
-              <a:rPr spc="200"/>
+              <a:rPr spc="150"/>
               <a:t>V_thr ≪ 1</a:t>
             </a:r>
           </a:p>
@@ -3733,28 +3793,28 @@
       </p:sp>
       <p:sp>
         <p:nvSpPr>
-          <p:cNvPr id="6" name="TextBox 5"/>
-          <p:cNvSpPr txBox="1"/>
-          <p:nvPr/>
-        </p:nvSpPr>
-        <p:spPr>
-          <a:xfrm>
-            <a:off x="6766560" y="2606040"/>
-            <a:ext cx="5029200" cy="274320"/>
-          </a:xfrm>
-          <a:prstGeom prst="rect">
-            <a:avLst/>
-          </a:prstGeom>
-          <a:noFill/>
-        </p:spPr>
-        <p:txBody>
-          <a:bodyPr wrap="square" lIns="0" rIns="0" tIns="0" bIns="0">
-            <a:spAutoFit/>
-          </a:bodyPr>
-          <a:lstStyle/>
-          <a:p>
-            <a:pPr algn="ctr">
-              <a:defRPr sz="1100" b="1" i="0">
+          <p:cNvPr id="8" name="TextBox 7"/>
+          <p:cNvSpPr txBox="1"/>
+          <p:nvPr/>
+        </p:nvSpPr>
+        <p:spPr>
+          <a:xfrm>
+            <a:off x="2011680" y="2194560"/>
+            <a:ext cx="1828800" cy="274320"/>
+          </a:xfrm>
+          <a:prstGeom prst="rect">
+            <a:avLst/>
+          </a:prstGeom>
+          <a:noFill/>
+        </p:spPr>
+        <p:txBody>
+          <a:bodyPr wrap="square" lIns="0" rIns="0" tIns="0" bIns="0">
+            <a:spAutoFit/>
+          </a:bodyPr>
+          <a:lstStyle/>
+          <a:p>
+            <a:pPr>
+              <a:defRPr sz="1000" b="1" i="0">
                 <a:solidFill>
                   <a:srgbClr val="0F2540"/>
                 </a:solidFill>
@@ -3762,7 +3822,7 @@
               </a:defRPr>
             </a:pPr>
             <a:r>
-              <a:rPr spc="200"/>
+              <a:rPr spc="150"/>
               <a:t>V_thr ≫ 1</a:t>
             </a:r>
           </a:p>
@@ -3770,14 +3830,14 @@
       </p:sp>
       <p:sp>
         <p:nvSpPr>
-          <p:cNvPr id="7" name="Rectangle 6"/>
+          <p:cNvPr id="9" name="Rectangle 8"/>
           <p:cNvSpPr/>
           <p:nvPr/>
         </p:nvSpPr>
         <p:spPr>
           <a:xfrm>
-            <a:off x="457200" y="2926080"/>
-            <a:ext cx="1005840" cy="914400"/>
+            <a:off x="457200" y="2560320"/>
+            <a:ext cx="777240" cy="1188720"/>
           </a:xfrm>
           <a:prstGeom prst="rect">
             <a:avLst/>
@@ -3815,14 +3875,14 @@
       </p:sp>
       <p:sp>
         <p:nvSpPr>
-          <p:cNvPr id="8" name="TextBox 7"/>
-          <p:cNvSpPr txBox="1"/>
-          <p:nvPr/>
-        </p:nvSpPr>
-        <p:spPr>
-          <a:xfrm>
-            <a:off x="457200" y="3218688"/>
-            <a:ext cx="1005840" cy="365760"/>
+          <p:cNvPr id="10" name="TextBox 9"/>
+          <p:cNvSpPr txBox="1"/>
+          <p:nvPr/>
+        </p:nvSpPr>
+        <p:spPr>
+          <a:xfrm>
+            <a:off x="457200" y="2971800"/>
+            <a:ext cx="777240" cy="365760"/>
           </a:xfrm>
           <a:prstGeom prst="rect">
             <a:avLst/>
@@ -3836,7 +3896,7 @@
           <a:lstStyle/>
           <a:p>
             <a:pPr algn="ctr">
-              <a:defRPr sz="1200" b="1" i="0">
+              <a:defRPr sz="1100" b="1" i="0">
                 <a:solidFill>
                   <a:srgbClr val="FFFFFF"/>
                 </a:solidFill>
@@ -3851,14 +3911,14 @@
       </p:sp>
       <p:sp>
         <p:nvSpPr>
-          <p:cNvPr id="9" name="Rectangle 8"/>
+          <p:cNvPr id="11" name="Rectangle 10"/>
           <p:cNvSpPr/>
           <p:nvPr/>
         </p:nvSpPr>
         <p:spPr>
           <a:xfrm>
-            <a:off x="1554480" y="2926080"/>
-            <a:ext cx="5029200" cy="914400"/>
+            <a:off x="1325880" y="2560320"/>
+            <a:ext cx="1463040" cy="1188720"/>
           </a:xfrm>
           <a:prstGeom prst="rect">
             <a:avLst/>
@@ -3866,9 +3926,9 @@
           <a:solidFill>
             <a:srgbClr val="FAEEE0"/>
           </a:solidFill>
-          <a:ln w="6350">
+          <a:ln w="10160">
             <a:solidFill>
-              <a:srgbClr val="FAEEE0"/>
+              <a:srgbClr val="E56945"/>
             </a:solidFill>
           </a:ln>
         </p:spPr>
@@ -3896,28 +3956,28 @@
       </p:sp>
       <p:sp>
         <p:nvSpPr>
-          <p:cNvPr id="10" name="TextBox 9"/>
-          <p:cNvSpPr txBox="1"/>
-          <p:nvPr/>
-        </p:nvSpPr>
-        <p:spPr>
-          <a:xfrm>
-            <a:off x="1691640" y="3044952"/>
-            <a:ext cx="4754880" cy="320040"/>
-          </a:xfrm>
-          <a:prstGeom prst="rect">
-            <a:avLst/>
-          </a:prstGeom>
-          <a:noFill/>
-        </p:spPr>
-        <p:txBody>
-          <a:bodyPr wrap="square" lIns="0" rIns="0" tIns="0" bIns="0">
-            <a:spAutoFit/>
-          </a:bodyPr>
-          <a:lstStyle/>
-          <a:p>
-            <a:pPr>
-              <a:defRPr sz="1200" b="1" i="0">
+          <p:cNvPr id="12" name="TextBox 11"/>
+          <p:cNvSpPr txBox="1"/>
+          <p:nvPr/>
+        </p:nvSpPr>
+        <p:spPr>
+          <a:xfrm>
+            <a:off x="1417320" y="2651760"/>
+            <a:ext cx="1280160" cy="274320"/>
+          </a:xfrm>
+          <a:prstGeom prst="rect">
+            <a:avLst/>
+          </a:prstGeom>
+          <a:noFill/>
+        </p:spPr>
+        <p:txBody>
+          <a:bodyPr wrap="square" lIns="0" rIns="0" tIns="0" bIns="0">
+            <a:spAutoFit/>
+          </a:bodyPr>
+          <a:lstStyle/>
+          <a:p>
+            <a:pPr>
+              <a:defRPr sz="1000" b="1" i="0">
                 <a:solidFill>
                   <a:srgbClr val="E56945"/>
                 </a:solidFill>
@@ -3925,35 +3985,35 @@
               </a:defRPr>
             </a:pPr>
             <a:r>
-              <a:t>✗  Flooding</a:t>
-            </a:r>
-          </a:p>
-        </p:txBody>
-      </p:sp>
-      <p:sp>
-        <p:nvSpPr>
-          <p:cNvPr id="11" name="TextBox 10"/>
-          <p:cNvSpPr txBox="1"/>
-          <p:nvPr/>
-        </p:nvSpPr>
-        <p:spPr>
-          <a:xfrm>
-            <a:off x="1691640" y="3383280"/>
-            <a:ext cx="4754880" cy="457200"/>
-          </a:xfrm>
-          <a:prstGeom prst="rect">
-            <a:avLst/>
-          </a:prstGeom>
-          <a:noFill/>
-        </p:spPr>
-        <p:txBody>
-          <a:bodyPr wrap="square" lIns="0" rIns="0" tIns="0" bIns="0">
-            <a:spAutoFit/>
-          </a:bodyPr>
-          <a:lstStyle/>
-          <a:p>
-            <a:pPr>
-              <a:defRPr sz="1100" b="0" i="0">
+              <a:t>✗  Flood</a:t>
+            </a:r>
+          </a:p>
+        </p:txBody>
+      </p:sp>
+      <p:sp>
+        <p:nvSpPr>
+          <p:cNvPr id="13" name="TextBox 12"/>
+          <p:cNvSpPr txBox="1"/>
+          <p:nvPr/>
+        </p:nvSpPr>
+        <p:spPr>
+          <a:xfrm>
+            <a:off x="1417320" y="2971800"/>
+            <a:ext cx="1280160" cy="777240"/>
+          </a:xfrm>
+          <a:prstGeom prst="rect">
+            <a:avLst/>
+          </a:prstGeom>
+          <a:noFill/>
+        </p:spPr>
+        <p:txBody>
+          <a:bodyPr wrap="square" lIns="0" rIns="0" tIns="0" bIns="0">
+            <a:spAutoFit/>
+          </a:bodyPr>
+          <a:lstStyle/>
+          <a:p>
+            <a:pPr>
+              <a:defRPr sz="800" b="0" i="0">
                 <a:solidFill>
                   <a:srgbClr val="1A1A1A"/>
                 </a:solidFill>
@@ -3961,21 +4021,29 @@
               </a:defRPr>
             </a:pPr>
             <a:r>
-              <a:t>fixed window covers most of the distribution</a:t>
-            </a:r>
-          </a:p>
-        </p:txBody>
-      </p:sp>
-      <p:sp>
-        <p:nvSpPr>
-          <p:cNvPr id="12" name="Rectangle 11"/>
+              <a:t>fixed window</a:t>
+            </a:r>
+            <a:br/>
+            <a:r>
+              <a:t>covers most of</a:t>
+            </a:r>
+            <a:br/>
+            <a:r>
+              <a:t>distribution</a:t>
+            </a:r>
+          </a:p>
+        </p:txBody>
+      </p:sp>
+      <p:sp>
+        <p:nvSpPr>
+          <p:cNvPr id="14" name="Rectangle 13"/>
           <p:cNvSpPr/>
           <p:nvPr/>
         </p:nvSpPr>
         <p:spPr>
           <a:xfrm>
-            <a:off x="6766560" y="2926080"/>
-            <a:ext cx="5029200" cy="914400"/>
+            <a:off x="2834640" y="2560320"/>
+            <a:ext cx="1463040" cy="1188720"/>
           </a:xfrm>
           <a:prstGeom prst="rect">
             <a:avLst/>
@@ -3983,9 +4051,9 @@
           <a:solidFill>
             <a:srgbClr val="FAEEE0"/>
           </a:solidFill>
-          <a:ln w="6350">
+          <a:ln w="10160">
             <a:solidFill>
-              <a:srgbClr val="FAEEE0"/>
+              <a:srgbClr val="E56945"/>
             </a:solidFill>
           </a:ln>
         </p:spPr>
@@ -4013,28 +4081,28 @@
       </p:sp>
       <p:sp>
         <p:nvSpPr>
-          <p:cNvPr id="13" name="TextBox 12"/>
-          <p:cNvSpPr txBox="1"/>
-          <p:nvPr/>
-        </p:nvSpPr>
-        <p:spPr>
-          <a:xfrm>
-            <a:off x="6903720" y="3044952"/>
-            <a:ext cx="4754880" cy="320040"/>
-          </a:xfrm>
-          <a:prstGeom prst="rect">
-            <a:avLst/>
-          </a:prstGeom>
-          <a:noFill/>
-        </p:spPr>
-        <p:txBody>
-          <a:bodyPr wrap="square" lIns="0" rIns="0" tIns="0" bIns="0">
-            <a:spAutoFit/>
-          </a:bodyPr>
-          <a:lstStyle/>
-          <a:p>
-            <a:pPr>
-              <a:defRPr sz="1200" b="1" i="0">
+          <p:cNvPr id="15" name="TextBox 14"/>
+          <p:cNvSpPr txBox="1"/>
+          <p:nvPr/>
+        </p:nvSpPr>
+        <p:spPr>
+          <a:xfrm>
+            <a:off x="2926080" y="2651760"/>
+            <a:ext cx="1280160" cy="274320"/>
+          </a:xfrm>
+          <a:prstGeom prst="rect">
+            <a:avLst/>
+          </a:prstGeom>
+          <a:noFill/>
+        </p:spPr>
+        <p:txBody>
+          <a:bodyPr wrap="square" lIns="0" rIns="0" tIns="0" bIns="0">
+            <a:spAutoFit/>
+          </a:bodyPr>
+          <a:lstStyle/>
+          <a:p>
+            <a:pPr>
+              <a:defRPr sz="1000" b="1" i="0">
                 <a:solidFill>
                   <a:srgbClr val="E56945"/>
                 </a:solidFill>
@@ -4042,35 +4110,35 @@
               </a:defRPr>
             </a:pPr>
             <a:r>
-              <a:t>✗  Starvation</a:t>
-            </a:r>
-          </a:p>
-        </p:txBody>
-      </p:sp>
-      <p:sp>
-        <p:nvSpPr>
-          <p:cNvPr id="14" name="TextBox 13"/>
-          <p:cNvSpPr txBox="1"/>
-          <p:nvPr/>
-        </p:nvSpPr>
-        <p:spPr>
-          <a:xfrm>
-            <a:off x="6903720" y="3383280"/>
-            <a:ext cx="4754880" cy="457200"/>
-          </a:xfrm>
-          <a:prstGeom prst="rect">
-            <a:avLst/>
-          </a:prstGeom>
-          <a:noFill/>
-        </p:spPr>
-        <p:txBody>
-          <a:bodyPr wrap="square" lIns="0" rIns="0" tIns="0" bIns="0">
-            <a:spAutoFit/>
-          </a:bodyPr>
-          <a:lstStyle/>
-          <a:p>
-            <a:pPr>
-              <a:defRPr sz="1100" b="0" i="0">
+              <a:t>✗  Starve</a:t>
+            </a:r>
+          </a:p>
+        </p:txBody>
+      </p:sp>
+      <p:sp>
+        <p:nvSpPr>
+          <p:cNvPr id="16" name="TextBox 15"/>
+          <p:cNvSpPr txBox="1"/>
+          <p:nvPr/>
+        </p:nvSpPr>
+        <p:spPr>
+          <a:xfrm>
+            <a:off x="2926080" y="2971800"/>
+            <a:ext cx="1280160" cy="777240"/>
+          </a:xfrm>
+          <a:prstGeom prst="rect">
+            <a:avLst/>
+          </a:prstGeom>
+          <a:noFill/>
+        </p:spPr>
+        <p:txBody>
+          <a:bodyPr wrap="square" lIns="0" rIns="0" tIns="0" bIns="0">
+            <a:spAutoFit/>
+          </a:bodyPr>
+          <a:lstStyle/>
+          <a:p>
+            <a:pPr>
+              <a:defRPr sz="800" b="0" i="0">
                 <a:solidFill>
                   <a:srgbClr val="1A1A1A"/>
                 </a:solidFill>
@@ -4078,21 +4146,29 @@
               </a:defRPr>
             </a:pPr>
             <a:r>
-              <a:t>fixed window misses the distribution</a:t>
-            </a:r>
-          </a:p>
-        </p:txBody>
-      </p:sp>
-      <p:sp>
-        <p:nvSpPr>
-          <p:cNvPr id="15" name="Rectangle 14"/>
+              <a:t>fixed window</a:t>
+            </a:r>
+            <a:br/>
+            <a:r>
+              <a:t>misses the</a:t>
+            </a:r>
+            <a:br/>
+            <a:r>
+              <a:t>distribution</a:t>
+            </a:r>
+          </a:p>
+        </p:txBody>
+      </p:sp>
+      <p:sp>
+        <p:nvSpPr>
+          <p:cNvPr id="17" name="Rectangle 16"/>
           <p:cNvSpPr/>
           <p:nvPr/>
         </p:nvSpPr>
         <p:spPr>
           <a:xfrm>
-            <a:off x="457200" y="3977640"/>
-            <a:ext cx="1005840" cy="914400"/>
+            <a:off x="457200" y="3840480"/>
+            <a:ext cx="777240" cy="1188720"/>
           </a:xfrm>
           <a:prstGeom prst="rect">
             <a:avLst/>
@@ -4130,14 +4206,14 @@
       </p:sp>
       <p:sp>
         <p:nvSpPr>
-          <p:cNvPr id="16" name="TextBox 15"/>
-          <p:cNvSpPr txBox="1"/>
-          <p:nvPr/>
-        </p:nvSpPr>
-        <p:spPr>
-          <a:xfrm>
-            <a:off x="457200" y="4270248"/>
-            <a:ext cx="1005840" cy="365760"/>
+          <p:cNvPr id="18" name="TextBox 17"/>
+          <p:cNvSpPr txBox="1"/>
+          <p:nvPr/>
+        </p:nvSpPr>
+        <p:spPr>
+          <a:xfrm>
+            <a:off x="457200" y="4251960"/>
+            <a:ext cx="777240" cy="365760"/>
           </a:xfrm>
           <a:prstGeom prst="rect">
             <a:avLst/>
@@ -4151,7 +4227,7 @@
           <a:lstStyle/>
           <a:p>
             <a:pPr algn="ctr">
-              <a:defRPr sz="1200" b="1" i="0">
+              <a:defRPr sz="1100" b="1" i="0">
                 <a:solidFill>
                   <a:srgbClr val="0F2540"/>
                 </a:solidFill>
@@ -4166,14 +4242,14 @@
       </p:sp>
       <p:sp>
         <p:nvSpPr>
-          <p:cNvPr id="17" name="Rectangle 16"/>
+          <p:cNvPr id="19" name="Rectangle 18"/>
           <p:cNvSpPr/>
           <p:nvPr/>
         </p:nvSpPr>
         <p:spPr>
           <a:xfrm>
-            <a:off x="1554480" y="3977640"/>
-            <a:ext cx="5029200" cy="914400"/>
+            <a:off x="1325880" y="3840480"/>
+            <a:ext cx="1463040" cy="1188720"/>
           </a:xfrm>
           <a:prstGeom prst="rect">
             <a:avLst/>
@@ -4181,9 +4257,9 @@
           <a:solidFill>
             <a:srgbClr val="FAEECB"/>
           </a:solidFill>
-          <a:ln w="6350">
+          <a:ln w="10160">
             <a:solidFill>
-              <a:srgbClr val="FAEECB"/>
+              <a:srgbClr val="E0B85F"/>
             </a:solidFill>
           </a:ln>
         </p:spPr>
@@ -4211,28 +4287,28 @@
       </p:sp>
       <p:sp>
         <p:nvSpPr>
-          <p:cNvPr id="18" name="TextBox 17"/>
-          <p:cNvSpPr txBox="1"/>
-          <p:nvPr/>
-        </p:nvSpPr>
-        <p:spPr>
-          <a:xfrm>
-            <a:off x="1691640" y="4096512"/>
-            <a:ext cx="4754880" cy="320040"/>
-          </a:xfrm>
-          <a:prstGeom prst="rect">
-            <a:avLst/>
-          </a:prstGeom>
-          <a:noFill/>
-        </p:spPr>
-        <p:txBody>
-          <a:bodyPr wrap="square" lIns="0" rIns="0" tIns="0" bIns="0">
-            <a:spAutoFit/>
-          </a:bodyPr>
-          <a:lstStyle/>
-          <a:p>
-            <a:pPr>
-              <a:defRPr sz="1200" b="1" i="0">
+          <p:cNvPr id="20" name="TextBox 19"/>
+          <p:cNvSpPr txBox="1"/>
+          <p:nvPr/>
+        </p:nvSpPr>
+        <p:spPr>
+          <a:xfrm>
+            <a:off x="1417320" y="3931920"/>
+            <a:ext cx="1280160" cy="274320"/>
+          </a:xfrm>
+          <a:prstGeom prst="rect">
+            <a:avLst/>
+          </a:prstGeom>
+          <a:noFill/>
+        </p:spPr>
+        <p:txBody>
+          <a:bodyPr wrap="square" lIns="0" rIns="0" tIns="0" bIns="0">
+            <a:spAutoFit/>
+          </a:bodyPr>
+          <a:lstStyle/>
+          <a:p>
+            <a:pPr>
+              <a:defRPr sz="1000" b="1" i="0">
                 <a:solidFill>
                   <a:srgbClr val="E56945"/>
                 </a:solidFill>
@@ -4240,35 +4316,35 @@
               </a:defRPr>
             </a:pPr>
             <a:r>
-              <a:t>✗  Explosion</a:t>
-            </a:r>
-          </a:p>
-        </p:txBody>
-      </p:sp>
-      <p:sp>
-        <p:nvSpPr>
-          <p:cNvPr id="19" name="TextBox 18"/>
-          <p:cNvSpPr txBox="1"/>
-          <p:nvPr/>
-        </p:nvSpPr>
-        <p:spPr>
-          <a:xfrm>
-            <a:off x="1691640" y="4434840"/>
-            <a:ext cx="4754880" cy="457200"/>
-          </a:xfrm>
-          <a:prstGeom prst="rect">
-            <a:avLst/>
-          </a:prstGeom>
-          <a:noFill/>
-        </p:spPr>
-        <p:txBody>
-          <a:bodyPr wrap="square" lIns="0" rIns="0" tIns="0" bIns="0">
-            <a:spAutoFit/>
-          </a:bodyPr>
-          <a:lstStyle/>
-          <a:p>
-            <a:pPr>
-              <a:defRPr sz="1100" b="0" i="0">
+              <a:t>✗  Explode</a:t>
+            </a:r>
+          </a:p>
+        </p:txBody>
+      </p:sp>
+      <p:sp>
+        <p:nvSpPr>
+          <p:cNvPr id="21" name="TextBox 20"/>
+          <p:cNvSpPr txBox="1"/>
+          <p:nvPr/>
+        </p:nvSpPr>
+        <p:spPr>
+          <a:xfrm>
+            <a:off x="1417320" y="4251960"/>
+            <a:ext cx="1280160" cy="777240"/>
+          </a:xfrm>
+          <a:prstGeom prst="rect">
+            <a:avLst/>
+          </a:prstGeom>
+          <a:noFill/>
+        </p:spPr>
+        <p:txBody>
+          <a:bodyPr wrap="square" lIns="0" rIns="0" tIns="0" bIns="0">
+            <a:spAutoFit/>
+          </a:bodyPr>
+          <a:lstStyle/>
+          <a:p>
+            <a:pPr>
+              <a:defRPr sz="800" b="0" i="0">
                 <a:solidFill>
                   <a:srgbClr val="1A1A1A"/>
                 </a:solidFill>
@@ -4276,21 +4352,29 @@
               </a:defRPr>
             </a:pPr>
             <a:r>
-              <a:t>1/V_thr blows the magnitude up</a:t>
-            </a:r>
-          </a:p>
-        </p:txBody>
-      </p:sp>
-      <p:sp>
-        <p:nvSpPr>
-          <p:cNvPr id="20" name="Rectangle 19"/>
+              <a:t>1/V_thr</a:t>
+            </a:r>
+            <a:br/>
+            <a:r>
+              <a:t>blows the</a:t>
+            </a:r>
+            <a:br/>
+            <a:r>
+              <a:t>magnitude up</a:t>
+            </a:r>
+          </a:p>
+        </p:txBody>
+      </p:sp>
+      <p:sp>
+        <p:nvSpPr>
+          <p:cNvPr id="22" name="Rectangle 21"/>
           <p:cNvSpPr/>
           <p:nvPr/>
         </p:nvSpPr>
         <p:spPr>
           <a:xfrm>
-            <a:off x="6766560" y="3977640"/>
-            <a:ext cx="5029200" cy="914400"/>
+            <a:off x="2834640" y="3840480"/>
+            <a:ext cx="1463040" cy="1188720"/>
           </a:xfrm>
           <a:prstGeom prst="rect">
             <a:avLst/>
@@ -4298,9 +4382,9 @@
           <a:solidFill>
             <a:srgbClr val="FAEECB"/>
           </a:solidFill>
-          <a:ln w="6350">
+          <a:ln w="10160">
             <a:solidFill>
-              <a:srgbClr val="FAEECB"/>
+              <a:srgbClr val="E0B85F"/>
             </a:solidFill>
           </a:ln>
         </p:spPr>
@@ -4328,28 +4412,28 @@
       </p:sp>
       <p:sp>
         <p:nvSpPr>
-          <p:cNvPr id="21" name="TextBox 20"/>
-          <p:cNvSpPr txBox="1"/>
-          <p:nvPr/>
-        </p:nvSpPr>
-        <p:spPr>
-          <a:xfrm>
-            <a:off x="6903720" y="4096512"/>
-            <a:ext cx="4754880" cy="320040"/>
-          </a:xfrm>
-          <a:prstGeom prst="rect">
-            <a:avLst/>
-          </a:prstGeom>
-          <a:noFill/>
-        </p:spPr>
-        <p:txBody>
-          <a:bodyPr wrap="square" lIns="0" rIns="0" tIns="0" bIns="0">
-            <a:spAutoFit/>
-          </a:bodyPr>
-          <a:lstStyle/>
-          <a:p>
-            <a:pPr>
-              <a:defRPr sz="1200" b="1" i="0">
+          <p:cNvPr id="23" name="TextBox 22"/>
+          <p:cNvSpPr txBox="1"/>
+          <p:nvPr/>
+        </p:nvSpPr>
+        <p:spPr>
+          <a:xfrm>
+            <a:off x="2926080" y="3931920"/>
+            <a:ext cx="1280160" cy="274320"/>
+          </a:xfrm>
+          <a:prstGeom prst="rect">
+            <a:avLst/>
+          </a:prstGeom>
+          <a:noFill/>
+        </p:spPr>
+        <p:txBody>
+          <a:bodyPr wrap="square" lIns="0" rIns="0" tIns="0" bIns="0">
+            <a:spAutoFit/>
+          </a:bodyPr>
+          <a:lstStyle/>
+          <a:p>
+            <a:pPr>
+              <a:defRPr sz="1000" b="1" i="0">
                 <a:solidFill>
                   <a:srgbClr val="E56945"/>
                 </a:solidFill>
@@ -4357,35 +4441,35 @@
               </a:defRPr>
             </a:pPr>
             <a:r>
-              <a:t>✗  Vanishing</a:t>
-            </a:r>
-          </a:p>
-        </p:txBody>
-      </p:sp>
-      <p:sp>
-        <p:nvSpPr>
-          <p:cNvPr id="22" name="TextBox 21"/>
-          <p:cNvSpPr txBox="1"/>
-          <p:nvPr/>
-        </p:nvSpPr>
-        <p:spPr>
-          <a:xfrm>
-            <a:off x="6903720" y="4434840"/>
-            <a:ext cx="4754880" cy="457200"/>
-          </a:xfrm>
-          <a:prstGeom prst="rect">
-            <a:avLst/>
-          </a:prstGeom>
-          <a:noFill/>
-        </p:spPr>
-        <p:txBody>
-          <a:bodyPr wrap="square" lIns="0" rIns="0" tIns="0" bIns="0">
-            <a:spAutoFit/>
-          </a:bodyPr>
-          <a:lstStyle/>
-          <a:p>
-            <a:pPr>
-              <a:defRPr sz="1100" b="0" i="0">
+              <a:t>✗  Vanish</a:t>
+            </a:r>
+          </a:p>
+        </p:txBody>
+      </p:sp>
+      <p:sp>
+        <p:nvSpPr>
+          <p:cNvPr id="24" name="TextBox 23"/>
+          <p:cNvSpPr txBox="1"/>
+          <p:nvPr/>
+        </p:nvSpPr>
+        <p:spPr>
+          <a:xfrm>
+            <a:off x="2926080" y="4251960"/>
+            <a:ext cx="1280160" cy="777240"/>
+          </a:xfrm>
+          <a:prstGeom prst="rect">
+            <a:avLst/>
+          </a:prstGeom>
+          <a:noFill/>
+        </p:spPr>
+        <p:txBody>
+          <a:bodyPr wrap="square" lIns="0" rIns="0" tIns="0" bIns="0">
+            <a:spAutoFit/>
+          </a:bodyPr>
+          <a:lstStyle/>
+          <a:p>
+            <a:pPr>
+              <a:defRPr sz="800" b="0" i="0">
                 <a:solidFill>
                   <a:srgbClr val="1A1A1A"/>
                 </a:solidFill>
@@ -4393,21 +4477,29 @@
               </a:defRPr>
             </a:pPr>
             <a:r>
-              <a:t>1/V_thr shrinks the magnitude</a:t>
-            </a:r>
-          </a:p>
-        </p:txBody>
-      </p:sp>
-      <p:sp>
-        <p:nvSpPr>
-          <p:cNvPr id="23" name="Rectangle 22"/>
+              <a:t>1/V_thr</a:t>
+            </a:r>
+            <a:br/>
+            <a:r>
+              <a:t>shrinks the</a:t>
+            </a:r>
+            <a:br/>
+            <a:r>
+              <a:t>magnitude</a:t>
+            </a:r>
+          </a:p>
+        </p:txBody>
+      </p:sp>
+      <p:sp>
+        <p:nvSpPr>
+          <p:cNvPr id="25" name="Rectangle 24"/>
           <p:cNvSpPr/>
           <p:nvPr/>
         </p:nvSpPr>
         <p:spPr>
           <a:xfrm>
-            <a:off x="457200" y="5029200"/>
-            <a:ext cx="1005840" cy="914400"/>
+            <a:off x="457200" y="5120640"/>
+            <a:ext cx="3840480" cy="868680"/>
           </a:xfrm>
           <a:prstGeom prst="rect">
             <a:avLst/>
@@ -4445,28 +4537,28 @@
       </p:sp>
       <p:sp>
         <p:nvSpPr>
-          <p:cNvPr id="24" name="TextBox 23"/>
-          <p:cNvSpPr txBox="1"/>
-          <p:nvPr/>
-        </p:nvSpPr>
-        <p:spPr>
-          <a:xfrm>
-            <a:off x="457200" y="5321808"/>
-            <a:ext cx="1005840" cy="365760"/>
-          </a:xfrm>
-          <a:prstGeom prst="rect">
-            <a:avLst/>
-          </a:prstGeom>
-          <a:noFill/>
-        </p:spPr>
-        <p:txBody>
-          <a:bodyPr wrap="square" lIns="0" rIns="0" tIns="0" bIns="0">
-            <a:spAutoFit/>
-          </a:bodyPr>
-          <a:lstStyle/>
-          <a:p>
-            <a:pPr algn="ctr">
-              <a:defRPr sz="1200" b="1" i="0">
+          <p:cNvPr id="26" name="TextBox 25"/>
+          <p:cNvSpPr txBox="1"/>
+          <p:nvPr/>
+        </p:nvSpPr>
+        <p:spPr>
+          <a:xfrm>
+            <a:off x="594360" y="5212079"/>
+            <a:ext cx="914400" cy="274320"/>
+          </a:xfrm>
+          <a:prstGeom prst="rect">
+            <a:avLst/>
+          </a:prstGeom>
+          <a:noFill/>
+        </p:spPr>
+        <p:txBody>
+          <a:bodyPr wrap="square" lIns="0" rIns="0" tIns="0" bIns="0">
+            <a:spAutoFit/>
+          </a:bodyPr>
+          <a:lstStyle/>
+          <a:p>
+            <a:pPr>
+              <a:defRPr sz="1100" b="1" i="0">
                 <a:solidFill>
                   <a:srgbClr val="FFFFFF"/>
                 </a:solidFill>
@@ -4481,248 +4573,50 @@
       </p:sp>
       <p:sp>
         <p:nvSpPr>
-          <p:cNvPr id="25" name="Rectangle 24"/>
-          <p:cNvSpPr/>
-          <p:nvPr/>
-        </p:nvSpPr>
-        <p:spPr>
-          <a:xfrm>
-            <a:off x="1554480" y="5029200"/>
-            <a:ext cx="5029200" cy="914400"/>
-          </a:xfrm>
-          <a:prstGeom prst="rect">
-            <a:avLst/>
-          </a:prstGeom>
-          <a:solidFill>
-            <a:srgbClr val="E5F5F0"/>
-          </a:solidFill>
-          <a:ln w="6350">
-            <a:solidFill>
-              <a:srgbClr val="E5F5F0"/>
-            </a:solidFill>
-          </a:ln>
-        </p:spPr>
-        <p:style>
-          <a:lnRef idx="1">
-            <a:schemeClr val="accent1"/>
-          </a:lnRef>
-          <a:fillRef idx="3">
-            <a:schemeClr val="accent1"/>
-          </a:fillRef>
-          <a:effectRef idx="2">
-            <a:schemeClr val="accent1"/>
-          </a:effectRef>
-          <a:fontRef idx="minor">
-            <a:schemeClr val="lt1"/>
-          </a:fontRef>
-        </p:style>
-        <p:txBody>
-          <a:bodyPr rtlCol="0" anchor="ctr"/>
-          <a:lstStyle/>
-          <a:p>
-            <a:pPr algn="ctr"/>
-          </a:p>
-        </p:txBody>
-      </p:sp>
-      <p:sp>
-        <p:nvSpPr>
-          <p:cNvPr id="26" name="TextBox 25"/>
-          <p:cNvSpPr txBox="1"/>
-          <p:nvPr/>
-        </p:nvSpPr>
-        <p:spPr>
-          <a:xfrm>
-            <a:off x="1691640" y="5148072"/>
-            <a:ext cx="4754880" cy="320040"/>
-          </a:xfrm>
-          <a:prstGeom prst="rect">
-            <a:avLst/>
-          </a:prstGeom>
-          <a:noFill/>
-        </p:spPr>
-        <p:txBody>
-          <a:bodyPr wrap="square" lIns="0" rIns="0" tIns="0" bIns="0">
-            <a:spAutoFit/>
-          </a:bodyPr>
-          <a:lstStyle/>
-          <a:p>
-            <a:pPr>
-              <a:defRPr sz="1200" b="1" i="0">
-                <a:solidFill>
-                  <a:srgbClr val="1D7E7E"/>
-                </a:solidFill>
-                <a:latin typeface="Calibri"/>
-              </a:defRPr>
-            </a:pPr>
-            <a:r>
-              <a:t>✓  Balanced</a:t>
-            </a:r>
-          </a:p>
-        </p:txBody>
-      </p:sp>
-      <p:sp>
-        <p:nvSpPr>
           <p:cNvPr id="27" name="TextBox 26"/>
           <p:cNvSpPr txBox="1"/>
           <p:nvPr/>
         </p:nvSpPr>
         <p:spPr>
           <a:xfrm>
-            <a:off x="1691640" y="5486400"/>
-            <a:ext cx="4754880" cy="457200"/>
-          </a:xfrm>
-          <a:prstGeom prst="rect">
-            <a:avLst/>
-          </a:prstGeom>
-          <a:noFill/>
-        </p:spPr>
-        <p:txBody>
-          <a:bodyPr wrap="square" lIns="0" rIns="0" tIns="0" bIns="0">
-            <a:spAutoFit/>
-          </a:bodyPr>
-          <a:lstStyle/>
-          <a:p>
-            <a:pPr>
-              <a:defRPr sz="1100" b="0" i="0">
-                <a:solidFill>
-                  <a:srgbClr val="1A1A1A"/>
-                </a:solidFill>
-                <a:latin typeface="Calibri"/>
-              </a:defRPr>
-            </a:pPr>
-            <a:r>
-              <a:t>window scales with V_thr,  magnitude stays 1</a:t>
-            </a:r>
-          </a:p>
-        </p:txBody>
-      </p:sp>
-      <p:sp>
-        <p:nvSpPr>
-          <p:cNvPr id="28" name="Rectangle 27"/>
-          <p:cNvSpPr/>
-          <p:nvPr/>
-        </p:nvSpPr>
-        <p:spPr>
-          <a:xfrm>
-            <a:off x="6766560" y="5029200"/>
-            <a:ext cx="5029200" cy="914400"/>
-          </a:xfrm>
-          <a:prstGeom prst="rect">
-            <a:avLst/>
-          </a:prstGeom>
-          <a:solidFill>
-            <a:srgbClr val="E5F5F0"/>
-          </a:solidFill>
-          <a:ln w="6350">
-            <a:solidFill>
-              <a:srgbClr val="E5F5F0"/>
-            </a:solidFill>
-          </a:ln>
-        </p:spPr>
-        <p:style>
-          <a:lnRef idx="1">
-            <a:schemeClr val="accent1"/>
-          </a:lnRef>
-          <a:fillRef idx="3">
-            <a:schemeClr val="accent1"/>
-          </a:fillRef>
-          <a:effectRef idx="2">
-            <a:schemeClr val="accent1"/>
-          </a:effectRef>
-          <a:fontRef idx="minor">
-            <a:schemeClr val="lt1"/>
-          </a:fontRef>
-        </p:style>
-        <p:txBody>
-          <a:bodyPr rtlCol="0" anchor="ctr"/>
-          <a:lstStyle/>
-          <a:p>
-            <a:pPr algn="ctr"/>
-          </a:p>
-        </p:txBody>
-      </p:sp>
-      <p:sp>
-        <p:nvSpPr>
-          <p:cNvPr id="29" name="TextBox 28"/>
-          <p:cNvSpPr txBox="1"/>
-          <p:nvPr/>
-        </p:nvSpPr>
-        <p:spPr>
-          <a:xfrm>
-            <a:off x="6903720" y="5148072"/>
-            <a:ext cx="4754880" cy="320040"/>
-          </a:xfrm>
-          <a:prstGeom prst="rect">
-            <a:avLst/>
-          </a:prstGeom>
-          <a:noFill/>
-        </p:spPr>
-        <p:txBody>
-          <a:bodyPr wrap="square" lIns="0" rIns="0" tIns="0" bIns="0">
-            <a:spAutoFit/>
-          </a:bodyPr>
-          <a:lstStyle/>
-          <a:p>
-            <a:pPr>
-              <a:defRPr sz="1200" b="1" i="0">
-                <a:solidFill>
-                  <a:srgbClr val="1D7E7E"/>
-                </a:solidFill>
-                <a:latin typeface="Calibri"/>
-              </a:defRPr>
-            </a:pPr>
-            <a:r>
-              <a:t>✓  Balanced</a:t>
-            </a:r>
-          </a:p>
-        </p:txBody>
-      </p:sp>
-      <p:sp>
-        <p:nvSpPr>
-          <p:cNvPr id="30" name="TextBox 29"/>
-          <p:cNvSpPr txBox="1"/>
-          <p:nvPr/>
-        </p:nvSpPr>
-        <p:spPr>
-          <a:xfrm>
-            <a:off x="6903720" y="5486400"/>
-            <a:ext cx="4754880" cy="457200"/>
-          </a:xfrm>
-          <a:prstGeom prst="rect">
-            <a:avLst/>
-          </a:prstGeom>
-          <a:noFill/>
-        </p:spPr>
-        <p:txBody>
-          <a:bodyPr wrap="square" lIns="0" rIns="0" tIns="0" bIns="0">
-            <a:spAutoFit/>
-          </a:bodyPr>
-          <a:lstStyle/>
-          <a:p>
-            <a:pPr>
-              <a:defRPr sz="1100" b="0" i="0">
-                <a:solidFill>
-                  <a:srgbClr val="1A1A1A"/>
-                </a:solidFill>
-                <a:latin typeface="Calibri"/>
-              </a:defRPr>
-            </a:pPr>
-            <a:r>
-              <a:t>window scales with V_thr,  magnitude stays 1</a:t>
-            </a:r>
-          </a:p>
-        </p:txBody>
-      </p:sp>
-      <p:sp>
-        <p:nvSpPr>
-          <p:cNvPr id="31" name="TextBox 30"/>
-          <p:cNvSpPr txBox="1"/>
-          <p:nvPr/>
-        </p:nvSpPr>
-        <p:spPr>
-          <a:xfrm>
-            <a:off x="457200" y="6217920"/>
-            <a:ext cx="11247120" cy="274320"/>
+            <a:off x="594360" y="5532120"/>
+            <a:ext cx="3657600" cy="411480"/>
+          </a:xfrm>
+          <a:prstGeom prst="rect">
+            <a:avLst/>
+          </a:prstGeom>
+          <a:noFill/>
+        </p:spPr>
+        <p:txBody>
+          <a:bodyPr wrap="square" lIns="0" rIns="0" tIns="0" bIns="0">
+            <a:spAutoFit/>
+          </a:bodyPr>
+          <a:lstStyle/>
+          <a:p>
+            <a:pPr>
+              <a:defRPr sz="1000" b="1" i="0">
+                <a:solidFill>
+                  <a:srgbClr val="FFFFFF"/>
+                </a:solidFill>
+                <a:latin typeface="Calibri"/>
+              </a:defRPr>
+            </a:pPr>
+            <a:r>
+              <a:t>✓  window scales with V_thr · magnitude stays 1</a:t>
+            </a:r>
+          </a:p>
+        </p:txBody>
+      </p:sp>
+      <p:sp>
+        <p:nvSpPr>
+          <p:cNvPr id="28" name="TextBox 27"/>
+          <p:cNvSpPr txBox="1"/>
+          <p:nvPr/>
+        </p:nvSpPr>
+        <p:spPr>
+          <a:xfrm>
+            <a:off x="4297680" y="6035040"/>
+            <a:ext cx="7315200" cy="274320"/>
           </a:xfrm>
           <a:prstGeom prst="rect">
             <a:avLst/>
@@ -4744,14 +4638,14 @@
               </a:defRPr>
             </a:pPr>
             <a:r>
-              <a:t>(Geometric picture in the thesis Figure 5.1.)</a:t>
-            </a:r>
-          </a:p>
-        </p:txBody>
-      </p:sp>
-      <p:sp>
-        <p:nvSpPr>
-          <p:cNvPr id="32" name="TextBox 31"/>
+              <a:t>Each colored box = active gradient region.  Width = window where gradient flows.  Height = magnitude.</a:t>
+            </a:r>
+          </a:p>
+        </p:txBody>
+      </p:sp>
+      <p:sp>
+        <p:nvSpPr>
+          <p:cNvPr id="29" name="TextBox 28"/>
           <p:cNvSpPr txBox="1"/>
           <p:nvPr/>
         </p:nvSpPr>
@@ -4787,7 +4681,7 @@
       </p:sp>
       <p:sp>
         <p:nvSpPr>
-          <p:cNvPr id="33" name="TextBox 32"/>
+          <p:cNvPr id="30" name="TextBox 29"/>
           <p:cNvSpPr txBox="1"/>
           <p:nvPr/>
         </p:nvSpPr>
@@ -4943,7 +4837,7 @@
               </a:defRPr>
             </a:pPr>
             <a:r>
-              <a:t>Multiply the threshold on the forward path; the chain rule cancels the bad factor</a:t>
+              <a:t>Multiply the threshold on the forward path; chain rule cancels the bad factor</a:t>
             </a:r>
           </a:p>
         </p:txBody>
@@ -4979,7 +4873,7 @@
               </a:defRPr>
             </a:pPr>
             <a:r>
-              <a:t>Step 1.  Use the relative-scale window (RS-SG style):</a:t>
+              <a:t>The recipe</a:t>
             </a:r>
           </a:p>
         </p:txBody>
@@ -4993,7 +4887,533 @@
         <p:spPr>
           <a:xfrm>
             <a:off x="457200" y="2651760"/>
-            <a:ext cx="54864" cy="640080"/>
+            <a:ext cx="3703320" cy="960120"/>
+          </a:xfrm>
+          <a:prstGeom prst="rect">
+            <a:avLst/>
+          </a:prstGeom>
+          <a:solidFill>
+            <a:srgbClr val="F8F7F2"/>
+          </a:solidFill>
+          <a:ln w="12700">
+            <a:solidFill>
+              <a:srgbClr val="1D7E7E"/>
+            </a:solidFill>
+          </a:ln>
+        </p:spPr>
+        <p:style>
+          <a:lnRef idx="1">
+            <a:schemeClr val="accent1"/>
+          </a:lnRef>
+          <a:fillRef idx="3">
+            <a:schemeClr val="accent1"/>
+          </a:fillRef>
+          <a:effectRef idx="2">
+            <a:schemeClr val="accent1"/>
+          </a:effectRef>
+          <a:fontRef idx="minor">
+            <a:schemeClr val="lt1"/>
+          </a:fontRef>
+        </p:style>
+        <p:txBody>
+          <a:bodyPr rtlCol="0" anchor="ctr"/>
+          <a:lstStyle/>
+          <a:p>
+            <a:pPr algn="ctr"/>
+          </a:p>
+        </p:txBody>
+      </p:sp>
+      <p:sp>
+        <p:nvSpPr>
+          <p:cNvPr id="7" name="TextBox 6"/>
+          <p:cNvSpPr txBox="1"/>
+          <p:nvPr/>
+        </p:nvSpPr>
+        <p:spPr>
+          <a:xfrm>
+            <a:off x="640080" y="2743200"/>
+            <a:ext cx="365760" cy="365760"/>
+          </a:xfrm>
+          <a:prstGeom prst="rect">
+            <a:avLst/>
+          </a:prstGeom>
+          <a:noFill/>
+        </p:spPr>
+        <p:txBody>
+          <a:bodyPr wrap="square" lIns="0" rIns="0" tIns="0" bIns="0">
+            <a:spAutoFit/>
+          </a:bodyPr>
+          <a:lstStyle/>
+          <a:p>
+            <a:pPr>
+              <a:defRPr sz="1800" b="1" i="0">
+                <a:solidFill>
+                  <a:srgbClr val="E0B85F"/>
+                </a:solidFill>
+                <a:latin typeface="Calibri"/>
+              </a:defRPr>
+            </a:pPr>
+            <a:r>
+              <a:t>1</a:t>
+            </a:r>
+          </a:p>
+        </p:txBody>
+      </p:sp>
+      <p:sp>
+        <p:nvSpPr>
+          <p:cNvPr id="8" name="TextBox 7"/>
+          <p:cNvSpPr txBox="1"/>
+          <p:nvPr/>
+        </p:nvSpPr>
+        <p:spPr>
+          <a:xfrm>
+            <a:off x="1051560" y="2788920"/>
+            <a:ext cx="3063239" cy="274320"/>
+          </a:xfrm>
+          <a:prstGeom prst="rect">
+            <a:avLst/>
+          </a:prstGeom>
+          <a:noFill/>
+        </p:spPr>
+        <p:txBody>
+          <a:bodyPr wrap="square" lIns="0" rIns="0" tIns="0" bIns="0">
+            <a:spAutoFit/>
+          </a:bodyPr>
+          <a:lstStyle/>
+          <a:p>
+            <a:pPr>
+              <a:defRPr sz="1100" b="1" i="0">
+                <a:solidFill>
+                  <a:srgbClr val="0F2540"/>
+                </a:solidFill>
+                <a:latin typeface="Calibri"/>
+              </a:defRPr>
+            </a:pPr>
+            <a:r>
+              <a:t>Relative-scale window</a:t>
+            </a:r>
+          </a:p>
+        </p:txBody>
+      </p:sp>
+      <p:sp>
+        <p:nvSpPr>
+          <p:cNvPr id="9" name="TextBox 8"/>
+          <p:cNvSpPr txBox="1"/>
+          <p:nvPr/>
+        </p:nvSpPr>
+        <p:spPr>
+          <a:xfrm>
+            <a:off x="1051560" y="3108960"/>
+            <a:ext cx="3063239" cy="457200"/>
+          </a:xfrm>
+          <a:prstGeom prst="rect">
+            <a:avLst/>
+          </a:prstGeom>
+          <a:noFill/>
+        </p:spPr>
+        <p:txBody>
+          <a:bodyPr wrap="square" lIns="0" rIns="0" tIns="0" bIns="0">
+            <a:spAutoFit/>
+          </a:bodyPr>
+          <a:lstStyle/>
+          <a:p>
+            <a:pPr>
+              <a:defRPr sz="1400" b="0" i="0">
+                <a:solidFill>
+                  <a:srgbClr val="1A1A1A"/>
+                </a:solidFill>
+                <a:latin typeface="Cambria Math"/>
+              </a:defRPr>
+            </a:pPr>
+            <a:r>
+              <a:t>x = M / V_thr − 1</a:t>
+            </a:r>
+          </a:p>
+        </p:txBody>
+      </p:sp>
+      <p:sp>
+        <p:nvSpPr>
+          <p:cNvPr id="10" name="Rectangle 9"/>
+          <p:cNvSpPr/>
+          <p:nvPr/>
+        </p:nvSpPr>
+        <p:spPr>
+          <a:xfrm>
+            <a:off x="4251960" y="2651760"/>
+            <a:ext cx="3703320" cy="960120"/>
+          </a:xfrm>
+          <a:prstGeom prst="rect">
+            <a:avLst/>
+          </a:prstGeom>
+          <a:solidFill>
+            <a:srgbClr val="F8F7F2"/>
+          </a:solidFill>
+          <a:ln w="12700">
+            <a:solidFill>
+              <a:srgbClr val="1D7E7E"/>
+            </a:solidFill>
+          </a:ln>
+        </p:spPr>
+        <p:style>
+          <a:lnRef idx="1">
+            <a:schemeClr val="accent1"/>
+          </a:lnRef>
+          <a:fillRef idx="3">
+            <a:schemeClr val="accent1"/>
+          </a:fillRef>
+          <a:effectRef idx="2">
+            <a:schemeClr val="accent1"/>
+          </a:effectRef>
+          <a:fontRef idx="minor">
+            <a:schemeClr val="lt1"/>
+          </a:fontRef>
+        </p:style>
+        <p:txBody>
+          <a:bodyPr rtlCol="0" anchor="ctr"/>
+          <a:lstStyle/>
+          <a:p>
+            <a:pPr algn="ctr"/>
+          </a:p>
+        </p:txBody>
+      </p:sp>
+      <p:sp>
+        <p:nvSpPr>
+          <p:cNvPr id="11" name="TextBox 10"/>
+          <p:cNvSpPr txBox="1"/>
+          <p:nvPr/>
+        </p:nvSpPr>
+        <p:spPr>
+          <a:xfrm>
+            <a:off x="4434840" y="2743200"/>
+            <a:ext cx="365760" cy="365760"/>
+          </a:xfrm>
+          <a:prstGeom prst="rect">
+            <a:avLst/>
+          </a:prstGeom>
+          <a:noFill/>
+        </p:spPr>
+        <p:txBody>
+          <a:bodyPr wrap="square" lIns="0" rIns="0" tIns="0" bIns="0">
+            <a:spAutoFit/>
+          </a:bodyPr>
+          <a:lstStyle/>
+          <a:p>
+            <a:pPr>
+              <a:defRPr sz="1800" b="1" i="0">
+                <a:solidFill>
+                  <a:srgbClr val="E0B85F"/>
+                </a:solidFill>
+                <a:latin typeface="Calibri"/>
+              </a:defRPr>
+            </a:pPr>
+            <a:r>
+              <a:t>2</a:t>
+            </a:r>
+          </a:p>
+        </p:txBody>
+      </p:sp>
+      <p:sp>
+        <p:nvSpPr>
+          <p:cNvPr id="12" name="TextBox 11"/>
+          <p:cNvSpPr txBox="1"/>
+          <p:nvPr/>
+        </p:nvSpPr>
+        <p:spPr>
+          <a:xfrm>
+            <a:off x="4846320" y="2788920"/>
+            <a:ext cx="3063239" cy="274320"/>
+          </a:xfrm>
+          <a:prstGeom prst="rect">
+            <a:avLst/>
+          </a:prstGeom>
+          <a:noFill/>
+        </p:spPr>
+        <p:txBody>
+          <a:bodyPr wrap="square" lIns="0" rIns="0" tIns="0" bIns="0">
+            <a:spAutoFit/>
+          </a:bodyPr>
+          <a:lstStyle/>
+          <a:p>
+            <a:pPr>
+              <a:defRPr sz="1100" b="1" i="0">
+                <a:solidFill>
+                  <a:srgbClr val="0F2540"/>
+                </a:solidFill>
+                <a:latin typeface="Calibri"/>
+              </a:defRPr>
+            </a:pPr>
+            <a:r>
+              <a:t>Multiply on forward</a:t>
+            </a:r>
+          </a:p>
+        </p:txBody>
+      </p:sp>
+      <p:sp>
+        <p:nvSpPr>
+          <p:cNvPr id="13" name="TextBox 12"/>
+          <p:cNvSpPr txBox="1"/>
+          <p:nvPr/>
+        </p:nvSpPr>
+        <p:spPr>
+          <a:xfrm>
+            <a:off x="4846320" y="3108960"/>
+            <a:ext cx="3063239" cy="457200"/>
+          </a:xfrm>
+          <a:prstGeom prst="rect">
+            <a:avLst/>
+          </a:prstGeom>
+          <a:noFill/>
+        </p:spPr>
+        <p:txBody>
+          <a:bodyPr wrap="square" lIns="0" rIns="0" tIns="0" bIns="0">
+            <a:spAutoFit/>
+          </a:bodyPr>
+          <a:lstStyle/>
+          <a:p>
+            <a:pPr>
+              <a:defRPr sz="1400" b="0" i="0">
+                <a:solidFill>
+                  <a:srgbClr val="1A1A1A"/>
+                </a:solidFill>
+                <a:latin typeface="Cambria Math"/>
+              </a:defRPr>
+            </a:pPr>
+            <a:r>
+              <a:t>O[t] = V_thr · S[t]</a:t>
+            </a:r>
+          </a:p>
+        </p:txBody>
+      </p:sp>
+      <p:sp>
+        <p:nvSpPr>
+          <p:cNvPr id="14" name="Rectangle 13"/>
+          <p:cNvSpPr/>
+          <p:nvPr/>
+        </p:nvSpPr>
+        <p:spPr>
+          <a:xfrm>
+            <a:off x="8046720" y="2651760"/>
+            <a:ext cx="3703320" cy="960120"/>
+          </a:xfrm>
+          <a:prstGeom prst="rect">
+            <a:avLst/>
+          </a:prstGeom>
+          <a:solidFill>
+            <a:srgbClr val="F8F7F2"/>
+          </a:solidFill>
+          <a:ln w="12700">
+            <a:solidFill>
+              <a:srgbClr val="1D7E7E"/>
+            </a:solidFill>
+          </a:ln>
+        </p:spPr>
+        <p:style>
+          <a:lnRef idx="1">
+            <a:schemeClr val="accent1"/>
+          </a:lnRef>
+          <a:fillRef idx="3">
+            <a:schemeClr val="accent1"/>
+          </a:fillRef>
+          <a:effectRef idx="2">
+            <a:schemeClr val="accent1"/>
+          </a:effectRef>
+          <a:fontRef idx="minor">
+            <a:schemeClr val="lt1"/>
+          </a:fontRef>
+        </p:style>
+        <p:txBody>
+          <a:bodyPr rtlCol="0" anchor="ctr"/>
+          <a:lstStyle/>
+          <a:p>
+            <a:pPr algn="ctr"/>
+          </a:p>
+        </p:txBody>
+      </p:sp>
+      <p:sp>
+        <p:nvSpPr>
+          <p:cNvPr id="15" name="TextBox 14"/>
+          <p:cNvSpPr txBox="1"/>
+          <p:nvPr/>
+        </p:nvSpPr>
+        <p:spPr>
+          <a:xfrm>
+            <a:off x="8229600" y="2743200"/>
+            <a:ext cx="365760" cy="365760"/>
+          </a:xfrm>
+          <a:prstGeom prst="rect">
+            <a:avLst/>
+          </a:prstGeom>
+          <a:noFill/>
+        </p:spPr>
+        <p:txBody>
+          <a:bodyPr wrap="square" lIns="0" rIns="0" tIns="0" bIns="0">
+            <a:spAutoFit/>
+          </a:bodyPr>
+          <a:lstStyle/>
+          <a:p>
+            <a:pPr>
+              <a:defRPr sz="1800" b="1" i="0">
+                <a:solidFill>
+                  <a:srgbClr val="E0B85F"/>
+                </a:solidFill>
+                <a:latin typeface="Calibri"/>
+              </a:defRPr>
+            </a:pPr>
+            <a:r>
+              <a:t>3</a:t>
+            </a:r>
+          </a:p>
+        </p:txBody>
+      </p:sp>
+      <p:sp>
+        <p:nvSpPr>
+          <p:cNvPr id="16" name="TextBox 15"/>
+          <p:cNvSpPr txBox="1"/>
+          <p:nvPr/>
+        </p:nvSpPr>
+        <p:spPr>
+          <a:xfrm>
+            <a:off x="8641080" y="2788920"/>
+            <a:ext cx="3063239" cy="274320"/>
+          </a:xfrm>
+          <a:prstGeom prst="rect">
+            <a:avLst/>
+          </a:prstGeom>
+          <a:noFill/>
+        </p:spPr>
+        <p:txBody>
+          <a:bodyPr wrap="square" lIns="0" rIns="0" tIns="0" bIns="0">
+            <a:spAutoFit/>
+          </a:bodyPr>
+          <a:lstStyle/>
+          <a:p>
+            <a:pPr>
+              <a:defRPr sz="1100" b="1" i="0">
+                <a:solidFill>
+                  <a:srgbClr val="0F2540"/>
+                </a:solidFill>
+                <a:latin typeface="Calibri"/>
+              </a:defRPr>
+            </a:pPr>
+            <a:r>
+              <a:t>Chain rule cancels</a:t>
+            </a:r>
+          </a:p>
+        </p:txBody>
+      </p:sp>
+      <p:sp>
+        <p:nvSpPr>
+          <p:cNvPr id="17" name="TextBox 16"/>
+          <p:cNvSpPr txBox="1"/>
+          <p:nvPr/>
+        </p:nvSpPr>
+        <p:spPr>
+          <a:xfrm>
+            <a:off x="8641080" y="3108960"/>
+            <a:ext cx="3063239" cy="457200"/>
+          </a:xfrm>
+          <a:prstGeom prst="rect">
+            <a:avLst/>
+          </a:prstGeom>
+          <a:noFill/>
+        </p:spPr>
+        <p:txBody>
+          <a:bodyPr wrap="square" lIns="0" rIns="0" tIns="0" bIns="0">
+            <a:spAutoFit/>
+          </a:bodyPr>
+          <a:lstStyle/>
+          <a:p>
+            <a:pPr>
+              <a:defRPr sz="1400" b="0" i="0">
+                <a:solidFill>
+                  <a:srgbClr val="1A1A1A"/>
+                </a:solidFill>
+                <a:latin typeface="Cambria Math"/>
+              </a:defRPr>
+            </a:pPr>
+            <a:r>
+              <a:t>∂O/∂M = f'(x)</a:t>
+            </a:r>
+          </a:p>
+        </p:txBody>
+      </p:sp>
+      <p:pic>
+        <p:nvPicPr>
+          <p:cNvPr id="18" name="Picture 17" descr="chain_rule.png"/>
+          <p:cNvPicPr>
+            <a:picLocks noChangeAspect="1"/>
+          </p:cNvPicPr>
+          <p:nvPr/>
+        </p:nvPicPr>
+        <p:blipFill>
+          <a:blip r:embed="rId2"/>
+          <a:stretch>
+            <a:fillRect/>
+          </a:stretch>
+        </p:blipFill>
+        <p:spPr>
+          <a:xfrm>
+            <a:off x="1371600" y="3931920"/>
+            <a:ext cx="9418320" cy="2497643"/>
+          </a:xfrm>
+          <a:prstGeom prst="rect">
+            <a:avLst/>
+          </a:prstGeom>
+        </p:spPr>
+      </p:pic>
+      <p:sp>
+        <p:nvSpPr>
+          <p:cNvPr id="19" name="Rectangle 18"/>
+          <p:cNvSpPr/>
+          <p:nvPr/>
+        </p:nvSpPr>
+        <p:spPr>
+          <a:xfrm>
+            <a:off x="457200" y="5852160"/>
+            <a:ext cx="54864" cy="548640"/>
+          </a:xfrm>
+          <a:prstGeom prst="rect">
+            <a:avLst/>
+          </a:prstGeom>
+          <a:solidFill>
+            <a:srgbClr val="E0B85F"/>
+          </a:solidFill>
+          <a:ln>
+            <a:noFill/>
+          </a:ln>
+        </p:spPr>
+        <p:style>
+          <a:lnRef idx="1">
+            <a:schemeClr val="accent1"/>
+          </a:lnRef>
+          <a:fillRef idx="3">
+            <a:schemeClr val="accent1"/>
+          </a:fillRef>
+          <a:effectRef idx="2">
+            <a:schemeClr val="accent1"/>
+          </a:effectRef>
+          <a:fontRef idx="minor">
+            <a:schemeClr val="lt1"/>
+          </a:fontRef>
+        </p:style>
+        <p:txBody>
+          <a:bodyPr rtlCol="0" anchor="ctr"/>
+          <a:lstStyle/>
+          <a:p>
+            <a:pPr algn="ctr"/>
+          </a:p>
+        </p:txBody>
+      </p:sp>
+      <p:sp>
+        <p:nvSpPr>
+          <p:cNvPr id="20" name="Rectangle 19"/>
+          <p:cNvSpPr/>
+          <p:nvPr/>
+        </p:nvSpPr>
+        <p:spPr>
+          <a:xfrm>
+            <a:off x="512064" y="5852160"/>
+            <a:ext cx="11192256" cy="548640"/>
           </a:xfrm>
           <a:prstGeom prst="rect">
             <a:avLst/>
@@ -5029,57 +5449,14 @@
       </p:sp>
       <p:sp>
         <p:nvSpPr>
-          <p:cNvPr id="7" name="Rectangle 6"/>
-          <p:cNvSpPr/>
-          <p:nvPr/>
-        </p:nvSpPr>
-        <p:spPr>
-          <a:xfrm>
-            <a:off x="512064" y="2651760"/>
-            <a:ext cx="11192256" cy="640080"/>
-          </a:xfrm>
-          <a:prstGeom prst="rect">
-            <a:avLst/>
-          </a:prstGeom>
-          <a:solidFill>
-            <a:srgbClr val="F8F7F2"/>
-          </a:solidFill>
-          <a:ln>
-            <a:noFill/>
-          </a:ln>
-        </p:spPr>
-        <p:style>
-          <a:lnRef idx="1">
-            <a:schemeClr val="accent1"/>
-          </a:lnRef>
-          <a:fillRef idx="3">
-            <a:schemeClr val="accent1"/>
-          </a:fillRef>
-          <a:effectRef idx="2">
-            <a:schemeClr val="accent1"/>
-          </a:effectRef>
-          <a:fontRef idx="minor">
-            <a:schemeClr val="lt1"/>
-          </a:fontRef>
-        </p:style>
-        <p:txBody>
-          <a:bodyPr rtlCol="0" anchor="ctr"/>
-          <a:lstStyle/>
-          <a:p>
-            <a:pPr algn="ctr"/>
-          </a:p>
-        </p:txBody>
-      </p:sp>
-      <p:sp>
-        <p:nvSpPr>
-          <p:cNvPr id="8" name="TextBox 7"/>
-          <p:cNvSpPr txBox="1"/>
-          <p:nvPr/>
-        </p:nvSpPr>
-        <p:spPr>
-          <a:xfrm>
-            <a:off x="777240" y="2788920"/>
-            <a:ext cx="10789920" cy="365759"/>
+          <p:cNvPr id="21" name="TextBox 20"/>
+          <p:cNvSpPr txBox="1"/>
+          <p:nvPr/>
+        </p:nvSpPr>
+        <p:spPr>
+          <a:xfrm>
+            <a:off x="777240" y="5989320"/>
+            <a:ext cx="10789920" cy="274320"/>
           </a:xfrm>
           <a:prstGeom prst="rect">
             <a:avLst/>
@@ -5093,332 +5470,7 @@
           <a:lstStyle/>
           <a:p>
             <a:pPr>
-              <a:spcBef>
-                <a:spcPts val="0"/>
-              </a:spcBef>
-              <a:defRPr sz="1400">
-                <a:solidFill>
-                  <a:srgbClr val="1A1A1A"/>
-                </a:solidFill>
-                <a:latin typeface="Calibri"/>
-              </a:defRPr>
-            </a:pPr>
-            <a:r>
-              <a:t>x  =  M[t] / V_thr   −   1</a:t>
-            </a:r>
-          </a:p>
-        </p:txBody>
-      </p:sp>
-      <p:sp>
-        <p:nvSpPr>
-          <p:cNvPr id="9" name="TextBox 8"/>
-          <p:cNvSpPr txBox="1"/>
-          <p:nvPr/>
-        </p:nvSpPr>
-        <p:spPr>
-          <a:xfrm>
-            <a:off x="457200" y="3520440"/>
-            <a:ext cx="11247120" cy="365760"/>
-          </a:xfrm>
-          <a:prstGeom prst="rect">
-            <a:avLst/>
-          </a:prstGeom>
-          <a:noFill/>
-        </p:spPr>
-        <p:txBody>
-          <a:bodyPr wrap="square" lIns="0" rIns="0" tIns="0" bIns="0">
-            <a:spAutoFit/>
-          </a:bodyPr>
-          <a:lstStyle/>
-          <a:p>
-            <a:pPr>
-              <a:defRPr sz="1300" b="1" i="0">
-                <a:solidFill>
-                  <a:srgbClr val="0F2540"/>
-                </a:solidFill>
-                <a:latin typeface="Calibri"/>
-              </a:defRPr>
-            </a:pPr>
-            <a:r>
-              <a:t>Step 2.  Multiply V_thr on the forward path  (this is the only change):</a:t>
-            </a:r>
-          </a:p>
-        </p:txBody>
-      </p:sp>
-      <p:sp>
-        <p:nvSpPr>
-          <p:cNvPr id="10" name="Rectangle 9"/>
-          <p:cNvSpPr/>
-          <p:nvPr/>
-        </p:nvSpPr>
-        <p:spPr>
-          <a:xfrm>
-            <a:off x="457200" y="3977639"/>
-            <a:ext cx="54864" cy="640080"/>
-          </a:xfrm>
-          <a:prstGeom prst="rect">
-            <a:avLst/>
-          </a:prstGeom>
-          <a:solidFill>
-            <a:srgbClr val="E0B85F"/>
-          </a:solidFill>
-          <a:ln>
-            <a:noFill/>
-          </a:ln>
-        </p:spPr>
-        <p:style>
-          <a:lnRef idx="1">
-            <a:schemeClr val="accent1"/>
-          </a:lnRef>
-          <a:fillRef idx="3">
-            <a:schemeClr val="accent1"/>
-          </a:fillRef>
-          <a:effectRef idx="2">
-            <a:schemeClr val="accent1"/>
-          </a:effectRef>
-          <a:fontRef idx="minor">
-            <a:schemeClr val="lt1"/>
-          </a:fontRef>
-        </p:style>
-        <p:txBody>
-          <a:bodyPr rtlCol="0" anchor="ctr"/>
-          <a:lstStyle/>
-          <a:p>
-            <a:pPr algn="ctr"/>
-          </a:p>
-        </p:txBody>
-      </p:sp>
-      <p:sp>
-        <p:nvSpPr>
-          <p:cNvPr id="11" name="Rectangle 10"/>
-          <p:cNvSpPr/>
-          <p:nvPr/>
-        </p:nvSpPr>
-        <p:spPr>
-          <a:xfrm>
-            <a:off x="512064" y="3977639"/>
-            <a:ext cx="11192256" cy="640080"/>
-          </a:xfrm>
-          <a:prstGeom prst="rect">
-            <a:avLst/>
-          </a:prstGeom>
-          <a:solidFill>
-            <a:srgbClr val="F8F7F2"/>
-          </a:solidFill>
-          <a:ln>
-            <a:noFill/>
-          </a:ln>
-        </p:spPr>
-        <p:style>
-          <a:lnRef idx="1">
-            <a:schemeClr val="accent1"/>
-          </a:lnRef>
-          <a:fillRef idx="3">
-            <a:schemeClr val="accent1"/>
-          </a:fillRef>
-          <a:effectRef idx="2">
-            <a:schemeClr val="accent1"/>
-          </a:effectRef>
-          <a:fontRef idx="minor">
-            <a:schemeClr val="lt1"/>
-          </a:fontRef>
-        </p:style>
-        <p:txBody>
-          <a:bodyPr rtlCol="0" anchor="ctr"/>
-          <a:lstStyle/>
-          <a:p>
-            <a:pPr algn="ctr"/>
-          </a:p>
-        </p:txBody>
-      </p:sp>
-      <p:sp>
-        <p:nvSpPr>
-          <p:cNvPr id="12" name="TextBox 11"/>
-          <p:cNvSpPr txBox="1"/>
-          <p:nvPr/>
-        </p:nvSpPr>
-        <p:spPr>
-          <a:xfrm>
-            <a:off x="777240" y="4114800"/>
-            <a:ext cx="10789920" cy="365759"/>
-          </a:xfrm>
-          <a:prstGeom prst="rect">
-            <a:avLst/>
-          </a:prstGeom>
-          <a:noFill/>
-        </p:spPr>
-        <p:txBody>
-          <a:bodyPr wrap="square">
-            <a:spAutoFit/>
-          </a:bodyPr>
-          <a:lstStyle/>
-          <a:p>
-            <a:pPr>
-              <a:spcBef>
-                <a:spcPts val="0"/>
-              </a:spcBef>
-              <a:defRPr sz="1400">
-                <a:solidFill>
-                  <a:srgbClr val="1A1A1A"/>
-                </a:solidFill>
-                <a:latin typeface="Calibri"/>
-              </a:defRPr>
-            </a:pPr>
-            <a:r>
-              <a:t>O[t]  =  V_thr  ·  S[t]</a:t>
-            </a:r>
-          </a:p>
-        </p:txBody>
-      </p:sp>
-      <p:sp>
-        <p:nvSpPr>
-          <p:cNvPr id="13" name="TextBox 12"/>
-          <p:cNvSpPr txBox="1"/>
-          <p:nvPr/>
-        </p:nvSpPr>
-        <p:spPr>
-          <a:xfrm>
-            <a:off x="457200" y="4846320"/>
-            <a:ext cx="11247120" cy="365760"/>
-          </a:xfrm>
-          <a:prstGeom prst="rect">
-            <a:avLst/>
-          </a:prstGeom>
-          <a:noFill/>
-        </p:spPr>
-        <p:txBody>
-          <a:bodyPr wrap="square" lIns="0" rIns="0" tIns="0" bIns="0">
-            <a:spAutoFit/>
-          </a:bodyPr>
-          <a:lstStyle/>
-          <a:p>
-            <a:pPr>
-              <a:defRPr sz="1300" b="1" i="0">
-                <a:solidFill>
-                  <a:srgbClr val="0F2540"/>
-                </a:solidFill>
-                <a:latin typeface="Calibri"/>
-              </a:defRPr>
-            </a:pPr>
-            <a:r>
-              <a:t>Step 3.  The chain rule cancels the 1/V_thr factor exactly:</a:t>
-            </a:r>
-          </a:p>
-        </p:txBody>
-      </p:sp>
-      <p:sp>
-        <p:nvSpPr>
-          <p:cNvPr id="14" name="Rectangle 13"/>
-          <p:cNvSpPr/>
-          <p:nvPr/>
-        </p:nvSpPr>
-        <p:spPr>
-          <a:xfrm>
-            <a:off x="457200" y="5303520"/>
-            <a:ext cx="54864" cy="777240"/>
-          </a:xfrm>
-          <a:prstGeom prst="rect">
-            <a:avLst/>
-          </a:prstGeom>
-          <a:solidFill>
-            <a:srgbClr val="E0B85F"/>
-          </a:solidFill>
-          <a:ln>
-            <a:noFill/>
-          </a:ln>
-        </p:spPr>
-        <p:style>
-          <a:lnRef idx="1">
-            <a:schemeClr val="accent1"/>
-          </a:lnRef>
-          <a:fillRef idx="3">
-            <a:schemeClr val="accent1"/>
-          </a:fillRef>
-          <a:effectRef idx="2">
-            <a:schemeClr val="accent1"/>
-          </a:effectRef>
-          <a:fontRef idx="minor">
-            <a:schemeClr val="lt1"/>
-          </a:fontRef>
-        </p:style>
-        <p:txBody>
-          <a:bodyPr rtlCol="0" anchor="ctr"/>
-          <a:lstStyle/>
-          <a:p>
-            <a:pPr algn="ctr"/>
-          </a:p>
-        </p:txBody>
-      </p:sp>
-      <p:sp>
-        <p:nvSpPr>
-          <p:cNvPr id="15" name="Rectangle 14"/>
-          <p:cNvSpPr/>
-          <p:nvPr/>
-        </p:nvSpPr>
-        <p:spPr>
-          <a:xfrm>
-            <a:off x="512064" y="5303520"/>
-            <a:ext cx="11192256" cy="777240"/>
-          </a:xfrm>
-          <a:prstGeom prst="rect">
-            <a:avLst/>
-          </a:prstGeom>
-          <a:solidFill>
-            <a:srgbClr val="0F2540"/>
-          </a:solidFill>
-          <a:ln>
-            <a:noFill/>
-          </a:ln>
-        </p:spPr>
-        <p:style>
-          <a:lnRef idx="1">
-            <a:schemeClr val="accent1"/>
-          </a:lnRef>
-          <a:fillRef idx="3">
-            <a:schemeClr val="accent1"/>
-          </a:fillRef>
-          <a:effectRef idx="2">
-            <a:schemeClr val="accent1"/>
-          </a:effectRef>
-          <a:fontRef idx="minor">
-            <a:schemeClr val="lt1"/>
-          </a:fontRef>
-        </p:style>
-        <p:txBody>
-          <a:bodyPr rtlCol="0" anchor="ctr"/>
-          <a:lstStyle/>
-          <a:p>
-            <a:pPr algn="ctr"/>
-          </a:p>
-        </p:txBody>
-      </p:sp>
-      <p:sp>
-        <p:nvSpPr>
-          <p:cNvPr id="16" name="TextBox 15"/>
-          <p:cNvSpPr txBox="1"/>
-          <p:nvPr/>
-        </p:nvSpPr>
-        <p:spPr>
-          <a:xfrm>
-            <a:off x="777240" y="5440680"/>
-            <a:ext cx="10789920" cy="502920"/>
-          </a:xfrm>
-          <a:prstGeom prst="rect">
-            <a:avLst/>
-          </a:prstGeom>
-          <a:noFill/>
-        </p:spPr>
-        <p:txBody>
-          <a:bodyPr wrap="square">
-            <a:spAutoFit/>
-          </a:bodyPr>
-          <a:lstStyle/>
-          <a:p>
-            <a:pPr>
-              <a:spcBef>
-                <a:spcPts val="0"/>
-              </a:spcBef>
-              <a:defRPr sz="1500">
+              <a:defRPr sz="1300" b="1">
                 <a:solidFill>
                   <a:srgbClr val="FFFFFF"/>
                 </a:solidFill>
@@ -5426,50 +5478,14 @@
               </a:defRPr>
             </a:pPr>
             <a:r>
-              <a:t>∂O / ∂M   =   V_thr  ·  ∂S/∂M   ≈   V_thr · (1/V_thr) f'(x)   =   f'(x)</a:t>
-            </a:r>
-          </a:p>
-        </p:txBody>
-      </p:sp>
-      <p:sp>
-        <p:nvSpPr>
-          <p:cNvPr id="17" name="TextBox 16"/>
-          <p:cNvSpPr txBox="1"/>
-          <p:nvPr/>
-        </p:nvSpPr>
-        <p:spPr>
-          <a:xfrm>
-            <a:off x="457200" y="6217920"/>
-            <a:ext cx="11247120" cy="274320"/>
-          </a:xfrm>
-          <a:prstGeom prst="rect">
-            <a:avLst/>
-          </a:prstGeom>
-          <a:noFill/>
-        </p:spPr>
-        <p:txBody>
-          <a:bodyPr wrap="square" lIns="0" rIns="0" tIns="0" bIns="0">
-            <a:spAutoFit/>
-          </a:bodyPr>
-          <a:lstStyle/>
-          <a:p>
-            <a:pPr algn="ctr">
-              <a:defRPr sz="1200" b="1" i="1">
-                <a:solidFill>
-                  <a:srgbClr val="1D7E7E"/>
-                </a:solidFill>
-                <a:latin typeface="Calibri"/>
-              </a:defRPr>
-            </a:pPr>
-            <a:r>
-              <a:t>Window adapts with V_thr   ·   gradient magnitude is threshold-invariant.</a:t>
-            </a:r>
-          </a:p>
-        </p:txBody>
-      </p:sp>
-      <p:sp>
-        <p:nvSpPr>
-          <p:cNvPr id="18" name="TextBox 17"/>
+              <a:t>Window adapts with V_thr  ·  gradient magnitude is threshold-invariant.</a:t>
+            </a:r>
+          </a:p>
+        </p:txBody>
+      </p:sp>
+      <p:sp>
+        <p:nvSpPr>
+          <p:cNvPr id="22" name="TextBox 21"/>
           <p:cNvSpPr txBox="1"/>
           <p:nvPr/>
         </p:nvSpPr>
@@ -5505,7 +5521,7 @@
       </p:sp>
       <p:sp>
         <p:nvSpPr>
-          <p:cNvPr id="19" name="TextBox 18"/>
+          <p:cNvPr id="23" name="TextBox 22"/>
           <p:cNvSpPr txBox="1"/>
           <p:nvPr/>
         </p:nvSpPr>
@@ -7105,7 +7121,7 @@
         </p:nvSpPr>
         <p:spPr>
           <a:xfrm>
-            <a:off x="457200" y="2194560"/>
+            <a:off x="457200" y="1600200"/>
             <a:ext cx="11247120" cy="365760"/>
           </a:xfrm>
           <a:prstGeom prst="rect">
@@ -7120,7 +7136,7 @@
           <a:lstStyle/>
           <a:p>
             <a:pPr>
-              <a:defRPr sz="1100" b="0" i="1">
+              <a:defRPr sz="1400" b="0" i="1">
                 <a:solidFill>
                   <a:srgbClr val="7A7A7A"/>
                 </a:solidFill>
@@ -7128,21 +7144,45 @@
               </a:defRPr>
             </a:pPr>
             <a:r>
-              <a:t>Standard LIF neurons.  No AutoAugment / Cutout.  Three trials each.</a:t>
-            </a:r>
-          </a:p>
-        </p:txBody>
-      </p:sp>
-      <p:sp>
-        <p:nvSpPr>
-          <p:cNvPr id="5" name="Rectangle 4"/>
+              <a:t>Standard LIF neurons · no AutoAugment / Cutout · three trials</a:t>
+            </a:r>
+          </a:p>
+        </p:txBody>
+      </p:sp>
+      <p:pic>
+        <p:nvPicPr>
+          <p:cNvPr id="5" name="Picture 4" descr="main_results_bars.png"/>
+          <p:cNvPicPr>
+            <a:picLocks noChangeAspect="1"/>
+          </p:cNvPicPr>
+          <p:nvPr/>
+        </p:nvPicPr>
+        <p:blipFill>
+          <a:blip r:embed="rId2"/>
+          <a:stretch>
+            <a:fillRect/>
+          </a:stretch>
+        </p:blipFill>
+        <p:spPr>
+          <a:xfrm>
+            <a:off x="365760" y="2194560"/>
+            <a:ext cx="7772400" cy="3246699"/>
+          </a:xfrm>
+          <a:prstGeom prst="rect">
+            <a:avLst/>
+          </a:prstGeom>
+        </p:spPr>
+      </p:pic>
+      <p:sp>
+        <p:nvSpPr>
+          <p:cNvPr id="6" name="Rectangle 5"/>
           <p:cNvSpPr/>
           <p:nvPr/>
         </p:nvSpPr>
         <p:spPr>
           <a:xfrm>
-            <a:off x="457200" y="2606040"/>
-            <a:ext cx="7315200" cy="3749039"/>
+            <a:off x="8229600" y="2194560"/>
+            <a:ext cx="3657600" cy="1280160"/>
           </a:xfrm>
           <a:prstGeom prst="rect">
             <a:avLst/>
@@ -7150,9 +7190,9 @@
           <a:solidFill>
             <a:srgbClr val="F8F7F2"/>
           </a:solidFill>
-          <a:ln w="6350">
+          <a:ln w="22860">
             <a:solidFill>
-              <a:srgbClr val="E5E5E0"/>
+              <a:srgbClr val="1D7E7E"/>
             </a:solidFill>
           </a:ln>
         </p:spPr>
@@ -7180,166 +7220,122 @@
       </p:sp>
       <p:sp>
         <p:nvSpPr>
-          <p:cNvPr id="6" name="TextBox 5"/>
-          <p:cNvSpPr txBox="1"/>
-          <p:nvPr/>
-        </p:nvSpPr>
-        <p:spPr>
-          <a:xfrm>
-            <a:off x="685800" y="2788920"/>
-            <a:ext cx="6858000" cy="365760"/>
-          </a:xfrm>
-          <a:prstGeom prst="rect">
-            <a:avLst/>
-          </a:prstGeom>
-          <a:noFill/>
-        </p:spPr>
-        <p:txBody>
-          <a:bodyPr wrap="square" lIns="0" rIns="0" tIns="0" bIns="0">
-            <a:spAutoFit/>
-          </a:bodyPr>
-          <a:lstStyle/>
-          <a:p>
-            <a:pPr>
-              <a:defRPr sz="1200" b="1" i="0">
+          <p:cNvPr id="7" name="TextBox 6"/>
+          <p:cNvSpPr txBox="1"/>
+          <p:nvPr/>
+        </p:nvSpPr>
+        <p:spPr>
+          <a:xfrm>
+            <a:off x="8412480" y="2377440"/>
+            <a:ext cx="2194560" cy="548640"/>
+          </a:xfrm>
+          <a:prstGeom prst="rect">
+            <a:avLst/>
+          </a:prstGeom>
+          <a:noFill/>
+        </p:spPr>
+        <p:txBody>
+          <a:bodyPr wrap="square" lIns="0" rIns="0" tIns="0" bIns="0">
+            <a:spAutoFit/>
+          </a:bodyPr>
+          <a:lstStyle/>
+          <a:p>
+            <a:pPr>
+              <a:defRPr sz="2600" b="1" i="0">
                 <a:solidFill>
                   <a:srgbClr val="1D7E7E"/>
                 </a:solidFill>
-                <a:latin typeface="Calibri"/>
-              </a:defRPr>
-            </a:pPr>
-            <a:r>
-              <a:t>Top-1 accuracy (%) — Ours vs. previous best</a:t>
-            </a:r>
-          </a:p>
-        </p:txBody>
-      </p:sp>
-      <p:sp>
-        <p:nvSpPr>
-          <p:cNvPr id="7" name="TextBox 6"/>
-          <p:cNvSpPr txBox="1"/>
-          <p:nvPr/>
-        </p:nvSpPr>
-        <p:spPr>
-          <a:xfrm>
-            <a:off x="731520" y="3246120"/>
-            <a:ext cx="6766560" cy="2926079"/>
-          </a:xfrm>
-          <a:prstGeom prst="rect">
-            <a:avLst/>
-          </a:prstGeom>
-          <a:noFill/>
-        </p:spPr>
-        <p:txBody>
-          <a:bodyPr wrap="square">
-            <a:spAutoFit/>
-          </a:bodyPr>
-          <a:lstStyle/>
-          <a:p>
-            <a:pPr>
-              <a:defRPr sz="1100">
+                <a:latin typeface="Cambria"/>
+              </a:defRPr>
+            </a:pPr>
+            <a:r>
+              <a:t>+1.09</a:t>
+            </a:r>
+          </a:p>
+        </p:txBody>
+      </p:sp>
+      <p:sp>
+        <p:nvSpPr>
+          <p:cNvPr id="8" name="TextBox 7"/>
+          <p:cNvSpPr txBox="1"/>
+          <p:nvPr/>
+        </p:nvSpPr>
+        <p:spPr>
+          <a:xfrm>
+            <a:off x="10424160" y="2487168"/>
+            <a:ext cx="1097280" cy="365760"/>
+          </a:xfrm>
+          <a:prstGeom prst="rect">
+            <a:avLst/>
+          </a:prstGeom>
+          <a:noFill/>
+        </p:spPr>
+        <p:txBody>
+          <a:bodyPr wrap="square" lIns="0" rIns="0" tIns="0" bIns="0">
+            <a:spAutoFit/>
+          </a:bodyPr>
+          <a:lstStyle/>
+          <a:p>
+            <a:pPr>
+              <a:defRPr sz="1100" b="0" i="0">
+                <a:solidFill>
+                  <a:srgbClr val="1D7E7E"/>
+                </a:solidFill>
+                <a:latin typeface="Calibri"/>
+              </a:defRPr>
+            </a:pPr>
+            <a:r>
+              <a:t>%pt</a:t>
+            </a:r>
+          </a:p>
+        </p:txBody>
+      </p:sp>
+      <p:sp>
+        <p:nvSpPr>
+          <p:cNvPr id="9" name="TextBox 8"/>
+          <p:cNvSpPr txBox="1"/>
+          <p:nvPr/>
+        </p:nvSpPr>
+        <p:spPr>
+          <a:xfrm>
+            <a:off x="8412480" y="2971800"/>
+            <a:ext cx="3383280" cy="457200"/>
+          </a:xfrm>
+          <a:prstGeom prst="rect">
+            <a:avLst/>
+          </a:prstGeom>
+          <a:noFill/>
+        </p:spPr>
+        <p:txBody>
+          <a:bodyPr wrap="square" lIns="0" rIns="0" tIns="0" bIns="0">
+            <a:spAutoFit/>
+          </a:bodyPr>
+          <a:lstStyle/>
+          <a:p>
+            <a:pPr>
+              <a:defRPr sz="1000" b="0" i="0">
                 <a:solidFill>
                   <a:srgbClr val="1A1A1A"/>
                 </a:solidFill>
-                <a:latin typeface="Consolas"/>
-              </a:defRPr>
-            </a:pPr>
-            <a:r>
-              <a:t>CIFAR-10  (R-19, T=6)     TAB 94.81     →  95.50    +0.69</a:t>
-            </a:r>
-          </a:p>
-          <a:p>
-            <a:pPr>
-              <a:spcBef>
-                <a:spcPts val="400"/>
-              </a:spcBef>
-              <a:defRPr sz="1100">
-                <a:solidFill>
-                  <a:srgbClr val="1A1A1A"/>
-                </a:solidFill>
-                <a:latin typeface="Consolas"/>
-              </a:defRPr>
-            </a:pPr>
-            <a:r>
-              <a:t>CIFAR-100 (R-19, T=6)     TAB 76.82     →  77.91    +1.09</a:t>
-            </a:r>
-          </a:p>
-          <a:p>
-            <a:pPr>
-              <a:spcBef>
-                <a:spcPts val="400"/>
-              </a:spcBef>
-              <a:defRPr sz="1100">
-                <a:solidFill>
-                  <a:srgbClr val="1A1A1A"/>
-                </a:solidFill>
-                <a:latin typeface="Consolas"/>
-              </a:defRPr>
-            </a:pPr>
-            <a:r>
-              <a:t>ImageNet  (R-34, T=6)     TAB 67.78     →  68.73    +0.95</a:t>
-            </a:r>
-          </a:p>
-          <a:p>
-            <a:pPr>
-              <a:spcBef>
-                <a:spcPts val="400"/>
-              </a:spcBef>
-              <a:defRPr sz="1100">
-                <a:solidFill>
-                  <a:srgbClr val="1A1A1A"/>
-                </a:solidFill>
-                <a:latin typeface="Consolas"/>
-              </a:defRPr>
-            </a:pPr>
-            <a:r>
-              <a:t>ImageNet  (SEW-R34, T=4)  MPS 69.03     →  69.67    +0.64</a:t>
-            </a:r>
-          </a:p>
-          <a:p>
-            <a:pPr>
-              <a:spcBef>
-                <a:spcPts val="400"/>
-              </a:spcBef>
-              <a:defRPr sz="1100">
-                <a:solidFill>
-                  <a:srgbClr val="1A1A1A"/>
-                </a:solidFill>
-                <a:latin typeface="Consolas"/>
-              </a:defRPr>
-            </a:pPr>
-            <a:r>
-              <a:t>DVS-CIFAR10 (R-19, T=10)  RMP 76.20     →  81.43    +5.23</a:t>
-            </a:r>
-          </a:p>
-          <a:p>
-            <a:pPr>
-              <a:spcBef>
-                <a:spcPts val="400"/>
-              </a:spcBef>
-              <a:defRPr sz="1100">
-                <a:solidFill>
-                  <a:srgbClr val="1A1A1A"/>
-                </a:solidFill>
-                <a:latin typeface="Consolas"/>
-              </a:defRPr>
-            </a:pPr>
-            <a:r>
-              <a:t>DVS-CIFAR10 (7-CNN, T=4)  TAB 76.70     →  79.27    +2.57</a:t>
-            </a:r>
-          </a:p>
-        </p:txBody>
-      </p:sp>
-      <p:sp>
-        <p:nvSpPr>
-          <p:cNvPr id="8" name="Rectangle 7"/>
+                <a:latin typeface="Calibri"/>
+              </a:defRPr>
+            </a:pPr>
+            <a:r>
+              <a:t>CIFAR-100  ·  beats TAB</a:t>
+            </a:r>
+          </a:p>
+        </p:txBody>
+      </p:sp>
+      <p:sp>
+        <p:nvSpPr>
+          <p:cNvPr id="10" name="Rectangle 9"/>
           <p:cNvSpPr/>
           <p:nvPr/>
         </p:nvSpPr>
         <p:spPr>
           <a:xfrm>
-            <a:off x="7955279" y="2606040"/>
-            <a:ext cx="4023360" cy="1143000"/>
+            <a:off x="8229600" y="3611880"/>
+            <a:ext cx="3657600" cy="1280160"/>
           </a:xfrm>
           <a:prstGeom prst="rect">
             <a:avLst/>
@@ -7347,7 +7343,7 @@
           <a:solidFill>
             <a:srgbClr val="F8F7F2"/>
           </a:solidFill>
-          <a:ln w="19050">
+          <a:ln w="22860">
             <a:solidFill>
               <a:srgbClr val="1D7E7E"/>
             </a:solidFill>
@@ -7377,14 +7373,14 @@
       </p:sp>
       <p:sp>
         <p:nvSpPr>
-          <p:cNvPr id="9" name="TextBox 8"/>
-          <p:cNvSpPr txBox="1"/>
-          <p:nvPr/>
-        </p:nvSpPr>
-        <p:spPr>
-          <a:xfrm>
-            <a:off x="8138159" y="2743200"/>
-            <a:ext cx="2286000" cy="502920"/>
+          <p:cNvPr id="11" name="TextBox 10"/>
+          <p:cNvSpPr txBox="1"/>
+          <p:nvPr/>
+        </p:nvSpPr>
+        <p:spPr>
+          <a:xfrm>
+            <a:off x="8412480" y="3794760"/>
+            <a:ext cx="2194560" cy="548640"/>
           </a:xfrm>
           <a:prstGeom prst="rect">
             <a:avLst/>
@@ -7406,21 +7402,21 @@
               </a:defRPr>
             </a:pPr>
             <a:r>
-              <a:t>+1.09</a:t>
-            </a:r>
-          </a:p>
-        </p:txBody>
-      </p:sp>
-      <p:sp>
-        <p:nvSpPr>
-          <p:cNvPr id="10" name="TextBox 9"/>
-          <p:cNvSpPr txBox="1"/>
-          <p:nvPr/>
-        </p:nvSpPr>
-        <p:spPr>
-          <a:xfrm>
-            <a:off x="10424159" y="2852928"/>
-            <a:ext cx="1371600" cy="365760"/>
+              <a:t>+0.64</a:t>
+            </a:r>
+          </a:p>
+        </p:txBody>
+      </p:sp>
+      <p:sp>
+        <p:nvSpPr>
+          <p:cNvPr id="12" name="TextBox 11"/>
+          <p:cNvSpPr txBox="1"/>
+          <p:nvPr/>
+        </p:nvSpPr>
+        <p:spPr>
+          <a:xfrm>
+            <a:off x="10424160" y="3904488"/>
+            <a:ext cx="1097280" cy="365760"/>
           </a:xfrm>
           <a:prstGeom prst="rect">
             <a:avLst/>
@@ -7449,14 +7445,14 @@
       </p:sp>
       <p:sp>
         <p:nvSpPr>
-          <p:cNvPr id="11" name="TextBox 10"/>
-          <p:cNvSpPr txBox="1"/>
-          <p:nvPr/>
-        </p:nvSpPr>
-        <p:spPr>
-          <a:xfrm>
-            <a:off x="8138159" y="3291840"/>
-            <a:ext cx="3657600" cy="411480"/>
+          <p:cNvPr id="13" name="TextBox 12"/>
+          <p:cNvSpPr txBox="1"/>
+          <p:nvPr/>
+        </p:nvSpPr>
+        <p:spPr>
+          <a:xfrm>
+            <a:off x="8412480" y="4389120"/>
+            <a:ext cx="3383280" cy="457200"/>
           </a:xfrm>
           <a:prstGeom prst="rect">
             <a:avLst/>
@@ -7478,21 +7474,21 @@
               </a:defRPr>
             </a:pPr>
             <a:r>
-              <a:t>CIFAR-100 over TAB</a:t>
-            </a:r>
-          </a:p>
-        </p:txBody>
-      </p:sp>
-      <p:sp>
-        <p:nvSpPr>
-          <p:cNvPr id="12" name="Rectangle 11"/>
+              <a:t>ImageNet  ·  beats MPS</a:t>
+            </a:r>
+          </a:p>
+        </p:txBody>
+      </p:sp>
+      <p:sp>
+        <p:nvSpPr>
+          <p:cNvPr id="14" name="Rectangle 13"/>
           <p:cNvSpPr/>
           <p:nvPr/>
         </p:nvSpPr>
         <p:spPr>
           <a:xfrm>
-            <a:off x="7955279" y="3886200"/>
-            <a:ext cx="4023360" cy="1143000"/>
+            <a:off x="8229600" y="5029200"/>
+            <a:ext cx="3657600" cy="1280160"/>
           </a:xfrm>
           <a:prstGeom prst="rect">
             <a:avLst/>
@@ -7500,9 +7496,9 @@
           <a:solidFill>
             <a:srgbClr val="F8F7F2"/>
           </a:solidFill>
-          <a:ln w="19050">
+          <a:ln w="22860">
             <a:solidFill>
-              <a:srgbClr val="1D7E7E"/>
+              <a:srgbClr val="E0B85F"/>
             </a:solidFill>
           </a:ln>
         </p:spPr>
@@ -7530,14 +7526,14 @@
       </p:sp>
       <p:sp>
         <p:nvSpPr>
-          <p:cNvPr id="13" name="TextBox 12"/>
-          <p:cNvSpPr txBox="1"/>
-          <p:nvPr/>
-        </p:nvSpPr>
-        <p:spPr>
-          <a:xfrm>
-            <a:off x="8138159" y="4023360"/>
-            <a:ext cx="2286000" cy="502920"/>
+          <p:cNvPr id="15" name="TextBox 14"/>
+          <p:cNvSpPr txBox="1"/>
+          <p:nvPr/>
+        </p:nvSpPr>
+        <p:spPr>
+          <a:xfrm>
+            <a:off x="8412480" y="5212080"/>
+            <a:ext cx="2194560" cy="548640"/>
           </a:xfrm>
           <a:prstGeom prst="rect">
             <a:avLst/>
@@ -7553,27 +7549,27 @@
             <a:pPr>
               <a:defRPr sz="2600" b="1" i="0">
                 <a:solidFill>
-                  <a:srgbClr val="1D7E7E"/>
+                  <a:srgbClr val="E0B85F"/>
                 </a:solidFill>
                 <a:latin typeface="Cambria"/>
               </a:defRPr>
             </a:pPr>
             <a:r>
-              <a:t>+0.64</a:t>
-            </a:r>
-          </a:p>
-        </p:txBody>
-      </p:sp>
-      <p:sp>
-        <p:nvSpPr>
-          <p:cNvPr id="14" name="TextBox 13"/>
-          <p:cNvSpPr txBox="1"/>
-          <p:nvPr/>
-        </p:nvSpPr>
-        <p:spPr>
-          <a:xfrm>
-            <a:off x="10424159" y="4133087"/>
-            <a:ext cx="1371600" cy="365760"/>
+              <a:t>+5.23</a:t>
+            </a:r>
+          </a:p>
+        </p:txBody>
+      </p:sp>
+      <p:sp>
+        <p:nvSpPr>
+          <p:cNvPr id="16" name="TextBox 15"/>
+          <p:cNvSpPr txBox="1"/>
+          <p:nvPr/>
+        </p:nvSpPr>
+        <p:spPr>
+          <a:xfrm>
+            <a:off x="10424160" y="5321808"/>
+            <a:ext cx="1097280" cy="365760"/>
           </a:xfrm>
           <a:prstGeom prst="rect">
             <a:avLst/>
@@ -7589,7 +7585,7 @@
             <a:pPr>
               <a:defRPr sz="1100" b="0" i="0">
                 <a:solidFill>
-                  <a:srgbClr val="1D7E7E"/>
+                  <a:srgbClr val="E0B85F"/>
                 </a:solidFill>
                 <a:latin typeface="Calibri"/>
               </a:defRPr>
@@ -7602,14 +7598,14 @@
       </p:sp>
       <p:sp>
         <p:nvSpPr>
-          <p:cNvPr id="15" name="TextBox 14"/>
-          <p:cNvSpPr txBox="1"/>
-          <p:nvPr/>
-        </p:nvSpPr>
-        <p:spPr>
-          <a:xfrm>
-            <a:off x="8138159" y="4572000"/>
-            <a:ext cx="3657600" cy="411480"/>
+          <p:cNvPr id="17" name="TextBox 16"/>
+          <p:cNvSpPr txBox="1"/>
+          <p:nvPr/>
+        </p:nvSpPr>
+        <p:spPr>
+          <a:xfrm>
+            <a:off x="8412480" y="5806440"/>
+            <a:ext cx="3383280" cy="457200"/>
           </a:xfrm>
           <a:prstGeom prst="rect">
             <a:avLst/>
@@ -7631,32 +7627,30 @@
               </a:defRPr>
             </a:pPr>
             <a:r>
-              <a:t>ImageNet (SEW-R34) over MPS</a:t>
-            </a:r>
-          </a:p>
-        </p:txBody>
-      </p:sp>
-      <p:sp>
-        <p:nvSpPr>
-          <p:cNvPr id="16" name="Rectangle 15"/>
+              <a:t>DVS-CIFAR10  ·  beats RMP</a:t>
+            </a:r>
+          </a:p>
+        </p:txBody>
+      </p:sp>
+      <p:sp>
+        <p:nvSpPr>
+          <p:cNvPr id="18" name="Rectangle 17"/>
           <p:cNvSpPr/>
           <p:nvPr/>
         </p:nvSpPr>
         <p:spPr>
           <a:xfrm>
-            <a:off x="7955279" y="5166360"/>
-            <a:ext cx="4023360" cy="1143000"/>
+            <a:off x="457200" y="6126480"/>
+            <a:ext cx="54864" cy="365760"/>
           </a:xfrm>
           <a:prstGeom prst="rect">
             <a:avLst/>
           </a:prstGeom>
           <a:solidFill>
-            <a:srgbClr val="F8F7F2"/>
+            <a:srgbClr val="E0B85F"/>
           </a:solidFill>
-          <a:ln w="19050">
-            <a:solidFill>
-              <a:srgbClr val="E0B85F"/>
-            </a:solidFill>
+          <a:ln>
+            <a:noFill/>
           </a:ln>
         </p:spPr>
         <p:style>
@@ -7683,115 +7677,86 @@
       </p:sp>
       <p:sp>
         <p:nvSpPr>
-          <p:cNvPr id="17" name="TextBox 16"/>
-          <p:cNvSpPr txBox="1"/>
-          <p:nvPr/>
-        </p:nvSpPr>
-        <p:spPr>
-          <a:xfrm>
-            <a:off x="8138159" y="5303520"/>
-            <a:ext cx="2286000" cy="502920"/>
-          </a:xfrm>
-          <a:prstGeom prst="rect">
-            <a:avLst/>
-          </a:prstGeom>
-          <a:noFill/>
-        </p:spPr>
-        <p:txBody>
-          <a:bodyPr wrap="square" lIns="0" rIns="0" tIns="0" bIns="0">
-            <a:spAutoFit/>
-          </a:bodyPr>
-          <a:lstStyle/>
-          <a:p>
-            <a:pPr>
-              <a:defRPr sz="2600" b="1" i="0">
+          <p:cNvPr id="19" name="Rectangle 18"/>
+          <p:cNvSpPr/>
+          <p:nvPr/>
+        </p:nvSpPr>
+        <p:spPr>
+          <a:xfrm>
+            <a:off x="512064" y="6126480"/>
+            <a:ext cx="11192256" cy="365760"/>
+          </a:xfrm>
+          <a:prstGeom prst="rect">
+            <a:avLst/>
+          </a:prstGeom>
+          <a:solidFill>
+            <a:srgbClr val="0F2540"/>
+          </a:solidFill>
+          <a:ln>
+            <a:noFill/>
+          </a:ln>
+        </p:spPr>
+        <p:style>
+          <a:lnRef idx="1">
+            <a:schemeClr val="accent1"/>
+          </a:lnRef>
+          <a:fillRef idx="3">
+            <a:schemeClr val="accent1"/>
+          </a:fillRef>
+          <a:effectRef idx="2">
+            <a:schemeClr val="accent1"/>
+          </a:effectRef>
+          <a:fontRef idx="minor">
+            <a:schemeClr val="lt1"/>
+          </a:fontRef>
+        </p:style>
+        <p:txBody>
+          <a:bodyPr rtlCol="0" anchor="ctr"/>
+          <a:lstStyle/>
+          <a:p>
+            <a:pPr algn="ctr"/>
+          </a:p>
+        </p:txBody>
+      </p:sp>
+      <p:sp>
+        <p:nvSpPr>
+          <p:cNvPr id="20" name="TextBox 19"/>
+          <p:cNvSpPr txBox="1"/>
+          <p:nvPr/>
+        </p:nvSpPr>
+        <p:spPr>
+          <a:xfrm>
+            <a:off x="777240" y="6263640"/>
+            <a:ext cx="10789920" cy="91440"/>
+          </a:xfrm>
+          <a:prstGeom prst="rect">
+            <a:avLst/>
+          </a:prstGeom>
+          <a:noFill/>
+        </p:spPr>
+        <p:txBody>
+          <a:bodyPr wrap="square">
+            <a:spAutoFit/>
+          </a:bodyPr>
+          <a:lstStyle/>
+          <a:p>
+            <a:pPr>
+              <a:defRPr sz="1100" b="1">
                 <a:solidFill>
                   <a:srgbClr val="E0B85F"/>
                 </a:solidFill>
-                <a:latin typeface="Cambria"/>
-              </a:defRPr>
-            </a:pPr>
-            <a:r>
-              <a:t>+5.23</a:t>
-            </a:r>
-          </a:p>
-        </p:txBody>
-      </p:sp>
-      <p:sp>
-        <p:nvSpPr>
-          <p:cNvPr id="18" name="TextBox 17"/>
-          <p:cNvSpPr txBox="1"/>
-          <p:nvPr/>
-        </p:nvSpPr>
-        <p:spPr>
-          <a:xfrm>
-            <a:off x="10424159" y="5413248"/>
-            <a:ext cx="1371600" cy="365760"/>
-          </a:xfrm>
-          <a:prstGeom prst="rect">
-            <a:avLst/>
-          </a:prstGeom>
-          <a:noFill/>
-        </p:spPr>
-        <p:txBody>
-          <a:bodyPr wrap="square" lIns="0" rIns="0" tIns="0" bIns="0">
-            <a:spAutoFit/>
-          </a:bodyPr>
-          <a:lstStyle/>
-          <a:p>
-            <a:pPr>
-              <a:defRPr sz="1100" b="0" i="0">
-                <a:solidFill>
-                  <a:srgbClr val="E0B85F"/>
-                </a:solidFill>
-                <a:latin typeface="Calibri"/>
-              </a:defRPr>
-            </a:pPr>
-            <a:r>
-              <a:t>%pt</a:t>
-            </a:r>
-          </a:p>
-        </p:txBody>
-      </p:sp>
-      <p:sp>
-        <p:nvSpPr>
-          <p:cNvPr id="19" name="TextBox 18"/>
-          <p:cNvSpPr txBox="1"/>
-          <p:nvPr/>
-        </p:nvSpPr>
-        <p:spPr>
-          <a:xfrm>
-            <a:off x="8138159" y="5852160"/>
-            <a:ext cx="3657600" cy="411480"/>
-          </a:xfrm>
-          <a:prstGeom prst="rect">
-            <a:avLst/>
-          </a:prstGeom>
-          <a:noFill/>
-        </p:spPr>
-        <p:txBody>
-          <a:bodyPr wrap="square" lIns="0" rIns="0" tIns="0" bIns="0">
-            <a:spAutoFit/>
-          </a:bodyPr>
-          <a:lstStyle/>
-          <a:p>
-            <a:pPr>
-              <a:defRPr sz="1000" b="0" i="0">
-                <a:solidFill>
-                  <a:srgbClr val="1A1A1A"/>
-                </a:solidFill>
-                <a:latin typeface="Calibri"/>
-              </a:defRPr>
-            </a:pPr>
-            <a:r>
-              <a:t>DVS-CIFAR10 over RMP-Loss</a:t>
-            </a:r>
-          </a:p>
-        </p:txBody>
-      </p:sp>
-      <p:sp>
-        <p:nvSpPr>
-          <p:cNvPr id="20" name="TextBox 19"/>
+                <a:latin typeface="Calibri"/>
+              </a:defRPr>
+            </a:pPr>
+            <a:r>
+              <a:t>Biggest gain on the most challenging (event-based) dataset — DVS-CIFAR10 +5.23 %pt</a:t>
+            </a:r>
+          </a:p>
+        </p:txBody>
+      </p:sp>
+      <p:sp>
+        <p:nvSpPr>
+          <p:cNvPr id="21" name="TextBox 20"/>
           <p:cNvSpPr txBox="1"/>
           <p:nvPr/>
         </p:nvSpPr>
@@ -7827,7 +7792,7 @@
       </p:sp>
       <p:sp>
         <p:nvSpPr>
-          <p:cNvPr id="21" name="TextBox 20"/>
+          <p:cNvPr id="22" name="TextBox 21"/>
           <p:cNvSpPr txBox="1"/>
           <p:nvPr/>
         </p:nvSpPr>
@@ -7988,16 +7953,40 @@
           </a:p>
         </p:txBody>
       </p:sp>
-      <p:sp>
-        <p:nvSpPr>
-          <p:cNvPr id="5" name="TextBox 4"/>
-          <p:cNvSpPr txBox="1"/>
-          <p:nvPr/>
-        </p:nvSpPr>
-        <p:spPr>
-          <a:xfrm>
-            <a:off x="457200" y="2286000"/>
-            <a:ext cx="5486400" cy="365760"/>
+      <p:pic>
+        <p:nvPicPr>
+          <p:cNvPr id="5" name="Picture 4" descr="ablation_bars.png"/>
+          <p:cNvPicPr>
+            <a:picLocks noChangeAspect="1"/>
+          </p:cNvPicPr>
+          <p:nvPr/>
+        </p:nvPicPr>
+        <p:blipFill>
+          <a:blip r:embed="rId2"/>
+          <a:stretch>
+            <a:fillRect/>
+          </a:stretch>
+        </p:blipFill>
+        <p:spPr>
+          <a:xfrm>
+            <a:off x="365760" y="2240280"/>
+            <a:ext cx="9144000" cy="3819646"/>
+          </a:xfrm>
+          <a:prstGeom prst="rect">
+            <a:avLst/>
+          </a:prstGeom>
+        </p:spPr>
+      </p:pic>
+      <p:sp>
+        <p:nvSpPr>
+          <p:cNvPr id="6" name="TextBox 5"/>
+          <p:cNvSpPr txBox="1"/>
+          <p:nvPr/>
+        </p:nvSpPr>
+        <p:spPr>
+          <a:xfrm>
+            <a:off x="9875520" y="2286000"/>
+            <a:ext cx="2194560" cy="365760"/>
           </a:xfrm>
           <a:prstGeom prst="rect">
             <a:avLst/>
@@ -8019,21 +8008,21 @@
               </a:defRPr>
             </a:pPr>
             <a:r>
-              <a:t>CIFAR-100   (T = 4)</a:t>
-            </a:r>
-          </a:p>
-        </p:txBody>
-      </p:sp>
-      <p:sp>
-        <p:nvSpPr>
-          <p:cNvPr id="6" name="Rectangle 5"/>
+              <a:t>Takeaway</a:t>
+            </a:r>
+          </a:p>
+        </p:txBody>
+      </p:sp>
+      <p:sp>
+        <p:nvSpPr>
+          <p:cNvPr id="7" name="Rectangle 6"/>
           <p:cNvSpPr/>
           <p:nvPr/>
         </p:nvSpPr>
         <p:spPr>
           <a:xfrm>
-            <a:off x="457200" y="2697480"/>
-            <a:ext cx="5486400" cy="2834640"/>
+            <a:off x="9692640" y="2697480"/>
+            <a:ext cx="2286000" cy="914400"/>
           </a:xfrm>
           <a:prstGeom prst="rect">
             <a:avLst/>
@@ -8041,9 +8030,9 @@
           <a:solidFill>
             <a:srgbClr val="F8F7F2"/>
           </a:solidFill>
-          <a:ln w="6350">
+          <a:ln w="16510">
             <a:solidFill>
-              <a:srgbClr val="E5E5E0"/>
+              <a:srgbClr val="1D7E7E"/>
             </a:solidFill>
           </a:ln>
         </p:spPr>
@@ -8071,153 +8060,86 @@
       </p:sp>
       <p:sp>
         <p:nvSpPr>
-          <p:cNvPr id="7" name="TextBox 6"/>
-          <p:cNvSpPr txBox="1"/>
-          <p:nvPr/>
-        </p:nvSpPr>
-        <p:spPr>
-          <a:xfrm>
-            <a:off x="640080" y="2834640"/>
-            <a:ext cx="5303520" cy="2560320"/>
-          </a:xfrm>
-          <a:prstGeom prst="rect">
-            <a:avLst/>
-          </a:prstGeom>
-          <a:noFill/>
-        </p:spPr>
-        <p:txBody>
-          <a:bodyPr wrap="square">
-            <a:spAutoFit/>
-          </a:bodyPr>
-          <a:lstStyle/>
-          <a:p>
-            <a:pPr>
-              <a:spcAft>
-                <a:spcPts val="800"/>
-              </a:spcAft>
-              <a:defRPr sz="1200" b="1">
+          <p:cNvPr id="8" name="TextBox 7"/>
+          <p:cNvSpPr txBox="1"/>
+          <p:nvPr/>
+        </p:nvSpPr>
+        <p:spPr>
+          <a:xfrm>
+            <a:off x="9829800" y="2788920"/>
+            <a:ext cx="2011680" cy="274320"/>
+          </a:xfrm>
+          <a:prstGeom prst="rect">
+            <a:avLst/>
+          </a:prstGeom>
+          <a:noFill/>
+        </p:spPr>
+        <p:txBody>
+          <a:bodyPr wrap="square" lIns="0" rIns="0" tIns="0" bIns="0">
+            <a:spAutoFit/>
+          </a:bodyPr>
+          <a:lstStyle/>
+          <a:p>
+            <a:pPr>
+              <a:defRPr sz="1000" b="0" i="0">
+                <a:solidFill>
+                  <a:srgbClr val="7A7A7A"/>
+                </a:solidFill>
+                <a:latin typeface="Calibri"/>
+              </a:defRPr>
+            </a:pPr>
+            <a:r>
+              <a:t>MP-Init alone</a:t>
+            </a:r>
+          </a:p>
+        </p:txBody>
+      </p:sp>
+      <p:sp>
+        <p:nvSpPr>
+          <p:cNvPr id="9" name="TextBox 8"/>
+          <p:cNvSpPr txBox="1"/>
+          <p:nvPr/>
+        </p:nvSpPr>
+        <p:spPr>
+          <a:xfrm>
+            <a:off x="9829800" y="3063240"/>
+            <a:ext cx="2011680" cy="457200"/>
+          </a:xfrm>
+          <a:prstGeom prst="rect">
+            <a:avLst/>
+          </a:prstGeom>
+          <a:noFill/>
+        </p:spPr>
+        <p:txBody>
+          <a:bodyPr wrap="square" lIns="0" rIns="0" tIns="0" bIns="0">
+            <a:spAutoFit/>
+          </a:bodyPr>
+          <a:lstStyle/>
+          <a:p>
+            <a:pPr>
+              <a:defRPr sz="1800" b="1" i="0">
                 <a:solidFill>
                   <a:srgbClr val="1D7E7E"/>
                 </a:solidFill>
-                <a:latin typeface="Consolas"/>
-              </a:defRPr>
-            </a:pPr>
-            <a:r>
-              <a:t>MP-Init    TrSG       Acc (%)</a:t>
-            </a:r>
-          </a:p>
-          <a:p>
-            <a:pPr>
-              <a:spcBef>
-                <a:spcPts val="400"/>
-              </a:spcBef>
-              <a:defRPr sz="1300" b="0">
-                <a:solidFill>
-                  <a:srgbClr val="1A1A1A"/>
-                </a:solidFill>
-                <a:latin typeface="Consolas"/>
-              </a:defRPr>
-            </a:pPr>
-            <a:r>
-              <a:t>   ✗        ✗         75.55</a:t>
-            </a:r>
-          </a:p>
-          <a:p>
-            <a:pPr>
-              <a:spcBef>
-                <a:spcPts val="400"/>
-              </a:spcBef>
-              <a:defRPr sz="1300" b="0">
-                <a:solidFill>
-                  <a:srgbClr val="1A1A1A"/>
-                </a:solidFill>
-                <a:latin typeface="Consolas"/>
-              </a:defRPr>
-            </a:pPr>
-            <a:r>
-              <a:t>   ✓        ✗         76.09</a:t>
-            </a:r>
-          </a:p>
-          <a:p>
-            <a:pPr>
-              <a:spcBef>
-                <a:spcPts val="400"/>
-              </a:spcBef>
-              <a:defRPr sz="1300" b="0">
-                <a:solidFill>
-                  <a:srgbClr val="1A1A1A"/>
-                </a:solidFill>
-                <a:latin typeface="Consolas"/>
-              </a:defRPr>
-            </a:pPr>
-            <a:r>
-              <a:t>   ✗        ✓         77.15</a:t>
-            </a:r>
-          </a:p>
-          <a:p>
-            <a:pPr>
-              <a:spcBef>
-                <a:spcPts val="400"/>
-              </a:spcBef>
-              <a:defRPr sz="1300" b="1">
-                <a:solidFill>
-                  <a:srgbClr val="1D7E7E"/>
-                </a:solidFill>
-                <a:latin typeface="Consolas"/>
-              </a:defRPr>
-            </a:pPr>
-            <a:r>
-              <a:t>   ✓        ✓         77.66</a:t>
-            </a:r>
-          </a:p>
-        </p:txBody>
-      </p:sp>
-      <p:sp>
-        <p:nvSpPr>
-          <p:cNvPr id="8" name="TextBox 7"/>
-          <p:cNvSpPr txBox="1"/>
-          <p:nvPr/>
-        </p:nvSpPr>
-        <p:spPr>
-          <a:xfrm>
-            <a:off x="6263640" y="2286000"/>
-            <a:ext cx="5486400" cy="365760"/>
-          </a:xfrm>
-          <a:prstGeom prst="rect">
-            <a:avLst/>
-          </a:prstGeom>
-          <a:noFill/>
-        </p:spPr>
-        <p:txBody>
-          <a:bodyPr wrap="square" lIns="0" rIns="0" tIns="0" bIns="0">
-            <a:spAutoFit/>
-          </a:bodyPr>
-          <a:lstStyle/>
-          <a:p>
-            <a:pPr>
-              <a:defRPr sz="1200" b="1" i="0">
-                <a:solidFill>
-                  <a:srgbClr val="0F2540"/>
-                </a:solidFill>
-                <a:latin typeface="Calibri"/>
-              </a:defRPr>
-            </a:pPr>
-            <a:r>
-              <a:t>DVS-CIFAR10   (T = 10)</a:t>
-            </a:r>
-          </a:p>
-        </p:txBody>
-      </p:sp>
-      <p:sp>
-        <p:nvSpPr>
-          <p:cNvPr id="9" name="Rectangle 8"/>
+                <a:latin typeface="Cambria"/>
+              </a:defRPr>
+            </a:pPr>
+            <a:r>
+              <a:t>+0.5 ~ 0.8</a:t>
+            </a:r>
+          </a:p>
+        </p:txBody>
+      </p:sp>
+      <p:sp>
+        <p:nvSpPr>
+          <p:cNvPr id="10" name="Rectangle 9"/>
           <p:cNvSpPr/>
           <p:nvPr/>
         </p:nvSpPr>
         <p:spPr>
           <a:xfrm>
-            <a:off x="6263640" y="2697480"/>
-            <a:ext cx="5486400" cy="2834640"/>
+            <a:off x="9692640" y="3703320"/>
+            <a:ext cx="2286000" cy="914400"/>
           </a:xfrm>
           <a:prstGeom prst="rect">
             <a:avLst/>
@@ -8225,9 +8147,9 @@
           <a:solidFill>
             <a:srgbClr val="F8F7F2"/>
           </a:solidFill>
-          <a:ln w="6350">
+          <a:ln w="16510">
             <a:solidFill>
-              <a:srgbClr val="E5E5E0"/>
+              <a:srgbClr val="E0B85F"/>
             </a:solidFill>
           </a:ln>
         </p:spPr>
@@ -8255,117 +8177,203 @@
       </p:sp>
       <p:sp>
         <p:nvSpPr>
-          <p:cNvPr id="10" name="TextBox 9"/>
-          <p:cNvSpPr txBox="1"/>
-          <p:nvPr/>
-        </p:nvSpPr>
-        <p:spPr>
-          <a:xfrm>
-            <a:off x="6446520" y="2834640"/>
-            <a:ext cx="5303520" cy="2560320"/>
-          </a:xfrm>
-          <a:prstGeom prst="rect">
-            <a:avLst/>
-          </a:prstGeom>
-          <a:noFill/>
-        </p:spPr>
-        <p:txBody>
-          <a:bodyPr wrap="square">
-            <a:spAutoFit/>
-          </a:bodyPr>
-          <a:lstStyle/>
-          <a:p>
-            <a:pPr>
-              <a:spcAft>
-                <a:spcPts val="800"/>
-              </a:spcAft>
-              <a:defRPr sz="1200" b="1">
-                <a:solidFill>
-                  <a:srgbClr val="1D7E7E"/>
-                </a:solidFill>
-                <a:latin typeface="Consolas"/>
-              </a:defRPr>
-            </a:pPr>
-            <a:r>
-              <a:t>MP-Init    TrSG       Acc (%)</a:t>
-            </a:r>
-          </a:p>
-          <a:p>
-            <a:pPr>
-              <a:spcBef>
-                <a:spcPts val="400"/>
-              </a:spcBef>
-              <a:defRPr sz="1300" b="0">
-                <a:solidFill>
-                  <a:srgbClr val="1A1A1A"/>
-                </a:solidFill>
-                <a:latin typeface="Consolas"/>
-              </a:defRPr>
-            </a:pPr>
-            <a:r>
-              <a:t>   ✗        ✗         76.60</a:t>
-            </a:r>
-          </a:p>
-          <a:p>
-            <a:pPr>
-              <a:spcBef>
-                <a:spcPts val="400"/>
-              </a:spcBef>
-              <a:defRPr sz="1300" b="0">
-                <a:solidFill>
-                  <a:srgbClr val="1A1A1A"/>
-                </a:solidFill>
-                <a:latin typeface="Consolas"/>
-              </a:defRPr>
-            </a:pPr>
-            <a:r>
-              <a:t>   ✓        ✗         77.37</a:t>
-            </a:r>
-          </a:p>
-          <a:p>
-            <a:pPr>
-              <a:spcBef>
-                <a:spcPts val="400"/>
-              </a:spcBef>
-              <a:defRPr sz="1300" b="0">
-                <a:solidFill>
-                  <a:srgbClr val="1A1A1A"/>
-                </a:solidFill>
-                <a:latin typeface="Consolas"/>
-              </a:defRPr>
-            </a:pPr>
-            <a:r>
-              <a:t>   ✗        ✓         80.83</a:t>
-            </a:r>
-          </a:p>
-          <a:p>
-            <a:pPr>
-              <a:spcBef>
-                <a:spcPts val="400"/>
-              </a:spcBef>
-              <a:defRPr sz="1300" b="1">
+          <p:cNvPr id="11" name="TextBox 10"/>
+          <p:cNvSpPr txBox="1"/>
+          <p:nvPr/>
+        </p:nvSpPr>
+        <p:spPr>
+          <a:xfrm>
+            <a:off x="9829800" y="3794759"/>
+            <a:ext cx="2011680" cy="274320"/>
+          </a:xfrm>
+          <a:prstGeom prst="rect">
+            <a:avLst/>
+          </a:prstGeom>
+          <a:noFill/>
+        </p:spPr>
+        <p:txBody>
+          <a:bodyPr wrap="square" lIns="0" rIns="0" tIns="0" bIns="0">
+            <a:spAutoFit/>
+          </a:bodyPr>
+          <a:lstStyle/>
+          <a:p>
+            <a:pPr>
+              <a:defRPr sz="1000" b="0" i="0">
+                <a:solidFill>
+                  <a:srgbClr val="7A7A7A"/>
+                </a:solidFill>
+                <a:latin typeface="Calibri"/>
+              </a:defRPr>
+            </a:pPr>
+            <a:r>
+              <a:t>TrSG alone</a:t>
+            </a:r>
+          </a:p>
+        </p:txBody>
+      </p:sp>
+      <p:sp>
+        <p:nvSpPr>
+          <p:cNvPr id="12" name="TextBox 11"/>
+          <p:cNvSpPr txBox="1"/>
+          <p:nvPr/>
+        </p:nvSpPr>
+        <p:spPr>
+          <a:xfrm>
+            <a:off x="9829800" y="4069080"/>
+            <a:ext cx="2011680" cy="457200"/>
+          </a:xfrm>
+          <a:prstGeom prst="rect">
+            <a:avLst/>
+          </a:prstGeom>
+          <a:noFill/>
+        </p:spPr>
+        <p:txBody>
+          <a:bodyPr wrap="square" lIns="0" rIns="0" tIns="0" bIns="0">
+            <a:spAutoFit/>
+          </a:bodyPr>
+          <a:lstStyle/>
+          <a:p>
+            <a:pPr>
+              <a:defRPr sz="1800" b="1" i="0">
                 <a:solidFill>
                   <a:srgbClr val="E0B85F"/>
                 </a:solidFill>
-                <a:latin typeface="Consolas"/>
-              </a:defRPr>
-            </a:pPr>
-            <a:r>
-              <a:t>   ✓        ✓         81.43</a:t>
-            </a:r>
-          </a:p>
-        </p:txBody>
-      </p:sp>
-      <p:sp>
-        <p:nvSpPr>
-          <p:cNvPr id="11" name="Rectangle 10"/>
+                <a:latin typeface="Cambria"/>
+              </a:defRPr>
+            </a:pPr>
+            <a:r>
+              <a:t>+1.6 ~ 4.2</a:t>
+            </a:r>
+          </a:p>
+        </p:txBody>
+      </p:sp>
+      <p:sp>
+        <p:nvSpPr>
+          <p:cNvPr id="13" name="Rectangle 12"/>
           <p:cNvSpPr/>
           <p:nvPr/>
         </p:nvSpPr>
         <p:spPr>
           <a:xfrm>
-            <a:off x="457200" y="5669280"/>
-            <a:ext cx="54864" cy="685800"/>
+            <a:off x="9692640" y="4709160"/>
+            <a:ext cx="2286000" cy="914400"/>
+          </a:xfrm>
+          <a:prstGeom prst="rect">
+            <a:avLst/>
+          </a:prstGeom>
+          <a:solidFill>
+            <a:srgbClr val="F8F7F2"/>
+          </a:solidFill>
+          <a:ln w="16510">
+            <a:solidFill>
+              <a:srgbClr val="0E5E5E"/>
+            </a:solidFill>
+          </a:ln>
+        </p:spPr>
+        <p:style>
+          <a:lnRef idx="1">
+            <a:schemeClr val="accent1"/>
+          </a:lnRef>
+          <a:fillRef idx="3">
+            <a:schemeClr val="accent1"/>
+          </a:fillRef>
+          <a:effectRef idx="2">
+            <a:schemeClr val="accent1"/>
+          </a:effectRef>
+          <a:fontRef idx="minor">
+            <a:schemeClr val="lt1"/>
+          </a:fontRef>
+        </p:style>
+        <p:txBody>
+          <a:bodyPr rtlCol="0" anchor="ctr"/>
+          <a:lstStyle/>
+          <a:p>
+            <a:pPr algn="ctr"/>
+          </a:p>
+        </p:txBody>
+      </p:sp>
+      <p:sp>
+        <p:nvSpPr>
+          <p:cNvPr id="14" name="TextBox 13"/>
+          <p:cNvSpPr txBox="1"/>
+          <p:nvPr/>
+        </p:nvSpPr>
+        <p:spPr>
+          <a:xfrm>
+            <a:off x="9829800" y="4800600"/>
+            <a:ext cx="2011680" cy="274320"/>
+          </a:xfrm>
+          <a:prstGeom prst="rect">
+            <a:avLst/>
+          </a:prstGeom>
+          <a:noFill/>
+        </p:spPr>
+        <p:txBody>
+          <a:bodyPr wrap="square" lIns="0" rIns="0" tIns="0" bIns="0">
+            <a:spAutoFit/>
+          </a:bodyPr>
+          <a:lstStyle/>
+          <a:p>
+            <a:pPr>
+              <a:defRPr sz="1000" b="0" i="0">
+                <a:solidFill>
+                  <a:srgbClr val="7A7A7A"/>
+                </a:solidFill>
+                <a:latin typeface="Calibri"/>
+              </a:defRPr>
+            </a:pPr>
+            <a:r>
+              <a:t>Both</a:t>
+            </a:r>
+          </a:p>
+        </p:txBody>
+      </p:sp>
+      <p:sp>
+        <p:nvSpPr>
+          <p:cNvPr id="15" name="TextBox 14"/>
+          <p:cNvSpPr txBox="1"/>
+          <p:nvPr/>
+        </p:nvSpPr>
+        <p:spPr>
+          <a:xfrm>
+            <a:off x="9829800" y="5074920"/>
+            <a:ext cx="2011680" cy="457200"/>
+          </a:xfrm>
+          <a:prstGeom prst="rect">
+            <a:avLst/>
+          </a:prstGeom>
+          <a:noFill/>
+        </p:spPr>
+        <p:txBody>
+          <a:bodyPr wrap="square" lIns="0" rIns="0" tIns="0" bIns="0">
+            <a:spAutoFit/>
+          </a:bodyPr>
+          <a:lstStyle/>
+          <a:p>
+            <a:pPr>
+              <a:defRPr sz="1800" b="1" i="0">
+                <a:solidFill>
+                  <a:srgbClr val="0E5E5E"/>
+                </a:solidFill>
+                <a:latin typeface="Cambria"/>
+              </a:defRPr>
+            </a:pPr>
+            <a:r>
+              <a:t>+2.1 ~ 4.8</a:t>
+            </a:r>
+          </a:p>
+        </p:txBody>
+      </p:sp>
+      <p:sp>
+        <p:nvSpPr>
+          <p:cNvPr id="16" name="Rectangle 15"/>
+          <p:cNvSpPr/>
+          <p:nvPr/>
+        </p:nvSpPr>
+        <p:spPr>
+          <a:xfrm>
+            <a:off x="457200" y="5989320"/>
+            <a:ext cx="54864" cy="502920"/>
           </a:xfrm>
           <a:prstGeom prst="rect">
             <a:avLst/>
@@ -8401,14 +8409,14 @@
       </p:sp>
       <p:sp>
         <p:nvSpPr>
-          <p:cNvPr id="12" name="Rectangle 11"/>
+          <p:cNvPr id="17" name="Rectangle 16"/>
           <p:cNvSpPr/>
           <p:nvPr/>
         </p:nvSpPr>
         <p:spPr>
           <a:xfrm>
-            <a:off x="512064" y="5669280"/>
-            <a:ext cx="11192256" cy="685800"/>
+            <a:off x="512064" y="5989320"/>
+            <a:ext cx="11192256" cy="502920"/>
           </a:xfrm>
           <a:prstGeom prst="rect">
             <a:avLst/>
@@ -8444,14 +8452,14 @@
       </p:sp>
       <p:sp>
         <p:nvSpPr>
-          <p:cNvPr id="13" name="TextBox 12"/>
-          <p:cNvSpPr txBox="1"/>
-          <p:nvPr/>
-        </p:nvSpPr>
-        <p:spPr>
-          <a:xfrm>
-            <a:off x="777240" y="5806440"/>
-            <a:ext cx="10789920" cy="411480"/>
+          <p:cNvPr id="18" name="TextBox 17"/>
+          <p:cNvSpPr txBox="1"/>
+          <p:nvPr/>
+        </p:nvSpPr>
+        <p:spPr>
+          <a:xfrm>
+            <a:off x="777240" y="6126480"/>
+            <a:ext cx="10789920" cy="228600"/>
           </a:xfrm>
           <a:prstGeom prst="rect">
             <a:avLst/>
@@ -8465,7 +8473,7 @@
           <a:lstStyle/>
           <a:p>
             <a:pPr>
-              <a:defRPr sz="1200" b="1">
+              <a:defRPr sz="1100" b="1">
                 <a:solidFill>
                   <a:srgbClr val="FFFFFF"/>
                 </a:solidFill>
@@ -8473,14 +8481,14 @@
               </a:defRPr>
             </a:pPr>
             <a:r>
-              <a:t>MP-Init alone +0.5 ~ 0.8.  TrSG alone +1.6 ~ 4.2.  Together +2.1 ~ 4.8.</a:t>
-            </a:r>
-          </a:p>
-        </p:txBody>
-      </p:sp>
-      <p:sp>
-        <p:nvSpPr>
-          <p:cNvPr id="14" name="TextBox 13"/>
+              <a:t>The two fixes are orthogonal — diagnoses aim at different components, not the same problem twice.</a:t>
+            </a:r>
+          </a:p>
+        </p:txBody>
+      </p:sp>
+      <p:sp>
+        <p:nvSpPr>
+          <p:cNvPr id="19" name="TextBox 18"/>
           <p:cNvSpPr txBox="1"/>
           <p:nvPr/>
         </p:nvSpPr>
@@ -8516,7 +8524,7 @@
       </p:sp>
       <p:sp>
         <p:nvSpPr>
-          <p:cNvPr id="15" name="TextBox 14"/>
+          <p:cNvPr id="20" name="TextBox 19"/>
           <p:cNvSpPr txBox="1"/>
           <p:nvPr/>
         </p:nvSpPr>
@@ -11740,7 +11748,7 @@
               </a:defRPr>
             </a:pPr>
             <a:r>
-              <a:t>How information flows, and how we get gradients through it</a:t>
+              <a:t>Three discrete-time updates, plus one trick to get gradients through them</a:t>
             </a:r>
           </a:p>
         </p:txBody>
@@ -11790,7 +11798,7 @@
         <p:spPr>
           <a:xfrm>
             <a:off x="457200" y="2743200"/>
-            <a:ext cx="5669280" cy="548640"/>
+            <a:ext cx="5669280" cy="502920"/>
           </a:xfrm>
           <a:prstGeom prst="rect">
             <a:avLst/>
@@ -11871,7 +11879,7 @@
         <p:spPr>
           <a:xfrm>
             <a:off x="1828800" y="2788920"/>
-            <a:ext cx="4206240" cy="457200"/>
+            <a:ext cx="4206240" cy="411480"/>
           </a:xfrm>
           <a:prstGeom prst="rect">
             <a:avLst/>
@@ -11906,8 +11914,8 @@
         </p:nvSpPr>
         <p:spPr>
           <a:xfrm>
-            <a:off x="457200" y="3429000"/>
-            <a:ext cx="5669280" cy="548640"/>
+            <a:off x="457200" y="3337560"/>
+            <a:ext cx="5669280" cy="502920"/>
           </a:xfrm>
           <a:prstGeom prst="rect">
             <a:avLst/>
@@ -11951,7 +11959,7 @@
         </p:nvSpPr>
         <p:spPr>
           <a:xfrm>
-            <a:off x="594360" y="3474720"/>
+            <a:off x="594360" y="3383279"/>
             <a:ext cx="1280160" cy="274320"/>
           </a:xfrm>
           <a:prstGeom prst="rect">
@@ -11987,8 +11995,8 @@
         </p:nvSpPr>
         <p:spPr>
           <a:xfrm>
-            <a:off x="1828800" y="3474720"/>
-            <a:ext cx="4206240" cy="457200"/>
+            <a:off x="1828800" y="3383279"/>
+            <a:ext cx="4206240" cy="411480"/>
           </a:xfrm>
           <a:prstGeom prst="rect">
             <a:avLst/>
@@ -12010,7 +12018,7 @@
               </a:defRPr>
             </a:pPr>
             <a:r>
-              <a:t>S[t] = H( M[t] − V_thr )       (1 if exceeds, else 0)</a:t>
+              <a:t>S[t] = H( M[t] − V_thr ) ∈ {0, 1}</a:t>
             </a:r>
           </a:p>
         </p:txBody>
@@ -12023,8 +12031,8 @@
         </p:nvSpPr>
         <p:spPr>
           <a:xfrm>
-            <a:off x="457200" y="4114800"/>
-            <a:ext cx="5669280" cy="548640"/>
+            <a:off x="457200" y="3931920"/>
+            <a:ext cx="5669280" cy="502920"/>
           </a:xfrm>
           <a:prstGeom prst="rect">
             <a:avLst/>
@@ -12068,7 +12076,7 @@
         </p:nvSpPr>
         <p:spPr>
           <a:xfrm>
-            <a:off x="594360" y="4160520"/>
+            <a:off x="594360" y="3977639"/>
             <a:ext cx="1280160" cy="274320"/>
           </a:xfrm>
           <a:prstGeom prst="rect">
@@ -12104,8 +12112,8 @@
         </p:nvSpPr>
         <p:spPr>
           <a:xfrm>
-            <a:off x="1828800" y="4160520"/>
-            <a:ext cx="4206240" cy="457200"/>
+            <a:off x="1828800" y="3977639"/>
+            <a:ext cx="4206240" cy="411480"/>
           </a:xfrm>
           <a:prstGeom prst="rect">
             <a:avLst/>
@@ -12140,8 +12148,8 @@
         </p:nvSpPr>
         <p:spPr>
           <a:xfrm>
-            <a:off x="457200" y="4754880"/>
-            <a:ext cx="5669280" cy="457200"/>
+            <a:off x="457200" y="4526280"/>
+            <a:ext cx="5669280" cy="365760"/>
           </a:xfrm>
           <a:prstGeom prst="rect">
             <a:avLst/>
@@ -12163,47 +12171,35 @@
               </a:defRPr>
             </a:pPr>
             <a:r>
-              <a:t>Two key learnable parameters:  τ  (leakage)  and  V_thr  (threshold).</a:t>
-            </a:r>
-          </a:p>
-        </p:txBody>
-      </p:sp>
-      <p:sp>
-        <p:nvSpPr>
-          <p:cNvPr id="16" name="TextBox 15"/>
-          <p:cNvSpPr txBox="1"/>
-          <p:nvPr/>
-        </p:nvSpPr>
-        <p:spPr>
-          <a:xfrm>
-            <a:off x="6583680" y="2286000"/>
-            <a:ext cx="5120640" cy="365760"/>
-          </a:xfrm>
-          <a:prstGeom prst="rect">
-            <a:avLst/>
-          </a:prstGeom>
-          <a:noFill/>
-        </p:spPr>
-        <p:txBody>
-          <a:bodyPr wrap="square" lIns="0" rIns="0" tIns="0" bIns="0">
-            <a:spAutoFit/>
-          </a:bodyPr>
-          <a:lstStyle/>
-          <a:p>
-            <a:pPr>
-              <a:defRPr sz="1400" b="1" i="0">
-                <a:solidFill>
-                  <a:srgbClr val="0F2540"/>
-                </a:solidFill>
-                <a:latin typeface="Calibri"/>
-              </a:defRPr>
-            </a:pPr>
-            <a:r>
-              <a:t>Heaviside is non-differentiable</a:t>
-            </a:r>
-          </a:p>
-        </p:txBody>
-      </p:sp>
+              <a:t>Two learnable parameters:  τ (leakage)  ·  V_thr (threshold).</a:t>
+            </a:r>
+          </a:p>
+        </p:txBody>
+      </p:sp>
+      <p:pic>
+        <p:nvPicPr>
+          <p:cNvPr id="16" name="Picture 15" descr="lif_dynamics.png"/>
+          <p:cNvPicPr>
+            <a:picLocks noChangeAspect="1"/>
+          </p:cNvPicPr>
+          <p:nvPr/>
+        </p:nvPicPr>
+        <p:blipFill>
+          <a:blip r:embed="rId2"/>
+          <a:stretch>
+            <a:fillRect/>
+          </a:stretch>
+        </p:blipFill>
+        <p:spPr>
+          <a:xfrm>
+            <a:off x="6400800" y="2286000"/>
+            <a:ext cx="5394960" cy="2444591"/>
+          </a:xfrm>
+          <a:prstGeom prst="rect">
+            <a:avLst/>
+          </a:prstGeom>
+        </p:spPr>
+      </p:pic>
       <p:sp>
         <p:nvSpPr>
           <p:cNvPr id="17" name="TextBox 16"/>
@@ -12212,110 +12208,102 @@
         </p:nvSpPr>
         <p:spPr>
           <a:xfrm>
-            <a:off x="6583680" y="2697480"/>
-            <a:ext cx="5120640" cy="457200"/>
-          </a:xfrm>
-          <a:prstGeom prst="rect">
-            <a:avLst/>
-          </a:prstGeom>
-          <a:noFill/>
-        </p:spPr>
-        <p:txBody>
-          <a:bodyPr wrap="square" lIns="0" rIns="0" tIns="0" bIns="0">
-            <a:spAutoFit/>
-          </a:bodyPr>
-          <a:lstStyle/>
-          <a:p>
-            <a:pPr>
-              <a:defRPr sz="1200" b="0" i="0">
+            <a:off x="6400800" y="4617720"/>
+            <a:ext cx="5394960" cy="274320"/>
+          </a:xfrm>
+          <a:prstGeom prst="rect">
+            <a:avLst/>
+          </a:prstGeom>
+          <a:noFill/>
+        </p:spPr>
+        <p:txBody>
+          <a:bodyPr wrap="square" lIns="0" rIns="0" tIns="0" bIns="0">
+            <a:spAutoFit/>
+          </a:bodyPr>
+          <a:lstStyle/>
+          <a:p>
+            <a:pPr algn="ctr">
+              <a:defRPr sz="1000" b="0" i="1">
+                <a:solidFill>
+                  <a:srgbClr val="7A7A7A"/>
+                </a:solidFill>
+                <a:latin typeface="Calibri"/>
+              </a:defRPr>
+            </a:pPr>
+            <a:r>
+              <a:t>M[t] integrates inputs, fires at V_thr, resets — repeat.</a:t>
+            </a:r>
+          </a:p>
+        </p:txBody>
+      </p:sp>
+      <p:sp>
+        <p:nvSpPr>
+          <p:cNvPr id="18" name="TextBox 17"/>
+          <p:cNvSpPr txBox="1"/>
+          <p:nvPr/>
+        </p:nvSpPr>
+        <p:spPr>
+          <a:xfrm>
+            <a:off x="6400800" y="4983480"/>
+            <a:ext cx="5394960" cy="365760"/>
+          </a:xfrm>
+          <a:prstGeom prst="rect">
+            <a:avLst/>
+          </a:prstGeom>
+          <a:noFill/>
+        </p:spPr>
+        <p:txBody>
+          <a:bodyPr wrap="square" lIns="0" rIns="0" tIns="0" bIns="0">
+            <a:spAutoFit/>
+          </a:bodyPr>
+          <a:lstStyle/>
+          <a:p>
+            <a:pPr>
+              <a:defRPr sz="1200" b="1" i="0">
+                <a:solidFill>
+                  <a:srgbClr val="E56945"/>
+                </a:solidFill>
+                <a:latin typeface="Calibri"/>
+              </a:defRPr>
+            </a:pPr>
+            <a:r>
+              <a:t>Heaviside H is not differentiable</a:t>
+            </a:r>
+          </a:p>
+        </p:txBody>
+      </p:sp>
+      <p:sp>
+        <p:nvSpPr>
+          <p:cNvPr id="19" name="TextBox 18"/>
+          <p:cNvSpPr txBox="1"/>
+          <p:nvPr/>
+        </p:nvSpPr>
+        <p:spPr>
+          <a:xfrm>
+            <a:off x="6400800" y="5349240"/>
+            <a:ext cx="5394960" cy="411480"/>
+          </a:xfrm>
+          <a:prstGeom prst="rect">
+            <a:avLst/>
+          </a:prstGeom>
+          <a:noFill/>
+        </p:spPr>
+        <p:txBody>
+          <a:bodyPr wrap="square" lIns="0" rIns="0" tIns="0" bIns="0">
+            <a:spAutoFit/>
+          </a:bodyPr>
+          <a:lstStyle/>
+          <a:p>
+            <a:pPr>
+              <a:defRPr sz="1100" b="0" i="0">
                 <a:solidFill>
                   <a:srgbClr val="1A1A1A"/>
                 </a:solidFill>
-                <a:latin typeface="Cambria Math"/>
-              </a:defRPr>
-            </a:pPr>
-            <a:r>
-              <a:t>S = H(M − V_thr)   ⇒   H'(x) = δ(x)   ⇒   no gradient flow</a:t>
-            </a:r>
-          </a:p>
-        </p:txBody>
-      </p:sp>
-      <p:sp>
-        <p:nvSpPr>
-          <p:cNvPr id="18" name="TextBox 17"/>
-          <p:cNvSpPr txBox="1"/>
-          <p:nvPr/>
-        </p:nvSpPr>
-        <p:spPr>
-          <a:xfrm>
-            <a:off x="6583680" y="3383280"/>
-            <a:ext cx="5120640" cy="365760"/>
-          </a:xfrm>
-          <a:prstGeom prst="rect">
-            <a:avLst/>
-          </a:prstGeom>
-          <a:noFill/>
-        </p:spPr>
-        <p:txBody>
-          <a:bodyPr wrap="square" lIns="0" rIns="0" tIns="0" bIns="0">
-            <a:spAutoFit/>
-          </a:bodyPr>
-          <a:lstStyle/>
-          <a:p>
-            <a:pPr>
-              <a:defRPr sz="1400" b="1" i="0">
-                <a:solidFill>
-                  <a:srgbClr val="0F2540"/>
-                </a:solidFill>
-                <a:latin typeface="Calibri"/>
-              </a:defRPr>
-            </a:pPr>
-            <a:r>
-              <a:t>Surrogate gradient (SG)</a:t>
-            </a:r>
-          </a:p>
-        </p:txBody>
-      </p:sp>
-      <p:sp>
-        <p:nvSpPr>
-          <p:cNvPr id="19" name="TextBox 18"/>
-          <p:cNvSpPr txBox="1"/>
-          <p:nvPr/>
-        </p:nvSpPr>
-        <p:spPr>
-          <a:xfrm>
-            <a:off x="6583680" y="3794760"/>
-            <a:ext cx="5120640" cy="1371600"/>
-          </a:xfrm>
-          <a:prstGeom prst="rect">
-            <a:avLst/>
-          </a:prstGeom>
-          <a:noFill/>
-        </p:spPr>
-        <p:txBody>
-          <a:bodyPr wrap="square" lIns="0" rIns="0" tIns="0" bIns="0">
-            <a:spAutoFit/>
-          </a:bodyPr>
-          <a:lstStyle/>
-          <a:p>
-            <a:pPr>
-              <a:defRPr sz="1200" b="0" i="0">
-                <a:solidFill>
-                  <a:srgbClr val="1A1A1A"/>
-                </a:solidFill>
-                <a:latin typeface="Calibri"/>
-              </a:defRPr>
-            </a:pPr>
-            <a:r>
-              <a:t>Replace H with a smooth surrogate f near the threshold.</a:t>
-            </a:r>
-            <a:br/>
-            <a:r>
-              <a:t>Use f'(x) ≈ H'(x) only in backward pass — forward pass</a:t>
-            </a:r>
-            <a:br/>
-            <a:r>
-              <a:t>still emits binary spikes.</a:t>
+                <a:latin typeface="Calibri"/>
+              </a:defRPr>
+            </a:pPr>
+            <a:r>
+              <a:t>Surrogate gradient: backward pass uses smooth f'(x) ≈ H'(x).</a:t>
             </a:r>
           </a:p>
         </p:txBody>
@@ -12328,8 +12316,8 @@
         </p:nvSpPr>
         <p:spPr>
           <a:xfrm>
-            <a:off x="457200" y="5532120"/>
-            <a:ext cx="54864" cy="777240"/>
+            <a:off x="457200" y="5989320"/>
+            <a:ext cx="54864" cy="411480"/>
           </a:xfrm>
           <a:prstGeom prst="rect">
             <a:avLst/>
@@ -12371,8 +12359,8 @@
         </p:nvSpPr>
         <p:spPr>
           <a:xfrm>
-            <a:off x="512064" y="5532120"/>
-            <a:ext cx="11192256" cy="777240"/>
+            <a:off x="512064" y="5989320"/>
+            <a:ext cx="11192256" cy="411480"/>
           </a:xfrm>
           <a:prstGeom prst="rect">
             <a:avLst/>
@@ -12414,8 +12402,8 @@
         </p:nvSpPr>
         <p:spPr>
           <a:xfrm>
-            <a:off x="777240" y="5669280"/>
-            <a:ext cx="10789920" cy="502920"/>
+            <a:off x="777240" y="6126480"/>
+            <a:ext cx="10789920" cy="137160"/>
           </a:xfrm>
           <a:prstGeom prst="rect">
             <a:avLst/>
@@ -12429,7 +12417,7 @@
           <a:lstStyle/>
           <a:p>
             <a:pPr>
-              <a:defRPr sz="1300" b="1">
+              <a:defRPr sz="1200" b="1">
                 <a:solidFill>
                   <a:srgbClr val="E0B85F"/>
                 </a:solidFill>
@@ -12437,23 +12425,7 @@
               </a:defRPr>
             </a:pPr>
             <a:r>
-              <a:t>Everything in this thesis turns on M[t] and V_thr.</a:t>
-            </a:r>
-          </a:p>
-          <a:p>
-            <a:pPr>
-              <a:spcBef>
-                <a:spcPts val="600"/>
-              </a:spcBef>
-              <a:defRPr sz="1100">
-                <a:solidFill>
-                  <a:srgbClr val="FFFFFF"/>
-                </a:solidFill>
-                <a:latin typeface="Calibri"/>
-              </a:defRPr>
-            </a:pPr>
-            <a:r>
-              <a:t>The membrane potential drives TCS;  the threshold drives the gradient pathology.</a:t>
+              <a:t>Everything in this thesis turns on M[t] and V_thr  ·  TCS at M[t]  ·  pathology at V_thr</a:t>
             </a:r>
           </a:p>
         </p:txBody>
@@ -13142,84 +13114,44 @@
         </p:nvSpPr>
         <p:spPr>
           <a:xfrm>
+            <a:off x="457200" y="1600200"/>
+            <a:ext cx="11247120" cy="365760"/>
+          </a:xfrm>
+          <a:prstGeom prst="rect">
+            <a:avLst/>
+          </a:prstGeom>
+          <a:noFill/>
+        </p:spPr>
+        <p:txBody>
+          <a:bodyPr wrap="square" lIns="0" rIns="0" tIns="0" bIns="0">
+            <a:spAutoFit/>
+          </a:bodyPr>
+          <a:lstStyle/>
+          <a:p>
+            <a:pPr>
+              <a:defRPr sz="1400" b="0" i="1">
+                <a:solidFill>
+                  <a:srgbClr val="7A7A7A"/>
+                </a:solidFill>
+                <a:latin typeface="Calibri"/>
+              </a:defRPr>
+            </a:pPr>
+            <a:r>
+              <a:t>PLIF, LTMD, DIET-SNN all let V_thr learn — but the surrogate gradient is scale-sensitive</a:t>
+            </a:r>
+          </a:p>
+        </p:txBody>
+      </p:sp>
+      <p:sp>
+        <p:nvSpPr>
+          <p:cNvPr id="5" name="Rectangle 4"/>
+          <p:cNvSpPr/>
+          <p:nvPr/>
+        </p:nvSpPr>
+        <p:spPr>
+          <a:xfrm>
             <a:off x="457200" y="2286000"/>
-            <a:ext cx="11247120" cy="457200"/>
-          </a:xfrm>
-          <a:prstGeom prst="rect">
-            <a:avLst/>
-          </a:prstGeom>
-          <a:noFill/>
-        </p:spPr>
-        <p:txBody>
-          <a:bodyPr wrap="square" lIns="0" rIns="0" tIns="0" bIns="0">
-            <a:spAutoFit/>
-          </a:bodyPr>
-          <a:lstStyle/>
-          <a:p>
-            <a:pPr>
-              <a:defRPr sz="1500" b="1" i="0">
-                <a:solidFill>
-                  <a:srgbClr val="0F2540"/>
-                </a:solidFill>
-                <a:latin typeface="Calibri"/>
-              </a:defRPr>
-            </a:pPr>
-            <a:r>
-              <a:t>V_thr controls when a neuron fires — we want it to learn.</a:t>
-            </a:r>
-          </a:p>
-        </p:txBody>
-      </p:sp>
-      <p:sp>
-        <p:nvSpPr>
-          <p:cNvPr id="5" name="TextBox 4"/>
-          <p:cNvSpPr txBox="1"/>
-          <p:nvPr/>
-        </p:nvSpPr>
-        <p:spPr>
-          <a:xfrm>
-            <a:off x="457200" y="2788920"/>
-            <a:ext cx="11247120" cy="548640"/>
-          </a:xfrm>
-          <a:prstGeom prst="rect">
-            <a:avLst/>
-          </a:prstGeom>
-          <a:noFill/>
-        </p:spPr>
-        <p:txBody>
-          <a:bodyPr wrap="square" lIns="0" rIns="0" tIns="0" bIns="0">
-            <a:spAutoFit/>
-          </a:bodyPr>
-          <a:lstStyle/>
-          <a:p>
-            <a:pPr>
-              <a:defRPr sz="1200" b="0" i="0">
-                <a:solidFill>
-                  <a:srgbClr val="1A1A1A"/>
-                </a:solidFill>
-                <a:latin typeface="Calibri"/>
-              </a:defRPr>
-            </a:pPr>
-            <a:r>
-              <a:t>Modern methods (PLIF, LTMD, DIET-SNN) all make V_thr trainable. But the surrogate gradient flowing</a:t>
-            </a:r>
-            <a:br/>
-            <a:r>
-              <a:t>through V_thr is highly sensitive to its scale.</a:t>
-            </a:r>
-          </a:p>
-        </p:txBody>
-      </p:sp>
-      <p:sp>
-        <p:nvSpPr>
-          <p:cNvPr id="6" name="Rectangle 5"/>
-          <p:cNvSpPr/>
-          <p:nvPr/>
-        </p:nvSpPr>
-        <p:spPr>
-          <a:xfrm>
-            <a:off x="457200" y="3749039"/>
-            <a:ext cx="5349240" cy="1828800"/>
+            <a:ext cx="5349240" cy="2377440"/>
           </a:xfrm>
           <a:prstGeom prst="rect">
             <a:avLst/>
@@ -13257,64 +13189,64 @@
       </p:sp>
       <p:sp>
         <p:nvSpPr>
+          <p:cNvPr id="6" name="TextBox 5"/>
+          <p:cNvSpPr txBox="1"/>
+          <p:nvPr/>
+        </p:nvSpPr>
+        <p:spPr>
+          <a:xfrm>
+            <a:off x="731520" y="2468880"/>
+            <a:ext cx="4892040" cy="365760"/>
+          </a:xfrm>
+          <a:prstGeom prst="rect">
+            <a:avLst/>
+          </a:prstGeom>
+          <a:noFill/>
+        </p:spPr>
+        <p:txBody>
+          <a:bodyPr wrap="square" lIns="0" rIns="0" tIns="0" bIns="0">
+            <a:spAutoFit/>
+          </a:bodyPr>
+          <a:lstStyle/>
+          <a:p>
+            <a:pPr>
+              <a:defRPr sz="1400" b="1" i="0">
+                <a:solidFill>
+                  <a:srgbClr val="E56945"/>
+                </a:solidFill>
+                <a:latin typeface="Calibri"/>
+              </a:defRPr>
+            </a:pPr>
+            <a:r>
+              <a:t>V_thr ≪ 1   (small threshold)</a:t>
+            </a:r>
+          </a:p>
+        </p:txBody>
+      </p:sp>
+      <p:sp>
+        <p:nvSpPr>
           <p:cNvPr id="7" name="TextBox 6"/>
           <p:cNvSpPr txBox="1"/>
           <p:nvPr/>
         </p:nvSpPr>
         <p:spPr>
           <a:xfrm>
-            <a:off x="731520" y="3931920"/>
-            <a:ext cx="1188720" cy="274320"/>
-          </a:xfrm>
-          <a:prstGeom prst="rect">
-            <a:avLst/>
-          </a:prstGeom>
-          <a:noFill/>
-        </p:spPr>
-        <p:txBody>
-          <a:bodyPr wrap="square" lIns="0" rIns="0" tIns="0" bIns="0">
-            <a:spAutoFit/>
-          </a:bodyPr>
-          <a:lstStyle/>
-          <a:p>
-            <a:pPr>
-              <a:defRPr sz="1200" b="1" i="0">
-                <a:solidFill>
-                  <a:srgbClr val="E56945"/>
-                </a:solidFill>
-                <a:latin typeface="Calibri"/>
-              </a:defRPr>
-            </a:pPr>
-            <a:r>
-              <a:t>V_thr ≪ 1</a:t>
-            </a:r>
-          </a:p>
-        </p:txBody>
-      </p:sp>
-      <p:sp>
-        <p:nvSpPr>
-          <p:cNvPr id="8" name="TextBox 7"/>
-          <p:cNvSpPr txBox="1"/>
-          <p:nvPr/>
-        </p:nvSpPr>
-        <p:spPr>
-          <a:xfrm>
-            <a:off x="731520" y="4297679"/>
-            <a:ext cx="4892040" cy="1280160"/>
-          </a:xfrm>
-          <a:prstGeom prst="rect">
-            <a:avLst/>
-          </a:prstGeom>
-          <a:noFill/>
-        </p:spPr>
-        <p:txBody>
-          <a:bodyPr wrap="square" lIns="0" rIns="0" tIns="0" bIns="0">
-            <a:spAutoFit/>
-          </a:bodyPr>
-          <a:lstStyle/>
-          <a:p>
-            <a:pPr>
-              <a:defRPr sz="1200" b="0" i="0">
+            <a:off x="731520" y="2926080"/>
+            <a:ext cx="4892040" cy="1645920"/>
+          </a:xfrm>
+          <a:prstGeom prst="rect">
+            <a:avLst/>
+          </a:prstGeom>
+          <a:noFill/>
+        </p:spPr>
+        <p:txBody>
+          <a:bodyPr wrap="square">
+            <a:spAutoFit/>
+          </a:bodyPr>
+          <a:lstStyle/>
+          <a:p>
+            <a:pPr>
+              <a:defRPr sz="1100">
                 <a:solidFill>
                   <a:srgbClr val="1A1A1A"/>
                 </a:solidFill>
@@ -13322,25 +13254,53 @@
               </a:defRPr>
             </a:pPr>
             <a:r>
-              <a:t>AS-SG floods the layer (window covers most of the distribution).</a:t>
-            </a:r>
-            <a:br/>
-            <a:r>
-              <a:t>RS-SG explodes through the 1/V_thr factor in the chain rule.</a:t>
-            </a:r>
-          </a:p>
-        </p:txBody>
-      </p:sp>
-      <p:sp>
-        <p:nvSpPr>
-          <p:cNvPr id="9" name="Rectangle 8"/>
+              <a:t>▸  AS-SG floods — fixed window covers almost the entire distribution</a:t>
+            </a:r>
+          </a:p>
+          <a:p>
+            <a:pPr>
+              <a:spcBef>
+                <a:spcPts val="600"/>
+              </a:spcBef>
+              <a:defRPr sz="1100">
+                <a:solidFill>
+                  <a:srgbClr val="1A1A1A"/>
+                </a:solidFill>
+                <a:latin typeface="Calibri"/>
+              </a:defRPr>
+            </a:pPr>
+            <a:r>
+              <a:t>▸  RS-SG explodes — the 1/V_thr factor blows the magnitude up</a:t>
+            </a:r>
+          </a:p>
+          <a:p>
+            <a:pPr>
+              <a:spcBef>
+                <a:spcPts val="600"/>
+              </a:spcBef>
+              <a:defRPr sz="1100">
+                <a:solidFill>
+                  <a:srgbClr val="1A1A1A"/>
+                </a:solidFill>
+                <a:latin typeface="Calibri"/>
+              </a:defRPr>
+            </a:pPr>
+            <a:r>
+              <a:t>▸  Real example: at V_thr = 0.1, RS-SG diverges to NaN within 100 epochs</a:t>
+            </a:r>
+          </a:p>
+        </p:txBody>
+      </p:sp>
+      <p:sp>
+        <p:nvSpPr>
+          <p:cNvPr id="8" name="Rectangle 7"/>
           <p:cNvSpPr/>
           <p:nvPr/>
         </p:nvSpPr>
         <p:spPr>
           <a:xfrm>
-            <a:off x="6355080" y="3749039"/>
-            <a:ext cx="5349240" cy="1828800"/>
+            <a:off x="6355080" y="2286000"/>
+            <a:ext cx="5349240" cy="2377440"/>
           </a:xfrm>
           <a:prstGeom prst="rect">
             <a:avLst/>
@@ -13378,64 +13338,64 @@
       </p:sp>
       <p:sp>
         <p:nvSpPr>
+          <p:cNvPr id="9" name="TextBox 8"/>
+          <p:cNvSpPr txBox="1"/>
+          <p:nvPr/>
+        </p:nvSpPr>
+        <p:spPr>
+          <a:xfrm>
+            <a:off x="6629400" y="2468880"/>
+            <a:ext cx="4892040" cy="365760"/>
+          </a:xfrm>
+          <a:prstGeom prst="rect">
+            <a:avLst/>
+          </a:prstGeom>
+          <a:noFill/>
+        </p:spPr>
+        <p:txBody>
+          <a:bodyPr wrap="square" lIns="0" rIns="0" tIns="0" bIns="0">
+            <a:spAutoFit/>
+          </a:bodyPr>
+          <a:lstStyle/>
+          <a:p>
+            <a:pPr>
+              <a:defRPr sz="1400" b="1" i="0">
+                <a:solidFill>
+                  <a:srgbClr val="E56945"/>
+                </a:solidFill>
+                <a:latin typeface="Calibri"/>
+              </a:defRPr>
+            </a:pPr>
+            <a:r>
+              <a:t>V_thr ≫ 1   (large threshold)</a:t>
+            </a:r>
+          </a:p>
+        </p:txBody>
+      </p:sp>
+      <p:sp>
+        <p:nvSpPr>
           <p:cNvPr id="10" name="TextBox 9"/>
           <p:cNvSpPr txBox="1"/>
           <p:nvPr/>
         </p:nvSpPr>
         <p:spPr>
           <a:xfrm>
-            <a:off x="6629400" y="3931920"/>
-            <a:ext cx="1188720" cy="274320"/>
-          </a:xfrm>
-          <a:prstGeom prst="rect">
-            <a:avLst/>
-          </a:prstGeom>
-          <a:noFill/>
-        </p:spPr>
-        <p:txBody>
-          <a:bodyPr wrap="square" lIns="0" rIns="0" tIns="0" bIns="0">
-            <a:spAutoFit/>
-          </a:bodyPr>
-          <a:lstStyle/>
-          <a:p>
-            <a:pPr>
-              <a:defRPr sz="1200" b="1" i="0">
-                <a:solidFill>
-                  <a:srgbClr val="E56945"/>
-                </a:solidFill>
-                <a:latin typeface="Calibri"/>
-              </a:defRPr>
-            </a:pPr>
-            <a:r>
-              <a:t>V_thr ≫ 1</a:t>
-            </a:r>
-          </a:p>
-        </p:txBody>
-      </p:sp>
-      <p:sp>
-        <p:nvSpPr>
-          <p:cNvPr id="11" name="TextBox 10"/>
-          <p:cNvSpPr txBox="1"/>
-          <p:nvPr/>
-        </p:nvSpPr>
-        <p:spPr>
-          <a:xfrm>
-            <a:off x="6629400" y="4297679"/>
-            <a:ext cx="4892040" cy="1280160"/>
-          </a:xfrm>
-          <a:prstGeom prst="rect">
-            <a:avLst/>
-          </a:prstGeom>
-          <a:noFill/>
-        </p:spPr>
-        <p:txBody>
-          <a:bodyPr wrap="square" lIns="0" rIns="0" tIns="0" bIns="0">
-            <a:spAutoFit/>
-          </a:bodyPr>
-          <a:lstStyle/>
-          <a:p>
-            <a:pPr>
-              <a:defRPr sz="1200" b="0" i="0">
+            <a:off x="6629400" y="2926080"/>
+            <a:ext cx="4892040" cy="1645920"/>
+          </a:xfrm>
+          <a:prstGeom prst="rect">
+            <a:avLst/>
+          </a:prstGeom>
+          <a:noFill/>
+        </p:spPr>
+        <p:txBody>
+          <a:bodyPr wrap="square">
+            <a:spAutoFit/>
+          </a:bodyPr>
+          <a:lstStyle/>
+          <a:p>
+            <a:pPr>
+              <a:defRPr sz="1100">
                 <a:solidFill>
                   <a:srgbClr val="1A1A1A"/>
                 </a:solidFill>
@@ -13443,54 +13403,188 @@
               </a:defRPr>
             </a:pPr>
             <a:r>
-              <a:t>AS-SG starves (window misses most of the distribution).</a:t>
+              <a:t>▸  AS-SG starves — fixed window covers a tiny tail of the distribution</a:t>
+            </a:r>
+          </a:p>
+          <a:p>
+            <a:pPr>
+              <a:spcBef>
+                <a:spcPts val="600"/>
+              </a:spcBef>
+              <a:defRPr sz="1100">
+                <a:solidFill>
+                  <a:srgbClr val="1A1A1A"/>
+                </a:solidFill>
+                <a:latin typeface="Calibri"/>
+              </a:defRPr>
+            </a:pPr>
+            <a:r>
+              <a:t>▸  RS-SG vanishes — the same 1/V_thr factor shrinks the magnitude</a:t>
+            </a:r>
+          </a:p>
+          <a:p>
+            <a:pPr>
+              <a:spcBef>
+                <a:spcPts val="600"/>
+              </a:spcBef>
+              <a:defRPr sz="1100">
+                <a:solidFill>
+                  <a:srgbClr val="1A1A1A"/>
+                </a:solidFill>
+                <a:latin typeface="Calibri"/>
+              </a:defRPr>
+            </a:pPr>
+            <a:r>
+              <a:t>▸  Real example: at V_thr = 2.0, AS-SG hits 0% active neurons by epoch 100</a:t>
+            </a:r>
+          </a:p>
+        </p:txBody>
+      </p:sp>
+      <p:sp>
+        <p:nvSpPr>
+          <p:cNvPr id="11" name="Rectangle 10"/>
+          <p:cNvSpPr/>
+          <p:nvPr/>
+        </p:nvSpPr>
+        <p:spPr>
+          <a:xfrm>
+            <a:off x="457200" y="4937760"/>
+            <a:ext cx="54864" cy="1280160"/>
+          </a:xfrm>
+          <a:prstGeom prst="rect">
+            <a:avLst/>
+          </a:prstGeom>
+          <a:solidFill>
+            <a:srgbClr val="E0B85F"/>
+          </a:solidFill>
+          <a:ln>
+            <a:noFill/>
+          </a:ln>
+        </p:spPr>
+        <p:style>
+          <a:lnRef idx="1">
+            <a:schemeClr val="accent1"/>
+          </a:lnRef>
+          <a:fillRef idx="3">
+            <a:schemeClr val="accent1"/>
+          </a:fillRef>
+          <a:effectRef idx="2">
+            <a:schemeClr val="accent1"/>
+          </a:effectRef>
+          <a:fontRef idx="minor">
+            <a:schemeClr val="lt1"/>
+          </a:fontRef>
+        </p:style>
+        <p:txBody>
+          <a:bodyPr rtlCol="0" anchor="ctr"/>
+          <a:lstStyle/>
+          <a:p>
+            <a:pPr algn="ctr"/>
+          </a:p>
+        </p:txBody>
+      </p:sp>
+      <p:sp>
+        <p:nvSpPr>
+          <p:cNvPr id="12" name="Rectangle 11"/>
+          <p:cNvSpPr/>
+          <p:nvPr/>
+        </p:nvSpPr>
+        <p:spPr>
+          <a:xfrm>
+            <a:off x="512064" y="4937760"/>
+            <a:ext cx="11192256" cy="1280160"/>
+          </a:xfrm>
+          <a:prstGeom prst="rect">
+            <a:avLst/>
+          </a:prstGeom>
+          <a:solidFill>
+            <a:srgbClr val="0F2540"/>
+          </a:solidFill>
+          <a:ln>
+            <a:noFill/>
+          </a:ln>
+        </p:spPr>
+        <p:style>
+          <a:lnRef idx="1">
+            <a:schemeClr val="accent1"/>
+          </a:lnRef>
+          <a:fillRef idx="3">
+            <a:schemeClr val="accent1"/>
+          </a:fillRef>
+          <a:effectRef idx="2">
+            <a:schemeClr val="accent1"/>
+          </a:effectRef>
+          <a:fontRef idx="minor">
+            <a:schemeClr val="lt1"/>
+          </a:fontRef>
+        </p:style>
+        <p:txBody>
+          <a:bodyPr rtlCol="0" anchor="ctr"/>
+          <a:lstStyle/>
+          <a:p>
+            <a:pPr algn="ctr"/>
+          </a:p>
+        </p:txBody>
+      </p:sp>
+      <p:sp>
+        <p:nvSpPr>
+          <p:cNvPr id="13" name="TextBox 12"/>
+          <p:cNvSpPr txBox="1"/>
+          <p:nvPr/>
+        </p:nvSpPr>
+        <p:spPr>
+          <a:xfrm>
+            <a:off x="777240" y="5074920"/>
+            <a:ext cx="10789920" cy="1005839"/>
+          </a:xfrm>
+          <a:prstGeom prst="rect">
+            <a:avLst/>
+          </a:prstGeom>
+          <a:noFill/>
+        </p:spPr>
+        <p:txBody>
+          <a:bodyPr wrap="square">
+            <a:spAutoFit/>
+          </a:bodyPr>
+          <a:lstStyle/>
+          <a:p>
+            <a:pPr>
+              <a:defRPr sz="1400" b="1">
+                <a:solidFill>
+                  <a:srgbClr val="E0B85F"/>
+                </a:solidFill>
+                <a:latin typeface="Calibri"/>
+              </a:defRPr>
+            </a:pPr>
+            <a:r>
+              <a:t>These are not corner cases.</a:t>
+            </a:r>
+          </a:p>
+          <a:p>
+            <a:pPr>
+              <a:spcBef>
+                <a:spcPts val="600"/>
+              </a:spcBef>
+              <a:defRPr sz="1100">
+                <a:solidFill>
+                  <a:srgbClr val="FFFFFF"/>
+                </a:solidFill>
+                <a:latin typeface="Calibri"/>
+              </a:defRPr>
+            </a:pPr>
+            <a:r>
+              <a:t>Trainable V_thr in practice drifts well below 1 in early layers and above 2 in deep ones —</a:t>
             </a:r>
             <a:br/>
             <a:r>
-              <a:t>RS-SG vanishes through the same 1/V_thr factor.</a:t>
-            </a:r>
-          </a:p>
-        </p:txBody>
-      </p:sp>
-      <p:sp>
-        <p:nvSpPr>
-          <p:cNvPr id="12" name="TextBox 11"/>
-          <p:cNvSpPr txBox="1"/>
-          <p:nvPr/>
-        </p:nvSpPr>
-        <p:spPr>
-          <a:xfrm>
-            <a:off x="457200" y="5852160"/>
-            <a:ext cx="11247120" cy="457200"/>
-          </a:xfrm>
-          <a:prstGeom prst="rect">
-            <a:avLst/>
-          </a:prstGeom>
-          <a:noFill/>
-        </p:spPr>
-        <p:txBody>
-          <a:bodyPr wrap="square" lIns="0" rIns="0" tIns="0" bIns="0">
-            <a:spAutoFit/>
-          </a:bodyPr>
-          <a:lstStyle/>
-          <a:p>
-            <a:pPr algn="ctr">
-              <a:defRPr sz="1300" b="0" i="1">
-                <a:solidFill>
-                  <a:srgbClr val="0F2540"/>
-                </a:solidFill>
-                <a:latin typeface="Calibri"/>
-              </a:defRPr>
-            </a:pPr>
-            <a:r>
-              <a:t>These are not corner cases — real trainings visit them.</a:t>
-            </a:r>
-          </a:p>
-        </p:txBody>
-      </p:sp>
-      <p:sp>
-        <p:nvSpPr>
-          <p:cNvPr id="13" name="TextBox 12"/>
+              <a:t>exactly the regimes where AS-SG and RS-SG both fail. We'll quantify on slide 13.</a:t>
+            </a:r>
+          </a:p>
+        </p:txBody>
+      </p:sp>
+      <p:sp>
+        <p:nvSpPr>
+          <p:cNvPr id="14" name="TextBox 13"/>
           <p:cNvSpPr txBox="1"/>
           <p:nvPr/>
         </p:nvSpPr>
@@ -13526,7 +13620,7 @@
       </p:sp>
       <p:sp>
         <p:nvSpPr>
-          <p:cNvPr id="14" name="TextBox 13"/>
+          <p:cNvPr id="15" name="TextBox 14"/>
           <p:cNvSpPr txBox="1"/>
           <p:nvPr/>
         </p:nvSpPr>
@@ -13695,8 +13789,8 @@
         </p:nvSpPr>
         <p:spPr>
           <a:xfrm>
-            <a:off x="457200" y="2194560"/>
-            <a:ext cx="54864" cy="822960"/>
+            <a:off x="457200" y="2286000"/>
+            <a:ext cx="54864" cy="640080"/>
           </a:xfrm>
           <a:prstGeom prst="rect">
             <a:avLst/>
@@ -13738,8 +13832,8 @@
         </p:nvSpPr>
         <p:spPr>
           <a:xfrm>
-            <a:off x="512064" y="2194560"/>
-            <a:ext cx="11192256" cy="822960"/>
+            <a:off x="512064" y="2286000"/>
+            <a:ext cx="6528816" cy="640080"/>
           </a:xfrm>
           <a:prstGeom prst="rect">
             <a:avLst/>
@@ -13781,8 +13875,8 @@
         </p:nvSpPr>
         <p:spPr>
           <a:xfrm>
-            <a:off x="777240" y="2331720"/>
-            <a:ext cx="10789920" cy="548640"/>
+            <a:off x="777240" y="2423160"/>
+            <a:ext cx="6126480" cy="365759"/>
           </a:xfrm>
           <a:prstGeom prst="rect">
             <a:avLst/>
@@ -13796,7 +13890,7 @@
           <a:lstStyle/>
           <a:p>
             <a:pPr>
-              <a:defRPr sz="1400" b="1">
+              <a:defRPr sz="1200" b="1">
                 <a:solidFill>
                   <a:srgbClr val="1D7E7E"/>
                 </a:solidFill>
@@ -13812,7 +13906,7 @@
               <a:spcBef>
                 <a:spcPts val="600"/>
               </a:spcBef>
-              <a:defRPr sz="1400">
+              <a:defRPr sz="1100">
                 <a:solidFill>
                   <a:srgbClr val="1A1A1A"/>
                 </a:solidFill>
@@ -13820,7 +13914,7 @@
               </a:defRPr>
             </a:pPr>
             <a:r>
-              <a:t>U[t+1]  =  f( U[t],  I_in[t+1] )         — i.i.d. inputs ⇒ Markov chain</a:t>
+              <a:t>U[t+1] = f( U[t], I_in[t+1] ) — i.i.d. ⇒ Markov chain</a:t>
             </a:r>
           </a:p>
         </p:txBody>
@@ -13833,7 +13927,7 @@
         </p:nvSpPr>
         <p:spPr>
           <a:xfrm>
-            <a:off x="457200" y="3200400"/>
+            <a:off x="457200" y="3108960"/>
             <a:ext cx="54864" cy="1463040"/>
           </a:xfrm>
           <a:prstGeom prst="rect">
@@ -13876,8 +13970,8 @@
         </p:nvSpPr>
         <p:spPr>
           <a:xfrm>
-            <a:off x="512064" y="3200400"/>
-            <a:ext cx="11192256" cy="1463040"/>
+            <a:off x="512064" y="3108960"/>
+            <a:ext cx="6528816" cy="1463040"/>
           </a:xfrm>
           <a:prstGeom prst="rect">
             <a:avLst/>
@@ -13919,8 +14013,8 @@
         </p:nvSpPr>
         <p:spPr>
           <a:xfrm>
-            <a:off x="777240" y="3337560"/>
-            <a:ext cx="10789920" cy="1188720"/>
+            <a:off x="777240" y="3246120"/>
+            <a:ext cx="6126480" cy="1188720"/>
           </a:xfrm>
           <a:prstGeom prst="rect">
             <a:avLst/>
@@ -13934,7 +14028,7 @@
           <a:lstStyle/>
           <a:p>
             <a:pPr>
-              <a:defRPr sz="1400" b="1">
+              <a:defRPr sz="1200" b="1">
                 <a:solidFill>
                   <a:srgbClr val="E0B85F"/>
                 </a:solidFill>
@@ -13950,7 +14044,7 @@
               <a:spcBef>
                 <a:spcPts val="600"/>
               </a:spcBef>
-              <a:defRPr sz="1200">
+              <a:defRPr sz="1100">
                 <a:solidFill>
                   <a:srgbClr val="FFFFFF"/>
                 </a:solidFill>
@@ -13958,12 +14052,16 @@
               </a:defRPr>
             </a:pPr>
             <a:r>
-              <a:t>Under (i.i.d. inputs) + (bounded U[t]),  the chain has a unique stationary distribution π.  Moreover,</a:t>
+              <a:t>Under (i.i.d. inputs) + (bounded U[t]),</a:t>
+            </a:r>
+            <a:br/>
+            <a:r>
+              <a:t>the chain has a unique stationary π.  Moreover,</a:t>
             </a:r>
             <a:br/>
             <a:br/>
             <a:r>
-              <a:t>      ‖ Pⁿ(x, ·)  −  π(·) ‖_TV   ≤   C · (1 − ε)ⁿ        (geometric convergence)</a:t>
+              <a:t>‖ Pⁿ(x, ·) − π(·) ‖_TV   ≤   C · (1 − ε)ⁿ</a:t>
             </a:r>
           </a:p>
         </p:txBody>
@@ -13976,22 +14074,22 @@
         </p:nvSpPr>
         <p:spPr>
           <a:xfrm>
-            <a:off x="457200" y="4937760"/>
-            <a:ext cx="11247120" cy="457200"/>
-          </a:xfrm>
-          <a:prstGeom prst="rect">
-            <a:avLst/>
-          </a:prstGeom>
-          <a:noFill/>
-        </p:spPr>
-        <p:txBody>
-          <a:bodyPr wrap="square" lIns="0" rIns="0" tIns="0" bIns="0">
-            <a:spAutoFit/>
-          </a:bodyPr>
-          <a:lstStyle/>
-          <a:p>
-            <a:pPr>
-              <a:defRPr sz="1400" b="1" i="0">
+            <a:off x="457200" y="4754880"/>
+            <a:ext cx="6583680" cy="365760"/>
+          </a:xfrm>
+          <a:prstGeom prst="rect">
+            <a:avLst/>
+          </a:prstGeom>
+          <a:noFill/>
+        </p:spPr>
+        <p:txBody>
+          <a:bodyPr wrap="square" lIns="0" rIns="0" tIns="0" bIns="0">
+            <a:spAutoFit/>
+          </a:bodyPr>
+          <a:lstStyle/>
+          <a:p>
+            <a:pPr>
+              <a:defRPr sz="1300" b="1" i="0">
                 <a:solidFill>
                   <a:srgbClr val="E56945"/>
                 </a:solidFill>
@@ -14012,8 +14110,8 @@
         </p:nvSpPr>
         <p:spPr>
           <a:xfrm>
-            <a:off x="457200" y="5349240"/>
-            <a:ext cx="11247120" cy="1371600"/>
+            <a:off x="457200" y="5120640"/>
+            <a:ext cx="6583680" cy="1280160"/>
           </a:xfrm>
           <a:prstGeom prst="rect">
             <a:avLst/>
@@ -14027,7 +14125,7 @@
           <a:lstStyle/>
           <a:p>
             <a:pPr>
-              <a:defRPr sz="1300">
+              <a:defRPr sz="1100">
                 <a:solidFill>
                   <a:srgbClr val="1A1A1A"/>
                 </a:solidFill>
@@ -14035,7 +14133,7 @@
               </a:defRPr>
             </a:pPr>
             <a:r>
-              <a:t>▸  Initial state ≠ π   ⇒   TCS is mathematically inevitable</a:t>
+              <a:t>▸  Initial state ≠ π  ⇒  drift is inevitable</a:t>
             </a:r>
           </a:p>
           <a:p>
@@ -14043,7 +14141,7 @@
               <a:spcBef>
                 <a:spcPts val="600"/>
               </a:spcBef>
-              <a:defRPr sz="1300">
+              <a:defRPr sz="1100">
                 <a:solidFill>
                   <a:srgbClr val="1A1A1A"/>
                 </a:solidFill>
@@ -14051,7 +14149,7 @@
               </a:defRPr>
             </a:pPr>
             <a:r>
-              <a:t>▸  Standard practice  U[0] = 0  is almost always far from π</a:t>
+              <a:t>▸  Standard U[0] = 0 is far from π</a:t>
             </a:r>
           </a:p>
           <a:p>
@@ -14059,7 +14157,7 @@
               <a:spcBef>
                 <a:spcPts val="600"/>
               </a:spcBef>
-              <a:defRPr sz="1300">
+              <a:defRPr sz="1100">
                 <a:solidFill>
                   <a:srgbClr val="1A1A1A"/>
                 </a:solidFill>
@@ -14067,14 +14165,110 @@
               </a:defRPr>
             </a:pPr>
             <a:r>
-              <a:t>▸  Don't fix the normalization layer — fix the initial state</a:t>
-            </a:r>
-          </a:p>
-        </p:txBody>
-      </p:sp>
-      <p:sp>
-        <p:nvSpPr>
-          <p:cNvPr id="13" name="TextBox 12"/>
+              <a:t>▸  Don't fix BN — fix the initial state</a:t>
+            </a:r>
+          </a:p>
+        </p:txBody>
+      </p:sp>
+      <p:pic>
+        <p:nvPicPr>
+          <p:cNvPr id="13" name="Picture 12" descr="convergence.png"/>
+          <p:cNvPicPr>
+            <a:picLocks noChangeAspect="1"/>
+          </p:cNvPicPr>
+          <p:nvPr/>
+        </p:nvPicPr>
+        <p:blipFill>
+          <a:blip r:embed="rId2"/>
+          <a:stretch>
+            <a:fillRect/>
+          </a:stretch>
+        </p:blipFill>
+        <p:spPr>
+          <a:xfrm>
+            <a:off x="7315200" y="2286000"/>
+            <a:ext cx="4572000" cy="2428875"/>
+          </a:xfrm>
+          <a:prstGeom prst="rect">
+            <a:avLst/>
+          </a:prstGeom>
+        </p:spPr>
+      </p:pic>
+      <p:sp>
+        <p:nvSpPr>
+          <p:cNvPr id="14" name="TextBox 13"/>
+          <p:cNvSpPr txBox="1"/>
+          <p:nvPr/>
+        </p:nvSpPr>
+        <p:spPr>
+          <a:xfrm>
+            <a:off x="7315200" y="4937760"/>
+            <a:ext cx="4572000" cy="365760"/>
+          </a:xfrm>
+          <a:prstGeom prst="rect">
+            <a:avLst/>
+          </a:prstGeom>
+          <a:noFill/>
+        </p:spPr>
+        <p:txBody>
+          <a:bodyPr wrap="square" lIns="0" rIns="0" tIns="0" bIns="0">
+            <a:spAutoFit/>
+          </a:bodyPr>
+          <a:lstStyle/>
+          <a:p>
+            <a:pPr algn="ctr">
+              <a:defRPr sz="1100" b="1" i="0">
+                <a:solidFill>
+                  <a:srgbClr val="0F2540"/>
+                </a:solidFill>
+                <a:latin typeface="Calibri"/>
+              </a:defRPr>
+            </a:pPr>
+            <a:r>
+              <a:t>Distribution of U[t] for t = 0, 1, 2, 3, 4, 5, 8, 12</a:t>
+            </a:r>
+          </a:p>
+        </p:txBody>
+      </p:sp>
+      <p:sp>
+        <p:nvSpPr>
+          <p:cNvPr id="15" name="TextBox 14"/>
+          <p:cNvSpPr txBox="1"/>
+          <p:nvPr/>
+        </p:nvSpPr>
+        <p:spPr>
+          <a:xfrm>
+            <a:off x="7315200" y="5303520"/>
+            <a:ext cx="4572000" cy="640080"/>
+          </a:xfrm>
+          <a:prstGeom prst="rect">
+            <a:avLst/>
+          </a:prstGeom>
+          <a:noFill/>
+        </p:spPr>
+        <p:txBody>
+          <a:bodyPr wrap="square" lIns="0" rIns="0" tIns="0" bIns="0">
+            <a:spAutoFit/>
+          </a:bodyPr>
+          <a:lstStyle/>
+          <a:p>
+            <a:pPr algn="ctr">
+              <a:defRPr sz="1000" b="0" i="1">
+                <a:solidFill>
+                  <a:srgbClr val="7A7A7A"/>
+                </a:solidFill>
+                <a:latin typeface="Calibri"/>
+              </a:defRPr>
+            </a:pPr>
+            <a:r>
+              <a:t>Starting from U[0]=0 (sharp red), the distribution exponentially approaches the stationary π (dashed navy).</a:t>
+            </a:r>
+          </a:p>
+        </p:txBody>
+      </p:sp>
+      <p:sp>
+        <p:nvSpPr>
+          <p:cNvPr id="16" name="TextBox 15"/>
           <p:cNvSpPr txBox="1"/>
           <p:nvPr/>
         </p:nvSpPr>
@@ -14110,7 +14304,7 @@
       </p:sp>
       <p:sp>
         <p:nvSpPr>
-          <p:cNvPr id="14" name="TextBox 13"/>
+          <p:cNvPr id="17" name="TextBox 16"/>
           <p:cNvSpPr txBox="1"/>
           <p:nvPr/>
         </p:nvSpPr>
@@ -15750,7 +15944,7 @@
               </a:defRPr>
             </a:pPr>
             <a:r>
-              <a:t>AS-SG and RS-SG — same idea, two parameterizations</a:t>
+              <a:t>AS-SG and RS-SG — look similar, behave very differently when V_thr is trainable</a:t>
             </a:r>
           </a:p>
         </p:txBody>
@@ -15764,7 +15958,7 @@
         <p:spPr>
           <a:xfrm>
             <a:off x="457200" y="2286000"/>
-            <a:ext cx="5486400" cy="3657600"/>
+            <a:ext cx="5486400" cy="1371600"/>
           </a:xfrm>
           <a:prstGeom prst="rect">
             <a:avLst/>
@@ -15808,7 +16002,79 @@
         </p:nvSpPr>
         <p:spPr>
           <a:xfrm>
-            <a:off x="640080" y="2423160"/>
+            <a:off x="640080" y="2377440"/>
+            <a:ext cx="5120640" cy="320040"/>
+          </a:xfrm>
+          <a:prstGeom prst="rect">
+            <a:avLst/>
+          </a:prstGeom>
+          <a:noFill/>
+        </p:spPr>
+        <p:txBody>
+          <a:bodyPr wrap="square" lIns="0" rIns="0" tIns="0" bIns="0">
+            <a:spAutoFit/>
+          </a:bodyPr>
+          <a:lstStyle/>
+          <a:p>
+            <a:pPr>
+              <a:defRPr sz="1300" b="1" i="0">
+                <a:solidFill>
+                  <a:srgbClr val="0F2540"/>
+                </a:solidFill>
+                <a:latin typeface="Calibri"/>
+              </a:defRPr>
+            </a:pPr>
+            <a:r>
+              <a:t>AS-SG  ·  Absolute-Scale</a:t>
+            </a:r>
+          </a:p>
+        </p:txBody>
+      </p:sp>
+      <p:sp>
+        <p:nvSpPr>
+          <p:cNvPr id="7" name="TextBox 6"/>
+          <p:cNvSpPr txBox="1"/>
+          <p:nvPr/>
+        </p:nvSpPr>
+        <p:spPr>
+          <a:xfrm>
+            <a:off x="640080" y="2743200"/>
+            <a:ext cx="5120640" cy="411480"/>
+          </a:xfrm>
+          <a:prstGeom prst="rect">
+            <a:avLst/>
+          </a:prstGeom>
+          <a:noFill/>
+        </p:spPr>
+        <p:txBody>
+          <a:bodyPr wrap="square" lIns="0" rIns="0" tIns="0" bIns="0">
+            <a:spAutoFit/>
+          </a:bodyPr>
+          <a:lstStyle/>
+          <a:p>
+            <a:pPr>
+              <a:defRPr sz="1800" b="0" i="0">
+                <a:solidFill>
+                  <a:srgbClr val="0F2540"/>
+                </a:solidFill>
+                <a:latin typeface="Cambria Math"/>
+              </a:defRPr>
+            </a:pPr>
+            <a:r>
+              <a:t>x = M[t] − V_thr</a:t>
+            </a:r>
+          </a:p>
+        </p:txBody>
+      </p:sp>
+      <p:sp>
+        <p:nvSpPr>
+          <p:cNvPr id="8" name="TextBox 7"/>
+          <p:cNvSpPr txBox="1"/>
+          <p:nvPr/>
+        </p:nvSpPr>
+        <p:spPr>
+          <a:xfrm>
+            <a:off x="640080" y="3246120"/>
             <a:ext cx="5120640" cy="365760"/>
           </a:xfrm>
           <a:prstGeom prst="rect">
@@ -15823,119 +16089,15 @@
           <a:lstStyle/>
           <a:p>
             <a:pPr>
-              <a:defRPr sz="1400" b="1" i="0">
-                <a:solidFill>
-                  <a:srgbClr val="0F2540"/>
-                </a:solidFill>
-                <a:latin typeface="Calibri"/>
-              </a:defRPr>
-            </a:pPr>
-            <a:r>
-              <a:t>AS-SG  ·  Absolute-Scale</a:t>
-            </a:r>
-          </a:p>
-        </p:txBody>
-      </p:sp>
-      <p:sp>
-        <p:nvSpPr>
-          <p:cNvPr id="7" name="TextBox 6"/>
-          <p:cNvSpPr txBox="1"/>
-          <p:nvPr/>
-        </p:nvSpPr>
-        <p:spPr>
-          <a:xfrm>
-            <a:off x="640080" y="2834640"/>
-            <a:ext cx="5120640" cy="457200"/>
-          </a:xfrm>
-          <a:prstGeom prst="rect">
-            <a:avLst/>
-          </a:prstGeom>
-          <a:noFill/>
-        </p:spPr>
-        <p:txBody>
-          <a:bodyPr wrap="square" lIns="0" rIns="0" tIns="0" bIns="0">
-            <a:spAutoFit/>
-          </a:bodyPr>
-          <a:lstStyle/>
-          <a:p>
-            <a:pPr>
-              <a:defRPr sz="1800" b="0" i="0">
-                <a:solidFill>
-                  <a:srgbClr val="0F2540"/>
-                </a:solidFill>
-                <a:latin typeface="Cambria Math"/>
-              </a:defRPr>
-            </a:pPr>
-            <a:r>
-              <a:t>x = M[t] − V_thr</a:t>
-            </a:r>
-          </a:p>
-        </p:txBody>
-      </p:sp>
-      <p:sp>
-        <p:nvSpPr>
-          <p:cNvPr id="8" name="TextBox 7"/>
-          <p:cNvSpPr txBox="1"/>
-          <p:nvPr/>
-        </p:nvSpPr>
-        <p:spPr>
-          <a:xfrm>
-            <a:off x="640080" y="3520440"/>
-            <a:ext cx="5120640" cy="2286000"/>
-          </a:xfrm>
-          <a:prstGeom prst="rect">
-            <a:avLst/>
-          </a:prstGeom>
-          <a:noFill/>
-        </p:spPr>
-        <p:txBody>
-          <a:bodyPr wrap="square">
-            <a:spAutoFit/>
-          </a:bodyPr>
-          <a:lstStyle/>
-          <a:p>
-            <a:pPr>
-              <a:defRPr sz="1200">
-                <a:solidFill>
-                  <a:srgbClr val="1A1A1A"/>
-                </a:solidFill>
-                <a:latin typeface="Calibri"/>
-              </a:defRPr>
-            </a:pPr>
-            <a:r>
-              <a:t>▸  Window width fixed at γ — ignores V_thr</a:t>
-            </a:r>
-          </a:p>
-          <a:p>
-            <a:pPr>
-              <a:spcBef>
-                <a:spcPts val="600"/>
-              </a:spcBef>
-              <a:defRPr sz="1200">
-                <a:solidFill>
-                  <a:srgbClr val="1A1A1A"/>
-                </a:solidFill>
-                <a:latin typeface="Calibri"/>
-              </a:defRPr>
-            </a:pPr>
-            <a:r>
-              <a:t>▸  Magnitude independent of V_thr</a:t>
-            </a:r>
-          </a:p>
-          <a:p>
-            <a:pPr>
-              <a:spcBef>
-                <a:spcPts val="600"/>
-              </a:spcBef>
-              <a:defRPr sz="1200">
-                <a:solidFill>
-                  <a:srgbClr val="1A1A1A"/>
-                </a:solidFill>
-                <a:latin typeface="Calibri"/>
-              </a:defRPr>
-            </a:pPr>
-            <a:r>
-              <a:t>▸  Used by tdBN, TET, PLIF, LTMD, …</a:t>
+              <a:defRPr sz="1000" b="0" i="1">
+                <a:solidFill>
+                  <a:srgbClr val="7A7A7A"/>
+                </a:solidFill>
+                <a:latin typeface="Calibri"/>
+              </a:defRPr>
+            </a:pPr>
+            <a:r>
+              <a:t>Used by tdBN, TET, PLIF, LTMD, …</a:t>
             </a:r>
           </a:p>
         </p:txBody>
@@ -15949,7 +16111,7 @@
         <p:spPr>
           <a:xfrm>
             <a:off x="6263640" y="2286000"/>
-            <a:ext cx="5486400" cy="3657600"/>
+            <a:ext cx="5486400" cy="1371600"/>
           </a:xfrm>
           <a:prstGeom prst="rect">
             <a:avLst/>
@@ -15993,7 +16155,79 @@
         </p:nvSpPr>
         <p:spPr>
           <a:xfrm>
-            <a:off x="6446520" y="2423160"/>
+            <a:off x="6446520" y="2377440"/>
+            <a:ext cx="5120640" cy="320040"/>
+          </a:xfrm>
+          <a:prstGeom prst="rect">
+            <a:avLst/>
+          </a:prstGeom>
+          <a:noFill/>
+        </p:spPr>
+        <p:txBody>
+          <a:bodyPr wrap="square" lIns="0" rIns="0" tIns="0" bIns="0">
+            <a:spAutoFit/>
+          </a:bodyPr>
+          <a:lstStyle/>
+          <a:p>
+            <a:pPr>
+              <a:defRPr sz="1300" b="1" i="0">
+                <a:solidFill>
+                  <a:srgbClr val="0F2540"/>
+                </a:solidFill>
+                <a:latin typeface="Calibri"/>
+              </a:defRPr>
+            </a:pPr>
+            <a:r>
+              <a:t>RS-SG  ·  Relative-Scale</a:t>
+            </a:r>
+          </a:p>
+        </p:txBody>
+      </p:sp>
+      <p:sp>
+        <p:nvSpPr>
+          <p:cNvPr id="11" name="TextBox 10"/>
+          <p:cNvSpPr txBox="1"/>
+          <p:nvPr/>
+        </p:nvSpPr>
+        <p:spPr>
+          <a:xfrm>
+            <a:off x="6446520" y="2743200"/>
+            <a:ext cx="5120640" cy="411480"/>
+          </a:xfrm>
+          <a:prstGeom prst="rect">
+            <a:avLst/>
+          </a:prstGeom>
+          <a:noFill/>
+        </p:spPr>
+        <p:txBody>
+          <a:bodyPr wrap="square" lIns="0" rIns="0" tIns="0" bIns="0">
+            <a:spAutoFit/>
+          </a:bodyPr>
+          <a:lstStyle/>
+          <a:p>
+            <a:pPr>
+              <a:defRPr sz="1800" b="0" i="0">
+                <a:solidFill>
+                  <a:srgbClr val="0F2540"/>
+                </a:solidFill>
+                <a:latin typeface="Cambria Math"/>
+              </a:defRPr>
+            </a:pPr>
+            <a:r>
+              <a:t>x = M[t] / V_thr − 1</a:t>
+            </a:r>
+          </a:p>
+        </p:txBody>
+      </p:sp>
+      <p:sp>
+        <p:nvSpPr>
+          <p:cNvPr id="12" name="TextBox 11"/>
+          <p:cNvSpPr txBox="1"/>
+          <p:nvPr/>
+        </p:nvSpPr>
+        <p:spPr>
+          <a:xfrm>
+            <a:off x="6446520" y="3246120"/>
             <a:ext cx="5120640" cy="365760"/>
           </a:xfrm>
           <a:prstGeom prst="rect">
@@ -16008,133 +16242,89 @@
           <a:lstStyle/>
           <a:p>
             <a:pPr>
-              <a:defRPr sz="1400" b="1" i="0">
-                <a:solidFill>
-                  <a:srgbClr val="0F2540"/>
-                </a:solidFill>
-                <a:latin typeface="Calibri"/>
-              </a:defRPr>
-            </a:pPr>
-            <a:r>
-              <a:t>RS-SG  ·  Relative-Scale</a:t>
-            </a:r>
-          </a:p>
-        </p:txBody>
-      </p:sp>
-      <p:sp>
-        <p:nvSpPr>
-          <p:cNvPr id="11" name="TextBox 10"/>
-          <p:cNvSpPr txBox="1"/>
-          <p:nvPr/>
-        </p:nvSpPr>
-        <p:spPr>
-          <a:xfrm>
-            <a:off x="6446520" y="2834640"/>
-            <a:ext cx="5120640" cy="457200"/>
-          </a:xfrm>
-          <a:prstGeom prst="rect">
-            <a:avLst/>
-          </a:prstGeom>
-          <a:noFill/>
-        </p:spPr>
-        <p:txBody>
-          <a:bodyPr wrap="square" lIns="0" rIns="0" tIns="0" bIns="0">
-            <a:spAutoFit/>
-          </a:bodyPr>
-          <a:lstStyle/>
-          <a:p>
-            <a:pPr>
-              <a:defRPr sz="1800" b="0" i="0">
-                <a:solidFill>
-                  <a:srgbClr val="0F2540"/>
-                </a:solidFill>
-                <a:latin typeface="Cambria Math"/>
-              </a:defRPr>
-            </a:pPr>
-            <a:r>
-              <a:t>x = M[t] / V_thr − 1</a:t>
-            </a:r>
-          </a:p>
-        </p:txBody>
-      </p:sp>
-      <p:sp>
-        <p:nvSpPr>
-          <p:cNvPr id="12" name="TextBox 11"/>
-          <p:cNvSpPr txBox="1"/>
-          <p:nvPr/>
-        </p:nvSpPr>
-        <p:spPr>
-          <a:xfrm>
-            <a:off x="6446520" y="3520440"/>
-            <a:ext cx="5120640" cy="2286000"/>
-          </a:xfrm>
-          <a:prstGeom prst="rect">
-            <a:avLst/>
-          </a:prstGeom>
-          <a:noFill/>
-        </p:spPr>
-        <p:txBody>
-          <a:bodyPr wrap="square">
-            <a:spAutoFit/>
-          </a:bodyPr>
-          <a:lstStyle/>
-          <a:p>
-            <a:pPr>
-              <a:defRPr sz="1200">
-                <a:solidFill>
-                  <a:srgbClr val="1A1A1A"/>
-                </a:solidFill>
-                <a:latin typeface="Calibri"/>
-              </a:defRPr>
-            </a:pPr>
-            <a:r>
-              <a:t>▸  Window scales with V_thr  ✓</a:t>
-            </a:r>
-          </a:p>
-          <a:p>
-            <a:pPr>
-              <a:spcBef>
-                <a:spcPts val="600"/>
-              </a:spcBef>
-              <a:defRPr sz="1200">
-                <a:solidFill>
-                  <a:srgbClr val="1A1A1A"/>
-                </a:solidFill>
-                <a:latin typeface="Calibri"/>
-              </a:defRPr>
-            </a:pPr>
-            <a:r>
-              <a:t>▸  But chain rule introduces a 1/V_thr factor in magnitude  ✗</a:t>
-            </a:r>
-          </a:p>
-          <a:p>
-            <a:pPr>
-              <a:spcBef>
-                <a:spcPts val="600"/>
-              </a:spcBef>
-              <a:defRPr sz="1200">
-                <a:solidFill>
-                  <a:srgbClr val="1A1A1A"/>
-                </a:solidFill>
-                <a:latin typeface="Calibri"/>
-              </a:defRPr>
-            </a:pPr>
-            <a:r>
-              <a:t>▸  Used by Meng 2023, DIET-SNN</a:t>
-            </a:r>
-          </a:p>
-        </p:txBody>
-      </p:sp>
-      <p:sp>
-        <p:nvSpPr>
-          <p:cNvPr id="13" name="Rectangle 12"/>
+              <a:defRPr sz="1000" b="0" i="1">
+                <a:solidFill>
+                  <a:srgbClr val="7A7A7A"/>
+                </a:solidFill>
+                <a:latin typeface="Calibri"/>
+              </a:defRPr>
+            </a:pPr>
+            <a:r>
+              <a:t>Used by Meng 2023, DIET-SNN</a:t>
+            </a:r>
+          </a:p>
+        </p:txBody>
+      </p:sp>
+      <p:sp>
+        <p:nvSpPr>
+          <p:cNvPr id="13" name="TextBox 12"/>
+          <p:cNvSpPr txBox="1"/>
+          <p:nvPr/>
+        </p:nvSpPr>
+        <p:spPr>
+          <a:xfrm>
+            <a:off x="457200" y="3794760"/>
+            <a:ext cx="11247120" cy="274320"/>
+          </a:xfrm>
+          <a:prstGeom prst="rect">
+            <a:avLst/>
+          </a:prstGeom>
+          <a:noFill/>
+        </p:spPr>
+        <p:txBody>
+          <a:bodyPr wrap="square" lIns="0" rIns="0" tIns="0" bIns="0">
+            <a:spAutoFit/>
+          </a:bodyPr>
+          <a:lstStyle/>
+          <a:p>
+            <a:pPr>
+              <a:defRPr sz="1100" b="0" i="1">
+                <a:solidFill>
+                  <a:srgbClr val="7A7A7A"/>
+                </a:solidFill>
+                <a:latin typeface="Calibri"/>
+              </a:defRPr>
+            </a:pPr>
+            <a:r>
+              <a:t>How the gradient window looks against the membrane-potential distribution</a:t>
+            </a:r>
+          </a:p>
+        </p:txBody>
+      </p:sp>
+      <p:pic>
+        <p:nvPicPr>
+          <p:cNvPr id="14" name="Picture 13" descr="sg_windows.png"/>
+          <p:cNvPicPr>
+            <a:picLocks noChangeAspect="1"/>
+          </p:cNvPicPr>
+          <p:nvPr/>
+        </p:nvPicPr>
+        <p:blipFill>
+          <a:blip r:embed="rId2"/>
+          <a:stretch>
+            <a:fillRect/>
+          </a:stretch>
+        </p:blipFill>
+        <p:spPr>
+          <a:xfrm>
+            <a:off x="3108960" y="4023360"/>
+            <a:ext cx="5943600" cy="2181828"/>
+          </a:xfrm>
+          <a:prstGeom prst="rect">
+            <a:avLst/>
+          </a:prstGeom>
+        </p:spPr>
+      </p:pic>
+      <p:sp>
+        <p:nvSpPr>
+          <p:cNvPr id="15" name="Rectangle 14"/>
           <p:cNvSpPr/>
           <p:nvPr/>
         </p:nvSpPr>
         <p:spPr>
           <a:xfrm>
-            <a:off x="457200" y="6080760"/>
-            <a:ext cx="54864" cy="411480"/>
+            <a:off x="457200" y="6126480"/>
+            <a:ext cx="54864" cy="365760"/>
           </a:xfrm>
           <a:prstGeom prst="rect">
             <a:avLst/>
@@ -16170,14 +16360,14 @@
       </p:sp>
       <p:sp>
         <p:nvSpPr>
-          <p:cNvPr id="14" name="Rectangle 13"/>
+          <p:cNvPr id="16" name="Rectangle 15"/>
           <p:cNvSpPr/>
           <p:nvPr/>
         </p:nvSpPr>
         <p:spPr>
           <a:xfrm>
-            <a:off x="512064" y="6080760"/>
-            <a:ext cx="11192256" cy="411480"/>
+            <a:off x="512064" y="6126480"/>
+            <a:ext cx="11192256" cy="365760"/>
           </a:xfrm>
           <a:prstGeom prst="rect">
             <a:avLst/>
@@ -16213,14 +16403,14 @@
       </p:sp>
       <p:sp>
         <p:nvSpPr>
-          <p:cNvPr id="15" name="TextBox 14"/>
-          <p:cNvSpPr txBox="1"/>
-          <p:nvPr/>
-        </p:nvSpPr>
-        <p:spPr>
-          <a:xfrm>
-            <a:off x="777240" y="6217920"/>
-            <a:ext cx="10789920" cy="137160"/>
+          <p:cNvPr id="17" name="TextBox 16"/>
+          <p:cNvSpPr txBox="1"/>
+          <p:nvPr/>
+        </p:nvSpPr>
+        <p:spPr>
+          <a:xfrm>
+            <a:off x="777240" y="6263640"/>
+            <a:ext cx="10789920" cy="91440"/>
           </a:xfrm>
           <a:prstGeom prst="rect">
             <a:avLst/>
@@ -16234,7 +16424,7 @@
           <a:lstStyle/>
           <a:p>
             <a:pPr>
-              <a:defRPr sz="1200" b="1">
+              <a:defRPr sz="1100" b="1">
                 <a:solidFill>
                   <a:srgbClr val="E0B85F"/>
                 </a:solidFill>
@@ -16242,14 +16432,14 @@
               </a:defRPr>
             </a:pPr>
             <a:r>
-              <a:t>Treated as essentially equivalent. Once V_thr is trainable, they break in opposite ways.</a:t>
-            </a:r>
-          </a:p>
-        </p:txBody>
-      </p:sp>
-      <p:sp>
-        <p:nvSpPr>
-          <p:cNvPr id="16" name="TextBox 15"/>
+              <a:t>Same when V_thr is fixed.  Once V_thr trains, AS-SG breaks one way, RS-SG breaks the opposite way.</a:t>
+            </a:r>
+          </a:p>
+        </p:txBody>
+      </p:sp>
+      <p:sp>
+        <p:nvSpPr>
+          <p:cNvPr id="18" name="TextBox 17"/>
           <p:cNvSpPr txBox="1"/>
           <p:nvPr/>
         </p:nvSpPr>
@@ -16285,7 +16475,7 @@
       </p:sp>
       <p:sp>
         <p:nvSpPr>
-          <p:cNvPr id="17" name="TextBox 16"/>
+          <p:cNvPr id="19" name="TextBox 18"/>
           <p:cNvSpPr txBox="1"/>
           <p:nvPr/>
         </p:nvSpPr>

--- a/Hyunho_Kook_Master_Defense.pptx
+++ b/Hyunho_Kook_Master_Defense.pptx
@@ -3689,7 +3689,7 @@
               </a:defRPr>
             </a:pPr>
             <a:r>
-              <a:t>Both window width and gradient magnitude must scale correctly with V_thr</a:t>
+              <a:t>Both window width AND gradient magnitude must scale correctly with V_thr</a:t>
             </a:r>
           </a:p>
         </p:txBody>
@@ -3710,8 +3710,8 @@
         </p:blipFill>
         <p:spPr>
           <a:xfrm>
-            <a:off x="4297680" y="1783080"/>
-            <a:ext cx="3675636" cy="4206240"/>
+            <a:off x="4617602" y="1828800"/>
+            <a:ext cx="2956490" cy="3383280"/>
           </a:xfrm>
           <a:prstGeom prst="rect">
             <a:avLst/>
@@ -3726,22 +3726,22 @@
         </p:nvSpPr>
         <p:spPr>
           <a:xfrm>
-            <a:off x="457200" y="1874519"/>
-            <a:ext cx="3657600" cy="274320"/>
-          </a:xfrm>
-          <a:prstGeom prst="rect">
-            <a:avLst/>
-          </a:prstGeom>
-          <a:noFill/>
-        </p:spPr>
-        <p:txBody>
-          <a:bodyPr wrap="square" lIns="0" rIns="0" tIns="0" bIns="0">
-            <a:spAutoFit/>
-          </a:bodyPr>
-          <a:lstStyle/>
-          <a:p>
-            <a:pPr>
-              <a:defRPr sz="1000" b="0" i="1">
+            <a:off x="457200" y="5230368"/>
+            <a:ext cx="11247120" cy="228600"/>
+          </a:xfrm>
+          <a:prstGeom prst="rect">
+            <a:avLst/>
+          </a:prstGeom>
+          <a:noFill/>
+        </p:spPr>
+        <p:txBody>
+          <a:bodyPr wrap="square" lIns="0" rIns="0" tIns="0" bIns="0">
+            <a:spAutoFit/>
+          </a:bodyPr>
+          <a:lstStyle/>
+          <a:p>
+            <a:pPr algn="ctr">
+              <a:defRPr sz="900" b="0" i="1">
                 <a:solidFill>
                   <a:srgbClr val="7A7A7A"/>
                 </a:solidFill>
@@ -3749,103 +3749,29 @@
               </a:defRPr>
             </a:pPr>
             <a:r>
-              <a:t>By V_thr:</a:t>
-            </a:r>
-          </a:p>
-        </p:txBody>
-      </p:sp>
-      <p:sp>
-        <p:nvSpPr>
-          <p:cNvPr id="7" name="TextBox 6"/>
-          <p:cNvSpPr txBox="1"/>
-          <p:nvPr/>
-        </p:nvSpPr>
-        <p:spPr>
-          <a:xfrm>
-            <a:off x="457200" y="2194560"/>
-            <a:ext cx="1463040" cy="274320"/>
-          </a:xfrm>
-          <a:prstGeom prst="rect">
-            <a:avLst/>
-          </a:prstGeom>
-          <a:noFill/>
-        </p:spPr>
-        <p:txBody>
-          <a:bodyPr wrap="square" lIns="0" rIns="0" tIns="0" bIns="0">
-            <a:spAutoFit/>
-          </a:bodyPr>
-          <a:lstStyle/>
-          <a:p>
-            <a:pPr>
-              <a:defRPr sz="1000" b="1" i="0">
-                <a:solidFill>
-                  <a:srgbClr val="0F2540"/>
-                </a:solidFill>
-                <a:latin typeface="Calibri"/>
-              </a:defRPr>
-            </a:pPr>
-            <a:r>
-              <a:rPr spc="150"/>
-              <a:t>V_thr ≪ 1</a:t>
-            </a:r>
-          </a:p>
-        </p:txBody>
-      </p:sp>
-      <p:sp>
-        <p:nvSpPr>
-          <p:cNvPr id="8" name="TextBox 7"/>
-          <p:cNvSpPr txBox="1"/>
-          <p:nvPr/>
-        </p:nvSpPr>
-        <p:spPr>
-          <a:xfrm>
-            <a:off x="2011680" y="2194560"/>
-            <a:ext cx="1828800" cy="274320"/>
-          </a:xfrm>
-          <a:prstGeom prst="rect">
-            <a:avLst/>
-          </a:prstGeom>
-          <a:noFill/>
-        </p:spPr>
-        <p:txBody>
-          <a:bodyPr wrap="square" lIns="0" rIns="0" tIns="0" bIns="0">
-            <a:spAutoFit/>
-          </a:bodyPr>
-          <a:lstStyle/>
-          <a:p>
-            <a:pPr>
-              <a:defRPr sz="1000" b="1" i="0">
-                <a:solidFill>
-                  <a:srgbClr val="0F2540"/>
-                </a:solidFill>
-                <a:latin typeface="Calibri"/>
-              </a:defRPr>
-            </a:pPr>
-            <a:r>
-              <a:rPr spc="150"/>
-              <a:t>V_thr ≫ 1</a:t>
-            </a:r>
-          </a:p>
-        </p:txBody>
-      </p:sp>
-      <p:sp>
-        <p:nvSpPr>
-          <p:cNvPr id="9" name="Rectangle 8"/>
+              <a:t>Each colored box = active gradient region.   width = window  ·  height = magnitude</a:t>
+            </a:r>
+          </a:p>
+        </p:txBody>
+      </p:sp>
+      <p:sp>
+        <p:nvSpPr>
+          <p:cNvPr id="7" name="Rectangle 6"/>
           <p:cNvSpPr/>
           <p:nvPr/>
         </p:nvSpPr>
         <p:spPr>
           <a:xfrm>
-            <a:off x="457200" y="2560320"/>
-            <a:ext cx="777240" cy="1188720"/>
+            <a:off x="371703" y="5623560"/>
+            <a:ext cx="2157984" cy="777240"/>
           </a:xfrm>
           <a:prstGeom prst="rect">
             <a:avLst/>
           </a:prstGeom>
           <a:solidFill>
-            <a:srgbClr val="E56945"/>
+            <a:srgbClr val="FAEEE0"/>
           </a:solidFill>
-          <a:ln>
+          <a:ln w="19050">
             <a:solidFill>
               <a:srgbClr val="E56945"/>
             </a:solidFill>
@@ -3875,14 +3801,14 @@
       </p:sp>
       <p:sp>
         <p:nvSpPr>
-          <p:cNvPr id="10" name="TextBox 9"/>
-          <p:cNvSpPr txBox="1"/>
-          <p:nvPr/>
-        </p:nvSpPr>
-        <p:spPr>
-          <a:xfrm>
-            <a:off x="457200" y="2971800"/>
-            <a:ext cx="777240" cy="365760"/>
+          <p:cNvPr id="8" name="TextBox 7"/>
+          <p:cNvSpPr txBox="1"/>
+          <p:nvPr/>
+        </p:nvSpPr>
+        <p:spPr>
+          <a:xfrm>
+            <a:off x="463143" y="5715000"/>
+            <a:ext cx="1975103" cy="320040"/>
           </a:xfrm>
           <a:prstGeom prst="rect">
             <a:avLst/>
@@ -3898,27 +3824,63 @@
             <a:pPr algn="ctr">
               <a:defRPr sz="1100" b="1" i="0">
                 <a:solidFill>
-                  <a:srgbClr val="FFFFFF"/>
-                </a:solidFill>
-                <a:latin typeface="Calibri"/>
-              </a:defRPr>
-            </a:pPr>
-            <a:r>
-              <a:t>AS-SG</a:t>
-            </a:r>
-          </a:p>
-        </p:txBody>
-      </p:sp>
-      <p:sp>
-        <p:nvSpPr>
-          <p:cNvPr id="11" name="Rectangle 10"/>
+                  <a:srgbClr val="E56945"/>
+                </a:solidFill>
+                <a:latin typeface="Calibri"/>
+              </a:defRPr>
+            </a:pPr>
+            <a:r>
+              <a:t>✗ Flooding</a:t>
+            </a:r>
+          </a:p>
+        </p:txBody>
+      </p:sp>
+      <p:sp>
+        <p:nvSpPr>
+          <p:cNvPr id="9" name="TextBox 8"/>
+          <p:cNvSpPr txBox="1"/>
+          <p:nvPr/>
+        </p:nvSpPr>
+        <p:spPr>
+          <a:xfrm>
+            <a:off x="463143" y="6035040"/>
+            <a:ext cx="1975103" cy="365760"/>
+          </a:xfrm>
+          <a:prstGeom prst="rect">
+            <a:avLst/>
+          </a:prstGeom>
+          <a:noFill/>
+        </p:spPr>
+        <p:txBody>
+          <a:bodyPr wrap="square" lIns="0" rIns="0" tIns="0" bIns="0">
+            <a:spAutoFit/>
+          </a:bodyPr>
+          <a:lstStyle/>
+          <a:p>
+            <a:pPr algn="ctr">
+              <a:defRPr sz="900" b="0" i="0">
+                <a:solidFill>
+                  <a:srgbClr val="1A1A1A"/>
+                </a:solidFill>
+                <a:latin typeface="Calibri"/>
+              </a:defRPr>
+            </a:pPr>
+            <a:r>
+              <a:t>AS-SG · V_thr ≪ 1</a:t>
+            </a:r>
+          </a:p>
+        </p:txBody>
+      </p:sp>
+      <p:sp>
+        <p:nvSpPr>
+          <p:cNvPr id="10" name="Rectangle 9"/>
           <p:cNvSpPr/>
           <p:nvPr/>
         </p:nvSpPr>
         <p:spPr>
           <a:xfrm>
-            <a:off x="1325880" y="2560320"/>
-            <a:ext cx="1463040" cy="1188720"/>
+            <a:off x="2694279" y="5623560"/>
+            <a:ext cx="2157984" cy="777240"/>
           </a:xfrm>
           <a:prstGeom prst="rect">
             <a:avLst/>
@@ -3926,7 +3888,7 @@
           <a:solidFill>
             <a:srgbClr val="FAEEE0"/>
           </a:solidFill>
-          <a:ln w="10160">
+          <a:ln w="19050">
             <a:solidFill>
               <a:srgbClr val="E56945"/>
             </a:solidFill>
@@ -3956,64 +3918,64 @@
       </p:sp>
       <p:sp>
         <p:nvSpPr>
+          <p:cNvPr id="11" name="TextBox 10"/>
+          <p:cNvSpPr txBox="1"/>
+          <p:nvPr/>
+        </p:nvSpPr>
+        <p:spPr>
+          <a:xfrm>
+            <a:off x="2785719" y="5715000"/>
+            <a:ext cx="1975103" cy="320040"/>
+          </a:xfrm>
+          <a:prstGeom prst="rect">
+            <a:avLst/>
+          </a:prstGeom>
+          <a:noFill/>
+        </p:spPr>
+        <p:txBody>
+          <a:bodyPr wrap="square" lIns="0" rIns="0" tIns="0" bIns="0">
+            <a:spAutoFit/>
+          </a:bodyPr>
+          <a:lstStyle/>
+          <a:p>
+            <a:pPr algn="ctr">
+              <a:defRPr sz="1100" b="1" i="0">
+                <a:solidFill>
+                  <a:srgbClr val="E56945"/>
+                </a:solidFill>
+                <a:latin typeface="Calibri"/>
+              </a:defRPr>
+            </a:pPr>
+            <a:r>
+              <a:t>✗ Starvation</a:t>
+            </a:r>
+          </a:p>
+        </p:txBody>
+      </p:sp>
+      <p:sp>
+        <p:nvSpPr>
           <p:cNvPr id="12" name="TextBox 11"/>
           <p:cNvSpPr txBox="1"/>
           <p:nvPr/>
         </p:nvSpPr>
         <p:spPr>
           <a:xfrm>
-            <a:off x="1417320" y="2651760"/>
-            <a:ext cx="1280160" cy="274320"/>
-          </a:xfrm>
-          <a:prstGeom prst="rect">
-            <a:avLst/>
-          </a:prstGeom>
-          <a:noFill/>
-        </p:spPr>
-        <p:txBody>
-          <a:bodyPr wrap="square" lIns="0" rIns="0" tIns="0" bIns="0">
-            <a:spAutoFit/>
-          </a:bodyPr>
-          <a:lstStyle/>
-          <a:p>
-            <a:pPr>
-              <a:defRPr sz="1000" b="1" i="0">
-                <a:solidFill>
-                  <a:srgbClr val="E56945"/>
-                </a:solidFill>
-                <a:latin typeface="Calibri"/>
-              </a:defRPr>
-            </a:pPr>
-            <a:r>
-              <a:t>✗  Flood</a:t>
-            </a:r>
-          </a:p>
-        </p:txBody>
-      </p:sp>
-      <p:sp>
-        <p:nvSpPr>
-          <p:cNvPr id="13" name="TextBox 12"/>
-          <p:cNvSpPr txBox="1"/>
-          <p:nvPr/>
-        </p:nvSpPr>
-        <p:spPr>
-          <a:xfrm>
-            <a:off x="1417320" y="2971800"/>
-            <a:ext cx="1280160" cy="777240"/>
-          </a:xfrm>
-          <a:prstGeom prst="rect">
-            <a:avLst/>
-          </a:prstGeom>
-          <a:noFill/>
-        </p:spPr>
-        <p:txBody>
-          <a:bodyPr wrap="square" lIns="0" rIns="0" tIns="0" bIns="0">
-            <a:spAutoFit/>
-          </a:bodyPr>
-          <a:lstStyle/>
-          <a:p>
-            <a:pPr>
-              <a:defRPr sz="800" b="0" i="0">
+            <a:off x="2785719" y="6035040"/>
+            <a:ext cx="1975103" cy="365760"/>
+          </a:xfrm>
+          <a:prstGeom prst="rect">
+            <a:avLst/>
+          </a:prstGeom>
+          <a:noFill/>
+        </p:spPr>
+        <p:txBody>
+          <a:bodyPr wrap="square" lIns="0" rIns="0" tIns="0" bIns="0">
+            <a:spAutoFit/>
+          </a:bodyPr>
+          <a:lstStyle/>
+          <a:p>
+            <a:pPr algn="ctr">
+              <a:defRPr sz="900" b="0" i="0">
                 <a:solidFill>
                   <a:srgbClr val="1A1A1A"/>
                 </a:solidFill>
@@ -4021,39 +3983,31 @@
               </a:defRPr>
             </a:pPr>
             <a:r>
-              <a:t>fixed window</a:t>
-            </a:r>
-            <a:br/>
-            <a:r>
-              <a:t>covers most of</a:t>
-            </a:r>
-            <a:br/>
-            <a:r>
-              <a:t>distribution</a:t>
-            </a:r>
-          </a:p>
-        </p:txBody>
-      </p:sp>
-      <p:sp>
-        <p:nvSpPr>
-          <p:cNvPr id="14" name="Rectangle 13"/>
+              <a:t>AS-SG · V_thr ≫ 1</a:t>
+            </a:r>
+          </a:p>
+        </p:txBody>
+      </p:sp>
+      <p:sp>
+        <p:nvSpPr>
+          <p:cNvPr id="13" name="Rectangle 12"/>
           <p:cNvSpPr/>
           <p:nvPr/>
         </p:nvSpPr>
         <p:spPr>
           <a:xfrm>
-            <a:off x="2834640" y="2560320"/>
-            <a:ext cx="1463040" cy="1188720"/>
+            <a:off x="5016855" y="5623560"/>
+            <a:ext cx="2157984" cy="777240"/>
           </a:xfrm>
           <a:prstGeom prst="rect">
             <a:avLst/>
           </a:prstGeom>
           <a:solidFill>
-            <a:srgbClr val="FAEEE0"/>
+            <a:srgbClr val="FAEECB"/>
           </a:solidFill>
-          <a:ln w="10160">
+          <a:ln w="19050">
             <a:solidFill>
-              <a:srgbClr val="E56945"/>
+              <a:srgbClr val="E0B85F"/>
             </a:solidFill>
           </a:ln>
         </p:spPr>
@@ -4081,64 +4035,64 @@
       </p:sp>
       <p:sp>
         <p:nvSpPr>
+          <p:cNvPr id="14" name="TextBox 13"/>
+          <p:cNvSpPr txBox="1"/>
+          <p:nvPr/>
+        </p:nvSpPr>
+        <p:spPr>
+          <a:xfrm>
+            <a:off x="5108295" y="5715000"/>
+            <a:ext cx="1975103" cy="320040"/>
+          </a:xfrm>
+          <a:prstGeom prst="rect">
+            <a:avLst/>
+          </a:prstGeom>
+          <a:noFill/>
+        </p:spPr>
+        <p:txBody>
+          <a:bodyPr wrap="square" lIns="0" rIns="0" tIns="0" bIns="0">
+            <a:spAutoFit/>
+          </a:bodyPr>
+          <a:lstStyle/>
+          <a:p>
+            <a:pPr algn="ctr">
+              <a:defRPr sz="1100" b="1" i="0">
+                <a:solidFill>
+                  <a:srgbClr val="E0B85F"/>
+                </a:solidFill>
+                <a:latin typeface="Calibri"/>
+              </a:defRPr>
+            </a:pPr>
+            <a:r>
+              <a:t>✗ Explosion</a:t>
+            </a:r>
+          </a:p>
+        </p:txBody>
+      </p:sp>
+      <p:sp>
+        <p:nvSpPr>
           <p:cNvPr id="15" name="TextBox 14"/>
           <p:cNvSpPr txBox="1"/>
           <p:nvPr/>
         </p:nvSpPr>
         <p:spPr>
           <a:xfrm>
-            <a:off x="2926080" y="2651760"/>
-            <a:ext cx="1280160" cy="274320"/>
-          </a:xfrm>
-          <a:prstGeom prst="rect">
-            <a:avLst/>
-          </a:prstGeom>
-          <a:noFill/>
-        </p:spPr>
-        <p:txBody>
-          <a:bodyPr wrap="square" lIns="0" rIns="0" tIns="0" bIns="0">
-            <a:spAutoFit/>
-          </a:bodyPr>
-          <a:lstStyle/>
-          <a:p>
-            <a:pPr>
-              <a:defRPr sz="1000" b="1" i="0">
-                <a:solidFill>
-                  <a:srgbClr val="E56945"/>
-                </a:solidFill>
-                <a:latin typeface="Calibri"/>
-              </a:defRPr>
-            </a:pPr>
-            <a:r>
-              <a:t>✗  Starve</a:t>
-            </a:r>
-          </a:p>
-        </p:txBody>
-      </p:sp>
-      <p:sp>
-        <p:nvSpPr>
-          <p:cNvPr id="16" name="TextBox 15"/>
-          <p:cNvSpPr txBox="1"/>
-          <p:nvPr/>
-        </p:nvSpPr>
-        <p:spPr>
-          <a:xfrm>
-            <a:off x="2926080" y="2971800"/>
-            <a:ext cx="1280160" cy="777240"/>
-          </a:xfrm>
-          <a:prstGeom prst="rect">
-            <a:avLst/>
-          </a:prstGeom>
-          <a:noFill/>
-        </p:spPr>
-        <p:txBody>
-          <a:bodyPr wrap="square" lIns="0" rIns="0" tIns="0" bIns="0">
-            <a:spAutoFit/>
-          </a:bodyPr>
-          <a:lstStyle/>
-          <a:p>
-            <a:pPr>
-              <a:defRPr sz="800" b="0" i="0">
+            <a:off x="5108295" y="6035040"/>
+            <a:ext cx="1975103" cy="365760"/>
+          </a:xfrm>
+          <a:prstGeom prst="rect">
+            <a:avLst/>
+          </a:prstGeom>
+          <a:noFill/>
+        </p:spPr>
+        <p:txBody>
+          <a:bodyPr wrap="square" lIns="0" rIns="0" tIns="0" bIns="0">
+            <a:spAutoFit/>
+          </a:bodyPr>
+          <a:lstStyle/>
+          <a:p>
+            <a:pPr algn="ctr">
+              <a:defRPr sz="900" b="0" i="0">
                 <a:solidFill>
                   <a:srgbClr val="1A1A1A"/>
                 </a:solidFill>
@@ -4146,37 +4100,29 @@
               </a:defRPr>
             </a:pPr>
             <a:r>
-              <a:t>fixed window</a:t>
-            </a:r>
-            <a:br/>
-            <a:r>
-              <a:t>misses the</a:t>
-            </a:r>
-            <a:br/>
-            <a:r>
-              <a:t>distribution</a:t>
-            </a:r>
-          </a:p>
-        </p:txBody>
-      </p:sp>
-      <p:sp>
-        <p:nvSpPr>
-          <p:cNvPr id="17" name="Rectangle 16"/>
+              <a:t>RS-SG · V_thr ≪ 1</a:t>
+            </a:r>
+          </a:p>
+        </p:txBody>
+      </p:sp>
+      <p:sp>
+        <p:nvSpPr>
+          <p:cNvPr id="16" name="Rectangle 15"/>
           <p:cNvSpPr/>
           <p:nvPr/>
         </p:nvSpPr>
         <p:spPr>
           <a:xfrm>
-            <a:off x="457200" y="3840480"/>
-            <a:ext cx="777240" cy="1188720"/>
+            <a:off x="7339431" y="5623560"/>
+            <a:ext cx="2157984" cy="777240"/>
           </a:xfrm>
           <a:prstGeom prst="rect">
             <a:avLst/>
           </a:prstGeom>
           <a:solidFill>
-            <a:srgbClr val="E0B85F"/>
+            <a:srgbClr val="FAEECB"/>
           </a:solidFill>
-          <a:ln>
+          <a:ln w="19050">
             <a:solidFill>
               <a:srgbClr val="E0B85F"/>
             </a:solidFill>
@@ -4206,14 +4152,14 @@
       </p:sp>
       <p:sp>
         <p:nvSpPr>
-          <p:cNvPr id="18" name="TextBox 17"/>
-          <p:cNvSpPr txBox="1"/>
-          <p:nvPr/>
-        </p:nvSpPr>
-        <p:spPr>
-          <a:xfrm>
-            <a:off x="457200" y="4251960"/>
-            <a:ext cx="777240" cy="365760"/>
+          <p:cNvPr id="17" name="TextBox 16"/>
+          <p:cNvSpPr txBox="1"/>
+          <p:nvPr/>
+        </p:nvSpPr>
+        <p:spPr>
+          <a:xfrm>
+            <a:off x="7430871" y="5715000"/>
+            <a:ext cx="1975103" cy="320040"/>
           </a:xfrm>
           <a:prstGeom prst="rect">
             <a:avLst/>
@@ -4229,13 +4175,49 @@
             <a:pPr algn="ctr">
               <a:defRPr sz="1100" b="1" i="0">
                 <a:solidFill>
-                  <a:srgbClr val="0F2540"/>
-                </a:solidFill>
-                <a:latin typeface="Calibri"/>
-              </a:defRPr>
-            </a:pPr>
-            <a:r>
-              <a:t>RS-SG</a:t>
+                  <a:srgbClr val="E0B85F"/>
+                </a:solidFill>
+                <a:latin typeface="Calibri"/>
+              </a:defRPr>
+            </a:pPr>
+            <a:r>
+              <a:t>✗ Vanishing</a:t>
+            </a:r>
+          </a:p>
+        </p:txBody>
+      </p:sp>
+      <p:sp>
+        <p:nvSpPr>
+          <p:cNvPr id="18" name="TextBox 17"/>
+          <p:cNvSpPr txBox="1"/>
+          <p:nvPr/>
+        </p:nvSpPr>
+        <p:spPr>
+          <a:xfrm>
+            <a:off x="7430871" y="6035040"/>
+            <a:ext cx="1975103" cy="365760"/>
+          </a:xfrm>
+          <a:prstGeom prst="rect">
+            <a:avLst/>
+          </a:prstGeom>
+          <a:noFill/>
+        </p:spPr>
+        <p:txBody>
+          <a:bodyPr wrap="square" lIns="0" rIns="0" tIns="0" bIns="0">
+            <a:spAutoFit/>
+          </a:bodyPr>
+          <a:lstStyle/>
+          <a:p>
+            <a:pPr algn="ctr">
+              <a:defRPr sz="900" b="0" i="0">
+                <a:solidFill>
+                  <a:srgbClr val="1A1A1A"/>
+                </a:solidFill>
+                <a:latin typeface="Calibri"/>
+              </a:defRPr>
+            </a:pPr>
+            <a:r>
+              <a:t>RS-SG · V_thr ≫ 1</a:t>
             </a:r>
           </a:p>
         </p:txBody>
@@ -4248,18 +4230,18 @@
         </p:nvSpPr>
         <p:spPr>
           <a:xfrm>
-            <a:off x="1325880" y="3840480"/>
-            <a:ext cx="1463040" cy="1188720"/>
+            <a:off x="9662007" y="5623560"/>
+            <a:ext cx="2157984" cy="777240"/>
           </a:xfrm>
           <a:prstGeom prst="rect">
             <a:avLst/>
           </a:prstGeom>
           <a:solidFill>
-            <a:srgbClr val="FAEECB"/>
+            <a:srgbClr val="E5F5F0"/>
           </a:solidFill>
-          <a:ln w="10160">
+          <a:ln w="19050">
             <a:solidFill>
-              <a:srgbClr val="E0B85F"/>
+              <a:srgbClr val="1D7E7E"/>
             </a:solidFill>
           </a:ln>
         </p:spPr>
@@ -4293,30 +4275,30 @@
         </p:nvSpPr>
         <p:spPr>
           <a:xfrm>
-            <a:off x="1417320" y="3931920"/>
-            <a:ext cx="1280160" cy="274320"/>
-          </a:xfrm>
-          <a:prstGeom prst="rect">
-            <a:avLst/>
-          </a:prstGeom>
-          <a:noFill/>
-        </p:spPr>
-        <p:txBody>
-          <a:bodyPr wrap="square" lIns="0" rIns="0" tIns="0" bIns="0">
-            <a:spAutoFit/>
-          </a:bodyPr>
-          <a:lstStyle/>
-          <a:p>
-            <a:pPr>
-              <a:defRPr sz="1000" b="1" i="0">
-                <a:solidFill>
-                  <a:srgbClr val="E56945"/>
-                </a:solidFill>
-                <a:latin typeface="Calibri"/>
-              </a:defRPr>
-            </a:pPr>
-            <a:r>
-              <a:t>✗  Explode</a:t>
+            <a:off x="9753447" y="5715000"/>
+            <a:ext cx="1975103" cy="320040"/>
+          </a:xfrm>
+          <a:prstGeom prst="rect">
+            <a:avLst/>
+          </a:prstGeom>
+          <a:noFill/>
+        </p:spPr>
+        <p:txBody>
+          <a:bodyPr wrap="square" lIns="0" rIns="0" tIns="0" bIns="0">
+            <a:spAutoFit/>
+          </a:bodyPr>
+          <a:lstStyle/>
+          <a:p>
+            <a:pPr algn="ctr">
+              <a:defRPr sz="1100" b="1" i="0">
+                <a:solidFill>
+                  <a:srgbClr val="1D7E7E"/>
+                </a:solidFill>
+                <a:latin typeface="Calibri"/>
+              </a:defRPr>
+            </a:pPr>
+            <a:r>
+              <a:t>✓ Balanced</a:t>
             </a:r>
           </a:p>
         </p:txBody>
@@ -4329,294 +4311,8 @@
         </p:nvSpPr>
         <p:spPr>
           <a:xfrm>
-            <a:off x="1417320" y="4251960"/>
-            <a:ext cx="1280160" cy="777240"/>
-          </a:xfrm>
-          <a:prstGeom prst="rect">
-            <a:avLst/>
-          </a:prstGeom>
-          <a:noFill/>
-        </p:spPr>
-        <p:txBody>
-          <a:bodyPr wrap="square" lIns="0" rIns="0" tIns="0" bIns="0">
-            <a:spAutoFit/>
-          </a:bodyPr>
-          <a:lstStyle/>
-          <a:p>
-            <a:pPr>
-              <a:defRPr sz="800" b="0" i="0">
-                <a:solidFill>
-                  <a:srgbClr val="1A1A1A"/>
-                </a:solidFill>
-                <a:latin typeface="Calibri"/>
-              </a:defRPr>
-            </a:pPr>
-            <a:r>
-              <a:t>1/V_thr</a:t>
-            </a:r>
-            <a:br/>
-            <a:r>
-              <a:t>blows the</a:t>
-            </a:r>
-            <a:br/>
-            <a:r>
-              <a:t>magnitude up</a:t>
-            </a:r>
-          </a:p>
-        </p:txBody>
-      </p:sp>
-      <p:sp>
-        <p:nvSpPr>
-          <p:cNvPr id="22" name="Rectangle 21"/>
-          <p:cNvSpPr/>
-          <p:nvPr/>
-        </p:nvSpPr>
-        <p:spPr>
-          <a:xfrm>
-            <a:off x="2834640" y="3840480"/>
-            <a:ext cx="1463040" cy="1188720"/>
-          </a:xfrm>
-          <a:prstGeom prst="rect">
-            <a:avLst/>
-          </a:prstGeom>
-          <a:solidFill>
-            <a:srgbClr val="FAEECB"/>
-          </a:solidFill>
-          <a:ln w="10160">
-            <a:solidFill>
-              <a:srgbClr val="E0B85F"/>
-            </a:solidFill>
-          </a:ln>
-        </p:spPr>
-        <p:style>
-          <a:lnRef idx="1">
-            <a:schemeClr val="accent1"/>
-          </a:lnRef>
-          <a:fillRef idx="3">
-            <a:schemeClr val="accent1"/>
-          </a:fillRef>
-          <a:effectRef idx="2">
-            <a:schemeClr val="accent1"/>
-          </a:effectRef>
-          <a:fontRef idx="minor">
-            <a:schemeClr val="lt1"/>
-          </a:fontRef>
-        </p:style>
-        <p:txBody>
-          <a:bodyPr rtlCol="0" anchor="ctr"/>
-          <a:lstStyle/>
-          <a:p>
-            <a:pPr algn="ctr"/>
-          </a:p>
-        </p:txBody>
-      </p:sp>
-      <p:sp>
-        <p:nvSpPr>
-          <p:cNvPr id="23" name="TextBox 22"/>
-          <p:cNvSpPr txBox="1"/>
-          <p:nvPr/>
-        </p:nvSpPr>
-        <p:spPr>
-          <a:xfrm>
-            <a:off x="2926080" y="3931920"/>
-            <a:ext cx="1280160" cy="274320"/>
-          </a:xfrm>
-          <a:prstGeom prst="rect">
-            <a:avLst/>
-          </a:prstGeom>
-          <a:noFill/>
-        </p:spPr>
-        <p:txBody>
-          <a:bodyPr wrap="square" lIns="0" rIns="0" tIns="0" bIns="0">
-            <a:spAutoFit/>
-          </a:bodyPr>
-          <a:lstStyle/>
-          <a:p>
-            <a:pPr>
-              <a:defRPr sz="1000" b="1" i="0">
-                <a:solidFill>
-                  <a:srgbClr val="E56945"/>
-                </a:solidFill>
-                <a:latin typeface="Calibri"/>
-              </a:defRPr>
-            </a:pPr>
-            <a:r>
-              <a:t>✗  Vanish</a:t>
-            </a:r>
-          </a:p>
-        </p:txBody>
-      </p:sp>
-      <p:sp>
-        <p:nvSpPr>
-          <p:cNvPr id="24" name="TextBox 23"/>
-          <p:cNvSpPr txBox="1"/>
-          <p:nvPr/>
-        </p:nvSpPr>
-        <p:spPr>
-          <a:xfrm>
-            <a:off x="2926080" y="4251960"/>
-            <a:ext cx="1280160" cy="777240"/>
-          </a:xfrm>
-          <a:prstGeom prst="rect">
-            <a:avLst/>
-          </a:prstGeom>
-          <a:noFill/>
-        </p:spPr>
-        <p:txBody>
-          <a:bodyPr wrap="square" lIns="0" rIns="0" tIns="0" bIns="0">
-            <a:spAutoFit/>
-          </a:bodyPr>
-          <a:lstStyle/>
-          <a:p>
-            <a:pPr>
-              <a:defRPr sz="800" b="0" i="0">
-                <a:solidFill>
-                  <a:srgbClr val="1A1A1A"/>
-                </a:solidFill>
-                <a:latin typeface="Calibri"/>
-              </a:defRPr>
-            </a:pPr>
-            <a:r>
-              <a:t>1/V_thr</a:t>
-            </a:r>
-            <a:br/>
-            <a:r>
-              <a:t>shrinks the</a:t>
-            </a:r>
-            <a:br/>
-            <a:r>
-              <a:t>magnitude</a:t>
-            </a:r>
-          </a:p>
-        </p:txBody>
-      </p:sp>
-      <p:sp>
-        <p:nvSpPr>
-          <p:cNvPr id="25" name="Rectangle 24"/>
-          <p:cNvSpPr/>
-          <p:nvPr/>
-        </p:nvSpPr>
-        <p:spPr>
-          <a:xfrm>
-            <a:off x="457200" y="5120640"/>
-            <a:ext cx="3840480" cy="868680"/>
-          </a:xfrm>
-          <a:prstGeom prst="rect">
-            <a:avLst/>
-          </a:prstGeom>
-          <a:solidFill>
-            <a:srgbClr val="1D7E7E"/>
-          </a:solidFill>
-          <a:ln>
-            <a:solidFill>
-              <a:srgbClr val="1D7E7E"/>
-            </a:solidFill>
-          </a:ln>
-        </p:spPr>
-        <p:style>
-          <a:lnRef idx="1">
-            <a:schemeClr val="accent1"/>
-          </a:lnRef>
-          <a:fillRef idx="3">
-            <a:schemeClr val="accent1"/>
-          </a:fillRef>
-          <a:effectRef idx="2">
-            <a:schemeClr val="accent1"/>
-          </a:effectRef>
-          <a:fontRef idx="minor">
-            <a:schemeClr val="lt1"/>
-          </a:fontRef>
-        </p:style>
-        <p:txBody>
-          <a:bodyPr rtlCol="0" anchor="ctr"/>
-          <a:lstStyle/>
-          <a:p>
-            <a:pPr algn="ctr"/>
-          </a:p>
-        </p:txBody>
-      </p:sp>
-      <p:sp>
-        <p:nvSpPr>
-          <p:cNvPr id="26" name="TextBox 25"/>
-          <p:cNvSpPr txBox="1"/>
-          <p:nvPr/>
-        </p:nvSpPr>
-        <p:spPr>
-          <a:xfrm>
-            <a:off x="594360" y="5212079"/>
-            <a:ext cx="914400" cy="274320"/>
-          </a:xfrm>
-          <a:prstGeom prst="rect">
-            <a:avLst/>
-          </a:prstGeom>
-          <a:noFill/>
-        </p:spPr>
-        <p:txBody>
-          <a:bodyPr wrap="square" lIns="0" rIns="0" tIns="0" bIns="0">
-            <a:spAutoFit/>
-          </a:bodyPr>
-          <a:lstStyle/>
-          <a:p>
-            <a:pPr>
-              <a:defRPr sz="1100" b="1" i="0">
-                <a:solidFill>
-                  <a:srgbClr val="FFFFFF"/>
-                </a:solidFill>
-                <a:latin typeface="Calibri"/>
-              </a:defRPr>
-            </a:pPr>
-            <a:r>
-              <a:t>TrSG</a:t>
-            </a:r>
-          </a:p>
-        </p:txBody>
-      </p:sp>
-      <p:sp>
-        <p:nvSpPr>
-          <p:cNvPr id="27" name="TextBox 26"/>
-          <p:cNvSpPr txBox="1"/>
-          <p:nvPr/>
-        </p:nvSpPr>
-        <p:spPr>
-          <a:xfrm>
-            <a:off x="594360" y="5532120"/>
-            <a:ext cx="3657600" cy="411480"/>
-          </a:xfrm>
-          <a:prstGeom prst="rect">
-            <a:avLst/>
-          </a:prstGeom>
-          <a:noFill/>
-        </p:spPr>
-        <p:txBody>
-          <a:bodyPr wrap="square" lIns="0" rIns="0" tIns="0" bIns="0">
-            <a:spAutoFit/>
-          </a:bodyPr>
-          <a:lstStyle/>
-          <a:p>
-            <a:pPr>
-              <a:defRPr sz="1000" b="1" i="0">
-                <a:solidFill>
-                  <a:srgbClr val="FFFFFF"/>
-                </a:solidFill>
-                <a:latin typeface="Calibri"/>
-              </a:defRPr>
-            </a:pPr>
-            <a:r>
-              <a:t>✓  window scales with V_thr · magnitude stays 1</a:t>
-            </a:r>
-          </a:p>
-        </p:txBody>
-      </p:sp>
-      <p:sp>
-        <p:nvSpPr>
-          <p:cNvPr id="28" name="TextBox 27"/>
-          <p:cNvSpPr txBox="1"/>
-          <p:nvPr/>
-        </p:nvSpPr>
-        <p:spPr>
-          <a:xfrm>
-            <a:off x="4297680" y="6035040"/>
-            <a:ext cx="7315200" cy="274320"/>
+            <a:off x="9753447" y="6035040"/>
+            <a:ext cx="1975103" cy="365760"/>
           </a:xfrm>
           <a:prstGeom prst="rect">
             <a:avLst/>
@@ -4630,22 +4326,22 @@
           <a:lstStyle/>
           <a:p>
             <a:pPr algn="ctr">
-              <a:defRPr sz="900" b="0" i="1">
-                <a:solidFill>
-                  <a:srgbClr val="7A7A7A"/>
-                </a:solidFill>
-                <a:latin typeface="Calibri"/>
-              </a:defRPr>
-            </a:pPr>
-            <a:r>
-              <a:t>Each colored box = active gradient region.  Width = window where gradient flows.  Height = magnitude.</a:t>
-            </a:r>
-          </a:p>
-        </p:txBody>
-      </p:sp>
-      <p:sp>
-        <p:nvSpPr>
-          <p:cNvPr id="29" name="TextBox 28"/>
+              <a:defRPr sz="900" b="0" i="0">
+                <a:solidFill>
+                  <a:srgbClr val="0F2540"/>
+                </a:solidFill>
+                <a:latin typeface="Calibri"/>
+              </a:defRPr>
+            </a:pPr>
+            <a:r>
+              <a:t>TrSG · all regimes</a:t>
+            </a:r>
+          </a:p>
+        </p:txBody>
+      </p:sp>
+      <p:sp>
+        <p:nvSpPr>
+          <p:cNvPr id="22" name="TextBox 21"/>
           <p:cNvSpPr txBox="1"/>
           <p:nvPr/>
         </p:nvSpPr>
@@ -4681,7 +4377,7 @@
       </p:sp>
       <p:sp>
         <p:nvSpPr>
-          <p:cNvPr id="30" name="TextBox 29"/>
+          <p:cNvPr id="23" name="TextBox 22"/>
           <p:cNvSpPr txBox="1"/>
           <p:nvPr/>
         </p:nvSpPr>
@@ -15957,8 +15653,146 @@
         </p:nvSpPr>
         <p:spPr>
           <a:xfrm>
-            <a:off x="457200" y="2286000"/>
-            <a:ext cx="5486400" cy="1371600"/>
+            <a:off x="457200" y="2194560"/>
+            <a:ext cx="54864" cy="640080"/>
+          </a:xfrm>
+          <a:prstGeom prst="rect">
+            <a:avLst/>
+          </a:prstGeom>
+          <a:solidFill>
+            <a:srgbClr val="E0B85F"/>
+          </a:solidFill>
+          <a:ln>
+            <a:noFill/>
+          </a:ln>
+        </p:spPr>
+        <p:style>
+          <a:lnRef idx="1">
+            <a:schemeClr val="accent1"/>
+          </a:lnRef>
+          <a:fillRef idx="3">
+            <a:schemeClr val="accent1"/>
+          </a:fillRef>
+          <a:effectRef idx="2">
+            <a:schemeClr val="accent1"/>
+          </a:effectRef>
+          <a:fontRef idx="minor">
+            <a:schemeClr val="lt1"/>
+          </a:fontRef>
+        </p:style>
+        <p:txBody>
+          <a:bodyPr rtlCol="0" anchor="ctr"/>
+          <a:lstStyle/>
+          <a:p>
+            <a:pPr algn="ctr"/>
+          </a:p>
+        </p:txBody>
+      </p:sp>
+      <p:sp>
+        <p:nvSpPr>
+          <p:cNvPr id="6" name="Rectangle 5"/>
+          <p:cNvSpPr/>
+          <p:nvPr/>
+        </p:nvSpPr>
+        <p:spPr>
+          <a:xfrm>
+            <a:off x="512064" y="2194560"/>
+            <a:ext cx="11192256" cy="640080"/>
+          </a:xfrm>
+          <a:prstGeom prst="rect">
+            <a:avLst/>
+          </a:prstGeom>
+          <a:solidFill>
+            <a:srgbClr val="F8F7F2"/>
+          </a:solidFill>
+          <a:ln>
+            <a:noFill/>
+          </a:ln>
+        </p:spPr>
+        <p:style>
+          <a:lnRef idx="1">
+            <a:schemeClr val="accent1"/>
+          </a:lnRef>
+          <a:fillRef idx="3">
+            <a:schemeClr val="accent1"/>
+          </a:fillRef>
+          <a:effectRef idx="2">
+            <a:schemeClr val="accent1"/>
+          </a:effectRef>
+          <a:fontRef idx="minor">
+            <a:schemeClr val="lt1"/>
+          </a:fontRef>
+        </p:style>
+        <p:txBody>
+          <a:bodyPr rtlCol="0" anchor="ctr"/>
+          <a:lstStyle/>
+          <a:p>
+            <a:pPr algn="ctr"/>
+          </a:p>
+        </p:txBody>
+      </p:sp>
+      <p:sp>
+        <p:nvSpPr>
+          <p:cNvPr id="7" name="TextBox 6"/>
+          <p:cNvSpPr txBox="1"/>
+          <p:nvPr/>
+        </p:nvSpPr>
+        <p:spPr>
+          <a:xfrm>
+            <a:off x="777240" y="2331720"/>
+            <a:ext cx="10789920" cy="365759"/>
+          </a:xfrm>
+          <a:prstGeom prst="rect">
+            <a:avLst/>
+          </a:prstGeom>
+          <a:noFill/>
+        </p:spPr>
+        <p:txBody>
+          <a:bodyPr wrap="square">
+            <a:spAutoFit/>
+          </a:bodyPr>
+          <a:lstStyle/>
+          <a:p>
+            <a:pPr>
+              <a:defRPr sz="1200" b="1">
+                <a:solidFill>
+                  <a:srgbClr val="0F2540"/>
+                </a:solidFill>
+                <a:latin typeface="Calibri"/>
+              </a:defRPr>
+            </a:pPr>
+            <a:r>
+              <a:t>Recap — Surrogate Gradient (SG)</a:t>
+            </a:r>
+          </a:p>
+          <a:p>
+            <a:pPr>
+              <a:spcBef>
+                <a:spcPts val="600"/>
+              </a:spcBef>
+              <a:defRPr sz="1100">
+                <a:solidFill>
+                  <a:srgbClr val="1A1A1A"/>
+                </a:solidFill>
+                <a:latin typeface="Calibri"/>
+              </a:defRPr>
+            </a:pPr>
+            <a:r>
+              <a:t>Spike S = H(x) is non-differentiable.  In backward pass, replace H' with a smooth f'(x).  The choice of x is what differs below.</a:t>
+            </a:r>
+          </a:p>
+        </p:txBody>
+      </p:sp>
+      <p:sp>
+        <p:nvSpPr>
+          <p:cNvPr id="8" name="Rectangle 7"/>
+          <p:cNvSpPr/>
+          <p:nvPr/>
+        </p:nvSpPr>
+        <p:spPr>
+          <a:xfrm>
+            <a:off x="457200" y="3017520"/>
+            <a:ext cx="5486400" cy="1188720"/>
           </a:xfrm>
           <a:prstGeom prst="rect">
             <a:avLst/>
@@ -15996,13 +15830,13 @@
       </p:sp>
       <p:sp>
         <p:nvSpPr>
-          <p:cNvPr id="6" name="TextBox 5"/>
-          <p:cNvSpPr txBox="1"/>
-          <p:nvPr/>
-        </p:nvSpPr>
-        <p:spPr>
-          <a:xfrm>
-            <a:off x="640080" y="2377440"/>
+          <p:cNvPr id="9" name="TextBox 8"/>
+          <p:cNvSpPr txBox="1"/>
+          <p:nvPr/>
+        </p:nvSpPr>
+        <p:spPr>
+          <a:xfrm>
+            <a:off x="640080" y="3108960"/>
             <a:ext cx="5120640" cy="320040"/>
           </a:xfrm>
           <a:prstGeom prst="rect">
@@ -16032,13 +15866,13 @@
       </p:sp>
       <p:sp>
         <p:nvSpPr>
-          <p:cNvPr id="7" name="TextBox 6"/>
-          <p:cNvSpPr txBox="1"/>
-          <p:nvPr/>
-        </p:nvSpPr>
-        <p:spPr>
-          <a:xfrm>
-            <a:off x="640080" y="2743200"/>
+          <p:cNvPr id="10" name="TextBox 9"/>
+          <p:cNvSpPr txBox="1"/>
+          <p:nvPr/>
+        </p:nvSpPr>
+        <p:spPr>
+          <a:xfrm>
+            <a:off x="640080" y="3429000"/>
             <a:ext cx="5120640" cy="411480"/>
           </a:xfrm>
           <a:prstGeom prst="rect">
@@ -16068,14 +15902,14 @@
       </p:sp>
       <p:sp>
         <p:nvSpPr>
-          <p:cNvPr id="8" name="TextBox 7"/>
-          <p:cNvSpPr txBox="1"/>
-          <p:nvPr/>
-        </p:nvSpPr>
-        <p:spPr>
-          <a:xfrm>
-            <a:off x="640080" y="3246120"/>
-            <a:ext cx="5120640" cy="365760"/>
+          <p:cNvPr id="11" name="TextBox 10"/>
+          <p:cNvSpPr txBox="1"/>
+          <p:nvPr/>
+        </p:nvSpPr>
+        <p:spPr>
+          <a:xfrm>
+            <a:off x="640080" y="3886200"/>
+            <a:ext cx="5120640" cy="274320"/>
           </a:xfrm>
           <a:prstGeom prst="rect">
             <a:avLst/>
@@ -16104,14 +15938,14 @@
       </p:sp>
       <p:sp>
         <p:nvSpPr>
-          <p:cNvPr id="9" name="Rectangle 8"/>
+          <p:cNvPr id="12" name="Rectangle 11"/>
           <p:cNvSpPr/>
           <p:nvPr/>
         </p:nvSpPr>
         <p:spPr>
           <a:xfrm>
-            <a:off x="6263640" y="2286000"/>
-            <a:ext cx="5486400" cy="1371600"/>
+            <a:off x="6263640" y="3017520"/>
+            <a:ext cx="5486400" cy="1188720"/>
           </a:xfrm>
           <a:prstGeom prst="rect">
             <a:avLst/>
@@ -16149,13 +15983,13 @@
       </p:sp>
       <p:sp>
         <p:nvSpPr>
-          <p:cNvPr id="10" name="TextBox 9"/>
-          <p:cNvSpPr txBox="1"/>
-          <p:nvPr/>
-        </p:nvSpPr>
-        <p:spPr>
-          <a:xfrm>
-            <a:off x="6446520" y="2377440"/>
+          <p:cNvPr id="13" name="TextBox 12"/>
+          <p:cNvSpPr txBox="1"/>
+          <p:nvPr/>
+        </p:nvSpPr>
+        <p:spPr>
+          <a:xfrm>
+            <a:off x="6446520" y="3108960"/>
             <a:ext cx="5120640" cy="320040"/>
           </a:xfrm>
           <a:prstGeom prst="rect">
@@ -16185,13 +16019,13 @@
       </p:sp>
       <p:sp>
         <p:nvSpPr>
-          <p:cNvPr id="11" name="TextBox 10"/>
-          <p:cNvSpPr txBox="1"/>
-          <p:nvPr/>
-        </p:nvSpPr>
-        <p:spPr>
-          <a:xfrm>
-            <a:off x="6446520" y="2743200"/>
+          <p:cNvPr id="14" name="TextBox 13"/>
+          <p:cNvSpPr txBox="1"/>
+          <p:nvPr/>
+        </p:nvSpPr>
+        <p:spPr>
+          <a:xfrm>
+            <a:off x="6446520" y="3429000"/>
             <a:ext cx="5120640" cy="411480"/>
           </a:xfrm>
           <a:prstGeom prst="rect">
@@ -16221,14 +16055,14 @@
       </p:sp>
       <p:sp>
         <p:nvSpPr>
-          <p:cNvPr id="12" name="TextBox 11"/>
-          <p:cNvSpPr txBox="1"/>
-          <p:nvPr/>
-        </p:nvSpPr>
-        <p:spPr>
-          <a:xfrm>
-            <a:off x="6446520" y="3246120"/>
-            <a:ext cx="5120640" cy="365760"/>
+          <p:cNvPr id="15" name="TextBox 14"/>
+          <p:cNvSpPr txBox="1"/>
+          <p:nvPr/>
+        </p:nvSpPr>
+        <p:spPr>
+          <a:xfrm>
+            <a:off x="6446520" y="3886200"/>
+            <a:ext cx="5120640" cy="274320"/>
           </a:xfrm>
           <a:prstGeom prst="rect">
             <a:avLst/>
@@ -16257,13 +16091,13 @@
       </p:sp>
       <p:sp>
         <p:nvSpPr>
-          <p:cNvPr id="13" name="TextBox 12"/>
-          <p:cNvSpPr txBox="1"/>
-          <p:nvPr/>
-        </p:nvSpPr>
-        <p:spPr>
-          <a:xfrm>
-            <a:off x="457200" y="3794760"/>
+          <p:cNvPr id="16" name="TextBox 15"/>
+          <p:cNvSpPr txBox="1"/>
+          <p:nvPr/>
+        </p:nvSpPr>
+        <p:spPr>
+          <a:xfrm>
+            <a:off x="457200" y="4343400"/>
             <a:ext cx="11247120" cy="274320"/>
           </a:xfrm>
           <a:prstGeom prst="rect">
@@ -16277,8 +16111,8 @@
           </a:bodyPr>
           <a:lstStyle/>
           <a:p>
-            <a:pPr>
-              <a:defRPr sz="1100" b="0" i="1">
+            <a:pPr algn="ctr">
+              <a:defRPr sz="1000" b="0" i="1">
                 <a:solidFill>
                   <a:srgbClr val="7A7A7A"/>
                 </a:solidFill>
@@ -16293,7 +16127,7 @@
       </p:sp>
       <p:pic>
         <p:nvPicPr>
-          <p:cNvPr id="14" name="Picture 13" descr="sg_windows.png"/>
+          <p:cNvPr id="17" name="Picture 16" descr="sg_windows.png"/>
           <p:cNvPicPr>
             <a:picLocks noChangeAspect="1"/>
           </p:cNvPicPr>
@@ -16307,8 +16141,8 @@
         </p:blipFill>
         <p:spPr>
           <a:xfrm>
-            <a:off x="3108960" y="4023360"/>
-            <a:ext cx="5943600" cy="2181828"/>
+            <a:off x="4114800" y="4617720"/>
+            <a:ext cx="3931920" cy="1443363"/>
           </a:xfrm>
           <a:prstGeom prst="rect">
             <a:avLst/>
@@ -16317,7 +16151,7 @@
       </p:pic>
       <p:sp>
         <p:nvSpPr>
-          <p:cNvPr id="15" name="Rectangle 14"/>
+          <p:cNvPr id="18" name="Rectangle 17"/>
           <p:cNvSpPr/>
           <p:nvPr/>
         </p:nvSpPr>
@@ -16360,7 +16194,7 @@
       </p:sp>
       <p:sp>
         <p:nvSpPr>
-          <p:cNvPr id="16" name="Rectangle 15"/>
+          <p:cNvPr id="19" name="Rectangle 18"/>
           <p:cNvSpPr/>
           <p:nvPr/>
         </p:nvSpPr>
@@ -16403,7 +16237,7 @@
       </p:sp>
       <p:sp>
         <p:nvSpPr>
-          <p:cNvPr id="17" name="TextBox 16"/>
+          <p:cNvPr id="20" name="TextBox 19"/>
           <p:cNvSpPr txBox="1"/>
           <p:nvPr/>
         </p:nvSpPr>
@@ -16439,7 +16273,7 @@
       </p:sp>
       <p:sp>
         <p:nvSpPr>
-          <p:cNvPr id="18" name="TextBox 17"/>
+          <p:cNvPr id="21" name="TextBox 20"/>
           <p:cNvSpPr txBox="1"/>
           <p:nvPr/>
         </p:nvSpPr>
@@ -16475,7 +16309,7 @@
       </p:sp>
       <p:sp>
         <p:nvSpPr>
-          <p:cNvPr id="19" name="TextBox 18"/>
+          <p:cNvPr id="22" name="TextBox 21"/>
           <p:cNvSpPr txBox="1"/>
           <p:nvPr/>
         </p:nvSpPr>

--- a/Hyunho_Kook_Master_Defense.pptx
+++ b/Hyunho_Kook_Master_Defense.pptx
@@ -23,6 +23,7 @@
     <p:sldId id="271" r:id="rId22"/>
     <p:sldId id="272" r:id="rId23"/>
     <p:sldId id="273" r:id="rId24"/>
+    <p:sldId id="274" r:id="rId25"/>
   </p:sldIdLst>
   <p:sldSz cx="12191695" cy="6858000" type="screen4x3"/>
   <p:notesSz cx="6858000" cy="9144000"/>
@@ -3653,7 +3654,7 @@
               </a:defRPr>
             </a:pPr>
             <a:r>
-              <a:t>Four Failure Modes — and One Fix</a:t>
+              <a:t>Two Surrogate-Gradient Families</a:t>
             </a:r>
           </a:p>
         </p:txBody>
@@ -3689,14 +3690,494 @@
               </a:defRPr>
             </a:pPr>
             <a:r>
-              <a:t>Both window width AND gradient magnitude must scale correctly with V_thr</a:t>
+              <a:t>AS-SG and RS-SG — look similar, behave very differently when V_thr is trainable</a:t>
+            </a:r>
+          </a:p>
+        </p:txBody>
+      </p:sp>
+      <p:sp>
+        <p:nvSpPr>
+          <p:cNvPr id="5" name="Rectangle 4"/>
+          <p:cNvSpPr/>
+          <p:nvPr/>
+        </p:nvSpPr>
+        <p:spPr>
+          <a:xfrm>
+            <a:off x="457200" y="2194560"/>
+            <a:ext cx="54864" cy="640080"/>
+          </a:xfrm>
+          <a:prstGeom prst="rect">
+            <a:avLst/>
+          </a:prstGeom>
+          <a:solidFill>
+            <a:srgbClr val="E0B85F"/>
+          </a:solidFill>
+          <a:ln>
+            <a:noFill/>
+          </a:ln>
+        </p:spPr>
+        <p:style>
+          <a:lnRef idx="1">
+            <a:schemeClr val="accent1"/>
+          </a:lnRef>
+          <a:fillRef idx="3">
+            <a:schemeClr val="accent1"/>
+          </a:fillRef>
+          <a:effectRef idx="2">
+            <a:schemeClr val="accent1"/>
+          </a:effectRef>
+          <a:fontRef idx="minor">
+            <a:schemeClr val="lt1"/>
+          </a:fontRef>
+        </p:style>
+        <p:txBody>
+          <a:bodyPr rtlCol="0" anchor="ctr"/>
+          <a:lstStyle/>
+          <a:p>
+            <a:pPr algn="ctr"/>
+          </a:p>
+        </p:txBody>
+      </p:sp>
+      <p:sp>
+        <p:nvSpPr>
+          <p:cNvPr id="6" name="Rectangle 5"/>
+          <p:cNvSpPr/>
+          <p:nvPr/>
+        </p:nvSpPr>
+        <p:spPr>
+          <a:xfrm>
+            <a:off x="512064" y="2194560"/>
+            <a:ext cx="11192256" cy="640080"/>
+          </a:xfrm>
+          <a:prstGeom prst="rect">
+            <a:avLst/>
+          </a:prstGeom>
+          <a:solidFill>
+            <a:srgbClr val="F8F7F2"/>
+          </a:solidFill>
+          <a:ln>
+            <a:noFill/>
+          </a:ln>
+        </p:spPr>
+        <p:style>
+          <a:lnRef idx="1">
+            <a:schemeClr val="accent1"/>
+          </a:lnRef>
+          <a:fillRef idx="3">
+            <a:schemeClr val="accent1"/>
+          </a:fillRef>
+          <a:effectRef idx="2">
+            <a:schemeClr val="accent1"/>
+          </a:effectRef>
+          <a:fontRef idx="minor">
+            <a:schemeClr val="lt1"/>
+          </a:fontRef>
+        </p:style>
+        <p:txBody>
+          <a:bodyPr rtlCol="0" anchor="ctr"/>
+          <a:lstStyle/>
+          <a:p>
+            <a:pPr algn="ctr"/>
+          </a:p>
+        </p:txBody>
+      </p:sp>
+      <p:sp>
+        <p:nvSpPr>
+          <p:cNvPr id="7" name="TextBox 6"/>
+          <p:cNvSpPr txBox="1"/>
+          <p:nvPr/>
+        </p:nvSpPr>
+        <p:spPr>
+          <a:xfrm>
+            <a:off x="777240" y="2331720"/>
+            <a:ext cx="10789920" cy="365759"/>
+          </a:xfrm>
+          <a:prstGeom prst="rect">
+            <a:avLst/>
+          </a:prstGeom>
+          <a:noFill/>
+        </p:spPr>
+        <p:txBody>
+          <a:bodyPr wrap="square">
+            <a:spAutoFit/>
+          </a:bodyPr>
+          <a:lstStyle/>
+          <a:p>
+            <a:pPr>
+              <a:defRPr sz="1200" b="1">
+                <a:solidFill>
+                  <a:srgbClr val="0F2540"/>
+                </a:solidFill>
+                <a:latin typeface="Calibri"/>
+              </a:defRPr>
+            </a:pPr>
+            <a:r>
+              <a:t>Recap — Surrogate Gradient (SG)</a:t>
+            </a:r>
+          </a:p>
+          <a:p>
+            <a:pPr>
+              <a:spcBef>
+                <a:spcPts val="600"/>
+              </a:spcBef>
+              <a:defRPr sz="1100">
+                <a:solidFill>
+                  <a:srgbClr val="1A1A1A"/>
+                </a:solidFill>
+                <a:latin typeface="Calibri"/>
+              </a:defRPr>
+            </a:pPr>
+            <a:r>
+              <a:t>Spike S = H(x) is non-differentiable.  In backward pass, replace H' with a smooth f'(x).  The choice of x is what differs below.</a:t>
+            </a:r>
+          </a:p>
+        </p:txBody>
+      </p:sp>
+      <p:sp>
+        <p:nvSpPr>
+          <p:cNvPr id="8" name="Rectangle 7"/>
+          <p:cNvSpPr/>
+          <p:nvPr/>
+        </p:nvSpPr>
+        <p:spPr>
+          <a:xfrm>
+            <a:off x="457200" y="3017520"/>
+            <a:ext cx="5486400" cy="1188720"/>
+          </a:xfrm>
+          <a:prstGeom prst="rect">
+            <a:avLst/>
+          </a:prstGeom>
+          <a:solidFill>
+            <a:srgbClr val="F8F7F2"/>
+          </a:solidFill>
+          <a:ln w="19050">
+            <a:solidFill>
+              <a:srgbClr val="0F2540"/>
+            </a:solidFill>
+          </a:ln>
+        </p:spPr>
+        <p:style>
+          <a:lnRef idx="1">
+            <a:schemeClr val="accent1"/>
+          </a:lnRef>
+          <a:fillRef idx="3">
+            <a:schemeClr val="accent1"/>
+          </a:fillRef>
+          <a:effectRef idx="2">
+            <a:schemeClr val="accent1"/>
+          </a:effectRef>
+          <a:fontRef idx="minor">
+            <a:schemeClr val="lt1"/>
+          </a:fontRef>
+        </p:style>
+        <p:txBody>
+          <a:bodyPr rtlCol="0" anchor="ctr"/>
+          <a:lstStyle/>
+          <a:p>
+            <a:pPr algn="ctr"/>
+          </a:p>
+        </p:txBody>
+      </p:sp>
+      <p:sp>
+        <p:nvSpPr>
+          <p:cNvPr id="9" name="TextBox 8"/>
+          <p:cNvSpPr txBox="1"/>
+          <p:nvPr/>
+        </p:nvSpPr>
+        <p:spPr>
+          <a:xfrm>
+            <a:off x="640080" y="3108960"/>
+            <a:ext cx="5120640" cy="320040"/>
+          </a:xfrm>
+          <a:prstGeom prst="rect">
+            <a:avLst/>
+          </a:prstGeom>
+          <a:noFill/>
+        </p:spPr>
+        <p:txBody>
+          <a:bodyPr wrap="square" lIns="0" rIns="0" tIns="0" bIns="0">
+            <a:spAutoFit/>
+          </a:bodyPr>
+          <a:lstStyle/>
+          <a:p>
+            <a:pPr>
+              <a:defRPr sz="1300" b="1" i="0">
+                <a:solidFill>
+                  <a:srgbClr val="0F2540"/>
+                </a:solidFill>
+                <a:latin typeface="Calibri"/>
+              </a:defRPr>
+            </a:pPr>
+            <a:r>
+              <a:t>AS-SG  ·  Absolute-Scale</a:t>
+            </a:r>
+          </a:p>
+        </p:txBody>
+      </p:sp>
+      <p:sp>
+        <p:nvSpPr>
+          <p:cNvPr id="10" name="TextBox 9"/>
+          <p:cNvSpPr txBox="1"/>
+          <p:nvPr/>
+        </p:nvSpPr>
+        <p:spPr>
+          <a:xfrm>
+            <a:off x="640080" y="3429000"/>
+            <a:ext cx="5120640" cy="411480"/>
+          </a:xfrm>
+          <a:prstGeom prst="rect">
+            <a:avLst/>
+          </a:prstGeom>
+          <a:noFill/>
+        </p:spPr>
+        <p:txBody>
+          <a:bodyPr wrap="square" lIns="0" rIns="0" tIns="0" bIns="0">
+            <a:spAutoFit/>
+          </a:bodyPr>
+          <a:lstStyle/>
+          <a:p>
+            <a:pPr>
+              <a:defRPr sz="1800" b="0" i="0">
+                <a:solidFill>
+                  <a:srgbClr val="0F2540"/>
+                </a:solidFill>
+                <a:latin typeface="Cambria Math"/>
+              </a:defRPr>
+            </a:pPr>
+            <a:r>
+              <a:t>x = M[t] − V_thr</a:t>
+            </a:r>
+          </a:p>
+        </p:txBody>
+      </p:sp>
+      <p:sp>
+        <p:nvSpPr>
+          <p:cNvPr id="11" name="TextBox 10"/>
+          <p:cNvSpPr txBox="1"/>
+          <p:nvPr/>
+        </p:nvSpPr>
+        <p:spPr>
+          <a:xfrm>
+            <a:off x="640080" y="3886200"/>
+            <a:ext cx="5120640" cy="274320"/>
+          </a:xfrm>
+          <a:prstGeom prst="rect">
+            <a:avLst/>
+          </a:prstGeom>
+          <a:noFill/>
+        </p:spPr>
+        <p:txBody>
+          <a:bodyPr wrap="square" lIns="0" rIns="0" tIns="0" bIns="0">
+            <a:spAutoFit/>
+          </a:bodyPr>
+          <a:lstStyle/>
+          <a:p>
+            <a:pPr>
+              <a:defRPr sz="1000" b="0" i="1">
+                <a:solidFill>
+                  <a:srgbClr val="7A7A7A"/>
+                </a:solidFill>
+                <a:latin typeface="Calibri"/>
+              </a:defRPr>
+            </a:pPr>
+            <a:r>
+              <a:t>Used by tdBN, TET, PLIF, LTMD, …</a:t>
+            </a:r>
+          </a:p>
+        </p:txBody>
+      </p:sp>
+      <p:sp>
+        <p:nvSpPr>
+          <p:cNvPr id="12" name="Rectangle 11"/>
+          <p:cNvSpPr/>
+          <p:nvPr/>
+        </p:nvSpPr>
+        <p:spPr>
+          <a:xfrm>
+            <a:off x="6263640" y="3017520"/>
+            <a:ext cx="5486400" cy="1188720"/>
+          </a:xfrm>
+          <a:prstGeom prst="rect">
+            <a:avLst/>
+          </a:prstGeom>
+          <a:solidFill>
+            <a:srgbClr val="F8F7F2"/>
+          </a:solidFill>
+          <a:ln w="19050">
+            <a:solidFill>
+              <a:srgbClr val="0F2540"/>
+            </a:solidFill>
+          </a:ln>
+        </p:spPr>
+        <p:style>
+          <a:lnRef idx="1">
+            <a:schemeClr val="accent1"/>
+          </a:lnRef>
+          <a:fillRef idx="3">
+            <a:schemeClr val="accent1"/>
+          </a:fillRef>
+          <a:effectRef idx="2">
+            <a:schemeClr val="accent1"/>
+          </a:effectRef>
+          <a:fontRef idx="minor">
+            <a:schemeClr val="lt1"/>
+          </a:fontRef>
+        </p:style>
+        <p:txBody>
+          <a:bodyPr rtlCol="0" anchor="ctr"/>
+          <a:lstStyle/>
+          <a:p>
+            <a:pPr algn="ctr"/>
+          </a:p>
+        </p:txBody>
+      </p:sp>
+      <p:sp>
+        <p:nvSpPr>
+          <p:cNvPr id="13" name="TextBox 12"/>
+          <p:cNvSpPr txBox="1"/>
+          <p:nvPr/>
+        </p:nvSpPr>
+        <p:spPr>
+          <a:xfrm>
+            <a:off x="6446520" y="3108960"/>
+            <a:ext cx="5120640" cy="320040"/>
+          </a:xfrm>
+          <a:prstGeom prst="rect">
+            <a:avLst/>
+          </a:prstGeom>
+          <a:noFill/>
+        </p:spPr>
+        <p:txBody>
+          <a:bodyPr wrap="square" lIns="0" rIns="0" tIns="0" bIns="0">
+            <a:spAutoFit/>
+          </a:bodyPr>
+          <a:lstStyle/>
+          <a:p>
+            <a:pPr>
+              <a:defRPr sz="1300" b="1" i="0">
+                <a:solidFill>
+                  <a:srgbClr val="0F2540"/>
+                </a:solidFill>
+                <a:latin typeface="Calibri"/>
+              </a:defRPr>
+            </a:pPr>
+            <a:r>
+              <a:t>RS-SG  ·  Relative-Scale</a:t>
+            </a:r>
+          </a:p>
+        </p:txBody>
+      </p:sp>
+      <p:sp>
+        <p:nvSpPr>
+          <p:cNvPr id="14" name="TextBox 13"/>
+          <p:cNvSpPr txBox="1"/>
+          <p:nvPr/>
+        </p:nvSpPr>
+        <p:spPr>
+          <a:xfrm>
+            <a:off x="6446520" y="3429000"/>
+            <a:ext cx="5120640" cy="411480"/>
+          </a:xfrm>
+          <a:prstGeom prst="rect">
+            <a:avLst/>
+          </a:prstGeom>
+          <a:noFill/>
+        </p:spPr>
+        <p:txBody>
+          <a:bodyPr wrap="square" lIns="0" rIns="0" tIns="0" bIns="0">
+            <a:spAutoFit/>
+          </a:bodyPr>
+          <a:lstStyle/>
+          <a:p>
+            <a:pPr>
+              <a:defRPr sz="1800" b="0" i="0">
+                <a:solidFill>
+                  <a:srgbClr val="0F2540"/>
+                </a:solidFill>
+                <a:latin typeface="Cambria Math"/>
+              </a:defRPr>
+            </a:pPr>
+            <a:r>
+              <a:t>x = M[t] / V_thr − 1</a:t>
+            </a:r>
+          </a:p>
+        </p:txBody>
+      </p:sp>
+      <p:sp>
+        <p:nvSpPr>
+          <p:cNvPr id="15" name="TextBox 14"/>
+          <p:cNvSpPr txBox="1"/>
+          <p:nvPr/>
+        </p:nvSpPr>
+        <p:spPr>
+          <a:xfrm>
+            <a:off x="6446520" y="3886200"/>
+            <a:ext cx="5120640" cy="274320"/>
+          </a:xfrm>
+          <a:prstGeom prst="rect">
+            <a:avLst/>
+          </a:prstGeom>
+          <a:noFill/>
+        </p:spPr>
+        <p:txBody>
+          <a:bodyPr wrap="square" lIns="0" rIns="0" tIns="0" bIns="0">
+            <a:spAutoFit/>
+          </a:bodyPr>
+          <a:lstStyle/>
+          <a:p>
+            <a:pPr>
+              <a:defRPr sz="1000" b="0" i="1">
+                <a:solidFill>
+                  <a:srgbClr val="7A7A7A"/>
+                </a:solidFill>
+                <a:latin typeface="Calibri"/>
+              </a:defRPr>
+            </a:pPr>
+            <a:r>
+              <a:t>Used by Meng 2023, DIET-SNN</a:t>
+            </a:r>
+          </a:p>
+        </p:txBody>
+      </p:sp>
+      <p:sp>
+        <p:nvSpPr>
+          <p:cNvPr id="16" name="TextBox 15"/>
+          <p:cNvSpPr txBox="1"/>
+          <p:nvPr/>
+        </p:nvSpPr>
+        <p:spPr>
+          <a:xfrm>
+            <a:off x="457200" y="4343400"/>
+            <a:ext cx="11247120" cy="274320"/>
+          </a:xfrm>
+          <a:prstGeom prst="rect">
+            <a:avLst/>
+          </a:prstGeom>
+          <a:noFill/>
+        </p:spPr>
+        <p:txBody>
+          <a:bodyPr wrap="square" lIns="0" rIns="0" tIns="0" bIns="0">
+            <a:spAutoFit/>
+          </a:bodyPr>
+          <a:lstStyle/>
+          <a:p>
+            <a:pPr algn="ctr">
+              <a:defRPr sz="1000" b="0" i="1">
+                <a:solidFill>
+                  <a:srgbClr val="7A7A7A"/>
+                </a:solidFill>
+                <a:latin typeface="Calibri"/>
+              </a:defRPr>
+            </a:pPr>
+            <a:r>
+              <a:t>How the gradient window looks against the membrane-potential distribution</a:t>
             </a:r>
           </a:p>
         </p:txBody>
       </p:sp>
       <p:pic>
         <p:nvPicPr>
-          <p:cNvPr id="5" name="Picture 4" descr="second_main.png"/>
+          <p:cNvPr id="17" name="Picture 16" descr="sg_windows.png"/>
           <p:cNvPicPr>
             <a:picLocks noChangeAspect="1"/>
           </p:cNvPicPr>
@@ -3710,8 +4191,8 @@
         </p:blipFill>
         <p:spPr>
           <a:xfrm>
-            <a:off x="4617602" y="1828800"/>
-            <a:ext cx="2956490" cy="3383280"/>
+            <a:off x="4114800" y="4617720"/>
+            <a:ext cx="3931920" cy="1443363"/>
           </a:xfrm>
           <a:prstGeom prst="rect">
             <a:avLst/>
@@ -3720,61 +4201,23 @@
       </p:pic>
       <p:sp>
         <p:nvSpPr>
-          <p:cNvPr id="6" name="TextBox 5"/>
-          <p:cNvSpPr txBox="1"/>
-          <p:nvPr/>
-        </p:nvSpPr>
-        <p:spPr>
-          <a:xfrm>
-            <a:off x="457200" y="5230368"/>
-            <a:ext cx="11247120" cy="228600"/>
-          </a:xfrm>
-          <a:prstGeom prst="rect">
-            <a:avLst/>
-          </a:prstGeom>
-          <a:noFill/>
-        </p:spPr>
-        <p:txBody>
-          <a:bodyPr wrap="square" lIns="0" rIns="0" tIns="0" bIns="0">
-            <a:spAutoFit/>
-          </a:bodyPr>
-          <a:lstStyle/>
-          <a:p>
-            <a:pPr algn="ctr">
-              <a:defRPr sz="900" b="0" i="1">
-                <a:solidFill>
-                  <a:srgbClr val="7A7A7A"/>
-                </a:solidFill>
-                <a:latin typeface="Calibri"/>
-              </a:defRPr>
-            </a:pPr>
-            <a:r>
-              <a:t>Each colored box = active gradient region.   width = window  ·  height = magnitude</a:t>
-            </a:r>
-          </a:p>
-        </p:txBody>
-      </p:sp>
-      <p:sp>
-        <p:nvSpPr>
-          <p:cNvPr id="7" name="Rectangle 6"/>
+          <p:cNvPr id="18" name="Rectangle 17"/>
           <p:cNvSpPr/>
           <p:nvPr/>
         </p:nvSpPr>
         <p:spPr>
           <a:xfrm>
-            <a:off x="371703" y="5623560"/>
-            <a:ext cx="2157984" cy="777240"/>
+            <a:off x="457200" y="6126480"/>
+            <a:ext cx="54864" cy="365760"/>
           </a:xfrm>
           <a:prstGeom prst="rect">
             <a:avLst/>
           </a:prstGeom>
           <a:solidFill>
-            <a:srgbClr val="FAEEE0"/>
+            <a:srgbClr val="E56945"/>
           </a:solidFill>
-          <a:ln w="19050">
-            <a:solidFill>
-              <a:srgbClr val="E56945"/>
-            </a:solidFill>
+          <a:ln>
+            <a:noFill/>
           </a:ln>
         </p:spPr>
         <p:style>
@@ -3801,97 +4244,23 @@
       </p:sp>
       <p:sp>
         <p:nvSpPr>
-          <p:cNvPr id="8" name="TextBox 7"/>
-          <p:cNvSpPr txBox="1"/>
-          <p:nvPr/>
-        </p:nvSpPr>
-        <p:spPr>
-          <a:xfrm>
-            <a:off x="463143" y="5715000"/>
-            <a:ext cx="1975103" cy="320040"/>
-          </a:xfrm>
-          <a:prstGeom prst="rect">
-            <a:avLst/>
-          </a:prstGeom>
-          <a:noFill/>
-        </p:spPr>
-        <p:txBody>
-          <a:bodyPr wrap="square" lIns="0" rIns="0" tIns="0" bIns="0">
-            <a:spAutoFit/>
-          </a:bodyPr>
-          <a:lstStyle/>
-          <a:p>
-            <a:pPr algn="ctr">
-              <a:defRPr sz="1100" b="1" i="0">
-                <a:solidFill>
-                  <a:srgbClr val="E56945"/>
-                </a:solidFill>
-                <a:latin typeface="Calibri"/>
-              </a:defRPr>
-            </a:pPr>
-            <a:r>
-              <a:t>✗ Flooding</a:t>
-            </a:r>
-          </a:p>
-        </p:txBody>
-      </p:sp>
-      <p:sp>
-        <p:nvSpPr>
-          <p:cNvPr id="9" name="TextBox 8"/>
-          <p:cNvSpPr txBox="1"/>
-          <p:nvPr/>
-        </p:nvSpPr>
-        <p:spPr>
-          <a:xfrm>
-            <a:off x="463143" y="6035040"/>
-            <a:ext cx="1975103" cy="365760"/>
-          </a:xfrm>
-          <a:prstGeom prst="rect">
-            <a:avLst/>
-          </a:prstGeom>
-          <a:noFill/>
-        </p:spPr>
-        <p:txBody>
-          <a:bodyPr wrap="square" lIns="0" rIns="0" tIns="0" bIns="0">
-            <a:spAutoFit/>
-          </a:bodyPr>
-          <a:lstStyle/>
-          <a:p>
-            <a:pPr algn="ctr">
-              <a:defRPr sz="900" b="0" i="0">
-                <a:solidFill>
-                  <a:srgbClr val="1A1A1A"/>
-                </a:solidFill>
-                <a:latin typeface="Calibri"/>
-              </a:defRPr>
-            </a:pPr>
-            <a:r>
-              <a:t>AS-SG · V_thr ≪ 1</a:t>
-            </a:r>
-          </a:p>
-        </p:txBody>
-      </p:sp>
-      <p:sp>
-        <p:nvSpPr>
-          <p:cNvPr id="10" name="Rectangle 9"/>
+          <p:cNvPr id="19" name="Rectangle 18"/>
           <p:cNvSpPr/>
           <p:nvPr/>
         </p:nvSpPr>
         <p:spPr>
           <a:xfrm>
-            <a:off x="2694279" y="5623560"/>
-            <a:ext cx="2157984" cy="777240"/>
+            <a:off x="512064" y="6126480"/>
+            <a:ext cx="11192256" cy="365760"/>
           </a:xfrm>
           <a:prstGeom prst="rect">
             <a:avLst/>
           </a:prstGeom>
           <a:solidFill>
-            <a:srgbClr val="FAEEE0"/>
+            <a:srgbClr val="0F2540"/>
           </a:solidFill>
-          <a:ln w="19050">
-            <a:solidFill>
-              <a:srgbClr val="E56945"/>
-            </a:solidFill>
+          <a:ln>
+            <a:noFill/>
           </a:ln>
         </p:spPr>
         <p:style>
@@ -3918,145 +4287,28 @@
       </p:sp>
       <p:sp>
         <p:nvSpPr>
-          <p:cNvPr id="11" name="TextBox 10"/>
-          <p:cNvSpPr txBox="1"/>
-          <p:nvPr/>
-        </p:nvSpPr>
-        <p:spPr>
-          <a:xfrm>
-            <a:off x="2785719" y="5715000"/>
-            <a:ext cx="1975103" cy="320040"/>
-          </a:xfrm>
-          <a:prstGeom prst="rect">
-            <a:avLst/>
-          </a:prstGeom>
-          <a:noFill/>
-        </p:spPr>
-        <p:txBody>
-          <a:bodyPr wrap="square" lIns="0" rIns="0" tIns="0" bIns="0">
-            <a:spAutoFit/>
-          </a:bodyPr>
-          <a:lstStyle/>
-          <a:p>
-            <a:pPr algn="ctr">
-              <a:defRPr sz="1100" b="1" i="0">
-                <a:solidFill>
-                  <a:srgbClr val="E56945"/>
-                </a:solidFill>
-                <a:latin typeface="Calibri"/>
-              </a:defRPr>
-            </a:pPr>
-            <a:r>
-              <a:t>✗ Starvation</a:t>
-            </a:r>
-          </a:p>
-        </p:txBody>
-      </p:sp>
-      <p:sp>
-        <p:nvSpPr>
-          <p:cNvPr id="12" name="TextBox 11"/>
-          <p:cNvSpPr txBox="1"/>
-          <p:nvPr/>
-        </p:nvSpPr>
-        <p:spPr>
-          <a:xfrm>
-            <a:off x="2785719" y="6035040"/>
-            <a:ext cx="1975103" cy="365760"/>
-          </a:xfrm>
-          <a:prstGeom prst="rect">
-            <a:avLst/>
-          </a:prstGeom>
-          <a:noFill/>
-        </p:spPr>
-        <p:txBody>
-          <a:bodyPr wrap="square" lIns="0" rIns="0" tIns="0" bIns="0">
-            <a:spAutoFit/>
-          </a:bodyPr>
-          <a:lstStyle/>
-          <a:p>
-            <a:pPr algn="ctr">
-              <a:defRPr sz="900" b="0" i="0">
-                <a:solidFill>
-                  <a:srgbClr val="1A1A1A"/>
-                </a:solidFill>
-                <a:latin typeface="Calibri"/>
-              </a:defRPr>
-            </a:pPr>
-            <a:r>
-              <a:t>AS-SG · V_thr ≫ 1</a:t>
-            </a:r>
-          </a:p>
-        </p:txBody>
-      </p:sp>
-      <p:sp>
-        <p:nvSpPr>
-          <p:cNvPr id="13" name="Rectangle 12"/>
-          <p:cNvSpPr/>
-          <p:nvPr/>
-        </p:nvSpPr>
-        <p:spPr>
-          <a:xfrm>
-            <a:off x="5016855" y="5623560"/>
-            <a:ext cx="2157984" cy="777240"/>
-          </a:xfrm>
-          <a:prstGeom prst="rect">
-            <a:avLst/>
-          </a:prstGeom>
-          <a:solidFill>
-            <a:srgbClr val="FAEECB"/>
-          </a:solidFill>
-          <a:ln w="19050">
-            <a:solidFill>
-              <a:srgbClr val="E0B85F"/>
-            </a:solidFill>
-          </a:ln>
-        </p:spPr>
-        <p:style>
-          <a:lnRef idx="1">
-            <a:schemeClr val="accent1"/>
-          </a:lnRef>
-          <a:fillRef idx="3">
-            <a:schemeClr val="accent1"/>
-          </a:fillRef>
-          <a:effectRef idx="2">
-            <a:schemeClr val="accent1"/>
-          </a:effectRef>
-          <a:fontRef idx="minor">
-            <a:schemeClr val="lt1"/>
-          </a:fontRef>
-        </p:style>
-        <p:txBody>
-          <a:bodyPr rtlCol="0" anchor="ctr"/>
-          <a:lstStyle/>
-          <a:p>
-            <a:pPr algn="ctr"/>
-          </a:p>
-        </p:txBody>
-      </p:sp>
-      <p:sp>
-        <p:nvSpPr>
-          <p:cNvPr id="14" name="TextBox 13"/>
-          <p:cNvSpPr txBox="1"/>
-          <p:nvPr/>
-        </p:nvSpPr>
-        <p:spPr>
-          <a:xfrm>
-            <a:off x="5108295" y="5715000"/>
-            <a:ext cx="1975103" cy="320040"/>
-          </a:xfrm>
-          <a:prstGeom prst="rect">
-            <a:avLst/>
-          </a:prstGeom>
-          <a:noFill/>
-        </p:spPr>
-        <p:txBody>
-          <a:bodyPr wrap="square" lIns="0" rIns="0" tIns="0" bIns="0">
-            <a:spAutoFit/>
-          </a:bodyPr>
-          <a:lstStyle/>
-          <a:p>
-            <a:pPr algn="ctr">
-              <a:defRPr sz="1100" b="1" i="0">
+          <p:cNvPr id="20" name="TextBox 19"/>
+          <p:cNvSpPr txBox="1"/>
+          <p:nvPr/>
+        </p:nvSpPr>
+        <p:spPr>
+          <a:xfrm>
+            <a:off x="777240" y="6263640"/>
+            <a:ext cx="10789920" cy="91440"/>
+          </a:xfrm>
+          <a:prstGeom prst="rect">
+            <a:avLst/>
+          </a:prstGeom>
+          <a:noFill/>
+        </p:spPr>
+        <p:txBody>
+          <a:bodyPr wrap="square">
+            <a:spAutoFit/>
+          </a:bodyPr>
+          <a:lstStyle/>
+          <a:p>
+            <a:pPr>
+              <a:defRPr sz="1100" b="1">
                 <a:solidFill>
                   <a:srgbClr val="E0B85F"/>
                 </a:solidFill>
@@ -4064,241 +4316,7 @@
               </a:defRPr>
             </a:pPr>
             <a:r>
-              <a:t>✗ Explosion</a:t>
-            </a:r>
-          </a:p>
-        </p:txBody>
-      </p:sp>
-      <p:sp>
-        <p:nvSpPr>
-          <p:cNvPr id="15" name="TextBox 14"/>
-          <p:cNvSpPr txBox="1"/>
-          <p:nvPr/>
-        </p:nvSpPr>
-        <p:spPr>
-          <a:xfrm>
-            <a:off x="5108295" y="6035040"/>
-            <a:ext cx="1975103" cy="365760"/>
-          </a:xfrm>
-          <a:prstGeom prst="rect">
-            <a:avLst/>
-          </a:prstGeom>
-          <a:noFill/>
-        </p:spPr>
-        <p:txBody>
-          <a:bodyPr wrap="square" lIns="0" rIns="0" tIns="0" bIns="0">
-            <a:spAutoFit/>
-          </a:bodyPr>
-          <a:lstStyle/>
-          <a:p>
-            <a:pPr algn="ctr">
-              <a:defRPr sz="900" b="0" i="0">
-                <a:solidFill>
-                  <a:srgbClr val="1A1A1A"/>
-                </a:solidFill>
-                <a:latin typeface="Calibri"/>
-              </a:defRPr>
-            </a:pPr>
-            <a:r>
-              <a:t>RS-SG · V_thr ≪ 1</a:t>
-            </a:r>
-          </a:p>
-        </p:txBody>
-      </p:sp>
-      <p:sp>
-        <p:nvSpPr>
-          <p:cNvPr id="16" name="Rectangle 15"/>
-          <p:cNvSpPr/>
-          <p:nvPr/>
-        </p:nvSpPr>
-        <p:spPr>
-          <a:xfrm>
-            <a:off x="7339431" y="5623560"/>
-            <a:ext cx="2157984" cy="777240"/>
-          </a:xfrm>
-          <a:prstGeom prst="rect">
-            <a:avLst/>
-          </a:prstGeom>
-          <a:solidFill>
-            <a:srgbClr val="FAEECB"/>
-          </a:solidFill>
-          <a:ln w="19050">
-            <a:solidFill>
-              <a:srgbClr val="E0B85F"/>
-            </a:solidFill>
-          </a:ln>
-        </p:spPr>
-        <p:style>
-          <a:lnRef idx="1">
-            <a:schemeClr val="accent1"/>
-          </a:lnRef>
-          <a:fillRef idx="3">
-            <a:schemeClr val="accent1"/>
-          </a:fillRef>
-          <a:effectRef idx="2">
-            <a:schemeClr val="accent1"/>
-          </a:effectRef>
-          <a:fontRef idx="minor">
-            <a:schemeClr val="lt1"/>
-          </a:fontRef>
-        </p:style>
-        <p:txBody>
-          <a:bodyPr rtlCol="0" anchor="ctr"/>
-          <a:lstStyle/>
-          <a:p>
-            <a:pPr algn="ctr"/>
-          </a:p>
-        </p:txBody>
-      </p:sp>
-      <p:sp>
-        <p:nvSpPr>
-          <p:cNvPr id="17" name="TextBox 16"/>
-          <p:cNvSpPr txBox="1"/>
-          <p:nvPr/>
-        </p:nvSpPr>
-        <p:spPr>
-          <a:xfrm>
-            <a:off x="7430871" y="5715000"/>
-            <a:ext cx="1975103" cy="320040"/>
-          </a:xfrm>
-          <a:prstGeom prst="rect">
-            <a:avLst/>
-          </a:prstGeom>
-          <a:noFill/>
-        </p:spPr>
-        <p:txBody>
-          <a:bodyPr wrap="square" lIns="0" rIns="0" tIns="0" bIns="0">
-            <a:spAutoFit/>
-          </a:bodyPr>
-          <a:lstStyle/>
-          <a:p>
-            <a:pPr algn="ctr">
-              <a:defRPr sz="1100" b="1" i="0">
-                <a:solidFill>
-                  <a:srgbClr val="E0B85F"/>
-                </a:solidFill>
-                <a:latin typeface="Calibri"/>
-              </a:defRPr>
-            </a:pPr>
-            <a:r>
-              <a:t>✗ Vanishing</a:t>
-            </a:r>
-          </a:p>
-        </p:txBody>
-      </p:sp>
-      <p:sp>
-        <p:nvSpPr>
-          <p:cNvPr id="18" name="TextBox 17"/>
-          <p:cNvSpPr txBox="1"/>
-          <p:nvPr/>
-        </p:nvSpPr>
-        <p:spPr>
-          <a:xfrm>
-            <a:off x="7430871" y="6035040"/>
-            <a:ext cx="1975103" cy="365760"/>
-          </a:xfrm>
-          <a:prstGeom prst="rect">
-            <a:avLst/>
-          </a:prstGeom>
-          <a:noFill/>
-        </p:spPr>
-        <p:txBody>
-          <a:bodyPr wrap="square" lIns="0" rIns="0" tIns="0" bIns="0">
-            <a:spAutoFit/>
-          </a:bodyPr>
-          <a:lstStyle/>
-          <a:p>
-            <a:pPr algn="ctr">
-              <a:defRPr sz="900" b="0" i="0">
-                <a:solidFill>
-                  <a:srgbClr val="1A1A1A"/>
-                </a:solidFill>
-                <a:latin typeface="Calibri"/>
-              </a:defRPr>
-            </a:pPr>
-            <a:r>
-              <a:t>RS-SG · V_thr ≫ 1</a:t>
-            </a:r>
-          </a:p>
-        </p:txBody>
-      </p:sp>
-      <p:sp>
-        <p:nvSpPr>
-          <p:cNvPr id="19" name="Rectangle 18"/>
-          <p:cNvSpPr/>
-          <p:nvPr/>
-        </p:nvSpPr>
-        <p:spPr>
-          <a:xfrm>
-            <a:off x="9662007" y="5623560"/>
-            <a:ext cx="2157984" cy="777240"/>
-          </a:xfrm>
-          <a:prstGeom prst="rect">
-            <a:avLst/>
-          </a:prstGeom>
-          <a:solidFill>
-            <a:srgbClr val="E5F5F0"/>
-          </a:solidFill>
-          <a:ln w="19050">
-            <a:solidFill>
-              <a:srgbClr val="1D7E7E"/>
-            </a:solidFill>
-          </a:ln>
-        </p:spPr>
-        <p:style>
-          <a:lnRef idx="1">
-            <a:schemeClr val="accent1"/>
-          </a:lnRef>
-          <a:fillRef idx="3">
-            <a:schemeClr val="accent1"/>
-          </a:fillRef>
-          <a:effectRef idx="2">
-            <a:schemeClr val="accent1"/>
-          </a:effectRef>
-          <a:fontRef idx="minor">
-            <a:schemeClr val="lt1"/>
-          </a:fontRef>
-        </p:style>
-        <p:txBody>
-          <a:bodyPr rtlCol="0" anchor="ctr"/>
-          <a:lstStyle/>
-          <a:p>
-            <a:pPr algn="ctr"/>
-          </a:p>
-        </p:txBody>
-      </p:sp>
-      <p:sp>
-        <p:nvSpPr>
-          <p:cNvPr id="20" name="TextBox 19"/>
-          <p:cNvSpPr txBox="1"/>
-          <p:nvPr/>
-        </p:nvSpPr>
-        <p:spPr>
-          <a:xfrm>
-            <a:off x="9753447" y="5715000"/>
-            <a:ext cx="1975103" cy="320040"/>
-          </a:xfrm>
-          <a:prstGeom prst="rect">
-            <a:avLst/>
-          </a:prstGeom>
-          <a:noFill/>
-        </p:spPr>
-        <p:txBody>
-          <a:bodyPr wrap="square" lIns="0" rIns="0" tIns="0" bIns="0">
-            <a:spAutoFit/>
-          </a:bodyPr>
-          <a:lstStyle/>
-          <a:p>
-            <a:pPr algn="ctr">
-              <a:defRPr sz="1100" b="1" i="0">
-                <a:solidFill>
-                  <a:srgbClr val="1D7E7E"/>
-                </a:solidFill>
-                <a:latin typeface="Calibri"/>
-              </a:defRPr>
-            </a:pPr>
-            <a:r>
-              <a:t>✓ Balanced</a:t>
+              <a:t>Same when V_thr is fixed.  Once V_thr trains, AS-SG breaks one way, RS-SG breaks the opposite way.</a:t>
             </a:r>
           </a:p>
         </p:txBody>
@@ -4306,42 +4324,6 @@
       <p:sp>
         <p:nvSpPr>
           <p:cNvPr id="21" name="TextBox 20"/>
-          <p:cNvSpPr txBox="1"/>
-          <p:nvPr/>
-        </p:nvSpPr>
-        <p:spPr>
-          <a:xfrm>
-            <a:off x="9753447" y="6035040"/>
-            <a:ext cx="1975103" cy="365760"/>
-          </a:xfrm>
-          <a:prstGeom prst="rect">
-            <a:avLst/>
-          </a:prstGeom>
-          <a:noFill/>
-        </p:spPr>
-        <p:txBody>
-          <a:bodyPr wrap="square" lIns="0" rIns="0" tIns="0" bIns="0">
-            <a:spAutoFit/>
-          </a:bodyPr>
-          <a:lstStyle/>
-          <a:p>
-            <a:pPr algn="ctr">
-              <a:defRPr sz="900" b="0" i="0">
-                <a:solidFill>
-                  <a:srgbClr val="0F2540"/>
-                </a:solidFill>
-                <a:latin typeface="Calibri"/>
-              </a:defRPr>
-            </a:pPr>
-            <a:r>
-              <a:t>TrSG · all regimes</a:t>
-            </a:r>
-          </a:p>
-        </p:txBody>
-      </p:sp>
-      <p:sp>
-        <p:nvSpPr>
-          <p:cNvPr id="22" name="TextBox 21"/>
           <p:cNvSpPr txBox="1"/>
           <p:nvPr/>
         </p:nvSpPr>
@@ -4377,7 +4359,7 @@
       </p:sp>
       <p:sp>
         <p:nvSpPr>
-          <p:cNvPr id="23" name="TextBox 22"/>
+          <p:cNvPr id="22" name="TextBox 21"/>
           <p:cNvSpPr txBox="1"/>
           <p:nvPr/>
         </p:nvSpPr>
@@ -4406,7 +4388,7 @@
               </a:defRPr>
             </a:pPr>
             <a:r>
-              <a:t>10 / 18</a:t>
+              <a:t>10 / 19</a:t>
             </a:r>
           </a:p>
         </p:txBody>
@@ -4497,7 +4479,7 @@
               </a:defRPr>
             </a:pPr>
             <a:r>
-              <a:t>TrSG — One-Line Fix</a:t>
+              <a:t>Four Failure Modes — and One Fix</a:t>
             </a:r>
           </a:p>
         </p:txBody>
@@ -4533,509 +4515,14 @@
               </a:defRPr>
             </a:pPr>
             <a:r>
-              <a:t>Multiply the threshold on the forward path; chain rule cancels the bad factor</a:t>
-            </a:r>
-          </a:p>
-        </p:txBody>
-      </p:sp>
-      <p:sp>
-        <p:nvSpPr>
-          <p:cNvPr id="5" name="TextBox 4"/>
-          <p:cNvSpPr txBox="1"/>
-          <p:nvPr/>
-        </p:nvSpPr>
-        <p:spPr>
-          <a:xfrm>
-            <a:off x="457200" y="2194560"/>
-            <a:ext cx="11247120" cy="365760"/>
-          </a:xfrm>
-          <a:prstGeom prst="rect">
-            <a:avLst/>
-          </a:prstGeom>
-          <a:noFill/>
-        </p:spPr>
-        <p:txBody>
-          <a:bodyPr wrap="square" lIns="0" rIns="0" tIns="0" bIns="0">
-            <a:spAutoFit/>
-          </a:bodyPr>
-          <a:lstStyle/>
-          <a:p>
-            <a:pPr>
-              <a:defRPr sz="1300" b="1" i="0">
-                <a:solidFill>
-                  <a:srgbClr val="0F2540"/>
-                </a:solidFill>
-                <a:latin typeface="Calibri"/>
-              </a:defRPr>
-            </a:pPr>
-            <a:r>
-              <a:t>The recipe</a:t>
-            </a:r>
-          </a:p>
-        </p:txBody>
-      </p:sp>
-      <p:sp>
-        <p:nvSpPr>
-          <p:cNvPr id="6" name="Rectangle 5"/>
-          <p:cNvSpPr/>
-          <p:nvPr/>
-        </p:nvSpPr>
-        <p:spPr>
-          <a:xfrm>
-            <a:off x="457200" y="2651760"/>
-            <a:ext cx="3703320" cy="960120"/>
-          </a:xfrm>
-          <a:prstGeom prst="rect">
-            <a:avLst/>
-          </a:prstGeom>
-          <a:solidFill>
-            <a:srgbClr val="F8F7F2"/>
-          </a:solidFill>
-          <a:ln w="12700">
-            <a:solidFill>
-              <a:srgbClr val="1D7E7E"/>
-            </a:solidFill>
-          </a:ln>
-        </p:spPr>
-        <p:style>
-          <a:lnRef idx="1">
-            <a:schemeClr val="accent1"/>
-          </a:lnRef>
-          <a:fillRef idx="3">
-            <a:schemeClr val="accent1"/>
-          </a:fillRef>
-          <a:effectRef idx="2">
-            <a:schemeClr val="accent1"/>
-          </a:effectRef>
-          <a:fontRef idx="minor">
-            <a:schemeClr val="lt1"/>
-          </a:fontRef>
-        </p:style>
-        <p:txBody>
-          <a:bodyPr rtlCol="0" anchor="ctr"/>
-          <a:lstStyle/>
-          <a:p>
-            <a:pPr algn="ctr"/>
-          </a:p>
-        </p:txBody>
-      </p:sp>
-      <p:sp>
-        <p:nvSpPr>
-          <p:cNvPr id="7" name="TextBox 6"/>
-          <p:cNvSpPr txBox="1"/>
-          <p:nvPr/>
-        </p:nvSpPr>
-        <p:spPr>
-          <a:xfrm>
-            <a:off x="640080" y="2743200"/>
-            <a:ext cx="365760" cy="365760"/>
-          </a:xfrm>
-          <a:prstGeom prst="rect">
-            <a:avLst/>
-          </a:prstGeom>
-          <a:noFill/>
-        </p:spPr>
-        <p:txBody>
-          <a:bodyPr wrap="square" lIns="0" rIns="0" tIns="0" bIns="0">
-            <a:spAutoFit/>
-          </a:bodyPr>
-          <a:lstStyle/>
-          <a:p>
-            <a:pPr>
-              <a:defRPr sz="1800" b="1" i="0">
-                <a:solidFill>
-                  <a:srgbClr val="E0B85F"/>
-                </a:solidFill>
-                <a:latin typeface="Calibri"/>
-              </a:defRPr>
-            </a:pPr>
-            <a:r>
-              <a:t>1</a:t>
-            </a:r>
-          </a:p>
-        </p:txBody>
-      </p:sp>
-      <p:sp>
-        <p:nvSpPr>
-          <p:cNvPr id="8" name="TextBox 7"/>
-          <p:cNvSpPr txBox="1"/>
-          <p:nvPr/>
-        </p:nvSpPr>
-        <p:spPr>
-          <a:xfrm>
-            <a:off x="1051560" y="2788920"/>
-            <a:ext cx="3063239" cy="274320"/>
-          </a:xfrm>
-          <a:prstGeom prst="rect">
-            <a:avLst/>
-          </a:prstGeom>
-          <a:noFill/>
-        </p:spPr>
-        <p:txBody>
-          <a:bodyPr wrap="square" lIns="0" rIns="0" tIns="0" bIns="0">
-            <a:spAutoFit/>
-          </a:bodyPr>
-          <a:lstStyle/>
-          <a:p>
-            <a:pPr>
-              <a:defRPr sz="1100" b="1" i="0">
-                <a:solidFill>
-                  <a:srgbClr val="0F2540"/>
-                </a:solidFill>
-                <a:latin typeface="Calibri"/>
-              </a:defRPr>
-            </a:pPr>
-            <a:r>
-              <a:t>Relative-scale window</a:t>
-            </a:r>
-          </a:p>
-        </p:txBody>
-      </p:sp>
-      <p:sp>
-        <p:nvSpPr>
-          <p:cNvPr id="9" name="TextBox 8"/>
-          <p:cNvSpPr txBox="1"/>
-          <p:nvPr/>
-        </p:nvSpPr>
-        <p:spPr>
-          <a:xfrm>
-            <a:off x="1051560" y="3108960"/>
-            <a:ext cx="3063239" cy="457200"/>
-          </a:xfrm>
-          <a:prstGeom prst="rect">
-            <a:avLst/>
-          </a:prstGeom>
-          <a:noFill/>
-        </p:spPr>
-        <p:txBody>
-          <a:bodyPr wrap="square" lIns="0" rIns="0" tIns="0" bIns="0">
-            <a:spAutoFit/>
-          </a:bodyPr>
-          <a:lstStyle/>
-          <a:p>
-            <a:pPr>
-              <a:defRPr sz="1400" b="0" i="0">
-                <a:solidFill>
-                  <a:srgbClr val="1A1A1A"/>
-                </a:solidFill>
-                <a:latin typeface="Cambria Math"/>
-              </a:defRPr>
-            </a:pPr>
-            <a:r>
-              <a:t>x = M / V_thr − 1</a:t>
-            </a:r>
-          </a:p>
-        </p:txBody>
-      </p:sp>
-      <p:sp>
-        <p:nvSpPr>
-          <p:cNvPr id="10" name="Rectangle 9"/>
-          <p:cNvSpPr/>
-          <p:nvPr/>
-        </p:nvSpPr>
-        <p:spPr>
-          <a:xfrm>
-            <a:off x="4251960" y="2651760"/>
-            <a:ext cx="3703320" cy="960120"/>
-          </a:xfrm>
-          <a:prstGeom prst="rect">
-            <a:avLst/>
-          </a:prstGeom>
-          <a:solidFill>
-            <a:srgbClr val="F8F7F2"/>
-          </a:solidFill>
-          <a:ln w="12700">
-            <a:solidFill>
-              <a:srgbClr val="1D7E7E"/>
-            </a:solidFill>
-          </a:ln>
-        </p:spPr>
-        <p:style>
-          <a:lnRef idx="1">
-            <a:schemeClr val="accent1"/>
-          </a:lnRef>
-          <a:fillRef idx="3">
-            <a:schemeClr val="accent1"/>
-          </a:fillRef>
-          <a:effectRef idx="2">
-            <a:schemeClr val="accent1"/>
-          </a:effectRef>
-          <a:fontRef idx="minor">
-            <a:schemeClr val="lt1"/>
-          </a:fontRef>
-        </p:style>
-        <p:txBody>
-          <a:bodyPr rtlCol="0" anchor="ctr"/>
-          <a:lstStyle/>
-          <a:p>
-            <a:pPr algn="ctr"/>
-          </a:p>
-        </p:txBody>
-      </p:sp>
-      <p:sp>
-        <p:nvSpPr>
-          <p:cNvPr id="11" name="TextBox 10"/>
-          <p:cNvSpPr txBox="1"/>
-          <p:nvPr/>
-        </p:nvSpPr>
-        <p:spPr>
-          <a:xfrm>
-            <a:off x="4434840" y="2743200"/>
-            <a:ext cx="365760" cy="365760"/>
-          </a:xfrm>
-          <a:prstGeom prst="rect">
-            <a:avLst/>
-          </a:prstGeom>
-          <a:noFill/>
-        </p:spPr>
-        <p:txBody>
-          <a:bodyPr wrap="square" lIns="0" rIns="0" tIns="0" bIns="0">
-            <a:spAutoFit/>
-          </a:bodyPr>
-          <a:lstStyle/>
-          <a:p>
-            <a:pPr>
-              <a:defRPr sz="1800" b="1" i="0">
-                <a:solidFill>
-                  <a:srgbClr val="E0B85F"/>
-                </a:solidFill>
-                <a:latin typeface="Calibri"/>
-              </a:defRPr>
-            </a:pPr>
-            <a:r>
-              <a:t>2</a:t>
-            </a:r>
-          </a:p>
-        </p:txBody>
-      </p:sp>
-      <p:sp>
-        <p:nvSpPr>
-          <p:cNvPr id="12" name="TextBox 11"/>
-          <p:cNvSpPr txBox="1"/>
-          <p:nvPr/>
-        </p:nvSpPr>
-        <p:spPr>
-          <a:xfrm>
-            <a:off x="4846320" y="2788920"/>
-            <a:ext cx="3063239" cy="274320"/>
-          </a:xfrm>
-          <a:prstGeom prst="rect">
-            <a:avLst/>
-          </a:prstGeom>
-          <a:noFill/>
-        </p:spPr>
-        <p:txBody>
-          <a:bodyPr wrap="square" lIns="0" rIns="0" tIns="0" bIns="0">
-            <a:spAutoFit/>
-          </a:bodyPr>
-          <a:lstStyle/>
-          <a:p>
-            <a:pPr>
-              <a:defRPr sz="1100" b="1" i="0">
-                <a:solidFill>
-                  <a:srgbClr val="0F2540"/>
-                </a:solidFill>
-                <a:latin typeface="Calibri"/>
-              </a:defRPr>
-            </a:pPr>
-            <a:r>
-              <a:t>Multiply on forward</a:t>
-            </a:r>
-          </a:p>
-        </p:txBody>
-      </p:sp>
-      <p:sp>
-        <p:nvSpPr>
-          <p:cNvPr id="13" name="TextBox 12"/>
-          <p:cNvSpPr txBox="1"/>
-          <p:nvPr/>
-        </p:nvSpPr>
-        <p:spPr>
-          <a:xfrm>
-            <a:off x="4846320" y="3108960"/>
-            <a:ext cx="3063239" cy="457200"/>
-          </a:xfrm>
-          <a:prstGeom prst="rect">
-            <a:avLst/>
-          </a:prstGeom>
-          <a:noFill/>
-        </p:spPr>
-        <p:txBody>
-          <a:bodyPr wrap="square" lIns="0" rIns="0" tIns="0" bIns="0">
-            <a:spAutoFit/>
-          </a:bodyPr>
-          <a:lstStyle/>
-          <a:p>
-            <a:pPr>
-              <a:defRPr sz="1400" b="0" i="0">
-                <a:solidFill>
-                  <a:srgbClr val="1A1A1A"/>
-                </a:solidFill>
-                <a:latin typeface="Cambria Math"/>
-              </a:defRPr>
-            </a:pPr>
-            <a:r>
-              <a:t>O[t] = V_thr · S[t]</a:t>
-            </a:r>
-          </a:p>
-        </p:txBody>
-      </p:sp>
-      <p:sp>
-        <p:nvSpPr>
-          <p:cNvPr id="14" name="Rectangle 13"/>
-          <p:cNvSpPr/>
-          <p:nvPr/>
-        </p:nvSpPr>
-        <p:spPr>
-          <a:xfrm>
-            <a:off x="8046720" y="2651760"/>
-            <a:ext cx="3703320" cy="960120"/>
-          </a:xfrm>
-          <a:prstGeom prst="rect">
-            <a:avLst/>
-          </a:prstGeom>
-          <a:solidFill>
-            <a:srgbClr val="F8F7F2"/>
-          </a:solidFill>
-          <a:ln w="12700">
-            <a:solidFill>
-              <a:srgbClr val="1D7E7E"/>
-            </a:solidFill>
-          </a:ln>
-        </p:spPr>
-        <p:style>
-          <a:lnRef idx="1">
-            <a:schemeClr val="accent1"/>
-          </a:lnRef>
-          <a:fillRef idx="3">
-            <a:schemeClr val="accent1"/>
-          </a:fillRef>
-          <a:effectRef idx="2">
-            <a:schemeClr val="accent1"/>
-          </a:effectRef>
-          <a:fontRef idx="minor">
-            <a:schemeClr val="lt1"/>
-          </a:fontRef>
-        </p:style>
-        <p:txBody>
-          <a:bodyPr rtlCol="0" anchor="ctr"/>
-          <a:lstStyle/>
-          <a:p>
-            <a:pPr algn="ctr"/>
-          </a:p>
-        </p:txBody>
-      </p:sp>
-      <p:sp>
-        <p:nvSpPr>
-          <p:cNvPr id="15" name="TextBox 14"/>
-          <p:cNvSpPr txBox="1"/>
-          <p:nvPr/>
-        </p:nvSpPr>
-        <p:spPr>
-          <a:xfrm>
-            <a:off x="8229600" y="2743200"/>
-            <a:ext cx="365760" cy="365760"/>
-          </a:xfrm>
-          <a:prstGeom prst="rect">
-            <a:avLst/>
-          </a:prstGeom>
-          <a:noFill/>
-        </p:spPr>
-        <p:txBody>
-          <a:bodyPr wrap="square" lIns="0" rIns="0" tIns="0" bIns="0">
-            <a:spAutoFit/>
-          </a:bodyPr>
-          <a:lstStyle/>
-          <a:p>
-            <a:pPr>
-              <a:defRPr sz="1800" b="1" i="0">
-                <a:solidFill>
-                  <a:srgbClr val="E0B85F"/>
-                </a:solidFill>
-                <a:latin typeface="Calibri"/>
-              </a:defRPr>
-            </a:pPr>
-            <a:r>
-              <a:t>3</a:t>
-            </a:r>
-          </a:p>
-        </p:txBody>
-      </p:sp>
-      <p:sp>
-        <p:nvSpPr>
-          <p:cNvPr id="16" name="TextBox 15"/>
-          <p:cNvSpPr txBox="1"/>
-          <p:nvPr/>
-        </p:nvSpPr>
-        <p:spPr>
-          <a:xfrm>
-            <a:off x="8641080" y="2788920"/>
-            <a:ext cx="3063239" cy="274320"/>
-          </a:xfrm>
-          <a:prstGeom prst="rect">
-            <a:avLst/>
-          </a:prstGeom>
-          <a:noFill/>
-        </p:spPr>
-        <p:txBody>
-          <a:bodyPr wrap="square" lIns="0" rIns="0" tIns="0" bIns="0">
-            <a:spAutoFit/>
-          </a:bodyPr>
-          <a:lstStyle/>
-          <a:p>
-            <a:pPr>
-              <a:defRPr sz="1100" b="1" i="0">
-                <a:solidFill>
-                  <a:srgbClr val="0F2540"/>
-                </a:solidFill>
-                <a:latin typeface="Calibri"/>
-              </a:defRPr>
-            </a:pPr>
-            <a:r>
-              <a:t>Chain rule cancels</a:t>
-            </a:r>
-          </a:p>
-        </p:txBody>
-      </p:sp>
-      <p:sp>
-        <p:nvSpPr>
-          <p:cNvPr id="17" name="TextBox 16"/>
-          <p:cNvSpPr txBox="1"/>
-          <p:nvPr/>
-        </p:nvSpPr>
-        <p:spPr>
-          <a:xfrm>
-            <a:off x="8641080" y="3108960"/>
-            <a:ext cx="3063239" cy="457200"/>
-          </a:xfrm>
-          <a:prstGeom prst="rect">
-            <a:avLst/>
-          </a:prstGeom>
-          <a:noFill/>
-        </p:spPr>
-        <p:txBody>
-          <a:bodyPr wrap="square" lIns="0" rIns="0" tIns="0" bIns="0">
-            <a:spAutoFit/>
-          </a:bodyPr>
-          <a:lstStyle/>
-          <a:p>
-            <a:pPr>
-              <a:defRPr sz="1400" b="0" i="0">
-                <a:solidFill>
-                  <a:srgbClr val="1A1A1A"/>
-                </a:solidFill>
-                <a:latin typeface="Cambria Math"/>
-              </a:defRPr>
-            </a:pPr>
-            <a:r>
-              <a:t>∂O/∂M = f'(x)</a:t>
+              <a:t>Both window width AND gradient magnitude must scale correctly with V_thr</a:t>
             </a:r>
           </a:p>
         </p:txBody>
       </p:sp>
       <p:pic>
         <p:nvPicPr>
-          <p:cNvPr id="18" name="Picture 17" descr="chain_rule.png"/>
+          <p:cNvPr id="5" name="Picture 4" descr="second_main.png"/>
           <p:cNvPicPr>
             <a:picLocks noChangeAspect="1"/>
           </p:cNvPicPr>
@@ -5049,8 +4536,8 @@
         </p:blipFill>
         <p:spPr>
           <a:xfrm>
-            <a:off x="1371600" y="3931920"/>
-            <a:ext cx="9418320" cy="2497643"/>
+            <a:off x="4617602" y="1828800"/>
+            <a:ext cx="2956490" cy="3383280"/>
           </a:xfrm>
           <a:prstGeom prst="rect">
             <a:avLst/>
@@ -5059,23 +4546,61 @@
       </p:pic>
       <p:sp>
         <p:nvSpPr>
-          <p:cNvPr id="19" name="Rectangle 18"/>
+          <p:cNvPr id="6" name="TextBox 5"/>
+          <p:cNvSpPr txBox="1"/>
+          <p:nvPr/>
+        </p:nvSpPr>
+        <p:spPr>
+          <a:xfrm>
+            <a:off x="457200" y="5230368"/>
+            <a:ext cx="11247120" cy="228600"/>
+          </a:xfrm>
+          <a:prstGeom prst="rect">
+            <a:avLst/>
+          </a:prstGeom>
+          <a:noFill/>
+        </p:spPr>
+        <p:txBody>
+          <a:bodyPr wrap="square" lIns="0" rIns="0" tIns="0" bIns="0">
+            <a:spAutoFit/>
+          </a:bodyPr>
+          <a:lstStyle/>
+          <a:p>
+            <a:pPr algn="ctr">
+              <a:defRPr sz="900" b="0" i="1">
+                <a:solidFill>
+                  <a:srgbClr val="7A7A7A"/>
+                </a:solidFill>
+                <a:latin typeface="Calibri"/>
+              </a:defRPr>
+            </a:pPr>
+            <a:r>
+              <a:t>Each colored box = active gradient region.   width = window  ·  height = magnitude</a:t>
+            </a:r>
+          </a:p>
+        </p:txBody>
+      </p:sp>
+      <p:sp>
+        <p:nvSpPr>
+          <p:cNvPr id="7" name="Rectangle 6"/>
           <p:cNvSpPr/>
           <p:nvPr/>
         </p:nvSpPr>
         <p:spPr>
           <a:xfrm>
-            <a:off x="457200" y="5852160"/>
-            <a:ext cx="54864" cy="548640"/>
+            <a:off x="371703" y="5623560"/>
+            <a:ext cx="2157984" cy="777240"/>
           </a:xfrm>
           <a:prstGeom prst="rect">
             <a:avLst/>
           </a:prstGeom>
           <a:solidFill>
-            <a:srgbClr val="E0B85F"/>
+            <a:srgbClr val="FAEEE0"/>
           </a:solidFill>
-          <a:ln>
-            <a:noFill/>
+          <a:ln w="19050">
+            <a:solidFill>
+              <a:srgbClr val="E56945"/>
+            </a:solidFill>
           </a:ln>
         </p:spPr>
         <p:style>
@@ -5102,23 +4627,97 @@
       </p:sp>
       <p:sp>
         <p:nvSpPr>
-          <p:cNvPr id="20" name="Rectangle 19"/>
+          <p:cNvPr id="8" name="TextBox 7"/>
+          <p:cNvSpPr txBox="1"/>
+          <p:nvPr/>
+        </p:nvSpPr>
+        <p:spPr>
+          <a:xfrm>
+            <a:off x="463143" y="5715000"/>
+            <a:ext cx="1975103" cy="320040"/>
+          </a:xfrm>
+          <a:prstGeom prst="rect">
+            <a:avLst/>
+          </a:prstGeom>
+          <a:noFill/>
+        </p:spPr>
+        <p:txBody>
+          <a:bodyPr wrap="square" lIns="0" rIns="0" tIns="0" bIns="0">
+            <a:spAutoFit/>
+          </a:bodyPr>
+          <a:lstStyle/>
+          <a:p>
+            <a:pPr algn="ctr">
+              <a:defRPr sz="1100" b="1" i="0">
+                <a:solidFill>
+                  <a:srgbClr val="E56945"/>
+                </a:solidFill>
+                <a:latin typeface="Calibri"/>
+              </a:defRPr>
+            </a:pPr>
+            <a:r>
+              <a:t>✗ Flooding</a:t>
+            </a:r>
+          </a:p>
+        </p:txBody>
+      </p:sp>
+      <p:sp>
+        <p:nvSpPr>
+          <p:cNvPr id="9" name="TextBox 8"/>
+          <p:cNvSpPr txBox="1"/>
+          <p:nvPr/>
+        </p:nvSpPr>
+        <p:spPr>
+          <a:xfrm>
+            <a:off x="463143" y="6035040"/>
+            <a:ext cx="1975103" cy="365760"/>
+          </a:xfrm>
+          <a:prstGeom prst="rect">
+            <a:avLst/>
+          </a:prstGeom>
+          <a:noFill/>
+        </p:spPr>
+        <p:txBody>
+          <a:bodyPr wrap="square" lIns="0" rIns="0" tIns="0" bIns="0">
+            <a:spAutoFit/>
+          </a:bodyPr>
+          <a:lstStyle/>
+          <a:p>
+            <a:pPr algn="ctr">
+              <a:defRPr sz="900" b="0" i="0">
+                <a:solidFill>
+                  <a:srgbClr val="1A1A1A"/>
+                </a:solidFill>
+                <a:latin typeface="Calibri"/>
+              </a:defRPr>
+            </a:pPr>
+            <a:r>
+              <a:t>AS-SG · V_thr ≪ 1</a:t>
+            </a:r>
+          </a:p>
+        </p:txBody>
+      </p:sp>
+      <p:sp>
+        <p:nvSpPr>
+          <p:cNvPr id="10" name="Rectangle 9"/>
           <p:cNvSpPr/>
           <p:nvPr/>
         </p:nvSpPr>
         <p:spPr>
           <a:xfrm>
-            <a:off x="512064" y="5852160"/>
-            <a:ext cx="11192256" cy="548640"/>
+            <a:off x="2694279" y="5623560"/>
+            <a:ext cx="2157984" cy="777240"/>
           </a:xfrm>
           <a:prstGeom prst="rect">
             <a:avLst/>
           </a:prstGeom>
           <a:solidFill>
-            <a:srgbClr val="1D7E7E"/>
+            <a:srgbClr val="FAEEE0"/>
           </a:solidFill>
-          <a:ln>
-            <a:noFill/>
+          <a:ln w="19050">
+            <a:solidFill>
+              <a:srgbClr val="E56945"/>
+            </a:solidFill>
           </a:ln>
         </p:spPr>
         <p:style>
@@ -5145,36 +4744,423 @@
       </p:sp>
       <p:sp>
         <p:nvSpPr>
+          <p:cNvPr id="11" name="TextBox 10"/>
+          <p:cNvSpPr txBox="1"/>
+          <p:nvPr/>
+        </p:nvSpPr>
+        <p:spPr>
+          <a:xfrm>
+            <a:off x="2785719" y="5715000"/>
+            <a:ext cx="1975103" cy="320040"/>
+          </a:xfrm>
+          <a:prstGeom prst="rect">
+            <a:avLst/>
+          </a:prstGeom>
+          <a:noFill/>
+        </p:spPr>
+        <p:txBody>
+          <a:bodyPr wrap="square" lIns="0" rIns="0" tIns="0" bIns="0">
+            <a:spAutoFit/>
+          </a:bodyPr>
+          <a:lstStyle/>
+          <a:p>
+            <a:pPr algn="ctr">
+              <a:defRPr sz="1100" b="1" i="0">
+                <a:solidFill>
+                  <a:srgbClr val="E56945"/>
+                </a:solidFill>
+                <a:latin typeface="Calibri"/>
+              </a:defRPr>
+            </a:pPr>
+            <a:r>
+              <a:t>✗ Starvation</a:t>
+            </a:r>
+          </a:p>
+        </p:txBody>
+      </p:sp>
+      <p:sp>
+        <p:nvSpPr>
+          <p:cNvPr id="12" name="TextBox 11"/>
+          <p:cNvSpPr txBox="1"/>
+          <p:nvPr/>
+        </p:nvSpPr>
+        <p:spPr>
+          <a:xfrm>
+            <a:off x="2785719" y="6035040"/>
+            <a:ext cx="1975103" cy="365760"/>
+          </a:xfrm>
+          <a:prstGeom prst="rect">
+            <a:avLst/>
+          </a:prstGeom>
+          <a:noFill/>
+        </p:spPr>
+        <p:txBody>
+          <a:bodyPr wrap="square" lIns="0" rIns="0" tIns="0" bIns="0">
+            <a:spAutoFit/>
+          </a:bodyPr>
+          <a:lstStyle/>
+          <a:p>
+            <a:pPr algn="ctr">
+              <a:defRPr sz="900" b="0" i="0">
+                <a:solidFill>
+                  <a:srgbClr val="1A1A1A"/>
+                </a:solidFill>
+                <a:latin typeface="Calibri"/>
+              </a:defRPr>
+            </a:pPr>
+            <a:r>
+              <a:t>AS-SG · V_thr ≫ 1</a:t>
+            </a:r>
+          </a:p>
+        </p:txBody>
+      </p:sp>
+      <p:sp>
+        <p:nvSpPr>
+          <p:cNvPr id="13" name="Rectangle 12"/>
+          <p:cNvSpPr/>
+          <p:nvPr/>
+        </p:nvSpPr>
+        <p:spPr>
+          <a:xfrm>
+            <a:off x="5016855" y="5623560"/>
+            <a:ext cx="2157984" cy="777240"/>
+          </a:xfrm>
+          <a:prstGeom prst="rect">
+            <a:avLst/>
+          </a:prstGeom>
+          <a:solidFill>
+            <a:srgbClr val="FAEECB"/>
+          </a:solidFill>
+          <a:ln w="19050">
+            <a:solidFill>
+              <a:srgbClr val="E0B85F"/>
+            </a:solidFill>
+          </a:ln>
+        </p:spPr>
+        <p:style>
+          <a:lnRef idx="1">
+            <a:schemeClr val="accent1"/>
+          </a:lnRef>
+          <a:fillRef idx="3">
+            <a:schemeClr val="accent1"/>
+          </a:fillRef>
+          <a:effectRef idx="2">
+            <a:schemeClr val="accent1"/>
+          </a:effectRef>
+          <a:fontRef idx="minor">
+            <a:schemeClr val="lt1"/>
+          </a:fontRef>
+        </p:style>
+        <p:txBody>
+          <a:bodyPr rtlCol="0" anchor="ctr"/>
+          <a:lstStyle/>
+          <a:p>
+            <a:pPr algn="ctr"/>
+          </a:p>
+        </p:txBody>
+      </p:sp>
+      <p:sp>
+        <p:nvSpPr>
+          <p:cNvPr id="14" name="TextBox 13"/>
+          <p:cNvSpPr txBox="1"/>
+          <p:nvPr/>
+        </p:nvSpPr>
+        <p:spPr>
+          <a:xfrm>
+            <a:off x="5108295" y="5715000"/>
+            <a:ext cx="1975103" cy="320040"/>
+          </a:xfrm>
+          <a:prstGeom prst="rect">
+            <a:avLst/>
+          </a:prstGeom>
+          <a:noFill/>
+        </p:spPr>
+        <p:txBody>
+          <a:bodyPr wrap="square" lIns="0" rIns="0" tIns="0" bIns="0">
+            <a:spAutoFit/>
+          </a:bodyPr>
+          <a:lstStyle/>
+          <a:p>
+            <a:pPr algn="ctr">
+              <a:defRPr sz="1100" b="1" i="0">
+                <a:solidFill>
+                  <a:srgbClr val="E0B85F"/>
+                </a:solidFill>
+                <a:latin typeface="Calibri"/>
+              </a:defRPr>
+            </a:pPr>
+            <a:r>
+              <a:t>✗ Explosion</a:t>
+            </a:r>
+          </a:p>
+        </p:txBody>
+      </p:sp>
+      <p:sp>
+        <p:nvSpPr>
+          <p:cNvPr id="15" name="TextBox 14"/>
+          <p:cNvSpPr txBox="1"/>
+          <p:nvPr/>
+        </p:nvSpPr>
+        <p:spPr>
+          <a:xfrm>
+            <a:off x="5108295" y="6035040"/>
+            <a:ext cx="1975103" cy="365760"/>
+          </a:xfrm>
+          <a:prstGeom prst="rect">
+            <a:avLst/>
+          </a:prstGeom>
+          <a:noFill/>
+        </p:spPr>
+        <p:txBody>
+          <a:bodyPr wrap="square" lIns="0" rIns="0" tIns="0" bIns="0">
+            <a:spAutoFit/>
+          </a:bodyPr>
+          <a:lstStyle/>
+          <a:p>
+            <a:pPr algn="ctr">
+              <a:defRPr sz="900" b="0" i="0">
+                <a:solidFill>
+                  <a:srgbClr val="1A1A1A"/>
+                </a:solidFill>
+                <a:latin typeface="Calibri"/>
+              </a:defRPr>
+            </a:pPr>
+            <a:r>
+              <a:t>RS-SG · V_thr ≪ 1</a:t>
+            </a:r>
+          </a:p>
+        </p:txBody>
+      </p:sp>
+      <p:sp>
+        <p:nvSpPr>
+          <p:cNvPr id="16" name="Rectangle 15"/>
+          <p:cNvSpPr/>
+          <p:nvPr/>
+        </p:nvSpPr>
+        <p:spPr>
+          <a:xfrm>
+            <a:off x="7339431" y="5623560"/>
+            <a:ext cx="2157984" cy="777240"/>
+          </a:xfrm>
+          <a:prstGeom prst="rect">
+            <a:avLst/>
+          </a:prstGeom>
+          <a:solidFill>
+            <a:srgbClr val="FAEECB"/>
+          </a:solidFill>
+          <a:ln w="19050">
+            <a:solidFill>
+              <a:srgbClr val="E0B85F"/>
+            </a:solidFill>
+          </a:ln>
+        </p:spPr>
+        <p:style>
+          <a:lnRef idx="1">
+            <a:schemeClr val="accent1"/>
+          </a:lnRef>
+          <a:fillRef idx="3">
+            <a:schemeClr val="accent1"/>
+          </a:fillRef>
+          <a:effectRef idx="2">
+            <a:schemeClr val="accent1"/>
+          </a:effectRef>
+          <a:fontRef idx="minor">
+            <a:schemeClr val="lt1"/>
+          </a:fontRef>
+        </p:style>
+        <p:txBody>
+          <a:bodyPr rtlCol="0" anchor="ctr"/>
+          <a:lstStyle/>
+          <a:p>
+            <a:pPr algn="ctr"/>
+          </a:p>
+        </p:txBody>
+      </p:sp>
+      <p:sp>
+        <p:nvSpPr>
+          <p:cNvPr id="17" name="TextBox 16"/>
+          <p:cNvSpPr txBox="1"/>
+          <p:nvPr/>
+        </p:nvSpPr>
+        <p:spPr>
+          <a:xfrm>
+            <a:off x="7430871" y="5715000"/>
+            <a:ext cx="1975103" cy="320040"/>
+          </a:xfrm>
+          <a:prstGeom prst="rect">
+            <a:avLst/>
+          </a:prstGeom>
+          <a:noFill/>
+        </p:spPr>
+        <p:txBody>
+          <a:bodyPr wrap="square" lIns="0" rIns="0" tIns="0" bIns="0">
+            <a:spAutoFit/>
+          </a:bodyPr>
+          <a:lstStyle/>
+          <a:p>
+            <a:pPr algn="ctr">
+              <a:defRPr sz="1100" b="1" i="0">
+                <a:solidFill>
+                  <a:srgbClr val="E0B85F"/>
+                </a:solidFill>
+                <a:latin typeface="Calibri"/>
+              </a:defRPr>
+            </a:pPr>
+            <a:r>
+              <a:t>✗ Vanishing</a:t>
+            </a:r>
+          </a:p>
+        </p:txBody>
+      </p:sp>
+      <p:sp>
+        <p:nvSpPr>
+          <p:cNvPr id="18" name="TextBox 17"/>
+          <p:cNvSpPr txBox="1"/>
+          <p:nvPr/>
+        </p:nvSpPr>
+        <p:spPr>
+          <a:xfrm>
+            <a:off x="7430871" y="6035040"/>
+            <a:ext cx="1975103" cy="365760"/>
+          </a:xfrm>
+          <a:prstGeom prst="rect">
+            <a:avLst/>
+          </a:prstGeom>
+          <a:noFill/>
+        </p:spPr>
+        <p:txBody>
+          <a:bodyPr wrap="square" lIns="0" rIns="0" tIns="0" bIns="0">
+            <a:spAutoFit/>
+          </a:bodyPr>
+          <a:lstStyle/>
+          <a:p>
+            <a:pPr algn="ctr">
+              <a:defRPr sz="900" b="0" i="0">
+                <a:solidFill>
+                  <a:srgbClr val="1A1A1A"/>
+                </a:solidFill>
+                <a:latin typeface="Calibri"/>
+              </a:defRPr>
+            </a:pPr>
+            <a:r>
+              <a:t>RS-SG · V_thr ≫ 1</a:t>
+            </a:r>
+          </a:p>
+        </p:txBody>
+      </p:sp>
+      <p:sp>
+        <p:nvSpPr>
+          <p:cNvPr id="19" name="Rectangle 18"/>
+          <p:cNvSpPr/>
+          <p:nvPr/>
+        </p:nvSpPr>
+        <p:spPr>
+          <a:xfrm>
+            <a:off x="9662007" y="5623560"/>
+            <a:ext cx="2157984" cy="777240"/>
+          </a:xfrm>
+          <a:prstGeom prst="rect">
+            <a:avLst/>
+          </a:prstGeom>
+          <a:solidFill>
+            <a:srgbClr val="E5F5F0"/>
+          </a:solidFill>
+          <a:ln w="19050">
+            <a:solidFill>
+              <a:srgbClr val="1D7E7E"/>
+            </a:solidFill>
+          </a:ln>
+        </p:spPr>
+        <p:style>
+          <a:lnRef idx="1">
+            <a:schemeClr val="accent1"/>
+          </a:lnRef>
+          <a:fillRef idx="3">
+            <a:schemeClr val="accent1"/>
+          </a:fillRef>
+          <a:effectRef idx="2">
+            <a:schemeClr val="accent1"/>
+          </a:effectRef>
+          <a:fontRef idx="minor">
+            <a:schemeClr val="lt1"/>
+          </a:fontRef>
+        </p:style>
+        <p:txBody>
+          <a:bodyPr rtlCol="0" anchor="ctr"/>
+          <a:lstStyle/>
+          <a:p>
+            <a:pPr algn="ctr"/>
+          </a:p>
+        </p:txBody>
+      </p:sp>
+      <p:sp>
+        <p:nvSpPr>
+          <p:cNvPr id="20" name="TextBox 19"/>
+          <p:cNvSpPr txBox="1"/>
+          <p:nvPr/>
+        </p:nvSpPr>
+        <p:spPr>
+          <a:xfrm>
+            <a:off x="9753447" y="5715000"/>
+            <a:ext cx="1975103" cy="320040"/>
+          </a:xfrm>
+          <a:prstGeom prst="rect">
+            <a:avLst/>
+          </a:prstGeom>
+          <a:noFill/>
+        </p:spPr>
+        <p:txBody>
+          <a:bodyPr wrap="square" lIns="0" rIns="0" tIns="0" bIns="0">
+            <a:spAutoFit/>
+          </a:bodyPr>
+          <a:lstStyle/>
+          <a:p>
+            <a:pPr algn="ctr">
+              <a:defRPr sz="1100" b="1" i="0">
+                <a:solidFill>
+                  <a:srgbClr val="1D7E7E"/>
+                </a:solidFill>
+                <a:latin typeface="Calibri"/>
+              </a:defRPr>
+            </a:pPr>
+            <a:r>
+              <a:t>✓ Balanced</a:t>
+            </a:r>
+          </a:p>
+        </p:txBody>
+      </p:sp>
+      <p:sp>
+        <p:nvSpPr>
           <p:cNvPr id="21" name="TextBox 20"/>
           <p:cNvSpPr txBox="1"/>
           <p:nvPr/>
         </p:nvSpPr>
         <p:spPr>
           <a:xfrm>
-            <a:off x="777240" y="5989320"/>
-            <a:ext cx="10789920" cy="274320"/>
-          </a:xfrm>
-          <a:prstGeom prst="rect">
-            <a:avLst/>
-          </a:prstGeom>
-          <a:noFill/>
-        </p:spPr>
-        <p:txBody>
-          <a:bodyPr wrap="square">
-            <a:spAutoFit/>
-          </a:bodyPr>
-          <a:lstStyle/>
-          <a:p>
-            <a:pPr>
-              <a:defRPr sz="1300" b="1">
-                <a:solidFill>
-                  <a:srgbClr val="FFFFFF"/>
-                </a:solidFill>
-                <a:latin typeface="Calibri"/>
-              </a:defRPr>
-            </a:pPr>
-            <a:r>
-              <a:t>Window adapts with V_thr  ·  gradient magnitude is threshold-invariant.</a:t>
+            <a:off x="9753447" y="6035040"/>
+            <a:ext cx="1975103" cy="365760"/>
+          </a:xfrm>
+          <a:prstGeom prst="rect">
+            <a:avLst/>
+          </a:prstGeom>
+          <a:noFill/>
+        </p:spPr>
+        <p:txBody>
+          <a:bodyPr wrap="square" lIns="0" rIns="0" tIns="0" bIns="0">
+            <a:spAutoFit/>
+          </a:bodyPr>
+          <a:lstStyle/>
+          <a:p>
+            <a:pPr algn="ctr">
+              <a:defRPr sz="900" b="0" i="0">
+                <a:solidFill>
+                  <a:srgbClr val="0F2540"/>
+                </a:solidFill>
+                <a:latin typeface="Calibri"/>
+              </a:defRPr>
+            </a:pPr>
+            <a:r>
+              <a:t>TrSG · all regimes</a:t>
             </a:r>
           </a:p>
         </p:txBody>
@@ -5246,7 +5232,7 @@
               </a:defRPr>
             </a:pPr>
             <a:r>
-              <a:t>11 / 18</a:t>
+              <a:t>11 / 19</a:t>
             </a:r>
           </a:p>
         </p:txBody>
@@ -5337,7 +5323,7 @@
               </a:defRPr>
             </a:pPr>
             <a:r>
-              <a:t>Inference Stays Binary</a:t>
+              <a:t>TrSG — One-Line Fix</a:t>
             </a:r>
           </a:p>
         </p:txBody>
@@ -5373,7 +5359,7 @@
               </a:defRPr>
             </a:pPr>
             <a:r>
-              <a:t>TrSG is a training-only trick — neuromorphic hardware never sees it</a:t>
+              <a:t>Multiply the threshold on the forward path; chain rule cancels the bad factor</a:t>
             </a:r>
           </a:p>
         </p:txBody>
@@ -5386,7 +5372,7 @@
         </p:nvSpPr>
         <p:spPr>
           <a:xfrm>
-            <a:off x="457200" y="2286000"/>
+            <a:off x="457200" y="2194560"/>
             <a:ext cx="11247120" cy="365760"/>
           </a:xfrm>
           <a:prstGeom prst="rect">
@@ -5401,7 +5387,7 @@
           <a:lstStyle/>
           <a:p>
             <a:pPr>
-              <a:defRPr sz="1400" b="1" i="0">
+              <a:defRPr sz="1300" b="1" i="0">
                 <a:solidFill>
                   <a:srgbClr val="0F2540"/>
                 </a:solidFill>
@@ -5409,7 +5395,7 @@
               </a:defRPr>
             </a:pPr>
             <a:r>
-              <a:t>Training</a:t>
+              <a:t>The recipe</a:t>
             </a:r>
           </a:p>
         </p:txBody>
@@ -5422,8 +5408,491 @@
         </p:nvSpPr>
         <p:spPr>
           <a:xfrm>
-            <a:off x="457200" y="2743200"/>
-            <a:ext cx="54864" cy="640080"/>
+            <a:off x="457200" y="2651760"/>
+            <a:ext cx="3703320" cy="960120"/>
+          </a:xfrm>
+          <a:prstGeom prst="rect">
+            <a:avLst/>
+          </a:prstGeom>
+          <a:solidFill>
+            <a:srgbClr val="F8F7F2"/>
+          </a:solidFill>
+          <a:ln w="12700">
+            <a:solidFill>
+              <a:srgbClr val="1D7E7E"/>
+            </a:solidFill>
+          </a:ln>
+        </p:spPr>
+        <p:style>
+          <a:lnRef idx="1">
+            <a:schemeClr val="accent1"/>
+          </a:lnRef>
+          <a:fillRef idx="3">
+            <a:schemeClr val="accent1"/>
+          </a:fillRef>
+          <a:effectRef idx="2">
+            <a:schemeClr val="accent1"/>
+          </a:effectRef>
+          <a:fontRef idx="minor">
+            <a:schemeClr val="lt1"/>
+          </a:fontRef>
+        </p:style>
+        <p:txBody>
+          <a:bodyPr rtlCol="0" anchor="ctr"/>
+          <a:lstStyle/>
+          <a:p>
+            <a:pPr algn="ctr"/>
+          </a:p>
+        </p:txBody>
+      </p:sp>
+      <p:sp>
+        <p:nvSpPr>
+          <p:cNvPr id="7" name="TextBox 6"/>
+          <p:cNvSpPr txBox="1"/>
+          <p:nvPr/>
+        </p:nvSpPr>
+        <p:spPr>
+          <a:xfrm>
+            <a:off x="640080" y="2743200"/>
+            <a:ext cx="365760" cy="365760"/>
+          </a:xfrm>
+          <a:prstGeom prst="rect">
+            <a:avLst/>
+          </a:prstGeom>
+          <a:noFill/>
+        </p:spPr>
+        <p:txBody>
+          <a:bodyPr wrap="square" lIns="0" rIns="0" tIns="0" bIns="0">
+            <a:spAutoFit/>
+          </a:bodyPr>
+          <a:lstStyle/>
+          <a:p>
+            <a:pPr>
+              <a:defRPr sz="1800" b="1" i="0">
+                <a:solidFill>
+                  <a:srgbClr val="E0B85F"/>
+                </a:solidFill>
+                <a:latin typeface="Calibri"/>
+              </a:defRPr>
+            </a:pPr>
+            <a:r>
+              <a:t>1</a:t>
+            </a:r>
+          </a:p>
+        </p:txBody>
+      </p:sp>
+      <p:sp>
+        <p:nvSpPr>
+          <p:cNvPr id="8" name="TextBox 7"/>
+          <p:cNvSpPr txBox="1"/>
+          <p:nvPr/>
+        </p:nvSpPr>
+        <p:spPr>
+          <a:xfrm>
+            <a:off x="1051560" y="2788920"/>
+            <a:ext cx="3063239" cy="274320"/>
+          </a:xfrm>
+          <a:prstGeom prst="rect">
+            <a:avLst/>
+          </a:prstGeom>
+          <a:noFill/>
+        </p:spPr>
+        <p:txBody>
+          <a:bodyPr wrap="square" lIns="0" rIns="0" tIns="0" bIns="0">
+            <a:spAutoFit/>
+          </a:bodyPr>
+          <a:lstStyle/>
+          <a:p>
+            <a:pPr>
+              <a:defRPr sz="1100" b="1" i="0">
+                <a:solidFill>
+                  <a:srgbClr val="0F2540"/>
+                </a:solidFill>
+                <a:latin typeface="Calibri"/>
+              </a:defRPr>
+            </a:pPr>
+            <a:r>
+              <a:t>Relative-scale window</a:t>
+            </a:r>
+          </a:p>
+        </p:txBody>
+      </p:sp>
+      <p:sp>
+        <p:nvSpPr>
+          <p:cNvPr id="9" name="TextBox 8"/>
+          <p:cNvSpPr txBox="1"/>
+          <p:nvPr/>
+        </p:nvSpPr>
+        <p:spPr>
+          <a:xfrm>
+            <a:off x="1051560" y="3108960"/>
+            <a:ext cx="3063239" cy="457200"/>
+          </a:xfrm>
+          <a:prstGeom prst="rect">
+            <a:avLst/>
+          </a:prstGeom>
+          <a:noFill/>
+        </p:spPr>
+        <p:txBody>
+          <a:bodyPr wrap="square" lIns="0" rIns="0" tIns="0" bIns="0">
+            <a:spAutoFit/>
+          </a:bodyPr>
+          <a:lstStyle/>
+          <a:p>
+            <a:pPr>
+              <a:defRPr sz="1400" b="0" i="0">
+                <a:solidFill>
+                  <a:srgbClr val="1A1A1A"/>
+                </a:solidFill>
+                <a:latin typeface="Cambria Math"/>
+              </a:defRPr>
+            </a:pPr>
+            <a:r>
+              <a:t>x = M / V_thr − 1</a:t>
+            </a:r>
+          </a:p>
+        </p:txBody>
+      </p:sp>
+      <p:sp>
+        <p:nvSpPr>
+          <p:cNvPr id="10" name="Rectangle 9"/>
+          <p:cNvSpPr/>
+          <p:nvPr/>
+        </p:nvSpPr>
+        <p:spPr>
+          <a:xfrm>
+            <a:off x="4251960" y="2651760"/>
+            <a:ext cx="3703320" cy="960120"/>
+          </a:xfrm>
+          <a:prstGeom prst="rect">
+            <a:avLst/>
+          </a:prstGeom>
+          <a:solidFill>
+            <a:srgbClr val="F8F7F2"/>
+          </a:solidFill>
+          <a:ln w="12700">
+            <a:solidFill>
+              <a:srgbClr val="1D7E7E"/>
+            </a:solidFill>
+          </a:ln>
+        </p:spPr>
+        <p:style>
+          <a:lnRef idx="1">
+            <a:schemeClr val="accent1"/>
+          </a:lnRef>
+          <a:fillRef idx="3">
+            <a:schemeClr val="accent1"/>
+          </a:fillRef>
+          <a:effectRef idx="2">
+            <a:schemeClr val="accent1"/>
+          </a:effectRef>
+          <a:fontRef idx="minor">
+            <a:schemeClr val="lt1"/>
+          </a:fontRef>
+        </p:style>
+        <p:txBody>
+          <a:bodyPr rtlCol="0" anchor="ctr"/>
+          <a:lstStyle/>
+          <a:p>
+            <a:pPr algn="ctr"/>
+          </a:p>
+        </p:txBody>
+      </p:sp>
+      <p:sp>
+        <p:nvSpPr>
+          <p:cNvPr id="11" name="TextBox 10"/>
+          <p:cNvSpPr txBox="1"/>
+          <p:nvPr/>
+        </p:nvSpPr>
+        <p:spPr>
+          <a:xfrm>
+            <a:off x="4434840" y="2743200"/>
+            <a:ext cx="365760" cy="365760"/>
+          </a:xfrm>
+          <a:prstGeom prst="rect">
+            <a:avLst/>
+          </a:prstGeom>
+          <a:noFill/>
+        </p:spPr>
+        <p:txBody>
+          <a:bodyPr wrap="square" lIns="0" rIns="0" tIns="0" bIns="0">
+            <a:spAutoFit/>
+          </a:bodyPr>
+          <a:lstStyle/>
+          <a:p>
+            <a:pPr>
+              <a:defRPr sz="1800" b="1" i="0">
+                <a:solidFill>
+                  <a:srgbClr val="E0B85F"/>
+                </a:solidFill>
+                <a:latin typeface="Calibri"/>
+              </a:defRPr>
+            </a:pPr>
+            <a:r>
+              <a:t>2</a:t>
+            </a:r>
+          </a:p>
+        </p:txBody>
+      </p:sp>
+      <p:sp>
+        <p:nvSpPr>
+          <p:cNvPr id="12" name="TextBox 11"/>
+          <p:cNvSpPr txBox="1"/>
+          <p:nvPr/>
+        </p:nvSpPr>
+        <p:spPr>
+          <a:xfrm>
+            <a:off x="4846320" y="2788920"/>
+            <a:ext cx="3063239" cy="274320"/>
+          </a:xfrm>
+          <a:prstGeom prst="rect">
+            <a:avLst/>
+          </a:prstGeom>
+          <a:noFill/>
+        </p:spPr>
+        <p:txBody>
+          <a:bodyPr wrap="square" lIns="0" rIns="0" tIns="0" bIns="0">
+            <a:spAutoFit/>
+          </a:bodyPr>
+          <a:lstStyle/>
+          <a:p>
+            <a:pPr>
+              <a:defRPr sz="1100" b="1" i="0">
+                <a:solidFill>
+                  <a:srgbClr val="0F2540"/>
+                </a:solidFill>
+                <a:latin typeface="Calibri"/>
+              </a:defRPr>
+            </a:pPr>
+            <a:r>
+              <a:t>Multiply on forward</a:t>
+            </a:r>
+          </a:p>
+        </p:txBody>
+      </p:sp>
+      <p:sp>
+        <p:nvSpPr>
+          <p:cNvPr id="13" name="TextBox 12"/>
+          <p:cNvSpPr txBox="1"/>
+          <p:nvPr/>
+        </p:nvSpPr>
+        <p:spPr>
+          <a:xfrm>
+            <a:off x="4846320" y="3108960"/>
+            <a:ext cx="3063239" cy="457200"/>
+          </a:xfrm>
+          <a:prstGeom prst="rect">
+            <a:avLst/>
+          </a:prstGeom>
+          <a:noFill/>
+        </p:spPr>
+        <p:txBody>
+          <a:bodyPr wrap="square" lIns="0" rIns="0" tIns="0" bIns="0">
+            <a:spAutoFit/>
+          </a:bodyPr>
+          <a:lstStyle/>
+          <a:p>
+            <a:pPr>
+              <a:defRPr sz="1400" b="0" i="0">
+                <a:solidFill>
+                  <a:srgbClr val="1A1A1A"/>
+                </a:solidFill>
+                <a:latin typeface="Cambria Math"/>
+              </a:defRPr>
+            </a:pPr>
+            <a:r>
+              <a:t>O[t] = V_thr · S[t]</a:t>
+            </a:r>
+          </a:p>
+        </p:txBody>
+      </p:sp>
+      <p:sp>
+        <p:nvSpPr>
+          <p:cNvPr id="14" name="Rectangle 13"/>
+          <p:cNvSpPr/>
+          <p:nvPr/>
+        </p:nvSpPr>
+        <p:spPr>
+          <a:xfrm>
+            <a:off x="8046720" y="2651760"/>
+            <a:ext cx="3703320" cy="960120"/>
+          </a:xfrm>
+          <a:prstGeom prst="rect">
+            <a:avLst/>
+          </a:prstGeom>
+          <a:solidFill>
+            <a:srgbClr val="F8F7F2"/>
+          </a:solidFill>
+          <a:ln w="12700">
+            <a:solidFill>
+              <a:srgbClr val="1D7E7E"/>
+            </a:solidFill>
+          </a:ln>
+        </p:spPr>
+        <p:style>
+          <a:lnRef idx="1">
+            <a:schemeClr val="accent1"/>
+          </a:lnRef>
+          <a:fillRef idx="3">
+            <a:schemeClr val="accent1"/>
+          </a:fillRef>
+          <a:effectRef idx="2">
+            <a:schemeClr val="accent1"/>
+          </a:effectRef>
+          <a:fontRef idx="minor">
+            <a:schemeClr val="lt1"/>
+          </a:fontRef>
+        </p:style>
+        <p:txBody>
+          <a:bodyPr rtlCol="0" anchor="ctr"/>
+          <a:lstStyle/>
+          <a:p>
+            <a:pPr algn="ctr"/>
+          </a:p>
+        </p:txBody>
+      </p:sp>
+      <p:sp>
+        <p:nvSpPr>
+          <p:cNvPr id="15" name="TextBox 14"/>
+          <p:cNvSpPr txBox="1"/>
+          <p:nvPr/>
+        </p:nvSpPr>
+        <p:spPr>
+          <a:xfrm>
+            <a:off x="8229600" y="2743200"/>
+            <a:ext cx="365760" cy="365760"/>
+          </a:xfrm>
+          <a:prstGeom prst="rect">
+            <a:avLst/>
+          </a:prstGeom>
+          <a:noFill/>
+        </p:spPr>
+        <p:txBody>
+          <a:bodyPr wrap="square" lIns="0" rIns="0" tIns="0" bIns="0">
+            <a:spAutoFit/>
+          </a:bodyPr>
+          <a:lstStyle/>
+          <a:p>
+            <a:pPr>
+              <a:defRPr sz="1800" b="1" i="0">
+                <a:solidFill>
+                  <a:srgbClr val="E0B85F"/>
+                </a:solidFill>
+                <a:latin typeface="Calibri"/>
+              </a:defRPr>
+            </a:pPr>
+            <a:r>
+              <a:t>3</a:t>
+            </a:r>
+          </a:p>
+        </p:txBody>
+      </p:sp>
+      <p:sp>
+        <p:nvSpPr>
+          <p:cNvPr id="16" name="TextBox 15"/>
+          <p:cNvSpPr txBox="1"/>
+          <p:nvPr/>
+        </p:nvSpPr>
+        <p:spPr>
+          <a:xfrm>
+            <a:off x="8641080" y="2788920"/>
+            <a:ext cx="3063239" cy="274320"/>
+          </a:xfrm>
+          <a:prstGeom prst="rect">
+            <a:avLst/>
+          </a:prstGeom>
+          <a:noFill/>
+        </p:spPr>
+        <p:txBody>
+          <a:bodyPr wrap="square" lIns="0" rIns="0" tIns="0" bIns="0">
+            <a:spAutoFit/>
+          </a:bodyPr>
+          <a:lstStyle/>
+          <a:p>
+            <a:pPr>
+              <a:defRPr sz="1100" b="1" i="0">
+                <a:solidFill>
+                  <a:srgbClr val="0F2540"/>
+                </a:solidFill>
+                <a:latin typeface="Calibri"/>
+              </a:defRPr>
+            </a:pPr>
+            <a:r>
+              <a:t>Chain rule cancels</a:t>
+            </a:r>
+          </a:p>
+        </p:txBody>
+      </p:sp>
+      <p:sp>
+        <p:nvSpPr>
+          <p:cNvPr id="17" name="TextBox 16"/>
+          <p:cNvSpPr txBox="1"/>
+          <p:nvPr/>
+        </p:nvSpPr>
+        <p:spPr>
+          <a:xfrm>
+            <a:off x="8641080" y="3108960"/>
+            <a:ext cx="3063239" cy="457200"/>
+          </a:xfrm>
+          <a:prstGeom prst="rect">
+            <a:avLst/>
+          </a:prstGeom>
+          <a:noFill/>
+        </p:spPr>
+        <p:txBody>
+          <a:bodyPr wrap="square" lIns="0" rIns="0" tIns="0" bIns="0">
+            <a:spAutoFit/>
+          </a:bodyPr>
+          <a:lstStyle/>
+          <a:p>
+            <a:pPr>
+              <a:defRPr sz="1400" b="0" i="0">
+                <a:solidFill>
+                  <a:srgbClr val="1A1A1A"/>
+                </a:solidFill>
+                <a:latin typeface="Cambria Math"/>
+              </a:defRPr>
+            </a:pPr>
+            <a:r>
+              <a:t>∂O/∂M = f'(x)</a:t>
+            </a:r>
+          </a:p>
+        </p:txBody>
+      </p:sp>
+      <p:pic>
+        <p:nvPicPr>
+          <p:cNvPr id="18" name="Picture 17" descr="chain_rule.png"/>
+          <p:cNvPicPr>
+            <a:picLocks noChangeAspect="1"/>
+          </p:cNvPicPr>
+          <p:nvPr/>
+        </p:nvPicPr>
+        <p:blipFill>
+          <a:blip r:embed="rId2"/>
+          <a:stretch>
+            <a:fillRect/>
+          </a:stretch>
+        </p:blipFill>
+        <p:spPr>
+          <a:xfrm>
+            <a:off x="1371600" y="3931920"/>
+            <a:ext cx="9418320" cy="2497643"/>
+          </a:xfrm>
+          <a:prstGeom prst="rect">
+            <a:avLst/>
+          </a:prstGeom>
+        </p:spPr>
+      </p:pic>
+      <p:sp>
+        <p:nvSpPr>
+          <p:cNvPr id="19" name="Rectangle 18"/>
+          <p:cNvSpPr/>
+          <p:nvPr/>
+        </p:nvSpPr>
+        <p:spPr>
+          <a:xfrm>
+            <a:off x="457200" y="5852160"/>
+            <a:ext cx="54864" cy="548640"/>
           </a:xfrm>
           <a:prstGeom prst="rect">
             <a:avLst/>
@@ -5459,257 +5928,14 @@
       </p:sp>
       <p:sp>
         <p:nvSpPr>
-          <p:cNvPr id="7" name="Rectangle 6"/>
+          <p:cNvPr id="20" name="Rectangle 19"/>
           <p:cNvSpPr/>
           <p:nvPr/>
         </p:nvSpPr>
         <p:spPr>
           <a:xfrm>
-            <a:off x="512064" y="2743200"/>
-            <a:ext cx="11192256" cy="640080"/>
-          </a:xfrm>
-          <a:prstGeom prst="rect">
-            <a:avLst/>
-          </a:prstGeom>
-          <a:solidFill>
-            <a:srgbClr val="F8F7F2"/>
-          </a:solidFill>
-          <a:ln>
-            <a:noFill/>
-          </a:ln>
-        </p:spPr>
-        <p:style>
-          <a:lnRef idx="1">
-            <a:schemeClr val="accent1"/>
-          </a:lnRef>
-          <a:fillRef idx="3">
-            <a:schemeClr val="accent1"/>
-          </a:fillRef>
-          <a:effectRef idx="2">
-            <a:schemeClr val="accent1"/>
-          </a:effectRef>
-          <a:fontRef idx="minor">
-            <a:schemeClr val="lt1"/>
-          </a:fontRef>
-        </p:style>
-        <p:txBody>
-          <a:bodyPr rtlCol="0" anchor="ctr"/>
-          <a:lstStyle/>
-          <a:p>
-            <a:pPr algn="ctr"/>
-          </a:p>
-        </p:txBody>
-      </p:sp>
-      <p:sp>
-        <p:nvSpPr>
-          <p:cNvPr id="8" name="TextBox 7"/>
-          <p:cNvSpPr txBox="1"/>
-          <p:nvPr/>
-        </p:nvSpPr>
-        <p:spPr>
-          <a:xfrm>
-            <a:off x="777240" y="2880360"/>
-            <a:ext cx="10789920" cy="365759"/>
-          </a:xfrm>
-          <a:prstGeom prst="rect">
-            <a:avLst/>
-          </a:prstGeom>
-          <a:noFill/>
-        </p:spPr>
-        <p:txBody>
-          <a:bodyPr wrap="square">
-            <a:spAutoFit/>
-          </a:bodyPr>
-          <a:lstStyle/>
-          <a:p>
-            <a:pPr>
-              <a:spcBef>
-                <a:spcPts val="0"/>
-              </a:spcBef>
-              <a:defRPr sz="1200">
-                <a:solidFill>
-                  <a:srgbClr val="1A1A1A"/>
-                </a:solidFill>
-                <a:latin typeface="Calibri"/>
-              </a:defRPr>
-            </a:pPr>
-            <a:r>
-              <a:t>Forward:    O[t]  =  V_thr · S[t]    (real-valued — gradient flows cleanly through V_thr)</a:t>
-            </a:r>
-          </a:p>
-        </p:txBody>
-      </p:sp>
-      <p:sp>
-        <p:nvSpPr>
-          <p:cNvPr id="9" name="TextBox 8"/>
-          <p:cNvSpPr txBox="1"/>
-          <p:nvPr/>
-        </p:nvSpPr>
-        <p:spPr>
-          <a:xfrm>
-            <a:off x="457200" y="3611880"/>
-            <a:ext cx="11247120" cy="365760"/>
-          </a:xfrm>
-          <a:prstGeom prst="rect">
-            <a:avLst/>
-          </a:prstGeom>
-          <a:noFill/>
-        </p:spPr>
-        <p:txBody>
-          <a:bodyPr wrap="square" lIns="0" rIns="0" tIns="0" bIns="0">
-            <a:spAutoFit/>
-          </a:bodyPr>
-          <a:lstStyle/>
-          <a:p>
-            <a:pPr>
-              <a:defRPr sz="1400" b="1" i="0">
-                <a:solidFill>
-                  <a:srgbClr val="0F2540"/>
-                </a:solidFill>
-                <a:latin typeface="Calibri"/>
-              </a:defRPr>
-            </a:pPr>
-            <a:r>
-              <a:t>At deployment, absorb V_thr into the next layer's weights</a:t>
-            </a:r>
-          </a:p>
-        </p:txBody>
-      </p:sp>
-      <p:sp>
-        <p:nvSpPr>
-          <p:cNvPr id="10" name="Rectangle 9"/>
-          <p:cNvSpPr/>
-          <p:nvPr/>
-        </p:nvSpPr>
-        <p:spPr>
-          <a:xfrm>
-            <a:off x="457200" y="4069080"/>
-            <a:ext cx="54864" cy="640080"/>
-          </a:xfrm>
-          <a:prstGeom prst="rect">
-            <a:avLst/>
-          </a:prstGeom>
-          <a:solidFill>
-            <a:srgbClr val="E0B85F"/>
-          </a:solidFill>
-          <a:ln>
-            <a:noFill/>
-          </a:ln>
-        </p:spPr>
-        <p:style>
-          <a:lnRef idx="1">
-            <a:schemeClr val="accent1"/>
-          </a:lnRef>
-          <a:fillRef idx="3">
-            <a:schemeClr val="accent1"/>
-          </a:fillRef>
-          <a:effectRef idx="2">
-            <a:schemeClr val="accent1"/>
-          </a:effectRef>
-          <a:fontRef idx="minor">
-            <a:schemeClr val="lt1"/>
-          </a:fontRef>
-        </p:style>
-        <p:txBody>
-          <a:bodyPr rtlCol="0" anchor="ctr"/>
-          <a:lstStyle/>
-          <a:p>
-            <a:pPr algn="ctr"/>
-          </a:p>
-        </p:txBody>
-      </p:sp>
-      <p:sp>
-        <p:nvSpPr>
-          <p:cNvPr id="11" name="Rectangle 10"/>
-          <p:cNvSpPr/>
-          <p:nvPr/>
-        </p:nvSpPr>
-        <p:spPr>
-          <a:xfrm>
-            <a:off x="512064" y="4069080"/>
-            <a:ext cx="11192256" cy="640080"/>
-          </a:xfrm>
-          <a:prstGeom prst="rect">
-            <a:avLst/>
-          </a:prstGeom>
-          <a:solidFill>
-            <a:srgbClr val="F8F7F2"/>
-          </a:solidFill>
-          <a:ln>
-            <a:noFill/>
-          </a:ln>
-        </p:spPr>
-        <p:style>
-          <a:lnRef idx="1">
-            <a:schemeClr val="accent1"/>
-          </a:lnRef>
-          <a:fillRef idx="3">
-            <a:schemeClr val="accent1"/>
-          </a:fillRef>
-          <a:effectRef idx="2">
-            <a:schemeClr val="accent1"/>
-          </a:effectRef>
-          <a:fontRef idx="minor">
-            <a:schemeClr val="lt1"/>
-          </a:fontRef>
-        </p:style>
-        <p:txBody>
-          <a:bodyPr rtlCol="0" anchor="ctr"/>
-          <a:lstStyle/>
-          <a:p>
-            <a:pPr algn="ctr"/>
-          </a:p>
-        </p:txBody>
-      </p:sp>
-      <p:sp>
-        <p:nvSpPr>
-          <p:cNvPr id="12" name="TextBox 11"/>
-          <p:cNvSpPr txBox="1"/>
-          <p:nvPr/>
-        </p:nvSpPr>
-        <p:spPr>
-          <a:xfrm>
-            <a:off x="777240" y="4206240"/>
-            <a:ext cx="10789920" cy="365759"/>
-          </a:xfrm>
-          <a:prstGeom prst="rect">
-            <a:avLst/>
-          </a:prstGeom>
-          <a:noFill/>
-        </p:spPr>
-        <p:txBody>
-          <a:bodyPr wrap="square">
-            <a:spAutoFit/>
-          </a:bodyPr>
-          <a:lstStyle/>
-          <a:p>
-            <a:pPr>
-              <a:spcBef>
-                <a:spcPts val="0"/>
-              </a:spcBef>
-              <a:defRPr sz="1200">
-                <a:solidFill>
-                  <a:srgbClr val="1A1A1A"/>
-                </a:solidFill>
-                <a:latin typeface="Calibri"/>
-              </a:defRPr>
-            </a:pPr>
-            <a:r>
-              <a:t>W'_{l→l+1}   =   V_thr  ·  W_{l→l+1}    (one-time rescaling)</a:t>
-            </a:r>
-          </a:p>
-        </p:txBody>
-      </p:sp>
-      <p:sp>
-        <p:nvSpPr>
-          <p:cNvPr id="13" name="Rectangle 12"/>
-          <p:cNvSpPr/>
-          <p:nvPr/>
-        </p:nvSpPr>
-        <p:spPr>
-          <a:xfrm>
-            <a:off x="457200" y="4800600"/>
-            <a:ext cx="54864" cy="640080"/>
+            <a:off x="512064" y="5852160"/>
+            <a:ext cx="11192256" cy="548640"/>
           </a:xfrm>
           <a:prstGeom prst="rect">
             <a:avLst/>
@@ -5745,57 +5971,14 @@
       </p:sp>
       <p:sp>
         <p:nvSpPr>
-          <p:cNvPr id="14" name="Rectangle 13"/>
-          <p:cNvSpPr/>
-          <p:nvPr/>
-        </p:nvSpPr>
-        <p:spPr>
-          <a:xfrm>
-            <a:off x="512064" y="4800600"/>
-            <a:ext cx="11192256" cy="640080"/>
-          </a:xfrm>
-          <a:prstGeom prst="rect">
-            <a:avLst/>
-          </a:prstGeom>
-          <a:solidFill>
-            <a:srgbClr val="E5F5F0"/>
-          </a:solidFill>
-          <a:ln>
-            <a:noFill/>
-          </a:ln>
-        </p:spPr>
-        <p:style>
-          <a:lnRef idx="1">
-            <a:schemeClr val="accent1"/>
-          </a:lnRef>
-          <a:fillRef idx="3">
-            <a:schemeClr val="accent1"/>
-          </a:fillRef>
-          <a:effectRef idx="2">
-            <a:schemeClr val="accent1"/>
-          </a:effectRef>
-          <a:fontRef idx="minor">
-            <a:schemeClr val="lt1"/>
-          </a:fontRef>
-        </p:style>
-        <p:txBody>
-          <a:bodyPr rtlCol="0" anchor="ctr"/>
-          <a:lstStyle/>
-          <a:p>
-            <a:pPr algn="ctr"/>
-          </a:p>
-        </p:txBody>
-      </p:sp>
-      <p:sp>
-        <p:nvSpPr>
-          <p:cNvPr id="15" name="TextBox 14"/>
-          <p:cNvSpPr txBox="1"/>
-          <p:nvPr/>
-        </p:nvSpPr>
-        <p:spPr>
-          <a:xfrm>
-            <a:off x="777240" y="4937760"/>
-            <a:ext cx="10789920" cy="365759"/>
+          <p:cNvPr id="21" name="TextBox 20"/>
+          <p:cNvSpPr txBox="1"/>
+          <p:nvPr/>
+        </p:nvSpPr>
+        <p:spPr>
+          <a:xfrm>
+            <a:off x="777240" y="5989320"/>
+            <a:ext cx="10789920" cy="274320"/>
           </a:xfrm>
           <a:prstGeom prst="rect">
             <a:avLst/>
@@ -5809,131 +5992,6 @@
           <a:lstStyle/>
           <a:p>
             <a:pPr>
-              <a:spcBef>
-                <a:spcPts val="0"/>
-              </a:spcBef>
-              <a:defRPr sz="1200">
-                <a:solidFill>
-                  <a:srgbClr val="0F2540"/>
-                </a:solidFill>
-                <a:latin typeface="Calibri"/>
-              </a:defRPr>
-            </a:pPr>
-            <a:r>
-              <a:t>Forward at test time:    O[t]  =  S[t]  ∈  {0, 1}      (standard LIF — back to binary spikes)</a:t>
-            </a:r>
-          </a:p>
-        </p:txBody>
-      </p:sp>
-      <p:sp>
-        <p:nvSpPr>
-          <p:cNvPr id="16" name="Rectangle 15"/>
-          <p:cNvSpPr/>
-          <p:nvPr/>
-        </p:nvSpPr>
-        <p:spPr>
-          <a:xfrm>
-            <a:off x="457200" y="5669280"/>
-            <a:ext cx="54864" cy="640080"/>
-          </a:xfrm>
-          <a:prstGeom prst="rect">
-            <a:avLst/>
-          </a:prstGeom>
-          <a:solidFill>
-            <a:srgbClr val="E0B85F"/>
-          </a:solidFill>
-          <a:ln>
-            <a:noFill/>
-          </a:ln>
-        </p:spPr>
-        <p:style>
-          <a:lnRef idx="1">
-            <a:schemeClr val="accent1"/>
-          </a:lnRef>
-          <a:fillRef idx="3">
-            <a:schemeClr val="accent1"/>
-          </a:fillRef>
-          <a:effectRef idx="2">
-            <a:schemeClr val="accent1"/>
-          </a:effectRef>
-          <a:fontRef idx="minor">
-            <a:schemeClr val="lt1"/>
-          </a:fontRef>
-        </p:style>
-        <p:txBody>
-          <a:bodyPr rtlCol="0" anchor="ctr"/>
-          <a:lstStyle/>
-          <a:p>
-            <a:pPr algn="ctr"/>
-          </a:p>
-        </p:txBody>
-      </p:sp>
-      <p:sp>
-        <p:nvSpPr>
-          <p:cNvPr id="17" name="Rectangle 16"/>
-          <p:cNvSpPr/>
-          <p:nvPr/>
-        </p:nvSpPr>
-        <p:spPr>
-          <a:xfrm>
-            <a:off x="512064" y="5669280"/>
-            <a:ext cx="11192256" cy="640080"/>
-          </a:xfrm>
-          <a:prstGeom prst="rect">
-            <a:avLst/>
-          </a:prstGeom>
-          <a:solidFill>
-            <a:srgbClr val="1D7E7E"/>
-          </a:solidFill>
-          <a:ln>
-            <a:noFill/>
-          </a:ln>
-        </p:spPr>
-        <p:style>
-          <a:lnRef idx="1">
-            <a:schemeClr val="accent1"/>
-          </a:lnRef>
-          <a:fillRef idx="3">
-            <a:schemeClr val="accent1"/>
-          </a:fillRef>
-          <a:effectRef idx="2">
-            <a:schemeClr val="accent1"/>
-          </a:effectRef>
-          <a:fontRef idx="minor">
-            <a:schemeClr val="lt1"/>
-          </a:fontRef>
-        </p:style>
-        <p:txBody>
-          <a:bodyPr rtlCol="0" anchor="ctr"/>
-          <a:lstStyle/>
-          <a:p>
-            <a:pPr algn="ctr"/>
-          </a:p>
-        </p:txBody>
-      </p:sp>
-      <p:sp>
-        <p:nvSpPr>
-          <p:cNvPr id="18" name="TextBox 17"/>
-          <p:cNvSpPr txBox="1"/>
-          <p:nvPr/>
-        </p:nvSpPr>
-        <p:spPr>
-          <a:xfrm>
-            <a:off x="777240" y="5806440"/>
-            <a:ext cx="10789920" cy="365759"/>
-          </a:xfrm>
-          <a:prstGeom prst="rect">
-            <a:avLst/>
-          </a:prstGeom>
-          <a:noFill/>
-        </p:spPr>
-        <p:txBody>
-          <a:bodyPr wrap="square">
-            <a:spAutoFit/>
-          </a:bodyPr>
-          <a:lstStyle/>
-          <a:p>
-            <a:pPr>
               <a:defRPr sz="1300" b="1">
                 <a:solidFill>
                   <a:srgbClr val="FFFFFF"/>
@@ -5942,14 +6000,14 @@
               </a:defRPr>
             </a:pPr>
             <a:r>
-              <a:t>Standard LIF operators at inference. Hardware compatibility preserved.</a:t>
-            </a:r>
-          </a:p>
-        </p:txBody>
-      </p:sp>
-      <p:sp>
-        <p:nvSpPr>
-          <p:cNvPr id="19" name="TextBox 18"/>
+              <a:t>Window adapts with V_thr  ·  gradient magnitude is threshold-invariant.</a:t>
+            </a:r>
+          </a:p>
+        </p:txBody>
+      </p:sp>
+      <p:sp>
+        <p:nvSpPr>
+          <p:cNvPr id="22" name="TextBox 21"/>
           <p:cNvSpPr txBox="1"/>
           <p:nvPr/>
         </p:nvSpPr>
@@ -5985,7 +6043,7 @@
       </p:sp>
       <p:sp>
         <p:nvSpPr>
-          <p:cNvPr id="20" name="TextBox 19"/>
+          <p:cNvPr id="23" name="TextBox 22"/>
           <p:cNvSpPr txBox="1"/>
           <p:nvPr/>
         </p:nvSpPr>
@@ -6014,7 +6072,7 @@
               </a:defRPr>
             </a:pPr>
             <a:r>
-              <a:t>12 / 18</a:t>
+              <a:t>12 / 19</a:t>
             </a:r>
           </a:p>
         </p:txBody>
@@ -6105,7 +6163,7 @@
               </a:defRPr>
             </a:pPr>
             <a:r>
-              <a:t>TrSG Holds Up — Stress Tests + Real Trajectories</a:t>
+              <a:t>Inference Stays Binary</a:t>
             </a:r>
           </a:p>
         </p:txBody>
@@ -6118,22 +6176,22 @@
         </p:nvSpPr>
         <p:spPr>
           <a:xfrm>
-            <a:off x="457200" y="2194560"/>
-            <a:ext cx="5943600" cy="365760"/>
-          </a:xfrm>
-          <a:prstGeom prst="rect">
-            <a:avLst/>
-          </a:prstGeom>
-          <a:noFill/>
-        </p:spPr>
-        <p:txBody>
-          <a:bodyPr wrap="square" lIns="0" rIns="0" tIns="0" bIns="0">
-            <a:spAutoFit/>
-          </a:bodyPr>
-          <a:lstStyle/>
-          <a:p>
-            <a:pPr>
-              <a:defRPr sz="1100" b="0" i="1">
+            <a:off x="457200" y="1600200"/>
+            <a:ext cx="11247120" cy="365760"/>
+          </a:xfrm>
+          <a:prstGeom prst="rect">
+            <a:avLst/>
+          </a:prstGeom>
+          <a:noFill/>
+        </p:spPr>
+        <p:txBody>
+          <a:bodyPr wrap="square" lIns="0" rIns="0" tIns="0" bIns="0">
+            <a:spAutoFit/>
+          </a:bodyPr>
+          <a:lstStyle/>
+          <a:p>
+            <a:pPr>
+              <a:defRPr sz="1400" b="0" i="1">
                 <a:solidFill>
                   <a:srgbClr val="7A7A7A"/>
                 </a:solidFill>
@@ -6141,379 +6199,57 @@
               </a:defRPr>
             </a:pPr>
             <a:r>
-              <a:t>Gradient-stability metrics at extreme thresholds  (CIFAR-100, T=4, ep 100)</a:t>
-            </a:r>
-          </a:p>
-        </p:txBody>
-      </p:sp>
-      <p:sp>
-        <p:nvSpPr>
-          <p:cNvPr id="5" name="Rectangle 4"/>
+              <a:t>TrSG is a training-only trick — neuromorphic hardware never sees it</a:t>
+            </a:r>
+          </a:p>
+        </p:txBody>
+      </p:sp>
+      <p:sp>
+        <p:nvSpPr>
+          <p:cNvPr id="5" name="TextBox 4"/>
+          <p:cNvSpPr txBox="1"/>
+          <p:nvPr/>
+        </p:nvSpPr>
+        <p:spPr>
+          <a:xfrm>
+            <a:off x="457200" y="2286000"/>
+            <a:ext cx="11247120" cy="365760"/>
+          </a:xfrm>
+          <a:prstGeom prst="rect">
+            <a:avLst/>
+          </a:prstGeom>
+          <a:noFill/>
+        </p:spPr>
+        <p:txBody>
+          <a:bodyPr wrap="square" lIns="0" rIns="0" tIns="0" bIns="0">
+            <a:spAutoFit/>
+          </a:bodyPr>
+          <a:lstStyle/>
+          <a:p>
+            <a:pPr>
+              <a:defRPr sz="1400" b="1" i="0">
+                <a:solidFill>
+                  <a:srgbClr val="0F2540"/>
+                </a:solidFill>
+                <a:latin typeface="Calibri"/>
+              </a:defRPr>
+            </a:pPr>
+            <a:r>
+              <a:t>Training</a:t>
+            </a:r>
+          </a:p>
+        </p:txBody>
+      </p:sp>
+      <p:sp>
+        <p:nvSpPr>
+          <p:cNvPr id="6" name="Rectangle 5"/>
           <p:cNvSpPr/>
           <p:nvPr/>
         </p:nvSpPr>
         <p:spPr>
           <a:xfrm>
-            <a:off x="457200" y="2606040"/>
-            <a:ext cx="2788920" cy="2194560"/>
-          </a:xfrm>
-          <a:prstGeom prst="rect">
-            <a:avLst/>
-          </a:prstGeom>
-          <a:solidFill>
-            <a:srgbClr val="F8F7F2"/>
-          </a:solidFill>
-          <a:ln w="6350">
-            <a:solidFill>
-              <a:srgbClr val="E5E5E0"/>
-            </a:solidFill>
-          </a:ln>
-        </p:spPr>
-        <p:style>
-          <a:lnRef idx="1">
-            <a:schemeClr val="accent1"/>
-          </a:lnRef>
-          <a:fillRef idx="3">
-            <a:schemeClr val="accent1"/>
-          </a:fillRef>
-          <a:effectRef idx="2">
-            <a:schemeClr val="accent1"/>
-          </a:effectRef>
-          <a:fontRef idx="minor">
-            <a:schemeClr val="lt1"/>
-          </a:fontRef>
-        </p:style>
-        <p:txBody>
-          <a:bodyPr rtlCol="0" anchor="ctr"/>
-          <a:lstStyle/>
-          <a:p>
-            <a:pPr algn="ctr"/>
-          </a:p>
-        </p:txBody>
-      </p:sp>
-      <p:sp>
-        <p:nvSpPr>
-          <p:cNvPr id="6" name="TextBox 5"/>
-          <p:cNvSpPr txBox="1"/>
-          <p:nvPr/>
-        </p:nvSpPr>
-        <p:spPr>
-          <a:xfrm>
-            <a:off x="594360" y="2679192"/>
-            <a:ext cx="2606040" cy="274320"/>
-          </a:xfrm>
-          <a:prstGeom prst="rect">
-            <a:avLst/>
-          </a:prstGeom>
-          <a:noFill/>
-        </p:spPr>
-        <p:txBody>
-          <a:bodyPr wrap="square" lIns="0" rIns="0" tIns="0" bIns="0">
-            <a:spAutoFit/>
-          </a:bodyPr>
-          <a:lstStyle/>
-          <a:p>
-            <a:pPr>
-              <a:defRPr sz="1100" b="1" i="0">
-                <a:solidFill>
-                  <a:srgbClr val="0F2540"/>
-                </a:solidFill>
-                <a:latin typeface="Calibri"/>
-              </a:defRPr>
-            </a:pPr>
-            <a:r>
-              <a:t>V_thr = 0.1   (low)</a:t>
-            </a:r>
-          </a:p>
-        </p:txBody>
-      </p:sp>
-      <p:sp>
-        <p:nvSpPr>
-          <p:cNvPr id="7" name="TextBox 6"/>
-          <p:cNvSpPr txBox="1"/>
-          <p:nvPr/>
-        </p:nvSpPr>
-        <p:spPr>
-          <a:xfrm>
-            <a:off x="594360" y="2971800"/>
-            <a:ext cx="2606040" cy="1828800"/>
-          </a:xfrm>
-          <a:prstGeom prst="rect">
-            <a:avLst/>
-          </a:prstGeom>
-          <a:noFill/>
-        </p:spPr>
-        <p:txBody>
-          <a:bodyPr wrap="square">
-            <a:spAutoFit/>
-          </a:bodyPr>
-          <a:lstStyle/>
-          <a:p>
-            <a:pPr>
-              <a:defRPr sz="1000">
-                <a:solidFill>
-                  <a:srgbClr val="E56945"/>
-                </a:solidFill>
-                <a:latin typeface="Consolas"/>
-              </a:defRPr>
-            </a:pPr>
-            <a:r>
-              <a:t>AS-SG    AbsStr 0.0145  · 90% active</a:t>
-            </a:r>
-          </a:p>
-          <a:p>
-            <a:pPr>
-              <a:spcBef>
-                <a:spcPts val="200"/>
-              </a:spcBef>
-              <a:defRPr sz="1000">
-                <a:solidFill>
-                  <a:srgbClr val="E56945"/>
-                </a:solidFill>
-                <a:latin typeface="Consolas"/>
-              </a:defRPr>
-            </a:pPr>
-            <a:r>
-              <a:t>RS-SG    diverged (NaN)</a:t>
-            </a:r>
-          </a:p>
-          <a:p>
-            <a:pPr>
-              <a:spcBef>
-                <a:spcPts val="200"/>
-              </a:spcBef>
-              <a:defRPr sz="1000">
-                <a:solidFill>
-                  <a:srgbClr val="1D7E7E"/>
-                </a:solidFill>
-                <a:latin typeface="Consolas"/>
-              </a:defRPr>
-            </a:pPr>
-            <a:r>
-              <a:t>TrSG     AbsStr 0.0153  · 21% · CV 0.87</a:t>
-            </a:r>
-          </a:p>
-        </p:txBody>
-      </p:sp>
-      <p:sp>
-        <p:nvSpPr>
-          <p:cNvPr id="8" name="Rectangle 7"/>
-          <p:cNvSpPr/>
-          <p:nvPr/>
-        </p:nvSpPr>
-        <p:spPr>
-          <a:xfrm>
-            <a:off x="3383280" y="2606040"/>
-            <a:ext cx="2788920" cy="2194560"/>
-          </a:xfrm>
-          <a:prstGeom prst="rect">
-            <a:avLst/>
-          </a:prstGeom>
-          <a:solidFill>
-            <a:srgbClr val="F8F7F2"/>
-          </a:solidFill>
-          <a:ln w="6350">
-            <a:solidFill>
-              <a:srgbClr val="E5E5E0"/>
-            </a:solidFill>
-          </a:ln>
-        </p:spPr>
-        <p:style>
-          <a:lnRef idx="1">
-            <a:schemeClr val="accent1"/>
-          </a:lnRef>
-          <a:fillRef idx="3">
-            <a:schemeClr val="accent1"/>
-          </a:fillRef>
-          <a:effectRef idx="2">
-            <a:schemeClr val="accent1"/>
-          </a:effectRef>
-          <a:fontRef idx="minor">
-            <a:schemeClr val="lt1"/>
-          </a:fontRef>
-        </p:style>
-        <p:txBody>
-          <a:bodyPr rtlCol="0" anchor="ctr"/>
-          <a:lstStyle/>
-          <a:p>
-            <a:pPr algn="ctr"/>
-          </a:p>
-        </p:txBody>
-      </p:sp>
-      <p:sp>
-        <p:nvSpPr>
-          <p:cNvPr id="9" name="TextBox 8"/>
-          <p:cNvSpPr txBox="1"/>
-          <p:nvPr/>
-        </p:nvSpPr>
-        <p:spPr>
-          <a:xfrm>
-            <a:off x="3520440" y="2679192"/>
-            <a:ext cx="2606040" cy="274320"/>
-          </a:xfrm>
-          <a:prstGeom prst="rect">
-            <a:avLst/>
-          </a:prstGeom>
-          <a:noFill/>
-        </p:spPr>
-        <p:txBody>
-          <a:bodyPr wrap="square" lIns="0" rIns="0" tIns="0" bIns="0">
-            <a:spAutoFit/>
-          </a:bodyPr>
-          <a:lstStyle/>
-          <a:p>
-            <a:pPr>
-              <a:defRPr sz="1100" b="1" i="0">
-                <a:solidFill>
-                  <a:srgbClr val="0F2540"/>
-                </a:solidFill>
-                <a:latin typeface="Calibri"/>
-              </a:defRPr>
-            </a:pPr>
-            <a:r>
-              <a:t>V_thr = 2.0   (high)</a:t>
-            </a:r>
-          </a:p>
-        </p:txBody>
-      </p:sp>
-      <p:sp>
-        <p:nvSpPr>
-          <p:cNvPr id="10" name="TextBox 9"/>
-          <p:cNvSpPr txBox="1"/>
-          <p:nvPr/>
-        </p:nvSpPr>
-        <p:spPr>
-          <a:xfrm>
-            <a:off x="3520440" y="2971800"/>
-            <a:ext cx="2606040" cy="1828800"/>
-          </a:xfrm>
-          <a:prstGeom prst="rect">
-            <a:avLst/>
-          </a:prstGeom>
-          <a:noFill/>
-        </p:spPr>
-        <p:txBody>
-          <a:bodyPr wrap="square">
-            <a:spAutoFit/>
-          </a:bodyPr>
-          <a:lstStyle/>
-          <a:p>
-            <a:pPr>
-              <a:defRPr sz="1000">
-                <a:solidFill>
-                  <a:srgbClr val="E56945"/>
-                </a:solidFill>
-                <a:latin typeface="Consolas"/>
-              </a:defRPr>
-            </a:pPr>
-            <a:r>
-              <a:t>AS-SG    0%  active  (zero gradient)</a:t>
-            </a:r>
-          </a:p>
-          <a:p>
-            <a:pPr>
-              <a:spcBef>
-                <a:spcPts val="200"/>
-              </a:spcBef>
-              <a:defRPr sz="1000">
-                <a:solidFill>
-                  <a:srgbClr val="E56945"/>
-                </a:solidFill>
-                <a:latin typeface="Consolas"/>
-              </a:defRPr>
-            </a:pPr>
-            <a:r>
-              <a:t>RS-SG    0.10% active · CV 2.25</a:t>
-            </a:r>
-          </a:p>
-          <a:p>
-            <a:pPr>
-              <a:spcBef>
-                <a:spcPts val="200"/>
-              </a:spcBef>
-              <a:defRPr sz="1000">
-                <a:solidFill>
-                  <a:srgbClr val="1D7E7E"/>
-                </a:solidFill>
-                <a:latin typeface="Consolas"/>
-              </a:defRPr>
-            </a:pPr>
-            <a:r>
-              <a:t>TrSG     AbsStr 0.0323  · 7% · CV 0.73</a:t>
-            </a:r>
-          </a:p>
-        </p:txBody>
-      </p:sp>
-      <p:sp>
-        <p:nvSpPr>
-          <p:cNvPr id="11" name="TextBox 10"/>
-          <p:cNvSpPr txBox="1"/>
-          <p:nvPr/>
-        </p:nvSpPr>
-        <p:spPr>
-          <a:xfrm>
-            <a:off x="6675120" y="2194560"/>
-            <a:ext cx="5120640" cy="365760"/>
-          </a:xfrm>
-          <a:prstGeom prst="rect">
-            <a:avLst/>
-          </a:prstGeom>
-          <a:noFill/>
-        </p:spPr>
-        <p:txBody>
-          <a:bodyPr wrap="square" lIns="0" rIns="0" tIns="0" bIns="0">
-            <a:spAutoFit/>
-          </a:bodyPr>
-          <a:lstStyle/>
-          <a:p>
-            <a:pPr>
-              <a:defRPr sz="1100" b="0" i="1">
-                <a:solidFill>
-                  <a:srgbClr val="7A7A7A"/>
-                </a:solidFill>
-                <a:latin typeface="Calibri"/>
-              </a:defRPr>
-            </a:pPr>
-            <a:r>
-              <a:t>Real trainings actually visit these regions</a:t>
-            </a:r>
-          </a:p>
-        </p:txBody>
-      </p:sp>
-      <p:pic>
-        <p:nvPicPr>
-          <p:cNvPr id="12" name="Picture 11" descr="threshold_training_imagenet.png"/>
-          <p:cNvPicPr>
-            <a:picLocks noChangeAspect="1"/>
-          </p:cNvPicPr>
-          <p:nvPr/>
-        </p:nvPicPr>
-        <p:blipFill>
-          <a:blip r:embed="rId2"/>
-          <a:stretch>
-            <a:fillRect/>
-          </a:stretch>
-        </p:blipFill>
-        <p:spPr>
-          <a:xfrm>
-            <a:off x="6675120" y="2606040"/>
-            <a:ext cx="5120640" cy="2194560"/>
-          </a:xfrm>
-          <a:prstGeom prst="rect">
-            <a:avLst/>
-          </a:prstGeom>
-        </p:spPr>
-      </p:pic>
-      <p:sp>
-        <p:nvSpPr>
-          <p:cNvPr id="13" name="Rectangle 12"/>
-          <p:cNvSpPr/>
-          <p:nvPr/>
-        </p:nvSpPr>
-        <p:spPr>
-          <a:xfrm>
-            <a:off x="457200" y="5029200"/>
-            <a:ext cx="54864" cy="1280160"/>
+            <a:off x="457200" y="2743200"/>
+            <a:ext cx="54864" cy="640080"/>
           </a:xfrm>
           <a:prstGeom prst="rect">
             <a:avLst/>
@@ -6549,20 +6285,20 @@
       </p:sp>
       <p:sp>
         <p:nvSpPr>
-          <p:cNvPr id="14" name="Rectangle 13"/>
+          <p:cNvPr id="7" name="Rectangle 6"/>
           <p:cNvSpPr/>
           <p:nvPr/>
         </p:nvSpPr>
         <p:spPr>
           <a:xfrm>
-            <a:off x="512064" y="5029200"/>
-            <a:ext cx="11192256" cy="1280160"/>
+            <a:off x="512064" y="2743200"/>
+            <a:ext cx="11192256" cy="640080"/>
           </a:xfrm>
           <a:prstGeom prst="rect">
             <a:avLst/>
           </a:prstGeom>
           <a:solidFill>
-            <a:srgbClr val="0F2540"/>
+            <a:srgbClr val="F8F7F2"/>
           </a:solidFill>
           <a:ln>
             <a:noFill/>
@@ -6592,14 +6328,300 @@
       </p:sp>
       <p:sp>
         <p:nvSpPr>
+          <p:cNvPr id="8" name="TextBox 7"/>
+          <p:cNvSpPr txBox="1"/>
+          <p:nvPr/>
+        </p:nvSpPr>
+        <p:spPr>
+          <a:xfrm>
+            <a:off x="777240" y="2880360"/>
+            <a:ext cx="10789920" cy="365759"/>
+          </a:xfrm>
+          <a:prstGeom prst="rect">
+            <a:avLst/>
+          </a:prstGeom>
+          <a:noFill/>
+        </p:spPr>
+        <p:txBody>
+          <a:bodyPr wrap="square">
+            <a:spAutoFit/>
+          </a:bodyPr>
+          <a:lstStyle/>
+          <a:p>
+            <a:pPr>
+              <a:spcBef>
+                <a:spcPts val="0"/>
+              </a:spcBef>
+              <a:defRPr sz="1200">
+                <a:solidFill>
+                  <a:srgbClr val="1A1A1A"/>
+                </a:solidFill>
+                <a:latin typeface="Calibri"/>
+              </a:defRPr>
+            </a:pPr>
+            <a:r>
+              <a:t>Forward:    O[t]  =  V_thr · S[t]    (real-valued — gradient flows cleanly through V_thr)</a:t>
+            </a:r>
+          </a:p>
+        </p:txBody>
+      </p:sp>
+      <p:sp>
+        <p:nvSpPr>
+          <p:cNvPr id="9" name="TextBox 8"/>
+          <p:cNvSpPr txBox="1"/>
+          <p:nvPr/>
+        </p:nvSpPr>
+        <p:spPr>
+          <a:xfrm>
+            <a:off x="457200" y="3611880"/>
+            <a:ext cx="11247120" cy="365760"/>
+          </a:xfrm>
+          <a:prstGeom prst="rect">
+            <a:avLst/>
+          </a:prstGeom>
+          <a:noFill/>
+        </p:spPr>
+        <p:txBody>
+          <a:bodyPr wrap="square" lIns="0" rIns="0" tIns="0" bIns="0">
+            <a:spAutoFit/>
+          </a:bodyPr>
+          <a:lstStyle/>
+          <a:p>
+            <a:pPr>
+              <a:defRPr sz="1400" b="1" i="0">
+                <a:solidFill>
+                  <a:srgbClr val="0F2540"/>
+                </a:solidFill>
+                <a:latin typeface="Calibri"/>
+              </a:defRPr>
+            </a:pPr>
+            <a:r>
+              <a:t>At deployment, absorb V_thr into the next layer's weights</a:t>
+            </a:r>
+          </a:p>
+        </p:txBody>
+      </p:sp>
+      <p:sp>
+        <p:nvSpPr>
+          <p:cNvPr id="10" name="Rectangle 9"/>
+          <p:cNvSpPr/>
+          <p:nvPr/>
+        </p:nvSpPr>
+        <p:spPr>
+          <a:xfrm>
+            <a:off x="457200" y="4069080"/>
+            <a:ext cx="54864" cy="640080"/>
+          </a:xfrm>
+          <a:prstGeom prst="rect">
+            <a:avLst/>
+          </a:prstGeom>
+          <a:solidFill>
+            <a:srgbClr val="E0B85F"/>
+          </a:solidFill>
+          <a:ln>
+            <a:noFill/>
+          </a:ln>
+        </p:spPr>
+        <p:style>
+          <a:lnRef idx="1">
+            <a:schemeClr val="accent1"/>
+          </a:lnRef>
+          <a:fillRef idx="3">
+            <a:schemeClr val="accent1"/>
+          </a:fillRef>
+          <a:effectRef idx="2">
+            <a:schemeClr val="accent1"/>
+          </a:effectRef>
+          <a:fontRef idx="minor">
+            <a:schemeClr val="lt1"/>
+          </a:fontRef>
+        </p:style>
+        <p:txBody>
+          <a:bodyPr rtlCol="0" anchor="ctr"/>
+          <a:lstStyle/>
+          <a:p>
+            <a:pPr algn="ctr"/>
+          </a:p>
+        </p:txBody>
+      </p:sp>
+      <p:sp>
+        <p:nvSpPr>
+          <p:cNvPr id="11" name="Rectangle 10"/>
+          <p:cNvSpPr/>
+          <p:nvPr/>
+        </p:nvSpPr>
+        <p:spPr>
+          <a:xfrm>
+            <a:off x="512064" y="4069080"/>
+            <a:ext cx="11192256" cy="640080"/>
+          </a:xfrm>
+          <a:prstGeom prst="rect">
+            <a:avLst/>
+          </a:prstGeom>
+          <a:solidFill>
+            <a:srgbClr val="F8F7F2"/>
+          </a:solidFill>
+          <a:ln>
+            <a:noFill/>
+          </a:ln>
+        </p:spPr>
+        <p:style>
+          <a:lnRef idx="1">
+            <a:schemeClr val="accent1"/>
+          </a:lnRef>
+          <a:fillRef idx="3">
+            <a:schemeClr val="accent1"/>
+          </a:fillRef>
+          <a:effectRef idx="2">
+            <a:schemeClr val="accent1"/>
+          </a:effectRef>
+          <a:fontRef idx="minor">
+            <a:schemeClr val="lt1"/>
+          </a:fontRef>
+        </p:style>
+        <p:txBody>
+          <a:bodyPr rtlCol="0" anchor="ctr"/>
+          <a:lstStyle/>
+          <a:p>
+            <a:pPr algn="ctr"/>
+          </a:p>
+        </p:txBody>
+      </p:sp>
+      <p:sp>
+        <p:nvSpPr>
+          <p:cNvPr id="12" name="TextBox 11"/>
+          <p:cNvSpPr txBox="1"/>
+          <p:nvPr/>
+        </p:nvSpPr>
+        <p:spPr>
+          <a:xfrm>
+            <a:off x="777240" y="4206240"/>
+            <a:ext cx="10789920" cy="365759"/>
+          </a:xfrm>
+          <a:prstGeom prst="rect">
+            <a:avLst/>
+          </a:prstGeom>
+          <a:noFill/>
+        </p:spPr>
+        <p:txBody>
+          <a:bodyPr wrap="square">
+            <a:spAutoFit/>
+          </a:bodyPr>
+          <a:lstStyle/>
+          <a:p>
+            <a:pPr>
+              <a:spcBef>
+                <a:spcPts val="0"/>
+              </a:spcBef>
+              <a:defRPr sz="1200">
+                <a:solidFill>
+                  <a:srgbClr val="1A1A1A"/>
+                </a:solidFill>
+                <a:latin typeface="Calibri"/>
+              </a:defRPr>
+            </a:pPr>
+            <a:r>
+              <a:t>W'_{l→l+1}   =   V_thr  ·  W_{l→l+1}    (one-time rescaling)</a:t>
+            </a:r>
+          </a:p>
+        </p:txBody>
+      </p:sp>
+      <p:sp>
+        <p:nvSpPr>
+          <p:cNvPr id="13" name="Rectangle 12"/>
+          <p:cNvSpPr/>
+          <p:nvPr/>
+        </p:nvSpPr>
+        <p:spPr>
+          <a:xfrm>
+            <a:off x="457200" y="4800600"/>
+            <a:ext cx="54864" cy="640080"/>
+          </a:xfrm>
+          <a:prstGeom prst="rect">
+            <a:avLst/>
+          </a:prstGeom>
+          <a:solidFill>
+            <a:srgbClr val="1D7E7E"/>
+          </a:solidFill>
+          <a:ln>
+            <a:noFill/>
+          </a:ln>
+        </p:spPr>
+        <p:style>
+          <a:lnRef idx="1">
+            <a:schemeClr val="accent1"/>
+          </a:lnRef>
+          <a:fillRef idx="3">
+            <a:schemeClr val="accent1"/>
+          </a:fillRef>
+          <a:effectRef idx="2">
+            <a:schemeClr val="accent1"/>
+          </a:effectRef>
+          <a:fontRef idx="minor">
+            <a:schemeClr val="lt1"/>
+          </a:fontRef>
+        </p:style>
+        <p:txBody>
+          <a:bodyPr rtlCol="0" anchor="ctr"/>
+          <a:lstStyle/>
+          <a:p>
+            <a:pPr algn="ctr"/>
+          </a:p>
+        </p:txBody>
+      </p:sp>
+      <p:sp>
+        <p:nvSpPr>
+          <p:cNvPr id="14" name="Rectangle 13"/>
+          <p:cNvSpPr/>
+          <p:nvPr/>
+        </p:nvSpPr>
+        <p:spPr>
+          <a:xfrm>
+            <a:off x="512064" y="4800600"/>
+            <a:ext cx="11192256" cy="640080"/>
+          </a:xfrm>
+          <a:prstGeom prst="rect">
+            <a:avLst/>
+          </a:prstGeom>
+          <a:solidFill>
+            <a:srgbClr val="E5F5F0"/>
+          </a:solidFill>
+          <a:ln>
+            <a:noFill/>
+          </a:ln>
+        </p:spPr>
+        <p:style>
+          <a:lnRef idx="1">
+            <a:schemeClr val="accent1"/>
+          </a:lnRef>
+          <a:fillRef idx="3">
+            <a:schemeClr val="accent1"/>
+          </a:fillRef>
+          <a:effectRef idx="2">
+            <a:schemeClr val="accent1"/>
+          </a:effectRef>
+          <a:fontRef idx="minor">
+            <a:schemeClr val="lt1"/>
+          </a:fontRef>
+        </p:style>
+        <p:txBody>
+          <a:bodyPr rtlCol="0" anchor="ctr"/>
+          <a:lstStyle/>
+          <a:p>
+            <a:pPr algn="ctr"/>
+          </a:p>
+        </p:txBody>
+      </p:sp>
+      <p:sp>
+        <p:nvSpPr>
           <p:cNvPr id="15" name="TextBox 14"/>
           <p:cNvSpPr txBox="1"/>
           <p:nvPr/>
         </p:nvSpPr>
         <p:spPr>
           <a:xfrm>
-            <a:off x="777240" y="5166360"/>
-            <a:ext cx="10789920" cy="1005839"/>
+            <a:off x="777240" y="4937760"/>
+            <a:ext cx="10789920" cy="365759"/>
           </a:xfrm>
           <a:prstGeom prst="rect">
             <a:avLst/>
@@ -6613,23 +6635,132 @@
           <a:lstStyle/>
           <a:p>
             <a:pPr>
-              <a:defRPr sz="1400" b="1">
-                <a:solidFill>
-                  <a:srgbClr val="E0B85F"/>
-                </a:solidFill>
-                <a:latin typeface="Calibri"/>
-              </a:defRPr>
-            </a:pPr>
-            <a:r>
-              <a:t>Threshold-robustness is a practical necessity</a:t>
-            </a:r>
-          </a:p>
-          <a:p>
-            <a:pPr>
               <a:spcBef>
-                <a:spcPts val="600"/>
+                <a:spcPts val="0"/>
               </a:spcBef>
-              <a:defRPr sz="1100">
+              <a:defRPr sz="1200">
+                <a:solidFill>
+                  <a:srgbClr val="0F2540"/>
+                </a:solidFill>
+                <a:latin typeface="Calibri"/>
+              </a:defRPr>
+            </a:pPr>
+            <a:r>
+              <a:t>Forward at test time:    O[t]  =  S[t]  ∈  {0, 1}      (standard LIF — back to binary spikes)</a:t>
+            </a:r>
+          </a:p>
+        </p:txBody>
+      </p:sp>
+      <p:sp>
+        <p:nvSpPr>
+          <p:cNvPr id="16" name="Rectangle 15"/>
+          <p:cNvSpPr/>
+          <p:nvPr/>
+        </p:nvSpPr>
+        <p:spPr>
+          <a:xfrm>
+            <a:off x="457200" y="5669280"/>
+            <a:ext cx="54864" cy="640080"/>
+          </a:xfrm>
+          <a:prstGeom prst="rect">
+            <a:avLst/>
+          </a:prstGeom>
+          <a:solidFill>
+            <a:srgbClr val="E0B85F"/>
+          </a:solidFill>
+          <a:ln>
+            <a:noFill/>
+          </a:ln>
+        </p:spPr>
+        <p:style>
+          <a:lnRef idx="1">
+            <a:schemeClr val="accent1"/>
+          </a:lnRef>
+          <a:fillRef idx="3">
+            <a:schemeClr val="accent1"/>
+          </a:fillRef>
+          <a:effectRef idx="2">
+            <a:schemeClr val="accent1"/>
+          </a:effectRef>
+          <a:fontRef idx="minor">
+            <a:schemeClr val="lt1"/>
+          </a:fontRef>
+        </p:style>
+        <p:txBody>
+          <a:bodyPr rtlCol="0" anchor="ctr"/>
+          <a:lstStyle/>
+          <a:p>
+            <a:pPr algn="ctr"/>
+          </a:p>
+        </p:txBody>
+      </p:sp>
+      <p:sp>
+        <p:nvSpPr>
+          <p:cNvPr id="17" name="Rectangle 16"/>
+          <p:cNvSpPr/>
+          <p:nvPr/>
+        </p:nvSpPr>
+        <p:spPr>
+          <a:xfrm>
+            <a:off x="512064" y="5669280"/>
+            <a:ext cx="11192256" cy="640080"/>
+          </a:xfrm>
+          <a:prstGeom prst="rect">
+            <a:avLst/>
+          </a:prstGeom>
+          <a:solidFill>
+            <a:srgbClr val="1D7E7E"/>
+          </a:solidFill>
+          <a:ln>
+            <a:noFill/>
+          </a:ln>
+        </p:spPr>
+        <p:style>
+          <a:lnRef idx="1">
+            <a:schemeClr val="accent1"/>
+          </a:lnRef>
+          <a:fillRef idx="3">
+            <a:schemeClr val="accent1"/>
+          </a:fillRef>
+          <a:effectRef idx="2">
+            <a:schemeClr val="accent1"/>
+          </a:effectRef>
+          <a:fontRef idx="minor">
+            <a:schemeClr val="lt1"/>
+          </a:fontRef>
+        </p:style>
+        <p:txBody>
+          <a:bodyPr rtlCol="0" anchor="ctr"/>
+          <a:lstStyle/>
+          <a:p>
+            <a:pPr algn="ctr"/>
+          </a:p>
+        </p:txBody>
+      </p:sp>
+      <p:sp>
+        <p:nvSpPr>
+          <p:cNvPr id="18" name="TextBox 17"/>
+          <p:cNvSpPr txBox="1"/>
+          <p:nvPr/>
+        </p:nvSpPr>
+        <p:spPr>
+          <a:xfrm>
+            <a:off x="777240" y="5806440"/>
+            <a:ext cx="10789920" cy="365759"/>
+          </a:xfrm>
+          <a:prstGeom prst="rect">
+            <a:avLst/>
+          </a:prstGeom>
+          <a:noFill/>
+        </p:spPr>
+        <p:txBody>
+          <a:bodyPr wrap="square">
+            <a:spAutoFit/>
+          </a:bodyPr>
+          <a:lstStyle/>
+          <a:p>
+            <a:pPr>
+              <a:defRPr sz="1300" b="1">
                 <a:solidFill>
                   <a:srgbClr val="FFFFFF"/>
                 </a:solidFill>
@@ -6637,18 +6768,14 @@
               </a:defRPr>
             </a:pPr>
             <a:r>
-              <a:t>Across CIFAR-100, DVS-CIFAR10, and ImageNet, trainable V_thr drifts well below 1</a:t>
-            </a:r>
-            <a:br/>
-            <a:r>
-              <a:t>or above 2 in some layers — exactly the regimes where AS-SG and RS-SG fail.</a:t>
-            </a:r>
-          </a:p>
-        </p:txBody>
-      </p:sp>
-      <p:sp>
-        <p:nvSpPr>
-          <p:cNvPr id="16" name="TextBox 15"/>
+              <a:t>Standard LIF operators at inference. Hardware compatibility preserved.</a:t>
+            </a:r>
+          </a:p>
+        </p:txBody>
+      </p:sp>
+      <p:sp>
+        <p:nvSpPr>
+          <p:cNvPr id="19" name="TextBox 18"/>
           <p:cNvSpPr txBox="1"/>
           <p:nvPr/>
         </p:nvSpPr>
@@ -6684,7 +6811,7 @@
       </p:sp>
       <p:sp>
         <p:nvSpPr>
-          <p:cNvPr id="17" name="TextBox 16"/>
+          <p:cNvPr id="20" name="TextBox 19"/>
           <p:cNvSpPr txBox="1"/>
           <p:nvPr/>
         </p:nvSpPr>
@@ -6713,7 +6840,7 @@
               </a:defRPr>
             </a:pPr>
             <a:r>
-              <a:t>13 / 18</a:t>
+              <a:t>13 / 19</a:t>
             </a:r>
           </a:p>
         </p:txBody>
@@ -6768,7 +6895,7 @@
             </a:pPr>
             <a:r>
               <a:rPr spc="300"/>
-              <a:t>EXPERIMENTS · 1/3</a:t>
+              <a:t>PART II · TRSG</a:t>
             </a:r>
           </a:p>
         </p:txBody>
@@ -6804,7 +6931,7 @@
               </a:defRPr>
             </a:pPr>
             <a:r>
-              <a:t>Main Results — SOTA Across the Board</a:t>
+              <a:t>TrSG Holds Up — Stress Tests + Real Trajectories</a:t>
             </a:r>
           </a:p>
         </p:txBody>
@@ -6817,22 +6944,22 @@
         </p:nvSpPr>
         <p:spPr>
           <a:xfrm>
-            <a:off x="457200" y="1600200"/>
-            <a:ext cx="11247120" cy="365760"/>
-          </a:xfrm>
-          <a:prstGeom prst="rect">
-            <a:avLst/>
-          </a:prstGeom>
-          <a:noFill/>
-        </p:spPr>
-        <p:txBody>
-          <a:bodyPr wrap="square" lIns="0" rIns="0" tIns="0" bIns="0">
-            <a:spAutoFit/>
-          </a:bodyPr>
-          <a:lstStyle/>
-          <a:p>
-            <a:pPr>
-              <a:defRPr sz="1400" b="0" i="1">
+            <a:off x="457200" y="2194560"/>
+            <a:ext cx="5943600" cy="365760"/>
+          </a:xfrm>
+          <a:prstGeom prst="rect">
+            <a:avLst/>
+          </a:prstGeom>
+          <a:noFill/>
+        </p:spPr>
+        <p:txBody>
+          <a:bodyPr wrap="square" lIns="0" rIns="0" tIns="0" bIns="0">
+            <a:spAutoFit/>
+          </a:bodyPr>
+          <a:lstStyle/>
+          <a:p>
+            <a:pPr>
+              <a:defRPr sz="1100" b="0" i="1">
                 <a:solidFill>
                   <a:srgbClr val="7A7A7A"/>
                 </a:solidFill>
@@ -6840,14 +6967,348 @@
               </a:defRPr>
             </a:pPr>
             <a:r>
-              <a:t>Standard LIF neurons · no AutoAugment / Cutout · three trials</a:t>
+              <a:t>Gradient-stability metrics at extreme thresholds  (CIFAR-100, T=4, ep 100)</a:t>
+            </a:r>
+          </a:p>
+        </p:txBody>
+      </p:sp>
+      <p:sp>
+        <p:nvSpPr>
+          <p:cNvPr id="5" name="Rectangle 4"/>
+          <p:cNvSpPr/>
+          <p:nvPr/>
+        </p:nvSpPr>
+        <p:spPr>
+          <a:xfrm>
+            <a:off x="457200" y="2606040"/>
+            <a:ext cx="2788920" cy="2194560"/>
+          </a:xfrm>
+          <a:prstGeom prst="rect">
+            <a:avLst/>
+          </a:prstGeom>
+          <a:solidFill>
+            <a:srgbClr val="F8F7F2"/>
+          </a:solidFill>
+          <a:ln w="6350">
+            <a:solidFill>
+              <a:srgbClr val="E5E5E0"/>
+            </a:solidFill>
+          </a:ln>
+        </p:spPr>
+        <p:style>
+          <a:lnRef idx="1">
+            <a:schemeClr val="accent1"/>
+          </a:lnRef>
+          <a:fillRef idx="3">
+            <a:schemeClr val="accent1"/>
+          </a:fillRef>
+          <a:effectRef idx="2">
+            <a:schemeClr val="accent1"/>
+          </a:effectRef>
+          <a:fontRef idx="minor">
+            <a:schemeClr val="lt1"/>
+          </a:fontRef>
+        </p:style>
+        <p:txBody>
+          <a:bodyPr rtlCol="0" anchor="ctr"/>
+          <a:lstStyle/>
+          <a:p>
+            <a:pPr algn="ctr"/>
+          </a:p>
+        </p:txBody>
+      </p:sp>
+      <p:sp>
+        <p:nvSpPr>
+          <p:cNvPr id="6" name="TextBox 5"/>
+          <p:cNvSpPr txBox="1"/>
+          <p:nvPr/>
+        </p:nvSpPr>
+        <p:spPr>
+          <a:xfrm>
+            <a:off x="594360" y="2679192"/>
+            <a:ext cx="2606040" cy="274320"/>
+          </a:xfrm>
+          <a:prstGeom prst="rect">
+            <a:avLst/>
+          </a:prstGeom>
+          <a:noFill/>
+        </p:spPr>
+        <p:txBody>
+          <a:bodyPr wrap="square" lIns="0" rIns="0" tIns="0" bIns="0">
+            <a:spAutoFit/>
+          </a:bodyPr>
+          <a:lstStyle/>
+          <a:p>
+            <a:pPr>
+              <a:defRPr sz="1100" b="1" i="0">
+                <a:solidFill>
+                  <a:srgbClr val="0F2540"/>
+                </a:solidFill>
+                <a:latin typeface="Calibri"/>
+              </a:defRPr>
+            </a:pPr>
+            <a:r>
+              <a:t>V_thr = 0.1   (low)</a:t>
+            </a:r>
+          </a:p>
+        </p:txBody>
+      </p:sp>
+      <p:sp>
+        <p:nvSpPr>
+          <p:cNvPr id="7" name="TextBox 6"/>
+          <p:cNvSpPr txBox="1"/>
+          <p:nvPr/>
+        </p:nvSpPr>
+        <p:spPr>
+          <a:xfrm>
+            <a:off x="594360" y="2971800"/>
+            <a:ext cx="2606040" cy="1828800"/>
+          </a:xfrm>
+          <a:prstGeom prst="rect">
+            <a:avLst/>
+          </a:prstGeom>
+          <a:noFill/>
+        </p:spPr>
+        <p:txBody>
+          <a:bodyPr wrap="square">
+            <a:spAutoFit/>
+          </a:bodyPr>
+          <a:lstStyle/>
+          <a:p>
+            <a:pPr>
+              <a:defRPr sz="1000">
+                <a:solidFill>
+                  <a:srgbClr val="E56945"/>
+                </a:solidFill>
+                <a:latin typeface="Consolas"/>
+              </a:defRPr>
+            </a:pPr>
+            <a:r>
+              <a:t>AS-SG    AbsStr 0.0145  · 90% active</a:t>
+            </a:r>
+          </a:p>
+          <a:p>
+            <a:pPr>
+              <a:spcBef>
+                <a:spcPts val="200"/>
+              </a:spcBef>
+              <a:defRPr sz="1000">
+                <a:solidFill>
+                  <a:srgbClr val="E56945"/>
+                </a:solidFill>
+                <a:latin typeface="Consolas"/>
+              </a:defRPr>
+            </a:pPr>
+            <a:r>
+              <a:t>RS-SG    diverged (NaN)</a:t>
+            </a:r>
+          </a:p>
+          <a:p>
+            <a:pPr>
+              <a:spcBef>
+                <a:spcPts val="200"/>
+              </a:spcBef>
+              <a:defRPr sz="1000">
+                <a:solidFill>
+                  <a:srgbClr val="1D7E7E"/>
+                </a:solidFill>
+                <a:latin typeface="Consolas"/>
+              </a:defRPr>
+            </a:pPr>
+            <a:r>
+              <a:t>TrSG     AbsStr 0.0153  · 21% · CV 0.87</a:t>
+            </a:r>
+          </a:p>
+        </p:txBody>
+      </p:sp>
+      <p:sp>
+        <p:nvSpPr>
+          <p:cNvPr id="8" name="Rectangle 7"/>
+          <p:cNvSpPr/>
+          <p:nvPr/>
+        </p:nvSpPr>
+        <p:spPr>
+          <a:xfrm>
+            <a:off x="3383280" y="2606040"/>
+            <a:ext cx="2788920" cy="2194560"/>
+          </a:xfrm>
+          <a:prstGeom prst="rect">
+            <a:avLst/>
+          </a:prstGeom>
+          <a:solidFill>
+            <a:srgbClr val="F8F7F2"/>
+          </a:solidFill>
+          <a:ln w="6350">
+            <a:solidFill>
+              <a:srgbClr val="E5E5E0"/>
+            </a:solidFill>
+          </a:ln>
+        </p:spPr>
+        <p:style>
+          <a:lnRef idx="1">
+            <a:schemeClr val="accent1"/>
+          </a:lnRef>
+          <a:fillRef idx="3">
+            <a:schemeClr val="accent1"/>
+          </a:fillRef>
+          <a:effectRef idx="2">
+            <a:schemeClr val="accent1"/>
+          </a:effectRef>
+          <a:fontRef idx="minor">
+            <a:schemeClr val="lt1"/>
+          </a:fontRef>
+        </p:style>
+        <p:txBody>
+          <a:bodyPr rtlCol="0" anchor="ctr"/>
+          <a:lstStyle/>
+          <a:p>
+            <a:pPr algn="ctr"/>
+          </a:p>
+        </p:txBody>
+      </p:sp>
+      <p:sp>
+        <p:nvSpPr>
+          <p:cNvPr id="9" name="TextBox 8"/>
+          <p:cNvSpPr txBox="1"/>
+          <p:nvPr/>
+        </p:nvSpPr>
+        <p:spPr>
+          <a:xfrm>
+            <a:off x="3520440" y="2679192"/>
+            <a:ext cx="2606040" cy="274320"/>
+          </a:xfrm>
+          <a:prstGeom prst="rect">
+            <a:avLst/>
+          </a:prstGeom>
+          <a:noFill/>
+        </p:spPr>
+        <p:txBody>
+          <a:bodyPr wrap="square" lIns="0" rIns="0" tIns="0" bIns="0">
+            <a:spAutoFit/>
+          </a:bodyPr>
+          <a:lstStyle/>
+          <a:p>
+            <a:pPr>
+              <a:defRPr sz="1100" b="1" i="0">
+                <a:solidFill>
+                  <a:srgbClr val="0F2540"/>
+                </a:solidFill>
+                <a:latin typeface="Calibri"/>
+              </a:defRPr>
+            </a:pPr>
+            <a:r>
+              <a:t>V_thr = 2.0   (high)</a:t>
+            </a:r>
+          </a:p>
+        </p:txBody>
+      </p:sp>
+      <p:sp>
+        <p:nvSpPr>
+          <p:cNvPr id="10" name="TextBox 9"/>
+          <p:cNvSpPr txBox="1"/>
+          <p:nvPr/>
+        </p:nvSpPr>
+        <p:spPr>
+          <a:xfrm>
+            <a:off x="3520440" y="2971800"/>
+            <a:ext cx="2606040" cy="1828800"/>
+          </a:xfrm>
+          <a:prstGeom prst="rect">
+            <a:avLst/>
+          </a:prstGeom>
+          <a:noFill/>
+        </p:spPr>
+        <p:txBody>
+          <a:bodyPr wrap="square">
+            <a:spAutoFit/>
+          </a:bodyPr>
+          <a:lstStyle/>
+          <a:p>
+            <a:pPr>
+              <a:defRPr sz="1000">
+                <a:solidFill>
+                  <a:srgbClr val="E56945"/>
+                </a:solidFill>
+                <a:latin typeface="Consolas"/>
+              </a:defRPr>
+            </a:pPr>
+            <a:r>
+              <a:t>AS-SG    0%  active  (zero gradient)</a:t>
+            </a:r>
+          </a:p>
+          <a:p>
+            <a:pPr>
+              <a:spcBef>
+                <a:spcPts val="200"/>
+              </a:spcBef>
+              <a:defRPr sz="1000">
+                <a:solidFill>
+                  <a:srgbClr val="E56945"/>
+                </a:solidFill>
+                <a:latin typeface="Consolas"/>
+              </a:defRPr>
+            </a:pPr>
+            <a:r>
+              <a:t>RS-SG    0.10% active · CV 2.25</a:t>
+            </a:r>
+          </a:p>
+          <a:p>
+            <a:pPr>
+              <a:spcBef>
+                <a:spcPts val="200"/>
+              </a:spcBef>
+              <a:defRPr sz="1000">
+                <a:solidFill>
+                  <a:srgbClr val="1D7E7E"/>
+                </a:solidFill>
+                <a:latin typeface="Consolas"/>
+              </a:defRPr>
+            </a:pPr>
+            <a:r>
+              <a:t>TrSG     AbsStr 0.0323  · 7% · CV 0.73</a:t>
+            </a:r>
+          </a:p>
+        </p:txBody>
+      </p:sp>
+      <p:sp>
+        <p:nvSpPr>
+          <p:cNvPr id="11" name="TextBox 10"/>
+          <p:cNvSpPr txBox="1"/>
+          <p:nvPr/>
+        </p:nvSpPr>
+        <p:spPr>
+          <a:xfrm>
+            <a:off x="6675120" y="2194560"/>
+            <a:ext cx="5120640" cy="365760"/>
+          </a:xfrm>
+          <a:prstGeom prst="rect">
+            <a:avLst/>
+          </a:prstGeom>
+          <a:noFill/>
+        </p:spPr>
+        <p:txBody>
+          <a:bodyPr wrap="square" lIns="0" rIns="0" tIns="0" bIns="0">
+            <a:spAutoFit/>
+          </a:bodyPr>
+          <a:lstStyle/>
+          <a:p>
+            <a:pPr>
+              <a:defRPr sz="1100" b="0" i="1">
+                <a:solidFill>
+                  <a:srgbClr val="7A7A7A"/>
+                </a:solidFill>
+                <a:latin typeface="Calibri"/>
+              </a:defRPr>
+            </a:pPr>
+            <a:r>
+              <a:t>Real trainings actually visit these regions</a:t>
             </a:r>
           </a:p>
         </p:txBody>
       </p:sp>
       <p:pic>
         <p:nvPicPr>
-          <p:cNvPr id="5" name="Picture 4" descr="main_results_bars.png"/>
+          <p:cNvPr id="12" name="Picture 11" descr="threshold_training_imagenet.png"/>
           <p:cNvPicPr>
             <a:picLocks noChangeAspect="1"/>
           </p:cNvPicPr>
@@ -6861,8 +7322,8 @@
         </p:blipFill>
         <p:spPr>
           <a:xfrm>
-            <a:off x="365760" y="2194560"/>
-            <a:ext cx="7772400" cy="3246699"/>
+            <a:off x="6675120" y="2606040"/>
+            <a:ext cx="5120640" cy="2194560"/>
           </a:xfrm>
           <a:prstGeom prst="rect">
             <a:avLst/>
@@ -6871,473 +7332,14 @@
       </p:pic>
       <p:sp>
         <p:nvSpPr>
-          <p:cNvPr id="6" name="Rectangle 5"/>
+          <p:cNvPr id="13" name="Rectangle 12"/>
           <p:cNvSpPr/>
           <p:nvPr/>
         </p:nvSpPr>
         <p:spPr>
           <a:xfrm>
-            <a:off x="8229600" y="2194560"/>
-            <a:ext cx="3657600" cy="1280160"/>
-          </a:xfrm>
-          <a:prstGeom prst="rect">
-            <a:avLst/>
-          </a:prstGeom>
-          <a:solidFill>
-            <a:srgbClr val="F8F7F2"/>
-          </a:solidFill>
-          <a:ln w="22860">
-            <a:solidFill>
-              <a:srgbClr val="1D7E7E"/>
-            </a:solidFill>
-          </a:ln>
-        </p:spPr>
-        <p:style>
-          <a:lnRef idx="1">
-            <a:schemeClr val="accent1"/>
-          </a:lnRef>
-          <a:fillRef idx="3">
-            <a:schemeClr val="accent1"/>
-          </a:fillRef>
-          <a:effectRef idx="2">
-            <a:schemeClr val="accent1"/>
-          </a:effectRef>
-          <a:fontRef idx="minor">
-            <a:schemeClr val="lt1"/>
-          </a:fontRef>
-        </p:style>
-        <p:txBody>
-          <a:bodyPr rtlCol="0" anchor="ctr"/>
-          <a:lstStyle/>
-          <a:p>
-            <a:pPr algn="ctr"/>
-          </a:p>
-        </p:txBody>
-      </p:sp>
-      <p:sp>
-        <p:nvSpPr>
-          <p:cNvPr id="7" name="TextBox 6"/>
-          <p:cNvSpPr txBox="1"/>
-          <p:nvPr/>
-        </p:nvSpPr>
-        <p:spPr>
-          <a:xfrm>
-            <a:off x="8412480" y="2377440"/>
-            <a:ext cx="2194560" cy="548640"/>
-          </a:xfrm>
-          <a:prstGeom prst="rect">
-            <a:avLst/>
-          </a:prstGeom>
-          <a:noFill/>
-        </p:spPr>
-        <p:txBody>
-          <a:bodyPr wrap="square" lIns="0" rIns="0" tIns="0" bIns="0">
-            <a:spAutoFit/>
-          </a:bodyPr>
-          <a:lstStyle/>
-          <a:p>
-            <a:pPr>
-              <a:defRPr sz="2600" b="1" i="0">
-                <a:solidFill>
-                  <a:srgbClr val="1D7E7E"/>
-                </a:solidFill>
-                <a:latin typeface="Cambria"/>
-              </a:defRPr>
-            </a:pPr>
-            <a:r>
-              <a:t>+1.09</a:t>
-            </a:r>
-          </a:p>
-        </p:txBody>
-      </p:sp>
-      <p:sp>
-        <p:nvSpPr>
-          <p:cNvPr id="8" name="TextBox 7"/>
-          <p:cNvSpPr txBox="1"/>
-          <p:nvPr/>
-        </p:nvSpPr>
-        <p:spPr>
-          <a:xfrm>
-            <a:off x="10424160" y="2487168"/>
-            <a:ext cx="1097280" cy="365760"/>
-          </a:xfrm>
-          <a:prstGeom prst="rect">
-            <a:avLst/>
-          </a:prstGeom>
-          <a:noFill/>
-        </p:spPr>
-        <p:txBody>
-          <a:bodyPr wrap="square" lIns="0" rIns="0" tIns="0" bIns="0">
-            <a:spAutoFit/>
-          </a:bodyPr>
-          <a:lstStyle/>
-          <a:p>
-            <a:pPr>
-              <a:defRPr sz="1100" b="0" i="0">
-                <a:solidFill>
-                  <a:srgbClr val="1D7E7E"/>
-                </a:solidFill>
-                <a:latin typeface="Calibri"/>
-              </a:defRPr>
-            </a:pPr>
-            <a:r>
-              <a:t>%pt</a:t>
-            </a:r>
-          </a:p>
-        </p:txBody>
-      </p:sp>
-      <p:sp>
-        <p:nvSpPr>
-          <p:cNvPr id="9" name="TextBox 8"/>
-          <p:cNvSpPr txBox="1"/>
-          <p:nvPr/>
-        </p:nvSpPr>
-        <p:spPr>
-          <a:xfrm>
-            <a:off x="8412480" y="2971800"/>
-            <a:ext cx="3383280" cy="457200"/>
-          </a:xfrm>
-          <a:prstGeom prst="rect">
-            <a:avLst/>
-          </a:prstGeom>
-          <a:noFill/>
-        </p:spPr>
-        <p:txBody>
-          <a:bodyPr wrap="square" lIns="0" rIns="0" tIns="0" bIns="0">
-            <a:spAutoFit/>
-          </a:bodyPr>
-          <a:lstStyle/>
-          <a:p>
-            <a:pPr>
-              <a:defRPr sz="1000" b="0" i="0">
-                <a:solidFill>
-                  <a:srgbClr val="1A1A1A"/>
-                </a:solidFill>
-                <a:latin typeface="Calibri"/>
-              </a:defRPr>
-            </a:pPr>
-            <a:r>
-              <a:t>CIFAR-100  ·  beats TAB</a:t>
-            </a:r>
-          </a:p>
-        </p:txBody>
-      </p:sp>
-      <p:sp>
-        <p:nvSpPr>
-          <p:cNvPr id="10" name="Rectangle 9"/>
-          <p:cNvSpPr/>
-          <p:nvPr/>
-        </p:nvSpPr>
-        <p:spPr>
-          <a:xfrm>
-            <a:off x="8229600" y="3611880"/>
-            <a:ext cx="3657600" cy="1280160"/>
-          </a:xfrm>
-          <a:prstGeom prst="rect">
-            <a:avLst/>
-          </a:prstGeom>
-          <a:solidFill>
-            <a:srgbClr val="F8F7F2"/>
-          </a:solidFill>
-          <a:ln w="22860">
-            <a:solidFill>
-              <a:srgbClr val="1D7E7E"/>
-            </a:solidFill>
-          </a:ln>
-        </p:spPr>
-        <p:style>
-          <a:lnRef idx="1">
-            <a:schemeClr val="accent1"/>
-          </a:lnRef>
-          <a:fillRef idx="3">
-            <a:schemeClr val="accent1"/>
-          </a:fillRef>
-          <a:effectRef idx="2">
-            <a:schemeClr val="accent1"/>
-          </a:effectRef>
-          <a:fontRef idx="minor">
-            <a:schemeClr val="lt1"/>
-          </a:fontRef>
-        </p:style>
-        <p:txBody>
-          <a:bodyPr rtlCol="0" anchor="ctr"/>
-          <a:lstStyle/>
-          <a:p>
-            <a:pPr algn="ctr"/>
-          </a:p>
-        </p:txBody>
-      </p:sp>
-      <p:sp>
-        <p:nvSpPr>
-          <p:cNvPr id="11" name="TextBox 10"/>
-          <p:cNvSpPr txBox="1"/>
-          <p:nvPr/>
-        </p:nvSpPr>
-        <p:spPr>
-          <a:xfrm>
-            <a:off x="8412480" y="3794760"/>
-            <a:ext cx="2194560" cy="548640"/>
-          </a:xfrm>
-          <a:prstGeom prst="rect">
-            <a:avLst/>
-          </a:prstGeom>
-          <a:noFill/>
-        </p:spPr>
-        <p:txBody>
-          <a:bodyPr wrap="square" lIns="0" rIns="0" tIns="0" bIns="0">
-            <a:spAutoFit/>
-          </a:bodyPr>
-          <a:lstStyle/>
-          <a:p>
-            <a:pPr>
-              <a:defRPr sz="2600" b="1" i="0">
-                <a:solidFill>
-                  <a:srgbClr val="1D7E7E"/>
-                </a:solidFill>
-                <a:latin typeface="Cambria"/>
-              </a:defRPr>
-            </a:pPr>
-            <a:r>
-              <a:t>+0.64</a:t>
-            </a:r>
-          </a:p>
-        </p:txBody>
-      </p:sp>
-      <p:sp>
-        <p:nvSpPr>
-          <p:cNvPr id="12" name="TextBox 11"/>
-          <p:cNvSpPr txBox="1"/>
-          <p:nvPr/>
-        </p:nvSpPr>
-        <p:spPr>
-          <a:xfrm>
-            <a:off x="10424160" y="3904488"/>
-            <a:ext cx="1097280" cy="365760"/>
-          </a:xfrm>
-          <a:prstGeom prst="rect">
-            <a:avLst/>
-          </a:prstGeom>
-          <a:noFill/>
-        </p:spPr>
-        <p:txBody>
-          <a:bodyPr wrap="square" lIns="0" rIns="0" tIns="0" bIns="0">
-            <a:spAutoFit/>
-          </a:bodyPr>
-          <a:lstStyle/>
-          <a:p>
-            <a:pPr>
-              <a:defRPr sz="1100" b="0" i="0">
-                <a:solidFill>
-                  <a:srgbClr val="1D7E7E"/>
-                </a:solidFill>
-                <a:latin typeface="Calibri"/>
-              </a:defRPr>
-            </a:pPr>
-            <a:r>
-              <a:t>%pt</a:t>
-            </a:r>
-          </a:p>
-        </p:txBody>
-      </p:sp>
-      <p:sp>
-        <p:nvSpPr>
-          <p:cNvPr id="13" name="TextBox 12"/>
-          <p:cNvSpPr txBox="1"/>
-          <p:nvPr/>
-        </p:nvSpPr>
-        <p:spPr>
-          <a:xfrm>
-            <a:off x="8412480" y="4389120"/>
-            <a:ext cx="3383280" cy="457200"/>
-          </a:xfrm>
-          <a:prstGeom prst="rect">
-            <a:avLst/>
-          </a:prstGeom>
-          <a:noFill/>
-        </p:spPr>
-        <p:txBody>
-          <a:bodyPr wrap="square" lIns="0" rIns="0" tIns="0" bIns="0">
-            <a:spAutoFit/>
-          </a:bodyPr>
-          <a:lstStyle/>
-          <a:p>
-            <a:pPr>
-              <a:defRPr sz="1000" b="0" i="0">
-                <a:solidFill>
-                  <a:srgbClr val="1A1A1A"/>
-                </a:solidFill>
-                <a:latin typeface="Calibri"/>
-              </a:defRPr>
-            </a:pPr>
-            <a:r>
-              <a:t>ImageNet  ·  beats MPS</a:t>
-            </a:r>
-          </a:p>
-        </p:txBody>
-      </p:sp>
-      <p:sp>
-        <p:nvSpPr>
-          <p:cNvPr id="14" name="Rectangle 13"/>
-          <p:cNvSpPr/>
-          <p:nvPr/>
-        </p:nvSpPr>
-        <p:spPr>
-          <a:xfrm>
-            <a:off x="8229600" y="5029200"/>
-            <a:ext cx="3657600" cy="1280160"/>
-          </a:xfrm>
-          <a:prstGeom prst="rect">
-            <a:avLst/>
-          </a:prstGeom>
-          <a:solidFill>
-            <a:srgbClr val="F8F7F2"/>
-          </a:solidFill>
-          <a:ln w="22860">
-            <a:solidFill>
-              <a:srgbClr val="E0B85F"/>
-            </a:solidFill>
-          </a:ln>
-        </p:spPr>
-        <p:style>
-          <a:lnRef idx="1">
-            <a:schemeClr val="accent1"/>
-          </a:lnRef>
-          <a:fillRef idx="3">
-            <a:schemeClr val="accent1"/>
-          </a:fillRef>
-          <a:effectRef idx="2">
-            <a:schemeClr val="accent1"/>
-          </a:effectRef>
-          <a:fontRef idx="minor">
-            <a:schemeClr val="lt1"/>
-          </a:fontRef>
-        </p:style>
-        <p:txBody>
-          <a:bodyPr rtlCol="0" anchor="ctr"/>
-          <a:lstStyle/>
-          <a:p>
-            <a:pPr algn="ctr"/>
-          </a:p>
-        </p:txBody>
-      </p:sp>
-      <p:sp>
-        <p:nvSpPr>
-          <p:cNvPr id="15" name="TextBox 14"/>
-          <p:cNvSpPr txBox="1"/>
-          <p:nvPr/>
-        </p:nvSpPr>
-        <p:spPr>
-          <a:xfrm>
-            <a:off x="8412480" y="5212080"/>
-            <a:ext cx="2194560" cy="548640"/>
-          </a:xfrm>
-          <a:prstGeom prst="rect">
-            <a:avLst/>
-          </a:prstGeom>
-          <a:noFill/>
-        </p:spPr>
-        <p:txBody>
-          <a:bodyPr wrap="square" lIns="0" rIns="0" tIns="0" bIns="0">
-            <a:spAutoFit/>
-          </a:bodyPr>
-          <a:lstStyle/>
-          <a:p>
-            <a:pPr>
-              <a:defRPr sz="2600" b="1" i="0">
-                <a:solidFill>
-                  <a:srgbClr val="E0B85F"/>
-                </a:solidFill>
-                <a:latin typeface="Cambria"/>
-              </a:defRPr>
-            </a:pPr>
-            <a:r>
-              <a:t>+5.23</a:t>
-            </a:r>
-          </a:p>
-        </p:txBody>
-      </p:sp>
-      <p:sp>
-        <p:nvSpPr>
-          <p:cNvPr id="16" name="TextBox 15"/>
-          <p:cNvSpPr txBox="1"/>
-          <p:nvPr/>
-        </p:nvSpPr>
-        <p:spPr>
-          <a:xfrm>
-            <a:off x="10424160" y="5321808"/>
-            <a:ext cx="1097280" cy="365760"/>
-          </a:xfrm>
-          <a:prstGeom prst="rect">
-            <a:avLst/>
-          </a:prstGeom>
-          <a:noFill/>
-        </p:spPr>
-        <p:txBody>
-          <a:bodyPr wrap="square" lIns="0" rIns="0" tIns="0" bIns="0">
-            <a:spAutoFit/>
-          </a:bodyPr>
-          <a:lstStyle/>
-          <a:p>
-            <a:pPr>
-              <a:defRPr sz="1100" b="0" i="0">
-                <a:solidFill>
-                  <a:srgbClr val="E0B85F"/>
-                </a:solidFill>
-                <a:latin typeface="Calibri"/>
-              </a:defRPr>
-            </a:pPr>
-            <a:r>
-              <a:t>%pt</a:t>
-            </a:r>
-          </a:p>
-        </p:txBody>
-      </p:sp>
-      <p:sp>
-        <p:nvSpPr>
-          <p:cNvPr id="17" name="TextBox 16"/>
-          <p:cNvSpPr txBox="1"/>
-          <p:nvPr/>
-        </p:nvSpPr>
-        <p:spPr>
-          <a:xfrm>
-            <a:off x="8412480" y="5806440"/>
-            <a:ext cx="3383280" cy="457200"/>
-          </a:xfrm>
-          <a:prstGeom prst="rect">
-            <a:avLst/>
-          </a:prstGeom>
-          <a:noFill/>
-        </p:spPr>
-        <p:txBody>
-          <a:bodyPr wrap="square" lIns="0" rIns="0" tIns="0" bIns="0">
-            <a:spAutoFit/>
-          </a:bodyPr>
-          <a:lstStyle/>
-          <a:p>
-            <a:pPr>
-              <a:defRPr sz="1000" b="0" i="0">
-                <a:solidFill>
-                  <a:srgbClr val="1A1A1A"/>
-                </a:solidFill>
-                <a:latin typeface="Calibri"/>
-              </a:defRPr>
-            </a:pPr>
-            <a:r>
-              <a:t>DVS-CIFAR10  ·  beats RMP</a:t>
-            </a:r>
-          </a:p>
-        </p:txBody>
-      </p:sp>
-      <p:sp>
-        <p:nvSpPr>
-          <p:cNvPr id="18" name="Rectangle 17"/>
-          <p:cNvSpPr/>
-          <p:nvPr/>
-        </p:nvSpPr>
-        <p:spPr>
-          <a:xfrm>
-            <a:off x="457200" y="6126480"/>
-            <a:ext cx="54864" cy="365760"/>
+            <a:off x="457200" y="5029200"/>
+            <a:ext cx="54864" cy="1280160"/>
           </a:xfrm>
           <a:prstGeom prst="rect">
             <a:avLst/>
@@ -7373,14 +7375,14 @@
       </p:sp>
       <p:sp>
         <p:nvSpPr>
-          <p:cNvPr id="19" name="Rectangle 18"/>
+          <p:cNvPr id="14" name="Rectangle 13"/>
           <p:cNvSpPr/>
           <p:nvPr/>
         </p:nvSpPr>
         <p:spPr>
           <a:xfrm>
-            <a:off x="512064" y="6126480"/>
-            <a:ext cx="11192256" cy="365760"/>
+            <a:off x="512064" y="5029200"/>
+            <a:ext cx="11192256" cy="1280160"/>
           </a:xfrm>
           <a:prstGeom prst="rect">
             <a:avLst/>
@@ -7416,14 +7418,14 @@
       </p:sp>
       <p:sp>
         <p:nvSpPr>
-          <p:cNvPr id="20" name="TextBox 19"/>
-          <p:cNvSpPr txBox="1"/>
-          <p:nvPr/>
-        </p:nvSpPr>
-        <p:spPr>
-          <a:xfrm>
-            <a:off x="777240" y="6263640"/>
-            <a:ext cx="10789920" cy="91440"/>
+          <p:cNvPr id="15" name="TextBox 14"/>
+          <p:cNvSpPr txBox="1"/>
+          <p:nvPr/>
+        </p:nvSpPr>
+        <p:spPr>
+          <a:xfrm>
+            <a:off x="777240" y="5166360"/>
+            <a:ext cx="10789920" cy="1005839"/>
           </a:xfrm>
           <a:prstGeom prst="rect">
             <a:avLst/>
@@ -7437,7 +7439,7 @@
           <a:lstStyle/>
           <a:p>
             <a:pPr>
-              <a:defRPr sz="1100" b="1">
+              <a:defRPr sz="1400" b="1">
                 <a:solidFill>
                   <a:srgbClr val="E0B85F"/>
                 </a:solidFill>
@@ -7445,14 +7447,34 @@
               </a:defRPr>
             </a:pPr>
             <a:r>
-              <a:t>Biggest gain on the most challenging (event-based) dataset — DVS-CIFAR10 +5.23 %pt</a:t>
-            </a:r>
-          </a:p>
-        </p:txBody>
-      </p:sp>
-      <p:sp>
-        <p:nvSpPr>
-          <p:cNvPr id="21" name="TextBox 20"/>
+              <a:t>Threshold-robustness is a practical necessity</a:t>
+            </a:r>
+          </a:p>
+          <a:p>
+            <a:pPr>
+              <a:spcBef>
+                <a:spcPts val="600"/>
+              </a:spcBef>
+              <a:defRPr sz="1100">
+                <a:solidFill>
+                  <a:srgbClr val="FFFFFF"/>
+                </a:solidFill>
+                <a:latin typeface="Calibri"/>
+              </a:defRPr>
+            </a:pPr>
+            <a:r>
+              <a:t>Across CIFAR-100, DVS-CIFAR10, and ImageNet, trainable V_thr drifts well below 1</a:t>
+            </a:r>
+            <a:br/>
+            <a:r>
+              <a:t>or above 2 in some layers — exactly the regimes where AS-SG and RS-SG fail.</a:t>
+            </a:r>
+          </a:p>
+        </p:txBody>
+      </p:sp>
+      <p:sp>
+        <p:nvSpPr>
+          <p:cNvPr id="16" name="TextBox 15"/>
           <p:cNvSpPr txBox="1"/>
           <p:nvPr/>
         </p:nvSpPr>
@@ -7488,7 +7510,7 @@
       </p:sp>
       <p:sp>
         <p:nvSpPr>
-          <p:cNvPr id="22" name="TextBox 21"/>
+          <p:cNvPr id="17" name="TextBox 16"/>
           <p:cNvSpPr txBox="1"/>
           <p:nvPr/>
         </p:nvSpPr>
@@ -7517,7 +7539,7 @@
               </a:defRPr>
             </a:pPr>
             <a:r>
-              <a:t>14 / 18</a:t>
+              <a:t>14 / 19</a:t>
             </a:r>
           </a:p>
         </p:txBody>
@@ -7572,7 +7594,7 @@
             </a:pPr>
             <a:r>
               <a:rPr spc="300"/>
-              <a:t>EXPERIMENTS · 2/3</a:t>
+              <a:t>EXPERIMENTS · 1/3</a:t>
             </a:r>
           </a:p>
         </p:txBody>
@@ -7608,7 +7630,7 @@
               </a:defRPr>
             </a:pPr>
             <a:r>
-              <a:t>Ablation — Independent and Complementary</a:t>
+              <a:t>Main Results — SOTA Across the Board</a:t>
             </a:r>
           </a:p>
         </p:txBody>
@@ -7644,14 +7666,14 @@
               </a:defRPr>
             </a:pPr>
             <a:r>
-              <a:t>Each method helps alone; together they compound (especially on event-based data)</a:t>
+              <a:t>Standard LIF neurons · no AutoAugment / Cutout · three trials</a:t>
             </a:r>
           </a:p>
         </p:txBody>
       </p:sp>
       <p:pic>
         <p:nvPicPr>
-          <p:cNvPr id="5" name="Picture 4" descr="ablation_bars.png"/>
+          <p:cNvPr id="5" name="Picture 4" descr="main_results_bars.png"/>
           <p:cNvPicPr>
             <a:picLocks noChangeAspect="1"/>
           </p:cNvPicPr>
@@ -7665,8 +7687,8 @@
         </p:blipFill>
         <p:spPr>
           <a:xfrm>
-            <a:off x="365760" y="2240280"/>
-            <a:ext cx="9144000" cy="3819646"/>
+            <a:off x="365760" y="2194560"/>
+            <a:ext cx="7772400" cy="3246699"/>
           </a:xfrm>
           <a:prstGeom prst="rect">
             <a:avLst/>
@@ -7675,50 +7697,14 @@
       </p:pic>
       <p:sp>
         <p:nvSpPr>
-          <p:cNvPr id="6" name="TextBox 5"/>
-          <p:cNvSpPr txBox="1"/>
-          <p:nvPr/>
-        </p:nvSpPr>
-        <p:spPr>
-          <a:xfrm>
-            <a:off x="9875520" y="2286000"/>
-            <a:ext cx="2194560" cy="365760"/>
-          </a:xfrm>
-          <a:prstGeom prst="rect">
-            <a:avLst/>
-          </a:prstGeom>
-          <a:noFill/>
-        </p:spPr>
-        <p:txBody>
-          <a:bodyPr wrap="square" lIns="0" rIns="0" tIns="0" bIns="0">
-            <a:spAutoFit/>
-          </a:bodyPr>
-          <a:lstStyle/>
-          <a:p>
-            <a:pPr>
-              <a:defRPr sz="1200" b="1" i="0">
-                <a:solidFill>
-                  <a:srgbClr val="0F2540"/>
-                </a:solidFill>
-                <a:latin typeface="Calibri"/>
-              </a:defRPr>
-            </a:pPr>
-            <a:r>
-              <a:t>Takeaway</a:t>
-            </a:r>
-          </a:p>
-        </p:txBody>
-      </p:sp>
-      <p:sp>
-        <p:nvSpPr>
-          <p:cNvPr id="7" name="Rectangle 6"/>
+          <p:cNvPr id="6" name="Rectangle 5"/>
           <p:cNvSpPr/>
           <p:nvPr/>
         </p:nvSpPr>
         <p:spPr>
           <a:xfrm>
-            <a:off x="9692640" y="2697480"/>
-            <a:ext cx="2286000" cy="914400"/>
+            <a:off x="8229600" y="2194560"/>
+            <a:ext cx="3657600" cy="1280160"/>
           </a:xfrm>
           <a:prstGeom prst="rect">
             <a:avLst/>
@@ -7726,7 +7712,7 @@
           <a:solidFill>
             <a:srgbClr val="F8F7F2"/>
           </a:solidFill>
-          <a:ln w="16510">
+          <a:ln w="22860">
             <a:solidFill>
               <a:srgbClr val="1D7E7E"/>
             </a:solidFill>
@@ -7756,14 +7742,86 @@
       </p:sp>
       <p:sp>
         <p:nvSpPr>
+          <p:cNvPr id="7" name="TextBox 6"/>
+          <p:cNvSpPr txBox="1"/>
+          <p:nvPr/>
+        </p:nvSpPr>
+        <p:spPr>
+          <a:xfrm>
+            <a:off x="8412480" y="2377440"/>
+            <a:ext cx="2194560" cy="548640"/>
+          </a:xfrm>
+          <a:prstGeom prst="rect">
+            <a:avLst/>
+          </a:prstGeom>
+          <a:noFill/>
+        </p:spPr>
+        <p:txBody>
+          <a:bodyPr wrap="square" lIns="0" rIns="0" tIns="0" bIns="0">
+            <a:spAutoFit/>
+          </a:bodyPr>
+          <a:lstStyle/>
+          <a:p>
+            <a:pPr>
+              <a:defRPr sz="2600" b="1" i="0">
+                <a:solidFill>
+                  <a:srgbClr val="1D7E7E"/>
+                </a:solidFill>
+                <a:latin typeface="Cambria"/>
+              </a:defRPr>
+            </a:pPr>
+            <a:r>
+              <a:t>+1.09</a:t>
+            </a:r>
+          </a:p>
+        </p:txBody>
+      </p:sp>
+      <p:sp>
+        <p:nvSpPr>
           <p:cNvPr id="8" name="TextBox 7"/>
           <p:cNvSpPr txBox="1"/>
           <p:nvPr/>
         </p:nvSpPr>
         <p:spPr>
           <a:xfrm>
-            <a:off x="9829800" y="2788920"/>
-            <a:ext cx="2011680" cy="274320"/>
+            <a:off x="10424160" y="2487168"/>
+            <a:ext cx="1097280" cy="365760"/>
+          </a:xfrm>
+          <a:prstGeom prst="rect">
+            <a:avLst/>
+          </a:prstGeom>
+          <a:noFill/>
+        </p:spPr>
+        <p:txBody>
+          <a:bodyPr wrap="square" lIns="0" rIns="0" tIns="0" bIns="0">
+            <a:spAutoFit/>
+          </a:bodyPr>
+          <a:lstStyle/>
+          <a:p>
+            <a:pPr>
+              <a:defRPr sz="1100" b="0" i="0">
+                <a:solidFill>
+                  <a:srgbClr val="1D7E7E"/>
+                </a:solidFill>
+                <a:latin typeface="Calibri"/>
+              </a:defRPr>
+            </a:pPr>
+            <a:r>
+              <a:t>%pt</a:t>
+            </a:r>
+          </a:p>
+        </p:txBody>
+      </p:sp>
+      <p:sp>
+        <p:nvSpPr>
+          <p:cNvPr id="9" name="TextBox 8"/>
+          <p:cNvSpPr txBox="1"/>
+          <p:nvPr/>
+        </p:nvSpPr>
+        <p:spPr>
+          <a:xfrm>
+            <a:off x="8412480" y="2971800"/>
+            <a:ext cx="3383280" cy="457200"/>
           </a:xfrm>
           <a:prstGeom prst="rect">
             <a:avLst/>
@@ -7779,49 +7837,13 @@
             <a:pPr>
               <a:defRPr sz="1000" b="0" i="0">
                 <a:solidFill>
-                  <a:srgbClr val="7A7A7A"/>
-                </a:solidFill>
-                <a:latin typeface="Calibri"/>
-              </a:defRPr>
-            </a:pPr>
-            <a:r>
-              <a:t>MP-Init alone</a:t>
-            </a:r>
-          </a:p>
-        </p:txBody>
-      </p:sp>
-      <p:sp>
-        <p:nvSpPr>
-          <p:cNvPr id="9" name="TextBox 8"/>
-          <p:cNvSpPr txBox="1"/>
-          <p:nvPr/>
-        </p:nvSpPr>
-        <p:spPr>
-          <a:xfrm>
-            <a:off x="9829800" y="3063240"/>
-            <a:ext cx="2011680" cy="457200"/>
-          </a:xfrm>
-          <a:prstGeom prst="rect">
-            <a:avLst/>
-          </a:prstGeom>
-          <a:noFill/>
-        </p:spPr>
-        <p:txBody>
-          <a:bodyPr wrap="square" lIns="0" rIns="0" tIns="0" bIns="0">
-            <a:spAutoFit/>
-          </a:bodyPr>
-          <a:lstStyle/>
-          <a:p>
-            <a:pPr>
-              <a:defRPr sz="1800" b="1" i="0">
-                <a:solidFill>
-                  <a:srgbClr val="1D7E7E"/>
-                </a:solidFill>
-                <a:latin typeface="Cambria"/>
-              </a:defRPr>
-            </a:pPr>
-            <a:r>
-              <a:t>+0.5 ~ 0.8</a:t>
+                  <a:srgbClr val="1A1A1A"/>
+                </a:solidFill>
+                <a:latin typeface="Calibri"/>
+              </a:defRPr>
+            </a:pPr>
+            <a:r>
+              <a:t>CIFAR-100  ·  beats TAB</a:t>
             </a:r>
           </a:p>
         </p:txBody>
@@ -7834,8 +7856,8 @@
         </p:nvSpPr>
         <p:spPr>
           <a:xfrm>
-            <a:off x="9692640" y="3703320"/>
-            <a:ext cx="2286000" cy="914400"/>
+            <a:off x="8229600" y="3611880"/>
+            <a:ext cx="3657600" cy="1280160"/>
           </a:xfrm>
           <a:prstGeom prst="rect">
             <a:avLst/>
@@ -7843,9 +7865,9 @@
           <a:solidFill>
             <a:srgbClr val="F8F7F2"/>
           </a:solidFill>
-          <a:ln w="16510">
+          <a:ln w="22860">
             <a:solidFill>
-              <a:srgbClr val="E0B85F"/>
+              <a:srgbClr val="1D7E7E"/>
             </a:solidFill>
           </a:ln>
         </p:spPr>
@@ -7879,8 +7901,80 @@
         </p:nvSpPr>
         <p:spPr>
           <a:xfrm>
-            <a:off x="9829800" y="3794759"/>
-            <a:ext cx="2011680" cy="274320"/>
+            <a:off x="8412480" y="3794760"/>
+            <a:ext cx="2194560" cy="548640"/>
+          </a:xfrm>
+          <a:prstGeom prst="rect">
+            <a:avLst/>
+          </a:prstGeom>
+          <a:noFill/>
+        </p:spPr>
+        <p:txBody>
+          <a:bodyPr wrap="square" lIns="0" rIns="0" tIns="0" bIns="0">
+            <a:spAutoFit/>
+          </a:bodyPr>
+          <a:lstStyle/>
+          <a:p>
+            <a:pPr>
+              <a:defRPr sz="2600" b="1" i="0">
+                <a:solidFill>
+                  <a:srgbClr val="1D7E7E"/>
+                </a:solidFill>
+                <a:latin typeface="Cambria"/>
+              </a:defRPr>
+            </a:pPr>
+            <a:r>
+              <a:t>+0.64</a:t>
+            </a:r>
+          </a:p>
+        </p:txBody>
+      </p:sp>
+      <p:sp>
+        <p:nvSpPr>
+          <p:cNvPr id="12" name="TextBox 11"/>
+          <p:cNvSpPr txBox="1"/>
+          <p:nvPr/>
+        </p:nvSpPr>
+        <p:spPr>
+          <a:xfrm>
+            <a:off x="10424160" y="3904488"/>
+            <a:ext cx="1097280" cy="365760"/>
+          </a:xfrm>
+          <a:prstGeom prst="rect">
+            <a:avLst/>
+          </a:prstGeom>
+          <a:noFill/>
+        </p:spPr>
+        <p:txBody>
+          <a:bodyPr wrap="square" lIns="0" rIns="0" tIns="0" bIns="0">
+            <a:spAutoFit/>
+          </a:bodyPr>
+          <a:lstStyle/>
+          <a:p>
+            <a:pPr>
+              <a:defRPr sz="1100" b="0" i="0">
+                <a:solidFill>
+                  <a:srgbClr val="1D7E7E"/>
+                </a:solidFill>
+                <a:latin typeface="Calibri"/>
+              </a:defRPr>
+            </a:pPr>
+            <a:r>
+              <a:t>%pt</a:t>
+            </a:r>
+          </a:p>
+        </p:txBody>
+      </p:sp>
+      <p:sp>
+        <p:nvSpPr>
+          <p:cNvPr id="13" name="TextBox 12"/>
+          <p:cNvSpPr txBox="1"/>
+          <p:nvPr/>
+        </p:nvSpPr>
+        <p:spPr>
+          <a:xfrm>
+            <a:off x="8412480" y="4389120"/>
+            <a:ext cx="3383280" cy="457200"/>
           </a:xfrm>
           <a:prstGeom prst="rect">
             <a:avLst/>
@@ -7896,63 +7990,27 @@
             <a:pPr>
               <a:defRPr sz="1000" b="0" i="0">
                 <a:solidFill>
-                  <a:srgbClr val="7A7A7A"/>
-                </a:solidFill>
-                <a:latin typeface="Calibri"/>
-              </a:defRPr>
-            </a:pPr>
-            <a:r>
-              <a:t>TrSG alone</a:t>
-            </a:r>
-          </a:p>
-        </p:txBody>
-      </p:sp>
-      <p:sp>
-        <p:nvSpPr>
-          <p:cNvPr id="12" name="TextBox 11"/>
-          <p:cNvSpPr txBox="1"/>
-          <p:nvPr/>
-        </p:nvSpPr>
-        <p:spPr>
-          <a:xfrm>
-            <a:off x="9829800" y="4069080"/>
-            <a:ext cx="2011680" cy="457200"/>
-          </a:xfrm>
-          <a:prstGeom prst="rect">
-            <a:avLst/>
-          </a:prstGeom>
-          <a:noFill/>
-        </p:spPr>
-        <p:txBody>
-          <a:bodyPr wrap="square" lIns="0" rIns="0" tIns="0" bIns="0">
-            <a:spAutoFit/>
-          </a:bodyPr>
-          <a:lstStyle/>
-          <a:p>
-            <a:pPr>
-              <a:defRPr sz="1800" b="1" i="0">
-                <a:solidFill>
-                  <a:srgbClr val="E0B85F"/>
-                </a:solidFill>
-                <a:latin typeface="Cambria"/>
-              </a:defRPr>
-            </a:pPr>
-            <a:r>
-              <a:t>+1.6 ~ 4.2</a:t>
-            </a:r>
-          </a:p>
-        </p:txBody>
-      </p:sp>
-      <p:sp>
-        <p:nvSpPr>
-          <p:cNvPr id="13" name="Rectangle 12"/>
+                  <a:srgbClr val="1A1A1A"/>
+                </a:solidFill>
+                <a:latin typeface="Calibri"/>
+              </a:defRPr>
+            </a:pPr>
+            <a:r>
+              <a:t>ImageNet  ·  beats MPS</a:t>
+            </a:r>
+          </a:p>
+        </p:txBody>
+      </p:sp>
+      <p:sp>
+        <p:nvSpPr>
+          <p:cNvPr id="14" name="Rectangle 13"/>
           <p:cNvSpPr/>
           <p:nvPr/>
         </p:nvSpPr>
         <p:spPr>
           <a:xfrm>
-            <a:off x="9692640" y="4709160"/>
-            <a:ext cx="2286000" cy="914400"/>
+            <a:off x="8229600" y="5029200"/>
+            <a:ext cx="3657600" cy="1280160"/>
           </a:xfrm>
           <a:prstGeom prst="rect">
             <a:avLst/>
@@ -7960,9 +8018,9 @@
           <a:solidFill>
             <a:srgbClr val="F8F7F2"/>
           </a:solidFill>
-          <a:ln w="16510">
+          <a:ln w="22860">
             <a:solidFill>
-              <a:srgbClr val="0E5E5E"/>
+              <a:srgbClr val="E0B85F"/>
             </a:solidFill>
           </a:ln>
         </p:spPr>
@@ -7990,14 +8048,86 @@
       </p:sp>
       <p:sp>
         <p:nvSpPr>
-          <p:cNvPr id="14" name="TextBox 13"/>
-          <p:cNvSpPr txBox="1"/>
-          <p:nvPr/>
-        </p:nvSpPr>
-        <p:spPr>
-          <a:xfrm>
-            <a:off x="9829800" y="4800600"/>
-            <a:ext cx="2011680" cy="274320"/>
+          <p:cNvPr id="15" name="TextBox 14"/>
+          <p:cNvSpPr txBox="1"/>
+          <p:nvPr/>
+        </p:nvSpPr>
+        <p:spPr>
+          <a:xfrm>
+            <a:off x="8412480" y="5212080"/>
+            <a:ext cx="2194560" cy="548640"/>
+          </a:xfrm>
+          <a:prstGeom prst="rect">
+            <a:avLst/>
+          </a:prstGeom>
+          <a:noFill/>
+        </p:spPr>
+        <p:txBody>
+          <a:bodyPr wrap="square" lIns="0" rIns="0" tIns="0" bIns="0">
+            <a:spAutoFit/>
+          </a:bodyPr>
+          <a:lstStyle/>
+          <a:p>
+            <a:pPr>
+              <a:defRPr sz="2600" b="1" i="0">
+                <a:solidFill>
+                  <a:srgbClr val="E0B85F"/>
+                </a:solidFill>
+                <a:latin typeface="Cambria"/>
+              </a:defRPr>
+            </a:pPr>
+            <a:r>
+              <a:t>+5.23</a:t>
+            </a:r>
+          </a:p>
+        </p:txBody>
+      </p:sp>
+      <p:sp>
+        <p:nvSpPr>
+          <p:cNvPr id="16" name="TextBox 15"/>
+          <p:cNvSpPr txBox="1"/>
+          <p:nvPr/>
+        </p:nvSpPr>
+        <p:spPr>
+          <a:xfrm>
+            <a:off x="10424160" y="5321808"/>
+            <a:ext cx="1097280" cy="365760"/>
+          </a:xfrm>
+          <a:prstGeom prst="rect">
+            <a:avLst/>
+          </a:prstGeom>
+          <a:noFill/>
+        </p:spPr>
+        <p:txBody>
+          <a:bodyPr wrap="square" lIns="0" rIns="0" tIns="0" bIns="0">
+            <a:spAutoFit/>
+          </a:bodyPr>
+          <a:lstStyle/>
+          <a:p>
+            <a:pPr>
+              <a:defRPr sz="1100" b="0" i="0">
+                <a:solidFill>
+                  <a:srgbClr val="E0B85F"/>
+                </a:solidFill>
+                <a:latin typeface="Calibri"/>
+              </a:defRPr>
+            </a:pPr>
+            <a:r>
+              <a:t>%pt</a:t>
+            </a:r>
+          </a:p>
+        </p:txBody>
+      </p:sp>
+      <p:sp>
+        <p:nvSpPr>
+          <p:cNvPr id="17" name="TextBox 16"/>
+          <p:cNvSpPr txBox="1"/>
+          <p:nvPr/>
+        </p:nvSpPr>
+        <p:spPr>
+          <a:xfrm>
+            <a:off x="8412480" y="5806440"/>
+            <a:ext cx="3383280" cy="457200"/>
           </a:xfrm>
           <a:prstGeom prst="rect">
             <a:avLst/>
@@ -8013,63 +8143,27 @@
             <a:pPr>
               <a:defRPr sz="1000" b="0" i="0">
                 <a:solidFill>
-                  <a:srgbClr val="7A7A7A"/>
-                </a:solidFill>
-                <a:latin typeface="Calibri"/>
-              </a:defRPr>
-            </a:pPr>
-            <a:r>
-              <a:t>Both</a:t>
-            </a:r>
-          </a:p>
-        </p:txBody>
-      </p:sp>
-      <p:sp>
-        <p:nvSpPr>
-          <p:cNvPr id="15" name="TextBox 14"/>
-          <p:cNvSpPr txBox="1"/>
-          <p:nvPr/>
-        </p:nvSpPr>
-        <p:spPr>
-          <a:xfrm>
-            <a:off x="9829800" y="5074920"/>
-            <a:ext cx="2011680" cy="457200"/>
-          </a:xfrm>
-          <a:prstGeom prst="rect">
-            <a:avLst/>
-          </a:prstGeom>
-          <a:noFill/>
-        </p:spPr>
-        <p:txBody>
-          <a:bodyPr wrap="square" lIns="0" rIns="0" tIns="0" bIns="0">
-            <a:spAutoFit/>
-          </a:bodyPr>
-          <a:lstStyle/>
-          <a:p>
-            <a:pPr>
-              <a:defRPr sz="1800" b="1" i="0">
-                <a:solidFill>
-                  <a:srgbClr val="0E5E5E"/>
-                </a:solidFill>
-                <a:latin typeface="Cambria"/>
-              </a:defRPr>
-            </a:pPr>
-            <a:r>
-              <a:t>+2.1 ~ 4.8</a:t>
-            </a:r>
-          </a:p>
-        </p:txBody>
-      </p:sp>
-      <p:sp>
-        <p:nvSpPr>
-          <p:cNvPr id="16" name="Rectangle 15"/>
+                  <a:srgbClr val="1A1A1A"/>
+                </a:solidFill>
+                <a:latin typeface="Calibri"/>
+              </a:defRPr>
+            </a:pPr>
+            <a:r>
+              <a:t>DVS-CIFAR10  ·  beats RMP</a:t>
+            </a:r>
+          </a:p>
+        </p:txBody>
+      </p:sp>
+      <p:sp>
+        <p:nvSpPr>
+          <p:cNvPr id="18" name="Rectangle 17"/>
           <p:cNvSpPr/>
           <p:nvPr/>
         </p:nvSpPr>
         <p:spPr>
           <a:xfrm>
-            <a:off x="457200" y="5989320"/>
-            <a:ext cx="54864" cy="502920"/>
+            <a:off x="457200" y="6126480"/>
+            <a:ext cx="54864" cy="365760"/>
           </a:xfrm>
           <a:prstGeom prst="rect">
             <a:avLst/>
@@ -8105,20 +8199,20 @@
       </p:sp>
       <p:sp>
         <p:nvSpPr>
-          <p:cNvPr id="17" name="Rectangle 16"/>
+          <p:cNvPr id="19" name="Rectangle 18"/>
           <p:cNvSpPr/>
           <p:nvPr/>
         </p:nvSpPr>
         <p:spPr>
           <a:xfrm>
-            <a:off x="512064" y="5989320"/>
-            <a:ext cx="11192256" cy="502920"/>
+            <a:off x="512064" y="6126480"/>
+            <a:ext cx="11192256" cy="365760"/>
           </a:xfrm>
           <a:prstGeom prst="rect">
             <a:avLst/>
           </a:prstGeom>
           <a:solidFill>
-            <a:srgbClr val="1D7E7E"/>
+            <a:srgbClr val="0F2540"/>
           </a:solidFill>
           <a:ln>
             <a:noFill/>
@@ -8148,14 +8242,14 @@
       </p:sp>
       <p:sp>
         <p:nvSpPr>
-          <p:cNvPr id="18" name="TextBox 17"/>
-          <p:cNvSpPr txBox="1"/>
-          <p:nvPr/>
-        </p:nvSpPr>
-        <p:spPr>
-          <a:xfrm>
-            <a:off x="777240" y="6126480"/>
-            <a:ext cx="10789920" cy="228600"/>
+          <p:cNvPr id="20" name="TextBox 19"/>
+          <p:cNvSpPr txBox="1"/>
+          <p:nvPr/>
+        </p:nvSpPr>
+        <p:spPr>
+          <a:xfrm>
+            <a:off x="777240" y="6263640"/>
+            <a:ext cx="10789920" cy="91440"/>
           </a:xfrm>
           <a:prstGeom prst="rect">
             <a:avLst/>
@@ -8171,20 +8265,20 @@
             <a:pPr>
               <a:defRPr sz="1100" b="1">
                 <a:solidFill>
-                  <a:srgbClr val="FFFFFF"/>
-                </a:solidFill>
-                <a:latin typeface="Calibri"/>
-              </a:defRPr>
-            </a:pPr>
-            <a:r>
-              <a:t>The two fixes are orthogonal — diagnoses aim at different components, not the same problem twice.</a:t>
-            </a:r>
-          </a:p>
-        </p:txBody>
-      </p:sp>
-      <p:sp>
-        <p:nvSpPr>
-          <p:cNvPr id="19" name="TextBox 18"/>
+                  <a:srgbClr val="E0B85F"/>
+                </a:solidFill>
+                <a:latin typeface="Calibri"/>
+              </a:defRPr>
+            </a:pPr>
+            <a:r>
+              <a:t>Biggest gain on the most challenging (event-based) dataset — DVS-CIFAR10 +5.23 %pt</a:t>
+            </a:r>
+          </a:p>
+        </p:txBody>
+      </p:sp>
+      <p:sp>
+        <p:nvSpPr>
+          <p:cNvPr id="21" name="TextBox 20"/>
           <p:cNvSpPr txBox="1"/>
           <p:nvPr/>
         </p:nvSpPr>
@@ -8220,7 +8314,7 @@
       </p:sp>
       <p:sp>
         <p:nvSpPr>
-          <p:cNvPr id="20" name="TextBox 19"/>
+          <p:cNvPr id="22" name="TextBox 21"/>
           <p:cNvSpPr txBox="1"/>
           <p:nvPr/>
         </p:nvSpPr>
@@ -8249,7 +8343,7 @@
               </a:defRPr>
             </a:pPr>
             <a:r>
-              <a:t>15 / 18</a:t>
+              <a:t>15 / 19</a:t>
             </a:r>
           </a:p>
         </p:txBody>
@@ -8304,7 +8398,7 @@
             </a:pPr>
             <a:r>
               <a:rPr spc="300"/>
-              <a:t>EXPERIMENTS · 3/3</a:t>
+              <a:t>EXPERIMENTS · 2/3</a:t>
             </a:r>
           </a:p>
         </p:txBody>
@@ -8340,7 +8434,7 @@
               </a:defRPr>
             </a:pPr>
             <a:r>
-              <a:t>Beyond Classification</a:t>
+              <a:t>Ablation — Independent and Complementary</a:t>
             </a:r>
           </a:p>
         </p:txBody>
@@ -8376,21 +8470,81 @@
               </a:defRPr>
             </a:pPr>
             <a:r>
-              <a:t>Transformer SNNs · object detection · energy preserved</a:t>
-            </a:r>
-          </a:p>
-        </p:txBody>
-      </p:sp>
-      <p:sp>
-        <p:nvSpPr>
-          <p:cNvPr id="5" name="Rectangle 4"/>
+              <a:t>Each method helps alone; together they compound (especially on event-based data)</a:t>
+            </a:r>
+          </a:p>
+        </p:txBody>
+      </p:sp>
+      <p:pic>
+        <p:nvPicPr>
+          <p:cNvPr id="5" name="Picture 4" descr="ablation_bars.png"/>
+          <p:cNvPicPr>
+            <a:picLocks noChangeAspect="1"/>
+          </p:cNvPicPr>
+          <p:nvPr/>
+        </p:nvPicPr>
+        <p:blipFill>
+          <a:blip r:embed="rId2"/>
+          <a:stretch>
+            <a:fillRect/>
+          </a:stretch>
+        </p:blipFill>
+        <p:spPr>
+          <a:xfrm>
+            <a:off x="365760" y="2240280"/>
+            <a:ext cx="9144000" cy="3819646"/>
+          </a:xfrm>
+          <a:prstGeom prst="rect">
+            <a:avLst/>
+          </a:prstGeom>
+        </p:spPr>
+      </p:pic>
+      <p:sp>
+        <p:nvSpPr>
+          <p:cNvPr id="6" name="TextBox 5"/>
+          <p:cNvSpPr txBox="1"/>
+          <p:nvPr/>
+        </p:nvSpPr>
+        <p:spPr>
+          <a:xfrm>
+            <a:off x="9875520" y="2286000"/>
+            <a:ext cx="2194560" cy="365760"/>
+          </a:xfrm>
+          <a:prstGeom prst="rect">
+            <a:avLst/>
+          </a:prstGeom>
+          <a:noFill/>
+        </p:spPr>
+        <p:txBody>
+          <a:bodyPr wrap="square" lIns="0" rIns="0" tIns="0" bIns="0">
+            <a:spAutoFit/>
+          </a:bodyPr>
+          <a:lstStyle/>
+          <a:p>
+            <a:pPr>
+              <a:defRPr sz="1200" b="1" i="0">
+                <a:solidFill>
+                  <a:srgbClr val="0F2540"/>
+                </a:solidFill>
+                <a:latin typeface="Calibri"/>
+              </a:defRPr>
+            </a:pPr>
+            <a:r>
+              <a:t>Takeaway</a:t>
+            </a:r>
+          </a:p>
+        </p:txBody>
+      </p:sp>
+      <p:sp>
+        <p:nvSpPr>
+          <p:cNvPr id="7" name="Rectangle 6"/>
           <p:cNvSpPr/>
           <p:nvPr/>
         </p:nvSpPr>
         <p:spPr>
           <a:xfrm>
-            <a:off x="457200" y="2286000"/>
-            <a:ext cx="5486400" cy="1554480"/>
+            <a:off x="9692640" y="2697480"/>
+            <a:ext cx="2286000" cy="914400"/>
           </a:xfrm>
           <a:prstGeom prst="rect">
             <a:avLst/>
@@ -8398,7 +8552,7 @@
           <a:solidFill>
             <a:srgbClr val="F8F7F2"/>
           </a:solidFill>
-          <a:ln w="15240">
+          <a:ln w="16510">
             <a:solidFill>
               <a:srgbClr val="1D7E7E"/>
             </a:solidFill>
@@ -8428,94 +8582,86 @@
       </p:sp>
       <p:sp>
         <p:nvSpPr>
-          <p:cNvPr id="6" name="TextBox 5"/>
-          <p:cNvSpPr txBox="1"/>
-          <p:nvPr/>
-        </p:nvSpPr>
-        <p:spPr>
-          <a:xfrm>
-            <a:off x="640080" y="2423160"/>
-            <a:ext cx="5120640" cy="365760"/>
-          </a:xfrm>
-          <a:prstGeom prst="rect">
-            <a:avLst/>
-          </a:prstGeom>
-          <a:noFill/>
-        </p:spPr>
-        <p:txBody>
-          <a:bodyPr wrap="square" lIns="0" rIns="0" tIns="0" bIns="0">
-            <a:spAutoFit/>
-          </a:bodyPr>
-          <a:lstStyle/>
-          <a:p>
-            <a:pPr>
-              <a:defRPr sz="1200" b="1" i="0">
+          <p:cNvPr id="8" name="TextBox 7"/>
+          <p:cNvSpPr txBox="1"/>
+          <p:nvPr/>
+        </p:nvSpPr>
+        <p:spPr>
+          <a:xfrm>
+            <a:off x="9829800" y="2788920"/>
+            <a:ext cx="2011680" cy="274320"/>
+          </a:xfrm>
+          <a:prstGeom prst="rect">
+            <a:avLst/>
+          </a:prstGeom>
+          <a:noFill/>
+        </p:spPr>
+        <p:txBody>
+          <a:bodyPr wrap="square" lIns="0" rIns="0" tIns="0" bIns="0">
+            <a:spAutoFit/>
+          </a:bodyPr>
+          <a:lstStyle/>
+          <a:p>
+            <a:pPr>
+              <a:defRPr sz="1000" b="0" i="0">
+                <a:solidFill>
+                  <a:srgbClr val="7A7A7A"/>
+                </a:solidFill>
+                <a:latin typeface="Calibri"/>
+              </a:defRPr>
+            </a:pPr>
+            <a:r>
+              <a:t>MP-Init alone</a:t>
+            </a:r>
+          </a:p>
+        </p:txBody>
+      </p:sp>
+      <p:sp>
+        <p:nvSpPr>
+          <p:cNvPr id="9" name="TextBox 8"/>
+          <p:cNvSpPr txBox="1"/>
+          <p:nvPr/>
+        </p:nvSpPr>
+        <p:spPr>
+          <a:xfrm>
+            <a:off x="9829800" y="3063240"/>
+            <a:ext cx="2011680" cy="457200"/>
+          </a:xfrm>
+          <a:prstGeom prst="rect">
+            <a:avLst/>
+          </a:prstGeom>
+          <a:noFill/>
+        </p:spPr>
+        <p:txBody>
+          <a:bodyPr wrap="square" lIns="0" rIns="0" tIns="0" bIns="0">
+            <a:spAutoFit/>
+          </a:bodyPr>
+          <a:lstStyle/>
+          <a:p>
+            <a:pPr>
+              <a:defRPr sz="1800" b="1" i="0">
                 <a:solidFill>
                   <a:srgbClr val="1D7E7E"/>
                 </a:solidFill>
-                <a:latin typeface="Calibri"/>
-              </a:defRPr>
-            </a:pPr>
-            <a:r>
-              <a:t>Transformer SNN  (QKFormer, ImageNet, T=4)</a:t>
-            </a:r>
-          </a:p>
-        </p:txBody>
-      </p:sp>
-      <p:sp>
-        <p:nvSpPr>
-          <p:cNvPr id="7" name="TextBox 6"/>
-          <p:cNvSpPr txBox="1"/>
-          <p:nvPr/>
-        </p:nvSpPr>
-        <p:spPr>
-          <a:xfrm>
-            <a:off x="640080" y="2788920"/>
-            <a:ext cx="5120640" cy="914400"/>
-          </a:xfrm>
-          <a:prstGeom prst="rect">
-            <a:avLst/>
-          </a:prstGeom>
-          <a:noFill/>
-        </p:spPr>
-        <p:txBody>
-          <a:bodyPr wrap="square" lIns="0" rIns="0" tIns="0" bIns="0">
-            <a:spAutoFit/>
-          </a:bodyPr>
-          <a:lstStyle/>
-          <a:p>
-            <a:pPr>
-              <a:defRPr sz="1100" b="0" i="0">
-                <a:solidFill>
-                  <a:srgbClr val="1A1A1A"/>
-                </a:solidFill>
-                <a:latin typeface="Calibri"/>
-              </a:defRPr>
-            </a:pPr>
-            <a:r>
-              <a:t>Baseline 78.80    →    + ours 79.90    (+1.10 %pt)</a:t>
-            </a:r>
-            <a:br/>
-            <a:r>
-              <a:t>AS-SG    77.09    →    RS-SG  78.70    →    TrSG  79.90</a:t>
-            </a:r>
-            <a:br/>
-            <a:r>
-              <a:t>Drop-in SG swap on a state-of-the-art Transformer SNN.</a:t>
-            </a:r>
-          </a:p>
-        </p:txBody>
-      </p:sp>
-      <p:sp>
-        <p:nvSpPr>
-          <p:cNvPr id="8" name="Rectangle 7"/>
+                <a:latin typeface="Cambria"/>
+              </a:defRPr>
+            </a:pPr>
+            <a:r>
+              <a:t>+0.5 ~ 0.8</a:t>
+            </a:r>
+          </a:p>
+        </p:txBody>
+      </p:sp>
+      <p:sp>
+        <p:nvSpPr>
+          <p:cNvPr id="10" name="Rectangle 9"/>
           <p:cNvSpPr/>
           <p:nvPr/>
         </p:nvSpPr>
         <p:spPr>
           <a:xfrm>
-            <a:off x="6263640" y="2286000"/>
-            <a:ext cx="5486400" cy="1554480"/>
+            <a:off x="9692640" y="3703320"/>
+            <a:ext cx="2286000" cy="914400"/>
           </a:xfrm>
           <a:prstGeom prst="rect">
             <a:avLst/>
@@ -8523,9 +8669,9 @@
           <a:solidFill>
             <a:srgbClr val="F8F7F2"/>
           </a:solidFill>
-          <a:ln w="15240">
+          <a:ln w="16510">
             <a:solidFill>
-              <a:srgbClr val="1D7E7E"/>
+              <a:srgbClr val="E0B85F"/>
             </a:solidFill>
           </a:ln>
         </p:spPr>
@@ -8553,94 +8699,86 @@
       </p:sp>
       <p:sp>
         <p:nvSpPr>
-          <p:cNvPr id="9" name="TextBox 8"/>
-          <p:cNvSpPr txBox="1"/>
-          <p:nvPr/>
-        </p:nvSpPr>
-        <p:spPr>
-          <a:xfrm>
-            <a:off x="6446520" y="2423160"/>
-            <a:ext cx="5120640" cy="365760"/>
-          </a:xfrm>
-          <a:prstGeom prst="rect">
-            <a:avLst/>
-          </a:prstGeom>
-          <a:noFill/>
-        </p:spPr>
-        <p:txBody>
-          <a:bodyPr wrap="square" lIns="0" rIns="0" tIns="0" bIns="0">
-            <a:spAutoFit/>
-          </a:bodyPr>
-          <a:lstStyle/>
-          <a:p>
-            <a:pPr>
-              <a:defRPr sz="1200" b="1" i="0">
-                <a:solidFill>
-                  <a:srgbClr val="1D7E7E"/>
-                </a:solidFill>
-                <a:latin typeface="Calibri"/>
-              </a:defRPr>
-            </a:pPr>
-            <a:r>
-              <a:t>Object detection  (COCO-2017, EMS-ResNet10, T=3)</a:t>
-            </a:r>
-          </a:p>
-        </p:txBody>
-      </p:sp>
-      <p:sp>
-        <p:nvSpPr>
-          <p:cNvPr id="10" name="TextBox 9"/>
-          <p:cNvSpPr txBox="1"/>
-          <p:nvPr/>
-        </p:nvSpPr>
-        <p:spPr>
-          <a:xfrm>
-            <a:off x="6446520" y="2788920"/>
-            <a:ext cx="5120640" cy="914400"/>
-          </a:xfrm>
-          <a:prstGeom prst="rect">
-            <a:avLst/>
-          </a:prstGeom>
-          <a:noFill/>
-        </p:spPr>
-        <p:txBody>
-          <a:bodyPr wrap="square" lIns="0" rIns="0" tIns="0" bIns="0">
-            <a:spAutoFit/>
-          </a:bodyPr>
-          <a:lstStyle/>
-          <a:p>
-            <a:pPr>
-              <a:defRPr sz="1100" b="0" i="0">
-                <a:solidFill>
-                  <a:srgbClr val="1A1A1A"/>
-                </a:solidFill>
-                <a:latin typeface="Calibri"/>
-              </a:defRPr>
-            </a:pPr>
-            <a:r>
-              <a:t>mAP@0.5         0.291  →  0.305    (+0.014)</a:t>
-            </a:r>
-            <a:br/>
-            <a:r>
-              <a:t>mAP@0.5:0.95    0.138  →  0.147    (+0.009)</a:t>
-            </a:r>
-            <a:br/>
-            <a:r>
-              <a:t>First evidence the principles transfer beyond classification.</a:t>
-            </a:r>
-          </a:p>
-        </p:txBody>
-      </p:sp>
-      <p:sp>
-        <p:nvSpPr>
-          <p:cNvPr id="11" name="Rectangle 10"/>
+          <p:cNvPr id="11" name="TextBox 10"/>
+          <p:cNvSpPr txBox="1"/>
+          <p:nvPr/>
+        </p:nvSpPr>
+        <p:spPr>
+          <a:xfrm>
+            <a:off x="9829800" y="3794759"/>
+            <a:ext cx="2011680" cy="274320"/>
+          </a:xfrm>
+          <a:prstGeom prst="rect">
+            <a:avLst/>
+          </a:prstGeom>
+          <a:noFill/>
+        </p:spPr>
+        <p:txBody>
+          <a:bodyPr wrap="square" lIns="0" rIns="0" tIns="0" bIns="0">
+            <a:spAutoFit/>
+          </a:bodyPr>
+          <a:lstStyle/>
+          <a:p>
+            <a:pPr>
+              <a:defRPr sz="1000" b="0" i="0">
+                <a:solidFill>
+                  <a:srgbClr val="7A7A7A"/>
+                </a:solidFill>
+                <a:latin typeface="Calibri"/>
+              </a:defRPr>
+            </a:pPr>
+            <a:r>
+              <a:t>TrSG alone</a:t>
+            </a:r>
+          </a:p>
+        </p:txBody>
+      </p:sp>
+      <p:sp>
+        <p:nvSpPr>
+          <p:cNvPr id="12" name="TextBox 11"/>
+          <p:cNvSpPr txBox="1"/>
+          <p:nvPr/>
+        </p:nvSpPr>
+        <p:spPr>
+          <a:xfrm>
+            <a:off x="9829800" y="4069080"/>
+            <a:ext cx="2011680" cy="457200"/>
+          </a:xfrm>
+          <a:prstGeom prst="rect">
+            <a:avLst/>
+          </a:prstGeom>
+          <a:noFill/>
+        </p:spPr>
+        <p:txBody>
+          <a:bodyPr wrap="square" lIns="0" rIns="0" tIns="0" bIns="0">
+            <a:spAutoFit/>
+          </a:bodyPr>
+          <a:lstStyle/>
+          <a:p>
+            <a:pPr>
+              <a:defRPr sz="1800" b="1" i="0">
+                <a:solidFill>
+                  <a:srgbClr val="E0B85F"/>
+                </a:solidFill>
+                <a:latin typeface="Cambria"/>
+              </a:defRPr>
+            </a:pPr>
+            <a:r>
+              <a:t>+1.6 ~ 4.2</a:t>
+            </a:r>
+          </a:p>
+        </p:txBody>
+      </p:sp>
+      <p:sp>
+        <p:nvSpPr>
+          <p:cNvPr id="13" name="Rectangle 12"/>
           <p:cNvSpPr/>
           <p:nvPr/>
         </p:nvSpPr>
         <p:spPr>
           <a:xfrm>
-            <a:off x="457200" y="4023360"/>
-            <a:ext cx="5486400" cy="1554480"/>
+            <a:off x="9692640" y="4709160"/>
+            <a:ext cx="2286000" cy="914400"/>
           </a:xfrm>
           <a:prstGeom prst="rect">
             <a:avLst/>
@@ -8648,9 +8786,9 @@
           <a:solidFill>
             <a:srgbClr val="F8F7F2"/>
           </a:solidFill>
-          <a:ln w="15240">
+          <a:ln w="16510">
             <a:solidFill>
-              <a:srgbClr val="1D7E7E"/>
+              <a:srgbClr val="0E5E5E"/>
             </a:solidFill>
           </a:ln>
         </p:spPr>
@@ -8678,219 +8816,86 @@
       </p:sp>
       <p:sp>
         <p:nvSpPr>
-          <p:cNvPr id="12" name="TextBox 11"/>
-          <p:cNvSpPr txBox="1"/>
-          <p:nvPr/>
-        </p:nvSpPr>
-        <p:spPr>
-          <a:xfrm>
-            <a:off x="640080" y="4160520"/>
-            <a:ext cx="5120640" cy="365760"/>
-          </a:xfrm>
-          <a:prstGeom prst="rect">
-            <a:avLst/>
-          </a:prstGeom>
-          <a:noFill/>
-        </p:spPr>
-        <p:txBody>
-          <a:bodyPr wrap="square" lIns="0" rIns="0" tIns="0" bIns="0">
-            <a:spAutoFit/>
-          </a:bodyPr>
-          <a:lstStyle/>
-          <a:p>
-            <a:pPr>
-              <a:defRPr sz="1200" b="1" i="0">
-                <a:solidFill>
-                  <a:srgbClr val="1D7E7E"/>
-                </a:solidFill>
-                <a:latin typeface="Calibri"/>
-              </a:defRPr>
-            </a:pPr>
-            <a:r>
-              <a:t>Energy at matched firing rate  (CIFAR-100)</a:t>
-            </a:r>
-          </a:p>
-        </p:txBody>
-      </p:sp>
-      <p:sp>
-        <p:nvSpPr>
-          <p:cNvPr id="13" name="TextBox 12"/>
-          <p:cNvSpPr txBox="1"/>
-          <p:nvPr/>
-        </p:nvSpPr>
-        <p:spPr>
-          <a:xfrm>
-            <a:off x="640080" y="4526280"/>
-            <a:ext cx="5120640" cy="914400"/>
-          </a:xfrm>
-          <a:prstGeom prst="rect">
-            <a:avLst/>
-          </a:prstGeom>
-          <a:noFill/>
-        </p:spPr>
-        <p:txBody>
-          <a:bodyPr wrap="square" lIns="0" rIns="0" tIns="0" bIns="0">
-            <a:spAutoFit/>
-          </a:bodyPr>
-          <a:lstStyle/>
-          <a:p>
-            <a:pPr>
-              <a:defRPr sz="1100" b="0" i="0">
-                <a:solidFill>
-                  <a:srgbClr val="1A1A1A"/>
-                </a:solidFill>
-                <a:latin typeface="Calibri"/>
-              </a:defRPr>
-            </a:pPr>
-            <a:r>
-              <a:t>Baseline   1.57 mJ   ·   75.58 %</a:t>
-            </a:r>
-            <a:br/>
-            <a:r>
-              <a:t>+ MP-Init + TrSG    1.67 mJ   ·   77.68 %</a:t>
-            </a:r>
-            <a:br/>
-            <a:r>
-              <a:t>+2.10 %pt at +6 % energy — gains aren't from spiking more.</a:t>
-            </a:r>
-          </a:p>
-        </p:txBody>
-      </p:sp>
-      <p:sp>
-        <p:nvSpPr>
-          <p:cNvPr id="14" name="Rectangle 13"/>
+          <p:cNvPr id="14" name="TextBox 13"/>
+          <p:cNvSpPr txBox="1"/>
+          <p:nvPr/>
+        </p:nvSpPr>
+        <p:spPr>
+          <a:xfrm>
+            <a:off x="9829800" y="4800600"/>
+            <a:ext cx="2011680" cy="274320"/>
+          </a:xfrm>
+          <a:prstGeom prst="rect">
+            <a:avLst/>
+          </a:prstGeom>
+          <a:noFill/>
+        </p:spPr>
+        <p:txBody>
+          <a:bodyPr wrap="square" lIns="0" rIns="0" tIns="0" bIns="0">
+            <a:spAutoFit/>
+          </a:bodyPr>
+          <a:lstStyle/>
+          <a:p>
+            <a:pPr>
+              <a:defRPr sz="1000" b="0" i="0">
+                <a:solidFill>
+                  <a:srgbClr val="7A7A7A"/>
+                </a:solidFill>
+                <a:latin typeface="Calibri"/>
+              </a:defRPr>
+            </a:pPr>
+            <a:r>
+              <a:t>Both</a:t>
+            </a:r>
+          </a:p>
+        </p:txBody>
+      </p:sp>
+      <p:sp>
+        <p:nvSpPr>
+          <p:cNvPr id="15" name="TextBox 14"/>
+          <p:cNvSpPr txBox="1"/>
+          <p:nvPr/>
+        </p:nvSpPr>
+        <p:spPr>
+          <a:xfrm>
+            <a:off x="9829800" y="5074920"/>
+            <a:ext cx="2011680" cy="457200"/>
+          </a:xfrm>
+          <a:prstGeom prst="rect">
+            <a:avLst/>
+          </a:prstGeom>
+          <a:noFill/>
+        </p:spPr>
+        <p:txBody>
+          <a:bodyPr wrap="square" lIns="0" rIns="0" tIns="0" bIns="0">
+            <a:spAutoFit/>
+          </a:bodyPr>
+          <a:lstStyle/>
+          <a:p>
+            <a:pPr>
+              <a:defRPr sz="1800" b="1" i="0">
+                <a:solidFill>
+                  <a:srgbClr val="0E5E5E"/>
+                </a:solidFill>
+                <a:latin typeface="Cambria"/>
+              </a:defRPr>
+            </a:pPr>
+            <a:r>
+              <a:t>+2.1 ~ 4.8</a:t>
+            </a:r>
+          </a:p>
+        </p:txBody>
+      </p:sp>
+      <p:sp>
+        <p:nvSpPr>
+          <p:cNvPr id="16" name="Rectangle 15"/>
           <p:cNvSpPr/>
           <p:nvPr/>
         </p:nvSpPr>
         <p:spPr>
           <a:xfrm>
-            <a:off x="6263640" y="4023360"/>
-            <a:ext cx="5486400" cy="1554480"/>
-          </a:xfrm>
-          <a:prstGeom prst="rect">
-            <a:avLst/>
-          </a:prstGeom>
-          <a:solidFill>
-            <a:srgbClr val="F8F7F2"/>
-          </a:solidFill>
-          <a:ln w="15240">
-            <a:solidFill>
-              <a:srgbClr val="1D7E7E"/>
-            </a:solidFill>
-          </a:ln>
-        </p:spPr>
-        <p:style>
-          <a:lnRef idx="1">
-            <a:schemeClr val="accent1"/>
-          </a:lnRef>
-          <a:fillRef idx="3">
-            <a:schemeClr val="accent1"/>
-          </a:fillRef>
-          <a:effectRef idx="2">
-            <a:schemeClr val="accent1"/>
-          </a:effectRef>
-          <a:fontRef idx="minor">
-            <a:schemeClr val="lt1"/>
-          </a:fontRef>
-        </p:style>
-        <p:txBody>
-          <a:bodyPr rtlCol="0" anchor="ctr"/>
-          <a:lstStyle/>
-          <a:p>
-            <a:pPr algn="ctr"/>
-          </a:p>
-        </p:txBody>
-      </p:sp>
-      <p:sp>
-        <p:nvSpPr>
-          <p:cNvPr id="15" name="TextBox 14"/>
-          <p:cNvSpPr txBox="1"/>
-          <p:nvPr/>
-        </p:nvSpPr>
-        <p:spPr>
-          <a:xfrm>
-            <a:off x="6446520" y="4160520"/>
-            <a:ext cx="5120640" cy="365760"/>
-          </a:xfrm>
-          <a:prstGeom prst="rect">
-            <a:avLst/>
-          </a:prstGeom>
-          <a:noFill/>
-        </p:spPr>
-        <p:txBody>
-          <a:bodyPr wrap="square" lIns="0" rIns="0" tIns="0" bIns="0">
-            <a:spAutoFit/>
-          </a:bodyPr>
-          <a:lstStyle/>
-          <a:p>
-            <a:pPr>
-              <a:defRPr sz="1200" b="1" i="0">
-                <a:solidFill>
-                  <a:srgbClr val="1D7E7E"/>
-                </a:solidFill>
-                <a:latin typeface="Calibri"/>
-              </a:defRPr>
-            </a:pPr>
-            <a:r>
-              <a:t>All four surrogate shapes</a:t>
-            </a:r>
-          </a:p>
-        </p:txBody>
-      </p:sp>
-      <p:sp>
-        <p:nvSpPr>
-          <p:cNvPr id="16" name="TextBox 15"/>
-          <p:cNvSpPr txBox="1"/>
-          <p:nvPr/>
-        </p:nvSpPr>
-        <p:spPr>
-          <a:xfrm>
-            <a:off x="6446520" y="4526280"/>
-            <a:ext cx="5120640" cy="914400"/>
-          </a:xfrm>
-          <a:prstGeom prst="rect">
-            <a:avLst/>
-          </a:prstGeom>
-          <a:noFill/>
-        </p:spPr>
-        <p:txBody>
-          <a:bodyPr wrap="square" lIns="0" rIns="0" tIns="0" bIns="0">
-            <a:spAutoFit/>
-          </a:bodyPr>
-          <a:lstStyle/>
-          <a:p>
-            <a:pPr>
-              <a:defRPr sz="1100" b="0" i="0">
-                <a:solidFill>
-                  <a:srgbClr val="1A1A1A"/>
-                </a:solidFill>
-                <a:latin typeface="Calibri"/>
-              </a:defRPr>
-            </a:pPr>
-            <a:r>
-              <a:t>Rectangular · Triangular · Arctan · Sigmoid</a:t>
-            </a:r>
-            <a:br/>
-            <a:r>
-              <a:t>TrSG remains the best across initial V_thr, initial τ,</a:t>
-            </a:r>
-            <a:br/>
-            <a:r>
-              <a:t>and surrogate shape — never tied for second.</a:t>
-            </a:r>
-          </a:p>
-        </p:txBody>
-      </p:sp>
-      <p:sp>
-        <p:nvSpPr>
-          <p:cNvPr id="17" name="Rectangle 16"/>
-          <p:cNvSpPr/>
-          <p:nvPr/>
-        </p:nvSpPr>
-        <p:spPr>
-          <a:xfrm>
-            <a:off x="457200" y="5715000"/>
-            <a:ext cx="54864" cy="685800"/>
+            <a:off x="457200" y="5989320"/>
+            <a:ext cx="54864" cy="502920"/>
           </a:xfrm>
           <a:prstGeom prst="rect">
             <a:avLst/>
@@ -8926,20 +8931,20 @@
       </p:sp>
       <p:sp>
         <p:nvSpPr>
-          <p:cNvPr id="18" name="Rectangle 17"/>
+          <p:cNvPr id="17" name="Rectangle 16"/>
           <p:cNvSpPr/>
           <p:nvPr/>
         </p:nvSpPr>
         <p:spPr>
           <a:xfrm>
-            <a:off x="512064" y="5715000"/>
-            <a:ext cx="11192256" cy="685800"/>
+            <a:off x="512064" y="5989320"/>
+            <a:ext cx="11192256" cy="502920"/>
           </a:xfrm>
           <a:prstGeom prst="rect">
             <a:avLst/>
           </a:prstGeom>
           <a:solidFill>
-            <a:srgbClr val="0F2540"/>
+            <a:srgbClr val="1D7E7E"/>
           </a:solidFill>
           <a:ln>
             <a:noFill/>
@@ -8969,43 +8974,43 @@
       </p:sp>
       <p:sp>
         <p:nvSpPr>
+          <p:cNvPr id="18" name="TextBox 17"/>
+          <p:cNvSpPr txBox="1"/>
+          <p:nvPr/>
+        </p:nvSpPr>
+        <p:spPr>
+          <a:xfrm>
+            <a:off x="777240" y="6126480"/>
+            <a:ext cx="10789920" cy="228600"/>
+          </a:xfrm>
+          <a:prstGeom prst="rect">
+            <a:avLst/>
+          </a:prstGeom>
+          <a:noFill/>
+        </p:spPr>
+        <p:txBody>
+          <a:bodyPr wrap="square">
+            <a:spAutoFit/>
+          </a:bodyPr>
+          <a:lstStyle/>
+          <a:p>
+            <a:pPr>
+              <a:defRPr sz="1100" b="1">
+                <a:solidFill>
+                  <a:srgbClr val="FFFFFF"/>
+                </a:solidFill>
+                <a:latin typeface="Calibri"/>
+              </a:defRPr>
+            </a:pPr>
+            <a:r>
+              <a:t>The two fixes are orthogonal — diagnoses aim at different components, not the same problem twice.</a:t>
+            </a:r>
+          </a:p>
+        </p:txBody>
+      </p:sp>
+      <p:sp>
+        <p:nvSpPr>
           <p:cNvPr id="19" name="TextBox 18"/>
-          <p:cNvSpPr txBox="1"/>
-          <p:nvPr/>
-        </p:nvSpPr>
-        <p:spPr>
-          <a:xfrm>
-            <a:off x="777240" y="5852160"/>
-            <a:ext cx="10789920" cy="411480"/>
-          </a:xfrm>
-          <a:prstGeom prst="rect">
-            <a:avLst/>
-          </a:prstGeom>
-          <a:noFill/>
-        </p:spPr>
-        <p:txBody>
-          <a:bodyPr wrap="square">
-            <a:spAutoFit/>
-          </a:bodyPr>
-          <a:lstStyle/>
-          <a:p>
-            <a:pPr>
-              <a:defRPr sz="1300" b="1">
-                <a:solidFill>
-                  <a:srgbClr val="E0B85F"/>
-                </a:solidFill>
-                <a:latin typeface="Calibri"/>
-              </a:defRPr>
-            </a:pPr>
-            <a:r>
-              <a:t>No architectural changes, no extra losses, no per-timestep parameters — just drop in.</a:t>
-            </a:r>
-          </a:p>
-        </p:txBody>
-      </p:sp>
-      <p:sp>
-        <p:nvSpPr>
-          <p:cNvPr id="20" name="TextBox 19"/>
           <p:cNvSpPr txBox="1"/>
           <p:nvPr/>
         </p:nvSpPr>
@@ -9041,7 +9046,7 @@
       </p:sp>
       <p:sp>
         <p:nvSpPr>
-          <p:cNvPr id="21" name="TextBox 20"/>
+          <p:cNvPr id="20" name="TextBox 19"/>
           <p:cNvSpPr txBox="1"/>
           <p:nvPr/>
         </p:nvSpPr>
@@ -9070,7 +9075,7 @@
               </a:defRPr>
             </a:pPr>
             <a:r>
-              <a:t>16 / 18</a:t>
+              <a:t>16 / 19</a:t>
             </a:r>
           </a:p>
         </p:txBody>
@@ -9125,7 +9130,7 @@
             </a:pPr>
             <a:r>
               <a:rPr spc="300"/>
-              <a:t>CONCLUSION</a:t>
+              <a:t>EXPERIMENTS · 3/3</a:t>
             </a:r>
           </a:p>
         </p:txBody>
@@ -9161,21 +9166,557 @@
               </a:defRPr>
             </a:pPr>
             <a:r>
-              <a:t>What This Talk Was About</a:t>
-            </a:r>
-          </a:p>
-        </p:txBody>
-      </p:sp>
-      <p:sp>
-        <p:nvSpPr>
-          <p:cNvPr id="4" name="Rectangle 3"/>
+              <a:t>Beyond Classification</a:t>
+            </a:r>
+          </a:p>
+        </p:txBody>
+      </p:sp>
+      <p:sp>
+        <p:nvSpPr>
+          <p:cNvPr id="4" name="TextBox 3"/>
+          <p:cNvSpPr txBox="1"/>
+          <p:nvPr/>
+        </p:nvSpPr>
+        <p:spPr>
+          <a:xfrm>
+            <a:off x="457200" y="1600200"/>
+            <a:ext cx="11247120" cy="365760"/>
+          </a:xfrm>
+          <a:prstGeom prst="rect">
+            <a:avLst/>
+          </a:prstGeom>
+          <a:noFill/>
+        </p:spPr>
+        <p:txBody>
+          <a:bodyPr wrap="square" lIns="0" rIns="0" tIns="0" bIns="0">
+            <a:spAutoFit/>
+          </a:bodyPr>
+          <a:lstStyle/>
+          <a:p>
+            <a:pPr>
+              <a:defRPr sz="1400" b="0" i="1">
+                <a:solidFill>
+                  <a:srgbClr val="7A7A7A"/>
+                </a:solidFill>
+                <a:latin typeface="Calibri"/>
+              </a:defRPr>
+            </a:pPr>
+            <a:r>
+              <a:t>Transformer SNNs · object detection · energy preserved</a:t>
+            </a:r>
+          </a:p>
+        </p:txBody>
+      </p:sp>
+      <p:sp>
+        <p:nvSpPr>
+          <p:cNvPr id="5" name="Rectangle 4"/>
           <p:cNvSpPr/>
           <p:nvPr/>
         </p:nvSpPr>
         <p:spPr>
           <a:xfrm>
-            <a:off x="457200" y="2194560"/>
-            <a:ext cx="54864" cy="914400"/>
+            <a:off x="457200" y="2286000"/>
+            <a:ext cx="5486400" cy="1554480"/>
+          </a:xfrm>
+          <a:prstGeom prst="rect">
+            <a:avLst/>
+          </a:prstGeom>
+          <a:solidFill>
+            <a:srgbClr val="F8F7F2"/>
+          </a:solidFill>
+          <a:ln w="15240">
+            <a:solidFill>
+              <a:srgbClr val="1D7E7E"/>
+            </a:solidFill>
+          </a:ln>
+        </p:spPr>
+        <p:style>
+          <a:lnRef idx="1">
+            <a:schemeClr val="accent1"/>
+          </a:lnRef>
+          <a:fillRef idx="3">
+            <a:schemeClr val="accent1"/>
+          </a:fillRef>
+          <a:effectRef idx="2">
+            <a:schemeClr val="accent1"/>
+          </a:effectRef>
+          <a:fontRef idx="minor">
+            <a:schemeClr val="lt1"/>
+          </a:fontRef>
+        </p:style>
+        <p:txBody>
+          <a:bodyPr rtlCol="0" anchor="ctr"/>
+          <a:lstStyle/>
+          <a:p>
+            <a:pPr algn="ctr"/>
+          </a:p>
+        </p:txBody>
+      </p:sp>
+      <p:sp>
+        <p:nvSpPr>
+          <p:cNvPr id="6" name="TextBox 5"/>
+          <p:cNvSpPr txBox="1"/>
+          <p:nvPr/>
+        </p:nvSpPr>
+        <p:spPr>
+          <a:xfrm>
+            <a:off x="640080" y="2423160"/>
+            <a:ext cx="5120640" cy="365760"/>
+          </a:xfrm>
+          <a:prstGeom prst="rect">
+            <a:avLst/>
+          </a:prstGeom>
+          <a:noFill/>
+        </p:spPr>
+        <p:txBody>
+          <a:bodyPr wrap="square" lIns="0" rIns="0" tIns="0" bIns="0">
+            <a:spAutoFit/>
+          </a:bodyPr>
+          <a:lstStyle/>
+          <a:p>
+            <a:pPr>
+              <a:defRPr sz="1200" b="1" i="0">
+                <a:solidFill>
+                  <a:srgbClr val="1D7E7E"/>
+                </a:solidFill>
+                <a:latin typeface="Calibri"/>
+              </a:defRPr>
+            </a:pPr>
+            <a:r>
+              <a:t>Transformer SNN  (QKFormer, ImageNet, T=4)</a:t>
+            </a:r>
+          </a:p>
+        </p:txBody>
+      </p:sp>
+      <p:sp>
+        <p:nvSpPr>
+          <p:cNvPr id="7" name="TextBox 6"/>
+          <p:cNvSpPr txBox="1"/>
+          <p:nvPr/>
+        </p:nvSpPr>
+        <p:spPr>
+          <a:xfrm>
+            <a:off x="640080" y="2788920"/>
+            <a:ext cx="5120640" cy="914400"/>
+          </a:xfrm>
+          <a:prstGeom prst="rect">
+            <a:avLst/>
+          </a:prstGeom>
+          <a:noFill/>
+        </p:spPr>
+        <p:txBody>
+          <a:bodyPr wrap="square" lIns="0" rIns="0" tIns="0" bIns="0">
+            <a:spAutoFit/>
+          </a:bodyPr>
+          <a:lstStyle/>
+          <a:p>
+            <a:pPr>
+              <a:defRPr sz="1100" b="0" i="0">
+                <a:solidFill>
+                  <a:srgbClr val="1A1A1A"/>
+                </a:solidFill>
+                <a:latin typeface="Calibri"/>
+              </a:defRPr>
+            </a:pPr>
+            <a:r>
+              <a:t>Baseline 78.80    →    + ours 79.90    (+1.10 %pt)</a:t>
+            </a:r>
+            <a:br/>
+            <a:r>
+              <a:t>AS-SG    77.09    →    RS-SG  78.70    →    TrSG  79.90</a:t>
+            </a:r>
+            <a:br/>
+            <a:r>
+              <a:t>Drop-in SG swap on a state-of-the-art Transformer SNN.</a:t>
+            </a:r>
+          </a:p>
+        </p:txBody>
+      </p:sp>
+      <p:sp>
+        <p:nvSpPr>
+          <p:cNvPr id="8" name="Rectangle 7"/>
+          <p:cNvSpPr/>
+          <p:nvPr/>
+        </p:nvSpPr>
+        <p:spPr>
+          <a:xfrm>
+            <a:off x="6263640" y="2286000"/>
+            <a:ext cx="5486400" cy="1554480"/>
+          </a:xfrm>
+          <a:prstGeom prst="rect">
+            <a:avLst/>
+          </a:prstGeom>
+          <a:solidFill>
+            <a:srgbClr val="F8F7F2"/>
+          </a:solidFill>
+          <a:ln w="15240">
+            <a:solidFill>
+              <a:srgbClr val="1D7E7E"/>
+            </a:solidFill>
+          </a:ln>
+        </p:spPr>
+        <p:style>
+          <a:lnRef idx="1">
+            <a:schemeClr val="accent1"/>
+          </a:lnRef>
+          <a:fillRef idx="3">
+            <a:schemeClr val="accent1"/>
+          </a:fillRef>
+          <a:effectRef idx="2">
+            <a:schemeClr val="accent1"/>
+          </a:effectRef>
+          <a:fontRef idx="minor">
+            <a:schemeClr val="lt1"/>
+          </a:fontRef>
+        </p:style>
+        <p:txBody>
+          <a:bodyPr rtlCol="0" anchor="ctr"/>
+          <a:lstStyle/>
+          <a:p>
+            <a:pPr algn="ctr"/>
+          </a:p>
+        </p:txBody>
+      </p:sp>
+      <p:sp>
+        <p:nvSpPr>
+          <p:cNvPr id="9" name="TextBox 8"/>
+          <p:cNvSpPr txBox="1"/>
+          <p:nvPr/>
+        </p:nvSpPr>
+        <p:spPr>
+          <a:xfrm>
+            <a:off x="6446520" y="2423160"/>
+            <a:ext cx="5120640" cy="365760"/>
+          </a:xfrm>
+          <a:prstGeom prst="rect">
+            <a:avLst/>
+          </a:prstGeom>
+          <a:noFill/>
+        </p:spPr>
+        <p:txBody>
+          <a:bodyPr wrap="square" lIns="0" rIns="0" tIns="0" bIns="0">
+            <a:spAutoFit/>
+          </a:bodyPr>
+          <a:lstStyle/>
+          <a:p>
+            <a:pPr>
+              <a:defRPr sz="1200" b="1" i="0">
+                <a:solidFill>
+                  <a:srgbClr val="1D7E7E"/>
+                </a:solidFill>
+                <a:latin typeface="Calibri"/>
+              </a:defRPr>
+            </a:pPr>
+            <a:r>
+              <a:t>Object detection  (COCO-2017, EMS-ResNet10, T=3)</a:t>
+            </a:r>
+          </a:p>
+        </p:txBody>
+      </p:sp>
+      <p:sp>
+        <p:nvSpPr>
+          <p:cNvPr id="10" name="TextBox 9"/>
+          <p:cNvSpPr txBox="1"/>
+          <p:nvPr/>
+        </p:nvSpPr>
+        <p:spPr>
+          <a:xfrm>
+            <a:off x="6446520" y="2788920"/>
+            <a:ext cx="5120640" cy="914400"/>
+          </a:xfrm>
+          <a:prstGeom prst="rect">
+            <a:avLst/>
+          </a:prstGeom>
+          <a:noFill/>
+        </p:spPr>
+        <p:txBody>
+          <a:bodyPr wrap="square" lIns="0" rIns="0" tIns="0" bIns="0">
+            <a:spAutoFit/>
+          </a:bodyPr>
+          <a:lstStyle/>
+          <a:p>
+            <a:pPr>
+              <a:defRPr sz="1100" b="0" i="0">
+                <a:solidFill>
+                  <a:srgbClr val="1A1A1A"/>
+                </a:solidFill>
+                <a:latin typeface="Calibri"/>
+              </a:defRPr>
+            </a:pPr>
+            <a:r>
+              <a:t>mAP@0.5         0.291  →  0.305    (+0.014)</a:t>
+            </a:r>
+            <a:br/>
+            <a:r>
+              <a:t>mAP@0.5:0.95    0.138  →  0.147    (+0.009)</a:t>
+            </a:r>
+            <a:br/>
+            <a:r>
+              <a:t>First evidence the principles transfer beyond classification.</a:t>
+            </a:r>
+          </a:p>
+        </p:txBody>
+      </p:sp>
+      <p:sp>
+        <p:nvSpPr>
+          <p:cNvPr id="11" name="Rectangle 10"/>
+          <p:cNvSpPr/>
+          <p:nvPr/>
+        </p:nvSpPr>
+        <p:spPr>
+          <a:xfrm>
+            <a:off x="457200" y="4023360"/>
+            <a:ext cx="5486400" cy="1554480"/>
+          </a:xfrm>
+          <a:prstGeom prst="rect">
+            <a:avLst/>
+          </a:prstGeom>
+          <a:solidFill>
+            <a:srgbClr val="F8F7F2"/>
+          </a:solidFill>
+          <a:ln w="15240">
+            <a:solidFill>
+              <a:srgbClr val="1D7E7E"/>
+            </a:solidFill>
+          </a:ln>
+        </p:spPr>
+        <p:style>
+          <a:lnRef idx="1">
+            <a:schemeClr val="accent1"/>
+          </a:lnRef>
+          <a:fillRef idx="3">
+            <a:schemeClr val="accent1"/>
+          </a:fillRef>
+          <a:effectRef idx="2">
+            <a:schemeClr val="accent1"/>
+          </a:effectRef>
+          <a:fontRef idx="minor">
+            <a:schemeClr val="lt1"/>
+          </a:fontRef>
+        </p:style>
+        <p:txBody>
+          <a:bodyPr rtlCol="0" anchor="ctr"/>
+          <a:lstStyle/>
+          <a:p>
+            <a:pPr algn="ctr"/>
+          </a:p>
+        </p:txBody>
+      </p:sp>
+      <p:sp>
+        <p:nvSpPr>
+          <p:cNvPr id="12" name="TextBox 11"/>
+          <p:cNvSpPr txBox="1"/>
+          <p:nvPr/>
+        </p:nvSpPr>
+        <p:spPr>
+          <a:xfrm>
+            <a:off x="640080" y="4160520"/>
+            <a:ext cx="5120640" cy="365760"/>
+          </a:xfrm>
+          <a:prstGeom prst="rect">
+            <a:avLst/>
+          </a:prstGeom>
+          <a:noFill/>
+        </p:spPr>
+        <p:txBody>
+          <a:bodyPr wrap="square" lIns="0" rIns="0" tIns="0" bIns="0">
+            <a:spAutoFit/>
+          </a:bodyPr>
+          <a:lstStyle/>
+          <a:p>
+            <a:pPr>
+              <a:defRPr sz="1200" b="1" i="0">
+                <a:solidFill>
+                  <a:srgbClr val="1D7E7E"/>
+                </a:solidFill>
+                <a:latin typeface="Calibri"/>
+              </a:defRPr>
+            </a:pPr>
+            <a:r>
+              <a:t>Energy at matched firing rate  (CIFAR-100)</a:t>
+            </a:r>
+          </a:p>
+        </p:txBody>
+      </p:sp>
+      <p:sp>
+        <p:nvSpPr>
+          <p:cNvPr id="13" name="TextBox 12"/>
+          <p:cNvSpPr txBox="1"/>
+          <p:nvPr/>
+        </p:nvSpPr>
+        <p:spPr>
+          <a:xfrm>
+            <a:off x="640080" y="4526280"/>
+            <a:ext cx="5120640" cy="914400"/>
+          </a:xfrm>
+          <a:prstGeom prst="rect">
+            <a:avLst/>
+          </a:prstGeom>
+          <a:noFill/>
+        </p:spPr>
+        <p:txBody>
+          <a:bodyPr wrap="square" lIns="0" rIns="0" tIns="0" bIns="0">
+            <a:spAutoFit/>
+          </a:bodyPr>
+          <a:lstStyle/>
+          <a:p>
+            <a:pPr>
+              <a:defRPr sz="1100" b="0" i="0">
+                <a:solidFill>
+                  <a:srgbClr val="1A1A1A"/>
+                </a:solidFill>
+                <a:latin typeface="Calibri"/>
+              </a:defRPr>
+            </a:pPr>
+            <a:r>
+              <a:t>Baseline   1.57 mJ   ·   75.58 %</a:t>
+            </a:r>
+            <a:br/>
+            <a:r>
+              <a:t>+ MP-Init + TrSG    1.67 mJ   ·   77.68 %</a:t>
+            </a:r>
+            <a:br/>
+            <a:r>
+              <a:t>+2.10 %pt at +6 % energy — gains aren't from spiking more.</a:t>
+            </a:r>
+          </a:p>
+        </p:txBody>
+      </p:sp>
+      <p:sp>
+        <p:nvSpPr>
+          <p:cNvPr id="14" name="Rectangle 13"/>
+          <p:cNvSpPr/>
+          <p:nvPr/>
+        </p:nvSpPr>
+        <p:spPr>
+          <a:xfrm>
+            <a:off x="6263640" y="4023360"/>
+            <a:ext cx="5486400" cy="1554480"/>
+          </a:xfrm>
+          <a:prstGeom prst="rect">
+            <a:avLst/>
+          </a:prstGeom>
+          <a:solidFill>
+            <a:srgbClr val="F8F7F2"/>
+          </a:solidFill>
+          <a:ln w="15240">
+            <a:solidFill>
+              <a:srgbClr val="1D7E7E"/>
+            </a:solidFill>
+          </a:ln>
+        </p:spPr>
+        <p:style>
+          <a:lnRef idx="1">
+            <a:schemeClr val="accent1"/>
+          </a:lnRef>
+          <a:fillRef idx="3">
+            <a:schemeClr val="accent1"/>
+          </a:fillRef>
+          <a:effectRef idx="2">
+            <a:schemeClr val="accent1"/>
+          </a:effectRef>
+          <a:fontRef idx="minor">
+            <a:schemeClr val="lt1"/>
+          </a:fontRef>
+        </p:style>
+        <p:txBody>
+          <a:bodyPr rtlCol="0" anchor="ctr"/>
+          <a:lstStyle/>
+          <a:p>
+            <a:pPr algn="ctr"/>
+          </a:p>
+        </p:txBody>
+      </p:sp>
+      <p:sp>
+        <p:nvSpPr>
+          <p:cNvPr id="15" name="TextBox 14"/>
+          <p:cNvSpPr txBox="1"/>
+          <p:nvPr/>
+        </p:nvSpPr>
+        <p:spPr>
+          <a:xfrm>
+            <a:off x="6446520" y="4160520"/>
+            <a:ext cx="5120640" cy="365760"/>
+          </a:xfrm>
+          <a:prstGeom prst="rect">
+            <a:avLst/>
+          </a:prstGeom>
+          <a:noFill/>
+        </p:spPr>
+        <p:txBody>
+          <a:bodyPr wrap="square" lIns="0" rIns="0" tIns="0" bIns="0">
+            <a:spAutoFit/>
+          </a:bodyPr>
+          <a:lstStyle/>
+          <a:p>
+            <a:pPr>
+              <a:defRPr sz="1200" b="1" i="0">
+                <a:solidFill>
+                  <a:srgbClr val="1D7E7E"/>
+                </a:solidFill>
+                <a:latin typeface="Calibri"/>
+              </a:defRPr>
+            </a:pPr>
+            <a:r>
+              <a:t>All four surrogate shapes</a:t>
+            </a:r>
+          </a:p>
+        </p:txBody>
+      </p:sp>
+      <p:sp>
+        <p:nvSpPr>
+          <p:cNvPr id="16" name="TextBox 15"/>
+          <p:cNvSpPr txBox="1"/>
+          <p:nvPr/>
+        </p:nvSpPr>
+        <p:spPr>
+          <a:xfrm>
+            <a:off x="6446520" y="4526280"/>
+            <a:ext cx="5120640" cy="914400"/>
+          </a:xfrm>
+          <a:prstGeom prst="rect">
+            <a:avLst/>
+          </a:prstGeom>
+          <a:noFill/>
+        </p:spPr>
+        <p:txBody>
+          <a:bodyPr wrap="square" lIns="0" rIns="0" tIns="0" bIns="0">
+            <a:spAutoFit/>
+          </a:bodyPr>
+          <a:lstStyle/>
+          <a:p>
+            <a:pPr>
+              <a:defRPr sz="1100" b="0" i="0">
+                <a:solidFill>
+                  <a:srgbClr val="1A1A1A"/>
+                </a:solidFill>
+                <a:latin typeface="Calibri"/>
+              </a:defRPr>
+            </a:pPr>
+            <a:r>
+              <a:t>Rectangular · Triangular · Arctan · Sigmoid</a:t>
+            </a:r>
+            <a:br/>
+            <a:r>
+              <a:t>TrSG remains the best across initial V_thr, initial τ,</a:t>
+            </a:r>
+            <a:br/>
+            <a:r>
+              <a:t>and surrogate shape — never tied for second.</a:t>
+            </a:r>
+          </a:p>
+        </p:txBody>
+      </p:sp>
+      <p:sp>
+        <p:nvSpPr>
+          <p:cNvPr id="17" name="Rectangle 16"/>
+          <p:cNvSpPr/>
+          <p:nvPr/>
+        </p:nvSpPr>
+        <p:spPr>
+          <a:xfrm>
+            <a:off x="457200" y="5715000"/>
+            <a:ext cx="54864" cy="685800"/>
           </a:xfrm>
           <a:prstGeom prst="rect">
             <a:avLst/>
@@ -9211,14 +9752,14 @@
       </p:sp>
       <p:sp>
         <p:nvSpPr>
-          <p:cNvPr id="5" name="Rectangle 4"/>
+          <p:cNvPr id="18" name="Rectangle 17"/>
           <p:cNvSpPr/>
           <p:nvPr/>
         </p:nvSpPr>
         <p:spPr>
           <a:xfrm>
-            <a:off x="512064" y="2194560"/>
-            <a:ext cx="11192256" cy="914400"/>
+            <a:off x="512064" y="5715000"/>
+            <a:ext cx="11192256" cy="685800"/>
           </a:xfrm>
           <a:prstGeom prst="rect">
             <a:avLst/>
@@ -9254,14 +9795,14 @@
       </p:sp>
       <p:sp>
         <p:nvSpPr>
-          <p:cNvPr id="6" name="TextBox 5"/>
-          <p:cNvSpPr txBox="1"/>
-          <p:nvPr/>
-        </p:nvSpPr>
-        <p:spPr>
-          <a:xfrm>
-            <a:off x="777240" y="2331720"/>
-            <a:ext cx="10789920" cy="640080"/>
+          <p:cNvPr id="19" name="TextBox 18"/>
+          <p:cNvSpPr txBox="1"/>
+          <p:nvPr/>
+        </p:nvSpPr>
+        <p:spPr>
+          <a:xfrm>
+            <a:off x="777240" y="5852160"/>
+            <a:ext cx="10789920" cy="411480"/>
           </a:xfrm>
           <a:prstGeom prst="rect">
             <a:avLst/>
@@ -9275,7 +9816,7 @@
           <a:lstStyle/>
           <a:p>
             <a:pPr>
-              <a:defRPr sz="1500" b="1">
+              <a:defRPr sz="1300" b="1">
                 <a:solidFill>
                   <a:srgbClr val="E0B85F"/>
                 </a:solidFill>
@@ -9283,411 +9824,14 @@
               </a:defRPr>
             </a:pPr>
             <a:r>
-              <a:t>Two long-standing instabilities of direct SNN training, traced and fixed.</a:t>
-            </a:r>
-          </a:p>
-          <a:p>
-            <a:pPr>
-              <a:spcBef>
-                <a:spcPts val="600"/>
-              </a:spcBef>
-              <a:defRPr sz="1100">
-                <a:solidFill>
-                  <a:srgbClr val="FFFFFF"/>
-                </a:solidFill>
-                <a:latin typeface="Calibri"/>
-              </a:defRPr>
-            </a:pPr>
-            <a:r>
-              <a:t>Both fixes are minimal, principled, and preserve standard inference.</a:t>
-            </a:r>
-          </a:p>
-        </p:txBody>
-      </p:sp>
-      <p:sp>
-        <p:nvSpPr>
-          <p:cNvPr id="7" name="Rectangle 6"/>
-          <p:cNvSpPr/>
-          <p:nvPr/>
-        </p:nvSpPr>
-        <p:spPr>
-          <a:xfrm>
-            <a:off x="457200" y="3383280"/>
-            <a:ext cx="3657600" cy="2743200"/>
-          </a:xfrm>
-          <a:prstGeom prst="rect">
-            <a:avLst/>
-          </a:prstGeom>
-          <a:solidFill>
-            <a:srgbClr val="F8F7F2"/>
-          </a:solidFill>
-          <a:ln w="19050">
-            <a:solidFill>
-              <a:srgbClr val="1D7E7E"/>
-            </a:solidFill>
-          </a:ln>
-        </p:spPr>
-        <p:style>
-          <a:lnRef idx="1">
-            <a:schemeClr val="accent1"/>
-          </a:lnRef>
-          <a:fillRef idx="3">
-            <a:schemeClr val="accent1"/>
-          </a:fillRef>
-          <a:effectRef idx="2">
-            <a:schemeClr val="accent1"/>
-          </a:effectRef>
-          <a:fontRef idx="minor">
-            <a:schemeClr val="lt1"/>
-          </a:fontRef>
-        </p:style>
-        <p:txBody>
-          <a:bodyPr rtlCol="0" anchor="ctr"/>
-          <a:lstStyle/>
-          <a:p>
-            <a:pPr algn="ctr"/>
-          </a:p>
-        </p:txBody>
-      </p:sp>
-      <p:sp>
-        <p:nvSpPr>
-          <p:cNvPr id="8" name="TextBox 7"/>
-          <p:cNvSpPr txBox="1"/>
-          <p:nvPr/>
-        </p:nvSpPr>
-        <p:spPr>
-          <a:xfrm>
-            <a:off x="640080" y="3520440"/>
-            <a:ext cx="3291840" cy="457200"/>
-          </a:xfrm>
-          <a:prstGeom prst="rect">
-            <a:avLst/>
-          </a:prstGeom>
-          <a:noFill/>
-        </p:spPr>
-        <p:txBody>
-          <a:bodyPr wrap="square" lIns="0" rIns="0" tIns="0" bIns="0">
-            <a:spAutoFit/>
-          </a:bodyPr>
-          <a:lstStyle/>
-          <a:p>
-            <a:pPr>
-              <a:defRPr sz="1800" b="1" i="0">
-                <a:solidFill>
-                  <a:srgbClr val="1D7E7E"/>
-                </a:solidFill>
-                <a:latin typeface="Cambria"/>
-              </a:defRPr>
-            </a:pPr>
-            <a:r>
-              <a:t>MP-Init</a:t>
-            </a:r>
-          </a:p>
-        </p:txBody>
-      </p:sp>
-      <p:sp>
-        <p:nvSpPr>
-          <p:cNvPr id="9" name="TextBox 8"/>
-          <p:cNvSpPr txBox="1"/>
-          <p:nvPr/>
-        </p:nvSpPr>
-        <p:spPr>
-          <a:xfrm>
-            <a:off x="640080" y="4023360"/>
-            <a:ext cx="3291840" cy="2011680"/>
-          </a:xfrm>
-          <a:prstGeom prst="rect">
-            <a:avLst/>
-          </a:prstGeom>
-          <a:noFill/>
-        </p:spPr>
-        <p:txBody>
-          <a:bodyPr wrap="square" lIns="0" rIns="0" tIns="0" bIns="0">
-            <a:spAutoFit/>
-          </a:bodyPr>
-          <a:lstStyle/>
-          <a:p>
-            <a:pPr>
-              <a:defRPr sz="1100" b="0" i="0">
-                <a:solidFill>
-                  <a:srgbClr val="1A1A1A"/>
-                </a:solidFill>
-                <a:latin typeface="Calibri"/>
-              </a:defRPr>
-            </a:pPr>
-            <a:r>
-              <a:t>TCS originates in the membrane potential — fix the initial state.</a:t>
-            </a:r>
-            <a:br/>
-            <a:br/>
-            <a:r>
-              <a:t>Per-layer running mean of U[T].</a:t>
-            </a:r>
-            <a:br/>
-            <a:br/>
-            <a:r>
-              <a:t>Zero overhead, standard LIF inference.</a:t>
-            </a:r>
-          </a:p>
-        </p:txBody>
-      </p:sp>
-      <p:sp>
-        <p:nvSpPr>
-          <p:cNvPr id="10" name="Rectangle 9"/>
-          <p:cNvSpPr/>
-          <p:nvPr/>
-        </p:nvSpPr>
-        <p:spPr>
-          <a:xfrm>
-            <a:off x="4297680" y="3383280"/>
-            <a:ext cx="3657600" cy="2743200"/>
-          </a:xfrm>
-          <a:prstGeom prst="rect">
-            <a:avLst/>
-          </a:prstGeom>
-          <a:solidFill>
-            <a:srgbClr val="F8F7F2"/>
-          </a:solidFill>
-          <a:ln w="19050">
-            <a:solidFill>
-              <a:srgbClr val="E0B85F"/>
-            </a:solidFill>
-          </a:ln>
-        </p:spPr>
-        <p:style>
-          <a:lnRef idx="1">
-            <a:schemeClr val="accent1"/>
-          </a:lnRef>
-          <a:fillRef idx="3">
-            <a:schemeClr val="accent1"/>
-          </a:fillRef>
-          <a:effectRef idx="2">
-            <a:schemeClr val="accent1"/>
-          </a:effectRef>
-          <a:fontRef idx="minor">
-            <a:schemeClr val="lt1"/>
-          </a:fontRef>
-        </p:style>
-        <p:txBody>
-          <a:bodyPr rtlCol="0" anchor="ctr"/>
-          <a:lstStyle/>
-          <a:p>
-            <a:pPr algn="ctr"/>
-          </a:p>
-        </p:txBody>
-      </p:sp>
-      <p:sp>
-        <p:nvSpPr>
-          <p:cNvPr id="11" name="TextBox 10"/>
-          <p:cNvSpPr txBox="1"/>
-          <p:nvPr/>
-        </p:nvSpPr>
-        <p:spPr>
-          <a:xfrm>
-            <a:off x="4480560" y="3520440"/>
-            <a:ext cx="3291840" cy="457200"/>
-          </a:xfrm>
-          <a:prstGeom prst="rect">
-            <a:avLst/>
-          </a:prstGeom>
-          <a:noFill/>
-        </p:spPr>
-        <p:txBody>
-          <a:bodyPr wrap="square" lIns="0" rIns="0" tIns="0" bIns="0">
-            <a:spAutoFit/>
-          </a:bodyPr>
-          <a:lstStyle/>
-          <a:p>
-            <a:pPr>
-              <a:defRPr sz="1800" b="1" i="0">
-                <a:solidFill>
-                  <a:srgbClr val="E0B85F"/>
-                </a:solidFill>
-                <a:latin typeface="Cambria"/>
-              </a:defRPr>
-            </a:pPr>
-            <a:r>
-              <a:t>TrSG</a:t>
-            </a:r>
-          </a:p>
-        </p:txBody>
-      </p:sp>
-      <p:sp>
-        <p:nvSpPr>
-          <p:cNvPr id="12" name="TextBox 11"/>
-          <p:cNvSpPr txBox="1"/>
-          <p:nvPr/>
-        </p:nvSpPr>
-        <p:spPr>
-          <a:xfrm>
-            <a:off x="4480560" y="4023360"/>
-            <a:ext cx="3291840" cy="2011680"/>
-          </a:xfrm>
-          <a:prstGeom prst="rect">
-            <a:avLst/>
-          </a:prstGeom>
-          <a:noFill/>
-        </p:spPr>
-        <p:txBody>
-          <a:bodyPr wrap="square" lIns="0" rIns="0" tIns="0" bIns="0">
-            <a:spAutoFit/>
-          </a:bodyPr>
-          <a:lstStyle/>
-          <a:p>
-            <a:pPr>
-              <a:defRPr sz="1100" b="0" i="0">
-                <a:solidFill>
-                  <a:srgbClr val="1A1A1A"/>
-                </a:solidFill>
-                <a:latin typeface="Calibri"/>
-              </a:defRPr>
-            </a:pPr>
-            <a:r>
-              <a:t>Threshold-induced gradient pathology — fix it with one forward-path multiplication.</a:t>
-            </a:r>
-            <a:br/>
-            <a:br/>
-            <a:r>
-              <a:t>Window adapts, magnitude is invariant.</a:t>
-            </a:r>
-            <a:br/>
-            <a:br/>
-            <a:r>
-              <a:t>Standard LIF after training.</a:t>
-            </a:r>
-          </a:p>
-        </p:txBody>
-      </p:sp>
-      <p:sp>
-        <p:nvSpPr>
-          <p:cNvPr id="13" name="Rectangle 12"/>
-          <p:cNvSpPr/>
-          <p:nvPr/>
-        </p:nvSpPr>
-        <p:spPr>
-          <a:xfrm>
-            <a:off x="8138160" y="3383280"/>
-            <a:ext cx="3657600" cy="2743200"/>
-          </a:xfrm>
-          <a:prstGeom prst="rect">
-            <a:avLst/>
-          </a:prstGeom>
-          <a:solidFill>
-            <a:srgbClr val="F8F7F2"/>
-          </a:solidFill>
-          <a:ln w="19050">
-            <a:solidFill>
-              <a:srgbClr val="1D7E7E"/>
-            </a:solidFill>
-          </a:ln>
-        </p:spPr>
-        <p:style>
-          <a:lnRef idx="1">
-            <a:schemeClr val="accent1"/>
-          </a:lnRef>
-          <a:fillRef idx="3">
-            <a:schemeClr val="accent1"/>
-          </a:fillRef>
-          <a:effectRef idx="2">
-            <a:schemeClr val="accent1"/>
-          </a:effectRef>
-          <a:fontRef idx="minor">
-            <a:schemeClr val="lt1"/>
-          </a:fontRef>
-        </p:style>
-        <p:txBody>
-          <a:bodyPr rtlCol="0" anchor="ctr"/>
-          <a:lstStyle/>
-          <a:p>
-            <a:pPr algn="ctr"/>
-          </a:p>
-        </p:txBody>
-      </p:sp>
-      <p:sp>
-        <p:nvSpPr>
-          <p:cNvPr id="14" name="TextBox 13"/>
-          <p:cNvSpPr txBox="1"/>
-          <p:nvPr/>
-        </p:nvSpPr>
-        <p:spPr>
-          <a:xfrm>
-            <a:off x="8321040" y="3520440"/>
-            <a:ext cx="3291840" cy="457200"/>
-          </a:xfrm>
-          <a:prstGeom prst="rect">
-            <a:avLst/>
-          </a:prstGeom>
-          <a:noFill/>
-        </p:spPr>
-        <p:txBody>
-          <a:bodyPr wrap="square" lIns="0" rIns="0" tIns="0" bIns="0">
-            <a:spAutoFit/>
-          </a:bodyPr>
-          <a:lstStyle/>
-          <a:p>
-            <a:pPr>
-              <a:defRPr sz="1800" b="1" i="0">
-                <a:solidFill>
-                  <a:srgbClr val="1D7E7E"/>
-                </a:solidFill>
-                <a:latin typeface="Cambria"/>
-              </a:defRPr>
-            </a:pPr>
-            <a:r>
-              <a:t>Validated</a:t>
-            </a:r>
-          </a:p>
-        </p:txBody>
-      </p:sp>
-      <p:sp>
-        <p:nvSpPr>
-          <p:cNvPr id="15" name="TextBox 14"/>
-          <p:cNvSpPr txBox="1"/>
-          <p:nvPr/>
-        </p:nvSpPr>
-        <p:spPr>
-          <a:xfrm>
-            <a:off x="8321040" y="4023360"/>
-            <a:ext cx="3291840" cy="2011680"/>
-          </a:xfrm>
-          <a:prstGeom prst="rect">
-            <a:avLst/>
-          </a:prstGeom>
-          <a:noFill/>
-        </p:spPr>
-        <p:txBody>
-          <a:bodyPr wrap="square" lIns="0" rIns="0" tIns="0" bIns="0">
-            <a:spAutoFit/>
-          </a:bodyPr>
-          <a:lstStyle/>
-          <a:p>
-            <a:pPr>
-              <a:defRPr sz="1100" b="0" i="0">
-                <a:solidFill>
-                  <a:srgbClr val="1A1A1A"/>
-                </a:solidFill>
-                <a:latin typeface="Calibri"/>
-              </a:defRPr>
-            </a:pPr>
-            <a:r>
-              <a:t>SOTA on CIFAR-10/100, ImageNet, DVS-CIFAR10.</a:t>
-            </a:r>
-            <a:br/>
-            <a:br/>
-            <a:r>
-              <a:t>Generalizes to Transformer SNNs (QKFormer +1.10) and detection (COCO +0.014 mAP).</a:t>
-            </a:r>
-            <a:br/>
-            <a:br/>
-            <a:r>
-              <a:t>All without architectural changes.</a:t>
-            </a:r>
-          </a:p>
-        </p:txBody>
-      </p:sp>
-      <p:sp>
-        <p:nvSpPr>
-          <p:cNvPr id="16" name="TextBox 15"/>
+              <a:t>No architectural changes, no extra losses, no per-timestep parameters — just drop in.</a:t>
+            </a:r>
+          </a:p>
+        </p:txBody>
+      </p:sp>
+      <p:sp>
+        <p:nvSpPr>
+          <p:cNvPr id="20" name="TextBox 19"/>
           <p:cNvSpPr txBox="1"/>
           <p:nvPr/>
         </p:nvSpPr>
@@ -9723,7 +9867,7 @@
       </p:sp>
       <p:sp>
         <p:nvSpPr>
-          <p:cNvPr id="17" name="TextBox 16"/>
+          <p:cNvPr id="21" name="TextBox 20"/>
           <p:cNvSpPr txBox="1"/>
           <p:nvPr/>
         </p:nvSpPr>
@@ -9752,7 +9896,7 @@
               </a:defRPr>
             </a:pPr>
             <a:r>
-              <a:t>17 / 18</a:t>
+              <a:t>17 / 19</a:t>
             </a:r>
           </a:p>
         </p:txBody>
@@ -9777,6 +9921,688 @@
       <p:grpSpPr/>
       <p:sp>
         <p:nvSpPr>
+          <p:cNvPr id="2" name="TextBox 1"/>
+          <p:cNvSpPr txBox="1"/>
+          <p:nvPr/>
+        </p:nvSpPr>
+        <p:spPr>
+          <a:xfrm>
+            <a:off x="457200" y="365760"/>
+            <a:ext cx="10972800" cy="274320"/>
+          </a:xfrm>
+          <a:prstGeom prst="rect">
+            <a:avLst/>
+          </a:prstGeom>
+          <a:noFill/>
+        </p:spPr>
+        <p:txBody>
+          <a:bodyPr wrap="square" lIns="0" rIns="0" tIns="0" bIns="0">
+            <a:spAutoFit/>
+          </a:bodyPr>
+          <a:lstStyle/>
+          <a:p>
+            <a:pPr>
+              <a:defRPr sz="1100" b="1" i="0">
+                <a:solidFill>
+                  <a:srgbClr val="1D7E7E"/>
+                </a:solidFill>
+                <a:latin typeface="Calibri"/>
+              </a:defRPr>
+            </a:pPr>
+            <a:r>
+              <a:rPr spc="300"/>
+              <a:t>CONCLUSION</a:t>
+            </a:r>
+          </a:p>
+        </p:txBody>
+      </p:sp>
+      <p:sp>
+        <p:nvSpPr>
+          <p:cNvPr id="3" name="TextBox 2"/>
+          <p:cNvSpPr txBox="1"/>
+          <p:nvPr/>
+        </p:nvSpPr>
+        <p:spPr>
+          <a:xfrm>
+            <a:off x="457200" y="777240"/>
+            <a:ext cx="11247120" cy="777240"/>
+          </a:xfrm>
+          <a:prstGeom prst="rect">
+            <a:avLst/>
+          </a:prstGeom>
+          <a:noFill/>
+        </p:spPr>
+        <p:txBody>
+          <a:bodyPr wrap="square" lIns="0" rIns="0" tIns="0" bIns="0">
+            <a:spAutoFit/>
+          </a:bodyPr>
+          <a:lstStyle/>
+          <a:p>
+            <a:pPr>
+              <a:defRPr sz="3000" b="1" i="0">
+                <a:solidFill>
+                  <a:srgbClr val="0F2540"/>
+                </a:solidFill>
+                <a:latin typeface="Cambria"/>
+              </a:defRPr>
+            </a:pPr>
+            <a:r>
+              <a:t>What This Talk Was About</a:t>
+            </a:r>
+          </a:p>
+        </p:txBody>
+      </p:sp>
+      <p:sp>
+        <p:nvSpPr>
+          <p:cNvPr id="4" name="Rectangle 3"/>
+          <p:cNvSpPr/>
+          <p:nvPr/>
+        </p:nvSpPr>
+        <p:spPr>
+          <a:xfrm>
+            <a:off x="457200" y="2194560"/>
+            <a:ext cx="54864" cy="914400"/>
+          </a:xfrm>
+          <a:prstGeom prst="rect">
+            <a:avLst/>
+          </a:prstGeom>
+          <a:solidFill>
+            <a:srgbClr val="E0B85F"/>
+          </a:solidFill>
+          <a:ln>
+            <a:noFill/>
+          </a:ln>
+        </p:spPr>
+        <p:style>
+          <a:lnRef idx="1">
+            <a:schemeClr val="accent1"/>
+          </a:lnRef>
+          <a:fillRef idx="3">
+            <a:schemeClr val="accent1"/>
+          </a:fillRef>
+          <a:effectRef idx="2">
+            <a:schemeClr val="accent1"/>
+          </a:effectRef>
+          <a:fontRef idx="minor">
+            <a:schemeClr val="lt1"/>
+          </a:fontRef>
+        </p:style>
+        <p:txBody>
+          <a:bodyPr rtlCol="0" anchor="ctr"/>
+          <a:lstStyle/>
+          <a:p>
+            <a:pPr algn="ctr"/>
+          </a:p>
+        </p:txBody>
+      </p:sp>
+      <p:sp>
+        <p:nvSpPr>
+          <p:cNvPr id="5" name="Rectangle 4"/>
+          <p:cNvSpPr/>
+          <p:nvPr/>
+        </p:nvSpPr>
+        <p:spPr>
+          <a:xfrm>
+            <a:off x="512064" y="2194560"/>
+            <a:ext cx="11192256" cy="914400"/>
+          </a:xfrm>
+          <a:prstGeom prst="rect">
+            <a:avLst/>
+          </a:prstGeom>
+          <a:solidFill>
+            <a:srgbClr val="0F2540"/>
+          </a:solidFill>
+          <a:ln>
+            <a:noFill/>
+          </a:ln>
+        </p:spPr>
+        <p:style>
+          <a:lnRef idx="1">
+            <a:schemeClr val="accent1"/>
+          </a:lnRef>
+          <a:fillRef idx="3">
+            <a:schemeClr val="accent1"/>
+          </a:fillRef>
+          <a:effectRef idx="2">
+            <a:schemeClr val="accent1"/>
+          </a:effectRef>
+          <a:fontRef idx="minor">
+            <a:schemeClr val="lt1"/>
+          </a:fontRef>
+        </p:style>
+        <p:txBody>
+          <a:bodyPr rtlCol="0" anchor="ctr"/>
+          <a:lstStyle/>
+          <a:p>
+            <a:pPr algn="ctr"/>
+          </a:p>
+        </p:txBody>
+      </p:sp>
+      <p:sp>
+        <p:nvSpPr>
+          <p:cNvPr id="6" name="TextBox 5"/>
+          <p:cNvSpPr txBox="1"/>
+          <p:nvPr/>
+        </p:nvSpPr>
+        <p:spPr>
+          <a:xfrm>
+            <a:off x="777240" y="2331720"/>
+            <a:ext cx="10789920" cy="640080"/>
+          </a:xfrm>
+          <a:prstGeom prst="rect">
+            <a:avLst/>
+          </a:prstGeom>
+          <a:noFill/>
+        </p:spPr>
+        <p:txBody>
+          <a:bodyPr wrap="square">
+            <a:spAutoFit/>
+          </a:bodyPr>
+          <a:lstStyle/>
+          <a:p>
+            <a:pPr>
+              <a:defRPr sz="1500" b="1">
+                <a:solidFill>
+                  <a:srgbClr val="E0B85F"/>
+                </a:solidFill>
+                <a:latin typeface="Calibri"/>
+              </a:defRPr>
+            </a:pPr>
+            <a:r>
+              <a:t>Two long-standing instabilities of direct SNN training, traced and fixed.</a:t>
+            </a:r>
+          </a:p>
+          <a:p>
+            <a:pPr>
+              <a:spcBef>
+                <a:spcPts val="600"/>
+              </a:spcBef>
+              <a:defRPr sz="1100">
+                <a:solidFill>
+                  <a:srgbClr val="FFFFFF"/>
+                </a:solidFill>
+                <a:latin typeface="Calibri"/>
+              </a:defRPr>
+            </a:pPr>
+            <a:r>
+              <a:t>Both fixes are minimal, principled, and preserve standard inference.</a:t>
+            </a:r>
+          </a:p>
+        </p:txBody>
+      </p:sp>
+      <p:sp>
+        <p:nvSpPr>
+          <p:cNvPr id="7" name="Rectangle 6"/>
+          <p:cNvSpPr/>
+          <p:nvPr/>
+        </p:nvSpPr>
+        <p:spPr>
+          <a:xfrm>
+            <a:off x="457200" y="3383280"/>
+            <a:ext cx="3657600" cy="2743200"/>
+          </a:xfrm>
+          <a:prstGeom prst="rect">
+            <a:avLst/>
+          </a:prstGeom>
+          <a:solidFill>
+            <a:srgbClr val="F8F7F2"/>
+          </a:solidFill>
+          <a:ln w="19050">
+            <a:solidFill>
+              <a:srgbClr val="1D7E7E"/>
+            </a:solidFill>
+          </a:ln>
+        </p:spPr>
+        <p:style>
+          <a:lnRef idx="1">
+            <a:schemeClr val="accent1"/>
+          </a:lnRef>
+          <a:fillRef idx="3">
+            <a:schemeClr val="accent1"/>
+          </a:fillRef>
+          <a:effectRef idx="2">
+            <a:schemeClr val="accent1"/>
+          </a:effectRef>
+          <a:fontRef idx="minor">
+            <a:schemeClr val="lt1"/>
+          </a:fontRef>
+        </p:style>
+        <p:txBody>
+          <a:bodyPr rtlCol="0" anchor="ctr"/>
+          <a:lstStyle/>
+          <a:p>
+            <a:pPr algn="ctr"/>
+          </a:p>
+        </p:txBody>
+      </p:sp>
+      <p:sp>
+        <p:nvSpPr>
+          <p:cNvPr id="8" name="TextBox 7"/>
+          <p:cNvSpPr txBox="1"/>
+          <p:nvPr/>
+        </p:nvSpPr>
+        <p:spPr>
+          <a:xfrm>
+            <a:off x="640080" y="3520440"/>
+            <a:ext cx="3291840" cy="457200"/>
+          </a:xfrm>
+          <a:prstGeom prst="rect">
+            <a:avLst/>
+          </a:prstGeom>
+          <a:noFill/>
+        </p:spPr>
+        <p:txBody>
+          <a:bodyPr wrap="square" lIns="0" rIns="0" tIns="0" bIns="0">
+            <a:spAutoFit/>
+          </a:bodyPr>
+          <a:lstStyle/>
+          <a:p>
+            <a:pPr>
+              <a:defRPr sz="1800" b="1" i="0">
+                <a:solidFill>
+                  <a:srgbClr val="1D7E7E"/>
+                </a:solidFill>
+                <a:latin typeface="Cambria"/>
+              </a:defRPr>
+            </a:pPr>
+            <a:r>
+              <a:t>MP-Init</a:t>
+            </a:r>
+          </a:p>
+        </p:txBody>
+      </p:sp>
+      <p:sp>
+        <p:nvSpPr>
+          <p:cNvPr id="9" name="TextBox 8"/>
+          <p:cNvSpPr txBox="1"/>
+          <p:nvPr/>
+        </p:nvSpPr>
+        <p:spPr>
+          <a:xfrm>
+            <a:off x="640080" y="4023360"/>
+            <a:ext cx="3291840" cy="2011680"/>
+          </a:xfrm>
+          <a:prstGeom prst="rect">
+            <a:avLst/>
+          </a:prstGeom>
+          <a:noFill/>
+        </p:spPr>
+        <p:txBody>
+          <a:bodyPr wrap="square" lIns="0" rIns="0" tIns="0" bIns="0">
+            <a:spAutoFit/>
+          </a:bodyPr>
+          <a:lstStyle/>
+          <a:p>
+            <a:pPr>
+              <a:defRPr sz="1100" b="0" i="0">
+                <a:solidFill>
+                  <a:srgbClr val="1A1A1A"/>
+                </a:solidFill>
+                <a:latin typeface="Calibri"/>
+              </a:defRPr>
+            </a:pPr>
+            <a:r>
+              <a:t>TCS originates in the membrane potential — fix the initial state.</a:t>
+            </a:r>
+            <a:br/>
+            <a:br/>
+            <a:r>
+              <a:t>Per-layer running mean of U[T].</a:t>
+            </a:r>
+            <a:br/>
+            <a:br/>
+            <a:r>
+              <a:t>Zero overhead, standard LIF inference.</a:t>
+            </a:r>
+          </a:p>
+        </p:txBody>
+      </p:sp>
+      <p:sp>
+        <p:nvSpPr>
+          <p:cNvPr id="10" name="Rectangle 9"/>
+          <p:cNvSpPr/>
+          <p:nvPr/>
+        </p:nvSpPr>
+        <p:spPr>
+          <a:xfrm>
+            <a:off x="4297680" y="3383280"/>
+            <a:ext cx="3657600" cy="2743200"/>
+          </a:xfrm>
+          <a:prstGeom prst="rect">
+            <a:avLst/>
+          </a:prstGeom>
+          <a:solidFill>
+            <a:srgbClr val="F8F7F2"/>
+          </a:solidFill>
+          <a:ln w="19050">
+            <a:solidFill>
+              <a:srgbClr val="E0B85F"/>
+            </a:solidFill>
+          </a:ln>
+        </p:spPr>
+        <p:style>
+          <a:lnRef idx="1">
+            <a:schemeClr val="accent1"/>
+          </a:lnRef>
+          <a:fillRef idx="3">
+            <a:schemeClr val="accent1"/>
+          </a:fillRef>
+          <a:effectRef idx="2">
+            <a:schemeClr val="accent1"/>
+          </a:effectRef>
+          <a:fontRef idx="minor">
+            <a:schemeClr val="lt1"/>
+          </a:fontRef>
+        </p:style>
+        <p:txBody>
+          <a:bodyPr rtlCol="0" anchor="ctr"/>
+          <a:lstStyle/>
+          <a:p>
+            <a:pPr algn="ctr"/>
+          </a:p>
+        </p:txBody>
+      </p:sp>
+      <p:sp>
+        <p:nvSpPr>
+          <p:cNvPr id="11" name="TextBox 10"/>
+          <p:cNvSpPr txBox="1"/>
+          <p:nvPr/>
+        </p:nvSpPr>
+        <p:spPr>
+          <a:xfrm>
+            <a:off x="4480560" y="3520440"/>
+            <a:ext cx="3291840" cy="457200"/>
+          </a:xfrm>
+          <a:prstGeom prst="rect">
+            <a:avLst/>
+          </a:prstGeom>
+          <a:noFill/>
+        </p:spPr>
+        <p:txBody>
+          <a:bodyPr wrap="square" lIns="0" rIns="0" tIns="0" bIns="0">
+            <a:spAutoFit/>
+          </a:bodyPr>
+          <a:lstStyle/>
+          <a:p>
+            <a:pPr>
+              <a:defRPr sz="1800" b="1" i="0">
+                <a:solidFill>
+                  <a:srgbClr val="E0B85F"/>
+                </a:solidFill>
+                <a:latin typeface="Cambria"/>
+              </a:defRPr>
+            </a:pPr>
+            <a:r>
+              <a:t>TrSG</a:t>
+            </a:r>
+          </a:p>
+        </p:txBody>
+      </p:sp>
+      <p:sp>
+        <p:nvSpPr>
+          <p:cNvPr id="12" name="TextBox 11"/>
+          <p:cNvSpPr txBox="1"/>
+          <p:nvPr/>
+        </p:nvSpPr>
+        <p:spPr>
+          <a:xfrm>
+            <a:off x="4480560" y="4023360"/>
+            <a:ext cx="3291840" cy="2011680"/>
+          </a:xfrm>
+          <a:prstGeom prst="rect">
+            <a:avLst/>
+          </a:prstGeom>
+          <a:noFill/>
+        </p:spPr>
+        <p:txBody>
+          <a:bodyPr wrap="square" lIns="0" rIns="0" tIns="0" bIns="0">
+            <a:spAutoFit/>
+          </a:bodyPr>
+          <a:lstStyle/>
+          <a:p>
+            <a:pPr>
+              <a:defRPr sz="1100" b="0" i="0">
+                <a:solidFill>
+                  <a:srgbClr val="1A1A1A"/>
+                </a:solidFill>
+                <a:latin typeface="Calibri"/>
+              </a:defRPr>
+            </a:pPr>
+            <a:r>
+              <a:t>Threshold-induced gradient pathology — fix it with one forward-path multiplication.</a:t>
+            </a:r>
+            <a:br/>
+            <a:br/>
+            <a:r>
+              <a:t>Window adapts, magnitude is invariant.</a:t>
+            </a:r>
+            <a:br/>
+            <a:br/>
+            <a:r>
+              <a:t>Standard LIF after training.</a:t>
+            </a:r>
+          </a:p>
+        </p:txBody>
+      </p:sp>
+      <p:sp>
+        <p:nvSpPr>
+          <p:cNvPr id="13" name="Rectangle 12"/>
+          <p:cNvSpPr/>
+          <p:nvPr/>
+        </p:nvSpPr>
+        <p:spPr>
+          <a:xfrm>
+            <a:off x="8138160" y="3383280"/>
+            <a:ext cx="3657600" cy="2743200"/>
+          </a:xfrm>
+          <a:prstGeom prst="rect">
+            <a:avLst/>
+          </a:prstGeom>
+          <a:solidFill>
+            <a:srgbClr val="F8F7F2"/>
+          </a:solidFill>
+          <a:ln w="19050">
+            <a:solidFill>
+              <a:srgbClr val="1D7E7E"/>
+            </a:solidFill>
+          </a:ln>
+        </p:spPr>
+        <p:style>
+          <a:lnRef idx="1">
+            <a:schemeClr val="accent1"/>
+          </a:lnRef>
+          <a:fillRef idx="3">
+            <a:schemeClr val="accent1"/>
+          </a:fillRef>
+          <a:effectRef idx="2">
+            <a:schemeClr val="accent1"/>
+          </a:effectRef>
+          <a:fontRef idx="minor">
+            <a:schemeClr val="lt1"/>
+          </a:fontRef>
+        </p:style>
+        <p:txBody>
+          <a:bodyPr rtlCol="0" anchor="ctr"/>
+          <a:lstStyle/>
+          <a:p>
+            <a:pPr algn="ctr"/>
+          </a:p>
+        </p:txBody>
+      </p:sp>
+      <p:sp>
+        <p:nvSpPr>
+          <p:cNvPr id="14" name="TextBox 13"/>
+          <p:cNvSpPr txBox="1"/>
+          <p:nvPr/>
+        </p:nvSpPr>
+        <p:spPr>
+          <a:xfrm>
+            <a:off x="8321040" y="3520440"/>
+            <a:ext cx="3291840" cy="457200"/>
+          </a:xfrm>
+          <a:prstGeom prst="rect">
+            <a:avLst/>
+          </a:prstGeom>
+          <a:noFill/>
+        </p:spPr>
+        <p:txBody>
+          <a:bodyPr wrap="square" lIns="0" rIns="0" tIns="0" bIns="0">
+            <a:spAutoFit/>
+          </a:bodyPr>
+          <a:lstStyle/>
+          <a:p>
+            <a:pPr>
+              <a:defRPr sz="1800" b="1" i="0">
+                <a:solidFill>
+                  <a:srgbClr val="1D7E7E"/>
+                </a:solidFill>
+                <a:latin typeface="Cambria"/>
+              </a:defRPr>
+            </a:pPr>
+            <a:r>
+              <a:t>Validated</a:t>
+            </a:r>
+          </a:p>
+        </p:txBody>
+      </p:sp>
+      <p:sp>
+        <p:nvSpPr>
+          <p:cNvPr id="15" name="TextBox 14"/>
+          <p:cNvSpPr txBox="1"/>
+          <p:nvPr/>
+        </p:nvSpPr>
+        <p:spPr>
+          <a:xfrm>
+            <a:off x="8321040" y="4023360"/>
+            <a:ext cx="3291840" cy="2011680"/>
+          </a:xfrm>
+          <a:prstGeom prst="rect">
+            <a:avLst/>
+          </a:prstGeom>
+          <a:noFill/>
+        </p:spPr>
+        <p:txBody>
+          <a:bodyPr wrap="square" lIns="0" rIns="0" tIns="0" bIns="0">
+            <a:spAutoFit/>
+          </a:bodyPr>
+          <a:lstStyle/>
+          <a:p>
+            <a:pPr>
+              <a:defRPr sz="1100" b="0" i="0">
+                <a:solidFill>
+                  <a:srgbClr val="1A1A1A"/>
+                </a:solidFill>
+                <a:latin typeface="Calibri"/>
+              </a:defRPr>
+            </a:pPr>
+            <a:r>
+              <a:t>SOTA on CIFAR-10/100, ImageNet, DVS-CIFAR10.</a:t>
+            </a:r>
+            <a:br/>
+            <a:br/>
+            <a:r>
+              <a:t>Generalizes to Transformer SNNs (QKFormer +1.10) and detection (COCO +0.014 mAP).</a:t>
+            </a:r>
+            <a:br/>
+            <a:br/>
+            <a:r>
+              <a:t>All without architectural changes.</a:t>
+            </a:r>
+          </a:p>
+        </p:txBody>
+      </p:sp>
+      <p:sp>
+        <p:nvSpPr>
+          <p:cNvPr id="16" name="TextBox 15"/>
+          <p:cNvSpPr txBox="1"/>
+          <p:nvPr/>
+        </p:nvSpPr>
+        <p:spPr>
+          <a:xfrm>
+            <a:off x="457200" y="6492240"/>
+            <a:ext cx="5486400" cy="274320"/>
+          </a:xfrm>
+          <a:prstGeom prst="rect">
+            <a:avLst/>
+          </a:prstGeom>
+          <a:noFill/>
+        </p:spPr>
+        <p:txBody>
+          <a:bodyPr wrap="square" lIns="0" rIns="0" tIns="0" bIns="0">
+            <a:spAutoFit/>
+          </a:bodyPr>
+          <a:lstStyle/>
+          <a:p>
+            <a:pPr>
+              <a:defRPr sz="1000" b="0" i="0">
+                <a:solidFill>
+                  <a:srgbClr val="7A7A7A"/>
+                </a:solidFill>
+                <a:latin typeface="Calibri"/>
+              </a:defRPr>
+            </a:pPr>
+            <a:r>
+              <a:t>Defense — Hyunho Kook</a:t>
+            </a:r>
+          </a:p>
+        </p:txBody>
+      </p:sp>
+      <p:sp>
+        <p:nvSpPr>
+          <p:cNvPr id="17" name="TextBox 16"/>
+          <p:cNvSpPr txBox="1"/>
+          <p:nvPr/>
+        </p:nvSpPr>
+        <p:spPr>
+          <a:xfrm>
+            <a:off x="6400800" y="6492240"/>
+            <a:ext cx="5303520" cy="274320"/>
+          </a:xfrm>
+          <a:prstGeom prst="rect">
+            <a:avLst/>
+          </a:prstGeom>
+          <a:noFill/>
+        </p:spPr>
+        <p:txBody>
+          <a:bodyPr wrap="square" lIns="0" rIns="0" tIns="0" bIns="0">
+            <a:spAutoFit/>
+          </a:bodyPr>
+          <a:lstStyle/>
+          <a:p>
+            <a:pPr algn="r">
+              <a:defRPr sz="1000" b="0" i="0">
+                <a:solidFill>
+                  <a:srgbClr val="7A7A7A"/>
+                </a:solidFill>
+                <a:latin typeface="Calibri"/>
+              </a:defRPr>
+            </a:pPr>
+            <a:r>
+              <a:t>18 / 19</a:t>
+            </a:r>
+          </a:p>
+        </p:txBody>
+      </p:sp>
+    </p:spTree>
+  </p:cSld>
+  <p:clrMapOvr>
+    <a:masterClrMapping/>
+  </p:clrMapOvr>
+</p:sld>
+</file>
+
+<file path=ppt/slides/slide19.xml><?xml version="1.0" encoding="utf-8"?>
+<p:sld xmlns:a="http://schemas.openxmlformats.org/drawingml/2006/main" xmlns:p="http://schemas.openxmlformats.org/presentationml/2006/main" xmlns:r="http://schemas.openxmlformats.org/officeDocument/2006/relationships">
+  <p:cSld>
+    <p:spTree>
+      <p:nvGrpSpPr>
+        <p:cNvPr id="1" name=""/>
+        <p:cNvGrpSpPr/>
+        <p:nvPr/>
+      </p:nvGrpSpPr>
+      <p:grpSpPr/>
+      <p:sp>
+        <p:nvSpPr>
           <p:cNvPr id="2" name="Rectangle 1"/>
           <p:cNvSpPr/>
           <p:nvPr/>
@@ -10556,7 +11382,7 @@
               </a:defRPr>
             </a:pPr>
             <a:r>
-              <a:t>18 / 18</a:t>
+              <a:t>19 / 19</a:t>
             </a:r>
           </a:p>
         </p:txBody>
@@ -11317,7 +12143,7 @@
               </a:defRPr>
             </a:pPr>
             <a:r>
-              <a:t>2 / 18</a:t>
+              <a:t>2 / 19</a:t>
             </a:r>
           </a:p>
         </p:txBody>
@@ -12193,7 +13019,7 @@
               </a:defRPr>
             </a:pPr>
             <a:r>
-              <a:t>3 / 18</a:t>
+              <a:t>3 / 19</a:t>
             </a:r>
           </a:p>
         </p:txBody>
@@ -12706,7 +13532,7 @@
               </a:defRPr>
             </a:pPr>
             <a:r>
-              <a:t>4 / 18</a:t>
+              <a:t>4 / 19</a:t>
             </a:r>
           </a:p>
         </p:txBody>
@@ -13345,7 +14171,7 @@
               </a:defRPr>
             </a:pPr>
             <a:r>
-              <a:t>5 / 18</a:t>
+              <a:t>5 / 19</a:t>
             </a:r>
           </a:p>
         </p:txBody>
@@ -14029,7 +14855,7 @@
               </a:defRPr>
             </a:pPr>
             <a:r>
-              <a:t>6 / 18</a:t>
+              <a:t>6 / 19</a:t>
             </a:r>
           </a:p>
         </p:txBody>
@@ -14797,7 +15623,7 @@
               </a:defRPr>
             </a:pPr>
             <a:r>
-              <a:t>7 / 18</a:t>
+              <a:t>7 / 19</a:t>
             </a:r>
           </a:p>
         </p:txBody>
@@ -15513,7 +16339,7 @@
               </a:defRPr>
             </a:pPr>
             <a:r>
-              <a:t>8 / 18</a:t>
+              <a:t>8 / 19</a:t>
             </a:r>
           </a:p>
         </p:txBody>
@@ -15568,7 +16394,7 @@
             </a:pPr>
             <a:r>
               <a:rPr spc="300"/>
-              <a:t>PART II · TRSG</a:t>
+              <a:t>PART I · MP-INIT</a:t>
             </a:r>
           </a:p>
         </p:txBody>
@@ -15604,7 +16430,7 @@
               </a:defRPr>
             </a:pPr>
             <a:r>
-              <a:t>Two Surrogate-Gradient Families</a:t>
+              <a:t>Why MP-Init Works — A Closer Look</a:t>
             </a:r>
           </a:p>
         </p:txBody>
@@ -15640,121 +16466,35 @@
               </a:defRPr>
             </a:pPr>
             <a:r>
-              <a:t>AS-SG and RS-SG — look similar, behave very differently when V_thr is trainable</a:t>
-            </a:r>
-          </a:p>
-        </p:txBody>
-      </p:sp>
-      <p:sp>
-        <p:nvSpPr>
-          <p:cNvPr id="5" name="Rectangle 4"/>
-          <p:cNvSpPr/>
+              <a:t>Aligning distributions aligns gradients — and improves the firing-rate frontier</a:t>
+            </a:r>
+          </a:p>
+        </p:txBody>
+      </p:sp>
+      <p:sp>
+        <p:nvSpPr>
+          <p:cNvPr id="5" name="TextBox 4"/>
+          <p:cNvSpPr txBox="1"/>
           <p:nvPr/>
         </p:nvSpPr>
         <p:spPr>
           <a:xfrm>
             <a:off x="457200" y="2194560"/>
-            <a:ext cx="54864" cy="640080"/>
-          </a:xfrm>
-          <a:prstGeom prst="rect">
-            <a:avLst/>
-          </a:prstGeom>
-          <a:solidFill>
-            <a:srgbClr val="E0B85F"/>
-          </a:solidFill>
-          <a:ln>
-            <a:noFill/>
-          </a:ln>
-        </p:spPr>
-        <p:style>
-          <a:lnRef idx="1">
-            <a:schemeClr val="accent1"/>
-          </a:lnRef>
-          <a:fillRef idx="3">
-            <a:schemeClr val="accent1"/>
-          </a:fillRef>
-          <a:effectRef idx="2">
-            <a:schemeClr val="accent1"/>
-          </a:effectRef>
-          <a:fontRef idx="minor">
-            <a:schemeClr val="lt1"/>
-          </a:fontRef>
-        </p:style>
-        <p:txBody>
-          <a:bodyPr rtlCol="0" anchor="ctr"/>
-          <a:lstStyle/>
-          <a:p>
-            <a:pPr algn="ctr"/>
-          </a:p>
-        </p:txBody>
-      </p:sp>
-      <p:sp>
-        <p:nvSpPr>
-          <p:cNvPr id="6" name="Rectangle 5"/>
-          <p:cNvSpPr/>
-          <p:nvPr/>
-        </p:nvSpPr>
-        <p:spPr>
-          <a:xfrm>
-            <a:off x="512064" y="2194560"/>
-            <a:ext cx="11192256" cy="640080"/>
-          </a:xfrm>
-          <a:prstGeom prst="rect">
-            <a:avLst/>
-          </a:prstGeom>
-          <a:solidFill>
-            <a:srgbClr val="F8F7F2"/>
-          </a:solidFill>
-          <a:ln>
-            <a:noFill/>
-          </a:ln>
-        </p:spPr>
-        <p:style>
-          <a:lnRef idx="1">
-            <a:schemeClr val="accent1"/>
-          </a:lnRef>
-          <a:fillRef idx="3">
-            <a:schemeClr val="accent1"/>
-          </a:fillRef>
-          <a:effectRef idx="2">
-            <a:schemeClr val="accent1"/>
-          </a:effectRef>
-          <a:fontRef idx="minor">
-            <a:schemeClr val="lt1"/>
-          </a:fontRef>
-        </p:style>
-        <p:txBody>
-          <a:bodyPr rtlCol="0" anchor="ctr"/>
-          <a:lstStyle/>
-          <a:p>
-            <a:pPr algn="ctr"/>
-          </a:p>
-        </p:txBody>
-      </p:sp>
-      <p:sp>
-        <p:nvSpPr>
-          <p:cNvPr id="7" name="TextBox 6"/>
-          <p:cNvSpPr txBox="1"/>
-          <p:nvPr/>
-        </p:nvSpPr>
-        <p:spPr>
-          <a:xfrm>
-            <a:off x="777240" y="2331720"/>
-            <a:ext cx="10789920" cy="365759"/>
-          </a:xfrm>
-          <a:prstGeom prst="rect">
-            <a:avLst/>
-          </a:prstGeom>
-          <a:noFill/>
-        </p:spPr>
-        <p:txBody>
-          <a:bodyPr wrap="square">
-            <a:spAutoFit/>
-          </a:bodyPr>
-          <a:lstStyle/>
-          <a:p>
-            <a:pPr>
-              <a:defRPr sz="1200" b="1">
+            <a:ext cx="5486400" cy="365760"/>
+          </a:xfrm>
+          <a:prstGeom prst="rect">
+            <a:avLst/>
+          </a:prstGeom>
+          <a:noFill/>
+        </p:spPr>
+        <p:txBody>
+          <a:bodyPr wrap="square" lIns="0" rIns="0" tIns="0" bIns="0">
+            <a:spAutoFit/>
+          </a:bodyPr>
+          <a:lstStyle/>
+          <a:p>
+            <a:pPr>
+              <a:defRPr sz="1300" b="1" i="0">
                 <a:solidFill>
                   <a:srgbClr val="0F2540"/>
                 </a:solidFill>
@@ -15762,372 +16502,14 @@
               </a:defRPr>
             </a:pPr>
             <a:r>
-              <a:t>Recap — Surrogate Gradient (SG)</a:t>
-            </a:r>
-          </a:p>
-          <a:p>
-            <a:pPr>
-              <a:spcBef>
-                <a:spcPts val="600"/>
-              </a:spcBef>
-              <a:defRPr sz="1100">
-                <a:solidFill>
-                  <a:srgbClr val="1A1A1A"/>
-                </a:solidFill>
-                <a:latin typeface="Calibri"/>
-              </a:defRPr>
-            </a:pPr>
-            <a:r>
-              <a:t>Spike S = H(x) is non-differentiable.  In backward pass, replace H' with a smooth f'(x).  The choice of x is what differs below.</a:t>
-            </a:r>
-          </a:p>
-        </p:txBody>
-      </p:sp>
-      <p:sp>
-        <p:nvSpPr>
-          <p:cNvPr id="8" name="Rectangle 7"/>
-          <p:cNvSpPr/>
-          <p:nvPr/>
-        </p:nvSpPr>
-        <p:spPr>
-          <a:xfrm>
-            <a:off x="457200" y="3017520"/>
-            <a:ext cx="5486400" cy="1188720"/>
-          </a:xfrm>
-          <a:prstGeom prst="rect">
-            <a:avLst/>
-          </a:prstGeom>
-          <a:solidFill>
-            <a:srgbClr val="F8F7F2"/>
-          </a:solidFill>
-          <a:ln w="19050">
-            <a:solidFill>
-              <a:srgbClr val="0F2540"/>
-            </a:solidFill>
-          </a:ln>
-        </p:spPr>
-        <p:style>
-          <a:lnRef idx="1">
-            <a:schemeClr val="accent1"/>
-          </a:lnRef>
-          <a:fillRef idx="3">
-            <a:schemeClr val="accent1"/>
-          </a:fillRef>
-          <a:effectRef idx="2">
-            <a:schemeClr val="accent1"/>
-          </a:effectRef>
-          <a:fontRef idx="minor">
-            <a:schemeClr val="lt1"/>
-          </a:fontRef>
-        </p:style>
-        <p:txBody>
-          <a:bodyPr rtlCol="0" anchor="ctr"/>
-          <a:lstStyle/>
-          <a:p>
-            <a:pPr algn="ctr"/>
-          </a:p>
-        </p:txBody>
-      </p:sp>
-      <p:sp>
-        <p:nvSpPr>
-          <p:cNvPr id="9" name="TextBox 8"/>
-          <p:cNvSpPr txBox="1"/>
-          <p:nvPr/>
-        </p:nvSpPr>
-        <p:spPr>
-          <a:xfrm>
-            <a:off x="640080" y="3108960"/>
-            <a:ext cx="5120640" cy="320040"/>
-          </a:xfrm>
-          <a:prstGeom prst="rect">
-            <a:avLst/>
-          </a:prstGeom>
-          <a:noFill/>
-        </p:spPr>
-        <p:txBody>
-          <a:bodyPr wrap="square" lIns="0" rIns="0" tIns="0" bIns="0">
-            <a:spAutoFit/>
-          </a:bodyPr>
-          <a:lstStyle/>
-          <a:p>
-            <a:pPr>
-              <a:defRPr sz="1300" b="1" i="0">
-                <a:solidFill>
-                  <a:srgbClr val="0F2540"/>
-                </a:solidFill>
-                <a:latin typeface="Calibri"/>
-              </a:defRPr>
-            </a:pPr>
-            <a:r>
-              <a:t>AS-SG  ·  Absolute-Scale</a:t>
-            </a:r>
-          </a:p>
-        </p:txBody>
-      </p:sp>
-      <p:sp>
-        <p:nvSpPr>
-          <p:cNvPr id="10" name="TextBox 9"/>
-          <p:cNvSpPr txBox="1"/>
-          <p:nvPr/>
-        </p:nvSpPr>
-        <p:spPr>
-          <a:xfrm>
-            <a:off x="640080" y="3429000"/>
-            <a:ext cx="5120640" cy="411480"/>
-          </a:xfrm>
-          <a:prstGeom prst="rect">
-            <a:avLst/>
-          </a:prstGeom>
-          <a:noFill/>
-        </p:spPr>
-        <p:txBody>
-          <a:bodyPr wrap="square" lIns="0" rIns="0" tIns="0" bIns="0">
-            <a:spAutoFit/>
-          </a:bodyPr>
-          <a:lstStyle/>
-          <a:p>
-            <a:pPr>
-              <a:defRPr sz="1800" b="0" i="0">
-                <a:solidFill>
-                  <a:srgbClr val="0F2540"/>
-                </a:solidFill>
-                <a:latin typeface="Cambria Math"/>
-              </a:defRPr>
-            </a:pPr>
-            <a:r>
-              <a:t>x = M[t] − V_thr</a:t>
-            </a:r>
-          </a:p>
-        </p:txBody>
-      </p:sp>
-      <p:sp>
-        <p:nvSpPr>
-          <p:cNvPr id="11" name="TextBox 10"/>
-          <p:cNvSpPr txBox="1"/>
-          <p:nvPr/>
-        </p:nvSpPr>
-        <p:spPr>
-          <a:xfrm>
-            <a:off x="640080" y="3886200"/>
-            <a:ext cx="5120640" cy="274320"/>
-          </a:xfrm>
-          <a:prstGeom prst="rect">
-            <a:avLst/>
-          </a:prstGeom>
-          <a:noFill/>
-        </p:spPr>
-        <p:txBody>
-          <a:bodyPr wrap="square" lIns="0" rIns="0" tIns="0" bIns="0">
-            <a:spAutoFit/>
-          </a:bodyPr>
-          <a:lstStyle/>
-          <a:p>
-            <a:pPr>
-              <a:defRPr sz="1000" b="0" i="1">
-                <a:solidFill>
-                  <a:srgbClr val="7A7A7A"/>
-                </a:solidFill>
-                <a:latin typeface="Calibri"/>
-              </a:defRPr>
-            </a:pPr>
-            <a:r>
-              <a:t>Used by tdBN, TET, PLIF, LTMD, …</a:t>
-            </a:r>
-          </a:p>
-        </p:txBody>
-      </p:sp>
-      <p:sp>
-        <p:nvSpPr>
-          <p:cNvPr id="12" name="Rectangle 11"/>
-          <p:cNvSpPr/>
-          <p:nvPr/>
-        </p:nvSpPr>
-        <p:spPr>
-          <a:xfrm>
-            <a:off x="6263640" y="3017520"/>
-            <a:ext cx="5486400" cy="1188720"/>
-          </a:xfrm>
-          <a:prstGeom prst="rect">
-            <a:avLst/>
-          </a:prstGeom>
-          <a:solidFill>
-            <a:srgbClr val="F8F7F2"/>
-          </a:solidFill>
-          <a:ln w="19050">
-            <a:solidFill>
-              <a:srgbClr val="0F2540"/>
-            </a:solidFill>
-          </a:ln>
-        </p:spPr>
-        <p:style>
-          <a:lnRef idx="1">
-            <a:schemeClr val="accent1"/>
-          </a:lnRef>
-          <a:fillRef idx="3">
-            <a:schemeClr val="accent1"/>
-          </a:fillRef>
-          <a:effectRef idx="2">
-            <a:schemeClr val="accent1"/>
-          </a:effectRef>
-          <a:fontRef idx="minor">
-            <a:schemeClr val="lt1"/>
-          </a:fontRef>
-        </p:style>
-        <p:txBody>
-          <a:bodyPr rtlCol="0" anchor="ctr"/>
-          <a:lstStyle/>
-          <a:p>
-            <a:pPr algn="ctr"/>
-          </a:p>
-        </p:txBody>
-      </p:sp>
-      <p:sp>
-        <p:nvSpPr>
-          <p:cNvPr id="13" name="TextBox 12"/>
-          <p:cNvSpPr txBox="1"/>
-          <p:nvPr/>
-        </p:nvSpPr>
-        <p:spPr>
-          <a:xfrm>
-            <a:off x="6446520" y="3108960"/>
-            <a:ext cx="5120640" cy="320040"/>
-          </a:xfrm>
-          <a:prstGeom prst="rect">
-            <a:avLst/>
-          </a:prstGeom>
-          <a:noFill/>
-        </p:spPr>
-        <p:txBody>
-          <a:bodyPr wrap="square" lIns="0" rIns="0" tIns="0" bIns="0">
-            <a:spAutoFit/>
-          </a:bodyPr>
-          <a:lstStyle/>
-          <a:p>
-            <a:pPr>
-              <a:defRPr sz="1300" b="1" i="0">
-                <a:solidFill>
-                  <a:srgbClr val="0F2540"/>
-                </a:solidFill>
-                <a:latin typeface="Calibri"/>
-              </a:defRPr>
-            </a:pPr>
-            <a:r>
-              <a:t>RS-SG  ·  Relative-Scale</a:t>
-            </a:r>
-          </a:p>
-        </p:txBody>
-      </p:sp>
-      <p:sp>
-        <p:nvSpPr>
-          <p:cNvPr id="14" name="TextBox 13"/>
-          <p:cNvSpPr txBox="1"/>
-          <p:nvPr/>
-        </p:nvSpPr>
-        <p:spPr>
-          <a:xfrm>
-            <a:off x="6446520" y="3429000"/>
-            <a:ext cx="5120640" cy="411480"/>
-          </a:xfrm>
-          <a:prstGeom prst="rect">
-            <a:avLst/>
-          </a:prstGeom>
-          <a:noFill/>
-        </p:spPr>
-        <p:txBody>
-          <a:bodyPr wrap="square" lIns="0" rIns="0" tIns="0" bIns="0">
-            <a:spAutoFit/>
-          </a:bodyPr>
-          <a:lstStyle/>
-          <a:p>
-            <a:pPr>
-              <a:defRPr sz="1800" b="0" i="0">
-                <a:solidFill>
-                  <a:srgbClr val="0F2540"/>
-                </a:solidFill>
-                <a:latin typeface="Cambria Math"/>
-              </a:defRPr>
-            </a:pPr>
-            <a:r>
-              <a:t>x = M[t] / V_thr − 1</a:t>
-            </a:r>
-          </a:p>
-        </p:txBody>
-      </p:sp>
-      <p:sp>
-        <p:nvSpPr>
-          <p:cNvPr id="15" name="TextBox 14"/>
-          <p:cNvSpPr txBox="1"/>
-          <p:nvPr/>
-        </p:nvSpPr>
-        <p:spPr>
-          <a:xfrm>
-            <a:off x="6446520" y="3886200"/>
-            <a:ext cx="5120640" cy="274320"/>
-          </a:xfrm>
-          <a:prstGeom prst="rect">
-            <a:avLst/>
-          </a:prstGeom>
-          <a:noFill/>
-        </p:spPr>
-        <p:txBody>
-          <a:bodyPr wrap="square" lIns="0" rIns="0" tIns="0" bIns="0">
-            <a:spAutoFit/>
-          </a:bodyPr>
-          <a:lstStyle/>
-          <a:p>
-            <a:pPr>
-              <a:defRPr sz="1000" b="0" i="1">
-                <a:solidFill>
-                  <a:srgbClr val="7A7A7A"/>
-                </a:solidFill>
-                <a:latin typeface="Calibri"/>
-              </a:defRPr>
-            </a:pPr>
-            <a:r>
-              <a:t>Used by Meng 2023, DIET-SNN</a:t>
-            </a:r>
-          </a:p>
-        </p:txBody>
-      </p:sp>
-      <p:sp>
-        <p:nvSpPr>
-          <p:cNvPr id="16" name="TextBox 15"/>
-          <p:cNvSpPr txBox="1"/>
-          <p:nvPr/>
-        </p:nvSpPr>
-        <p:spPr>
-          <a:xfrm>
-            <a:off x="457200" y="4343400"/>
-            <a:ext cx="11247120" cy="274320"/>
-          </a:xfrm>
-          <a:prstGeom prst="rect">
-            <a:avLst/>
-          </a:prstGeom>
-          <a:noFill/>
-        </p:spPr>
-        <p:txBody>
-          <a:bodyPr wrap="square" lIns="0" rIns="0" tIns="0" bIns="0">
-            <a:spAutoFit/>
-          </a:bodyPr>
-          <a:lstStyle/>
-          <a:p>
-            <a:pPr algn="ctr">
-              <a:defRPr sz="1000" b="0" i="1">
-                <a:solidFill>
-                  <a:srgbClr val="7A7A7A"/>
-                </a:solidFill>
-                <a:latin typeface="Calibri"/>
-              </a:defRPr>
-            </a:pPr>
-            <a:r>
-              <a:t>How the gradient window looks against the membrane-potential distribution</a:t>
+              <a:t>Gradient cosine similarity across timesteps</a:t>
             </a:r>
           </a:p>
         </p:txBody>
       </p:sp>
       <p:pic>
         <p:nvPicPr>
-          <p:cNvPr id="17" name="Picture 16" descr="sg_windows.png"/>
+          <p:cNvPr id="6" name="Picture 5" descr="grad_collision.png"/>
           <p:cNvPicPr>
             <a:picLocks noChangeAspect="1"/>
           </p:cNvPicPr>
@@ -16141,8 +16523,8 @@
         </p:blipFill>
         <p:spPr>
           <a:xfrm>
-            <a:off x="4114800" y="4617720"/>
-            <a:ext cx="3931920" cy="1443363"/>
+            <a:off x="1362456" y="2606040"/>
+            <a:ext cx="3683097" cy="1828800"/>
           </a:xfrm>
           <a:prstGeom prst="rect">
             <a:avLst/>
@@ -16151,20 +16533,288 @@
       </p:pic>
       <p:sp>
         <p:nvSpPr>
-          <p:cNvPr id="18" name="Rectangle 17"/>
+          <p:cNvPr id="7" name="TextBox 6"/>
+          <p:cNvSpPr txBox="1"/>
+          <p:nvPr/>
+        </p:nvSpPr>
+        <p:spPr>
+          <a:xfrm>
+            <a:off x="457200" y="4526280"/>
+            <a:ext cx="5486400" cy="274320"/>
+          </a:xfrm>
+          <a:prstGeom prst="rect">
+            <a:avLst/>
+          </a:prstGeom>
+          <a:noFill/>
+        </p:spPr>
+        <p:txBody>
+          <a:bodyPr wrap="square" lIns="0" rIns="0" tIns="0" bIns="0">
+            <a:spAutoFit/>
+          </a:bodyPr>
+          <a:lstStyle/>
+          <a:p>
+            <a:pPr algn="ctr">
+              <a:defRPr sz="1000" b="0" i="1">
+                <a:solidFill>
+                  <a:srgbClr val="7A7A7A"/>
+                </a:solidFill>
+                <a:latin typeface="Calibri"/>
+              </a:defRPr>
+            </a:pPr>
+            <a:r>
+              <a:t>ResNet-19 · CIFAR-100 · 4 timesteps</a:t>
+            </a:r>
+          </a:p>
+        </p:txBody>
+      </p:sp>
+      <p:sp>
+        <p:nvSpPr>
+          <p:cNvPr id="8" name="TextBox 7"/>
+          <p:cNvSpPr txBox="1"/>
+          <p:nvPr/>
+        </p:nvSpPr>
+        <p:spPr>
+          <a:xfrm>
+            <a:off x="457200" y="4846320"/>
+            <a:ext cx="5486400" cy="1280160"/>
+          </a:xfrm>
+          <a:prstGeom prst="rect">
+            <a:avLst/>
+          </a:prstGeom>
+          <a:noFill/>
+        </p:spPr>
+        <p:txBody>
+          <a:bodyPr wrap="square">
+            <a:spAutoFit/>
+          </a:bodyPr>
+          <a:lstStyle/>
+          <a:p>
+            <a:pPr>
+              <a:defRPr sz="1100">
+                <a:solidFill>
+                  <a:srgbClr val="1A1A1A"/>
+                </a:solidFill>
+                <a:latin typeface="Calibri"/>
+              </a:defRPr>
+            </a:pPr>
+            <a:r>
+              <a:t>▸  Without MP-Init: gradients at t=1 conflict with later steps (cos 0.07–0.18)</a:t>
+            </a:r>
+          </a:p>
+          <a:p>
+            <a:pPr>
+              <a:spcBef>
+                <a:spcPts val="600"/>
+              </a:spcBef>
+              <a:defRPr sz="1100">
+                <a:solidFill>
+                  <a:srgbClr val="1A1A1A"/>
+                </a:solidFill>
+                <a:latin typeface="Calibri"/>
+              </a:defRPr>
+            </a:pPr>
+            <a:r>
+              <a:t>▸  With MP-Init: temporal ensemble realigned (cos ≈ 0.5)</a:t>
+            </a:r>
+          </a:p>
+          <a:p>
+            <a:pPr>
+              <a:spcBef>
+                <a:spcPts val="600"/>
+              </a:spcBef>
+              <a:defRPr sz="1100">
+                <a:solidFill>
+                  <a:srgbClr val="1A1A1A"/>
+                </a:solidFill>
+                <a:latin typeface="Calibri"/>
+              </a:defRPr>
+            </a:pPr>
+            <a:r>
+              <a:t>▸  Stable optimization — not just stable inference</a:t>
+            </a:r>
+          </a:p>
+        </p:txBody>
+      </p:sp>
+      <p:sp>
+        <p:nvSpPr>
+          <p:cNvPr id="9" name="TextBox 8"/>
+          <p:cNvSpPr txBox="1"/>
+          <p:nvPr/>
+        </p:nvSpPr>
+        <p:spPr>
+          <a:xfrm>
+            <a:off x="6263640" y="2194560"/>
+            <a:ext cx="5486400" cy="365760"/>
+          </a:xfrm>
+          <a:prstGeom prst="rect">
+            <a:avLst/>
+          </a:prstGeom>
+          <a:noFill/>
+        </p:spPr>
+        <p:txBody>
+          <a:bodyPr wrap="square" lIns="0" rIns="0" tIns="0" bIns="0">
+            <a:spAutoFit/>
+          </a:bodyPr>
+          <a:lstStyle/>
+          <a:p>
+            <a:pPr>
+              <a:defRPr sz="1300" b="1" i="0">
+                <a:solidFill>
+                  <a:srgbClr val="0F2540"/>
+                </a:solidFill>
+                <a:latin typeface="Calibri"/>
+              </a:defRPr>
+            </a:pPr>
+            <a:r>
+              <a:t>Accuracy vs. firing rate  (Pareto frontier)</a:t>
+            </a:r>
+          </a:p>
+        </p:txBody>
+      </p:sp>
+      <p:pic>
+        <p:nvPicPr>
+          <p:cNvPr id="10" name="Picture 9" descr="firing_rate_vs_accuracy.png"/>
+          <p:cNvPicPr>
+            <a:picLocks noChangeAspect="1"/>
+          </p:cNvPicPr>
+          <p:nvPr/>
+        </p:nvPicPr>
+        <p:blipFill>
+          <a:blip r:embed="rId3"/>
+          <a:stretch>
+            <a:fillRect/>
+          </a:stretch>
+        </p:blipFill>
+        <p:spPr>
+          <a:xfrm>
+            <a:off x="6400800" y="2606040"/>
+            <a:ext cx="5219395" cy="1828800"/>
+          </a:xfrm>
+          <a:prstGeom prst="rect">
+            <a:avLst/>
+          </a:prstGeom>
+        </p:spPr>
+      </p:pic>
+      <p:sp>
+        <p:nvSpPr>
+          <p:cNvPr id="11" name="TextBox 10"/>
+          <p:cNvSpPr txBox="1"/>
+          <p:nvPr/>
+        </p:nvSpPr>
+        <p:spPr>
+          <a:xfrm>
+            <a:off x="6263640" y="4526280"/>
+            <a:ext cx="5486400" cy="274320"/>
+          </a:xfrm>
+          <a:prstGeom prst="rect">
+            <a:avLst/>
+          </a:prstGeom>
+          <a:noFill/>
+        </p:spPr>
+        <p:txBody>
+          <a:bodyPr wrap="square" lIns="0" rIns="0" tIns="0" bIns="0">
+            <a:spAutoFit/>
+          </a:bodyPr>
+          <a:lstStyle/>
+          <a:p>
+            <a:pPr algn="ctr">
+              <a:defRPr sz="1000" b="0" i="1">
+                <a:solidFill>
+                  <a:srgbClr val="7A7A7A"/>
+                </a:solidFill>
+                <a:latin typeface="Calibri"/>
+              </a:defRPr>
+            </a:pPr>
+            <a:r>
+              <a:t>ResNet-19 · CIFAR-100 with sparsity regularizer</a:t>
+            </a:r>
+          </a:p>
+        </p:txBody>
+      </p:sp>
+      <p:sp>
+        <p:nvSpPr>
+          <p:cNvPr id="12" name="TextBox 11"/>
+          <p:cNvSpPr txBox="1"/>
+          <p:nvPr/>
+        </p:nvSpPr>
+        <p:spPr>
+          <a:xfrm>
+            <a:off x="6263640" y="4846320"/>
+            <a:ext cx="5486400" cy="1280160"/>
+          </a:xfrm>
+          <a:prstGeom prst="rect">
+            <a:avLst/>
+          </a:prstGeom>
+          <a:noFill/>
+        </p:spPr>
+        <p:txBody>
+          <a:bodyPr wrap="square">
+            <a:spAutoFit/>
+          </a:bodyPr>
+          <a:lstStyle/>
+          <a:p>
+            <a:pPr>
+              <a:defRPr sz="1100">
+                <a:solidFill>
+                  <a:srgbClr val="1A1A1A"/>
+                </a:solidFill>
+                <a:latin typeface="Calibri"/>
+              </a:defRPr>
+            </a:pPr>
+            <a:r>
+              <a:t>▸  MP-Init dominates baseline at every firing rate</a:t>
+            </a:r>
+          </a:p>
+          <a:p>
+            <a:pPr>
+              <a:spcBef>
+                <a:spcPts val="600"/>
+              </a:spcBef>
+              <a:defRPr sz="1100">
+                <a:solidFill>
+                  <a:srgbClr val="1A1A1A"/>
+                </a:solidFill>
+                <a:latin typeface="Calibri"/>
+              </a:defRPr>
+            </a:pPr>
+            <a:r>
+              <a:t>▸  Even at 6% firing rate, beats all baseline settings</a:t>
+            </a:r>
+          </a:p>
+          <a:p>
+            <a:pPr>
+              <a:spcBef>
+                <a:spcPts val="600"/>
+              </a:spcBef>
+              <a:defRPr sz="1100">
+                <a:solidFill>
+                  <a:srgbClr val="1A1A1A"/>
+                </a:solidFill>
+                <a:latin typeface="Calibri"/>
+              </a:defRPr>
+            </a:pPr>
+            <a:r>
+              <a:t>▸  Gains come from spiking BETTER, not spiking MORE</a:t>
+            </a:r>
+          </a:p>
+        </p:txBody>
+      </p:sp>
+      <p:sp>
+        <p:nvSpPr>
+          <p:cNvPr id="13" name="Rectangle 12"/>
           <p:cNvSpPr/>
           <p:nvPr/>
         </p:nvSpPr>
         <p:spPr>
           <a:xfrm>
-            <a:off x="457200" y="6126480"/>
-            <a:ext cx="54864" cy="365760"/>
+            <a:off x="457200" y="6080760"/>
+            <a:ext cx="54864" cy="411480"/>
           </a:xfrm>
           <a:prstGeom prst="rect">
             <a:avLst/>
           </a:prstGeom>
           <a:solidFill>
-            <a:srgbClr val="E56945"/>
+            <a:srgbClr val="E0B85F"/>
           </a:solidFill>
           <a:ln>
             <a:noFill/>
@@ -16194,20 +16844,20 @@
       </p:sp>
       <p:sp>
         <p:nvSpPr>
-          <p:cNvPr id="19" name="Rectangle 18"/>
+          <p:cNvPr id="14" name="Rectangle 13"/>
           <p:cNvSpPr/>
           <p:nvPr/>
         </p:nvSpPr>
         <p:spPr>
           <a:xfrm>
-            <a:off x="512064" y="6126480"/>
-            <a:ext cx="11192256" cy="365760"/>
+            <a:off x="512064" y="6080760"/>
+            <a:ext cx="11192256" cy="411480"/>
           </a:xfrm>
           <a:prstGeom prst="rect">
             <a:avLst/>
           </a:prstGeom>
           <a:solidFill>
-            <a:srgbClr val="0F2540"/>
+            <a:srgbClr val="1D7E7E"/>
           </a:solidFill>
           <a:ln>
             <a:noFill/>
@@ -16237,14 +16887,14 @@
       </p:sp>
       <p:sp>
         <p:nvSpPr>
-          <p:cNvPr id="20" name="TextBox 19"/>
-          <p:cNvSpPr txBox="1"/>
-          <p:nvPr/>
-        </p:nvSpPr>
-        <p:spPr>
-          <a:xfrm>
-            <a:off x="777240" y="6263640"/>
-            <a:ext cx="10789920" cy="91440"/>
+          <p:cNvPr id="15" name="TextBox 14"/>
+          <p:cNvSpPr txBox="1"/>
+          <p:nvPr/>
+        </p:nvSpPr>
+        <p:spPr>
+          <a:xfrm>
+            <a:off x="777240" y="6217920"/>
+            <a:ext cx="10789920" cy="137160"/>
           </a:xfrm>
           <a:prstGeom prst="rect">
             <a:avLst/>
@@ -16258,22 +16908,22 @@
           <a:lstStyle/>
           <a:p>
             <a:pPr>
-              <a:defRPr sz="1100" b="1">
-                <a:solidFill>
-                  <a:srgbClr val="E0B85F"/>
-                </a:solidFill>
-                <a:latin typeface="Calibri"/>
-              </a:defRPr>
-            </a:pPr>
-            <a:r>
-              <a:t>Same when V_thr is fixed.  Once V_thr trains, AS-SG breaks one way, RS-SG breaks the opposite way.</a:t>
-            </a:r>
-          </a:p>
-        </p:txBody>
-      </p:sp>
-      <p:sp>
-        <p:nvSpPr>
-          <p:cNvPr id="21" name="TextBox 20"/>
+              <a:defRPr sz="1200" b="1">
+                <a:solidFill>
+                  <a:srgbClr val="FFFFFF"/>
+                </a:solidFill>
+                <a:latin typeface="Calibri"/>
+              </a:defRPr>
+            </a:pPr>
+            <a:r>
+              <a:t>Higher accuracy from stabler training — efficiency-preserving improvements, not accuracy-via-spend.</a:t>
+            </a:r>
+          </a:p>
+        </p:txBody>
+      </p:sp>
+      <p:sp>
+        <p:nvSpPr>
+          <p:cNvPr id="16" name="TextBox 15"/>
           <p:cNvSpPr txBox="1"/>
           <p:nvPr/>
         </p:nvSpPr>
@@ -16309,7 +16959,7 @@
       </p:sp>
       <p:sp>
         <p:nvSpPr>
-          <p:cNvPr id="22" name="TextBox 21"/>
+          <p:cNvPr id="17" name="TextBox 16"/>
           <p:cNvSpPr txBox="1"/>
           <p:nvPr/>
         </p:nvSpPr>
@@ -16338,7 +16988,7 @@
               </a:defRPr>
             </a:pPr>
             <a:r>
-              <a:t>9 / 18</a:t>
+              <a:t>9 / 19</a:t>
             </a:r>
           </a:p>
         </p:txBody>

--- a/Hyunho_Kook_Master_Defense.pptx
+++ b/Hyunho_Kook_Master_Defense.pptx
@@ -6931,7 +6931,7 @@
               </a:defRPr>
             </a:pPr>
             <a:r>
-              <a:t>TrSG Holds Up — Stress Tests + Real Trajectories</a:t>
+              <a:t>Why TrSG Works — A Closer Look</a:t>
             </a:r>
           </a:p>
         </p:txBody>
@@ -6944,22 +6944,22 @@
         </p:nvSpPr>
         <p:spPr>
           <a:xfrm>
-            <a:off x="457200" y="2194560"/>
-            <a:ext cx="5943600" cy="365760"/>
-          </a:xfrm>
-          <a:prstGeom prst="rect">
-            <a:avLst/>
-          </a:prstGeom>
-          <a:noFill/>
-        </p:spPr>
-        <p:txBody>
-          <a:bodyPr wrap="square" lIns="0" rIns="0" tIns="0" bIns="0">
-            <a:spAutoFit/>
-          </a:bodyPr>
-          <a:lstStyle/>
-          <a:p>
-            <a:pPr>
-              <a:defRPr sz="1100" b="0" i="1">
+            <a:off x="457200" y="1600200"/>
+            <a:ext cx="11247120" cy="365760"/>
+          </a:xfrm>
+          <a:prstGeom prst="rect">
+            <a:avLst/>
+          </a:prstGeom>
+          <a:noFill/>
+        </p:spPr>
+        <p:txBody>
+          <a:bodyPr wrap="square" lIns="0" rIns="0" tIns="0" bIns="0">
+            <a:spAutoFit/>
+          </a:bodyPr>
+          <a:lstStyle/>
+          <a:p>
+            <a:pPr>
+              <a:defRPr sz="1400" b="0" i="1">
                 <a:solidFill>
                   <a:srgbClr val="7A7A7A"/>
                 </a:solidFill>
@@ -6967,348 +6967,14 @@
               </a:defRPr>
             </a:pPr>
             <a:r>
-              <a:t>Gradient-stability metrics at extreme thresholds  (CIFAR-100, T=4, ep 100)</a:t>
-            </a:r>
-          </a:p>
-        </p:txBody>
-      </p:sp>
-      <p:sp>
-        <p:nvSpPr>
-          <p:cNvPr id="5" name="Rectangle 4"/>
-          <p:cNvSpPr/>
-          <p:nvPr/>
-        </p:nvSpPr>
-        <p:spPr>
-          <a:xfrm>
-            <a:off x="457200" y="2606040"/>
-            <a:ext cx="2788920" cy="2194560"/>
-          </a:xfrm>
-          <a:prstGeom prst="rect">
-            <a:avLst/>
-          </a:prstGeom>
-          <a:solidFill>
-            <a:srgbClr val="F8F7F2"/>
-          </a:solidFill>
-          <a:ln w="6350">
-            <a:solidFill>
-              <a:srgbClr val="E5E5E0"/>
-            </a:solidFill>
-          </a:ln>
-        </p:spPr>
-        <p:style>
-          <a:lnRef idx="1">
-            <a:schemeClr val="accent1"/>
-          </a:lnRef>
-          <a:fillRef idx="3">
-            <a:schemeClr val="accent1"/>
-          </a:fillRef>
-          <a:effectRef idx="2">
-            <a:schemeClr val="accent1"/>
-          </a:effectRef>
-          <a:fontRef idx="minor">
-            <a:schemeClr val="lt1"/>
-          </a:fontRef>
-        </p:style>
-        <p:txBody>
-          <a:bodyPr rtlCol="0" anchor="ctr"/>
-          <a:lstStyle/>
-          <a:p>
-            <a:pPr algn="ctr"/>
-          </a:p>
-        </p:txBody>
-      </p:sp>
-      <p:sp>
-        <p:nvSpPr>
-          <p:cNvPr id="6" name="TextBox 5"/>
-          <p:cNvSpPr txBox="1"/>
-          <p:nvPr/>
-        </p:nvSpPr>
-        <p:spPr>
-          <a:xfrm>
-            <a:off x="594360" y="2679192"/>
-            <a:ext cx="2606040" cy="274320"/>
-          </a:xfrm>
-          <a:prstGeom prst="rect">
-            <a:avLst/>
-          </a:prstGeom>
-          <a:noFill/>
-        </p:spPr>
-        <p:txBody>
-          <a:bodyPr wrap="square" lIns="0" rIns="0" tIns="0" bIns="0">
-            <a:spAutoFit/>
-          </a:bodyPr>
-          <a:lstStyle/>
-          <a:p>
-            <a:pPr>
-              <a:defRPr sz="1100" b="1" i="0">
-                <a:solidFill>
-                  <a:srgbClr val="0F2540"/>
-                </a:solidFill>
-                <a:latin typeface="Calibri"/>
-              </a:defRPr>
-            </a:pPr>
-            <a:r>
-              <a:t>V_thr = 0.1   (low)</a:t>
-            </a:r>
-          </a:p>
-        </p:txBody>
-      </p:sp>
-      <p:sp>
-        <p:nvSpPr>
-          <p:cNvPr id="7" name="TextBox 6"/>
-          <p:cNvSpPr txBox="1"/>
-          <p:nvPr/>
-        </p:nvSpPr>
-        <p:spPr>
-          <a:xfrm>
-            <a:off x="594360" y="2971800"/>
-            <a:ext cx="2606040" cy="1828800"/>
-          </a:xfrm>
-          <a:prstGeom prst="rect">
-            <a:avLst/>
-          </a:prstGeom>
-          <a:noFill/>
-        </p:spPr>
-        <p:txBody>
-          <a:bodyPr wrap="square">
-            <a:spAutoFit/>
-          </a:bodyPr>
-          <a:lstStyle/>
-          <a:p>
-            <a:pPr>
-              <a:defRPr sz="1000">
-                <a:solidFill>
-                  <a:srgbClr val="E56945"/>
-                </a:solidFill>
-                <a:latin typeface="Consolas"/>
-              </a:defRPr>
-            </a:pPr>
-            <a:r>
-              <a:t>AS-SG    AbsStr 0.0145  · 90% active</a:t>
-            </a:r>
-          </a:p>
-          <a:p>
-            <a:pPr>
-              <a:spcBef>
-                <a:spcPts val="200"/>
-              </a:spcBef>
-              <a:defRPr sz="1000">
-                <a:solidFill>
-                  <a:srgbClr val="E56945"/>
-                </a:solidFill>
-                <a:latin typeface="Consolas"/>
-              </a:defRPr>
-            </a:pPr>
-            <a:r>
-              <a:t>RS-SG    diverged (NaN)</a:t>
-            </a:r>
-          </a:p>
-          <a:p>
-            <a:pPr>
-              <a:spcBef>
-                <a:spcPts val="200"/>
-              </a:spcBef>
-              <a:defRPr sz="1000">
-                <a:solidFill>
-                  <a:srgbClr val="1D7E7E"/>
-                </a:solidFill>
-                <a:latin typeface="Consolas"/>
-              </a:defRPr>
-            </a:pPr>
-            <a:r>
-              <a:t>TrSG     AbsStr 0.0153  · 21% · CV 0.87</a:t>
-            </a:r>
-          </a:p>
-        </p:txBody>
-      </p:sp>
-      <p:sp>
-        <p:nvSpPr>
-          <p:cNvPr id="8" name="Rectangle 7"/>
-          <p:cNvSpPr/>
-          <p:nvPr/>
-        </p:nvSpPr>
-        <p:spPr>
-          <a:xfrm>
-            <a:off x="3383280" y="2606040"/>
-            <a:ext cx="2788920" cy="2194560"/>
-          </a:xfrm>
-          <a:prstGeom prst="rect">
-            <a:avLst/>
-          </a:prstGeom>
-          <a:solidFill>
-            <a:srgbClr val="F8F7F2"/>
-          </a:solidFill>
-          <a:ln w="6350">
-            <a:solidFill>
-              <a:srgbClr val="E5E5E0"/>
-            </a:solidFill>
-          </a:ln>
-        </p:spPr>
-        <p:style>
-          <a:lnRef idx="1">
-            <a:schemeClr val="accent1"/>
-          </a:lnRef>
-          <a:fillRef idx="3">
-            <a:schemeClr val="accent1"/>
-          </a:fillRef>
-          <a:effectRef idx="2">
-            <a:schemeClr val="accent1"/>
-          </a:effectRef>
-          <a:fontRef idx="minor">
-            <a:schemeClr val="lt1"/>
-          </a:fontRef>
-        </p:style>
-        <p:txBody>
-          <a:bodyPr rtlCol="0" anchor="ctr"/>
-          <a:lstStyle/>
-          <a:p>
-            <a:pPr algn="ctr"/>
-          </a:p>
-        </p:txBody>
-      </p:sp>
-      <p:sp>
-        <p:nvSpPr>
-          <p:cNvPr id="9" name="TextBox 8"/>
-          <p:cNvSpPr txBox="1"/>
-          <p:nvPr/>
-        </p:nvSpPr>
-        <p:spPr>
-          <a:xfrm>
-            <a:off x="3520440" y="2679192"/>
-            <a:ext cx="2606040" cy="274320"/>
-          </a:xfrm>
-          <a:prstGeom prst="rect">
-            <a:avLst/>
-          </a:prstGeom>
-          <a:noFill/>
-        </p:spPr>
-        <p:txBody>
-          <a:bodyPr wrap="square" lIns="0" rIns="0" tIns="0" bIns="0">
-            <a:spAutoFit/>
-          </a:bodyPr>
-          <a:lstStyle/>
-          <a:p>
-            <a:pPr>
-              <a:defRPr sz="1100" b="1" i="0">
-                <a:solidFill>
-                  <a:srgbClr val="0F2540"/>
-                </a:solidFill>
-                <a:latin typeface="Calibri"/>
-              </a:defRPr>
-            </a:pPr>
-            <a:r>
-              <a:t>V_thr = 2.0   (high)</a:t>
-            </a:r>
-          </a:p>
-        </p:txBody>
-      </p:sp>
-      <p:sp>
-        <p:nvSpPr>
-          <p:cNvPr id="10" name="TextBox 9"/>
-          <p:cNvSpPr txBox="1"/>
-          <p:nvPr/>
-        </p:nvSpPr>
-        <p:spPr>
-          <a:xfrm>
-            <a:off x="3520440" y="2971800"/>
-            <a:ext cx="2606040" cy="1828800"/>
-          </a:xfrm>
-          <a:prstGeom prst="rect">
-            <a:avLst/>
-          </a:prstGeom>
-          <a:noFill/>
-        </p:spPr>
-        <p:txBody>
-          <a:bodyPr wrap="square">
-            <a:spAutoFit/>
-          </a:bodyPr>
-          <a:lstStyle/>
-          <a:p>
-            <a:pPr>
-              <a:defRPr sz="1000">
-                <a:solidFill>
-                  <a:srgbClr val="E56945"/>
-                </a:solidFill>
-                <a:latin typeface="Consolas"/>
-              </a:defRPr>
-            </a:pPr>
-            <a:r>
-              <a:t>AS-SG    0%  active  (zero gradient)</a:t>
-            </a:r>
-          </a:p>
-          <a:p>
-            <a:pPr>
-              <a:spcBef>
-                <a:spcPts val="200"/>
-              </a:spcBef>
-              <a:defRPr sz="1000">
-                <a:solidFill>
-                  <a:srgbClr val="E56945"/>
-                </a:solidFill>
-                <a:latin typeface="Consolas"/>
-              </a:defRPr>
-            </a:pPr>
-            <a:r>
-              <a:t>RS-SG    0.10% active · CV 2.25</a:t>
-            </a:r>
-          </a:p>
-          <a:p>
-            <a:pPr>
-              <a:spcBef>
-                <a:spcPts val="200"/>
-              </a:spcBef>
-              <a:defRPr sz="1000">
-                <a:solidFill>
-                  <a:srgbClr val="1D7E7E"/>
-                </a:solidFill>
-                <a:latin typeface="Consolas"/>
-              </a:defRPr>
-            </a:pPr>
-            <a:r>
-              <a:t>TrSG     AbsStr 0.0323  · 7% · CV 0.73</a:t>
-            </a:r>
-          </a:p>
-        </p:txBody>
-      </p:sp>
-      <p:sp>
-        <p:nvSpPr>
-          <p:cNvPr id="11" name="TextBox 10"/>
-          <p:cNvSpPr txBox="1"/>
-          <p:nvPr/>
-        </p:nvSpPr>
-        <p:spPr>
-          <a:xfrm>
-            <a:off x="6675120" y="2194560"/>
-            <a:ext cx="5120640" cy="365760"/>
-          </a:xfrm>
-          <a:prstGeom prst="rect">
-            <a:avLst/>
-          </a:prstGeom>
-          <a:noFill/>
-        </p:spPr>
-        <p:txBody>
-          <a:bodyPr wrap="square" lIns="0" rIns="0" tIns="0" bIns="0">
-            <a:spAutoFit/>
-          </a:bodyPr>
-          <a:lstStyle/>
-          <a:p>
-            <a:pPr>
-              <a:defRPr sz="1100" b="0" i="1">
-                <a:solidFill>
-                  <a:srgbClr val="7A7A7A"/>
-                </a:solidFill>
-                <a:latin typeface="Calibri"/>
-              </a:defRPr>
-            </a:pPr>
-            <a:r>
-              <a:t>Real trainings actually visit these regions</a:t>
+              <a:t>Stable gradient across thresholds  ·  real trainings actually visit those regimes</a:t>
             </a:r>
           </a:p>
         </p:txBody>
       </p:sp>
       <p:pic>
         <p:nvPicPr>
-          <p:cNvPr id="12" name="Picture 11" descr="threshold_training_imagenet.png"/>
+          <p:cNvPr id="5" name="Picture 4" descr="no_training_acc.png"/>
           <p:cNvPicPr>
             <a:picLocks noChangeAspect="1"/>
           </p:cNvPicPr>
@@ -7322,8 +6988,8 @@
         </p:blipFill>
         <p:spPr>
           <a:xfrm>
-            <a:off x="6675120" y="2606040"/>
-            <a:ext cx="5120640" cy="2194560"/>
+            <a:off x="3108960" y="2194560"/>
+            <a:ext cx="5943600" cy="2329249"/>
           </a:xfrm>
           <a:prstGeom prst="rect">
             <a:avLst/>
@@ -7332,14 +6998,82 @@
       </p:pic>
       <p:sp>
         <p:nvSpPr>
-          <p:cNvPr id="13" name="Rectangle 12"/>
+          <p:cNvPr id="6" name="TextBox 5"/>
+          <p:cNvSpPr txBox="1"/>
+          <p:nvPr/>
+        </p:nvSpPr>
+        <p:spPr>
+          <a:xfrm>
+            <a:off x="457200" y="4800600"/>
+            <a:ext cx="11247120" cy="1280160"/>
+          </a:xfrm>
+          <a:prstGeom prst="rect">
+            <a:avLst/>
+          </a:prstGeom>
+          <a:noFill/>
+        </p:spPr>
+        <p:txBody>
+          <a:bodyPr wrap="square">
+            <a:spAutoFit/>
+          </a:bodyPr>
+          <a:lstStyle/>
+          <a:p>
+            <a:pPr>
+              <a:defRPr sz="1200">
+                <a:solidFill>
+                  <a:srgbClr val="1A1A1A"/>
+                </a:solidFill>
+                <a:latin typeface="Calibri"/>
+              </a:defRPr>
+            </a:pPr>
+            <a:r>
+              <a:t>▸  TrSG wins at every V_thr — most dramatically at the extremes (74.0 vs 61.6 / div. at V_thr=0.1; 64.3 vs 18.1 / 5.4 at V_thr=2.0)</a:t>
+            </a:r>
+          </a:p>
+          <a:p>
+            <a:pPr>
+              <a:spcBef>
+                <a:spcPts val="600"/>
+              </a:spcBef>
+              <a:defRPr sz="1200">
+                <a:solidFill>
+                  <a:srgbClr val="1A1A1A"/>
+                </a:solidFill>
+                <a:latin typeface="Calibri"/>
+              </a:defRPr>
+            </a:pPr>
+            <a:r>
+              <a:t>▸  AS-SG and RS-SG only work in a narrow band around V_thr=1.0</a:t>
+            </a:r>
+          </a:p>
+          <a:p>
+            <a:pPr>
+              <a:spcBef>
+                <a:spcPts val="600"/>
+              </a:spcBef>
+              <a:defRPr sz="1200">
+                <a:solidFill>
+                  <a:srgbClr val="1A1A1A"/>
+                </a:solidFill>
+                <a:latin typeface="Calibri"/>
+              </a:defRPr>
+            </a:pPr>
+            <a:r>
+              <a:t>▸  Real trainings DO visit V_thr ≪ 1 (early layers) and V_thr ≫ 1 (deep layers)</a:t>
+            </a:r>
+          </a:p>
+        </p:txBody>
+      </p:sp>
+      <p:sp>
+        <p:nvSpPr>
+          <p:cNvPr id="7" name="Rectangle 6"/>
           <p:cNvSpPr/>
           <p:nvPr/>
         </p:nvSpPr>
         <p:spPr>
           <a:xfrm>
-            <a:off x="457200" y="5029200"/>
-            <a:ext cx="54864" cy="1280160"/>
+            <a:off x="457200" y="6080760"/>
+            <a:ext cx="54864" cy="411480"/>
           </a:xfrm>
           <a:prstGeom prst="rect">
             <a:avLst/>
@@ -7375,14 +7109,14 @@
       </p:sp>
       <p:sp>
         <p:nvSpPr>
-          <p:cNvPr id="14" name="Rectangle 13"/>
+          <p:cNvPr id="8" name="Rectangle 7"/>
           <p:cNvSpPr/>
           <p:nvPr/>
         </p:nvSpPr>
         <p:spPr>
           <a:xfrm>
-            <a:off x="512064" y="5029200"/>
-            <a:ext cx="11192256" cy="1280160"/>
+            <a:off x="512064" y="6080760"/>
+            <a:ext cx="11192256" cy="411480"/>
           </a:xfrm>
           <a:prstGeom prst="rect">
             <a:avLst/>
@@ -7418,14 +7152,14 @@
       </p:sp>
       <p:sp>
         <p:nvSpPr>
-          <p:cNvPr id="15" name="TextBox 14"/>
-          <p:cNvSpPr txBox="1"/>
-          <p:nvPr/>
-        </p:nvSpPr>
-        <p:spPr>
-          <a:xfrm>
-            <a:off x="777240" y="5166360"/>
-            <a:ext cx="10789920" cy="1005839"/>
+          <p:cNvPr id="9" name="TextBox 8"/>
+          <p:cNvSpPr txBox="1"/>
+          <p:nvPr/>
+        </p:nvSpPr>
+        <p:spPr>
+          <a:xfrm>
+            <a:off x="777240" y="6217920"/>
+            <a:ext cx="10789920" cy="137160"/>
           </a:xfrm>
           <a:prstGeom prst="rect">
             <a:avLst/>
@@ -7439,7 +7173,7 @@
           <a:lstStyle/>
           <a:p>
             <a:pPr>
-              <a:defRPr sz="1400" b="1">
+              <a:defRPr sz="1200" b="1">
                 <a:solidFill>
                   <a:srgbClr val="E0B85F"/>
                 </a:solidFill>
@@ -7447,34 +7181,14 @@
               </a:defRPr>
             </a:pPr>
             <a:r>
-              <a:t>Threshold-robustness is a practical necessity</a:t>
-            </a:r>
-          </a:p>
-          <a:p>
-            <a:pPr>
-              <a:spcBef>
-                <a:spcPts val="600"/>
-              </a:spcBef>
-              <a:defRPr sz="1100">
-                <a:solidFill>
-                  <a:srgbClr val="FFFFFF"/>
-                </a:solidFill>
-                <a:latin typeface="Calibri"/>
-              </a:defRPr>
-            </a:pPr>
-            <a:r>
-              <a:t>Across CIFAR-100, DVS-CIFAR10, and ImageNet, trainable V_thr drifts well below 1</a:t>
-            </a:r>
-            <a:br/>
-            <a:r>
-              <a:t>or above 2 in some layers — exactly the regimes where AS-SG and RS-SG fail.</a:t>
-            </a:r>
-          </a:p>
-        </p:txBody>
-      </p:sp>
-      <p:sp>
-        <p:nvSpPr>
-          <p:cNvPr id="16" name="TextBox 15"/>
+              <a:t>Threshold-robustness is a practical necessity, not a theoretical edge case.</a:t>
+            </a:r>
+          </a:p>
+        </p:txBody>
+      </p:sp>
+      <p:sp>
+        <p:nvSpPr>
+          <p:cNvPr id="10" name="TextBox 9"/>
           <p:cNvSpPr txBox="1"/>
           <p:nvPr/>
         </p:nvSpPr>
@@ -7510,7 +7224,7 @@
       </p:sp>
       <p:sp>
         <p:nvSpPr>
-          <p:cNvPr id="17" name="TextBox 16"/>
+          <p:cNvPr id="11" name="TextBox 10"/>
           <p:cNvSpPr txBox="1"/>
           <p:nvPr/>
         </p:nvSpPr>

--- a/Hyunho_Kook_Master_Defense.pptx
+++ b/Hyunho_Kook_Master_Defense.pptx
@@ -4147,7 +4147,7 @@
         </p:nvSpPr>
         <p:spPr>
           <a:xfrm>
-            <a:off x="457200" y="4343400"/>
+            <a:off x="457200" y="4206240"/>
             <a:ext cx="11247120" cy="274320"/>
           </a:xfrm>
           <a:prstGeom prst="rect">
@@ -4191,8 +4191,8 @@
         </p:blipFill>
         <p:spPr>
           <a:xfrm>
-            <a:off x="4114800" y="4617720"/>
-            <a:ext cx="3931920" cy="1443363"/>
+            <a:off x="4297680" y="4480560"/>
+            <a:ext cx="3566160" cy="1309097"/>
           </a:xfrm>
           <a:prstGeom prst="rect">
             <a:avLst/>
@@ -4207,7 +4207,7 @@
         </p:nvSpPr>
         <p:spPr>
           <a:xfrm>
-            <a:off x="457200" y="6126480"/>
+            <a:off x="457200" y="6035040"/>
             <a:ext cx="54864" cy="365760"/>
           </a:xfrm>
           <a:prstGeom prst="rect">
@@ -4250,7 +4250,7 @@
         </p:nvSpPr>
         <p:spPr>
           <a:xfrm>
-            <a:off x="512064" y="6126480"/>
+            <a:off x="512064" y="6035040"/>
             <a:ext cx="11192256" cy="365760"/>
           </a:xfrm>
           <a:prstGeom prst="rect">
@@ -4293,7 +4293,7 @@
         </p:nvSpPr>
         <p:spPr>
           <a:xfrm>
-            <a:off x="777240" y="6263640"/>
+            <a:off x="777240" y="6172200"/>
             <a:ext cx="10789920" cy="91440"/>
           </a:xfrm>
           <a:prstGeom prst="rect">
@@ -4316,7 +4316,7 @@
               </a:defRPr>
             </a:pPr>
             <a:r>
-              <a:t>Same when V_thr is fixed.  Once V_thr trains, AS-SG breaks one way, RS-SG breaks the opposite way.</a:t>
+              <a:t>Same when V_thr is fixed.  Once V_thr trains, AS-SG breaks one way, RS-SG the opposite.</a:t>
             </a:r>
           </a:p>
         </p:txBody>
@@ -10490,22 +10490,22 @@
         </p:nvSpPr>
         <p:spPr>
           <a:xfrm>
-            <a:off x="640080" y="1280160"/>
-            <a:ext cx="10972800" cy="640080"/>
-          </a:xfrm>
-          <a:prstGeom prst="rect">
-            <a:avLst/>
-          </a:prstGeom>
-          <a:noFill/>
-        </p:spPr>
-        <p:txBody>
-          <a:bodyPr wrap="square" lIns="0" rIns="0" tIns="0" bIns="0">
-            <a:spAutoFit/>
-          </a:bodyPr>
-          <a:lstStyle/>
-          <a:p>
-            <a:pPr>
-              <a:defRPr sz="3200" b="1" i="0">
+            <a:off x="640080" y="1463040"/>
+            <a:ext cx="10972800" cy="822960"/>
+          </a:xfrm>
+          <a:prstGeom prst="rect">
+            <a:avLst/>
+          </a:prstGeom>
+          <a:noFill/>
+        </p:spPr>
+        <p:txBody>
+          <a:bodyPr wrap="square" lIns="0" rIns="0" tIns="0" bIns="0">
+            <a:spAutoFit/>
+          </a:bodyPr>
+          <a:lstStyle/>
+          <a:p>
+            <a:pPr>
+              <a:defRPr sz="3600" b="1" i="0">
                 <a:solidFill>
                   <a:srgbClr val="FFFFFF"/>
                 </a:solidFill>
@@ -10526,24 +10526,24 @@
         </p:nvSpPr>
         <p:spPr>
           <a:xfrm>
-            <a:off x="640080" y="1920240"/>
-            <a:ext cx="10972800" cy="640080"/>
-          </a:xfrm>
-          <a:prstGeom prst="rect">
-            <a:avLst/>
-          </a:prstGeom>
-          <a:noFill/>
-        </p:spPr>
-        <p:txBody>
-          <a:bodyPr wrap="square" lIns="0" rIns="0" tIns="0" bIns="0">
-            <a:spAutoFit/>
-          </a:bodyPr>
-          <a:lstStyle/>
-          <a:p>
-            <a:pPr>
-              <a:defRPr sz="3200" b="1" i="0">
-                <a:solidFill>
-                  <a:srgbClr val="FFFFFF"/>
+            <a:off x="640080" y="2286000"/>
+            <a:ext cx="10972800" cy="822960"/>
+          </a:xfrm>
+          <a:prstGeom prst="rect">
+            <a:avLst/>
+          </a:prstGeom>
+          <a:noFill/>
+        </p:spPr>
+        <p:txBody>
+          <a:bodyPr wrap="square" lIns="0" rIns="0" tIns="0" bIns="0">
+            <a:spAutoFit/>
+          </a:bodyPr>
+          <a:lstStyle/>
+          <a:p>
+            <a:pPr>
+              <a:defRPr sz="3600" b="1" i="0">
+                <a:solidFill>
+                  <a:srgbClr val="E0B85F"/>
                 </a:solidFill>
                 <a:latin typeface="Cambria"/>
               </a:defRPr>
@@ -10556,46 +10556,38 @@
       </p:sp>
       <p:sp>
         <p:nvSpPr>
-          <p:cNvPr id="8" name="Rectangle 7"/>
-          <p:cNvSpPr/>
-          <p:nvPr/>
-        </p:nvSpPr>
-        <p:spPr>
-          <a:xfrm>
-            <a:off x="457200" y="2834640"/>
-            <a:ext cx="3657600" cy="1691640"/>
-          </a:xfrm>
-          <a:prstGeom prst="rect">
-            <a:avLst/>
-          </a:prstGeom>
-          <a:solidFill>
-            <a:srgbClr val="0F2540"/>
-          </a:solidFill>
-          <a:ln w="15240">
-            <a:solidFill>
-              <a:srgbClr val="1D7E7E"/>
-            </a:solidFill>
-          </a:ln>
-        </p:spPr>
-        <p:style>
-          <a:lnRef idx="1">
-            <a:schemeClr val="accent1"/>
-          </a:lnRef>
-          <a:fillRef idx="3">
-            <a:schemeClr val="accent1"/>
-          </a:fillRef>
-          <a:effectRef idx="2">
-            <a:schemeClr val="accent1"/>
-          </a:effectRef>
-          <a:fontRef idx="minor">
-            <a:schemeClr val="lt1"/>
-          </a:fontRef>
-        </p:style>
-        <p:txBody>
-          <a:bodyPr rtlCol="0" anchor="ctr"/>
-          <a:lstStyle/>
-          <a:p>
-            <a:pPr algn="ctr"/>
+          <p:cNvPr id="8" name="TextBox 7"/>
+          <p:cNvSpPr txBox="1"/>
+          <p:nvPr/>
+        </p:nvSpPr>
+        <p:spPr>
+          <a:xfrm>
+            <a:off x="640080" y="3657600"/>
+            <a:ext cx="10058400" cy="274320"/>
+          </a:xfrm>
+          <a:prstGeom prst="rect">
+            <a:avLst/>
+          </a:prstGeom>
+          <a:noFill/>
+        </p:spPr>
+        <p:txBody>
+          <a:bodyPr wrap="square" lIns="0" rIns="0" tIns="0" bIns="0">
+            <a:spAutoFit/>
+          </a:bodyPr>
+          <a:lstStyle/>
+          <a:p>
+            <a:pPr>
+              <a:defRPr sz="1100" b="1" i="0">
+                <a:solidFill>
+                  <a:srgbClr val="E0B85F"/>
+                </a:solidFill>
+                <a:latin typeface="Calibri"/>
+              </a:defRPr>
+            </a:pPr>
+            <a:r>
+              <a:rPr spc="400"/>
+              <a:t>LIMITATIONS</a:t>
+            </a:r>
           </a:p>
         </p:txBody>
       </p:sp>
@@ -10607,30 +10599,38 @@
         </p:nvSpPr>
         <p:spPr>
           <a:xfrm>
-            <a:off x="685800" y="3017520"/>
-            <a:ext cx="3200400" cy="365760"/>
-          </a:xfrm>
-          <a:prstGeom prst="rect">
-            <a:avLst/>
-          </a:prstGeom>
-          <a:noFill/>
-        </p:spPr>
-        <p:txBody>
-          <a:bodyPr wrap="square" lIns="0" rIns="0" tIns="0" bIns="0">
-            <a:spAutoFit/>
-          </a:bodyPr>
-          <a:lstStyle/>
-          <a:p>
-            <a:pPr>
-              <a:defRPr sz="1800" b="1" i="0">
-                <a:solidFill>
-                  <a:srgbClr val="1D7E7E"/>
-                </a:solidFill>
-                <a:latin typeface="Cambria"/>
-              </a:defRPr>
-            </a:pPr>
-            <a:r>
-              <a:t>MP-Init</a:t>
+            <a:off x="640080" y="3977639"/>
+            <a:ext cx="10972800" cy="1005840"/>
+          </a:xfrm>
+          <a:prstGeom prst="rect">
+            <a:avLst/>
+          </a:prstGeom>
+          <a:noFill/>
+        </p:spPr>
+        <p:txBody>
+          <a:bodyPr wrap="square" lIns="0" rIns="0" tIns="0" bIns="0">
+            <a:spAutoFit/>
+          </a:bodyPr>
+          <a:lstStyle/>
+          <a:p>
+            <a:pPr>
+              <a:defRPr sz="1200" b="0" i="0">
+                <a:solidFill>
+                  <a:srgbClr val="CBD8E0"/>
+                </a:solidFill>
+                <a:latin typeface="Calibri"/>
+              </a:defRPr>
+            </a:pPr>
+            <a:r>
+              <a:t>▸  Per-layer constant approximates π only at the mean — richer parameterizations are open.</a:t>
+            </a:r>
+            <a:br/>
+            <a:r>
+              <a:t>▸  Hardware with fixed neuron parameters needs quantization-aware adaptation.</a:t>
+            </a:r>
+            <a:br/>
+            <a:r>
+              <a:t>▸  i.i.d. assumption empirically supported, but tighter bounds welcome.</a:t>
             </a:r>
           </a:p>
         </p:txBody>
@@ -10643,22 +10643,59 @@
         </p:nvSpPr>
         <p:spPr>
           <a:xfrm>
-            <a:off x="685800" y="3520440"/>
-            <a:ext cx="3200400" cy="822960"/>
-          </a:xfrm>
-          <a:prstGeom prst="rect">
-            <a:avLst/>
-          </a:prstGeom>
-          <a:noFill/>
-        </p:spPr>
-        <p:txBody>
-          <a:bodyPr wrap="square" lIns="0" rIns="0" tIns="0" bIns="0">
-            <a:spAutoFit/>
-          </a:bodyPr>
-          <a:lstStyle/>
-          <a:p>
-            <a:pPr>
-              <a:defRPr sz="1000" b="0" i="0">
+            <a:off x="640080" y="5074920"/>
+            <a:ext cx="10058400" cy="274320"/>
+          </a:xfrm>
+          <a:prstGeom prst="rect">
+            <a:avLst/>
+          </a:prstGeom>
+          <a:noFill/>
+        </p:spPr>
+        <p:txBody>
+          <a:bodyPr wrap="square" lIns="0" rIns="0" tIns="0" bIns="0">
+            <a:spAutoFit/>
+          </a:bodyPr>
+          <a:lstStyle/>
+          <a:p>
+            <a:pPr>
+              <a:defRPr sz="1100" b="1" i="0">
+                <a:solidFill>
+                  <a:srgbClr val="E0B85F"/>
+                </a:solidFill>
+                <a:latin typeface="Calibri"/>
+              </a:defRPr>
+            </a:pPr>
+            <a:r>
+              <a:rPr spc="400"/>
+              <a:t>FUTURE  WORK</a:t>
+            </a:r>
+          </a:p>
+        </p:txBody>
+      </p:sp>
+      <p:sp>
+        <p:nvSpPr>
+          <p:cNvPr id="11" name="TextBox 10"/>
+          <p:cNvSpPr txBox="1"/>
+          <p:nvPr/>
+        </p:nvSpPr>
+        <p:spPr>
+          <a:xfrm>
+            <a:off x="640080" y="5394960"/>
+            <a:ext cx="10972800" cy="822960"/>
+          </a:xfrm>
+          <a:prstGeom prst="rect">
+            <a:avLst/>
+          </a:prstGeom>
+          <a:noFill/>
+        </p:spPr>
+        <p:txBody>
+          <a:bodyPr wrap="square" lIns="0" rIns="0" tIns="0" bIns="0">
+            <a:spAutoFit/>
+          </a:bodyPr>
+          <a:lstStyle/>
+          <a:p>
+            <a:pPr>
+              <a:defRPr sz="1200" b="0" i="0">
                 <a:solidFill>
                   <a:srgbClr val="CBD8E0"/>
                 </a:solidFill>
@@ -10666,329 +10703,18 @@
               </a:defRPr>
             </a:pPr>
             <a:r>
-              <a:t>TCS originates in the membrane potential. A per-layer running mean closes the gap to the stationary distribution. No overhead, standard inference.</a:t>
-            </a:r>
-          </a:p>
-        </p:txBody>
-      </p:sp>
-      <p:sp>
-        <p:nvSpPr>
-          <p:cNvPr id="11" name="Rectangle 10"/>
-          <p:cNvSpPr/>
-          <p:nvPr/>
-        </p:nvSpPr>
-        <p:spPr>
-          <a:xfrm>
-            <a:off x="4297680" y="2834640"/>
-            <a:ext cx="3657600" cy="1691640"/>
-          </a:xfrm>
-          <a:prstGeom prst="rect">
-            <a:avLst/>
-          </a:prstGeom>
-          <a:solidFill>
-            <a:srgbClr val="0F2540"/>
-          </a:solidFill>
-          <a:ln w="15240">
-            <a:solidFill>
-              <a:srgbClr val="E0B85F"/>
-            </a:solidFill>
-          </a:ln>
-        </p:spPr>
-        <p:style>
-          <a:lnRef idx="1">
-            <a:schemeClr val="accent1"/>
-          </a:lnRef>
-          <a:fillRef idx="3">
-            <a:schemeClr val="accent1"/>
-          </a:fillRef>
-          <a:effectRef idx="2">
-            <a:schemeClr val="accent1"/>
-          </a:effectRef>
-          <a:fontRef idx="minor">
-            <a:schemeClr val="lt1"/>
-          </a:fontRef>
-        </p:style>
-        <p:txBody>
-          <a:bodyPr rtlCol="0" anchor="ctr"/>
-          <a:lstStyle/>
-          <a:p>
-            <a:pPr algn="ctr"/>
-          </a:p>
-        </p:txBody>
-      </p:sp>
-      <p:sp>
-        <p:nvSpPr>
-          <p:cNvPr id="12" name="TextBox 11"/>
-          <p:cNvSpPr txBox="1"/>
-          <p:nvPr/>
-        </p:nvSpPr>
-        <p:spPr>
-          <a:xfrm>
-            <a:off x="4526280" y="3017520"/>
-            <a:ext cx="3200400" cy="365760"/>
-          </a:xfrm>
-          <a:prstGeom prst="rect">
-            <a:avLst/>
-          </a:prstGeom>
-          <a:noFill/>
-        </p:spPr>
-        <p:txBody>
-          <a:bodyPr wrap="square" lIns="0" rIns="0" tIns="0" bIns="0">
-            <a:spAutoFit/>
-          </a:bodyPr>
-          <a:lstStyle/>
-          <a:p>
-            <a:pPr>
-              <a:defRPr sz="1800" b="1" i="0">
-                <a:solidFill>
-                  <a:srgbClr val="E0B85F"/>
-                </a:solidFill>
-                <a:latin typeface="Cambria"/>
-              </a:defRPr>
-            </a:pPr>
-            <a:r>
-              <a:t>TrSG</a:t>
-            </a:r>
-          </a:p>
-        </p:txBody>
-      </p:sp>
-      <p:sp>
-        <p:nvSpPr>
-          <p:cNvPr id="13" name="TextBox 12"/>
-          <p:cNvSpPr txBox="1"/>
-          <p:nvPr/>
-        </p:nvSpPr>
-        <p:spPr>
-          <a:xfrm>
-            <a:off x="4526280" y="3520440"/>
-            <a:ext cx="3200400" cy="822960"/>
-          </a:xfrm>
-          <a:prstGeom prst="rect">
-            <a:avLst/>
-          </a:prstGeom>
-          <a:noFill/>
-        </p:spPr>
-        <p:txBody>
-          <a:bodyPr wrap="square" lIns="0" rIns="0" tIns="0" bIns="0">
-            <a:spAutoFit/>
-          </a:bodyPr>
-          <a:lstStyle/>
-          <a:p>
-            <a:pPr>
-              <a:defRPr sz="1000" b="0" i="0">
-                <a:solidFill>
-                  <a:srgbClr val="CBD8E0"/>
-                </a:solidFill>
-                <a:latin typeface="Calibri"/>
-              </a:defRPr>
-            </a:pPr>
-            <a:r>
-              <a:t>Threshold-induced gradient pathology cancelled by a one-line forward-path fix. Window adapts, magnitude is invariant. Inference reverts to binary spikes.</a:t>
-            </a:r>
-          </a:p>
-        </p:txBody>
-      </p:sp>
-      <p:sp>
-        <p:nvSpPr>
-          <p:cNvPr id="14" name="Rectangle 13"/>
-          <p:cNvSpPr/>
-          <p:nvPr/>
-        </p:nvSpPr>
-        <p:spPr>
-          <a:xfrm>
-            <a:off x="8138160" y="2834640"/>
-            <a:ext cx="3657600" cy="1691640"/>
-          </a:xfrm>
-          <a:prstGeom prst="rect">
-            <a:avLst/>
-          </a:prstGeom>
-          <a:solidFill>
-            <a:srgbClr val="0F2540"/>
-          </a:solidFill>
-          <a:ln w="15240">
-            <a:solidFill>
-              <a:srgbClr val="1D7E7E"/>
-            </a:solidFill>
-          </a:ln>
-        </p:spPr>
-        <p:style>
-          <a:lnRef idx="1">
-            <a:schemeClr val="accent1"/>
-          </a:lnRef>
-          <a:fillRef idx="3">
-            <a:schemeClr val="accent1"/>
-          </a:fillRef>
-          <a:effectRef idx="2">
-            <a:schemeClr val="accent1"/>
-          </a:effectRef>
-          <a:fontRef idx="minor">
-            <a:schemeClr val="lt1"/>
-          </a:fontRef>
-        </p:style>
-        <p:txBody>
-          <a:bodyPr rtlCol="0" anchor="ctr"/>
-          <a:lstStyle/>
-          <a:p>
-            <a:pPr algn="ctr"/>
-          </a:p>
-        </p:txBody>
-      </p:sp>
-      <p:sp>
-        <p:nvSpPr>
-          <p:cNvPr id="15" name="TextBox 14"/>
-          <p:cNvSpPr txBox="1"/>
-          <p:nvPr/>
-        </p:nvSpPr>
-        <p:spPr>
-          <a:xfrm>
-            <a:off x="8366760" y="3017520"/>
-            <a:ext cx="3200400" cy="365760"/>
-          </a:xfrm>
-          <a:prstGeom prst="rect">
-            <a:avLst/>
-          </a:prstGeom>
-          <a:noFill/>
-        </p:spPr>
-        <p:txBody>
-          <a:bodyPr wrap="square" lIns="0" rIns="0" tIns="0" bIns="0">
-            <a:spAutoFit/>
-          </a:bodyPr>
-          <a:lstStyle/>
-          <a:p>
-            <a:pPr>
-              <a:defRPr sz="1800" b="1" i="0">
-                <a:solidFill>
-                  <a:srgbClr val="1D7E7E"/>
-                </a:solidFill>
-                <a:latin typeface="Cambria"/>
-              </a:defRPr>
-            </a:pPr>
-            <a:r>
-              <a:t>Validated</a:t>
-            </a:r>
-          </a:p>
-        </p:txBody>
-      </p:sp>
-      <p:sp>
-        <p:nvSpPr>
-          <p:cNvPr id="16" name="TextBox 15"/>
-          <p:cNvSpPr txBox="1"/>
-          <p:nvPr/>
-        </p:nvSpPr>
-        <p:spPr>
-          <a:xfrm>
-            <a:off x="8366760" y="3520440"/>
-            <a:ext cx="3200400" cy="822960"/>
-          </a:xfrm>
-          <a:prstGeom prst="rect">
-            <a:avLst/>
-          </a:prstGeom>
-          <a:noFill/>
-        </p:spPr>
-        <p:txBody>
-          <a:bodyPr wrap="square" lIns="0" rIns="0" tIns="0" bIns="0">
-            <a:spAutoFit/>
-          </a:bodyPr>
-          <a:lstStyle/>
-          <a:p>
-            <a:pPr>
-              <a:defRPr sz="1000" b="0" i="0">
-                <a:solidFill>
-                  <a:srgbClr val="CBD8E0"/>
-                </a:solidFill>
-                <a:latin typeface="Calibri"/>
-              </a:defRPr>
-            </a:pPr>
-            <a:r>
-              <a:t>SOTA on CIFAR-10/100, ImageNet, DVS-CIFAR10. Generalizes to Transformer SNNs and event-based detection without modification.</a:t>
-            </a:r>
-          </a:p>
-        </p:txBody>
-      </p:sp>
-      <p:sp>
-        <p:nvSpPr>
-          <p:cNvPr id="17" name="TextBox 16"/>
-          <p:cNvSpPr txBox="1"/>
-          <p:nvPr/>
-        </p:nvSpPr>
-        <p:spPr>
-          <a:xfrm>
-            <a:off x="457200" y="4800600"/>
-            <a:ext cx="10058400" cy="274320"/>
-          </a:xfrm>
-          <a:prstGeom prst="rect">
-            <a:avLst/>
-          </a:prstGeom>
-          <a:noFill/>
-        </p:spPr>
-        <p:txBody>
-          <a:bodyPr wrap="square" lIns="0" rIns="0" tIns="0" bIns="0">
-            <a:spAutoFit/>
-          </a:bodyPr>
-          <a:lstStyle/>
-          <a:p>
-            <a:pPr>
-              <a:defRPr sz="1000" b="1" i="0">
-                <a:solidFill>
-                  <a:srgbClr val="E0B85F"/>
-                </a:solidFill>
-                <a:latin typeface="Calibri"/>
-              </a:defRPr>
-            </a:pPr>
-            <a:r>
-              <a:rPr spc="400"/>
-              <a:t>LIMITATIONS  &amp;  FUTURE  WORK</a:t>
-            </a:r>
-          </a:p>
-        </p:txBody>
-      </p:sp>
-      <p:sp>
-        <p:nvSpPr>
-          <p:cNvPr id="18" name="TextBox 17"/>
-          <p:cNvSpPr txBox="1"/>
-          <p:nvPr/>
-        </p:nvSpPr>
-        <p:spPr>
-          <a:xfrm>
-            <a:off x="457200" y="5120640"/>
-            <a:ext cx="11247120" cy="914400"/>
-          </a:xfrm>
-          <a:prstGeom prst="rect">
-            <a:avLst/>
-          </a:prstGeom>
-          <a:noFill/>
-        </p:spPr>
-        <p:txBody>
-          <a:bodyPr wrap="square" lIns="0" rIns="0" tIns="0" bIns="0">
-            <a:spAutoFit/>
-          </a:bodyPr>
-          <a:lstStyle/>
-          <a:p>
-            <a:pPr>
-              <a:defRPr sz="1100" b="0" i="0">
-                <a:solidFill>
-                  <a:srgbClr val="CBD8E0"/>
-                </a:solidFill>
-                <a:latin typeface="Calibri"/>
-              </a:defRPr>
-            </a:pPr>
-            <a:r>
-              <a:t>Per-layer constant approximates π only at the mean — richer parameterizations are open.</a:t>
+              <a:t>▸  Hardware-aware adaptation:  Loihi, Akida, TrueNorth</a:t>
             </a:r>
             <a:br/>
             <a:r>
-              <a:t>Hardware with fixed neuron parameters needs quantization-aware adaptation.</a:t>
-            </a:r>
-            <a:br/>
-            <a:r>
-              <a:t>Beyond LIF: extending the principles to adaptive LIF, Izhikevich, and large foundation-scale SNNs.</a:t>
-            </a:r>
-          </a:p>
-        </p:txBody>
-      </p:sp>
-      <p:sp>
-        <p:nvSpPr>
-          <p:cNvPr id="19" name="Rectangle 18"/>
+              <a:t>▸  Beyond LIF:  adaptive LIF, Izhikevich, foundation-scale SNNs</a:t>
+            </a:r>
+          </a:p>
+        </p:txBody>
+      </p:sp>
+      <p:sp>
+        <p:nvSpPr>
+          <p:cNvPr id="12" name="Rectangle 11"/>
           <p:cNvSpPr/>
           <p:nvPr/>
         </p:nvSpPr>
@@ -11031,13 +10757,13 @@
       </p:sp>
       <p:sp>
         <p:nvSpPr>
-          <p:cNvPr id="20" name="TextBox 19"/>
-          <p:cNvSpPr txBox="1"/>
-          <p:nvPr/>
-        </p:nvSpPr>
-        <p:spPr>
-          <a:xfrm>
-            <a:off x="640080" y="6400800"/>
+          <p:cNvPr id="13" name="TextBox 12"/>
+          <p:cNvSpPr txBox="1"/>
+          <p:nvPr/>
+        </p:nvSpPr>
+        <p:spPr>
+          <a:xfrm>
+            <a:off x="640080" y="6373368"/>
             <a:ext cx="10972800" cy="365760"/>
           </a:xfrm>
           <a:prstGeom prst="rect">
@@ -11052,7 +10778,7 @@
           <a:lstStyle/>
           <a:p>
             <a:pPr>
-              <a:defRPr sz="2000" b="1" i="1">
+              <a:defRPr sz="2200" b="1" i="1">
                 <a:solidFill>
                   <a:srgbClr val="E0B85F"/>
                 </a:solidFill>
@@ -11067,7 +10793,7 @@
       </p:sp>
       <p:sp>
         <p:nvSpPr>
-          <p:cNvPr id="21" name="TextBox 20"/>
+          <p:cNvPr id="14" name="TextBox 13"/>
           <p:cNvSpPr txBox="1"/>
           <p:nvPr/>
         </p:nvSpPr>
@@ -13813,7 +13539,7 @@
             </a:r>
             <a:br/>
             <a:r>
-              <a:t>exactly the regimes where AS-SG and RS-SG both fail. We'll quantify on slide 13.</a:t>
+              <a:t>exactly the regimes where AS-SG and RS-SG both fail. We'll quantify in Part II.</a:t>
             </a:r>
           </a:p>
         </p:txBody>

--- a/Hyunho_Kook_Master_Defense.pptx
+++ b/Hyunho_Kook_Master_Defense.pptx
@@ -24,6 +24,7 @@
     <p:sldId id="272" r:id="rId23"/>
     <p:sldId id="273" r:id="rId24"/>
     <p:sldId id="274" r:id="rId25"/>
+    <p:sldId id="275" r:id="rId26"/>
   </p:sldIdLst>
   <p:sldSz cx="12191695" cy="6858000" type="screen4x3"/>
   <p:notesSz cx="6858000" cy="9144000"/>
@@ -4388,7 +4389,7 @@
               </a:defRPr>
             </a:pPr>
             <a:r>
-              <a:t>10 / 19</a:t>
+              <a:t>10 / 20</a:t>
             </a:r>
           </a:p>
         </p:txBody>
@@ -5232,7 +5233,7 @@
               </a:defRPr>
             </a:pPr>
             <a:r>
-              <a:t>11 / 19</a:t>
+              <a:t>11 / 20</a:t>
             </a:r>
           </a:p>
         </p:txBody>
@@ -6072,7 +6073,7 @@
               </a:defRPr>
             </a:pPr>
             <a:r>
-              <a:t>12 / 19</a:t>
+              <a:t>12 / 20</a:t>
             </a:r>
           </a:p>
         </p:txBody>
@@ -6840,7 +6841,7 @@
               </a:defRPr>
             </a:pPr>
             <a:r>
-              <a:t>13 / 19</a:t>
+              <a:t>13 / 20</a:t>
             </a:r>
           </a:p>
         </p:txBody>
@@ -6931,7 +6932,7 @@
               </a:defRPr>
             </a:pPr>
             <a:r>
-              <a:t>Why TrSG Works — A Closer Look</a:t>
+              <a:t>Why TrSG Works — A Stable Gradient</a:t>
             </a:r>
           </a:p>
         </p:txBody>
@@ -6967,35 +6968,56 @@
               </a:defRPr>
             </a:pPr>
             <a:r>
-              <a:t>Stable gradient across thresholds  ·  real trainings actually visit those regimes</a:t>
-            </a:r>
-          </a:p>
-        </p:txBody>
-      </p:sp>
-      <p:pic>
-        <p:nvPicPr>
-          <p:cNvPr id="5" name="Picture 4" descr="no_training_acc.png"/>
-          <p:cNvPicPr>
-            <a:picLocks noChangeAspect="1"/>
-          </p:cNvPicPr>
-          <p:nvPr/>
-        </p:nvPicPr>
-        <p:blipFill>
-          <a:blip r:embed="rId2"/>
-          <a:stretch>
-            <a:fillRect/>
-          </a:stretch>
-        </p:blipFill>
-        <p:spPr>
-          <a:xfrm>
-            <a:off x="3108960" y="2194560"/>
-            <a:ext cx="5943600" cy="2329249"/>
-          </a:xfrm>
-          <a:prstGeom prst="rect">
-            <a:avLst/>
-          </a:prstGeom>
-        </p:spPr>
-      </p:pic>
+              <a:t>Three stability metrics tell the same story across extreme V_thr</a:t>
+            </a:r>
+          </a:p>
+        </p:txBody>
+      </p:sp>
+      <p:sp>
+        <p:nvSpPr>
+          <p:cNvPr id="5" name="Rectangle 4"/>
+          <p:cNvSpPr/>
+          <p:nvPr/>
+        </p:nvSpPr>
+        <p:spPr>
+          <a:xfrm>
+            <a:off x="457200" y="2240280"/>
+            <a:ext cx="3703320" cy="960120"/>
+          </a:xfrm>
+          <a:prstGeom prst="rect">
+            <a:avLst/>
+          </a:prstGeom>
+          <a:solidFill>
+            <a:srgbClr val="F8F7F2"/>
+          </a:solidFill>
+          <a:ln w="6350">
+            <a:solidFill>
+              <a:srgbClr val="E5E5E0"/>
+            </a:solidFill>
+          </a:ln>
+        </p:spPr>
+        <p:style>
+          <a:lnRef idx="1">
+            <a:schemeClr val="accent1"/>
+          </a:lnRef>
+          <a:fillRef idx="3">
+            <a:schemeClr val="accent1"/>
+          </a:fillRef>
+          <a:effectRef idx="2">
+            <a:schemeClr val="accent1"/>
+          </a:effectRef>
+          <a:fontRef idx="minor">
+            <a:schemeClr val="lt1"/>
+          </a:fontRef>
+        </p:style>
+        <p:txBody>
+          <a:bodyPr rtlCol="0" anchor="ctr"/>
+          <a:lstStyle/>
+          <a:p>
+            <a:pPr algn="ctr"/>
+          </a:p>
+        </p:txBody>
+      </p:sp>
       <p:sp>
         <p:nvSpPr>
           <p:cNvPr id="6" name="TextBox 5"/>
@@ -7004,76 +7026,1772 @@
         </p:nvSpPr>
         <p:spPr>
           <a:xfrm>
-            <a:off x="457200" y="4800600"/>
-            <a:ext cx="11247120" cy="1280160"/>
-          </a:xfrm>
-          <a:prstGeom prst="rect">
-            <a:avLst/>
-          </a:prstGeom>
-          <a:noFill/>
-        </p:spPr>
-        <p:txBody>
-          <a:bodyPr wrap="square">
-            <a:spAutoFit/>
-          </a:bodyPr>
-          <a:lstStyle/>
-          <a:p>
-            <a:pPr>
-              <a:defRPr sz="1200">
+            <a:off x="594360" y="2313432"/>
+            <a:ext cx="3429000" cy="274320"/>
+          </a:xfrm>
+          <a:prstGeom prst="rect">
+            <a:avLst/>
+          </a:prstGeom>
+          <a:noFill/>
+        </p:spPr>
+        <p:txBody>
+          <a:bodyPr wrap="square" lIns="0" rIns="0" tIns="0" bIns="0">
+            <a:spAutoFit/>
+          </a:bodyPr>
+          <a:lstStyle/>
+          <a:p>
+            <a:pPr>
+              <a:defRPr sz="1200" b="1" i="0">
+                <a:solidFill>
+                  <a:srgbClr val="0F2540"/>
+                </a:solidFill>
+                <a:latin typeface="Calibri"/>
+              </a:defRPr>
+            </a:pPr>
+            <a:r>
+              <a:t>AbsStr</a:t>
+            </a:r>
+          </a:p>
+        </p:txBody>
+      </p:sp>
+      <p:sp>
+        <p:nvSpPr>
+          <p:cNvPr id="7" name="TextBox 6"/>
+          <p:cNvSpPr txBox="1"/>
+          <p:nvPr/>
+        </p:nvSpPr>
+        <p:spPr>
+          <a:xfrm>
+            <a:off x="594360" y="2606040"/>
+            <a:ext cx="3429000" cy="274320"/>
+          </a:xfrm>
+          <a:prstGeom prst="rect">
+            <a:avLst/>
+          </a:prstGeom>
+          <a:noFill/>
+        </p:spPr>
+        <p:txBody>
+          <a:bodyPr wrap="square" lIns="0" rIns="0" tIns="0" bIns="0">
+            <a:spAutoFit/>
+          </a:bodyPr>
+          <a:lstStyle/>
+          <a:p>
+            <a:pPr>
+              <a:defRPr sz="1100" b="0" i="0">
                 <a:solidFill>
                   <a:srgbClr val="1A1A1A"/>
                 </a:solidFill>
-                <a:latin typeface="Calibri"/>
-              </a:defRPr>
-            </a:pPr>
-            <a:r>
-              <a:t>▸  TrSG wins at every V_thr — most dramatically at the extremes (74.0 vs 61.6 / div. at V_thr=0.1; 64.3 vs 18.1 / 5.4 at V_thr=2.0)</a:t>
-            </a:r>
-          </a:p>
-          <a:p>
-            <a:pPr>
-              <a:spcBef>
-                <a:spcPts val="600"/>
-              </a:spcBef>
-              <a:defRPr sz="1200">
+                <a:latin typeface="Cambria Math"/>
+              </a:defRPr>
+            </a:pPr>
+            <a:r>
+              <a:t>mean |gradient|</a:t>
+            </a:r>
+          </a:p>
+        </p:txBody>
+      </p:sp>
+      <p:sp>
+        <p:nvSpPr>
+          <p:cNvPr id="8" name="TextBox 7"/>
+          <p:cNvSpPr txBox="1"/>
+          <p:nvPr/>
+        </p:nvSpPr>
+        <p:spPr>
+          <a:xfrm>
+            <a:off x="594360" y="2898648"/>
+            <a:ext cx="3429000" cy="274320"/>
+          </a:xfrm>
+          <a:prstGeom prst="rect">
+            <a:avLst/>
+          </a:prstGeom>
+          <a:noFill/>
+        </p:spPr>
+        <p:txBody>
+          <a:bodyPr wrap="square" lIns="0" rIns="0" tIns="0" bIns="0">
+            <a:spAutoFit/>
+          </a:bodyPr>
+          <a:lstStyle/>
+          <a:p>
+            <a:pPr>
+              <a:defRPr sz="900" b="0" i="1">
+                <a:solidFill>
+                  <a:srgbClr val="7A7A7A"/>
+                </a:solidFill>
+                <a:latin typeface="Calibri"/>
+              </a:defRPr>
+            </a:pPr>
+            <a:r>
+              <a:t>low → vanishing,   high → exploding</a:t>
+            </a:r>
+          </a:p>
+        </p:txBody>
+      </p:sp>
+      <p:sp>
+        <p:nvSpPr>
+          <p:cNvPr id="9" name="Rectangle 8"/>
+          <p:cNvSpPr/>
+          <p:nvPr/>
+        </p:nvSpPr>
+        <p:spPr>
+          <a:xfrm>
+            <a:off x="4251960" y="2240280"/>
+            <a:ext cx="3703320" cy="960120"/>
+          </a:xfrm>
+          <a:prstGeom prst="rect">
+            <a:avLst/>
+          </a:prstGeom>
+          <a:solidFill>
+            <a:srgbClr val="F8F7F2"/>
+          </a:solidFill>
+          <a:ln w="6350">
+            <a:solidFill>
+              <a:srgbClr val="E5E5E0"/>
+            </a:solidFill>
+          </a:ln>
+        </p:spPr>
+        <p:style>
+          <a:lnRef idx="1">
+            <a:schemeClr val="accent1"/>
+          </a:lnRef>
+          <a:fillRef idx="3">
+            <a:schemeClr val="accent1"/>
+          </a:fillRef>
+          <a:effectRef idx="2">
+            <a:schemeClr val="accent1"/>
+          </a:effectRef>
+          <a:fontRef idx="minor">
+            <a:schemeClr val="lt1"/>
+          </a:fontRef>
+        </p:style>
+        <p:txBody>
+          <a:bodyPr rtlCol="0" anchor="ctr"/>
+          <a:lstStyle/>
+          <a:p>
+            <a:pPr algn="ctr"/>
+          </a:p>
+        </p:txBody>
+      </p:sp>
+      <p:sp>
+        <p:nvSpPr>
+          <p:cNvPr id="10" name="TextBox 9"/>
+          <p:cNvSpPr txBox="1"/>
+          <p:nvPr/>
+        </p:nvSpPr>
+        <p:spPr>
+          <a:xfrm>
+            <a:off x="4389120" y="2313432"/>
+            <a:ext cx="3429000" cy="274320"/>
+          </a:xfrm>
+          <a:prstGeom prst="rect">
+            <a:avLst/>
+          </a:prstGeom>
+          <a:noFill/>
+        </p:spPr>
+        <p:txBody>
+          <a:bodyPr wrap="square" lIns="0" rIns="0" tIns="0" bIns="0">
+            <a:spAutoFit/>
+          </a:bodyPr>
+          <a:lstStyle/>
+          <a:p>
+            <a:pPr>
+              <a:defRPr sz="1200" b="1" i="0">
+                <a:solidFill>
+                  <a:srgbClr val="0F2540"/>
+                </a:solidFill>
+                <a:latin typeface="Calibri"/>
+              </a:defRPr>
+            </a:pPr>
+            <a:r>
+              <a:t>RatioAG</a:t>
+            </a:r>
+          </a:p>
+        </p:txBody>
+      </p:sp>
+      <p:sp>
+        <p:nvSpPr>
+          <p:cNvPr id="11" name="TextBox 10"/>
+          <p:cNvSpPr txBox="1"/>
+          <p:nvPr/>
+        </p:nvSpPr>
+        <p:spPr>
+          <a:xfrm>
+            <a:off x="4389120" y="2606040"/>
+            <a:ext cx="3429000" cy="274320"/>
+          </a:xfrm>
+          <a:prstGeom prst="rect">
+            <a:avLst/>
+          </a:prstGeom>
+          <a:noFill/>
+        </p:spPr>
+        <p:txBody>
+          <a:bodyPr wrap="square" lIns="0" rIns="0" tIns="0" bIns="0">
+            <a:spAutoFit/>
+          </a:bodyPr>
+          <a:lstStyle/>
+          <a:p>
+            <a:pPr>
+              <a:defRPr sz="1100" b="0" i="0">
                 <a:solidFill>
                   <a:srgbClr val="1A1A1A"/>
                 </a:solidFill>
-                <a:latin typeface="Calibri"/>
-              </a:defRPr>
-            </a:pPr>
-            <a:r>
-              <a:t>▸  AS-SG and RS-SG only work in a narrow band around V_thr=1.0</a:t>
-            </a:r>
-          </a:p>
-          <a:p>
-            <a:pPr>
-              <a:spcBef>
-                <a:spcPts val="600"/>
-              </a:spcBef>
-              <a:defRPr sz="1200">
+                <a:latin typeface="Cambria Math"/>
+              </a:defRPr>
+            </a:pPr>
+            <a:r>
+              <a:t>% neurons with active gradient</a:t>
+            </a:r>
+          </a:p>
+        </p:txBody>
+      </p:sp>
+      <p:sp>
+        <p:nvSpPr>
+          <p:cNvPr id="12" name="TextBox 11"/>
+          <p:cNvSpPr txBox="1"/>
+          <p:nvPr/>
+        </p:nvSpPr>
+        <p:spPr>
+          <a:xfrm>
+            <a:off x="4389120" y="2898648"/>
+            <a:ext cx="3429000" cy="274320"/>
+          </a:xfrm>
+          <a:prstGeom prst="rect">
+            <a:avLst/>
+          </a:prstGeom>
+          <a:noFill/>
+        </p:spPr>
+        <p:txBody>
+          <a:bodyPr wrap="square" lIns="0" rIns="0" tIns="0" bIns="0">
+            <a:spAutoFit/>
+          </a:bodyPr>
+          <a:lstStyle/>
+          <a:p>
+            <a:pPr>
+              <a:defRPr sz="900" b="0" i="1">
+                <a:solidFill>
+                  <a:srgbClr val="7A7A7A"/>
+                </a:solidFill>
+                <a:latin typeface="Calibri"/>
+              </a:defRPr>
+            </a:pPr>
+            <a:r>
+              <a:t>low → starvation,   high → flooding</a:t>
+            </a:r>
+          </a:p>
+        </p:txBody>
+      </p:sp>
+      <p:sp>
+        <p:nvSpPr>
+          <p:cNvPr id="13" name="Rectangle 12"/>
+          <p:cNvSpPr/>
+          <p:nvPr/>
+        </p:nvSpPr>
+        <p:spPr>
+          <a:xfrm>
+            <a:off x="8046720" y="2240280"/>
+            <a:ext cx="3703320" cy="960120"/>
+          </a:xfrm>
+          <a:prstGeom prst="rect">
+            <a:avLst/>
+          </a:prstGeom>
+          <a:solidFill>
+            <a:srgbClr val="F8F7F2"/>
+          </a:solidFill>
+          <a:ln w="6350">
+            <a:solidFill>
+              <a:srgbClr val="E5E5E0"/>
+            </a:solidFill>
+          </a:ln>
+        </p:spPr>
+        <p:style>
+          <a:lnRef idx="1">
+            <a:schemeClr val="accent1"/>
+          </a:lnRef>
+          <a:fillRef idx="3">
+            <a:schemeClr val="accent1"/>
+          </a:fillRef>
+          <a:effectRef idx="2">
+            <a:schemeClr val="accent1"/>
+          </a:effectRef>
+          <a:fontRef idx="minor">
+            <a:schemeClr val="lt1"/>
+          </a:fontRef>
+        </p:style>
+        <p:txBody>
+          <a:bodyPr rtlCol="0" anchor="ctr"/>
+          <a:lstStyle/>
+          <a:p>
+            <a:pPr algn="ctr"/>
+          </a:p>
+        </p:txBody>
+      </p:sp>
+      <p:sp>
+        <p:nvSpPr>
+          <p:cNvPr id="14" name="TextBox 13"/>
+          <p:cNvSpPr txBox="1"/>
+          <p:nvPr/>
+        </p:nvSpPr>
+        <p:spPr>
+          <a:xfrm>
+            <a:off x="8183880" y="2313432"/>
+            <a:ext cx="3429000" cy="274320"/>
+          </a:xfrm>
+          <a:prstGeom prst="rect">
+            <a:avLst/>
+          </a:prstGeom>
+          <a:noFill/>
+        </p:spPr>
+        <p:txBody>
+          <a:bodyPr wrap="square" lIns="0" rIns="0" tIns="0" bIns="0">
+            <a:spAutoFit/>
+          </a:bodyPr>
+          <a:lstStyle/>
+          <a:p>
+            <a:pPr>
+              <a:defRPr sz="1200" b="1" i="0">
+                <a:solidFill>
+                  <a:srgbClr val="0F2540"/>
+                </a:solidFill>
+                <a:latin typeface="Calibri"/>
+              </a:defRPr>
+            </a:pPr>
+            <a:r>
+              <a:t>GradCV</a:t>
+            </a:r>
+          </a:p>
+        </p:txBody>
+      </p:sp>
+      <p:sp>
+        <p:nvSpPr>
+          <p:cNvPr id="15" name="TextBox 14"/>
+          <p:cNvSpPr txBox="1"/>
+          <p:nvPr/>
+        </p:nvSpPr>
+        <p:spPr>
+          <a:xfrm>
+            <a:off x="8183880" y="2606040"/>
+            <a:ext cx="3429000" cy="274320"/>
+          </a:xfrm>
+          <a:prstGeom prst="rect">
+            <a:avLst/>
+          </a:prstGeom>
+          <a:noFill/>
+        </p:spPr>
+        <p:txBody>
+          <a:bodyPr wrap="square" lIns="0" rIns="0" tIns="0" bIns="0">
+            <a:spAutoFit/>
+          </a:bodyPr>
+          <a:lstStyle/>
+          <a:p>
+            <a:pPr>
+              <a:defRPr sz="1100" b="0" i="0">
                 <a:solidFill>
                   <a:srgbClr val="1A1A1A"/>
                 </a:solidFill>
-                <a:latin typeface="Calibri"/>
-              </a:defRPr>
-            </a:pPr>
-            <a:r>
-              <a:t>▸  Real trainings DO visit V_thr ≪ 1 (early layers) and V_thr ≫ 1 (deep layers)</a:t>
-            </a:r>
-          </a:p>
-        </p:txBody>
-      </p:sp>
-      <p:sp>
-        <p:nvSpPr>
-          <p:cNvPr id="7" name="Rectangle 6"/>
+                <a:latin typeface="Cambria Math"/>
+              </a:defRPr>
+            </a:pPr>
+            <a:r>
+              <a:t>std / mean of |gradient|</a:t>
+            </a:r>
+          </a:p>
+        </p:txBody>
+      </p:sp>
+      <p:sp>
+        <p:nvSpPr>
+          <p:cNvPr id="16" name="TextBox 15"/>
+          <p:cNvSpPr txBox="1"/>
+          <p:nvPr/>
+        </p:nvSpPr>
+        <p:spPr>
+          <a:xfrm>
+            <a:off x="8183880" y="2898648"/>
+            <a:ext cx="3429000" cy="274320"/>
+          </a:xfrm>
+          <a:prstGeom prst="rect">
+            <a:avLst/>
+          </a:prstGeom>
+          <a:noFill/>
+        </p:spPr>
+        <p:txBody>
+          <a:bodyPr wrap="square" lIns="0" rIns="0" tIns="0" bIns="0">
+            <a:spAutoFit/>
+          </a:bodyPr>
+          <a:lstStyle/>
+          <a:p>
+            <a:pPr>
+              <a:defRPr sz="900" b="0" i="1">
+                <a:solidFill>
+                  <a:srgbClr val="7A7A7A"/>
+                </a:solidFill>
+                <a:latin typeface="Calibri"/>
+              </a:defRPr>
+            </a:pPr>
+            <a:r>
+              <a:t>high → unstable, hard-to-tune updates</a:t>
+            </a:r>
+          </a:p>
+        </p:txBody>
+      </p:sp>
+      <p:sp>
+        <p:nvSpPr>
+          <p:cNvPr id="17" name="TextBox 16"/>
+          <p:cNvSpPr txBox="1"/>
+          <p:nvPr/>
+        </p:nvSpPr>
+        <p:spPr>
+          <a:xfrm>
+            <a:off x="457200" y="3383280"/>
+            <a:ext cx="11247120" cy="274320"/>
+          </a:xfrm>
+          <a:prstGeom prst="rect">
+            <a:avLst/>
+          </a:prstGeom>
+          <a:noFill/>
+        </p:spPr>
+        <p:txBody>
+          <a:bodyPr wrap="square" lIns="0" rIns="0" tIns="0" bIns="0">
+            <a:spAutoFit/>
+          </a:bodyPr>
+          <a:lstStyle/>
+          <a:p>
+            <a:pPr>
+              <a:defRPr sz="1000" b="0" i="1">
+                <a:solidFill>
+                  <a:srgbClr val="7A7A7A"/>
+                </a:solidFill>
+                <a:latin typeface="Calibri"/>
+              </a:defRPr>
+            </a:pPr>
+            <a:r>
+              <a:t>Stress-test metrics at epoch 100 — CIFAR-100, ResNet-19, τ=2.0 frozen</a:t>
+            </a:r>
+          </a:p>
+        </p:txBody>
+      </p:sp>
+      <p:sp>
+        <p:nvSpPr>
+          <p:cNvPr id="18" name="Rectangle 17"/>
           <p:cNvSpPr/>
           <p:nvPr/>
         </p:nvSpPr>
         <p:spPr>
           <a:xfrm>
-            <a:off x="457200" y="6080760"/>
-            <a:ext cx="54864" cy="411480"/>
+            <a:off x="457200" y="3703320"/>
+            <a:ext cx="5532120" cy="2194560"/>
+          </a:xfrm>
+          <a:prstGeom prst="rect">
+            <a:avLst/>
+          </a:prstGeom>
+          <a:solidFill>
+            <a:srgbClr val="F8F7F2"/>
+          </a:solidFill>
+          <a:ln w="12700">
+            <a:solidFill>
+              <a:srgbClr val="0F2540"/>
+            </a:solidFill>
+          </a:ln>
+        </p:spPr>
+        <p:style>
+          <a:lnRef idx="1">
+            <a:schemeClr val="accent1"/>
+          </a:lnRef>
+          <a:fillRef idx="3">
+            <a:schemeClr val="accent1"/>
+          </a:fillRef>
+          <a:effectRef idx="2">
+            <a:schemeClr val="accent1"/>
+          </a:effectRef>
+          <a:fontRef idx="minor">
+            <a:schemeClr val="lt1"/>
+          </a:fontRef>
+        </p:style>
+        <p:txBody>
+          <a:bodyPr rtlCol="0" anchor="ctr"/>
+          <a:lstStyle/>
+          <a:p>
+            <a:pPr algn="ctr"/>
+          </a:p>
+        </p:txBody>
+      </p:sp>
+      <p:sp>
+        <p:nvSpPr>
+          <p:cNvPr id="19" name="TextBox 18"/>
+          <p:cNvSpPr txBox="1"/>
+          <p:nvPr/>
+        </p:nvSpPr>
+        <p:spPr>
+          <a:xfrm>
+            <a:off x="640080" y="3794759"/>
+            <a:ext cx="5303520" cy="274320"/>
+          </a:xfrm>
+          <a:prstGeom prst="rect">
+            <a:avLst/>
+          </a:prstGeom>
+          <a:noFill/>
+        </p:spPr>
+        <p:txBody>
+          <a:bodyPr wrap="square" lIns="0" rIns="0" tIns="0" bIns="0">
+            <a:spAutoFit/>
+          </a:bodyPr>
+          <a:lstStyle/>
+          <a:p>
+            <a:pPr>
+              <a:defRPr sz="1200" b="1" i="0">
+                <a:solidFill>
+                  <a:srgbClr val="0F2540"/>
+                </a:solidFill>
+                <a:latin typeface="Calibri"/>
+              </a:defRPr>
+            </a:pPr>
+            <a:r>
+              <a:t>V_thr = 0.1   (small threshold)</a:t>
+            </a:r>
+          </a:p>
+        </p:txBody>
+      </p:sp>
+      <p:sp>
+        <p:nvSpPr>
+          <p:cNvPr id="20" name="TextBox 19"/>
+          <p:cNvSpPr txBox="1"/>
+          <p:nvPr/>
+        </p:nvSpPr>
+        <p:spPr>
+          <a:xfrm>
+            <a:off x="1874519" y="4160520"/>
+            <a:ext cx="1188720" cy="228600"/>
+          </a:xfrm>
+          <a:prstGeom prst="rect">
+            <a:avLst/>
+          </a:prstGeom>
+          <a:noFill/>
+        </p:spPr>
+        <p:txBody>
+          <a:bodyPr wrap="square" lIns="0" rIns="0" tIns="0" bIns="0">
+            <a:spAutoFit/>
+          </a:bodyPr>
+          <a:lstStyle/>
+          <a:p>
+            <a:pPr>
+              <a:defRPr sz="900" b="1" i="0">
+                <a:solidFill>
+                  <a:srgbClr val="1D7E7E"/>
+                </a:solidFill>
+                <a:latin typeface="Calibri"/>
+              </a:defRPr>
+            </a:pPr>
+            <a:r>
+              <a:t>SG</a:t>
+            </a:r>
+          </a:p>
+        </p:txBody>
+      </p:sp>
+      <p:sp>
+        <p:nvSpPr>
+          <p:cNvPr id="21" name="TextBox 20"/>
+          <p:cNvSpPr txBox="1"/>
+          <p:nvPr/>
+        </p:nvSpPr>
+        <p:spPr>
+          <a:xfrm>
+            <a:off x="3200400" y="4160520"/>
+            <a:ext cx="1188720" cy="228600"/>
+          </a:xfrm>
+          <a:prstGeom prst="rect">
+            <a:avLst/>
+          </a:prstGeom>
+          <a:noFill/>
+        </p:spPr>
+        <p:txBody>
+          <a:bodyPr wrap="square" lIns="0" rIns="0" tIns="0" bIns="0">
+            <a:spAutoFit/>
+          </a:bodyPr>
+          <a:lstStyle/>
+          <a:p>
+            <a:pPr>
+              <a:defRPr sz="900" b="1" i="0">
+                <a:solidFill>
+                  <a:srgbClr val="1D7E7E"/>
+                </a:solidFill>
+                <a:latin typeface="Calibri"/>
+              </a:defRPr>
+            </a:pPr>
+            <a:r>
+              <a:t>AbsStr</a:t>
+            </a:r>
+          </a:p>
+        </p:txBody>
+      </p:sp>
+      <p:sp>
+        <p:nvSpPr>
+          <p:cNvPr id="22" name="TextBox 21"/>
+          <p:cNvSpPr txBox="1"/>
+          <p:nvPr/>
+        </p:nvSpPr>
+        <p:spPr>
+          <a:xfrm>
+            <a:off x="4389120" y="4160520"/>
+            <a:ext cx="1188720" cy="228600"/>
+          </a:xfrm>
+          <a:prstGeom prst="rect">
+            <a:avLst/>
+          </a:prstGeom>
+          <a:noFill/>
+        </p:spPr>
+        <p:txBody>
+          <a:bodyPr wrap="square" lIns="0" rIns="0" tIns="0" bIns="0">
+            <a:spAutoFit/>
+          </a:bodyPr>
+          <a:lstStyle/>
+          <a:p>
+            <a:pPr>
+              <a:defRPr sz="900" b="1" i="0">
+                <a:solidFill>
+                  <a:srgbClr val="1D7E7E"/>
+                </a:solidFill>
+                <a:latin typeface="Calibri"/>
+              </a:defRPr>
+            </a:pPr>
+            <a:r>
+              <a:t>RatioAG</a:t>
+            </a:r>
+          </a:p>
+        </p:txBody>
+      </p:sp>
+      <p:sp>
+        <p:nvSpPr>
+          <p:cNvPr id="23" name="TextBox 22"/>
+          <p:cNvSpPr txBox="1"/>
+          <p:nvPr/>
+        </p:nvSpPr>
+        <p:spPr>
+          <a:xfrm>
+            <a:off x="5394960" y="4160520"/>
+            <a:ext cx="1188720" cy="228600"/>
+          </a:xfrm>
+          <a:prstGeom prst="rect">
+            <a:avLst/>
+          </a:prstGeom>
+          <a:noFill/>
+        </p:spPr>
+        <p:txBody>
+          <a:bodyPr wrap="square" lIns="0" rIns="0" tIns="0" bIns="0">
+            <a:spAutoFit/>
+          </a:bodyPr>
+          <a:lstStyle/>
+          <a:p>
+            <a:pPr>
+              <a:defRPr sz="900" b="1" i="0">
+                <a:solidFill>
+                  <a:srgbClr val="1D7E7E"/>
+                </a:solidFill>
+                <a:latin typeface="Calibri"/>
+              </a:defRPr>
+            </a:pPr>
+            <a:r>
+              <a:t>GradCV</a:t>
+            </a:r>
+          </a:p>
+        </p:txBody>
+      </p:sp>
+      <p:sp>
+        <p:nvSpPr>
+          <p:cNvPr id="24" name="TextBox 23"/>
+          <p:cNvSpPr txBox="1"/>
+          <p:nvPr/>
+        </p:nvSpPr>
+        <p:spPr>
+          <a:xfrm>
+            <a:off x="640080" y="4480559"/>
+            <a:ext cx="1280160" cy="274320"/>
+          </a:xfrm>
+          <a:prstGeom prst="rect">
+            <a:avLst/>
+          </a:prstGeom>
+          <a:noFill/>
+        </p:spPr>
+        <p:txBody>
+          <a:bodyPr wrap="square" lIns="0" rIns="0" tIns="0" bIns="0">
+            <a:spAutoFit/>
+          </a:bodyPr>
+          <a:lstStyle/>
+          <a:p>
+            <a:pPr>
+              <a:defRPr sz="1100" b="1" i="0">
+                <a:solidFill>
+                  <a:srgbClr val="E56945"/>
+                </a:solidFill>
+                <a:latin typeface="Calibri"/>
+              </a:defRPr>
+            </a:pPr>
+            <a:r>
+              <a:t>AS-SG</a:t>
+            </a:r>
+          </a:p>
+        </p:txBody>
+      </p:sp>
+      <p:sp>
+        <p:nvSpPr>
+          <p:cNvPr id="25" name="TextBox 24"/>
+          <p:cNvSpPr txBox="1"/>
+          <p:nvPr/>
+        </p:nvSpPr>
+        <p:spPr>
+          <a:xfrm>
+            <a:off x="2057400" y="4480559"/>
+            <a:ext cx="1188720" cy="274320"/>
+          </a:xfrm>
+          <a:prstGeom prst="rect">
+            <a:avLst/>
+          </a:prstGeom>
+          <a:noFill/>
+        </p:spPr>
+        <p:txBody>
+          <a:bodyPr wrap="square" lIns="0" rIns="0" tIns="0" bIns="0">
+            <a:spAutoFit/>
+          </a:bodyPr>
+          <a:lstStyle/>
+          <a:p>
+            <a:pPr>
+              <a:defRPr sz="1050" b="0" i="0">
+                <a:solidFill>
+                  <a:srgbClr val="E56945"/>
+                </a:solidFill>
+                <a:latin typeface="Consolas"/>
+              </a:defRPr>
+            </a:pPr>
+            <a:r>
+              <a:t>0.0145</a:t>
+            </a:r>
+          </a:p>
+        </p:txBody>
+      </p:sp>
+      <p:sp>
+        <p:nvSpPr>
+          <p:cNvPr id="26" name="TextBox 25"/>
+          <p:cNvSpPr txBox="1"/>
+          <p:nvPr/>
+        </p:nvSpPr>
+        <p:spPr>
+          <a:xfrm>
+            <a:off x="3246120" y="4480559"/>
+            <a:ext cx="1188720" cy="274320"/>
+          </a:xfrm>
+          <a:prstGeom prst="rect">
+            <a:avLst/>
+          </a:prstGeom>
+          <a:noFill/>
+        </p:spPr>
+        <p:txBody>
+          <a:bodyPr wrap="square" lIns="0" rIns="0" tIns="0" bIns="0">
+            <a:spAutoFit/>
+          </a:bodyPr>
+          <a:lstStyle/>
+          <a:p>
+            <a:pPr>
+              <a:defRPr sz="1050" b="0" i="0">
+                <a:solidFill>
+                  <a:srgbClr val="E56945"/>
+                </a:solidFill>
+                <a:latin typeface="Consolas"/>
+              </a:defRPr>
+            </a:pPr>
+            <a:r>
+              <a:t>90.20%</a:t>
+            </a:r>
+          </a:p>
+        </p:txBody>
+      </p:sp>
+      <p:sp>
+        <p:nvSpPr>
+          <p:cNvPr id="27" name="TextBox 26"/>
+          <p:cNvSpPr txBox="1"/>
+          <p:nvPr/>
+        </p:nvSpPr>
+        <p:spPr>
+          <a:xfrm>
+            <a:off x="4434840" y="4480559"/>
+            <a:ext cx="1188720" cy="274320"/>
+          </a:xfrm>
+          <a:prstGeom prst="rect">
+            <a:avLst/>
+          </a:prstGeom>
+          <a:noFill/>
+        </p:spPr>
+        <p:txBody>
+          <a:bodyPr wrap="square" lIns="0" rIns="0" tIns="0" bIns="0">
+            <a:spAutoFit/>
+          </a:bodyPr>
+          <a:lstStyle/>
+          <a:p>
+            <a:pPr>
+              <a:defRPr sz="1050" b="0" i="0">
+                <a:solidFill>
+                  <a:srgbClr val="E56945"/>
+                </a:solidFill>
+                <a:latin typeface="Consolas"/>
+              </a:defRPr>
+            </a:pPr>
+            <a:r>
+              <a:t>1.22</a:t>
+            </a:r>
+          </a:p>
+        </p:txBody>
+      </p:sp>
+      <p:sp>
+        <p:nvSpPr>
+          <p:cNvPr id="28" name="TextBox 27"/>
+          <p:cNvSpPr txBox="1"/>
+          <p:nvPr/>
+        </p:nvSpPr>
+        <p:spPr>
+          <a:xfrm>
+            <a:off x="640080" y="4892040"/>
+            <a:ext cx="1280160" cy="274320"/>
+          </a:xfrm>
+          <a:prstGeom prst="rect">
+            <a:avLst/>
+          </a:prstGeom>
+          <a:noFill/>
+        </p:spPr>
+        <p:txBody>
+          <a:bodyPr wrap="square" lIns="0" rIns="0" tIns="0" bIns="0">
+            <a:spAutoFit/>
+          </a:bodyPr>
+          <a:lstStyle/>
+          <a:p>
+            <a:pPr>
+              <a:defRPr sz="1100" b="1" i="0">
+                <a:solidFill>
+                  <a:srgbClr val="E56945"/>
+                </a:solidFill>
+                <a:latin typeface="Calibri"/>
+              </a:defRPr>
+            </a:pPr>
+            <a:r>
+              <a:t>RS-SG</a:t>
+            </a:r>
+          </a:p>
+        </p:txBody>
+      </p:sp>
+      <p:sp>
+        <p:nvSpPr>
+          <p:cNvPr id="29" name="TextBox 28"/>
+          <p:cNvSpPr txBox="1"/>
+          <p:nvPr/>
+        </p:nvSpPr>
+        <p:spPr>
+          <a:xfrm>
+            <a:off x="2057400" y="4892040"/>
+            <a:ext cx="1188720" cy="274320"/>
+          </a:xfrm>
+          <a:prstGeom prst="rect">
+            <a:avLst/>
+          </a:prstGeom>
+          <a:noFill/>
+        </p:spPr>
+        <p:txBody>
+          <a:bodyPr wrap="square" lIns="0" rIns="0" tIns="0" bIns="0">
+            <a:spAutoFit/>
+          </a:bodyPr>
+          <a:lstStyle/>
+          <a:p>
+            <a:pPr>
+              <a:defRPr sz="1050" b="0" i="0">
+                <a:solidFill>
+                  <a:srgbClr val="E56945"/>
+                </a:solidFill>
+                <a:latin typeface="Consolas"/>
+              </a:defRPr>
+            </a:pPr>
+            <a:r>
+              <a:t>NaN</a:t>
+            </a:r>
+          </a:p>
+        </p:txBody>
+      </p:sp>
+      <p:sp>
+        <p:nvSpPr>
+          <p:cNvPr id="30" name="TextBox 29"/>
+          <p:cNvSpPr txBox="1"/>
+          <p:nvPr/>
+        </p:nvSpPr>
+        <p:spPr>
+          <a:xfrm>
+            <a:off x="3246120" y="4892040"/>
+            <a:ext cx="1188720" cy="274320"/>
+          </a:xfrm>
+          <a:prstGeom prst="rect">
+            <a:avLst/>
+          </a:prstGeom>
+          <a:noFill/>
+        </p:spPr>
+        <p:txBody>
+          <a:bodyPr wrap="square" lIns="0" rIns="0" tIns="0" bIns="0">
+            <a:spAutoFit/>
+          </a:bodyPr>
+          <a:lstStyle/>
+          <a:p>
+            <a:pPr>
+              <a:defRPr sz="1050" b="0" i="0">
+                <a:solidFill>
+                  <a:srgbClr val="E56945"/>
+                </a:solidFill>
+                <a:latin typeface="Consolas"/>
+              </a:defRPr>
+            </a:pPr>
+            <a:r>
+              <a:t>0.00%</a:t>
+            </a:r>
+          </a:p>
+        </p:txBody>
+      </p:sp>
+      <p:sp>
+        <p:nvSpPr>
+          <p:cNvPr id="31" name="TextBox 30"/>
+          <p:cNvSpPr txBox="1"/>
+          <p:nvPr/>
+        </p:nvSpPr>
+        <p:spPr>
+          <a:xfrm>
+            <a:off x="4434840" y="4892040"/>
+            <a:ext cx="1188720" cy="274320"/>
+          </a:xfrm>
+          <a:prstGeom prst="rect">
+            <a:avLst/>
+          </a:prstGeom>
+          <a:noFill/>
+        </p:spPr>
+        <p:txBody>
+          <a:bodyPr wrap="square" lIns="0" rIns="0" tIns="0" bIns="0">
+            <a:spAutoFit/>
+          </a:bodyPr>
+          <a:lstStyle/>
+          <a:p>
+            <a:pPr>
+              <a:defRPr sz="1050" b="0" i="0">
+                <a:solidFill>
+                  <a:srgbClr val="E56945"/>
+                </a:solidFill>
+                <a:latin typeface="Consolas"/>
+              </a:defRPr>
+            </a:pPr>
+            <a:r>
+              <a:t>NaN</a:t>
+            </a:r>
+          </a:p>
+        </p:txBody>
+      </p:sp>
+      <p:sp>
+        <p:nvSpPr>
+          <p:cNvPr id="32" name="TextBox 31"/>
+          <p:cNvSpPr txBox="1"/>
+          <p:nvPr/>
+        </p:nvSpPr>
+        <p:spPr>
+          <a:xfrm>
+            <a:off x="640080" y="5303520"/>
+            <a:ext cx="1280160" cy="274320"/>
+          </a:xfrm>
+          <a:prstGeom prst="rect">
+            <a:avLst/>
+          </a:prstGeom>
+          <a:noFill/>
+        </p:spPr>
+        <p:txBody>
+          <a:bodyPr wrap="square" lIns="0" rIns="0" tIns="0" bIns="0">
+            <a:spAutoFit/>
+          </a:bodyPr>
+          <a:lstStyle/>
+          <a:p>
+            <a:pPr>
+              <a:defRPr sz="1100" b="1" i="0">
+                <a:solidFill>
+                  <a:srgbClr val="1D7E7E"/>
+                </a:solidFill>
+                <a:latin typeface="Calibri"/>
+              </a:defRPr>
+            </a:pPr>
+            <a:r>
+              <a:t>TrSG</a:t>
+            </a:r>
+          </a:p>
+        </p:txBody>
+      </p:sp>
+      <p:sp>
+        <p:nvSpPr>
+          <p:cNvPr id="33" name="TextBox 32"/>
+          <p:cNvSpPr txBox="1"/>
+          <p:nvPr/>
+        </p:nvSpPr>
+        <p:spPr>
+          <a:xfrm>
+            <a:off x="2057400" y="5303520"/>
+            <a:ext cx="1188720" cy="274320"/>
+          </a:xfrm>
+          <a:prstGeom prst="rect">
+            <a:avLst/>
+          </a:prstGeom>
+          <a:noFill/>
+        </p:spPr>
+        <p:txBody>
+          <a:bodyPr wrap="square" lIns="0" rIns="0" tIns="0" bIns="0">
+            <a:spAutoFit/>
+          </a:bodyPr>
+          <a:lstStyle/>
+          <a:p>
+            <a:pPr>
+              <a:defRPr sz="1050" b="0" i="0">
+                <a:solidFill>
+                  <a:srgbClr val="1D7E7E"/>
+                </a:solidFill>
+                <a:latin typeface="Consolas"/>
+              </a:defRPr>
+            </a:pPr>
+            <a:r>
+              <a:t>0.0153</a:t>
+            </a:r>
+          </a:p>
+        </p:txBody>
+      </p:sp>
+      <p:sp>
+        <p:nvSpPr>
+          <p:cNvPr id="34" name="TextBox 33"/>
+          <p:cNvSpPr txBox="1"/>
+          <p:nvPr/>
+        </p:nvSpPr>
+        <p:spPr>
+          <a:xfrm>
+            <a:off x="3246120" y="5303520"/>
+            <a:ext cx="1188720" cy="274320"/>
+          </a:xfrm>
+          <a:prstGeom prst="rect">
+            <a:avLst/>
+          </a:prstGeom>
+          <a:noFill/>
+        </p:spPr>
+        <p:txBody>
+          <a:bodyPr wrap="square" lIns="0" rIns="0" tIns="0" bIns="0">
+            <a:spAutoFit/>
+          </a:bodyPr>
+          <a:lstStyle/>
+          <a:p>
+            <a:pPr>
+              <a:defRPr sz="1050" b="0" i="0">
+                <a:solidFill>
+                  <a:srgbClr val="1D7E7E"/>
+                </a:solidFill>
+                <a:latin typeface="Consolas"/>
+              </a:defRPr>
+            </a:pPr>
+            <a:r>
+              <a:t>21.45%</a:t>
+            </a:r>
+          </a:p>
+        </p:txBody>
+      </p:sp>
+      <p:sp>
+        <p:nvSpPr>
+          <p:cNvPr id="35" name="TextBox 34"/>
+          <p:cNvSpPr txBox="1"/>
+          <p:nvPr/>
+        </p:nvSpPr>
+        <p:spPr>
+          <a:xfrm>
+            <a:off x="4434840" y="5303520"/>
+            <a:ext cx="1188720" cy="274320"/>
+          </a:xfrm>
+          <a:prstGeom prst="rect">
+            <a:avLst/>
+          </a:prstGeom>
+          <a:noFill/>
+        </p:spPr>
+        <p:txBody>
+          <a:bodyPr wrap="square" lIns="0" rIns="0" tIns="0" bIns="0">
+            <a:spAutoFit/>
+          </a:bodyPr>
+          <a:lstStyle/>
+          <a:p>
+            <a:pPr>
+              <a:defRPr sz="1050" b="0" i="0">
+                <a:solidFill>
+                  <a:srgbClr val="1D7E7E"/>
+                </a:solidFill>
+                <a:latin typeface="Consolas"/>
+              </a:defRPr>
+            </a:pPr>
+            <a:r>
+              <a:t>0.87</a:t>
+            </a:r>
+          </a:p>
+        </p:txBody>
+      </p:sp>
+      <p:sp>
+        <p:nvSpPr>
+          <p:cNvPr id="36" name="Rectangle 35"/>
+          <p:cNvSpPr/>
+          <p:nvPr/>
+        </p:nvSpPr>
+        <p:spPr>
+          <a:xfrm>
+            <a:off x="6199632" y="3703320"/>
+            <a:ext cx="5532120" cy="2194560"/>
+          </a:xfrm>
+          <a:prstGeom prst="rect">
+            <a:avLst/>
+          </a:prstGeom>
+          <a:solidFill>
+            <a:srgbClr val="F8F7F2"/>
+          </a:solidFill>
+          <a:ln w="12700">
+            <a:solidFill>
+              <a:srgbClr val="0F2540"/>
+            </a:solidFill>
+          </a:ln>
+        </p:spPr>
+        <p:style>
+          <a:lnRef idx="1">
+            <a:schemeClr val="accent1"/>
+          </a:lnRef>
+          <a:fillRef idx="3">
+            <a:schemeClr val="accent1"/>
+          </a:fillRef>
+          <a:effectRef idx="2">
+            <a:schemeClr val="accent1"/>
+          </a:effectRef>
+          <a:fontRef idx="minor">
+            <a:schemeClr val="lt1"/>
+          </a:fontRef>
+        </p:style>
+        <p:txBody>
+          <a:bodyPr rtlCol="0" anchor="ctr"/>
+          <a:lstStyle/>
+          <a:p>
+            <a:pPr algn="ctr"/>
+          </a:p>
+        </p:txBody>
+      </p:sp>
+      <p:sp>
+        <p:nvSpPr>
+          <p:cNvPr id="37" name="TextBox 36"/>
+          <p:cNvSpPr txBox="1"/>
+          <p:nvPr/>
+        </p:nvSpPr>
+        <p:spPr>
+          <a:xfrm>
+            <a:off x="6382512" y="3794759"/>
+            <a:ext cx="5303520" cy="274320"/>
+          </a:xfrm>
+          <a:prstGeom prst="rect">
+            <a:avLst/>
+          </a:prstGeom>
+          <a:noFill/>
+        </p:spPr>
+        <p:txBody>
+          <a:bodyPr wrap="square" lIns="0" rIns="0" tIns="0" bIns="0">
+            <a:spAutoFit/>
+          </a:bodyPr>
+          <a:lstStyle/>
+          <a:p>
+            <a:pPr>
+              <a:defRPr sz="1200" b="1" i="0">
+                <a:solidFill>
+                  <a:srgbClr val="0F2540"/>
+                </a:solidFill>
+                <a:latin typeface="Calibri"/>
+              </a:defRPr>
+            </a:pPr>
+            <a:r>
+              <a:t>V_thr = 2.0   (large threshold)</a:t>
+            </a:r>
+          </a:p>
+        </p:txBody>
+      </p:sp>
+      <p:sp>
+        <p:nvSpPr>
+          <p:cNvPr id="38" name="TextBox 37"/>
+          <p:cNvSpPr txBox="1"/>
+          <p:nvPr/>
+        </p:nvSpPr>
+        <p:spPr>
+          <a:xfrm>
+            <a:off x="7616952" y="4160520"/>
+            <a:ext cx="1188720" cy="228600"/>
+          </a:xfrm>
+          <a:prstGeom prst="rect">
+            <a:avLst/>
+          </a:prstGeom>
+          <a:noFill/>
+        </p:spPr>
+        <p:txBody>
+          <a:bodyPr wrap="square" lIns="0" rIns="0" tIns="0" bIns="0">
+            <a:spAutoFit/>
+          </a:bodyPr>
+          <a:lstStyle/>
+          <a:p>
+            <a:pPr>
+              <a:defRPr sz="900" b="1" i="0">
+                <a:solidFill>
+                  <a:srgbClr val="1D7E7E"/>
+                </a:solidFill>
+                <a:latin typeface="Calibri"/>
+              </a:defRPr>
+            </a:pPr>
+            <a:r>
+              <a:t>SG</a:t>
+            </a:r>
+          </a:p>
+        </p:txBody>
+      </p:sp>
+      <p:sp>
+        <p:nvSpPr>
+          <p:cNvPr id="39" name="TextBox 38"/>
+          <p:cNvSpPr txBox="1"/>
+          <p:nvPr/>
+        </p:nvSpPr>
+        <p:spPr>
+          <a:xfrm>
+            <a:off x="8942832" y="4160520"/>
+            <a:ext cx="1188720" cy="228600"/>
+          </a:xfrm>
+          <a:prstGeom prst="rect">
+            <a:avLst/>
+          </a:prstGeom>
+          <a:noFill/>
+        </p:spPr>
+        <p:txBody>
+          <a:bodyPr wrap="square" lIns="0" rIns="0" tIns="0" bIns="0">
+            <a:spAutoFit/>
+          </a:bodyPr>
+          <a:lstStyle/>
+          <a:p>
+            <a:pPr>
+              <a:defRPr sz="900" b="1" i="0">
+                <a:solidFill>
+                  <a:srgbClr val="1D7E7E"/>
+                </a:solidFill>
+                <a:latin typeface="Calibri"/>
+              </a:defRPr>
+            </a:pPr>
+            <a:r>
+              <a:t>AbsStr</a:t>
+            </a:r>
+          </a:p>
+        </p:txBody>
+      </p:sp>
+      <p:sp>
+        <p:nvSpPr>
+          <p:cNvPr id="40" name="TextBox 39"/>
+          <p:cNvSpPr txBox="1"/>
+          <p:nvPr/>
+        </p:nvSpPr>
+        <p:spPr>
+          <a:xfrm>
+            <a:off x="10131552" y="4160520"/>
+            <a:ext cx="1188720" cy="228600"/>
+          </a:xfrm>
+          <a:prstGeom prst="rect">
+            <a:avLst/>
+          </a:prstGeom>
+          <a:noFill/>
+        </p:spPr>
+        <p:txBody>
+          <a:bodyPr wrap="square" lIns="0" rIns="0" tIns="0" bIns="0">
+            <a:spAutoFit/>
+          </a:bodyPr>
+          <a:lstStyle/>
+          <a:p>
+            <a:pPr>
+              <a:defRPr sz="900" b="1" i="0">
+                <a:solidFill>
+                  <a:srgbClr val="1D7E7E"/>
+                </a:solidFill>
+                <a:latin typeface="Calibri"/>
+              </a:defRPr>
+            </a:pPr>
+            <a:r>
+              <a:t>RatioAG</a:t>
+            </a:r>
+          </a:p>
+        </p:txBody>
+      </p:sp>
+      <p:sp>
+        <p:nvSpPr>
+          <p:cNvPr id="41" name="TextBox 40"/>
+          <p:cNvSpPr txBox="1"/>
+          <p:nvPr/>
+        </p:nvSpPr>
+        <p:spPr>
+          <a:xfrm>
+            <a:off x="11137392" y="4160520"/>
+            <a:ext cx="1188720" cy="228600"/>
+          </a:xfrm>
+          <a:prstGeom prst="rect">
+            <a:avLst/>
+          </a:prstGeom>
+          <a:noFill/>
+        </p:spPr>
+        <p:txBody>
+          <a:bodyPr wrap="square" lIns="0" rIns="0" tIns="0" bIns="0">
+            <a:spAutoFit/>
+          </a:bodyPr>
+          <a:lstStyle/>
+          <a:p>
+            <a:pPr>
+              <a:defRPr sz="900" b="1" i="0">
+                <a:solidFill>
+                  <a:srgbClr val="1D7E7E"/>
+                </a:solidFill>
+                <a:latin typeface="Calibri"/>
+              </a:defRPr>
+            </a:pPr>
+            <a:r>
+              <a:t>GradCV</a:t>
+            </a:r>
+          </a:p>
+        </p:txBody>
+      </p:sp>
+      <p:sp>
+        <p:nvSpPr>
+          <p:cNvPr id="42" name="TextBox 41"/>
+          <p:cNvSpPr txBox="1"/>
+          <p:nvPr/>
+        </p:nvSpPr>
+        <p:spPr>
+          <a:xfrm>
+            <a:off x="6382512" y="4480559"/>
+            <a:ext cx="1280160" cy="274320"/>
+          </a:xfrm>
+          <a:prstGeom prst="rect">
+            <a:avLst/>
+          </a:prstGeom>
+          <a:noFill/>
+        </p:spPr>
+        <p:txBody>
+          <a:bodyPr wrap="square" lIns="0" rIns="0" tIns="0" bIns="0">
+            <a:spAutoFit/>
+          </a:bodyPr>
+          <a:lstStyle/>
+          <a:p>
+            <a:pPr>
+              <a:defRPr sz="1100" b="1" i="0">
+                <a:solidFill>
+                  <a:srgbClr val="E56945"/>
+                </a:solidFill>
+                <a:latin typeface="Calibri"/>
+              </a:defRPr>
+            </a:pPr>
+            <a:r>
+              <a:t>AS-SG</a:t>
+            </a:r>
+          </a:p>
+        </p:txBody>
+      </p:sp>
+      <p:sp>
+        <p:nvSpPr>
+          <p:cNvPr id="43" name="TextBox 42"/>
+          <p:cNvSpPr txBox="1"/>
+          <p:nvPr/>
+        </p:nvSpPr>
+        <p:spPr>
+          <a:xfrm>
+            <a:off x="7799832" y="4480559"/>
+            <a:ext cx="1188720" cy="274320"/>
+          </a:xfrm>
+          <a:prstGeom prst="rect">
+            <a:avLst/>
+          </a:prstGeom>
+          <a:noFill/>
+        </p:spPr>
+        <p:txBody>
+          <a:bodyPr wrap="square" lIns="0" rIns="0" tIns="0" bIns="0">
+            <a:spAutoFit/>
+          </a:bodyPr>
+          <a:lstStyle/>
+          <a:p>
+            <a:pPr>
+              <a:defRPr sz="1050" b="0" i="0">
+                <a:solidFill>
+                  <a:srgbClr val="E56945"/>
+                </a:solidFill>
+                <a:latin typeface="Consolas"/>
+              </a:defRPr>
+            </a:pPr>
+            <a:r>
+              <a:t>0.0000</a:t>
+            </a:r>
+          </a:p>
+        </p:txBody>
+      </p:sp>
+      <p:sp>
+        <p:nvSpPr>
+          <p:cNvPr id="44" name="TextBox 43"/>
+          <p:cNvSpPr txBox="1"/>
+          <p:nvPr/>
+        </p:nvSpPr>
+        <p:spPr>
+          <a:xfrm>
+            <a:off x="8988552" y="4480559"/>
+            <a:ext cx="1188720" cy="274320"/>
+          </a:xfrm>
+          <a:prstGeom prst="rect">
+            <a:avLst/>
+          </a:prstGeom>
+          <a:noFill/>
+        </p:spPr>
+        <p:txBody>
+          <a:bodyPr wrap="square" lIns="0" rIns="0" tIns="0" bIns="0">
+            <a:spAutoFit/>
+          </a:bodyPr>
+          <a:lstStyle/>
+          <a:p>
+            <a:pPr>
+              <a:defRPr sz="1050" b="0" i="0">
+                <a:solidFill>
+                  <a:srgbClr val="E56945"/>
+                </a:solidFill>
+                <a:latin typeface="Consolas"/>
+              </a:defRPr>
+            </a:pPr>
+            <a:r>
+              <a:t>0.00%</a:t>
+            </a:r>
+          </a:p>
+        </p:txBody>
+      </p:sp>
+      <p:sp>
+        <p:nvSpPr>
+          <p:cNvPr id="45" name="TextBox 44"/>
+          <p:cNvSpPr txBox="1"/>
+          <p:nvPr/>
+        </p:nvSpPr>
+        <p:spPr>
+          <a:xfrm>
+            <a:off x="10177272" y="4480559"/>
+            <a:ext cx="1188720" cy="274320"/>
+          </a:xfrm>
+          <a:prstGeom prst="rect">
+            <a:avLst/>
+          </a:prstGeom>
+          <a:noFill/>
+        </p:spPr>
+        <p:txBody>
+          <a:bodyPr wrap="square" lIns="0" rIns="0" tIns="0" bIns="0">
+            <a:spAutoFit/>
+          </a:bodyPr>
+          <a:lstStyle/>
+          <a:p>
+            <a:pPr>
+              <a:defRPr sz="1050" b="0" i="0">
+                <a:solidFill>
+                  <a:srgbClr val="E56945"/>
+                </a:solidFill>
+                <a:latin typeface="Consolas"/>
+              </a:defRPr>
+            </a:pPr>
+            <a:r>
+              <a:t>0.000</a:t>
+            </a:r>
+          </a:p>
+        </p:txBody>
+      </p:sp>
+      <p:sp>
+        <p:nvSpPr>
+          <p:cNvPr id="46" name="TextBox 45"/>
+          <p:cNvSpPr txBox="1"/>
+          <p:nvPr/>
+        </p:nvSpPr>
+        <p:spPr>
+          <a:xfrm>
+            <a:off x="6382512" y="4892040"/>
+            <a:ext cx="1280160" cy="274320"/>
+          </a:xfrm>
+          <a:prstGeom prst="rect">
+            <a:avLst/>
+          </a:prstGeom>
+          <a:noFill/>
+        </p:spPr>
+        <p:txBody>
+          <a:bodyPr wrap="square" lIns="0" rIns="0" tIns="0" bIns="0">
+            <a:spAutoFit/>
+          </a:bodyPr>
+          <a:lstStyle/>
+          <a:p>
+            <a:pPr>
+              <a:defRPr sz="1100" b="1" i="0">
+                <a:solidFill>
+                  <a:srgbClr val="E56945"/>
+                </a:solidFill>
+                <a:latin typeface="Calibri"/>
+              </a:defRPr>
+            </a:pPr>
+            <a:r>
+              <a:t>RS-SG</a:t>
+            </a:r>
+          </a:p>
+        </p:txBody>
+      </p:sp>
+      <p:sp>
+        <p:nvSpPr>
+          <p:cNvPr id="47" name="TextBox 46"/>
+          <p:cNvSpPr txBox="1"/>
+          <p:nvPr/>
+        </p:nvSpPr>
+        <p:spPr>
+          <a:xfrm>
+            <a:off x="7799832" y="4892040"/>
+            <a:ext cx="1188720" cy="274320"/>
+          </a:xfrm>
+          <a:prstGeom prst="rect">
+            <a:avLst/>
+          </a:prstGeom>
+          <a:noFill/>
+        </p:spPr>
+        <p:txBody>
+          <a:bodyPr wrap="square" lIns="0" rIns="0" tIns="0" bIns="0">
+            <a:spAutoFit/>
+          </a:bodyPr>
+          <a:lstStyle/>
+          <a:p>
+            <a:pPr>
+              <a:defRPr sz="1050" b="0" i="0">
+                <a:solidFill>
+                  <a:srgbClr val="E56945"/>
+                </a:solidFill>
+                <a:latin typeface="Consolas"/>
+              </a:defRPr>
+            </a:pPr>
+            <a:r>
+              <a:t>0.0021</a:t>
+            </a:r>
+          </a:p>
+        </p:txBody>
+      </p:sp>
+      <p:sp>
+        <p:nvSpPr>
+          <p:cNvPr id="48" name="TextBox 47"/>
+          <p:cNvSpPr txBox="1"/>
+          <p:nvPr/>
+        </p:nvSpPr>
+        <p:spPr>
+          <a:xfrm>
+            <a:off x="8988552" y="4892040"/>
+            <a:ext cx="1188720" cy="274320"/>
+          </a:xfrm>
+          <a:prstGeom prst="rect">
+            <a:avLst/>
+          </a:prstGeom>
+          <a:noFill/>
+        </p:spPr>
+        <p:txBody>
+          <a:bodyPr wrap="square" lIns="0" rIns="0" tIns="0" bIns="0">
+            <a:spAutoFit/>
+          </a:bodyPr>
+          <a:lstStyle/>
+          <a:p>
+            <a:pPr>
+              <a:defRPr sz="1050" b="0" i="0">
+                <a:solidFill>
+                  <a:srgbClr val="E56945"/>
+                </a:solidFill>
+                <a:latin typeface="Consolas"/>
+              </a:defRPr>
+            </a:pPr>
+            <a:r>
+              <a:t>0.10%</a:t>
+            </a:r>
+          </a:p>
+        </p:txBody>
+      </p:sp>
+      <p:sp>
+        <p:nvSpPr>
+          <p:cNvPr id="49" name="TextBox 48"/>
+          <p:cNvSpPr txBox="1"/>
+          <p:nvPr/>
+        </p:nvSpPr>
+        <p:spPr>
+          <a:xfrm>
+            <a:off x="10177272" y="4892040"/>
+            <a:ext cx="1188720" cy="274320"/>
+          </a:xfrm>
+          <a:prstGeom prst="rect">
+            <a:avLst/>
+          </a:prstGeom>
+          <a:noFill/>
+        </p:spPr>
+        <p:txBody>
+          <a:bodyPr wrap="square" lIns="0" rIns="0" tIns="0" bIns="0">
+            <a:spAutoFit/>
+          </a:bodyPr>
+          <a:lstStyle/>
+          <a:p>
+            <a:pPr>
+              <a:defRPr sz="1050" b="0" i="0">
+                <a:solidFill>
+                  <a:srgbClr val="E56945"/>
+                </a:solidFill>
+                <a:latin typeface="Consolas"/>
+              </a:defRPr>
+            </a:pPr>
+            <a:r>
+              <a:t>2.25</a:t>
+            </a:r>
+          </a:p>
+        </p:txBody>
+      </p:sp>
+      <p:sp>
+        <p:nvSpPr>
+          <p:cNvPr id="50" name="TextBox 49"/>
+          <p:cNvSpPr txBox="1"/>
+          <p:nvPr/>
+        </p:nvSpPr>
+        <p:spPr>
+          <a:xfrm>
+            <a:off x="6382512" y="5303520"/>
+            <a:ext cx="1280160" cy="274320"/>
+          </a:xfrm>
+          <a:prstGeom prst="rect">
+            <a:avLst/>
+          </a:prstGeom>
+          <a:noFill/>
+        </p:spPr>
+        <p:txBody>
+          <a:bodyPr wrap="square" lIns="0" rIns="0" tIns="0" bIns="0">
+            <a:spAutoFit/>
+          </a:bodyPr>
+          <a:lstStyle/>
+          <a:p>
+            <a:pPr>
+              <a:defRPr sz="1100" b="1" i="0">
+                <a:solidFill>
+                  <a:srgbClr val="1D7E7E"/>
+                </a:solidFill>
+                <a:latin typeface="Calibri"/>
+              </a:defRPr>
+            </a:pPr>
+            <a:r>
+              <a:t>TrSG</a:t>
+            </a:r>
+          </a:p>
+        </p:txBody>
+      </p:sp>
+      <p:sp>
+        <p:nvSpPr>
+          <p:cNvPr id="51" name="TextBox 50"/>
+          <p:cNvSpPr txBox="1"/>
+          <p:nvPr/>
+        </p:nvSpPr>
+        <p:spPr>
+          <a:xfrm>
+            <a:off x="7799832" y="5303520"/>
+            <a:ext cx="1188720" cy="274320"/>
+          </a:xfrm>
+          <a:prstGeom prst="rect">
+            <a:avLst/>
+          </a:prstGeom>
+          <a:noFill/>
+        </p:spPr>
+        <p:txBody>
+          <a:bodyPr wrap="square" lIns="0" rIns="0" tIns="0" bIns="0">
+            <a:spAutoFit/>
+          </a:bodyPr>
+          <a:lstStyle/>
+          <a:p>
+            <a:pPr>
+              <a:defRPr sz="1050" b="0" i="0">
+                <a:solidFill>
+                  <a:srgbClr val="1D7E7E"/>
+                </a:solidFill>
+                <a:latin typeface="Consolas"/>
+              </a:defRPr>
+            </a:pPr>
+            <a:r>
+              <a:t>0.0323</a:t>
+            </a:r>
+          </a:p>
+        </p:txBody>
+      </p:sp>
+      <p:sp>
+        <p:nvSpPr>
+          <p:cNvPr id="52" name="TextBox 51"/>
+          <p:cNvSpPr txBox="1"/>
+          <p:nvPr/>
+        </p:nvSpPr>
+        <p:spPr>
+          <a:xfrm>
+            <a:off x="8988552" y="5303520"/>
+            <a:ext cx="1188720" cy="274320"/>
+          </a:xfrm>
+          <a:prstGeom prst="rect">
+            <a:avLst/>
+          </a:prstGeom>
+          <a:noFill/>
+        </p:spPr>
+        <p:txBody>
+          <a:bodyPr wrap="square" lIns="0" rIns="0" tIns="0" bIns="0">
+            <a:spAutoFit/>
+          </a:bodyPr>
+          <a:lstStyle/>
+          <a:p>
+            <a:pPr>
+              <a:defRPr sz="1050" b="0" i="0">
+                <a:solidFill>
+                  <a:srgbClr val="1D7E7E"/>
+                </a:solidFill>
+                <a:latin typeface="Consolas"/>
+              </a:defRPr>
+            </a:pPr>
+            <a:r>
+              <a:t>6.90%</a:t>
+            </a:r>
+          </a:p>
+        </p:txBody>
+      </p:sp>
+      <p:sp>
+        <p:nvSpPr>
+          <p:cNvPr id="53" name="TextBox 52"/>
+          <p:cNvSpPr txBox="1"/>
+          <p:nvPr/>
+        </p:nvSpPr>
+        <p:spPr>
+          <a:xfrm>
+            <a:off x="10177272" y="5303520"/>
+            <a:ext cx="1188720" cy="274320"/>
+          </a:xfrm>
+          <a:prstGeom prst="rect">
+            <a:avLst/>
+          </a:prstGeom>
+          <a:noFill/>
+        </p:spPr>
+        <p:txBody>
+          <a:bodyPr wrap="square" lIns="0" rIns="0" tIns="0" bIns="0">
+            <a:spAutoFit/>
+          </a:bodyPr>
+          <a:lstStyle/>
+          <a:p>
+            <a:pPr>
+              <a:defRPr sz="1050" b="0" i="0">
+                <a:solidFill>
+                  <a:srgbClr val="1D7E7E"/>
+                </a:solidFill>
+                <a:latin typeface="Consolas"/>
+              </a:defRPr>
+            </a:pPr>
+            <a:r>
+              <a:t>0.73</a:t>
+            </a:r>
+          </a:p>
+        </p:txBody>
+      </p:sp>
+      <p:sp>
+        <p:nvSpPr>
+          <p:cNvPr id="54" name="Rectangle 53"/>
+          <p:cNvSpPr/>
+          <p:nvPr/>
+        </p:nvSpPr>
+        <p:spPr>
+          <a:xfrm>
+            <a:off x="457200" y="6126480"/>
+            <a:ext cx="54864" cy="365760"/>
           </a:xfrm>
           <a:prstGeom prst="rect">
             <a:avLst/>
@@ -7109,14 +8827,14 @@
       </p:sp>
       <p:sp>
         <p:nvSpPr>
-          <p:cNvPr id="8" name="Rectangle 7"/>
+          <p:cNvPr id="55" name="Rectangle 54"/>
           <p:cNvSpPr/>
           <p:nvPr/>
         </p:nvSpPr>
         <p:spPr>
           <a:xfrm>
-            <a:off x="512064" y="6080760"/>
-            <a:ext cx="11192256" cy="411480"/>
+            <a:off x="512064" y="6126480"/>
+            <a:ext cx="11192256" cy="365760"/>
           </a:xfrm>
           <a:prstGeom prst="rect">
             <a:avLst/>
@@ -7152,14 +8870,14 @@
       </p:sp>
       <p:sp>
         <p:nvSpPr>
-          <p:cNvPr id="9" name="TextBox 8"/>
-          <p:cNvSpPr txBox="1"/>
-          <p:nvPr/>
-        </p:nvSpPr>
-        <p:spPr>
-          <a:xfrm>
-            <a:off x="777240" y="6217920"/>
-            <a:ext cx="10789920" cy="137160"/>
+          <p:cNvPr id="56" name="TextBox 55"/>
+          <p:cNvSpPr txBox="1"/>
+          <p:nvPr/>
+        </p:nvSpPr>
+        <p:spPr>
+          <a:xfrm>
+            <a:off x="777240" y="6263640"/>
+            <a:ext cx="10789920" cy="91440"/>
           </a:xfrm>
           <a:prstGeom prst="rect">
             <a:avLst/>
@@ -7181,14 +8899,14 @@
               </a:defRPr>
             </a:pPr>
             <a:r>
-              <a:t>Threshold-robustness is a practical necessity, not a theoretical edge case.</a:t>
-            </a:r>
-          </a:p>
-        </p:txBody>
-      </p:sp>
-      <p:sp>
-        <p:nvSpPr>
-          <p:cNvPr id="10" name="TextBox 9"/>
+              <a:t>TrSG keeps all three metrics in the healthy range — at every threshold.</a:t>
+            </a:r>
+          </a:p>
+        </p:txBody>
+      </p:sp>
+      <p:sp>
+        <p:nvSpPr>
+          <p:cNvPr id="57" name="TextBox 56"/>
           <p:cNvSpPr txBox="1"/>
           <p:nvPr/>
         </p:nvSpPr>
@@ -7224,7 +8942,7 @@
       </p:sp>
       <p:sp>
         <p:nvSpPr>
-          <p:cNvPr id="11" name="TextBox 10"/>
+          <p:cNvPr id="58" name="TextBox 57"/>
           <p:cNvSpPr txBox="1"/>
           <p:nvPr/>
         </p:nvSpPr>
@@ -7253,7 +8971,7 @@
               </a:defRPr>
             </a:pPr>
             <a:r>
-              <a:t>14 / 19</a:t>
+              <a:t>14 / 20</a:t>
             </a:r>
           </a:p>
         </p:txBody>
@@ -7308,7 +9026,7 @@
             </a:pPr>
             <a:r>
               <a:rPr spc="300"/>
-              <a:t>EXPERIMENTS · 1/3</a:t>
+              <a:t>PART II · TRSG</a:t>
             </a:r>
           </a:p>
         </p:txBody>
@@ -7344,7 +9062,7 @@
               </a:defRPr>
             </a:pPr>
             <a:r>
-              <a:t>Main Results — SOTA Across the Board</a:t>
+              <a:t>TrSG Robust Across All V_thr</a:t>
             </a:r>
           </a:p>
         </p:txBody>
@@ -7380,14 +9098,50 @@
               </a:defRPr>
             </a:pPr>
             <a:r>
-              <a:t>Standard LIF neurons · no AutoAugment / Cutout · three trials</a:t>
+              <a:t>Direct accuracy evidence  +  real trainings actually visit the extreme regimes</a:t>
+            </a:r>
+          </a:p>
+        </p:txBody>
+      </p:sp>
+      <p:sp>
+        <p:nvSpPr>
+          <p:cNvPr id="5" name="TextBox 4"/>
+          <p:cNvSpPr txBox="1"/>
+          <p:nvPr/>
+        </p:nvSpPr>
+        <p:spPr>
+          <a:xfrm>
+            <a:off x="457200" y="2194560"/>
+            <a:ext cx="6126480" cy="274320"/>
+          </a:xfrm>
+          <a:prstGeom prst="rect">
+            <a:avLst/>
+          </a:prstGeom>
+          <a:noFill/>
+        </p:spPr>
+        <p:txBody>
+          <a:bodyPr wrap="square" lIns="0" rIns="0" tIns="0" bIns="0">
+            <a:spAutoFit/>
+          </a:bodyPr>
+          <a:lstStyle/>
+          <a:p>
+            <a:pPr>
+              <a:defRPr sz="1200" b="1" i="0">
+                <a:solidFill>
+                  <a:srgbClr val="0F2540"/>
+                </a:solidFill>
+                <a:latin typeface="Calibri"/>
+              </a:defRPr>
+            </a:pPr>
+            <a:r>
+              <a:t>Accuracy with V_thr frozen at varying values</a:t>
             </a:r>
           </a:p>
         </p:txBody>
       </p:sp>
       <p:pic>
         <p:nvPicPr>
-          <p:cNvPr id="5" name="Picture 4" descr="main_results_bars.png"/>
+          <p:cNvPr id="6" name="Picture 5" descr="no_training_acc.png"/>
           <p:cNvPicPr>
             <a:picLocks noChangeAspect="1"/>
           </p:cNvPicPr>
@@ -7401,8 +9155,8 @@
         </p:blipFill>
         <p:spPr>
           <a:xfrm>
-            <a:off x="365760" y="2194560"/>
-            <a:ext cx="7772400" cy="3246699"/>
+            <a:off x="457200" y="2560320"/>
+            <a:ext cx="6126480" cy="2400918"/>
           </a:xfrm>
           <a:prstGeom prst="rect">
             <a:avLst/>
@@ -7411,472 +9165,197 @@
       </p:pic>
       <p:sp>
         <p:nvSpPr>
-          <p:cNvPr id="6" name="Rectangle 5"/>
+          <p:cNvPr id="7" name="TextBox 6"/>
+          <p:cNvSpPr txBox="1"/>
+          <p:nvPr/>
+        </p:nvSpPr>
+        <p:spPr>
+          <a:xfrm>
+            <a:off x="457200" y="5029200"/>
+            <a:ext cx="6126480" cy="274320"/>
+          </a:xfrm>
+          <a:prstGeom prst="rect">
+            <a:avLst/>
+          </a:prstGeom>
+          <a:noFill/>
+        </p:spPr>
+        <p:txBody>
+          <a:bodyPr wrap="square" lIns="0" rIns="0" tIns="0" bIns="0">
+            <a:spAutoFit/>
+          </a:bodyPr>
+          <a:lstStyle/>
+          <a:p>
+            <a:pPr algn="ctr">
+              <a:defRPr sz="1000" b="0" i="1">
+                <a:solidFill>
+                  <a:srgbClr val="7A7A7A"/>
+                </a:solidFill>
+                <a:latin typeface="Calibri"/>
+              </a:defRPr>
+            </a:pPr>
+            <a:r>
+              <a:t>CIFAR-100, ResNet-19, τ=2.0 frozen</a:t>
+            </a:r>
+          </a:p>
+        </p:txBody>
+      </p:sp>
+      <p:sp>
+        <p:nvSpPr>
+          <p:cNvPr id="8" name="TextBox 7"/>
+          <p:cNvSpPr txBox="1"/>
+          <p:nvPr/>
+        </p:nvSpPr>
+        <p:spPr>
+          <a:xfrm>
+            <a:off x="6766560" y="2194560"/>
+            <a:ext cx="5029200" cy="274320"/>
+          </a:xfrm>
+          <a:prstGeom prst="rect">
+            <a:avLst/>
+          </a:prstGeom>
+          <a:noFill/>
+        </p:spPr>
+        <p:txBody>
+          <a:bodyPr wrap="square" lIns="0" rIns="0" tIns="0" bIns="0">
+            <a:spAutoFit/>
+          </a:bodyPr>
+          <a:lstStyle/>
+          <a:p>
+            <a:pPr>
+              <a:defRPr sz="1200" b="1" i="0">
+                <a:solidFill>
+                  <a:srgbClr val="0F2540"/>
+                </a:solidFill>
+                <a:latin typeface="Calibri"/>
+              </a:defRPr>
+            </a:pPr>
+            <a:r>
+              <a:t>Trainable V_thr trajectories — ImageNet</a:t>
+            </a:r>
+          </a:p>
+        </p:txBody>
+      </p:sp>
+      <p:pic>
+        <p:nvPicPr>
+          <p:cNvPr id="9" name="Picture 8" descr="threshold_training_imagenet.png"/>
+          <p:cNvPicPr>
+            <a:picLocks noChangeAspect="1"/>
+          </p:cNvPicPr>
+          <p:nvPr/>
+        </p:nvPicPr>
+        <p:blipFill>
+          <a:blip r:embed="rId3"/>
+          <a:stretch>
+            <a:fillRect/>
+          </a:stretch>
+        </p:blipFill>
+        <p:spPr>
+          <a:xfrm>
+            <a:off x="6766560" y="2560320"/>
+            <a:ext cx="5029200" cy="2286000"/>
+          </a:xfrm>
+          <a:prstGeom prst="rect">
+            <a:avLst/>
+          </a:prstGeom>
+        </p:spPr>
+      </p:pic>
+      <p:sp>
+        <p:nvSpPr>
+          <p:cNvPr id="10" name="TextBox 9"/>
+          <p:cNvSpPr txBox="1"/>
+          <p:nvPr/>
+        </p:nvSpPr>
+        <p:spPr>
+          <a:xfrm>
+            <a:off x="6766560" y="4937760"/>
+            <a:ext cx="5029200" cy="274320"/>
+          </a:xfrm>
+          <a:prstGeom prst="rect">
+            <a:avLst/>
+          </a:prstGeom>
+          <a:noFill/>
+        </p:spPr>
+        <p:txBody>
+          <a:bodyPr wrap="square" lIns="0" rIns="0" tIns="0" bIns="0">
+            <a:spAutoFit/>
+          </a:bodyPr>
+          <a:lstStyle/>
+          <a:p>
+            <a:pPr algn="ctr">
+              <a:defRPr sz="1000" b="0" i="1">
+                <a:solidFill>
+                  <a:srgbClr val="7A7A7A"/>
+                </a:solidFill>
+                <a:latin typeface="Calibri"/>
+              </a:defRPr>
+            </a:pPr>
+            <a:r>
+              <a:t>ResNet-34 on ImageNet · 120 epochs</a:t>
+            </a:r>
+          </a:p>
+        </p:txBody>
+      </p:sp>
+      <p:sp>
+        <p:nvSpPr>
+          <p:cNvPr id="11" name="TextBox 10"/>
+          <p:cNvSpPr txBox="1"/>
+          <p:nvPr/>
+        </p:nvSpPr>
+        <p:spPr>
+          <a:xfrm>
+            <a:off x="457200" y="5349240"/>
+            <a:ext cx="11247120" cy="640080"/>
+          </a:xfrm>
+          <a:prstGeom prst="rect">
+            <a:avLst/>
+          </a:prstGeom>
+          <a:noFill/>
+        </p:spPr>
+        <p:txBody>
+          <a:bodyPr wrap="square">
+            <a:spAutoFit/>
+          </a:bodyPr>
+          <a:lstStyle/>
+          <a:p>
+            <a:pPr>
+              <a:defRPr sz="1100">
+                <a:solidFill>
+                  <a:srgbClr val="1A1A1A"/>
+                </a:solidFill>
+                <a:latin typeface="Calibri"/>
+              </a:defRPr>
+            </a:pPr>
+            <a:r>
+              <a:t>▸  Frozen V_thr accuracy:  TrSG wins at every threshold; AS-SG/RS-SG fail outside V_thr ≈ 1</a:t>
+            </a:r>
+          </a:p>
+          <a:p>
+            <a:pPr>
+              <a:spcBef>
+                <a:spcPts val="600"/>
+              </a:spcBef>
+              <a:defRPr sz="1100">
+                <a:solidFill>
+                  <a:srgbClr val="1A1A1A"/>
+                </a:solidFill>
+                <a:latin typeface="Calibri"/>
+              </a:defRPr>
+            </a:pPr>
+            <a:r>
+              <a:t>▸  Real trainings drift V_thr ≪ 1 in early layers and ≫ 1 in deep layers — exactly the failure regimes</a:t>
+            </a:r>
+          </a:p>
+        </p:txBody>
+      </p:sp>
+      <p:sp>
+        <p:nvSpPr>
+          <p:cNvPr id="12" name="Rectangle 11"/>
           <p:cNvSpPr/>
           <p:nvPr/>
         </p:nvSpPr>
         <p:spPr>
           <a:xfrm>
-            <a:off x="8229600" y="2194560"/>
-            <a:ext cx="3657600" cy="1280160"/>
-          </a:xfrm>
-          <a:prstGeom prst="rect">
-            <a:avLst/>
-          </a:prstGeom>
-          <a:solidFill>
-            <a:srgbClr val="F8F7F2"/>
-          </a:solidFill>
-          <a:ln w="22860">
-            <a:solidFill>
-              <a:srgbClr val="1D7E7E"/>
-            </a:solidFill>
-          </a:ln>
-        </p:spPr>
-        <p:style>
-          <a:lnRef idx="1">
-            <a:schemeClr val="accent1"/>
-          </a:lnRef>
-          <a:fillRef idx="3">
-            <a:schemeClr val="accent1"/>
-          </a:fillRef>
-          <a:effectRef idx="2">
-            <a:schemeClr val="accent1"/>
-          </a:effectRef>
-          <a:fontRef idx="minor">
-            <a:schemeClr val="lt1"/>
-          </a:fontRef>
-        </p:style>
-        <p:txBody>
-          <a:bodyPr rtlCol="0" anchor="ctr"/>
-          <a:lstStyle/>
-          <a:p>
-            <a:pPr algn="ctr"/>
-          </a:p>
-        </p:txBody>
-      </p:sp>
-      <p:sp>
-        <p:nvSpPr>
-          <p:cNvPr id="7" name="TextBox 6"/>
-          <p:cNvSpPr txBox="1"/>
-          <p:nvPr/>
-        </p:nvSpPr>
-        <p:spPr>
-          <a:xfrm>
-            <a:off x="8412480" y="2377440"/>
-            <a:ext cx="2194560" cy="548640"/>
-          </a:xfrm>
-          <a:prstGeom prst="rect">
-            <a:avLst/>
-          </a:prstGeom>
-          <a:noFill/>
-        </p:spPr>
-        <p:txBody>
-          <a:bodyPr wrap="square" lIns="0" rIns="0" tIns="0" bIns="0">
-            <a:spAutoFit/>
-          </a:bodyPr>
-          <a:lstStyle/>
-          <a:p>
-            <a:pPr>
-              <a:defRPr sz="2600" b="1" i="0">
-                <a:solidFill>
-                  <a:srgbClr val="1D7E7E"/>
-                </a:solidFill>
-                <a:latin typeface="Cambria"/>
-              </a:defRPr>
-            </a:pPr>
-            <a:r>
-              <a:t>+1.09</a:t>
-            </a:r>
-          </a:p>
-        </p:txBody>
-      </p:sp>
-      <p:sp>
-        <p:nvSpPr>
-          <p:cNvPr id="8" name="TextBox 7"/>
-          <p:cNvSpPr txBox="1"/>
-          <p:nvPr/>
-        </p:nvSpPr>
-        <p:spPr>
-          <a:xfrm>
-            <a:off x="10424160" y="2487168"/>
-            <a:ext cx="1097280" cy="365760"/>
-          </a:xfrm>
-          <a:prstGeom prst="rect">
-            <a:avLst/>
-          </a:prstGeom>
-          <a:noFill/>
-        </p:spPr>
-        <p:txBody>
-          <a:bodyPr wrap="square" lIns="0" rIns="0" tIns="0" bIns="0">
-            <a:spAutoFit/>
-          </a:bodyPr>
-          <a:lstStyle/>
-          <a:p>
-            <a:pPr>
-              <a:defRPr sz="1100" b="0" i="0">
-                <a:solidFill>
-                  <a:srgbClr val="1D7E7E"/>
-                </a:solidFill>
-                <a:latin typeface="Calibri"/>
-              </a:defRPr>
-            </a:pPr>
-            <a:r>
-              <a:t>%pt</a:t>
-            </a:r>
-          </a:p>
-        </p:txBody>
-      </p:sp>
-      <p:sp>
-        <p:nvSpPr>
-          <p:cNvPr id="9" name="TextBox 8"/>
-          <p:cNvSpPr txBox="1"/>
-          <p:nvPr/>
-        </p:nvSpPr>
-        <p:spPr>
-          <a:xfrm>
-            <a:off x="8412480" y="2971800"/>
-            <a:ext cx="3383280" cy="457200"/>
-          </a:xfrm>
-          <a:prstGeom prst="rect">
-            <a:avLst/>
-          </a:prstGeom>
-          <a:noFill/>
-        </p:spPr>
-        <p:txBody>
-          <a:bodyPr wrap="square" lIns="0" rIns="0" tIns="0" bIns="0">
-            <a:spAutoFit/>
-          </a:bodyPr>
-          <a:lstStyle/>
-          <a:p>
-            <a:pPr>
-              <a:defRPr sz="1000" b="0" i="0">
-                <a:solidFill>
-                  <a:srgbClr val="1A1A1A"/>
-                </a:solidFill>
-                <a:latin typeface="Calibri"/>
-              </a:defRPr>
-            </a:pPr>
-            <a:r>
-              <a:t>CIFAR-100  ·  beats TAB</a:t>
-            </a:r>
-          </a:p>
-        </p:txBody>
-      </p:sp>
-      <p:sp>
-        <p:nvSpPr>
-          <p:cNvPr id="10" name="Rectangle 9"/>
-          <p:cNvSpPr/>
-          <p:nvPr/>
-        </p:nvSpPr>
-        <p:spPr>
-          <a:xfrm>
-            <a:off x="8229600" y="3611880"/>
-            <a:ext cx="3657600" cy="1280160"/>
-          </a:xfrm>
-          <a:prstGeom prst="rect">
-            <a:avLst/>
-          </a:prstGeom>
-          <a:solidFill>
-            <a:srgbClr val="F8F7F2"/>
-          </a:solidFill>
-          <a:ln w="22860">
-            <a:solidFill>
-              <a:srgbClr val="1D7E7E"/>
-            </a:solidFill>
-          </a:ln>
-        </p:spPr>
-        <p:style>
-          <a:lnRef idx="1">
-            <a:schemeClr val="accent1"/>
-          </a:lnRef>
-          <a:fillRef idx="3">
-            <a:schemeClr val="accent1"/>
-          </a:fillRef>
-          <a:effectRef idx="2">
-            <a:schemeClr val="accent1"/>
-          </a:effectRef>
-          <a:fontRef idx="minor">
-            <a:schemeClr val="lt1"/>
-          </a:fontRef>
-        </p:style>
-        <p:txBody>
-          <a:bodyPr rtlCol="0" anchor="ctr"/>
-          <a:lstStyle/>
-          <a:p>
-            <a:pPr algn="ctr"/>
-          </a:p>
-        </p:txBody>
-      </p:sp>
-      <p:sp>
-        <p:nvSpPr>
-          <p:cNvPr id="11" name="TextBox 10"/>
-          <p:cNvSpPr txBox="1"/>
-          <p:nvPr/>
-        </p:nvSpPr>
-        <p:spPr>
-          <a:xfrm>
-            <a:off x="8412480" y="3794760"/>
-            <a:ext cx="2194560" cy="548640"/>
-          </a:xfrm>
-          <a:prstGeom prst="rect">
-            <a:avLst/>
-          </a:prstGeom>
-          <a:noFill/>
-        </p:spPr>
-        <p:txBody>
-          <a:bodyPr wrap="square" lIns="0" rIns="0" tIns="0" bIns="0">
-            <a:spAutoFit/>
-          </a:bodyPr>
-          <a:lstStyle/>
-          <a:p>
-            <a:pPr>
-              <a:defRPr sz="2600" b="1" i="0">
-                <a:solidFill>
-                  <a:srgbClr val="1D7E7E"/>
-                </a:solidFill>
-                <a:latin typeface="Cambria"/>
-              </a:defRPr>
-            </a:pPr>
-            <a:r>
-              <a:t>+0.64</a:t>
-            </a:r>
-          </a:p>
-        </p:txBody>
-      </p:sp>
-      <p:sp>
-        <p:nvSpPr>
-          <p:cNvPr id="12" name="TextBox 11"/>
-          <p:cNvSpPr txBox="1"/>
-          <p:nvPr/>
-        </p:nvSpPr>
-        <p:spPr>
-          <a:xfrm>
-            <a:off x="10424160" y="3904488"/>
-            <a:ext cx="1097280" cy="365760"/>
-          </a:xfrm>
-          <a:prstGeom prst="rect">
-            <a:avLst/>
-          </a:prstGeom>
-          <a:noFill/>
-        </p:spPr>
-        <p:txBody>
-          <a:bodyPr wrap="square" lIns="0" rIns="0" tIns="0" bIns="0">
-            <a:spAutoFit/>
-          </a:bodyPr>
-          <a:lstStyle/>
-          <a:p>
-            <a:pPr>
-              <a:defRPr sz="1100" b="0" i="0">
-                <a:solidFill>
-                  <a:srgbClr val="1D7E7E"/>
-                </a:solidFill>
-                <a:latin typeface="Calibri"/>
-              </a:defRPr>
-            </a:pPr>
-            <a:r>
-              <a:t>%pt</a:t>
-            </a:r>
-          </a:p>
-        </p:txBody>
-      </p:sp>
-      <p:sp>
-        <p:nvSpPr>
-          <p:cNvPr id="13" name="TextBox 12"/>
-          <p:cNvSpPr txBox="1"/>
-          <p:nvPr/>
-        </p:nvSpPr>
-        <p:spPr>
-          <a:xfrm>
-            <a:off x="8412480" y="4389120"/>
-            <a:ext cx="3383280" cy="457200"/>
-          </a:xfrm>
-          <a:prstGeom prst="rect">
-            <a:avLst/>
-          </a:prstGeom>
-          <a:noFill/>
-        </p:spPr>
-        <p:txBody>
-          <a:bodyPr wrap="square" lIns="0" rIns="0" tIns="0" bIns="0">
-            <a:spAutoFit/>
-          </a:bodyPr>
-          <a:lstStyle/>
-          <a:p>
-            <a:pPr>
-              <a:defRPr sz="1000" b="0" i="0">
-                <a:solidFill>
-                  <a:srgbClr val="1A1A1A"/>
-                </a:solidFill>
-                <a:latin typeface="Calibri"/>
-              </a:defRPr>
-            </a:pPr>
-            <a:r>
-              <a:t>ImageNet  ·  beats MPS</a:t>
-            </a:r>
-          </a:p>
-        </p:txBody>
-      </p:sp>
-      <p:sp>
-        <p:nvSpPr>
-          <p:cNvPr id="14" name="Rectangle 13"/>
-          <p:cNvSpPr/>
-          <p:nvPr/>
-        </p:nvSpPr>
-        <p:spPr>
-          <a:xfrm>
-            <a:off x="8229600" y="5029200"/>
-            <a:ext cx="3657600" cy="1280160"/>
-          </a:xfrm>
-          <a:prstGeom prst="rect">
-            <a:avLst/>
-          </a:prstGeom>
-          <a:solidFill>
-            <a:srgbClr val="F8F7F2"/>
-          </a:solidFill>
-          <a:ln w="22860">
-            <a:solidFill>
-              <a:srgbClr val="E0B85F"/>
-            </a:solidFill>
-          </a:ln>
-        </p:spPr>
-        <p:style>
-          <a:lnRef idx="1">
-            <a:schemeClr val="accent1"/>
-          </a:lnRef>
-          <a:fillRef idx="3">
-            <a:schemeClr val="accent1"/>
-          </a:fillRef>
-          <a:effectRef idx="2">
-            <a:schemeClr val="accent1"/>
-          </a:effectRef>
-          <a:fontRef idx="minor">
-            <a:schemeClr val="lt1"/>
-          </a:fontRef>
-        </p:style>
-        <p:txBody>
-          <a:bodyPr rtlCol="0" anchor="ctr"/>
-          <a:lstStyle/>
-          <a:p>
-            <a:pPr algn="ctr"/>
-          </a:p>
-        </p:txBody>
-      </p:sp>
-      <p:sp>
-        <p:nvSpPr>
-          <p:cNvPr id="15" name="TextBox 14"/>
-          <p:cNvSpPr txBox="1"/>
-          <p:nvPr/>
-        </p:nvSpPr>
-        <p:spPr>
-          <a:xfrm>
-            <a:off x="8412480" y="5212080"/>
-            <a:ext cx="2194560" cy="548640"/>
-          </a:xfrm>
-          <a:prstGeom prst="rect">
-            <a:avLst/>
-          </a:prstGeom>
-          <a:noFill/>
-        </p:spPr>
-        <p:txBody>
-          <a:bodyPr wrap="square" lIns="0" rIns="0" tIns="0" bIns="0">
-            <a:spAutoFit/>
-          </a:bodyPr>
-          <a:lstStyle/>
-          <a:p>
-            <a:pPr>
-              <a:defRPr sz="2600" b="1" i="0">
-                <a:solidFill>
-                  <a:srgbClr val="E0B85F"/>
-                </a:solidFill>
-                <a:latin typeface="Cambria"/>
-              </a:defRPr>
-            </a:pPr>
-            <a:r>
-              <a:t>+5.23</a:t>
-            </a:r>
-          </a:p>
-        </p:txBody>
-      </p:sp>
-      <p:sp>
-        <p:nvSpPr>
-          <p:cNvPr id="16" name="TextBox 15"/>
-          <p:cNvSpPr txBox="1"/>
-          <p:nvPr/>
-        </p:nvSpPr>
-        <p:spPr>
-          <a:xfrm>
-            <a:off x="10424160" y="5321808"/>
-            <a:ext cx="1097280" cy="365760"/>
-          </a:xfrm>
-          <a:prstGeom prst="rect">
-            <a:avLst/>
-          </a:prstGeom>
-          <a:noFill/>
-        </p:spPr>
-        <p:txBody>
-          <a:bodyPr wrap="square" lIns="0" rIns="0" tIns="0" bIns="0">
-            <a:spAutoFit/>
-          </a:bodyPr>
-          <a:lstStyle/>
-          <a:p>
-            <a:pPr>
-              <a:defRPr sz="1100" b="0" i="0">
-                <a:solidFill>
-                  <a:srgbClr val="E0B85F"/>
-                </a:solidFill>
-                <a:latin typeface="Calibri"/>
-              </a:defRPr>
-            </a:pPr>
-            <a:r>
-              <a:t>%pt</a:t>
-            </a:r>
-          </a:p>
-        </p:txBody>
-      </p:sp>
-      <p:sp>
-        <p:nvSpPr>
-          <p:cNvPr id="17" name="TextBox 16"/>
-          <p:cNvSpPr txBox="1"/>
-          <p:nvPr/>
-        </p:nvSpPr>
-        <p:spPr>
-          <a:xfrm>
-            <a:off x="8412480" y="5806440"/>
-            <a:ext cx="3383280" cy="457200"/>
-          </a:xfrm>
-          <a:prstGeom prst="rect">
-            <a:avLst/>
-          </a:prstGeom>
-          <a:noFill/>
-        </p:spPr>
-        <p:txBody>
-          <a:bodyPr wrap="square" lIns="0" rIns="0" tIns="0" bIns="0">
-            <a:spAutoFit/>
-          </a:bodyPr>
-          <a:lstStyle/>
-          <a:p>
-            <a:pPr>
-              <a:defRPr sz="1000" b="0" i="0">
-                <a:solidFill>
-                  <a:srgbClr val="1A1A1A"/>
-                </a:solidFill>
-                <a:latin typeface="Calibri"/>
-              </a:defRPr>
-            </a:pPr>
-            <a:r>
-              <a:t>DVS-CIFAR10  ·  beats RMP</a:t>
-            </a:r>
-          </a:p>
-        </p:txBody>
-      </p:sp>
-      <p:sp>
-        <p:nvSpPr>
-          <p:cNvPr id="18" name="Rectangle 17"/>
-          <p:cNvSpPr/>
-          <p:nvPr/>
-        </p:nvSpPr>
-        <p:spPr>
-          <a:xfrm>
-            <a:off x="457200" y="6126480"/>
+            <a:off x="457200" y="6080760"/>
             <a:ext cx="54864" cy="365760"/>
           </a:xfrm>
           <a:prstGeom prst="rect">
@@ -7913,13 +9392,13 @@
       </p:sp>
       <p:sp>
         <p:nvSpPr>
-          <p:cNvPr id="19" name="Rectangle 18"/>
+          <p:cNvPr id="13" name="Rectangle 12"/>
           <p:cNvSpPr/>
           <p:nvPr/>
         </p:nvSpPr>
         <p:spPr>
           <a:xfrm>
-            <a:off x="512064" y="6126480"/>
+            <a:off x="512064" y="6080760"/>
             <a:ext cx="11192256" cy="365760"/>
           </a:xfrm>
           <a:prstGeom prst="rect">
@@ -7956,13 +9435,13 @@
       </p:sp>
       <p:sp>
         <p:nvSpPr>
-          <p:cNvPr id="20" name="TextBox 19"/>
-          <p:cNvSpPr txBox="1"/>
-          <p:nvPr/>
-        </p:nvSpPr>
-        <p:spPr>
-          <a:xfrm>
-            <a:off x="777240" y="6263640"/>
+          <p:cNvPr id="14" name="TextBox 13"/>
+          <p:cNvSpPr txBox="1"/>
+          <p:nvPr/>
+        </p:nvSpPr>
+        <p:spPr>
+          <a:xfrm>
+            <a:off x="777240" y="6217920"/>
             <a:ext cx="10789920" cy="91440"/>
           </a:xfrm>
           <a:prstGeom prst="rect">
@@ -7985,14 +9464,14 @@
               </a:defRPr>
             </a:pPr>
             <a:r>
-              <a:t>Biggest gain on the most challenging (event-based) dataset — DVS-CIFAR10 +5.23 %pt</a:t>
-            </a:r>
-          </a:p>
-        </p:txBody>
-      </p:sp>
-      <p:sp>
-        <p:nvSpPr>
-          <p:cNvPr id="21" name="TextBox 20"/>
+              <a:t>Threshold-robustness is a practical necessity, not a theoretical edge case.</a:t>
+            </a:r>
+          </a:p>
+        </p:txBody>
+      </p:sp>
+      <p:sp>
+        <p:nvSpPr>
+          <p:cNvPr id="15" name="TextBox 14"/>
           <p:cNvSpPr txBox="1"/>
           <p:nvPr/>
         </p:nvSpPr>
@@ -8028,7 +9507,7 @@
       </p:sp>
       <p:sp>
         <p:nvSpPr>
-          <p:cNvPr id="22" name="TextBox 21"/>
+          <p:cNvPr id="16" name="TextBox 15"/>
           <p:cNvSpPr txBox="1"/>
           <p:nvPr/>
         </p:nvSpPr>
@@ -8057,7 +9536,7 @@
               </a:defRPr>
             </a:pPr>
             <a:r>
-              <a:t>15 / 19</a:t>
+              <a:t>15 / 20</a:t>
             </a:r>
           </a:p>
         </p:txBody>
@@ -8112,7 +9591,7 @@
             </a:pPr>
             <a:r>
               <a:rPr spc="300"/>
-              <a:t>EXPERIMENTS · 2/3</a:t>
+              <a:t>EXPERIMENTS · 1/3</a:t>
             </a:r>
           </a:p>
         </p:txBody>
@@ -8148,7 +9627,7 @@
               </a:defRPr>
             </a:pPr>
             <a:r>
-              <a:t>Ablation — Independent and Complementary</a:t>
+              <a:t>Main Results — SOTA Across the Board</a:t>
             </a:r>
           </a:p>
         </p:txBody>
@@ -8184,14 +9663,14 @@
               </a:defRPr>
             </a:pPr>
             <a:r>
-              <a:t>Each method helps alone; together they compound (especially on event-based data)</a:t>
+              <a:t>Standard LIF neurons · no AutoAugment / Cutout · three trials</a:t>
             </a:r>
           </a:p>
         </p:txBody>
       </p:sp>
       <p:pic>
         <p:nvPicPr>
-          <p:cNvPr id="5" name="Picture 4" descr="ablation_bars.png"/>
+          <p:cNvPr id="5" name="Picture 4" descr="main_results_bars.png"/>
           <p:cNvPicPr>
             <a:picLocks noChangeAspect="1"/>
           </p:cNvPicPr>
@@ -8205,8 +9684,8 @@
         </p:blipFill>
         <p:spPr>
           <a:xfrm>
-            <a:off x="365760" y="2240280"/>
-            <a:ext cx="9144000" cy="3819646"/>
+            <a:off x="365760" y="2194560"/>
+            <a:ext cx="7772400" cy="3246699"/>
           </a:xfrm>
           <a:prstGeom prst="rect">
             <a:avLst/>
@@ -8215,50 +9694,14 @@
       </p:pic>
       <p:sp>
         <p:nvSpPr>
-          <p:cNvPr id="6" name="TextBox 5"/>
-          <p:cNvSpPr txBox="1"/>
-          <p:nvPr/>
-        </p:nvSpPr>
-        <p:spPr>
-          <a:xfrm>
-            <a:off x="9875520" y="2286000"/>
-            <a:ext cx="2194560" cy="365760"/>
-          </a:xfrm>
-          <a:prstGeom prst="rect">
-            <a:avLst/>
-          </a:prstGeom>
-          <a:noFill/>
-        </p:spPr>
-        <p:txBody>
-          <a:bodyPr wrap="square" lIns="0" rIns="0" tIns="0" bIns="0">
-            <a:spAutoFit/>
-          </a:bodyPr>
-          <a:lstStyle/>
-          <a:p>
-            <a:pPr>
-              <a:defRPr sz="1200" b="1" i="0">
-                <a:solidFill>
-                  <a:srgbClr val="0F2540"/>
-                </a:solidFill>
-                <a:latin typeface="Calibri"/>
-              </a:defRPr>
-            </a:pPr>
-            <a:r>
-              <a:t>Takeaway</a:t>
-            </a:r>
-          </a:p>
-        </p:txBody>
-      </p:sp>
-      <p:sp>
-        <p:nvSpPr>
-          <p:cNvPr id="7" name="Rectangle 6"/>
+          <p:cNvPr id="6" name="Rectangle 5"/>
           <p:cNvSpPr/>
           <p:nvPr/>
         </p:nvSpPr>
         <p:spPr>
           <a:xfrm>
-            <a:off x="9692640" y="2697480"/>
-            <a:ext cx="2286000" cy="914400"/>
+            <a:off x="8229600" y="2194560"/>
+            <a:ext cx="3657600" cy="1280160"/>
           </a:xfrm>
           <a:prstGeom prst="rect">
             <a:avLst/>
@@ -8266,7 +9709,7 @@
           <a:solidFill>
             <a:srgbClr val="F8F7F2"/>
           </a:solidFill>
-          <a:ln w="16510">
+          <a:ln w="22860">
             <a:solidFill>
               <a:srgbClr val="1D7E7E"/>
             </a:solidFill>
@@ -8296,14 +9739,86 @@
       </p:sp>
       <p:sp>
         <p:nvSpPr>
+          <p:cNvPr id="7" name="TextBox 6"/>
+          <p:cNvSpPr txBox="1"/>
+          <p:nvPr/>
+        </p:nvSpPr>
+        <p:spPr>
+          <a:xfrm>
+            <a:off x="8412480" y="2377440"/>
+            <a:ext cx="2194560" cy="548640"/>
+          </a:xfrm>
+          <a:prstGeom prst="rect">
+            <a:avLst/>
+          </a:prstGeom>
+          <a:noFill/>
+        </p:spPr>
+        <p:txBody>
+          <a:bodyPr wrap="square" lIns="0" rIns="0" tIns="0" bIns="0">
+            <a:spAutoFit/>
+          </a:bodyPr>
+          <a:lstStyle/>
+          <a:p>
+            <a:pPr>
+              <a:defRPr sz="2600" b="1" i="0">
+                <a:solidFill>
+                  <a:srgbClr val="1D7E7E"/>
+                </a:solidFill>
+                <a:latin typeface="Cambria"/>
+              </a:defRPr>
+            </a:pPr>
+            <a:r>
+              <a:t>+1.09</a:t>
+            </a:r>
+          </a:p>
+        </p:txBody>
+      </p:sp>
+      <p:sp>
+        <p:nvSpPr>
           <p:cNvPr id="8" name="TextBox 7"/>
           <p:cNvSpPr txBox="1"/>
           <p:nvPr/>
         </p:nvSpPr>
         <p:spPr>
           <a:xfrm>
-            <a:off x="9829800" y="2788920"/>
-            <a:ext cx="2011680" cy="274320"/>
+            <a:off x="10424160" y="2487168"/>
+            <a:ext cx="1097280" cy="365760"/>
+          </a:xfrm>
+          <a:prstGeom prst="rect">
+            <a:avLst/>
+          </a:prstGeom>
+          <a:noFill/>
+        </p:spPr>
+        <p:txBody>
+          <a:bodyPr wrap="square" lIns="0" rIns="0" tIns="0" bIns="0">
+            <a:spAutoFit/>
+          </a:bodyPr>
+          <a:lstStyle/>
+          <a:p>
+            <a:pPr>
+              <a:defRPr sz="1100" b="0" i="0">
+                <a:solidFill>
+                  <a:srgbClr val="1D7E7E"/>
+                </a:solidFill>
+                <a:latin typeface="Calibri"/>
+              </a:defRPr>
+            </a:pPr>
+            <a:r>
+              <a:t>%pt</a:t>
+            </a:r>
+          </a:p>
+        </p:txBody>
+      </p:sp>
+      <p:sp>
+        <p:nvSpPr>
+          <p:cNvPr id="9" name="TextBox 8"/>
+          <p:cNvSpPr txBox="1"/>
+          <p:nvPr/>
+        </p:nvSpPr>
+        <p:spPr>
+          <a:xfrm>
+            <a:off x="8412480" y="2971800"/>
+            <a:ext cx="3383280" cy="457200"/>
           </a:xfrm>
           <a:prstGeom prst="rect">
             <a:avLst/>
@@ -8319,49 +9834,13 @@
             <a:pPr>
               <a:defRPr sz="1000" b="0" i="0">
                 <a:solidFill>
-                  <a:srgbClr val="7A7A7A"/>
-                </a:solidFill>
-                <a:latin typeface="Calibri"/>
-              </a:defRPr>
-            </a:pPr>
-            <a:r>
-              <a:t>MP-Init alone</a:t>
-            </a:r>
-          </a:p>
-        </p:txBody>
-      </p:sp>
-      <p:sp>
-        <p:nvSpPr>
-          <p:cNvPr id="9" name="TextBox 8"/>
-          <p:cNvSpPr txBox="1"/>
-          <p:nvPr/>
-        </p:nvSpPr>
-        <p:spPr>
-          <a:xfrm>
-            <a:off x="9829800" y="3063240"/>
-            <a:ext cx="2011680" cy="457200"/>
-          </a:xfrm>
-          <a:prstGeom prst="rect">
-            <a:avLst/>
-          </a:prstGeom>
-          <a:noFill/>
-        </p:spPr>
-        <p:txBody>
-          <a:bodyPr wrap="square" lIns="0" rIns="0" tIns="0" bIns="0">
-            <a:spAutoFit/>
-          </a:bodyPr>
-          <a:lstStyle/>
-          <a:p>
-            <a:pPr>
-              <a:defRPr sz="1800" b="1" i="0">
-                <a:solidFill>
-                  <a:srgbClr val="1D7E7E"/>
-                </a:solidFill>
-                <a:latin typeface="Cambria"/>
-              </a:defRPr>
-            </a:pPr>
-            <a:r>
-              <a:t>+0.5 ~ 0.8</a:t>
+                  <a:srgbClr val="1A1A1A"/>
+                </a:solidFill>
+                <a:latin typeface="Calibri"/>
+              </a:defRPr>
+            </a:pPr>
+            <a:r>
+              <a:t>CIFAR-100  ·  beats TAB</a:t>
             </a:r>
           </a:p>
         </p:txBody>
@@ -8374,8 +9853,8 @@
         </p:nvSpPr>
         <p:spPr>
           <a:xfrm>
-            <a:off x="9692640" y="3703320"/>
-            <a:ext cx="2286000" cy="914400"/>
+            <a:off x="8229600" y="3611880"/>
+            <a:ext cx="3657600" cy="1280160"/>
           </a:xfrm>
           <a:prstGeom prst="rect">
             <a:avLst/>
@@ -8383,9 +9862,9 @@
           <a:solidFill>
             <a:srgbClr val="F8F7F2"/>
           </a:solidFill>
-          <a:ln w="16510">
+          <a:ln w="22860">
             <a:solidFill>
-              <a:srgbClr val="E0B85F"/>
+              <a:srgbClr val="1D7E7E"/>
             </a:solidFill>
           </a:ln>
         </p:spPr>
@@ -8419,8 +9898,80 @@
         </p:nvSpPr>
         <p:spPr>
           <a:xfrm>
-            <a:off x="9829800" y="3794759"/>
-            <a:ext cx="2011680" cy="274320"/>
+            <a:off x="8412480" y="3794760"/>
+            <a:ext cx="2194560" cy="548640"/>
+          </a:xfrm>
+          <a:prstGeom prst="rect">
+            <a:avLst/>
+          </a:prstGeom>
+          <a:noFill/>
+        </p:spPr>
+        <p:txBody>
+          <a:bodyPr wrap="square" lIns="0" rIns="0" tIns="0" bIns="0">
+            <a:spAutoFit/>
+          </a:bodyPr>
+          <a:lstStyle/>
+          <a:p>
+            <a:pPr>
+              <a:defRPr sz="2600" b="1" i="0">
+                <a:solidFill>
+                  <a:srgbClr val="1D7E7E"/>
+                </a:solidFill>
+                <a:latin typeface="Cambria"/>
+              </a:defRPr>
+            </a:pPr>
+            <a:r>
+              <a:t>+0.64</a:t>
+            </a:r>
+          </a:p>
+        </p:txBody>
+      </p:sp>
+      <p:sp>
+        <p:nvSpPr>
+          <p:cNvPr id="12" name="TextBox 11"/>
+          <p:cNvSpPr txBox="1"/>
+          <p:nvPr/>
+        </p:nvSpPr>
+        <p:spPr>
+          <a:xfrm>
+            <a:off x="10424160" y="3904488"/>
+            <a:ext cx="1097280" cy="365760"/>
+          </a:xfrm>
+          <a:prstGeom prst="rect">
+            <a:avLst/>
+          </a:prstGeom>
+          <a:noFill/>
+        </p:spPr>
+        <p:txBody>
+          <a:bodyPr wrap="square" lIns="0" rIns="0" tIns="0" bIns="0">
+            <a:spAutoFit/>
+          </a:bodyPr>
+          <a:lstStyle/>
+          <a:p>
+            <a:pPr>
+              <a:defRPr sz="1100" b="0" i="0">
+                <a:solidFill>
+                  <a:srgbClr val="1D7E7E"/>
+                </a:solidFill>
+                <a:latin typeface="Calibri"/>
+              </a:defRPr>
+            </a:pPr>
+            <a:r>
+              <a:t>%pt</a:t>
+            </a:r>
+          </a:p>
+        </p:txBody>
+      </p:sp>
+      <p:sp>
+        <p:nvSpPr>
+          <p:cNvPr id="13" name="TextBox 12"/>
+          <p:cNvSpPr txBox="1"/>
+          <p:nvPr/>
+        </p:nvSpPr>
+        <p:spPr>
+          <a:xfrm>
+            <a:off x="8412480" y="4389120"/>
+            <a:ext cx="3383280" cy="457200"/>
           </a:xfrm>
           <a:prstGeom prst="rect">
             <a:avLst/>
@@ -8436,63 +9987,27 @@
             <a:pPr>
               <a:defRPr sz="1000" b="0" i="0">
                 <a:solidFill>
-                  <a:srgbClr val="7A7A7A"/>
-                </a:solidFill>
-                <a:latin typeface="Calibri"/>
-              </a:defRPr>
-            </a:pPr>
-            <a:r>
-              <a:t>TrSG alone</a:t>
-            </a:r>
-          </a:p>
-        </p:txBody>
-      </p:sp>
-      <p:sp>
-        <p:nvSpPr>
-          <p:cNvPr id="12" name="TextBox 11"/>
-          <p:cNvSpPr txBox="1"/>
-          <p:nvPr/>
-        </p:nvSpPr>
-        <p:spPr>
-          <a:xfrm>
-            <a:off x="9829800" y="4069080"/>
-            <a:ext cx="2011680" cy="457200"/>
-          </a:xfrm>
-          <a:prstGeom prst="rect">
-            <a:avLst/>
-          </a:prstGeom>
-          <a:noFill/>
-        </p:spPr>
-        <p:txBody>
-          <a:bodyPr wrap="square" lIns="0" rIns="0" tIns="0" bIns="0">
-            <a:spAutoFit/>
-          </a:bodyPr>
-          <a:lstStyle/>
-          <a:p>
-            <a:pPr>
-              <a:defRPr sz="1800" b="1" i="0">
-                <a:solidFill>
-                  <a:srgbClr val="E0B85F"/>
-                </a:solidFill>
-                <a:latin typeface="Cambria"/>
-              </a:defRPr>
-            </a:pPr>
-            <a:r>
-              <a:t>+1.6 ~ 4.2</a:t>
-            </a:r>
-          </a:p>
-        </p:txBody>
-      </p:sp>
-      <p:sp>
-        <p:nvSpPr>
-          <p:cNvPr id="13" name="Rectangle 12"/>
+                  <a:srgbClr val="1A1A1A"/>
+                </a:solidFill>
+                <a:latin typeface="Calibri"/>
+              </a:defRPr>
+            </a:pPr>
+            <a:r>
+              <a:t>ImageNet  ·  beats MPS</a:t>
+            </a:r>
+          </a:p>
+        </p:txBody>
+      </p:sp>
+      <p:sp>
+        <p:nvSpPr>
+          <p:cNvPr id="14" name="Rectangle 13"/>
           <p:cNvSpPr/>
           <p:nvPr/>
         </p:nvSpPr>
         <p:spPr>
           <a:xfrm>
-            <a:off x="9692640" y="4709160"/>
-            <a:ext cx="2286000" cy="914400"/>
+            <a:off x="8229600" y="5029200"/>
+            <a:ext cx="3657600" cy="1280160"/>
           </a:xfrm>
           <a:prstGeom prst="rect">
             <a:avLst/>
@@ -8500,9 +10015,9 @@
           <a:solidFill>
             <a:srgbClr val="F8F7F2"/>
           </a:solidFill>
-          <a:ln w="16510">
+          <a:ln w="22860">
             <a:solidFill>
-              <a:srgbClr val="0E5E5E"/>
+              <a:srgbClr val="E0B85F"/>
             </a:solidFill>
           </a:ln>
         </p:spPr>
@@ -8530,14 +10045,86 @@
       </p:sp>
       <p:sp>
         <p:nvSpPr>
-          <p:cNvPr id="14" name="TextBox 13"/>
-          <p:cNvSpPr txBox="1"/>
-          <p:nvPr/>
-        </p:nvSpPr>
-        <p:spPr>
-          <a:xfrm>
-            <a:off x="9829800" y="4800600"/>
-            <a:ext cx="2011680" cy="274320"/>
+          <p:cNvPr id="15" name="TextBox 14"/>
+          <p:cNvSpPr txBox="1"/>
+          <p:nvPr/>
+        </p:nvSpPr>
+        <p:spPr>
+          <a:xfrm>
+            <a:off x="8412480" y="5212080"/>
+            <a:ext cx="2194560" cy="548640"/>
+          </a:xfrm>
+          <a:prstGeom prst="rect">
+            <a:avLst/>
+          </a:prstGeom>
+          <a:noFill/>
+        </p:spPr>
+        <p:txBody>
+          <a:bodyPr wrap="square" lIns="0" rIns="0" tIns="0" bIns="0">
+            <a:spAutoFit/>
+          </a:bodyPr>
+          <a:lstStyle/>
+          <a:p>
+            <a:pPr>
+              <a:defRPr sz="2600" b="1" i="0">
+                <a:solidFill>
+                  <a:srgbClr val="E0B85F"/>
+                </a:solidFill>
+                <a:latin typeface="Cambria"/>
+              </a:defRPr>
+            </a:pPr>
+            <a:r>
+              <a:t>+5.23</a:t>
+            </a:r>
+          </a:p>
+        </p:txBody>
+      </p:sp>
+      <p:sp>
+        <p:nvSpPr>
+          <p:cNvPr id="16" name="TextBox 15"/>
+          <p:cNvSpPr txBox="1"/>
+          <p:nvPr/>
+        </p:nvSpPr>
+        <p:spPr>
+          <a:xfrm>
+            <a:off x="10424160" y="5321808"/>
+            <a:ext cx="1097280" cy="365760"/>
+          </a:xfrm>
+          <a:prstGeom prst="rect">
+            <a:avLst/>
+          </a:prstGeom>
+          <a:noFill/>
+        </p:spPr>
+        <p:txBody>
+          <a:bodyPr wrap="square" lIns="0" rIns="0" tIns="0" bIns="0">
+            <a:spAutoFit/>
+          </a:bodyPr>
+          <a:lstStyle/>
+          <a:p>
+            <a:pPr>
+              <a:defRPr sz="1100" b="0" i="0">
+                <a:solidFill>
+                  <a:srgbClr val="E0B85F"/>
+                </a:solidFill>
+                <a:latin typeface="Calibri"/>
+              </a:defRPr>
+            </a:pPr>
+            <a:r>
+              <a:t>%pt</a:t>
+            </a:r>
+          </a:p>
+        </p:txBody>
+      </p:sp>
+      <p:sp>
+        <p:nvSpPr>
+          <p:cNvPr id="17" name="TextBox 16"/>
+          <p:cNvSpPr txBox="1"/>
+          <p:nvPr/>
+        </p:nvSpPr>
+        <p:spPr>
+          <a:xfrm>
+            <a:off x="8412480" y="5806440"/>
+            <a:ext cx="3383280" cy="457200"/>
           </a:xfrm>
           <a:prstGeom prst="rect">
             <a:avLst/>
@@ -8553,63 +10140,27 @@
             <a:pPr>
               <a:defRPr sz="1000" b="0" i="0">
                 <a:solidFill>
-                  <a:srgbClr val="7A7A7A"/>
-                </a:solidFill>
-                <a:latin typeface="Calibri"/>
-              </a:defRPr>
-            </a:pPr>
-            <a:r>
-              <a:t>Both</a:t>
-            </a:r>
-          </a:p>
-        </p:txBody>
-      </p:sp>
-      <p:sp>
-        <p:nvSpPr>
-          <p:cNvPr id="15" name="TextBox 14"/>
-          <p:cNvSpPr txBox="1"/>
-          <p:nvPr/>
-        </p:nvSpPr>
-        <p:spPr>
-          <a:xfrm>
-            <a:off x="9829800" y="5074920"/>
-            <a:ext cx="2011680" cy="457200"/>
-          </a:xfrm>
-          <a:prstGeom prst="rect">
-            <a:avLst/>
-          </a:prstGeom>
-          <a:noFill/>
-        </p:spPr>
-        <p:txBody>
-          <a:bodyPr wrap="square" lIns="0" rIns="0" tIns="0" bIns="0">
-            <a:spAutoFit/>
-          </a:bodyPr>
-          <a:lstStyle/>
-          <a:p>
-            <a:pPr>
-              <a:defRPr sz="1800" b="1" i="0">
-                <a:solidFill>
-                  <a:srgbClr val="0E5E5E"/>
-                </a:solidFill>
-                <a:latin typeface="Cambria"/>
-              </a:defRPr>
-            </a:pPr>
-            <a:r>
-              <a:t>+2.1 ~ 4.8</a:t>
-            </a:r>
-          </a:p>
-        </p:txBody>
-      </p:sp>
-      <p:sp>
-        <p:nvSpPr>
-          <p:cNvPr id="16" name="Rectangle 15"/>
+                  <a:srgbClr val="1A1A1A"/>
+                </a:solidFill>
+                <a:latin typeface="Calibri"/>
+              </a:defRPr>
+            </a:pPr>
+            <a:r>
+              <a:t>DVS-CIFAR10  ·  beats RMP</a:t>
+            </a:r>
+          </a:p>
+        </p:txBody>
+      </p:sp>
+      <p:sp>
+        <p:nvSpPr>
+          <p:cNvPr id="18" name="Rectangle 17"/>
           <p:cNvSpPr/>
           <p:nvPr/>
         </p:nvSpPr>
         <p:spPr>
           <a:xfrm>
-            <a:off x="457200" y="5989320"/>
-            <a:ext cx="54864" cy="502920"/>
+            <a:off x="457200" y="6126480"/>
+            <a:ext cx="54864" cy="365760"/>
           </a:xfrm>
           <a:prstGeom prst="rect">
             <a:avLst/>
@@ -8645,20 +10196,20 @@
       </p:sp>
       <p:sp>
         <p:nvSpPr>
-          <p:cNvPr id="17" name="Rectangle 16"/>
+          <p:cNvPr id="19" name="Rectangle 18"/>
           <p:cNvSpPr/>
           <p:nvPr/>
         </p:nvSpPr>
         <p:spPr>
           <a:xfrm>
-            <a:off x="512064" y="5989320"/>
-            <a:ext cx="11192256" cy="502920"/>
+            <a:off x="512064" y="6126480"/>
+            <a:ext cx="11192256" cy="365760"/>
           </a:xfrm>
           <a:prstGeom prst="rect">
             <a:avLst/>
           </a:prstGeom>
           <a:solidFill>
-            <a:srgbClr val="1D7E7E"/>
+            <a:srgbClr val="0F2540"/>
           </a:solidFill>
           <a:ln>
             <a:noFill/>
@@ -8688,14 +10239,14 @@
       </p:sp>
       <p:sp>
         <p:nvSpPr>
-          <p:cNvPr id="18" name="TextBox 17"/>
-          <p:cNvSpPr txBox="1"/>
-          <p:nvPr/>
-        </p:nvSpPr>
-        <p:spPr>
-          <a:xfrm>
-            <a:off x="777240" y="6126480"/>
-            <a:ext cx="10789920" cy="228600"/>
+          <p:cNvPr id="20" name="TextBox 19"/>
+          <p:cNvSpPr txBox="1"/>
+          <p:nvPr/>
+        </p:nvSpPr>
+        <p:spPr>
+          <a:xfrm>
+            <a:off x="777240" y="6263640"/>
+            <a:ext cx="10789920" cy="91440"/>
           </a:xfrm>
           <a:prstGeom prst="rect">
             <a:avLst/>
@@ -8711,20 +10262,20 @@
             <a:pPr>
               <a:defRPr sz="1100" b="1">
                 <a:solidFill>
-                  <a:srgbClr val="FFFFFF"/>
-                </a:solidFill>
-                <a:latin typeface="Calibri"/>
-              </a:defRPr>
-            </a:pPr>
-            <a:r>
-              <a:t>The two fixes are orthogonal — diagnoses aim at different components, not the same problem twice.</a:t>
-            </a:r>
-          </a:p>
-        </p:txBody>
-      </p:sp>
-      <p:sp>
-        <p:nvSpPr>
-          <p:cNvPr id="19" name="TextBox 18"/>
+                  <a:srgbClr val="E0B85F"/>
+                </a:solidFill>
+                <a:latin typeface="Calibri"/>
+              </a:defRPr>
+            </a:pPr>
+            <a:r>
+              <a:t>Biggest gain on the most challenging (event-based) dataset — DVS-CIFAR10 +5.23 %pt</a:t>
+            </a:r>
+          </a:p>
+        </p:txBody>
+      </p:sp>
+      <p:sp>
+        <p:nvSpPr>
+          <p:cNvPr id="21" name="TextBox 20"/>
           <p:cNvSpPr txBox="1"/>
           <p:nvPr/>
         </p:nvSpPr>
@@ -8760,7 +10311,7 @@
       </p:sp>
       <p:sp>
         <p:nvSpPr>
-          <p:cNvPr id="20" name="TextBox 19"/>
+          <p:cNvPr id="22" name="TextBox 21"/>
           <p:cNvSpPr txBox="1"/>
           <p:nvPr/>
         </p:nvSpPr>
@@ -8789,7 +10340,7 @@
               </a:defRPr>
             </a:pPr>
             <a:r>
-              <a:t>16 / 19</a:t>
+              <a:t>16 / 20</a:t>
             </a:r>
           </a:p>
         </p:txBody>
@@ -8844,7 +10395,7 @@
             </a:pPr>
             <a:r>
               <a:rPr spc="300"/>
-              <a:t>EXPERIMENTS · 3/3</a:t>
+              <a:t>EXPERIMENTS · 2/3</a:t>
             </a:r>
           </a:p>
         </p:txBody>
@@ -8880,7 +10431,7 @@
               </a:defRPr>
             </a:pPr>
             <a:r>
-              <a:t>Beyond Classification</a:t>
+              <a:t>Ablation — Independent and Complementary</a:t>
             </a:r>
           </a:p>
         </p:txBody>
@@ -8916,21 +10467,81 @@
               </a:defRPr>
             </a:pPr>
             <a:r>
-              <a:t>Transformer SNNs · object detection · energy preserved</a:t>
-            </a:r>
-          </a:p>
-        </p:txBody>
-      </p:sp>
-      <p:sp>
-        <p:nvSpPr>
-          <p:cNvPr id="5" name="Rectangle 4"/>
+              <a:t>Each method helps alone; together they compound (especially on event-based data)</a:t>
+            </a:r>
+          </a:p>
+        </p:txBody>
+      </p:sp>
+      <p:pic>
+        <p:nvPicPr>
+          <p:cNvPr id="5" name="Picture 4" descr="ablation_bars.png"/>
+          <p:cNvPicPr>
+            <a:picLocks noChangeAspect="1"/>
+          </p:cNvPicPr>
+          <p:nvPr/>
+        </p:nvPicPr>
+        <p:blipFill>
+          <a:blip r:embed="rId2"/>
+          <a:stretch>
+            <a:fillRect/>
+          </a:stretch>
+        </p:blipFill>
+        <p:spPr>
+          <a:xfrm>
+            <a:off x="365760" y="2240280"/>
+            <a:ext cx="9144000" cy="3819646"/>
+          </a:xfrm>
+          <a:prstGeom prst="rect">
+            <a:avLst/>
+          </a:prstGeom>
+        </p:spPr>
+      </p:pic>
+      <p:sp>
+        <p:nvSpPr>
+          <p:cNvPr id="6" name="TextBox 5"/>
+          <p:cNvSpPr txBox="1"/>
+          <p:nvPr/>
+        </p:nvSpPr>
+        <p:spPr>
+          <a:xfrm>
+            <a:off x="9875520" y="2286000"/>
+            <a:ext cx="2194560" cy="365760"/>
+          </a:xfrm>
+          <a:prstGeom prst="rect">
+            <a:avLst/>
+          </a:prstGeom>
+          <a:noFill/>
+        </p:spPr>
+        <p:txBody>
+          <a:bodyPr wrap="square" lIns="0" rIns="0" tIns="0" bIns="0">
+            <a:spAutoFit/>
+          </a:bodyPr>
+          <a:lstStyle/>
+          <a:p>
+            <a:pPr>
+              <a:defRPr sz="1200" b="1" i="0">
+                <a:solidFill>
+                  <a:srgbClr val="0F2540"/>
+                </a:solidFill>
+                <a:latin typeface="Calibri"/>
+              </a:defRPr>
+            </a:pPr>
+            <a:r>
+              <a:t>Takeaway</a:t>
+            </a:r>
+          </a:p>
+        </p:txBody>
+      </p:sp>
+      <p:sp>
+        <p:nvSpPr>
+          <p:cNvPr id="7" name="Rectangle 6"/>
           <p:cNvSpPr/>
           <p:nvPr/>
         </p:nvSpPr>
         <p:spPr>
           <a:xfrm>
-            <a:off x="457200" y="2286000"/>
-            <a:ext cx="5486400" cy="1554480"/>
+            <a:off x="9692640" y="2697480"/>
+            <a:ext cx="2286000" cy="914400"/>
           </a:xfrm>
           <a:prstGeom prst="rect">
             <a:avLst/>
@@ -8938,7 +10549,7 @@
           <a:solidFill>
             <a:srgbClr val="F8F7F2"/>
           </a:solidFill>
-          <a:ln w="15240">
+          <a:ln w="16510">
             <a:solidFill>
               <a:srgbClr val="1D7E7E"/>
             </a:solidFill>
@@ -8968,94 +10579,86 @@
       </p:sp>
       <p:sp>
         <p:nvSpPr>
-          <p:cNvPr id="6" name="TextBox 5"/>
-          <p:cNvSpPr txBox="1"/>
-          <p:nvPr/>
-        </p:nvSpPr>
-        <p:spPr>
-          <a:xfrm>
-            <a:off x="640080" y="2423160"/>
-            <a:ext cx="5120640" cy="365760"/>
-          </a:xfrm>
-          <a:prstGeom prst="rect">
-            <a:avLst/>
-          </a:prstGeom>
-          <a:noFill/>
-        </p:spPr>
-        <p:txBody>
-          <a:bodyPr wrap="square" lIns="0" rIns="0" tIns="0" bIns="0">
-            <a:spAutoFit/>
-          </a:bodyPr>
-          <a:lstStyle/>
-          <a:p>
-            <a:pPr>
-              <a:defRPr sz="1200" b="1" i="0">
+          <p:cNvPr id="8" name="TextBox 7"/>
+          <p:cNvSpPr txBox="1"/>
+          <p:nvPr/>
+        </p:nvSpPr>
+        <p:spPr>
+          <a:xfrm>
+            <a:off x="9829800" y="2788920"/>
+            <a:ext cx="2011680" cy="274320"/>
+          </a:xfrm>
+          <a:prstGeom prst="rect">
+            <a:avLst/>
+          </a:prstGeom>
+          <a:noFill/>
+        </p:spPr>
+        <p:txBody>
+          <a:bodyPr wrap="square" lIns="0" rIns="0" tIns="0" bIns="0">
+            <a:spAutoFit/>
+          </a:bodyPr>
+          <a:lstStyle/>
+          <a:p>
+            <a:pPr>
+              <a:defRPr sz="1000" b="0" i="0">
+                <a:solidFill>
+                  <a:srgbClr val="7A7A7A"/>
+                </a:solidFill>
+                <a:latin typeface="Calibri"/>
+              </a:defRPr>
+            </a:pPr>
+            <a:r>
+              <a:t>MP-Init alone</a:t>
+            </a:r>
+          </a:p>
+        </p:txBody>
+      </p:sp>
+      <p:sp>
+        <p:nvSpPr>
+          <p:cNvPr id="9" name="TextBox 8"/>
+          <p:cNvSpPr txBox="1"/>
+          <p:nvPr/>
+        </p:nvSpPr>
+        <p:spPr>
+          <a:xfrm>
+            <a:off x="9829800" y="3063240"/>
+            <a:ext cx="2011680" cy="457200"/>
+          </a:xfrm>
+          <a:prstGeom prst="rect">
+            <a:avLst/>
+          </a:prstGeom>
+          <a:noFill/>
+        </p:spPr>
+        <p:txBody>
+          <a:bodyPr wrap="square" lIns="0" rIns="0" tIns="0" bIns="0">
+            <a:spAutoFit/>
+          </a:bodyPr>
+          <a:lstStyle/>
+          <a:p>
+            <a:pPr>
+              <a:defRPr sz="1800" b="1" i="0">
                 <a:solidFill>
                   <a:srgbClr val="1D7E7E"/>
                 </a:solidFill>
-                <a:latin typeface="Calibri"/>
-              </a:defRPr>
-            </a:pPr>
-            <a:r>
-              <a:t>Transformer SNN  (QKFormer, ImageNet, T=4)</a:t>
-            </a:r>
-          </a:p>
-        </p:txBody>
-      </p:sp>
-      <p:sp>
-        <p:nvSpPr>
-          <p:cNvPr id="7" name="TextBox 6"/>
-          <p:cNvSpPr txBox="1"/>
-          <p:nvPr/>
-        </p:nvSpPr>
-        <p:spPr>
-          <a:xfrm>
-            <a:off x="640080" y="2788920"/>
-            <a:ext cx="5120640" cy="914400"/>
-          </a:xfrm>
-          <a:prstGeom prst="rect">
-            <a:avLst/>
-          </a:prstGeom>
-          <a:noFill/>
-        </p:spPr>
-        <p:txBody>
-          <a:bodyPr wrap="square" lIns="0" rIns="0" tIns="0" bIns="0">
-            <a:spAutoFit/>
-          </a:bodyPr>
-          <a:lstStyle/>
-          <a:p>
-            <a:pPr>
-              <a:defRPr sz="1100" b="0" i="0">
-                <a:solidFill>
-                  <a:srgbClr val="1A1A1A"/>
-                </a:solidFill>
-                <a:latin typeface="Calibri"/>
-              </a:defRPr>
-            </a:pPr>
-            <a:r>
-              <a:t>Baseline 78.80    →    + ours 79.90    (+1.10 %pt)</a:t>
-            </a:r>
-            <a:br/>
-            <a:r>
-              <a:t>AS-SG    77.09    →    RS-SG  78.70    →    TrSG  79.90</a:t>
-            </a:r>
-            <a:br/>
-            <a:r>
-              <a:t>Drop-in SG swap on a state-of-the-art Transformer SNN.</a:t>
-            </a:r>
-          </a:p>
-        </p:txBody>
-      </p:sp>
-      <p:sp>
-        <p:nvSpPr>
-          <p:cNvPr id="8" name="Rectangle 7"/>
+                <a:latin typeface="Cambria"/>
+              </a:defRPr>
+            </a:pPr>
+            <a:r>
+              <a:t>+0.5 ~ 0.8</a:t>
+            </a:r>
+          </a:p>
+        </p:txBody>
+      </p:sp>
+      <p:sp>
+        <p:nvSpPr>
+          <p:cNvPr id="10" name="Rectangle 9"/>
           <p:cNvSpPr/>
           <p:nvPr/>
         </p:nvSpPr>
         <p:spPr>
           <a:xfrm>
-            <a:off x="6263640" y="2286000"/>
-            <a:ext cx="5486400" cy="1554480"/>
+            <a:off x="9692640" y="3703320"/>
+            <a:ext cx="2286000" cy="914400"/>
           </a:xfrm>
           <a:prstGeom prst="rect">
             <a:avLst/>
@@ -9063,9 +10666,9 @@
           <a:solidFill>
             <a:srgbClr val="F8F7F2"/>
           </a:solidFill>
-          <a:ln w="15240">
+          <a:ln w="16510">
             <a:solidFill>
-              <a:srgbClr val="1D7E7E"/>
+              <a:srgbClr val="E0B85F"/>
             </a:solidFill>
           </a:ln>
         </p:spPr>
@@ -9093,94 +10696,86 @@
       </p:sp>
       <p:sp>
         <p:nvSpPr>
-          <p:cNvPr id="9" name="TextBox 8"/>
-          <p:cNvSpPr txBox="1"/>
-          <p:nvPr/>
-        </p:nvSpPr>
-        <p:spPr>
-          <a:xfrm>
-            <a:off x="6446520" y="2423160"/>
-            <a:ext cx="5120640" cy="365760"/>
-          </a:xfrm>
-          <a:prstGeom prst="rect">
-            <a:avLst/>
-          </a:prstGeom>
-          <a:noFill/>
-        </p:spPr>
-        <p:txBody>
-          <a:bodyPr wrap="square" lIns="0" rIns="0" tIns="0" bIns="0">
-            <a:spAutoFit/>
-          </a:bodyPr>
-          <a:lstStyle/>
-          <a:p>
-            <a:pPr>
-              <a:defRPr sz="1200" b="1" i="0">
-                <a:solidFill>
-                  <a:srgbClr val="1D7E7E"/>
-                </a:solidFill>
-                <a:latin typeface="Calibri"/>
-              </a:defRPr>
-            </a:pPr>
-            <a:r>
-              <a:t>Object detection  (COCO-2017, EMS-ResNet10, T=3)</a:t>
-            </a:r>
-          </a:p>
-        </p:txBody>
-      </p:sp>
-      <p:sp>
-        <p:nvSpPr>
-          <p:cNvPr id="10" name="TextBox 9"/>
-          <p:cNvSpPr txBox="1"/>
-          <p:nvPr/>
-        </p:nvSpPr>
-        <p:spPr>
-          <a:xfrm>
-            <a:off x="6446520" y="2788920"/>
-            <a:ext cx="5120640" cy="914400"/>
-          </a:xfrm>
-          <a:prstGeom prst="rect">
-            <a:avLst/>
-          </a:prstGeom>
-          <a:noFill/>
-        </p:spPr>
-        <p:txBody>
-          <a:bodyPr wrap="square" lIns="0" rIns="0" tIns="0" bIns="0">
-            <a:spAutoFit/>
-          </a:bodyPr>
-          <a:lstStyle/>
-          <a:p>
-            <a:pPr>
-              <a:defRPr sz="1100" b="0" i="0">
-                <a:solidFill>
-                  <a:srgbClr val="1A1A1A"/>
-                </a:solidFill>
-                <a:latin typeface="Calibri"/>
-              </a:defRPr>
-            </a:pPr>
-            <a:r>
-              <a:t>mAP@0.5         0.291  →  0.305    (+0.014)</a:t>
-            </a:r>
-            <a:br/>
-            <a:r>
-              <a:t>mAP@0.5:0.95    0.138  →  0.147    (+0.009)</a:t>
-            </a:r>
-            <a:br/>
-            <a:r>
-              <a:t>First evidence the principles transfer beyond classification.</a:t>
-            </a:r>
-          </a:p>
-        </p:txBody>
-      </p:sp>
-      <p:sp>
-        <p:nvSpPr>
-          <p:cNvPr id="11" name="Rectangle 10"/>
+          <p:cNvPr id="11" name="TextBox 10"/>
+          <p:cNvSpPr txBox="1"/>
+          <p:nvPr/>
+        </p:nvSpPr>
+        <p:spPr>
+          <a:xfrm>
+            <a:off x="9829800" y="3794759"/>
+            <a:ext cx="2011680" cy="274320"/>
+          </a:xfrm>
+          <a:prstGeom prst="rect">
+            <a:avLst/>
+          </a:prstGeom>
+          <a:noFill/>
+        </p:spPr>
+        <p:txBody>
+          <a:bodyPr wrap="square" lIns="0" rIns="0" tIns="0" bIns="0">
+            <a:spAutoFit/>
+          </a:bodyPr>
+          <a:lstStyle/>
+          <a:p>
+            <a:pPr>
+              <a:defRPr sz="1000" b="0" i="0">
+                <a:solidFill>
+                  <a:srgbClr val="7A7A7A"/>
+                </a:solidFill>
+                <a:latin typeface="Calibri"/>
+              </a:defRPr>
+            </a:pPr>
+            <a:r>
+              <a:t>TrSG alone</a:t>
+            </a:r>
+          </a:p>
+        </p:txBody>
+      </p:sp>
+      <p:sp>
+        <p:nvSpPr>
+          <p:cNvPr id="12" name="TextBox 11"/>
+          <p:cNvSpPr txBox="1"/>
+          <p:nvPr/>
+        </p:nvSpPr>
+        <p:spPr>
+          <a:xfrm>
+            <a:off x="9829800" y="4069080"/>
+            <a:ext cx="2011680" cy="457200"/>
+          </a:xfrm>
+          <a:prstGeom prst="rect">
+            <a:avLst/>
+          </a:prstGeom>
+          <a:noFill/>
+        </p:spPr>
+        <p:txBody>
+          <a:bodyPr wrap="square" lIns="0" rIns="0" tIns="0" bIns="0">
+            <a:spAutoFit/>
+          </a:bodyPr>
+          <a:lstStyle/>
+          <a:p>
+            <a:pPr>
+              <a:defRPr sz="1800" b="1" i="0">
+                <a:solidFill>
+                  <a:srgbClr val="E0B85F"/>
+                </a:solidFill>
+                <a:latin typeface="Cambria"/>
+              </a:defRPr>
+            </a:pPr>
+            <a:r>
+              <a:t>+1.6 ~ 4.2</a:t>
+            </a:r>
+          </a:p>
+        </p:txBody>
+      </p:sp>
+      <p:sp>
+        <p:nvSpPr>
+          <p:cNvPr id="13" name="Rectangle 12"/>
           <p:cNvSpPr/>
           <p:nvPr/>
         </p:nvSpPr>
         <p:spPr>
           <a:xfrm>
-            <a:off x="457200" y="4023360"/>
-            <a:ext cx="5486400" cy="1554480"/>
+            <a:off x="9692640" y="4709160"/>
+            <a:ext cx="2286000" cy="914400"/>
           </a:xfrm>
           <a:prstGeom prst="rect">
             <a:avLst/>
@@ -9188,9 +10783,9 @@
           <a:solidFill>
             <a:srgbClr val="F8F7F2"/>
           </a:solidFill>
-          <a:ln w="15240">
+          <a:ln w="16510">
             <a:solidFill>
-              <a:srgbClr val="1D7E7E"/>
+              <a:srgbClr val="0E5E5E"/>
             </a:solidFill>
           </a:ln>
         </p:spPr>
@@ -9218,219 +10813,86 @@
       </p:sp>
       <p:sp>
         <p:nvSpPr>
-          <p:cNvPr id="12" name="TextBox 11"/>
-          <p:cNvSpPr txBox="1"/>
-          <p:nvPr/>
-        </p:nvSpPr>
-        <p:spPr>
-          <a:xfrm>
-            <a:off x="640080" y="4160520"/>
-            <a:ext cx="5120640" cy="365760"/>
-          </a:xfrm>
-          <a:prstGeom prst="rect">
-            <a:avLst/>
-          </a:prstGeom>
-          <a:noFill/>
-        </p:spPr>
-        <p:txBody>
-          <a:bodyPr wrap="square" lIns="0" rIns="0" tIns="0" bIns="0">
-            <a:spAutoFit/>
-          </a:bodyPr>
-          <a:lstStyle/>
-          <a:p>
-            <a:pPr>
-              <a:defRPr sz="1200" b="1" i="0">
-                <a:solidFill>
-                  <a:srgbClr val="1D7E7E"/>
-                </a:solidFill>
-                <a:latin typeface="Calibri"/>
-              </a:defRPr>
-            </a:pPr>
-            <a:r>
-              <a:t>Energy at matched firing rate  (CIFAR-100)</a:t>
-            </a:r>
-          </a:p>
-        </p:txBody>
-      </p:sp>
-      <p:sp>
-        <p:nvSpPr>
-          <p:cNvPr id="13" name="TextBox 12"/>
-          <p:cNvSpPr txBox="1"/>
-          <p:nvPr/>
-        </p:nvSpPr>
-        <p:spPr>
-          <a:xfrm>
-            <a:off x="640080" y="4526280"/>
-            <a:ext cx="5120640" cy="914400"/>
-          </a:xfrm>
-          <a:prstGeom prst="rect">
-            <a:avLst/>
-          </a:prstGeom>
-          <a:noFill/>
-        </p:spPr>
-        <p:txBody>
-          <a:bodyPr wrap="square" lIns="0" rIns="0" tIns="0" bIns="0">
-            <a:spAutoFit/>
-          </a:bodyPr>
-          <a:lstStyle/>
-          <a:p>
-            <a:pPr>
-              <a:defRPr sz="1100" b="0" i="0">
-                <a:solidFill>
-                  <a:srgbClr val="1A1A1A"/>
-                </a:solidFill>
-                <a:latin typeface="Calibri"/>
-              </a:defRPr>
-            </a:pPr>
-            <a:r>
-              <a:t>Baseline   1.57 mJ   ·   75.58 %</a:t>
-            </a:r>
-            <a:br/>
-            <a:r>
-              <a:t>+ MP-Init + TrSG    1.67 mJ   ·   77.68 %</a:t>
-            </a:r>
-            <a:br/>
-            <a:r>
-              <a:t>+2.10 %pt at +6 % energy — gains aren't from spiking more.</a:t>
-            </a:r>
-          </a:p>
-        </p:txBody>
-      </p:sp>
-      <p:sp>
-        <p:nvSpPr>
-          <p:cNvPr id="14" name="Rectangle 13"/>
+          <p:cNvPr id="14" name="TextBox 13"/>
+          <p:cNvSpPr txBox="1"/>
+          <p:nvPr/>
+        </p:nvSpPr>
+        <p:spPr>
+          <a:xfrm>
+            <a:off x="9829800" y="4800600"/>
+            <a:ext cx="2011680" cy="274320"/>
+          </a:xfrm>
+          <a:prstGeom prst="rect">
+            <a:avLst/>
+          </a:prstGeom>
+          <a:noFill/>
+        </p:spPr>
+        <p:txBody>
+          <a:bodyPr wrap="square" lIns="0" rIns="0" tIns="0" bIns="0">
+            <a:spAutoFit/>
+          </a:bodyPr>
+          <a:lstStyle/>
+          <a:p>
+            <a:pPr>
+              <a:defRPr sz="1000" b="0" i="0">
+                <a:solidFill>
+                  <a:srgbClr val="7A7A7A"/>
+                </a:solidFill>
+                <a:latin typeface="Calibri"/>
+              </a:defRPr>
+            </a:pPr>
+            <a:r>
+              <a:t>Both</a:t>
+            </a:r>
+          </a:p>
+        </p:txBody>
+      </p:sp>
+      <p:sp>
+        <p:nvSpPr>
+          <p:cNvPr id="15" name="TextBox 14"/>
+          <p:cNvSpPr txBox="1"/>
+          <p:nvPr/>
+        </p:nvSpPr>
+        <p:spPr>
+          <a:xfrm>
+            <a:off x="9829800" y="5074920"/>
+            <a:ext cx="2011680" cy="457200"/>
+          </a:xfrm>
+          <a:prstGeom prst="rect">
+            <a:avLst/>
+          </a:prstGeom>
+          <a:noFill/>
+        </p:spPr>
+        <p:txBody>
+          <a:bodyPr wrap="square" lIns="0" rIns="0" tIns="0" bIns="0">
+            <a:spAutoFit/>
+          </a:bodyPr>
+          <a:lstStyle/>
+          <a:p>
+            <a:pPr>
+              <a:defRPr sz="1800" b="1" i="0">
+                <a:solidFill>
+                  <a:srgbClr val="0E5E5E"/>
+                </a:solidFill>
+                <a:latin typeface="Cambria"/>
+              </a:defRPr>
+            </a:pPr>
+            <a:r>
+              <a:t>+2.1 ~ 4.8</a:t>
+            </a:r>
+          </a:p>
+        </p:txBody>
+      </p:sp>
+      <p:sp>
+        <p:nvSpPr>
+          <p:cNvPr id="16" name="Rectangle 15"/>
           <p:cNvSpPr/>
           <p:nvPr/>
         </p:nvSpPr>
         <p:spPr>
           <a:xfrm>
-            <a:off x="6263640" y="4023360"/>
-            <a:ext cx="5486400" cy="1554480"/>
-          </a:xfrm>
-          <a:prstGeom prst="rect">
-            <a:avLst/>
-          </a:prstGeom>
-          <a:solidFill>
-            <a:srgbClr val="F8F7F2"/>
-          </a:solidFill>
-          <a:ln w="15240">
-            <a:solidFill>
-              <a:srgbClr val="1D7E7E"/>
-            </a:solidFill>
-          </a:ln>
-        </p:spPr>
-        <p:style>
-          <a:lnRef idx="1">
-            <a:schemeClr val="accent1"/>
-          </a:lnRef>
-          <a:fillRef idx="3">
-            <a:schemeClr val="accent1"/>
-          </a:fillRef>
-          <a:effectRef idx="2">
-            <a:schemeClr val="accent1"/>
-          </a:effectRef>
-          <a:fontRef idx="minor">
-            <a:schemeClr val="lt1"/>
-          </a:fontRef>
-        </p:style>
-        <p:txBody>
-          <a:bodyPr rtlCol="0" anchor="ctr"/>
-          <a:lstStyle/>
-          <a:p>
-            <a:pPr algn="ctr"/>
-          </a:p>
-        </p:txBody>
-      </p:sp>
-      <p:sp>
-        <p:nvSpPr>
-          <p:cNvPr id="15" name="TextBox 14"/>
-          <p:cNvSpPr txBox="1"/>
-          <p:nvPr/>
-        </p:nvSpPr>
-        <p:spPr>
-          <a:xfrm>
-            <a:off x="6446520" y="4160520"/>
-            <a:ext cx="5120640" cy="365760"/>
-          </a:xfrm>
-          <a:prstGeom prst="rect">
-            <a:avLst/>
-          </a:prstGeom>
-          <a:noFill/>
-        </p:spPr>
-        <p:txBody>
-          <a:bodyPr wrap="square" lIns="0" rIns="0" tIns="0" bIns="0">
-            <a:spAutoFit/>
-          </a:bodyPr>
-          <a:lstStyle/>
-          <a:p>
-            <a:pPr>
-              <a:defRPr sz="1200" b="1" i="0">
-                <a:solidFill>
-                  <a:srgbClr val="1D7E7E"/>
-                </a:solidFill>
-                <a:latin typeface="Calibri"/>
-              </a:defRPr>
-            </a:pPr>
-            <a:r>
-              <a:t>All four surrogate shapes</a:t>
-            </a:r>
-          </a:p>
-        </p:txBody>
-      </p:sp>
-      <p:sp>
-        <p:nvSpPr>
-          <p:cNvPr id="16" name="TextBox 15"/>
-          <p:cNvSpPr txBox="1"/>
-          <p:nvPr/>
-        </p:nvSpPr>
-        <p:spPr>
-          <a:xfrm>
-            <a:off x="6446520" y="4526280"/>
-            <a:ext cx="5120640" cy="914400"/>
-          </a:xfrm>
-          <a:prstGeom prst="rect">
-            <a:avLst/>
-          </a:prstGeom>
-          <a:noFill/>
-        </p:spPr>
-        <p:txBody>
-          <a:bodyPr wrap="square" lIns="0" rIns="0" tIns="0" bIns="0">
-            <a:spAutoFit/>
-          </a:bodyPr>
-          <a:lstStyle/>
-          <a:p>
-            <a:pPr>
-              <a:defRPr sz="1100" b="0" i="0">
-                <a:solidFill>
-                  <a:srgbClr val="1A1A1A"/>
-                </a:solidFill>
-                <a:latin typeface="Calibri"/>
-              </a:defRPr>
-            </a:pPr>
-            <a:r>
-              <a:t>Rectangular · Triangular · Arctan · Sigmoid</a:t>
-            </a:r>
-            <a:br/>
-            <a:r>
-              <a:t>TrSG remains the best across initial V_thr, initial τ,</a:t>
-            </a:r>
-            <a:br/>
-            <a:r>
-              <a:t>and surrogate shape — never tied for second.</a:t>
-            </a:r>
-          </a:p>
-        </p:txBody>
-      </p:sp>
-      <p:sp>
-        <p:nvSpPr>
-          <p:cNvPr id="17" name="Rectangle 16"/>
-          <p:cNvSpPr/>
-          <p:nvPr/>
-        </p:nvSpPr>
-        <p:spPr>
-          <a:xfrm>
-            <a:off x="457200" y="5715000"/>
-            <a:ext cx="54864" cy="685800"/>
+            <a:off x="457200" y="5989320"/>
+            <a:ext cx="54864" cy="502920"/>
           </a:xfrm>
           <a:prstGeom prst="rect">
             <a:avLst/>
@@ -9466,20 +10928,20 @@
       </p:sp>
       <p:sp>
         <p:nvSpPr>
-          <p:cNvPr id="18" name="Rectangle 17"/>
+          <p:cNvPr id="17" name="Rectangle 16"/>
           <p:cNvSpPr/>
           <p:nvPr/>
         </p:nvSpPr>
         <p:spPr>
           <a:xfrm>
-            <a:off x="512064" y="5715000"/>
-            <a:ext cx="11192256" cy="685800"/>
+            <a:off x="512064" y="5989320"/>
+            <a:ext cx="11192256" cy="502920"/>
           </a:xfrm>
           <a:prstGeom prst="rect">
             <a:avLst/>
           </a:prstGeom>
           <a:solidFill>
-            <a:srgbClr val="0F2540"/>
+            <a:srgbClr val="1D7E7E"/>
           </a:solidFill>
           <a:ln>
             <a:noFill/>
@@ -9509,43 +10971,43 @@
       </p:sp>
       <p:sp>
         <p:nvSpPr>
+          <p:cNvPr id="18" name="TextBox 17"/>
+          <p:cNvSpPr txBox="1"/>
+          <p:nvPr/>
+        </p:nvSpPr>
+        <p:spPr>
+          <a:xfrm>
+            <a:off x="777240" y="6126480"/>
+            <a:ext cx="10789920" cy="228600"/>
+          </a:xfrm>
+          <a:prstGeom prst="rect">
+            <a:avLst/>
+          </a:prstGeom>
+          <a:noFill/>
+        </p:spPr>
+        <p:txBody>
+          <a:bodyPr wrap="square">
+            <a:spAutoFit/>
+          </a:bodyPr>
+          <a:lstStyle/>
+          <a:p>
+            <a:pPr>
+              <a:defRPr sz="1100" b="1">
+                <a:solidFill>
+                  <a:srgbClr val="FFFFFF"/>
+                </a:solidFill>
+                <a:latin typeface="Calibri"/>
+              </a:defRPr>
+            </a:pPr>
+            <a:r>
+              <a:t>The two fixes are orthogonal — diagnoses aim at different components, not the same problem twice.</a:t>
+            </a:r>
+          </a:p>
+        </p:txBody>
+      </p:sp>
+      <p:sp>
+        <p:nvSpPr>
           <p:cNvPr id="19" name="TextBox 18"/>
-          <p:cNvSpPr txBox="1"/>
-          <p:nvPr/>
-        </p:nvSpPr>
-        <p:spPr>
-          <a:xfrm>
-            <a:off x="777240" y="5852160"/>
-            <a:ext cx="10789920" cy="411480"/>
-          </a:xfrm>
-          <a:prstGeom prst="rect">
-            <a:avLst/>
-          </a:prstGeom>
-          <a:noFill/>
-        </p:spPr>
-        <p:txBody>
-          <a:bodyPr wrap="square">
-            <a:spAutoFit/>
-          </a:bodyPr>
-          <a:lstStyle/>
-          <a:p>
-            <a:pPr>
-              <a:defRPr sz="1300" b="1">
-                <a:solidFill>
-                  <a:srgbClr val="E0B85F"/>
-                </a:solidFill>
-                <a:latin typeface="Calibri"/>
-              </a:defRPr>
-            </a:pPr>
-            <a:r>
-              <a:t>No architectural changes, no extra losses, no per-timestep parameters — just drop in.</a:t>
-            </a:r>
-          </a:p>
-        </p:txBody>
-      </p:sp>
-      <p:sp>
-        <p:nvSpPr>
-          <p:cNvPr id="20" name="TextBox 19"/>
           <p:cNvSpPr txBox="1"/>
           <p:nvPr/>
         </p:nvSpPr>
@@ -9581,7 +11043,7 @@
       </p:sp>
       <p:sp>
         <p:nvSpPr>
-          <p:cNvPr id="21" name="TextBox 20"/>
+          <p:cNvPr id="20" name="TextBox 19"/>
           <p:cNvSpPr txBox="1"/>
           <p:nvPr/>
         </p:nvSpPr>
@@ -9610,7 +11072,7 @@
               </a:defRPr>
             </a:pPr>
             <a:r>
-              <a:t>17 / 19</a:t>
+              <a:t>17 / 20</a:t>
             </a:r>
           </a:p>
         </p:txBody>
@@ -9665,7 +11127,7 @@
             </a:pPr>
             <a:r>
               <a:rPr spc="300"/>
-              <a:t>CONCLUSION</a:t>
+              <a:t>EXPERIMENTS · 3/3</a:t>
             </a:r>
           </a:p>
         </p:txBody>
@@ -9701,21 +11163,557 @@
               </a:defRPr>
             </a:pPr>
             <a:r>
-              <a:t>What This Talk Was About</a:t>
-            </a:r>
-          </a:p>
-        </p:txBody>
-      </p:sp>
-      <p:sp>
-        <p:nvSpPr>
-          <p:cNvPr id="4" name="Rectangle 3"/>
+              <a:t>Beyond Classification</a:t>
+            </a:r>
+          </a:p>
+        </p:txBody>
+      </p:sp>
+      <p:sp>
+        <p:nvSpPr>
+          <p:cNvPr id="4" name="TextBox 3"/>
+          <p:cNvSpPr txBox="1"/>
+          <p:nvPr/>
+        </p:nvSpPr>
+        <p:spPr>
+          <a:xfrm>
+            <a:off x="457200" y="1600200"/>
+            <a:ext cx="11247120" cy="365760"/>
+          </a:xfrm>
+          <a:prstGeom prst="rect">
+            <a:avLst/>
+          </a:prstGeom>
+          <a:noFill/>
+        </p:spPr>
+        <p:txBody>
+          <a:bodyPr wrap="square" lIns="0" rIns="0" tIns="0" bIns="0">
+            <a:spAutoFit/>
+          </a:bodyPr>
+          <a:lstStyle/>
+          <a:p>
+            <a:pPr>
+              <a:defRPr sz="1400" b="0" i="1">
+                <a:solidFill>
+                  <a:srgbClr val="7A7A7A"/>
+                </a:solidFill>
+                <a:latin typeface="Calibri"/>
+              </a:defRPr>
+            </a:pPr>
+            <a:r>
+              <a:t>Transformer SNNs · object detection · energy preserved</a:t>
+            </a:r>
+          </a:p>
+        </p:txBody>
+      </p:sp>
+      <p:sp>
+        <p:nvSpPr>
+          <p:cNvPr id="5" name="Rectangle 4"/>
           <p:cNvSpPr/>
           <p:nvPr/>
         </p:nvSpPr>
         <p:spPr>
           <a:xfrm>
-            <a:off x="457200" y="2194560"/>
-            <a:ext cx="54864" cy="914400"/>
+            <a:off x="457200" y="2286000"/>
+            <a:ext cx="5486400" cy="1554480"/>
+          </a:xfrm>
+          <a:prstGeom prst="rect">
+            <a:avLst/>
+          </a:prstGeom>
+          <a:solidFill>
+            <a:srgbClr val="F8F7F2"/>
+          </a:solidFill>
+          <a:ln w="15240">
+            <a:solidFill>
+              <a:srgbClr val="1D7E7E"/>
+            </a:solidFill>
+          </a:ln>
+        </p:spPr>
+        <p:style>
+          <a:lnRef idx="1">
+            <a:schemeClr val="accent1"/>
+          </a:lnRef>
+          <a:fillRef idx="3">
+            <a:schemeClr val="accent1"/>
+          </a:fillRef>
+          <a:effectRef idx="2">
+            <a:schemeClr val="accent1"/>
+          </a:effectRef>
+          <a:fontRef idx="minor">
+            <a:schemeClr val="lt1"/>
+          </a:fontRef>
+        </p:style>
+        <p:txBody>
+          <a:bodyPr rtlCol="0" anchor="ctr"/>
+          <a:lstStyle/>
+          <a:p>
+            <a:pPr algn="ctr"/>
+          </a:p>
+        </p:txBody>
+      </p:sp>
+      <p:sp>
+        <p:nvSpPr>
+          <p:cNvPr id="6" name="TextBox 5"/>
+          <p:cNvSpPr txBox="1"/>
+          <p:nvPr/>
+        </p:nvSpPr>
+        <p:spPr>
+          <a:xfrm>
+            <a:off x="640080" y="2423160"/>
+            <a:ext cx="5120640" cy="365760"/>
+          </a:xfrm>
+          <a:prstGeom prst="rect">
+            <a:avLst/>
+          </a:prstGeom>
+          <a:noFill/>
+        </p:spPr>
+        <p:txBody>
+          <a:bodyPr wrap="square" lIns="0" rIns="0" tIns="0" bIns="0">
+            <a:spAutoFit/>
+          </a:bodyPr>
+          <a:lstStyle/>
+          <a:p>
+            <a:pPr>
+              <a:defRPr sz="1200" b="1" i="0">
+                <a:solidFill>
+                  <a:srgbClr val="1D7E7E"/>
+                </a:solidFill>
+                <a:latin typeface="Calibri"/>
+              </a:defRPr>
+            </a:pPr>
+            <a:r>
+              <a:t>Transformer SNN  (QKFormer, ImageNet, T=4)</a:t>
+            </a:r>
+          </a:p>
+        </p:txBody>
+      </p:sp>
+      <p:sp>
+        <p:nvSpPr>
+          <p:cNvPr id="7" name="TextBox 6"/>
+          <p:cNvSpPr txBox="1"/>
+          <p:nvPr/>
+        </p:nvSpPr>
+        <p:spPr>
+          <a:xfrm>
+            <a:off x="640080" y="2788920"/>
+            <a:ext cx="5120640" cy="914400"/>
+          </a:xfrm>
+          <a:prstGeom prst="rect">
+            <a:avLst/>
+          </a:prstGeom>
+          <a:noFill/>
+        </p:spPr>
+        <p:txBody>
+          <a:bodyPr wrap="square" lIns="0" rIns="0" tIns="0" bIns="0">
+            <a:spAutoFit/>
+          </a:bodyPr>
+          <a:lstStyle/>
+          <a:p>
+            <a:pPr>
+              <a:defRPr sz="1100" b="0" i="0">
+                <a:solidFill>
+                  <a:srgbClr val="1A1A1A"/>
+                </a:solidFill>
+                <a:latin typeface="Calibri"/>
+              </a:defRPr>
+            </a:pPr>
+            <a:r>
+              <a:t>Baseline 78.80    →    + ours 79.90    (+1.10 %pt)</a:t>
+            </a:r>
+            <a:br/>
+            <a:r>
+              <a:t>AS-SG    77.09    →    RS-SG  78.70    →    TrSG  79.90</a:t>
+            </a:r>
+            <a:br/>
+            <a:r>
+              <a:t>Drop-in SG swap on a state-of-the-art Transformer SNN.</a:t>
+            </a:r>
+          </a:p>
+        </p:txBody>
+      </p:sp>
+      <p:sp>
+        <p:nvSpPr>
+          <p:cNvPr id="8" name="Rectangle 7"/>
+          <p:cNvSpPr/>
+          <p:nvPr/>
+        </p:nvSpPr>
+        <p:spPr>
+          <a:xfrm>
+            <a:off x="6263640" y="2286000"/>
+            <a:ext cx="5486400" cy="1554480"/>
+          </a:xfrm>
+          <a:prstGeom prst="rect">
+            <a:avLst/>
+          </a:prstGeom>
+          <a:solidFill>
+            <a:srgbClr val="F8F7F2"/>
+          </a:solidFill>
+          <a:ln w="15240">
+            <a:solidFill>
+              <a:srgbClr val="1D7E7E"/>
+            </a:solidFill>
+          </a:ln>
+        </p:spPr>
+        <p:style>
+          <a:lnRef idx="1">
+            <a:schemeClr val="accent1"/>
+          </a:lnRef>
+          <a:fillRef idx="3">
+            <a:schemeClr val="accent1"/>
+          </a:fillRef>
+          <a:effectRef idx="2">
+            <a:schemeClr val="accent1"/>
+          </a:effectRef>
+          <a:fontRef idx="minor">
+            <a:schemeClr val="lt1"/>
+          </a:fontRef>
+        </p:style>
+        <p:txBody>
+          <a:bodyPr rtlCol="0" anchor="ctr"/>
+          <a:lstStyle/>
+          <a:p>
+            <a:pPr algn="ctr"/>
+          </a:p>
+        </p:txBody>
+      </p:sp>
+      <p:sp>
+        <p:nvSpPr>
+          <p:cNvPr id="9" name="TextBox 8"/>
+          <p:cNvSpPr txBox="1"/>
+          <p:nvPr/>
+        </p:nvSpPr>
+        <p:spPr>
+          <a:xfrm>
+            <a:off x="6446520" y="2423160"/>
+            <a:ext cx="5120640" cy="365760"/>
+          </a:xfrm>
+          <a:prstGeom prst="rect">
+            <a:avLst/>
+          </a:prstGeom>
+          <a:noFill/>
+        </p:spPr>
+        <p:txBody>
+          <a:bodyPr wrap="square" lIns="0" rIns="0" tIns="0" bIns="0">
+            <a:spAutoFit/>
+          </a:bodyPr>
+          <a:lstStyle/>
+          <a:p>
+            <a:pPr>
+              <a:defRPr sz="1200" b="1" i="0">
+                <a:solidFill>
+                  <a:srgbClr val="1D7E7E"/>
+                </a:solidFill>
+                <a:latin typeface="Calibri"/>
+              </a:defRPr>
+            </a:pPr>
+            <a:r>
+              <a:t>Object detection  (COCO-2017, EMS-ResNet10, T=3)</a:t>
+            </a:r>
+          </a:p>
+        </p:txBody>
+      </p:sp>
+      <p:sp>
+        <p:nvSpPr>
+          <p:cNvPr id="10" name="TextBox 9"/>
+          <p:cNvSpPr txBox="1"/>
+          <p:nvPr/>
+        </p:nvSpPr>
+        <p:spPr>
+          <a:xfrm>
+            <a:off x="6446520" y="2788920"/>
+            <a:ext cx="5120640" cy="914400"/>
+          </a:xfrm>
+          <a:prstGeom prst="rect">
+            <a:avLst/>
+          </a:prstGeom>
+          <a:noFill/>
+        </p:spPr>
+        <p:txBody>
+          <a:bodyPr wrap="square" lIns="0" rIns="0" tIns="0" bIns="0">
+            <a:spAutoFit/>
+          </a:bodyPr>
+          <a:lstStyle/>
+          <a:p>
+            <a:pPr>
+              <a:defRPr sz="1100" b="0" i="0">
+                <a:solidFill>
+                  <a:srgbClr val="1A1A1A"/>
+                </a:solidFill>
+                <a:latin typeface="Calibri"/>
+              </a:defRPr>
+            </a:pPr>
+            <a:r>
+              <a:t>mAP@0.5         0.291  →  0.305    (+0.014)</a:t>
+            </a:r>
+            <a:br/>
+            <a:r>
+              <a:t>mAP@0.5:0.95    0.138  →  0.147    (+0.009)</a:t>
+            </a:r>
+            <a:br/>
+            <a:r>
+              <a:t>First evidence the principles transfer beyond classification.</a:t>
+            </a:r>
+          </a:p>
+        </p:txBody>
+      </p:sp>
+      <p:sp>
+        <p:nvSpPr>
+          <p:cNvPr id="11" name="Rectangle 10"/>
+          <p:cNvSpPr/>
+          <p:nvPr/>
+        </p:nvSpPr>
+        <p:spPr>
+          <a:xfrm>
+            <a:off x="457200" y="4023360"/>
+            <a:ext cx="5486400" cy="1554480"/>
+          </a:xfrm>
+          <a:prstGeom prst="rect">
+            <a:avLst/>
+          </a:prstGeom>
+          <a:solidFill>
+            <a:srgbClr val="F8F7F2"/>
+          </a:solidFill>
+          <a:ln w="15240">
+            <a:solidFill>
+              <a:srgbClr val="1D7E7E"/>
+            </a:solidFill>
+          </a:ln>
+        </p:spPr>
+        <p:style>
+          <a:lnRef idx="1">
+            <a:schemeClr val="accent1"/>
+          </a:lnRef>
+          <a:fillRef idx="3">
+            <a:schemeClr val="accent1"/>
+          </a:fillRef>
+          <a:effectRef idx="2">
+            <a:schemeClr val="accent1"/>
+          </a:effectRef>
+          <a:fontRef idx="minor">
+            <a:schemeClr val="lt1"/>
+          </a:fontRef>
+        </p:style>
+        <p:txBody>
+          <a:bodyPr rtlCol="0" anchor="ctr"/>
+          <a:lstStyle/>
+          <a:p>
+            <a:pPr algn="ctr"/>
+          </a:p>
+        </p:txBody>
+      </p:sp>
+      <p:sp>
+        <p:nvSpPr>
+          <p:cNvPr id="12" name="TextBox 11"/>
+          <p:cNvSpPr txBox="1"/>
+          <p:nvPr/>
+        </p:nvSpPr>
+        <p:spPr>
+          <a:xfrm>
+            <a:off x="640080" y="4160520"/>
+            <a:ext cx="5120640" cy="365760"/>
+          </a:xfrm>
+          <a:prstGeom prst="rect">
+            <a:avLst/>
+          </a:prstGeom>
+          <a:noFill/>
+        </p:spPr>
+        <p:txBody>
+          <a:bodyPr wrap="square" lIns="0" rIns="0" tIns="0" bIns="0">
+            <a:spAutoFit/>
+          </a:bodyPr>
+          <a:lstStyle/>
+          <a:p>
+            <a:pPr>
+              <a:defRPr sz="1200" b="1" i="0">
+                <a:solidFill>
+                  <a:srgbClr val="1D7E7E"/>
+                </a:solidFill>
+                <a:latin typeface="Calibri"/>
+              </a:defRPr>
+            </a:pPr>
+            <a:r>
+              <a:t>Energy at matched firing rate  (CIFAR-100)</a:t>
+            </a:r>
+          </a:p>
+        </p:txBody>
+      </p:sp>
+      <p:sp>
+        <p:nvSpPr>
+          <p:cNvPr id="13" name="TextBox 12"/>
+          <p:cNvSpPr txBox="1"/>
+          <p:nvPr/>
+        </p:nvSpPr>
+        <p:spPr>
+          <a:xfrm>
+            <a:off x="640080" y="4526280"/>
+            <a:ext cx="5120640" cy="914400"/>
+          </a:xfrm>
+          <a:prstGeom prst="rect">
+            <a:avLst/>
+          </a:prstGeom>
+          <a:noFill/>
+        </p:spPr>
+        <p:txBody>
+          <a:bodyPr wrap="square" lIns="0" rIns="0" tIns="0" bIns="0">
+            <a:spAutoFit/>
+          </a:bodyPr>
+          <a:lstStyle/>
+          <a:p>
+            <a:pPr>
+              <a:defRPr sz="1100" b="0" i="0">
+                <a:solidFill>
+                  <a:srgbClr val="1A1A1A"/>
+                </a:solidFill>
+                <a:latin typeface="Calibri"/>
+              </a:defRPr>
+            </a:pPr>
+            <a:r>
+              <a:t>Baseline   1.57 mJ   ·   75.58 %</a:t>
+            </a:r>
+            <a:br/>
+            <a:r>
+              <a:t>+ MP-Init + TrSG    1.67 mJ   ·   77.68 %</a:t>
+            </a:r>
+            <a:br/>
+            <a:r>
+              <a:t>+2.10 %pt at +6 % energy — gains aren't from spiking more.</a:t>
+            </a:r>
+          </a:p>
+        </p:txBody>
+      </p:sp>
+      <p:sp>
+        <p:nvSpPr>
+          <p:cNvPr id="14" name="Rectangle 13"/>
+          <p:cNvSpPr/>
+          <p:nvPr/>
+        </p:nvSpPr>
+        <p:spPr>
+          <a:xfrm>
+            <a:off x="6263640" y="4023360"/>
+            <a:ext cx="5486400" cy="1554480"/>
+          </a:xfrm>
+          <a:prstGeom prst="rect">
+            <a:avLst/>
+          </a:prstGeom>
+          <a:solidFill>
+            <a:srgbClr val="F8F7F2"/>
+          </a:solidFill>
+          <a:ln w="15240">
+            <a:solidFill>
+              <a:srgbClr val="1D7E7E"/>
+            </a:solidFill>
+          </a:ln>
+        </p:spPr>
+        <p:style>
+          <a:lnRef idx="1">
+            <a:schemeClr val="accent1"/>
+          </a:lnRef>
+          <a:fillRef idx="3">
+            <a:schemeClr val="accent1"/>
+          </a:fillRef>
+          <a:effectRef idx="2">
+            <a:schemeClr val="accent1"/>
+          </a:effectRef>
+          <a:fontRef idx="minor">
+            <a:schemeClr val="lt1"/>
+          </a:fontRef>
+        </p:style>
+        <p:txBody>
+          <a:bodyPr rtlCol="0" anchor="ctr"/>
+          <a:lstStyle/>
+          <a:p>
+            <a:pPr algn="ctr"/>
+          </a:p>
+        </p:txBody>
+      </p:sp>
+      <p:sp>
+        <p:nvSpPr>
+          <p:cNvPr id="15" name="TextBox 14"/>
+          <p:cNvSpPr txBox="1"/>
+          <p:nvPr/>
+        </p:nvSpPr>
+        <p:spPr>
+          <a:xfrm>
+            <a:off x="6446520" y="4160520"/>
+            <a:ext cx="5120640" cy="365760"/>
+          </a:xfrm>
+          <a:prstGeom prst="rect">
+            <a:avLst/>
+          </a:prstGeom>
+          <a:noFill/>
+        </p:spPr>
+        <p:txBody>
+          <a:bodyPr wrap="square" lIns="0" rIns="0" tIns="0" bIns="0">
+            <a:spAutoFit/>
+          </a:bodyPr>
+          <a:lstStyle/>
+          <a:p>
+            <a:pPr>
+              <a:defRPr sz="1200" b="1" i="0">
+                <a:solidFill>
+                  <a:srgbClr val="1D7E7E"/>
+                </a:solidFill>
+                <a:latin typeface="Calibri"/>
+              </a:defRPr>
+            </a:pPr>
+            <a:r>
+              <a:t>All four surrogate shapes</a:t>
+            </a:r>
+          </a:p>
+        </p:txBody>
+      </p:sp>
+      <p:sp>
+        <p:nvSpPr>
+          <p:cNvPr id="16" name="TextBox 15"/>
+          <p:cNvSpPr txBox="1"/>
+          <p:nvPr/>
+        </p:nvSpPr>
+        <p:spPr>
+          <a:xfrm>
+            <a:off x="6446520" y="4526280"/>
+            <a:ext cx="5120640" cy="914400"/>
+          </a:xfrm>
+          <a:prstGeom prst="rect">
+            <a:avLst/>
+          </a:prstGeom>
+          <a:noFill/>
+        </p:spPr>
+        <p:txBody>
+          <a:bodyPr wrap="square" lIns="0" rIns="0" tIns="0" bIns="0">
+            <a:spAutoFit/>
+          </a:bodyPr>
+          <a:lstStyle/>
+          <a:p>
+            <a:pPr>
+              <a:defRPr sz="1100" b="0" i="0">
+                <a:solidFill>
+                  <a:srgbClr val="1A1A1A"/>
+                </a:solidFill>
+                <a:latin typeface="Calibri"/>
+              </a:defRPr>
+            </a:pPr>
+            <a:r>
+              <a:t>Rectangular · Triangular · Arctan · Sigmoid</a:t>
+            </a:r>
+            <a:br/>
+            <a:r>
+              <a:t>TrSG remains the best across initial V_thr, initial τ,</a:t>
+            </a:r>
+            <a:br/>
+            <a:r>
+              <a:t>and surrogate shape — never tied for second.</a:t>
+            </a:r>
+          </a:p>
+        </p:txBody>
+      </p:sp>
+      <p:sp>
+        <p:nvSpPr>
+          <p:cNvPr id="17" name="Rectangle 16"/>
+          <p:cNvSpPr/>
+          <p:nvPr/>
+        </p:nvSpPr>
+        <p:spPr>
+          <a:xfrm>
+            <a:off x="457200" y="5715000"/>
+            <a:ext cx="54864" cy="685800"/>
           </a:xfrm>
           <a:prstGeom prst="rect">
             <a:avLst/>
@@ -9751,14 +11749,14 @@
       </p:sp>
       <p:sp>
         <p:nvSpPr>
-          <p:cNvPr id="5" name="Rectangle 4"/>
+          <p:cNvPr id="18" name="Rectangle 17"/>
           <p:cNvSpPr/>
           <p:nvPr/>
         </p:nvSpPr>
         <p:spPr>
           <a:xfrm>
-            <a:off x="512064" y="2194560"/>
-            <a:ext cx="11192256" cy="914400"/>
+            <a:off x="512064" y="5715000"/>
+            <a:ext cx="11192256" cy="685800"/>
           </a:xfrm>
           <a:prstGeom prst="rect">
             <a:avLst/>
@@ -9794,14 +11792,14 @@
       </p:sp>
       <p:sp>
         <p:nvSpPr>
-          <p:cNvPr id="6" name="TextBox 5"/>
-          <p:cNvSpPr txBox="1"/>
-          <p:nvPr/>
-        </p:nvSpPr>
-        <p:spPr>
-          <a:xfrm>
-            <a:off x="777240" y="2331720"/>
-            <a:ext cx="10789920" cy="640080"/>
+          <p:cNvPr id="19" name="TextBox 18"/>
+          <p:cNvSpPr txBox="1"/>
+          <p:nvPr/>
+        </p:nvSpPr>
+        <p:spPr>
+          <a:xfrm>
+            <a:off x="777240" y="5852160"/>
+            <a:ext cx="10789920" cy="411480"/>
           </a:xfrm>
           <a:prstGeom prst="rect">
             <a:avLst/>
@@ -9815,7 +11813,7 @@
           <a:lstStyle/>
           <a:p>
             <a:pPr>
-              <a:defRPr sz="1500" b="1">
+              <a:defRPr sz="1300" b="1">
                 <a:solidFill>
                   <a:srgbClr val="E0B85F"/>
                 </a:solidFill>
@@ -9823,411 +11821,14 @@
               </a:defRPr>
             </a:pPr>
             <a:r>
-              <a:t>Two long-standing instabilities of direct SNN training, traced and fixed.</a:t>
-            </a:r>
-          </a:p>
-          <a:p>
-            <a:pPr>
-              <a:spcBef>
-                <a:spcPts val="600"/>
-              </a:spcBef>
-              <a:defRPr sz="1100">
-                <a:solidFill>
-                  <a:srgbClr val="FFFFFF"/>
-                </a:solidFill>
-                <a:latin typeface="Calibri"/>
-              </a:defRPr>
-            </a:pPr>
-            <a:r>
-              <a:t>Both fixes are minimal, principled, and preserve standard inference.</a:t>
-            </a:r>
-          </a:p>
-        </p:txBody>
-      </p:sp>
-      <p:sp>
-        <p:nvSpPr>
-          <p:cNvPr id="7" name="Rectangle 6"/>
-          <p:cNvSpPr/>
-          <p:nvPr/>
-        </p:nvSpPr>
-        <p:spPr>
-          <a:xfrm>
-            <a:off x="457200" y="3383280"/>
-            <a:ext cx="3657600" cy="2743200"/>
-          </a:xfrm>
-          <a:prstGeom prst="rect">
-            <a:avLst/>
-          </a:prstGeom>
-          <a:solidFill>
-            <a:srgbClr val="F8F7F2"/>
-          </a:solidFill>
-          <a:ln w="19050">
-            <a:solidFill>
-              <a:srgbClr val="1D7E7E"/>
-            </a:solidFill>
-          </a:ln>
-        </p:spPr>
-        <p:style>
-          <a:lnRef idx="1">
-            <a:schemeClr val="accent1"/>
-          </a:lnRef>
-          <a:fillRef idx="3">
-            <a:schemeClr val="accent1"/>
-          </a:fillRef>
-          <a:effectRef idx="2">
-            <a:schemeClr val="accent1"/>
-          </a:effectRef>
-          <a:fontRef idx="minor">
-            <a:schemeClr val="lt1"/>
-          </a:fontRef>
-        </p:style>
-        <p:txBody>
-          <a:bodyPr rtlCol="0" anchor="ctr"/>
-          <a:lstStyle/>
-          <a:p>
-            <a:pPr algn="ctr"/>
-          </a:p>
-        </p:txBody>
-      </p:sp>
-      <p:sp>
-        <p:nvSpPr>
-          <p:cNvPr id="8" name="TextBox 7"/>
-          <p:cNvSpPr txBox="1"/>
-          <p:nvPr/>
-        </p:nvSpPr>
-        <p:spPr>
-          <a:xfrm>
-            <a:off x="640080" y="3520440"/>
-            <a:ext cx="3291840" cy="457200"/>
-          </a:xfrm>
-          <a:prstGeom prst="rect">
-            <a:avLst/>
-          </a:prstGeom>
-          <a:noFill/>
-        </p:spPr>
-        <p:txBody>
-          <a:bodyPr wrap="square" lIns="0" rIns="0" tIns="0" bIns="0">
-            <a:spAutoFit/>
-          </a:bodyPr>
-          <a:lstStyle/>
-          <a:p>
-            <a:pPr>
-              <a:defRPr sz="1800" b="1" i="0">
-                <a:solidFill>
-                  <a:srgbClr val="1D7E7E"/>
-                </a:solidFill>
-                <a:latin typeface="Cambria"/>
-              </a:defRPr>
-            </a:pPr>
-            <a:r>
-              <a:t>MP-Init</a:t>
-            </a:r>
-          </a:p>
-        </p:txBody>
-      </p:sp>
-      <p:sp>
-        <p:nvSpPr>
-          <p:cNvPr id="9" name="TextBox 8"/>
-          <p:cNvSpPr txBox="1"/>
-          <p:nvPr/>
-        </p:nvSpPr>
-        <p:spPr>
-          <a:xfrm>
-            <a:off x="640080" y="4023360"/>
-            <a:ext cx="3291840" cy="2011680"/>
-          </a:xfrm>
-          <a:prstGeom prst="rect">
-            <a:avLst/>
-          </a:prstGeom>
-          <a:noFill/>
-        </p:spPr>
-        <p:txBody>
-          <a:bodyPr wrap="square" lIns="0" rIns="0" tIns="0" bIns="0">
-            <a:spAutoFit/>
-          </a:bodyPr>
-          <a:lstStyle/>
-          <a:p>
-            <a:pPr>
-              <a:defRPr sz="1100" b="0" i="0">
-                <a:solidFill>
-                  <a:srgbClr val="1A1A1A"/>
-                </a:solidFill>
-                <a:latin typeface="Calibri"/>
-              </a:defRPr>
-            </a:pPr>
-            <a:r>
-              <a:t>TCS originates in the membrane potential — fix the initial state.</a:t>
-            </a:r>
-            <a:br/>
-            <a:br/>
-            <a:r>
-              <a:t>Per-layer running mean of U[T].</a:t>
-            </a:r>
-            <a:br/>
-            <a:br/>
-            <a:r>
-              <a:t>Zero overhead, standard LIF inference.</a:t>
-            </a:r>
-          </a:p>
-        </p:txBody>
-      </p:sp>
-      <p:sp>
-        <p:nvSpPr>
-          <p:cNvPr id="10" name="Rectangle 9"/>
-          <p:cNvSpPr/>
-          <p:nvPr/>
-        </p:nvSpPr>
-        <p:spPr>
-          <a:xfrm>
-            <a:off x="4297680" y="3383280"/>
-            <a:ext cx="3657600" cy="2743200"/>
-          </a:xfrm>
-          <a:prstGeom prst="rect">
-            <a:avLst/>
-          </a:prstGeom>
-          <a:solidFill>
-            <a:srgbClr val="F8F7F2"/>
-          </a:solidFill>
-          <a:ln w="19050">
-            <a:solidFill>
-              <a:srgbClr val="E0B85F"/>
-            </a:solidFill>
-          </a:ln>
-        </p:spPr>
-        <p:style>
-          <a:lnRef idx="1">
-            <a:schemeClr val="accent1"/>
-          </a:lnRef>
-          <a:fillRef idx="3">
-            <a:schemeClr val="accent1"/>
-          </a:fillRef>
-          <a:effectRef idx="2">
-            <a:schemeClr val="accent1"/>
-          </a:effectRef>
-          <a:fontRef idx="minor">
-            <a:schemeClr val="lt1"/>
-          </a:fontRef>
-        </p:style>
-        <p:txBody>
-          <a:bodyPr rtlCol="0" anchor="ctr"/>
-          <a:lstStyle/>
-          <a:p>
-            <a:pPr algn="ctr"/>
-          </a:p>
-        </p:txBody>
-      </p:sp>
-      <p:sp>
-        <p:nvSpPr>
-          <p:cNvPr id="11" name="TextBox 10"/>
-          <p:cNvSpPr txBox="1"/>
-          <p:nvPr/>
-        </p:nvSpPr>
-        <p:spPr>
-          <a:xfrm>
-            <a:off x="4480560" y="3520440"/>
-            <a:ext cx="3291840" cy="457200"/>
-          </a:xfrm>
-          <a:prstGeom prst="rect">
-            <a:avLst/>
-          </a:prstGeom>
-          <a:noFill/>
-        </p:spPr>
-        <p:txBody>
-          <a:bodyPr wrap="square" lIns="0" rIns="0" tIns="0" bIns="0">
-            <a:spAutoFit/>
-          </a:bodyPr>
-          <a:lstStyle/>
-          <a:p>
-            <a:pPr>
-              <a:defRPr sz="1800" b="1" i="0">
-                <a:solidFill>
-                  <a:srgbClr val="E0B85F"/>
-                </a:solidFill>
-                <a:latin typeface="Cambria"/>
-              </a:defRPr>
-            </a:pPr>
-            <a:r>
-              <a:t>TrSG</a:t>
-            </a:r>
-          </a:p>
-        </p:txBody>
-      </p:sp>
-      <p:sp>
-        <p:nvSpPr>
-          <p:cNvPr id="12" name="TextBox 11"/>
-          <p:cNvSpPr txBox="1"/>
-          <p:nvPr/>
-        </p:nvSpPr>
-        <p:spPr>
-          <a:xfrm>
-            <a:off x="4480560" y="4023360"/>
-            <a:ext cx="3291840" cy="2011680"/>
-          </a:xfrm>
-          <a:prstGeom prst="rect">
-            <a:avLst/>
-          </a:prstGeom>
-          <a:noFill/>
-        </p:spPr>
-        <p:txBody>
-          <a:bodyPr wrap="square" lIns="0" rIns="0" tIns="0" bIns="0">
-            <a:spAutoFit/>
-          </a:bodyPr>
-          <a:lstStyle/>
-          <a:p>
-            <a:pPr>
-              <a:defRPr sz="1100" b="0" i="0">
-                <a:solidFill>
-                  <a:srgbClr val="1A1A1A"/>
-                </a:solidFill>
-                <a:latin typeface="Calibri"/>
-              </a:defRPr>
-            </a:pPr>
-            <a:r>
-              <a:t>Threshold-induced gradient pathology — fix it with one forward-path multiplication.</a:t>
-            </a:r>
-            <a:br/>
-            <a:br/>
-            <a:r>
-              <a:t>Window adapts, magnitude is invariant.</a:t>
-            </a:r>
-            <a:br/>
-            <a:br/>
-            <a:r>
-              <a:t>Standard LIF after training.</a:t>
-            </a:r>
-          </a:p>
-        </p:txBody>
-      </p:sp>
-      <p:sp>
-        <p:nvSpPr>
-          <p:cNvPr id="13" name="Rectangle 12"/>
-          <p:cNvSpPr/>
-          <p:nvPr/>
-        </p:nvSpPr>
-        <p:spPr>
-          <a:xfrm>
-            <a:off x="8138160" y="3383280"/>
-            <a:ext cx="3657600" cy="2743200"/>
-          </a:xfrm>
-          <a:prstGeom prst="rect">
-            <a:avLst/>
-          </a:prstGeom>
-          <a:solidFill>
-            <a:srgbClr val="F8F7F2"/>
-          </a:solidFill>
-          <a:ln w="19050">
-            <a:solidFill>
-              <a:srgbClr val="1D7E7E"/>
-            </a:solidFill>
-          </a:ln>
-        </p:spPr>
-        <p:style>
-          <a:lnRef idx="1">
-            <a:schemeClr val="accent1"/>
-          </a:lnRef>
-          <a:fillRef idx="3">
-            <a:schemeClr val="accent1"/>
-          </a:fillRef>
-          <a:effectRef idx="2">
-            <a:schemeClr val="accent1"/>
-          </a:effectRef>
-          <a:fontRef idx="minor">
-            <a:schemeClr val="lt1"/>
-          </a:fontRef>
-        </p:style>
-        <p:txBody>
-          <a:bodyPr rtlCol="0" anchor="ctr"/>
-          <a:lstStyle/>
-          <a:p>
-            <a:pPr algn="ctr"/>
-          </a:p>
-        </p:txBody>
-      </p:sp>
-      <p:sp>
-        <p:nvSpPr>
-          <p:cNvPr id="14" name="TextBox 13"/>
-          <p:cNvSpPr txBox="1"/>
-          <p:nvPr/>
-        </p:nvSpPr>
-        <p:spPr>
-          <a:xfrm>
-            <a:off x="8321040" y="3520440"/>
-            <a:ext cx="3291840" cy="457200"/>
-          </a:xfrm>
-          <a:prstGeom prst="rect">
-            <a:avLst/>
-          </a:prstGeom>
-          <a:noFill/>
-        </p:spPr>
-        <p:txBody>
-          <a:bodyPr wrap="square" lIns="0" rIns="0" tIns="0" bIns="0">
-            <a:spAutoFit/>
-          </a:bodyPr>
-          <a:lstStyle/>
-          <a:p>
-            <a:pPr>
-              <a:defRPr sz="1800" b="1" i="0">
-                <a:solidFill>
-                  <a:srgbClr val="1D7E7E"/>
-                </a:solidFill>
-                <a:latin typeface="Cambria"/>
-              </a:defRPr>
-            </a:pPr>
-            <a:r>
-              <a:t>Validated</a:t>
-            </a:r>
-          </a:p>
-        </p:txBody>
-      </p:sp>
-      <p:sp>
-        <p:nvSpPr>
-          <p:cNvPr id="15" name="TextBox 14"/>
-          <p:cNvSpPr txBox="1"/>
-          <p:nvPr/>
-        </p:nvSpPr>
-        <p:spPr>
-          <a:xfrm>
-            <a:off x="8321040" y="4023360"/>
-            <a:ext cx="3291840" cy="2011680"/>
-          </a:xfrm>
-          <a:prstGeom prst="rect">
-            <a:avLst/>
-          </a:prstGeom>
-          <a:noFill/>
-        </p:spPr>
-        <p:txBody>
-          <a:bodyPr wrap="square" lIns="0" rIns="0" tIns="0" bIns="0">
-            <a:spAutoFit/>
-          </a:bodyPr>
-          <a:lstStyle/>
-          <a:p>
-            <a:pPr>
-              <a:defRPr sz="1100" b="0" i="0">
-                <a:solidFill>
-                  <a:srgbClr val="1A1A1A"/>
-                </a:solidFill>
-                <a:latin typeface="Calibri"/>
-              </a:defRPr>
-            </a:pPr>
-            <a:r>
-              <a:t>SOTA on CIFAR-10/100, ImageNet, DVS-CIFAR10.</a:t>
-            </a:r>
-            <a:br/>
-            <a:br/>
-            <a:r>
-              <a:t>Generalizes to Transformer SNNs (QKFormer +1.10) and detection (COCO +0.014 mAP).</a:t>
-            </a:r>
-            <a:br/>
-            <a:br/>
-            <a:r>
-              <a:t>All without architectural changes.</a:t>
-            </a:r>
-          </a:p>
-        </p:txBody>
-      </p:sp>
-      <p:sp>
-        <p:nvSpPr>
-          <p:cNvPr id="16" name="TextBox 15"/>
+              <a:t>No architectural changes, no extra losses, no per-timestep parameters — just drop in.</a:t>
+            </a:r>
+          </a:p>
+        </p:txBody>
+      </p:sp>
+      <p:sp>
+        <p:nvSpPr>
+          <p:cNvPr id="20" name="TextBox 19"/>
           <p:cNvSpPr txBox="1"/>
           <p:nvPr/>
         </p:nvSpPr>
@@ -10263,7 +11864,7 @@
       </p:sp>
       <p:sp>
         <p:nvSpPr>
-          <p:cNvPr id="17" name="TextBox 16"/>
+          <p:cNvPr id="21" name="TextBox 20"/>
           <p:cNvSpPr txBox="1"/>
           <p:nvPr/>
         </p:nvSpPr>
@@ -10292,7 +11893,7 @@
               </a:defRPr>
             </a:pPr>
             <a:r>
-              <a:t>18 / 19</a:t>
+              <a:t>18 / 20</a:t>
             </a:r>
           </a:p>
         </p:txBody>
@@ -10317,14 +11918,130 @@
       <p:grpSpPr/>
       <p:sp>
         <p:nvSpPr>
-          <p:cNvPr id="2" name="Rectangle 1"/>
+          <p:cNvPr id="2" name="TextBox 1"/>
+          <p:cNvSpPr txBox="1"/>
+          <p:nvPr/>
+        </p:nvSpPr>
+        <p:spPr>
+          <a:xfrm>
+            <a:off x="457200" y="365760"/>
+            <a:ext cx="10972800" cy="274320"/>
+          </a:xfrm>
+          <a:prstGeom prst="rect">
+            <a:avLst/>
+          </a:prstGeom>
+          <a:noFill/>
+        </p:spPr>
+        <p:txBody>
+          <a:bodyPr wrap="square" lIns="0" rIns="0" tIns="0" bIns="0">
+            <a:spAutoFit/>
+          </a:bodyPr>
+          <a:lstStyle/>
+          <a:p>
+            <a:pPr>
+              <a:defRPr sz="1100" b="1" i="0">
+                <a:solidFill>
+                  <a:srgbClr val="1D7E7E"/>
+                </a:solidFill>
+                <a:latin typeface="Calibri"/>
+              </a:defRPr>
+            </a:pPr>
+            <a:r>
+              <a:rPr spc="300"/>
+              <a:t>CONCLUSION</a:t>
+            </a:r>
+          </a:p>
+        </p:txBody>
+      </p:sp>
+      <p:sp>
+        <p:nvSpPr>
+          <p:cNvPr id="3" name="TextBox 2"/>
+          <p:cNvSpPr txBox="1"/>
+          <p:nvPr/>
+        </p:nvSpPr>
+        <p:spPr>
+          <a:xfrm>
+            <a:off x="457200" y="777240"/>
+            <a:ext cx="11247120" cy="777240"/>
+          </a:xfrm>
+          <a:prstGeom prst="rect">
+            <a:avLst/>
+          </a:prstGeom>
+          <a:noFill/>
+        </p:spPr>
+        <p:txBody>
+          <a:bodyPr wrap="square" lIns="0" rIns="0" tIns="0" bIns="0">
+            <a:spAutoFit/>
+          </a:bodyPr>
+          <a:lstStyle/>
+          <a:p>
+            <a:pPr>
+              <a:defRPr sz="3000" b="1" i="0">
+                <a:solidFill>
+                  <a:srgbClr val="0F2540"/>
+                </a:solidFill>
+                <a:latin typeface="Cambria"/>
+              </a:defRPr>
+            </a:pPr>
+            <a:r>
+              <a:t>What This Talk Was About</a:t>
+            </a:r>
+          </a:p>
+        </p:txBody>
+      </p:sp>
+      <p:sp>
+        <p:nvSpPr>
+          <p:cNvPr id="4" name="Rectangle 3"/>
           <p:cNvSpPr/>
           <p:nvPr/>
         </p:nvSpPr>
         <p:spPr>
           <a:xfrm>
-            <a:off x="0" y="0"/>
-            <a:ext cx="12191695" cy="6858000"/>
+            <a:off x="457200" y="2194560"/>
+            <a:ext cx="54864" cy="914400"/>
+          </a:xfrm>
+          <a:prstGeom prst="rect">
+            <a:avLst/>
+          </a:prstGeom>
+          <a:solidFill>
+            <a:srgbClr val="E0B85F"/>
+          </a:solidFill>
+          <a:ln>
+            <a:noFill/>
+          </a:ln>
+        </p:spPr>
+        <p:style>
+          <a:lnRef idx="1">
+            <a:schemeClr val="accent1"/>
+          </a:lnRef>
+          <a:fillRef idx="3">
+            <a:schemeClr val="accent1"/>
+          </a:fillRef>
+          <a:effectRef idx="2">
+            <a:schemeClr val="accent1"/>
+          </a:effectRef>
+          <a:fontRef idx="minor">
+            <a:schemeClr val="lt1"/>
+          </a:fontRef>
+        </p:style>
+        <p:txBody>
+          <a:bodyPr rtlCol="0" anchor="ctr"/>
+          <a:lstStyle/>
+          <a:p>
+            <a:pPr algn="ctr"/>
+          </a:p>
+        </p:txBody>
+      </p:sp>
+      <p:sp>
+        <p:nvSpPr>
+          <p:cNvPr id="5" name="Rectangle 4"/>
+          <p:cNvSpPr/>
+          <p:nvPr/>
+        </p:nvSpPr>
+        <p:spPr>
+          <a:xfrm>
+            <a:off x="512064" y="2194560"/>
+            <a:ext cx="11192256" cy="914400"/>
           </a:xfrm>
           <a:prstGeom prst="rect">
             <a:avLst/>
@@ -10335,7 +12052,6 @@
           <a:ln>
             <a:noFill/>
           </a:ln>
-          <a:effectLst/>
         </p:spPr>
         <p:style>
           <a:lnRef idx="1">
@@ -10361,23 +12077,77 @@
       </p:sp>
       <p:sp>
         <p:nvSpPr>
-          <p:cNvPr id="3" name="Oval 2"/>
+          <p:cNvPr id="6" name="TextBox 5"/>
+          <p:cNvSpPr txBox="1"/>
+          <p:nvPr/>
+        </p:nvSpPr>
+        <p:spPr>
+          <a:xfrm>
+            <a:off x="777240" y="2331720"/>
+            <a:ext cx="10789920" cy="640080"/>
+          </a:xfrm>
+          <a:prstGeom prst="rect">
+            <a:avLst/>
+          </a:prstGeom>
+          <a:noFill/>
+        </p:spPr>
+        <p:txBody>
+          <a:bodyPr wrap="square">
+            <a:spAutoFit/>
+          </a:bodyPr>
+          <a:lstStyle/>
+          <a:p>
+            <a:pPr>
+              <a:defRPr sz="1500" b="1">
+                <a:solidFill>
+                  <a:srgbClr val="E0B85F"/>
+                </a:solidFill>
+                <a:latin typeface="Calibri"/>
+              </a:defRPr>
+            </a:pPr>
+            <a:r>
+              <a:t>Two long-standing instabilities of direct SNN training, traced and fixed.</a:t>
+            </a:r>
+          </a:p>
+          <a:p>
+            <a:pPr>
+              <a:spcBef>
+                <a:spcPts val="600"/>
+              </a:spcBef>
+              <a:defRPr sz="1100">
+                <a:solidFill>
+                  <a:srgbClr val="FFFFFF"/>
+                </a:solidFill>
+                <a:latin typeface="Calibri"/>
+              </a:defRPr>
+            </a:pPr>
+            <a:r>
+              <a:t>Both fixes are minimal, principled, and preserve standard inference.</a:t>
+            </a:r>
+          </a:p>
+        </p:txBody>
+      </p:sp>
+      <p:sp>
+        <p:nvSpPr>
+          <p:cNvPr id="7" name="Rectangle 6"/>
           <p:cNvSpPr/>
           <p:nvPr/>
         </p:nvSpPr>
         <p:spPr>
           <a:xfrm>
-            <a:off x="8229600" y="-1371600"/>
-            <a:ext cx="3657600" cy="3657600"/>
-          </a:xfrm>
-          <a:prstGeom prst="ellipse">
+            <a:off x="457200" y="3383280"/>
+            <a:ext cx="3657600" cy="2743200"/>
+          </a:xfrm>
+          <a:prstGeom prst="rect">
             <a:avLst/>
           </a:prstGeom>
           <a:solidFill>
-            <a:srgbClr val="091A30"/>
+            <a:srgbClr val="F8F7F2"/>
           </a:solidFill>
-          <a:ln>
-            <a:noFill/>
+          <a:ln w="19050">
+            <a:solidFill>
+              <a:srgbClr val="1D7E7E"/>
+            </a:solidFill>
           </a:ln>
         </p:spPr>
         <p:style>
@@ -10404,23 +12174,107 @@
       </p:sp>
       <p:sp>
         <p:nvSpPr>
-          <p:cNvPr id="4" name="Oval 3"/>
+          <p:cNvPr id="8" name="TextBox 7"/>
+          <p:cNvSpPr txBox="1"/>
+          <p:nvPr/>
+        </p:nvSpPr>
+        <p:spPr>
+          <a:xfrm>
+            <a:off x="640080" y="3520440"/>
+            <a:ext cx="3291840" cy="457200"/>
+          </a:xfrm>
+          <a:prstGeom prst="rect">
+            <a:avLst/>
+          </a:prstGeom>
+          <a:noFill/>
+        </p:spPr>
+        <p:txBody>
+          <a:bodyPr wrap="square" lIns="0" rIns="0" tIns="0" bIns="0">
+            <a:spAutoFit/>
+          </a:bodyPr>
+          <a:lstStyle/>
+          <a:p>
+            <a:pPr>
+              <a:defRPr sz="1800" b="1" i="0">
+                <a:solidFill>
+                  <a:srgbClr val="1D7E7E"/>
+                </a:solidFill>
+                <a:latin typeface="Cambria"/>
+              </a:defRPr>
+            </a:pPr>
+            <a:r>
+              <a:t>MP-Init</a:t>
+            </a:r>
+          </a:p>
+        </p:txBody>
+      </p:sp>
+      <p:sp>
+        <p:nvSpPr>
+          <p:cNvPr id="9" name="TextBox 8"/>
+          <p:cNvSpPr txBox="1"/>
+          <p:nvPr/>
+        </p:nvSpPr>
+        <p:spPr>
+          <a:xfrm>
+            <a:off x="640080" y="4023360"/>
+            <a:ext cx="3291840" cy="2011680"/>
+          </a:xfrm>
+          <a:prstGeom prst="rect">
+            <a:avLst/>
+          </a:prstGeom>
+          <a:noFill/>
+        </p:spPr>
+        <p:txBody>
+          <a:bodyPr wrap="square" lIns="0" rIns="0" tIns="0" bIns="0">
+            <a:spAutoFit/>
+          </a:bodyPr>
+          <a:lstStyle/>
+          <a:p>
+            <a:pPr>
+              <a:defRPr sz="1100" b="0" i="0">
+                <a:solidFill>
+                  <a:srgbClr val="1A1A1A"/>
+                </a:solidFill>
+                <a:latin typeface="Calibri"/>
+              </a:defRPr>
+            </a:pPr>
+            <a:r>
+              <a:t>TCS originates in the membrane potential — fix the initial state.</a:t>
+            </a:r>
+            <a:br/>
+            <a:br/>
+            <a:r>
+              <a:t>Per-layer running mean of U[T].</a:t>
+            </a:r>
+            <a:br/>
+            <a:br/>
+            <a:r>
+              <a:t>Zero overhead, standard LIF inference.</a:t>
+            </a:r>
+          </a:p>
+        </p:txBody>
+      </p:sp>
+      <p:sp>
+        <p:nvSpPr>
+          <p:cNvPr id="10" name="Rectangle 9"/>
           <p:cNvSpPr/>
           <p:nvPr/>
         </p:nvSpPr>
         <p:spPr>
           <a:xfrm>
-            <a:off x="-1828800" y="4572000"/>
-            <a:ext cx="5029200" cy="5029200"/>
-          </a:xfrm>
-          <a:prstGeom prst="ellipse">
+            <a:off x="4297680" y="3383280"/>
+            <a:ext cx="3657600" cy="2743200"/>
+          </a:xfrm>
+          <a:prstGeom prst="rect">
             <a:avLst/>
           </a:prstGeom>
           <a:solidFill>
-            <a:srgbClr val="091A30"/>
+            <a:srgbClr val="F8F7F2"/>
           </a:solidFill>
-          <a:ln>
-            <a:noFill/>
+          <a:ln w="19050">
+            <a:solidFill>
+              <a:srgbClr val="E0B85F"/>
+            </a:solidFill>
           </a:ln>
         </p:spPr>
         <p:style>
@@ -10447,290 +12301,107 @@
       </p:sp>
       <p:sp>
         <p:nvSpPr>
-          <p:cNvPr id="5" name="TextBox 4"/>
-          <p:cNvSpPr txBox="1"/>
-          <p:nvPr/>
-        </p:nvSpPr>
-        <p:spPr>
-          <a:xfrm>
-            <a:off x="640080" y="640080"/>
-            <a:ext cx="9144000" cy="365760"/>
-          </a:xfrm>
-          <a:prstGeom prst="rect">
-            <a:avLst/>
-          </a:prstGeom>
-          <a:noFill/>
-        </p:spPr>
-        <p:txBody>
-          <a:bodyPr wrap="square" lIns="0" rIns="0" tIns="0" bIns="0">
-            <a:spAutoFit/>
-          </a:bodyPr>
-          <a:lstStyle/>
-          <a:p>
-            <a:pPr>
-              <a:defRPr sz="1200" b="1" i="0">
+          <p:cNvPr id="11" name="TextBox 10"/>
+          <p:cNvSpPr txBox="1"/>
+          <p:nvPr/>
+        </p:nvSpPr>
+        <p:spPr>
+          <a:xfrm>
+            <a:off x="4480560" y="3520440"/>
+            <a:ext cx="3291840" cy="457200"/>
+          </a:xfrm>
+          <a:prstGeom prst="rect">
+            <a:avLst/>
+          </a:prstGeom>
+          <a:noFill/>
+        </p:spPr>
+        <p:txBody>
+          <a:bodyPr wrap="square" lIns="0" rIns="0" tIns="0" bIns="0">
+            <a:spAutoFit/>
+          </a:bodyPr>
+          <a:lstStyle/>
+          <a:p>
+            <a:pPr>
+              <a:defRPr sz="1800" b="1" i="0">
                 <a:solidFill>
                   <a:srgbClr val="E0B85F"/>
                 </a:solidFill>
-                <a:latin typeface="Calibri"/>
-              </a:defRPr>
-            </a:pPr>
-            <a:r>
-              <a:rPr spc="400"/>
-              <a:t>CONCLUSION</a:t>
-            </a:r>
-          </a:p>
-        </p:txBody>
-      </p:sp>
-      <p:sp>
-        <p:nvSpPr>
-          <p:cNvPr id="6" name="TextBox 5"/>
-          <p:cNvSpPr txBox="1"/>
-          <p:nvPr/>
-        </p:nvSpPr>
-        <p:spPr>
-          <a:xfrm>
-            <a:off x="640080" y="1463040"/>
-            <a:ext cx="10972800" cy="822960"/>
-          </a:xfrm>
-          <a:prstGeom prst="rect">
-            <a:avLst/>
-          </a:prstGeom>
-          <a:noFill/>
-        </p:spPr>
-        <p:txBody>
-          <a:bodyPr wrap="square" lIns="0" rIns="0" tIns="0" bIns="0">
-            <a:spAutoFit/>
-          </a:bodyPr>
-          <a:lstStyle/>
-          <a:p>
-            <a:pPr>
-              <a:defRPr sz="3600" b="1" i="0">
-                <a:solidFill>
-                  <a:srgbClr val="FFFFFF"/>
-                </a:solidFill>
                 <a:latin typeface="Cambria"/>
               </a:defRPr>
             </a:pPr>
             <a:r>
-              <a:t>Two instabilities, two principled fixes,</a:t>
-            </a:r>
-          </a:p>
-        </p:txBody>
-      </p:sp>
-      <p:sp>
-        <p:nvSpPr>
-          <p:cNvPr id="7" name="TextBox 6"/>
-          <p:cNvSpPr txBox="1"/>
-          <p:nvPr/>
-        </p:nvSpPr>
-        <p:spPr>
-          <a:xfrm>
-            <a:off x="640080" y="2286000"/>
-            <a:ext cx="10972800" cy="822960"/>
-          </a:xfrm>
-          <a:prstGeom prst="rect">
-            <a:avLst/>
-          </a:prstGeom>
-          <a:noFill/>
-        </p:spPr>
-        <p:txBody>
-          <a:bodyPr wrap="square" lIns="0" rIns="0" tIns="0" bIns="0">
-            <a:spAutoFit/>
-          </a:bodyPr>
-          <a:lstStyle/>
-          <a:p>
-            <a:pPr>
-              <a:defRPr sz="3600" b="1" i="0">
-                <a:solidFill>
-                  <a:srgbClr val="E0B85F"/>
-                </a:solidFill>
-                <a:latin typeface="Cambria"/>
-              </a:defRPr>
-            </a:pPr>
-            <a:r>
-              <a:t>one cohesive story.</a:t>
-            </a:r>
-          </a:p>
-        </p:txBody>
-      </p:sp>
-      <p:sp>
-        <p:nvSpPr>
-          <p:cNvPr id="8" name="TextBox 7"/>
-          <p:cNvSpPr txBox="1"/>
-          <p:nvPr/>
-        </p:nvSpPr>
-        <p:spPr>
-          <a:xfrm>
-            <a:off x="640080" y="3657600"/>
-            <a:ext cx="10058400" cy="274320"/>
-          </a:xfrm>
-          <a:prstGeom prst="rect">
-            <a:avLst/>
-          </a:prstGeom>
-          <a:noFill/>
-        </p:spPr>
-        <p:txBody>
-          <a:bodyPr wrap="square" lIns="0" rIns="0" tIns="0" bIns="0">
-            <a:spAutoFit/>
-          </a:bodyPr>
-          <a:lstStyle/>
-          <a:p>
-            <a:pPr>
-              <a:defRPr sz="1100" b="1" i="0">
-                <a:solidFill>
-                  <a:srgbClr val="E0B85F"/>
-                </a:solidFill>
-                <a:latin typeface="Calibri"/>
-              </a:defRPr>
-            </a:pPr>
-            <a:r>
-              <a:rPr spc="400"/>
-              <a:t>LIMITATIONS</a:t>
-            </a:r>
-          </a:p>
-        </p:txBody>
-      </p:sp>
-      <p:sp>
-        <p:nvSpPr>
-          <p:cNvPr id="9" name="TextBox 8"/>
-          <p:cNvSpPr txBox="1"/>
-          <p:nvPr/>
-        </p:nvSpPr>
-        <p:spPr>
-          <a:xfrm>
-            <a:off x="640080" y="3977639"/>
-            <a:ext cx="10972800" cy="1005840"/>
-          </a:xfrm>
-          <a:prstGeom prst="rect">
-            <a:avLst/>
-          </a:prstGeom>
-          <a:noFill/>
-        </p:spPr>
-        <p:txBody>
-          <a:bodyPr wrap="square" lIns="0" rIns="0" tIns="0" bIns="0">
-            <a:spAutoFit/>
-          </a:bodyPr>
-          <a:lstStyle/>
-          <a:p>
-            <a:pPr>
-              <a:defRPr sz="1200" b="0" i="0">
-                <a:solidFill>
-                  <a:srgbClr val="CBD8E0"/>
-                </a:solidFill>
-                <a:latin typeface="Calibri"/>
-              </a:defRPr>
-            </a:pPr>
-            <a:r>
-              <a:t>▸  Per-layer constant approximates π only at the mean — richer parameterizations are open.</a:t>
+              <a:t>TrSG</a:t>
+            </a:r>
+          </a:p>
+        </p:txBody>
+      </p:sp>
+      <p:sp>
+        <p:nvSpPr>
+          <p:cNvPr id="12" name="TextBox 11"/>
+          <p:cNvSpPr txBox="1"/>
+          <p:nvPr/>
+        </p:nvSpPr>
+        <p:spPr>
+          <a:xfrm>
+            <a:off x="4480560" y="4023360"/>
+            <a:ext cx="3291840" cy="2011680"/>
+          </a:xfrm>
+          <a:prstGeom prst="rect">
+            <a:avLst/>
+          </a:prstGeom>
+          <a:noFill/>
+        </p:spPr>
+        <p:txBody>
+          <a:bodyPr wrap="square" lIns="0" rIns="0" tIns="0" bIns="0">
+            <a:spAutoFit/>
+          </a:bodyPr>
+          <a:lstStyle/>
+          <a:p>
+            <a:pPr>
+              <a:defRPr sz="1100" b="0" i="0">
+                <a:solidFill>
+                  <a:srgbClr val="1A1A1A"/>
+                </a:solidFill>
+                <a:latin typeface="Calibri"/>
+              </a:defRPr>
+            </a:pPr>
+            <a:r>
+              <a:t>Threshold-induced gradient pathology — fix it with one forward-path multiplication.</a:t>
             </a:r>
             <a:br/>
-            <a:r>
-              <a:t>▸  Hardware with fixed neuron parameters needs quantization-aware adaptation.</a:t>
-            </a:r>
             <a:br/>
             <a:r>
-              <a:t>▸  i.i.d. assumption empirically supported, but tighter bounds welcome.</a:t>
-            </a:r>
-          </a:p>
-        </p:txBody>
-      </p:sp>
-      <p:sp>
-        <p:nvSpPr>
-          <p:cNvPr id="10" name="TextBox 9"/>
-          <p:cNvSpPr txBox="1"/>
-          <p:nvPr/>
-        </p:nvSpPr>
-        <p:spPr>
-          <a:xfrm>
-            <a:off x="640080" y="5074920"/>
-            <a:ext cx="10058400" cy="274320"/>
-          </a:xfrm>
-          <a:prstGeom prst="rect">
-            <a:avLst/>
-          </a:prstGeom>
-          <a:noFill/>
-        </p:spPr>
-        <p:txBody>
-          <a:bodyPr wrap="square" lIns="0" rIns="0" tIns="0" bIns="0">
-            <a:spAutoFit/>
-          </a:bodyPr>
-          <a:lstStyle/>
-          <a:p>
-            <a:pPr>
-              <a:defRPr sz="1100" b="1" i="0">
-                <a:solidFill>
-                  <a:srgbClr val="E0B85F"/>
-                </a:solidFill>
-                <a:latin typeface="Calibri"/>
-              </a:defRPr>
-            </a:pPr>
-            <a:r>
-              <a:rPr spc="400"/>
-              <a:t>FUTURE  WORK</a:t>
-            </a:r>
-          </a:p>
-        </p:txBody>
-      </p:sp>
-      <p:sp>
-        <p:nvSpPr>
-          <p:cNvPr id="11" name="TextBox 10"/>
-          <p:cNvSpPr txBox="1"/>
-          <p:nvPr/>
-        </p:nvSpPr>
-        <p:spPr>
-          <a:xfrm>
-            <a:off x="640080" y="5394960"/>
-            <a:ext cx="10972800" cy="822960"/>
-          </a:xfrm>
-          <a:prstGeom prst="rect">
-            <a:avLst/>
-          </a:prstGeom>
-          <a:noFill/>
-        </p:spPr>
-        <p:txBody>
-          <a:bodyPr wrap="square" lIns="0" rIns="0" tIns="0" bIns="0">
-            <a:spAutoFit/>
-          </a:bodyPr>
-          <a:lstStyle/>
-          <a:p>
-            <a:pPr>
-              <a:defRPr sz="1200" b="0" i="0">
-                <a:solidFill>
-                  <a:srgbClr val="CBD8E0"/>
-                </a:solidFill>
-                <a:latin typeface="Calibri"/>
-              </a:defRPr>
-            </a:pPr>
-            <a:r>
-              <a:t>▸  Hardware-aware adaptation:  Loihi, Akida, TrueNorth</a:t>
+              <a:t>Window adapts, magnitude is invariant.</a:t>
             </a:r>
             <a:br/>
-            <a:r>
-              <a:t>▸  Beyond LIF:  adaptive LIF, Izhikevich, foundation-scale SNNs</a:t>
-            </a:r>
-          </a:p>
-        </p:txBody>
-      </p:sp>
-      <p:sp>
-        <p:nvSpPr>
-          <p:cNvPr id="12" name="Rectangle 11"/>
+            <a:br/>
+            <a:r>
+              <a:t>Standard LIF after training.</a:t>
+            </a:r>
+          </a:p>
+        </p:txBody>
+      </p:sp>
+      <p:sp>
+        <p:nvSpPr>
+          <p:cNvPr id="13" name="Rectangle 12"/>
           <p:cNvSpPr/>
           <p:nvPr/>
         </p:nvSpPr>
         <p:spPr>
           <a:xfrm>
-            <a:off x="640080" y="6263640"/>
-            <a:ext cx="914400" cy="36576"/>
+            <a:off x="8138160" y="3383280"/>
+            <a:ext cx="3657600" cy="2743200"/>
           </a:xfrm>
           <a:prstGeom prst="rect">
             <a:avLst/>
           </a:prstGeom>
           <a:solidFill>
-            <a:srgbClr val="E0B85F"/>
+            <a:srgbClr val="F8F7F2"/>
           </a:solidFill>
-          <a:ln>
-            <a:noFill/>
+          <a:ln w="19050">
+            <a:solidFill>
+              <a:srgbClr val="1D7E7E"/>
+            </a:solidFill>
           </a:ln>
         </p:spPr>
         <p:style>
@@ -10757,50 +12428,132 @@
       </p:sp>
       <p:sp>
         <p:nvSpPr>
-          <p:cNvPr id="13" name="TextBox 12"/>
-          <p:cNvSpPr txBox="1"/>
-          <p:nvPr/>
-        </p:nvSpPr>
-        <p:spPr>
-          <a:xfrm>
-            <a:off x="640080" y="6373368"/>
-            <a:ext cx="10972800" cy="365760"/>
-          </a:xfrm>
-          <a:prstGeom prst="rect">
-            <a:avLst/>
-          </a:prstGeom>
-          <a:noFill/>
-        </p:spPr>
-        <p:txBody>
-          <a:bodyPr wrap="square" lIns="0" rIns="0" tIns="0" bIns="0">
-            <a:spAutoFit/>
-          </a:bodyPr>
-          <a:lstStyle/>
-          <a:p>
-            <a:pPr>
-              <a:defRPr sz="2200" b="1" i="1">
-                <a:solidFill>
-                  <a:srgbClr val="E0B85F"/>
+          <p:cNvPr id="14" name="TextBox 13"/>
+          <p:cNvSpPr txBox="1"/>
+          <p:nvPr/>
+        </p:nvSpPr>
+        <p:spPr>
+          <a:xfrm>
+            <a:off x="8321040" y="3520440"/>
+            <a:ext cx="3291840" cy="457200"/>
+          </a:xfrm>
+          <a:prstGeom prst="rect">
+            <a:avLst/>
+          </a:prstGeom>
+          <a:noFill/>
+        </p:spPr>
+        <p:txBody>
+          <a:bodyPr wrap="square" lIns="0" rIns="0" tIns="0" bIns="0">
+            <a:spAutoFit/>
+          </a:bodyPr>
+          <a:lstStyle/>
+          <a:p>
+            <a:pPr>
+              <a:defRPr sz="1800" b="1" i="0">
+                <a:solidFill>
+                  <a:srgbClr val="1D7E7E"/>
                 </a:solidFill>
                 <a:latin typeface="Cambria"/>
               </a:defRPr>
             </a:pPr>
             <a:r>
-              <a:t>Thank you.   Questions?</a:t>
-            </a:r>
-          </a:p>
-        </p:txBody>
-      </p:sp>
-      <p:sp>
-        <p:nvSpPr>
-          <p:cNvPr id="14" name="TextBox 13"/>
-          <p:cNvSpPr txBox="1"/>
-          <p:nvPr/>
-        </p:nvSpPr>
-        <p:spPr>
-          <a:xfrm>
-            <a:off x="10058400" y="6492240"/>
-            <a:ext cx="1645920" cy="274320"/>
+              <a:t>Validated</a:t>
+            </a:r>
+          </a:p>
+        </p:txBody>
+      </p:sp>
+      <p:sp>
+        <p:nvSpPr>
+          <p:cNvPr id="15" name="TextBox 14"/>
+          <p:cNvSpPr txBox="1"/>
+          <p:nvPr/>
+        </p:nvSpPr>
+        <p:spPr>
+          <a:xfrm>
+            <a:off x="8321040" y="4023360"/>
+            <a:ext cx="3291840" cy="2011680"/>
+          </a:xfrm>
+          <a:prstGeom prst="rect">
+            <a:avLst/>
+          </a:prstGeom>
+          <a:noFill/>
+        </p:spPr>
+        <p:txBody>
+          <a:bodyPr wrap="square" lIns="0" rIns="0" tIns="0" bIns="0">
+            <a:spAutoFit/>
+          </a:bodyPr>
+          <a:lstStyle/>
+          <a:p>
+            <a:pPr>
+              <a:defRPr sz="1100" b="0" i="0">
+                <a:solidFill>
+                  <a:srgbClr val="1A1A1A"/>
+                </a:solidFill>
+                <a:latin typeface="Calibri"/>
+              </a:defRPr>
+            </a:pPr>
+            <a:r>
+              <a:t>SOTA on CIFAR-10/100, ImageNet, DVS-CIFAR10.</a:t>
+            </a:r>
+            <a:br/>
+            <a:br/>
+            <a:r>
+              <a:t>Generalizes to Transformer SNNs (QKFormer +1.10) and detection (COCO +0.014 mAP).</a:t>
+            </a:r>
+            <a:br/>
+            <a:br/>
+            <a:r>
+              <a:t>All without architectural changes.</a:t>
+            </a:r>
+          </a:p>
+        </p:txBody>
+      </p:sp>
+      <p:sp>
+        <p:nvSpPr>
+          <p:cNvPr id="16" name="TextBox 15"/>
+          <p:cNvSpPr txBox="1"/>
+          <p:nvPr/>
+        </p:nvSpPr>
+        <p:spPr>
+          <a:xfrm>
+            <a:off x="457200" y="6492240"/>
+            <a:ext cx="5486400" cy="274320"/>
+          </a:xfrm>
+          <a:prstGeom prst="rect">
+            <a:avLst/>
+          </a:prstGeom>
+          <a:noFill/>
+        </p:spPr>
+        <p:txBody>
+          <a:bodyPr wrap="square" lIns="0" rIns="0" tIns="0" bIns="0">
+            <a:spAutoFit/>
+          </a:bodyPr>
+          <a:lstStyle/>
+          <a:p>
+            <a:pPr>
+              <a:defRPr sz="1000" b="0" i="0">
+                <a:solidFill>
+                  <a:srgbClr val="7A7A7A"/>
+                </a:solidFill>
+                <a:latin typeface="Calibri"/>
+              </a:defRPr>
+            </a:pPr>
+            <a:r>
+              <a:t>Defense — Hyunho Kook</a:t>
+            </a:r>
+          </a:p>
+        </p:txBody>
+      </p:sp>
+      <p:sp>
+        <p:nvSpPr>
+          <p:cNvPr id="17" name="TextBox 16"/>
+          <p:cNvSpPr txBox="1"/>
+          <p:nvPr/>
+        </p:nvSpPr>
+        <p:spPr>
+          <a:xfrm>
+            <a:off x="6400800" y="6492240"/>
+            <a:ext cx="5303520" cy="274320"/>
           </a:xfrm>
           <a:prstGeom prst="rect">
             <a:avLst/>
@@ -10816,13 +12569,13 @@
             <a:pPr algn="r">
               <a:defRPr sz="1000" b="0" i="0">
                 <a:solidFill>
-                  <a:srgbClr val="8095A8"/>
-                </a:solidFill>
-                <a:latin typeface="Calibri"/>
-              </a:defRPr>
-            </a:pPr>
-            <a:r>
-              <a:t>19 / 19</a:t>
+                  <a:srgbClr val="7A7A7A"/>
+                </a:solidFill>
+                <a:latin typeface="Calibri"/>
+              </a:defRPr>
+            </a:pPr>
+            <a:r>
+              <a:t>19 / 20</a:t>
             </a:r>
           </a:p>
         </p:txBody>
@@ -11583,7 +13336,537 @@
               </a:defRPr>
             </a:pPr>
             <a:r>
-              <a:t>2 / 19</a:t>
+              <a:t>2 / 20</a:t>
+            </a:r>
+          </a:p>
+        </p:txBody>
+      </p:sp>
+    </p:spTree>
+  </p:cSld>
+  <p:clrMapOvr>
+    <a:masterClrMapping/>
+  </p:clrMapOvr>
+</p:sld>
+</file>
+
+<file path=ppt/slides/slide20.xml><?xml version="1.0" encoding="utf-8"?>
+<p:sld xmlns:a="http://schemas.openxmlformats.org/drawingml/2006/main" xmlns:p="http://schemas.openxmlformats.org/presentationml/2006/main" xmlns:r="http://schemas.openxmlformats.org/officeDocument/2006/relationships">
+  <p:cSld>
+    <p:spTree>
+      <p:nvGrpSpPr>
+        <p:cNvPr id="1" name=""/>
+        <p:cNvGrpSpPr/>
+        <p:nvPr/>
+      </p:nvGrpSpPr>
+      <p:grpSpPr/>
+      <p:sp>
+        <p:nvSpPr>
+          <p:cNvPr id="2" name="Rectangle 1"/>
+          <p:cNvSpPr/>
+          <p:nvPr/>
+        </p:nvSpPr>
+        <p:spPr>
+          <a:xfrm>
+            <a:off x="0" y="0"/>
+            <a:ext cx="12191695" cy="6858000"/>
+          </a:xfrm>
+          <a:prstGeom prst="rect">
+            <a:avLst/>
+          </a:prstGeom>
+          <a:solidFill>
+            <a:srgbClr val="0F2540"/>
+          </a:solidFill>
+          <a:ln>
+            <a:noFill/>
+          </a:ln>
+          <a:effectLst/>
+        </p:spPr>
+        <p:style>
+          <a:lnRef idx="1">
+            <a:schemeClr val="accent1"/>
+          </a:lnRef>
+          <a:fillRef idx="3">
+            <a:schemeClr val="accent1"/>
+          </a:fillRef>
+          <a:effectRef idx="2">
+            <a:schemeClr val="accent1"/>
+          </a:effectRef>
+          <a:fontRef idx="minor">
+            <a:schemeClr val="lt1"/>
+          </a:fontRef>
+        </p:style>
+        <p:txBody>
+          <a:bodyPr rtlCol="0" anchor="ctr"/>
+          <a:lstStyle/>
+          <a:p>
+            <a:pPr algn="ctr"/>
+          </a:p>
+        </p:txBody>
+      </p:sp>
+      <p:sp>
+        <p:nvSpPr>
+          <p:cNvPr id="3" name="Oval 2"/>
+          <p:cNvSpPr/>
+          <p:nvPr/>
+        </p:nvSpPr>
+        <p:spPr>
+          <a:xfrm>
+            <a:off x="8229600" y="-1371600"/>
+            <a:ext cx="3657600" cy="3657600"/>
+          </a:xfrm>
+          <a:prstGeom prst="ellipse">
+            <a:avLst/>
+          </a:prstGeom>
+          <a:solidFill>
+            <a:srgbClr val="091A30"/>
+          </a:solidFill>
+          <a:ln>
+            <a:noFill/>
+          </a:ln>
+        </p:spPr>
+        <p:style>
+          <a:lnRef idx="1">
+            <a:schemeClr val="accent1"/>
+          </a:lnRef>
+          <a:fillRef idx="3">
+            <a:schemeClr val="accent1"/>
+          </a:fillRef>
+          <a:effectRef idx="2">
+            <a:schemeClr val="accent1"/>
+          </a:effectRef>
+          <a:fontRef idx="minor">
+            <a:schemeClr val="lt1"/>
+          </a:fontRef>
+        </p:style>
+        <p:txBody>
+          <a:bodyPr rtlCol="0" anchor="ctr"/>
+          <a:lstStyle/>
+          <a:p>
+            <a:pPr algn="ctr"/>
+          </a:p>
+        </p:txBody>
+      </p:sp>
+      <p:sp>
+        <p:nvSpPr>
+          <p:cNvPr id="4" name="Oval 3"/>
+          <p:cNvSpPr/>
+          <p:nvPr/>
+        </p:nvSpPr>
+        <p:spPr>
+          <a:xfrm>
+            <a:off x="-1828800" y="4572000"/>
+            <a:ext cx="5029200" cy="5029200"/>
+          </a:xfrm>
+          <a:prstGeom prst="ellipse">
+            <a:avLst/>
+          </a:prstGeom>
+          <a:solidFill>
+            <a:srgbClr val="091A30"/>
+          </a:solidFill>
+          <a:ln>
+            <a:noFill/>
+          </a:ln>
+        </p:spPr>
+        <p:style>
+          <a:lnRef idx="1">
+            <a:schemeClr val="accent1"/>
+          </a:lnRef>
+          <a:fillRef idx="3">
+            <a:schemeClr val="accent1"/>
+          </a:fillRef>
+          <a:effectRef idx="2">
+            <a:schemeClr val="accent1"/>
+          </a:effectRef>
+          <a:fontRef idx="minor">
+            <a:schemeClr val="lt1"/>
+          </a:fontRef>
+        </p:style>
+        <p:txBody>
+          <a:bodyPr rtlCol="0" anchor="ctr"/>
+          <a:lstStyle/>
+          <a:p>
+            <a:pPr algn="ctr"/>
+          </a:p>
+        </p:txBody>
+      </p:sp>
+      <p:sp>
+        <p:nvSpPr>
+          <p:cNvPr id="5" name="TextBox 4"/>
+          <p:cNvSpPr txBox="1"/>
+          <p:nvPr/>
+        </p:nvSpPr>
+        <p:spPr>
+          <a:xfrm>
+            <a:off x="640080" y="640080"/>
+            <a:ext cx="9144000" cy="365760"/>
+          </a:xfrm>
+          <a:prstGeom prst="rect">
+            <a:avLst/>
+          </a:prstGeom>
+          <a:noFill/>
+        </p:spPr>
+        <p:txBody>
+          <a:bodyPr wrap="square" lIns="0" rIns="0" tIns="0" bIns="0">
+            <a:spAutoFit/>
+          </a:bodyPr>
+          <a:lstStyle/>
+          <a:p>
+            <a:pPr>
+              <a:defRPr sz="1200" b="1" i="0">
+                <a:solidFill>
+                  <a:srgbClr val="E0B85F"/>
+                </a:solidFill>
+                <a:latin typeface="Calibri"/>
+              </a:defRPr>
+            </a:pPr>
+            <a:r>
+              <a:rPr spc="400"/>
+              <a:t>CONCLUSION</a:t>
+            </a:r>
+          </a:p>
+        </p:txBody>
+      </p:sp>
+      <p:sp>
+        <p:nvSpPr>
+          <p:cNvPr id="6" name="TextBox 5"/>
+          <p:cNvSpPr txBox="1"/>
+          <p:nvPr/>
+        </p:nvSpPr>
+        <p:spPr>
+          <a:xfrm>
+            <a:off x="640080" y="1463040"/>
+            <a:ext cx="10972800" cy="822960"/>
+          </a:xfrm>
+          <a:prstGeom prst="rect">
+            <a:avLst/>
+          </a:prstGeom>
+          <a:noFill/>
+        </p:spPr>
+        <p:txBody>
+          <a:bodyPr wrap="square" lIns="0" rIns="0" tIns="0" bIns="0">
+            <a:spAutoFit/>
+          </a:bodyPr>
+          <a:lstStyle/>
+          <a:p>
+            <a:pPr>
+              <a:defRPr sz="3600" b="1" i="0">
+                <a:solidFill>
+                  <a:srgbClr val="FFFFFF"/>
+                </a:solidFill>
+                <a:latin typeface="Cambria"/>
+              </a:defRPr>
+            </a:pPr>
+            <a:r>
+              <a:t>Two instabilities, two principled fixes,</a:t>
+            </a:r>
+          </a:p>
+        </p:txBody>
+      </p:sp>
+      <p:sp>
+        <p:nvSpPr>
+          <p:cNvPr id="7" name="TextBox 6"/>
+          <p:cNvSpPr txBox="1"/>
+          <p:nvPr/>
+        </p:nvSpPr>
+        <p:spPr>
+          <a:xfrm>
+            <a:off x="640080" y="2286000"/>
+            <a:ext cx="10972800" cy="822960"/>
+          </a:xfrm>
+          <a:prstGeom prst="rect">
+            <a:avLst/>
+          </a:prstGeom>
+          <a:noFill/>
+        </p:spPr>
+        <p:txBody>
+          <a:bodyPr wrap="square" lIns="0" rIns="0" tIns="0" bIns="0">
+            <a:spAutoFit/>
+          </a:bodyPr>
+          <a:lstStyle/>
+          <a:p>
+            <a:pPr>
+              <a:defRPr sz="3600" b="1" i="0">
+                <a:solidFill>
+                  <a:srgbClr val="E0B85F"/>
+                </a:solidFill>
+                <a:latin typeface="Cambria"/>
+              </a:defRPr>
+            </a:pPr>
+            <a:r>
+              <a:t>one cohesive story.</a:t>
+            </a:r>
+          </a:p>
+        </p:txBody>
+      </p:sp>
+      <p:sp>
+        <p:nvSpPr>
+          <p:cNvPr id="8" name="TextBox 7"/>
+          <p:cNvSpPr txBox="1"/>
+          <p:nvPr/>
+        </p:nvSpPr>
+        <p:spPr>
+          <a:xfrm>
+            <a:off x="640080" y="3657600"/>
+            <a:ext cx="10058400" cy="274320"/>
+          </a:xfrm>
+          <a:prstGeom prst="rect">
+            <a:avLst/>
+          </a:prstGeom>
+          <a:noFill/>
+        </p:spPr>
+        <p:txBody>
+          <a:bodyPr wrap="square" lIns="0" rIns="0" tIns="0" bIns="0">
+            <a:spAutoFit/>
+          </a:bodyPr>
+          <a:lstStyle/>
+          <a:p>
+            <a:pPr>
+              <a:defRPr sz="1100" b="1" i="0">
+                <a:solidFill>
+                  <a:srgbClr val="E0B85F"/>
+                </a:solidFill>
+                <a:latin typeface="Calibri"/>
+              </a:defRPr>
+            </a:pPr>
+            <a:r>
+              <a:rPr spc="400"/>
+              <a:t>LIMITATIONS</a:t>
+            </a:r>
+          </a:p>
+        </p:txBody>
+      </p:sp>
+      <p:sp>
+        <p:nvSpPr>
+          <p:cNvPr id="9" name="TextBox 8"/>
+          <p:cNvSpPr txBox="1"/>
+          <p:nvPr/>
+        </p:nvSpPr>
+        <p:spPr>
+          <a:xfrm>
+            <a:off x="640080" y="3977639"/>
+            <a:ext cx="10972800" cy="1005840"/>
+          </a:xfrm>
+          <a:prstGeom prst="rect">
+            <a:avLst/>
+          </a:prstGeom>
+          <a:noFill/>
+        </p:spPr>
+        <p:txBody>
+          <a:bodyPr wrap="square" lIns="0" rIns="0" tIns="0" bIns="0">
+            <a:spAutoFit/>
+          </a:bodyPr>
+          <a:lstStyle/>
+          <a:p>
+            <a:pPr>
+              <a:defRPr sz="1200" b="0" i="0">
+                <a:solidFill>
+                  <a:srgbClr val="CBD8E0"/>
+                </a:solidFill>
+                <a:latin typeface="Calibri"/>
+              </a:defRPr>
+            </a:pPr>
+            <a:r>
+              <a:t>▸  Per-layer constant approximates π only at the mean — richer parameterizations are open.</a:t>
+            </a:r>
+            <a:br/>
+            <a:r>
+              <a:t>▸  Hardware with fixed neuron parameters needs quantization-aware adaptation.</a:t>
+            </a:r>
+            <a:br/>
+            <a:r>
+              <a:t>▸  i.i.d. assumption empirically supported, but tighter bounds welcome.</a:t>
+            </a:r>
+          </a:p>
+        </p:txBody>
+      </p:sp>
+      <p:sp>
+        <p:nvSpPr>
+          <p:cNvPr id="10" name="TextBox 9"/>
+          <p:cNvSpPr txBox="1"/>
+          <p:nvPr/>
+        </p:nvSpPr>
+        <p:spPr>
+          <a:xfrm>
+            <a:off x="640080" y="5074920"/>
+            <a:ext cx="10058400" cy="274320"/>
+          </a:xfrm>
+          <a:prstGeom prst="rect">
+            <a:avLst/>
+          </a:prstGeom>
+          <a:noFill/>
+        </p:spPr>
+        <p:txBody>
+          <a:bodyPr wrap="square" lIns="0" rIns="0" tIns="0" bIns="0">
+            <a:spAutoFit/>
+          </a:bodyPr>
+          <a:lstStyle/>
+          <a:p>
+            <a:pPr>
+              <a:defRPr sz="1100" b="1" i="0">
+                <a:solidFill>
+                  <a:srgbClr val="E0B85F"/>
+                </a:solidFill>
+                <a:latin typeface="Calibri"/>
+              </a:defRPr>
+            </a:pPr>
+            <a:r>
+              <a:rPr spc="400"/>
+              <a:t>FUTURE  WORK</a:t>
+            </a:r>
+          </a:p>
+        </p:txBody>
+      </p:sp>
+      <p:sp>
+        <p:nvSpPr>
+          <p:cNvPr id="11" name="TextBox 10"/>
+          <p:cNvSpPr txBox="1"/>
+          <p:nvPr/>
+        </p:nvSpPr>
+        <p:spPr>
+          <a:xfrm>
+            <a:off x="640080" y="5394960"/>
+            <a:ext cx="10972800" cy="822960"/>
+          </a:xfrm>
+          <a:prstGeom prst="rect">
+            <a:avLst/>
+          </a:prstGeom>
+          <a:noFill/>
+        </p:spPr>
+        <p:txBody>
+          <a:bodyPr wrap="square" lIns="0" rIns="0" tIns="0" bIns="0">
+            <a:spAutoFit/>
+          </a:bodyPr>
+          <a:lstStyle/>
+          <a:p>
+            <a:pPr>
+              <a:defRPr sz="1200" b="0" i="0">
+                <a:solidFill>
+                  <a:srgbClr val="CBD8E0"/>
+                </a:solidFill>
+                <a:latin typeface="Calibri"/>
+              </a:defRPr>
+            </a:pPr>
+            <a:r>
+              <a:t>▸  Hardware-aware adaptation:  Loihi, Akida, TrueNorth</a:t>
+            </a:r>
+            <a:br/>
+            <a:r>
+              <a:t>▸  Beyond LIF:  adaptive LIF, Izhikevich, foundation-scale SNNs</a:t>
+            </a:r>
+          </a:p>
+        </p:txBody>
+      </p:sp>
+      <p:sp>
+        <p:nvSpPr>
+          <p:cNvPr id="12" name="Rectangle 11"/>
+          <p:cNvSpPr/>
+          <p:nvPr/>
+        </p:nvSpPr>
+        <p:spPr>
+          <a:xfrm>
+            <a:off x="640080" y="6263640"/>
+            <a:ext cx="914400" cy="36576"/>
+          </a:xfrm>
+          <a:prstGeom prst="rect">
+            <a:avLst/>
+          </a:prstGeom>
+          <a:solidFill>
+            <a:srgbClr val="E0B85F"/>
+          </a:solidFill>
+          <a:ln>
+            <a:noFill/>
+          </a:ln>
+        </p:spPr>
+        <p:style>
+          <a:lnRef idx="1">
+            <a:schemeClr val="accent1"/>
+          </a:lnRef>
+          <a:fillRef idx="3">
+            <a:schemeClr val="accent1"/>
+          </a:fillRef>
+          <a:effectRef idx="2">
+            <a:schemeClr val="accent1"/>
+          </a:effectRef>
+          <a:fontRef idx="minor">
+            <a:schemeClr val="lt1"/>
+          </a:fontRef>
+        </p:style>
+        <p:txBody>
+          <a:bodyPr rtlCol="0" anchor="ctr"/>
+          <a:lstStyle/>
+          <a:p>
+            <a:pPr algn="ctr"/>
+          </a:p>
+        </p:txBody>
+      </p:sp>
+      <p:sp>
+        <p:nvSpPr>
+          <p:cNvPr id="13" name="TextBox 12"/>
+          <p:cNvSpPr txBox="1"/>
+          <p:nvPr/>
+        </p:nvSpPr>
+        <p:spPr>
+          <a:xfrm>
+            <a:off x="640080" y="6373368"/>
+            <a:ext cx="10972800" cy="365760"/>
+          </a:xfrm>
+          <a:prstGeom prst="rect">
+            <a:avLst/>
+          </a:prstGeom>
+          <a:noFill/>
+        </p:spPr>
+        <p:txBody>
+          <a:bodyPr wrap="square" lIns="0" rIns="0" tIns="0" bIns="0">
+            <a:spAutoFit/>
+          </a:bodyPr>
+          <a:lstStyle/>
+          <a:p>
+            <a:pPr>
+              <a:defRPr sz="2200" b="1" i="1">
+                <a:solidFill>
+                  <a:srgbClr val="E0B85F"/>
+                </a:solidFill>
+                <a:latin typeface="Cambria"/>
+              </a:defRPr>
+            </a:pPr>
+            <a:r>
+              <a:t>Thank you.   Questions?</a:t>
+            </a:r>
+          </a:p>
+        </p:txBody>
+      </p:sp>
+      <p:sp>
+        <p:nvSpPr>
+          <p:cNvPr id="14" name="TextBox 13"/>
+          <p:cNvSpPr txBox="1"/>
+          <p:nvPr/>
+        </p:nvSpPr>
+        <p:spPr>
+          <a:xfrm>
+            <a:off x="10058400" y="6492240"/>
+            <a:ext cx="1645920" cy="274320"/>
+          </a:xfrm>
+          <a:prstGeom prst="rect">
+            <a:avLst/>
+          </a:prstGeom>
+          <a:noFill/>
+        </p:spPr>
+        <p:txBody>
+          <a:bodyPr wrap="square" lIns="0" rIns="0" tIns="0" bIns="0">
+            <a:spAutoFit/>
+          </a:bodyPr>
+          <a:lstStyle/>
+          <a:p>
+            <a:pPr algn="r">
+              <a:defRPr sz="1000" b="0" i="0">
+                <a:solidFill>
+                  <a:srgbClr val="8095A8"/>
+                </a:solidFill>
+                <a:latin typeface="Calibri"/>
+              </a:defRPr>
+            </a:pPr>
+            <a:r>
+              <a:t>20 / 20</a:t>
             </a:r>
           </a:p>
         </p:txBody>
@@ -12459,7 +14742,7 @@
               </a:defRPr>
             </a:pPr>
             <a:r>
-              <a:t>3 / 19</a:t>
+              <a:t>3 / 20</a:t>
             </a:r>
           </a:p>
         </p:txBody>
@@ -12972,7 +15255,7 @@
               </a:defRPr>
             </a:pPr>
             <a:r>
-              <a:t>4 / 19</a:t>
+              <a:t>4 / 20</a:t>
             </a:r>
           </a:p>
         </p:txBody>
@@ -13611,7 +15894,7 @@
               </a:defRPr>
             </a:pPr>
             <a:r>
-              <a:t>5 / 19</a:t>
+              <a:t>5 / 20</a:t>
             </a:r>
           </a:p>
         </p:txBody>
@@ -14295,7 +16578,7 @@
               </a:defRPr>
             </a:pPr>
             <a:r>
-              <a:t>6 / 19</a:t>
+              <a:t>6 / 20</a:t>
             </a:r>
           </a:p>
         </p:txBody>
@@ -15063,7 +17346,7 @@
               </a:defRPr>
             </a:pPr>
             <a:r>
-              <a:t>7 / 19</a:t>
+              <a:t>7 / 20</a:t>
             </a:r>
           </a:p>
         </p:txBody>
@@ -15779,7 +18062,7 @@
               </a:defRPr>
             </a:pPr>
             <a:r>
-              <a:t>8 / 19</a:t>
+              <a:t>8 / 20</a:t>
             </a:r>
           </a:p>
         </p:txBody>
@@ -16428,7 +18711,7 @@
               </a:defRPr>
             </a:pPr>
             <a:r>
-              <a:t>9 / 19</a:t>
+              <a:t>9 / 20</a:t>
             </a:r>
           </a:p>
         </p:txBody>

--- a/Hyunho_Kook_Master_Defense.pptx
+++ b/Hyunho_Kook_Master_Defense.pptx
@@ -7477,7 +7477,7 @@
         <p:spPr>
           <a:xfrm>
             <a:off x="457200" y="3703320"/>
-            <a:ext cx="5532120" cy="2194560"/>
+            <a:ext cx="5532120" cy="2286000"/>
           </a:xfrm>
           <a:prstGeom prst="rect">
             <a:avLst/>
@@ -7522,21 +7522,21 @@
         <p:spPr>
           <a:xfrm>
             <a:off x="640080" y="3794759"/>
-            <a:ext cx="5303520" cy="274320"/>
-          </a:xfrm>
-          <a:prstGeom prst="rect">
-            <a:avLst/>
-          </a:prstGeom>
-          <a:noFill/>
-        </p:spPr>
-        <p:txBody>
-          <a:bodyPr wrap="square" lIns="0" rIns="0" tIns="0" bIns="0">
-            <a:spAutoFit/>
-          </a:bodyPr>
-          <a:lstStyle/>
-          <a:p>
-            <a:pPr>
-              <a:defRPr sz="1200" b="1" i="0">
+            <a:ext cx="5303520" cy="320040"/>
+          </a:xfrm>
+          <a:prstGeom prst="rect">
+            <a:avLst/>
+          </a:prstGeom>
+          <a:noFill/>
+        </p:spPr>
+        <p:txBody>
+          <a:bodyPr wrap="square" lIns="0" rIns="0" tIns="0" bIns="0">
+            <a:spAutoFit/>
+          </a:bodyPr>
+          <a:lstStyle/>
+          <a:p>
+            <a:pPr>
+              <a:defRPr sz="1300" b="1" i="0">
                 <a:solidFill>
                   <a:srgbClr val="0F2540"/>
                 </a:solidFill>
@@ -7557,22 +7557,22 @@
         </p:nvSpPr>
         <p:spPr>
           <a:xfrm>
-            <a:off x="1874519" y="4160520"/>
-            <a:ext cx="1188720" cy="228600"/>
-          </a:xfrm>
-          <a:prstGeom prst="rect">
-            <a:avLst/>
-          </a:prstGeom>
-          <a:noFill/>
-        </p:spPr>
-        <p:txBody>
-          <a:bodyPr wrap="square" lIns="0" rIns="0" tIns="0" bIns="0">
-            <a:spAutoFit/>
-          </a:bodyPr>
-          <a:lstStyle/>
-          <a:p>
-            <a:pPr>
-              <a:defRPr sz="900" b="1" i="0">
+            <a:off x="685800" y="4206240"/>
+            <a:ext cx="1280160" cy="274320"/>
+          </a:xfrm>
+          <a:prstGeom prst="rect">
+            <a:avLst/>
+          </a:prstGeom>
+          <a:noFill/>
+        </p:spPr>
+        <p:txBody>
+          <a:bodyPr wrap="square" lIns="0" rIns="0" tIns="0" bIns="0">
+            <a:spAutoFit/>
+          </a:bodyPr>
+          <a:lstStyle/>
+          <a:p>
+            <a:pPr>
+              <a:defRPr sz="1100" b="1" i="0">
                 <a:solidFill>
                   <a:srgbClr val="1D7E7E"/>
                 </a:solidFill>
@@ -7593,22 +7593,22 @@
         </p:nvSpPr>
         <p:spPr>
           <a:xfrm>
-            <a:off x="3200400" y="4160520"/>
-            <a:ext cx="1188720" cy="228600"/>
-          </a:xfrm>
-          <a:prstGeom prst="rect">
-            <a:avLst/>
-          </a:prstGeom>
-          <a:noFill/>
-        </p:spPr>
-        <p:txBody>
-          <a:bodyPr wrap="square" lIns="0" rIns="0" tIns="0" bIns="0">
-            <a:spAutoFit/>
-          </a:bodyPr>
-          <a:lstStyle/>
-          <a:p>
-            <a:pPr>
-              <a:defRPr sz="900" b="1" i="0">
+            <a:off x="2103120" y="4206240"/>
+            <a:ext cx="1280160" cy="274320"/>
+          </a:xfrm>
+          <a:prstGeom prst="rect">
+            <a:avLst/>
+          </a:prstGeom>
+          <a:noFill/>
+        </p:spPr>
+        <p:txBody>
+          <a:bodyPr wrap="square" lIns="0" rIns="0" tIns="0" bIns="0">
+            <a:spAutoFit/>
+          </a:bodyPr>
+          <a:lstStyle/>
+          <a:p>
+            <a:pPr>
+              <a:defRPr sz="1100" b="1" i="0">
                 <a:solidFill>
                   <a:srgbClr val="1D7E7E"/>
                 </a:solidFill>
@@ -7629,22 +7629,22 @@
         </p:nvSpPr>
         <p:spPr>
           <a:xfrm>
-            <a:off x="4389120" y="4160520"/>
-            <a:ext cx="1188720" cy="228600"/>
-          </a:xfrm>
-          <a:prstGeom prst="rect">
-            <a:avLst/>
-          </a:prstGeom>
-          <a:noFill/>
-        </p:spPr>
-        <p:txBody>
-          <a:bodyPr wrap="square" lIns="0" rIns="0" tIns="0" bIns="0">
-            <a:spAutoFit/>
-          </a:bodyPr>
-          <a:lstStyle/>
-          <a:p>
-            <a:pPr>
-              <a:defRPr sz="900" b="1" i="0">
+            <a:off x="3474720" y="4206240"/>
+            <a:ext cx="1280160" cy="274320"/>
+          </a:xfrm>
+          <a:prstGeom prst="rect">
+            <a:avLst/>
+          </a:prstGeom>
+          <a:noFill/>
+        </p:spPr>
+        <p:txBody>
+          <a:bodyPr wrap="square" lIns="0" rIns="0" tIns="0" bIns="0">
+            <a:spAutoFit/>
+          </a:bodyPr>
+          <a:lstStyle/>
+          <a:p>
+            <a:pPr>
+              <a:defRPr sz="1100" b="1" i="0">
                 <a:solidFill>
                   <a:srgbClr val="1D7E7E"/>
                 </a:solidFill>
@@ -7665,22 +7665,22 @@
         </p:nvSpPr>
         <p:spPr>
           <a:xfrm>
-            <a:off x="5394960" y="4160520"/>
-            <a:ext cx="1188720" cy="228600"/>
-          </a:xfrm>
-          <a:prstGeom prst="rect">
-            <a:avLst/>
-          </a:prstGeom>
-          <a:noFill/>
-        </p:spPr>
-        <p:txBody>
-          <a:bodyPr wrap="square" lIns="0" rIns="0" tIns="0" bIns="0">
-            <a:spAutoFit/>
-          </a:bodyPr>
-          <a:lstStyle/>
-          <a:p>
-            <a:pPr>
-              <a:defRPr sz="900" b="1" i="0">
+            <a:off x="4846320" y="4206240"/>
+            <a:ext cx="1280160" cy="274320"/>
+          </a:xfrm>
+          <a:prstGeom prst="rect">
+            <a:avLst/>
+          </a:prstGeom>
+          <a:noFill/>
+        </p:spPr>
+        <p:txBody>
+          <a:bodyPr wrap="square" lIns="0" rIns="0" tIns="0" bIns="0">
+            <a:spAutoFit/>
+          </a:bodyPr>
+          <a:lstStyle/>
+          <a:p>
+            <a:pPr>
+              <a:defRPr sz="1100" b="1" i="0">
                 <a:solidFill>
                   <a:srgbClr val="1D7E7E"/>
                 </a:solidFill>
@@ -7701,22 +7701,22 @@
         </p:nvSpPr>
         <p:spPr>
           <a:xfrm>
-            <a:off x="640080" y="4480559"/>
-            <a:ext cx="1280160" cy="274320"/>
-          </a:xfrm>
-          <a:prstGeom prst="rect">
-            <a:avLst/>
-          </a:prstGeom>
-          <a:noFill/>
-        </p:spPr>
-        <p:txBody>
-          <a:bodyPr wrap="square" lIns="0" rIns="0" tIns="0" bIns="0">
-            <a:spAutoFit/>
-          </a:bodyPr>
-          <a:lstStyle/>
-          <a:p>
-            <a:pPr>
-              <a:defRPr sz="1100" b="1" i="0">
+            <a:off x="685800" y="4572000"/>
+            <a:ext cx="1280160" cy="320040"/>
+          </a:xfrm>
+          <a:prstGeom prst="rect">
+            <a:avLst/>
+          </a:prstGeom>
+          <a:noFill/>
+        </p:spPr>
+        <p:txBody>
+          <a:bodyPr wrap="square" lIns="0" rIns="0" tIns="0" bIns="0">
+            <a:spAutoFit/>
+          </a:bodyPr>
+          <a:lstStyle/>
+          <a:p>
+            <a:pPr>
+              <a:defRPr sz="1300" b="1" i="0">
                 <a:solidFill>
                   <a:srgbClr val="E56945"/>
                 </a:solidFill>
@@ -7737,22 +7737,22 @@
         </p:nvSpPr>
         <p:spPr>
           <a:xfrm>
-            <a:off x="2057400" y="4480559"/>
-            <a:ext cx="1188720" cy="274320"/>
-          </a:xfrm>
-          <a:prstGeom prst="rect">
-            <a:avLst/>
-          </a:prstGeom>
-          <a:noFill/>
-        </p:spPr>
-        <p:txBody>
-          <a:bodyPr wrap="square" lIns="0" rIns="0" tIns="0" bIns="0">
-            <a:spAutoFit/>
-          </a:bodyPr>
-          <a:lstStyle/>
-          <a:p>
-            <a:pPr>
-              <a:defRPr sz="1050" b="0" i="0">
+            <a:off x="2103120" y="4572000"/>
+            <a:ext cx="1280160" cy="320040"/>
+          </a:xfrm>
+          <a:prstGeom prst="rect">
+            <a:avLst/>
+          </a:prstGeom>
+          <a:noFill/>
+        </p:spPr>
+        <p:txBody>
+          <a:bodyPr wrap="square" lIns="0" rIns="0" tIns="0" bIns="0">
+            <a:spAutoFit/>
+          </a:bodyPr>
+          <a:lstStyle/>
+          <a:p>
+            <a:pPr>
+              <a:defRPr sz="1250" b="0" i="0">
                 <a:solidFill>
                   <a:srgbClr val="E56945"/>
                 </a:solidFill>
@@ -7773,22 +7773,22 @@
         </p:nvSpPr>
         <p:spPr>
           <a:xfrm>
-            <a:off x="3246120" y="4480559"/>
-            <a:ext cx="1188720" cy="274320"/>
-          </a:xfrm>
-          <a:prstGeom prst="rect">
-            <a:avLst/>
-          </a:prstGeom>
-          <a:noFill/>
-        </p:spPr>
-        <p:txBody>
-          <a:bodyPr wrap="square" lIns="0" rIns="0" tIns="0" bIns="0">
-            <a:spAutoFit/>
-          </a:bodyPr>
-          <a:lstStyle/>
-          <a:p>
-            <a:pPr>
-              <a:defRPr sz="1050" b="0" i="0">
+            <a:off x="3474720" y="4572000"/>
+            <a:ext cx="1280160" cy="320040"/>
+          </a:xfrm>
+          <a:prstGeom prst="rect">
+            <a:avLst/>
+          </a:prstGeom>
+          <a:noFill/>
+        </p:spPr>
+        <p:txBody>
+          <a:bodyPr wrap="square" lIns="0" rIns="0" tIns="0" bIns="0">
+            <a:spAutoFit/>
+          </a:bodyPr>
+          <a:lstStyle/>
+          <a:p>
+            <a:pPr>
+              <a:defRPr sz="1250" b="0" i="0">
                 <a:solidFill>
                   <a:srgbClr val="E56945"/>
                 </a:solidFill>
@@ -7809,22 +7809,22 @@
         </p:nvSpPr>
         <p:spPr>
           <a:xfrm>
-            <a:off x="4434840" y="4480559"/>
-            <a:ext cx="1188720" cy="274320"/>
-          </a:xfrm>
-          <a:prstGeom prst="rect">
-            <a:avLst/>
-          </a:prstGeom>
-          <a:noFill/>
-        </p:spPr>
-        <p:txBody>
-          <a:bodyPr wrap="square" lIns="0" rIns="0" tIns="0" bIns="0">
-            <a:spAutoFit/>
-          </a:bodyPr>
-          <a:lstStyle/>
-          <a:p>
-            <a:pPr>
-              <a:defRPr sz="1050" b="0" i="0">
+            <a:off x="4846320" y="4572000"/>
+            <a:ext cx="1280160" cy="320040"/>
+          </a:xfrm>
+          <a:prstGeom prst="rect">
+            <a:avLst/>
+          </a:prstGeom>
+          <a:noFill/>
+        </p:spPr>
+        <p:txBody>
+          <a:bodyPr wrap="square" lIns="0" rIns="0" tIns="0" bIns="0">
+            <a:spAutoFit/>
+          </a:bodyPr>
+          <a:lstStyle/>
+          <a:p>
+            <a:pPr>
+              <a:defRPr sz="1250" b="0" i="0">
                 <a:solidFill>
                   <a:srgbClr val="E56945"/>
                 </a:solidFill>
@@ -7845,22 +7845,22 @@
         </p:nvSpPr>
         <p:spPr>
           <a:xfrm>
-            <a:off x="640080" y="4892040"/>
-            <a:ext cx="1280160" cy="274320"/>
-          </a:xfrm>
-          <a:prstGeom prst="rect">
-            <a:avLst/>
-          </a:prstGeom>
-          <a:noFill/>
-        </p:spPr>
-        <p:txBody>
-          <a:bodyPr wrap="square" lIns="0" rIns="0" tIns="0" bIns="0">
-            <a:spAutoFit/>
-          </a:bodyPr>
-          <a:lstStyle/>
-          <a:p>
-            <a:pPr>
-              <a:defRPr sz="1100" b="1" i="0">
+            <a:off x="685800" y="5010912"/>
+            <a:ext cx="1280160" cy="320040"/>
+          </a:xfrm>
+          <a:prstGeom prst="rect">
+            <a:avLst/>
+          </a:prstGeom>
+          <a:noFill/>
+        </p:spPr>
+        <p:txBody>
+          <a:bodyPr wrap="square" lIns="0" rIns="0" tIns="0" bIns="0">
+            <a:spAutoFit/>
+          </a:bodyPr>
+          <a:lstStyle/>
+          <a:p>
+            <a:pPr>
+              <a:defRPr sz="1300" b="1" i="0">
                 <a:solidFill>
                   <a:srgbClr val="E56945"/>
                 </a:solidFill>
@@ -7881,22 +7881,22 @@
         </p:nvSpPr>
         <p:spPr>
           <a:xfrm>
-            <a:off x="2057400" y="4892040"/>
-            <a:ext cx="1188720" cy="274320"/>
-          </a:xfrm>
-          <a:prstGeom prst="rect">
-            <a:avLst/>
-          </a:prstGeom>
-          <a:noFill/>
-        </p:spPr>
-        <p:txBody>
-          <a:bodyPr wrap="square" lIns="0" rIns="0" tIns="0" bIns="0">
-            <a:spAutoFit/>
-          </a:bodyPr>
-          <a:lstStyle/>
-          <a:p>
-            <a:pPr>
-              <a:defRPr sz="1050" b="0" i="0">
+            <a:off x="2103120" y="5010912"/>
+            <a:ext cx="1280160" cy="320040"/>
+          </a:xfrm>
+          <a:prstGeom prst="rect">
+            <a:avLst/>
+          </a:prstGeom>
+          <a:noFill/>
+        </p:spPr>
+        <p:txBody>
+          <a:bodyPr wrap="square" lIns="0" rIns="0" tIns="0" bIns="0">
+            <a:spAutoFit/>
+          </a:bodyPr>
+          <a:lstStyle/>
+          <a:p>
+            <a:pPr>
+              <a:defRPr sz="1250" b="0" i="0">
                 <a:solidFill>
                   <a:srgbClr val="E56945"/>
                 </a:solidFill>
@@ -7917,22 +7917,22 @@
         </p:nvSpPr>
         <p:spPr>
           <a:xfrm>
-            <a:off x="3246120" y="4892040"/>
-            <a:ext cx="1188720" cy="274320"/>
-          </a:xfrm>
-          <a:prstGeom prst="rect">
-            <a:avLst/>
-          </a:prstGeom>
-          <a:noFill/>
-        </p:spPr>
-        <p:txBody>
-          <a:bodyPr wrap="square" lIns="0" rIns="0" tIns="0" bIns="0">
-            <a:spAutoFit/>
-          </a:bodyPr>
-          <a:lstStyle/>
-          <a:p>
-            <a:pPr>
-              <a:defRPr sz="1050" b="0" i="0">
+            <a:off x="3474720" y="5010912"/>
+            <a:ext cx="1280160" cy="320040"/>
+          </a:xfrm>
+          <a:prstGeom prst="rect">
+            <a:avLst/>
+          </a:prstGeom>
+          <a:noFill/>
+        </p:spPr>
+        <p:txBody>
+          <a:bodyPr wrap="square" lIns="0" rIns="0" tIns="0" bIns="0">
+            <a:spAutoFit/>
+          </a:bodyPr>
+          <a:lstStyle/>
+          <a:p>
+            <a:pPr>
+              <a:defRPr sz="1250" b="0" i="0">
                 <a:solidFill>
                   <a:srgbClr val="E56945"/>
                 </a:solidFill>
@@ -7953,22 +7953,22 @@
         </p:nvSpPr>
         <p:spPr>
           <a:xfrm>
-            <a:off x="4434840" y="4892040"/>
-            <a:ext cx="1188720" cy="274320"/>
-          </a:xfrm>
-          <a:prstGeom prst="rect">
-            <a:avLst/>
-          </a:prstGeom>
-          <a:noFill/>
-        </p:spPr>
-        <p:txBody>
-          <a:bodyPr wrap="square" lIns="0" rIns="0" tIns="0" bIns="0">
-            <a:spAutoFit/>
-          </a:bodyPr>
-          <a:lstStyle/>
-          <a:p>
-            <a:pPr>
-              <a:defRPr sz="1050" b="0" i="0">
+            <a:off x="4846320" y="5010912"/>
+            <a:ext cx="1280160" cy="320040"/>
+          </a:xfrm>
+          <a:prstGeom prst="rect">
+            <a:avLst/>
+          </a:prstGeom>
+          <a:noFill/>
+        </p:spPr>
+        <p:txBody>
+          <a:bodyPr wrap="square" lIns="0" rIns="0" tIns="0" bIns="0">
+            <a:spAutoFit/>
+          </a:bodyPr>
+          <a:lstStyle/>
+          <a:p>
+            <a:pPr>
+              <a:defRPr sz="1250" b="0" i="0">
                 <a:solidFill>
                   <a:srgbClr val="E56945"/>
                 </a:solidFill>
@@ -7989,22 +7989,22 @@
         </p:nvSpPr>
         <p:spPr>
           <a:xfrm>
-            <a:off x="640080" y="5303520"/>
-            <a:ext cx="1280160" cy="274320"/>
-          </a:xfrm>
-          <a:prstGeom prst="rect">
-            <a:avLst/>
-          </a:prstGeom>
-          <a:noFill/>
-        </p:spPr>
-        <p:txBody>
-          <a:bodyPr wrap="square" lIns="0" rIns="0" tIns="0" bIns="0">
-            <a:spAutoFit/>
-          </a:bodyPr>
-          <a:lstStyle/>
-          <a:p>
-            <a:pPr>
-              <a:defRPr sz="1100" b="1" i="0">
+            <a:off x="685800" y="5449824"/>
+            <a:ext cx="1280160" cy="320040"/>
+          </a:xfrm>
+          <a:prstGeom prst="rect">
+            <a:avLst/>
+          </a:prstGeom>
+          <a:noFill/>
+        </p:spPr>
+        <p:txBody>
+          <a:bodyPr wrap="square" lIns="0" rIns="0" tIns="0" bIns="0">
+            <a:spAutoFit/>
+          </a:bodyPr>
+          <a:lstStyle/>
+          <a:p>
+            <a:pPr>
+              <a:defRPr sz="1300" b="1" i="0">
                 <a:solidFill>
                   <a:srgbClr val="1D7E7E"/>
                 </a:solidFill>
@@ -8025,22 +8025,22 @@
         </p:nvSpPr>
         <p:spPr>
           <a:xfrm>
-            <a:off x="2057400" y="5303520"/>
-            <a:ext cx="1188720" cy="274320"/>
-          </a:xfrm>
-          <a:prstGeom prst="rect">
-            <a:avLst/>
-          </a:prstGeom>
-          <a:noFill/>
-        </p:spPr>
-        <p:txBody>
-          <a:bodyPr wrap="square" lIns="0" rIns="0" tIns="0" bIns="0">
-            <a:spAutoFit/>
-          </a:bodyPr>
-          <a:lstStyle/>
-          <a:p>
-            <a:pPr>
-              <a:defRPr sz="1050" b="0" i="0">
+            <a:off x="2103120" y="5449824"/>
+            <a:ext cx="1280160" cy="320040"/>
+          </a:xfrm>
+          <a:prstGeom prst="rect">
+            <a:avLst/>
+          </a:prstGeom>
+          <a:noFill/>
+        </p:spPr>
+        <p:txBody>
+          <a:bodyPr wrap="square" lIns="0" rIns="0" tIns="0" bIns="0">
+            <a:spAutoFit/>
+          </a:bodyPr>
+          <a:lstStyle/>
+          <a:p>
+            <a:pPr>
+              <a:defRPr sz="1250" b="0" i="0">
                 <a:solidFill>
                   <a:srgbClr val="1D7E7E"/>
                 </a:solidFill>
@@ -8061,22 +8061,22 @@
         </p:nvSpPr>
         <p:spPr>
           <a:xfrm>
-            <a:off x="3246120" y="5303520"/>
-            <a:ext cx="1188720" cy="274320"/>
-          </a:xfrm>
-          <a:prstGeom prst="rect">
-            <a:avLst/>
-          </a:prstGeom>
-          <a:noFill/>
-        </p:spPr>
-        <p:txBody>
-          <a:bodyPr wrap="square" lIns="0" rIns="0" tIns="0" bIns="0">
-            <a:spAutoFit/>
-          </a:bodyPr>
-          <a:lstStyle/>
-          <a:p>
-            <a:pPr>
-              <a:defRPr sz="1050" b="0" i="0">
+            <a:off x="3474720" y="5449824"/>
+            <a:ext cx="1280160" cy="320040"/>
+          </a:xfrm>
+          <a:prstGeom prst="rect">
+            <a:avLst/>
+          </a:prstGeom>
+          <a:noFill/>
+        </p:spPr>
+        <p:txBody>
+          <a:bodyPr wrap="square" lIns="0" rIns="0" tIns="0" bIns="0">
+            <a:spAutoFit/>
+          </a:bodyPr>
+          <a:lstStyle/>
+          <a:p>
+            <a:pPr>
+              <a:defRPr sz="1250" b="0" i="0">
                 <a:solidFill>
                   <a:srgbClr val="1D7E7E"/>
                 </a:solidFill>
@@ -8097,22 +8097,22 @@
         </p:nvSpPr>
         <p:spPr>
           <a:xfrm>
-            <a:off x="4434840" y="5303520"/>
-            <a:ext cx="1188720" cy="274320"/>
-          </a:xfrm>
-          <a:prstGeom prst="rect">
-            <a:avLst/>
-          </a:prstGeom>
-          <a:noFill/>
-        </p:spPr>
-        <p:txBody>
-          <a:bodyPr wrap="square" lIns="0" rIns="0" tIns="0" bIns="0">
-            <a:spAutoFit/>
-          </a:bodyPr>
-          <a:lstStyle/>
-          <a:p>
-            <a:pPr>
-              <a:defRPr sz="1050" b="0" i="0">
+            <a:off x="4846320" y="5449824"/>
+            <a:ext cx="1280160" cy="320040"/>
+          </a:xfrm>
+          <a:prstGeom prst="rect">
+            <a:avLst/>
+          </a:prstGeom>
+          <a:noFill/>
+        </p:spPr>
+        <p:txBody>
+          <a:bodyPr wrap="square" lIns="0" rIns="0" tIns="0" bIns="0">
+            <a:spAutoFit/>
+          </a:bodyPr>
+          <a:lstStyle/>
+          <a:p>
+            <a:pPr>
+              <a:defRPr sz="1250" b="0" i="0">
                 <a:solidFill>
                   <a:srgbClr val="1D7E7E"/>
                 </a:solidFill>
@@ -8134,7 +8134,7 @@
         <p:spPr>
           <a:xfrm>
             <a:off x="6199632" y="3703320"/>
-            <a:ext cx="5532120" cy="2194560"/>
+            <a:ext cx="5532120" cy="2286000"/>
           </a:xfrm>
           <a:prstGeom prst="rect">
             <a:avLst/>
@@ -8179,21 +8179,21 @@
         <p:spPr>
           <a:xfrm>
             <a:off x="6382512" y="3794759"/>
-            <a:ext cx="5303520" cy="274320"/>
-          </a:xfrm>
-          <a:prstGeom prst="rect">
-            <a:avLst/>
-          </a:prstGeom>
-          <a:noFill/>
-        </p:spPr>
-        <p:txBody>
-          <a:bodyPr wrap="square" lIns="0" rIns="0" tIns="0" bIns="0">
-            <a:spAutoFit/>
-          </a:bodyPr>
-          <a:lstStyle/>
-          <a:p>
-            <a:pPr>
-              <a:defRPr sz="1200" b="1" i="0">
+            <a:ext cx="5303520" cy="320040"/>
+          </a:xfrm>
+          <a:prstGeom prst="rect">
+            <a:avLst/>
+          </a:prstGeom>
+          <a:noFill/>
+        </p:spPr>
+        <p:txBody>
+          <a:bodyPr wrap="square" lIns="0" rIns="0" tIns="0" bIns="0">
+            <a:spAutoFit/>
+          </a:bodyPr>
+          <a:lstStyle/>
+          <a:p>
+            <a:pPr>
+              <a:defRPr sz="1300" b="1" i="0">
                 <a:solidFill>
                   <a:srgbClr val="0F2540"/>
                 </a:solidFill>
@@ -8214,22 +8214,22 @@
         </p:nvSpPr>
         <p:spPr>
           <a:xfrm>
-            <a:off x="7616952" y="4160520"/>
-            <a:ext cx="1188720" cy="228600"/>
-          </a:xfrm>
-          <a:prstGeom prst="rect">
-            <a:avLst/>
-          </a:prstGeom>
-          <a:noFill/>
-        </p:spPr>
-        <p:txBody>
-          <a:bodyPr wrap="square" lIns="0" rIns="0" tIns="0" bIns="0">
-            <a:spAutoFit/>
-          </a:bodyPr>
-          <a:lstStyle/>
-          <a:p>
-            <a:pPr>
-              <a:defRPr sz="900" b="1" i="0">
+            <a:off x="6428232" y="4206240"/>
+            <a:ext cx="1280160" cy="274320"/>
+          </a:xfrm>
+          <a:prstGeom prst="rect">
+            <a:avLst/>
+          </a:prstGeom>
+          <a:noFill/>
+        </p:spPr>
+        <p:txBody>
+          <a:bodyPr wrap="square" lIns="0" rIns="0" tIns="0" bIns="0">
+            <a:spAutoFit/>
+          </a:bodyPr>
+          <a:lstStyle/>
+          <a:p>
+            <a:pPr>
+              <a:defRPr sz="1100" b="1" i="0">
                 <a:solidFill>
                   <a:srgbClr val="1D7E7E"/>
                 </a:solidFill>
@@ -8250,22 +8250,22 @@
         </p:nvSpPr>
         <p:spPr>
           <a:xfrm>
-            <a:off x="8942832" y="4160520"/>
-            <a:ext cx="1188720" cy="228600"/>
-          </a:xfrm>
-          <a:prstGeom prst="rect">
-            <a:avLst/>
-          </a:prstGeom>
-          <a:noFill/>
-        </p:spPr>
-        <p:txBody>
-          <a:bodyPr wrap="square" lIns="0" rIns="0" tIns="0" bIns="0">
-            <a:spAutoFit/>
-          </a:bodyPr>
-          <a:lstStyle/>
-          <a:p>
-            <a:pPr>
-              <a:defRPr sz="900" b="1" i="0">
+            <a:off x="7845552" y="4206240"/>
+            <a:ext cx="1280160" cy="274320"/>
+          </a:xfrm>
+          <a:prstGeom prst="rect">
+            <a:avLst/>
+          </a:prstGeom>
+          <a:noFill/>
+        </p:spPr>
+        <p:txBody>
+          <a:bodyPr wrap="square" lIns="0" rIns="0" tIns="0" bIns="0">
+            <a:spAutoFit/>
+          </a:bodyPr>
+          <a:lstStyle/>
+          <a:p>
+            <a:pPr>
+              <a:defRPr sz="1100" b="1" i="0">
                 <a:solidFill>
                   <a:srgbClr val="1D7E7E"/>
                 </a:solidFill>
@@ -8286,22 +8286,22 @@
         </p:nvSpPr>
         <p:spPr>
           <a:xfrm>
-            <a:off x="10131552" y="4160520"/>
-            <a:ext cx="1188720" cy="228600"/>
-          </a:xfrm>
-          <a:prstGeom prst="rect">
-            <a:avLst/>
-          </a:prstGeom>
-          <a:noFill/>
-        </p:spPr>
-        <p:txBody>
-          <a:bodyPr wrap="square" lIns="0" rIns="0" tIns="0" bIns="0">
-            <a:spAutoFit/>
-          </a:bodyPr>
-          <a:lstStyle/>
-          <a:p>
-            <a:pPr>
-              <a:defRPr sz="900" b="1" i="0">
+            <a:off x="9217152" y="4206240"/>
+            <a:ext cx="1280160" cy="274320"/>
+          </a:xfrm>
+          <a:prstGeom prst="rect">
+            <a:avLst/>
+          </a:prstGeom>
+          <a:noFill/>
+        </p:spPr>
+        <p:txBody>
+          <a:bodyPr wrap="square" lIns="0" rIns="0" tIns="0" bIns="0">
+            <a:spAutoFit/>
+          </a:bodyPr>
+          <a:lstStyle/>
+          <a:p>
+            <a:pPr>
+              <a:defRPr sz="1100" b="1" i="0">
                 <a:solidFill>
                   <a:srgbClr val="1D7E7E"/>
                 </a:solidFill>
@@ -8322,22 +8322,22 @@
         </p:nvSpPr>
         <p:spPr>
           <a:xfrm>
-            <a:off x="11137392" y="4160520"/>
-            <a:ext cx="1188720" cy="228600"/>
-          </a:xfrm>
-          <a:prstGeom prst="rect">
-            <a:avLst/>
-          </a:prstGeom>
-          <a:noFill/>
-        </p:spPr>
-        <p:txBody>
-          <a:bodyPr wrap="square" lIns="0" rIns="0" tIns="0" bIns="0">
-            <a:spAutoFit/>
-          </a:bodyPr>
-          <a:lstStyle/>
-          <a:p>
-            <a:pPr>
-              <a:defRPr sz="900" b="1" i="0">
+            <a:off x="10588752" y="4206240"/>
+            <a:ext cx="1280160" cy="274320"/>
+          </a:xfrm>
+          <a:prstGeom prst="rect">
+            <a:avLst/>
+          </a:prstGeom>
+          <a:noFill/>
+        </p:spPr>
+        <p:txBody>
+          <a:bodyPr wrap="square" lIns="0" rIns="0" tIns="0" bIns="0">
+            <a:spAutoFit/>
+          </a:bodyPr>
+          <a:lstStyle/>
+          <a:p>
+            <a:pPr>
+              <a:defRPr sz="1100" b="1" i="0">
                 <a:solidFill>
                   <a:srgbClr val="1D7E7E"/>
                 </a:solidFill>
@@ -8358,22 +8358,22 @@
         </p:nvSpPr>
         <p:spPr>
           <a:xfrm>
-            <a:off x="6382512" y="4480559"/>
-            <a:ext cx="1280160" cy="274320"/>
-          </a:xfrm>
-          <a:prstGeom prst="rect">
-            <a:avLst/>
-          </a:prstGeom>
-          <a:noFill/>
-        </p:spPr>
-        <p:txBody>
-          <a:bodyPr wrap="square" lIns="0" rIns="0" tIns="0" bIns="0">
-            <a:spAutoFit/>
-          </a:bodyPr>
-          <a:lstStyle/>
-          <a:p>
-            <a:pPr>
-              <a:defRPr sz="1100" b="1" i="0">
+            <a:off x="6428232" y="4572000"/>
+            <a:ext cx="1280160" cy="320040"/>
+          </a:xfrm>
+          <a:prstGeom prst="rect">
+            <a:avLst/>
+          </a:prstGeom>
+          <a:noFill/>
+        </p:spPr>
+        <p:txBody>
+          <a:bodyPr wrap="square" lIns="0" rIns="0" tIns="0" bIns="0">
+            <a:spAutoFit/>
+          </a:bodyPr>
+          <a:lstStyle/>
+          <a:p>
+            <a:pPr>
+              <a:defRPr sz="1300" b="1" i="0">
                 <a:solidFill>
                   <a:srgbClr val="E56945"/>
                 </a:solidFill>
@@ -8394,22 +8394,22 @@
         </p:nvSpPr>
         <p:spPr>
           <a:xfrm>
-            <a:off x="7799832" y="4480559"/>
-            <a:ext cx="1188720" cy="274320"/>
-          </a:xfrm>
-          <a:prstGeom prst="rect">
-            <a:avLst/>
-          </a:prstGeom>
-          <a:noFill/>
-        </p:spPr>
-        <p:txBody>
-          <a:bodyPr wrap="square" lIns="0" rIns="0" tIns="0" bIns="0">
-            <a:spAutoFit/>
-          </a:bodyPr>
-          <a:lstStyle/>
-          <a:p>
-            <a:pPr>
-              <a:defRPr sz="1050" b="0" i="0">
+            <a:off x="7845552" y="4572000"/>
+            <a:ext cx="1280160" cy="320040"/>
+          </a:xfrm>
+          <a:prstGeom prst="rect">
+            <a:avLst/>
+          </a:prstGeom>
+          <a:noFill/>
+        </p:spPr>
+        <p:txBody>
+          <a:bodyPr wrap="square" lIns="0" rIns="0" tIns="0" bIns="0">
+            <a:spAutoFit/>
+          </a:bodyPr>
+          <a:lstStyle/>
+          <a:p>
+            <a:pPr>
+              <a:defRPr sz="1250" b="0" i="0">
                 <a:solidFill>
                   <a:srgbClr val="E56945"/>
                 </a:solidFill>
@@ -8430,22 +8430,22 @@
         </p:nvSpPr>
         <p:spPr>
           <a:xfrm>
-            <a:off x="8988552" y="4480559"/>
-            <a:ext cx="1188720" cy="274320"/>
-          </a:xfrm>
-          <a:prstGeom prst="rect">
-            <a:avLst/>
-          </a:prstGeom>
-          <a:noFill/>
-        </p:spPr>
-        <p:txBody>
-          <a:bodyPr wrap="square" lIns="0" rIns="0" tIns="0" bIns="0">
-            <a:spAutoFit/>
-          </a:bodyPr>
-          <a:lstStyle/>
-          <a:p>
-            <a:pPr>
-              <a:defRPr sz="1050" b="0" i="0">
+            <a:off x="9217152" y="4572000"/>
+            <a:ext cx="1280160" cy="320040"/>
+          </a:xfrm>
+          <a:prstGeom prst="rect">
+            <a:avLst/>
+          </a:prstGeom>
+          <a:noFill/>
+        </p:spPr>
+        <p:txBody>
+          <a:bodyPr wrap="square" lIns="0" rIns="0" tIns="0" bIns="0">
+            <a:spAutoFit/>
+          </a:bodyPr>
+          <a:lstStyle/>
+          <a:p>
+            <a:pPr>
+              <a:defRPr sz="1250" b="0" i="0">
                 <a:solidFill>
                   <a:srgbClr val="E56945"/>
                 </a:solidFill>
@@ -8466,22 +8466,22 @@
         </p:nvSpPr>
         <p:spPr>
           <a:xfrm>
-            <a:off x="10177272" y="4480559"/>
-            <a:ext cx="1188720" cy="274320"/>
-          </a:xfrm>
-          <a:prstGeom prst="rect">
-            <a:avLst/>
-          </a:prstGeom>
-          <a:noFill/>
-        </p:spPr>
-        <p:txBody>
-          <a:bodyPr wrap="square" lIns="0" rIns="0" tIns="0" bIns="0">
-            <a:spAutoFit/>
-          </a:bodyPr>
-          <a:lstStyle/>
-          <a:p>
-            <a:pPr>
-              <a:defRPr sz="1050" b="0" i="0">
+            <a:off x="10588752" y="4572000"/>
+            <a:ext cx="1280160" cy="320040"/>
+          </a:xfrm>
+          <a:prstGeom prst="rect">
+            <a:avLst/>
+          </a:prstGeom>
+          <a:noFill/>
+        </p:spPr>
+        <p:txBody>
+          <a:bodyPr wrap="square" lIns="0" rIns="0" tIns="0" bIns="0">
+            <a:spAutoFit/>
+          </a:bodyPr>
+          <a:lstStyle/>
+          <a:p>
+            <a:pPr>
+              <a:defRPr sz="1250" b="0" i="0">
                 <a:solidFill>
                   <a:srgbClr val="E56945"/>
                 </a:solidFill>
@@ -8502,22 +8502,22 @@
         </p:nvSpPr>
         <p:spPr>
           <a:xfrm>
-            <a:off x="6382512" y="4892040"/>
-            <a:ext cx="1280160" cy="274320"/>
-          </a:xfrm>
-          <a:prstGeom prst="rect">
-            <a:avLst/>
-          </a:prstGeom>
-          <a:noFill/>
-        </p:spPr>
-        <p:txBody>
-          <a:bodyPr wrap="square" lIns="0" rIns="0" tIns="0" bIns="0">
-            <a:spAutoFit/>
-          </a:bodyPr>
-          <a:lstStyle/>
-          <a:p>
-            <a:pPr>
-              <a:defRPr sz="1100" b="1" i="0">
+            <a:off x="6428232" y="5010912"/>
+            <a:ext cx="1280160" cy="320040"/>
+          </a:xfrm>
+          <a:prstGeom prst="rect">
+            <a:avLst/>
+          </a:prstGeom>
+          <a:noFill/>
+        </p:spPr>
+        <p:txBody>
+          <a:bodyPr wrap="square" lIns="0" rIns="0" tIns="0" bIns="0">
+            <a:spAutoFit/>
+          </a:bodyPr>
+          <a:lstStyle/>
+          <a:p>
+            <a:pPr>
+              <a:defRPr sz="1300" b="1" i="0">
                 <a:solidFill>
                   <a:srgbClr val="E56945"/>
                 </a:solidFill>
@@ -8538,22 +8538,22 @@
         </p:nvSpPr>
         <p:spPr>
           <a:xfrm>
-            <a:off x="7799832" y="4892040"/>
-            <a:ext cx="1188720" cy="274320"/>
-          </a:xfrm>
-          <a:prstGeom prst="rect">
-            <a:avLst/>
-          </a:prstGeom>
-          <a:noFill/>
-        </p:spPr>
-        <p:txBody>
-          <a:bodyPr wrap="square" lIns="0" rIns="0" tIns="0" bIns="0">
-            <a:spAutoFit/>
-          </a:bodyPr>
-          <a:lstStyle/>
-          <a:p>
-            <a:pPr>
-              <a:defRPr sz="1050" b="0" i="0">
+            <a:off x="7845552" y="5010912"/>
+            <a:ext cx="1280160" cy="320040"/>
+          </a:xfrm>
+          <a:prstGeom prst="rect">
+            <a:avLst/>
+          </a:prstGeom>
+          <a:noFill/>
+        </p:spPr>
+        <p:txBody>
+          <a:bodyPr wrap="square" lIns="0" rIns="0" tIns="0" bIns="0">
+            <a:spAutoFit/>
+          </a:bodyPr>
+          <a:lstStyle/>
+          <a:p>
+            <a:pPr>
+              <a:defRPr sz="1250" b="0" i="0">
                 <a:solidFill>
                   <a:srgbClr val="E56945"/>
                 </a:solidFill>
@@ -8574,22 +8574,22 @@
         </p:nvSpPr>
         <p:spPr>
           <a:xfrm>
-            <a:off x="8988552" y="4892040"/>
-            <a:ext cx="1188720" cy="274320"/>
-          </a:xfrm>
-          <a:prstGeom prst="rect">
-            <a:avLst/>
-          </a:prstGeom>
-          <a:noFill/>
-        </p:spPr>
-        <p:txBody>
-          <a:bodyPr wrap="square" lIns="0" rIns="0" tIns="0" bIns="0">
-            <a:spAutoFit/>
-          </a:bodyPr>
-          <a:lstStyle/>
-          <a:p>
-            <a:pPr>
-              <a:defRPr sz="1050" b="0" i="0">
+            <a:off x="9217152" y="5010912"/>
+            <a:ext cx="1280160" cy="320040"/>
+          </a:xfrm>
+          <a:prstGeom prst="rect">
+            <a:avLst/>
+          </a:prstGeom>
+          <a:noFill/>
+        </p:spPr>
+        <p:txBody>
+          <a:bodyPr wrap="square" lIns="0" rIns="0" tIns="0" bIns="0">
+            <a:spAutoFit/>
+          </a:bodyPr>
+          <a:lstStyle/>
+          <a:p>
+            <a:pPr>
+              <a:defRPr sz="1250" b="0" i="0">
                 <a:solidFill>
                   <a:srgbClr val="E56945"/>
                 </a:solidFill>
@@ -8610,22 +8610,22 @@
         </p:nvSpPr>
         <p:spPr>
           <a:xfrm>
-            <a:off x="10177272" y="4892040"/>
-            <a:ext cx="1188720" cy="274320"/>
-          </a:xfrm>
-          <a:prstGeom prst="rect">
-            <a:avLst/>
-          </a:prstGeom>
-          <a:noFill/>
-        </p:spPr>
-        <p:txBody>
-          <a:bodyPr wrap="square" lIns="0" rIns="0" tIns="0" bIns="0">
-            <a:spAutoFit/>
-          </a:bodyPr>
-          <a:lstStyle/>
-          <a:p>
-            <a:pPr>
-              <a:defRPr sz="1050" b="0" i="0">
+            <a:off x="10588752" y="5010912"/>
+            <a:ext cx="1280160" cy="320040"/>
+          </a:xfrm>
+          <a:prstGeom prst="rect">
+            <a:avLst/>
+          </a:prstGeom>
+          <a:noFill/>
+        </p:spPr>
+        <p:txBody>
+          <a:bodyPr wrap="square" lIns="0" rIns="0" tIns="0" bIns="0">
+            <a:spAutoFit/>
+          </a:bodyPr>
+          <a:lstStyle/>
+          <a:p>
+            <a:pPr>
+              <a:defRPr sz="1250" b="0" i="0">
                 <a:solidFill>
                   <a:srgbClr val="E56945"/>
                 </a:solidFill>
@@ -8646,22 +8646,22 @@
         </p:nvSpPr>
         <p:spPr>
           <a:xfrm>
-            <a:off x="6382512" y="5303520"/>
-            <a:ext cx="1280160" cy="274320"/>
-          </a:xfrm>
-          <a:prstGeom prst="rect">
-            <a:avLst/>
-          </a:prstGeom>
-          <a:noFill/>
-        </p:spPr>
-        <p:txBody>
-          <a:bodyPr wrap="square" lIns="0" rIns="0" tIns="0" bIns="0">
-            <a:spAutoFit/>
-          </a:bodyPr>
-          <a:lstStyle/>
-          <a:p>
-            <a:pPr>
-              <a:defRPr sz="1100" b="1" i="0">
+            <a:off x="6428232" y="5449824"/>
+            <a:ext cx="1280160" cy="320040"/>
+          </a:xfrm>
+          <a:prstGeom prst="rect">
+            <a:avLst/>
+          </a:prstGeom>
+          <a:noFill/>
+        </p:spPr>
+        <p:txBody>
+          <a:bodyPr wrap="square" lIns="0" rIns="0" tIns="0" bIns="0">
+            <a:spAutoFit/>
+          </a:bodyPr>
+          <a:lstStyle/>
+          <a:p>
+            <a:pPr>
+              <a:defRPr sz="1300" b="1" i="0">
                 <a:solidFill>
                   <a:srgbClr val="1D7E7E"/>
                 </a:solidFill>
@@ -8682,22 +8682,22 @@
         </p:nvSpPr>
         <p:spPr>
           <a:xfrm>
-            <a:off x="7799832" y="5303520"/>
-            <a:ext cx="1188720" cy="274320"/>
-          </a:xfrm>
-          <a:prstGeom prst="rect">
-            <a:avLst/>
-          </a:prstGeom>
-          <a:noFill/>
-        </p:spPr>
-        <p:txBody>
-          <a:bodyPr wrap="square" lIns="0" rIns="0" tIns="0" bIns="0">
-            <a:spAutoFit/>
-          </a:bodyPr>
-          <a:lstStyle/>
-          <a:p>
-            <a:pPr>
-              <a:defRPr sz="1050" b="0" i="0">
+            <a:off x="7845552" y="5449824"/>
+            <a:ext cx="1280160" cy="320040"/>
+          </a:xfrm>
+          <a:prstGeom prst="rect">
+            <a:avLst/>
+          </a:prstGeom>
+          <a:noFill/>
+        </p:spPr>
+        <p:txBody>
+          <a:bodyPr wrap="square" lIns="0" rIns="0" tIns="0" bIns="0">
+            <a:spAutoFit/>
+          </a:bodyPr>
+          <a:lstStyle/>
+          <a:p>
+            <a:pPr>
+              <a:defRPr sz="1250" b="0" i="0">
                 <a:solidFill>
                   <a:srgbClr val="1D7E7E"/>
                 </a:solidFill>
@@ -8718,22 +8718,22 @@
         </p:nvSpPr>
         <p:spPr>
           <a:xfrm>
-            <a:off x="8988552" y="5303520"/>
-            <a:ext cx="1188720" cy="274320"/>
-          </a:xfrm>
-          <a:prstGeom prst="rect">
-            <a:avLst/>
-          </a:prstGeom>
-          <a:noFill/>
-        </p:spPr>
-        <p:txBody>
-          <a:bodyPr wrap="square" lIns="0" rIns="0" tIns="0" bIns="0">
-            <a:spAutoFit/>
-          </a:bodyPr>
-          <a:lstStyle/>
-          <a:p>
-            <a:pPr>
-              <a:defRPr sz="1050" b="0" i="0">
+            <a:off x="9217152" y="5449824"/>
+            <a:ext cx="1280160" cy="320040"/>
+          </a:xfrm>
+          <a:prstGeom prst="rect">
+            <a:avLst/>
+          </a:prstGeom>
+          <a:noFill/>
+        </p:spPr>
+        <p:txBody>
+          <a:bodyPr wrap="square" lIns="0" rIns="0" tIns="0" bIns="0">
+            <a:spAutoFit/>
+          </a:bodyPr>
+          <a:lstStyle/>
+          <a:p>
+            <a:pPr>
+              <a:defRPr sz="1250" b="0" i="0">
                 <a:solidFill>
                   <a:srgbClr val="1D7E7E"/>
                 </a:solidFill>
@@ -8754,22 +8754,22 @@
         </p:nvSpPr>
         <p:spPr>
           <a:xfrm>
-            <a:off x="10177272" y="5303520"/>
-            <a:ext cx="1188720" cy="274320"/>
-          </a:xfrm>
-          <a:prstGeom prst="rect">
-            <a:avLst/>
-          </a:prstGeom>
-          <a:noFill/>
-        </p:spPr>
-        <p:txBody>
-          <a:bodyPr wrap="square" lIns="0" rIns="0" tIns="0" bIns="0">
-            <a:spAutoFit/>
-          </a:bodyPr>
-          <a:lstStyle/>
-          <a:p>
-            <a:pPr>
-              <a:defRPr sz="1050" b="0" i="0">
+            <a:off x="10588752" y="5449824"/>
+            <a:ext cx="1280160" cy="320040"/>
+          </a:xfrm>
+          <a:prstGeom prst="rect">
+            <a:avLst/>
+          </a:prstGeom>
+          <a:noFill/>
+        </p:spPr>
+        <p:txBody>
+          <a:bodyPr wrap="square" lIns="0" rIns="0" tIns="0" bIns="0">
+            <a:spAutoFit/>
+          </a:bodyPr>
+          <a:lstStyle/>
+          <a:p>
+            <a:pPr>
+              <a:defRPr sz="1250" b="0" i="0">
                 <a:solidFill>
                   <a:srgbClr val="1D7E7E"/>
                 </a:solidFill>
@@ -17726,7 +17726,7 @@
         </p:nvSpPr>
         <p:spPr>
           <a:xfrm>
-            <a:off x="457200" y="4709160"/>
+            <a:off x="457200" y="4663440"/>
             <a:ext cx="11247120" cy="365760"/>
           </a:xfrm>
           <a:prstGeom prst="rect">
@@ -17741,7 +17741,7 @@
           <a:lstStyle/>
           <a:p>
             <a:pPr>
-              <a:defRPr sz="1200" b="1" i="0">
+              <a:defRPr sz="1400" b="1" i="0">
                 <a:solidFill>
                   <a:srgbClr val="0F2540"/>
                 </a:solidFill>
@@ -17762,8 +17762,8 @@
         </p:nvSpPr>
         <p:spPr>
           <a:xfrm>
-            <a:off x="457200" y="5074920"/>
-            <a:ext cx="6400800" cy="1280160"/>
+            <a:off x="457200" y="5029200"/>
+            <a:ext cx="6583680" cy="1417320"/>
           </a:xfrm>
           <a:prstGeom prst="rect">
             <a:avLst/>
@@ -17807,83 +17807,548 @@
         </p:nvSpPr>
         <p:spPr>
           <a:xfrm>
-            <a:off x="640080" y="5166359"/>
-            <a:ext cx="6035040" cy="1097280"/>
-          </a:xfrm>
-          <a:prstGeom prst="rect">
-            <a:avLst/>
-          </a:prstGeom>
-          <a:noFill/>
-        </p:spPr>
-        <p:txBody>
-          <a:bodyPr wrap="square">
-            <a:spAutoFit/>
-          </a:bodyPr>
-          <a:lstStyle/>
-          <a:p>
-            <a:pPr>
-              <a:defRPr sz="1100">
+            <a:off x="731520" y="5120640"/>
+            <a:ext cx="3200400" cy="274320"/>
+          </a:xfrm>
+          <a:prstGeom prst="rect">
+            <a:avLst/>
+          </a:prstGeom>
+          <a:noFill/>
+        </p:spPr>
+        <p:txBody>
+          <a:bodyPr wrap="square" lIns="0" rIns="0" tIns="0" bIns="0">
+            <a:spAutoFit/>
+          </a:bodyPr>
+          <a:lstStyle/>
+          <a:p>
+            <a:pPr>
+              <a:defRPr sz="1100" b="1" i="0">
+                <a:solidFill>
+                  <a:srgbClr val="1D7E7E"/>
+                </a:solidFill>
+                <a:latin typeface="Calibri"/>
+              </a:defRPr>
+            </a:pPr>
+            <a:r>
+              <a:t>Setting</a:t>
+            </a:r>
+          </a:p>
+        </p:txBody>
+      </p:sp>
+      <p:sp>
+        <p:nvSpPr>
+          <p:cNvPr id="16" name="TextBox 15"/>
+          <p:cNvSpPr txBox="1"/>
+          <p:nvPr/>
+        </p:nvSpPr>
+        <p:spPr>
+          <a:xfrm>
+            <a:off x="4114800" y="5120640"/>
+            <a:ext cx="1280160" cy="274320"/>
+          </a:xfrm>
+          <a:prstGeom prst="rect">
+            <a:avLst/>
+          </a:prstGeom>
+          <a:noFill/>
+        </p:spPr>
+        <p:txBody>
+          <a:bodyPr wrap="square" lIns="0" rIns="0" tIns="0" bIns="0">
+            <a:spAutoFit/>
+          </a:bodyPr>
+          <a:lstStyle/>
+          <a:p>
+            <a:pPr algn="ctr">
+              <a:defRPr sz="1100" b="1" i="0">
+                <a:solidFill>
+                  <a:srgbClr val="1D7E7E"/>
+                </a:solidFill>
+                <a:latin typeface="Calibri"/>
+              </a:defRPr>
+            </a:pPr>
+            <a:r>
+              <a:t>Baseline</a:t>
+            </a:r>
+          </a:p>
+        </p:txBody>
+      </p:sp>
+      <p:sp>
+        <p:nvSpPr>
+          <p:cNvPr id="17" name="TextBox 16"/>
+          <p:cNvSpPr txBox="1"/>
+          <p:nvPr/>
+        </p:nvSpPr>
+        <p:spPr>
+          <a:xfrm>
+            <a:off x="5486400" y="5120640"/>
+            <a:ext cx="1280160" cy="274320"/>
+          </a:xfrm>
+          <a:prstGeom prst="rect">
+            <a:avLst/>
+          </a:prstGeom>
+          <a:noFill/>
+        </p:spPr>
+        <p:txBody>
+          <a:bodyPr wrap="square" lIns="0" rIns="0" tIns="0" bIns="0">
+            <a:spAutoFit/>
+          </a:bodyPr>
+          <a:lstStyle/>
+          <a:p>
+            <a:pPr algn="ctr">
+              <a:defRPr sz="1100" b="1" i="0">
+                <a:solidFill>
+                  <a:srgbClr val="1D7E7E"/>
+                </a:solidFill>
+                <a:latin typeface="Calibri"/>
+              </a:defRPr>
+            </a:pPr>
+            <a:r>
+              <a:t>+ MP-Init</a:t>
+            </a:r>
+          </a:p>
+        </p:txBody>
+      </p:sp>
+      <p:sp>
+        <p:nvSpPr>
+          <p:cNvPr id="18" name="TextBox 17"/>
+          <p:cNvSpPr txBox="1"/>
+          <p:nvPr/>
+        </p:nvSpPr>
+        <p:spPr>
+          <a:xfrm>
+            <a:off x="731520" y="5440680"/>
+            <a:ext cx="3200400" cy="228600"/>
+          </a:xfrm>
+          <a:prstGeom prst="rect">
+            <a:avLst/>
+          </a:prstGeom>
+          <a:noFill/>
+        </p:spPr>
+        <p:txBody>
+          <a:bodyPr wrap="square" lIns="0" rIns="0" tIns="0" bIns="0">
+            <a:spAutoFit/>
+          </a:bodyPr>
+          <a:lstStyle/>
+          <a:p>
+            <a:pPr>
+              <a:defRPr sz="1100" b="0" i="0">
                 <a:solidFill>
                   <a:srgbClr val="1A1A1A"/>
                 </a:solidFill>
-                <a:latin typeface="Consolas"/>
-              </a:defRPr>
-            </a:pPr>
-            <a:r>
-              <a:t>CIFAR-100, T=4   tdBN            75.55  →  76.09</a:t>
-            </a:r>
-          </a:p>
-          <a:p>
-            <a:pPr>
-              <a:defRPr sz="1100">
+                <a:latin typeface="Calibri"/>
+              </a:defRPr>
+            </a:pPr>
+            <a:r>
+              <a:t>CIFAR-100  ·  T=4  ·  tdBN</a:t>
+            </a:r>
+          </a:p>
+        </p:txBody>
+      </p:sp>
+      <p:sp>
+        <p:nvSpPr>
+          <p:cNvPr id="19" name="TextBox 18"/>
+          <p:cNvSpPr txBox="1"/>
+          <p:nvPr/>
+        </p:nvSpPr>
+        <p:spPr>
+          <a:xfrm>
+            <a:off x="4114800" y="5440680"/>
+            <a:ext cx="1280160" cy="228600"/>
+          </a:xfrm>
+          <a:prstGeom prst="rect">
+            <a:avLst/>
+          </a:prstGeom>
+          <a:noFill/>
+        </p:spPr>
+        <p:txBody>
+          <a:bodyPr wrap="square" lIns="0" rIns="0" tIns="0" bIns="0">
+            <a:spAutoFit/>
+          </a:bodyPr>
+          <a:lstStyle/>
+          <a:p>
+            <a:pPr algn="ctr">
+              <a:defRPr sz="1100" b="0" i="0">
+                <a:solidFill>
+                  <a:srgbClr val="7A7A7A"/>
+                </a:solidFill>
+                <a:latin typeface="Calibri"/>
+              </a:defRPr>
+            </a:pPr>
+            <a:r>
+              <a:t>75.55</a:t>
+            </a:r>
+          </a:p>
+        </p:txBody>
+      </p:sp>
+      <p:sp>
+        <p:nvSpPr>
+          <p:cNvPr id="20" name="TextBox 19"/>
+          <p:cNvSpPr txBox="1"/>
+          <p:nvPr/>
+        </p:nvSpPr>
+        <p:spPr>
+          <a:xfrm>
+            <a:off x="5486400" y="5440680"/>
+            <a:ext cx="1280160" cy="228600"/>
+          </a:xfrm>
+          <a:prstGeom prst="rect">
+            <a:avLst/>
+          </a:prstGeom>
+          <a:noFill/>
+        </p:spPr>
+        <p:txBody>
+          <a:bodyPr wrap="square" lIns="0" rIns="0" tIns="0" bIns="0">
+            <a:spAutoFit/>
+          </a:bodyPr>
+          <a:lstStyle/>
+          <a:p>
+            <a:pPr algn="ctr">
+              <a:defRPr sz="1100" b="1" i="0">
+                <a:solidFill>
+                  <a:srgbClr val="1D7E7E"/>
+                </a:solidFill>
+                <a:latin typeface="Calibri"/>
+              </a:defRPr>
+            </a:pPr>
+            <a:r>
+              <a:t>76.09</a:t>
+            </a:r>
+          </a:p>
+        </p:txBody>
+      </p:sp>
+      <p:sp>
+        <p:nvSpPr>
+          <p:cNvPr id="21" name="TextBox 20"/>
+          <p:cNvSpPr txBox="1"/>
+          <p:nvPr/>
+        </p:nvSpPr>
+        <p:spPr>
+          <a:xfrm>
+            <a:off x="731520" y="5678424"/>
+            <a:ext cx="3200400" cy="228600"/>
+          </a:xfrm>
+          <a:prstGeom prst="rect">
+            <a:avLst/>
+          </a:prstGeom>
+          <a:noFill/>
+        </p:spPr>
+        <p:txBody>
+          <a:bodyPr wrap="square" lIns="0" rIns="0" tIns="0" bIns="0">
+            <a:spAutoFit/>
+          </a:bodyPr>
+          <a:lstStyle/>
+          <a:p>
+            <a:pPr>
+              <a:defRPr sz="1100" b="0" i="0">
                 <a:solidFill>
                   <a:srgbClr val="1A1A1A"/>
                 </a:solidFill>
-                <a:latin typeface="Consolas"/>
-              </a:defRPr>
-            </a:pPr>
-            <a:r>
-              <a:t>                 TEBN            75.96  →  76.45</a:t>
-            </a:r>
-          </a:p>
-          <a:p>
-            <a:pPr>
-              <a:defRPr sz="1100">
+                <a:latin typeface="Calibri"/>
+              </a:defRPr>
+            </a:pPr>
+            <a:r>
+              <a:t>CIFAR-100  ·  T=4  ·  TEBN</a:t>
+            </a:r>
+          </a:p>
+        </p:txBody>
+      </p:sp>
+      <p:sp>
+        <p:nvSpPr>
+          <p:cNvPr id="22" name="TextBox 21"/>
+          <p:cNvSpPr txBox="1"/>
+          <p:nvPr/>
+        </p:nvSpPr>
+        <p:spPr>
+          <a:xfrm>
+            <a:off x="4114800" y="5678424"/>
+            <a:ext cx="1280160" cy="228600"/>
+          </a:xfrm>
+          <a:prstGeom prst="rect">
+            <a:avLst/>
+          </a:prstGeom>
+          <a:noFill/>
+        </p:spPr>
+        <p:txBody>
+          <a:bodyPr wrap="square" lIns="0" rIns="0" tIns="0" bIns="0">
+            <a:spAutoFit/>
+          </a:bodyPr>
+          <a:lstStyle/>
+          <a:p>
+            <a:pPr algn="ctr">
+              <a:defRPr sz="1100" b="0" i="0">
+                <a:solidFill>
+                  <a:srgbClr val="7A7A7A"/>
+                </a:solidFill>
+                <a:latin typeface="Calibri"/>
+              </a:defRPr>
+            </a:pPr>
+            <a:r>
+              <a:t>75.96</a:t>
+            </a:r>
+          </a:p>
+        </p:txBody>
+      </p:sp>
+      <p:sp>
+        <p:nvSpPr>
+          <p:cNvPr id="23" name="TextBox 22"/>
+          <p:cNvSpPr txBox="1"/>
+          <p:nvPr/>
+        </p:nvSpPr>
+        <p:spPr>
+          <a:xfrm>
+            <a:off x="5486400" y="5678424"/>
+            <a:ext cx="1280160" cy="228600"/>
+          </a:xfrm>
+          <a:prstGeom prst="rect">
+            <a:avLst/>
+          </a:prstGeom>
+          <a:noFill/>
+        </p:spPr>
+        <p:txBody>
+          <a:bodyPr wrap="square" lIns="0" rIns="0" tIns="0" bIns="0">
+            <a:spAutoFit/>
+          </a:bodyPr>
+          <a:lstStyle/>
+          <a:p>
+            <a:pPr algn="ctr">
+              <a:defRPr sz="1100" b="1" i="0">
+                <a:solidFill>
+                  <a:srgbClr val="1D7E7E"/>
+                </a:solidFill>
+                <a:latin typeface="Calibri"/>
+              </a:defRPr>
+            </a:pPr>
+            <a:r>
+              <a:t>76.45</a:t>
+            </a:r>
+          </a:p>
+        </p:txBody>
+      </p:sp>
+      <p:sp>
+        <p:nvSpPr>
+          <p:cNvPr id="24" name="TextBox 23"/>
+          <p:cNvSpPr txBox="1"/>
+          <p:nvPr/>
+        </p:nvSpPr>
+        <p:spPr>
+          <a:xfrm>
+            <a:off x="731520" y="5916168"/>
+            <a:ext cx="3200400" cy="228600"/>
+          </a:xfrm>
+          <a:prstGeom prst="rect">
+            <a:avLst/>
+          </a:prstGeom>
+          <a:noFill/>
+        </p:spPr>
+        <p:txBody>
+          <a:bodyPr wrap="square" lIns="0" rIns="0" tIns="0" bIns="0">
+            <a:spAutoFit/>
+          </a:bodyPr>
+          <a:lstStyle/>
+          <a:p>
+            <a:pPr>
+              <a:defRPr sz="1100" b="0" i="0">
                 <a:solidFill>
                   <a:srgbClr val="1A1A1A"/>
                 </a:solidFill>
-                <a:latin typeface="Consolas"/>
-              </a:defRPr>
-            </a:pPr>
-            <a:r>
-              <a:t>                 TAB             76.25  →  77.24</a:t>
-            </a:r>
-          </a:p>
-          <a:p>
-            <a:pPr>
-              <a:defRPr sz="1100">
+                <a:latin typeface="Calibri"/>
+              </a:defRPr>
+            </a:pPr>
+            <a:r>
+              <a:t>CIFAR-100  ·  T=4  ·  TAB</a:t>
+            </a:r>
+          </a:p>
+        </p:txBody>
+      </p:sp>
+      <p:sp>
+        <p:nvSpPr>
+          <p:cNvPr id="25" name="TextBox 24"/>
+          <p:cNvSpPr txBox="1"/>
+          <p:nvPr/>
+        </p:nvSpPr>
+        <p:spPr>
+          <a:xfrm>
+            <a:off x="4114800" y="5916168"/>
+            <a:ext cx="1280160" cy="228600"/>
+          </a:xfrm>
+          <a:prstGeom prst="rect">
+            <a:avLst/>
+          </a:prstGeom>
+          <a:noFill/>
+        </p:spPr>
+        <p:txBody>
+          <a:bodyPr wrap="square" lIns="0" rIns="0" tIns="0" bIns="0">
+            <a:spAutoFit/>
+          </a:bodyPr>
+          <a:lstStyle/>
+          <a:p>
+            <a:pPr algn="ctr">
+              <a:defRPr sz="1100" b="0" i="0">
+                <a:solidFill>
+                  <a:srgbClr val="7A7A7A"/>
+                </a:solidFill>
+                <a:latin typeface="Calibri"/>
+              </a:defRPr>
+            </a:pPr>
+            <a:r>
+              <a:t>76.25</a:t>
+            </a:r>
+          </a:p>
+        </p:txBody>
+      </p:sp>
+      <p:sp>
+        <p:nvSpPr>
+          <p:cNvPr id="26" name="TextBox 25"/>
+          <p:cNvSpPr txBox="1"/>
+          <p:nvPr/>
+        </p:nvSpPr>
+        <p:spPr>
+          <a:xfrm>
+            <a:off x="5486400" y="5916168"/>
+            <a:ext cx="1280160" cy="228600"/>
+          </a:xfrm>
+          <a:prstGeom prst="rect">
+            <a:avLst/>
+          </a:prstGeom>
+          <a:noFill/>
+        </p:spPr>
+        <p:txBody>
+          <a:bodyPr wrap="square" lIns="0" rIns="0" tIns="0" bIns="0">
+            <a:spAutoFit/>
+          </a:bodyPr>
+          <a:lstStyle/>
+          <a:p>
+            <a:pPr algn="ctr">
+              <a:defRPr sz="1100" b="1" i="0">
+                <a:solidFill>
+                  <a:srgbClr val="1D7E7E"/>
+                </a:solidFill>
+                <a:latin typeface="Calibri"/>
+              </a:defRPr>
+            </a:pPr>
+            <a:r>
+              <a:t>77.24</a:t>
+            </a:r>
+          </a:p>
+        </p:txBody>
+      </p:sp>
+      <p:sp>
+        <p:nvSpPr>
+          <p:cNvPr id="27" name="TextBox 26"/>
+          <p:cNvSpPr txBox="1"/>
+          <p:nvPr/>
+        </p:nvSpPr>
+        <p:spPr>
+          <a:xfrm>
+            <a:off x="731520" y="6153912"/>
+            <a:ext cx="3200400" cy="228600"/>
+          </a:xfrm>
+          <a:prstGeom prst="rect">
+            <a:avLst/>
+          </a:prstGeom>
+          <a:noFill/>
+        </p:spPr>
+        <p:txBody>
+          <a:bodyPr wrap="square" lIns="0" rIns="0" tIns="0" bIns="0">
+            <a:spAutoFit/>
+          </a:bodyPr>
+          <a:lstStyle/>
+          <a:p>
+            <a:pPr>
+              <a:defRPr sz="1100" b="0" i="0">
                 <a:solidFill>
                   <a:srgbClr val="1A1A1A"/>
                 </a:solidFill>
-                <a:latin typeface="Consolas"/>
-              </a:defRPr>
-            </a:pPr>
-            <a:r>
-              <a:t>DVS-CIFAR10, T=10  tdBN          76.60  →  77.37</a:t>
-            </a:r>
-          </a:p>
-        </p:txBody>
-      </p:sp>
-      <p:sp>
-        <p:nvSpPr>
-          <p:cNvPr id="16" name="Rectangle 15"/>
+                <a:latin typeface="Calibri"/>
+              </a:defRPr>
+            </a:pPr>
+            <a:r>
+              <a:t>DVS-CIFAR10  ·  T=10  ·  tdBN</a:t>
+            </a:r>
+          </a:p>
+        </p:txBody>
+      </p:sp>
+      <p:sp>
+        <p:nvSpPr>
+          <p:cNvPr id="28" name="TextBox 27"/>
+          <p:cNvSpPr txBox="1"/>
+          <p:nvPr/>
+        </p:nvSpPr>
+        <p:spPr>
+          <a:xfrm>
+            <a:off x="4114800" y="6153912"/>
+            <a:ext cx="1280160" cy="228600"/>
+          </a:xfrm>
+          <a:prstGeom prst="rect">
+            <a:avLst/>
+          </a:prstGeom>
+          <a:noFill/>
+        </p:spPr>
+        <p:txBody>
+          <a:bodyPr wrap="square" lIns="0" rIns="0" tIns="0" bIns="0">
+            <a:spAutoFit/>
+          </a:bodyPr>
+          <a:lstStyle/>
+          <a:p>
+            <a:pPr algn="ctr">
+              <a:defRPr sz="1100" b="0" i="0">
+                <a:solidFill>
+                  <a:srgbClr val="7A7A7A"/>
+                </a:solidFill>
+                <a:latin typeface="Calibri"/>
+              </a:defRPr>
+            </a:pPr>
+            <a:r>
+              <a:t>76.60</a:t>
+            </a:r>
+          </a:p>
+        </p:txBody>
+      </p:sp>
+      <p:sp>
+        <p:nvSpPr>
+          <p:cNvPr id="29" name="TextBox 28"/>
+          <p:cNvSpPr txBox="1"/>
+          <p:nvPr/>
+        </p:nvSpPr>
+        <p:spPr>
+          <a:xfrm>
+            <a:off x="5486400" y="6153912"/>
+            <a:ext cx="1280160" cy="228600"/>
+          </a:xfrm>
+          <a:prstGeom prst="rect">
+            <a:avLst/>
+          </a:prstGeom>
+          <a:noFill/>
+        </p:spPr>
+        <p:txBody>
+          <a:bodyPr wrap="square" lIns="0" rIns="0" tIns="0" bIns="0">
+            <a:spAutoFit/>
+          </a:bodyPr>
+          <a:lstStyle/>
+          <a:p>
+            <a:pPr algn="ctr">
+              <a:defRPr sz="1100" b="1" i="0">
+                <a:solidFill>
+                  <a:srgbClr val="1D7E7E"/>
+                </a:solidFill>
+                <a:latin typeface="Calibri"/>
+              </a:defRPr>
+            </a:pPr>
+            <a:r>
+              <a:t>77.37</a:t>
+            </a:r>
+          </a:p>
+        </p:txBody>
+      </p:sp>
+      <p:sp>
+        <p:nvSpPr>
+          <p:cNvPr id="30" name="Rectangle 29"/>
           <p:cNvSpPr/>
           <p:nvPr/>
         </p:nvSpPr>
         <p:spPr>
           <a:xfrm>
-            <a:off x="7132320" y="5074920"/>
-            <a:ext cx="4572000" cy="1280160"/>
+            <a:off x="7315200" y="5029200"/>
+            <a:ext cx="4434840" cy="1417320"/>
           </a:xfrm>
           <a:prstGeom prst="rect">
             <a:avLst/>
@@ -17921,13 +18386,13 @@
       </p:sp>
       <p:sp>
         <p:nvSpPr>
-          <p:cNvPr id="17" name="TextBox 16"/>
-          <p:cNvSpPr txBox="1"/>
-          <p:nvPr/>
-        </p:nvSpPr>
-        <p:spPr>
-          <a:xfrm>
-            <a:off x="7360920" y="5166360"/>
+          <p:cNvPr id="31" name="TextBox 30"/>
+          <p:cNvSpPr txBox="1"/>
+          <p:nvPr/>
+        </p:nvSpPr>
+        <p:spPr>
+          <a:xfrm>
+            <a:off x="7543800" y="5166360"/>
             <a:ext cx="4114800" cy="502920"/>
           </a:xfrm>
           <a:prstGeom prst="rect">
@@ -17942,7 +18407,7 @@
           <a:lstStyle/>
           <a:p>
             <a:pPr>
-              <a:defRPr sz="2200" b="1" i="0">
+              <a:defRPr sz="2400" b="1" i="0">
                 <a:solidFill>
                   <a:srgbClr val="0F2540"/>
                 </a:solidFill>
@@ -17957,14 +18422,14 @@
       </p:sp>
       <p:sp>
         <p:nvSpPr>
-          <p:cNvPr id="18" name="TextBox 17"/>
-          <p:cNvSpPr txBox="1"/>
-          <p:nvPr/>
-        </p:nvSpPr>
-        <p:spPr>
-          <a:xfrm>
-            <a:off x="7360920" y="5669280"/>
-            <a:ext cx="4114800" cy="594360"/>
+          <p:cNvPr id="32" name="TextBox 31"/>
+          <p:cNvSpPr txBox="1"/>
+          <p:nvPr/>
+        </p:nvSpPr>
+        <p:spPr>
+          <a:xfrm>
+            <a:off x="7543800" y="5715000"/>
+            <a:ext cx="4114800" cy="640080"/>
           </a:xfrm>
           <a:prstGeom prst="rect">
             <a:avLst/>
@@ -17997,7 +18462,7 @@
       </p:sp>
       <p:sp>
         <p:nvSpPr>
-          <p:cNvPr id="19" name="TextBox 18"/>
+          <p:cNvPr id="33" name="TextBox 32"/>
           <p:cNvSpPr txBox="1"/>
           <p:nvPr/>
         </p:nvSpPr>
@@ -18033,7 +18498,7 @@
       </p:sp>
       <p:sp>
         <p:nvSpPr>
-          <p:cNvPr id="20" name="TextBox 19"/>
+          <p:cNvPr id="34" name="TextBox 33"/>
           <p:cNvSpPr txBox="1"/>
           <p:nvPr/>
         </p:nvSpPr>

--- a/Hyunho_Kook_Master_Defense.pptx
+++ b/Hyunho_Kook_Master_Defense.pptx
@@ -3705,7 +3705,7 @@
         <p:spPr>
           <a:xfrm>
             <a:off x="457200" y="2194560"/>
-            <a:ext cx="54864" cy="640080"/>
+            <a:ext cx="54864" cy="502920"/>
           </a:xfrm>
           <a:prstGeom prst="rect">
             <a:avLst/>
@@ -3748,7 +3748,7 @@
         <p:spPr>
           <a:xfrm>
             <a:off x="512064" y="2194560"/>
-            <a:ext cx="11192256" cy="640080"/>
+            <a:ext cx="11192256" cy="502920"/>
           </a:xfrm>
           <a:prstGeom prst="rect">
             <a:avLst/>
@@ -3791,7 +3791,7 @@
         <p:spPr>
           <a:xfrm>
             <a:off x="777240" y="2331720"/>
-            <a:ext cx="10789920" cy="365759"/>
+            <a:ext cx="10789920" cy="228600"/>
           </a:xfrm>
           <a:prstGeom prst="rect">
             <a:avLst/>
@@ -3813,23 +3813,7 @@
               </a:defRPr>
             </a:pPr>
             <a:r>
-              <a:t>Recap — Surrogate Gradient (SG)</a:t>
-            </a:r>
-          </a:p>
-          <a:p>
-            <a:pPr>
-              <a:spcBef>
-                <a:spcPts val="600"/>
-              </a:spcBef>
-              <a:defRPr sz="1100">
-                <a:solidFill>
-                  <a:srgbClr val="1A1A1A"/>
-                </a:solidFill>
-                <a:latin typeface="Calibri"/>
-              </a:defRPr>
-            </a:pPr>
-            <a:r>
-              <a:t>Spike S = H(x) is non-differentiable.  In backward pass, replace H' with a smooth f'(x).  The choice of x is what differs below.</a:t>
+              <a:t>Recap — Surrogate Gradient: replace H'(x) with smooth f'(x).  Choice of x differs below.</a:t>
             </a:r>
           </a:p>
         </p:txBody>
@@ -3842,8 +3826,8 @@
         </p:nvSpPr>
         <p:spPr>
           <a:xfrm>
-            <a:off x="457200" y="3017520"/>
-            <a:ext cx="5486400" cy="1188720"/>
+            <a:off x="457200" y="2880360"/>
+            <a:ext cx="4754880" cy="1508760"/>
           </a:xfrm>
           <a:prstGeom prst="rect">
             <a:avLst/>
@@ -3887,8 +3871,8 @@
         </p:nvSpPr>
         <p:spPr>
           <a:xfrm>
-            <a:off x="640080" y="3108960"/>
-            <a:ext cx="5120640" cy="320040"/>
+            <a:off x="640080" y="2971800"/>
+            <a:ext cx="4389120" cy="320040"/>
           </a:xfrm>
           <a:prstGeom prst="rect">
             <a:avLst/>
@@ -3923,8 +3907,8 @@
         </p:nvSpPr>
         <p:spPr>
           <a:xfrm>
-            <a:off x="640080" y="3429000"/>
-            <a:ext cx="5120640" cy="411480"/>
+            <a:off x="640080" y="3337560"/>
+            <a:ext cx="4389120" cy="457200"/>
           </a:xfrm>
           <a:prstGeom prst="rect">
             <a:avLst/>
@@ -3959,30 +3943,30 @@
         </p:nvSpPr>
         <p:spPr>
           <a:xfrm>
-            <a:off x="640080" y="3886200"/>
-            <a:ext cx="5120640" cy="274320"/>
-          </a:xfrm>
-          <a:prstGeom prst="rect">
-            <a:avLst/>
-          </a:prstGeom>
-          <a:noFill/>
-        </p:spPr>
-        <p:txBody>
-          <a:bodyPr wrap="square" lIns="0" rIns="0" tIns="0" bIns="0">
-            <a:spAutoFit/>
-          </a:bodyPr>
-          <a:lstStyle/>
-          <a:p>
-            <a:pPr>
-              <a:defRPr sz="1000" b="0" i="1">
-                <a:solidFill>
-                  <a:srgbClr val="7A7A7A"/>
-                </a:solidFill>
-                <a:latin typeface="Calibri"/>
-              </a:defRPr>
-            </a:pPr>
-            <a:r>
-              <a:t>Used by tdBN, TET, PLIF, LTMD, …</a:t>
+            <a:off x="640080" y="3931920"/>
+            <a:ext cx="4389120" cy="365760"/>
+          </a:xfrm>
+          <a:prstGeom prst="rect">
+            <a:avLst/>
+          </a:prstGeom>
+          <a:noFill/>
+        </p:spPr>
+        <p:txBody>
+          <a:bodyPr wrap="square" lIns="0" rIns="0" tIns="0" bIns="0">
+            <a:spAutoFit/>
+          </a:bodyPr>
+          <a:lstStyle/>
+          <a:p>
+            <a:pPr>
+              <a:defRPr sz="1100" b="0" i="1">
+                <a:solidFill>
+                  <a:srgbClr val="E56945"/>
+                </a:solidFill>
+                <a:latin typeface="Calibri"/>
+              </a:defRPr>
+            </a:pPr>
+            <a:r>
+              <a:t>Window of FIXED width γ, centered at V_thr</a:t>
             </a:r>
           </a:p>
         </p:txBody>
@@ -3995,8 +3979,8 @@
         </p:nvSpPr>
         <p:spPr>
           <a:xfrm>
-            <a:off x="6263640" y="3017520"/>
-            <a:ext cx="5486400" cy="1188720"/>
+            <a:off x="457200" y="4526280"/>
+            <a:ext cx="4754880" cy="1508760"/>
           </a:xfrm>
           <a:prstGeom prst="rect">
             <a:avLst/>
@@ -4040,8 +4024,8 @@
         </p:nvSpPr>
         <p:spPr>
           <a:xfrm>
-            <a:off x="6446520" y="3108960"/>
-            <a:ext cx="5120640" cy="320040"/>
+            <a:off x="640080" y="4617720"/>
+            <a:ext cx="4389120" cy="320040"/>
           </a:xfrm>
           <a:prstGeom prst="rect">
             <a:avLst/>
@@ -4076,8 +4060,8 @@
         </p:nvSpPr>
         <p:spPr>
           <a:xfrm>
-            <a:off x="6446520" y="3429000"/>
-            <a:ext cx="5120640" cy="411480"/>
+            <a:off x="640080" y="4983480"/>
+            <a:ext cx="4389120" cy="457200"/>
           </a:xfrm>
           <a:prstGeom prst="rect">
             <a:avLst/>
@@ -4112,22 +4096,58 @@
         </p:nvSpPr>
         <p:spPr>
           <a:xfrm>
-            <a:off x="6446520" y="3886200"/>
-            <a:ext cx="5120640" cy="274320"/>
-          </a:xfrm>
-          <a:prstGeom prst="rect">
-            <a:avLst/>
-          </a:prstGeom>
-          <a:noFill/>
-        </p:spPr>
-        <p:txBody>
-          <a:bodyPr wrap="square" lIns="0" rIns="0" tIns="0" bIns="0">
-            <a:spAutoFit/>
-          </a:bodyPr>
-          <a:lstStyle/>
-          <a:p>
-            <a:pPr>
-              <a:defRPr sz="1000" b="0" i="1">
+            <a:off x="640080" y="5577840"/>
+            <a:ext cx="4389120" cy="365760"/>
+          </a:xfrm>
+          <a:prstGeom prst="rect">
+            <a:avLst/>
+          </a:prstGeom>
+          <a:noFill/>
+        </p:spPr>
+        <p:txBody>
+          <a:bodyPr wrap="square" lIns="0" rIns="0" tIns="0" bIns="0">
+            <a:spAutoFit/>
+          </a:bodyPr>
+          <a:lstStyle/>
+          <a:p>
+            <a:pPr>
+              <a:defRPr sz="1100" b="0" i="1">
+                <a:solidFill>
+                  <a:srgbClr val="E0B85F"/>
+                </a:solidFill>
+                <a:latin typeface="Calibri"/>
+              </a:defRPr>
+            </a:pPr>
+            <a:r>
+              <a:t>Window SCALES with V_thr — but magnitude / V_thr</a:t>
+            </a:r>
+          </a:p>
+        </p:txBody>
+      </p:sp>
+      <p:sp>
+        <p:nvSpPr>
+          <p:cNvPr id="16" name="TextBox 15"/>
+          <p:cNvSpPr txBox="1"/>
+          <p:nvPr/>
+        </p:nvSpPr>
+        <p:spPr>
+          <a:xfrm>
+            <a:off x="5440680" y="2880360"/>
+            <a:ext cx="6400800" cy="274320"/>
+          </a:xfrm>
+          <a:prstGeom prst="rect">
+            <a:avLst/>
+          </a:prstGeom>
+          <a:noFill/>
+        </p:spPr>
+        <p:txBody>
+          <a:bodyPr wrap="square" lIns="0" rIns="0" tIns="0" bIns="0">
+            <a:spAutoFit/>
+          </a:bodyPr>
+          <a:lstStyle/>
+          <a:p>
+            <a:pPr algn="ctr">
+              <a:defRPr sz="1100" b="0" i="1">
                 <a:solidFill>
                   <a:srgbClr val="7A7A7A"/>
                 </a:solidFill>
@@ -4135,43 +4155,7 @@
               </a:defRPr>
             </a:pPr>
             <a:r>
-              <a:t>Used by Meng 2023, DIET-SNN</a:t>
-            </a:r>
-          </a:p>
-        </p:txBody>
-      </p:sp>
-      <p:sp>
-        <p:nvSpPr>
-          <p:cNvPr id="16" name="TextBox 15"/>
-          <p:cNvSpPr txBox="1"/>
-          <p:nvPr/>
-        </p:nvSpPr>
-        <p:spPr>
-          <a:xfrm>
-            <a:off x="457200" y="4206240"/>
-            <a:ext cx="11247120" cy="274320"/>
-          </a:xfrm>
-          <a:prstGeom prst="rect">
-            <a:avLst/>
-          </a:prstGeom>
-          <a:noFill/>
-        </p:spPr>
-        <p:txBody>
-          <a:bodyPr wrap="square" lIns="0" rIns="0" tIns="0" bIns="0">
-            <a:spAutoFit/>
-          </a:bodyPr>
-          <a:lstStyle/>
-          <a:p>
-            <a:pPr algn="ctr">
-              <a:defRPr sz="1000" b="0" i="1">
-                <a:solidFill>
-                  <a:srgbClr val="7A7A7A"/>
-                </a:solidFill>
-                <a:latin typeface="Calibri"/>
-              </a:defRPr>
-            </a:pPr>
-            <a:r>
-              <a:t>How the gradient window looks against the membrane-potential distribution</a:t>
+              <a:t>Gradient-window vs membrane distribution</a:t>
             </a:r>
           </a:p>
         </p:txBody>
@@ -4192,8 +4176,8 @@
         </p:blipFill>
         <p:spPr>
           <a:xfrm>
-            <a:off x="4297680" y="4480560"/>
-            <a:ext cx="3566160" cy="1309097"/>
+            <a:off x="5440680" y="3200400"/>
+            <a:ext cx="6400800" cy="2349661"/>
           </a:xfrm>
           <a:prstGeom prst="rect">
             <a:avLst/>
@@ -4208,7 +4192,7 @@
         </p:nvSpPr>
         <p:spPr>
           <a:xfrm>
-            <a:off x="457200" y="6035040"/>
+            <a:off x="457200" y="5989320"/>
             <a:ext cx="54864" cy="365760"/>
           </a:xfrm>
           <a:prstGeom prst="rect">
@@ -4251,7 +4235,7 @@
         </p:nvSpPr>
         <p:spPr>
           <a:xfrm>
-            <a:off x="512064" y="6035040"/>
+            <a:off x="512064" y="5989320"/>
             <a:ext cx="11192256" cy="365760"/>
           </a:xfrm>
           <a:prstGeom prst="rect">
@@ -4294,7 +4278,7 @@
         </p:nvSpPr>
         <p:spPr>
           <a:xfrm>
-            <a:off x="777240" y="6172200"/>
+            <a:off x="777240" y="6126480"/>
             <a:ext cx="10789920" cy="91440"/>
           </a:xfrm>
           <a:prstGeom prst="rect">
@@ -4317,7 +4301,7 @@
               </a:defRPr>
             </a:pPr>
             <a:r>
-              <a:t>Same when V_thr is fixed.  Once V_thr trains, AS-SG breaks one way, RS-SG the opposite.</a:t>
+              <a:t>Same when V_thr is fixed. Once V_thr trains, AS-SG and RS-SG break in opposite ways.</a:t>
             </a:r>
           </a:p>
         </p:txBody>
@@ -7477,15 +7461,15 @@
         <p:spPr>
           <a:xfrm>
             <a:off x="457200" y="3703320"/>
-            <a:ext cx="5532120" cy="2286000"/>
+            <a:ext cx="5532120" cy="2377440"/>
           </a:xfrm>
           <a:prstGeom prst="rect">
             <a:avLst/>
           </a:prstGeom>
           <a:solidFill>
-            <a:srgbClr val="F8F7F2"/>
+            <a:srgbClr val="FFFFFF"/>
           </a:solidFill>
-          <a:ln w="12700">
+          <a:ln w="19050">
             <a:solidFill>
               <a:srgbClr val="0F2540"/>
             </a:solidFill>
@@ -7515,637 +7499,23 @@
       </p:sp>
       <p:sp>
         <p:nvSpPr>
-          <p:cNvPr id="19" name="TextBox 18"/>
-          <p:cNvSpPr txBox="1"/>
-          <p:nvPr/>
-        </p:nvSpPr>
-        <p:spPr>
-          <a:xfrm>
-            <a:off x="640080" y="3794759"/>
-            <a:ext cx="5303520" cy="320040"/>
-          </a:xfrm>
-          <a:prstGeom prst="rect">
-            <a:avLst/>
-          </a:prstGeom>
-          <a:noFill/>
-        </p:spPr>
-        <p:txBody>
-          <a:bodyPr wrap="square" lIns="0" rIns="0" tIns="0" bIns="0">
-            <a:spAutoFit/>
-          </a:bodyPr>
-          <a:lstStyle/>
-          <a:p>
-            <a:pPr>
-              <a:defRPr sz="1300" b="1" i="0">
-                <a:solidFill>
-                  <a:srgbClr val="0F2540"/>
-                </a:solidFill>
-                <a:latin typeface="Calibri"/>
-              </a:defRPr>
-            </a:pPr>
-            <a:r>
-              <a:t>V_thr = 0.1   (small threshold)</a:t>
-            </a:r>
-          </a:p>
-        </p:txBody>
-      </p:sp>
-      <p:sp>
-        <p:nvSpPr>
-          <p:cNvPr id="20" name="TextBox 19"/>
-          <p:cNvSpPr txBox="1"/>
-          <p:nvPr/>
-        </p:nvSpPr>
-        <p:spPr>
-          <a:xfrm>
-            <a:off x="685800" y="4206240"/>
-            <a:ext cx="1280160" cy="274320"/>
-          </a:xfrm>
-          <a:prstGeom prst="rect">
-            <a:avLst/>
-          </a:prstGeom>
-          <a:noFill/>
-        </p:spPr>
-        <p:txBody>
-          <a:bodyPr wrap="square" lIns="0" rIns="0" tIns="0" bIns="0">
-            <a:spAutoFit/>
-          </a:bodyPr>
-          <a:lstStyle/>
-          <a:p>
-            <a:pPr>
-              <a:defRPr sz="1100" b="1" i="0">
-                <a:solidFill>
-                  <a:srgbClr val="1D7E7E"/>
-                </a:solidFill>
-                <a:latin typeface="Calibri"/>
-              </a:defRPr>
-            </a:pPr>
-            <a:r>
-              <a:t>SG</a:t>
-            </a:r>
-          </a:p>
-        </p:txBody>
-      </p:sp>
-      <p:sp>
-        <p:nvSpPr>
-          <p:cNvPr id="21" name="TextBox 20"/>
-          <p:cNvSpPr txBox="1"/>
-          <p:nvPr/>
-        </p:nvSpPr>
-        <p:spPr>
-          <a:xfrm>
-            <a:off x="2103120" y="4206240"/>
-            <a:ext cx="1280160" cy="274320"/>
-          </a:xfrm>
-          <a:prstGeom prst="rect">
-            <a:avLst/>
-          </a:prstGeom>
-          <a:noFill/>
-        </p:spPr>
-        <p:txBody>
-          <a:bodyPr wrap="square" lIns="0" rIns="0" tIns="0" bIns="0">
-            <a:spAutoFit/>
-          </a:bodyPr>
-          <a:lstStyle/>
-          <a:p>
-            <a:pPr>
-              <a:defRPr sz="1100" b="1" i="0">
-                <a:solidFill>
-                  <a:srgbClr val="1D7E7E"/>
-                </a:solidFill>
-                <a:latin typeface="Calibri"/>
-              </a:defRPr>
-            </a:pPr>
-            <a:r>
-              <a:t>AbsStr</a:t>
-            </a:r>
-          </a:p>
-        </p:txBody>
-      </p:sp>
-      <p:sp>
-        <p:nvSpPr>
-          <p:cNvPr id="22" name="TextBox 21"/>
-          <p:cNvSpPr txBox="1"/>
-          <p:nvPr/>
-        </p:nvSpPr>
-        <p:spPr>
-          <a:xfrm>
-            <a:off x="3474720" y="4206240"/>
-            <a:ext cx="1280160" cy="274320"/>
-          </a:xfrm>
-          <a:prstGeom prst="rect">
-            <a:avLst/>
-          </a:prstGeom>
-          <a:noFill/>
-        </p:spPr>
-        <p:txBody>
-          <a:bodyPr wrap="square" lIns="0" rIns="0" tIns="0" bIns="0">
-            <a:spAutoFit/>
-          </a:bodyPr>
-          <a:lstStyle/>
-          <a:p>
-            <a:pPr>
-              <a:defRPr sz="1100" b="1" i="0">
-                <a:solidFill>
-                  <a:srgbClr val="1D7E7E"/>
-                </a:solidFill>
-                <a:latin typeface="Calibri"/>
-              </a:defRPr>
-            </a:pPr>
-            <a:r>
-              <a:t>RatioAG</a:t>
-            </a:r>
-          </a:p>
-        </p:txBody>
-      </p:sp>
-      <p:sp>
-        <p:nvSpPr>
-          <p:cNvPr id="23" name="TextBox 22"/>
-          <p:cNvSpPr txBox="1"/>
-          <p:nvPr/>
-        </p:nvSpPr>
-        <p:spPr>
-          <a:xfrm>
-            <a:off x="4846320" y="4206240"/>
-            <a:ext cx="1280160" cy="274320"/>
-          </a:xfrm>
-          <a:prstGeom prst="rect">
-            <a:avLst/>
-          </a:prstGeom>
-          <a:noFill/>
-        </p:spPr>
-        <p:txBody>
-          <a:bodyPr wrap="square" lIns="0" rIns="0" tIns="0" bIns="0">
-            <a:spAutoFit/>
-          </a:bodyPr>
-          <a:lstStyle/>
-          <a:p>
-            <a:pPr>
-              <a:defRPr sz="1100" b="1" i="0">
-                <a:solidFill>
-                  <a:srgbClr val="1D7E7E"/>
-                </a:solidFill>
-                <a:latin typeface="Calibri"/>
-              </a:defRPr>
-            </a:pPr>
-            <a:r>
-              <a:t>GradCV</a:t>
-            </a:r>
-          </a:p>
-        </p:txBody>
-      </p:sp>
-      <p:sp>
-        <p:nvSpPr>
-          <p:cNvPr id="24" name="TextBox 23"/>
-          <p:cNvSpPr txBox="1"/>
-          <p:nvPr/>
-        </p:nvSpPr>
-        <p:spPr>
-          <a:xfrm>
-            <a:off x="685800" y="4572000"/>
-            <a:ext cx="1280160" cy="320040"/>
-          </a:xfrm>
-          <a:prstGeom prst="rect">
-            <a:avLst/>
-          </a:prstGeom>
-          <a:noFill/>
-        </p:spPr>
-        <p:txBody>
-          <a:bodyPr wrap="square" lIns="0" rIns="0" tIns="0" bIns="0">
-            <a:spAutoFit/>
-          </a:bodyPr>
-          <a:lstStyle/>
-          <a:p>
-            <a:pPr>
-              <a:defRPr sz="1300" b="1" i="0">
-                <a:solidFill>
-                  <a:srgbClr val="E56945"/>
-                </a:solidFill>
-                <a:latin typeface="Calibri"/>
-              </a:defRPr>
-            </a:pPr>
-            <a:r>
-              <a:t>AS-SG</a:t>
-            </a:r>
-          </a:p>
-        </p:txBody>
-      </p:sp>
-      <p:sp>
-        <p:nvSpPr>
-          <p:cNvPr id="25" name="TextBox 24"/>
-          <p:cNvSpPr txBox="1"/>
-          <p:nvPr/>
-        </p:nvSpPr>
-        <p:spPr>
-          <a:xfrm>
-            <a:off x="2103120" y="4572000"/>
-            <a:ext cx="1280160" cy="320040"/>
-          </a:xfrm>
-          <a:prstGeom prst="rect">
-            <a:avLst/>
-          </a:prstGeom>
-          <a:noFill/>
-        </p:spPr>
-        <p:txBody>
-          <a:bodyPr wrap="square" lIns="0" rIns="0" tIns="0" bIns="0">
-            <a:spAutoFit/>
-          </a:bodyPr>
-          <a:lstStyle/>
-          <a:p>
-            <a:pPr>
-              <a:defRPr sz="1250" b="0" i="0">
-                <a:solidFill>
-                  <a:srgbClr val="E56945"/>
-                </a:solidFill>
-                <a:latin typeface="Consolas"/>
-              </a:defRPr>
-            </a:pPr>
-            <a:r>
-              <a:t>0.0145</a:t>
-            </a:r>
-          </a:p>
-        </p:txBody>
-      </p:sp>
-      <p:sp>
-        <p:nvSpPr>
-          <p:cNvPr id="26" name="TextBox 25"/>
-          <p:cNvSpPr txBox="1"/>
-          <p:nvPr/>
-        </p:nvSpPr>
-        <p:spPr>
-          <a:xfrm>
-            <a:off x="3474720" y="4572000"/>
-            <a:ext cx="1280160" cy="320040"/>
-          </a:xfrm>
-          <a:prstGeom prst="rect">
-            <a:avLst/>
-          </a:prstGeom>
-          <a:noFill/>
-        </p:spPr>
-        <p:txBody>
-          <a:bodyPr wrap="square" lIns="0" rIns="0" tIns="0" bIns="0">
-            <a:spAutoFit/>
-          </a:bodyPr>
-          <a:lstStyle/>
-          <a:p>
-            <a:pPr>
-              <a:defRPr sz="1250" b="0" i="0">
-                <a:solidFill>
-                  <a:srgbClr val="E56945"/>
-                </a:solidFill>
-                <a:latin typeface="Consolas"/>
-              </a:defRPr>
-            </a:pPr>
-            <a:r>
-              <a:t>90.20%</a:t>
-            </a:r>
-          </a:p>
-        </p:txBody>
-      </p:sp>
-      <p:sp>
-        <p:nvSpPr>
-          <p:cNvPr id="27" name="TextBox 26"/>
-          <p:cNvSpPr txBox="1"/>
-          <p:nvPr/>
-        </p:nvSpPr>
-        <p:spPr>
-          <a:xfrm>
-            <a:off x="4846320" y="4572000"/>
-            <a:ext cx="1280160" cy="320040"/>
-          </a:xfrm>
-          <a:prstGeom prst="rect">
-            <a:avLst/>
-          </a:prstGeom>
-          <a:noFill/>
-        </p:spPr>
-        <p:txBody>
-          <a:bodyPr wrap="square" lIns="0" rIns="0" tIns="0" bIns="0">
-            <a:spAutoFit/>
-          </a:bodyPr>
-          <a:lstStyle/>
-          <a:p>
-            <a:pPr>
-              <a:defRPr sz="1250" b="0" i="0">
-                <a:solidFill>
-                  <a:srgbClr val="E56945"/>
-                </a:solidFill>
-                <a:latin typeface="Consolas"/>
-              </a:defRPr>
-            </a:pPr>
-            <a:r>
-              <a:t>1.22</a:t>
-            </a:r>
-          </a:p>
-        </p:txBody>
-      </p:sp>
-      <p:sp>
-        <p:nvSpPr>
-          <p:cNvPr id="28" name="TextBox 27"/>
-          <p:cNvSpPr txBox="1"/>
-          <p:nvPr/>
-        </p:nvSpPr>
-        <p:spPr>
-          <a:xfrm>
-            <a:off x="685800" y="5010912"/>
-            <a:ext cx="1280160" cy="320040"/>
-          </a:xfrm>
-          <a:prstGeom prst="rect">
-            <a:avLst/>
-          </a:prstGeom>
-          <a:noFill/>
-        </p:spPr>
-        <p:txBody>
-          <a:bodyPr wrap="square" lIns="0" rIns="0" tIns="0" bIns="0">
-            <a:spAutoFit/>
-          </a:bodyPr>
-          <a:lstStyle/>
-          <a:p>
-            <a:pPr>
-              <a:defRPr sz="1300" b="1" i="0">
-                <a:solidFill>
-                  <a:srgbClr val="E56945"/>
-                </a:solidFill>
-                <a:latin typeface="Calibri"/>
-              </a:defRPr>
-            </a:pPr>
-            <a:r>
-              <a:t>RS-SG</a:t>
-            </a:r>
-          </a:p>
-        </p:txBody>
-      </p:sp>
-      <p:sp>
-        <p:nvSpPr>
-          <p:cNvPr id="29" name="TextBox 28"/>
-          <p:cNvSpPr txBox="1"/>
-          <p:nvPr/>
-        </p:nvSpPr>
-        <p:spPr>
-          <a:xfrm>
-            <a:off x="2103120" y="5010912"/>
-            <a:ext cx="1280160" cy="320040"/>
-          </a:xfrm>
-          <a:prstGeom prst="rect">
-            <a:avLst/>
-          </a:prstGeom>
-          <a:noFill/>
-        </p:spPr>
-        <p:txBody>
-          <a:bodyPr wrap="square" lIns="0" rIns="0" tIns="0" bIns="0">
-            <a:spAutoFit/>
-          </a:bodyPr>
-          <a:lstStyle/>
-          <a:p>
-            <a:pPr>
-              <a:defRPr sz="1250" b="0" i="0">
-                <a:solidFill>
-                  <a:srgbClr val="E56945"/>
-                </a:solidFill>
-                <a:latin typeface="Consolas"/>
-              </a:defRPr>
-            </a:pPr>
-            <a:r>
-              <a:t>NaN</a:t>
-            </a:r>
-          </a:p>
-        </p:txBody>
-      </p:sp>
-      <p:sp>
-        <p:nvSpPr>
-          <p:cNvPr id="30" name="TextBox 29"/>
-          <p:cNvSpPr txBox="1"/>
-          <p:nvPr/>
-        </p:nvSpPr>
-        <p:spPr>
-          <a:xfrm>
-            <a:off x="3474720" y="5010912"/>
-            <a:ext cx="1280160" cy="320040"/>
-          </a:xfrm>
-          <a:prstGeom prst="rect">
-            <a:avLst/>
-          </a:prstGeom>
-          <a:noFill/>
-        </p:spPr>
-        <p:txBody>
-          <a:bodyPr wrap="square" lIns="0" rIns="0" tIns="0" bIns="0">
-            <a:spAutoFit/>
-          </a:bodyPr>
-          <a:lstStyle/>
-          <a:p>
-            <a:pPr>
-              <a:defRPr sz="1250" b="0" i="0">
-                <a:solidFill>
-                  <a:srgbClr val="E56945"/>
-                </a:solidFill>
-                <a:latin typeface="Consolas"/>
-              </a:defRPr>
-            </a:pPr>
-            <a:r>
-              <a:t>0.00%</a:t>
-            </a:r>
-          </a:p>
-        </p:txBody>
-      </p:sp>
-      <p:sp>
-        <p:nvSpPr>
-          <p:cNvPr id="31" name="TextBox 30"/>
-          <p:cNvSpPr txBox="1"/>
-          <p:nvPr/>
-        </p:nvSpPr>
-        <p:spPr>
-          <a:xfrm>
-            <a:off x="4846320" y="5010912"/>
-            <a:ext cx="1280160" cy="320040"/>
-          </a:xfrm>
-          <a:prstGeom prst="rect">
-            <a:avLst/>
-          </a:prstGeom>
-          <a:noFill/>
-        </p:spPr>
-        <p:txBody>
-          <a:bodyPr wrap="square" lIns="0" rIns="0" tIns="0" bIns="0">
-            <a:spAutoFit/>
-          </a:bodyPr>
-          <a:lstStyle/>
-          <a:p>
-            <a:pPr>
-              <a:defRPr sz="1250" b="0" i="0">
-                <a:solidFill>
-                  <a:srgbClr val="E56945"/>
-                </a:solidFill>
-                <a:latin typeface="Consolas"/>
-              </a:defRPr>
-            </a:pPr>
-            <a:r>
-              <a:t>NaN</a:t>
-            </a:r>
-          </a:p>
-        </p:txBody>
-      </p:sp>
-      <p:sp>
-        <p:nvSpPr>
-          <p:cNvPr id="32" name="TextBox 31"/>
-          <p:cNvSpPr txBox="1"/>
-          <p:nvPr/>
-        </p:nvSpPr>
-        <p:spPr>
-          <a:xfrm>
-            <a:off x="685800" y="5449824"/>
-            <a:ext cx="1280160" cy="320040"/>
-          </a:xfrm>
-          <a:prstGeom prst="rect">
-            <a:avLst/>
-          </a:prstGeom>
-          <a:noFill/>
-        </p:spPr>
-        <p:txBody>
-          <a:bodyPr wrap="square" lIns="0" rIns="0" tIns="0" bIns="0">
-            <a:spAutoFit/>
-          </a:bodyPr>
-          <a:lstStyle/>
-          <a:p>
-            <a:pPr>
-              <a:defRPr sz="1300" b="1" i="0">
-                <a:solidFill>
-                  <a:srgbClr val="1D7E7E"/>
-                </a:solidFill>
-                <a:latin typeface="Calibri"/>
-              </a:defRPr>
-            </a:pPr>
-            <a:r>
-              <a:t>TrSG</a:t>
-            </a:r>
-          </a:p>
-        </p:txBody>
-      </p:sp>
-      <p:sp>
-        <p:nvSpPr>
-          <p:cNvPr id="33" name="TextBox 32"/>
-          <p:cNvSpPr txBox="1"/>
-          <p:nvPr/>
-        </p:nvSpPr>
-        <p:spPr>
-          <a:xfrm>
-            <a:off x="2103120" y="5449824"/>
-            <a:ext cx="1280160" cy="320040"/>
-          </a:xfrm>
-          <a:prstGeom prst="rect">
-            <a:avLst/>
-          </a:prstGeom>
-          <a:noFill/>
-        </p:spPr>
-        <p:txBody>
-          <a:bodyPr wrap="square" lIns="0" rIns="0" tIns="0" bIns="0">
-            <a:spAutoFit/>
-          </a:bodyPr>
-          <a:lstStyle/>
-          <a:p>
-            <a:pPr>
-              <a:defRPr sz="1250" b="0" i="0">
-                <a:solidFill>
-                  <a:srgbClr val="1D7E7E"/>
-                </a:solidFill>
-                <a:latin typeface="Consolas"/>
-              </a:defRPr>
-            </a:pPr>
-            <a:r>
-              <a:t>0.0153</a:t>
-            </a:r>
-          </a:p>
-        </p:txBody>
-      </p:sp>
-      <p:sp>
-        <p:nvSpPr>
-          <p:cNvPr id="34" name="TextBox 33"/>
-          <p:cNvSpPr txBox="1"/>
-          <p:nvPr/>
-        </p:nvSpPr>
-        <p:spPr>
-          <a:xfrm>
-            <a:off x="3474720" y="5449824"/>
-            <a:ext cx="1280160" cy="320040"/>
-          </a:xfrm>
-          <a:prstGeom prst="rect">
-            <a:avLst/>
-          </a:prstGeom>
-          <a:noFill/>
-        </p:spPr>
-        <p:txBody>
-          <a:bodyPr wrap="square" lIns="0" rIns="0" tIns="0" bIns="0">
-            <a:spAutoFit/>
-          </a:bodyPr>
-          <a:lstStyle/>
-          <a:p>
-            <a:pPr>
-              <a:defRPr sz="1250" b="0" i="0">
-                <a:solidFill>
-                  <a:srgbClr val="1D7E7E"/>
-                </a:solidFill>
-                <a:latin typeface="Consolas"/>
-              </a:defRPr>
-            </a:pPr>
-            <a:r>
-              <a:t>21.45%</a:t>
-            </a:r>
-          </a:p>
-        </p:txBody>
-      </p:sp>
-      <p:sp>
-        <p:nvSpPr>
-          <p:cNvPr id="35" name="TextBox 34"/>
-          <p:cNvSpPr txBox="1"/>
-          <p:nvPr/>
-        </p:nvSpPr>
-        <p:spPr>
-          <a:xfrm>
-            <a:off x="4846320" y="5449824"/>
-            <a:ext cx="1280160" cy="320040"/>
-          </a:xfrm>
-          <a:prstGeom prst="rect">
-            <a:avLst/>
-          </a:prstGeom>
-          <a:noFill/>
-        </p:spPr>
-        <p:txBody>
-          <a:bodyPr wrap="square" lIns="0" rIns="0" tIns="0" bIns="0">
-            <a:spAutoFit/>
-          </a:bodyPr>
-          <a:lstStyle/>
-          <a:p>
-            <a:pPr>
-              <a:defRPr sz="1250" b="0" i="0">
-                <a:solidFill>
-                  <a:srgbClr val="1D7E7E"/>
-                </a:solidFill>
-                <a:latin typeface="Consolas"/>
-              </a:defRPr>
-            </a:pPr>
-            <a:r>
-              <a:t>0.87</a:t>
-            </a:r>
-          </a:p>
-        </p:txBody>
-      </p:sp>
-      <p:sp>
-        <p:nvSpPr>
-          <p:cNvPr id="36" name="Rectangle 35"/>
+          <p:cNvPr id="19" name="Rectangle 18"/>
           <p:cNvSpPr/>
           <p:nvPr/>
         </p:nvSpPr>
         <p:spPr>
           <a:xfrm>
-            <a:off x="6199632" y="3703320"/>
-            <a:ext cx="5532120" cy="2286000"/>
+            <a:off x="457200" y="3703320"/>
+            <a:ext cx="5532120" cy="384048"/>
           </a:xfrm>
           <a:prstGeom prst="rect">
             <a:avLst/>
           </a:prstGeom>
           <a:solidFill>
-            <a:srgbClr val="F8F7F2"/>
+            <a:srgbClr val="0F2540"/>
           </a:solidFill>
-          <a:ln w="12700">
-            <a:solidFill>
-              <a:srgbClr val="0F2540"/>
-            </a:solidFill>
+          <a:ln>
+            <a:noFill/>
           </a:ln>
         </p:spPr>
         <p:style>
@@ -8172,13 +7542,842 @@
       </p:sp>
       <p:sp>
         <p:nvSpPr>
+          <p:cNvPr id="20" name="TextBox 19"/>
+          <p:cNvSpPr txBox="1"/>
+          <p:nvPr/>
+        </p:nvSpPr>
+        <p:spPr>
+          <a:xfrm>
+            <a:off x="640080" y="3758183"/>
+            <a:ext cx="5303520" cy="320040"/>
+          </a:xfrm>
+          <a:prstGeom prst="rect">
+            <a:avLst/>
+          </a:prstGeom>
+          <a:noFill/>
+        </p:spPr>
+        <p:txBody>
+          <a:bodyPr wrap="square" lIns="0" rIns="0" tIns="0" bIns="0">
+            <a:spAutoFit/>
+          </a:bodyPr>
+          <a:lstStyle/>
+          <a:p>
+            <a:pPr>
+              <a:defRPr sz="1200" b="1" i="0">
+                <a:solidFill>
+                  <a:srgbClr val="E0B85F"/>
+                </a:solidFill>
+                <a:latin typeface="Calibri"/>
+              </a:defRPr>
+            </a:pPr>
+            <a:r>
+              <a:t>V_thr = 0.1   (small threshold)</a:t>
+            </a:r>
+          </a:p>
+        </p:txBody>
+      </p:sp>
+      <p:sp>
+        <p:nvSpPr>
+          <p:cNvPr id="21" name="Rectangle 20"/>
+          <p:cNvSpPr/>
+          <p:nvPr/>
+        </p:nvSpPr>
+        <p:spPr>
+          <a:xfrm>
+            <a:off x="502920" y="4160520"/>
+            <a:ext cx="5440680" cy="365760"/>
+          </a:xfrm>
+          <a:prstGeom prst="rect">
+            <a:avLst/>
+          </a:prstGeom>
+          <a:solidFill>
+            <a:srgbClr val="E5F5F0"/>
+          </a:solidFill>
+          <a:ln>
+            <a:noFill/>
+          </a:ln>
+        </p:spPr>
+        <p:style>
+          <a:lnRef idx="1">
+            <a:schemeClr val="accent1"/>
+          </a:lnRef>
+          <a:fillRef idx="3">
+            <a:schemeClr val="accent1"/>
+          </a:fillRef>
+          <a:effectRef idx="2">
+            <a:schemeClr val="accent1"/>
+          </a:effectRef>
+          <a:fontRef idx="minor">
+            <a:schemeClr val="lt1"/>
+          </a:fontRef>
+        </p:style>
+        <p:txBody>
+          <a:bodyPr rtlCol="0" anchor="ctr"/>
+          <a:lstStyle/>
+          <a:p>
+            <a:pPr algn="ctr"/>
+          </a:p>
+        </p:txBody>
+      </p:sp>
+      <p:sp>
+        <p:nvSpPr>
+          <p:cNvPr id="22" name="TextBox 21"/>
+          <p:cNvSpPr txBox="1"/>
+          <p:nvPr/>
+        </p:nvSpPr>
+        <p:spPr>
+          <a:xfrm>
+            <a:off x="685800" y="4215383"/>
+            <a:ext cx="1280160" cy="274320"/>
+          </a:xfrm>
+          <a:prstGeom prst="rect">
+            <a:avLst/>
+          </a:prstGeom>
+          <a:noFill/>
+        </p:spPr>
+        <p:txBody>
+          <a:bodyPr wrap="square" lIns="0" rIns="0" tIns="0" bIns="0">
+            <a:spAutoFit/>
+          </a:bodyPr>
+          <a:lstStyle/>
+          <a:p>
+            <a:pPr>
+              <a:defRPr sz="1100" b="1" i="0">
+                <a:solidFill>
+                  <a:srgbClr val="0F2540"/>
+                </a:solidFill>
+                <a:latin typeface="Calibri"/>
+              </a:defRPr>
+            </a:pPr>
+            <a:r>
+              <a:t>SG</a:t>
+            </a:r>
+          </a:p>
+        </p:txBody>
+      </p:sp>
+      <p:sp>
+        <p:nvSpPr>
+          <p:cNvPr id="23" name="TextBox 22"/>
+          <p:cNvSpPr txBox="1"/>
+          <p:nvPr/>
+        </p:nvSpPr>
+        <p:spPr>
+          <a:xfrm>
+            <a:off x="2103120" y="4215383"/>
+            <a:ext cx="1280160" cy="274320"/>
+          </a:xfrm>
+          <a:prstGeom prst="rect">
+            <a:avLst/>
+          </a:prstGeom>
+          <a:noFill/>
+        </p:spPr>
+        <p:txBody>
+          <a:bodyPr wrap="square" lIns="0" rIns="0" tIns="0" bIns="0">
+            <a:spAutoFit/>
+          </a:bodyPr>
+          <a:lstStyle/>
+          <a:p>
+            <a:pPr>
+              <a:defRPr sz="1100" b="1" i="0">
+                <a:solidFill>
+                  <a:srgbClr val="0F2540"/>
+                </a:solidFill>
+                <a:latin typeface="Calibri"/>
+              </a:defRPr>
+            </a:pPr>
+            <a:r>
+              <a:t>AbsStr</a:t>
+            </a:r>
+          </a:p>
+        </p:txBody>
+      </p:sp>
+      <p:sp>
+        <p:nvSpPr>
+          <p:cNvPr id="24" name="TextBox 23"/>
+          <p:cNvSpPr txBox="1"/>
+          <p:nvPr/>
+        </p:nvSpPr>
+        <p:spPr>
+          <a:xfrm>
+            <a:off x="3474720" y="4215383"/>
+            <a:ext cx="1280160" cy="274320"/>
+          </a:xfrm>
+          <a:prstGeom prst="rect">
+            <a:avLst/>
+          </a:prstGeom>
+          <a:noFill/>
+        </p:spPr>
+        <p:txBody>
+          <a:bodyPr wrap="square" lIns="0" rIns="0" tIns="0" bIns="0">
+            <a:spAutoFit/>
+          </a:bodyPr>
+          <a:lstStyle/>
+          <a:p>
+            <a:pPr>
+              <a:defRPr sz="1100" b="1" i="0">
+                <a:solidFill>
+                  <a:srgbClr val="0F2540"/>
+                </a:solidFill>
+                <a:latin typeface="Calibri"/>
+              </a:defRPr>
+            </a:pPr>
+            <a:r>
+              <a:t>RatioAG</a:t>
+            </a:r>
+          </a:p>
+        </p:txBody>
+      </p:sp>
+      <p:sp>
+        <p:nvSpPr>
+          <p:cNvPr id="25" name="TextBox 24"/>
+          <p:cNvSpPr txBox="1"/>
+          <p:nvPr/>
+        </p:nvSpPr>
+        <p:spPr>
+          <a:xfrm>
+            <a:off x="4846320" y="4215383"/>
+            <a:ext cx="1280160" cy="274320"/>
+          </a:xfrm>
+          <a:prstGeom prst="rect">
+            <a:avLst/>
+          </a:prstGeom>
+          <a:noFill/>
+        </p:spPr>
+        <p:txBody>
+          <a:bodyPr wrap="square" lIns="0" rIns="0" tIns="0" bIns="0">
+            <a:spAutoFit/>
+          </a:bodyPr>
+          <a:lstStyle/>
+          <a:p>
+            <a:pPr>
+              <a:defRPr sz="1100" b="1" i="0">
+                <a:solidFill>
+                  <a:srgbClr val="0F2540"/>
+                </a:solidFill>
+                <a:latin typeface="Calibri"/>
+              </a:defRPr>
+            </a:pPr>
+            <a:r>
+              <a:t>GradCV</a:t>
+            </a:r>
+          </a:p>
+        </p:txBody>
+      </p:sp>
+      <p:sp>
+        <p:nvSpPr>
+          <p:cNvPr id="26" name="Rectangle 25"/>
+          <p:cNvSpPr/>
+          <p:nvPr/>
+        </p:nvSpPr>
+        <p:spPr>
+          <a:xfrm>
+            <a:off x="502920" y="4526280"/>
+            <a:ext cx="5440680" cy="22860"/>
+          </a:xfrm>
+          <a:prstGeom prst="rect">
+            <a:avLst/>
+          </a:prstGeom>
+          <a:solidFill>
+            <a:srgbClr val="1D7E7E"/>
+          </a:solidFill>
+          <a:ln>
+            <a:noFill/>
+          </a:ln>
+        </p:spPr>
+        <p:style>
+          <a:lnRef idx="1">
+            <a:schemeClr val="accent1"/>
+          </a:lnRef>
+          <a:fillRef idx="3">
+            <a:schemeClr val="accent1"/>
+          </a:fillRef>
+          <a:effectRef idx="2">
+            <a:schemeClr val="accent1"/>
+          </a:effectRef>
+          <a:fontRef idx="minor">
+            <a:schemeClr val="lt1"/>
+          </a:fontRef>
+        </p:style>
+        <p:txBody>
+          <a:bodyPr rtlCol="0" anchor="ctr"/>
+          <a:lstStyle/>
+          <a:p>
+            <a:pPr algn="ctr"/>
+          </a:p>
+        </p:txBody>
+      </p:sp>
+      <p:sp>
+        <p:nvSpPr>
+          <p:cNvPr id="27" name="TextBox 26"/>
+          <p:cNvSpPr txBox="1"/>
+          <p:nvPr/>
+        </p:nvSpPr>
+        <p:spPr>
+          <a:xfrm>
+            <a:off x="685800" y="4663440"/>
+            <a:ext cx="1280160" cy="320040"/>
+          </a:xfrm>
+          <a:prstGeom prst="rect">
+            <a:avLst/>
+          </a:prstGeom>
+          <a:noFill/>
+        </p:spPr>
+        <p:txBody>
+          <a:bodyPr wrap="square" lIns="0" rIns="0" tIns="0" bIns="0">
+            <a:spAutoFit/>
+          </a:bodyPr>
+          <a:lstStyle/>
+          <a:p>
+            <a:pPr>
+              <a:defRPr sz="1300" b="1" i="0">
+                <a:solidFill>
+                  <a:srgbClr val="E56945"/>
+                </a:solidFill>
+                <a:latin typeface="Calibri"/>
+              </a:defRPr>
+            </a:pPr>
+            <a:r>
+              <a:t>AS-SG</a:t>
+            </a:r>
+          </a:p>
+        </p:txBody>
+      </p:sp>
+      <p:sp>
+        <p:nvSpPr>
+          <p:cNvPr id="28" name="TextBox 27"/>
+          <p:cNvSpPr txBox="1"/>
+          <p:nvPr/>
+        </p:nvSpPr>
+        <p:spPr>
+          <a:xfrm>
+            <a:off x="2103120" y="4663440"/>
+            <a:ext cx="1280160" cy="320040"/>
+          </a:xfrm>
+          <a:prstGeom prst="rect">
+            <a:avLst/>
+          </a:prstGeom>
+          <a:noFill/>
+        </p:spPr>
+        <p:txBody>
+          <a:bodyPr wrap="square" lIns="0" rIns="0" tIns="0" bIns="0">
+            <a:spAutoFit/>
+          </a:bodyPr>
+          <a:lstStyle/>
+          <a:p>
+            <a:pPr>
+              <a:defRPr sz="1300" b="1" i="0">
+                <a:solidFill>
+                  <a:srgbClr val="E56945"/>
+                </a:solidFill>
+                <a:latin typeface="Consolas"/>
+              </a:defRPr>
+            </a:pPr>
+            <a:r>
+              <a:t>0.0145</a:t>
+            </a:r>
+          </a:p>
+        </p:txBody>
+      </p:sp>
+      <p:sp>
+        <p:nvSpPr>
+          <p:cNvPr id="29" name="TextBox 28"/>
+          <p:cNvSpPr txBox="1"/>
+          <p:nvPr/>
+        </p:nvSpPr>
+        <p:spPr>
+          <a:xfrm>
+            <a:off x="3474720" y="4663440"/>
+            <a:ext cx="1280160" cy="320040"/>
+          </a:xfrm>
+          <a:prstGeom prst="rect">
+            <a:avLst/>
+          </a:prstGeom>
+          <a:noFill/>
+        </p:spPr>
+        <p:txBody>
+          <a:bodyPr wrap="square" lIns="0" rIns="0" tIns="0" bIns="0">
+            <a:spAutoFit/>
+          </a:bodyPr>
+          <a:lstStyle/>
+          <a:p>
+            <a:pPr>
+              <a:defRPr sz="1300" b="1" i="0">
+                <a:solidFill>
+                  <a:srgbClr val="E56945"/>
+                </a:solidFill>
+                <a:latin typeface="Consolas"/>
+              </a:defRPr>
+            </a:pPr>
+            <a:r>
+              <a:t>90.20%</a:t>
+            </a:r>
+          </a:p>
+        </p:txBody>
+      </p:sp>
+      <p:sp>
+        <p:nvSpPr>
+          <p:cNvPr id="30" name="TextBox 29"/>
+          <p:cNvSpPr txBox="1"/>
+          <p:nvPr/>
+        </p:nvSpPr>
+        <p:spPr>
+          <a:xfrm>
+            <a:off x="4846320" y="4663440"/>
+            <a:ext cx="1280160" cy="320040"/>
+          </a:xfrm>
+          <a:prstGeom prst="rect">
+            <a:avLst/>
+          </a:prstGeom>
+          <a:noFill/>
+        </p:spPr>
+        <p:txBody>
+          <a:bodyPr wrap="square" lIns="0" rIns="0" tIns="0" bIns="0">
+            <a:spAutoFit/>
+          </a:bodyPr>
+          <a:lstStyle/>
+          <a:p>
+            <a:pPr>
+              <a:defRPr sz="1300" b="1" i="0">
+                <a:solidFill>
+                  <a:srgbClr val="E56945"/>
+                </a:solidFill>
+                <a:latin typeface="Consolas"/>
+              </a:defRPr>
+            </a:pPr>
+            <a:r>
+              <a:t>1.22</a:t>
+            </a:r>
+          </a:p>
+        </p:txBody>
+      </p:sp>
+      <p:sp>
+        <p:nvSpPr>
+          <p:cNvPr id="31" name="Rectangle 30"/>
+          <p:cNvSpPr/>
+          <p:nvPr/>
+        </p:nvSpPr>
+        <p:spPr>
+          <a:xfrm>
+            <a:off x="502920" y="5029200"/>
+            <a:ext cx="5440680" cy="457200"/>
+          </a:xfrm>
+          <a:prstGeom prst="rect">
+            <a:avLst/>
+          </a:prstGeom>
+          <a:solidFill>
+            <a:srgbClr val="F8F7F2"/>
+          </a:solidFill>
+          <a:ln>
+            <a:noFill/>
+          </a:ln>
+        </p:spPr>
+        <p:style>
+          <a:lnRef idx="1">
+            <a:schemeClr val="accent1"/>
+          </a:lnRef>
+          <a:fillRef idx="3">
+            <a:schemeClr val="accent1"/>
+          </a:fillRef>
+          <a:effectRef idx="2">
+            <a:schemeClr val="accent1"/>
+          </a:effectRef>
+          <a:fontRef idx="minor">
+            <a:schemeClr val="lt1"/>
+          </a:fontRef>
+        </p:style>
+        <p:txBody>
+          <a:bodyPr rtlCol="0" anchor="ctr"/>
+          <a:lstStyle/>
+          <a:p>
+            <a:pPr algn="ctr"/>
+          </a:p>
+        </p:txBody>
+      </p:sp>
+      <p:sp>
+        <p:nvSpPr>
+          <p:cNvPr id="32" name="TextBox 31"/>
+          <p:cNvSpPr txBox="1"/>
+          <p:nvPr/>
+        </p:nvSpPr>
+        <p:spPr>
+          <a:xfrm>
+            <a:off x="685800" y="5120640"/>
+            <a:ext cx="1280160" cy="320040"/>
+          </a:xfrm>
+          <a:prstGeom prst="rect">
+            <a:avLst/>
+          </a:prstGeom>
+          <a:noFill/>
+        </p:spPr>
+        <p:txBody>
+          <a:bodyPr wrap="square" lIns="0" rIns="0" tIns="0" bIns="0">
+            <a:spAutoFit/>
+          </a:bodyPr>
+          <a:lstStyle/>
+          <a:p>
+            <a:pPr>
+              <a:defRPr sz="1300" b="1" i="0">
+                <a:solidFill>
+                  <a:srgbClr val="E56945"/>
+                </a:solidFill>
+                <a:latin typeface="Calibri"/>
+              </a:defRPr>
+            </a:pPr>
+            <a:r>
+              <a:t>RS-SG</a:t>
+            </a:r>
+          </a:p>
+        </p:txBody>
+      </p:sp>
+      <p:sp>
+        <p:nvSpPr>
+          <p:cNvPr id="33" name="TextBox 32"/>
+          <p:cNvSpPr txBox="1"/>
+          <p:nvPr/>
+        </p:nvSpPr>
+        <p:spPr>
+          <a:xfrm>
+            <a:off x="2103120" y="5120640"/>
+            <a:ext cx="1280160" cy="320040"/>
+          </a:xfrm>
+          <a:prstGeom prst="rect">
+            <a:avLst/>
+          </a:prstGeom>
+          <a:noFill/>
+        </p:spPr>
+        <p:txBody>
+          <a:bodyPr wrap="square" lIns="0" rIns="0" tIns="0" bIns="0">
+            <a:spAutoFit/>
+          </a:bodyPr>
+          <a:lstStyle/>
+          <a:p>
+            <a:pPr>
+              <a:defRPr sz="1300" b="1" i="0">
+                <a:solidFill>
+                  <a:srgbClr val="E56945"/>
+                </a:solidFill>
+                <a:latin typeface="Consolas"/>
+              </a:defRPr>
+            </a:pPr>
+            <a:r>
+              <a:t>NaN</a:t>
+            </a:r>
+          </a:p>
+        </p:txBody>
+      </p:sp>
+      <p:sp>
+        <p:nvSpPr>
+          <p:cNvPr id="34" name="TextBox 33"/>
+          <p:cNvSpPr txBox="1"/>
+          <p:nvPr/>
+        </p:nvSpPr>
+        <p:spPr>
+          <a:xfrm>
+            <a:off x="3474720" y="5120640"/>
+            <a:ext cx="1280160" cy="320040"/>
+          </a:xfrm>
+          <a:prstGeom prst="rect">
+            <a:avLst/>
+          </a:prstGeom>
+          <a:noFill/>
+        </p:spPr>
+        <p:txBody>
+          <a:bodyPr wrap="square" lIns="0" rIns="0" tIns="0" bIns="0">
+            <a:spAutoFit/>
+          </a:bodyPr>
+          <a:lstStyle/>
+          <a:p>
+            <a:pPr>
+              <a:defRPr sz="1300" b="1" i="0">
+                <a:solidFill>
+                  <a:srgbClr val="E56945"/>
+                </a:solidFill>
+                <a:latin typeface="Consolas"/>
+              </a:defRPr>
+            </a:pPr>
+            <a:r>
+              <a:t>0.00%</a:t>
+            </a:r>
+          </a:p>
+        </p:txBody>
+      </p:sp>
+      <p:sp>
+        <p:nvSpPr>
+          <p:cNvPr id="35" name="TextBox 34"/>
+          <p:cNvSpPr txBox="1"/>
+          <p:nvPr/>
+        </p:nvSpPr>
+        <p:spPr>
+          <a:xfrm>
+            <a:off x="4846320" y="5120640"/>
+            <a:ext cx="1280160" cy="320040"/>
+          </a:xfrm>
+          <a:prstGeom prst="rect">
+            <a:avLst/>
+          </a:prstGeom>
+          <a:noFill/>
+        </p:spPr>
+        <p:txBody>
+          <a:bodyPr wrap="square" lIns="0" rIns="0" tIns="0" bIns="0">
+            <a:spAutoFit/>
+          </a:bodyPr>
+          <a:lstStyle/>
+          <a:p>
+            <a:pPr>
+              <a:defRPr sz="1300" b="1" i="0">
+                <a:solidFill>
+                  <a:srgbClr val="E56945"/>
+                </a:solidFill>
+                <a:latin typeface="Consolas"/>
+              </a:defRPr>
+            </a:pPr>
+            <a:r>
+              <a:t>NaN</a:t>
+            </a:r>
+          </a:p>
+        </p:txBody>
+      </p:sp>
+      <p:sp>
+        <p:nvSpPr>
+          <p:cNvPr id="36" name="TextBox 35"/>
+          <p:cNvSpPr txBox="1"/>
+          <p:nvPr/>
+        </p:nvSpPr>
+        <p:spPr>
+          <a:xfrm>
+            <a:off x="685800" y="5577840"/>
+            <a:ext cx="1280160" cy="320040"/>
+          </a:xfrm>
+          <a:prstGeom prst="rect">
+            <a:avLst/>
+          </a:prstGeom>
+          <a:noFill/>
+        </p:spPr>
+        <p:txBody>
+          <a:bodyPr wrap="square" lIns="0" rIns="0" tIns="0" bIns="0">
+            <a:spAutoFit/>
+          </a:bodyPr>
+          <a:lstStyle/>
+          <a:p>
+            <a:pPr>
+              <a:defRPr sz="1300" b="1" i="0">
+                <a:solidFill>
+                  <a:srgbClr val="1D7E7E"/>
+                </a:solidFill>
+                <a:latin typeface="Calibri"/>
+              </a:defRPr>
+            </a:pPr>
+            <a:r>
+              <a:t>TrSG</a:t>
+            </a:r>
+          </a:p>
+        </p:txBody>
+      </p:sp>
+      <p:sp>
+        <p:nvSpPr>
           <p:cNvPr id="37" name="TextBox 36"/>
           <p:cNvSpPr txBox="1"/>
           <p:nvPr/>
         </p:nvSpPr>
         <p:spPr>
           <a:xfrm>
-            <a:off x="6382512" y="3794759"/>
+            <a:off x="2103120" y="5577840"/>
+            <a:ext cx="1280160" cy="320040"/>
+          </a:xfrm>
+          <a:prstGeom prst="rect">
+            <a:avLst/>
+          </a:prstGeom>
+          <a:noFill/>
+        </p:spPr>
+        <p:txBody>
+          <a:bodyPr wrap="square" lIns="0" rIns="0" tIns="0" bIns="0">
+            <a:spAutoFit/>
+          </a:bodyPr>
+          <a:lstStyle/>
+          <a:p>
+            <a:pPr>
+              <a:defRPr sz="1300" b="1" i="0">
+                <a:solidFill>
+                  <a:srgbClr val="1D7E7E"/>
+                </a:solidFill>
+                <a:latin typeface="Consolas"/>
+              </a:defRPr>
+            </a:pPr>
+            <a:r>
+              <a:t>0.0153</a:t>
+            </a:r>
+          </a:p>
+        </p:txBody>
+      </p:sp>
+      <p:sp>
+        <p:nvSpPr>
+          <p:cNvPr id="38" name="TextBox 37"/>
+          <p:cNvSpPr txBox="1"/>
+          <p:nvPr/>
+        </p:nvSpPr>
+        <p:spPr>
+          <a:xfrm>
+            <a:off x="3474720" y="5577840"/>
+            <a:ext cx="1280160" cy="320040"/>
+          </a:xfrm>
+          <a:prstGeom prst="rect">
+            <a:avLst/>
+          </a:prstGeom>
+          <a:noFill/>
+        </p:spPr>
+        <p:txBody>
+          <a:bodyPr wrap="square" lIns="0" rIns="0" tIns="0" bIns="0">
+            <a:spAutoFit/>
+          </a:bodyPr>
+          <a:lstStyle/>
+          <a:p>
+            <a:pPr>
+              <a:defRPr sz="1300" b="1" i="0">
+                <a:solidFill>
+                  <a:srgbClr val="1D7E7E"/>
+                </a:solidFill>
+                <a:latin typeface="Consolas"/>
+              </a:defRPr>
+            </a:pPr>
+            <a:r>
+              <a:t>21.45%</a:t>
+            </a:r>
+          </a:p>
+        </p:txBody>
+      </p:sp>
+      <p:sp>
+        <p:nvSpPr>
+          <p:cNvPr id="39" name="TextBox 38"/>
+          <p:cNvSpPr txBox="1"/>
+          <p:nvPr/>
+        </p:nvSpPr>
+        <p:spPr>
+          <a:xfrm>
+            <a:off x="4846320" y="5577840"/>
+            <a:ext cx="1280160" cy="320040"/>
+          </a:xfrm>
+          <a:prstGeom prst="rect">
+            <a:avLst/>
+          </a:prstGeom>
+          <a:noFill/>
+        </p:spPr>
+        <p:txBody>
+          <a:bodyPr wrap="square" lIns="0" rIns="0" tIns="0" bIns="0">
+            <a:spAutoFit/>
+          </a:bodyPr>
+          <a:lstStyle/>
+          <a:p>
+            <a:pPr>
+              <a:defRPr sz="1300" b="1" i="0">
+                <a:solidFill>
+                  <a:srgbClr val="1D7E7E"/>
+                </a:solidFill>
+                <a:latin typeface="Consolas"/>
+              </a:defRPr>
+            </a:pPr>
+            <a:r>
+              <a:t>0.87</a:t>
+            </a:r>
+          </a:p>
+        </p:txBody>
+      </p:sp>
+      <p:sp>
+        <p:nvSpPr>
+          <p:cNvPr id="40" name="Rectangle 39"/>
+          <p:cNvSpPr/>
+          <p:nvPr/>
+        </p:nvSpPr>
+        <p:spPr>
+          <a:xfrm>
+            <a:off x="6199632" y="3703320"/>
+            <a:ext cx="5532120" cy="2377440"/>
+          </a:xfrm>
+          <a:prstGeom prst="rect">
+            <a:avLst/>
+          </a:prstGeom>
+          <a:solidFill>
+            <a:srgbClr val="FFFFFF"/>
+          </a:solidFill>
+          <a:ln w="19050">
+            <a:solidFill>
+              <a:srgbClr val="0F2540"/>
+            </a:solidFill>
+          </a:ln>
+        </p:spPr>
+        <p:style>
+          <a:lnRef idx="1">
+            <a:schemeClr val="accent1"/>
+          </a:lnRef>
+          <a:fillRef idx="3">
+            <a:schemeClr val="accent1"/>
+          </a:fillRef>
+          <a:effectRef idx="2">
+            <a:schemeClr val="accent1"/>
+          </a:effectRef>
+          <a:fontRef idx="minor">
+            <a:schemeClr val="lt1"/>
+          </a:fontRef>
+        </p:style>
+        <p:txBody>
+          <a:bodyPr rtlCol="0" anchor="ctr"/>
+          <a:lstStyle/>
+          <a:p>
+            <a:pPr algn="ctr"/>
+          </a:p>
+        </p:txBody>
+      </p:sp>
+      <p:sp>
+        <p:nvSpPr>
+          <p:cNvPr id="41" name="Rectangle 40"/>
+          <p:cNvSpPr/>
+          <p:nvPr/>
+        </p:nvSpPr>
+        <p:spPr>
+          <a:xfrm>
+            <a:off x="6199632" y="3703320"/>
+            <a:ext cx="5532120" cy="384048"/>
+          </a:xfrm>
+          <a:prstGeom prst="rect">
+            <a:avLst/>
+          </a:prstGeom>
+          <a:solidFill>
+            <a:srgbClr val="0F2540"/>
+          </a:solidFill>
+          <a:ln>
+            <a:noFill/>
+          </a:ln>
+        </p:spPr>
+        <p:style>
+          <a:lnRef idx="1">
+            <a:schemeClr val="accent1"/>
+          </a:lnRef>
+          <a:fillRef idx="3">
+            <a:schemeClr val="accent1"/>
+          </a:fillRef>
+          <a:effectRef idx="2">
+            <a:schemeClr val="accent1"/>
+          </a:effectRef>
+          <a:fontRef idx="minor">
+            <a:schemeClr val="lt1"/>
+          </a:fontRef>
+        </p:style>
+        <p:txBody>
+          <a:bodyPr rtlCol="0" anchor="ctr"/>
+          <a:lstStyle/>
+          <a:p>
+            <a:pPr algn="ctr"/>
+          </a:p>
+        </p:txBody>
+      </p:sp>
+      <p:sp>
+        <p:nvSpPr>
+          <p:cNvPr id="42" name="TextBox 41"/>
+          <p:cNvSpPr txBox="1"/>
+          <p:nvPr/>
+        </p:nvSpPr>
+        <p:spPr>
+          <a:xfrm>
+            <a:off x="6382512" y="3758183"/>
             <a:ext cx="5303520" cy="320040"/>
           </a:xfrm>
           <a:prstGeom prst="rect">
@@ -8193,43 +8392,604 @@
           <a:lstStyle/>
           <a:p>
             <a:pPr>
+              <a:defRPr sz="1200" b="1" i="0">
+                <a:solidFill>
+                  <a:srgbClr val="E0B85F"/>
+                </a:solidFill>
+                <a:latin typeface="Calibri"/>
+              </a:defRPr>
+            </a:pPr>
+            <a:r>
+              <a:t>V_thr = 2.0   (large threshold)</a:t>
+            </a:r>
+          </a:p>
+        </p:txBody>
+      </p:sp>
+      <p:sp>
+        <p:nvSpPr>
+          <p:cNvPr id="43" name="Rectangle 42"/>
+          <p:cNvSpPr/>
+          <p:nvPr/>
+        </p:nvSpPr>
+        <p:spPr>
+          <a:xfrm>
+            <a:off x="6245352" y="4160520"/>
+            <a:ext cx="5440680" cy="365760"/>
+          </a:xfrm>
+          <a:prstGeom prst="rect">
+            <a:avLst/>
+          </a:prstGeom>
+          <a:solidFill>
+            <a:srgbClr val="E5F5F0"/>
+          </a:solidFill>
+          <a:ln>
+            <a:noFill/>
+          </a:ln>
+        </p:spPr>
+        <p:style>
+          <a:lnRef idx="1">
+            <a:schemeClr val="accent1"/>
+          </a:lnRef>
+          <a:fillRef idx="3">
+            <a:schemeClr val="accent1"/>
+          </a:fillRef>
+          <a:effectRef idx="2">
+            <a:schemeClr val="accent1"/>
+          </a:effectRef>
+          <a:fontRef idx="minor">
+            <a:schemeClr val="lt1"/>
+          </a:fontRef>
+        </p:style>
+        <p:txBody>
+          <a:bodyPr rtlCol="0" anchor="ctr"/>
+          <a:lstStyle/>
+          <a:p>
+            <a:pPr algn="ctr"/>
+          </a:p>
+        </p:txBody>
+      </p:sp>
+      <p:sp>
+        <p:nvSpPr>
+          <p:cNvPr id="44" name="TextBox 43"/>
+          <p:cNvSpPr txBox="1"/>
+          <p:nvPr/>
+        </p:nvSpPr>
+        <p:spPr>
+          <a:xfrm>
+            <a:off x="6428232" y="4215383"/>
+            <a:ext cx="1280160" cy="274320"/>
+          </a:xfrm>
+          <a:prstGeom prst="rect">
+            <a:avLst/>
+          </a:prstGeom>
+          <a:noFill/>
+        </p:spPr>
+        <p:txBody>
+          <a:bodyPr wrap="square" lIns="0" rIns="0" tIns="0" bIns="0">
+            <a:spAutoFit/>
+          </a:bodyPr>
+          <a:lstStyle/>
+          <a:p>
+            <a:pPr>
+              <a:defRPr sz="1100" b="1" i="0">
+                <a:solidFill>
+                  <a:srgbClr val="0F2540"/>
+                </a:solidFill>
+                <a:latin typeface="Calibri"/>
+              </a:defRPr>
+            </a:pPr>
+            <a:r>
+              <a:t>SG</a:t>
+            </a:r>
+          </a:p>
+        </p:txBody>
+      </p:sp>
+      <p:sp>
+        <p:nvSpPr>
+          <p:cNvPr id="45" name="TextBox 44"/>
+          <p:cNvSpPr txBox="1"/>
+          <p:nvPr/>
+        </p:nvSpPr>
+        <p:spPr>
+          <a:xfrm>
+            <a:off x="7845552" y="4215383"/>
+            <a:ext cx="1280160" cy="274320"/>
+          </a:xfrm>
+          <a:prstGeom prst="rect">
+            <a:avLst/>
+          </a:prstGeom>
+          <a:noFill/>
+        </p:spPr>
+        <p:txBody>
+          <a:bodyPr wrap="square" lIns="0" rIns="0" tIns="0" bIns="0">
+            <a:spAutoFit/>
+          </a:bodyPr>
+          <a:lstStyle/>
+          <a:p>
+            <a:pPr>
+              <a:defRPr sz="1100" b="1" i="0">
+                <a:solidFill>
+                  <a:srgbClr val="0F2540"/>
+                </a:solidFill>
+                <a:latin typeface="Calibri"/>
+              </a:defRPr>
+            </a:pPr>
+            <a:r>
+              <a:t>AbsStr</a:t>
+            </a:r>
+          </a:p>
+        </p:txBody>
+      </p:sp>
+      <p:sp>
+        <p:nvSpPr>
+          <p:cNvPr id="46" name="TextBox 45"/>
+          <p:cNvSpPr txBox="1"/>
+          <p:nvPr/>
+        </p:nvSpPr>
+        <p:spPr>
+          <a:xfrm>
+            <a:off x="9217152" y="4215383"/>
+            <a:ext cx="1280160" cy="274320"/>
+          </a:xfrm>
+          <a:prstGeom prst="rect">
+            <a:avLst/>
+          </a:prstGeom>
+          <a:noFill/>
+        </p:spPr>
+        <p:txBody>
+          <a:bodyPr wrap="square" lIns="0" rIns="0" tIns="0" bIns="0">
+            <a:spAutoFit/>
+          </a:bodyPr>
+          <a:lstStyle/>
+          <a:p>
+            <a:pPr>
+              <a:defRPr sz="1100" b="1" i="0">
+                <a:solidFill>
+                  <a:srgbClr val="0F2540"/>
+                </a:solidFill>
+                <a:latin typeface="Calibri"/>
+              </a:defRPr>
+            </a:pPr>
+            <a:r>
+              <a:t>RatioAG</a:t>
+            </a:r>
+          </a:p>
+        </p:txBody>
+      </p:sp>
+      <p:sp>
+        <p:nvSpPr>
+          <p:cNvPr id="47" name="TextBox 46"/>
+          <p:cNvSpPr txBox="1"/>
+          <p:nvPr/>
+        </p:nvSpPr>
+        <p:spPr>
+          <a:xfrm>
+            <a:off x="10588752" y="4215383"/>
+            <a:ext cx="1280160" cy="274320"/>
+          </a:xfrm>
+          <a:prstGeom prst="rect">
+            <a:avLst/>
+          </a:prstGeom>
+          <a:noFill/>
+        </p:spPr>
+        <p:txBody>
+          <a:bodyPr wrap="square" lIns="0" rIns="0" tIns="0" bIns="0">
+            <a:spAutoFit/>
+          </a:bodyPr>
+          <a:lstStyle/>
+          <a:p>
+            <a:pPr>
+              <a:defRPr sz="1100" b="1" i="0">
+                <a:solidFill>
+                  <a:srgbClr val="0F2540"/>
+                </a:solidFill>
+                <a:latin typeface="Calibri"/>
+              </a:defRPr>
+            </a:pPr>
+            <a:r>
+              <a:t>GradCV</a:t>
+            </a:r>
+          </a:p>
+        </p:txBody>
+      </p:sp>
+      <p:sp>
+        <p:nvSpPr>
+          <p:cNvPr id="48" name="Rectangle 47"/>
+          <p:cNvSpPr/>
+          <p:nvPr/>
+        </p:nvSpPr>
+        <p:spPr>
+          <a:xfrm>
+            <a:off x="6245352" y="4526280"/>
+            <a:ext cx="5440680" cy="22860"/>
+          </a:xfrm>
+          <a:prstGeom prst="rect">
+            <a:avLst/>
+          </a:prstGeom>
+          <a:solidFill>
+            <a:srgbClr val="1D7E7E"/>
+          </a:solidFill>
+          <a:ln>
+            <a:noFill/>
+          </a:ln>
+        </p:spPr>
+        <p:style>
+          <a:lnRef idx="1">
+            <a:schemeClr val="accent1"/>
+          </a:lnRef>
+          <a:fillRef idx="3">
+            <a:schemeClr val="accent1"/>
+          </a:fillRef>
+          <a:effectRef idx="2">
+            <a:schemeClr val="accent1"/>
+          </a:effectRef>
+          <a:fontRef idx="minor">
+            <a:schemeClr val="lt1"/>
+          </a:fontRef>
+        </p:style>
+        <p:txBody>
+          <a:bodyPr rtlCol="0" anchor="ctr"/>
+          <a:lstStyle/>
+          <a:p>
+            <a:pPr algn="ctr"/>
+          </a:p>
+        </p:txBody>
+      </p:sp>
+      <p:sp>
+        <p:nvSpPr>
+          <p:cNvPr id="49" name="TextBox 48"/>
+          <p:cNvSpPr txBox="1"/>
+          <p:nvPr/>
+        </p:nvSpPr>
+        <p:spPr>
+          <a:xfrm>
+            <a:off x="6428232" y="4663440"/>
+            <a:ext cx="1280160" cy="320040"/>
+          </a:xfrm>
+          <a:prstGeom prst="rect">
+            <a:avLst/>
+          </a:prstGeom>
+          <a:noFill/>
+        </p:spPr>
+        <p:txBody>
+          <a:bodyPr wrap="square" lIns="0" rIns="0" tIns="0" bIns="0">
+            <a:spAutoFit/>
+          </a:bodyPr>
+          <a:lstStyle/>
+          <a:p>
+            <a:pPr>
               <a:defRPr sz="1300" b="1" i="0">
                 <a:solidFill>
-                  <a:srgbClr val="0F2540"/>
-                </a:solidFill>
-                <a:latin typeface="Calibri"/>
-              </a:defRPr>
-            </a:pPr>
-            <a:r>
-              <a:t>V_thr = 2.0   (large threshold)</a:t>
-            </a:r>
-          </a:p>
-        </p:txBody>
-      </p:sp>
-      <p:sp>
-        <p:nvSpPr>
-          <p:cNvPr id="38" name="TextBox 37"/>
-          <p:cNvSpPr txBox="1"/>
-          <p:nvPr/>
-        </p:nvSpPr>
-        <p:spPr>
-          <a:xfrm>
-            <a:off x="6428232" y="4206240"/>
-            <a:ext cx="1280160" cy="274320"/>
-          </a:xfrm>
-          <a:prstGeom prst="rect">
-            <a:avLst/>
-          </a:prstGeom>
-          <a:noFill/>
-        </p:spPr>
-        <p:txBody>
-          <a:bodyPr wrap="square" lIns="0" rIns="0" tIns="0" bIns="0">
-            <a:spAutoFit/>
-          </a:bodyPr>
-          <a:lstStyle/>
-          <a:p>
-            <a:pPr>
-              <a:defRPr sz="1100" b="1" i="0">
+                  <a:srgbClr val="E56945"/>
+                </a:solidFill>
+                <a:latin typeface="Calibri"/>
+              </a:defRPr>
+            </a:pPr>
+            <a:r>
+              <a:t>AS-SG</a:t>
+            </a:r>
+          </a:p>
+        </p:txBody>
+      </p:sp>
+      <p:sp>
+        <p:nvSpPr>
+          <p:cNvPr id="50" name="TextBox 49"/>
+          <p:cNvSpPr txBox="1"/>
+          <p:nvPr/>
+        </p:nvSpPr>
+        <p:spPr>
+          <a:xfrm>
+            <a:off x="7845552" y="4663440"/>
+            <a:ext cx="1280160" cy="320040"/>
+          </a:xfrm>
+          <a:prstGeom prst="rect">
+            <a:avLst/>
+          </a:prstGeom>
+          <a:noFill/>
+        </p:spPr>
+        <p:txBody>
+          <a:bodyPr wrap="square" lIns="0" rIns="0" tIns="0" bIns="0">
+            <a:spAutoFit/>
+          </a:bodyPr>
+          <a:lstStyle/>
+          <a:p>
+            <a:pPr>
+              <a:defRPr sz="1300" b="1" i="0">
+                <a:solidFill>
+                  <a:srgbClr val="E56945"/>
+                </a:solidFill>
+                <a:latin typeface="Consolas"/>
+              </a:defRPr>
+            </a:pPr>
+            <a:r>
+              <a:t>0.0000</a:t>
+            </a:r>
+          </a:p>
+        </p:txBody>
+      </p:sp>
+      <p:sp>
+        <p:nvSpPr>
+          <p:cNvPr id="51" name="TextBox 50"/>
+          <p:cNvSpPr txBox="1"/>
+          <p:nvPr/>
+        </p:nvSpPr>
+        <p:spPr>
+          <a:xfrm>
+            <a:off x="9217152" y="4663440"/>
+            <a:ext cx="1280160" cy="320040"/>
+          </a:xfrm>
+          <a:prstGeom prst="rect">
+            <a:avLst/>
+          </a:prstGeom>
+          <a:noFill/>
+        </p:spPr>
+        <p:txBody>
+          <a:bodyPr wrap="square" lIns="0" rIns="0" tIns="0" bIns="0">
+            <a:spAutoFit/>
+          </a:bodyPr>
+          <a:lstStyle/>
+          <a:p>
+            <a:pPr>
+              <a:defRPr sz="1300" b="1" i="0">
+                <a:solidFill>
+                  <a:srgbClr val="E56945"/>
+                </a:solidFill>
+                <a:latin typeface="Consolas"/>
+              </a:defRPr>
+            </a:pPr>
+            <a:r>
+              <a:t>0.00%</a:t>
+            </a:r>
+          </a:p>
+        </p:txBody>
+      </p:sp>
+      <p:sp>
+        <p:nvSpPr>
+          <p:cNvPr id="52" name="TextBox 51"/>
+          <p:cNvSpPr txBox="1"/>
+          <p:nvPr/>
+        </p:nvSpPr>
+        <p:spPr>
+          <a:xfrm>
+            <a:off x="10588752" y="4663440"/>
+            <a:ext cx="1280160" cy="320040"/>
+          </a:xfrm>
+          <a:prstGeom prst="rect">
+            <a:avLst/>
+          </a:prstGeom>
+          <a:noFill/>
+        </p:spPr>
+        <p:txBody>
+          <a:bodyPr wrap="square" lIns="0" rIns="0" tIns="0" bIns="0">
+            <a:spAutoFit/>
+          </a:bodyPr>
+          <a:lstStyle/>
+          <a:p>
+            <a:pPr>
+              <a:defRPr sz="1300" b="1" i="0">
+                <a:solidFill>
+                  <a:srgbClr val="E56945"/>
+                </a:solidFill>
+                <a:latin typeface="Consolas"/>
+              </a:defRPr>
+            </a:pPr>
+            <a:r>
+              <a:t>0.000</a:t>
+            </a:r>
+          </a:p>
+        </p:txBody>
+      </p:sp>
+      <p:sp>
+        <p:nvSpPr>
+          <p:cNvPr id="53" name="Rectangle 52"/>
+          <p:cNvSpPr/>
+          <p:nvPr/>
+        </p:nvSpPr>
+        <p:spPr>
+          <a:xfrm>
+            <a:off x="6245352" y="5029200"/>
+            <a:ext cx="5440680" cy="457200"/>
+          </a:xfrm>
+          <a:prstGeom prst="rect">
+            <a:avLst/>
+          </a:prstGeom>
+          <a:solidFill>
+            <a:srgbClr val="F8F7F2"/>
+          </a:solidFill>
+          <a:ln>
+            <a:noFill/>
+          </a:ln>
+        </p:spPr>
+        <p:style>
+          <a:lnRef idx="1">
+            <a:schemeClr val="accent1"/>
+          </a:lnRef>
+          <a:fillRef idx="3">
+            <a:schemeClr val="accent1"/>
+          </a:fillRef>
+          <a:effectRef idx="2">
+            <a:schemeClr val="accent1"/>
+          </a:effectRef>
+          <a:fontRef idx="minor">
+            <a:schemeClr val="lt1"/>
+          </a:fontRef>
+        </p:style>
+        <p:txBody>
+          <a:bodyPr rtlCol="0" anchor="ctr"/>
+          <a:lstStyle/>
+          <a:p>
+            <a:pPr algn="ctr"/>
+          </a:p>
+        </p:txBody>
+      </p:sp>
+      <p:sp>
+        <p:nvSpPr>
+          <p:cNvPr id="54" name="TextBox 53"/>
+          <p:cNvSpPr txBox="1"/>
+          <p:nvPr/>
+        </p:nvSpPr>
+        <p:spPr>
+          <a:xfrm>
+            <a:off x="6428232" y="5120640"/>
+            <a:ext cx="1280160" cy="320040"/>
+          </a:xfrm>
+          <a:prstGeom prst="rect">
+            <a:avLst/>
+          </a:prstGeom>
+          <a:noFill/>
+        </p:spPr>
+        <p:txBody>
+          <a:bodyPr wrap="square" lIns="0" rIns="0" tIns="0" bIns="0">
+            <a:spAutoFit/>
+          </a:bodyPr>
+          <a:lstStyle/>
+          <a:p>
+            <a:pPr>
+              <a:defRPr sz="1300" b="1" i="0">
+                <a:solidFill>
+                  <a:srgbClr val="E56945"/>
+                </a:solidFill>
+                <a:latin typeface="Calibri"/>
+              </a:defRPr>
+            </a:pPr>
+            <a:r>
+              <a:t>RS-SG</a:t>
+            </a:r>
+          </a:p>
+        </p:txBody>
+      </p:sp>
+      <p:sp>
+        <p:nvSpPr>
+          <p:cNvPr id="55" name="TextBox 54"/>
+          <p:cNvSpPr txBox="1"/>
+          <p:nvPr/>
+        </p:nvSpPr>
+        <p:spPr>
+          <a:xfrm>
+            <a:off x="7845552" y="5120640"/>
+            <a:ext cx="1280160" cy="320040"/>
+          </a:xfrm>
+          <a:prstGeom prst="rect">
+            <a:avLst/>
+          </a:prstGeom>
+          <a:noFill/>
+        </p:spPr>
+        <p:txBody>
+          <a:bodyPr wrap="square" lIns="0" rIns="0" tIns="0" bIns="0">
+            <a:spAutoFit/>
+          </a:bodyPr>
+          <a:lstStyle/>
+          <a:p>
+            <a:pPr>
+              <a:defRPr sz="1300" b="1" i="0">
+                <a:solidFill>
+                  <a:srgbClr val="E56945"/>
+                </a:solidFill>
+                <a:latin typeface="Consolas"/>
+              </a:defRPr>
+            </a:pPr>
+            <a:r>
+              <a:t>0.0021</a:t>
+            </a:r>
+          </a:p>
+        </p:txBody>
+      </p:sp>
+      <p:sp>
+        <p:nvSpPr>
+          <p:cNvPr id="56" name="TextBox 55"/>
+          <p:cNvSpPr txBox="1"/>
+          <p:nvPr/>
+        </p:nvSpPr>
+        <p:spPr>
+          <a:xfrm>
+            <a:off x="9217152" y="5120640"/>
+            <a:ext cx="1280160" cy="320040"/>
+          </a:xfrm>
+          <a:prstGeom prst="rect">
+            <a:avLst/>
+          </a:prstGeom>
+          <a:noFill/>
+        </p:spPr>
+        <p:txBody>
+          <a:bodyPr wrap="square" lIns="0" rIns="0" tIns="0" bIns="0">
+            <a:spAutoFit/>
+          </a:bodyPr>
+          <a:lstStyle/>
+          <a:p>
+            <a:pPr>
+              <a:defRPr sz="1300" b="1" i="0">
+                <a:solidFill>
+                  <a:srgbClr val="E56945"/>
+                </a:solidFill>
+                <a:latin typeface="Consolas"/>
+              </a:defRPr>
+            </a:pPr>
+            <a:r>
+              <a:t>0.10%</a:t>
+            </a:r>
+          </a:p>
+        </p:txBody>
+      </p:sp>
+      <p:sp>
+        <p:nvSpPr>
+          <p:cNvPr id="57" name="TextBox 56"/>
+          <p:cNvSpPr txBox="1"/>
+          <p:nvPr/>
+        </p:nvSpPr>
+        <p:spPr>
+          <a:xfrm>
+            <a:off x="10588752" y="5120640"/>
+            <a:ext cx="1280160" cy="320040"/>
+          </a:xfrm>
+          <a:prstGeom prst="rect">
+            <a:avLst/>
+          </a:prstGeom>
+          <a:noFill/>
+        </p:spPr>
+        <p:txBody>
+          <a:bodyPr wrap="square" lIns="0" rIns="0" tIns="0" bIns="0">
+            <a:spAutoFit/>
+          </a:bodyPr>
+          <a:lstStyle/>
+          <a:p>
+            <a:pPr>
+              <a:defRPr sz="1300" b="1" i="0">
+                <a:solidFill>
+                  <a:srgbClr val="E56945"/>
+                </a:solidFill>
+                <a:latin typeface="Consolas"/>
+              </a:defRPr>
+            </a:pPr>
+            <a:r>
+              <a:t>2.25</a:t>
+            </a:r>
+          </a:p>
+        </p:txBody>
+      </p:sp>
+      <p:sp>
+        <p:nvSpPr>
+          <p:cNvPr id="58" name="TextBox 57"/>
+          <p:cNvSpPr txBox="1"/>
+          <p:nvPr/>
+        </p:nvSpPr>
+        <p:spPr>
+          <a:xfrm>
+            <a:off x="6428232" y="5577840"/>
+            <a:ext cx="1280160" cy="320040"/>
+          </a:xfrm>
+          <a:prstGeom prst="rect">
+            <a:avLst/>
+          </a:prstGeom>
+          <a:noFill/>
+        </p:spPr>
+        <p:txBody>
+          <a:bodyPr wrap="square" lIns="0" rIns="0" tIns="0" bIns="0">
+            <a:spAutoFit/>
+          </a:bodyPr>
+          <a:lstStyle/>
+          <a:p>
+            <a:pPr>
+              <a:defRPr sz="1300" b="1" i="0">
                 <a:solidFill>
                   <a:srgbClr val="1D7E7E"/>
                 </a:solidFill>
@@ -8237,546 +8997,114 @@
               </a:defRPr>
             </a:pPr>
             <a:r>
-              <a:t>SG</a:t>
-            </a:r>
-          </a:p>
-        </p:txBody>
-      </p:sp>
-      <p:sp>
-        <p:nvSpPr>
-          <p:cNvPr id="39" name="TextBox 38"/>
-          <p:cNvSpPr txBox="1"/>
-          <p:nvPr/>
-        </p:nvSpPr>
-        <p:spPr>
-          <a:xfrm>
-            <a:off x="7845552" y="4206240"/>
-            <a:ext cx="1280160" cy="274320"/>
-          </a:xfrm>
-          <a:prstGeom prst="rect">
-            <a:avLst/>
-          </a:prstGeom>
-          <a:noFill/>
-        </p:spPr>
-        <p:txBody>
-          <a:bodyPr wrap="square" lIns="0" rIns="0" tIns="0" bIns="0">
-            <a:spAutoFit/>
-          </a:bodyPr>
-          <a:lstStyle/>
-          <a:p>
-            <a:pPr>
-              <a:defRPr sz="1100" b="1" i="0">
+              <a:t>TrSG</a:t>
+            </a:r>
+          </a:p>
+        </p:txBody>
+      </p:sp>
+      <p:sp>
+        <p:nvSpPr>
+          <p:cNvPr id="59" name="TextBox 58"/>
+          <p:cNvSpPr txBox="1"/>
+          <p:nvPr/>
+        </p:nvSpPr>
+        <p:spPr>
+          <a:xfrm>
+            <a:off x="7845552" y="5577840"/>
+            <a:ext cx="1280160" cy="320040"/>
+          </a:xfrm>
+          <a:prstGeom prst="rect">
+            <a:avLst/>
+          </a:prstGeom>
+          <a:noFill/>
+        </p:spPr>
+        <p:txBody>
+          <a:bodyPr wrap="square" lIns="0" rIns="0" tIns="0" bIns="0">
+            <a:spAutoFit/>
+          </a:bodyPr>
+          <a:lstStyle/>
+          <a:p>
+            <a:pPr>
+              <a:defRPr sz="1300" b="1" i="0">
                 <a:solidFill>
                   <a:srgbClr val="1D7E7E"/>
                 </a:solidFill>
-                <a:latin typeface="Calibri"/>
-              </a:defRPr>
-            </a:pPr>
-            <a:r>
-              <a:t>AbsStr</a:t>
-            </a:r>
-          </a:p>
-        </p:txBody>
-      </p:sp>
-      <p:sp>
-        <p:nvSpPr>
-          <p:cNvPr id="40" name="TextBox 39"/>
-          <p:cNvSpPr txBox="1"/>
-          <p:nvPr/>
-        </p:nvSpPr>
-        <p:spPr>
-          <a:xfrm>
-            <a:off x="9217152" y="4206240"/>
-            <a:ext cx="1280160" cy="274320"/>
-          </a:xfrm>
-          <a:prstGeom prst="rect">
-            <a:avLst/>
-          </a:prstGeom>
-          <a:noFill/>
-        </p:spPr>
-        <p:txBody>
-          <a:bodyPr wrap="square" lIns="0" rIns="0" tIns="0" bIns="0">
-            <a:spAutoFit/>
-          </a:bodyPr>
-          <a:lstStyle/>
-          <a:p>
-            <a:pPr>
-              <a:defRPr sz="1100" b="1" i="0">
+                <a:latin typeface="Consolas"/>
+              </a:defRPr>
+            </a:pPr>
+            <a:r>
+              <a:t>0.0323</a:t>
+            </a:r>
+          </a:p>
+        </p:txBody>
+      </p:sp>
+      <p:sp>
+        <p:nvSpPr>
+          <p:cNvPr id="60" name="TextBox 59"/>
+          <p:cNvSpPr txBox="1"/>
+          <p:nvPr/>
+        </p:nvSpPr>
+        <p:spPr>
+          <a:xfrm>
+            <a:off x="9217152" y="5577840"/>
+            <a:ext cx="1280160" cy="320040"/>
+          </a:xfrm>
+          <a:prstGeom prst="rect">
+            <a:avLst/>
+          </a:prstGeom>
+          <a:noFill/>
+        </p:spPr>
+        <p:txBody>
+          <a:bodyPr wrap="square" lIns="0" rIns="0" tIns="0" bIns="0">
+            <a:spAutoFit/>
+          </a:bodyPr>
+          <a:lstStyle/>
+          <a:p>
+            <a:pPr>
+              <a:defRPr sz="1300" b="1" i="0">
                 <a:solidFill>
                   <a:srgbClr val="1D7E7E"/>
                 </a:solidFill>
-                <a:latin typeface="Calibri"/>
-              </a:defRPr>
-            </a:pPr>
-            <a:r>
-              <a:t>RatioAG</a:t>
-            </a:r>
-          </a:p>
-        </p:txBody>
-      </p:sp>
-      <p:sp>
-        <p:nvSpPr>
-          <p:cNvPr id="41" name="TextBox 40"/>
-          <p:cNvSpPr txBox="1"/>
-          <p:nvPr/>
-        </p:nvSpPr>
-        <p:spPr>
-          <a:xfrm>
-            <a:off x="10588752" y="4206240"/>
-            <a:ext cx="1280160" cy="274320"/>
-          </a:xfrm>
-          <a:prstGeom prst="rect">
-            <a:avLst/>
-          </a:prstGeom>
-          <a:noFill/>
-        </p:spPr>
-        <p:txBody>
-          <a:bodyPr wrap="square" lIns="0" rIns="0" tIns="0" bIns="0">
-            <a:spAutoFit/>
-          </a:bodyPr>
-          <a:lstStyle/>
-          <a:p>
-            <a:pPr>
-              <a:defRPr sz="1100" b="1" i="0">
+                <a:latin typeface="Consolas"/>
+              </a:defRPr>
+            </a:pPr>
+            <a:r>
+              <a:t>6.90%</a:t>
+            </a:r>
+          </a:p>
+        </p:txBody>
+      </p:sp>
+      <p:sp>
+        <p:nvSpPr>
+          <p:cNvPr id="61" name="TextBox 60"/>
+          <p:cNvSpPr txBox="1"/>
+          <p:nvPr/>
+        </p:nvSpPr>
+        <p:spPr>
+          <a:xfrm>
+            <a:off x="10588752" y="5577840"/>
+            <a:ext cx="1280160" cy="320040"/>
+          </a:xfrm>
+          <a:prstGeom prst="rect">
+            <a:avLst/>
+          </a:prstGeom>
+          <a:noFill/>
+        </p:spPr>
+        <p:txBody>
+          <a:bodyPr wrap="square" lIns="0" rIns="0" tIns="0" bIns="0">
+            <a:spAutoFit/>
+          </a:bodyPr>
+          <a:lstStyle/>
+          <a:p>
+            <a:pPr>
+              <a:defRPr sz="1300" b="1" i="0">
                 <a:solidFill>
                   <a:srgbClr val="1D7E7E"/>
                 </a:solidFill>
-                <a:latin typeface="Calibri"/>
-              </a:defRPr>
-            </a:pPr>
-            <a:r>
-              <a:t>GradCV</a:t>
-            </a:r>
-          </a:p>
-        </p:txBody>
-      </p:sp>
-      <p:sp>
-        <p:nvSpPr>
-          <p:cNvPr id="42" name="TextBox 41"/>
-          <p:cNvSpPr txBox="1"/>
-          <p:nvPr/>
-        </p:nvSpPr>
-        <p:spPr>
-          <a:xfrm>
-            <a:off x="6428232" y="4572000"/>
-            <a:ext cx="1280160" cy="320040"/>
-          </a:xfrm>
-          <a:prstGeom prst="rect">
-            <a:avLst/>
-          </a:prstGeom>
-          <a:noFill/>
-        </p:spPr>
-        <p:txBody>
-          <a:bodyPr wrap="square" lIns="0" rIns="0" tIns="0" bIns="0">
-            <a:spAutoFit/>
-          </a:bodyPr>
-          <a:lstStyle/>
-          <a:p>
-            <a:pPr>
-              <a:defRPr sz="1300" b="1" i="0">
-                <a:solidFill>
-                  <a:srgbClr val="E56945"/>
-                </a:solidFill>
-                <a:latin typeface="Calibri"/>
-              </a:defRPr>
-            </a:pPr>
-            <a:r>
-              <a:t>AS-SG</a:t>
-            </a:r>
-          </a:p>
-        </p:txBody>
-      </p:sp>
-      <p:sp>
-        <p:nvSpPr>
-          <p:cNvPr id="43" name="TextBox 42"/>
-          <p:cNvSpPr txBox="1"/>
-          <p:nvPr/>
-        </p:nvSpPr>
-        <p:spPr>
-          <a:xfrm>
-            <a:off x="7845552" y="4572000"/>
-            <a:ext cx="1280160" cy="320040"/>
-          </a:xfrm>
-          <a:prstGeom prst="rect">
-            <a:avLst/>
-          </a:prstGeom>
-          <a:noFill/>
-        </p:spPr>
-        <p:txBody>
-          <a:bodyPr wrap="square" lIns="0" rIns="0" tIns="0" bIns="0">
-            <a:spAutoFit/>
-          </a:bodyPr>
-          <a:lstStyle/>
-          <a:p>
-            <a:pPr>
-              <a:defRPr sz="1250" b="0" i="0">
-                <a:solidFill>
-                  <a:srgbClr val="E56945"/>
-                </a:solidFill>
                 <a:latin typeface="Consolas"/>
               </a:defRPr>
             </a:pPr>
             <a:r>
-              <a:t>0.0000</a:t>
-            </a:r>
-          </a:p>
-        </p:txBody>
-      </p:sp>
-      <p:sp>
-        <p:nvSpPr>
-          <p:cNvPr id="44" name="TextBox 43"/>
-          <p:cNvSpPr txBox="1"/>
-          <p:nvPr/>
-        </p:nvSpPr>
-        <p:spPr>
-          <a:xfrm>
-            <a:off x="9217152" y="4572000"/>
-            <a:ext cx="1280160" cy="320040"/>
-          </a:xfrm>
-          <a:prstGeom prst="rect">
-            <a:avLst/>
-          </a:prstGeom>
-          <a:noFill/>
-        </p:spPr>
-        <p:txBody>
-          <a:bodyPr wrap="square" lIns="0" rIns="0" tIns="0" bIns="0">
-            <a:spAutoFit/>
-          </a:bodyPr>
-          <a:lstStyle/>
-          <a:p>
-            <a:pPr>
-              <a:defRPr sz="1250" b="0" i="0">
-                <a:solidFill>
-                  <a:srgbClr val="E56945"/>
-                </a:solidFill>
-                <a:latin typeface="Consolas"/>
-              </a:defRPr>
-            </a:pPr>
-            <a:r>
-              <a:t>0.00%</a:t>
-            </a:r>
-          </a:p>
-        </p:txBody>
-      </p:sp>
-      <p:sp>
-        <p:nvSpPr>
-          <p:cNvPr id="45" name="TextBox 44"/>
-          <p:cNvSpPr txBox="1"/>
-          <p:nvPr/>
-        </p:nvSpPr>
-        <p:spPr>
-          <a:xfrm>
-            <a:off x="10588752" y="4572000"/>
-            <a:ext cx="1280160" cy="320040"/>
-          </a:xfrm>
-          <a:prstGeom prst="rect">
-            <a:avLst/>
-          </a:prstGeom>
-          <a:noFill/>
-        </p:spPr>
-        <p:txBody>
-          <a:bodyPr wrap="square" lIns="0" rIns="0" tIns="0" bIns="0">
-            <a:spAutoFit/>
-          </a:bodyPr>
-          <a:lstStyle/>
-          <a:p>
-            <a:pPr>
-              <a:defRPr sz="1250" b="0" i="0">
-                <a:solidFill>
-                  <a:srgbClr val="E56945"/>
-                </a:solidFill>
-                <a:latin typeface="Consolas"/>
-              </a:defRPr>
-            </a:pPr>
-            <a:r>
-              <a:t>0.000</a:t>
-            </a:r>
-          </a:p>
-        </p:txBody>
-      </p:sp>
-      <p:sp>
-        <p:nvSpPr>
-          <p:cNvPr id="46" name="TextBox 45"/>
-          <p:cNvSpPr txBox="1"/>
-          <p:nvPr/>
-        </p:nvSpPr>
-        <p:spPr>
-          <a:xfrm>
-            <a:off x="6428232" y="5010912"/>
-            <a:ext cx="1280160" cy="320040"/>
-          </a:xfrm>
-          <a:prstGeom prst="rect">
-            <a:avLst/>
-          </a:prstGeom>
-          <a:noFill/>
-        </p:spPr>
-        <p:txBody>
-          <a:bodyPr wrap="square" lIns="0" rIns="0" tIns="0" bIns="0">
-            <a:spAutoFit/>
-          </a:bodyPr>
-          <a:lstStyle/>
-          <a:p>
-            <a:pPr>
-              <a:defRPr sz="1300" b="1" i="0">
-                <a:solidFill>
-                  <a:srgbClr val="E56945"/>
-                </a:solidFill>
-                <a:latin typeface="Calibri"/>
-              </a:defRPr>
-            </a:pPr>
-            <a:r>
-              <a:t>RS-SG</a:t>
-            </a:r>
-          </a:p>
-        </p:txBody>
-      </p:sp>
-      <p:sp>
-        <p:nvSpPr>
-          <p:cNvPr id="47" name="TextBox 46"/>
-          <p:cNvSpPr txBox="1"/>
-          <p:nvPr/>
-        </p:nvSpPr>
-        <p:spPr>
-          <a:xfrm>
-            <a:off x="7845552" y="5010912"/>
-            <a:ext cx="1280160" cy="320040"/>
-          </a:xfrm>
-          <a:prstGeom prst="rect">
-            <a:avLst/>
-          </a:prstGeom>
-          <a:noFill/>
-        </p:spPr>
-        <p:txBody>
-          <a:bodyPr wrap="square" lIns="0" rIns="0" tIns="0" bIns="0">
-            <a:spAutoFit/>
-          </a:bodyPr>
-          <a:lstStyle/>
-          <a:p>
-            <a:pPr>
-              <a:defRPr sz="1250" b="0" i="0">
-                <a:solidFill>
-                  <a:srgbClr val="E56945"/>
-                </a:solidFill>
-                <a:latin typeface="Consolas"/>
-              </a:defRPr>
-            </a:pPr>
-            <a:r>
-              <a:t>0.0021</a:t>
-            </a:r>
-          </a:p>
-        </p:txBody>
-      </p:sp>
-      <p:sp>
-        <p:nvSpPr>
-          <p:cNvPr id="48" name="TextBox 47"/>
-          <p:cNvSpPr txBox="1"/>
-          <p:nvPr/>
-        </p:nvSpPr>
-        <p:spPr>
-          <a:xfrm>
-            <a:off x="9217152" y="5010912"/>
-            <a:ext cx="1280160" cy="320040"/>
-          </a:xfrm>
-          <a:prstGeom prst="rect">
-            <a:avLst/>
-          </a:prstGeom>
-          <a:noFill/>
-        </p:spPr>
-        <p:txBody>
-          <a:bodyPr wrap="square" lIns="0" rIns="0" tIns="0" bIns="0">
-            <a:spAutoFit/>
-          </a:bodyPr>
-          <a:lstStyle/>
-          <a:p>
-            <a:pPr>
-              <a:defRPr sz="1250" b="0" i="0">
-                <a:solidFill>
-                  <a:srgbClr val="E56945"/>
-                </a:solidFill>
-                <a:latin typeface="Consolas"/>
-              </a:defRPr>
-            </a:pPr>
-            <a:r>
-              <a:t>0.10%</a:t>
-            </a:r>
-          </a:p>
-        </p:txBody>
-      </p:sp>
-      <p:sp>
-        <p:nvSpPr>
-          <p:cNvPr id="49" name="TextBox 48"/>
-          <p:cNvSpPr txBox="1"/>
-          <p:nvPr/>
-        </p:nvSpPr>
-        <p:spPr>
-          <a:xfrm>
-            <a:off x="10588752" y="5010912"/>
-            <a:ext cx="1280160" cy="320040"/>
-          </a:xfrm>
-          <a:prstGeom prst="rect">
-            <a:avLst/>
-          </a:prstGeom>
-          <a:noFill/>
-        </p:spPr>
-        <p:txBody>
-          <a:bodyPr wrap="square" lIns="0" rIns="0" tIns="0" bIns="0">
-            <a:spAutoFit/>
-          </a:bodyPr>
-          <a:lstStyle/>
-          <a:p>
-            <a:pPr>
-              <a:defRPr sz="1250" b="0" i="0">
-                <a:solidFill>
-                  <a:srgbClr val="E56945"/>
-                </a:solidFill>
-                <a:latin typeface="Consolas"/>
-              </a:defRPr>
-            </a:pPr>
-            <a:r>
-              <a:t>2.25</a:t>
-            </a:r>
-          </a:p>
-        </p:txBody>
-      </p:sp>
-      <p:sp>
-        <p:nvSpPr>
-          <p:cNvPr id="50" name="TextBox 49"/>
-          <p:cNvSpPr txBox="1"/>
-          <p:nvPr/>
-        </p:nvSpPr>
-        <p:spPr>
-          <a:xfrm>
-            <a:off x="6428232" y="5449824"/>
-            <a:ext cx="1280160" cy="320040"/>
-          </a:xfrm>
-          <a:prstGeom prst="rect">
-            <a:avLst/>
-          </a:prstGeom>
-          <a:noFill/>
-        </p:spPr>
-        <p:txBody>
-          <a:bodyPr wrap="square" lIns="0" rIns="0" tIns="0" bIns="0">
-            <a:spAutoFit/>
-          </a:bodyPr>
-          <a:lstStyle/>
-          <a:p>
-            <a:pPr>
-              <a:defRPr sz="1300" b="1" i="0">
-                <a:solidFill>
-                  <a:srgbClr val="1D7E7E"/>
-                </a:solidFill>
-                <a:latin typeface="Calibri"/>
-              </a:defRPr>
-            </a:pPr>
-            <a:r>
-              <a:t>TrSG</a:t>
-            </a:r>
-          </a:p>
-        </p:txBody>
-      </p:sp>
-      <p:sp>
-        <p:nvSpPr>
-          <p:cNvPr id="51" name="TextBox 50"/>
-          <p:cNvSpPr txBox="1"/>
-          <p:nvPr/>
-        </p:nvSpPr>
-        <p:spPr>
-          <a:xfrm>
-            <a:off x="7845552" y="5449824"/>
-            <a:ext cx="1280160" cy="320040"/>
-          </a:xfrm>
-          <a:prstGeom prst="rect">
-            <a:avLst/>
-          </a:prstGeom>
-          <a:noFill/>
-        </p:spPr>
-        <p:txBody>
-          <a:bodyPr wrap="square" lIns="0" rIns="0" tIns="0" bIns="0">
-            <a:spAutoFit/>
-          </a:bodyPr>
-          <a:lstStyle/>
-          <a:p>
-            <a:pPr>
-              <a:defRPr sz="1250" b="0" i="0">
-                <a:solidFill>
-                  <a:srgbClr val="1D7E7E"/>
-                </a:solidFill>
-                <a:latin typeface="Consolas"/>
-              </a:defRPr>
-            </a:pPr>
-            <a:r>
-              <a:t>0.0323</a:t>
-            </a:r>
-          </a:p>
-        </p:txBody>
-      </p:sp>
-      <p:sp>
-        <p:nvSpPr>
-          <p:cNvPr id="52" name="TextBox 51"/>
-          <p:cNvSpPr txBox="1"/>
-          <p:nvPr/>
-        </p:nvSpPr>
-        <p:spPr>
-          <a:xfrm>
-            <a:off x="9217152" y="5449824"/>
-            <a:ext cx="1280160" cy="320040"/>
-          </a:xfrm>
-          <a:prstGeom prst="rect">
-            <a:avLst/>
-          </a:prstGeom>
-          <a:noFill/>
-        </p:spPr>
-        <p:txBody>
-          <a:bodyPr wrap="square" lIns="0" rIns="0" tIns="0" bIns="0">
-            <a:spAutoFit/>
-          </a:bodyPr>
-          <a:lstStyle/>
-          <a:p>
-            <a:pPr>
-              <a:defRPr sz="1250" b="0" i="0">
-                <a:solidFill>
-                  <a:srgbClr val="1D7E7E"/>
-                </a:solidFill>
-                <a:latin typeface="Consolas"/>
-              </a:defRPr>
-            </a:pPr>
-            <a:r>
-              <a:t>6.90%</a:t>
-            </a:r>
-          </a:p>
-        </p:txBody>
-      </p:sp>
-      <p:sp>
-        <p:nvSpPr>
-          <p:cNvPr id="53" name="TextBox 52"/>
-          <p:cNvSpPr txBox="1"/>
-          <p:nvPr/>
-        </p:nvSpPr>
-        <p:spPr>
-          <a:xfrm>
-            <a:off x="10588752" y="5449824"/>
-            <a:ext cx="1280160" cy="320040"/>
-          </a:xfrm>
-          <a:prstGeom prst="rect">
-            <a:avLst/>
-          </a:prstGeom>
-          <a:noFill/>
-        </p:spPr>
-        <p:txBody>
-          <a:bodyPr wrap="square" lIns="0" rIns="0" tIns="0" bIns="0">
-            <a:spAutoFit/>
-          </a:bodyPr>
-          <a:lstStyle/>
-          <a:p>
-            <a:pPr>
-              <a:defRPr sz="1250" b="0" i="0">
-                <a:solidFill>
-                  <a:srgbClr val="1D7E7E"/>
-                </a:solidFill>
-                <a:latin typeface="Consolas"/>
-              </a:defRPr>
-            </a:pPr>
-            <a:r>
               <a:t>0.73</a:t>
             </a:r>
           </a:p>
@@ -8784,7 +9112,7 @@
       </p:sp>
       <p:sp>
         <p:nvSpPr>
-          <p:cNvPr id="54" name="Rectangle 53"/>
+          <p:cNvPr id="62" name="Rectangle 61"/>
           <p:cNvSpPr/>
           <p:nvPr/>
         </p:nvSpPr>
@@ -8827,7 +9155,7 @@
       </p:sp>
       <p:sp>
         <p:nvSpPr>
-          <p:cNvPr id="55" name="Rectangle 54"/>
+          <p:cNvPr id="63" name="Rectangle 62"/>
           <p:cNvSpPr/>
           <p:nvPr/>
         </p:nvSpPr>
@@ -8870,7 +9198,7 @@
       </p:sp>
       <p:sp>
         <p:nvSpPr>
-          <p:cNvPr id="56" name="TextBox 55"/>
+          <p:cNvPr id="64" name="TextBox 63"/>
           <p:cNvSpPr txBox="1"/>
           <p:nvPr/>
         </p:nvSpPr>
@@ -8906,7 +9234,7 @@
       </p:sp>
       <p:sp>
         <p:nvSpPr>
-          <p:cNvPr id="57" name="TextBox 56"/>
+          <p:cNvPr id="65" name="TextBox 64"/>
           <p:cNvSpPr txBox="1"/>
           <p:nvPr/>
         </p:nvSpPr>
@@ -8942,7 +9270,7 @@
       </p:sp>
       <p:sp>
         <p:nvSpPr>
-          <p:cNvPr id="58" name="TextBox 57"/>
+          <p:cNvPr id="66" name="TextBox 65"/>
           <p:cNvSpPr txBox="1"/>
           <p:nvPr/>
         </p:nvSpPr>
@@ -14561,7 +14889,7 @@
         </p:nvSpPr>
         <p:spPr>
           <a:xfrm>
-            <a:off x="457200" y="5989320"/>
+            <a:off x="457200" y="5669280"/>
             <a:ext cx="54864" cy="411480"/>
           </a:xfrm>
           <a:prstGeom prst="rect">
@@ -14604,7 +14932,7 @@
         </p:nvSpPr>
         <p:spPr>
           <a:xfrm>
-            <a:off x="512064" y="5989320"/>
+            <a:off x="512064" y="5669280"/>
             <a:ext cx="11192256" cy="411480"/>
           </a:xfrm>
           <a:prstGeom prst="rect">
@@ -14647,7 +14975,7 @@
         </p:nvSpPr>
         <p:spPr>
           <a:xfrm>
-            <a:off x="777240" y="6126480"/>
+            <a:off x="777240" y="5806440"/>
             <a:ext cx="10789920" cy="137160"/>
           </a:xfrm>
           <a:prstGeom prst="rect">

--- a/Hyunho_Kook_Master_Defense.pptx
+++ b/Hyunho_Kook_Master_Defense.pptx
@@ -3790,16 +3790,16 @@
         </p:nvSpPr>
         <p:spPr>
           <a:xfrm>
-            <a:off x="777240" y="2331720"/>
-            <a:ext cx="10789920" cy="228600"/>
-          </a:xfrm>
-          <a:prstGeom prst="rect">
-            <a:avLst/>
-          </a:prstGeom>
-          <a:noFill/>
-        </p:spPr>
-        <p:txBody>
-          <a:bodyPr wrap="square">
+            <a:off x="777240" y="2240279"/>
+            <a:ext cx="10789920" cy="411480"/>
+          </a:xfrm>
+          <a:prstGeom prst="rect">
+            <a:avLst/>
+          </a:prstGeom>
+          <a:noFill/>
+        </p:spPr>
+        <p:txBody>
+          <a:bodyPr wrap="square" anchor="ctr">
             <a:spAutoFit/>
           </a:bodyPr>
           <a:lstStyle/>
@@ -4278,16 +4278,16 @@
         </p:nvSpPr>
         <p:spPr>
           <a:xfrm>
-            <a:off x="777240" y="6126480"/>
-            <a:ext cx="10789920" cy="91440"/>
-          </a:xfrm>
-          <a:prstGeom prst="rect">
-            <a:avLst/>
-          </a:prstGeom>
-          <a:noFill/>
-        </p:spPr>
-        <p:txBody>
-          <a:bodyPr wrap="square">
+            <a:off x="777240" y="6035040"/>
+            <a:ext cx="10789920" cy="274320"/>
+          </a:xfrm>
+          <a:prstGeom prst="rect">
+            <a:avLst/>
+          </a:prstGeom>
+          <a:noFill/>
+        </p:spPr>
+        <p:txBody>
+          <a:bodyPr wrap="square" anchor="ctr">
             <a:spAutoFit/>
           </a:bodyPr>
           <a:lstStyle/>
@@ -5962,16 +5962,16 @@
         </p:nvSpPr>
         <p:spPr>
           <a:xfrm>
-            <a:off x="777240" y="5989320"/>
-            <a:ext cx="10789920" cy="274320"/>
-          </a:xfrm>
-          <a:prstGeom prst="rect">
-            <a:avLst/>
-          </a:prstGeom>
-          <a:noFill/>
-        </p:spPr>
-        <p:txBody>
-          <a:bodyPr wrap="square">
+            <a:off x="777240" y="5897880"/>
+            <a:ext cx="10789920" cy="457200"/>
+          </a:xfrm>
+          <a:prstGeom prst="rect">
+            <a:avLst/>
+          </a:prstGeom>
+          <a:noFill/>
+        </p:spPr>
+        <p:txBody>
+          <a:bodyPr wrap="square" anchor="ctr">
             <a:spAutoFit/>
           </a:bodyPr>
           <a:lstStyle/>
@@ -6319,16 +6319,16 @@
         </p:nvSpPr>
         <p:spPr>
           <a:xfrm>
-            <a:off x="777240" y="2880360"/>
-            <a:ext cx="10789920" cy="365759"/>
-          </a:xfrm>
-          <a:prstGeom prst="rect">
-            <a:avLst/>
-          </a:prstGeom>
-          <a:noFill/>
-        </p:spPr>
-        <p:txBody>
-          <a:bodyPr wrap="square">
+            <a:off x="777240" y="2788920"/>
+            <a:ext cx="10789920" cy="548640"/>
+          </a:xfrm>
+          <a:prstGeom prst="rect">
+            <a:avLst/>
+          </a:prstGeom>
+          <a:noFill/>
+        </p:spPr>
+        <p:txBody>
+          <a:bodyPr wrap="square" anchor="ctr">
             <a:spAutoFit/>
           </a:bodyPr>
           <a:lstStyle/>
@@ -6480,16 +6480,16 @@
         </p:nvSpPr>
         <p:spPr>
           <a:xfrm>
-            <a:off x="777240" y="4206240"/>
-            <a:ext cx="10789920" cy="365759"/>
-          </a:xfrm>
-          <a:prstGeom prst="rect">
-            <a:avLst/>
-          </a:prstGeom>
-          <a:noFill/>
-        </p:spPr>
-        <p:txBody>
-          <a:bodyPr wrap="square">
+            <a:off x="777240" y="4114800"/>
+            <a:ext cx="10789920" cy="548640"/>
+          </a:xfrm>
+          <a:prstGeom prst="rect">
+            <a:avLst/>
+          </a:prstGeom>
+          <a:noFill/>
+        </p:spPr>
+        <p:txBody>
+          <a:bodyPr wrap="square" anchor="ctr">
             <a:spAutoFit/>
           </a:bodyPr>
           <a:lstStyle/>
@@ -6605,16 +6605,16 @@
         </p:nvSpPr>
         <p:spPr>
           <a:xfrm>
-            <a:off x="777240" y="4937760"/>
-            <a:ext cx="10789920" cy="365759"/>
-          </a:xfrm>
-          <a:prstGeom prst="rect">
-            <a:avLst/>
-          </a:prstGeom>
-          <a:noFill/>
-        </p:spPr>
-        <p:txBody>
-          <a:bodyPr wrap="square">
+            <a:off x="777240" y="4846320"/>
+            <a:ext cx="10789920" cy="548640"/>
+          </a:xfrm>
+          <a:prstGeom prst="rect">
+            <a:avLst/>
+          </a:prstGeom>
+          <a:noFill/>
+        </p:spPr>
+        <p:txBody>
+          <a:bodyPr wrap="square" anchor="ctr">
             <a:spAutoFit/>
           </a:bodyPr>
           <a:lstStyle/>
@@ -6730,16 +6730,16 @@
         </p:nvSpPr>
         <p:spPr>
           <a:xfrm>
-            <a:off x="777240" y="5806440"/>
-            <a:ext cx="10789920" cy="365759"/>
-          </a:xfrm>
-          <a:prstGeom prst="rect">
-            <a:avLst/>
-          </a:prstGeom>
-          <a:noFill/>
-        </p:spPr>
-        <p:txBody>
-          <a:bodyPr wrap="square">
+            <a:off x="777240" y="5715000"/>
+            <a:ext cx="10789920" cy="548640"/>
+          </a:xfrm>
+          <a:prstGeom prst="rect">
+            <a:avLst/>
+          </a:prstGeom>
+          <a:noFill/>
+        </p:spPr>
+        <p:txBody>
+          <a:bodyPr wrap="square" anchor="ctr">
             <a:spAutoFit/>
           </a:bodyPr>
           <a:lstStyle/>
@@ -9204,16 +9204,16 @@
         </p:nvSpPr>
         <p:spPr>
           <a:xfrm>
-            <a:off x="777240" y="6263640"/>
-            <a:ext cx="10789920" cy="91440"/>
-          </a:xfrm>
-          <a:prstGeom prst="rect">
-            <a:avLst/>
-          </a:prstGeom>
-          <a:noFill/>
-        </p:spPr>
-        <p:txBody>
-          <a:bodyPr wrap="square">
+            <a:off x="777240" y="6172200"/>
+            <a:ext cx="10789920" cy="274320"/>
+          </a:xfrm>
+          <a:prstGeom prst="rect">
+            <a:avLst/>
+          </a:prstGeom>
+          <a:noFill/>
+        </p:spPr>
+        <p:txBody>
+          <a:bodyPr wrap="square" anchor="ctr">
             <a:spAutoFit/>
           </a:bodyPr>
           <a:lstStyle/>
@@ -9769,16 +9769,16 @@
         </p:nvSpPr>
         <p:spPr>
           <a:xfrm>
-            <a:off x="777240" y="6217920"/>
-            <a:ext cx="10789920" cy="91440"/>
-          </a:xfrm>
-          <a:prstGeom prst="rect">
-            <a:avLst/>
-          </a:prstGeom>
-          <a:noFill/>
-        </p:spPr>
-        <p:txBody>
-          <a:bodyPr wrap="square">
+            <a:off x="777240" y="6126480"/>
+            <a:ext cx="10789920" cy="274320"/>
+          </a:xfrm>
+          <a:prstGeom prst="rect">
+            <a:avLst/>
+          </a:prstGeom>
+          <a:noFill/>
+        </p:spPr>
+        <p:txBody>
+          <a:bodyPr wrap="square" anchor="ctr">
             <a:spAutoFit/>
           </a:bodyPr>
           <a:lstStyle/>
@@ -10573,16 +10573,16 @@
         </p:nvSpPr>
         <p:spPr>
           <a:xfrm>
-            <a:off x="777240" y="6263640"/>
-            <a:ext cx="10789920" cy="91440"/>
-          </a:xfrm>
-          <a:prstGeom prst="rect">
-            <a:avLst/>
-          </a:prstGeom>
-          <a:noFill/>
-        </p:spPr>
-        <p:txBody>
-          <a:bodyPr wrap="square">
+            <a:off x="777240" y="6172200"/>
+            <a:ext cx="10789920" cy="274320"/>
+          </a:xfrm>
+          <a:prstGeom prst="rect">
+            <a:avLst/>
+          </a:prstGeom>
+          <a:noFill/>
+        </p:spPr>
+        <p:txBody>
+          <a:bodyPr wrap="square" anchor="ctr">
             <a:spAutoFit/>
           </a:bodyPr>
           <a:lstStyle/>
@@ -11305,16 +11305,16 @@
         </p:nvSpPr>
         <p:spPr>
           <a:xfrm>
-            <a:off x="777240" y="6126480"/>
-            <a:ext cx="10789920" cy="228600"/>
-          </a:xfrm>
-          <a:prstGeom prst="rect">
-            <a:avLst/>
-          </a:prstGeom>
-          <a:noFill/>
-        </p:spPr>
-        <p:txBody>
-          <a:bodyPr wrap="square">
+            <a:off x="777240" y="6035040"/>
+            <a:ext cx="10789920" cy="411480"/>
+          </a:xfrm>
+          <a:prstGeom prst="rect">
+            <a:avLst/>
+          </a:prstGeom>
+          <a:noFill/>
+        </p:spPr>
+        <p:txBody>
+          <a:bodyPr wrap="square" anchor="ctr">
             <a:spAutoFit/>
           </a:bodyPr>
           <a:lstStyle/>
@@ -12126,16 +12126,16 @@
         </p:nvSpPr>
         <p:spPr>
           <a:xfrm>
-            <a:off x="777240" y="5852160"/>
-            <a:ext cx="10789920" cy="411480"/>
-          </a:xfrm>
-          <a:prstGeom prst="rect">
-            <a:avLst/>
-          </a:prstGeom>
-          <a:noFill/>
-        </p:spPr>
-        <p:txBody>
-          <a:bodyPr wrap="square">
+            <a:off x="777240" y="5760720"/>
+            <a:ext cx="10789920" cy="594360"/>
+          </a:xfrm>
+          <a:prstGeom prst="rect">
+            <a:avLst/>
+          </a:prstGeom>
+          <a:noFill/>
+        </p:spPr>
+        <p:txBody>
+          <a:bodyPr wrap="square" anchor="ctr">
             <a:spAutoFit/>
           </a:bodyPr>
           <a:lstStyle/>
@@ -12411,16 +12411,16 @@
         </p:nvSpPr>
         <p:spPr>
           <a:xfrm>
-            <a:off x="777240" y="2331720"/>
-            <a:ext cx="10789920" cy="640080"/>
-          </a:xfrm>
-          <a:prstGeom prst="rect">
-            <a:avLst/>
-          </a:prstGeom>
-          <a:noFill/>
-        </p:spPr>
-        <p:txBody>
-          <a:bodyPr wrap="square">
+            <a:off x="777240" y="2240279"/>
+            <a:ext cx="10789920" cy="822960"/>
+          </a:xfrm>
+          <a:prstGeom prst="rect">
+            <a:avLst/>
+          </a:prstGeom>
+          <a:noFill/>
+        </p:spPr>
+        <p:txBody>
+          <a:bodyPr wrap="square" anchor="ctr">
             <a:spAutoFit/>
           </a:bodyPr>
           <a:lstStyle/>
@@ -14975,16 +14975,16 @@
         </p:nvSpPr>
         <p:spPr>
           <a:xfrm>
-            <a:off x="777240" y="5806440"/>
-            <a:ext cx="10789920" cy="137160"/>
-          </a:xfrm>
-          <a:prstGeom prst="rect">
-            <a:avLst/>
-          </a:prstGeom>
-          <a:noFill/>
-        </p:spPr>
-        <p:txBody>
-          <a:bodyPr wrap="square">
+            <a:off x="777240" y="5715000"/>
+            <a:ext cx="10789920" cy="320040"/>
+          </a:xfrm>
+          <a:prstGeom prst="rect">
+            <a:avLst/>
+          </a:prstGeom>
+          <a:noFill/>
+        </p:spPr>
+        <p:txBody>
+          <a:bodyPr wrap="square" anchor="ctr">
             <a:spAutoFit/>
           </a:bodyPr>
           <a:lstStyle/>
@@ -15412,16 +15412,16 @@
         </p:nvSpPr>
         <p:spPr>
           <a:xfrm>
-            <a:off x="777240" y="5623560"/>
-            <a:ext cx="5486400" cy="594359"/>
-          </a:xfrm>
-          <a:prstGeom prst="rect">
-            <a:avLst/>
-          </a:prstGeom>
-          <a:noFill/>
-        </p:spPr>
-        <p:txBody>
-          <a:bodyPr wrap="square">
+            <a:off x="777240" y="5532120"/>
+            <a:ext cx="5486400" cy="777240"/>
+          </a:xfrm>
+          <a:prstGeom prst="rect">
+            <a:avLst/>
+          </a:prstGeom>
+          <a:noFill/>
+        </p:spPr>
+        <p:txBody>
+          <a:bodyPr wrap="square" anchor="ctr">
             <a:spAutoFit/>
           </a:bodyPr>
           <a:lstStyle/>
@@ -16107,16 +16107,16 @@
         </p:nvSpPr>
         <p:spPr>
           <a:xfrm>
-            <a:off x="777240" y="5074920"/>
-            <a:ext cx="10789920" cy="1005839"/>
-          </a:xfrm>
-          <a:prstGeom prst="rect">
-            <a:avLst/>
-          </a:prstGeom>
-          <a:noFill/>
-        </p:spPr>
-        <p:txBody>
-          <a:bodyPr wrap="square">
+            <a:off x="777240" y="4983480"/>
+            <a:ext cx="10789920" cy="1188719"/>
+          </a:xfrm>
+          <a:prstGeom prst="rect">
+            <a:avLst/>
+          </a:prstGeom>
+          <a:noFill/>
+        </p:spPr>
+        <p:txBody>
+          <a:bodyPr wrap="square" anchor="ctr">
             <a:spAutoFit/>
           </a:bodyPr>
           <a:lstStyle/>
@@ -16448,16 +16448,16 @@
         </p:nvSpPr>
         <p:spPr>
           <a:xfrm>
-            <a:off x="777240" y="2423160"/>
-            <a:ext cx="6126480" cy="365759"/>
-          </a:xfrm>
-          <a:prstGeom prst="rect">
-            <a:avLst/>
-          </a:prstGeom>
-          <a:noFill/>
-        </p:spPr>
-        <p:txBody>
-          <a:bodyPr wrap="square">
+            <a:off x="777240" y="2331720"/>
+            <a:ext cx="6126480" cy="548640"/>
+          </a:xfrm>
+          <a:prstGeom prst="rect">
+            <a:avLst/>
+          </a:prstGeom>
+          <a:noFill/>
+        </p:spPr>
+        <p:txBody>
+          <a:bodyPr wrap="square" anchor="ctr">
             <a:spAutoFit/>
           </a:bodyPr>
           <a:lstStyle/>
@@ -16586,16 +16586,16 @@
         </p:nvSpPr>
         <p:spPr>
           <a:xfrm>
-            <a:off x="777240" y="3246120"/>
-            <a:ext cx="6126480" cy="1188720"/>
-          </a:xfrm>
-          <a:prstGeom prst="rect">
-            <a:avLst/>
-          </a:prstGeom>
-          <a:noFill/>
-        </p:spPr>
-        <p:txBody>
-          <a:bodyPr wrap="square">
+            <a:off x="777240" y="3154679"/>
+            <a:ext cx="6126480" cy="1371600"/>
+          </a:xfrm>
+          <a:prstGeom prst="rect">
+            <a:avLst/>
+          </a:prstGeom>
+          <a:noFill/>
+        </p:spPr>
+        <p:txBody>
+          <a:bodyPr wrap="square" anchor="ctr">
             <a:spAutoFit/>
           </a:bodyPr>
           <a:lstStyle/>
@@ -17168,16 +17168,16 @@
         </p:nvSpPr>
         <p:spPr>
           <a:xfrm>
-            <a:off x="777240" y="2834640"/>
-            <a:ext cx="5486400" cy="365759"/>
-          </a:xfrm>
-          <a:prstGeom prst="rect">
-            <a:avLst/>
-          </a:prstGeom>
-          <a:noFill/>
-        </p:spPr>
-        <p:txBody>
-          <a:bodyPr wrap="square">
+            <a:off x="777240" y="2743200"/>
+            <a:ext cx="5486400" cy="548640"/>
+          </a:xfrm>
+          <a:prstGeom prst="rect">
+            <a:avLst/>
+          </a:prstGeom>
+          <a:noFill/>
+        </p:spPr>
+        <p:txBody>
+          <a:bodyPr wrap="square" anchor="ctr">
             <a:spAutoFit/>
           </a:bodyPr>
           <a:lstStyle/>
@@ -17563,16 +17563,16 @@
         </p:nvSpPr>
         <p:spPr>
           <a:xfrm>
-            <a:off x="777240" y="5669280"/>
-            <a:ext cx="10789920" cy="548640"/>
-          </a:xfrm>
-          <a:prstGeom prst="rect">
-            <a:avLst/>
-          </a:prstGeom>
-          <a:noFill/>
-        </p:spPr>
-        <p:txBody>
-          <a:bodyPr wrap="square">
+            <a:off x="777240" y="5577840"/>
+            <a:ext cx="10789920" cy="731520"/>
+          </a:xfrm>
+          <a:prstGeom prst="rect">
+            <a:avLst/>
+          </a:prstGeom>
+          <a:noFill/>
+        </p:spPr>
+        <p:txBody>
+          <a:bodyPr wrap="square" anchor="ctr">
             <a:spAutoFit/>
           </a:bodyPr>
           <a:lstStyle/>
@@ -19409,16 +19409,16 @@
         </p:nvSpPr>
         <p:spPr>
           <a:xfrm>
-            <a:off x="777240" y="6217920"/>
-            <a:ext cx="10789920" cy="137160"/>
-          </a:xfrm>
-          <a:prstGeom prst="rect">
-            <a:avLst/>
-          </a:prstGeom>
-          <a:noFill/>
-        </p:spPr>
-        <p:txBody>
-          <a:bodyPr wrap="square">
+            <a:off x="777240" y="6126480"/>
+            <a:ext cx="10789920" cy="320040"/>
+          </a:xfrm>
+          <a:prstGeom prst="rect">
+            <a:avLst/>
+          </a:prstGeom>
+          <a:noFill/>
+        </p:spPr>
+        <p:txBody>
+          <a:bodyPr wrap="square" anchor="ctr">
             <a:spAutoFit/>
           </a:bodyPr>
           <a:lstStyle/>

--- a/Hyunho_Kook_Master_Defense.pptx
+++ b/Hyunho_Kook_Master_Defense.pptx
@@ -7461,51 +7461,6 @@
         <p:spPr>
           <a:xfrm>
             <a:off x="457200" y="3703320"/>
-            <a:ext cx="5532120" cy="2377440"/>
-          </a:xfrm>
-          <a:prstGeom prst="rect">
-            <a:avLst/>
-          </a:prstGeom>
-          <a:solidFill>
-            <a:srgbClr val="FFFFFF"/>
-          </a:solidFill>
-          <a:ln w="19050">
-            <a:solidFill>
-              <a:srgbClr val="0F2540"/>
-            </a:solidFill>
-          </a:ln>
-        </p:spPr>
-        <p:style>
-          <a:lnRef idx="1">
-            <a:schemeClr val="accent1"/>
-          </a:lnRef>
-          <a:fillRef idx="3">
-            <a:schemeClr val="accent1"/>
-          </a:fillRef>
-          <a:effectRef idx="2">
-            <a:schemeClr val="accent1"/>
-          </a:effectRef>
-          <a:fontRef idx="minor">
-            <a:schemeClr val="lt1"/>
-          </a:fontRef>
-        </p:style>
-        <p:txBody>
-          <a:bodyPr rtlCol="0" anchor="ctr"/>
-          <a:lstStyle/>
-          <a:p>
-            <a:pPr algn="ctr"/>
-          </a:p>
-        </p:txBody>
-      </p:sp>
-      <p:sp>
-        <p:nvSpPr>
-          <p:cNvPr id="19" name="Rectangle 18"/>
-          <p:cNvSpPr/>
-          <p:nvPr/>
-        </p:nvSpPr>
-        <p:spPr>
-          <a:xfrm>
-            <a:off x="457200" y="3703320"/>
             <a:ext cx="5532120" cy="384048"/>
           </a:xfrm>
           <a:prstGeom prst="rect">
@@ -7542,7 +7497,7 @@
       </p:sp>
       <p:sp>
         <p:nvSpPr>
-          <p:cNvPr id="20" name="TextBox 19"/>
+          <p:cNvPr id="19" name="TextBox 18"/>
           <p:cNvSpPr txBox="1"/>
           <p:nvPr/>
         </p:nvSpPr>
@@ -7576,759 +7531,429 @@
           </a:p>
         </p:txBody>
       </p:sp>
+      <p:graphicFrame>
+        <p:nvGraphicFramePr>
+          <p:cNvPr id="20" name="Table 19"/>
+          <p:cNvGraphicFramePr>
+            <a:graphicFrameLocks noGrp="1"/>
+          </p:cNvGraphicFramePr>
+          <p:nvPr/>
+        </p:nvGraphicFramePr>
+        <p:xfrm>
+          <a:off x="457200" y="4087368"/>
+          <a:ext cx="5532120" cy="1783080"/>
+        </p:xfrm>
+        <a:graphic>
+          <a:graphicData uri="http://schemas.openxmlformats.org/drawingml/2006/table">
+            <a:tbl>
+              <a:tblPr firstRow="1" bandRow="1">
+                <a:tableStyleId>{5C22544A-7EE6-4342-B048-85BDC9FD1C3A}</a:tableStyleId>
+              </a:tblPr>
+              <a:tblGrid>
+                <a:gridCol w="1325880"/>
+                <a:gridCol w="1371600"/>
+                <a:gridCol w="1417320"/>
+                <a:gridCol w="1417320"/>
+              </a:tblGrid>
+              <a:tr h="411480">
+                <a:tc>
+                  <a:txBody>
+                    <a:bodyPr anchor="ctr"/>
+                    <a:lstStyle/>
+                    <a:p>
+                      <a:pPr algn="l">
+                        <a:defRPr sz="1100" b="1">
+                          <a:solidFill>
+                            <a:srgbClr val="0F2540"/>
+                          </a:solidFill>
+                          <a:latin typeface="Calibri"/>
+                        </a:defRPr>
+                      </a:pPr>
+                      <a:r>
+                        <a:t>SG</a:t>
+                      </a:r>
+                    </a:p>
+                  </a:txBody>
+                  <a:tcPr marL="109728" marR="109728">
+                    <a:solidFill>
+                      <a:srgbClr val="E5F5F0"/>
+                    </a:solidFill>
+                  </a:tcPr>
+                </a:tc>
+                <a:tc>
+                  <a:txBody>
+                    <a:bodyPr anchor="ctr"/>
+                    <a:lstStyle/>
+                    <a:p>
+                      <a:pPr algn="ctr">
+                        <a:defRPr sz="1100" b="1">
+                          <a:solidFill>
+                            <a:srgbClr val="0F2540"/>
+                          </a:solidFill>
+                          <a:latin typeface="Calibri"/>
+                        </a:defRPr>
+                      </a:pPr>
+                      <a:r>
+                        <a:t>AbsStr</a:t>
+                      </a:r>
+                    </a:p>
+                  </a:txBody>
+                  <a:tcPr marL="109728" marR="109728">
+                    <a:solidFill>
+                      <a:srgbClr val="E5F5F0"/>
+                    </a:solidFill>
+                  </a:tcPr>
+                </a:tc>
+                <a:tc>
+                  <a:txBody>
+                    <a:bodyPr anchor="ctr"/>
+                    <a:lstStyle/>
+                    <a:p>
+                      <a:pPr algn="ctr">
+                        <a:defRPr sz="1100" b="1">
+                          <a:solidFill>
+                            <a:srgbClr val="0F2540"/>
+                          </a:solidFill>
+                          <a:latin typeface="Calibri"/>
+                        </a:defRPr>
+                      </a:pPr>
+                      <a:r>
+                        <a:t>RatioAG</a:t>
+                      </a:r>
+                    </a:p>
+                  </a:txBody>
+                  <a:tcPr marL="109728" marR="109728">
+                    <a:solidFill>
+                      <a:srgbClr val="E5F5F0"/>
+                    </a:solidFill>
+                  </a:tcPr>
+                </a:tc>
+                <a:tc>
+                  <a:txBody>
+                    <a:bodyPr anchor="ctr"/>
+                    <a:lstStyle/>
+                    <a:p>
+                      <a:pPr algn="ctr">
+                        <a:defRPr sz="1100" b="1">
+                          <a:solidFill>
+                            <a:srgbClr val="0F2540"/>
+                          </a:solidFill>
+                          <a:latin typeface="Calibri"/>
+                        </a:defRPr>
+                      </a:pPr>
+                      <a:r>
+                        <a:t>GradCV</a:t>
+                      </a:r>
+                    </a:p>
+                  </a:txBody>
+                  <a:tcPr marL="109728" marR="109728">
+                    <a:solidFill>
+                      <a:srgbClr val="E5F5F0"/>
+                    </a:solidFill>
+                  </a:tcPr>
+                </a:tc>
+              </a:tr>
+              <a:tr h="457200">
+                <a:tc>
+                  <a:txBody>
+                    <a:bodyPr anchor="ctr"/>
+                    <a:lstStyle/>
+                    <a:p>
+                      <a:pPr algn="l">
+                        <a:defRPr b="1" sz="1300">
+                          <a:solidFill>
+                            <a:srgbClr val="E56945"/>
+                          </a:solidFill>
+                          <a:latin typeface="Calibri"/>
+                        </a:defRPr>
+                      </a:pPr>
+                      <a:r>
+                        <a:t>AS-SG</a:t>
+                      </a:r>
+                    </a:p>
+                  </a:txBody>
+                  <a:tcPr marL="109728" marR="109728">
+                    <a:solidFill>
+                      <a:srgbClr val="FFFFFF"/>
+                    </a:solidFill>
+                  </a:tcPr>
+                </a:tc>
+                <a:tc>
+                  <a:txBody>
+                    <a:bodyPr anchor="ctr"/>
+                    <a:lstStyle/>
+                    <a:p>
+                      <a:pPr algn="ctr">
+                        <a:defRPr b="1" sz="1300">
+                          <a:solidFill>
+                            <a:srgbClr val="E56945"/>
+                          </a:solidFill>
+                          <a:latin typeface="Consolas"/>
+                        </a:defRPr>
+                      </a:pPr>
+                      <a:r>
+                        <a:t>0.0145</a:t>
+                      </a:r>
+                    </a:p>
+                  </a:txBody>
+                  <a:tcPr marL="109728" marR="109728">
+                    <a:solidFill>
+                      <a:srgbClr val="FFFFFF"/>
+                    </a:solidFill>
+                  </a:tcPr>
+                </a:tc>
+                <a:tc>
+                  <a:txBody>
+                    <a:bodyPr anchor="ctr"/>
+                    <a:lstStyle/>
+                    <a:p>
+                      <a:pPr algn="ctr">
+                        <a:defRPr b="1" sz="1300">
+                          <a:solidFill>
+                            <a:srgbClr val="E56945"/>
+                          </a:solidFill>
+                          <a:latin typeface="Consolas"/>
+                        </a:defRPr>
+                      </a:pPr>
+                      <a:r>
+                        <a:t>90.20%</a:t>
+                      </a:r>
+                    </a:p>
+                  </a:txBody>
+                  <a:tcPr marL="109728" marR="109728">
+                    <a:solidFill>
+                      <a:srgbClr val="FFFFFF"/>
+                    </a:solidFill>
+                  </a:tcPr>
+                </a:tc>
+                <a:tc>
+                  <a:txBody>
+                    <a:bodyPr anchor="ctr"/>
+                    <a:lstStyle/>
+                    <a:p>
+                      <a:pPr algn="ctr">
+                        <a:defRPr b="1" sz="1300">
+                          <a:solidFill>
+                            <a:srgbClr val="E56945"/>
+                          </a:solidFill>
+                          <a:latin typeface="Consolas"/>
+                        </a:defRPr>
+                      </a:pPr>
+                      <a:r>
+                        <a:t>1.22</a:t>
+                      </a:r>
+                    </a:p>
+                  </a:txBody>
+                  <a:tcPr marL="109728" marR="109728">
+                    <a:solidFill>
+                      <a:srgbClr val="FFFFFF"/>
+                    </a:solidFill>
+                  </a:tcPr>
+                </a:tc>
+              </a:tr>
+              <a:tr h="457200">
+                <a:tc>
+                  <a:txBody>
+                    <a:bodyPr anchor="ctr"/>
+                    <a:lstStyle/>
+                    <a:p>
+                      <a:pPr algn="l">
+                        <a:defRPr b="1" sz="1300">
+                          <a:solidFill>
+                            <a:srgbClr val="E56945"/>
+                          </a:solidFill>
+                          <a:latin typeface="Calibri"/>
+                        </a:defRPr>
+                      </a:pPr>
+                      <a:r>
+                        <a:t>RS-SG</a:t>
+                      </a:r>
+                    </a:p>
+                  </a:txBody>
+                  <a:tcPr marL="109728" marR="109728">
+                    <a:solidFill>
+                      <a:srgbClr val="F8F7F2"/>
+                    </a:solidFill>
+                  </a:tcPr>
+                </a:tc>
+                <a:tc>
+                  <a:txBody>
+                    <a:bodyPr anchor="ctr"/>
+                    <a:lstStyle/>
+                    <a:p>
+                      <a:pPr algn="ctr">
+                        <a:defRPr b="1" sz="1300">
+                          <a:solidFill>
+                            <a:srgbClr val="E56945"/>
+                          </a:solidFill>
+                          <a:latin typeface="Consolas"/>
+                        </a:defRPr>
+                      </a:pPr>
+                      <a:r>
+                        <a:t>NaN</a:t>
+                      </a:r>
+                    </a:p>
+                  </a:txBody>
+                  <a:tcPr marL="109728" marR="109728">
+                    <a:solidFill>
+                      <a:srgbClr val="F8F7F2"/>
+                    </a:solidFill>
+                  </a:tcPr>
+                </a:tc>
+                <a:tc>
+                  <a:txBody>
+                    <a:bodyPr anchor="ctr"/>
+                    <a:lstStyle/>
+                    <a:p>
+                      <a:pPr algn="ctr">
+                        <a:defRPr b="1" sz="1300">
+                          <a:solidFill>
+                            <a:srgbClr val="E56945"/>
+                          </a:solidFill>
+                          <a:latin typeface="Consolas"/>
+                        </a:defRPr>
+                      </a:pPr>
+                      <a:r>
+                        <a:t>0.00%</a:t>
+                      </a:r>
+                    </a:p>
+                  </a:txBody>
+                  <a:tcPr marL="109728" marR="109728">
+                    <a:solidFill>
+                      <a:srgbClr val="F8F7F2"/>
+                    </a:solidFill>
+                  </a:tcPr>
+                </a:tc>
+                <a:tc>
+                  <a:txBody>
+                    <a:bodyPr anchor="ctr"/>
+                    <a:lstStyle/>
+                    <a:p>
+                      <a:pPr algn="ctr">
+                        <a:defRPr b="1" sz="1300">
+                          <a:solidFill>
+                            <a:srgbClr val="E56945"/>
+                          </a:solidFill>
+                          <a:latin typeface="Consolas"/>
+                        </a:defRPr>
+                      </a:pPr>
+                      <a:r>
+                        <a:t>NaN</a:t>
+                      </a:r>
+                    </a:p>
+                  </a:txBody>
+                  <a:tcPr marL="109728" marR="109728">
+                    <a:solidFill>
+                      <a:srgbClr val="F8F7F2"/>
+                    </a:solidFill>
+                  </a:tcPr>
+                </a:tc>
+              </a:tr>
+              <a:tr h="457200">
+                <a:tc>
+                  <a:txBody>
+                    <a:bodyPr anchor="ctr"/>
+                    <a:lstStyle/>
+                    <a:p>
+                      <a:pPr algn="l">
+                        <a:defRPr b="1" sz="1300">
+                          <a:solidFill>
+                            <a:srgbClr val="1D7E7E"/>
+                          </a:solidFill>
+                          <a:latin typeface="Calibri"/>
+                        </a:defRPr>
+                      </a:pPr>
+                      <a:r>
+                        <a:t>TrSG</a:t>
+                      </a:r>
+                    </a:p>
+                  </a:txBody>
+                  <a:tcPr marL="109728" marR="109728">
+                    <a:solidFill>
+                      <a:srgbClr val="FFFFFF"/>
+                    </a:solidFill>
+                  </a:tcPr>
+                </a:tc>
+                <a:tc>
+                  <a:txBody>
+                    <a:bodyPr anchor="ctr"/>
+                    <a:lstStyle/>
+                    <a:p>
+                      <a:pPr algn="ctr">
+                        <a:defRPr b="1" sz="1300">
+                          <a:solidFill>
+                            <a:srgbClr val="1D7E7E"/>
+                          </a:solidFill>
+                          <a:latin typeface="Consolas"/>
+                        </a:defRPr>
+                      </a:pPr>
+                      <a:r>
+                        <a:t>0.0153</a:t>
+                      </a:r>
+                    </a:p>
+                  </a:txBody>
+                  <a:tcPr marL="109728" marR="109728">
+                    <a:solidFill>
+                      <a:srgbClr val="FFFFFF"/>
+                    </a:solidFill>
+                  </a:tcPr>
+                </a:tc>
+                <a:tc>
+                  <a:txBody>
+                    <a:bodyPr anchor="ctr"/>
+                    <a:lstStyle/>
+                    <a:p>
+                      <a:pPr algn="ctr">
+                        <a:defRPr b="1" sz="1300">
+                          <a:solidFill>
+                            <a:srgbClr val="1D7E7E"/>
+                          </a:solidFill>
+                          <a:latin typeface="Consolas"/>
+                        </a:defRPr>
+                      </a:pPr>
+                      <a:r>
+                        <a:t>21.45%</a:t>
+                      </a:r>
+                    </a:p>
+                  </a:txBody>
+                  <a:tcPr marL="109728" marR="109728">
+                    <a:solidFill>
+                      <a:srgbClr val="FFFFFF"/>
+                    </a:solidFill>
+                  </a:tcPr>
+                </a:tc>
+                <a:tc>
+                  <a:txBody>
+                    <a:bodyPr anchor="ctr"/>
+                    <a:lstStyle/>
+                    <a:p>
+                      <a:pPr algn="ctr">
+                        <a:defRPr b="1" sz="1300">
+                          <a:solidFill>
+                            <a:srgbClr val="1D7E7E"/>
+                          </a:solidFill>
+                          <a:latin typeface="Consolas"/>
+                        </a:defRPr>
+                      </a:pPr>
+                      <a:r>
+                        <a:t>0.87</a:t>
+                      </a:r>
+                    </a:p>
+                  </a:txBody>
+                  <a:tcPr marL="109728" marR="109728">
+                    <a:solidFill>
+                      <a:srgbClr val="FFFFFF"/>
+                    </a:solidFill>
+                  </a:tcPr>
+                </a:tc>
+              </a:tr>
+            </a:tbl>
+          </a:graphicData>
+        </a:graphic>
+      </p:graphicFrame>
       <p:sp>
         <p:nvSpPr>
           <p:cNvPr id="21" name="Rectangle 20"/>
-          <p:cNvSpPr/>
-          <p:nvPr/>
-        </p:nvSpPr>
-        <p:spPr>
-          <a:xfrm>
-            <a:off x="502920" y="4160520"/>
-            <a:ext cx="5440680" cy="365760"/>
-          </a:xfrm>
-          <a:prstGeom prst="rect">
-            <a:avLst/>
-          </a:prstGeom>
-          <a:solidFill>
-            <a:srgbClr val="E5F5F0"/>
-          </a:solidFill>
-          <a:ln>
-            <a:noFill/>
-          </a:ln>
-        </p:spPr>
-        <p:style>
-          <a:lnRef idx="1">
-            <a:schemeClr val="accent1"/>
-          </a:lnRef>
-          <a:fillRef idx="3">
-            <a:schemeClr val="accent1"/>
-          </a:fillRef>
-          <a:effectRef idx="2">
-            <a:schemeClr val="accent1"/>
-          </a:effectRef>
-          <a:fontRef idx="minor">
-            <a:schemeClr val="lt1"/>
-          </a:fontRef>
-        </p:style>
-        <p:txBody>
-          <a:bodyPr rtlCol="0" anchor="ctr"/>
-          <a:lstStyle/>
-          <a:p>
-            <a:pPr algn="ctr"/>
-          </a:p>
-        </p:txBody>
-      </p:sp>
-      <p:sp>
-        <p:nvSpPr>
-          <p:cNvPr id="22" name="TextBox 21"/>
-          <p:cNvSpPr txBox="1"/>
-          <p:nvPr/>
-        </p:nvSpPr>
-        <p:spPr>
-          <a:xfrm>
-            <a:off x="685800" y="4215383"/>
-            <a:ext cx="1280160" cy="274320"/>
-          </a:xfrm>
-          <a:prstGeom prst="rect">
-            <a:avLst/>
-          </a:prstGeom>
-          <a:noFill/>
-        </p:spPr>
-        <p:txBody>
-          <a:bodyPr wrap="square" lIns="0" rIns="0" tIns="0" bIns="0">
-            <a:spAutoFit/>
-          </a:bodyPr>
-          <a:lstStyle/>
-          <a:p>
-            <a:pPr>
-              <a:defRPr sz="1100" b="1" i="0">
-                <a:solidFill>
-                  <a:srgbClr val="0F2540"/>
-                </a:solidFill>
-                <a:latin typeface="Calibri"/>
-              </a:defRPr>
-            </a:pPr>
-            <a:r>
-              <a:t>SG</a:t>
-            </a:r>
-          </a:p>
-        </p:txBody>
-      </p:sp>
-      <p:sp>
-        <p:nvSpPr>
-          <p:cNvPr id="23" name="TextBox 22"/>
-          <p:cNvSpPr txBox="1"/>
-          <p:nvPr/>
-        </p:nvSpPr>
-        <p:spPr>
-          <a:xfrm>
-            <a:off x="2103120" y="4215383"/>
-            <a:ext cx="1280160" cy="274320"/>
-          </a:xfrm>
-          <a:prstGeom prst="rect">
-            <a:avLst/>
-          </a:prstGeom>
-          <a:noFill/>
-        </p:spPr>
-        <p:txBody>
-          <a:bodyPr wrap="square" lIns="0" rIns="0" tIns="0" bIns="0">
-            <a:spAutoFit/>
-          </a:bodyPr>
-          <a:lstStyle/>
-          <a:p>
-            <a:pPr>
-              <a:defRPr sz="1100" b="1" i="0">
-                <a:solidFill>
-                  <a:srgbClr val="0F2540"/>
-                </a:solidFill>
-                <a:latin typeface="Calibri"/>
-              </a:defRPr>
-            </a:pPr>
-            <a:r>
-              <a:t>AbsStr</a:t>
-            </a:r>
-          </a:p>
-        </p:txBody>
-      </p:sp>
-      <p:sp>
-        <p:nvSpPr>
-          <p:cNvPr id="24" name="TextBox 23"/>
-          <p:cNvSpPr txBox="1"/>
-          <p:nvPr/>
-        </p:nvSpPr>
-        <p:spPr>
-          <a:xfrm>
-            <a:off x="3474720" y="4215383"/>
-            <a:ext cx="1280160" cy="274320"/>
-          </a:xfrm>
-          <a:prstGeom prst="rect">
-            <a:avLst/>
-          </a:prstGeom>
-          <a:noFill/>
-        </p:spPr>
-        <p:txBody>
-          <a:bodyPr wrap="square" lIns="0" rIns="0" tIns="0" bIns="0">
-            <a:spAutoFit/>
-          </a:bodyPr>
-          <a:lstStyle/>
-          <a:p>
-            <a:pPr>
-              <a:defRPr sz="1100" b="1" i="0">
-                <a:solidFill>
-                  <a:srgbClr val="0F2540"/>
-                </a:solidFill>
-                <a:latin typeface="Calibri"/>
-              </a:defRPr>
-            </a:pPr>
-            <a:r>
-              <a:t>RatioAG</a:t>
-            </a:r>
-          </a:p>
-        </p:txBody>
-      </p:sp>
-      <p:sp>
-        <p:nvSpPr>
-          <p:cNvPr id="25" name="TextBox 24"/>
-          <p:cNvSpPr txBox="1"/>
-          <p:nvPr/>
-        </p:nvSpPr>
-        <p:spPr>
-          <a:xfrm>
-            <a:off x="4846320" y="4215383"/>
-            <a:ext cx="1280160" cy="274320"/>
-          </a:xfrm>
-          <a:prstGeom prst="rect">
-            <a:avLst/>
-          </a:prstGeom>
-          <a:noFill/>
-        </p:spPr>
-        <p:txBody>
-          <a:bodyPr wrap="square" lIns="0" rIns="0" tIns="0" bIns="0">
-            <a:spAutoFit/>
-          </a:bodyPr>
-          <a:lstStyle/>
-          <a:p>
-            <a:pPr>
-              <a:defRPr sz="1100" b="1" i="0">
-                <a:solidFill>
-                  <a:srgbClr val="0F2540"/>
-                </a:solidFill>
-                <a:latin typeface="Calibri"/>
-              </a:defRPr>
-            </a:pPr>
-            <a:r>
-              <a:t>GradCV</a:t>
-            </a:r>
-          </a:p>
-        </p:txBody>
-      </p:sp>
-      <p:sp>
-        <p:nvSpPr>
-          <p:cNvPr id="26" name="Rectangle 25"/>
-          <p:cNvSpPr/>
-          <p:nvPr/>
-        </p:nvSpPr>
-        <p:spPr>
-          <a:xfrm>
-            <a:off x="502920" y="4526280"/>
-            <a:ext cx="5440680" cy="22860"/>
-          </a:xfrm>
-          <a:prstGeom prst="rect">
-            <a:avLst/>
-          </a:prstGeom>
-          <a:solidFill>
-            <a:srgbClr val="1D7E7E"/>
-          </a:solidFill>
-          <a:ln>
-            <a:noFill/>
-          </a:ln>
-        </p:spPr>
-        <p:style>
-          <a:lnRef idx="1">
-            <a:schemeClr val="accent1"/>
-          </a:lnRef>
-          <a:fillRef idx="3">
-            <a:schemeClr val="accent1"/>
-          </a:fillRef>
-          <a:effectRef idx="2">
-            <a:schemeClr val="accent1"/>
-          </a:effectRef>
-          <a:fontRef idx="minor">
-            <a:schemeClr val="lt1"/>
-          </a:fontRef>
-        </p:style>
-        <p:txBody>
-          <a:bodyPr rtlCol="0" anchor="ctr"/>
-          <a:lstStyle/>
-          <a:p>
-            <a:pPr algn="ctr"/>
-          </a:p>
-        </p:txBody>
-      </p:sp>
-      <p:sp>
-        <p:nvSpPr>
-          <p:cNvPr id="27" name="TextBox 26"/>
-          <p:cNvSpPr txBox="1"/>
-          <p:nvPr/>
-        </p:nvSpPr>
-        <p:spPr>
-          <a:xfrm>
-            <a:off x="685800" y="4663440"/>
-            <a:ext cx="1280160" cy="320040"/>
-          </a:xfrm>
-          <a:prstGeom prst="rect">
-            <a:avLst/>
-          </a:prstGeom>
-          <a:noFill/>
-        </p:spPr>
-        <p:txBody>
-          <a:bodyPr wrap="square" lIns="0" rIns="0" tIns="0" bIns="0">
-            <a:spAutoFit/>
-          </a:bodyPr>
-          <a:lstStyle/>
-          <a:p>
-            <a:pPr>
-              <a:defRPr sz="1300" b="1" i="0">
-                <a:solidFill>
-                  <a:srgbClr val="E56945"/>
-                </a:solidFill>
-                <a:latin typeface="Calibri"/>
-              </a:defRPr>
-            </a:pPr>
-            <a:r>
-              <a:t>AS-SG</a:t>
-            </a:r>
-          </a:p>
-        </p:txBody>
-      </p:sp>
-      <p:sp>
-        <p:nvSpPr>
-          <p:cNvPr id="28" name="TextBox 27"/>
-          <p:cNvSpPr txBox="1"/>
-          <p:nvPr/>
-        </p:nvSpPr>
-        <p:spPr>
-          <a:xfrm>
-            <a:off x="2103120" y="4663440"/>
-            <a:ext cx="1280160" cy="320040"/>
-          </a:xfrm>
-          <a:prstGeom prst="rect">
-            <a:avLst/>
-          </a:prstGeom>
-          <a:noFill/>
-        </p:spPr>
-        <p:txBody>
-          <a:bodyPr wrap="square" lIns="0" rIns="0" tIns="0" bIns="0">
-            <a:spAutoFit/>
-          </a:bodyPr>
-          <a:lstStyle/>
-          <a:p>
-            <a:pPr>
-              <a:defRPr sz="1300" b="1" i="0">
-                <a:solidFill>
-                  <a:srgbClr val="E56945"/>
-                </a:solidFill>
-                <a:latin typeface="Consolas"/>
-              </a:defRPr>
-            </a:pPr>
-            <a:r>
-              <a:t>0.0145</a:t>
-            </a:r>
-          </a:p>
-        </p:txBody>
-      </p:sp>
-      <p:sp>
-        <p:nvSpPr>
-          <p:cNvPr id="29" name="TextBox 28"/>
-          <p:cNvSpPr txBox="1"/>
-          <p:nvPr/>
-        </p:nvSpPr>
-        <p:spPr>
-          <a:xfrm>
-            <a:off x="3474720" y="4663440"/>
-            <a:ext cx="1280160" cy="320040"/>
-          </a:xfrm>
-          <a:prstGeom prst="rect">
-            <a:avLst/>
-          </a:prstGeom>
-          <a:noFill/>
-        </p:spPr>
-        <p:txBody>
-          <a:bodyPr wrap="square" lIns="0" rIns="0" tIns="0" bIns="0">
-            <a:spAutoFit/>
-          </a:bodyPr>
-          <a:lstStyle/>
-          <a:p>
-            <a:pPr>
-              <a:defRPr sz="1300" b="1" i="0">
-                <a:solidFill>
-                  <a:srgbClr val="E56945"/>
-                </a:solidFill>
-                <a:latin typeface="Consolas"/>
-              </a:defRPr>
-            </a:pPr>
-            <a:r>
-              <a:t>90.20%</a:t>
-            </a:r>
-          </a:p>
-        </p:txBody>
-      </p:sp>
-      <p:sp>
-        <p:nvSpPr>
-          <p:cNvPr id="30" name="TextBox 29"/>
-          <p:cNvSpPr txBox="1"/>
-          <p:nvPr/>
-        </p:nvSpPr>
-        <p:spPr>
-          <a:xfrm>
-            <a:off x="4846320" y="4663440"/>
-            <a:ext cx="1280160" cy="320040"/>
-          </a:xfrm>
-          <a:prstGeom prst="rect">
-            <a:avLst/>
-          </a:prstGeom>
-          <a:noFill/>
-        </p:spPr>
-        <p:txBody>
-          <a:bodyPr wrap="square" lIns="0" rIns="0" tIns="0" bIns="0">
-            <a:spAutoFit/>
-          </a:bodyPr>
-          <a:lstStyle/>
-          <a:p>
-            <a:pPr>
-              <a:defRPr sz="1300" b="1" i="0">
-                <a:solidFill>
-                  <a:srgbClr val="E56945"/>
-                </a:solidFill>
-                <a:latin typeface="Consolas"/>
-              </a:defRPr>
-            </a:pPr>
-            <a:r>
-              <a:t>1.22</a:t>
-            </a:r>
-          </a:p>
-        </p:txBody>
-      </p:sp>
-      <p:sp>
-        <p:nvSpPr>
-          <p:cNvPr id="31" name="Rectangle 30"/>
-          <p:cNvSpPr/>
-          <p:nvPr/>
-        </p:nvSpPr>
-        <p:spPr>
-          <a:xfrm>
-            <a:off x="502920" y="5029200"/>
-            <a:ext cx="5440680" cy="457200"/>
-          </a:xfrm>
-          <a:prstGeom prst="rect">
-            <a:avLst/>
-          </a:prstGeom>
-          <a:solidFill>
-            <a:srgbClr val="F8F7F2"/>
-          </a:solidFill>
-          <a:ln>
-            <a:noFill/>
-          </a:ln>
-        </p:spPr>
-        <p:style>
-          <a:lnRef idx="1">
-            <a:schemeClr val="accent1"/>
-          </a:lnRef>
-          <a:fillRef idx="3">
-            <a:schemeClr val="accent1"/>
-          </a:fillRef>
-          <a:effectRef idx="2">
-            <a:schemeClr val="accent1"/>
-          </a:effectRef>
-          <a:fontRef idx="minor">
-            <a:schemeClr val="lt1"/>
-          </a:fontRef>
-        </p:style>
-        <p:txBody>
-          <a:bodyPr rtlCol="0" anchor="ctr"/>
-          <a:lstStyle/>
-          <a:p>
-            <a:pPr algn="ctr"/>
-          </a:p>
-        </p:txBody>
-      </p:sp>
-      <p:sp>
-        <p:nvSpPr>
-          <p:cNvPr id="32" name="TextBox 31"/>
-          <p:cNvSpPr txBox="1"/>
-          <p:nvPr/>
-        </p:nvSpPr>
-        <p:spPr>
-          <a:xfrm>
-            <a:off x="685800" y="5120640"/>
-            <a:ext cx="1280160" cy="320040"/>
-          </a:xfrm>
-          <a:prstGeom prst="rect">
-            <a:avLst/>
-          </a:prstGeom>
-          <a:noFill/>
-        </p:spPr>
-        <p:txBody>
-          <a:bodyPr wrap="square" lIns="0" rIns="0" tIns="0" bIns="0">
-            <a:spAutoFit/>
-          </a:bodyPr>
-          <a:lstStyle/>
-          <a:p>
-            <a:pPr>
-              <a:defRPr sz="1300" b="1" i="0">
-                <a:solidFill>
-                  <a:srgbClr val="E56945"/>
-                </a:solidFill>
-                <a:latin typeface="Calibri"/>
-              </a:defRPr>
-            </a:pPr>
-            <a:r>
-              <a:t>RS-SG</a:t>
-            </a:r>
-          </a:p>
-        </p:txBody>
-      </p:sp>
-      <p:sp>
-        <p:nvSpPr>
-          <p:cNvPr id="33" name="TextBox 32"/>
-          <p:cNvSpPr txBox="1"/>
-          <p:nvPr/>
-        </p:nvSpPr>
-        <p:spPr>
-          <a:xfrm>
-            <a:off x="2103120" y="5120640"/>
-            <a:ext cx="1280160" cy="320040"/>
-          </a:xfrm>
-          <a:prstGeom prst="rect">
-            <a:avLst/>
-          </a:prstGeom>
-          <a:noFill/>
-        </p:spPr>
-        <p:txBody>
-          <a:bodyPr wrap="square" lIns="0" rIns="0" tIns="0" bIns="0">
-            <a:spAutoFit/>
-          </a:bodyPr>
-          <a:lstStyle/>
-          <a:p>
-            <a:pPr>
-              <a:defRPr sz="1300" b="1" i="0">
-                <a:solidFill>
-                  <a:srgbClr val="E56945"/>
-                </a:solidFill>
-                <a:latin typeface="Consolas"/>
-              </a:defRPr>
-            </a:pPr>
-            <a:r>
-              <a:t>NaN</a:t>
-            </a:r>
-          </a:p>
-        </p:txBody>
-      </p:sp>
-      <p:sp>
-        <p:nvSpPr>
-          <p:cNvPr id="34" name="TextBox 33"/>
-          <p:cNvSpPr txBox="1"/>
-          <p:nvPr/>
-        </p:nvSpPr>
-        <p:spPr>
-          <a:xfrm>
-            <a:off x="3474720" y="5120640"/>
-            <a:ext cx="1280160" cy="320040"/>
-          </a:xfrm>
-          <a:prstGeom prst="rect">
-            <a:avLst/>
-          </a:prstGeom>
-          <a:noFill/>
-        </p:spPr>
-        <p:txBody>
-          <a:bodyPr wrap="square" lIns="0" rIns="0" tIns="0" bIns="0">
-            <a:spAutoFit/>
-          </a:bodyPr>
-          <a:lstStyle/>
-          <a:p>
-            <a:pPr>
-              <a:defRPr sz="1300" b="1" i="0">
-                <a:solidFill>
-                  <a:srgbClr val="E56945"/>
-                </a:solidFill>
-                <a:latin typeface="Consolas"/>
-              </a:defRPr>
-            </a:pPr>
-            <a:r>
-              <a:t>0.00%</a:t>
-            </a:r>
-          </a:p>
-        </p:txBody>
-      </p:sp>
-      <p:sp>
-        <p:nvSpPr>
-          <p:cNvPr id="35" name="TextBox 34"/>
-          <p:cNvSpPr txBox="1"/>
-          <p:nvPr/>
-        </p:nvSpPr>
-        <p:spPr>
-          <a:xfrm>
-            <a:off x="4846320" y="5120640"/>
-            <a:ext cx="1280160" cy="320040"/>
-          </a:xfrm>
-          <a:prstGeom prst="rect">
-            <a:avLst/>
-          </a:prstGeom>
-          <a:noFill/>
-        </p:spPr>
-        <p:txBody>
-          <a:bodyPr wrap="square" lIns="0" rIns="0" tIns="0" bIns="0">
-            <a:spAutoFit/>
-          </a:bodyPr>
-          <a:lstStyle/>
-          <a:p>
-            <a:pPr>
-              <a:defRPr sz="1300" b="1" i="0">
-                <a:solidFill>
-                  <a:srgbClr val="E56945"/>
-                </a:solidFill>
-                <a:latin typeface="Consolas"/>
-              </a:defRPr>
-            </a:pPr>
-            <a:r>
-              <a:t>NaN</a:t>
-            </a:r>
-          </a:p>
-        </p:txBody>
-      </p:sp>
-      <p:sp>
-        <p:nvSpPr>
-          <p:cNvPr id="36" name="TextBox 35"/>
-          <p:cNvSpPr txBox="1"/>
-          <p:nvPr/>
-        </p:nvSpPr>
-        <p:spPr>
-          <a:xfrm>
-            <a:off x="685800" y="5577840"/>
-            <a:ext cx="1280160" cy="320040"/>
-          </a:xfrm>
-          <a:prstGeom prst="rect">
-            <a:avLst/>
-          </a:prstGeom>
-          <a:noFill/>
-        </p:spPr>
-        <p:txBody>
-          <a:bodyPr wrap="square" lIns="0" rIns="0" tIns="0" bIns="0">
-            <a:spAutoFit/>
-          </a:bodyPr>
-          <a:lstStyle/>
-          <a:p>
-            <a:pPr>
-              <a:defRPr sz="1300" b="1" i="0">
-                <a:solidFill>
-                  <a:srgbClr val="1D7E7E"/>
-                </a:solidFill>
-                <a:latin typeface="Calibri"/>
-              </a:defRPr>
-            </a:pPr>
-            <a:r>
-              <a:t>TrSG</a:t>
-            </a:r>
-          </a:p>
-        </p:txBody>
-      </p:sp>
-      <p:sp>
-        <p:nvSpPr>
-          <p:cNvPr id="37" name="TextBox 36"/>
-          <p:cNvSpPr txBox="1"/>
-          <p:nvPr/>
-        </p:nvSpPr>
-        <p:spPr>
-          <a:xfrm>
-            <a:off x="2103120" y="5577840"/>
-            <a:ext cx="1280160" cy="320040"/>
-          </a:xfrm>
-          <a:prstGeom prst="rect">
-            <a:avLst/>
-          </a:prstGeom>
-          <a:noFill/>
-        </p:spPr>
-        <p:txBody>
-          <a:bodyPr wrap="square" lIns="0" rIns="0" tIns="0" bIns="0">
-            <a:spAutoFit/>
-          </a:bodyPr>
-          <a:lstStyle/>
-          <a:p>
-            <a:pPr>
-              <a:defRPr sz="1300" b="1" i="0">
-                <a:solidFill>
-                  <a:srgbClr val="1D7E7E"/>
-                </a:solidFill>
-                <a:latin typeface="Consolas"/>
-              </a:defRPr>
-            </a:pPr>
-            <a:r>
-              <a:t>0.0153</a:t>
-            </a:r>
-          </a:p>
-        </p:txBody>
-      </p:sp>
-      <p:sp>
-        <p:nvSpPr>
-          <p:cNvPr id="38" name="TextBox 37"/>
-          <p:cNvSpPr txBox="1"/>
-          <p:nvPr/>
-        </p:nvSpPr>
-        <p:spPr>
-          <a:xfrm>
-            <a:off x="3474720" y="5577840"/>
-            <a:ext cx="1280160" cy="320040"/>
-          </a:xfrm>
-          <a:prstGeom prst="rect">
-            <a:avLst/>
-          </a:prstGeom>
-          <a:noFill/>
-        </p:spPr>
-        <p:txBody>
-          <a:bodyPr wrap="square" lIns="0" rIns="0" tIns="0" bIns="0">
-            <a:spAutoFit/>
-          </a:bodyPr>
-          <a:lstStyle/>
-          <a:p>
-            <a:pPr>
-              <a:defRPr sz="1300" b="1" i="0">
-                <a:solidFill>
-                  <a:srgbClr val="1D7E7E"/>
-                </a:solidFill>
-                <a:latin typeface="Consolas"/>
-              </a:defRPr>
-            </a:pPr>
-            <a:r>
-              <a:t>21.45%</a:t>
-            </a:r>
-          </a:p>
-        </p:txBody>
-      </p:sp>
-      <p:sp>
-        <p:nvSpPr>
-          <p:cNvPr id="39" name="TextBox 38"/>
-          <p:cNvSpPr txBox="1"/>
-          <p:nvPr/>
-        </p:nvSpPr>
-        <p:spPr>
-          <a:xfrm>
-            <a:off x="4846320" y="5577840"/>
-            <a:ext cx="1280160" cy="320040"/>
-          </a:xfrm>
-          <a:prstGeom prst="rect">
-            <a:avLst/>
-          </a:prstGeom>
-          <a:noFill/>
-        </p:spPr>
-        <p:txBody>
-          <a:bodyPr wrap="square" lIns="0" rIns="0" tIns="0" bIns="0">
-            <a:spAutoFit/>
-          </a:bodyPr>
-          <a:lstStyle/>
-          <a:p>
-            <a:pPr>
-              <a:defRPr sz="1300" b="1" i="0">
-                <a:solidFill>
-                  <a:srgbClr val="1D7E7E"/>
-                </a:solidFill>
-                <a:latin typeface="Consolas"/>
-              </a:defRPr>
-            </a:pPr>
-            <a:r>
-              <a:t>0.87</a:t>
-            </a:r>
-          </a:p>
-        </p:txBody>
-      </p:sp>
-      <p:sp>
-        <p:nvSpPr>
-          <p:cNvPr id="40" name="Rectangle 39"/>
-          <p:cNvSpPr/>
-          <p:nvPr/>
-        </p:nvSpPr>
-        <p:spPr>
-          <a:xfrm>
-            <a:off x="6199632" y="3703320"/>
-            <a:ext cx="5532120" cy="2377440"/>
-          </a:xfrm>
-          <a:prstGeom prst="rect">
-            <a:avLst/>
-          </a:prstGeom>
-          <a:solidFill>
-            <a:srgbClr val="FFFFFF"/>
-          </a:solidFill>
-          <a:ln w="19050">
-            <a:solidFill>
-              <a:srgbClr val="0F2540"/>
-            </a:solidFill>
-          </a:ln>
-        </p:spPr>
-        <p:style>
-          <a:lnRef idx="1">
-            <a:schemeClr val="accent1"/>
-          </a:lnRef>
-          <a:fillRef idx="3">
-            <a:schemeClr val="accent1"/>
-          </a:fillRef>
-          <a:effectRef idx="2">
-            <a:schemeClr val="accent1"/>
-          </a:effectRef>
-          <a:fontRef idx="minor">
-            <a:schemeClr val="lt1"/>
-          </a:fontRef>
-        </p:style>
-        <p:txBody>
-          <a:bodyPr rtlCol="0" anchor="ctr"/>
-          <a:lstStyle/>
-          <a:p>
-            <a:pPr algn="ctr"/>
-          </a:p>
-        </p:txBody>
-      </p:sp>
-      <p:sp>
-        <p:nvSpPr>
-          <p:cNvPr id="41" name="Rectangle 40"/>
           <p:cNvSpPr/>
           <p:nvPr/>
         </p:nvSpPr>
@@ -8371,7 +7996,7 @@
       </p:sp>
       <p:sp>
         <p:nvSpPr>
-          <p:cNvPr id="42" name="TextBox 41"/>
+          <p:cNvPr id="22" name="TextBox 21"/>
           <p:cNvSpPr txBox="1"/>
           <p:nvPr/>
         </p:nvSpPr>
@@ -8405,714 +8030,429 @@
           </a:p>
         </p:txBody>
       </p:sp>
-      <p:sp>
-        <p:nvSpPr>
-          <p:cNvPr id="43" name="Rectangle 42"/>
-          <p:cNvSpPr/>
-          <p:nvPr/>
-        </p:nvSpPr>
-        <p:spPr>
-          <a:xfrm>
-            <a:off x="6245352" y="4160520"/>
-            <a:ext cx="5440680" cy="365760"/>
-          </a:xfrm>
-          <a:prstGeom prst="rect">
-            <a:avLst/>
-          </a:prstGeom>
-          <a:solidFill>
-            <a:srgbClr val="E5F5F0"/>
-          </a:solidFill>
-          <a:ln>
-            <a:noFill/>
-          </a:ln>
-        </p:spPr>
-        <p:style>
-          <a:lnRef idx="1">
-            <a:schemeClr val="accent1"/>
-          </a:lnRef>
-          <a:fillRef idx="3">
-            <a:schemeClr val="accent1"/>
-          </a:fillRef>
-          <a:effectRef idx="2">
-            <a:schemeClr val="accent1"/>
-          </a:effectRef>
-          <a:fontRef idx="minor">
-            <a:schemeClr val="lt1"/>
-          </a:fontRef>
-        </p:style>
-        <p:txBody>
-          <a:bodyPr rtlCol="0" anchor="ctr"/>
-          <a:lstStyle/>
-          <a:p>
-            <a:pPr algn="ctr"/>
-          </a:p>
-        </p:txBody>
-      </p:sp>
-      <p:sp>
-        <p:nvSpPr>
-          <p:cNvPr id="44" name="TextBox 43"/>
-          <p:cNvSpPr txBox="1"/>
-          <p:nvPr/>
-        </p:nvSpPr>
-        <p:spPr>
-          <a:xfrm>
-            <a:off x="6428232" y="4215383"/>
-            <a:ext cx="1280160" cy="274320"/>
-          </a:xfrm>
-          <a:prstGeom prst="rect">
-            <a:avLst/>
-          </a:prstGeom>
-          <a:noFill/>
-        </p:spPr>
-        <p:txBody>
-          <a:bodyPr wrap="square" lIns="0" rIns="0" tIns="0" bIns="0">
-            <a:spAutoFit/>
-          </a:bodyPr>
-          <a:lstStyle/>
-          <a:p>
-            <a:pPr>
-              <a:defRPr sz="1100" b="1" i="0">
-                <a:solidFill>
-                  <a:srgbClr val="0F2540"/>
-                </a:solidFill>
-                <a:latin typeface="Calibri"/>
-              </a:defRPr>
-            </a:pPr>
-            <a:r>
-              <a:t>SG</a:t>
-            </a:r>
-          </a:p>
-        </p:txBody>
-      </p:sp>
-      <p:sp>
-        <p:nvSpPr>
-          <p:cNvPr id="45" name="TextBox 44"/>
-          <p:cNvSpPr txBox="1"/>
-          <p:nvPr/>
-        </p:nvSpPr>
-        <p:spPr>
-          <a:xfrm>
-            <a:off x="7845552" y="4215383"/>
-            <a:ext cx="1280160" cy="274320"/>
-          </a:xfrm>
-          <a:prstGeom prst="rect">
-            <a:avLst/>
-          </a:prstGeom>
-          <a:noFill/>
-        </p:spPr>
-        <p:txBody>
-          <a:bodyPr wrap="square" lIns="0" rIns="0" tIns="0" bIns="0">
-            <a:spAutoFit/>
-          </a:bodyPr>
-          <a:lstStyle/>
-          <a:p>
-            <a:pPr>
-              <a:defRPr sz="1100" b="1" i="0">
-                <a:solidFill>
-                  <a:srgbClr val="0F2540"/>
-                </a:solidFill>
-                <a:latin typeface="Calibri"/>
-              </a:defRPr>
-            </a:pPr>
-            <a:r>
-              <a:t>AbsStr</a:t>
-            </a:r>
-          </a:p>
-        </p:txBody>
-      </p:sp>
-      <p:sp>
-        <p:nvSpPr>
-          <p:cNvPr id="46" name="TextBox 45"/>
-          <p:cNvSpPr txBox="1"/>
-          <p:nvPr/>
-        </p:nvSpPr>
-        <p:spPr>
-          <a:xfrm>
-            <a:off x="9217152" y="4215383"/>
-            <a:ext cx="1280160" cy="274320"/>
-          </a:xfrm>
-          <a:prstGeom prst="rect">
-            <a:avLst/>
-          </a:prstGeom>
-          <a:noFill/>
-        </p:spPr>
-        <p:txBody>
-          <a:bodyPr wrap="square" lIns="0" rIns="0" tIns="0" bIns="0">
-            <a:spAutoFit/>
-          </a:bodyPr>
-          <a:lstStyle/>
-          <a:p>
-            <a:pPr>
-              <a:defRPr sz="1100" b="1" i="0">
-                <a:solidFill>
-                  <a:srgbClr val="0F2540"/>
-                </a:solidFill>
-                <a:latin typeface="Calibri"/>
-              </a:defRPr>
-            </a:pPr>
-            <a:r>
-              <a:t>RatioAG</a:t>
-            </a:r>
-          </a:p>
-        </p:txBody>
-      </p:sp>
-      <p:sp>
-        <p:nvSpPr>
-          <p:cNvPr id="47" name="TextBox 46"/>
-          <p:cNvSpPr txBox="1"/>
-          <p:nvPr/>
-        </p:nvSpPr>
-        <p:spPr>
-          <a:xfrm>
-            <a:off x="10588752" y="4215383"/>
-            <a:ext cx="1280160" cy="274320"/>
-          </a:xfrm>
-          <a:prstGeom prst="rect">
-            <a:avLst/>
-          </a:prstGeom>
-          <a:noFill/>
-        </p:spPr>
-        <p:txBody>
-          <a:bodyPr wrap="square" lIns="0" rIns="0" tIns="0" bIns="0">
-            <a:spAutoFit/>
-          </a:bodyPr>
-          <a:lstStyle/>
-          <a:p>
-            <a:pPr>
-              <a:defRPr sz="1100" b="1" i="0">
-                <a:solidFill>
-                  <a:srgbClr val="0F2540"/>
-                </a:solidFill>
-                <a:latin typeface="Calibri"/>
-              </a:defRPr>
-            </a:pPr>
-            <a:r>
-              <a:t>GradCV</a:t>
-            </a:r>
-          </a:p>
-        </p:txBody>
-      </p:sp>
-      <p:sp>
-        <p:nvSpPr>
-          <p:cNvPr id="48" name="Rectangle 47"/>
-          <p:cNvSpPr/>
-          <p:nvPr/>
-        </p:nvSpPr>
-        <p:spPr>
-          <a:xfrm>
-            <a:off x="6245352" y="4526280"/>
-            <a:ext cx="5440680" cy="22860"/>
-          </a:xfrm>
-          <a:prstGeom prst="rect">
-            <a:avLst/>
-          </a:prstGeom>
-          <a:solidFill>
-            <a:srgbClr val="1D7E7E"/>
-          </a:solidFill>
-          <a:ln>
-            <a:noFill/>
-          </a:ln>
-        </p:spPr>
-        <p:style>
-          <a:lnRef idx="1">
-            <a:schemeClr val="accent1"/>
-          </a:lnRef>
-          <a:fillRef idx="3">
-            <a:schemeClr val="accent1"/>
-          </a:fillRef>
-          <a:effectRef idx="2">
-            <a:schemeClr val="accent1"/>
-          </a:effectRef>
-          <a:fontRef idx="minor">
-            <a:schemeClr val="lt1"/>
-          </a:fontRef>
-        </p:style>
-        <p:txBody>
-          <a:bodyPr rtlCol="0" anchor="ctr"/>
-          <a:lstStyle/>
-          <a:p>
-            <a:pPr algn="ctr"/>
-          </a:p>
-        </p:txBody>
-      </p:sp>
-      <p:sp>
-        <p:nvSpPr>
-          <p:cNvPr id="49" name="TextBox 48"/>
-          <p:cNvSpPr txBox="1"/>
-          <p:nvPr/>
-        </p:nvSpPr>
-        <p:spPr>
-          <a:xfrm>
-            <a:off x="6428232" y="4663440"/>
-            <a:ext cx="1280160" cy="320040"/>
-          </a:xfrm>
-          <a:prstGeom prst="rect">
-            <a:avLst/>
-          </a:prstGeom>
-          <a:noFill/>
-        </p:spPr>
-        <p:txBody>
-          <a:bodyPr wrap="square" lIns="0" rIns="0" tIns="0" bIns="0">
-            <a:spAutoFit/>
-          </a:bodyPr>
-          <a:lstStyle/>
-          <a:p>
-            <a:pPr>
-              <a:defRPr sz="1300" b="1" i="0">
-                <a:solidFill>
-                  <a:srgbClr val="E56945"/>
-                </a:solidFill>
-                <a:latin typeface="Calibri"/>
-              </a:defRPr>
-            </a:pPr>
-            <a:r>
-              <a:t>AS-SG</a:t>
-            </a:r>
-          </a:p>
-        </p:txBody>
-      </p:sp>
-      <p:sp>
-        <p:nvSpPr>
-          <p:cNvPr id="50" name="TextBox 49"/>
-          <p:cNvSpPr txBox="1"/>
-          <p:nvPr/>
-        </p:nvSpPr>
-        <p:spPr>
-          <a:xfrm>
-            <a:off x="7845552" y="4663440"/>
-            <a:ext cx="1280160" cy="320040"/>
-          </a:xfrm>
-          <a:prstGeom prst="rect">
-            <a:avLst/>
-          </a:prstGeom>
-          <a:noFill/>
-        </p:spPr>
-        <p:txBody>
-          <a:bodyPr wrap="square" lIns="0" rIns="0" tIns="0" bIns="0">
-            <a:spAutoFit/>
-          </a:bodyPr>
-          <a:lstStyle/>
-          <a:p>
-            <a:pPr>
-              <a:defRPr sz="1300" b="1" i="0">
-                <a:solidFill>
-                  <a:srgbClr val="E56945"/>
-                </a:solidFill>
-                <a:latin typeface="Consolas"/>
-              </a:defRPr>
-            </a:pPr>
-            <a:r>
-              <a:t>0.0000</a:t>
-            </a:r>
-          </a:p>
-        </p:txBody>
-      </p:sp>
-      <p:sp>
-        <p:nvSpPr>
-          <p:cNvPr id="51" name="TextBox 50"/>
-          <p:cNvSpPr txBox="1"/>
-          <p:nvPr/>
-        </p:nvSpPr>
-        <p:spPr>
-          <a:xfrm>
-            <a:off x="9217152" y="4663440"/>
-            <a:ext cx="1280160" cy="320040"/>
-          </a:xfrm>
-          <a:prstGeom prst="rect">
-            <a:avLst/>
-          </a:prstGeom>
-          <a:noFill/>
-        </p:spPr>
-        <p:txBody>
-          <a:bodyPr wrap="square" lIns="0" rIns="0" tIns="0" bIns="0">
-            <a:spAutoFit/>
-          </a:bodyPr>
-          <a:lstStyle/>
-          <a:p>
-            <a:pPr>
-              <a:defRPr sz="1300" b="1" i="0">
-                <a:solidFill>
-                  <a:srgbClr val="E56945"/>
-                </a:solidFill>
-                <a:latin typeface="Consolas"/>
-              </a:defRPr>
-            </a:pPr>
-            <a:r>
-              <a:t>0.00%</a:t>
-            </a:r>
-          </a:p>
-        </p:txBody>
-      </p:sp>
-      <p:sp>
-        <p:nvSpPr>
-          <p:cNvPr id="52" name="TextBox 51"/>
-          <p:cNvSpPr txBox="1"/>
-          <p:nvPr/>
-        </p:nvSpPr>
-        <p:spPr>
-          <a:xfrm>
-            <a:off x="10588752" y="4663440"/>
-            <a:ext cx="1280160" cy="320040"/>
-          </a:xfrm>
-          <a:prstGeom prst="rect">
-            <a:avLst/>
-          </a:prstGeom>
-          <a:noFill/>
-        </p:spPr>
-        <p:txBody>
-          <a:bodyPr wrap="square" lIns="0" rIns="0" tIns="0" bIns="0">
-            <a:spAutoFit/>
-          </a:bodyPr>
-          <a:lstStyle/>
-          <a:p>
-            <a:pPr>
-              <a:defRPr sz="1300" b="1" i="0">
-                <a:solidFill>
-                  <a:srgbClr val="E56945"/>
-                </a:solidFill>
-                <a:latin typeface="Consolas"/>
-              </a:defRPr>
-            </a:pPr>
-            <a:r>
-              <a:t>0.000</a:t>
-            </a:r>
-          </a:p>
-        </p:txBody>
-      </p:sp>
-      <p:sp>
-        <p:nvSpPr>
-          <p:cNvPr id="53" name="Rectangle 52"/>
-          <p:cNvSpPr/>
-          <p:nvPr/>
-        </p:nvSpPr>
-        <p:spPr>
-          <a:xfrm>
-            <a:off x="6245352" y="5029200"/>
-            <a:ext cx="5440680" cy="457200"/>
-          </a:xfrm>
-          <a:prstGeom prst="rect">
-            <a:avLst/>
-          </a:prstGeom>
-          <a:solidFill>
-            <a:srgbClr val="F8F7F2"/>
-          </a:solidFill>
-          <a:ln>
-            <a:noFill/>
-          </a:ln>
-        </p:spPr>
-        <p:style>
-          <a:lnRef idx="1">
-            <a:schemeClr val="accent1"/>
-          </a:lnRef>
-          <a:fillRef idx="3">
-            <a:schemeClr val="accent1"/>
-          </a:fillRef>
-          <a:effectRef idx="2">
-            <a:schemeClr val="accent1"/>
-          </a:effectRef>
-          <a:fontRef idx="minor">
-            <a:schemeClr val="lt1"/>
-          </a:fontRef>
-        </p:style>
-        <p:txBody>
-          <a:bodyPr rtlCol="0" anchor="ctr"/>
-          <a:lstStyle/>
-          <a:p>
-            <a:pPr algn="ctr"/>
-          </a:p>
-        </p:txBody>
-      </p:sp>
-      <p:sp>
-        <p:nvSpPr>
-          <p:cNvPr id="54" name="TextBox 53"/>
-          <p:cNvSpPr txBox="1"/>
-          <p:nvPr/>
-        </p:nvSpPr>
-        <p:spPr>
-          <a:xfrm>
-            <a:off x="6428232" y="5120640"/>
-            <a:ext cx="1280160" cy="320040"/>
-          </a:xfrm>
-          <a:prstGeom prst="rect">
-            <a:avLst/>
-          </a:prstGeom>
-          <a:noFill/>
-        </p:spPr>
-        <p:txBody>
-          <a:bodyPr wrap="square" lIns="0" rIns="0" tIns="0" bIns="0">
-            <a:spAutoFit/>
-          </a:bodyPr>
-          <a:lstStyle/>
-          <a:p>
-            <a:pPr>
-              <a:defRPr sz="1300" b="1" i="0">
-                <a:solidFill>
-                  <a:srgbClr val="E56945"/>
-                </a:solidFill>
-                <a:latin typeface="Calibri"/>
-              </a:defRPr>
-            </a:pPr>
-            <a:r>
-              <a:t>RS-SG</a:t>
-            </a:r>
-          </a:p>
-        </p:txBody>
-      </p:sp>
-      <p:sp>
-        <p:nvSpPr>
-          <p:cNvPr id="55" name="TextBox 54"/>
-          <p:cNvSpPr txBox="1"/>
-          <p:nvPr/>
-        </p:nvSpPr>
-        <p:spPr>
-          <a:xfrm>
-            <a:off x="7845552" y="5120640"/>
-            <a:ext cx="1280160" cy="320040"/>
-          </a:xfrm>
-          <a:prstGeom prst="rect">
-            <a:avLst/>
-          </a:prstGeom>
-          <a:noFill/>
-        </p:spPr>
-        <p:txBody>
-          <a:bodyPr wrap="square" lIns="0" rIns="0" tIns="0" bIns="0">
-            <a:spAutoFit/>
-          </a:bodyPr>
-          <a:lstStyle/>
-          <a:p>
-            <a:pPr>
-              <a:defRPr sz="1300" b="1" i="0">
-                <a:solidFill>
-                  <a:srgbClr val="E56945"/>
-                </a:solidFill>
-                <a:latin typeface="Consolas"/>
-              </a:defRPr>
-            </a:pPr>
-            <a:r>
-              <a:t>0.0021</a:t>
-            </a:r>
-          </a:p>
-        </p:txBody>
-      </p:sp>
-      <p:sp>
-        <p:nvSpPr>
-          <p:cNvPr id="56" name="TextBox 55"/>
-          <p:cNvSpPr txBox="1"/>
-          <p:nvPr/>
-        </p:nvSpPr>
-        <p:spPr>
-          <a:xfrm>
-            <a:off x="9217152" y="5120640"/>
-            <a:ext cx="1280160" cy="320040"/>
-          </a:xfrm>
-          <a:prstGeom prst="rect">
-            <a:avLst/>
-          </a:prstGeom>
-          <a:noFill/>
-        </p:spPr>
-        <p:txBody>
-          <a:bodyPr wrap="square" lIns="0" rIns="0" tIns="0" bIns="0">
-            <a:spAutoFit/>
-          </a:bodyPr>
-          <a:lstStyle/>
-          <a:p>
-            <a:pPr>
-              <a:defRPr sz="1300" b="1" i="0">
-                <a:solidFill>
-                  <a:srgbClr val="E56945"/>
-                </a:solidFill>
-                <a:latin typeface="Consolas"/>
-              </a:defRPr>
-            </a:pPr>
-            <a:r>
-              <a:t>0.10%</a:t>
-            </a:r>
-          </a:p>
-        </p:txBody>
-      </p:sp>
-      <p:sp>
-        <p:nvSpPr>
-          <p:cNvPr id="57" name="TextBox 56"/>
-          <p:cNvSpPr txBox="1"/>
-          <p:nvPr/>
-        </p:nvSpPr>
-        <p:spPr>
-          <a:xfrm>
-            <a:off x="10588752" y="5120640"/>
-            <a:ext cx="1280160" cy="320040"/>
-          </a:xfrm>
-          <a:prstGeom prst="rect">
-            <a:avLst/>
-          </a:prstGeom>
-          <a:noFill/>
-        </p:spPr>
-        <p:txBody>
-          <a:bodyPr wrap="square" lIns="0" rIns="0" tIns="0" bIns="0">
-            <a:spAutoFit/>
-          </a:bodyPr>
-          <a:lstStyle/>
-          <a:p>
-            <a:pPr>
-              <a:defRPr sz="1300" b="1" i="0">
-                <a:solidFill>
-                  <a:srgbClr val="E56945"/>
-                </a:solidFill>
-                <a:latin typeface="Consolas"/>
-              </a:defRPr>
-            </a:pPr>
-            <a:r>
-              <a:t>2.25</a:t>
-            </a:r>
-          </a:p>
-        </p:txBody>
-      </p:sp>
-      <p:sp>
-        <p:nvSpPr>
-          <p:cNvPr id="58" name="TextBox 57"/>
-          <p:cNvSpPr txBox="1"/>
-          <p:nvPr/>
-        </p:nvSpPr>
-        <p:spPr>
-          <a:xfrm>
-            <a:off x="6428232" y="5577840"/>
-            <a:ext cx="1280160" cy="320040"/>
-          </a:xfrm>
-          <a:prstGeom prst="rect">
-            <a:avLst/>
-          </a:prstGeom>
-          <a:noFill/>
-        </p:spPr>
-        <p:txBody>
-          <a:bodyPr wrap="square" lIns="0" rIns="0" tIns="0" bIns="0">
-            <a:spAutoFit/>
-          </a:bodyPr>
-          <a:lstStyle/>
-          <a:p>
-            <a:pPr>
-              <a:defRPr sz="1300" b="1" i="0">
-                <a:solidFill>
-                  <a:srgbClr val="1D7E7E"/>
-                </a:solidFill>
-                <a:latin typeface="Calibri"/>
-              </a:defRPr>
-            </a:pPr>
-            <a:r>
-              <a:t>TrSG</a:t>
-            </a:r>
-          </a:p>
-        </p:txBody>
-      </p:sp>
-      <p:sp>
-        <p:nvSpPr>
-          <p:cNvPr id="59" name="TextBox 58"/>
-          <p:cNvSpPr txBox="1"/>
-          <p:nvPr/>
-        </p:nvSpPr>
-        <p:spPr>
-          <a:xfrm>
-            <a:off x="7845552" y="5577840"/>
-            <a:ext cx="1280160" cy="320040"/>
-          </a:xfrm>
-          <a:prstGeom prst="rect">
-            <a:avLst/>
-          </a:prstGeom>
-          <a:noFill/>
-        </p:spPr>
-        <p:txBody>
-          <a:bodyPr wrap="square" lIns="0" rIns="0" tIns="0" bIns="0">
-            <a:spAutoFit/>
-          </a:bodyPr>
-          <a:lstStyle/>
-          <a:p>
-            <a:pPr>
-              <a:defRPr sz="1300" b="1" i="0">
-                <a:solidFill>
-                  <a:srgbClr val="1D7E7E"/>
-                </a:solidFill>
-                <a:latin typeface="Consolas"/>
-              </a:defRPr>
-            </a:pPr>
-            <a:r>
-              <a:t>0.0323</a:t>
-            </a:r>
-          </a:p>
-        </p:txBody>
-      </p:sp>
-      <p:sp>
-        <p:nvSpPr>
-          <p:cNvPr id="60" name="TextBox 59"/>
-          <p:cNvSpPr txBox="1"/>
-          <p:nvPr/>
-        </p:nvSpPr>
-        <p:spPr>
-          <a:xfrm>
-            <a:off x="9217152" y="5577840"/>
-            <a:ext cx="1280160" cy="320040"/>
-          </a:xfrm>
-          <a:prstGeom prst="rect">
-            <a:avLst/>
-          </a:prstGeom>
-          <a:noFill/>
-        </p:spPr>
-        <p:txBody>
-          <a:bodyPr wrap="square" lIns="0" rIns="0" tIns="0" bIns="0">
-            <a:spAutoFit/>
-          </a:bodyPr>
-          <a:lstStyle/>
-          <a:p>
-            <a:pPr>
-              <a:defRPr sz="1300" b="1" i="0">
-                <a:solidFill>
-                  <a:srgbClr val="1D7E7E"/>
-                </a:solidFill>
-                <a:latin typeface="Consolas"/>
-              </a:defRPr>
-            </a:pPr>
-            <a:r>
-              <a:t>6.90%</a:t>
-            </a:r>
-          </a:p>
-        </p:txBody>
-      </p:sp>
-      <p:sp>
-        <p:nvSpPr>
-          <p:cNvPr id="61" name="TextBox 60"/>
-          <p:cNvSpPr txBox="1"/>
-          <p:nvPr/>
-        </p:nvSpPr>
-        <p:spPr>
-          <a:xfrm>
-            <a:off x="10588752" y="5577840"/>
-            <a:ext cx="1280160" cy="320040"/>
-          </a:xfrm>
-          <a:prstGeom prst="rect">
-            <a:avLst/>
-          </a:prstGeom>
-          <a:noFill/>
-        </p:spPr>
-        <p:txBody>
-          <a:bodyPr wrap="square" lIns="0" rIns="0" tIns="0" bIns="0">
-            <a:spAutoFit/>
-          </a:bodyPr>
-          <a:lstStyle/>
-          <a:p>
-            <a:pPr>
-              <a:defRPr sz="1300" b="1" i="0">
-                <a:solidFill>
-                  <a:srgbClr val="1D7E7E"/>
-                </a:solidFill>
-                <a:latin typeface="Consolas"/>
-              </a:defRPr>
-            </a:pPr>
-            <a:r>
-              <a:t>0.73</a:t>
-            </a:r>
-          </a:p>
-        </p:txBody>
-      </p:sp>
-      <p:sp>
-        <p:nvSpPr>
-          <p:cNvPr id="62" name="Rectangle 61"/>
+      <p:graphicFrame>
+        <p:nvGraphicFramePr>
+          <p:cNvPr id="23" name="Table 22"/>
+          <p:cNvGraphicFramePr>
+            <a:graphicFrameLocks noGrp="1"/>
+          </p:cNvGraphicFramePr>
+          <p:nvPr/>
+        </p:nvGraphicFramePr>
+        <p:xfrm>
+          <a:off x="6199632" y="4087368"/>
+          <a:ext cx="5532120" cy="1783080"/>
+        </p:xfrm>
+        <a:graphic>
+          <a:graphicData uri="http://schemas.openxmlformats.org/drawingml/2006/table">
+            <a:tbl>
+              <a:tblPr firstRow="1" bandRow="1">
+                <a:tableStyleId>{5C22544A-7EE6-4342-B048-85BDC9FD1C3A}</a:tableStyleId>
+              </a:tblPr>
+              <a:tblGrid>
+                <a:gridCol w="1325880"/>
+                <a:gridCol w="1371600"/>
+                <a:gridCol w="1417320"/>
+                <a:gridCol w="1417320"/>
+              </a:tblGrid>
+              <a:tr h="411480">
+                <a:tc>
+                  <a:txBody>
+                    <a:bodyPr anchor="ctr"/>
+                    <a:lstStyle/>
+                    <a:p>
+                      <a:pPr algn="l">
+                        <a:defRPr sz="1100" b="1">
+                          <a:solidFill>
+                            <a:srgbClr val="0F2540"/>
+                          </a:solidFill>
+                          <a:latin typeface="Calibri"/>
+                        </a:defRPr>
+                      </a:pPr>
+                      <a:r>
+                        <a:t>SG</a:t>
+                      </a:r>
+                    </a:p>
+                  </a:txBody>
+                  <a:tcPr marL="109728" marR="109728">
+                    <a:solidFill>
+                      <a:srgbClr val="E5F5F0"/>
+                    </a:solidFill>
+                  </a:tcPr>
+                </a:tc>
+                <a:tc>
+                  <a:txBody>
+                    <a:bodyPr anchor="ctr"/>
+                    <a:lstStyle/>
+                    <a:p>
+                      <a:pPr algn="ctr">
+                        <a:defRPr sz="1100" b="1">
+                          <a:solidFill>
+                            <a:srgbClr val="0F2540"/>
+                          </a:solidFill>
+                          <a:latin typeface="Calibri"/>
+                        </a:defRPr>
+                      </a:pPr>
+                      <a:r>
+                        <a:t>AbsStr</a:t>
+                      </a:r>
+                    </a:p>
+                  </a:txBody>
+                  <a:tcPr marL="109728" marR="109728">
+                    <a:solidFill>
+                      <a:srgbClr val="E5F5F0"/>
+                    </a:solidFill>
+                  </a:tcPr>
+                </a:tc>
+                <a:tc>
+                  <a:txBody>
+                    <a:bodyPr anchor="ctr"/>
+                    <a:lstStyle/>
+                    <a:p>
+                      <a:pPr algn="ctr">
+                        <a:defRPr sz="1100" b="1">
+                          <a:solidFill>
+                            <a:srgbClr val="0F2540"/>
+                          </a:solidFill>
+                          <a:latin typeface="Calibri"/>
+                        </a:defRPr>
+                      </a:pPr>
+                      <a:r>
+                        <a:t>RatioAG</a:t>
+                      </a:r>
+                    </a:p>
+                  </a:txBody>
+                  <a:tcPr marL="109728" marR="109728">
+                    <a:solidFill>
+                      <a:srgbClr val="E5F5F0"/>
+                    </a:solidFill>
+                  </a:tcPr>
+                </a:tc>
+                <a:tc>
+                  <a:txBody>
+                    <a:bodyPr anchor="ctr"/>
+                    <a:lstStyle/>
+                    <a:p>
+                      <a:pPr algn="ctr">
+                        <a:defRPr sz="1100" b="1">
+                          <a:solidFill>
+                            <a:srgbClr val="0F2540"/>
+                          </a:solidFill>
+                          <a:latin typeface="Calibri"/>
+                        </a:defRPr>
+                      </a:pPr>
+                      <a:r>
+                        <a:t>GradCV</a:t>
+                      </a:r>
+                    </a:p>
+                  </a:txBody>
+                  <a:tcPr marL="109728" marR="109728">
+                    <a:solidFill>
+                      <a:srgbClr val="E5F5F0"/>
+                    </a:solidFill>
+                  </a:tcPr>
+                </a:tc>
+              </a:tr>
+              <a:tr h="457200">
+                <a:tc>
+                  <a:txBody>
+                    <a:bodyPr anchor="ctr"/>
+                    <a:lstStyle/>
+                    <a:p>
+                      <a:pPr algn="l">
+                        <a:defRPr b="1" sz="1300">
+                          <a:solidFill>
+                            <a:srgbClr val="E56945"/>
+                          </a:solidFill>
+                          <a:latin typeface="Calibri"/>
+                        </a:defRPr>
+                      </a:pPr>
+                      <a:r>
+                        <a:t>AS-SG</a:t>
+                      </a:r>
+                    </a:p>
+                  </a:txBody>
+                  <a:tcPr marL="109728" marR="109728">
+                    <a:solidFill>
+                      <a:srgbClr val="FFFFFF"/>
+                    </a:solidFill>
+                  </a:tcPr>
+                </a:tc>
+                <a:tc>
+                  <a:txBody>
+                    <a:bodyPr anchor="ctr"/>
+                    <a:lstStyle/>
+                    <a:p>
+                      <a:pPr algn="ctr">
+                        <a:defRPr b="1" sz="1300">
+                          <a:solidFill>
+                            <a:srgbClr val="E56945"/>
+                          </a:solidFill>
+                          <a:latin typeface="Consolas"/>
+                        </a:defRPr>
+                      </a:pPr>
+                      <a:r>
+                        <a:t>0.0000</a:t>
+                      </a:r>
+                    </a:p>
+                  </a:txBody>
+                  <a:tcPr marL="109728" marR="109728">
+                    <a:solidFill>
+                      <a:srgbClr val="FFFFFF"/>
+                    </a:solidFill>
+                  </a:tcPr>
+                </a:tc>
+                <a:tc>
+                  <a:txBody>
+                    <a:bodyPr anchor="ctr"/>
+                    <a:lstStyle/>
+                    <a:p>
+                      <a:pPr algn="ctr">
+                        <a:defRPr b="1" sz="1300">
+                          <a:solidFill>
+                            <a:srgbClr val="E56945"/>
+                          </a:solidFill>
+                          <a:latin typeface="Consolas"/>
+                        </a:defRPr>
+                      </a:pPr>
+                      <a:r>
+                        <a:t>0.00%</a:t>
+                      </a:r>
+                    </a:p>
+                  </a:txBody>
+                  <a:tcPr marL="109728" marR="109728">
+                    <a:solidFill>
+                      <a:srgbClr val="FFFFFF"/>
+                    </a:solidFill>
+                  </a:tcPr>
+                </a:tc>
+                <a:tc>
+                  <a:txBody>
+                    <a:bodyPr anchor="ctr"/>
+                    <a:lstStyle/>
+                    <a:p>
+                      <a:pPr algn="ctr">
+                        <a:defRPr b="1" sz="1300">
+                          <a:solidFill>
+                            <a:srgbClr val="E56945"/>
+                          </a:solidFill>
+                          <a:latin typeface="Consolas"/>
+                        </a:defRPr>
+                      </a:pPr>
+                      <a:r>
+                        <a:t>0.000</a:t>
+                      </a:r>
+                    </a:p>
+                  </a:txBody>
+                  <a:tcPr marL="109728" marR="109728">
+                    <a:solidFill>
+                      <a:srgbClr val="FFFFFF"/>
+                    </a:solidFill>
+                  </a:tcPr>
+                </a:tc>
+              </a:tr>
+              <a:tr h="457200">
+                <a:tc>
+                  <a:txBody>
+                    <a:bodyPr anchor="ctr"/>
+                    <a:lstStyle/>
+                    <a:p>
+                      <a:pPr algn="l">
+                        <a:defRPr b="1" sz="1300">
+                          <a:solidFill>
+                            <a:srgbClr val="E56945"/>
+                          </a:solidFill>
+                          <a:latin typeface="Calibri"/>
+                        </a:defRPr>
+                      </a:pPr>
+                      <a:r>
+                        <a:t>RS-SG</a:t>
+                      </a:r>
+                    </a:p>
+                  </a:txBody>
+                  <a:tcPr marL="109728" marR="109728">
+                    <a:solidFill>
+                      <a:srgbClr val="F8F7F2"/>
+                    </a:solidFill>
+                  </a:tcPr>
+                </a:tc>
+                <a:tc>
+                  <a:txBody>
+                    <a:bodyPr anchor="ctr"/>
+                    <a:lstStyle/>
+                    <a:p>
+                      <a:pPr algn="ctr">
+                        <a:defRPr b="1" sz="1300">
+                          <a:solidFill>
+                            <a:srgbClr val="E56945"/>
+                          </a:solidFill>
+                          <a:latin typeface="Consolas"/>
+                        </a:defRPr>
+                      </a:pPr>
+                      <a:r>
+                        <a:t>0.0021</a:t>
+                      </a:r>
+                    </a:p>
+                  </a:txBody>
+                  <a:tcPr marL="109728" marR="109728">
+                    <a:solidFill>
+                      <a:srgbClr val="F8F7F2"/>
+                    </a:solidFill>
+                  </a:tcPr>
+                </a:tc>
+                <a:tc>
+                  <a:txBody>
+                    <a:bodyPr anchor="ctr"/>
+                    <a:lstStyle/>
+                    <a:p>
+                      <a:pPr algn="ctr">
+                        <a:defRPr b="1" sz="1300">
+                          <a:solidFill>
+                            <a:srgbClr val="E56945"/>
+                          </a:solidFill>
+                          <a:latin typeface="Consolas"/>
+                        </a:defRPr>
+                      </a:pPr>
+                      <a:r>
+                        <a:t>0.10%</a:t>
+                      </a:r>
+                    </a:p>
+                  </a:txBody>
+                  <a:tcPr marL="109728" marR="109728">
+                    <a:solidFill>
+                      <a:srgbClr val="F8F7F2"/>
+                    </a:solidFill>
+                  </a:tcPr>
+                </a:tc>
+                <a:tc>
+                  <a:txBody>
+                    <a:bodyPr anchor="ctr"/>
+                    <a:lstStyle/>
+                    <a:p>
+                      <a:pPr algn="ctr">
+                        <a:defRPr b="1" sz="1300">
+                          <a:solidFill>
+                            <a:srgbClr val="E56945"/>
+                          </a:solidFill>
+                          <a:latin typeface="Consolas"/>
+                        </a:defRPr>
+                      </a:pPr>
+                      <a:r>
+                        <a:t>2.25</a:t>
+                      </a:r>
+                    </a:p>
+                  </a:txBody>
+                  <a:tcPr marL="109728" marR="109728">
+                    <a:solidFill>
+                      <a:srgbClr val="F8F7F2"/>
+                    </a:solidFill>
+                  </a:tcPr>
+                </a:tc>
+              </a:tr>
+              <a:tr h="457200">
+                <a:tc>
+                  <a:txBody>
+                    <a:bodyPr anchor="ctr"/>
+                    <a:lstStyle/>
+                    <a:p>
+                      <a:pPr algn="l">
+                        <a:defRPr b="1" sz="1300">
+                          <a:solidFill>
+                            <a:srgbClr val="1D7E7E"/>
+                          </a:solidFill>
+                          <a:latin typeface="Calibri"/>
+                        </a:defRPr>
+                      </a:pPr>
+                      <a:r>
+                        <a:t>TrSG</a:t>
+                      </a:r>
+                    </a:p>
+                  </a:txBody>
+                  <a:tcPr marL="109728" marR="109728">
+                    <a:solidFill>
+                      <a:srgbClr val="FFFFFF"/>
+                    </a:solidFill>
+                  </a:tcPr>
+                </a:tc>
+                <a:tc>
+                  <a:txBody>
+                    <a:bodyPr anchor="ctr"/>
+                    <a:lstStyle/>
+                    <a:p>
+                      <a:pPr algn="ctr">
+                        <a:defRPr b="1" sz="1300">
+                          <a:solidFill>
+                            <a:srgbClr val="1D7E7E"/>
+                          </a:solidFill>
+                          <a:latin typeface="Consolas"/>
+                        </a:defRPr>
+                      </a:pPr>
+                      <a:r>
+                        <a:t>0.0323</a:t>
+                      </a:r>
+                    </a:p>
+                  </a:txBody>
+                  <a:tcPr marL="109728" marR="109728">
+                    <a:solidFill>
+                      <a:srgbClr val="FFFFFF"/>
+                    </a:solidFill>
+                  </a:tcPr>
+                </a:tc>
+                <a:tc>
+                  <a:txBody>
+                    <a:bodyPr anchor="ctr"/>
+                    <a:lstStyle/>
+                    <a:p>
+                      <a:pPr algn="ctr">
+                        <a:defRPr b="1" sz="1300">
+                          <a:solidFill>
+                            <a:srgbClr val="1D7E7E"/>
+                          </a:solidFill>
+                          <a:latin typeface="Consolas"/>
+                        </a:defRPr>
+                      </a:pPr>
+                      <a:r>
+                        <a:t>6.90%</a:t>
+                      </a:r>
+                    </a:p>
+                  </a:txBody>
+                  <a:tcPr marL="109728" marR="109728">
+                    <a:solidFill>
+                      <a:srgbClr val="FFFFFF"/>
+                    </a:solidFill>
+                  </a:tcPr>
+                </a:tc>
+                <a:tc>
+                  <a:txBody>
+                    <a:bodyPr anchor="ctr"/>
+                    <a:lstStyle/>
+                    <a:p>
+                      <a:pPr algn="ctr">
+                        <a:defRPr b="1" sz="1300">
+                          <a:solidFill>
+                            <a:srgbClr val="1D7E7E"/>
+                          </a:solidFill>
+                          <a:latin typeface="Consolas"/>
+                        </a:defRPr>
+                      </a:pPr>
+                      <a:r>
+                        <a:t>0.73</a:t>
+                      </a:r>
+                    </a:p>
+                  </a:txBody>
+                  <a:tcPr marL="109728" marR="109728">
+                    <a:solidFill>
+                      <a:srgbClr val="FFFFFF"/>
+                    </a:solidFill>
+                  </a:tcPr>
+                </a:tc>
+              </a:tr>
+            </a:tbl>
+          </a:graphicData>
+        </a:graphic>
+      </p:graphicFrame>
+      <p:sp>
+        <p:nvSpPr>
+          <p:cNvPr id="24" name="Rectangle 23"/>
           <p:cNvSpPr/>
           <p:nvPr/>
         </p:nvSpPr>
@@ -9155,7 +8495,7 @@
       </p:sp>
       <p:sp>
         <p:nvSpPr>
-          <p:cNvPr id="63" name="Rectangle 62"/>
+          <p:cNvPr id="25" name="Rectangle 24"/>
           <p:cNvSpPr/>
           <p:nvPr/>
         </p:nvSpPr>
@@ -9198,7 +8538,7 @@
       </p:sp>
       <p:sp>
         <p:nvSpPr>
-          <p:cNvPr id="64" name="TextBox 63"/>
+          <p:cNvPr id="26" name="TextBox 25"/>
           <p:cNvSpPr txBox="1"/>
           <p:nvPr/>
         </p:nvSpPr>
@@ -9234,7 +8574,7 @@
       </p:sp>
       <p:sp>
         <p:nvSpPr>
-          <p:cNvPr id="65" name="TextBox 64"/>
+          <p:cNvPr id="27" name="TextBox 26"/>
           <p:cNvSpPr txBox="1"/>
           <p:nvPr/>
         </p:nvSpPr>
@@ -9270,7 +8610,7 @@
       </p:sp>
       <p:sp>
         <p:nvSpPr>
-          <p:cNvPr id="66" name="TextBox 65"/>
+          <p:cNvPr id="28" name="TextBox 27"/>
           <p:cNvSpPr txBox="1"/>
           <p:nvPr/>
         </p:nvSpPr>
@@ -18082,594 +17422,406 @@
           </a:p>
         </p:txBody>
       </p:sp>
-      <p:sp>
-        <p:nvSpPr>
-          <p:cNvPr id="14" name="Rectangle 13"/>
-          <p:cNvSpPr/>
-          <p:nvPr/>
-        </p:nvSpPr>
-        <p:spPr>
-          <a:xfrm>
-            <a:off x="457200" y="5029200"/>
-            <a:ext cx="6583680" cy="1417320"/>
-          </a:xfrm>
-          <a:prstGeom prst="rect">
-            <a:avLst/>
-          </a:prstGeom>
-          <a:solidFill>
-            <a:srgbClr val="F8F7F2"/>
-          </a:solidFill>
-          <a:ln w="6350">
-            <a:solidFill>
-              <a:srgbClr val="E5E5E0"/>
-            </a:solidFill>
-          </a:ln>
-        </p:spPr>
-        <p:style>
-          <a:lnRef idx="1">
-            <a:schemeClr val="accent1"/>
-          </a:lnRef>
-          <a:fillRef idx="3">
-            <a:schemeClr val="accent1"/>
-          </a:fillRef>
-          <a:effectRef idx="2">
-            <a:schemeClr val="accent1"/>
-          </a:effectRef>
-          <a:fontRef idx="minor">
-            <a:schemeClr val="lt1"/>
-          </a:fontRef>
-        </p:style>
-        <p:txBody>
-          <a:bodyPr rtlCol="0" anchor="ctr"/>
-          <a:lstStyle/>
-          <a:p>
-            <a:pPr algn="ctr"/>
-          </a:p>
-        </p:txBody>
-      </p:sp>
-      <p:sp>
-        <p:nvSpPr>
-          <p:cNvPr id="15" name="TextBox 14"/>
-          <p:cNvSpPr txBox="1"/>
-          <p:nvPr/>
-        </p:nvSpPr>
-        <p:spPr>
-          <a:xfrm>
-            <a:off x="731520" y="5120640"/>
-            <a:ext cx="3200400" cy="274320"/>
-          </a:xfrm>
-          <a:prstGeom prst="rect">
-            <a:avLst/>
-          </a:prstGeom>
-          <a:noFill/>
-        </p:spPr>
-        <p:txBody>
-          <a:bodyPr wrap="square" lIns="0" rIns="0" tIns="0" bIns="0">
-            <a:spAutoFit/>
-          </a:bodyPr>
-          <a:lstStyle/>
-          <a:p>
-            <a:pPr>
-              <a:defRPr sz="1100" b="1" i="0">
-                <a:solidFill>
-                  <a:srgbClr val="1D7E7E"/>
-                </a:solidFill>
-                <a:latin typeface="Calibri"/>
-              </a:defRPr>
-            </a:pPr>
-            <a:r>
-              <a:t>Setting</a:t>
-            </a:r>
-          </a:p>
-        </p:txBody>
-      </p:sp>
-      <p:sp>
-        <p:nvSpPr>
-          <p:cNvPr id="16" name="TextBox 15"/>
-          <p:cNvSpPr txBox="1"/>
-          <p:nvPr/>
-        </p:nvSpPr>
-        <p:spPr>
-          <a:xfrm>
-            <a:off x="4114800" y="5120640"/>
-            <a:ext cx="1280160" cy="274320"/>
-          </a:xfrm>
-          <a:prstGeom prst="rect">
-            <a:avLst/>
-          </a:prstGeom>
-          <a:noFill/>
-        </p:spPr>
-        <p:txBody>
-          <a:bodyPr wrap="square" lIns="0" rIns="0" tIns="0" bIns="0">
-            <a:spAutoFit/>
-          </a:bodyPr>
-          <a:lstStyle/>
-          <a:p>
-            <a:pPr algn="ctr">
-              <a:defRPr sz="1100" b="1" i="0">
-                <a:solidFill>
-                  <a:srgbClr val="1D7E7E"/>
-                </a:solidFill>
-                <a:latin typeface="Calibri"/>
-              </a:defRPr>
-            </a:pPr>
-            <a:r>
-              <a:t>Baseline</a:t>
-            </a:r>
-          </a:p>
-        </p:txBody>
-      </p:sp>
-      <p:sp>
-        <p:nvSpPr>
-          <p:cNvPr id="17" name="TextBox 16"/>
-          <p:cNvSpPr txBox="1"/>
-          <p:nvPr/>
-        </p:nvSpPr>
-        <p:spPr>
-          <a:xfrm>
-            <a:off x="5486400" y="5120640"/>
-            <a:ext cx="1280160" cy="274320"/>
-          </a:xfrm>
-          <a:prstGeom prst="rect">
-            <a:avLst/>
-          </a:prstGeom>
-          <a:noFill/>
-        </p:spPr>
-        <p:txBody>
-          <a:bodyPr wrap="square" lIns="0" rIns="0" tIns="0" bIns="0">
-            <a:spAutoFit/>
-          </a:bodyPr>
-          <a:lstStyle/>
-          <a:p>
-            <a:pPr algn="ctr">
-              <a:defRPr sz="1100" b="1" i="0">
-                <a:solidFill>
-                  <a:srgbClr val="1D7E7E"/>
-                </a:solidFill>
-                <a:latin typeface="Calibri"/>
-              </a:defRPr>
-            </a:pPr>
-            <a:r>
-              <a:t>+ MP-Init</a:t>
-            </a:r>
-          </a:p>
-        </p:txBody>
-      </p:sp>
-      <p:sp>
-        <p:nvSpPr>
-          <p:cNvPr id="18" name="TextBox 17"/>
-          <p:cNvSpPr txBox="1"/>
-          <p:nvPr/>
-        </p:nvSpPr>
-        <p:spPr>
-          <a:xfrm>
-            <a:off x="731520" y="5440680"/>
-            <a:ext cx="3200400" cy="228600"/>
-          </a:xfrm>
-          <a:prstGeom prst="rect">
-            <a:avLst/>
-          </a:prstGeom>
-          <a:noFill/>
-        </p:spPr>
-        <p:txBody>
-          <a:bodyPr wrap="square" lIns="0" rIns="0" tIns="0" bIns="0">
-            <a:spAutoFit/>
-          </a:bodyPr>
-          <a:lstStyle/>
-          <a:p>
-            <a:pPr>
-              <a:defRPr sz="1100" b="0" i="0">
-                <a:solidFill>
-                  <a:srgbClr val="1A1A1A"/>
-                </a:solidFill>
-                <a:latin typeface="Calibri"/>
-              </a:defRPr>
-            </a:pPr>
-            <a:r>
-              <a:t>CIFAR-100  ·  T=4  ·  tdBN</a:t>
-            </a:r>
-          </a:p>
-        </p:txBody>
-      </p:sp>
-      <p:sp>
-        <p:nvSpPr>
-          <p:cNvPr id="19" name="TextBox 18"/>
-          <p:cNvSpPr txBox="1"/>
-          <p:nvPr/>
-        </p:nvSpPr>
-        <p:spPr>
-          <a:xfrm>
-            <a:off x="4114800" y="5440680"/>
-            <a:ext cx="1280160" cy="228600"/>
-          </a:xfrm>
-          <a:prstGeom prst="rect">
-            <a:avLst/>
-          </a:prstGeom>
-          <a:noFill/>
-        </p:spPr>
-        <p:txBody>
-          <a:bodyPr wrap="square" lIns="0" rIns="0" tIns="0" bIns="0">
-            <a:spAutoFit/>
-          </a:bodyPr>
-          <a:lstStyle/>
-          <a:p>
-            <a:pPr algn="ctr">
-              <a:defRPr sz="1100" b="0" i="0">
-                <a:solidFill>
-                  <a:srgbClr val="7A7A7A"/>
-                </a:solidFill>
-                <a:latin typeface="Calibri"/>
-              </a:defRPr>
-            </a:pPr>
-            <a:r>
-              <a:t>75.55</a:t>
-            </a:r>
-          </a:p>
-        </p:txBody>
-      </p:sp>
-      <p:sp>
-        <p:nvSpPr>
-          <p:cNvPr id="20" name="TextBox 19"/>
-          <p:cNvSpPr txBox="1"/>
-          <p:nvPr/>
-        </p:nvSpPr>
-        <p:spPr>
-          <a:xfrm>
-            <a:off x="5486400" y="5440680"/>
-            <a:ext cx="1280160" cy="228600"/>
-          </a:xfrm>
-          <a:prstGeom prst="rect">
-            <a:avLst/>
-          </a:prstGeom>
-          <a:noFill/>
-        </p:spPr>
-        <p:txBody>
-          <a:bodyPr wrap="square" lIns="0" rIns="0" tIns="0" bIns="0">
-            <a:spAutoFit/>
-          </a:bodyPr>
-          <a:lstStyle/>
-          <a:p>
-            <a:pPr algn="ctr">
-              <a:defRPr sz="1100" b="1" i="0">
-                <a:solidFill>
-                  <a:srgbClr val="1D7E7E"/>
-                </a:solidFill>
-                <a:latin typeface="Calibri"/>
-              </a:defRPr>
-            </a:pPr>
-            <a:r>
-              <a:t>76.09</a:t>
-            </a:r>
-          </a:p>
-        </p:txBody>
-      </p:sp>
-      <p:sp>
-        <p:nvSpPr>
-          <p:cNvPr id="21" name="TextBox 20"/>
-          <p:cNvSpPr txBox="1"/>
-          <p:nvPr/>
-        </p:nvSpPr>
-        <p:spPr>
-          <a:xfrm>
-            <a:off x="731520" y="5678424"/>
-            <a:ext cx="3200400" cy="228600"/>
-          </a:xfrm>
-          <a:prstGeom prst="rect">
-            <a:avLst/>
-          </a:prstGeom>
-          <a:noFill/>
-        </p:spPr>
-        <p:txBody>
-          <a:bodyPr wrap="square" lIns="0" rIns="0" tIns="0" bIns="0">
-            <a:spAutoFit/>
-          </a:bodyPr>
-          <a:lstStyle/>
-          <a:p>
-            <a:pPr>
-              <a:defRPr sz="1100" b="0" i="0">
-                <a:solidFill>
-                  <a:srgbClr val="1A1A1A"/>
-                </a:solidFill>
-                <a:latin typeface="Calibri"/>
-              </a:defRPr>
-            </a:pPr>
-            <a:r>
-              <a:t>CIFAR-100  ·  T=4  ·  TEBN</a:t>
-            </a:r>
-          </a:p>
-        </p:txBody>
-      </p:sp>
-      <p:sp>
-        <p:nvSpPr>
-          <p:cNvPr id="22" name="TextBox 21"/>
-          <p:cNvSpPr txBox="1"/>
-          <p:nvPr/>
-        </p:nvSpPr>
-        <p:spPr>
-          <a:xfrm>
-            <a:off x="4114800" y="5678424"/>
-            <a:ext cx="1280160" cy="228600"/>
-          </a:xfrm>
-          <a:prstGeom prst="rect">
-            <a:avLst/>
-          </a:prstGeom>
-          <a:noFill/>
-        </p:spPr>
-        <p:txBody>
-          <a:bodyPr wrap="square" lIns="0" rIns="0" tIns="0" bIns="0">
-            <a:spAutoFit/>
-          </a:bodyPr>
-          <a:lstStyle/>
-          <a:p>
-            <a:pPr algn="ctr">
-              <a:defRPr sz="1100" b="0" i="0">
-                <a:solidFill>
-                  <a:srgbClr val="7A7A7A"/>
-                </a:solidFill>
-                <a:latin typeface="Calibri"/>
-              </a:defRPr>
-            </a:pPr>
-            <a:r>
-              <a:t>75.96</a:t>
-            </a:r>
-          </a:p>
-        </p:txBody>
-      </p:sp>
-      <p:sp>
-        <p:nvSpPr>
-          <p:cNvPr id="23" name="TextBox 22"/>
-          <p:cNvSpPr txBox="1"/>
-          <p:nvPr/>
-        </p:nvSpPr>
-        <p:spPr>
-          <a:xfrm>
-            <a:off x="5486400" y="5678424"/>
-            <a:ext cx="1280160" cy="228600"/>
-          </a:xfrm>
-          <a:prstGeom prst="rect">
-            <a:avLst/>
-          </a:prstGeom>
-          <a:noFill/>
-        </p:spPr>
-        <p:txBody>
-          <a:bodyPr wrap="square" lIns="0" rIns="0" tIns="0" bIns="0">
-            <a:spAutoFit/>
-          </a:bodyPr>
-          <a:lstStyle/>
-          <a:p>
-            <a:pPr algn="ctr">
-              <a:defRPr sz="1100" b="1" i="0">
-                <a:solidFill>
-                  <a:srgbClr val="1D7E7E"/>
-                </a:solidFill>
-                <a:latin typeface="Calibri"/>
-              </a:defRPr>
-            </a:pPr>
-            <a:r>
-              <a:t>76.45</a:t>
-            </a:r>
-          </a:p>
-        </p:txBody>
-      </p:sp>
-      <p:sp>
-        <p:nvSpPr>
-          <p:cNvPr id="24" name="TextBox 23"/>
-          <p:cNvSpPr txBox="1"/>
-          <p:nvPr/>
-        </p:nvSpPr>
-        <p:spPr>
-          <a:xfrm>
-            <a:off x="731520" y="5916168"/>
-            <a:ext cx="3200400" cy="228600"/>
-          </a:xfrm>
-          <a:prstGeom prst="rect">
-            <a:avLst/>
-          </a:prstGeom>
-          <a:noFill/>
-        </p:spPr>
-        <p:txBody>
-          <a:bodyPr wrap="square" lIns="0" rIns="0" tIns="0" bIns="0">
-            <a:spAutoFit/>
-          </a:bodyPr>
-          <a:lstStyle/>
-          <a:p>
-            <a:pPr>
-              <a:defRPr sz="1100" b="0" i="0">
-                <a:solidFill>
-                  <a:srgbClr val="1A1A1A"/>
-                </a:solidFill>
-                <a:latin typeface="Calibri"/>
-              </a:defRPr>
-            </a:pPr>
-            <a:r>
-              <a:t>CIFAR-100  ·  T=4  ·  TAB</a:t>
-            </a:r>
-          </a:p>
-        </p:txBody>
-      </p:sp>
-      <p:sp>
-        <p:nvSpPr>
-          <p:cNvPr id="25" name="TextBox 24"/>
-          <p:cNvSpPr txBox="1"/>
-          <p:nvPr/>
-        </p:nvSpPr>
-        <p:spPr>
-          <a:xfrm>
-            <a:off x="4114800" y="5916168"/>
-            <a:ext cx="1280160" cy="228600"/>
-          </a:xfrm>
-          <a:prstGeom prst="rect">
-            <a:avLst/>
-          </a:prstGeom>
-          <a:noFill/>
-        </p:spPr>
-        <p:txBody>
-          <a:bodyPr wrap="square" lIns="0" rIns="0" tIns="0" bIns="0">
-            <a:spAutoFit/>
-          </a:bodyPr>
-          <a:lstStyle/>
-          <a:p>
-            <a:pPr algn="ctr">
-              <a:defRPr sz="1100" b="0" i="0">
-                <a:solidFill>
-                  <a:srgbClr val="7A7A7A"/>
-                </a:solidFill>
-                <a:latin typeface="Calibri"/>
-              </a:defRPr>
-            </a:pPr>
-            <a:r>
-              <a:t>76.25</a:t>
-            </a:r>
-          </a:p>
-        </p:txBody>
-      </p:sp>
-      <p:sp>
-        <p:nvSpPr>
-          <p:cNvPr id="26" name="TextBox 25"/>
-          <p:cNvSpPr txBox="1"/>
-          <p:nvPr/>
-        </p:nvSpPr>
-        <p:spPr>
-          <a:xfrm>
-            <a:off x="5486400" y="5916168"/>
-            <a:ext cx="1280160" cy="228600"/>
-          </a:xfrm>
-          <a:prstGeom prst="rect">
-            <a:avLst/>
-          </a:prstGeom>
-          <a:noFill/>
-        </p:spPr>
-        <p:txBody>
-          <a:bodyPr wrap="square" lIns="0" rIns="0" tIns="0" bIns="0">
-            <a:spAutoFit/>
-          </a:bodyPr>
-          <a:lstStyle/>
-          <a:p>
-            <a:pPr algn="ctr">
-              <a:defRPr sz="1100" b="1" i="0">
-                <a:solidFill>
-                  <a:srgbClr val="1D7E7E"/>
-                </a:solidFill>
-                <a:latin typeface="Calibri"/>
-              </a:defRPr>
-            </a:pPr>
-            <a:r>
-              <a:t>77.24</a:t>
-            </a:r>
-          </a:p>
-        </p:txBody>
-      </p:sp>
-      <p:sp>
-        <p:nvSpPr>
-          <p:cNvPr id="27" name="TextBox 26"/>
-          <p:cNvSpPr txBox="1"/>
-          <p:nvPr/>
-        </p:nvSpPr>
-        <p:spPr>
-          <a:xfrm>
-            <a:off x="731520" y="6153912"/>
-            <a:ext cx="3200400" cy="228600"/>
-          </a:xfrm>
-          <a:prstGeom prst="rect">
-            <a:avLst/>
-          </a:prstGeom>
-          <a:noFill/>
-        </p:spPr>
-        <p:txBody>
-          <a:bodyPr wrap="square" lIns="0" rIns="0" tIns="0" bIns="0">
-            <a:spAutoFit/>
-          </a:bodyPr>
-          <a:lstStyle/>
-          <a:p>
-            <a:pPr>
-              <a:defRPr sz="1100" b="0" i="0">
-                <a:solidFill>
-                  <a:srgbClr val="1A1A1A"/>
-                </a:solidFill>
-                <a:latin typeface="Calibri"/>
-              </a:defRPr>
-            </a:pPr>
-            <a:r>
-              <a:t>DVS-CIFAR10  ·  T=10  ·  tdBN</a:t>
-            </a:r>
-          </a:p>
-        </p:txBody>
-      </p:sp>
-      <p:sp>
-        <p:nvSpPr>
-          <p:cNvPr id="28" name="TextBox 27"/>
-          <p:cNvSpPr txBox="1"/>
-          <p:nvPr/>
-        </p:nvSpPr>
-        <p:spPr>
-          <a:xfrm>
-            <a:off x="4114800" y="6153912"/>
-            <a:ext cx="1280160" cy="228600"/>
-          </a:xfrm>
-          <a:prstGeom prst="rect">
-            <a:avLst/>
-          </a:prstGeom>
-          <a:noFill/>
-        </p:spPr>
-        <p:txBody>
-          <a:bodyPr wrap="square" lIns="0" rIns="0" tIns="0" bIns="0">
-            <a:spAutoFit/>
-          </a:bodyPr>
-          <a:lstStyle/>
-          <a:p>
-            <a:pPr algn="ctr">
-              <a:defRPr sz="1100" b="0" i="0">
-                <a:solidFill>
-                  <a:srgbClr val="7A7A7A"/>
-                </a:solidFill>
-                <a:latin typeface="Calibri"/>
-              </a:defRPr>
-            </a:pPr>
-            <a:r>
-              <a:t>76.60</a:t>
-            </a:r>
-          </a:p>
-        </p:txBody>
-      </p:sp>
-      <p:sp>
-        <p:nvSpPr>
-          <p:cNvPr id="29" name="TextBox 28"/>
-          <p:cNvSpPr txBox="1"/>
-          <p:nvPr/>
-        </p:nvSpPr>
-        <p:spPr>
-          <a:xfrm>
-            <a:off x="5486400" y="6153912"/>
-            <a:ext cx="1280160" cy="228600"/>
-          </a:xfrm>
-          <a:prstGeom prst="rect">
-            <a:avLst/>
-          </a:prstGeom>
-          <a:noFill/>
-        </p:spPr>
-        <p:txBody>
-          <a:bodyPr wrap="square" lIns="0" rIns="0" tIns="0" bIns="0">
-            <a:spAutoFit/>
-          </a:bodyPr>
-          <a:lstStyle/>
-          <a:p>
-            <a:pPr algn="ctr">
-              <a:defRPr sz="1100" b="1" i="0">
-                <a:solidFill>
-                  <a:srgbClr val="1D7E7E"/>
-                </a:solidFill>
-                <a:latin typeface="Calibri"/>
-              </a:defRPr>
-            </a:pPr>
-            <a:r>
-              <a:t>77.37</a:t>
-            </a:r>
-          </a:p>
-        </p:txBody>
-      </p:sp>
-      <p:sp>
-        <p:nvSpPr>
-          <p:cNvPr id="30" name="Rectangle 29"/>
+      <p:graphicFrame>
+        <p:nvGraphicFramePr>
+          <p:cNvPr id="14" name="Table 13"/>
+          <p:cNvGraphicFramePr>
+            <a:graphicFrameLocks noGrp="1"/>
+          </p:cNvGraphicFramePr>
+          <p:nvPr/>
+        </p:nvGraphicFramePr>
+        <p:xfrm>
+          <a:off x="457200" y="5029200"/>
+          <a:ext cx="6583680" cy="1417320"/>
+        </p:xfrm>
+        <a:graphic>
+          <a:graphicData uri="http://schemas.openxmlformats.org/drawingml/2006/table">
+            <a:tbl>
+              <a:tblPr firstRow="1" bandRow="1">
+                <a:tableStyleId>{5C22544A-7EE6-4342-B048-85BDC9FD1C3A}</a:tableStyleId>
+              </a:tblPr>
+              <a:tblGrid>
+                <a:gridCol w="3840480"/>
+                <a:gridCol w="1371600"/>
+                <a:gridCol w="1371600"/>
+              </a:tblGrid>
+              <a:tr h="320040">
+                <a:tc>
+                  <a:txBody>
+                    <a:bodyPr anchor="ctr"/>
+                    <a:lstStyle/>
+                    <a:p>
+                      <a:pPr algn="l">
+                        <a:defRPr sz="1100" b="1">
+                          <a:solidFill>
+                            <a:srgbClr val="0F2540"/>
+                          </a:solidFill>
+                          <a:latin typeface="Calibri"/>
+                        </a:defRPr>
+                      </a:pPr>
+                      <a:r>
+                        <a:t>Setting</a:t>
+                      </a:r>
+                    </a:p>
+                  </a:txBody>
+                  <a:tcPr marL="137160" marR="137160">
+                    <a:solidFill>
+                      <a:srgbClr val="E5F5F0"/>
+                    </a:solidFill>
+                  </a:tcPr>
+                </a:tc>
+                <a:tc>
+                  <a:txBody>
+                    <a:bodyPr anchor="ctr"/>
+                    <a:lstStyle/>
+                    <a:p>
+                      <a:pPr algn="ctr">
+                        <a:defRPr sz="1100" b="1">
+                          <a:solidFill>
+                            <a:srgbClr val="0F2540"/>
+                          </a:solidFill>
+                          <a:latin typeface="Calibri"/>
+                        </a:defRPr>
+                      </a:pPr>
+                      <a:r>
+                        <a:t>Baseline</a:t>
+                      </a:r>
+                    </a:p>
+                  </a:txBody>
+                  <a:tcPr marL="137160" marR="137160">
+                    <a:solidFill>
+                      <a:srgbClr val="E5F5F0"/>
+                    </a:solidFill>
+                  </a:tcPr>
+                </a:tc>
+                <a:tc>
+                  <a:txBody>
+                    <a:bodyPr anchor="ctr"/>
+                    <a:lstStyle/>
+                    <a:p>
+                      <a:pPr algn="ctr">
+                        <a:defRPr sz="1100" b="1">
+                          <a:solidFill>
+                            <a:srgbClr val="0F2540"/>
+                          </a:solidFill>
+                          <a:latin typeface="Calibri"/>
+                        </a:defRPr>
+                      </a:pPr>
+                      <a:r>
+                        <a:t>+ MP-Init</a:t>
+                      </a:r>
+                    </a:p>
+                  </a:txBody>
+                  <a:tcPr marL="137160" marR="137160">
+                    <a:solidFill>
+                      <a:srgbClr val="E5F5F0"/>
+                    </a:solidFill>
+                  </a:tcPr>
+                </a:tc>
+              </a:tr>
+              <a:tr h="274320">
+                <a:tc>
+                  <a:txBody>
+                    <a:bodyPr anchor="ctr"/>
+                    <a:lstStyle/>
+                    <a:p>
+                      <a:pPr algn="l">
+                        <a:defRPr sz="1100" b="0">
+                          <a:solidFill>
+                            <a:srgbClr val="1A1A1A"/>
+                          </a:solidFill>
+                          <a:latin typeface="Calibri"/>
+                        </a:defRPr>
+                      </a:pPr>
+                      <a:r>
+                        <a:t>CIFAR-100  ·  T=4  ·  tdBN</a:t>
+                      </a:r>
+                    </a:p>
+                  </a:txBody>
+                  <a:tcPr marL="137160" marR="137160">
+                    <a:solidFill>
+                      <a:srgbClr val="FFFFFF"/>
+                    </a:solidFill>
+                  </a:tcPr>
+                </a:tc>
+                <a:tc>
+                  <a:txBody>
+                    <a:bodyPr anchor="ctr"/>
+                    <a:lstStyle/>
+                    <a:p>
+                      <a:pPr algn="ctr">
+                        <a:defRPr sz="1100" b="0">
+                          <a:solidFill>
+                            <a:srgbClr val="7A7A7A"/>
+                          </a:solidFill>
+                          <a:latin typeface="Calibri"/>
+                        </a:defRPr>
+                      </a:pPr>
+                      <a:r>
+                        <a:t>75.55</a:t>
+                      </a:r>
+                    </a:p>
+                  </a:txBody>
+                  <a:tcPr marL="137160" marR="137160">
+                    <a:solidFill>
+                      <a:srgbClr val="FFFFFF"/>
+                    </a:solidFill>
+                  </a:tcPr>
+                </a:tc>
+                <a:tc>
+                  <a:txBody>
+                    <a:bodyPr anchor="ctr"/>
+                    <a:lstStyle/>
+                    <a:p>
+                      <a:pPr algn="ctr">
+                        <a:defRPr sz="1100" b="1">
+                          <a:solidFill>
+                            <a:srgbClr val="1D7E7E"/>
+                          </a:solidFill>
+                          <a:latin typeface="Calibri"/>
+                        </a:defRPr>
+                      </a:pPr>
+                      <a:r>
+                        <a:t>76.09</a:t>
+                      </a:r>
+                    </a:p>
+                  </a:txBody>
+                  <a:tcPr marL="137160" marR="137160">
+                    <a:solidFill>
+                      <a:srgbClr val="FFFFFF"/>
+                    </a:solidFill>
+                  </a:tcPr>
+                </a:tc>
+              </a:tr>
+              <a:tr h="274320">
+                <a:tc>
+                  <a:txBody>
+                    <a:bodyPr anchor="ctr"/>
+                    <a:lstStyle/>
+                    <a:p>
+                      <a:pPr algn="l">
+                        <a:defRPr sz="1100" b="0">
+                          <a:solidFill>
+                            <a:srgbClr val="1A1A1A"/>
+                          </a:solidFill>
+                          <a:latin typeface="Calibri"/>
+                        </a:defRPr>
+                      </a:pPr>
+                      <a:r>
+                        <a:t>CIFAR-100  ·  T=4  ·  TEBN</a:t>
+                      </a:r>
+                    </a:p>
+                  </a:txBody>
+                  <a:tcPr marL="137160" marR="137160">
+                    <a:solidFill>
+                      <a:srgbClr val="F8F7F2"/>
+                    </a:solidFill>
+                  </a:tcPr>
+                </a:tc>
+                <a:tc>
+                  <a:txBody>
+                    <a:bodyPr anchor="ctr"/>
+                    <a:lstStyle/>
+                    <a:p>
+                      <a:pPr algn="ctr">
+                        <a:defRPr sz="1100" b="0">
+                          <a:solidFill>
+                            <a:srgbClr val="7A7A7A"/>
+                          </a:solidFill>
+                          <a:latin typeface="Calibri"/>
+                        </a:defRPr>
+                      </a:pPr>
+                      <a:r>
+                        <a:t>75.96</a:t>
+                      </a:r>
+                    </a:p>
+                  </a:txBody>
+                  <a:tcPr marL="137160" marR="137160">
+                    <a:solidFill>
+                      <a:srgbClr val="F8F7F2"/>
+                    </a:solidFill>
+                  </a:tcPr>
+                </a:tc>
+                <a:tc>
+                  <a:txBody>
+                    <a:bodyPr anchor="ctr"/>
+                    <a:lstStyle/>
+                    <a:p>
+                      <a:pPr algn="ctr">
+                        <a:defRPr sz="1100" b="1">
+                          <a:solidFill>
+                            <a:srgbClr val="1D7E7E"/>
+                          </a:solidFill>
+                          <a:latin typeface="Calibri"/>
+                        </a:defRPr>
+                      </a:pPr>
+                      <a:r>
+                        <a:t>76.45</a:t>
+                      </a:r>
+                    </a:p>
+                  </a:txBody>
+                  <a:tcPr marL="137160" marR="137160">
+                    <a:solidFill>
+                      <a:srgbClr val="F8F7F2"/>
+                    </a:solidFill>
+                  </a:tcPr>
+                </a:tc>
+              </a:tr>
+              <a:tr h="274320">
+                <a:tc>
+                  <a:txBody>
+                    <a:bodyPr anchor="ctr"/>
+                    <a:lstStyle/>
+                    <a:p>
+                      <a:pPr algn="l">
+                        <a:defRPr sz="1100" b="0">
+                          <a:solidFill>
+                            <a:srgbClr val="1A1A1A"/>
+                          </a:solidFill>
+                          <a:latin typeface="Calibri"/>
+                        </a:defRPr>
+                      </a:pPr>
+                      <a:r>
+                        <a:t>CIFAR-100  ·  T=4  ·  TAB</a:t>
+                      </a:r>
+                    </a:p>
+                  </a:txBody>
+                  <a:tcPr marL="137160" marR="137160">
+                    <a:solidFill>
+                      <a:srgbClr val="FFFFFF"/>
+                    </a:solidFill>
+                  </a:tcPr>
+                </a:tc>
+                <a:tc>
+                  <a:txBody>
+                    <a:bodyPr anchor="ctr"/>
+                    <a:lstStyle/>
+                    <a:p>
+                      <a:pPr algn="ctr">
+                        <a:defRPr sz="1100" b="0">
+                          <a:solidFill>
+                            <a:srgbClr val="7A7A7A"/>
+                          </a:solidFill>
+                          <a:latin typeface="Calibri"/>
+                        </a:defRPr>
+                      </a:pPr>
+                      <a:r>
+                        <a:t>76.25</a:t>
+                      </a:r>
+                    </a:p>
+                  </a:txBody>
+                  <a:tcPr marL="137160" marR="137160">
+                    <a:solidFill>
+                      <a:srgbClr val="FFFFFF"/>
+                    </a:solidFill>
+                  </a:tcPr>
+                </a:tc>
+                <a:tc>
+                  <a:txBody>
+                    <a:bodyPr anchor="ctr"/>
+                    <a:lstStyle/>
+                    <a:p>
+                      <a:pPr algn="ctr">
+                        <a:defRPr sz="1100" b="1">
+                          <a:solidFill>
+                            <a:srgbClr val="1D7E7E"/>
+                          </a:solidFill>
+                          <a:latin typeface="Calibri"/>
+                        </a:defRPr>
+                      </a:pPr>
+                      <a:r>
+                        <a:t>77.24</a:t>
+                      </a:r>
+                    </a:p>
+                  </a:txBody>
+                  <a:tcPr marL="137160" marR="137160">
+                    <a:solidFill>
+                      <a:srgbClr val="FFFFFF"/>
+                    </a:solidFill>
+                  </a:tcPr>
+                </a:tc>
+              </a:tr>
+              <a:tr h="274320">
+                <a:tc>
+                  <a:txBody>
+                    <a:bodyPr anchor="ctr"/>
+                    <a:lstStyle/>
+                    <a:p>
+                      <a:pPr algn="l">
+                        <a:defRPr sz="1100" b="0">
+                          <a:solidFill>
+                            <a:srgbClr val="1A1A1A"/>
+                          </a:solidFill>
+                          <a:latin typeface="Calibri"/>
+                        </a:defRPr>
+                      </a:pPr>
+                      <a:r>
+                        <a:t>DVS-CIFAR10  ·  T=10  ·  tdBN</a:t>
+                      </a:r>
+                    </a:p>
+                  </a:txBody>
+                  <a:tcPr marL="137160" marR="137160">
+                    <a:solidFill>
+                      <a:srgbClr val="F8F7F2"/>
+                    </a:solidFill>
+                  </a:tcPr>
+                </a:tc>
+                <a:tc>
+                  <a:txBody>
+                    <a:bodyPr anchor="ctr"/>
+                    <a:lstStyle/>
+                    <a:p>
+                      <a:pPr algn="ctr">
+                        <a:defRPr sz="1100" b="0">
+                          <a:solidFill>
+                            <a:srgbClr val="7A7A7A"/>
+                          </a:solidFill>
+                          <a:latin typeface="Calibri"/>
+                        </a:defRPr>
+                      </a:pPr>
+                      <a:r>
+                        <a:t>76.60</a:t>
+                      </a:r>
+                    </a:p>
+                  </a:txBody>
+                  <a:tcPr marL="137160" marR="137160">
+                    <a:solidFill>
+                      <a:srgbClr val="F8F7F2"/>
+                    </a:solidFill>
+                  </a:tcPr>
+                </a:tc>
+                <a:tc>
+                  <a:txBody>
+                    <a:bodyPr anchor="ctr"/>
+                    <a:lstStyle/>
+                    <a:p>
+                      <a:pPr algn="ctr">
+                        <a:defRPr sz="1100" b="1">
+                          <a:solidFill>
+                            <a:srgbClr val="1D7E7E"/>
+                          </a:solidFill>
+                          <a:latin typeface="Calibri"/>
+                        </a:defRPr>
+                      </a:pPr>
+                      <a:r>
+                        <a:t>77.37</a:t>
+                      </a:r>
+                    </a:p>
+                  </a:txBody>
+                  <a:tcPr marL="137160" marR="137160">
+                    <a:solidFill>
+                      <a:srgbClr val="F8F7F2"/>
+                    </a:solidFill>
+                  </a:tcPr>
+                </a:tc>
+              </a:tr>
+            </a:tbl>
+          </a:graphicData>
+        </a:graphic>
+      </p:graphicFrame>
+      <p:sp>
+        <p:nvSpPr>
+          <p:cNvPr id="15" name="Rectangle 14"/>
           <p:cNvSpPr/>
           <p:nvPr/>
         </p:nvSpPr>
@@ -18714,7 +17866,7 @@
       </p:sp>
       <p:sp>
         <p:nvSpPr>
-          <p:cNvPr id="31" name="TextBox 30"/>
+          <p:cNvPr id="16" name="TextBox 15"/>
           <p:cNvSpPr txBox="1"/>
           <p:nvPr/>
         </p:nvSpPr>
@@ -18750,7 +17902,7 @@
       </p:sp>
       <p:sp>
         <p:nvSpPr>
-          <p:cNvPr id="32" name="TextBox 31"/>
+          <p:cNvPr id="17" name="TextBox 16"/>
           <p:cNvSpPr txBox="1"/>
           <p:nvPr/>
         </p:nvSpPr>
@@ -18790,7 +17942,7 @@
       </p:sp>
       <p:sp>
         <p:nvSpPr>
-          <p:cNvPr id="33" name="TextBox 32"/>
+          <p:cNvPr id="18" name="TextBox 17"/>
           <p:cNvSpPr txBox="1"/>
           <p:nvPr/>
         </p:nvSpPr>
@@ -18826,7 +17978,7 @@
       </p:sp>
       <p:sp>
         <p:nvSpPr>
-          <p:cNvPr id="34" name="TextBox 33"/>
+          <p:cNvPr id="19" name="TextBox 18"/>
           <p:cNvSpPr txBox="1"/>
           <p:nvPr/>
         </p:nvSpPr>

--- a/Hyunho_Kook_Master_Defense.pptx
+++ b/Hyunho_Kook_Master_Defense.pptx
@@ -25,6 +25,14 @@
     <p:sldId id="273" r:id="rId24"/>
     <p:sldId id="274" r:id="rId25"/>
     <p:sldId id="275" r:id="rId26"/>
+    <p:sldId id="276" r:id="rId27"/>
+    <p:sldId id="277" r:id="rId28"/>
+    <p:sldId id="278" r:id="rId29"/>
+    <p:sldId id="279" r:id="rId30"/>
+    <p:sldId id="280" r:id="rId31"/>
+    <p:sldId id="281" r:id="rId32"/>
+    <p:sldId id="282" r:id="rId33"/>
+    <p:sldId id="283" r:id="rId34"/>
   </p:sldIdLst>
   <p:sldSz cx="12191695" cy="6858000" type="screen4x3"/>
   <p:notesSz cx="6858000" cy="9144000"/>
@@ -13547,6 +13555,9190 @@
 </p:sld>
 </file>
 
+<file path=ppt/slides/slide21.xml><?xml version="1.0" encoding="utf-8"?>
+<p:sld xmlns:a="http://schemas.openxmlformats.org/drawingml/2006/main" xmlns:p="http://schemas.openxmlformats.org/presentationml/2006/main" xmlns:r="http://schemas.openxmlformats.org/officeDocument/2006/relationships">
+  <p:cSld>
+    <p:spTree>
+      <p:nvGrpSpPr>
+        <p:cNvPr id="1" name=""/>
+        <p:cNvGrpSpPr/>
+        <p:nvPr/>
+      </p:nvGrpSpPr>
+      <p:grpSpPr/>
+      <p:sp>
+        <p:nvSpPr>
+          <p:cNvPr id="2" name="Rectangle 1"/>
+          <p:cNvSpPr/>
+          <p:nvPr/>
+        </p:nvSpPr>
+        <p:spPr>
+          <a:xfrm>
+            <a:off x="0" y="0"/>
+            <a:ext cx="12191695" cy="6858000"/>
+          </a:xfrm>
+          <a:prstGeom prst="rect">
+            <a:avLst/>
+          </a:prstGeom>
+          <a:solidFill>
+            <a:srgbClr val="0F2540"/>
+          </a:solidFill>
+          <a:ln>
+            <a:noFill/>
+          </a:ln>
+          <a:effectLst/>
+        </p:spPr>
+        <p:style>
+          <a:lnRef idx="1">
+            <a:schemeClr val="accent1"/>
+          </a:lnRef>
+          <a:fillRef idx="3">
+            <a:schemeClr val="accent1"/>
+          </a:fillRef>
+          <a:effectRef idx="2">
+            <a:schemeClr val="accent1"/>
+          </a:effectRef>
+          <a:fontRef idx="minor">
+            <a:schemeClr val="lt1"/>
+          </a:fontRef>
+        </p:style>
+        <p:txBody>
+          <a:bodyPr rtlCol="0" anchor="ctr"/>
+          <a:lstStyle/>
+          <a:p>
+            <a:pPr algn="ctr"/>
+          </a:p>
+        </p:txBody>
+      </p:sp>
+      <p:sp>
+        <p:nvSpPr>
+          <p:cNvPr id="3" name="Oval 2"/>
+          <p:cNvSpPr/>
+          <p:nvPr/>
+        </p:nvSpPr>
+        <p:spPr>
+          <a:xfrm>
+            <a:off x="-1828800" y="-1828800"/>
+            <a:ext cx="5029200" cy="5029200"/>
+          </a:xfrm>
+          <a:prstGeom prst="ellipse">
+            <a:avLst/>
+          </a:prstGeom>
+          <a:solidFill>
+            <a:srgbClr val="091A30"/>
+          </a:solidFill>
+          <a:ln>
+            <a:noFill/>
+          </a:ln>
+        </p:spPr>
+        <p:style>
+          <a:lnRef idx="1">
+            <a:schemeClr val="accent1"/>
+          </a:lnRef>
+          <a:fillRef idx="3">
+            <a:schemeClr val="accent1"/>
+          </a:fillRef>
+          <a:effectRef idx="2">
+            <a:schemeClr val="accent1"/>
+          </a:effectRef>
+          <a:fontRef idx="minor">
+            <a:schemeClr val="lt1"/>
+          </a:fontRef>
+        </p:style>
+        <p:txBody>
+          <a:bodyPr rtlCol="0" anchor="ctr"/>
+          <a:lstStyle/>
+          <a:p>
+            <a:pPr algn="ctr"/>
+          </a:p>
+        </p:txBody>
+      </p:sp>
+      <p:sp>
+        <p:nvSpPr>
+          <p:cNvPr id="4" name="Oval 3"/>
+          <p:cNvSpPr/>
+          <p:nvPr/>
+        </p:nvSpPr>
+        <p:spPr>
+          <a:xfrm>
+            <a:off x="9601200" y="4114800"/>
+            <a:ext cx="3657600" cy="3657600"/>
+          </a:xfrm>
+          <a:prstGeom prst="ellipse">
+            <a:avLst/>
+          </a:prstGeom>
+          <a:solidFill>
+            <a:srgbClr val="091A30"/>
+          </a:solidFill>
+          <a:ln>
+            <a:noFill/>
+          </a:ln>
+        </p:spPr>
+        <p:style>
+          <a:lnRef idx="1">
+            <a:schemeClr val="accent1"/>
+          </a:lnRef>
+          <a:fillRef idx="3">
+            <a:schemeClr val="accent1"/>
+          </a:fillRef>
+          <a:effectRef idx="2">
+            <a:schemeClr val="accent1"/>
+          </a:effectRef>
+          <a:fontRef idx="minor">
+            <a:schemeClr val="lt1"/>
+          </a:fontRef>
+        </p:style>
+        <p:txBody>
+          <a:bodyPr rtlCol="0" anchor="ctr"/>
+          <a:lstStyle/>
+          <a:p>
+            <a:pPr algn="ctr"/>
+          </a:p>
+        </p:txBody>
+      </p:sp>
+      <p:sp>
+        <p:nvSpPr>
+          <p:cNvPr id="5" name="TextBox 4"/>
+          <p:cNvSpPr txBox="1"/>
+          <p:nvPr/>
+        </p:nvSpPr>
+        <p:spPr>
+          <a:xfrm>
+            <a:off x="640080" y="1828800"/>
+            <a:ext cx="10972800" cy="365760"/>
+          </a:xfrm>
+          <a:prstGeom prst="rect">
+            <a:avLst/>
+          </a:prstGeom>
+          <a:noFill/>
+        </p:spPr>
+        <p:txBody>
+          <a:bodyPr wrap="square" lIns="0" rIns="0" tIns="0" bIns="0">
+            <a:spAutoFit/>
+          </a:bodyPr>
+          <a:lstStyle/>
+          <a:p>
+            <a:pPr>
+              <a:defRPr sz="1200" b="1" i="0">
+                <a:solidFill>
+                  <a:srgbClr val="E0B85F"/>
+                </a:solidFill>
+                <a:latin typeface="Calibri"/>
+              </a:defRPr>
+            </a:pPr>
+            <a:r>
+              <a:rPr spc="400"/>
+              <a:t>BACKUP MATERIAL</a:t>
+            </a:r>
+          </a:p>
+        </p:txBody>
+      </p:sp>
+      <p:sp>
+        <p:nvSpPr>
+          <p:cNvPr id="6" name="TextBox 5"/>
+          <p:cNvSpPr txBox="1"/>
+          <p:nvPr/>
+        </p:nvSpPr>
+        <p:spPr>
+          <a:xfrm>
+            <a:off x="640080" y="2468880"/>
+            <a:ext cx="10972800" cy="1097280"/>
+          </a:xfrm>
+          <a:prstGeom prst="rect">
+            <a:avLst/>
+          </a:prstGeom>
+          <a:noFill/>
+        </p:spPr>
+        <p:txBody>
+          <a:bodyPr wrap="square" lIns="0" rIns="0" tIns="0" bIns="0">
+            <a:spAutoFit/>
+          </a:bodyPr>
+          <a:lstStyle/>
+          <a:p>
+            <a:pPr>
+              <a:defRPr sz="6000" b="1" i="0">
+                <a:solidFill>
+                  <a:srgbClr val="FFFFFF"/>
+                </a:solidFill>
+                <a:latin typeface="Cambria"/>
+              </a:defRPr>
+            </a:pPr>
+            <a:r>
+              <a:t>Appendix</a:t>
+            </a:r>
+          </a:p>
+        </p:txBody>
+      </p:sp>
+      <p:sp>
+        <p:nvSpPr>
+          <p:cNvPr id="7" name="Rectangle 6"/>
+          <p:cNvSpPr/>
+          <p:nvPr/>
+        </p:nvSpPr>
+        <p:spPr>
+          <a:xfrm>
+            <a:off x="640080" y="3703320"/>
+            <a:ext cx="914400" cy="36576"/>
+          </a:xfrm>
+          <a:prstGeom prst="rect">
+            <a:avLst/>
+          </a:prstGeom>
+          <a:solidFill>
+            <a:srgbClr val="E0B85F"/>
+          </a:solidFill>
+          <a:ln>
+            <a:noFill/>
+          </a:ln>
+        </p:spPr>
+        <p:style>
+          <a:lnRef idx="1">
+            <a:schemeClr val="accent1"/>
+          </a:lnRef>
+          <a:fillRef idx="3">
+            <a:schemeClr val="accent1"/>
+          </a:fillRef>
+          <a:effectRef idx="2">
+            <a:schemeClr val="accent1"/>
+          </a:effectRef>
+          <a:fontRef idx="minor">
+            <a:schemeClr val="lt1"/>
+          </a:fontRef>
+        </p:style>
+        <p:txBody>
+          <a:bodyPr rtlCol="0" anchor="ctr"/>
+          <a:lstStyle/>
+          <a:p>
+            <a:pPr algn="ctr"/>
+          </a:p>
+        </p:txBody>
+      </p:sp>
+      <p:sp>
+        <p:nvSpPr>
+          <p:cNvPr id="8" name="TextBox 7"/>
+          <p:cNvSpPr txBox="1"/>
+          <p:nvPr/>
+        </p:nvSpPr>
+        <p:spPr>
+          <a:xfrm>
+            <a:off x="640080" y="3931920"/>
+            <a:ext cx="10972800" cy="457200"/>
+          </a:xfrm>
+          <a:prstGeom prst="rect">
+            <a:avLst/>
+          </a:prstGeom>
+          <a:noFill/>
+        </p:spPr>
+        <p:txBody>
+          <a:bodyPr wrap="square" lIns="0" rIns="0" tIns="0" bIns="0">
+            <a:spAutoFit/>
+          </a:bodyPr>
+          <a:lstStyle/>
+          <a:p>
+            <a:pPr>
+              <a:defRPr sz="2000" b="0" i="1">
+                <a:solidFill>
+                  <a:srgbClr val="E0B85F"/>
+                </a:solidFill>
+                <a:latin typeface="Cambria"/>
+              </a:defRPr>
+            </a:pPr>
+            <a:r>
+              <a:t>Q&amp;A reference: hardware, datasets, prior work</a:t>
+            </a:r>
+          </a:p>
+        </p:txBody>
+      </p:sp>
+      <p:sp>
+        <p:nvSpPr>
+          <p:cNvPr id="9" name="TextBox 8"/>
+          <p:cNvSpPr txBox="1"/>
+          <p:nvPr/>
+        </p:nvSpPr>
+        <p:spPr>
+          <a:xfrm>
+            <a:off x="640080" y="4572000"/>
+            <a:ext cx="548640" cy="292608"/>
+          </a:xfrm>
+          <a:prstGeom prst="rect">
+            <a:avLst/>
+          </a:prstGeom>
+          <a:noFill/>
+        </p:spPr>
+        <p:txBody>
+          <a:bodyPr wrap="square" lIns="0" rIns="0" tIns="0" bIns="0">
+            <a:spAutoFit/>
+          </a:bodyPr>
+          <a:lstStyle/>
+          <a:p>
+            <a:pPr>
+              <a:defRPr sz="1200" b="1" i="0">
+                <a:solidFill>
+                  <a:srgbClr val="E0B85F"/>
+                </a:solidFill>
+                <a:latin typeface="Calibri"/>
+              </a:defRPr>
+            </a:pPr>
+            <a:r>
+              <a:t>A1</a:t>
+            </a:r>
+          </a:p>
+        </p:txBody>
+      </p:sp>
+      <p:sp>
+        <p:nvSpPr>
+          <p:cNvPr id="10" name="TextBox 9"/>
+          <p:cNvSpPr txBox="1"/>
+          <p:nvPr/>
+        </p:nvSpPr>
+        <p:spPr>
+          <a:xfrm>
+            <a:off x="1280160" y="4572000"/>
+            <a:ext cx="5120640" cy="292608"/>
+          </a:xfrm>
+          <a:prstGeom prst="rect">
+            <a:avLst/>
+          </a:prstGeom>
+          <a:noFill/>
+        </p:spPr>
+        <p:txBody>
+          <a:bodyPr wrap="square" lIns="0" rIns="0" tIns="0" bIns="0">
+            <a:spAutoFit/>
+          </a:bodyPr>
+          <a:lstStyle/>
+          <a:p>
+            <a:pPr>
+              <a:defRPr sz="1200" b="0" i="0">
+                <a:solidFill>
+                  <a:srgbClr val="CBD8E0"/>
+                </a:solidFill>
+                <a:latin typeface="Calibri"/>
+              </a:defRPr>
+            </a:pPr>
+            <a:r>
+              <a:t>Can SNNs run on real chips?</a:t>
+            </a:r>
+          </a:p>
+        </p:txBody>
+      </p:sp>
+      <p:sp>
+        <p:nvSpPr>
+          <p:cNvPr id="11" name="TextBox 10"/>
+          <p:cNvSpPr txBox="1"/>
+          <p:nvPr/>
+        </p:nvSpPr>
+        <p:spPr>
+          <a:xfrm>
+            <a:off x="640080" y="4937760"/>
+            <a:ext cx="548640" cy="292608"/>
+          </a:xfrm>
+          <a:prstGeom prst="rect">
+            <a:avLst/>
+          </a:prstGeom>
+          <a:noFill/>
+        </p:spPr>
+        <p:txBody>
+          <a:bodyPr wrap="square" lIns="0" rIns="0" tIns="0" bIns="0">
+            <a:spAutoFit/>
+          </a:bodyPr>
+          <a:lstStyle/>
+          <a:p>
+            <a:pPr>
+              <a:defRPr sz="1200" b="1" i="0">
+                <a:solidFill>
+                  <a:srgbClr val="E0B85F"/>
+                </a:solidFill>
+                <a:latin typeface="Calibri"/>
+              </a:defRPr>
+            </a:pPr>
+            <a:r>
+              <a:t>A2</a:t>
+            </a:r>
+          </a:p>
+        </p:txBody>
+      </p:sp>
+      <p:sp>
+        <p:nvSpPr>
+          <p:cNvPr id="12" name="TextBox 11"/>
+          <p:cNvSpPr txBox="1"/>
+          <p:nvPr/>
+        </p:nvSpPr>
+        <p:spPr>
+          <a:xfrm>
+            <a:off x="1280160" y="4937760"/>
+            <a:ext cx="5120640" cy="292608"/>
+          </a:xfrm>
+          <a:prstGeom prst="rect">
+            <a:avLst/>
+          </a:prstGeom>
+          <a:noFill/>
+        </p:spPr>
+        <p:txBody>
+          <a:bodyPr wrap="square" lIns="0" rIns="0" tIns="0" bIns="0">
+            <a:spAutoFit/>
+          </a:bodyPr>
+          <a:lstStyle/>
+          <a:p>
+            <a:pPr>
+              <a:defRPr sz="1200" b="0" i="0">
+                <a:solidFill>
+                  <a:srgbClr val="CBD8E0"/>
+                </a:solidFill>
+                <a:latin typeface="Calibri"/>
+              </a:defRPr>
+            </a:pPr>
+            <a:r>
+              <a:t>Where SNN efficiency comes from</a:t>
+            </a:r>
+          </a:p>
+        </p:txBody>
+      </p:sp>
+      <p:sp>
+        <p:nvSpPr>
+          <p:cNvPr id="13" name="TextBox 12"/>
+          <p:cNvSpPr txBox="1"/>
+          <p:nvPr/>
+        </p:nvSpPr>
+        <p:spPr>
+          <a:xfrm>
+            <a:off x="640080" y="5303520"/>
+            <a:ext cx="548640" cy="292608"/>
+          </a:xfrm>
+          <a:prstGeom prst="rect">
+            <a:avLst/>
+          </a:prstGeom>
+          <a:noFill/>
+        </p:spPr>
+        <p:txBody>
+          <a:bodyPr wrap="square" lIns="0" rIns="0" tIns="0" bIns="0">
+            <a:spAutoFit/>
+          </a:bodyPr>
+          <a:lstStyle/>
+          <a:p>
+            <a:pPr>
+              <a:defRPr sz="1200" b="1" i="0">
+                <a:solidFill>
+                  <a:srgbClr val="E0B85F"/>
+                </a:solidFill>
+                <a:latin typeface="Calibri"/>
+              </a:defRPr>
+            </a:pPr>
+            <a:r>
+              <a:t>A3</a:t>
+            </a:r>
+          </a:p>
+        </p:txBody>
+      </p:sp>
+      <p:sp>
+        <p:nvSpPr>
+          <p:cNvPr id="14" name="TextBox 13"/>
+          <p:cNvSpPr txBox="1"/>
+          <p:nvPr/>
+        </p:nvSpPr>
+        <p:spPr>
+          <a:xfrm>
+            <a:off x="1280160" y="5303520"/>
+            <a:ext cx="5120640" cy="292608"/>
+          </a:xfrm>
+          <a:prstGeom prst="rect">
+            <a:avLst/>
+          </a:prstGeom>
+          <a:noFill/>
+        </p:spPr>
+        <p:txBody>
+          <a:bodyPr wrap="square" lIns="0" rIns="0" tIns="0" bIns="0">
+            <a:spAutoFit/>
+          </a:bodyPr>
+          <a:lstStyle/>
+          <a:p>
+            <a:pPr>
+              <a:defRPr sz="1200" b="0" i="0">
+                <a:solidFill>
+                  <a:srgbClr val="CBD8E0"/>
+                </a:solidFill>
+                <a:latin typeface="Calibri"/>
+              </a:defRPr>
+            </a:pPr>
+            <a:r>
+              <a:t>Energy: SNN chip vs DNN platforms</a:t>
+            </a:r>
+          </a:p>
+        </p:txBody>
+      </p:sp>
+      <p:sp>
+        <p:nvSpPr>
+          <p:cNvPr id="15" name="TextBox 14"/>
+          <p:cNvSpPr txBox="1"/>
+          <p:nvPr/>
+        </p:nvSpPr>
+        <p:spPr>
+          <a:xfrm>
+            <a:off x="640080" y="5669280"/>
+            <a:ext cx="548640" cy="292608"/>
+          </a:xfrm>
+          <a:prstGeom prst="rect">
+            <a:avLst/>
+          </a:prstGeom>
+          <a:noFill/>
+        </p:spPr>
+        <p:txBody>
+          <a:bodyPr wrap="square" lIns="0" rIns="0" tIns="0" bIns="0">
+            <a:spAutoFit/>
+          </a:bodyPr>
+          <a:lstStyle/>
+          <a:p>
+            <a:pPr>
+              <a:defRPr sz="1200" b="1" i="0">
+                <a:solidFill>
+                  <a:srgbClr val="E0B85F"/>
+                </a:solidFill>
+                <a:latin typeface="Calibri"/>
+              </a:defRPr>
+            </a:pPr>
+            <a:r>
+              <a:t>A4</a:t>
+            </a:r>
+          </a:p>
+        </p:txBody>
+      </p:sp>
+      <p:sp>
+        <p:nvSpPr>
+          <p:cNvPr id="16" name="TextBox 15"/>
+          <p:cNvSpPr txBox="1"/>
+          <p:nvPr/>
+        </p:nvSpPr>
+        <p:spPr>
+          <a:xfrm>
+            <a:off x="1280160" y="5669280"/>
+            <a:ext cx="5120640" cy="292608"/>
+          </a:xfrm>
+          <a:prstGeom prst="rect">
+            <a:avLst/>
+          </a:prstGeom>
+          <a:noFill/>
+        </p:spPr>
+        <p:txBody>
+          <a:bodyPr wrap="square" lIns="0" rIns="0" tIns="0" bIns="0">
+            <a:spAutoFit/>
+          </a:bodyPr>
+          <a:lstStyle/>
+          <a:p>
+            <a:pPr>
+              <a:defRPr sz="1200" b="0" i="0">
+                <a:solidFill>
+                  <a:srgbClr val="CBD8E0"/>
+                </a:solidFill>
+                <a:latin typeface="Calibri"/>
+              </a:defRPr>
+            </a:pPr>
+            <a:r>
+              <a:t>What is an event-based dataset?</a:t>
+            </a:r>
+          </a:p>
+        </p:txBody>
+      </p:sp>
+      <p:sp>
+        <p:nvSpPr>
+          <p:cNvPr id="17" name="TextBox 16"/>
+          <p:cNvSpPr txBox="1"/>
+          <p:nvPr/>
+        </p:nvSpPr>
+        <p:spPr>
+          <a:xfrm>
+            <a:off x="6400800" y="4572000"/>
+            <a:ext cx="548640" cy="292608"/>
+          </a:xfrm>
+          <a:prstGeom prst="rect">
+            <a:avLst/>
+          </a:prstGeom>
+          <a:noFill/>
+        </p:spPr>
+        <p:txBody>
+          <a:bodyPr wrap="square" lIns="0" rIns="0" tIns="0" bIns="0">
+            <a:spAutoFit/>
+          </a:bodyPr>
+          <a:lstStyle/>
+          <a:p>
+            <a:pPr>
+              <a:defRPr sz="1200" b="1" i="0">
+                <a:solidFill>
+                  <a:srgbClr val="E0B85F"/>
+                </a:solidFill>
+                <a:latin typeface="Calibri"/>
+              </a:defRPr>
+            </a:pPr>
+            <a:r>
+              <a:t>A5</a:t>
+            </a:r>
+          </a:p>
+        </p:txBody>
+      </p:sp>
+      <p:sp>
+        <p:nvSpPr>
+          <p:cNvPr id="18" name="TextBox 17"/>
+          <p:cNvSpPr txBox="1"/>
+          <p:nvPr/>
+        </p:nvSpPr>
+        <p:spPr>
+          <a:xfrm>
+            <a:off x="7040880" y="4572000"/>
+            <a:ext cx="5120640" cy="292608"/>
+          </a:xfrm>
+          <a:prstGeom prst="rect">
+            <a:avLst/>
+          </a:prstGeom>
+          <a:noFill/>
+        </p:spPr>
+        <p:txBody>
+          <a:bodyPr wrap="square" lIns="0" rIns="0" tIns="0" bIns="0">
+            <a:spAutoFit/>
+          </a:bodyPr>
+          <a:lstStyle/>
+          <a:p>
+            <a:pPr>
+              <a:defRPr sz="1200" b="0" i="0">
+                <a:solidFill>
+                  <a:srgbClr val="CBD8E0"/>
+                </a:solidFill>
+                <a:latin typeface="Calibri"/>
+              </a:defRPr>
+            </a:pPr>
+            <a:r>
+              <a:t>From DVS events to SNN input</a:t>
+            </a:r>
+          </a:p>
+        </p:txBody>
+      </p:sp>
+      <p:sp>
+        <p:nvSpPr>
+          <p:cNvPr id="19" name="TextBox 18"/>
+          <p:cNvSpPr txBox="1"/>
+          <p:nvPr/>
+        </p:nvSpPr>
+        <p:spPr>
+          <a:xfrm>
+            <a:off x="6400800" y="4937760"/>
+            <a:ext cx="548640" cy="292608"/>
+          </a:xfrm>
+          <a:prstGeom prst="rect">
+            <a:avLst/>
+          </a:prstGeom>
+          <a:noFill/>
+        </p:spPr>
+        <p:txBody>
+          <a:bodyPr wrap="square" lIns="0" rIns="0" tIns="0" bIns="0">
+            <a:spAutoFit/>
+          </a:bodyPr>
+          <a:lstStyle/>
+          <a:p>
+            <a:pPr>
+              <a:defRPr sz="1200" b="1" i="0">
+                <a:solidFill>
+                  <a:srgbClr val="E0B85F"/>
+                </a:solidFill>
+                <a:latin typeface="Calibri"/>
+              </a:defRPr>
+            </a:pPr>
+            <a:r>
+              <a:t>A6</a:t>
+            </a:r>
+          </a:p>
+        </p:txBody>
+      </p:sp>
+      <p:sp>
+        <p:nvSpPr>
+          <p:cNvPr id="20" name="TextBox 19"/>
+          <p:cNvSpPr txBox="1"/>
+          <p:nvPr/>
+        </p:nvSpPr>
+        <p:spPr>
+          <a:xfrm>
+            <a:off x="7040880" y="4937760"/>
+            <a:ext cx="5120640" cy="292608"/>
+          </a:xfrm>
+          <a:prstGeom prst="rect">
+            <a:avLst/>
+          </a:prstGeom>
+          <a:noFill/>
+        </p:spPr>
+        <p:txBody>
+          <a:bodyPr wrap="square" lIns="0" rIns="0" tIns="0" bIns="0">
+            <a:spAutoFit/>
+          </a:bodyPr>
+          <a:lstStyle/>
+          <a:p>
+            <a:pPr>
+              <a:defRPr sz="1200" b="0" i="0">
+                <a:solidFill>
+                  <a:srgbClr val="CBD8E0"/>
+                </a:solidFill>
+                <a:latin typeface="Calibri"/>
+              </a:defRPr>
+            </a:pPr>
+            <a:r>
+              <a:t>How were SNNs trained before?</a:t>
+            </a:r>
+          </a:p>
+        </p:txBody>
+      </p:sp>
+      <p:sp>
+        <p:nvSpPr>
+          <p:cNvPr id="21" name="TextBox 20"/>
+          <p:cNvSpPr txBox="1"/>
+          <p:nvPr/>
+        </p:nvSpPr>
+        <p:spPr>
+          <a:xfrm>
+            <a:off x="6400800" y="5303520"/>
+            <a:ext cx="548640" cy="292608"/>
+          </a:xfrm>
+          <a:prstGeom prst="rect">
+            <a:avLst/>
+          </a:prstGeom>
+          <a:noFill/>
+        </p:spPr>
+        <p:txBody>
+          <a:bodyPr wrap="square" lIns="0" rIns="0" tIns="0" bIns="0">
+            <a:spAutoFit/>
+          </a:bodyPr>
+          <a:lstStyle/>
+          <a:p>
+            <a:pPr>
+              <a:defRPr sz="1200" b="1" i="0">
+                <a:solidFill>
+                  <a:srgbClr val="E0B85F"/>
+                </a:solidFill>
+                <a:latin typeface="Calibri"/>
+              </a:defRPr>
+            </a:pPr>
+            <a:r>
+              <a:t>A7</a:t>
+            </a:r>
+          </a:p>
+        </p:txBody>
+      </p:sp>
+      <p:sp>
+        <p:nvSpPr>
+          <p:cNvPr id="22" name="TextBox 21"/>
+          <p:cNvSpPr txBox="1"/>
+          <p:nvPr/>
+        </p:nvSpPr>
+        <p:spPr>
+          <a:xfrm>
+            <a:off x="7040880" y="5303520"/>
+            <a:ext cx="5120640" cy="292608"/>
+          </a:xfrm>
+          <a:prstGeom prst="rect">
+            <a:avLst/>
+          </a:prstGeom>
+          <a:noFill/>
+        </p:spPr>
+        <p:txBody>
+          <a:bodyPr wrap="square" lIns="0" rIns="0" tIns="0" bIns="0">
+            <a:spAutoFit/>
+          </a:bodyPr>
+          <a:lstStyle/>
+          <a:p>
+            <a:pPr>
+              <a:defRPr sz="1200" b="0" i="0">
+                <a:solidFill>
+                  <a:srgbClr val="CBD8E0"/>
+                </a:solidFill>
+                <a:latin typeface="Calibri"/>
+              </a:defRPr>
+            </a:pPr>
+            <a:r>
+              <a:t>Prior work on TCS &amp; threshold learning</a:t>
+            </a:r>
+          </a:p>
+        </p:txBody>
+      </p:sp>
+    </p:spTree>
+  </p:cSld>
+  <p:clrMapOvr>
+    <a:masterClrMapping/>
+  </p:clrMapOvr>
+</p:sld>
+</file>
+
+<file path=ppt/slides/slide22.xml><?xml version="1.0" encoding="utf-8"?>
+<p:sld xmlns:a="http://schemas.openxmlformats.org/drawingml/2006/main" xmlns:p="http://schemas.openxmlformats.org/presentationml/2006/main" xmlns:r="http://schemas.openxmlformats.org/officeDocument/2006/relationships">
+  <p:cSld>
+    <p:spTree>
+      <p:nvGrpSpPr>
+        <p:cNvPr id="1" name=""/>
+        <p:cNvGrpSpPr/>
+        <p:nvPr/>
+      </p:nvGrpSpPr>
+      <p:grpSpPr/>
+      <p:sp>
+        <p:nvSpPr>
+          <p:cNvPr id="2" name="Rectangle 1"/>
+          <p:cNvSpPr/>
+          <p:nvPr/>
+        </p:nvSpPr>
+        <p:spPr>
+          <a:xfrm>
+            <a:off x="457200" y="566928"/>
+            <a:ext cx="54864" cy="201168"/>
+          </a:xfrm>
+          <a:prstGeom prst="rect">
+            <a:avLst/>
+          </a:prstGeom>
+          <a:solidFill>
+            <a:srgbClr val="E56945"/>
+          </a:solidFill>
+          <a:ln>
+            <a:noFill/>
+          </a:ln>
+        </p:spPr>
+        <p:style>
+          <a:lnRef idx="1">
+            <a:schemeClr val="accent1"/>
+          </a:lnRef>
+          <a:fillRef idx="3">
+            <a:schemeClr val="accent1"/>
+          </a:fillRef>
+          <a:effectRef idx="2">
+            <a:schemeClr val="accent1"/>
+          </a:effectRef>
+          <a:fontRef idx="minor">
+            <a:schemeClr val="lt1"/>
+          </a:fontRef>
+        </p:style>
+        <p:txBody>
+          <a:bodyPr rtlCol="0" anchor="ctr"/>
+          <a:lstStyle/>
+          <a:p>
+            <a:pPr algn="ctr"/>
+          </a:p>
+        </p:txBody>
+      </p:sp>
+      <p:sp>
+        <p:nvSpPr>
+          <p:cNvPr id="3" name="TextBox 2"/>
+          <p:cNvSpPr txBox="1"/>
+          <p:nvPr/>
+        </p:nvSpPr>
+        <p:spPr>
+          <a:xfrm>
+            <a:off x="594360" y="548640"/>
+            <a:ext cx="5486400" cy="274320"/>
+          </a:xfrm>
+          <a:prstGeom prst="rect">
+            <a:avLst/>
+          </a:prstGeom>
+          <a:noFill/>
+        </p:spPr>
+        <p:txBody>
+          <a:bodyPr wrap="square" lIns="0" rIns="0" tIns="0" bIns="0">
+            <a:spAutoFit/>
+          </a:bodyPr>
+          <a:lstStyle/>
+          <a:p>
+            <a:pPr>
+              <a:defRPr sz="1000" b="1" i="0">
+                <a:solidFill>
+                  <a:srgbClr val="E56945"/>
+                </a:solidFill>
+                <a:latin typeface="Calibri"/>
+              </a:defRPr>
+            </a:pPr>
+            <a:r>
+              <a:rPr spc="400"/>
+              <a:t>APPENDIX · A1</a:t>
+            </a:r>
+          </a:p>
+        </p:txBody>
+      </p:sp>
+      <p:sp>
+        <p:nvSpPr>
+          <p:cNvPr id="4" name="TextBox 3"/>
+          <p:cNvSpPr txBox="1"/>
+          <p:nvPr/>
+        </p:nvSpPr>
+        <p:spPr>
+          <a:xfrm>
+            <a:off x="457200" y="777240"/>
+            <a:ext cx="11247120" cy="777240"/>
+          </a:xfrm>
+          <a:prstGeom prst="rect">
+            <a:avLst/>
+          </a:prstGeom>
+          <a:noFill/>
+        </p:spPr>
+        <p:txBody>
+          <a:bodyPr wrap="square" lIns="0" rIns="0" tIns="0" bIns="0">
+            <a:spAutoFit/>
+          </a:bodyPr>
+          <a:lstStyle/>
+          <a:p>
+            <a:pPr>
+              <a:defRPr sz="3000" b="1" i="0">
+                <a:solidFill>
+                  <a:srgbClr val="0F2540"/>
+                </a:solidFill>
+                <a:latin typeface="Cambria"/>
+              </a:defRPr>
+            </a:pPr>
+            <a:r>
+              <a:t>Can SNNs Actually Run on Chips?</a:t>
+            </a:r>
+          </a:p>
+        </p:txBody>
+      </p:sp>
+      <p:sp>
+        <p:nvSpPr>
+          <p:cNvPr id="5" name="TextBox 4"/>
+          <p:cNvSpPr txBox="1"/>
+          <p:nvPr/>
+        </p:nvSpPr>
+        <p:spPr>
+          <a:xfrm>
+            <a:off x="457200" y="1600200"/>
+            <a:ext cx="11247120" cy="365760"/>
+          </a:xfrm>
+          <a:prstGeom prst="rect">
+            <a:avLst/>
+          </a:prstGeom>
+          <a:noFill/>
+        </p:spPr>
+        <p:txBody>
+          <a:bodyPr wrap="square" lIns="0" rIns="0" tIns="0" bIns="0">
+            <a:spAutoFit/>
+          </a:bodyPr>
+          <a:lstStyle/>
+          <a:p>
+            <a:pPr>
+              <a:defRPr sz="1400" b="0" i="1">
+                <a:solidFill>
+                  <a:srgbClr val="7A7A7A"/>
+                </a:solidFill>
+                <a:latin typeface="Calibri"/>
+              </a:defRPr>
+            </a:pPr>
+            <a:r>
+              <a:t>Production-grade neuromorphic silicon already exists.</a:t>
+            </a:r>
+          </a:p>
+        </p:txBody>
+      </p:sp>
+      <p:sp>
+        <p:nvSpPr>
+          <p:cNvPr id="6" name="TextBox 5"/>
+          <p:cNvSpPr txBox="1"/>
+          <p:nvPr/>
+        </p:nvSpPr>
+        <p:spPr>
+          <a:xfrm>
+            <a:off x="457200" y="2194560"/>
+            <a:ext cx="3749039" cy="365760"/>
+          </a:xfrm>
+          <a:prstGeom prst="rect">
+            <a:avLst/>
+          </a:prstGeom>
+          <a:noFill/>
+        </p:spPr>
+        <p:txBody>
+          <a:bodyPr wrap="square" lIns="0" rIns="0" tIns="0" bIns="0">
+            <a:spAutoFit/>
+          </a:bodyPr>
+          <a:lstStyle/>
+          <a:p>
+            <a:pPr>
+              <a:defRPr sz="1500" b="1" i="0">
+                <a:solidFill>
+                  <a:srgbClr val="0F2540"/>
+                </a:solidFill>
+                <a:latin typeface="Calibri"/>
+              </a:defRPr>
+            </a:pPr>
+            <a:r>
+              <a:t>Yes — and at scale.</a:t>
+            </a:r>
+          </a:p>
+        </p:txBody>
+      </p:sp>
+      <p:sp>
+        <p:nvSpPr>
+          <p:cNvPr id="7" name="TextBox 6"/>
+          <p:cNvSpPr txBox="1"/>
+          <p:nvPr/>
+        </p:nvSpPr>
+        <p:spPr>
+          <a:xfrm>
+            <a:off x="457200" y="2606040"/>
+            <a:ext cx="3749039" cy="2103120"/>
+          </a:xfrm>
+          <a:prstGeom prst="rect">
+            <a:avLst/>
+          </a:prstGeom>
+          <a:noFill/>
+        </p:spPr>
+        <p:txBody>
+          <a:bodyPr wrap="square" lIns="0" rIns="0" tIns="0" bIns="0">
+            <a:spAutoFit/>
+          </a:bodyPr>
+          <a:lstStyle/>
+          <a:p>
+            <a:pPr>
+              <a:defRPr sz="1150" b="0" i="0">
+                <a:solidFill>
+                  <a:srgbClr val="1A1A1A"/>
+                </a:solidFill>
+                <a:latin typeface="Calibri"/>
+              </a:defRPr>
+            </a:pPr>
+            <a:r>
+              <a:t>Several research and commercial chips natively run spiking models. Our methods (MP-Init, TrSG) are training-time techniques that produce the same LIF model these chips already accept — so the trained network ports directly without architectural changes.</a:t>
+            </a:r>
+          </a:p>
+        </p:txBody>
+      </p:sp>
+      <p:sp>
+        <p:nvSpPr>
+          <p:cNvPr id="8" name="Rectangle 7"/>
+          <p:cNvSpPr/>
+          <p:nvPr/>
+        </p:nvSpPr>
+        <p:spPr>
+          <a:xfrm>
+            <a:off x="457200" y="5120640"/>
+            <a:ext cx="54864" cy="1188720"/>
+          </a:xfrm>
+          <a:prstGeom prst="rect">
+            <a:avLst/>
+          </a:prstGeom>
+          <a:solidFill>
+            <a:srgbClr val="1D7E7E"/>
+          </a:solidFill>
+          <a:ln>
+            <a:noFill/>
+          </a:ln>
+        </p:spPr>
+        <p:style>
+          <a:lnRef idx="1">
+            <a:schemeClr val="accent1"/>
+          </a:lnRef>
+          <a:fillRef idx="3">
+            <a:schemeClr val="accent1"/>
+          </a:fillRef>
+          <a:effectRef idx="2">
+            <a:schemeClr val="accent1"/>
+          </a:effectRef>
+          <a:fontRef idx="minor">
+            <a:schemeClr val="lt1"/>
+          </a:fontRef>
+        </p:style>
+        <p:txBody>
+          <a:bodyPr rtlCol="0" anchor="ctr"/>
+          <a:lstStyle/>
+          <a:p>
+            <a:pPr algn="ctr"/>
+          </a:p>
+        </p:txBody>
+      </p:sp>
+      <p:sp>
+        <p:nvSpPr>
+          <p:cNvPr id="9" name="Rectangle 8"/>
+          <p:cNvSpPr/>
+          <p:nvPr/>
+        </p:nvSpPr>
+        <p:spPr>
+          <a:xfrm>
+            <a:off x="512064" y="5120640"/>
+            <a:ext cx="3694176" cy="1188720"/>
+          </a:xfrm>
+          <a:prstGeom prst="rect">
+            <a:avLst/>
+          </a:prstGeom>
+          <a:solidFill>
+            <a:srgbClr val="E5F5F0"/>
+          </a:solidFill>
+          <a:ln>
+            <a:noFill/>
+          </a:ln>
+        </p:spPr>
+        <p:style>
+          <a:lnRef idx="1">
+            <a:schemeClr val="accent1"/>
+          </a:lnRef>
+          <a:fillRef idx="3">
+            <a:schemeClr val="accent1"/>
+          </a:fillRef>
+          <a:effectRef idx="2">
+            <a:schemeClr val="accent1"/>
+          </a:effectRef>
+          <a:fontRef idx="minor">
+            <a:schemeClr val="lt1"/>
+          </a:fontRef>
+        </p:style>
+        <p:txBody>
+          <a:bodyPr rtlCol="0" anchor="ctr"/>
+          <a:lstStyle/>
+          <a:p>
+            <a:pPr algn="ctr"/>
+          </a:p>
+        </p:txBody>
+      </p:sp>
+      <p:sp>
+        <p:nvSpPr>
+          <p:cNvPr id="10" name="TextBox 9"/>
+          <p:cNvSpPr txBox="1"/>
+          <p:nvPr/>
+        </p:nvSpPr>
+        <p:spPr>
+          <a:xfrm>
+            <a:off x="777240" y="5166359"/>
+            <a:ext cx="3291839" cy="1097280"/>
+          </a:xfrm>
+          <a:prstGeom prst="rect">
+            <a:avLst/>
+          </a:prstGeom>
+          <a:noFill/>
+        </p:spPr>
+        <p:txBody>
+          <a:bodyPr wrap="square" anchor="ctr">
+            <a:spAutoFit/>
+          </a:bodyPr>
+          <a:lstStyle/>
+          <a:p>
+            <a:pPr>
+              <a:defRPr sz="1100" b="1">
+                <a:solidFill>
+                  <a:srgbClr val="1D7E7E"/>
+                </a:solidFill>
+                <a:latin typeface="Calibri"/>
+              </a:defRPr>
+            </a:pPr>
+            <a:r>
+              <a:t>Key takeaway</a:t>
+            </a:r>
+          </a:p>
+          <a:p>
+            <a:pPr>
+              <a:spcBef>
+                <a:spcPts val="600"/>
+              </a:spcBef>
+              <a:defRPr sz="1100">
+                <a:solidFill>
+                  <a:srgbClr val="1A1A1A"/>
+                </a:solidFill>
+                <a:latin typeface="Calibri"/>
+              </a:defRPr>
+            </a:pPr>
+            <a:r>
+              <a:t>Hardware is here. The bottleneck is training quality at low T.</a:t>
+            </a:r>
+          </a:p>
+        </p:txBody>
+      </p:sp>
+      <p:graphicFrame>
+        <p:nvGraphicFramePr>
+          <p:cNvPr id="11" name="Table 10"/>
+          <p:cNvGraphicFramePr>
+            <a:graphicFrameLocks noGrp="1"/>
+          </p:cNvGraphicFramePr>
+          <p:nvPr/>
+        </p:nvGraphicFramePr>
+        <p:xfrm>
+          <a:off x="4526280" y="2194560"/>
+          <a:ext cx="7315200" cy="3977640"/>
+        </p:xfrm>
+        <a:graphic>
+          <a:graphicData uri="http://schemas.openxmlformats.org/drawingml/2006/table">
+            <a:tbl>
+              <a:tblPr firstRow="1" bandRow="1">
+                <a:tableStyleId>{5C22544A-7EE6-4342-B048-85BDC9FD1C3A}</a:tableStyleId>
+              </a:tblPr>
+              <a:tblGrid>
+                <a:gridCol w="1783080"/>
+                <a:gridCol w="640080"/>
+                <a:gridCol w="960120"/>
+                <a:gridCol w="1783080"/>
+                <a:gridCol w="2148840"/>
+              </a:tblGrid>
+              <a:tr h="457200">
+                <a:tc>
+                  <a:txBody>
+                    <a:bodyPr anchor="ctr"/>
+                    <a:lstStyle/>
+                    <a:p>
+                      <a:pPr algn="l">
+                        <a:defRPr sz="1100" b="1">
+                          <a:solidFill>
+                            <a:srgbClr val="FFFFFF"/>
+                          </a:solidFill>
+                          <a:latin typeface="Calibri"/>
+                        </a:defRPr>
+                      </a:pPr>
+                      <a:r>
+                        <a:t>Chip</a:t>
+                      </a:r>
+                    </a:p>
+                  </a:txBody>
+                  <a:tcPr marL="91440" marR="91440">
+                    <a:solidFill>
+                      <a:srgbClr val="0F2540"/>
+                    </a:solidFill>
+                  </a:tcPr>
+                </a:tc>
+                <a:tc>
+                  <a:txBody>
+                    <a:bodyPr anchor="ctr"/>
+                    <a:lstStyle/>
+                    <a:p>
+                      <a:pPr algn="ctr">
+                        <a:defRPr sz="1100" b="1">
+                          <a:solidFill>
+                            <a:srgbClr val="FFFFFF"/>
+                          </a:solidFill>
+                          <a:latin typeface="Calibri"/>
+                        </a:defRPr>
+                      </a:pPr>
+                      <a:r>
+                        <a:t>Year</a:t>
+                      </a:r>
+                    </a:p>
+                  </a:txBody>
+                  <a:tcPr marL="91440" marR="91440">
+                    <a:solidFill>
+                      <a:srgbClr val="0F2540"/>
+                    </a:solidFill>
+                  </a:tcPr>
+                </a:tc>
+                <a:tc>
+                  <a:txBody>
+                    <a:bodyPr anchor="ctr"/>
+                    <a:lstStyle/>
+                    <a:p>
+                      <a:pPr algn="ctr">
+                        <a:defRPr sz="1100" b="1">
+                          <a:solidFill>
+                            <a:srgbClr val="FFFFFF"/>
+                          </a:solidFill>
+                          <a:latin typeface="Calibri"/>
+                        </a:defRPr>
+                      </a:pPr>
+                      <a:r>
+                        <a:t>Process</a:t>
+                      </a:r>
+                    </a:p>
+                  </a:txBody>
+                  <a:tcPr marL="91440" marR="91440">
+                    <a:solidFill>
+                      <a:srgbClr val="0F2540"/>
+                    </a:solidFill>
+                  </a:tcPr>
+                </a:tc>
+                <a:tc>
+                  <a:txBody>
+                    <a:bodyPr anchor="ctr"/>
+                    <a:lstStyle/>
+                    <a:p>
+                      <a:pPr algn="ctr">
+                        <a:defRPr sz="1100" b="1">
+                          <a:solidFill>
+                            <a:srgbClr val="FFFFFF"/>
+                          </a:solidFill>
+                          <a:latin typeface="Calibri"/>
+                        </a:defRPr>
+                      </a:pPr>
+                      <a:r>
+                        <a:t>Capacity</a:t>
+                      </a:r>
+                    </a:p>
+                  </a:txBody>
+                  <a:tcPr marL="91440" marR="91440">
+                    <a:solidFill>
+                      <a:srgbClr val="0F2540"/>
+                    </a:solidFill>
+                  </a:tcPr>
+                </a:tc>
+                <a:tc>
+                  <a:txBody>
+                    <a:bodyPr anchor="ctr"/>
+                    <a:lstStyle/>
+                    <a:p>
+                      <a:pPr algn="ctr">
+                        <a:defRPr sz="1100" b="1">
+                          <a:solidFill>
+                            <a:srgbClr val="FFFFFF"/>
+                          </a:solidFill>
+                          <a:latin typeface="Calibri"/>
+                        </a:defRPr>
+                      </a:pPr>
+                      <a:r>
+                        <a:t>Energy / power</a:t>
+                      </a:r>
+                    </a:p>
+                  </a:txBody>
+                  <a:tcPr marL="91440" marR="91440">
+                    <a:solidFill>
+                      <a:srgbClr val="0F2540"/>
+                    </a:solidFill>
+                  </a:tcPr>
+                </a:tc>
+              </a:tr>
+              <a:tr h="502920">
+                <a:tc>
+                  <a:txBody>
+                    <a:bodyPr anchor="ctr"/>
+                    <a:lstStyle/>
+                    <a:p>
+                      <a:pPr algn="l">
+                        <a:defRPr b="1" sz="1050">
+                          <a:solidFill>
+                            <a:srgbClr val="0F2540"/>
+                          </a:solidFill>
+                          <a:latin typeface="Calibri"/>
+                        </a:defRPr>
+                      </a:pPr>
+                      <a:r>
+                        <a:t>IBM TrueNorth</a:t>
+                      </a:r>
+                    </a:p>
+                  </a:txBody>
+                  <a:tcPr marL="91440" marR="91440" marT="36576" marB="36576">
+                    <a:solidFill>
+                      <a:srgbClr val="FFFFFF"/>
+                    </a:solidFill>
+                  </a:tcPr>
+                </a:tc>
+                <a:tc>
+                  <a:txBody>
+                    <a:bodyPr anchor="ctr"/>
+                    <a:lstStyle/>
+                    <a:p>
+                      <a:pPr algn="ctr">
+                        <a:defRPr sz="1000">
+                          <a:solidFill>
+                            <a:srgbClr val="1A1A1A"/>
+                          </a:solidFill>
+                          <a:latin typeface="Consolas"/>
+                        </a:defRPr>
+                      </a:pPr>
+                      <a:r>
+                        <a:t>2014</a:t>
+                      </a:r>
+                    </a:p>
+                  </a:txBody>
+                  <a:tcPr marL="91440" marR="91440" marT="36576" marB="36576">
+                    <a:solidFill>
+                      <a:srgbClr val="FFFFFF"/>
+                    </a:solidFill>
+                  </a:tcPr>
+                </a:tc>
+                <a:tc>
+                  <a:txBody>
+                    <a:bodyPr anchor="ctr"/>
+                    <a:lstStyle/>
+                    <a:p>
+                      <a:pPr algn="ctr">
+                        <a:defRPr sz="1000">
+                          <a:solidFill>
+                            <a:srgbClr val="1A1A1A"/>
+                          </a:solidFill>
+                          <a:latin typeface="Consolas"/>
+                        </a:defRPr>
+                      </a:pPr>
+                      <a:r>
+                        <a:t>65 nm</a:t>
+                      </a:r>
+                    </a:p>
+                  </a:txBody>
+                  <a:tcPr marL="91440" marR="91440" marT="36576" marB="36576">
+                    <a:solidFill>
+                      <a:srgbClr val="FFFFFF"/>
+                    </a:solidFill>
+                  </a:tcPr>
+                </a:tc>
+                <a:tc>
+                  <a:txBody>
+                    <a:bodyPr anchor="ctr"/>
+                    <a:lstStyle/>
+                    <a:p>
+                      <a:pPr algn="ctr">
+                        <a:defRPr sz="950">
+                          <a:solidFill>
+                            <a:srgbClr val="1A1A1A"/>
+                          </a:solidFill>
+                          <a:latin typeface="Calibri"/>
+                        </a:defRPr>
+                      </a:pPr>
+                      <a:r>
+                        <a:t>1 M neur.</a:t>
+                      </a:r>
+                    </a:p>
+                    <a:p>
+                      <a:pPr algn="ctr">
+                        <a:defRPr sz="950">
+                          <a:solidFill>
+                            <a:srgbClr val="1A1A1A"/>
+                          </a:solidFill>
+                          <a:latin typeface="Calibri"/>
+                        </a:defRPr>
+                      </a:pPr>
+                      <a:r>
+                        <a:t>256 M syn.</a:t>
+                      </a:r>
+                    </a:p>
+                  </a:txBody>
+                  <a:tcPr marL="91440" marR="91440" marT="36576" marB="36576">
+                    <a:solidFill>
+                      <a:srgbClr val="FFFFFF"/>
+                    </a:solidFill>
+                  </a:tcPr>
+                </a:tc>
+                <a:tc>
+                  <a:txBody>
+                    <a:bodyPr anchor="ctr"/>
+                    <a:lstStyle/>
+                    <a:p>
+                      <a:pPr algn="ctr">
+                        <a:defRPr sz="950">
+                          <a:solidFill>
+                            <a:srgbClr val="1A1A1A"/>
+                          </a:solidFill>
+                          <a:latin typeface="Calibri"/>
+                        </a:defRPr>
+                      </a:pPr>
+                      <a:r>
+                        <a:t>70 mW · 26 pJ/event</a:t>
+                      </a:r>
+                    </a:p>
+                  </a:txBody>
+                  <a:tcPr marL="91440" marR="91440" marT="36576" marB="36576">
+                    <a:solidFill>
+                      <a:srgbClr val="FFFFFF"/>
+                    </a:solidFill>
+                  </a:tcPr>
+                </a:tc>
+              </a:tr>
+              <a:tr h="502920">
+                <a:tc>
+                  <a:txBody>
+                    <a:bodyPr anchor="ctr"/>
+                    <a:lstStyle/>
+                    <a:p>
+                      <a:pPr algn="l">
+                        <a:defRPr b="1" sz="1050">
+                          <a:solidFill>
+                            <a:srgbClr val="0F2540"/>
+                          </a:solidFill>
+                          <a:latin typeface="Calibri"/>
+                        </a:defRPr>
+                      </a:pPr>
+                      <a:r>
+                        <a:t>Intel Loihi</a:t>
+                      </a:r>
+                    </a:p>
+                  </a:txBody>
+                  <a:tcPr marL="91440" marR="91440" marT="36576" marB="36576">
+                    <a:solidFill>
+                      <a:srgbClr val="F8F7F2"/>
+                    </a:solidFill>
+                  </a:tcPr>
+                </a:tc>
+                <a:tc>
+                  <a:txBody>
+                    <a:bodyPr anchor="ctr"/>
+                    <a:lstStyle/>
+                    <a:p>
+                      <a:pPr algn="ctr">
+                        <a:defRPr sz="1000">
+                          <a:solidFill>
+                            <a:srgbClr val="1A1A1A"/>
+                          </a:solidFill>
+                          <a:latin typeface="Consolas"/>
+                        </a:defRPr>
+                      </a:pPr>
+                      <a:r>
+                        <a:t>2018</a:t>
+                      </a:r>
+                    </a:p>
+                  </a:txBody>
+                  <a:tcPr marL="91440" marR="91440" marT="36576" marB="36576">
+                    <a:solidFill>
+                      <a:srgbClr val="F8F7F2"/>
+                    </a:solidFill>
+                  </a:tcPr>
+                </a:tc>
+                <a:tc>
+                  <a:txBody>
+                    <a:bodyPr anchor="ctr"/>
+                    <a:lstStyle/>
+                    <a:p>
+                      <a:pPr algn="ctr">
+                        <a:defRPr sz="1000">
+                          <a:solidFill>
+                            <a:srgbClr val="1A1A1A"/>
+                          </a:solidFill>
+                          <a:latin typeface="Consolas"/>
+                        </a:defRPr>
+                      </a:pPr>
+                      <a:r>
+                        <a:t>14 nm</a:t>
+                      </a:r>
+                    </a:p>
+                  </a:txBody>
+                  <a:tcPr marL="91440" marR="91440" marT="36576" marB="36576">
+                    <a:solidFill>
+                      <a:srgbClr val="F8F7F2"/>
+                    </a:solidFill>
+                  </a:tcPr>
+                </a:tc>
+                <a:tc>
+                  <a:txBody>
+                    <a:bodyPr anchor="ctr"/>
+                    <a:lstStyle/>
+                    <a:p>
+                      <a:pPr algn="ctr">
+                        <a:defRPr sz="950">
+                          <a:solidFill>
+                            <a:srgbClr val="1A1A1A"/>
+                          </a:solidFill>
+                          <a:latin typeface="Calibri"/>
+                        </a:defRPr>
+                      </a:pPr>
+                      <a:r>
+                        <a:t>130 K neur.</a:t>
+                      </a:r>
+                    </a:p>
+                    <a:p>
+                      <a:pPr algn="ctr">
+                        <a:defRPr sz="950">
+                          <a:solidFill>
+                            <a:srgbClr val="1A1A1A"/>
+                          </a:solidFill>
+                          <a:latin typeface="Calibri"/>
+                        </a:defRPr>
+                      </a:pPr>
+                      <a:r>
+                        <a:t>130 M syn.</a:t>
+                      </a:r>
+                    </a:p>
+                  </a:txBody>
+                  <a:tcPr marL="91440" marR="91440" marT="36576" marB="36576">
+                    <a:solidFill>
+                      <a:srgbClr val="F8F7F2"/>
+                    </a:solidFill>
+                  </a:tcPr>
+                </a:tc>
+                <a:tc>
+                  <a:txBody>
+                    <a:bodyPr anchor="ctr"/>
+                    <a:lstStyle/>
+                    <a:p>
+                      <a:pPr algn="ctr">
+                        <a:defRPr sz="950">
+                          <a:solidFill>
+                            <a:srgbClr val="1A1A1A"/>
+                          </a:solidFill>
+                          <a:latin typeface="Calibri"/>
+                        </a:defRPr>
+                      </a:pPr>
+                      <a:r>
+                        <a:t>23.6 pJ / op</a:t>
+                      </a:r>
+                    </a:p>
+                  </a:txBody>
+                  <a:tcPr marL="91440" marR="91440" marT="36576" marB="36576">
+                    <a:solidFill>
+                      <a:srgbClr val="F8F7F2"/>
+                    </a:solidFill>
+                  </a:tcPr>
+                </a:tc>
+              </a:tr>
+              <a:tr h="502920">
+                <a:tc>
+                  <a:txBody>
+                    <a:bodyPr anchor="ctr"/>
+                    <a:lstStyle/>
+                    <a:p>
+                      <a:pPr algn="l">
+                        <a:defRPr b="1" sz="1050">
+                          <a:solidFill>
+                            <a:srgbClr val="0F2540"/>
+                          </a:solidFill>
+                          <a:latin typeface="Calibri"/>
+                        </a:defRPr>
+                      </a:pPr>
+                      <a:r>
+                        <a:t>Intel Loihi 2</a:t>
+                      </a:r>
+                    </a:p>
+                  </a:txBody>
+                  <a:tcPr marL="91440" marR="91440" marT="36576" marB="36576">
+                    <a:solidFill>
+                      <a:srgbClr val="FFFFFF"/>
+                    </a:solidFill>
+                  </a:tcPr>
+                </a:tc>
+                <a:tc>
+                  <a:txBody>
+                    <a:bodyPr anchor="ctr"/>
+                    <a:lstStyle/>
+                    <a:p>
+                      <a:pPr algn="ctr">
+                        <a:defRPr sz="1000">
+                          <a:solidFill>
+                            <a:srgbClr val="1A1A1A"/>
+                          </a:solidFill>
+                          <a:latin typeface="Consolas"/>
+                        </a:defRPr>
+                      </a:pPr>
+                      <a:r>
+                        <a:t>2021</a:t>
+                      </a:r>
+                    </a:p>
+                  </a:txBody>
+                  <a:tcPr marL="91440" marR="91440" marT="36576" marB="36576">
+                    <a:solidFill>
+                      <a:srgbClr val="FFFFFF"/>
+                    </a:solidFill>
+                  </a:tcPr>
+                </a:tc>
+                <a:tc>
+                  <a:txBody>
+                    <a:bodyPr anchor="ctr"/>
+                    <a:lstStyle/>
+                    <a:p>
+                      <a:pPr algn="ctr">
+                        <a:defRPr sz="1000">
+                          <a:solidFill>
+                            <a:srgbClr val="1A1A1A"/>
+                          </a:solidFill>
+                          <a:latin typeface="Consolas"/>
+                        </a:defRPr>
+                      </a:pPr>
+                      <a:r>
+                        <a:t>Intel 4</a:t>
+                      </a:r>
+                    </a:p>
+                  </a:txBody>
+                  <a:tcPr marL="91440" marR="91440" marT="36576" marB="36576">
+                    <a:solidFill>
+                      <a:srgbClr val="FFFFFF"/>
+                    </a:solidFill>
+                  </a:tcPr>
+                </a:tc>
+                <a:tc>
+                  <a:txBody>
+                    <a:bodyPr anchor="ctr"/>
+                    <a:lstStyle/>
+                    <a:p>
+                      <a:pPr algn="ctr">
+                        <a:defRPr sz="950">
+                          <a:solidFill>
+                            <a:srgbClr val="1A1A1A"/>
+                          </a:solidFill>
+                          <a:latin typeface="Calibri"/>
+                        </a:defRPr>
+                      </a:pPr>
+                      <a:r>
+                        <a:t>1 M neur.</a:t>
+                      </a:r>
+                    </a:p>
+                    <a:p>
+                      <a:pPr algn="ctr">
+                        <a:defRPr sz="950">
+                          <a:solidFill>
+                            <a:srgbClr val="1A1A1A"/>
+                          </a:solidFill>
+                          <a:latin typeface="Calibri"/>
+                        </a:defRPr>
+                      </a:pPr>
+                      <a:r>
+                        <a:t>graded spikes</a:t>
+                      </a:r>
+                    </a:p>
+                  </a:txBody>
+                  <a:tcPr marL="91440" marR="91440" marT="36576" marB="36576">
+                    <a:solidFill>
+                      <a:srgbClr val="FFFFFF"/>
+                    </a:solidFill>
+                  </a:tcPr>
+                </a:tc>
+                <a:tc>
+                  <a:txBody>
+                    <a:bodyPr anchor="ctr"/>
+                    <a:lstStyle/>
+                    <a:p>
+                      <a:pPr algn="ctr">
+                        <a:defRPr sz="950">
+                          <a:solidFill>
+                            <a:srgbClr val="1A1A1A"/>
+                          </a:solidFill>
+                          <a:latin typeface="Calibri"/>
+                        </a:defRPr>
+                      </a:pPr>
+                      <a:r>
+                        <a:t>improved · multi-bit</a:t>
+                      </a:r>
+                    </a:p>
+                  </a:txBody>
+                  <a:tcPr marL="91440" marR="91440" marT="36576" marB="36576">
+                    <a:solidFill>
+                      <a:srgbClr val="FFFFFF"/>
+                    </a:solidFill>
+                  </a:tcPr>
+                </a:tc>
+              </a:tr>
+              <a:tr h="502920">
+                <a:tc>
+                  <a:txBody>
+                    <a:bodyPr anchor="ctr"/>
+                    <a:lstStyle/>
+                    <a:p>
+                      <a:pPr algn="l">
+                        <a:defRPr b="1" sz="1050">
+                          <a:solidFill>
+                            <a:srgbClr val="0F2540"/>
+                          </a:solidFill>
+                          <a:latin typeface="Calibri"/>
+                        </a:defRPr>
+                      </a:pPr>
+                      <a:r>
+                        <a:t>SpiNNaker 2</a:t>
+                      </a:r>
+                    </a:p>
+                  </a:txBody>
+                  <a:tcPr marL="91440" marR="91440" marT="36576" marB="36576">
+                    <a:solidFill>
+                      <a:srgbClr val="F8F7F2"/>
+                    </a:solidFill>
+                  </a:tcPr>
+                </a:tc>
+                <a:tc>
+                  <a:txBody>
+                    <a:bodyPr anchor="ctr"/>
+                    <a:lstStyle/>
+                    <a:p>
+                      <a:pPr algn="ctr">
+                        <a:defRPr sz="1000">
+                          <a:solidFill>
+                            <a:srgbClr val="1A1A1A"/>
+                          </a:solidFill>
+                          <a:latin typeface="Consolas"/>
+                        </a:defRPr>
+                      </a:pPr>
+                      <a:r>
+                        <a:t>2024</a:t>
+                      </a:r>
+                    </a:p>
+                  </a:txBody>
+                  <a:tcPr marL="91440" marR="91440" marT="36576" marB="36576">
+                    <a:solidFill>
+                      <a:srgbClr val="F8F7F2"/>
+                    </a:solidFill>
+                  </a:tcPr>
+                </a:tc>
+                <a:tc>
+                  <a:txBody>
+                    <a:bodyPr anchor="ctr"/>
+                    <a:lstStyle/>
+                    <a:p>
+                      <a:pPr algn="ctr">
+                        <a:defRPr sz="1000">
+                          <a:solidFill>
+                            <a:srgbClr val="1A1A1A"/>
+                          </a:solidFill>
+                          <a:latin typeface="Consolas"/>
+                        </a:defRPr>
+                      </a:pPr>
+                      <a:r>
+                        <a:t>22 nm</a:t>
+                      </a:r>
+                    </a:p>
+                  </a:txBody>
+                  <a:tcPr marL="91440" marR="91440" marT="36576" marB="36576">
+                    <a:solidFill>
+                      <a:srgbClr val="F8F7F2"/>
+                    </a:solidFill>
+                  </a:tcPr>
+                </a:tc>
+                <a:tc>
+                  <a:txBody>
+                    <a:bodyPr anchor="ctr"/>
+                    <a:lstStyle/>
+                    <a:p>
+                      <a:pPr algn="ctr">
+                        <a:defRPr sz="950">
+                          <a:solidFill>
+                            <a:srgbClr val="1A1A1A"/>
+                          </a:solidFill>
+                          <a:latin typeface="Calibri"/>
+                        </a:defRPr>
+                      </a:pPr>
+                      <a:r>
+                        <a:t>10 M neur.</a:t>
+                      </a:r>
+                    </a:p>
+                    <a:p>
+                      <a:pPr algn="ctr">
+                        <a:defRPr sz="950">
+                          <a:solidFill>
+                            <a:srgbClr val="1A1A1A"/>
+                          </a:solidFill>
+                          <a:latin typeface="Calibri"/>
+                        </a:defRPr>
+                      </a:pPr>
+                      <a:r>
+                        <a:t>152 ARM cores</a:t>
+                      </a:r>
+                    </a:p>
+                  </a:txBody>
+                  <a:tcPr marL="91440" marR="91440" marT="36576" marB="36576">
+                    <a:solidFill>
+                      <a:srgbClr val="F8F7F2"/>
+                    </a:solidFill>
+                  </a:tcPr>
+                </a:tc>
+                <a:tc>
+                  <a:txBody>
+                    <a:bodyPr anchor="ctr"/>
+                    <a:lstStyle/>
+                    <a:p>
+                      <a:pPr algn="ctr">
+                        <a:defRPr sz="950">
+                          <a:solidFill>
+                            <a:srgbClr val="1A1A1A"/>
+                          </a:solidFill>
+                          <a:latin typeface="Calibri"/>
+                        </a:defRPr>
+                      </a:pPr>
+                      <a:r>
+                        <a:t>ARM-based · digital</a:t>
+                      </a:r>
+                    </a:p>
+                  </a:txBody>
+                  <a:tcPr marL="91440" marR="91440" marT="36576" marB="36576">
+                    <a:solidFill>
+                      <a:srgbClr val="F8F7F2"/>
+                    </a:solidFill>
+                  </a:tcPr>
+                </a:tc>
+              </a:tr>
+              <a:tr h="502920">
+                <a:tc>
+                  <a:txBody>
+                    <a:bodyPr anchor="ctr"/>
+                    <a:lstStyle/>
+                    <a:p>
+                      <a:pPr algn="l">
+                        <a:defRPr b="1" sz="1050">
+                          <a:solidFill>
+                            <a:srgbClr val="0F2540"/>
+                          </a:solidFill>
+                          <a:latin typeface="Calibri"/>
+                        </a:defRPr>
+                      </a:pPr>
+                      <a:r>
+                        <a:t>Tianjic</a:t>
+                      </a:r>
+                    </a:p>
+                  </a:txBody>
+                  <a:tcPr marL="91440" marR="91440" marT="36576" marB="36576">
+                    <a:solidFill>
+                      <a:srgbClr val="FFFFFF"/>
+                    </a:solidFill>
+                  </a:tcPr>
+                </a:tc>
+                <a:tc>
+                  <a:txBody>
+                    <a:bodyPr anchor="ctr"/>
+                    <a:lstStyle/>
+                    <a:p>
+                      <a:pPr algn="ctr">
+                        <a:defRPr sz="1000">
+                          <a:solidFill>
+                            <a:srgbClr val="1A1A1A"/>
+                          </a:solidFill>
+                          <a:latin typeface="Consolas"/>
+                        </a:defRPr>
+                      </a:pPr>
+                      <a:r>
+                        <a:t>2019</a:t>
+                      </a:r>
+                    </a:p>
+                  </a:txBody>
+                  <a:tcPr marL="91440" marR="91440" marT="36576" marB="36576">
+                    <a:solidFill>
+                      <a:srgbClr val="FFFFFF"/>
+                    </a:solidFill>
+                  </a:tcPr>
+                </a:tc>
+                <a:tc>
+                  <a:txBody>
+                    <a:bodyPr anchor="ctr"/>
+                    <a:lstStyle/>
+                    <a:p>
+                      <a:pPr algn="ctr">
+                        <a:defRPr sz="1000">
+                          <a:solidFill>
+                            <a:srgbClr val="1A1A1A"/>
+                          </a:solidFill>
+                          <a:latin typeface="Consolas"/>
+                        </a:defRPr>
+                      </a:pPr>
+                      <a:r>
+                        <a:t>28 nm</a:t>
+                      </a:r>
+                    </a:p>
+                  </a:txBody>
+                  <a:tcPr marL="91440" marR="91440" marT="36576" marB="36576">
+                    <a:solidFill>
+                      <a:srgbClr val="FFFFFF"/>
+                    </a:solidFill>
+                  </a:tcPr>
+                </a:tc>
+                <a:tc>
+                  <a:txBody>
+                    <a:bodyPr anchor="ctr"/>
+                    <a:lstStyle/>
+                    <a:p>
+                      <a:pPr algn="ctr">
+                        <a:defRPr sz="950">
+                          <a:solidFill>
+                            <a:srgbClr val="1A1A1A"/>
+                          </a:solidFill>
+                          <a:latin typeface="Calibri"/>
+                        </a:defRPr>
+                      </a:pPr>
+                      <a:r>
+                        <a:t>40 K neur.</a:t>
+                      </a:r>
+                    </a:p>
+                    <a:p>
+                      <a:pPr algn="ctr">
+                        <a:defRPr sz="950">
+                          <a:solidFill>
+                            <a:srgbClr val="1A1A1A"/>
+                          </a:solidFill>
+                          <a:latin typeface="Calibri"/>
+                        </a:defRPr>
+                      </a:pPr>
+                      <a:r>
+                        <a:t>SNN+ANN hybrid</a:t>
+                      </a:r>
+                    </a:p>
+                  </a:txBody>
+                  <a:tcPr marL="91440" marR="91440" marT="36576" marB="36576">
+                    <a:solidFill>
+                      <a:srgbClr val="FFFFFF"/>
+                    </a:solidFill>
+                  </a:tcPr>
+                </a:tc>
+                <a:tc>
+                  <a:txBody>
+                    <a:bodyPr anchor="ctr"/>
+                    <a:lstStyle/>
+                    <a:p>
+                      <a:pPr algn="ctr">
+                        <a:defRPr sz="950">
+                          <a:solidFill>
+                            <a:srgbClr val="1A1A1A"/>
+                          </a:solidFill>
+                          <a:latin typeface="Calibri"/>
+                        </a:defRPr>
+                      </a:pPr>
+                      <a:r>
+                        <a:t>Tsinghua · Nature 2019</a:t>
+                      </a:r>
+                    </a:p>
+                  </a:txBody>
+                  <a:tcPr marL="91440" marR="91440" marT="36576" marB="36576">
+                    <a:solidFill>
+                      <a:srgbClr val="FFFFFF"/>
+                    </a:solidFill>
+                  </a:tcPr>
+                </a:tc>
+              </a:tr>
+              <a:tr h="502920">
+                <a:tc>
+                  <a:txBody>
+                    <a:bodyPr anchor="ctr"/>
+                    <a:lstStyle/>
+                    <a:p>
+                      <a:pPr algn="l">
+                        <a:defRPr b="1" sz="1050">
+                          <a:solidFill>
+                            <a:srgbClr val="0F2540"/>
+                          </a:solidFill>
+                          <a:latin typeface="Calibri"/>
+                        </a:defRPr>
+                      </a:pPr>
+                      <a:r>
+                        <a:t>Speck (SynSense)</a:t>
+                      </a:r>
+                    </a:p>
+                  </a:txBody>
+                  <a:tcPr marL="91440" marR="91440" marT="36576" marB="36576">
+                    <a:solidFill>
+                      <a:srgbClr val="F8F7F2"/>
+                    </a:solidFill>
+                  </a:tcPr>
+                </a:tc>
+                <a:tc>
+                  <a:txBody>
+                    <a:bodyPr anchor="ctr"/>
+                    <a:lstStyle/>
+                    <a:p>
+                      <a:pPr algn="ctr">
+                        <a:defRPr sz="1000">
+                          <a:solidFill>
+                            <a:srgbClr val="1A1A1A"/>
+                          </a:solidFill>
+                          <a:latin typeface="Consolas"/>
+                        </a:defRPr>
+                      </a:pPr>
+                      <a:r>
+                        <a:t>2022</a:t>
+                      </a:r>
+                    </a:p>
+                  </a:txBody>
+                  <a:tcPr marL="91440" marR="91440" marT="36576" marB="36576">
+                    <a:solidFill>
+                      <a:srgbClr val="F8F7F2"/>
+                    </a:solidFill>
+                  </a:tcPr>
+                </a:tc>
+                <a:tc>
+                  <a:txBody>
+                    <a:bodyPr anchor="ctr"/>
+                    <a:lstStyle/>
+                    <a:p>
+                      <a:pPr algn="ctr">
+                        <a:defRPr sz="1000">
+                          <a:solidFill>
+                            <a:srgbClr val="1A1A1A"/>
+                          </a:solidFill>
+                          <a:latin typeface="Consolas"/>
+                        </a:defRPr>
+                      </a:pPr>
+                      <a:r>
+                        <a:t>65 nm</a:t>
+                      </a:r>
+                    </a:p>
+                  </a:txBody>
+                  <a:tcPr marL="91440" marR="91440" marT="36576" marB="36576">
+                    <a:solidFill>
+                      <a:srgbClr val="F8F7F2"/>
+                    </a:solidFill>
+                  </a:tcPr>
+                </a:tc>
+                <a:tc>
+                  <a:txBody>
+                    <a:bodyPr anchor="ctr"/>
+                    <a:lstStyle/>
+                    <a:p>
+                      <a:pPr algn="ctr">
+                        <a:defRPr sz="950">
+                          <a:solidFill>
+                            <a:srgbClr val="1A1A1A"/>
+                          </a:solidFill>
+                          <a:latin typeface="Calibri"/>
+                        </a:defRPr>
+                      </a:pPr>
+                      <a:r>
+                        <a:t>327 K neur.</a:t>
+                      </a:r>
+                    </a:p>
+                    <a:p>
+                      <a:pPr algn="ctr">
+                        <a:defRPr sz="950">
+                          <a:solidFill>
+                            <a:srgbClr val="1A1A1A"/>
+                          </a:solidFill>
+                          <a:latin typeface="Calibri"/>
+                        </a:defRPr>
+                      </a:pPr>
+                      <a:r>
+                        <a:t>DVS on-chip</a:t>
+                      </a:r>
+                    </a:p>
+                  </a:txBody>
+                  <a:tcPr marL="91440" marR="91440" marT="36576" marB="36576">
+                    <a:solidFill>
+                      <a:srgbClr val="F8F7F2"/>
+                    </a:solidFill>
+                  </a:tcPr>
+                </a:tc>
+                <a:tc>
+                  <a:txBody>
+                    <a:bodyPr anchor="ctr"/>
+                    <a:lstStyle/>
+                    <a:p>
+                      <a:pPr algn="ctr">
+                        <a:defRPr sz="950">
+                          <a:solidFill>
+                            <a:srgbClr val="1A1A1A"/>
+                          </a:solidFill>
+                          <a:latin typeface="Calibri"/>
+                        </a:defRPr>
+                      </a:pPr>
+                      <a:r>
+                        <a:t>mW-level · always-on</a:t>
+                      </a:r>
+                    </a:p>
+                  </a:txBody>
+                  <a:tcPr marL="91440" marR="91440" marT="36576" marB="36576">
+                    <a:solidFill>
+                      <a:srgbClr val="F8F7F2"/>
+                    </a:solidFill>
+                  </a:tcPr>
+                </a:tc>
+              </a:tr>
+              <a:tr h="502920">
+                <a:tc>
+                  <a:txBody>
+                    <a:bodyPr anchor="ctr"/>
+                    <a:lstStyle/>
+                    <a:p>
+                      <a:pPr algn="l">
+                        <a:defRPr b="1" sz="1050">
+                          <a:solidFill>
+                            <a:srgbClr val="0F2540"/>
+                          </a:solidFill>
+                          <a:latin typeface="Calibri"/>
+                        </a:defRPr>
+                      </a:pPr>
+                      <a:r>
+                        <a:t>BrainScaleS-2</a:t>
+                      </a:r>
+                    </a:p>
+                  </a:txBody>
+                  <a:tcPr marL="91440" marR="91440" marT="36576" marB="36576">
+                    <a:solidFill>
+                      <a:srgbClr val="FFFFFF"/>
+                    </a:solidFill>
+                  </a:tcPr>
+                </a:tc>
+                <a:tc>
+                  <a:txBody>
+                    <a:bodyPr anchor="ctr"/>
+                    <a:lstStyle/>
+                    <a:p>
+                      <a:pPr algn="ctr">
+                        <a:defRPr sz="1000">
+                          <a:solidFill>
+                            <a:srgbClr val="1A1A1A"/>
+                          </a:solidFill>
+                          <a:latin typeface="Consolas"/>
+                        </a:defRPr>
+                      </a:pPr>
+                      <a:r>
+                        <a:t>2022</a:t>
+                      </a:r>
+                    </a:p>
+                  </a:txBody>
+                  <a:tcPr marL="91440" marR="91440" marT="36576" marB="36576">
+                    <a:solidFill>
+                      <a:srgbClr val="FFFFFF"/>
+                    </a:solidFill>
+                  </a:tcPr>
+                </a:tc>
+                <a:tc>
+                  <a:txBody>
+                    <a:bodyPr anchor="ctr"/>
+                    <a:lstStyle/>
+                    <a:p>
+                      <a:pPr algn="ctr">
+                        <a:defRPr sz="1000">
+                          <a:solidFill>
+                            <a:srgbClr val="1A1A1A"/>
+                          </a:solidFill>
+                          <a:latin typeface="Consolas"/>
+                        </a:defRPr>
+                      </a:pPr>
+                      <a:r>
+                        <a:t>65 nm</a:t>
+                      </a:r>
+                    </a:p>
+                  </a:txBody>
+                  <a:tcPr marL="91440" marR="91440" marT="36576" marB="36576">
+                    <a:solidFill>
+                      <a:srgbClr val="FFFFFF"/>
+                    </a:solidFill>
+                  </a:tcPr>
+                </a:tc>
+                <a:tc>
+                  <a:txBody>
+                    <a:bodyPr anchor="ctr"/>
+                    <a:lstStyle/>
+                    <a:p>
+                      <a:pPr algn="ctr">
+                        <a:defRPr sz="950">
+                          <a:solidFill>
+                            <a:srgbClr val="1A1A1A"/>
+                          </a:solidFill>
+                          <a:latin typeface="Calibri"/>
+                        </a:defRPr>
+                      </a:pPr>
+                      <a:r>
+                        <a:t>512 analog neur.</a:t>
+                      </a:r>
+                    </a:p>
+                  </a:txBody>
+                  <a:tcPr marL="91440" marR="91440" marT="36576" marB="36576">
+                    <a:solidFill>
+                      <a:srgbClr val="FFFFFF"/>
+                    </a:solidFill>
+                  </a:tcPr>
+                </a:tc>
+                <a:tc>
+                  <a:txBody>
+                    <a:bodyPr anchor="ctr"/>
+                    <a:lstStyle/>
+                    <a:p>
+                      <a:pPr algn="ctr">
+                        <a:defRPr sz="950">
+                          <a:solidFill>
+                            <a:srgbClr val="1A1A1A"/>
+                          </a:solidFill>
+                          <a:latin typeface="Calibri"/>
+                        </a:defRPr>
+                      </a:pPr>
+                      <a:r>
+                        <a:t>1000× wall-clock</a:t>
+                      </a:r>
+                    </a:p>
+                  </a:txBody>
+                  <a:tcPr marL="91440" marR="91440" marT="36576" marB="36576">
+                    <a:solidFill>
+                      <a:srgbClr val="FFFFFF"/>
+                    </a:solidFill>
+                  </a:tcPr>
+                </a:tc>
+              </a:tr>
+            </a:tbl>
+          </a:graphicData>
+        </a:graphic>
+      </p:graphicFrame>
+      <p:sp>
+        <p:nvSpPr>
+          <p:cNvPr id="12" name="TextBox 11"/>
+          <p:cNvSpPr txBox="1"/>
+          <p:nvPr/>
+        </p:nvSpPr>
+        <p:spPr>
+          <a:xfrm>
+            <a:off x="4526280" y="6355080"/>
+            <a:ext cx="7315200" cy="228600"/>
+          </a:xfrm>
+          <a:prstGeom prst="rect">
+            <a:avLst/>
+          </a:prstGeom>
+          <a:noFill/>
+        </p:spPr>
+        <p:txBody>
+          <a:bodyPr wrap="square" lIns="0" rIns="0" tIns="0" bIns="0">
+            <a:spAutoFit/>
+          </a:bodyPr>
+          <a:lstStyle/>
+          <a:p>
+            <a:pPr>
+              <a:defRPr sz="850" b="0" i="1">
+                <a:solidFill>
+                  <a:srgbClr val="7A7A7A"/>
+                </a:solidFill>
+                <a:latin typeface="Calibri"/>
+              </a:defRPr>
+            </a:pPr>
+            <a:r>
+              <a:t>Refs: Merolla 2014 · Davies 2018 · Mayr 2019 · Pei 2019 · SynSense 2022 · BrainScaleS team 2022.</a:t>
+            </a:r>
+          </a:p>
+        </p:txBody>
+      </p:sp>
+      <p:sp>
+        <p:nvSpPr>
+          <p:cNvPr id="13" name="TextBox 12"/>
+          <p:cNvSpPr txBox="1"/>
+          <p:nvPr/>
+        </p:nvSpPr>
+        <p:spPr>
+          <a:xfrm>
+            <a:off x="457200" y="6492240"/>
+            <a:ext cx="5486400" cy="274320"/>
+          </a:xfrm>
+          <a:prstGeom prst="rect">
+            <a:avLst/>
+          </a:prstGeom>
+          <a:noFill/>
+        </p:spPr>
+        <p:txBody>
+          <a:bodyPr wrap="square" lIns="0" rIns="0" tIns="0" bIns="0">
+            <a:spAutoFit/>
+          </a:bodyPr>
+          <a:lstStyle/>
+          <a:p>
+            <a:pPr>
+              <a:defRPr sz="1000" b="0" i="0">
+                <a:solidFill>
+                  <a:srgbClr val="7A7A7A"/>
+                </a:solidFill>
+                <a:latin typeface="Calibri"/>
+              </a:defRPr>
+            </a:pPr>
+            <a:r>
+              <a:t>Appendix — Hyunho Kook</a:t>
+            </a:r>
+          </a:p>
+        </p:txBody>
+      </p:sp>
+      <p:sp>
+        <p:nvSpPr>
+          <p:cNvPr id="14" name="TextBox 13"/>
+          <p:cNvSpPr txBox="1"/>
+          <p:nvPr/>
+        </p:nvSpPr>
+        <p:spPr>
+          <a:xfrm>
+            <a:off x="6400800" y="6492240"/>
+            <a:ext cx="5303520" cy="274320"/>
+          </a:xfrm>
+          <a:prstGeom prst="rect">
+            <a:avLst/>
+          </a:prstGeom>
+          <a:noFill/>
+        </p:spPr>
+        <p:txBody>
+          <a:bodyPr wrap="square" lIns="0" rIns="0" tIns="0" bIns="0">
+            <a:spAutoFit/>
+          </a:bodyPr>
+          <a:lstStyle/>
+          <a:p>
+            <a:pPr algn="r">
+              <a:defRPr sz="1000" b="0" i="0">
+                <a:solidFill>
+                  <a:srgbClr val="7A7A7A"/>
+                </a:solidFill>
+                <a:latin typeface="Calibri"/>
+              </a:defRPr>
+            </a:pPr>
+            <a:r>
+              <a:t>A1 / A7</a:t>
+            </a:r>
+          </a:p>
+        </p:txBody>
+      </p:sp>
+    </p:spTree>
+  </p:cSld>
+  <p:clrMapOvr>
+    <a:masterClrMapping/>
+  </p:clrMapOvr>
+</p:sld>
+</file>
+
+<file path=ppt/slides/slide23.xml><?xml version="1.0" encoding="utf-8"?>
+<p:sld xmlns:a="http://schemas.openxmlformats.org/drawingml/2006/main" xmlns:p="http://schemas.openxmlformats.org/presentationml/2006/main" xmlns:r="http://schemas.openxmlformats.org/officeDocument/2006/relationships">
+  <p:cSld>
+    <p:spTree>
+      <p:nvGrpSpPr>
+        <p:cNvPr id="1" name=""/>
+        <p:cNvGrpSpPr/>
+        <p:nvPr/>
+      </p:nvGrpSpPr>
+      <p:grpSpPr/>
+      <p:sp>
+        <p:nvSpPr>
+          <p:cNvPr id="2" name="Rectangle 1"/>
+          <p:cNvSpPr/>
+          <p:nvPr/>
+        </p:nvSpPr>
+        <p:spPr>
+          <a:xfrm>
+            <a:off x="457200" y="566928"/>
+            <a:ext cx="54864" cy="201168"/>
+          </a:xfrm>
+          <a:prstGeom prst="rect">
+            <a:avLst/>
+          </a:prstGeom>
+          <a:solidFill>
+            <a:srgbClr val="E56945"/>
+          </a:solidFill>
+          <a:ln>
+            <a:noFill/>
+          </a:ln>
+        </p:spPr>
+        <p:style>
+          <a:lnRef idx="1">
+            <a:schemeClr val="accent1"/>
+          </a:lnRef>
+          <a:fillRef idx="3">
+            <a:schemeClr val="accent1"/>
+          </a:fillRef>
+          <a:effectRef idx="2">
+            <a:schemeClr val="accent1"/>
+          </a:effectRef>
+          <a:fontRef idx="minor">
+            <a:schemeClr val="lt1"/>
+          </a:fontRef>
+        </p:style>
+        <p:txBody>
+          <a:bodyPr rtlCol="0" anchor="ctr"/>
+          <a:lstStyle/>
+          <a:p>
+            <a:pPr algn="ctr"/>
+          </a:p>
+        </p:txBody>
+      </p:sp>
+      <p:sp>
+        <p:nvSpPr>
+          <p:cNvPr id="3" name="TextBox 2"/>
+          <p:cNvSpPr txBox="1"/>
+          <p:nvPr/>
+        </p:nvSpPr>
+        <p:spPr>
+          <a:xfrm>
+            <a:off x="594360" y="548640"/>
+            <a:ext cx="5486400" cy="274320"/>
+          </a:xfrm>
+          <a:prstGeom prst="rect">
+            <a:avLst/>
+          </a:prstGeom>
+          <a:noFill/>
+        </p:spPr>
+        <p:txBody>
+          <a:bodyPr wrap="square" lIns="0" rIns="0" tIns="0" bIns="0">
+            <a:spAutoFit/>
+          </a:bodyPr>
+          <a:lstStyle/>
+          <a:p>
+            <a:pPr>
+              <a:defRPr sz="1000" b="1" i="0">
+                <a:solidFill>
+                  <a:srgbClr val="E56945"/>
+                </a:solidFill>
+                <a:latin typeface="Calibri"/>
+              </a:defRPr>
+            </a:pPr>
+            <a:r>
+              <a:rPr spc="400"/>
+              <a:t>APPENDIX · A2</a:t>
+            </a:r>
+          </a:p>
+        </p:txBody>
+      </p:sp>
+      <p:sp>
+        <p:nvSpPr>
+          <p:cNvPr id="4" name="TextBox 3"/>
+          <p:cNvSpPr txBox="1"/>
+          <p:nvPr/>
+        </p:nvSpPr>
+        <p:spPr>
+          <a:xfrm>
+            <a:off x="457200" y="777240"/>
+            <a:ext cx="11247120" cy="777240"/>
+          </a:xfrm>
+          <a:prstGeom prst="rect">
+            <a:avLst/>
+          </a:prstGeom>
+          <a:noFill/>
+        </p:spPr>
+        <p:txBody>
+          <a:bodyPr wrap="square" lIns="0" rIns="0" tIns="0" bIns="0">
+            <a:spAutoFit/>
+          </a:bodyPr>
+          <a:lstStyle/>
+          <a:p>
+            <a:pPr>
+              <a:defRPr sz="3000" b="1" i="0">
+                <a:solidFill>
+                  <a:srgbClr val="0F2540"/>
+                </a:solidFill>
+                <a:latin typeface="Cambria"/>
+              </a:defRPr>
+            </a:pPr>
+            <a:r>
+              <a:t>Where SNN Efficiency Comes From</a:t>
+            </a:r>
+          </a:p>
+        </p:txBody>
+      </p:sp>
+      <p:sp>
+        <p:nvSpPr>
+          <p:cNvPr id="5" name="TextBox 4"/>
+          <p:cNvSpPr txBox="1"/>
+          <p:nvPr/>
+        </p:nvSpPr>
+        <p:spPr>
+          <a:xfrm>
+            <a:off x="457200" y="1600200"/>
+            <a:ext cx="11247120" cy="365760"/>
+          </a:xfrm>
+          <a:prstGeom prst="rect">
+            <a:avLst/>
+          </a:prstGeom>
+          <a:noFill/>
+        </p:spPr>
+        <p:txBody>
+          <a:bodyPr wrap="square" lIns="0" rIns="0" tIns="0" bIns="0">
+            <a:spAutoFit/>
+          </a:bodyPr>
+          <a:lstStyle/>
+          <a:p>
+            <a:pPr>
+              <a:defRPr sz="1400" b="0" i="1">
+                <a:solidFill>
+                  <a:srgbClr val="7A7A7A"/>
+                </a:solidFill>
+                <a:latin typeface="Calibri"/>
+              </a:defRPr>
+            </a:pPr>
+            <a:r>
+              <a:t>Three structural advantages — none requires a new training scheme.</a:t>
+            </a:r>
+          </a:p>
+        </p:txBody>
+      </p:sp>
+      <p:sp>
+        <p:nvSpPr>
+          <p:cNvPr id="6" name="Rectangle 5"/>
+          <p:cNvSpPr/>
+          <p:nvPr/>
+        </p:nvSpPr>
+        <p:spPr>
+          <a:xfrm>
+            <a:off x="457200" y="2194560"/>
+            <a:ext cx="3703320" cy="2331720"/>
+          </a:xfrm>
+          <a:prstGeom prst="rect">
+            <a:avLst/>
+          </a:prstGeom>
+          <a:solidFill>
+            <a:srgbClr val="FFFFFF"/>
+          </a:solidFill>
+          <a:ln w="22860">
+            <a:solidFill>
+              <a:srgbClr val="1D7E7E"/>
+            </a:solidFill>
+          </a:ln>
+        </p:spPr>
+        <p:style>
+          <a:lnRef idx="1">
+            <a:schemeClr val="accent1"/>
+          </a:lnRef>
+          <a:fillRef idx="3">
+            <a:schemeClr val="accent1"/>
+          </a:fillRef>
+          <a:effectRef idx="2">
+            <a:schemeClr val="accent1"/>
+          </a:effectRef>
+          <a:fontRef idx="minor">
+            <a:schemeClr val="lt1"/>
+          </a:fontRef>
+        </p:style>
+        <p:txBody>
+          <a:bodyPr rtlCol="0" anchor="ctr"/>
+          <a:lstStyle/>
+          <a:p>
+            <a:pPr algn="ctr"/>
+          </a:p>
+        </p:txBody>
+      </p:sp>
+      <p:sp>
+        <p:nvSpPr>
+          <p:cNvPr id="7" name="Rectangle 6"/>
+          <p:cNvSpPr/>
+          <p:nvPr/>
+        </p:nvSpPr>
+        <p:spPr>
+          <a:xfrm>
+            <a:off x="457200" y="2194560"/>
+            <a:ext cx="3703320" cy="91440"/>
+          </a:xfrm>
+          <a:prstGeom prst="rect">
+            <a:avLst/>
+          </a:prstGeom>
+          <a:solidFill>
+            <a:srgbClr val="1D7E7E"/>
+          </a:solidFill>
+          <a:ln>
+            <a:noFill/>
+          </a:ln>
+        </p:spPr>
+        <p:style>
+          <a:lnRef idx="1">
+            <a:schemeClr val="accent1"/>
+          </a:lnRef>
+          <a:fillRef idx="3">
+            <a:schemeClr val="accent1"/>
+          </a:fillRef>
+          <a:effectRef idx="2">
+            <a:schemeClr val="accent1"/>
+          </a:effectRef>
+          <a:fontRef idx="minor">
+            <a:schemeClr val="lt1"/>
+          </a:fontRef>
+        </p:style>
+        <p:txBody>
+          <a:bodyPr rtlCol="0" anchor="ctr"/>
+          <a:lstStyle/>
+          <a:p>
+            <a:pPr algn="ctr"/>
+          </a:p>
+        </p:txBody>
+      </p:sp>
+      <p:sp>
+        <p:nvSpPr>
+          <p:cNvPr id="8" name="TextBox 7"/>
+          <p:cNvSpPr txBox="1"/>
+          <p:nvPr/>
+        </p:nvSpPr>
+        <p:spPr>
+          <a:xfrm>
+            <a:off x="640080" y="2423160"/>
+            <a:ext cx="3337560" cy="365760"/>
+          </a:xfrm>
+          <a:prstGeom prst="rect">
+            <a:avLst/>
+          </a:prstGeom>
+          <a:noFill/>
+        </p:spPr>
+        <p:txBody>
+          <a:bodyPr wrap="square" lIns="0" rIns="0" tIns="0" bIns="0">
+            <a:spAutoFit/>
+          </a:bodyPr>
+          <a:lstStyle/>
+          <a:p>
+            <a:pPr>
+              <a:defRPr sz="1400" b="1" i="0">
+                <a:solidFill>
+                  <a:srgbClr val="1D7E7E"/>
+                </a:solidFill>
+                <a:latin typeface="Calibri"/>
+              </a:defRPr>
+            </a:pPr>
+            <a:r>
+              <a:t>①  Event-driven</a:t>
+            </a:r>
+          </a:p>
+        </p:txBody>
+      </p:sp>
+      <p:sp>
+        <p:nvSpPr>
+          <p:cNvPr id="9" name="TextBox 8"/>
+          <p:cNvSpPr txBox="1"/>
+          <p:nvPr/>
+        </p:nvSpPr>
+        <p:spPr>
+          <a:xfrm>
+            <a:off x="640080" y="2880360"/>
+            <a:ext cx="3337560" cy="1188720"/>
+          </a:xfrm>
+          <a:prstGeom prst="rect">
+            <a:avLst/>
+          </a:prstGeom>
+          <a:noFill/>
+        </p:spPr>
+        <p:txBody>
+          <a:bodyPr wrap="square" lIns="0" rIns="0" tIns="0" bIns="0">
+            <a:spAutoFit/>
+          </a:bodyPr>
+          <a:lstStyle/>
+          <a:p>
+            <a:pPr>
+              <a:defRPr sz="1100" b="0" i="0">
+                <a:solidFill>
+                  <a:srgbClr val="1A1A1A"/>
+                </a:solidFill>
+                <a:latin typeface="Calibri"/>
+              </a:defRPr>
+            </a:pPr>
+            <a:r>
+              <a:t>No spike → no compute. Inactive neurons skip MAC and memory access entirely.</a:t>
+            </a:r>
+          </a:p>
+        </p:txBody>
+      </p:sp>
+      <p:sp>
+        <p:nvSpPr>
+          <p:cNvPr id="10" name="Rectangle 9"/>
+          <p:cNvSpPr/>
+          <p:nvPr/>
+        </p:nvSpPr>
+        <p:spPr>
+          <a:xfrm>
+            <a:off x="594360" y="4023359"/>
+            <a:ext cx="3429000" cy="365760"/>
+          </a:xfrm>
+          <a:prstGeom prst="rect">
+            <a:avLst/>
+          </a:prstGeom>
+          <a:solidFill>
+            <a:srgbClr val="F8F7F2"/>
+          </a:solidFill>
+          <a:ln>
+            <a:noFill/>
+          </a:ln>
+        </p:spPr>
+        <p:style>
+          <a:lnRef idx="1">
+            <a:schemeClr val="accent1"/>
+          </a:lnRef>
+          <a:fillRef idx="3">
+            <a:schemeClr val="accent1"/>
+          </a:fillRef>
+          <a:effectRef idx="2">
+            <a:schemeClr val="accent1"/>
+          </a:effectRef>
+          <a:fontRef idx="minor">
+            <a:schemeClr val="lt1"/>
+          </a:fontRef>
+        </p:style>
+        <p:txBody>
+          <a:bodyPr rtlCol="0" anchor="ctr"/>
+          <a:lstStyle/>
+          <a:p>
+            <a:pPr algn="ctr"/>
+          </a:p>
+        </p:txBody>
+      </p:sp>
+      <p:sp>
+        <p:nvSpPr>
+          <p:cNvPr id="11" name="TextBox 10"/>
+          <p:cNvSpPr txBox="1"/>
+          <p:nvPr/>
+        </p:nvSpPr>
+        <p:spPr>
+          <a:xfrm>
+            <a:off x="640080" y="4078223"/>
+            <a:ext cx="3337560" cy="292608"/>
+          </a:xfrm>
+          <a:prstGeom prst="rect">
+            <a:avLst/>
+          </a:prstGeom>
+          <a:noFill/>
+        </p:spPr>
+        <p:txBody>
+          <a:bodyPr wrap="square" lIns="0" rIns="0" tIns="0" bIns="0">
+            <a:spAutoFit/>
+          </a:bodyPr>
+          <a:lstStyle/>
+          <a:p>
+            <a:pPr>
+              <a:defRPr sz="1000" b="1" i="0">
+                <a:solidFill>
+                  <a:srgbClr val="0F2540"/>
+                </a:solidFill>
+                <a:latin typeface="Consolas"/>
+              </a:defRPr>
+            </a:pPr>
+            <a:r>
+              <a:t>Typical activity:  5–20 % per timestep</a:t>
+            </a:r>
+          </a:p>
+        </p:txBody>
+      </p:sp>
+      <p:sp>
+        <p:nvSpPr>
+          <p:cNvPr id="12" name="Rectangle 11"/>
+          <p:cNvSpPr/>
+          <p:nvPr/>
+        </p:nvSpPr>
+        <p:spPr>
+          <a:xfrm>
+            <a:off x="4352544" y="2194560"/>
+            <a:ext cx="3703320" cy="2331720"/>
+          </a:xfrm>
+          <a:prstGeom prst="rect">
+            <a:avLst/>
+          </a:prstGeom>
+          <a:solidFill>
+            <a:srgbClr val="FFFFFF"/>
+          </a:solidFill>
+          <a:ln w="22860">
+            <a:solidFill>
+              <a:srgbClr val="E0B85F"/>
+            </a:solidFill>
+          </a:ln>
+        </p:spPr>
+        <p:style>
+          <a:lnRef idx="1">
+            <a:schemeClr val="accent1"/>
+          </a:lnRef>
+          <a:fillRef idx="3">
+            <a:schemeClr val="accent1"/>
+          </a:fillRef>
+          <a:effectRef idx="2">
+            <a:schemeClr val="accent1"/>
+          </a:effectRef>
+          <a:fontRef idx="minor">
+            <a:schemeClr val="lt1"/>
+          </a:fontRef>
+        </p:style>
+        <p:txBody>
+          <a:bodyPr rtlCol="0" anchor="ctr"/>
+          <a:lstStyle/>
+          <a:p>
+            <a:pPr algn="ctr"/>
+          </a:p>
+        </p:txBody>
+      </p:sp>
+      <p:sp>
+        <p:nvSpPr>
+          <p:cNvPr id="13" name="Rectangle 12"/>
+          <p:cNvSpPr/>
+          <p:nvPr/>
+        </p:nvSpPr>
+        <p:spPr>
+          <a:xfrm>
+            <a:off x="4352544" y="2194560"/>
+            <a:ext cx="3703320" cy="91440"/>
+          </a:xfrm>
+          <a:prstGeom prst="rect">
+            <a:avLst/>
+          </a:prstGeom>
+          <a:solidFill>
+            <a:srgbClr val="E0B85F"/>
+          </a:solidFill>
+          <a:ln>
+            <a:noFill/>
+          </a:ln>
+        </p:spPr>
+        <p:style>
+          <a:lnRef idx="1">
+            <a:schemeClr val="accent1"/>
+          </a:lnRef>
+          <a:fillRef idx="3">
+            <a:schemeClr val="accent1"/>
+          </a:fillRef>
+          <a:effectRef idx="2">
+            <a:schemeClr val="accent1"/>
+          </a:effectRef>
+          <a:fontRef idx="minor">
+            <a:schemeClr val="lt1"/>
+          </a:fontRef>
+        </p:style>
+        <p:txBody>
+          <a:bodyPr rtlCol="0" anchor="ctr"/>
+          <a:lstStyle/>
+          <a:p>
+            <a:pPr algn="ctr"/>
+          </a:p>
+        </p:txBody>
+      </p:sp>
+      <p:sp>
+        <p:nvSpPr>
+          <p:cNvPr id="14" name="TextBox 13"/>
+          <p:cNvSpPr txBox="1"/>
+          <p:nvPr/>
+        </p:nvSpPr>
+        <p:spPr>
+          <a:xfrm>
+            <a:off x="4535424" y="2423160"/>
+            <a:ext cx="3337560" cy="365760"/>
+          </a:xfrm>
+          <a:prstGeom prst="rect">
+            <a:avLst/>
+          </a:prstGeom>
+          <a:noFill/>
+        </p:spPr>
+        <p:txBody>
+          <a:bodyPr wrap="square" lIns="0" rIns="0" tIns="0" bIns="0">
+            <a:spAutoFit/>
+          </a:bodyPr>
+          <a:lstStyle/>
+          <a:p>
+            <a:pPr>
+              <a:defRPr sz="1400" b="1" i="0">
+                <a:solidFill>
+                  <a:srgbClr val="E0B85F"/>
+                </a:solidFill>
+                <a:latin typeface="Calibri"/>
+              </a:defRPr>
+            </a:pPr>
+            <a:r>
+              <a:t>②  Multiplication-free</a:t>
+            </a:r>
+          </a:p>
+        </p:txBody>
+      </p:sp>
+      <p:sp>
+        <p:nvSpPr>
+          <p:cNvPr id="15" name="TextBox 14"/>
+          <p:cNvSpPr txBox="1"/>
+          <p:nvPr/>
+        </p:nvSpPr>
+        <p:spPr>
+          <a:xfrm>
+            <a:off x="4535424" y="2880360"/>
+            <a:ext cx="3337560" cy="1188720"/>
+          </a:xfrm>
+          <a:prstGeom prst="rect">
+            <a:avLst/>
+          </a:prstGeom>
+          <a:noFill/>
+        </p:spPr>
+        <p:txBody>
+          <a:bodyPr wrap="square" lIns="0" rIns="0" tIns="0" bIns="0">
+            <a:spAutoFit/>
+          </a:bodyPr>
+          <a:lstStyle/>
+          <a:p>
+            <a:pPr>
+              <a:defRPr sz="1100" b="0" i="0">
+                <a:solidFill>
+                  <a:srgbClr val="1A1A1A"/>
+                </a:solidFill>
+                <a:latin typeface="Calibri"/>
+              </a:defRPr>
+            </a:pPr>
+            <a:r>
+              <a:t>Spike ∈ {0, 1} → W·spike degenerates to W or 0. Each synapse becomes an Accumulate (AC), not a MAC.</a:t>
+            </a:r>
+          </a:p>
+        </p:txBody>
+      </p:sp>
+      <p:sp>
+        <p:nvSpPr>
+          <p:cNvPr id="16" name="Rectangle 15"/>
+          <p:cNvSpPr/>
+          <p:nvPr/>
+        </p:nvSpPr>
+        <p:spPr>
+          <a:xfrm>
+            <a:off x="4489704" y="4023359"/>
+            <a:ext cx="3429000" cy="365760"/>
+          </a:xfrm>
+          <a:prstGeom prst="rect">
+            <a:avLst/>
+          </a:prstGeom>
+          <a:solidFill>
+            <a:srgbClr val="F8F7F2"/>
+          </a:solidFill>
+          <a:ln>
+            <a:noFill/>
+          </a:ln>
+        </p:spPr>
+        <p:style>
+          <a:lnRef idx="1">
+            <a:schemeClr val="accent1"/>
+          </a:lnRef>
+          <a:fillRef idx="3">
+            <a:schemeClr val="accent1"/>
+          </a:fillRef>
+          <a:effectRef idx="2">
+            <a:schemeClr val="accent1"/>
+          </a:effectRef>
+          <a:fontRef idx="minor">
+            <a:schemeClr val="lt1"/>
+          </a:fontRef>
+        </p:style>
+        <p:txBody>
+          <a:bodyPr rtlCol="0" anchor="ctr"/>
+          <a:lstStyle/>
+          <a:p>
+            <a:pPr algn="ctr"/>
+          </a:p>
+        </p:txBody>
+      </p:sp>
+      <p:sp>
+        <p:nvSpPr>
+          <p:cNvPr id="17" name="TextBox 16"/>
+          <p:cNvSpPr txBox="1"/>
+          <p:nvPr/>
+        </p:nvSpPr>
+        <p:spPr>
+          <a:xfrm>
+            <a:off x="4535424" y="4078223"/>
+            <a:ext cx="3337560" cy="292608"/>
+          </a:xfrm>
+          <a:prstGeom prst="rect">
+            <a:avLst/>
+          </a:prstGeom>
+          <a:noFill/>
+        </p:spPr>
+        <p:txBody>
+          <a:bodyPr wrap="square" lIns="0" rIns="0" tIns="0" bIns="0">
+            <a:spAutoFit/>
+          </a:bodyPr>
+          <a:lstStyle/>
+          <a:p>
+            <a:pPr>
+              <a:defRPr sz="1000" b="1" i="0">
+                <a:solidFill>
+                  <a:srgbClr val="0F2540"/>
+                </a:solidFill>
+                <a:latin typeface="Consolas"/>
+              </a:defRPr>
+            </a:pPr>
+            <a:r>
+              <a:t>AC ≈ 6–8× cheaper than MAC (45 nm)</a:t>
+            </a:r>
+          </a:p>
+        </p:txBody>
+      </p:sp>
+      <p:sp>
+        <p:nvSpPr>
+          <p:cNvPr id="18" name="Rectangle 17"/>
+          <p:cNvSpPr/>
+          <p:nvPr/>
+        </p:nvSpPr>
+        <p:spPr>
+          <a:xfrm>
+            <a:off x="8247888" y="2194560"/>
+            <a:ext cx="3703320" cy="2331720"/>
+          </a:xfrm>
+          <a:prstGeom prst="rect">
+            <a:avLst/>
+          </a:prstGeom>
+          <a:solidFill>
+            <a:srgbClr val="FFFFFF"/>
+          </a:solidFill>
+          <a:ln w="22860">
+            <a:solidFill>
+              <a:srgbClr val="E56945"/>
+            </a:solidFill>
+          </a:ln>
+        </p:spPr>
+        <p:style>
+          <a:lnRef idx="1">
+            <a:schemeClr val="accent1"/>
+          </a:lnRef>
+          <a:fillRef idx="3">
+            <a:schemeClr val="accent1"/>
+          </a:fillRef>
+          <a:effectRef idx="2">
+            <a:schemeClr val="accent1"/>
+          </a:effectRef>
+          <a:fontRef idx="minor">
+            <a:schemeClr val="lt1"/>
+          </a:fontRef>
+        </p:style>
+        <p:txBody>
+          <a:bodyPr rtlCol="0" anchor="ctr"/>
+          <a:lstStyle/>
+          <a:p>
+            <a:pPr algn="ctr"/>
+          </a:p>
+        </p:txBody>
+      </p:sp>
+      <p:sp>
+        <p:nvSpPr>
+          <p:cNvPr id="19" name="Rectangle 18"/>
+          <p:cNvSpPr/>
+          <p:nvPr/>
+        </p:nvSpPr>
+        <p:spPr>
+          <a:xfrm>
+            <a:off x="8247888" y="2194560"/>
+            <a:ext cx="3703320" cy="91440"/>
+          </a:xfrm>
+          <a:prstGeom prst="rect">
+            <a:avLst/>
+          </a:prstGeom>
+          <a:solidFill>
+            <a:srgbClr val="E56945"/>
+          </a:solidFill>
+          <a:ln>
+            <a:noFill/>
+          </a:ln>
+        </p:spPr>
+        <p:style>
+          <a:lnRef idx="1">
+            <a:schemeClr val="accent1"/>
+          </a:lnRef>
+          <a:fillRef idx="3">
+            <a:schemeClr val="accent1"/>
+          </a:fillRef>
+          <a:effectRef idx="2">
+            <a:schemeClr val="accent1"/>
+          </a:effectRef>
+          <a:fontRef idx="minor">
+            <a:schemeClr val="lt1"/>
+          </a:fontRef>
+        </p:style>
+        <p:txBody>
+          <a:bodyPr rtlCol="0" anchor="ctr"/>
+          <a:lstStyle/>
+          <a:p>
+            <a:pPr algn="ctr"/>
+          </a:p>
+        </p:txBody>
+      </p:sp>
+      <p:sp>
+        <p:nvSpPr>
+          <p:cNvPr id="20" name="TextBox 19"/>
+          <p:cNvSpPr txBox="1"/>
+          <p:nvPr/>
+        </p:nvSpPr>
+        <p:spPr>
+          <a:xfrm>
+            <a:off x="8430767" y="2423160"/>
+            <a:ext cx="3337560" cy="365760"/>
+          </a:xfrm>
+          <a:prstGeom prst="rect">
+            <a:avLst/>
+          </a:prstGeom>
+          <a:noFill/>
+        </p:spPr>
+        <p:txBody>
+          <a:bodyPr wrap="square" lIns="0" rIns="0" tIns="0" bIns="0">
+            <a:spAutoFit/>
+          </a:bodyPr>
+          <a:lstStyle/>
+          <a:p>
+            <a:pPr>
+              <a:defRPr sz="1400" b="1" i="0">
+                <a:solidFill>
+                  <a:srgbClr val="E56945"/>
+                </a:solidFill>
+                <a:latin typeface="Calibri"/>
+              </a:defRPr>
+            </a:pPr>
+            <a:r>
+              <a:t>③  Co-located memory</a:t>
+            </a:r>
+          </a:p>
+        </p:txBody>
+      </p:sp>
+      <p:sp>
+        <p:nvSpPr>
+          <p:cNvPr id="21" name="TextBox 20"/>
+          <p:cNvSpPr txBox="1"/>
+          <p:nvPr/>
+        </p:nvSpPr>
+        <p:spPr>
+          <a:xfrm>
+            <a:off x="8430767" y="2880360"/>
+            <a:ext cx="3337560" cy="1188720"/>
+          </a:xfrm>
+          <a:prstGeom prst="rect">
+            <a:avLst/>
+          </a:prstGeom>
+          <a:noFill/>
+        </p:spPr>
+        <p:txBody>
+          <a:bodyPr wrap="square" lIns="0" rIns="0" tIns="0" bIns="0">
+            <a:spAutoFit/>
+          </a:bodyPr>
+          <a:lstStyle/>
+          <a:p>
+            <a:pPr>
+              <a:defRPr sz="1100" b="0" i="0">
+                <a:solidFill>
+                  <a:srgbClr val="1A1A1A"/>
+                </a:solidFill>
+                <a:latin typeface="Calibri"/>
+              </a:defRPr>
+            </a:pPr>
+            <a:r>
+              <a:t>Neuromorphic cores keep synaptic weights in local SRAM, on-chip mesh routing — no DRAM trip.</a:t>
+            </a:r>
+          </a:p>
+        </p:txBody>
+      </p:sp>
+      <p:sp>
+        <p:nvSpPr>
+          <p:cNvPr id="22" name="Rectangle 21"/>
+          <p:cNvSpPr/>
+          <p:nvPr/>
+        </p:nvSpPr>
+        <p:spPr>
+          <a:xfrm>
+            <a:off x="8385048" y="4023359"/>
+            <a:ext cx="3429000" cy="365760"/>
+          </a:xfrm>
+          <a:prstGeom prst="rect">
+            <a:avLst/>
+          </a:prstGeom>
+          <a:solidFill>
+            <a:srgbClr val="F8F7F2"/>
+          </a:solidFill>
+          <a:ln>
+            <a:noFill/>
+          </a:ln>
+        </p:spPr>
+        <p:style>
+          <a:lnRef idx="1">
+            <a:schemeClr val="accent1"/>
+          </a:lnRef>
+          <a:fillRef idx="3">
+            <a:schemeClr val="accent1"/>
+          </a:fillRef>
+          <a:effectRef idx="2">
+            <a:schemeClr val="accent1"/>
+          </a:effectRef>
+          <a:fontRef idx="minor">
+            <a:schemeClr val="lt1"/>
+          </a:fontRef>
+        </p:style>
+        <p:txBody>
+          <a:bodyPr rtlCol="0" anchor="ctr"/>
+          <a:lstStyle/>
+          <a:p>
+            <a:pPr algn="ctr"/>
+          </a:p>
+        </p:txBody>
+      </p:sp>
+      <p:sp>
+        <p:nvSpPr>
+          <p:cNvPr id="23" name="TextBox 22"/>
+          <p:cNvSpPr txBox="1"/>
+          <p:nvPr/>
+        </p:nvSpPr>
+        <p:spPr>
+          <a:xfrm>
+            <a:off x="8430767" y="4078223"/>
+            <a:ext cx="3337560" cy="292608"/>
+          </a:xfrm>
+          <a:prstGeom prst="rect">
+            <a:avLst/>
+          </a:prstGeom>
+          <a:noFill/>
+        </p:spPr>
+        <p:txBody>
+          <a:bodyPr wrap="square" lIns="0" rIns="0" tIns="0" bIns="0">
+            <a:spAutoFit/>
+          </a:bodyPr>
+          <a:lstStyle/>
+          <a:p>
+            <a:pPr>
+              <a:defRPr sz="1000" b="1" i="0">
+                <a:solidFill>
+                  <a:srgbClr val="0F2540"/>
+                </a:solidFill>
+                <a:latin typeface="Consolas"/>
+              </a:defRPr>
+            </a:pPr>
+            <a:r>
+              <a:t>DRAM 64-bit ≈ 1300 pJ vs SRAM ≈ 5 pJ</a:t>
+            </a:r>
+          </a:p>
+        </p:txBody>
+      </p:sp>
+      <p:pic>
+        <p:nvPicPr>
+          <p:cNvPr id="24" name="Picture 23" descr="mac_vs_ac.png"/>
+          <p:cNvPicPr>
+            <a:picLocks noChangeAspect="1"/>
+          </p:cNvPicPr>
+          <p:nvPr/>
+        </p:nvPicPr>
+        <p:blipFill>
+          <a:blip r:embed="rId2"/>
+          <a:stretch>
+            <a:fillRect/>
+          </a:stretch>
+        </p:blipFill>
+        <p:spPr>
+          <a:xfrm>
+            <a:off x="457200" y="4709160"/>
+            <a:ext cx="6766560" cy="1794423"/>
+          </a:xfrm>
+          <a:prstGeom prst="rect">
+            <a:avLst/>
+          </a:prstGeom>
+        </p:spPr>
+      </p:pic>
+      <p:sp>
+        <p:nvSpPr>
+          <p:cNvPr id="25" name="Rectangle 24"/>
+          <p:cNvSpPr/>
+          <p:nvPr/>
+        </p:nvSpPr>
+        <p:spPr>
+          <a:xfrm>
+            <a:off x="7498079" y="4846320"/>
+            <a:ext cx="54864" cy="1508760"/>
+          </a:xfrm>
+          <a:prstGeom prst="rect">
+            <a:avLst/>
+          </a:prstGeom>
+          <a:solidFill>
+            <a:srgbClr val="E0B85F"/>
+          </a:solidFill>
+          <a:ln>
+            <a:noFill/>
+          </a:ln>
+        </p:spPr>
+        <p:style>
+          <a:lnRef idx="1">
+            <a:schemeClr val="accent1"/>
+          </a:lnRef>
+          <a:fillRef idx="3">
+            <a:schemeClr val="accent1"/>
+          </a:fillRef>
+          <a:effectRef idx="2">
+            <a:schemeClr val="accent1"/>
+          </a:effectRef>
+          <a:fontRef idx="minor">
+            <a:schemeClr val="lt1"/>
+          </a:fontRef>
+        </p:style>
+        <p:txBody>
+          <a:bodyPr rtlCol="0" anchor="ctr"/>
+          <a:lstStyle/>
+          <a:p>
+            <a:pPr algn="ctr"/>
+          </a:p>
+        </p:txBody>
+      </p:sp>
+      <p:sp>
+        <p:nvSpPr>
+          <p:cNvPr id="26" name="Rectangle 25"/>
+          <p:cNvSpPr/>
+          <p:nvPr/>
+        </p:nvSpPr>
+        <p:spPr>
+          <a:xfrm>
+            <a:off x="7552944" y="4846320"/>
+            <a:ext cx="4288536" cy="1508760"/>
+          </a:xfrm>
+          <a:prstGeom prst="rect">
+            <a:avLst/>
+          </a:prstGeom>
+          <a:solidFill>
+            <a:srgbClr val="0F2540"/>
+          </a:solidFill>
+          <a:ln>
+            <a:noFill/>
+          </a:ln>
+        </p:spPr>
+        <p:style>
+          <a:lnRef idx="1">
+            <a:schemeClr val="accent1"/>
+          </a:lnRef>
+          <a:fillRef idx="3">
+            <a:schemeClr val="accent1"/>
+          </a:fillRef>
+          <a:effectRef idx="2">
+            <a:schemeClr val="accent1"/>
+          </a:effectRef>
+          <a:fontRef idx="minor">
+            <a:schemeClr val="lt1"/>
+          </a:fontRef>
+        </p:style>
+        <p:txBody>
+          <a:bodyPr rtlCol="0" anchor="ctr"/>
+          <a:lstStyle/>
+          <a:p>
+            <a:pPr algn="ctr"/>
+          </a:p>
+        </p:txBody>
+      </p:sp>
+      <p:sp>
+        <p:nvSpPr>
+          <p:cNvPr id="27" name="TextBox 26"/>
+          <p:cNvSpPr txBox="1"/>
+          <p:nvPr/>
+        </p:nvSpPr>
+        <p:spPr>
+          <a:xfrm>
+            <a:off x="7818119" y="4892040"/>
+            <a:ext cx="3886200" cy="1417319"/>
+          </a:xfrm>
+          <a:prstGeom prst="rect">
+            <a:avLst/>
+          </a:prstGeom>
+          <a:noFill/>
+        </p:spPr>
+        <p:txBody>
+          <a:bodyPr wrap="square" anchor="ctr">
+            <a:spAutoFit/>
+          </a:bodyPr>
+          <a:lstStyle/>
+          <a:p>
+            <a:pPr>
+              <a:defRPr sz="1100" b="1">
+                <a:solidFill>
+                  <a:srgbClr val="E0B85F"/>
+                </a:solidFill>
+                <a:latin typeface="Calibri"/>
+              </a:defRPr>
+            </a:pPr>
+            <a:r>
+              <a:t>Bottom line</a:t>
+            </a:r>
+          </a:p>
+          <a:p>
+            <a:pPr>
+              <a:spcBef>
+                <a:spcPts val="600"/>
+              </a:spcBef>
+              <a:defRPr sz="1000">
+                <a:solidFill>
+                  <a:srgbClr val="FFFFFF"/>
+                </a:solidFill>
+                <a:latin typeface="Calibri"/>
+              </a:defRPr>
+            </a:pPr>
+            <a:r>
+              <a:t>Efficiency is structural — comes from sparsity + binary spikes + co-located memory.</a:t>
+            </a:r>
+            <a:br/>
+            <a:r>
+              <a:t>MP-Init / TrSG protect (1) by stabilizing low-T training.</a:t>
+            </a:r>
+          </a:p>
+        </p:txBody>
+      </p:sp>
+      <p:sp>
+        <p:nvSpPr>
+          <p:cNvPr id="28" name="TextBox 27"/>
+          <p:cNvSpPr txBox="1"/>
+          <p:nvPr/>
+        </p:nvSpPr>
+        <p:spPr>
+          <a:xfrm>
+            <a:off x="457200" y="6492240"/>
+            <a:ext cx="5486400" cy="274320"/>
+          </a:xfrm>
+          <a:prstGeom prst="rect">
+            <a:avLst/>
+          </a:prstGeom>
+          <a:noFill/>
+        </p:spPr>
+        <p:txBody>
+          <a:bodyPr wrap="square" lIns="0" rIns="0" tIns="0" bIns="0">
+            <a:spAutoFit/>
+          </a:bodyPr>
+          <a:lstStyle/>
+          <a:p>
+            <a:pPr>
+              <a:defRPr sz="1000" b="0" i="0">
+                <a:solidFill>
+                  <a:srgbClr val="7A7A7A"/>
+                </a:solidFill>
+                <a:latin typeface="Calibri"/>
+              </a:defRPr>
+            </a:pPr>
+            <a:r>
+              <a:t>Appendix — Hyunho Kook</a:t>
+            </a:r>
+          </a:p>
+        </p:txBody>
+      </p:sp>
+      <p:sp>
+        <p:nvSpPr>
+          <p:cNvPr id="29" name="TextBox 28"/>
+          <p:cNvSpPr txBox="1"/>
+          <p:nvPr/>
+        </p:nvSpPr>
+        <p:spPr>
+          <a:xfrm>
+            <a:off x="6400800" y="6492240"/>
+            <a:ext cx="5303520" cy="274320"/>
+          </a:xfrm>
+          <a:prstGeom prst="rect">
+            <a:avLst/>
+          </a:prstGeom>
+          <a:noFill/>
+        </p:spPr>
+        <p:txBody>
+          <a:bodyPr wrap="square" lIns="0" rIns="0" tIns="0" bIns="0">
+            <a:spAutoFit/>
+          </a:bodyPr>
+          <a:lstStyle/>
+          <a:p>
+            <a:pPr algn="r">
+              <a:defRPr sz="1000" b="0" i="0">
+                <a:solidFill>
+                  <a:srgbClr val="7A7A7A"/>
+                </a:solidFill>
+                <a:latin typeface="Calibri"/>
+              </a:defRPr>
+            </a:pPr>
+            <a:r>
+              <a:t>A2 / A7</a:t>
+            </a:r>
+          </a:p>
+        </p:txBody>
+      </p:sp>
+    </p:spTree>
+  </p:cSld>
+  <p:clrMapOvr>
+    <a:masterClrMapping/>
+  </p:clrMapOvr>
+</p:sld>
+</file>
+
+<file path=ppt/slides/slide24.xml><?xml version="1.0" encoding="utf-8"?>
+<p:sld xmlns:a="http://schemas.openxmlformats.org/drawingml/2006/main" xmlns:p="http://schemas.openxmlformats.org/presentationml/2006/main" xmlns:r="http://schemas.openxmlformats.org/officeDocument/2006/relationships">
+  <p:cSld>
+    <p:spTree>
+      <p:nvGrpSpPr>
+        <p:cNvPr id="1" name=""/>
+        <p:cNvGrpSpPr/>
+        <p:nvPr/>
+      </p:nvGrpSpPr>
+      <p:grpSpPr/>
+      <p:sp>
+        <p:nvSpPr>
+          <p:cNvPr id="2" name="Rectangle 1"/>
+          <p:cNvSpPr/>
+          <p:nvPr/>
+        </p:nvSpPr>
+        <p:spPr>
+          <a:xfrm>
+            <a:off x="457200" y="566928"/>
+            <a:ext cx="54864" cy="201168"/>
+          </a:xfrm>
+          <a:prstGeom prst="rect">
+            <a:avLst/>
+          </a:prstGeom>
+          <a:solidFill>
+            <a:srgbClr val="E56945"/>
+          </a:solidFill>
+          <a:ln>
+            <a:noFill/>
+          </a:ln>
+        </p:spPr>
+        <p:style>
+          <a:lnRef idx="1">
+            <a:schemeClr val="accent1"/>
+          </a:lnRef>
+          <a:fillRef idx="3">
+            <a:schemeClr val="accent1"/>
+          </a:fillRef>
+          <a:effectRef idx="2">
+            <a:schemeClr val="accent1"/>
+          </a:effectRef>
+          <a:fontRef idx="minor">
+            <a:schemeClr val="lt1"/>
+          </a:fontRef>
+        </p:style>
+        <p:txBody>
+          <a:bodyPr rtlCol="0" anchor="ctr"/>
+          <a:lstStyle/>
+          <a:p>
+            <a:pPr algn="ctr"/>
+          </a:p>
+        </p:txBody>
+      </p:sp>
+      <p:sp>
+        <p:nvSpPr>
+          <p:cNvPr id="3" name="TextBox 2"/>
+          <p:cNvSpPr txBox="1"/>
+          <p:nvPr/>
+        </p:nvSpPr>
+        <p:spPr>
+          <a:xfrm>
+            <a:off x="594360" y="548640"/>
+            <a:ext cx="5486400" cy="274320"/>
+          </a:xfrm>
+          <a:prstGeom prst="rect">
+            <a:avLst/>
+          </a:prstGeom>
+          <a:noFill/>
+        </p:spPr>
+        <p:txBody>
+          <a:bodyPr wrap="square" lIns="0" rIns="0" tIns="0" bIns="0">
+            <a:spAutoFit/>
+          </a:bodyPr>
+          <a:lstStyle/>
+          <a:p>
+            <a:pPr>
+              <a:defRPr sz="1000" b="1" i="0">
+                <a:solidFill>
+                  <a:srgbClr val="E56945"/>
+                </a:solidFill>
+                <a:latin typeface="Calibri"/>
+              </a:defRPr>
+            </a:pPr>
+            <a:r>
+              <a:rPr spc="400"/>
+              <a:t>APPENDIX · A3</a:t>
+            </a:r>
+          </a:p>
+        </p:txBody>
+      </p:sp>
+      <p:sp>
+        <p:nvSpPr>
+          <p:cNvPr id="4" name="TextBox 3"/>
+          <p:cNvSpPr txBox="1"/>
+          <p:nvPr/>
+        </p:nvSpPr>
+        <p:spPr>
+          <a:xfrm>
+            <a:off x="457200" y="777240"/>
+            <a:ext cx="11247120" cy="777240"/>
+          </a:xfrm>
+          <a:prstGeom prst="rect">
+            <a:avLst/>
+          </a:prstGeom>
+          <a:noFill/>
+        </p:spPr>
+        <p:txBody>
+          <a:bodyPr wrap="square" lIns="0" rIns="0" tIns="0" bIns="0">
+            <a:spAutoFit/>
+          </a:bodyPr>
+          <a:lstStyle/>
+          <a:p>
+            <a:pPr>
+              <a:defRPr sz="3000" b="1" i="0">
+                <a:solidFill>
+                  <a:srgbClr val="0F2540"/>
+                </a:solidFill>
+                <a:latin typeface="Cambria"/>
+              </a:defRPr>
+            </a:pPr>
+            <a:r>
+              <a:t>Energy: SNN Chip vs DNN Platforms</a:t>
+            </a:r>
+          </a:p>
+        </p:txBody>
+      </p:sp>
+      <p:sp>
+        <p:nvSpPr>
+          <p:cNvPr id="5" name="TextBox 4"/>
+          <p:cNvSpPr txBox="1"/>
+          <p:nvPr/>
+        </p:nvSpPr>
+        <p:spPr>
+          <a:xfrm>
+            <a:off x="457200" y="1600200"/>
+            <a:ext cx="11247120" cy="365760"/>
+          </a:xfrm>
+          <a:prstGeom prst="rect">
+            <a:avLst/>
+          </a:prstGeom>
+          <a:noFill/>
+        </p:spPr>
+        <p:txBody>
+          <a:bodyPr wrap="square" lIns="0" rIns="0" tIns="0" bIns="0">
+            <a:spAutoFit/>
+          </a:bodyPr>
+          <a:lstStyle/>
+          <a:p>
+            <a:pPr>
+              <a:defRPr sz="1400" b="0" i="1">
+                <a:solidFill>
+                  <a:srgbClr val="7A7A7A"/>
+                </a:solidFill>
+                <a:latin typeface="Calibri"/>
+              </a:defRPr>
+            </a:pPr>
+            <a:r>
+              <a:t>Same task, four hardware platforms — what does the gap actually look like?</a:t>
+            </a:r>
+          </a:p>
+        </p:txBody>
+      </p:sp>
+      <p:pic>
+        <p:nvPicPr>
+          <p:cNvPr id="6" name="Picture 5" descr="energy_compare.png"/>
+          <p:cNvPicPr>
+            <a:picLocks noChangeAspect="1"/>
+          </p:cNvPicPr>
+          <p:nvPr/>
+        </p:nvPicPr>
+        <p:blipFill>
+          <a:blip r:embed="rId2"/>
+          <a:stretch>
+            <a:fillRect/>
+          </a:stretch>
+        </p:blipFill>
+        <p:spPr>
+          <a:xfrm>
+            <a:off x="365760" y="2194560"/>
+            <a:ext cx="7040880" cy="3404926"/>
+          </a:xfrm>
+          <a:prstGeom prst="rect">
+            <a:avLst/>
+          </a:prstGeom>
+        </p:spPr>
+      </p:pic>
+      <p:sp>
+        <p:nvSpPr>
+          <p:cNvPr id="7" name="TextBox 6"/>
+          <p:cNvSpPr txBox="1"/>
+          <p:nvPr/>
+        </p:nvSpPr>
+        <p:spPr>
+          <a:xfrm>
+            <a:off x="365760" y="5440680"/>
+            <a:ext cx="7040880" cy="274320"/>
+          </a:xfrm>
+          <a:prstGeom prst="rect">
+            <a:avLst/>
+          </a:prstGeom>
+          <a:noFill/>
+        </p:spPr>
+        <p:txBody>
+          <a:bodyPr wrap="square" lIns="0" rIns="0" tIns="0" bIns="0">
+            <a:spAutoFit/>
+          </a:bodyPr>
+          <a:lstStyle/>
+          <a:p>
+            <a:pPr>
+              <a:defRPr sz="1000" b="0" i="1">
+                <a:solidFill>
+                  <a:srgbClr val="7A7A7A"/>
+                </a:solidFill>
+                <a:latin typeface="Calibri"/>
+              </a:defRPr>
+            </a:pPr>
+            <a:r>
+              <a:t>Same Aloha keyword-spotting task on each platform.</a:t>
+            </a:r>
+          </a:p>
+        </p:txBody>
+      </p:sp>
+      <p:sp>
+        <p:nvSpPr>
+          <p:cNvPr id="8" name="TextBox 7"/>
+          <p:cNvSpPr txBox="1"/>
+          <p:nvPr/>
+        </p:nvSpPr>
+        <p:spPr>
+          <a:xfrm>
+            <a:off x="7680960" y="2194560"/>
+            <a:ext cx="4206240" cy="365760"/>
+          </a:xfrm>
+          <a:prstGeom prst="rect">
+            <a:avLst/>
+          </a:prstGeom>
+          <a:noFill/>
+        </p:spPr>
+        <p:txBody>
+          <a:bodyPr wrap="square" lIns="0" rIns="0" tIns="0" bIns="0">
+            <a:spAutoFit/>
+          </a:bodyPr>
+          <a:lstStyle/>
+          <a:p>
+            <a:pPr>
+              <a:defRPr sz="1500" b="1" i="0">
+                <a:solidFill>
+                  <a:srgbClr val="0F2540"/>
+                </a:solidFill>
+                <a:latin typeface="Calibri"/>
+              </a:defRPr>
+            </a:pPr>
+            <a:r>
+              <a:t>How big is the gap?</a:t>
+            </a:r>
+          </a:p>
+        </p:txBody>
+      </p:sp>
+      <p:sp>
+        <p:nvSpPr>
+          <p:cNvPr id="9" name="TextBox 8"/>
+          <p:cNvSpPr txBox="1"/>
+          <p:nvPr/>
+        </p:nvSpPr>
+        <p:spPr>
+          <a:xfrm>
+            <a:off x="7680960" y="2606040"/>
+            <a:ext cx="4206240" cy="365760"/>
+          </a:xfrm>
+          <a:prstGeom prst="rect">
+            <a:avLst/>
+          </a:prstGeom>
+          <a:noFill/>
+        </p:spPr>
+        <p:txBody>
+          <a:bodyPr wrap="square" lIns="0" rIns="0" tIns="0" bIns="0">
+            <a:spAutoFit/>
+          </a:bodyPr>
+          <a:lstStyle/>
+          <a:p>
+            <a:pPr>
+              <a:defRPr sz="1200" b="1" i="0">
+                <a:solidFill>
+                  <a:srgbClr val="1D7E7E"/>
+                </a:solidFill>
+                <a:latin typeface="Calibri"/>
+              </a:defRPr>
+            </a:pPr>
+            <a:r>
+              <a:t>Sparse / event tasks</a:t>
+            </a:r>
+          </a:p>
+        </p:txBody>
+      </p:sp>
+      <p:sp>
+        <p:nvSpPr>
+          <p:cNvPr id="10" name="TextBox 9"/>
+          <p:cNvSpPr txBox="1"/>
+          <p:nvPr/>
+        </p:nvSpPr>
+        <p:spPr>
+          <a:xfrm>
+            <a:off x="7680960" y="2907792"/>
+            <a:ext cx="4206240" cy="457200"/>
+          </a:xfrm>
+          <a:prstGeom prst="rect">
+            <a:avLst/>
+          </a:prstGeom>
+          <a:noFill/>
+        </p:spPr>
+        <p:txBody>
+          <a:bodyPr wrap="square" lIns="0" rIns="0" tIns="0" bIns="0">
+            <a:spAutoFit/>
+          </a:bodyPr>
+          <a:lstStyle/>
+          <a:p>
+            <a:pPr>
+              <a:defRPr sz="1050" b="0" i="0">
+                <a:solidFill>
+                  <a:srgbClr val="1A1A1A"/>
+                </a:solidFill>
+                <a:latin typeface="Calibri"/>
+              </a:defRPr>
+            </a:pPr>
+            <a:r>
+              <a:t>~50–100×  vs embedded GPU</a:t>
+            </a:r>
+            <a:br/>
+            <a:r>
+              <a:t>(keyword spot, gesture, sparse coding)</a:t>
+            </a:r>
+          </a:p>
+        </p:txBody>
+      </p:sp>
+      <p:sp>
+        <p:nvSpPr>
+          <p:cNvPr id="11" name="TextBox 10"/>
+          <p:cNvSpPr txBox="1"/>
+          <p:nvPr/>
+        </p:nvSpPr>
+        <p:spPr>
+          <a:xfrm>
+            <a:off x="7680960" y="3611880"/>
+            <a:ext cx="4206240" cy="365760"/>
+          </a:xfrm>
+          <a:prstGeom prst="rect">
+            <a:avLst/>
+          </a:prstGeom>
+          <a:noFill/>
+        </p:spPr>
+        <p:txBody>
+          <a:bodyPr wrap="square" lIns="0" rIns="0" tIns="0" bIns="0">
+            <a:spAutoFit/>
+          </a:bodyPr>
+          <a:lstStyle/>
+          <a:p>
+            <a:pPr>
+              <a:defRPr sz="1200" b="1" i="0">
+                <a:solidFill>
+                  <a:srgbClr val="E0B85F"/>
+                </a:solidFill>
+                <a:latin typeface="Calibri"/>
+              </a:defRPr>
+            </a:pPr>
+            <a:r>
+              <a:t>Static images (CIFAR / ImageNet)</a:t>
+            </a:r>
+          </a:p>
+        </p:txBody>
+      </p:sp>
+      <p:sp>
+        <p:nvSpPr>
+          <p:cNvPr id="12" name="TextBox 11"/>
+          <p:cNvSpPr txBox="1"/>
+          <p:nvPr/>
+        </p:nvSpPr>
+        <p:spPr>
+          <a:xfrm>
+            <a:off x="7680960" y="3913632"/>
+            <a:ext cx="4206240" cy="457200"/>
+          </a:xfrm>
+          <a:prstGeom prst="rect">
+            <a:avLst/>
+          </a:prstGeom>
+          <a:noFill/>
+        </p:spPr>
+        <p:txBody>
+          <a:bodyPr wrap="square" lIns="0" rIns="0" tIns="0" bIns="0">
+            <a:spAutoFit/>
+          </a:bodyPr>
+          <a:lstStyle/>
+          <a:p>
+            <a:pPr>
+              <a:defRPr sz="1050" b="0" i="0">
+                <a:solidFill>
+                  <a:srgbClr val="1A1A1A"/>
+                </a:solidFill>
+                <a:latin typeface="Calibri"/>
+              </a:defRPr>
+            </a:pPr>
+            <a:r>
+              <a:t>~3–10×  vs GPU at iso-accuracy</a:t>
+            </a:r>
+          </a:p>
+        </p:txBody>
+      </p:sp>
+      <p:sp>
+        <p:nvSpPr>
+          <p:cNvPr id="13" name="TextBox 12"/>
+          <p:cNvSpPr txBox="1"/>
+          <p:nvPr/>
+        </p:nvSpPr>
+        <p:spPr>
+          <a:xfrm>
+            <a:off x="7680960" y="4434840"/>
+            <a:ext cx="4206240" cy="365760"/>
+          </a:xfrm>
+          <a:prstGeom prst="rect">
+            <a:avLst/>
+          </a:prstGeom>
+          <a:noFill/>
+        </p:spPr>
+        <p:txBody>
+          <a:bodyPr wrap="square" lIns="0" rIns="0" tIns="0" bIns="0">
+            <a:spAutoFit/>
+          </a:bodyPr>
+          <a:lstStyle/>
+          <a:p>
+            <a:pPr>
+              <a:defRPr sz="1200" b="1" i="0">
+                <a:solidFill>
+                  <a:srgbClr val="E56945"/>
+                </a:solidFill>
+                <a:latin typeface="Calibri"/>
+              </a:defRPr>
+            </a:pPr>
+            <a:r>
+              <a:t>Why so task-dependent?</a:t>
+            </a:r>
+          </a:p>
+        </p:txBody>
+      </p:sp>
+      <p:sp>
+        <p:nvSpPr>
+          <p:cNvPr id="14" name="TextBox 13"/>
+          <p:cNvSpPr txBox="1"/>
+          <p:nvPr/>
+        </p:nvSpPr>
+        <p:spPr>
+          <a:xfrm>
+            <a:off x="7680960" y="4736592"/>
+            <a:ext cx="4206240" cy="640080"/>
+          </a:xfrm>
+          <a:prstGeom prst="rect">
+            <a:avLst/>
+          </a:prstGeom>
+          <a:noFill/>
+        </p:spPr>
+        <p:txBody>
+          <a:bodyPr wrap="square" lIns="0" rIns="0" tIns="0" bIns="0">
+            <a:spAutoFit/>
+          </a:bodyPr>
+          <a:lstStyle/>
+          <a:p>
+            <a:pPr>
+              <a:defRPr sz="1050" b="0" i="0">
+                <a:solidFill>
+                  <a:srgbClr val="1A1A1A"/>
+                </a:solidFill>
+                <a:latin typeface="Calibri"/>
+              </a:defRPr>
+            </a:pPr>
+            <a:r>
+              <a:t>Energy ∝ T × spike-rate × neurons.</a:t>
+            </a:r>
+            <a:br/>
+            <a:r>
+              <a:t>Low-T + high-sparsity → big gap.</a:t>
+            </a:r>
+          </a:p>
+        </p:txBody>
+      </p:sp>
+      <p:sp>
+        <p:nvSpPr>
+          <p:cNvPr id="15" name="Rectangle 14"/>
+          <p:cNvSpPr/>
+          <p:nvPr/>
+        </p:nvSpPr>
+        <p:spPr>
+          <a:xfrm>
+            <a:off x="7680960" y="5532120"/>
+            <a:ext cx="54864" cy="822960"/>
+          </a:xfrm>
+          <a:prstGeom prst="rect">
+            <a:avLst/>
+          </a:prstGeom>
+          <a:solidFill>
+            <a:srgbClr val="E0B85F"/>
+          </a:solidFill>
+          <a:ln>
+            <a:noFill/>
+          </a:ln>
+        </p:spPr>
+        <p:style>
+          <a:lnRef idx="1">
+            <a:schemeClr val="accent1"/>
+          </a:lnRef>
+          <a:fillRef idx="3">
+            <a:schemeClr val="accent1"/>
+          </a:fillRef>
+          <a:effectRef idx="2">
+            <a:schemeClr val="accent1"/>
+          </a:effectRef>
+          <a:fontRef idx="minor">
+            <a:schemeClr val="lt1"/>
+          </a:fontRef>
+        </p:style>
+        <p:txBody>
+          <a:bodyPr rtlCol="0" anchor="ctr"/>
+          <a:lstStyle/>
+          <a:p>
+            <a:pPr algn="ctr"/>
+          </a:p>
+        </p:txBody>
+      </p:sp>
+      <p:sp>
+        <p:nvSpPr>
+          <p:cNvPr id="16" name="Rectangle 15"/>
+          <p:cNvSpPr/>
+          <p:nvPr/>
+        </p:nvSpPr>
+        <p:spPr>
+          <a:xfrm>
+            <a:off x="7735824" y="5532120"/>
+            <a:ext cx="4151376" cy="822960"/>
+          </a:xfrm>
+          <a:prstGeom prst="rect">
+            <a:avLst/>
+          </a:prstGeom>
+          <a:solidFill>
+            <a:srgbClr val="0F2540"/>
+          </a:solidFill>
+          <a:ln>
+            <a:noFill/>
+          </a:ln>
+        </p:spPr>
+        <p:style>
+          <a:lnRef idx="1">
+            <a:schemeClr val="accent1"/>
+          </a:lnRef>
+          <a:fillRef idx="3">
+            <a:schemeClr val="accent1"/>
+          </a:fillRef>
+          <a:effectRef idx="2">
+            <a:schemeClr val="accent1"/>
+          </a:effectRef>
+          <a:fontRef idx="minor">
+            <a:schemeClr val="lt1"/>
+          </a:fontRef>
+        </p:style>
+        <p:txBody>
+          <a:bodyPr rtlCol="0" anchor="ctr"/>
+          <a:lstStyle/>
+          <a:p>
+            <a:pPr algn="ctr"/>
+          </a:p>
+        </p:txBody>
+      </p:sp>
+      <p:sp>
+        <p:nvSpPr>
+          <p:cNvPr id="17" name="TextBox 16"/>
+          <p:cNvSpPr txBox="1"/>
+          <p:nvPr/>
+        </p:nvSpPr>
+        <p:spPr>
+          <a:xfrm>
+            <a:off x="8001000" y="5577840"/>
+            <a:ext cx="3749039" cy="731520"/>
+          </a:xfrm>
+          <a:prstGeom prst="rect">
+            <a:avLst/>
+          </a:prstGeom>
+          <a:noFill/>
+        </p:spPr>
+        <p:txBody>
+          <a:bodyPr wrap="square" anchor="ctr">
+            <a:spAutoFit/>
+          </a:bodyPr>
+          <a:lstStyle/>
+          <a:p>
+            <a:pPr>
+              <a:defRPr sz="1050" b="1">
+                <a:solidFill>
+                  <a:srgbClr val="E0B85F"/>
+                </a:solidFill>
+                <a:latin typeface="Calibri"/>
+              </a:defRPr>
+            </a:pPr>
+            <a:r>
+              <a:t>Why this matters for our work</a:t>
+            </a:r>
+          </a:p>
+          <a:p>
+            <a:pPr>
+              <a:spcBef>
+                <a:spcPts val="600"/>
+              </a:spcBef>
+              <a:defRPr sz="950">
+                <a:solidFill>
+                  <a:srgbClr val="FFFFFF"/>
+                </a:solidFill>
+                <a:latin typeface="Calibri"/>
+              </a:defRPr>
+            </a:pPr>
+            <a:r>
+              <a:t>MP-Init enables T = 2 SOTA → directly multiplies energy savings.</a:t>
+            </a:r>
+          </a:p>
+        </p:txBody>
+      </p:sp>
+      <p:sp>
+        <p:nvSpPr>
+          <p:cNvPr id="18" name="TextBox 17"/>
+          <p:cNvSpPr txBox="1"/>
+          <p:nvPr/>
+        </p:nvSpPr>
+        <p:spPr>
+          <a:xfrm>
+            <a:off x="457200" y="6400800"/>
+            <a:ext cx="10972800" cy="228600"/>
+          </a:xfrm>
+          <a:prstGeom prst="rect">
+            <a:avLst/>
+          </a:prstGeom>
+          <a:noFill/>
+        </p:spPr>
+        <p:txBody>
+          <a:bodyPr wrap="square" lIns="0" rIns="0" tIns="0" bIns="0">
+            <a:spAutoFit/>
+          </a:bodyPr>
+          <a:lstStyle/>
+          <a:p>
+            <a:pPr>
+              <a:defRPr sz="850" b="0" i="1">
+                <a:solidFill>
+                  <a:srgbClr val="7A7A7A"/>
+                </a:solidFill>
+                <a:latin typeface="Calibri"/>
+              </a:defRPr>
+            </a:pPr>
+            <a:r>
+              <a:t>Sources: Blouw et al. 2019 (keyword-spotting benchmark); Davies et al. 2021 (LASSO 48× vs CPU); Horowitz ISSCC 2014 (per-op energy).</a:t>
+            </a:r>
+          </a:p>
+        </p:txBody>
+      </p:sp>
+      <p:sp>
+        <p:nvSpPr>
+          <p:cNvPr id="19" name="TextBox 18"/>
+          <p:cNvSpPr txBox="1"/>
+          <p:nvPr/>
+        </p:nvSpPr>
+        <p:spPr>
+          <a:xfrm>
+            <a:off x="457200" y="6492240"/>
+            <a:ext cx="5486400" cy="274320"/>
+          </a:xfrm>
+          <a:prstGeom prst="rect">
+            <a:avLst/>
+          </a:prstGeom>
+          <a:noFill/>
+        </p:spPr>
+        <p:txBody>
+          <a:bodyPr wrap="square" lIns="0" rIns="0" tIns="0" bIns="0">
+            <a:spAutoFit/>
+          </a:bodyPr>
+          <a:lstStyle/>
+          <a:p>
+            <a:pPr>
+              <a:defRPr sz="1000" b="0" i="0">
+                <a:solidFill>
+                  <a:srgbClr val="7A7A7A"/>
+                </a:solidFill>
+                <a:latin typeface="Calibri"/>
+              </a:defRPr>
+            </a:pPr>
+            <a:r>
+              <a:t>Appendix — Hyunho Kook</a:t>
+            </a:r>
+          </a:p>
+        </p:txBody>
+      </p:sp>
+      <p:sp>
+        <p:nvSpPr>
+          <p:cNvPr id="20" name="TextBox 19"/>
+          <p:cNvSpPr txBox="1"/>
+          <p:nvPr/>
+        </p:nvSpPr>
+        <p:spPr>
+          <a:xfrm>
+            <a:off x="6400800" y="6492240"/>
+            <a:ext cx="5303520" cy="274320"/>
+          </a:xfrm>
+          <a:prstGeom prst="rect">
+            <a:avLst/>
+          </a:prstGeom>
+          <a:noFill/>
+        </p:spPr>
+        <p:txBody>
+          <a:bodyPr wrap="square" lIns="0" rIns="0" tIns="0" bIns="0">
+            <a:spAutoFit/>
+          </a:bodyPr>
+          <a:lstStyle/>
+          <a:p>
+            <a:pPr algn="r">
+              <a:defRPr sz="1000" b="0" i="0">
+                <a:solidFill>
+                  <a:srgbClr val="7A7A7A"/>
+                </a:solidFill>
+                <a:latin typeface="Calibri"/>
+              </a:defRPr>
+            </a:pPr>
+            <a:r>
+              <a:t>A3 / A7</a:t>
+            </a:r>
+          </a:p>
+        </p:txBody>
+      </p:sp>
+    </p:spTree>
+  </p:cSld>
+  <p:clrMapOvr>
+    <a:masterClrMapping/>
+  </p:clrMapOvr>
+</p:sld>
+</file>
+
+<file path=ppt/slides/slide25.xml><?xml version="1.0" encoding="utf-8"?>
+<p:sld xmlns:a="http://schemas.openxmlformats.org/drawingml/2006/main" xmlns:p="http://schemas.openxmlformats.org/presentationml/2006/main" xmlns:r="http://schemas.openxmlformats.org/officeDocument/2006/relationships">
+  <p:cSld>
+    <p:spTree>
+      <p:nvGrpSpPr>
+        <p:cNvPr id="1" name=""/>
+        <p:cNvGrpSpPr/>
+        <p:nvPr/>
+      </p:nvGrpSpPr>
+      <p:grpSpPr/>
+      <p:sp>
+        <p:nvSpPr>
+          <p:cNvPr id="2" name="Rectangle 1"/>
+          <p:cNvSpPr/>
+          <p:nvPr/>
+        </p:nvSpPr>
+        <p:spPr>
+          <a:xfrm>
+            <a:off x="457200" y="566928"/>
+            <a:ext cx="54864" cy="201168"/>
+          </a:xfrm>
+          <a:prstGeom prst="rect">
+            <a:avLst/>
+          </a:prstGeom>
+          <a:solidFill>
+            <a:srgbClr val="E56945"/>
+          </a:solidFill>
+          <a:ln>
+            <a:noFill/>
+          </a:ln>
+        </p:spPr>
+        <p:style>
+          <a:lnRef idx="1">
+            <a:schemeClr val="accent1"/>
+          </a:lnRef>
+          <a:fillRef idx="3">
+            <a:schemeClr val="accent1"/>
+          </a:fillRef>
+          <a:effectRef idx="2">
+            <a:schemeClr val="accent1"/>
+          </a:effectRef>
+          <a:fontRef idx="minor">
+            <a:schemeClr val="lt1"/>
+          </a:fontRef>
+        </p:style>
+        <p:txBody>
+          <a:bodyPr rtlCol="0" anchor="ctr"/>
+          <a:lstStyle/>
+          <a:p>
+            <a:pPr algn="ctr"/>
+          </a:p>
+        </p:txBody>
+      </p:sp>
+      <p:sp>
+        <p:nvSpPr>
+          <p:cNvPr id="3" name="TextBox 2"/>
+          <p:cNvSpPr txBox="1"/>
+          <p:nvPr/>
+        </p:nvSpPr>
+        <p:spPr>
+          <a:xfrm>
+            <a:off x="594360" y="548640"/>
+            <a:ext cx="5486400" cy="274320"/>
+          </a:xfrm>
+          <a:prstGeom prst="rect">
+            <a:avLst/>
+          </a:prstGeom>
+          <a:noFill/>
+        </p:spPr>
+        <p:txBody>
+          <a:bodyPr wrap="square" lIns="0" rIns="0" tIns="0" bIns="0">
+            <a:spAutoFit/>
+          </a:bodyPr>
+          <a:lstStyle/>
+          <a:p>
+            <a:pPr>
+              <a:defRPr sz="1000" b="1" i="0">
+                <a:solidFill>
+                  <a:srgbClr val="E56945"/>
+                </a:solidFill>
+                <a:latin typeface="Calibri"/>
+              </a:defRPr>
+            </a:pPr>
+            <a:r>
+              <a:rPr spc="400"/>
+              <a:t>APPENDIX · A4</a:t>
+            </a:r>
+          </a:p>
+        </p:txBody>
+      </p:sp>
+      <p:sp>
+        <p:nvSpPr>
+          <p:cNvPr id="4" name="TextBox 3"/>
+          <p:cNvSpPr txBox="1"/>
+          <p:nvPr/>
+        </p:nvSpPr>
+        <p:spPr>
+          <a:xfrm>
+            <a:off x="457200" y="777240"/>
+            <a:ext cx="11247120" cy="777240"/>
+          </a:xfrm>
+          <a:prstGeom prst="rect">
+            <a:avLst/>
+          </a:prstGeom>
+          <a:noFill/>
+        </p:spPr>
+        <p:txBody>
+          <a:bodyPr wrap="square" lIns="0" rIns="0" tIns="0" bIns="0">
+            <a:spAutoFit/>
+          </a:bodyPr>
+          <a:lstStyle/>
+          <a:p>
+            <a:pPr>
+              <a:defRPr sz="3000" b="1" i="0">
+                <a:solidFill>
+                  <a:srgbClr val="0F2540"/>
+                </a:solidFill>
+                <a:latin typeface="Cambria"/>
+              </a:defRPr>
+            </a:pPr>
+            <a:r>
+              <a:t>What Is an Event-Based Dataset?</a:t>
+            </a:r>
+          </a:p>
+        </p:txBody>
+      </p:sp>
+      <p:sp>
+        <p:nvSpPr>
+          <p:cNvPr id="5" name="TextBox 4"/>
+          <p:cNvSpPr txBox="1"/>
+          <p:nvPr/>
+        </p:nvSpPr>
+        <p:spPr>
+          <a:xfrm>
+            <a:off x="457200" y="1600200"/>
+            <a:ext cx="11247120" cy="365760"/>
+          </a:xfrm>
+          <a:prstGeom prst="rect">
+            <a:avLst/>
+          </a:prstGeom>
+          <a:noFill/>
+        </p:spPr>
+        <p:txBody>
+          <a:bodyPr wrap="square" lIns="0" rIns="0" tIns="0" bIns="0">
+            <a:spAutoFit/>
+          </a:bodyPr>
+          <a:lstStyle/>
+          <a:p>
+            <a:pPr>
+              <a:defRPr sz="1400" b="0" i="1">
+                <a:solidFill>
+                  <a:srgbClr val="7A7A7A"/>
+                </a:solidFill>
+                <a:latin typeface="Calibri"/>
+              </a:defRPr>
+            </a:pPr>
+            <a:r>
+              <a:t>Output of asynchronous DVS cameras — sparse, fast, high dynamic range.</a:t>
+            </a:r>
+          </a:p>
+        </p:txBody>
+      </p:sp>
+      <p:sp>
+        <p:nvSpPr>
+          <p:cNvPr id="6" name="TextBox 5"/>
+          <p:cNvSpPr txBox="1"/>
+          <p:nvPr/>
+        </p:nvSpPr>
+        <p:spPr>
+          <a:xfrm>
+            <a:off x="457200" y="2194560"/>
+            <a:ext cx="5029200" cy="365760"/>
+          </a:xfrm>
+          <a:prstGeom prst="rect">
+            <a:avLst/>
+          </a:prstGeom>
+          <a:noFill/>
+        </p:spPr>
+        <p:txBody>
+          <a:bodyPr wrap="square" lIns="0" rIns="0" tIns="0" bIns="0">
+            <a:spAutoFit/>
+          </a:bodyPr>
+          <a:lstStyle/>
+          <a:p>
+            <a:pPr>
+              <a:defRPr sz="1500" b="1" i="0">
+                <a:solidFill>
+                  <a:srgbClr val="0F2540"/>
+                </a:solidFill>
+                <a:latin typeface="Calibri"/>
+              </a:defRPr>
+            </a:pPr>
+            <a:r>
+              <a:t>DVS: Dynamic Vision Sensor</a:t>
+            </a:r>
+          </a:p>
+        </p:txBody>
+      </p:sp>
+      <p:sp>
+        <p:nvSpPr>
+          <p:cNvPr id="7" name="TextBox 6"/>
+          <p:cNvSpPr txBox="1"/>
+          <p:nvPr/>
+        </p:nvSpPr>
+        <p:spPr>
+          <a:xfrm>
+            <a:off x="457200" y="2606040"/>
+            <a:ext cx="5029200" cy="1097280"/>
+          </a:xfrm>
+          <a:prstGeom prst="rect">
+            <a:avLst/>
+          </a:prstGeom>
+          <a:noFill/>
+        </p:spPr>
+        <p:txBody>
+          <a:bodyPr wrap="square" lIns="0" rIns="0" tIns="0" bIns="0">
+            <a:spAutoFit/>
+          </a:bodyPr>
+          <a:lstStyle/>
+          <a:p>
+            <a:pPr>
+              <a:defRPr sz="1100" b="0" i="0">
+                <a:solidFill>
+                  <a:srgbClr val="1A1A1A"/>
+                </a:solidFill>
+                <a:latin typeface="Calibri"/>
+              </a:defRPr>
+            </a:pPr>
+            <a:r>
+              <a:t>Each pixel asynchronously emits an event when its log-intensity changes by a threshold.</a:t>
+            </a:r>
+            <a:br/>
+            <a:r>
+              <a:t>Output: a stream of (x, y, t, polarity) tuples.</a:t>
+            </a:r>
+          </a:p>
+        </p:txBody>
+      </p:sp>
+      <p:sp>
+        <p:nvSpPr>
+          <p:cNvPr id="8" name="Rectangle 7"/>
+          <p:cNvSpPr/>
+          <p:nvPr/>
+        </p:nvSpPr>
+        <p:spPr>
+          <a:xfrm>
+            <a:off x="457200" y="3977639"/>
+            <a:ext cx="1188720" cy="868680"/>
+          </a:xfrm>
+          <a:prstGeom prst="rect">
+            <a:avLst/>
+          </a:prstGeom>
+          <a:solidFill>
+            <a:srgbClr val="F8F7F2"/>
+          </a:solidFill>
+          <a:ln w="19050">
+            <a:solidFill>
+              <a:srgbClr val="1D7E7E"/>
+            </a:solidFill>
+          </a:ln>
+        </p:spPr>
+        <p:style>
+          <a:lnRef idx="1">
+            <a:schemeClr val="accent1"/>
+          </a:lnRef>
+          <a:fillRef idx="3">
+            <a:schemeClr val="accent1"/>
+          </a:fillRef>
+          <a:effectRef idx="2">
+            <a:schemeClr val="accent1"/>
+          </a:effectRef>
+          <a:fontRef idx="minor">
+            <a:schemeClr val="lt1"/>
+          </a:fontRef>
+        </p:style>
+        <p:txBody>
+          <a:bodyPr rtlCol="0" anchor="ctr"/>
+          <a:lstStyle/>
+          <a:p>
+            <a:pPr algn="ctr"/>
+          </a:p>
+        </p:txBody>
+      </p:sp>
+      <p:sp>
+        <p:nvSpPr>
+          <p:cNvPr id="9" name="TextBox 8"/>
+          <p:cNvSpPr txBox="1"/>
+          <p:nvPr/>
+        </p:nvSpPr>
+        <p:spPr>
+          <a:xfrm>
+            <a:off x="457200" y="4069079"/>
+            <a:ext cx="1188720" cy="365760"/>
+          </a:xfrm>
+          <a:prstGeom prst="rect">
+            <a:avLst/>
+          </a:prstGeom>
+          <a:noFill/>
+        </p:spPr>
+        <p:txBody>
+          <a:bodyPr wrap="square" lIns="0" rIns="0" tIns="0" bIns="0">
+            <a:spAutoFit/>
+          </a:bodyPr>
+          <a:lstStyle/>
+          <a:p>
+            <a:pPr algn="ctr">
+              <a:defRPr sz="1300" b="1" i="0">
+                <a:solidFill>
+                  <a:srgbClr val="1D7E7E"/>
+                </a:solidFill>
+                <a:latin typeface="Calibri"/>
+              </a:defRPr>
+            </a:pPr>
+            <a:r>
+              <a:t>μs</a:t>
+            </a:r>
+          </a:p>
+        </p:txBody>
+      </p:sp>
+      <p:sp>
+        <p:nvSpPr>
+          <p:cNvPr id="10" name="TextBox 9"/>
+          <p:cNvSpPr txBox="1"/>
+          <p:nvPr/>
+        </p:nvSpPr>
+        <p:spPr>
+          <a:xfrm>
+            <a:off x="457200" y="4434840"/>
+            <a:ext cx="1188720" cy="365760"/>
+          </a:xfrm>
+          <a:prstGeom prst="rect">
+            <a:avLst/>
+          </a:prstGeom>
+          <a:noFill/>
+        </p:spPr>
+        <p:txBody>
+          <a:bodyPr wrap="square" lIns="0" rIns="0" tIns="0" bIns="0">
+            <a:spAutoFit/>
+          </a:bodyPr>
+          <a:lstStyle/>
+          <a:p>
+            <a:pPr algn="ctr">
+              <a:defRPr sz="850" b="0" i="0">
+                <a:solidFill>
+                  <a:srgbClr val="7A7A7A"/>
+                </a:solidFill>
+                <a:latin typeface="Calibri"/>
+              </a:defRPr>
+            </a:pPr>
+            <a:r>
+              <a:t>temporal resolution</a:t>
+            </a:r>
+          </a:p>
+        </p:txBody>
+      </p:sp>
+      <p:sp>
+        <p:nvSpPr>
+          <p:cNvPr id="11" name="Rectangle 10"/>
+          <p:cNvSpPr/>
+          <p:nvPr/>
+        </p:nvSpPr>
+        <p:spPr>
+          <a:xfrm>
+            <a:off x="1755648" y="3977639"/>
+            <a:ext cx="1188720" cy="868680"/>
+          </a:xfrm>
+          <a:prstGeom prst="rect">
+            <a:avLst/>
+          </a:prstGeom>
+          <a:solidFill>
+            <a:srgbClr val="F8F7F2"/>
+          </a:solidFill>
+          <a:ln w="19050">
+            <a:solidFill>
+              <a:srgbClr val="E0B85F"/>
+            </a:solidFill>
+          </a:ln>
+        </p:spPr>
+        <p:style>
+          <a:lnRef idx="1">
+            <a:schemeClr val="accent1"/>
+          </a:lnRef>
+          <a:fillRef idx="3">
+            <a:schemeClr val="accent1"/>
+          </a:fillRef>
+          <a:effectRef idx="2">
+            <a:schemeClr val="accent1"/>
+          </a:effectRef>
+          <a:fontRef idx="minor">
+            <a:schemeClr val="lt1"/>
+          </a:fontRef>
+        </p:style>
+        <p:txBody>
+          <a:bodyPr rtlCol="0" anchor="ctr"/>
+          <a:lstStyle/>
+          <a:p>
+            <a:pPr algn="ctr"/>
+          </a:p>
+        </p:txBody>
+      </p:sp>
+      <p:sp>
+        <p:nvSpPr>
+          <p:cNvPr id="12" name="TextBox 11"/>
+          <p:cNvSpPr txBox="1"/>
+          <p:nvPr/>
+        </p:nvSpPr>
+        <p:spPr>
+          <a:xfrm>
+            <a:off x="1755648" y="4069079"/>
+            <a:ext cx="1188720" cy="365760"/>
+          </a:xfrm>
+          <a:prstGeom prst="rect">
+            <a:avLst/>
+          </a:prstGeom>
+          <a:noFill/>
+        </p:spPr>
+        <p:txBody>
+          <a:bodyPr wrap="square" lIns="0" rIns="0" tIns="0" bIns="0">
+            <a:spAutoFit/>
+          </a:bodyPr>
+          <a:lstStyle/>
+          <a:p>
+            <a:pPr algn="ctr">
+              <a:defRPr sz="1300" b="1" i="0">
+                <a:solidFill>
+                  <a:srgbClr val="E0B85F"/>
+                </a:solidFill>
+                <a:latin typeface="Calibri"/>
+              </a:defRPr>
+            </a:pPr>
+            <a:r>
+              <a:t>&gt;120 dB</a:t>
+            </a:r>
+          </a:p>
+        </p:txBody>
+      </p:sp>
+      <p:sp>
+        <p:nvSpPr>
+          <p:cNvPr id="13" name="TextBox 12"/>
+          <p:cNvSpPr txBox="1"/>
+          <p:nvPr/>
+        </p:nvSpPr>
+        <p:spPr>
+          <a:xfrm>
+            <a:off x="1755648" y="4434840"/>
+            <a:ext cx="1188720" cy="365760"/>
+          </a:xfrm>
+          <a:prstGeom prst="rect">
+            <a:avLst/>
+          </a:prstGeom>
+          <a:noFill/>
+        </p:spPr>
+        <p:txBody>
+          <a:bodyPr wrap="square" lIns="0" rIns="0" tIns="0" bIns="0">
+            <a:spAutoFit/>
+          </a:bodyPr>
+          <a:lstStyle/>
+          <a:p>
+            <a:pPr algn="ctr">
+              <a:defRPr sz="850" b="0" i="0">
+                <a:solidFill>
+                  <a:srgbClr val="7A7A7A"/>
+                </a:solidFill>
+                <a:latin typeface="Calibri"/>
+              </a:defRPr>
+            </a:pPr>
+            <a:r>
+              <a:t>dynamic range</a:t>
+            </a:r>
+          </a:p>
+        </p:txBody>
+      </p:sp>
+      <p:sp>
+        <p:nvSpPr>
+          <p:cNvPr id="14" name="Rectangle 13"/>
+          <p:cNvSpPr/>
+          <p:nvPr/>
+        </p:nvSpPr>
+        <p:spPr>
+          <a:xfrm>
+            <a:off x="3054096" y="3977639"/>
+            <a:ext cx="1188720" cy="868680"/>
+          </a:xfrm>
+          <a:prstGeom prst="rect">
+            <a:avLst/>
+          </a:prstGeom>
+          <a:solidFill>
+            <a:srgbClr val="F8F7F2"/>
+          </a:solidFill>
+          <a:ln w="19050">
+            <a:solidFill>
+              <a:srgbClr val="E56945"/>
+            </a:solidFill>
+          </a:ln>
+        </p:spPr>
+        <p:style>
+          <a:lnRef idx="1">
+            <a:schemeClr val="accent1"/>
+          </a:lnRef>
+          <a:fillRef idx="3">
+            <a:schemeClr val="accent1"/>
+          </a:fillRef>
+          <a:effectRef idx="2">
+            <a:schemeClr val="accent1"/>
+          </a:effectRef>
+          <a:fontRef idx="minor">
+            <a:schemeClr val="lt1"/>
+          </a:fontRef>
+        </p:style>
+        <p:txBody>
+          <a:bodyPr rtlCol="0" anchor="ctr"/>
+          <a:lstStyle/>
+          <a:p>
+            <a:pPr algn="ctr"/>
+          </a:p>
+        </p:txBody>
+      </p:sp>
+      <p:sp>
+        <p:nvSpPr>
+          <p:cNvPr id="15" name="TextBox 14"/>
+          <p:cNvSpPr txBox="1"/>
+          <p:nvPr/>
+        </p:nvSpPr>
+        <p:spPr>
+          <a:xfrm>
+            <a:off x="3054096" y="4069079"/>
+            <a:ext cx="1188720" cy="365760"/>
+          </a:xfrm>
+          <a:prstGeom prst="rect">
+            <a:avLst/>
+          </a:prstGeom>
+          <a:noFill/>
+        </p:spPr>
+        <p:txBody>
+          <a:bodyPr wrap="square" lIns="0" rIns="0" tIns="0" bIns="0">
+            <a:spAutoFit/>
+          </a:bodyPr>
+          <a:lstStyle/>
+          <a:p>
+            <a:pPr algn="ctr">
+              <a:defRPr sz="1300" b="1" i="0">
+                <a:solidFill>
+                  <a:srgbClr val="E56945"/>
+                </a:solidFill>
+                <a:latin typeface="Calibri"/>
+              </a:defRPr>
+            </a:pPr>
+            <a:r>
+              <a:t>Sparse</a:t>
+            </a:r>
+          </a:p>
+        </p:txBody>
+      </p:sp>
+      <p:sp>
+        <p:nvSpPr>
+          <p:cNvPr id="16" name="TextBox 15"/>
+          <p:cNvSpPr txBox="1"/>
+          <p:nvPr/>
+        </p:nvSpPr>
+        <p:spPr>
+          <a:xfrm>
+            <a:off x="3054096" y="4434840"/>
+            <a:ext cx="1188720" cy="365760"/>
+          </a:xfrm>
+          <a:prstGeom prst="rect">
+            <a:avLst/>
+          </a:prstGeom>
+          <a:noFill/>
+        </p:spPr>
+        <p:txBody>
+          <a:bodyPr wrap="square" lIns="0" rIns="0" tIns="0" bIns="0">
+            <a:spAutoFit/>
+          </a:bodyPr>
+          <a:lstStyle/>
+          <a:p>
+            <a:pPr algn="ctr">
+              <a:defRPr sz="850" b="0" i="0">
+                <a:solidFill>
+                  <a:srgbClr val="7A7A7A"/>
+                </a:solidFill>
+                <a:latin typeface="Calibri"/>
+              </a:defRPr>
+            </a:pPr>
+            <a:r>
+              <a:t>only changes emit</a:t>
+            </a:r>
+          </a:p>
+        </p:txBody>
+      </p:sp>
+      <p:sp>
+        <p:nvSpPr>
+          <p:cNvPr id="17" name="Rectangle 16"/>
+          <p:cNvSpPr/>
+          <p:nvPr/>
+        </p:nvSpPr>
+        <p:spPr>
+          <a:xfrm>
+            <a:off x="4352544" y="3977639"/>
+            <a:ext cx="1188720" cy="868680"/>
+          </a:xfrm>
+          <a:prstGeom prst="rect">
+            <a:avLst/>
+          </a:prstGeom>
+          <a:solidFill>
+            <a:srgbClr val="F8F7F2"/>
+          </a:solidFill>
+          <a:ln w="19050">
+            <a:solidFill>
+              <a:srgbClr val="0F2540"/>
+            </a:solidFill>
+          </a:ln>
+        </p:spPr>
+        <p:style>
+          <a:lnRef idx="1">
+            <a:schemeClr val="accent1"/>
+          </a:lnRef>
+          <a:fillRef idx="3">
+            <a:schemeClr val="accent1"/>
+          </a:fillRef>
+          <a:effectRef idx="2">
+            <a:schemeClr val="accent1"/>
+          </a:effectRef>
+          <a:fontRef idx="minor">
+            <a:schemeClr val="lt1"/>
+          </a:fontRef>
+        </p:style>
+        <p:txBody>
+          <a:bodyPr rtlCol="0" anchor="ctr"/>
+          <a:lstStyle/>
+          <a:p>
+            <a:pPr algn="ctr"/>
+          </a:p>
+        </p:txBody>
+      </p:sp>
+      <p:sp>
+        <p:nvSpPr>
+          <p:cNvPr id="18" name="TextBox 17"/>
+          <p:cNvSpPr txBox="1"/>
+          <p:nvPr/>
+        </p:nvSpPr>
+        <p:spPr>
+          <a:xfrm>
+            <a:off x="4352544" y="4069079"/>
+            <a:ext cx="1188720" cy="365760"/>
+          </a:xfrm>
+          <a:prstGeom prst="rect">
+            <a:avLst/>
+          </a:prstGeom>
+          <a:noFill/>
+        </p:spPr>
+        <p:txBody>
+          <a:bodyPr wrap="square" lIns="0" rIns="0" tIns="0" bIns="0">
+            <a:spAutoFit/>
+          </a:bodyPr>
+          <a:lstStyle/>
+          <a:p>
+            <a:pPr algn="ctr">
+              <a:defRPr sz="1300" b="1" i="0">
+                <a:solidFill>
+                  <a:srgbClr val="0F2540"/>
+                </a:solidFill>
+                <a:latin typeface="Calibri"/>
+              </a:defRPr>
+            </a:pPr>
+            <a:r>
+              <a:t>No blur</a:t>
+            </a:r>
+          </a:p>
+        </p:txBody>
+      </p:sp>
+      <p:sp>
+        <p:nvSpPr>
+          <p:cNvPr id="19" name="TextBox 18"/>
+          <p:cNvSpPr txBox="1"/>
+          <p:nvPr/>
+        </p:nvSpPr>
+        <p:spPr>
+          <a:xfrm>
+            <a:off x="4352544" y="4434840"/>
+            <a:ext cx="1188720" cy="365760"/>
+          </a:xfrm>
+          <a:prstGeom prst="rect">
+            <a:avLst/>
+          </a:prstGeom>
+          <a:noFill/>
+        </p:spPr>
+        <p:txBody>
+          <a:bodyPr wrap="square" lIns="0" rIns="0" tIns="0" bIns="0">
+            <a:spAutoFit/>
+          </a:bodyPr>
+          <a:lstStyle/>
+          <a:p>
+            <a:pPr algn="ctr">
+              <a:defRPr sz="850" b="0" i="0">
+                <a:solidFill>
+                  <a:srgbClr val="7A7A7A"/>
+                </a:solidFill>
+                <a:latin typeface="Calibri"/>
+              </a:defRPr>
+            </a:pPr>
+            <a:r>
+              <a:t>no exposure window</a:t>
+            </a:r>
+          </a:p>
+        </p:txBody>
+      </p:sp>
+      <p:sp>
+        <p:nvSpPr>
+          <p:cNvPr id="20" name="Rectangle 19"/>
+          <p:cNvSpPr/>
+          <p:nvPr/>
+        </p:nvSpPr>
+        <p:spPr>
+          <a:xfrm>
+            <a:off x="457200" y="5166360"/>
+            <a:ext cx="54864" cy="1005840"/>
+          </a:xfrm>
+          <a:prstGeom prst="rect">
+            <a:avLst/>
+          </a:prstGeom>
+          <a:solidFill>
+            <a:srgbClr val="1D7E7E"/>
+          </a:solidFill>
+          <a:ln>
+            <a:noFill/>
+          </a:ln>
+        </p:spPr>
+        <p:style>
+          <a:lnRef idx="1">
+            <a:schemeClr val="accent1"/>
+          </a:lnRef>
+          <a:fillRef idx="3">
+            <a:schemeClr val="accent1"/>
+          </a:fillRef>
+          <a:effectRef idx="2">
+            <a:schemeClr val="accent1"/>
+          </a:effectRef>
+          <a:fontRef idx="minor">
+            <a:schemeClr val="lt1"/>
+          </a:fontRef>
+        </p:style>
+        <p:txBody>
+          <a:bodyPr rtlCol="0" anchor="ctr"/>
+          <a:lstStyle/>
+          <a:p>
+            <a:pPr algn="ctr"/>
+          </a:p>
+        </p:txBody>
+      </p:sp>
+      <p:sp>
+        <p:nvSpPr>
+          <p:cNvPr id="21" name="Rectangle 20"/>
+          <p:cNvSpPr/>
+          <p:nvPr/>
+        </p:nvSpPr>
+        <p:spPr>
+          <a:xfrm>
+            <a:off x="512064" y="5166360"/>
+            <a:ext cx="5294376" cy="1005840"/>
+          </a:xfrm>
+          <a:prstGeom prst="rect">
+            <a:avLst/>
+          </a:prstGeom>
+          <a:solidFill>
+            <a:srgbClr val="E5F5F0"/>
+          </a:solidFill>
+          <a:ln>
+            <a:noFill/>
+          </a:ln>
+        </p:spPr>
+        <p:style>
+          <a:lnRef idx="1">
+            <a:schemeClr val="accent1"/>
+          </a:lnRef>
+          <a:fillRef idx="3">
+            <a:schemeClr val="accent1"/>
+          </a:fillRef>
+          <a:effectRef idx="2">
+            <a:schemeClr val="accent1"/>
+          </a:effectRef>
+          <a:fontRef idx="minor">
+            <a:schemeClr val="lt1"/>
+          </a:fontRef>
+        </p:style>
+        <p:txBody>
+          <a:bodyPr rtlCol="0" anchor="ctr"/>
+          <a:lstStyle/>
+          <a:p>
+            <a:pPr algn="ctr"/>
+          </a:p>
+        </p:txBody>
+      </p:sp>
+      <p:sp>
+        <p:nvSpPr>
+          <p:cNvPr id="22" name="TextBox 21"/>
+          <p:cNvSpPr txBox="1"/>
+          <p:nvPr/>
+        </p:nvSpPr>
+        <p:spPr>
+          <a:xfrm>
+            <a:off x="777240" y="5212080"/>
+            <a:ext cx="4892040" cy="914400"/>
+          </a:xfrm>
+          <a:prstGeom prst="rect">
+            <a:avLst/>
+          </a:prstGeom>
+          <a:noFill/>
+        </p:spPr>
+        <p:txBody>
+          <a:bodyPr wrap="square" anchor="ctr">
+            <a:spAutoFit/>
+          </a:bodyPr>
+          <a:lstStyle/>
+          <a:p>
+            <a:pPr>
+              <a:defRPr sz="1100" b="1">
+                <a:solidFill>
+                  <a:srgbClr val="1D7E7E"/>
+                </a:solidFill>
+                <a:latin typeface="Calibri"/>
+              </a:defRPr>
+            </a:pPr>
+            <a:r>
+              <a:t>In this thesis</a:t>
+            </a:r>
+          </a:p>
+          <a:p>
+            <a:pPr>
+              <a:spcBef>
+                <a:spcPts val="600"/>
+              </a:spcBef>
+              <a:defRPr sz="1100">
+                <a:solidFill>
+                  <a:srgbClr val="1A1A1A"/>
+                </a:solidFill>
+                <a:latin typeface="Calibri"/>
+              </a:defRPr>
+            </a:pPr>
+            <a:r>
+              <a:t>DVS-CIFAR10  (event-based image classification, T = 10).</a:t>
+            </a:r>
+          </a:p>
+        </p:txBody>
+      </p:sp>
+      <p:graphicFrame>
+        <p:nvGraphicFramePr>
+          <p:cNvPr id="23" name="Table 22"/>
+          <p:cNvGraphicFramePr>
+            <a:graphicFrameLocks noGrp="1"/>
+          </p:cNvGraphicFramePr>
+          <p:nvPr/>
+        </p:nvGraphicFramePr>
+        <p:xfrm>
+          <a:off x="6035040" y="2194560"/>
+          <a:ext cx="5852160" cy="3931920"/>
+        </p:xfrm>
+        <a:graphic>
+          <a:graphicData uri="http://schemas.openxmlformats.org/drawingml/2006/table">
+            <a:tbl>
+              <a:tblPr firstRow="1" bandRow="1">
+                <a:tableStyleId>{5C22544A-7EE6-4342-B048-85BDC9FD1C3A}</a:tableStyleId>
+              </a:tblPr>
+              <a:tblGrid>
+                <a:gridCol w="2103120"/>
+                <a:gridCol w="2606040"/>
+                <a:gridCol w="1143000"/>
+              </a:tblGrid>
+              <a:tr h="411480">
+                <a:tc>
+                  <a:txBody>
+                    <a:bodyPr anchor="ctr"/>
+                    <a:lstStyle/>
+                    <a:p>
+                      <a:pPr algn="l">
+                        <a:defRPr sz="1100" b="1">
+                          <a:solidFill>
+                            <a:srgbClr val="FFFFFF"/>
+                          </a:solidFill>
+                          <a:latin typeface="Calibri"/>
+                        </a:defRPr>
+                      </a:pPr>
+                      <a:r>
+                        <a:t>Dataset</a:t>
+                      </a:r>
+                    </a:p>
+                  </a:txBody>
+                  <a:tcPr marL="109728" marR="91440">
+                    <a:solidFill>
+                      <a:srgbClr val="0F2540"/>
+                    </a:solidFill>
+                  </a:tcPr>
+                </a:tc>
+                <a:tc>
+                  <a:txBody>
+                    <a:bodyPr anchor="ctr"/>
+                    <a:lstStyle/>
+                    <a:p>
+                      <a:pPr algn="l">
+                        <a:defRPr sz="1100" b="1">
+                          <a:solidFill>
+                            <a:srgbClr val="FFFFFF"/>
+                          </a:solidFill>
+                          <a:latin typeface="Calibri"/>
+                        </a:defRPr>
+                      </a:pPr>
+                      <a:r>
+                        <a:t>Description</a:t>
+                      </a:r>
+                    </a:p>
+                  </a:txBody>
+                  <a:tcPr marL="109728" marR="91440">
+                    <a:solidFill>
+                      <a:srgbClr val="0F2540"/>
+                    </a:solidFill>
+                  </a:tcPr>
+                </a:tc>
+                <a:tc>
+                  <a:txBody>
+                    <a:bodyPr anchor="ctr"/>
+                    <a:lstStyle/>
+                    <a:p>
+                      <a:pPr algn="ctr">
+                        <a:defRPr sz="1100" b="1">
+                          <a:solidFill>
+                            <a:srgbClr val="FFFFFF"/>
+                          </a:solidFill>
+                          <a:latin typeface="Calibri"/>
+                        </a:defRPr>
+                      </a:pPr>
+                      <a:r>
+                        <a:t>Size</a:t>
+                      </a:r>
+                    </a:p>
+                  </a:txBody>
+                  <a:tcPr marL="109728" marR="91440">
+                    <a:solidFill>
+                      <a:srgbClr val="0F2540"/>
+                    </a:solidFill>
+                  </a:tcPr>
+                </a:tc>
+              </a:tr>
+              <a:tr h="502920">
+                <a:tc>
+                  <a:txBody>
+                    <a:bodyPr anchor="ctr"/>
+                    <a:lstStyle/>
+                    <a:p>
+                      <a:pPr algn="l">
+                        <a:defRPr b="1" sz="1050">
+                          <a:solidFill>
+                            <a:srgbClr val="1D7E7E"/>
+                          </a:solidFill>
+                          <a:latin typeface="Calibri"/>
+                        </a:defRPr>
+                      </a:pPr>
+                      <a:r>
+                        <a:t>DVS-CIFAR10</a:t>
+                      </a:r>
+                    </a:p>
+                  </a:txBody>
+                  <a:tcPr marL="109728" marR="91440">
+                    <a:solidFill>
+                      <a:srgbClr val="E5F5F0"/>
+                    </a:solidFill>
+                  </a:tcPr>
+                </a:tc>
+                <a:tc>
+                  <a:txBody>
+                    <a:bodyPr anchor="ctr"/>
+                    <a:lstStyle/>
+                    <a:p>
+                      <a:pPr algn="l">
+                        <a:defRPr sz="1000">
+                          <a:solidFill>
+                            <a:srgbClr val="1A1A1A"/>
+                          </a:solidFill>
+                          <a:latin typeface="Calibri"/>
+                        </a:defRPr>
+                      </a:pPr>
+                      <a:r>
+                        <a:t>CIFAR-10 on monitor + saccading DVS</a:t>
+                      </a:r>
+                    </a:p>
+                  </a:txBody>
+                  <a:tcPr marL="109728" marR="91440">
+                    <a:solidFill>
+                      <a:srgbClr val="E5F5F0"/>
+                    </a:solidFill>
+                  </a:tcPr>
+                </a:tc>
+                <a:tc>
+                  <a:txBody>
+                    <a:bodyPr anchor="ctr"/>
+                    <a:lstStyle/>
+                    <a:p>
+                      <a:pPr algn="ctr">
+                        <a:defRPr sz="1000">
+                          <a:solidFill>
+                            <a:srgbClr val="1A1A1A"/>
+                          </a:solidFill>
+                          <a:latin typeface="Consolas"/>
+                        </a:defRPr>
+                      </a:pPr>
+                      <a:r>
+                        <a:t>10 K</a:t>
+                      </a:r>
+                    </a:p>
+                  </a:txBody>
+                  <a:tcPr marL="109728" marR="91440">
+                    <a:solidFill>
+                      <a:srgbClr val="E5F5F0"/>
+                    </a:solidFill>
+                  </a:tcPr>
+                </a:tc>
+              </a:tr>
+              <a:tr h="502920">
+                <a:tc>
+                  <a:txBody>
+                    <a:bodyPr anchor="ctr"/>
+                    <a:lstStyle/>
+                    <a:p>
+                      <a:pPr algn="l">
+                        <a:defRPr b="1" sz="1050">
+                          <a:solidFill>
+                            <a:srgbClr val="0F2540"/>
+                          </a:solidFill>
+                          <a:latin typeface="Calibri"/>
+                        </a:defRPr>
+                      </a:pPr>
+                      <a:r>
+                        <a:t>N-MNIST</a:t>
+                      </a:r>
+                    </a:p>
+                  </a:txBody>
+                  <a:tcPr marL="109728" marR="91440">
+                    <a:solidFill>
+                      <a:srgbClr val="F8F7F2"/>
+                    </a:solidFill>
+                  </a:tcPr>
+                </a:tc>
+                <a:tc>
+                  <a:txBody>
+                    <a:bodyPr anchor="ctr"/>
+                    <a:lstStyle/>
+                    <a:p>
+                      <a:pPr algn="l">
+                        <a:defRPr sz="1000">
+                          <a:solidFill>
+                            <a:srgbClr val="1A1A1A"/>
+                          </a:solidFill>
+                          <a:latin typeface="Calibri"/>
+                        </a:defRPr>
+                      </a:pPr>
+                      <a:r>
+                        <a:t>MNIST shown to event camera</a:t>
+                      </a:r>
+                    </a:p>
+                  </a:txBody>
+                  <a:tcPr marL="109728" marR="91440">
+                    <a:solidFill>
+                      <a:srgbClr val="F8F7F2"/>
+                    </a:solidFill>
+                  </a:tcPr>
+                </a:tc>
+                <a:tc>
+                  <a:txBody>
+                    <a:bodyPr anchor="ctr"/>
+                    <a:lstStyle/>
+                    <a:p>
+                      <a:pPr algn="ctr">
+                        <a:defRPr sz="1000">
+                          <a:solidFill>
+                            <a:srgbClr val="1A1A1A"/>
+                          </a:solidFill>
+                          <a:latin typeface="Consolas"/>
+                        </a:defRPr>
+                      </a:pPr>
+                      <a:r>
+                        <a:t>70 K</a:t>
+                      </a:r>
+                    </a:p>
+                  </a:txBody>
+                  <a:tcPr marL="109728" marR="91440">
+                    <a:solidFill>
+                      <a:srgbClr val="F8F7F2"/>
+                    </a:solidFill>
+                  </a:tcPr>
+                </a:tc>
+              </a:tr>
+              <a:tr h="502920">
+                <a:tc>
+                  <a:txBody>
+                    <a:bodyPr anchor="ctr"/>
+                    <a:lstStyle/>
+                    <a:p>
+                      <a:pPr algn="l">
+                        <a:defRPr b="1" sz="1050">
+                          <a:solidFill>
+                            <a:srgbClr val="0F2540"/>
+                          </a:solidFill>
+                          <a:latin typeface="Calibri"/>
+                        </a:defRPr>
+                      </a:pPr>
+                      <a:r>
+                        <a:t>N-Caltech101</a:t>
+                      </a:r>
+                    </a:p>
+                  </a:txBody>
+                  <a:tcPr marL="109728" marR="91440">
+                    <a:solidFill>
+                      <a:srgbClr val="FFFFFF"/>
+                    </a:solidFill>
+                  </a:tcPr>
+                </a:tc>
+                <a:tc>
+                  <a:txBody>
+                    <a:bodyPr anchor="ctr"/>
+                    <a:lstStyle/>
+                    <a:p>
+                      <a:pPr algn="l">
+                        <a:defRPr sz="1000">
+                          <a:solidFill>
+                            <a:srgbClr val="1A1A1A"/>
+                          </a:solidFill>
+                          <a:latin typeface="Calibri"/>
+                        </a:defRPr>
+                      </a:pPr>
+                      <a:r>
+                        <a:t>Caltech101 in event form</a:t>
+                      </a:r>
+                    </a:p>
+                  </a:txBody>
+                  <a:tcPr marL="109728" marR="91440">
+                    <a:solidFill>
+                      <a:srgbClr val="FFFFFF"/>
+                    </a:solidFill>
+                  </a:tcPr>
+                </a:tc>
+                <a:tc>
+                  <a:txBody>
+                    <a:bodyPr anchor="ctr"/>
+                    <a:lstStyle/>
+                    <a:p>
+                      <a:pPr algn="ctr">
+                        <a:defRPr sz="1000">
+                          <a:solidFill>
+                            <a:srgbClr val="1A1A1A"/>
+                          </a:solidFill>
+                          <a:latin typeface="Consolas"/>
+                        </a:defRPr>
+                      </a:pPr>
+                      <a:r>
+                        <a:t>8.7 K</a:t>
+                      </a:r>
+                    </a:p>
+                  </a:txBody>
+                  <a:tcPr marL="109728" marR="91440">
+                    <a:solidFill>
+                      <a:srgbClr val="FFFFFF"/>
+                    </a:solidFill>
+                  </a:tcPr>
+                </a:tc>
+              </a:tr>
+              <a:tr h="502920">
+                <a:tc>
+                  <a:txBody>
+                    <a:bodyPr anchor="ctr"/>
+                    <a:lstStyle/>
+                    <a:p>
+                      <a:pPr algn="l">
+                        <a:defRPr b="1" sz="1050">
+                          <a:solidFill>
+                            <a:srgbClr val="0F2540"/>
+                          </a:solidFill>
+                          <a:latin typeface="Calibri"/>
+                        </a:defRPr>
+                      </a:pPr>
+                      <a:r>
+                        <a:t>DVS-Gesture (IBM)</a:t>
+                      </a:r>
+                    </a:p>
+                  </a:txBody>
+                  <a:tcPr marL="109728" marR="91440">
+                    <a:solidFill>
+                      <a:srgbClr val="F8F7F2"/>
+                    </a:solidFill>
+                  </a:tcPr>
+                </a:tc>
+                <a:tc>
+                  <a:txBody>
+                    <a:bodyPr anchor="ctr"/>
+                    <a:lstStyle/>
+                    <a:p>
+                      <a:pPr algn="l">
+                        <a:defRPr sz="1000">
+                          <a:solidFill>
+                            <a:srgbClr val="1A1A1A"/>
+                          </a:solidFill>
+                          <a:latin typeface="Calibri"/>
+                        </a:defRPr>
+                      </a:pPr>
+                      <a:r>
+                        <a:t>11 hand gestures, 29 subjects</a:t>
+                      </a:r>
+                    </a:p>
+                  </a:txBody>
+                  <a:tcPr marL="109728" marR="91440">
+                    <a:solidFill>
+                      <a:srgbClr val="F8F7F2"/>
+                    </a:solidFill>
+                  </a:tcPr>
+                </a:tc>
+                <a:tc>
+                  <a:txBody>
+                    <a:bodyPr anchor="ctr"/>
+                    <a:lstStyle/>
+                    <a:p>
+                      <a:pPr algn="ctr">
+                        <a:defRPr sz="1000">
+                          <a:solidFill>
+                            <a:srgbClr val="1A1A1A"/>
+                          </a:solidFill>
+                          <a:latin typeface="Consolas"/>
+                        </a:defRPr>
+                      </a:pPr>
+                      <a:r>
+                        <a:t>1.3 K clips</a:t>
+                      </a:r>
+                    </a:p>
+                  </a:txBody>
+                  <a:tcPr marL="109728" marR="91440">
+                    <a:solidFill>
+                      <a:srgbClr val="F8F7F2"/>
+                    </a:solidFill>
+                  </a:tcPr>
+                </a:tc>
+              </a:tr>
+              <a:tr h="502920">
+                <a:tc>
+                  <a:txBody>
+                    <a:bodyPr anchor="ctr"/>
+                    <a:lstStyle/>
+                    <a:p>
+                      <a:pPr algn="l">
+                        <a:defRPr b="1" sz="1050">
+                          <a:solidFill>
+                            <a:srgbClr val="0F2540"/>
+                          </a:solidFill>
+                          <a:latin typeface="Calibri"/>
+                        </a:defRPr>
+                      </a:pPr>
+                      <a:r>
+                        <a:t>SHD</a:t>
+                      </a:r>
+                    </a:p>
+                  </a:txBody>
+                  <a:tcPr marL="109728" marR="91440">
+                    <a:solidFill>
+                      <a:srgbClr val="FFFFFF"/>
+                    </a:solidFill>
+                  </a:tcPr>
+                </a:tc>
+                <a:tc>
+                  <a:txBody>
+                    <a:bodyPr anchor="ctr"/>
+                    <a:lstStyle/>
+                    <a:p>
+                      <a:pPr algn="l">
+                        <a:defRPr sz="1000">
+                          <a:solidFill>
+                            <a:srgbClr val="1A1A1A"/>
+                          </a:solidFill>
+                          <a:latin typeface="Calibri"/>
+                        </a:defRPr>
+                      </a:pPr>
+                      <a:r>
+                        <a:t>Spiking Heidelberg Digits (audio events)</a:t>
+                      </a:r>
+                    </a:p>
+                  </a:txBody>
+                  <a:tcPr marL="109728" marR="91440">
+                    <a:solidFill>
+                      <a:srgbClr val="FFFFFF"/>
+                    </a:solidFill>
+                  </a:tcPr>
+                </a:tc>
+                <a:tc>
+                  <a:txBody>
+                    <a:bodyPr anchor="ctr"/>
+                    <a:lstStyle/>
+                    <a:p>
+                      <a:pPr algn="ctr">
+                        <a:defRPr sz="1000">
+                          <a:solidFill>
+                            <a:srgbClr val="1A1A1A"/>
+                          </a:solidFill>
+                          <a:latin typeface="Consolas"/>
+                        </a:defRPr>
+                      </a:pPr>
+                      <a:r>
+                        <a:t>10 K</a:t>
+                      </a:r>
+                    </a:p>
+                  </a:txBody>
+                  <a:tcPr marL="109728" marR="91440">
+                    <a:solidFill>
+                      <a:srgbClr val="FFFFFF"/>
+                    </a:solidFill>
+                  </a:tcPr>
+                </a:tc>
+              </a:tr>
+              <a:tr h="502920">
+                <a:tc>
+                  <a:txBody>
+                    <a:bodyPr anchor="ctr"/>
+                    <a:lstStyle/>
+                    <a:p>
+                      <a:pPr algn="l">
+                        <a:defRPr b="1" sz="1050">
+                          <a:solidFill>
+                            <a:srgbClr val="0F2540"/>
+                          </a:solidFill>
+                          <a:latin typeface="Calibri"/>
+                        </a:defRPr>
+                      </a:pPr>
+                      <a:r>
+                        <a:t>Gen1 / 1Mpx</a:t>
+                      </a:r>
+                    </a:p>
+                  </a:txBody>
+                  <a:tcPr marL="109728" marR="91440">
+                    <a:solidFill>
+                      <a:srgbClr val="F8F7F2"/>
+                    </a:solidFill>
+                  </a:tcPr>
+                </a:tc>
+                <a:tc>
+                  <a:txBody>
+                    <a:bodyPr anchor="ctr"/>
+                    <a:lstStyle/>
+                    <a:p>
+                      <a:pPr algn="l">
+                        <a:defRPr sz="1000">
+                          <a:solidFill>
+                            <a:srgbClr val="1A1A1A"/>
+                          </a:solidFill>
+                          <a:latin typeface="Calibri"/>
+                        </a:defRPr>
+                      </a:pPr>
+                      <a:r>
+                        <a:t>Prophesee automotive (object detect.)</a:t>
+                      </a:r>
+                    </a:p>
+                  </a:txBody>
+                  <a:tcPr marL="109728" marR="91440">
+                    <a:solidFill>
+                      <a:srgbClr val="F8F7F2"/>
+                    </a:solidFill>
+                  </a:tcPr>
+                </a:tc>
+                <a:tc>
+                  <a:txBody>
+                    <a:bodyPr anchor="ctr"/>
+                    <a:lstStyle/>
+                    <a:p>
+                      <a:pPr algn="ctr">
+                        <a:defRPr sz="1000">
+                          <a:solidFill>
+                            <a:srgbClr val="1A1A1A"/>
+                          </a:solidFill>
+                          <a:latin typeface="Consolas"/>
+                        </a:defRPr>
+                      </a:pPr>
+                      <a:r>
+                        <a:t>39 h / 14 h</a:t>
+                      </a:r>
+                    </a:p>
+                  </a:txBody>
+                  <a:tcPr marL="109728" marR="91440">
+                    <a:solidFill>
+                      <a:srgbClr val="F8F7F2"/>
+                    </a:solidFill>
+                  </a:tcPr>
+                </a:tc>
+              </a:tr>
+              <a:tr h="502920">
+                <a:tc>
+                  <a:txBody>
+                    <a:bodyPr anchor="ctr"/>
+                    <a:lstStyle/>
+                    <a:p>
+                      <a:pPr algn="l">
+                        <a:defRPr b="1" sz="1050">
+                          <a:solidFill>
+                            <a:srgbClr val="0F2540"/>
+                          </a:solidFill>
+                          <a:latin typeface="Calibri"/>
+                        </a:defRPr>
+                      </a:pPr>
+                      <a:r>
+                        <a:t>ASL-DVS</a:t>
+                      </a:r>
+                    </a:p>
+                  </a:txBody>
+                  <a:tcPr marL="109728" marR="91440">
+                    <a:solidFill>
+                      <a:srgbClr val="FFFFFF"/>
+                    </a:solidFill>
+                  </a:tcPr>
+                </a:tc>
+                <a:tc>
+                  <a:txBody>
+                    <a:bodyPr anchor="ctr"/>
+                    <a:lstStyle/>
+                    <a:p>
+                      <a:pPr algn="l">
+                        <a:defRPr sz="1000">
+                          <a:solidFill>
+                            <a:srgbClr val="1A1A1A"/>
+                          </a:solidFill>
+                          <a:latin typeface="Calibri"/>
+                        </a:defRPr>
+                      </a:pPr>
+                      <a:r>
+                        <a:t>American Sign Language (event)</a:t>
+                      </a:r>
+                    </a:p>
+                  </a:txBody>
+                  <a:tcPr marL="109728" marR="91440">
+                    <a:solidFill>
+                      <a:srgbClr val="FFFFFF"/>
+                    </a:solidFill>
+                  </a:tcPr>
+                </a:tc>
+                <a:tc>
+                  <a:txBody>
+                    <a:bodyPr anchor="ctr"/>
+                    <a:lstStyle/>
+                    <a:p>
+                      <a:pPr algn="ctr">
+                        <a:defRPr sz="1000">
+                          <a:solidFill>
+                            <a:srgbClr val="1A1A1A"/>
+                          </a:solidFill>
+                          <a:latin typeface="Consolas"/>
+                        </a:defRPr>
+                      </a:pPr>
+                      <a:r>
+                        <a:t>100 K</a:t>
+                      </a:r>
+                    </a:p>
+                  </a:txBody>
+                  <a:tcPr marL="109728" marR="91440">
+                    <a:solidFill>
+                      <a:srgbClr val="FFFFFF"/>
+                    </a:solidFill>
+                  </a:tcPr>
+                </a:tc>
+              </a:tr>
+            </a:tbl>
+          </a:graphicData>
+        </a:graphic>
+      </p:graphicFrame>
+      <p:sp>
+        <p:nvSpPr>
+          <p:cNvPr id="24" name="TextBox 23"/>
+          <p:cNvSpPr txBox="1"/>
+          <p:nvPr/>
+        </p:nvSpPr>
+        <p:spPr>
+          <a:xfrm>
+            <a:off x="6035040" y="6217920"/>
+            <a:ext cx="5852160" cy="228600"/>
+          </a:xfrm>
+          <a:prstGeom prst="rect">
+            <a:avLst/>
+          </a:prstGeom>
+          <a:noFill/>
+        </p:spPr>
+        <p:txBody>
+          <a:bodyPr wrap="square" lIns="0" rIns="0" tIns="0" bIns="0">
+            <a:spAutoFit/>
+          </a:bodyPr>
+          <a:lstStyle/>
+          <a:p>
+            <a:pPr>
+              <a:defRPr sz="900" b="0" i="1">
+                <a:solidFill>
+                  <a:srgbClr val="7A7A7A"/>
+                </a:solidFill>
+                <a:latin typeface="Calibri"/>
+              </a:defRPr>
+            </a:pPr>
+            <a:r>
+              <a:t>Highlighted: dataset used in this thesis.</a:t>
+            </a:r>
+          </a:p>
+        </p:txBody>
+      </p:sp>
+      <p:sp>
+        <p:nvSpPr>
+          <p:cNvPr id="25" name="TextBox 24"/>
+          <p:cNvSpPr txBox="1"/>
+          <p:nvPr/>
+        </p:nvSpPr>
+        <p:spPr>
+          <a:xfrm>
+            <a:off x="457200" y="6492240"/>
+            <a:ext cx="5486400" cy="274320"/>
+          </a:xfrm>
+          <a:prstGeom prst="rect">
+            <a:avLst/>
+          </a:prstGeom>
+          <a:noFill/>
+        </p:spPr>
+        <p:txBody>
+          <a:bodyPr wrap="square" lIns="0" rIns="0" tIns="0" bIns="0">
+            <a:spAutoFit/>
+          </a:bodyPr>
+          <a:lstStyle/>
+          <a:p>
+            <a:pPr>
+              <a:defRPr sz="1000" b="0" i="0">
+                <a:solidFill>
+                  <a:srgbClr val="7A7A7A"/>
+                </a:solidFill>
+                <a:latin typeface="Calibri"/>
+              </a:defRPr>
+            </a:pPr>
+            <a:r>
+              <a:t>Appendix — Hyunho Kook</a:t>
+            </a:r>
+          </a:p>
+        </p:txBody>
+      </p:sp>
+      <p:sp>
+        <p:nvSpPr>
+          <p:cNvPr id="26" name="TextBox 25"/>
+          <p:cNvSpPr txBox="1"/>
+          <p:nvPr/>
+        </p:nvSpPr>
+        <p:spPr>
+          <a:xfrm>
+            <a:off x="6400800" y="6492240"/>
+            <a:ext cx="5303520" cy="274320"/>
+          </a:xfrm>
+          <a:prstGeom prst="rect">
+            <a:avLst/>
+          </a:prstGeom>
+          <a:noFill/>
+        </p:spPr>
+        <p:txBody>
+          <a:bodyPr wrap="square" lIns="0" rIns="0" tIns="0" bIns="0">
+            <a:spAutoFit/>
+          </a:bodyPr>
+          <a:lstStyle/>
+          <a:p>
+            <a:pPr algn="r">
+              <a:defRPr sz="1000" b="0" i="0">
+                <a:solidFill>
+                  <a:srgbClr val="7A7A7A"/>
+                </a:solidFill>
+                <a:latin typeface="Calibri"/>
+              </a:defRPr>
+            </a:pPr>
+            <a:r>
+              <a:t>A4 / A7</a:t>
+            </a:r>
+          </a:p>
+        </p:txBody>
+      </p:sp>
+    </p:spTree>
+  </p:cSld>
+  <p:clrMapOvr>
+    <a:masterClrMapping/>
+  </p:clrMapOvr>
+</p:sld>
+</file>
+
+<file path=ppt/slides/slide26.xml><?xml version="1.0" encoding="utf-8"?>
+<p:sld xmlns:a="http://schemas.openxmlformats.org/drawingml/2006/main" xmlns:p="http://schemas.openxmlformats.org/presentationml/2006/main" xmlns:r="http://schemas.openxmlformats.org/officeDocument/2006/relationships">
+  <p:cSld>
+    <p:spTree>
+      <p:nvGrpSpPr>
+        <p:cNvPr id="1" name=""/>
+        <p:cNvGrpSpPr/>
+        <p:nvPr/>
+      </p:nvGrpSpPr>
+      <p:grpSpPr/>
+      <p:sp>
+        <p:nvSpPr>
+          <p:cNvPr id="2" name="Rectangle 1"/>
+          <p:cNvSpPr/>
+          <p:nvPr/>
+        </p:nvSpPr>
+        <p:spPr>
+          <a:xfrm>
+            <a:off x="457200" y="566928"/>
+            <a:ext cx="54864" cy="201168"/>
+          </a:xfrm>
+          <a:prstGeom prst="rect">
+            <a:avLst/>
+          </a:prstGeom>
+          <a:solidFill>
+            <a:srgbClr val="E56945"/>
+          </a:solidFill>
+          <a:ln>
+            <a:noFill/>
+          </a:ln>
+        </p:spPr>
+        <p:style>
+          <a:lnRef idx="1">
+            <a:schemeClr val="accent1"/>
+          </a:lnRef>
+          <a:fillRef idx="3">
+            <a:schemeClr val="accent1"/>
+          </a:fillRef>
+          <a:effectRef idx="2">
+            <a:schemeClr val="accent1"/>
+          </a:effectRef>
+          <a:fontRef idx="minor">
+            <a:schemeClr val="lt1"/>
+          </a:fontRef>
+        </p:style>
+        <p:txBody>
+          <a:bodyPr rtlCol="0" anchor="ctr"/>
+          <a:lstStyle/>
+          <a:p>
+            <a:pPr algn="ctr"/>
+          </a:p>
+        </p:txBody>
+      </p:sp>
+      <p:sp>
+        <p:nvSpPr>
+          <p:cNvPr id="3" name="TextBox 2"/>
+          <p:cNvSpPr txBox="1"/>
+          <p:nvPr/>
+        </p:nvSpPr>
+        <p:spPr>
+          <a:xfrm>
+            <a:off x="594360" y="548640"/>
+            <a:ext cx="5486400" cy="274320"/>
+          </a:xfrm>
+          <a:prstGeom prst="rect">
+            <a:avLst/>
+          </a:prstGeom>
+          <a:noFill/>
+        </p:spPr>
+        <p:txBody>
+          <a:bodyPr wrap="square" lIns="0" rIns="0" tIns="0" bIns="0">
+            <a:spAutoFit/>
+          </a:bodyPr>
+          <a:lstStyle/>
+          <a:p>
+            <a:pPr>
+              <a:defRPr sz="1000" b="1" i="0">
+                <a:solidFill>
+                  <a:srgbClr val="E56945"/>
+                </a:solidFill>
+                <a:latin typeface="Calibri"/>
+              </a:defRPr>
+            </a:pPr>
+            <a:r>
+              <a:rPr spc="400"/>
+              <a:t>APPENDIX · A5</a:t>
+            </a:r>
+          </a:p>
+        </p:txBody>
+      </p:sp>
+      <p:sp>
+        <p:nvSpPr>
+          <p:cNvPr id="4" name="TextBox 3"/>
+          <p:cNvSpPr txBox="1"/>
+          <p:nvPr/>
+        </p:nvSpPr>
+        <p:spPr>
+          <a:xfrm>
+            <a:off x="457200" y="777240"/>
+            <a:ext cx="11247120" cy="777240"/>
+          </a:xfrm>
+          <a:prstGeom prst="rect">
+            <a:avLst/>
+          </a:prstGeom>
+          <a:noFill/>
+        </p:spPr>
+        <p:txBody>
+          <a:bodyPr wrap="square" lIns="0" rIns="0" tIns="0" bIns="0">
+            <a:spAutoFit/>
+          </a:bodyPr>
+          <a:lstStyle/>
+          <a:p>
+            <a:pPr>
+              <a:defRPr sz="3000" b="1" i="0">
+                <a:solidFill>
+                  <a:srgbClr val="0F2540"/>
+                </a:solidFill>
+                <a:latin typeface="Cambria"/>
+              </a:defRPr>
+            </a:pPr>
+            <a:r>
+              <a:t>From DVS Events to SNN Input</a:t>
+            </a:r>
+          </a:p>
+        </p:txBody>
+      </p:sp>
+      <p:sp>
+        <p:nvSpPr>
+          <p:cNvPr id="5" name="TextBox 4"/>
+          <p:cNvSpPr txBox="1"/>
+          <p:nvPr/>
+        </p:nvSpPr>
+        <p:spPr>
+          <a:xfrm>
+            <a:off x="457200" y="1600200"/>
+            <a:ext cx="11247120" cy="365760"/>
+          </a:xfrm>
+          <a:prstGeom prst="rect">
+            <a:avLst/>
+          </a:prstGeom>
+          <a:noFill/>
+        </p:spPr>
+        <p:txBody>
+          <a:bodyPr wrap="square" lIns="0" rIns="0" tIns="0" bIns="0">
+            <a:spAutoFit/>
+          </a:bodyPr>
+          <a:lstStyle/>
+          <a:p>
+            <a:pPr>
+              <a:defRPr sz="1400" b="0" i="1">
+                <a:solidFill>
+                  <a:srgbClr val="7A7A7A"/>
+                </a:solidFill>
+                <a:latin typeface="Calibri"/>
+              </a:defRPr>
+            </a:pPr>
+            <a:r>
+              <a:t>Asynchronous events become T frames that the LIF stack consumes.</a:t>
+            </a:r>
+          </a:p>
+        </p:txBody>
+      </p:sp>
+      <p:pic>
+        <p:nvPicPr>
+          <p:cNvPr id="6" name="Picture 5" descr="dvs_workflow.png"/>
+          <p:cNvPicPr>
+            <a:picLocks noChangeAspect="1"/>
+          </p:cNvPicPr>
+          <p:nvPr/>
+        </p:nvPicPr>
+        <p:blipFill>
+          <a:blip r:embed="rId2"/>
+          <a:stretch>
+            <a:fillRect/>
+          </a:stretch>
+        </p:blipFill>
+        <p:spPr>
+          <a:xfrm>
+            <a:off x="548640" y="2286000"/>
+            <a:ext cx="11064240" cy="3822072"/>
+          </a:xfrm>
+          <a:prstGeom prst="rect">
+            <a:avLst/>
+          </a:prstGeom>
+        </p:spPr>
+      </p:pic>
+      <p:sp>
+        <p:nvSpPr>
+          <p:cNvPr id="7" name="Rectangle 6"/>
+          <p:cNvSpPr/>
+          <p:nvPr/>
+        </p:nvSpPr>
+        <p:spPr>
+          <a:xfrm>
+            <a:off x="548640" y="5760720"/>
+            <a:ext cx="54864" cy="594360"/>
+          </a:xfrm>
+          <a:prstGeom prst="rect">
+            <a:avLst/>
+          </a:prstGeom>
+          <a:solidFill>
+            <a:srgbClr val="1D7E7E"/>
+          </a:solidFill>
+          <a:ln>
+            <a:noFill/>
+          </a:ln>
+        </p:spPr>
+        <p:style>
+          <a:lnRef idx="1">
+            <a:schemeClr val="accent1"/>
+          </a:lnRef>
+          <a:fillRef idx="3">
+            <a:schemeClr val="accent1"/>
+          </a:fillRef>
+          <a:effectRef idx="2">
+            <a:schemeClr val="accent1"/>
+          </a:effectRef>
+          <a:fontRef idx="minor">
+            <a:schemeClr val="lt1"/>
+          </a:fontRef>
+        </p:style>
+        <p:txBody>
+          <a:bodyPr rtlCol="0" anchor="ctr"/>
+          <a:lstStyle/>
+          <a:p>
+            <a:pPr algn="ctr"/>
+          </a:p>
+        </p:txBody>
+      </p:sp>
+      <p:sp>
+        <p:nvSpPr>
+          <p:cNvPr id="8" name="Rectangle 7"/>
+          <p:cNvSpPr/>
+          <p:nvPr/>
+        </p:nvSpPr>
+        <p:spPr>
+          <a:xfrm>
+            <a:off x="603503" y="5760720"/>
+            <a:ext cx="11009376" cy="594360"/>
+          </a:xfrm>
+          <a:prstGeom prst="rect">
+            <a:avLst/>
+          </a:prstGeom>
+          <a:solidFill>
+            <a:srgbClr val="E5F5F0"/>
+          </a:solidFill>
+          <a:ln>
+            <a:noFill/>
+          </a:ln>
+        </p:spPr>
+        <p:style>
+          <a:lnRef idx="1">
+            <a:schemeClr val="accent1"/>
+          </a:lnRef>
+          <a:fillRef idx="3">
+            <a:schemeClr val="accent1"/>
+          </a:fillRef>
+          <a:effectRef idx="2">
+            <a:schemeClr val="accent1"/>
+          </a:effectRef>
+          <a:fontRef idx="minor">
+            <a:schemeClr val="lt1"/>
+          </a:fontRef>
+        </p:style>
+        <p:txBody>
+          <a:bodyPr rtlCol="0" anchor="ctr"/>
+          <a:lstStyle/>
+          <a:p>
+            <a:pPr algn="ctr"/>
+          </a:p>
+        </p:txBody>
+      </p:sp>
+      <p:sp>
+        <p:nvSpPr>
+          <p:cNvPr id="9" name="TextBox 8"/>
+          <p:cNvSpPr txBox="1"/>
+          <p:nvPr/>
+        </p:nvSpPr>
+        <p:spPr>
+          <a:xfrm>
+            <a:off x="868680" y="5806440"/>
+            <a:ext cx="10607040" cy="502920"/>
+          </a:xfrm>
+          <a:prstGeom prst="rect">
+            <a:avLst/>
+          </a:prstGeom>
+          <a:noFill/>
+        </p:spPr>
+        <p:txBody>
+          <a:bodyPr wrap="square" anchor="ctr">
+            <a:spAutoFit/>
+          </a:bodyPr>
+          <a:lstStyle/>
+          <a:p>
+            <a:pPr>
+              <a:defRPr sz="1150" b="1">
+                <a:solidFill>
+                  <a:srgbClr val="1D7E7E"/>
+                </a:solidFill>
+                <a:latin typeface="Calibri"/>
+              </a:defRPr>
+            </a:pPr>
+            <a:r>
+              <a:t>Why this matters for MP-Init</a:t>
+            </a:r>
+          </a:p>
+          <a:p>
+            <a:pPr>
+              <a:spcBef>
+                <a:spcPts val="600"/>
+              </a:spcBef>
+              <a:defRPr sz="1050">
+                <a:solidFill>
+                  <a:srgbClr val="1A1A1A"/>
+                </a:solidFill>
+                <a:latin typeface="Calibri"/>
+              </a:defRPr>
+            </a:pPr>
+            <a:r>
+              <a:t>The first frame after binning has no history → the membrane starts at zero, far from π. That's exactly the gap MP-Init closes.</a:t>
+            </a:r>
+          </a:p>
+        </p:txBody>
+      </p:sp>
+      <p:sp>
+        <p:nvSpPr>
+          <p:cNvPr id="10" name="TextBox 9"/>
+          <p:cNvSpPr txBox="1"/>
+          <p:nvPr/>
+        </p:nvSpPr>
+        <p:spPr>
+          <a:xfrm>
+            <a:off x="457200" y="6492240"/>
+            <a:ext cx="5486400" cy="274320"/>
+          </a:xfrm>
+          <a:prstGeom prst="rect">
+            <a:avLst/>
+          </a:prstGeom>
+          <a:noFill/>
+        </p:spPr>
+        <p:txBody>
+          <a:bodyPr wrap="square" lIns="0" rIns="0" tIns="0" bIns="0">
+            <a:spAutoFit/>
+          </a:bodyPr>
+          <a:lstStyle/>
+          <a:p>
+            <a:pPr>
+              <a:defRPr sz="1000" b="0" i="0">
+                <a:solidFill>
+                  <a:srgbClr val="7A7A7A"/>
+                </a:solidFill>
+                <a:latin typeface="Calibri"/>
+              </a:defRPr>
+            </a:pPr>
+            <a:r>
+              <a:t>Appendix — Hyunho Kook</a:t>
+            </a:r>
+          </a:p>
+        </p:txBody>
+      </p:sp>
+      <p:sp>
+        <p:nvSpPr>
+          <p:cNvPr id="11" name="TextBox 10"/>
+          <p:cNvSpPr txBox="1"/>
+          <p:nvPr/>
+        </p:nvSpPr>
+        <p:spPr>
+          <a:xfrm>
+            <a:off x="6400800" y="6492240"/>
+            <a:ext cx="5303520" cy="274320"/>
+          </a:xfrm>
+          <a:prstGeom prst="rect">
+            <a:avLst/>
+          </a:prstGeom>
+          <a:noFill/>
+        </p:spPr>
+        <p:txBody>
+          <a:bodyPr wrap="square" lIns="0" rIns="0" tIns="0" bIns="0">
+            <a:spAutoFit/>
+          </a:bodyPr>
+          <a:lstStyle/>
+          <a:p>
+            <a:pPr algn="r">
+              <a:defRPr sz="1000" b="0" i="0">
+                <a:solidFill>
+                  <a:srgbClr val="7A7A7A"/>
+                </a:solidFill>
+                <a:latin typeface="Calibri"/>
+              </a:defRPr>
+            </a:pPr>
+            <a:r>
+              <a:t>A5 / A7</a:t>
+            </a:r>
+          </a:p>
+        </p:txBody>
+      </p:sp>
+    </p:spTree>
+  </p:cSld>
+  <p:clrMapOvr>
+    <a:masterClrMapping/>
+  </p:clrMapOvr>
+</p:sld>
+</file>
+
+<file path=ppt/slides/slide27.xml><?xml version="1.0" encoding="utf-8"?>
+<p:sld xmlns:a="http://schemas.openxmlformats.org/drawingml/2006/main" xmlns:p="http://schemas.openxmlformats.org/presentationml/2006/main" xmlns:r="http://schemas.openxmlformats.org/officeDocument/2006/relationships">
+  <p:cSld>
+    <p:spTree>
+      <p:nvGrpSpPr>
+        <p:cNvPr id="1" name=""/>
+        <p:cNvGrpSpPr/>
+        <p:nvPr/>
+      </p:nvGrpSpPr>
+      <p:grpSpPr/>
+      <p:sp>
+        <p:nvSpPr>
+          <p:cNvPr id="2" name="Rectangle 1"/>
+          <p:cNvSpPr/>
+          <p:nvPr/>
+        </p:nvSpPr>
+        <p:spPr>
+          <a:xfrm>
+            <a:off x="457200" y="566928"/>
+            <a:ext cx="54864" cy="201168"/>
+          </a:xfrm>
+          <a:prstGeom prst="rect">
+            <a:avLst/>
+          </a:prstGeom>
+          <a:solidFill>
+            <a:srgbClr val="E56945"/>
+          </a:solidFill>
+          <a:ln>
+            <a:noFill/>
+          </a:ln>
+        </p:spPr>
+        <p:style>
+          <a:lnRef idx="1">
+            <a:schemeClr val="accent1"/>
+          </a:lnRef>
+          <a:fillRef idx="3">
+            <a:schemeClr val="accent1"/>
+          </a:fillRef>
+          <a:effectRef idx="2">
+            <a:schemeClr val="accent1"/>
+          </a:effectRef>
+          <a:fontRef idx="minor">
+            <a:schemeClr val="lt1"/>
+          </a:fontRef>
+        </p:style>
+        <p:txBody>
+          <a:bodyPr rtlCol="0" anchor="ctr"/>
+          <a:lstStyle/>
+          <a:p>
+            <a:pPr algn="ctr"/>
+          </a:p>
+        </p:txBody>
+      </p:sp>
+      <p:sp>
+        <p:nvSpPr>
+          <p:cNvPr id="3" name="TextBox 2"/>
+          <p:cNvSpPr txBox="1"/>
+          <p:nvPr/>
+        </p:nvSpPr>
+        <p:spPr>
+          <a:xfrm>
+            <a:off x="594360" y="548640"/>
+            <a:ext cx="5486400" cy="274320"/>
+          </a:xfrm>
+          <a:prstGeom prst="rect">
+            <a:avLst/>
+          </a:prstGeom>
+          <a:noFill/>
+        </p:spPr>
+        <p:txBody>
+          <a:bodyPr wrap="square" lIns="0" rIns="0" tIns="0" bIns="0">
+            <a:spAutoFit/>
+          </a:bodyPr>
+          <a:lstStyle/>
+          <a:p>
+            <a:pPr>
+              <a:defRPr sz="1000" b="1" i="0">
+                <a:solidFill>
+                  <a:srgbClr val="E56945"/>
+                </a:solidFill>
+                <a:latin typeface="Calibri"/>
+              </a:defRPr>
+            </a:pPr>
+            <a:r>
+              <a:rPr spc="400"/>
+              <a:t>APPENDIX · A6</a:t>
+            </a:r>
+          </a:p>
+        </p:txBody>
+      </p:sp>
+      <p:sp>
+        <p:nvSpPr>
+          <p:cNvPr id="4" name="TextBox 3"/>
+          <p:cNvSpPr txBox="1"/>
+          <p:nvPr/>
+        </p:nvSpPr>
+        <p:spPr>
+          <a:xfrm>
+            <a:off x="457200" y="777240"/>
+            <a:ext cx="11247120" cy="777240"/>
+          </a:xfrm>
+          <a:prstGeom prst="rect">
+            <a:avLst/>
+          </a:prstGeom>
+          <a:noFill/>
+        </p:spPr>
+        <p:txBody>
+          <a:bodyPr wrap="square" lIns="0" rIns="0" tIns="0" bIns="0">
+            <a:spAutoFit/>
+          </a:bodyPr>
+          <a:lstStyle/>
+          <a:p>
+            <a:pPr>
+              <a:defRPr sz="3000" b="1" i="0">
+                <a:solidFill>
+                  <a:srgbClr val="0F2540"/>
+                </a:solidFill>
+                <a:latin typeface="Cambria"/>
+              </a:defRPr>
+            </a:pPr>
+            <a:r>
+              <a:t>How Were SNNs Trained Before?</a:t>
+            </a:r>
+          </a:p>
+        </p:txBody>
+      </p:sp>
+      <p:sp>
+        <p:nvSpPr>
+          <p:cNvPr id="5" name="TextBox 4"/>
+          <p:cNvSpPr txBox="1"/>
+          <p:nvPr/>
+        </p:nvSpPr>
+        <p:spPr>
+          <a:xfrm>
+            <a:off x="457200" y="1600200"/>
+            <a:ext cx="11247120" cy="365760"/>
+          </a:xfrm>
+          <a:prstGeom prst="rect">
+            <a:avLst/>
+          </a:prstGeom>
+          <a:noFill/>
+        </p:spPr>
+        <p:txBody>
+          <a:bodyPr wrap="square" lIns="0" rIns="0" tIns="0" bIns="0">
+            <a:spAutoFit/>
+          </a:bodyPr>
+          <a:lstStyle/>
+          <a:p>
+            <a:pPr>
+              <a:defRPr sz="1400" b="0" i="1">
+                <a:solidFill>
+                  <a:srgbClr val="7A7A7A"/>
+                </a:solidFill>
+                <a:latin typeface="Calibri"/>
+              </a:defRPr>
+            </a:pPr>
+            <a:r>
+              <a:t>From biological learning rules to modern surrogate-gradient BPTT.</a:t>
+            </a:r>
+          </a:p>
+        </p:txBody>
+      </p:sp>
+      <p:sp>
+        <p:nvSpPr>
+          <p:cNvPr id="6" name="Rectangle 5"/>
+          <p:cNvSpPr/>
+          <p:nvPr/>
+        </p:nvSpPr>
+        <p:spPr>
+          <a:xfrm>
+            <a:off x="731520" y="2926080"/>
+            <a:ext cx="10698480" cy="36576"/>
+          </a:xfrm>
+          <a:prstGeom prst="rect">
+            <a:avLst/>
+          </a:prstGeom>
+          <a:solidFill>
+            <a:srgbClr val="0F2540"/>
+          </a:solidFill>
+          <a:ln>
+            <a:noFill/>
+          </a:ln>
+        </p:spPr>
+        <p:style>
+          <a:lnRef idx="1">
+            <a:schemeClr val="accent1"/>
+          </a:lnRef>
+          <a:fillRef idx="3">
+            <a:schemeClr val="accent1"/>
+          </a:fillRef>
+          <a:effectRef idx="2">
+            <a:schemeClr val="accent1"/>
+          </a:effectRef>
+          <a:fontRef idx="minor">
+            <a:schemeClr val="lt1"/>
+          </a:fontRef>
+        </p:style>
+        <p:txBody>
+          <a:bodyPr rtlCol="0" anchor="ctr"/>
+          <a:lstStyle/>
+          <a:p>
+            <a:pPr algn="ctr"/>
+          </a:p>
+        </p:txBody>
+      </p:sp>
+      <p:sp>
+        <p:nvSpPr>
+          <p:cNvPr id="7" name="Oval 6"/>
+          <p:cNvSpPr/>
+          <p:nvPr/>
+        </p:nvSpPr>
+        <p:spPr>
+          <a:xfrm>
+            <a:off x="612648" y="2834640"/>
+            <a:ext cx="237744" cy="237744"/>
+          </a:xfrm>
+          <a:prstGeom prst="ellipse">
+            <a:avLst/>
+          </a:prstGeom>
+          <a:solidFill>
+            <a:srgbClr val="E0B85F"/>
+          </a:solidFill>
+          <a:ln w="31750">
+            <a:solidFill>
+              <a:srgbClr val="FFFFFF"/>
+            </a:solidFill>
+          </a:ln>
+        </p:spPr>
+        <p:style>
+          <a:lnRef idx="1">
+            <a:schemeClr val="accent1"/>
+          </a:lnRef>
+          <a:fillRef idx="3">
+            <a:schemeClr val="accent1"/>
+          </a:fillRef>
+          <a:effectRef idx="2">
+            <a:schemeClr val="accent1"/>
+          </a:effectRef>
+          <a:fontRef idx="minor">
+            <a:schemeClr val="lt1"/>
+          </a:fontRef>
+        </p:style>
+        <p:txBody>
+          <a:bodyPr rtlCol="0" anchor="ctr"/>
+          <a:lstStyle/>
+          <a:p>
+            <a:pPr algn="ctr"/>
+          </a:p>
+        </p:txBody>
+      </p:sp>
+      <p:sp>
+        <p:nvSpPr>
+          <p:cNvPr id="8" name="TextBox 7"/>
+          <p:cNvSpPr txBox="1"/>
+          <p:nvPr/>
+        </p:nvSpPr>
+        <p:spPr>
+          <a:xfrm>
+            <a:off x="182880" y="2468880"/>
+            <a:ext cx="1097280" cy="274320"/>
+          </a:xfrm>
+          <a:prstGeom prst="rect">
+            <a:avLst/>
+          </a:prstGeom>
+          <a:noFill/>
+        </p:spPr>
+        <p:txBody>
+          <a:bodyPr wrap="square" lIns="0" rIns="0" tIns="0" bIns="0">
+            <a:spAutoFit/>
+          </a:bodyPr>
+          <a:lstStyle/>
+          <a:p>
+            <a:pPr algn="ctr">
+              <a:defRPr sz="1100" b="1" i="0">
+                <a:solidFill>
+                  <a:srgbClr val="E0B85F"/>
+                </a:solidFill>
+                <a:latin typeface="Consolas"/>
+              </a:defRPr>
+            </a:pPr>
+            <a:r>
+              <a:t>1998</a:t>
+            </a:r>
+          </a:p>
+        </p:txBody>
+      </p:sp>
+      <p:sp>
+        <p:nvSpPr>
+          <p:cNvPr id="9" name="TextBox 8"/>
+          <p:cNvSpPr txBox="1"/>
+          <p:nvPr/>
+        </p:nvSpPr>
+        <p:spPr>
+          <a:xfrm>
+            <a:off x="-182879" y="3154680"/>
+            <a:ext cx="1828800" cy="548640"/>
+          </a:xfrm>
+          <a:prstGeom prst="rect">
+            <a:avLst/>
+          </a:prstGeom>
+          <a:noFill/>
+        </p:spPr>
+        <p:txBody>
+          <a:bodyPr wrap="square" lIns="0" rIns="0" tIns="0" bIns="0">
+            <a:spAutoFit/>
+          </a:bodyPr>
+          <a:lstStyle/>
+          <a:p>
+            <a:pPr algn="ctr">
+              <a:defRPr sz="1200" b="1" i="0">
+                <a:solidFill>
+                  <a:srgbClr val="E0B85F"/>
+                </a:solidFill>
+                <a:latin typeface="Calibri"/>
+              </a:defRPr>
+            </a:pPr>
+            <a:r>
+              <a:t>STDP</a:t>
+            </a:r>
+          </a:p>
+        </p:txBody>
+      </p:sp>
+      <p:sp>
+        <p:nvSpPr>
+          <p:cNvPr id="10" name="Oval 9"/>
+          <p:cNvSpPr/>
+          <p:nvPr/>
+        </p:nvSpPr>
+        <p:spPr>
+          <a:xfrm>
+            <a:off x="3538728" y="2834640"/>
+            <a:ext cx="237744" cy="237744"/>
+          </a:xfrm>
+          <a:prstGeom prst="ellipse">
+            <a:avLst/>
+          </a:prstGeom>
+          <a:solidFill>
+            <a:srgbClr val="E56945"/>
+          </a:solidFill>
+          <a:ln w="31750">
+            <a:solidFill>
+              <a:srgbClr val="FFFFFF"/>
+            </a:solidFill>
+          </a:ln>
+        </p:spPr>
+        <p:style>
+          <a:lnRef idx="1">
+            <a:schemeClr val="accent1"/>
+          </a:lnRef>
+          <a:fillRef idx="3">
+            <a:schemeClr val="accent1"/>
+          </a:fillRef>
+          <a:effectRef idx="2">
+            <a:schemeClr val="accent1"/>
+          </a:effectRef>
+          <a:fontRef idx="minor">
+            <a:schemeClr val="lt1"/>
+          </a:fontRef>
+        </p:style>
+        <p:txBody>
+          <a:bodyPr rtlCol="0" anchor="ctr"/>
+          <a:lstStyle/>
+          <a:p>
+            <a:pPr algn="ctr"/>
+          </a:p>
+        </p:txBody>
+      </p:sp>
+      <p:sp>
+        <p:nvSpPr>
+          <p:cNvPr id="11" name="TextBox 10"/>
+          <p:cNvSpPr txBox="1"/>
+          <p:nvPr/>
+        </p:nvSpPr>
+        <p:spPr>
+          <a:xfrm>
+            <a:off x="3108960" y="2468880"/>
+            <a:ext cx="1097280" cy="274320"/>
+          </a:xfrm>
+          <a:prstGeom prst="rect">
+            <a:avLst/>
+          </a:prstGeom>
+          <a:noFill/>
+        </p:spPr>
+        <p:txBody>
+          <a:bodyPr wrap="square" lIns="0" rIns="0" tIns="0" bIns="0">
+            <a:spAutoFit/>
+          </a:bodyPr>
+          <a:lstStyle/>
+          <a:p>
+            <a:pPr algn="ctr">
+              <a:defRPr sz="1100" b="1" i="0">
+                <a:solidFill>
+                  <a:srgbClr val="E56945"/>
+                </a:solidFill>
+                <a:latin typeface="Consolas"/>
+              </a:defRPr>
+            </a:pPr>
+            <a:r>
+              <a:t>2015</a:t>
+            </a:r>
+          </a:p>
+        </p:txBody>
+      </p:sp>
+      <p:sp>
+        <p:nvSpPr>
+          <p:cNvPr id="12" name="TextBox 11"/>
+          <p:cNvSpPr txBox="1"/>
+          <p:nvPr/>
+        </p:nvSpPr>
+        <p:spPr>
+          <a:xfrm>
+            <a:off x="2743200" y="3154680"/>
+            <a:ext cx="1828800" cy="548640"/>
+          </a:xfrm>
+          <a:prstGeom prst="rect">
+            <a:avLst/>
+          </a:prstGeom>
+          <a:noFill/>
+        </p:spPr>
+        <p:txBody>
+          <a:bodyPr wrap="square" lIns="0" rIns="0" tIns="0" bIns="0">
+            <a:spAutoFit/>
+          </a:bodyPr>
+          <a:lstStyle/>
+          <a:p>
+            <a:pPr algn="ctr">
+              <a:defRPr sz="1200" b="1" i="0">
+                <a:solidFill>
+                  <a:srgbClr val="E56945"/>
+                </a:solidFill>
+                <a:latin typeface="Calibri"/>
+              </a:defRPr>
+            </a:pPr>
+            <a:r>
+              <a:t>ANN→SNN</a:t>
+            </a:r>
+            <a:br/>
+            <a:r>
+              <a:t>conversion</a:t>
+            </a:r>
+          </a:p>
+        </p:txBody>
+      </p:sp>
+      <p:sp>
+        <p:nvSpPr>
+          <p:cNvPr id="13" name="Oval 12"/>
+          <p:cNvSpPr/>
+          <p:nvPr/>
+        </p:nvSpPr>
+        <p:spPr>
+          <a:xfrm>
+            <a:off x="7196328" y="2834640"/>
+            <a:ext cx="237744" cy="237744"/>
+          </a:xfrm>
+          <a:prstGeom prst="ellipse">
+            <a:avLst/>
+          </a:prstGeom>
+          <a:solidFill>
+            <a:srgbClr val="1D7E7E"/>
+          </a:solidFill>
+          <a:ln w="31750">
+            <a:solidFill>
+              <a:srgbClr val="FFFFFF"/>
+            </a:solidFill>
+          </a:ln>
+        </p:spPr>
+        <p:style>
+          <a:lnRef idx="1">
+            <a:schemeClr val="accent1"/>
+          </a:lnRef>
+          <a:fillRef idx="3">
+            <a:schemeClr val="accent1"/>
+          </a:fillRef>
+          <a:effectRef idx="2">
+            <a:schemeClr val="accent1"/>
+          </a:effectRef>
+          <a:fontRef idx="minor">
+            <a:schemeClr val="lt1"/>
+          </a:fontRef>
+        </p:style>
+        <p:txBody>
+          <a:bodyPr rtlCol="0" anchor="ctr"/>
+          <a:lstStyle/>
+          <a:p>
+            <a:pPr algn="ctr"/>
+          </a:p>
+        </p:txBody>
+      </p:sp>
+      <p:sp>
+        <p:nvSpPr>
+          <p:cNvPr id="14" name="TextBox 13"/>
+          <p:cNvSpPr txBox="1"/>
+          <p:nvPr/>
+        </p:nvSpPr>
+        <p:spPr>
+          <a:xfrm>
+            <a:off x="6766560" y="2468880"/>
+            <a:ext cx="1097280" cy="274320"/>
+          </a:xfrm>
+          <a:prstGeom prst="rect">
+            <a:avLst/>
+          </a:prstGeom>
+          <a:noFill/>
+        </p:spPr>
+        <p:txBody>
+          <a:bodyPr wrap="square" lIns="0" rIns="0" tIns="0" bIns="0">
+            <a:spAutoFit/>
+          </a:bodyPr>
+          <a:lstStyle/>
+          <a:p>
+            <a:pPr algn="ctr">
+              <a:defRPr sz="1100" b="1" i="0">
+                <a:solidFill>
+                  <a:srgbClr val="1D7E7E"/>
+                </a:solidFill>
+                <a:latin typeface="Consolas"/>
+              </a:defRPr>
+            </a:pPr>
+            <a:r>
+              <a:t>2018</a:t>
+            </a:r>
+          </a:p>
+        </p:txBody>
+      </p:sp>
+      <p:sp>
+        <p:nvSpPr>
+          <p:cNvPr id="15" name="TextBox 14"/>
+          <p:cNvSpPr txBox="1"/>
+          <p:nvPr/>
+        </p:nvSpPr>
+        <p:spPr>
+          <a:xfrm>
+            <a:off x="6400800" y="3154680"/>
+            <a:ext cx="1828800" cy="548640"/>
+          </a:xfrm>
+          <a:prstGeom prst="rect">
+            <a:avLst/>
+          </a:prstGeom>
+          <a:noFill/>
+        </p:spPr>
+        <p:txBody>
+          <a:bodyPr wrap="square" lIns="0" rIns="0" tIns="0" bIns="0">
+            <a:spAutoFit/>
+          </a:bodyPr>
+          <a:lstStyle/>
+          <a:p>
+            <a:pPr algn="ctr">
+              <a:defRPr sz="1200" b="1" i="0">
+                <a:solidFill>
+                  <a:srgbClr val="1D7E7E"/>
+                </a:solidFill>
+                <a:latin typeface="Calibri"/>
+              </a:defRPr>
+            </a:pPr>
+            <a:r>
+              <a:t>Surrogate</a:t>
+            </a:r>
+            <a:br/>
+            <a:r>
+              <a:t>gradient</a:t>
+            </a:r>
+          </a:p>
+        </p:txBody>
+      </p:sp>
+      <p:sp>
+        <p:nvSpPr>
+          <p:cNvPr id="16" name="Oval 15"/>
+          <p:cNvSpPr/>
+          <p:nvPr/>
+        </p:nvSpPr>
+        <p:spPr>
+          <a:xfrm>
+            <a:off x="10853928" y="2834640"/>
+            <a:ext cx="237744" cy="237744"/>
+          </a:xfrm>
+          <a:prstGeom prst="ellipse">
+            <a:avLst/>
+          </a:prstGeom>
+          <a:solidFill>
+            <a:srgbClr val="0F2540"/>
+          </a:solidFill>
+          <a:ln w="31750">
+            <a:solidFill>
+              <a:srgbClr val="FFFFFF"/>
+            </a:solidFill>
+          </a:ln>
+        </p:spPr>
+        <p:style>
+          <a:lnRef idx="1">
+            <a:schemeClr val="accent1"/>
+          </a:lnRef>
+          <a:fillRef idx="3">
+            <a:schemeClr val="accent1"/>
+          </a:fillRef>
+          <a:effectRef idx="2">
+            <a:schemeClr val="accent1"/>
+          </a:effectRef>
+          <a:fontRef idx="minor">
+            <a:schemeClr val="lt1"/>
+          </a:fontRef>
+        </p:style>
+        <p:txBody>
+          <a:bodyPr rtlCol="0" anchor="ctr"/>
+          <a:lstStyle/>
+          <a:p>
+            <a:pPr algn="ctr"/>
+          </a:p>
+        </p:txBody>
+      </p:sp>
+      <p:sp>
+        <p:nvSpPr>
+          <p:cNvPr id="17" name="TextBox 16"/>
+          <p:cNvSpPr txBox="1"/>
+          <p:nvPr/>
+        </p:nvSpPr>
+        <p:spPr>
+          <a:xfrm>
+            <a:off x="10424160" y="2468880"/>
+            <a:ext cx="1097280" cy="274320"/>
+          </a:xfrm>
+          <a:prstGeom prst="rect">
+            <a:avLst/>
+          </a:prstGeom>
+          <a:noFill/>
+        </p:spPr>
+        <p:txBody>
+          <a:bodyPr wrap="square" lIns="0" rIns="0" tIns="0" bIns="0">
+            <a:spAutoFit/>
+          </a:bodyPr>
+          <a:lstStyle/>
+          <a:p>
+            <a:pPr algn="ctr">
+              <a:defRPr sz="1100" b="1" i="0">
+                <a:solidFill>
+                  <a:srgbClr val="0F2540"/>
+                </a:solidFill>
+                <a:latin typeface="Consolas"/>
+              </a:defRPr>
+            </a:pPr>
+            <a:r>
+              <a:t>today</a:t>
+            </a:r>
+          </a:p>
+        </p:txBody>
+      </p:sp>
+      <p:sp>
+        <p:nvSpPr>
+          <p:cNvPr id="18" name="TextBox 17"/>
+          <p:cNvSpPr txBox="1"/>
+          <p:nvPr/>
+        </p:nvSpPr>
+        <p:spPr>
+          <a:xfrm>
+            <a:off x="10058400" y="3154680"/>
+            <a:ext cx="1828800" cy="548640"/>
+          </a:xfrm>
+          <a:prstGeom prst="rect">
+            <a:avLst/>
+          </a:prstGeom>
+          <a:noFill/>
+        </p:spPr>
+        <p:txBody>
+          <a:bodyPr wrap="square" lIns="0" rIns="0" tIns="0" bIns="0">
+            <a:spAutoFit/>
+          </a:bodyPr>
+          <a:lstStyle/>
+          <a:p>
+            <a:pPr algn="ctr">
+              <a:defRPr sz="1200" b="1" i="0">
+                <a:solidFill>
+                  <a:srgbClr val="0F2540"/>
+                </a:solidFill>
+                <a:latin typeface="Calibri"/>
+              </a:defRPr>
+            </a:pPr>
+            <a:r>
+              <a:t>Direct +</a:t>
+            </a:r>
+            <a:br/>
+            <a:r>
+              <a:t>learnable</a:t>
+            </a:r>
+          </a:p>
+        </p:txBody>
+      </p:sp>
+      <p:sp>
+        <p:nvSpPr>
+          <p:cNvPr id="19" name="Rectangle 18"/>
+          <p:cNvSpPr/>
+          <p:nvPr/>
+        </p:nvSpPr>
+        <p:spPr>
+          <a:xfrm>
+            <a:off x="502920" y="4160520"/>
+            <a:ext cx="2606040" cy="1920240"/>
+          </a:xfrm>
+          <a:prstGeom prst="rect">
+            <a:avLst/>
+          </a:prstGeom>
+          <a:solidFill>
+            <a:srgbClr val="FFFFFF"/>
+          </a:solidFill>
+          <a:ln w="19050">
+            <a:solidFill>
+              <a:srgbClr val="E0B85F"/>
+            </a:solidFill>
+          </a:ln>
+        </p:spPr>
+        <p:style>
+          <a:lnRef idx="1">
+            <a:schemeClr val="accent1"/>
+          </a:lnRef>
+          <a:fillRef idx="3">
+            <a:schemeClr val="accent1"/>
+          </a:fillRef>
+          <a:effectRef idx="2">
+            <a:schemeClr val="accent1"/>
+          </a:effectRef>
+          <a:fontRef idx="minor">
+            <a:schemeClr val="lt1"/>
+          </a:fontRef>
+        </p:style>
+        <p:txBody>
+          <a:bodyPr rtlCol="0" anchor="ctr"/>
+          <a:lstStyle/>
+          <a:p>
+            <a:pPr algn="ctr"/>
+          </a:p>
+        </p:txBody>
+      </p:sp>
+      <p:sp>
+        <p:nvSpPr>
+          <p:cNvPr id="20" name="Rectangle 19"/>
+          <p:cNvSpPr/>
+          <p:nvPr/>
+        </p:nvSpPr>
+        <p:spPr>
+          <a:xfrm>
+            <a:off x="502920" y="4160520"/>
+            <a:ext cx="2606040" cy="54864"/>
+          </a:xfrm>
+          <a:prstGeom prst="rect">
+            <a:avLst/>
+          </a:prstGeom>
+          <a:solidFill>
+            <a:srgbClr val="E0B85F"/>
+          </a:solidFill>
+          <a:ln>
+            <a:noFill/>
+          </a:ln>
+        </p:spPr>
+        <p:style>
+          <a:lnRef idx="1">
+            <a:schemeClr val="accent1"/>
+          </a:lnRef>
+          <a:fillRef idx="3">
+            <a:schemeClr val="accent1"/>
+          </a:fillRef>
+          <a:effectRef idx="2">
+            <a:schemeClr val="accent1"/>
+          </a:effectRef>
+          <a:fontRef idx="minor">
+            <a:schemeClr val="lt1"/>
+          </a:fontRef>
+        </p:style>
+        <p:txBody>
+          <a:bodyPr rtlCol="0" anchor="ctr"/>
+          <a:lstStyle/>
+          <a:p>
+            <a:pPr algn="ctr"/>
+          </a:p>
+        </p:txBody>
+      </p:sp>
+      <p:sp>
+        <p:nvSpPr>
+          <p:cNvPr id="21" name="TextBox 20"/>
+          <p:cNvSpPr txBox="1"/>
+          <p:nvPr/>
+        </p:nvSpPr>
+        <p:spPr>
+          <a:xfrm>
+            <a:off x="640080" y="4325112"/>
+            <a:ext cx="2331720" cy="365760"/>
+          </a:xfrm>
+          <a:prstGeom prst="rect">
+            <a:avLst/>
+          </a:prstGeom>
+          <a:noFill/>
+        </p:spPr>
+        <p:txBody>
+          <a:bodyPr wrap="square" lIns="0" rIns="0" tIns="0" bIns="0">
+            <a:spAutoFit/>
+          </a:bodyPr>
+          <a:lstStyle/>
+          <a:p>
+            <a:pPr>
+              <a:defRPr sz="1100" b="1" i="0">
+                <a:solidFill>
+                  <a:srgbClr val="E0B85F"/>
+                </a:solidFill>
+                <a:latin typeface="Calibri"/>
+              </a:defRPr>
+            </a:pPr>
+            <a:r>
+              <a:t>Spike-Timing-Dependent Plasticity</a:t>
+            </a:r>
+          </a:p>
+        </p:txBody>
+      </p:sp>
+      <p:sp>
+        <p:nvSpPr>
+          <p:cNvPr id="22" name="TextBox 21"/>
+          <p:cNvSpPr txBox="1"/>
+          <p:nvPr/>
+        </p:nvSpPr>
+        <p:spPr>
+          <a:xfrm>
+            <a:off x="640080" y="4727448"/>
+            <a:ext cx="2331720" cy="960120"/>
+          </a:xfrm>
+          <a:prstGeom prst="rect">
+            <a:avLst/>
+          </a:prstGeom>
+          <a:noFill/>
+        </p:spPr>
+        <p:txBody>
+          <a:bodyPr wrap="square" lIns="0" rIns="0" tIns="0" bIns="0">
+            <a:spAutoFit/>
+          </a:bodyPr>
+          <a:lstStyle/>
+          <a:p>
+            <a:pPr>
+              <a:defRPr sz="1000" b="0" i="0">
+                <a:solidFill>
+                  <a:srgbClr val="1A1A1A"/>
+                </a:solidFill>
+                <a:latin typeface="Calibri"/>
+              </a:defRPr>
+            </a:pPr>
+            <a:r>
+              <a:t>Biological Hebbian rule.</a:t>
+            </a:r>
+            <a:br/>
+            <a:r>
+              <a:t>Unsupervised, local; works on small nets only.</a:t>
+            </a:r>
+          </a:p>
+        </p:txBody>
+      </p:sp>
+      <p:sp>
+        <p:nvSpPr>
+          <p:cNvPr id="23" name="TextBox 22"/>
+          <p:cNvSpPr txBox="1"/>
+          <p:nvPr/>
+        </p:nvSpPr>
+        <p:spPr>
+          <a:xfrm>
+            <a:off x="640080" y="5577840"/>
+            <a:ext cx="2331720" cy="457200"/>
+          </a:xfrm>
+          <a:prstGeom prst="rect">
+            <a:avLst/>
+          </a:prstGeom>
+          <a:noFill/>
+        </p:spPr>
+        <p:txBody>
+          <a:bodyPr wrap="square" lIns="0" rIns="0" tIns="0" bIns="0">
+            <a:spAutoFit/>
+          </a:bodyPr>
+          <a:lstStyle/>
+          <a:p>
+            <a:pPr>
+              <a:defRPr sz="850" b="0" i="1">
+                <a:solidFill>
+                  <a:srgbClr val="7A7A7A"/>
+                </a:solidFill>
+                <a:latin typeface="Calibri"/>
+              </a:defRPr>
+            </a:pPr>
+            <a:r>
+              <a:t>Bi &amp; Poo 1998</a:t>
+            </a:r>
+            <a:br/>
+            <a:r>
+              <a:t>Diehl &amp; Cook 2015</a:t>
+            </a:r>
+          </a:p>
+        </p:txBody>
+      </p:sp>
+      <p:sp>
+        <p:nvSpPr>
+          <p:cNvPr id="24" name="Rectangle 23"/>
+          <p:cNvSpPr/>
+          <p:nvPr/>
+        </p:nvSpPr>
+        <p:spPr>
+          <a:xfrm>
+            <a:off x="3246120" y="4160520"/>
+            <a:ext cx="2606040" cy="1920240"/>
+          </a:xfrm>
+          <a:prstGeom prst="rect">
+            <a:avLst/>
+          </a:prstGeom>
+          <a:solidFill>
+            <a:srgbClr val="FFFFFF"/>
+          </a:solidFill>
+          <a:ln w="19050">
+            <a:solidFill>
+              <a:srgbClr val="E56945"/>
+            </a:solidFill>
+          </a:ln>
+        </p:spPr>
+        <p:style>
+          <a:lnRef idx="1">
+            <a:schemeClr val="accent1"/>
+          </a:lnRef>
+          <a:fillRef idx="3">
+            <a:schemeClr val="accent1"/>
+          </a:fillRef>
+          <a:effectRef idx="2">
+            <a:schemeClr val="accent1"/>
+          </a:effectRef>
+          <a:fontRef idx="minor">
+            <a:schemeClr val="lt1"/>
+          </a:fontRef>
+        </p:style>
+        <p:txBody>
+          <a:bodyPr rtlCol="0" anchor="ctr"/>
+          <a:lstStyle/>
+          <a:p>
+            <a:pPr algn="ctr"/>
+          </a:p>
+        </p:txBody>
+      </p:sp>
+      <p:sp>
+        <p:nvSpPr>
+          <p:cNvPr id="25" name="Rectangle 24"/>
+          <p:cNvSpPr/>
+          <p:nvPr/>
+        </p:nvSpPr>
+        <p:spPr>
+          <a:xfrm>
+            <a:off x="3246120" y="4160520"/>
+            <a:ext cx="2606040" cy="54864"/>
+          </a:xfrm>
+          <a:prstGeom prst="rect">
+            <a:avLst/>
+          </a:prstGeom>
+          <a:solidFill>
+            <a:srgbClr val="E56945"/>
+          </a:solidFill>
+          <a:ln>
+            <a:noFill/>
+          </a:ln>
+        </p:spPr>
+        <p:style>
+          <a:lnRef idx="1">
+            <a:schemeClr val="accent1"/>
+          </a:lnRef>
+          <a:fillRef idx="3">
+            <a:schemeClr val="accent1"/>
+          </a:fillRef>
+          <a:effectRef idx="2">
+            <a:schemeClr val="accent1"/>
+          </a:effectRef>
+          <a:fontRef idx="minor">
+            <a:schemeClr val="lt1"/>
+          </a:fontRef>
+        </p:style>
+        <p:txBody>
+          <a:bodyPr rtlCol="0" anchor="ctr"/>
+          <a:lstStyle/>
+          <a:p>
+            <a:pPr algn="ctr"/>
+          </a:p>
+        </p:txBody>
+      </p:sp>
+      <p:sp>
+        <p:nvSpPr>
+          <p:cNvPr id="26" name="TextBox 25"/>
+          <p:cNvSpPr txBox="1"/>
+          <p:nvPr/>
+        </p:nvSpPr>
+        <p:spPr>
+          <a:xfrm>
+            <a:off x="3383279" y="4325112"/>
+            <a:ext cx="2331720" cy="365760"/>
+          </a:xfrm>
+          <a:prstGeom prst="rect">
+            <a:avLst/>
+          </a:prstGeom>
+          <a:noFill/>
+        </p:spPr>
+        <p:txBody>
+          <a:bodyPr wrap="square" lIns="0" rIns="0" tIns="0" bIns="0">
+            <a:spAutoFit/>
+          </a:bodyPr>
+          <a:lstStyle/>
+          <a:p>
+            <a:pPr>
+              <a:defRPr sz="1100" b="1" i="0">
+                <a:solidFill>
+                  <a:srgbClr val="E56945"/>
+                </a:solidFill>
+                <a:latin typeface="Calibri"/>
+              </a:defRPr>
+            </a:pPr>
+            <a:r>
+              <a:t>Train ANN → convert weights</a:t>
+            </a:r>
+          </a:p>
+        </p:txBody>
+      </p:sp>
+      <p:sp>
+        <p:nvSpPr>
+          <p:cNvPr id="27" name="TextBox 26"/>
+          <p:cNvSpPr txBox="1"/>
+          <p:nvPr/>
+        </p:nvSpPr>
+        <p:spPr>
+          <a:xfrm>
+            <a:off x="3383279" y="4727448"/>
+            <a:ext cx="2331720" cy="960120"/>
+          </a:xfrm>
+          <a:prstGeom prst="rect">
+            <a:avLst/>
+          </a:prstGeom>
+          <a:noFill/>
+        </p:spPr>
+        <p:txBody>
+          <a:bodyPr wrap="square" lIns="0" rIns="0" tIns="0" bIns="0">
+            <a:spAutoFit/>
+          </a:bodyPr>
+          <a:lstStyle/>
+          <a:p>
+            <a:pPr>
+              <a:defRPr sz="1000" b="0" i="0">
+                <a:solidFill>
+                  <a:srgbClr val="1A1A1A"/>
+                </a:solidFill>
+                <a:latin typeface="Calibri"/>
+              </a:defRPr>
+            </a:pPr>
+            <a:r>
+              <a:t>Use pretrained ReLU CNN; map activations to spike rates.</a:t>
+            </a:r>
+            <a:br/>
+            <a:r>
+              <a:t>Needs T = 100–2000; cannot use event data.</a:t>
+            </a:r>
+          </a:p>
+        </p:txBody>
+      </p:sp>
+      <p:sp>
+        <p:nvSpPr>
+          <p:cNvPr id="28" name="TextBox 27"/>
+          <p:cNvSpPr txBox="1"/>
+          <p:nvPr/>
+        </p:nvSpPr>
+        <p:spPr>
+          <a:xfrm>
+            <a:off x="3383279" y="5577840"/>
+            <a:ext cx="2331720" cy="457200"/>
+          </a:xfrm>
+          <a:prstGeom prst="rect">
+            <a:avLst/>
+          </a:prstGeom>
+          <a:noFill/>
+        </p:spPr>
+        <p:txBody>
+          <a:bodyPr wrap="square" lIns="0" rIns="0" tIns="0" bIns="0">
+            <a:spAutoFit/>
+          </a:bodyPr>
+          <a:lstStyle/>
+          <a:p>
+            <a:pPr>
+              <a:defRPr sz="850" b="0" i="1">
+                <a:solidFill>
+                  <a:srgbClr val="7A7A7A"/>
+                </a:solidFill>
+                <a:latin typeface="Calibri"/>
+              </a:defRPr>
+            </a:pPr>
+            <a:r>
+              <a:t>Cao 2015 · Diehl 2015</a:t>
+            </a:r>
+            <a:br/>
+            <a:r>
+              <a:t>Rueckauer 2017</a:t>
+            </a:r>
+          </a:p>
+        </p:txBody>
+      </p:sp>
+      <p:sp>
+        <p:nvSpPr>
+          <p:cNvPr id="29" name="Rectangle 28"/>
+          <p:cNvSpPr/>
+          <p:nvPr/>
+        </p:nvSpPr>
+        <p:spPr>
+          <a:xfrm>
+            <a:off x="5989320" y="4160520"/>
+            <a:ext cx="2606040" cy="1920240"/>
+          </a:xfrm>
+          <a:prstGeom prst="rect">
+            <a:avLst/>
+          </a:prstGeom>
+          <a:solidFill>
+            <a:srgbClr val="FFFFFF"/>
+          </a:solidFill>
+          <a:ln w="19050">
+            <a:solidFill>
+              <a:srgbClr val="1D7E7E"/>
+            </a:solidFill>
+          </a:ln>
+        </p:spPr>
+        <p:style>
+          <a:lnRef idx="1">
+            <a:schemeClr val="accent1"/>
+          </a:lnRef>
+          <a:fillRef idx="3">
+            <a:schemeClr val="accent1"/>
+          </a:fillRef>
+          <a:effectRef idx="2">
+            <a:schemeClr val="accent1"/>
+          </a:effectRef>
+          <a:fontRef idx="minor">
+            <a:schemeClr val="lt1"/>
+          </a:fontRef>
+        </p:style>
+        <p:txBody>
+          <a:bodyPr rtlCol="0" anchor="ctr"/>
+          <a:lstStyle/>
+          <a:p>
+            <a:pPr algn="ctr"/>
+          </a:p>
+        </p:txBody>
+      </p:sp>
+      <p:sp>
+        <p:nvSpPr>
+          <p:cNvPr id="30" name="Rectangle 29"/>
+          <p:cNvSpPr/>
+          <p:nvPr/>
+        </p:nvSpPr>
+        <p:spPr>
+          <a:xfrm>
+            <a:off x="5989320" y="4160520"/>
+            <a:ext cx="2606040" cy="54864"/>
+          </a:xfrm>
+          <a:prstGeom prst="rect">
+            <a:avLst/>
+          </a:prstGeom>
+          <a:solidFill>
+            <a:srgbClr val="1D7E7E"/>
+          </a:solidFill>
+          <a:ln>
+            <a:noFill/>
+          </a:ln>
+        </p:spPr>
+        <p:style>
+          <a:lnRef idx="1">
+            <a:schemeClr val="accent1"/>
+          </a:lnRef>
+          <a:fillRef idx="3">
+            <a:schemeClr val="accent1"/>
+          </a:fillRef>
+          <a:effectRef idx="2">
+            <a:schemeClr val="accent1"/>
+          </a:effectRef>
+          <a:fontRef idx="minor">
+            <a:schemeClr val="lt1"/>
+          </a:fontRef>
+        </p:style>
+        <p:txBody>
+          <a:bodyPr rtlCol="0" anchor="ctr"/>
+          <a:lstStyle/>
+          <a:p>
+            <a:pPr algn="ctr"/>
+          </a:p>
+        </p:txBody>
+      </p:sp>
+      <p:sp>
+        <p:nvSpPr>
+          <p:cNvPr id="31" name="TextBox 30"/>
+          <p:cNvSpPr txBox="1"/>
+          <p:nvPr/>
+        </p:nvSpPr>
+        <p:spPr>
+          <a:xfrm>
+            <a:off x="6126480" y="4325112"/>
+            <a:ext cx="2331720" cy="365760"/>
+          </a:xfrm>
+          <a:prstGeom prst="rect">
+            <a:avLst/>
+          </a:prstGeom>
+          <a:noFill/>
+        </p:spPr>
+        <p:txBody>
+          <a:bodyPr wrap="square" lIns="0" rIns="0" tIns="0" bIns="0">
+            <a:spAutoFit/>
+          </a:bodyPr>
+          <a:lstStyle/>
+          <a:p>
+            <a:pPr>
+              <a:defRPr sz="1100" b="1" i="0">
+                <a:solidFill>
+                  <a:srgbClr val="1D7E7E"/>
+                </a:solidFill>
+                <a:latin typeface="Calibri"/>
+              </a:defRPr>
+            </a:pPr>
+            <a:r>
+              <a:t>Surrogate gradient (STBP / BPTT)</a:t>
+            </a:r>
+          </a:p>
+        </p:txBody>
+      </p:sp>
+      <p:sp>
+        <p:nvSpPr>
+          <p:cNvPr id="32" name="TextBox 31"/>
+          <p:cNvSpPr txBox="1"/>
+          <p:nvPr/>
+        </p:nvSpPr>
+        <p:spPr>
+          <a:xfrm>
+            <a:off x="6126480" y="4727448"/>
+            <a:ext cx="2331720" cy="960120"/>
+          </a:xfrm>
+          <a:prstGeom prst="rect">
+            <a:avLst/>
+          </a:prstGeom>
+          <a:noFill/>
+        </p:spPr>
+        <p:txBody>
+          <a:bodyPr wrap="square" lIns="0" rIns="0" tIns="0" bIns="0">
+            <a:spAutoFit/>
+          </a:bodyPr>
+          <a:lstStyle/>
+          <a:p>
+            <a:pPr>
+              <a:defRPr sz="1000" b="0" i="0">
+                <a:solidFill>
+                  <a:srgbClr val="1A1A1A"/>
+                </a:solidFill>
+                <a:latin typeface="Calibri"/>
+              </a:defRPr>
+            </a:pPr>
+            <a:r>
+              <a:t>Replace Heaviside backward with a smooth function.</a:t>
+            </a:r>
+            <a:br/>
+            <a:r>
+              <a:t>Few timesteps; works on event data; modern dominant.</a:t>
+            </a:r>
+          </a:p>
+        </p:txBody>
+      </p:sp>
+      <p:sp>
+        <p:nvSpPr>
+          <p:cNvPr id="33" name="TextBox 32"/>
+          <p:cNvSpPr txBox="1"/>
+          <p:nvPr/>
+        </p:nvSpPr>
+        <p:spPr>
+          <a:xfrm>
+            <a:off x="6126480" y="5577840"/>
+            <a:ext cx="2331720" cy="457200"/>
+          </a:xfrm>
+          <a:prstGeom prst="rect">
+            <a:avLst/>
+          </a:prstGeom>
+          <a:noFill/>
+        </p:spPr>
+        <p:txBody>
+          <a:bodyPr wrap="square" lIns="0" rIns="0" tIns="0" bIns="0">
+            <a:spAutoFit/>
+          </a:bodyPr>
+          <a:lstStyle/>
+          <a:p>
+            <a:pPr>
+              <a:defRPr sz="850" b="0" i="1">
+                <a:solidFill>
+                  <a:srgbClr val="7A7A7A"/>
+                </a:solidFill>
+                <a:latin typeface="Calibri"/>
+              </a:defRPr>
+            </a:pPr>
+            <a:r>
+              <a:t>Bohte 2002 · Wu 2018</a:t>
+            </a:r>
+            <a:br/>
+            <a:r>
+              <a:t>Neftci 2019</a:t>
+            </a:r>
+          </a:p>
+        </p:txBody>
+      </p:sp>
+      <p:sp>
+        <p:nvSpPr>
+          <p:cNvPr id="34" name="Rectangle 33"/>
+          <p:cNvSpPr/>
+          <p:nvPr/>
+        </p:nvSpPr>
+        <p:spPr>
+          <a:xfrm>
+            <a:off x="8732520" y="4160520"/>
+            <a:ext cx="2606040" cy="1920240"/>
+          </a:xfrm>
+          <a:prstGeom prst="rect">
+            <a:avLst/>
+          </a:prstGeom>
+          <a:solidFill>
+            <a:srgbClr val="FFFFFF"/>
+          </a:solidFill>
+          <a:ln w="19050">
+            <a:solidFill>
+              <a:srgbClr val="0F2540"/>
+            </a:solidFill>
+          </a:ln>
+        </p:spPr>
+        <p:style>
+          <a:lnRef idx="1">
+            <a:schemeClr val="accent1"/>
+          </a:lnRef>
+          <a:fillRef idx="3">
+            <a:schemeClr val="accent1"/>
+          </a:fillRef>
+          <a:effectRef idx="2">
+            <a:schemeClr val="accent1"/>
+          </a:effectRef>
+          <a:fontRef idx="minor">
+            <a:schemeClr val="lt1"/>
+          </a:fontRef>
+        </p:style>
+        <p:txBody>
+          <a:bodyPr rtlCol="0" anchor="ctr"/>
+          <a:lstStyle/>
+          <a:p>
+            <a:pPr algn="ctr"/>
+          </a:p>
+        </p:txBody>
+      </p:sp>
+      <p:sp>
+        <p:nvSpPr>
+          <p:cNvPr id="35" name="Rectangle 34"/>
+          <p:cNvSpPr/>
+          <p:nvPr/>
+        </p:nvSpPr>
+        <p:spPr>
+          <a:xfrm>
+            <a:off x="8732520" y="4160520"/>
+            <a:ext cx="2606040" cy="54864"/>
+          </a:xfrm>
+          <a:prstGeom prst="rect">
+            <a:avLst/>
+          </a:prstGeom>
+          <a:solidFill>
+            <a:srgbClr val="0F2540"/>
+          </a:solidFill>
+          <a:ln>
+            <a:noFill/>
+          </a:ln>
+        </p:spPr>
+        <p:style>
+          <a:lnRef idx="1">
+            <a:schemeClr val="accent1"/>
+          </a:lnRef>
+          <a:fillRef idx="3">
+            <a:schemeClr val="accent1"/>
+          </a:fillRef>
+          <a:effectRef idx="2">
+            <a:schemeClr val="accent1"/>
+          </a:effectRef>
+          <a:fontRef idx="minor">
+            <a:schemeClr val="lt1"/>
+          </a:fontRef>
+        </p:style>
+        <p:txBody>
+          <a:bodyPr rtlCol="0" anchor="ctr"/>
+          <a:lstStyle/>
+          <a:p>
+            <a:pPr algn="ctr"/>
+          </a:p>
+        </p:txBody>
+      </p:sp>
+      <p:sp>
+        <p:nvSpPr>
+          <p:cNvPr id="36" name="TextBox 35"/>
+          <p:cNvSpPr txBox="1"/>
+          <p:nvPr/>
+        </p:nvSpPr>
+        <p:spPr>
+          <a:xfrm>
+            <a:off x="8869680" y="4325112"/>
+            <a:ext cx="2331720" cy="365760"/>
+          </a:xfrm>
+          <a:prstGeom prst="rect">
+            <a:avLst/>
+          </a:prstGeom>
+          <a:noFill/>
+        </p:spPr>
+        <p:txBody>
+          <a:bodyPr wrap="square" lIns="0" rIns="0" tIns="0" bIns="0">
+            <a:spAutoFit/>
+          </a:bodyPr>
+          <a:lstStyle/>
+          <a:p>
+            <a:pPr>
+              <a:defRPr sz="1100" b="1" i="0">
+                <a:solidFill>
+                  <a:srgbClr val="0F2540"/>
+                </a:solidFill>
+                <a:latin typeface="Calibri"/>
+              </a:defRPr>
+            </a:pPr>
+            <a:r>
+              <a:t>Learnable LIF parameters</a:t>
+            </a:r>
+          </a:p>
+        </p:txBody>
+      </p:sp>
+      <p:sp>
+        <p:nvSpPr>
+          <p:cNvPr id="37" name="TextBox 36"/>
+          <p:cNvSpPr txBox="1"/>
+          <p:nvPr/>
+        </p:nvSpPr>
+        <p:spPr>
+          <a:xfrm>
+            <a:off x="8869680" y="4727448"/>
+            <a:ext cx="2331720" cy="960120"/>
+          </a:xfrm>
+          <a:prstGeom prst="rect">
+            <a:avLst/>
+          </a:prstGeom>
+          <a:noFill/>
+        </p:spPr>
+        <p:txBody>
+          <a:bodyPr wrap="square" lIns="0" rIns="0" tIns="0" bIns="0">
+            <a:spAutoFit/>
+          </a:bodyPr>
+          <a:lstStyle/>
+          <a:p>
+            <a:pPr>
+              <a:defRPr sz="1000" b="0" i="0">
+                <a:solidFill>
+                  <a:srgbClr val="1A1A1A"/>
+                </a:solidFill>
+                <a:latin typeface="Calibri"/>
+              </a:defRPr>
+            </a:pPr>
+            <a:r>
+              <a:t>Train V_thr, τ end-to-end → adaptive neurons.</a:t>
+            </a:r>
+            <a:br/>
+            <a:r>
+              <a:t>This thesis: stabilize that training pathway.</a:t>
+            </a:r>
+          </a:p>
+        </p:txBody>
+      </p:sp>
+      <p:sp>
+        <p:nvSpPr>
+          <p:cNvPr id="38" name="TextBox 37"/>
+          <p:cNvSpPr txBox="1"/>
+          <p:nvPr/>
+        </p:nvSpPr>
+        <p:spPr>
+          <a:xfrm>
+            <a:off x="8869680" y="5577840"/>
+            <a:ext cx="2331720" cy="457200"/>
+          </a:xfrm>
+          <a:prstGeom prst="rect">
+            <a:avLst/>
+          </a:prstGeom>
+          <a:noFill/>
+        </p:spPr>
+        <p:txBody>
+          <a:bodyPr wrap="square" lIns="0" rIns="0" tIns="0" bIns="0">
+            <a:spAutoFit/>
+          </a:bodyPr>
+          <a:lstStyle/>
+          <a:p>
+            <a:pPr>
+              <a:defRPr sz="850" b="0" i="1">
+                <a:solidFill>
+                  <a:srgbClr val="7A7A7A"/>
+                </a:solidFill>
+                <a:latin typeface="Calibri"/>
+              </a:defRPr>
+            </a:pPr>
+            <a:r>
+              <a:t>Fang 2021 · Wang 2022</a:t>
+            </a:r>
+            <a:br/>
+            <a:r>
+              <a:t>Rathi 2023 · ours</a:t>
+            </a:r>
+          </a:p>
+        </p:txBody>
+      </p:sp>
+      <p:sp>
+        <p:nvSpPr>
+          <p:cNvPr id="39" name="TextBox 38"/>
+          <p:cNvSpPr txBox="1"/>
+          <p:nvPr/>
+        </p:nvSpPr>
+        <p:spPr>
+          <a:xfrm>
+            <a:off x="457200" y="6492240"/>
+            <a:ext cx="5486400" cy="274320"/>
+          </a:xfrm>
+          <a:prstGeom prst="rect">
+            <a:avLst/>
+          </a:prstGeom>
+          <a:noFill/>
+        </p:spPr>
+        <p:txBody>
+          <a:bodyPr wrap="square" lIns="0" rIns="0" tIns="0" bIns="0">
+            <a:spAutoFit/>
+          </a:bodyPr>
+          <a:lstStyle/>
+          <a:p>
+            <a:pPr>
+              <a:defRPr sz="1000" b="0" i="0">
+                <a:solidFill>
+                  <a:srgbClr val="7A7A7A"/>
+                </a:solidFill>
+                <a:latin typeface="Calibri"/>
+              </a:defRPr>
+            </a:pPr>
+            <a:r>
+              <a:t>Appendix — Hyunho Kook</a:t>
+            </a:r>
+          </a:p>
+        </p:txBody>
+      </p:sp>
+      <p:sp>
+        <p:nvSpPr>
+          <p:cNvPr id="40" name="TextBox 39"/>
+          <p:cNvSpPr txBox="1"/>
+          <p:nvPr/>
+        </p:nvSpPr>
+        <p:spPr>
+          <a:xfrm>
+            <a:off x="6400800" y="6492240"/>
+            <a:ext cx="5303520" cy="274320"/>
+          </a:xfrm>
+          <a:prstGeom prst="rect">
+            <a:avLst/>
+          </a:prstGeom>
+          <a:noFill/>
+        </p:spPr>
+        <p:txBody>
+          <a:bodyPr wrap="square" lIns="0" rIns="0" tIns="0" bIns="0">
+            <a:spAutoFit/>
+          </a:bodyPr>
+          <a:lstStyle/>
+          <a:p>
+            <a:pPr algn="r">
+              <a:defRPr sz="1000" b="0" i="0">
+                <a:solidFill>
+                  <a:srgbClr val="7A7A7A"/>
+                </a:solidFill>
+                <a:latin typeface="Calibri"/>
+              </a:defRPr>
+            </a:pPr>
+            <a:r>
+              <a:t>A6 / A7</a:t>
+            </a:r>
+          </a:p>
+        </p:txBody>
+      </p:sp>
+    </p:spTree>
+  </p:cSld>
+  <p:clrMapOvr>
+    <a:masterClrMapping/>
+  </p:clrMapOvr>
+</p:sld>
+</file>
+
+<file path=ppt/slides/slide28.xml><?xml version="1.0" encoding="utf-8"?>
+<p:sld xmlns:a="http://schemas.openxmlformats.org/drawingml/2006/main" xmlns:p="http://schemas.openxmlformats.org/presentationml/2006/main" xmlns:r="http://schemas.openxmlformats.org/officeDocument/2006/relationships">
+  <p:cSld>
+    <p:spTree>
+      <p:nvGrpSpPr>
+        <p:cNvPr id="1" name=""/>
+        <p:cNvGrpSpPr/>
+        <p:nvPr/>
+      </p:nvGrpSpPr>
+      <p:grpSpPr/>
+      <p:sp>
+        <p:nvSpPr>
+          <p:cNvPr id="2" name="Rectangle 1"/>
+          <p:cNvSpPr/>
+          <p:nvPr/>
+        </p:nvSpPr>
+        <p:spPr>
+          <a:xfrm>
+            <a:off x="457200" y="566928"/>
+            <a:ext cx="54864" cy="201168"/>
+          </a:xfrm>
+          <a:prstGeom prst="rect">
+            <a:avLst/>
+          </a:prstGeom>
+          <a:solidFill>
+            <a:srgbClr val="E56945"/>
+          </a:solidFill>
+          <a:ln>
+            <a:noFill/>
+          </a:ln>
+        </p:spPr>
+        <p:style>
+          <a:lnRef idx="1">
+            <a:schemeClr val="accent1"/>
+          </a:lnRef>
+          <a:fillRef idx="3">
+            <a:schemeClr val="accent1"/>
+          </a:fillRef>
+          <a:effectRef idx="2">
+            <a:schemeClr val="accent1"/>
+          </a:effectRef>
+          <a:fontRef idx="minor">
+            <a:schemeClr val="lt1"/>
+          </a:fontRef>
+        </p:style>
+        <p:txBody>
+          <a:bodyPr rtlCol="0" anchor="ctr"/>
+          <a:lstStyle/>
+          <a:p>
+            <a:pPr algn="ctr"/>
+          </a:p>
+        </p:txBody>
+      </p:sp>
+      <p:sp>
+        <p:nvSpPr>
+          <p:cNvPr id="3" name="TextBox 2"/>
+          <p:cNvSpPr txBox="1"/>
+          <p:nvPr/>
+        </p:nvSpPr>
+        <p:spPr>
+          <a:xfrm>
+            <a:off x="594360" y="548640"/>
+            <a:ext cx="5486400" cy="274320"/>
+          </a:xfrm>
+          <a:prstGeom prst="rect">
+            <a:avLst/>
+          </a:prstGeom>
+          <a:noFill/>
+        </p:spPr>
+        <p:txBody>
+          <a:bodyPr wrap="square" lIns="0" rIns="0" tIns="0" bIns="0">
+            <a:spAutoFit/>
+          </a:bodyPr>
+          <a:lstStyle/>
+          <a:p>
+            <a:pPr>
+              <a:defRPr sz="1000" b="1" i="0">
+                <a:solidFill>
+                  <a:srgbClr val="E56945"/>
+                </a:solidFill>
+                <a:latin typeface="Calibri"/>
+              </a:defRPr>
+            </a:pPr>
+            <a:r>
+              <a:rPr spc="400"/>
+              <a:t>APPENDIX · A7</a:t>
+            </a:r>
+          </a:p>
+        </p:txBody>
+      </p:sp>
+      <p:sp>
+        <p:nvSpPr>
+          <p:cNvPr id="4" name="TextBox 3"/>
+          <p:cNvSpPr txBox="1"/>
+          <p:nvPr/>
+        </p:nvSpPr>
+        <p:spPr>
+          <a:xfrm>
+            <a:off x="457200" y="777240"/>
+            <a:ext cx="11247120" cy="777240"/>
+          </a:xfrm>
+          <a:prstGeom prst="rect">
+            <a:avLst/>
+          </a:prstGeom>
+          <a:noFill/>
+        </p:spPr>
+        <p:txBody>
+          <a:bodyPr wrap="square" lIns="0" rIns="0" tIns="0" bIns="0">
+            <a:spAutoFit/>
+          </a:bodyPr>
+          <a:lstStyle/>
+          <a:p>
+            <a:pPr>
+              <a:defRPr sz="3000" b="1" i="0">
+                <a:solidFill>
+                  <a:srgbClr val="0F2540"/>
+                </a:solidFill>
+                <a:latin typeface="Cambria"/>
+              </a:defRPr>
+            </a:pPr>
+            <a:r>
+              <a:t>Where Prior Work Falls Short</a:t>
+            </a:r>
+          </a:p>
+        </p:txBody>
+      </p:sp>
+      <p:sp>
+        <p:nvSpPr>
+          <p:cNvPr id="5" name="TextBox 4"/>
+          <p:cNvSpPr txBox="1"/>
+          <p:nvPr/>
+        </p:nvSpPr>
+        <p:spPr>
+          <a:xfrm>
+            <a:off x="457200" y="1600200"/>
+            <a:ext cx="11247120" cy="365760"/>
+          </a:xfrm>
+          <a:prstGeom prst="rect">
+            <a:avLst/>
+          </a:prstGeom>
+          <a:noFill/>
+        </p:spPr>
+        <p:txBody>
+          <a:bodyPr wrap="square" lIns="0" rIns="0" tIns="0" bIns="0">
+            <a:spAutoFit/>
+          </a:bodyPr>
+          <a:lstStyle/>
+          <a:p>
+            <a:pPr>
+              <a:defRPr sz="1400" b="0" i="1">
+                <a:solidFill>
+                  <a:srgbClr val="7A7A7A"/>
+                </a:solidFill>
+                <a:latin typeface="Calibri"/>
+              </a:defRPr>
+            </a:pPr>
+            <a:r>
+              <a:t>TCS methods miss the membrane potential; threshold-learning methods don't diagnose the gradient.</a:t>
+            </a:r>
+          </a:p>
+        </p:txBody>
+      </p:sp>
+      <p:sp>
+        <p:nvSpPr>
+          <p:cNvPr id="6" name="TextBox 5"/>
+          <p:cNvSpPr txBox="1"/>
+          <p:nvPr/>
+        </p:nvSpPr>
+        <p:spPr>
+          <a:xfrm>
+            <a:off x="457200" y="2194560"/>
+            <a:ext cx="5486400" cy="365760"/>
+          </a:xfrm>
+          <a:prstGeom prst="rect">
+            <a:avLst/>
+          </a:prstGeom>
+          <a:noFill/>
+        </p:spPr>
+        <p:txBody>
+          <a:bodyPr wrap="square" lIns="0" rIns="0" tIns="0" bIns="0">
+            <a:spAutoFit/>
+          </a:bodyPr>
+          <a:lstStyle/>
+          <a:p>
+            <a:pPr>
+              <a:defRPr sz="1400" b="1" i="0">
+                <a:solidFill>
+                  <a:srgbClr val="0F2540"/>
+                </a:solidFill>
+                <a:latin typeface="Calibri"/>
+              </a:defRPr>
+            </a:pPr>
+            <a:r>
+              <a:t>TCS / Normalization in SNNs</a:t>
+            </a:r>
+          </a:p>
+        </p:txBody>
+      </p:sp>
+      <p:graphicFrame>
+        <p:nvGraphicFramePr>
+          <p:cNvPr id="7" name="Table 6"/>
+          <p:cNvGraphicFramePr>
+            <a:graphicFrameLocks noGrp="1"/>
+          </p:cNvGraphicFramePr>
+          <p:nvPr/>
+        </p:nvGraphicFramePr>
+        <p:xfrm>
+          <a:off x="457200" y="2606040"/>
+          <a:ext cx="5486399" cy="2724912"/>
+        </p:xfrm>
+        <a:graphic>
+          <a:graphicData uri="http://schemas.openxmlformats.org/drawingml/2006/table">
+            <a:tbl>
+              <a:tblPr firstRow="1" bandRow="1">
+                <a:tableStyleId>{5C22544A-7EE6-4342-B048-85BDC9FD1C3A}</a:tableStyleId>
+              </a:tblPr>
+              <a:tblGrid>
+                <a:gridCol w="1280160"/>
+                <a:gridCol w="2331720"/>
+                <a:gridCol w="1874519"/>
+              </a:tblGrid>
+              <a:tr h="457200">
+                <a:tc>
+                  <a:txBody>
+                    <a:bodyPr anchor="ctr"/>
+                    <a:lstStyle/>
+                    <a:p>
+                      <a:pPr algn="l">
+                        <a:defRPr sz="1050" b="1">
+                          <a:solidFill>
+                            <a:srgbClr val="FFFFFF"/>
+                          </a:solidFill>
+                          <a:latin typeface="Calibri"/>
+                        </a:defRPr>
+                      </a:pPr>
+                      <a:r>
+                        <a:t>Method</a:t>
+                      </a:r>
+                    </a:p>
+                  </a:txBody>
+                  <a:tcPr marL="109728" marR="91440">
+                    <a:solidFill>
+                      <a:srgbClr val="0F2540"/>
+                    </a:solidFill>
+                  </a:tcPr>
+                </a:tc>
+                <a:tc>
+                  <a:txBody>
+                    <a:bodyPr anchor="ctr"/>
+                    <a:lstStyle/>
+                    <a:p>
+                      <a:pPr algn="l">
+                        <a:defRPr sz="1050" b="1">
+                          <a:solidFill>
+                            <a:srgbClr val="FFFFFF"/>
+                          </a:solidFill>
+                          <a:latin typeface="Calibri"/>
+                        </a:defRPr>
+                      </a:pPr>
+                      <a:r>
+                        <a:t>What it does</a:t>
+                      </a:r>
+                    </a:p>
+                  </a:txBody>
+                  <a:tcPr marL="109728" marR="91440">
+                    <a:solidFill>
+                      <a:srgbClr val="0F2540"/>
+                    </a:solidFill>
+                  </a:tcPr>
+                </a:tc>
+                <a:tc>
+                  <a:txBody>
+                    <a:bodyPr anchor="ctr"/>
+                    <a:lstStyle/>
+                    <a:p>
+                      <a:pPr algn="l">
+                        <a:defRPr sz="1050" b="1">
+                          <a:solidFill>
+                            <a:srgbClr val="FFFFFF"/>
+                          </a:solidFill>
+                          <a:latin typeface="Calibri"/>
+                        </a:defRPr>
+                      </a:pPr>
+                      <a:r>
+                        <a:t>What it misses</a:t>
+                      </a:r>
+                    </a:p>
+                  </a:txBody>
+                  <a:tcPr marL="109728" marR="91440">
+                    <a:solidFill>
+                      <a:srgbClr val="0F2540"/>
+                    </a:solidFill>
+                  </a:tcPr>
+                </a:tc>
+              </a:tr>
+              <a:tr h="566928">
+                <a:tc>
+                  <a:txBody>
+                    <a:bodyPr anchor="ctr"/>
+                    <a:lstStyle/>
+                    <a:p>
+                      <a:pPr algn="l">
+                        <a:defRPr sz="1000" b="1">
+                          <a:solidFill>
+                            <a:srgbClr val="0F2540"/>
+                          </a:solidFill>
+                          <a:latin typeface="Calibri"/>
+                        </a:defRPr>
+                      </a:pPr>
+                      <a:r>
+                        <a:t>BNTT '20</a:t>
+                      </a:r>
+                    </a:p>
+                  </a:txBody>
+                  <a:tcPr marL="109728" marR="91440">
+                    <a:solidFill>
+                      <a:srgbClr val="FFFFFF"/>
+                    </a:solidFill>
+                  </a:tcPr>
+                </a:tc>
+                <a:tc>
+                  <a:txBody>
+                    <a:bodyPr anchor="ctr"/>
+                    <a:lstStyle/>
+                    <a:p>
+                      <a:pPr algn="l">
+                        <a:defRPr sz="950">
+                          <a:solidFill>
+                            <a:srgbClr val="1A1A1A"/>
+                          </a:solidFill>
+                          <a:latin typeface="Calibri"/>
+                        </a:defRPr>
+                      </a:pPr>
+                      <a:r>
+                        <a:t>Per-timestep BN params</a:t>
+                      </a:r>
+                    </a:p>
+                  </a:txBody>
+                  <a:tcPr marL="109728" marR="91440">
+                    <a:solidFill>
+                      <a:srgbClr val="FFFFFF"/>
+                    </a:solidFill>
+                  </a:tcPr>
+                </a:tc>
+                <a:tc>
+                  <a:txBody>
+                    <a:bodyPr anchor="ctr"/>
+                    <a:lstStyle/>
+                    <a:p>
+                      <a:pPr algn="l">
+                        <a:defRPr sz="950" i="1">
+                          <a:solidFill>
+                            <a:srgbClr val="E56945"/>
+                          </a:solidFill>
+                          <a:latin typeface="Calibri"/>
+                        </a:defRPr>
+                      </a:pPr>
+                      <a:r>
+                        <a:t>Output BN only</a:t>
+                      </a:r>
+                    </a:p>
+                  </a:txBody>
+                  <a:tcPr marL="109728" marR="91440">
+                    <a:solidFill>
+                      <a:srgbClr val="FFFFFF"/>
+                    </a:solidFill>
+                  </a:tcPr>
+                </a:tc>
+              </a:tr>
+              <a:tr h="566928">
+                <a:tc>
+                  <a:txBody>
+                    <a:bodyPr anchor="ctr"/>
+                    <a:lstStyle/>
+                    <a:p>
+                      <a:pPr algn="l">
+                        <a:defRPr sz="1000" b="1">
+                          <a:solidFill>
+                            <a:srgbClr val="0F2540"/>
+                          </a:solidFill>
+                          <a:latin typeface="Calibri"/>
+                        </a:defRPr>
+                      </a:pPr>
+                      <a:r>
+                        <a:t>tdBN '20</a:t>
+                      </a:r>
+                    </a:p>
+                  </a:txBody>
+                  <a:tcPr marL="109728" marR="91440">
+                    <a:solidFill>
+                      <a:srgbClr val="F8F7F2"/>
+                    </a:solidFill>
+                  </a:tcPr>
+                </a:tc>
+                <a:tc>
+                  <a:txBody>
+                    <a:bodyPr anchor="ctr"/>
+                    <a:lstStyle/>
+                    <a:p>
+                      <a:pPr algn="l">
+                        <a:defRPr sz="950">
+                          <a:solidFill>
+                            <a:srgbClr val="1A1A1A"/>
+                          </a:solidFill>
+                          <a:latin typeface="Calibri"/>
+                        </a:defRPr>
+                      </a:pPr>
+                      <a:r>
+                        <a:t>Threshold-dependent BN</a:t>
+                      </a:r>
+                    </a:p>
+                  </a:txBody>
+                  <a:tcPr marL="109728" marR="91440">
+                    <a:solidFill>
+                      <a:srgbClr val="F8F7F2"/>
+                    </a:solidFill>
+                  </a:tcPr>
+                </a:tc>
+                <a:tc>
+                  <a:txBody>
+                    <a:bodyPr anchor="ctr"/>
+                    <a:lstStyle/>
+                    <a:p>
+                      <a:pPr algn="l">
+                        <a:defRPr sz="950" i="1">
+                          <a:solidFill>
+                            <a:srgbClr val="E56945"/>
+                          </a:solidFill>
+                          <a:latin typeface="Calibri"/>
+                        </a:defRPr>
+                      </a:pPr>
+                      <a:r>
+                        <a:t>Output BN only</a:t>
+                      </a:r>
+                    </a:p>
+                  </a:txBody>
+                  <a:tcPr marL="109728" marR="91440">
+                    <a:solidFill>
+                      <a:srgbClr val="F8F7F2"/>
+                    </a:solidFill>
+                  </a:tcPr>
+                </a:tc>
+              </a:tr>
+              <a:tr h="566928">
+                <a:tc>
+                  <a:txBody>
+                    <a:bodyPr anchor="ctr"/>
+                    <a:lstStyle/>
+                    <a:p>
+                      <a:pPr algn="l">
+                        <a:defRPr sz="1000" b="1">
+                          <a:solidFill>
+                            <a:srgbClr val="0F2540"/>
+                          </a:solidFill>
+                          <a:latin typeface="Calibri"/>
+                        </a:defRPr>
+                      </a:pPr>
+                      <a:r>
+                        <a:t>TEBN '22</a:t>
+                      </a:r>
+                    </a:p>
+                  </a:txBody>
+                  <a:tcPr marL="109728" marR="91440">
+                    <a:solidFill>
+                      <a:srgbClr val="FFFFFF"/>
+                    </a:solidFill>
+                  </a:tcPr>
+                </a:tc>
+                <a:tc>
+                  <a:txBody>
+                    <a:bodyPr anchor="ctr"/>
+                    <a:lstStyle/>
+                    <a:p>
+                      <a:pPr algn="l">
+                        <a:defRPr sz="950">
+                          <a:solidFill>
+                            <a:srgbClr val="1A1A1A"/>
+                          </a:solidFill>
+                          <a:latin typeface="Calibri"/>
+                        </a:defRPr>
+                      </a:pPr>
+                      <a:r>
+                        <a:t>Timestep-specific affine</a:t>
+                      </a:r>
+                    </a:p>
+                  </a:txBody>
+                  <a:tcPr marL="109728" marR="91440">
+                    <a:solidFill>
+                      <a:srgbClr val="FFFFFF"/>
+                    </a:solidFill>
+                  </a:tcPr>
+                </a:tc>
+                <a:tc>
+                  <a:txBody>
+                    <a:bodyPr anchor="ctr"/>
+                    <a:lstStyle/>
+                    <a:p>
+                      <a:pPr algn="l">
+                        <a:defRPr sz="950" i="1">
+                          <a:solidFill>
+                            <a:srgbClr val="E56945"/>
+                          </a:solidFill>
+                          <a:latin typeface="Calibri"/>
+                        </a:defRPr>
+                      </a:pPr>
+                      <a:r>
+                        <a:t>Doesn't fix membrane drift</a:t>
+                      </a:r>
+                    </a:p>
+                  </a:txBody>
+                  <a:tcPr marL="109728" marR="91440">
+                    <a:solidFill>
+                      <a:srgbClr val="FFFFFF"/>
+                    </a:solidFill>
+                  </a:tcPr>
+                </a:tc>
+              </a:tr>
+              <a:tr h="566928">
+                <a:tc>
+                  <a:txBody>
+                    <a:bodyPr anchor="ctr"/>
+                    <a:lstStyle/>
+                    <a:p>
+                      <a:pPr algn="l">
+                        <a:defRPr sz="1000" b="1">
+                          <a:solidFill>
+                            <a:srgbClr val="0F2540"/>
+                          </a:solidFill>
+                          <a:latin typeface="Calibri"/>
+                        </a:defRPr>
+                      </a:pPr>
+                      <a:r>
+                        <a:t>TAB '24</a:t>
+                      </a:r>
+                    </a:p>
+                  </a:txBody>
+                  <a:tcPr marL="109728" marR="91440">
+                    <a:solidFill>
+                      <a:srgbClr val="F8F7F2"/>
+                    </a:solidFill>
+                  </a:tcPr>
+                </a:tc>
+                <a:tc>
+                  <a:txBody>
+                    <a:bodyPr anchor="ctr"/>
+                    <a:lstStyle/>
+                    <a:p>
+                      <a:pPr algn="l">
+                        <a:defRPr sz="950">
+                          <a:solidFill>
+                            <a:srgbClr val="1A1A1A"/>
+                          </a:solidFill>
+                          <a:latin typeface="Calibri"/>
+                        </a:defRPr>
+                      </a:pPr>
+                      <a:r>
+                        <a:t>Temporal-adaptive normalize</a:t>
+                      </a:r>
+                    </a:p>
+                  </a:txBody>
+                  <a:tcPr marL="109728" marR="91440">
+                    <a:solidFill>
+                      <a:srgbClr val="F8F7F2"/>
+                    </a:solidFill>
+                  </a:tcPr>
+                </a:tc>
+                <a:tc>
+                  <a:txBody>
+                    <a:bodyPr anchor="ctr"/>
+                    <a:lstStyle/>
+                    <a:p>
+                      <a:pPr algn="l">
+                        <a:defRPr sz="950" i="1">
+                          <a:solidFill>
+                            <a:srgbClr val="E56945"/>
+                          </a:solidFill>
+                          <a:latin typeface="Calibri"/>
+                        </a:defRPr>
+                      </a:pPr>
+                      <a:r>
+                        <a:t>Membrane TCS persists</a:t>
+                      </a:r>
+                    </a:p>
+                  </a:txBody>
+                  <a:tcPr marL="109728" marR="91440">
+                    <a:solidFill>
+                      <a:srgbClr val="F8F7F2"/>
+                    </a:solidFill>
+                  </a:tcPr>
+                </a:tc>
+              </a:tr>
+            </a:tbl>
+          </a:graphicData>
+        </a:graphic>
+      </p:graphicFrame>
+      <p:sp>
+        <p:nvSpPr>
+          <p:cNvPr id="8" name="Rectangle 7"/>
+          <p:cNvSpPr/>
+          <p:nvPr/>
+        </p:nvSpPr>
+        <p:spPr>
+          <a:xfrm>
+            <a:off x="457200" y="5486400"/>
+            <a:ext cx="54864" cy="777240"/>
+          </a:xfrm>
+          <a:prstGeom prst="rect">
+            <a:avLst/>
+          </a:prstGeom>
+          <a:solidFill>
+            <a:srgbClr val="1D7E7E"/>
+          </a:solidFill>
+          <a:ln>
+            <a:noFill/>
+          </a:ln>
+        </p:spPr>
+        <p:style>
+          <a:lnRef idx="1">
+            <a:schemeClr val="accent1"/>
+          </a:lnRef>
+          <a:fillRef idx="3">
+            <a:schemeClr val="accent1"/>
+          </a:fillRef>
+          <a:effectRef idx="2">
+            <a:schemeClr val="accent1"/>
+          </a:effectRef>
+          <a:fontRef idx="minor">
+            <a:schemeClr val="lt1"/>
+          </a:fontRef>
+        </p:style>
+        <p:txBody>
+          <a:bodyPr rtlCol="0" anchor="ctr"/>
+          <a:lstStyle/>
+          <a:p>
+            <a:pPr algn="ctr"/>
+          </a:p>
+        </p:txBody>
+      </p:sp>
+      <p:sp>
+        <p:nvSpPr>
+          <p:cNvPr id="9" name="Rectangle 8"/>
+          <p:cNvSpPr/>
+          <p:nvPr/>
+        </p:nvSpPr>
+        <p:spPr>
+          <a:xfrm>
+            <a:off x="512064" y="5486400"/>
+            <a:ext cx="5431536" cy="777240"/>
+          </a:xfrm>
+          <a:prstGeom prst="rect">
+            <a:avLst/>
+          </a:prstGeom>
+          <a:solidFill>
+            <a:srgbClr val="E5F5F0"/>
+          </a:solidFill>
+          <a:ln>
+            <a:noFill/>
+          </a:ln>
+        </p:spPr>
+        <p:style>
+          <a:lnRef idx="1">
+            <a:schemeClr val="accent1"/>
+          </a:lnRef>
+          <a:fillRef idx="3">
+            <a:schemeClr val="accent1"/>
+          </a:fillRef>
+          <a:effectRef idx="2">
+            <a:schemeClr val="accent1"/>
+          </a:effectRef>
+          <a:fontRef idx="minor">
+            <a:schemeClr val="lt1"/>
+          </a:fontRef>
+        </p:style>
+        <p:txBody>
+          <a:bodyPr rtlCol="0" anchor="ctr"/>
+          <a:lstStyle/>
+          <a:p>
+            <a:pPr algn="ctr"/>
+          </a:p>
+        </p:txBody>
+      </p:sp>
+      <p:sp>
+        <p:nvSpPr>
+          <p:cNvPr id="10" name="TextBox 9"/>
+          <p:cNvSpPr txBox="1"/>
+          <p:nvPr/>
+        </p:nvSpPr>
+        <p:spPr>
+          <a:xfrm>
+            <a:off x="777240" y="5532120"/>
+            <a:ext cx="5029200" cy="685800"/>
+          </a:xfrm>
+          <a:prstGeom prst="rect">
+            <a:avLst/>
+          </a:prstGeom>
+          <a:noFill/>
+        </p:spPr>
+        <p:txBody>
+          <a:bodyPr wrap="square" anchor="ctr">
+            <a:spAutoFit/>
+          </a:bodyPr>
+          <a:lstStyle/>
+          <a:p>
+            <a:pPr>
+              <a:defRPr sz="1100" b="1">
+                <a:solidFill>
+                  <a:srgbClr val="1D7E7E"/>
+                </a:solidFill>
+                <a:latin typeface="Calibri"/>
+              </a:defRPr>
+            </a:pPr>
+            <a:r>
+              <a:t>Our take (MP-Init)</a:t>
+            </a:r>
+          </a:p>
+          <a:p>
+            <a:pPr>
+              <a:spcBef>
+                <a:spcPts val="600"/>
+              </a:spcBef>
+              <a:defRPr sz="1000">
+                <a:solidFill>
+                  <a:srgbClr val="1A1A1A"/>
+                </a:solidFill>
+                <a:latin typeface="Calibri"/>
+              </a:defRPr>
+            </a:pPr>
+            <a:r>
+              <a:t>Fix the cause, not symptom — align M[t] with stationary π directly.</a:t>
+            </a:r>
+          </a:p>
+        </p:txBody>
+      </p:sp>
+      <p:sp>
+        <p:nvSpPr>
+          <p:cNvPr id="11" name="TextBox 10"/>
+          <p:cNvSpPr txBox="1"/>
+          <p:nvPr/>
+        </p:nvSpPr>
+        <p:spPr>
+          <a:xfrm>
+            <a:off x="6263640" y="2194560"/>
+            <a:ext cx="5486400" cy="365760"/>
+          </a:xfrm>
+          <a:prstGeom prst="rect">
+            <a:avLst/>
+          </a:prstGeom>
+          <a:noFill/>
+        </p:spPr>
+        <p:txBody>
+          <a:bodyPr wrap="square" lIns="0" rIns="0" tIns="0" bIns="0">
+            <a:spAutoFit/>
+          </a:bodyPr>
+          <a:lstStyle/>
+          <a:p>
+            <a:pPr>
+              <a:defRPr sz="1400" b="1" i="0">
+                <a:solidFill>
+                  <a:srgbClr val="0F2540"/>
+                </a:solidFill>
+                <a:latin typeface="Calibri"/>
+              </a:defRPr>
+            </a:pPr>
+            <a:r>
+              <a:t>Trainable LIF parameters (V_thr, τ)</a:t>
+            </a:r>
+          </a:p>
+        </p:txBody>
+      </p:sp>
+      <p:graphicFrame>
+        <p:nvGraphicFramePr>
+          <p:cNvPr id="12" name="Table 11"/>
+          <p:cNvGraphicFramePr>
+            <a:graphicFrameLocks noGrp="1"/>
+          </p:cNvGraphicFramePr>
+          <p:nvPr/>
+        </p:nvGraphicFramePr>
+        <p:xfrm>
+          <a:off x="6263640" y="2606040"/>
+          <a:ext cx="5486399" cy="2724912"/>
+        </p:xfrm>
+        <a:graphic>
+          <a:graphicData uri="http://schemas.openxmlformats.org/drawingml/2006/table">
+            <a:tbl>
+              <a:tblPr firstRow="1" bandRow="1">
+                <a:tableStyleId>{5C22544A-7EE6-4342-B048-85BDC9FD1C3A}</a:tableStyleId>
+              </a:tblPr>
+              <a:tblGrid>
+                <a:gridCol w="1417320"/>
+                <a:gridCol w="2194560"/>
+                <a:gridCol w="1874519"/>
+              </a:tblGrid>
+              <a:tr h="457200">
+                <a:tc>
+                  <a:txBody>
+                    <a:bodyPr anchor="ctr"/>
+                    <a:lstStyle/>
+                    <a:p>
+                      <a:pPr algn="l">
+                        <a:defRPr sz="1050" b="1">
+                          <a:solidFill>
+                            <a:srgbClr val="FFFFFF"/>
+                          </a:solidFill>
+                          <a:latin typeface="Calibri"/>
+                        </a:defRPr>
+                      </a:pPr>
+                      <a:r>
+                        <a:t>Method</a:t>
+                      </a:r>
+                    </a:p>
+                  </a:txBody>
+                  <a:tcPr marL="109728" marR="91440">
+                    <a:solidFill>
+                      <a:srgbClr val="0F2540"/>
+                    </a:solidFill>
+                  </a:tcPr>
+                </a:tc>
+                <a:tc>
+                  <a:txBody>
+                    <a:bodyPr anchor="ctr"/>
+                    <a:lstStyle/>
+                    <a:p>
+                      <a:pPr algn="l">
+                        <a:defRPr sz="1050" b="1">
+                          <a:solidFill>
+                            <a:srgbClr val="FFFFFF"/>
+                          </a:solidFill>
+                          <a:latin typeface="Calibri"/>
+                        </a:defRPr>
+                      </a:pPr>
+                      <a:r>
+                        <a:t>What's learned</a:t>
+                      </a:r>
+                    </a:p>
+                  </a:txBody>
+                  <a:tcPr marL="109728" marR="91440">
+                    <a:solidFill>
+                      <a:srgbClr val="0F2540"/>
+                    </a:solidFill>
+                  </a:tcPr>
+                </a:tc>
+                <a:tc>
+                  <a:txBody>
+                    <a:bodyPr anchor="ctr"/>
+                    <a:lstStyle/>
+                    <a:p>
+                      <a:pPr algn="l">
+                        <a:defRPr sz="1050" b="1">
+                          <a:solidFill>
+                            <a:srgbClr val="FFFFFF"/>
+                          </a:solidFill>
+                          <a:latin typeface="Calibri"/>
+                        </a:defRPr>
+                      </a:pPr>
+                      <a:r>
+                        <a:t>What it misses</a:t>
+                      </a:r>
+                    </a:p>
+                  </a:txBody>
+                  <a:tcPr marL="109728" marR="91440">
+                    <a:solidFill>
+                      <a:srgbClr val="0F2540"/>
+                    </a:solidFill>
+                  </a:tcPr>
+                </a:tc>
+              </a:tr>
+              <a:tr h="566928">
+                <a:tc>
+                  <a:txBody>
+                    <a:bodyPr anchor="ctr"/>
+                    <a:lstStyle/>
+                    <a:p>
+                      <a:pPr algn="l">
+                        <a:defRPr sz="1000" b="1">
+                          <a:solidFill>
+                            <a:srgbClr val="0F2540"/>
+                          </a:solidFill>
+                          <a:latin typeface="Calibri"/>
+                        </a:defRPr>
+                      </a:pPr>
+                      <a:r>
+                        <a:t>PLIF '21</a:t>
+                      </a:r>
+                    </a:p>
+                  </a:txBody>
+                  <a:tcPr marL="109728" marR="91440">
+                    <a:solidFill>
+                      <a:srgbClr val="FFFFFF"/>
+                    </a:solidFill>
+                  </a:tcPr>
+                </a:tc>
+                <a:tc>
+                  <a:txBody>
+                    <a:bodyPr anchor="ctr"/>
+                    <a:lstStyle/>
+                    <a:p>
+                      <a:pPr algn="l">
+                        <a:defRPr sz="950">
+                          <a:solidFill>
+                            <a:srgbClr val="1A1A1A"/>
+                          </a:solidFill>
+                          <a:latin typeface="Calibri"/>
+                        </a:defRPr>
+                      </a:pPr>
+                      <a:r>
+                        <a:t>Leakage τ only</a:t>
+                      </a:r>
+                    </a:p>
+                  </a:txBody>
+                  <a:tcPr marL="109728" marR="91440">
+                    <a:solidFill>
+                      <a:srgbClr val="FFFFFF"/>
+                    </a:solidFill>
+                  </a:tcPr>
+                </a:tc>
+                <a:tc>
+                  <a:txBody>
+                    <a:bodyPr anchor="ctr"/>
+                    <a:lstStyle/>
+                    <a:p>
+                      <a:pPr algn="l">
+                        <a:defRPr sz="950" i="1">
+                          <a:solidFill>
+                            <a:srgbClr val="E56945"/>
+                          </a:solidFill>
+                          <a:latin typeface="Calibri"/>
+                        </a:defRPr>
+                      </a:pPr>
+                      <a:r>
+                        <a:t>V_thr fixed</a:t>
+                      </a:r>
+                    </a:p>
+                  </a:txBody>
+                  <a:tcPr marL="109728" marR="91440">
+                    <a:solidFill>
+                      <a:srgbClr val="FFFFFF"/>
+                    </a:solidFill>
+                  </a:tcPr>
+                </a:tc>
+              </a:tr>
+              <a:tr h="566928">
+                <a:tc>
+                  <a:txBody>
+                    <a:bodyPr anchor="ctr"/>
+                    <a:lstStyle/>
+                    <a:p>
+                      <a:pPr algn="l">
+                        <a:defRPr sz="1000" b="1">
+                          <a:solidFill>
+                            <a:srgbClr val="0F2540"/>
+                          </a:solidFill>
+                          <a:latin typeface="Calibri"/>
+                        </a:defRPr>
+                      </a:pPr>
+                      <a:r>
+                        <a:t>LTMD '22</a:t>
+                      </a:r>
+                    </a:p>
+                  </a:txBody>
+                  <a:tcPr marL="109728" marR="91440">
+                    <a:solidFill>
+                      <a:srgbClr val="F8F7F2"/>
+                    </a:solidFill>
+                  </a:tcPr>
+                </a:tc>
+                <a:tc>
+                  <a:txBody>
+                    <a:bodyPr anchor="ctr"/>
+                    <a:lstStyle/>
+                    <a:p>
+                      <a:pPr algn="l">
+                        <a:defRPr sz="950">
+                          <a:solidFill>
+                            <a:srgbClr val="1A1A1A"/>
+                          </a:solidFill>
+                          <a:latin typeface="Calibri"/>
+                        </a:defRPr>
+                      </a:pPr>
+                      <a:r>
+                        <a:t>V_thr + τ (heavy clipping)</a:t>
+                      </a:r>
+                    </a:p>
+                  </a:txBody>
+                  <a:tcPr marL="109728" marR="91440">
+                    <a:solidFill>
+                      <a:srgbClr val="F8F7F2"/>
+                    </a:solidFill>
+                  </a:tcPr>
+                </a:tc>
+                <a:tc>
+                  <a:txBody>
+                    <a:bodyPr anchor="ctr"/>
+                    <a:lstStyle/>
+                    <a:p>
+                      <a:pPr algn="l">
+                        <a:defRPr sz="950" i="1">
+                          <a:solidFill>
+                            <a:srgbClr val="E56945"/>
+                          </a:solidFill>
+                          <a:latin typeface="Calibri"/>
+                        </a:defRPr>
+                      </a:pPr>
+                      <a:r>
+                        <a:t>Hides instability</a:t>
+                      </a:r>
+                    </a:p>
+                  </a:txBody>
+                  <a:tcPr marL="109728" marR="91440">
+                    <a:solidFill>
+                      <a:srgbClr val="F8F7F2"/>
+                    </a:solidFill>
+                  </a:tcPr>
+                </a:tc>
+              </a:tr>
+              <a:tr h="566928">
+                <a:tc>
+                  <a:txBody>
+                    <a:bodyPr anchor="ctr"/>
+                    <a:lstStyle/>
+                    <a:p>
+                      <a:pPr algn="l">
+                        <a:defRPr sz="1000" b="1">
+                          <a:solidFill>
+                            <a:srgbClr val="0F2540"/>
+                          </a:solidFill>
+                          <a:latin typeface="Calibri"/>
+                        </a:defRPr>
+                      </a:pPr>
+                      <a:r>
+                        <a:t>DIET-SNN '23</a:t>
+                      </a:r>
+                    </a:p>
+                  </a:txBody>
+                  <a:tcPr marL="109728" marR="91440">
+                    <a:solidFill>
+                      <a:srgbClr val="FFFFFF"/>
+                    </a:solidFill>
+                  </a:tcPr>
+                </a:tc>
+                <a:tc>
+                  <a:txBody>
+                    <a:bodyPr anchor="ctr"/>
+                    <a:lstStyle/>
+                    <a:p>
+                      <a:pPr algn="l">
+                        <a:defRPr sz="950">
+                          <a:solidFill>
+                            <a:srgbClr val="1A1A1A"/>
+                          </a:solidFill>
+                          <a:latin typeface="Calibri"/>
+                        </a:defRPr>
+                      </a:pPr>
+                      <a:r>
+                        <a:t>V_thr + τ (gradient clip)</a:t>
+                      </a:r>
+                    </a:p>
+                  </a:txBody>
+                  <a:tcPr marL="109728" marR="91440">
+                    <a:solidFill>
+                      <a:srgbClr val="FFFFFF"/>
+                    </a:solidFill>
+                  </a:tcPr>
+                </a:tc>
+                <a:tc>
+                  <a:txBody>
+                    <a:bodyPr anchor="ctr"/>
+                    <a:lstStyle/>
+                    <a:p>
+                      <a:pPr algn="l">
+                        <a:defRPr sz="950" i="1">
+                          <a:solidFill>
+                            <a:srgbClr val="E56945"/>
+                          </a:solidFill>
+                          <a:latin typeface="Calibri"/>
+                        </a:defRPr>
+                      </a:pPr>
+                      <a:r>
+                        <a:t>Doesn't classify failure</a:t>
+                      </a:r>
+                    </a:p>
+                  </a:txBody>
+                  <a:tcPr marL="109728" marR="91440">
+                    <a:solidFill>
+                      <a:srgbClr val="FFFFFF"/>
+                    </a:solidFill>
+                  </a:tcPr>
+                </a:tc>
+              </a:tr>
+              <a:tr h="566928">
+                <a:tc>
+                  <a:txBody>
+                    <a:bodyPr anchor="ctr"/>
+                    <a:lstStyle/>
+                    <a:p>
+                      <a:pPr algn="l">
+                        <a:defRPr sz="1000" b="1">
+                          <a:solidFill>
+                            <a:srgbClr val="1D7E7E"/>
+                          </a:solidFill>
+                          <a:latin typeface="Calibri"/>
+                        </a:defRPr>
+                      </a:pPr>
+                      <a:r>
+                        <a:t>Ours (TrSG)</a:t>
+                      </a:r>
+                    </a:p>
+                  </a:txBody>
+                  <a:tcPr marL="109728" marR="91440">
+                    <a:solidFill>
+                      <a:srgbClr val="E5F5F0"/>
+                    </a:solidFill>
+                  </a:tcPr>
+                </a:tc>
+                <a:tc>
+                  <a:txBody>
+                    <a:bodyPr anchor="ctr"/>
+                    <a:lstStyle/>
+                    <a:p>
+                      <a:pPr algn="l">
+                        <a:defRPr sz="950" b="1">
+                          <a:solidFill>
+                            <a:srgbClr val="1D7E7E"/>
+                          </a:solidFill>
+                          <a:latin typeface="Calibri"/>
+                        </a:defRPr>
+                      </a:pPr>
+                      <a:r>
+                        <a:t>V_thr + τ, scale-invariant</a:t>
+                      </a:r>
+                    </a:p>
+                  </a:txBody>
+                  <a:tcPr marL="109728" marR="91440">
+                    <a:solidFill>
+                      <a:srgbClr val="E5F5F0"/>
+                    </a:solidFill>
+                  </a:tcPr>
+                </a:tc>
+                <a:tc>
+                  <a:txBody>
+                    <a:bodyPr anchor="ctr"/>
+                    <a:lstStyle/>
+                    <a:p>
+                      <a:pPr algn="l">
+                        <a:defRPr sz="1100" b="1">
+                          <a:solidFill>
+                            <a:srgbClr val="1D7E7E"/>
+                          </a:solidFill>
+                          <a:latin typeface="Calibri"/>
+                        </a:defRPr>
+                      </a:pPr>
+                      <a:r>
+                        <a:t>—</a:t>
+                      </a:r>
+                    </a:p>
+                  </a:txBody>
+                  <a:tcPr marL="109728" marR="91440">
+                    <a:solidFill>
+                      <a:srgbClr val="E5F5F0"/>
+                    </a:solidFill>
+                  </a:tcPr>
+                </a:tc>
+              </a:tr>
+            </a:tbl>
+          </a:graphicData>
+        </a:graphic>
+      </p:graphicFrame>
+      <p:sp>
+        <p:nvSpPr>
+          <p:cNvPr id="13" name="Rectangle 12"/>
+          <p:cNvSpPr/>
+          <p:nvPr/>
+        </p:nvSpPr>
+        <p:spPr>
+          <a:xfrm>
+            <a:off x="6263640" y="5486400"/>
+            <a:ext cx="54864" cy="777240"/>
+          </a:xfrm>
+          <a:prstGeom prst="rect">
+            <a:avLst/>
+          </a:prstGeom>
+          <a:solidFill>
+            <a:srgbClr val="E0B85F"/>
+          </a:solidFill>
+          <a:ln>
+            <a:noFill/>
+          </a:ln>
+        </p:spPr>
+        <p:style>
+          <a:lnRef idx="1">
+            <a:schemeClr val="accent1"/>
+          </a:lnRef>
+          <a:fillRef idx="3">
+            <a:schemeClr val="accent1"/>
+          </a:fillRef>
+          <a:effectRef idx="2">
+            <a:schemeClr val="accent1"/>
+          </a:effectRef>
+          <a:fontRef idx="minor">
+            <a:schemeClr val="lt1"/>
+          </a:fontRef>
+        </p:style>
+        <p:txBody>
+          <a:bodyPr rtlCol="0" anchor="ctr"/>
+          <a:lstStyle/>
+          <a:p>
+            <a:pPr algn="ctr"/>
+          </a:p>
+        </p:txBody>
+      </p:sp>
+      <p:sp>
+        <p:nvSpPr>
+          <p:cNvPr id="14" name="Rectangle 13"/>
+          <p:cNvSpPr/>
+          <p:nvPr/>
+        </p:nvSpPr>
+        <p:spPr>
+          <a:xfrm>
+            <a:off x="6318503" y="5486400"/>
+            <a:ext cx="5431536" cy="777240"/>
+          </a:xfrm>
+          <a:prstGeom prst="rect">
+            <a:avLst/>
+          </a:prstGeom>
+          <a:solidFill>
+            <a:srgbClr val="0F2540"/>
+          </a:solidFill>
+          <a:ln>
+            <a:noFill/>
+          </a:ln>
+        </p:spPr>
+        <p:style>
+          <a:lnRef idx="1">
+            <a:schemeClr val="accent1"/>
+          </a:lnRef>
+          <a:fillRef idx="3">
+            <a:schemeClr val="accent1"/>
+          </a:fillRef>
+          <a:effectRef idx="2">
+            <a:schemeClr val="accent1"/>
+          </a:effectRef>
+          <a:fontRef idx="minor">
+            <a:schemeClr val="lt1"/>
+          </a:fontRef>
+        </p:style>
+        <p:txBody>
+          <a:bodyPr rtlCol="0" anchor="ctr"/>
+          <a:lstStyle/>
+          <a:p>
+            <a:pPr algn="ctr"/>
+          </a:p>
+        </p:txBody>
+      </p:sp>
+      <p:sp>
+        <p:nvSpPr>
+          <p:cNvPr id="15" name="TextBox 14"/>
+          <p:cNvSpPr txBox="1"/>
+          <p:nvPr/>
+        </p:nvSpPr>
+        <p:spPr>
+          <a:xfrm>
+            <a:off x="6583679" y="5532120"/>
+            <a:ext cx="5029200" cy="685800"/>
+          </a:xfrm>
+          <a:prstGeom prst="rect">
+            <a:avLst/>
+          </a:prstGeom>
+          <a:noFill/>
+        </p:spPr>
+        <p:txBody>
+          <a:bodyPr wrap="square" anchor="ctr">
+            <a:spAutoFit/>
+          </a:bodyPr>
+          <a:lstStyle/>
+          <a:p>
+            <a:pPr>
+              <a:defRPr sz="1100" b="1">
+                <a:solidFill>
+                  <a:srgbClr val="E0B85F"/>
+                </a:solidFill>
+                <a:latin typeface="Calibri"/>
+              </a:defRPr>
+            </a:pPr>
+            <a:r>
+              <a:t>Our take (TrSG)</a:t>
+            </a:r>
+          </a:p>
+          <a:p>
+            <a:pPr>
+              <a:spcBef>
+                <a:spcPts val="600"/>
+              </a:spcBef>
+              <a:defRPr sz="1000">
+                <a:solidFill>
+                  <a:srgbClr val="FFFFFF"/>
+                </a:solidFill>
+                <a:latin typeface="Calibri"/>
+              </a:defRPr>
+            </a:pPr>
+            <a:r>
+              <a:t>Diagnose first (4 failure modes), then cancel the 1/V_thr factor by construction.</a:t>
+            </a:r>
+          </a:p>
+        </p:txBody>
+      </p:sp>
+      <p:sp>
+        <p:nvSpPr>
+          <p:cNvPr id="16" name="TextBox 15"/>
+          <p:cNvSpPr txBox="1"/>
+          <p:nvPr/>
+        </p:nvSpPr>
+        <p:spPr>
+          <a:xfrm>
+            <a:off x="457200" y="6492240"/>
+            <a:ext cx="5486400" cy="274320"/>
+          </a:xfrm>
+          <a:prstGeom prst="rect">
+            <a:avLst/>
+          </a:prstGeom>
+          <a:noFill/>
+        </p:spPr>
+        <p:txBody>
+          <a:bodyPr wrap="square" lIns="0" rIns="0" tIns="0" bIns="0">
+            <a:spAutoFit/>
+          </a:bodyPr>
+          <a:lstStyle/>
+          <a:p>
+            <a:pPr>
+              <a:defRPr sz="1000" b="0" i="0">
+                <a:solidFill>
+                  <a:srgbClr val="7A7A7A"/>
+                </a:solidFill>
+                <a:latin typeface="Calibri"/>
+              </a:defRPr>
+            </a:pPr>
+            <a:r>
+              <a:t>Appendix — Hyunho Kook</a:t>
+            </a:r>
+          </a:p>
+        </p:txBody>
+      </p:sp>
+      <p:sp>
+        <p:nvSpPr>
+          <p:cNvPr id="17" name="TextBox 16"/>
+          <p:cNvSpPr txBox="1"/>
+          <p:nvPr/>
+        </p:nvSpPr>
+        <p:spPr>
+          <a:xfrm>
+            <a:off x="6400800" y="6492240"/>
+            <a:ext cx="5303520" cy="274320"/>
+          </a:xfrm>
+          <a:prstGeom prst="rect">
+            <a:avLst/>
+          </a:prstGeom>
+          <a:noFill/>
+        </p:spPr>
+        <p:txBody>
+          <a:bodyPr wrap="square" lIns="0" rIns="0" tIns="0" bIns="0">
+            <a:spAutoFit/>
+          </a:bodyPr>
+          <a:lstStyle/>
+          <a:p>
+            <a:pPr algn="r">
+              <a:defRPr sz="1000" b="0" i="0">
+                <a:solidFill>
+                  <a:srgbClr val="7A7A7A"/>
+                </a:solidFill>
+                <a:latin typeface="Calibri"/>
+              </a:defRPr>
+            </a:pPr>
+            <a:r>
+              <a:t>A7 / A7</a:t>
+            </a:r>
+          </a:p>
+        </p:txBody>
+      </p:sp>
+    </p:spTree>
+  </p:cSld>
+  <p:clrMapOvr>
+    <a:masterClrMapping/>
+  </p:clrMapOvr>
+</p:sld>
+</file>
+
 <file path=ppt/slides/slide3.xml><?xml version="1.0" encoding="utf-8"?>
 <p:sld xmlns:a="http://schemas.openxmlformats.org/drawingml/2006/main" xmlns:p="http://schemas.openxmlformats.org/presentationml/2006/main" xmlns:r="http://schemas.openxmlformats.org/officeDocument/2006/relationships">
   <p:cSld>

--- a/Hyunho_Kook_Master_Defense.pptx
+++ b/Hyunho_Kook_Master_Defense.pptx
@@ -14867,7 +14867,7 @@
                         </a:defRPr>
                       </a:pPr>
                       <a:r>
-                        <a:t>Energy / power</a:t>
+                        <a:t>Headline metric</a:t>
                       </a:r>
                     </a:p>
                   </a:txBody>
@@ -15370,7 +15370,7 @@
                         </a:defRPr>
                       </a:pPr>
                       <a:r>
-                        <a:t>10 M neur.</a:t>
+                        <a:t>152 K neur.</a:t>
                       </a:r>
                     </a:p>
                     <a:p>
@@ -15383,7 +15383,7 @@
                         </a:defRPr>
                       </a:pPr>
                       <a:r>
-                        <a:t>152 ARM cores</a:t>
+                        <a:t>152 M syn. / chip</a:t>
                       </a:r>
                     </a:p>
                   </a:txBody>
@@ -15640,7 +15640,7 @@
                         </a:defRPr>
                       </a:pPr>
                       <a:r>
-                        <a:t>327 K neur.</a:t>
+                        <a:t>328 K neur.</a:t>
                       </a:r>
                     </a:p>
                     <a:p>
@@ -15677,7 +15677,7 @@
                         </a:defRPr>
                       </a:pPr>
                       <a:r>
-                        <a:t>mW-level · always-on</a:t>
+                        <a:t>&lt; 10 mW · always-on</a:t>
                       </a:r>
                     </a:p>
                   </a:txBody>
@@ -15799,7 +15799,7 @@
                         </a:defRPr>
                       </a:pPr>
                       <a:r>
-                        <a:t>1000× wall-clock</a:t>
+                        <a:t>1000× biological speed</a:t>
                       </a:r>
                     </a:p>
                   </a:txBody>
@@ -16565,7 +16565,7 @@
               </a:defRPr>
             </a:pPr>
             <a:r>
-              <a:t>AC ≈ 6–8× cheaper than MAC (45 nm)</a:t>
+              <a:t>INT8 AC ≈ 8× cheaper than INT8 MAC (45 nm)</a:t>
             </a:r>
           </a:p>
         </p:txBody>
@@ -17456,7 +17456,11 @@
               </a:defRPr>
             </a:pPr>
             <a:r>
-              <a:t>~3–10×  vs GPU at iso-accuracy</a:t>
+              <a:t>~2–5×  vs GPU at iso-accuracy</a:t>
+            </a:r>
+            <a:br/>
+            <a:r>
+              <a:t>(per published SNN/CNN comparisons)</a:t>
             </a:r>
           </a:p>
         </p:txBody>
@@ -18943,7 +18947,7 @@
                         </a:defRPr>
                       </a:pPr>
                       <a:r>
-                        <a:t>8.7 K</a:t>
+                        <a:t>9.1 K</a:t>
                       </a:r>
                     </a:p>
                   </a:txBody>
@@ -20822,7 +20826,11 @@
             </a:r>
             <a:br/>
             <a:r>
-              <a:t>Needs T = 100–2000; cannot use event data.</a:t>
+              <a:t>Early: T = 100–2000.  Modern (QCFS '23): T ≤ 8.</a:t>
+            </a:r>
+            <a:br/>
+            <a:r>
+              <a:t>Still cannot consume native event data.</a:t>
             </a:r>
           </a:p>
         </p:txBody>
@@ -20858,11 +20866,11 @@
               </a:defRPr>
             </a:pPr>
             <a:r>
-              <a:t>Cao 2015 · Diehl 2015</a:t>
+              <a:t>Cao 2015 · Rueckauer 2017</a:t>
             </a:r>
             <a:br/>
             <a:r>
-              <a:t>Rueckauer 2017</a:t>
+              <a:t>Bu 2023 (QCFS) · Hao 2023</a:t>
             </a:r>
           </a:p>
         </p:txBody>
@@ -21665,7 +21673,7 @@
                         </a:defRPr>
                       </a:pPr>
                       <a:r>
-                        <a:t>BNTT '20</a:t>
+                        <a:t>BNTT '21</a:t>
                       </a:r>
                     </a:p>
                   </a:txBody>
@@ -21689,7 +21697,7 @@
                         </a:defRPr>
                       </a:pPr>
                       <a:r>
-                        <a:t>Per-timestep BN params</a:t>
+                        <a:t>BN on synaptic input current</a:t>
                       </a:r>
                     </a:p>
                   </a:txBody>
@@ -21713,7 +21721,7 @@
                         </a:defRPr>
                       </a:pPr>
                       <a:r>
-                        <a:t>Output BN only</a:t>
+                        <a:t>U[t] drift not corrected</a:t>
                       </a:r>
                     </a:p>
                   </a:txBody>
@@ -21763,7 +21771,7 @@
                         </a:defRPr>
                       </a:pPr>
                       <a:r>
-                        <a:t>Threshold-dependent BN</a:t>
+                        <a:t>Threshold-dependent BN on activations</a:t>
                       </a:r>
                     </a:p>
                   </a:txBody>
@@ -21787,7 +21795,7 @@
                         </a:defRPr>
                       </a:pPr>
                       <a:r>
-                        <a:t>Output BN only</a:t>
+                        <a:t>Pre-spike BN; U[t] persists</a:t>
                       </a:r>
                     </a:p>
                   </a:txBody>
@@ -21837,7 +21845,7 @@
                         </a:defRPr>
                       </a:pPr>
                       <a:r>
-                        <a:t>Timestep-specific affine</a:t>
+                        <a:t>Timestep-specific affine on outputs</a:t>
                       </a:r>
                     </a:p>
                   </a:txBody>
@@ -21861,7 +21869,7 @@
                         </a:defRPr>
                       </a:pPr>
                       <a:r>
-                        <a:t>Doesn't fix membrane drift</a:t>
+                        <a:t>Membrane drift untouched</a:t>
                       </a:r>
                     </a:p>
                   </a:txBody>
@@ -21911,7 +21919,7 @@
                         </a:defRPr>
                       </a:pPr>
                       <a:r>
-                        <a:t>Temporal-adaptive normalize</a:t>
+                        <a:t>Temporal-adaptive output normalization</a:t>
                       </a:r>
                     </a:p>
                   </a:txBody>

--- a/Hyunho_Kook_Master_Defense.pptx
+++ b/Hyunho_Kook_Master_Defense.pptx
@@ -4649,7 +4649,7 @@
               </a:defRPr>
             </a:pPr>
             <a:r>
-              <a:t>✗ Flooding</a:t>
+              <a:t>✗ Flood</a:t>
             </a:r>
           </a:p>
         </p:txBody>
@@ -6514,7 +6514,7 @@
               </a:defRPr>
             </a:pPr>
             <a:r>
-              <a:t>W'_{l→l+1}   =   V_thr  ·  W_{l→l+1}    (one-time rescaling)</a:t>
+              <a:t>W'_{l→l+1}   =   V_thr^l  ·  W_{l→l+1}    (one-time rescaling per layer)</a:t>
             </a:r>
           </a:p>
         </p:txBody>
@@ -8832,7 +8832,7 @@
         <p:spPr>
           <a:xfrm>
             <a:off x="457200" y="2560320"/>
-            <a:ext cx="6126480" cy="2400918"/>
+            <a:ext cx="6126480" cy="2293290"/>
           </a:xfrm>
           <a:prstGeom prst="rect">
             <a:avLst/>
@@ -9822,7 +9822,7 @@
               </a:defRPr>
             </a:pPr>
             <a:r>
-              <a:t>DVS-CIFAR10  ·  beats RMP</a:t>
+              <a:t>DVS-CIFAR10  ·  beats RMP-Loss</a:t>
             </a:r>
           </a:p>
         </p:txBody>
@@ -10143,7 +10143,7 @@
               </a:defRPr>
             </a:pPr>
             <a:r>
-              <a:t>Each method helps alone; together they compound (especially on event-based data)</a:t>
+              <a:t>Each method helps alone; gains stack additively (largest combined effect on event-based data)</a:t>
             </a:r>
           </a:p>
         </p:txBody>
@@ -11206,7 +11206,7 @@
               </a:defRPr>
             </a:pPr>
             <a:r>
-              <a:t>Energy at matched firing rate  (CIFAR-100)</a:t>
+              <a:t>Energy under matched configuration  (CIFAR-100)</a:t>
             </a:r>
           </a:p>
         </p:txBody>
@@ -11250,7 +11250,11 @@
             </a:r>
             <a:br/>
             <a:r>
-              <a:t>+2.10 %pt at +6 % energy — gains aren't from spiking more.</a:t>
+              <a:t>+2.10 %pt at +6 % energy → orders of magnitude better than</a:t>
+            </a:r>
+            <a:br/>
+            <a:r>
+              <a:t>spike-rate-multiplying baselines (cf. Pareto frontier on slide 9).</a:t>
             </a:r>
           </a:p>
         </p:txBody>
@@ -25027,7 +25031,7 @@
               </a:defRPr>
             </a:pPr>
             <a:r>
-              <a:t>U[t+1] = f( U[t], I_in[t+1] ) — i.i.d. ⇒ Markov chain</a:t>
+              <a:t>U[t+1] = f( U[t], I_in[t+1] ) — Markov by construction;  i.i.d. inputs ⇒ time-homogeneous</a:t>
             </a:r>
           </a:p>
         </p:txBody>
@@ -26594,7 +26598,7 @@
         </p:nvSpPr>
         <p:spPr>
           <a:xfrm>
-            <a:off x="457200" y="4663440"/>
+            <a:off x="457200" y="4526280"/>
             <a:ext cx="11247120" cy="365760"/>
           </a:xfrm>
           <a:prstGeom prst="rect">
@@ -26631,8 +26635,8 @@
           <p:nvPr/>
         </p:nvGraphicFramePr>
         <p:xfrm>
-          <a:off x="457200" y="5029200"/>
-          <a:ext cx="6583680" cy="1417320"/>
+          <a:off x="457200" y="4846320"/>
+          <a:ext cx="6583680" cy="1412748"/>
         </p:xfrm>
         <a:graphic>
           <a:graphicData uri="http://schemas.openxmlformats.org/drawingml/2006/table">
@@ -26645,7 +26649,7 @@
                 <a:gridCol w="1371600"/>
                 <a:gridCol w="1371600"/>
               </a:tblGrid>
-              <a:tr h="320040">
+              <a:tr h="292608">
                 <a:tc>
                   <a:txBody>
                     <a:bodyPr anchor="ctr"/>
@@ -26719,7 +26723,7 @@
                   </a:tcPr>
                 </a:tc>
               </a:tr>
-              <a:tr h="274320">
+              <a:tr h="224028">
                 <a:tc>
                   <a:txBody>
                     <a:bodyPr anchor="ctr"/>
@@ -26734,7 +26738,7 @@
                         </a:defRPr>
                       </a:pPr>
                       <a:r>
-                        <a:t>CIFAR-100  ·  T=4  ·  tdBN</a:t>
+                        <a:t>CIFAR-100  ·  T=2  ·  tdBN</a:t>
                       </a:r>
                     </a:p>
                   </a:txBody>
@@ -26758,7 +26762,7 @@
                         </a:defRPr>
                       </a:pPr>
                       <a:r>
-                        <a:t>75.55</a:t>
+                        <a:t>72.35</a:t>
                       </a:r>
                     </a:p>
                   </a:txBody>
@@ -26782,7 +26786,7 @@
                         </a:defRPr>
                       </a:pPr>
                       <a:r>
-                        <a:t>76.09</a:t>
+                        <a:t>74.01</a:t>
                       </a:r>
                     </a:p>
                   </a:txBody>
@@ -26793,7 +26797,7 @@
                   </a:tcPr>
                 </a:tc>
               </a:tr>
-              <a:tr h="274320">
+              <a:tr h="224028">
                 <a:tc>
                   <a:txBody>
                     <a:bodyPr anchor="ctr"/>
@@ -26808,7 +26812,7 @@
                         </a:defRPr>
                       </a:pPr>
                       <a:r>
-                        <a:t>CIFAR-100  ·  T=4  ·  TEBN</a:t>
+                        <a:t>CIFAR-100  ·  T=4  ·  tdBN</a:t>
                       </a:r>
                     </a:p>
                   </a:txBody>
@@ -26832,7 +26836,7 @@
                         </a:defRPr>
                       </a:pPr>
                       <a:r>
-                        <a:t>75.96</a:t>
+                        <a:t>75.55</a:t>
                       </a:r>
                     </a:p>
                   </a:txBody>
@@ -26856,7 +26860,7 @@
                         </a:defRPr>
                       </a:pPr>
                       <a:r>
-                        <a:t>76.45</a:t>
+                        <a:t>76.09</a:t>
                       </a:r>
                     </a:p>
                   </a:txBody>
@@ -26867,7 +26871,7 @@
                   </a:tcPr>
                 </a:tc>
               </a:tr>
-              <a:tr h="274320">
+              <a:tr h="224028">
                 <a:tc>
                   <a:txBody>
                     <a:bodyPr anchor="ctr"/>
@@ -26882,7 +26886,7 @@
                         </a:defRPr>
                       </a:pPr>
                       <a:r>
-                        <a:t>CIFAR-100  ·  T=4  ·  TAB</a:t>
+                        <a:t>CIFAR-100  ·  T=4  ·  TEBN</a:t>
                       </a:r>
                     </a:p>
                   </a:txBody>
@@ -26906,7 +26910,7 @@
                         </a:defRPr>
                       </a:pPr>
                       <a:r>
-                        <a:t>76.25</a:t>
+                        <a:t>75.96</a:t>
                       </a:r>
                     </a:p>
                   </a:txBody>
@@ -26930,7 +26934,7 @@
                         </a:defRPr>
                       </a:pPr>
                       <a:r>
-                        <a:t>77.24</a:t>
+                        <a:t>76.45</a:t>
                       </a:r>
                     </a:p>
                   </a:txBody>
@@ -26941,7 +26945,7 @@
                   </a:tcPr>
                 </a:tc>
               </a:tr>
-              <a:tr h="274320">
+              <a:tr h="224028">
                 <a:tc>
                   <a:txBody>
                     <a:bodyPr anchor="ctr"/>
@@ -26956,7 +26960,7 @@
                         </a:defRPr>
                       </a:pPr>
                       <a:r>
-                        <a:t>DVS-CIFAR10  ·  T=10  ·  tdBN</a:t>
+                        <a:t>CIFAR-100  ·  T=4  ·  TAB</a:t>
                       </a:r>
                     </a:p>
                   </a:txBody>
@@ -26980,7 +26984,7 @@
                         </a:defRPr>
                       </a:pPr>
                       <a:r>
-                        <a:t>76.60</a:t>
+                        <a:t>76.25</a:t>
                       </a:r>
                     </a:p>
                   </a:txBody>
@@ -27004,7 +27008,7 @@
                         </a:defRPr>
                       </a:pPr>
                       <a:r>
-                        <a:t>77.37</a:t>
+                        <a:t>77.24</a:t>
                       </a:r>
                     </a:p>
                   </a:txBody>
@@ -27015,6 +27019,80 @@
                   </a:tcPr>
                 </a:tc>
               </a:tr>
+              <a:tr h="224028">
+                <a:tc>
+                  <a:txBody>
+                    <a:bodyPr anchor="ctr"/>
+                    <a:lstStyle/>
+                    <a:p>
+                      <a:pPr algn="l">
+                        <a:defRPr sz="1100" b="0">
+                          <a:solidFill>
+                            <a:srgbClr val="1A1A1A"/>
+                          </a:solidFill>
+                          <a:latin typeface="Calibri"/>
+                        </a:defRPr>
+                      </a:pPr>
+                      <a:r>
+                        <a:t>DVS-CIFAR10  ·  T=10  ·  tdBN</a:t>
+                      </a:r>
+                    </a:p>
+                  </a:txBody>
+                  <a:tcPr marL="137160" marR="137160">
+                    <a:solidFill>
+                      <a:srgbClr val="FFFFFF"/>
+                    </a:solidFill>
+                  </a:tcPr>
+                </a:tc>
+                <a:tc>
+                  <a:txBody>
+                    <a:bodyPr anchor="ctr"/>
+                    <a:lstStyle/>
+                    <a:p>
+                      <a:pPr algn="ctr">
+                        <a:defRPr sz="1100" b="0">
+                          <a:solidFill>
+                            <a:srgbClr val="7A7A7A"/>
+                          </a:solidFill>
+                          <a:latin typeface="Calibri"/>
+                        </a:defRPr>
+                      </a:pPr>
+                      <a:r>
+                        <a:t>76.60</a:t>
+                      </a:r>
+                    </a:p>
+                  </a:txBody>
+                  <a:tcPr marL="137160" marR="137160">
+                    <a:solidFill>
+                      <a:srgbClr val="FFFFFF"/>
+                    </a:solidFill>
+                  </a:tcPr>
+                </a:tc>
+                <a:tc>
+                  <a:txBody>
+                    <a:bodyPr anchor="ctr"/>
+                    <a:lstStyle/>
+                    <a:p>
+                      <a:pPr algn="ctr">
+                        <a:defRPr sz="1100" b="1">
+                          <a:solidFill>
+                            <a:srgbClr val="1D7E7E"/>
+                          </a:solidFill>
+                          <a:latin typeface="Calibri"/>
+                        </a:defRPr>
+                      </a:pPr>
+                      <a:r>
+                        <a:t>77.37</a:t>
+                      </a:r>
+                    </a:p>
+                  </a:txBody>
+                  <a:tcPr marL="137160" marR="137160">
+                    <a:solidFill>
+                      <a:srgbClr val="FFFFFF"/>
+                    </a:solidFill>
+                  </a:tcPr>
+                </a:tc>
+              </a:tr>
             </a:tbl>
           </a:graphicData>
         </a:graphic>
@@ -27027,7 +27105,7 @@
         </p:nvSpPr>
         <p:spPr>
           <a:xfrm>
-            <a:off x="7315200" y="5029200"/>
+            <a:off x="7315200" y="4846320"/>
             <a:ext cx="4434840" cy="1417320"/>
           </a:xfrm>
           <a:prstGeom prst="rect">
@@ -27072,7 +27150,7 @@
         </p:nvSpPr>
         <p:spPr>
           <a:xfrm>
-            <a:off x="7543800" y="5166360"/>
+            <a:off x="7543800" y="4983480"/>
             <a:ext cx="4114800" cy="502920"/>
           </a:xfrm>
           <a:prstGeom prst="rect">
@@ -27108,7 +27186,7 @@
         </p:nvSpPr>
         <p:spPr>
           <a:xfrm>
-            <a:off x="7543800" y="5715000"/>
+            <a:off x="7543800" y="5532120"/>
             <a:ext cx="4114800" cy="640080"/>
           </a:xfrm>
           <a:prstGeom prst="rect">

--- a/Hyunho_Kook_Master_Defense.pptx
+++ b/Hyunho_Kook_Master_Defense.pptx
@@ -3835,7 +3835,7 @@
         <p:spPr>
           <a:xfrm>
             <a:off x="457200" y="2880360"/>
-            <a:ext cx="4754880" cy="1508760"/>
+            <a:ext cx="4754880" cy="1371600"/>
           </a:xfrm>
           <a:prstGeom prst="rect">
             <a:avLst/>
@@ -3879,7 +3879,7 @@
         </p:nvSpPr>
         <p:spPr>
           <a:xfrm>
-            <a:off x="640080" y="2971800"/>
+            <a:off x="640080" y="2944368"/>
             <a:ext cx="4389120" cy="320040"/>
           </a:xfrm>
           <a:prstGeom prst="rect">
@@ -3915,7 +3915,7 @@
         </p:nvSpPr>
         <p:spPr>
           <a:xfrm>
-            <a:off x="640080" y="3337560"/>
+            <a:off x="640080" y="3291840"/>
             <a:ext cx="4389120" cy="457200"/>
           </a:xfrm>
           <a:prstGeom prst="rect">
@@ -3951,7 +3951,7 @@
         </p:nvSpPr>
         <p:spPr>
           <a:xfrm>
-            <a:off x="640080" y="3931920"/>
+            <a:off x="640080" y="3840480"/>
             <a:ext cx="4389120" cy="365760"/>
           </a:xfrm>
           <a:prstGeom prst="rect">
@@ -3987,8 +3987,8 @@
         </p:nvSpPr>
         <p:spPr>
           <a:xfrm>
-            <a:off x="457200" y="4526280"/>
-            <a:ext cx="4754880" cy="1508760"/>
+            <a:off x="457200" y="4389120"/>
+            <a:ext cx="4754880" cy="1371600"/>
           </a:xfrm>
           <a:prstGeom prst="rect">
             <a:avLst/>
@@ -4032,7 +4032,7 @@
         </p:nvSpPr>
         <p:spPr>
           <a:xfrm>
-            <a:off x="640080" y="4617720"/>
+            <a:off x="640080" y="4453128"/>
             <a:ext cx="4389120" cy="320040"/>
           </a:xfrm>
           <a:prstGeom prst="rect">
@@ -4068,7 +4068,7 @@
         </p:nvSpPr>
         <p:spPr>
           <a:xfrm>
-            <a:off x="640080" y="4983480"/>
+            <a:off x="640080" y="4800600"/>
             <a:ext cx="4389120" cy="457200"/>
           </a:xfrm>
           <a:prstGeom prst="rect">
@@ -4104,7 +4104,7 @@
         </p:nvSpPr>
         <p:spPr>
           <a:xfrm>
-            <a:off x="640080" y="5577840"/>
+            <a:off x="640080" y="5349240"/>
             <a:ext cx="4389120" cy="365760"/>
           </a:xfrm>
           <a:prstGeom prst="rect">
@@ -4529,8 +4529,8 @@
         </p:blipFill>
         <p:spPr>
           <a:xfrm>
-            <a:off x="4617602" y="1828800"/>
-            <a:ext cx="2956490" cy="3383280"/>
+            <a:off x="4497744" y="1783080"/>
+            <a:ext cx="3196206" cy="3657600"/>
           </a:xfrm>
           <a:prstGeom prst="rect">
             <a:avLst/>
@@ -4545,7 +4545,7 @@
         </p:nvSpPr>
         <p:spPr>
           <a:xfrm>
-            <a:off x="457200" y="5230368"/>
+            <a:off x="457200" y="5458968"/>
             <a:ext cx="11247120" cy="228600"/>
           </a:xfrm>
           <a:prstGeom prst="rect">
@@ -4581,8 +4581,8 @@
         </p:nvSpPr>
         <p:spPr>
           <a:xfrm>
-            <a:off x="371703" y="5623560"/>
-            <a:ext cx="2157984" cy="777240"/>
+            <a:off x="371703" y="5760720"/>
+            <a:ext cx="2157984" cy="685800"/>
           </a:xfrm>
           <a:prstGeom prst="rect">
             <a:avLst/>
@@ -4626,7 +4626,7 @@
         </p:nvSpPr>
         <p:spPr>
           <a:xfrm>
-            <a:off x="463143" y="5715000"/>
+            <a:off x="463143" y="5852159"/>
             <a:ext cx="1975103" cy="320040"/>
           </a:xfrm>
           <a:prstGeom prst="rect">
@@ -4662,7 +4662,7 @@
         </p:nvSpPr>
         <p:spPr>
           <a:xfrm>
-            <a:off x="463143" y="6035040"/>
+            <a:off x="463143" y="6172200"/>
             <a:ext cx="1975103" cy="365760"/>
           </a:xfrm>
           <a:prstGeom prst="rect">
@@ -4698,8 +4698,8 @@
         </p:nvSpPr>
         <p:spPr>
           <a:xfrm>
-            <a:off x="2694279" y="5623560"/>
-            <a:ext cx="2157984" cy="777240"/>
+            <a:off x="2694279" y="5760720"/>
+            <a:ext cx="2157984" cy="685800"/>
           </a:xfrm>
           <a:prstGeom prst="rect">
             <a:avLst/>
@@ -4743,7 +4743,7 @@
         </p:nvSpPr>
         <p:spPr>
           <a:xfrm>
-            <a:off x="2785719" y="5715000"/>
+            <a:off x="2785719" y="5852159"/>
             <a:ext cx="1975103" cy="320040"/>
           </a:xfrm>
           <a:prstGeom prst="rect">
@@ -4779,7 +4779,7 @@
         </p:nvSpPr>
         <p:spPr>
           <a:xfrm>
-            <a:off x="2785719" y="6035040"/>
+            <a:off x="2785719" y="6172200"/>
             <a:ext cx="1975103" cy="365760"/>
           </a:xfrm>
           <a:prstGeom prst="rect">
@@ -4815,8 +4815,8 @@
         </p:nvSpPr>
         <p:spPr>
           <a:xfrm>
-            <a:off x="5016855" y="5623560"/>
-            <a:ext cx="2157984" cy="777240"/>
+            <a:off x="5016855" y="5760720"/>
+            <a:ext cx="2157984" cy="685800"/>
           </a:xfrm>
           <a:prstGeom prst="rect">
             <a:avLst/>
@@ -4860,7 +4860,7 @@
         </p:nvSpPr>
         <p:spPr>
           <a:xfrm>
-            <a:off x="5108295" y="5715000"/>
+            <a:off x="5108295" y="5852159"/>
             <a:ext cx="1975103" cy="320040"/>
           </a:xfrm>
           <a:prstGeom prst="rect">
@@ -4896,7 +4896,7 @@
         </p:nvSpPr>
         <p:spPr>
           <a:xfrm>
-            <a:off x="5108295" y="6035040"/>
+            <a:off x="5108295" y="6172200"/>
             <a:ext cx="1975103" cy="365760"/>
           </a:xfrm>
           <a:prstGeom prst="rect">
@@ -4932,8 +4932,8 @@
         </p:nvSpPr>
         <p:spPr>
           <a:xfrm>
-            <a:off x="7339431" y="5623560"/>
-            <a:ext cx="2157984" cy="777240"/>
+            <a:off x="7339431" y="5760720"/>
+            <a:ext cx="2157984" cy="685800"/>
           </a:xfrm>
           <a:prstGeom prst="rect">
             <a:avLst/>
@@ -4977,7 +4977,7 @@
         </p:nvSpPr>
         <p:spPr>
           <a:xfrm>
-            <a:off x="7430871" y="5715000"/>
+            <a:off x="7430871" y="5852159"/>
             <a:ext cx="1975103" cy="320040"/>
           </a:xfrm>
           <a:prstGeom prst="rect">
@@ -5013,7 +5013,7 @@
         </p:nvSpPr>
         <p:spPr>
           <a:xfrm>
-            <a:off x="7430871" y="6035040"/>
+            <a:off x="7430871" y="6172200"/>
             <a:ext cx="1975103" cy="365760"/>
           </a:xfrm>
           <a:prstGeom prst="rect">
@@ -5049,8 +5049,8 @@
         </p:nvSpPr>
         <p:spPr>
           <a:xfrm>
-            <a:off x="9662007" y="5623560"/>
-            <a:ext cx="2157984" cy="777240"/>
+            <a:off x="9662007" y="5760720"/>
+            <a:ext cx="2157984" cy="685800"/>
           </a:xfrm>
           <a:prstGeom prst="rect">
             <a:avLst/>
@@ -5094,7 +5094,7 @@
         </p:nvSpPr>
         <p:spPr>
           <a:xfrm>
-            <a:off x="9753447" y="5715000"/>
+            <a:off x="9753447" y="5852159"/>
             <a:ext cx="1975103" cy="320040"/>
           </a:xfrm>
           <a:prstGeom prst="rect">
@@ -5130,7 +5130,7 @@
         </p:nvSpPr>
         <p:spPr>
           <a:xfrm>
-            <a:off x="9753447" y="6035040"/>
+            <a:off x="9753447" y="6172200"/>
             <a:ext cx="1975103" cy="365760"/>
           </a:xfrm>
           <a:prstGeom prst="rect">
@@ -8466,8 +8466,8 @@
         </p:nvSpPr>
         <p:spPr>
           <a:xfrm>
-            <a:off x="457200" y="6126480"/>
-            <a:ext cx="54864" cy="365760"/>
+            <a:off x="457200" y="5989320"/>
+            <a:ext cx="54864" cy="411480"/>
           </a:xfrm>
           <a:prstGeom prst="rect">
             <a:avLst/>
@@ -8509,8 +8509,8 @@
         </p:nvSpPr>
         <p:spPr>
           <a:xfrm>
-            <a:off x="512064" y="6126480"/>
-            <a:ext cx="11192256" cy="365760"/>
+            <a:off x="512064" y="5989320"/>
+            <a:ext cx="11192256" cy="411480"/>
           </a:xfrm>
           <a:prstGeom prst="rect">
             <a:avLst/>
@@ -8552,8 +8552,8 @@
         </p:nvSpPr>
         <p:spPr>
           <a:xfrm>
-            <a:off x="777240" y="6172200"/>
-            <a:ext cx="10789920" cy="274320"/>
+            <a:off x="777240" y="6035040"/>
+            <a:ext cx="10789920" cy="320040"/>
           </a:xfrm>
           <a:prstGeom prst="rect">
             <a:avLst/>
@@ -8832,7 +8832,7 @@
         <p:spPr>
           <a:xfrm>
             <a:off x="457200" y="2560320"/>
-            <a:ext cx="6126480" cy="2293290"/>
+            <a:ext cx="6126480" cy="2468880"/>
           </a:xfrm>
           <a:prstGeom prst="rect">
             <a:avLst/>
@@ -8847,7 +8847,7 @@
         </p:nvSpPr>
         <p:spPr>
           <a:xfrm>
-            <a:off x="457200" y="5029200"/>
+            <a:off x="457200" y="5074920"/>
             <a:ext cx="6126480" cy="274320"/>
           </a:xfrm>
           <a:prstGeom prst="rect">
@@ -8928,7 +8928,7 @@
         <p:spPr>
           <a:xfrm>
             <a:off x="6766560" y="2560320"/>
-            <a:ext cx="5029200" cy="2286000"/>
+            <a:ext cx="5029200" cy="2468880"/>
           </a:xfrm>
           <a:prstGeom prst="rect">
             <a:avLst/>
@@ -8943,7 +8943,7 @@
         </p:nvSpPr>
         <p:spPr>
           <a:xfrm>
-            <a:off x="6766560" y="4937760"/>
+            <a:off x="6766560" y="5074920"/>
             <a:ext cx="5029200" cy="274320"/>
           </a:xfrm>
           <a:prstGeom prst="rect">
@@ -10889,7 +10889,7 @@
         <p:spPr>
           <a:xfrm>
             <a:off x="457200" y="2286000"/>
-            <a:ext cx="5486400" cy="1554480"/>
+            <a:ext cx="5486400" cy="1417320"/>
           </a:xfrm>
           <a:prstGeom prst="rect">
             <a:avLst/>
@@ -10970,7 +10970,7 @@
         <p:spPr>
           <a:xfrm>
             <a:off x="640080" y="2788920"/>
-            <a:ext cx="5120640" cy="914400"/>
+            <a:ext cx="5120640" cy="777240"/>
           </a:xfrm>
           <a:prstGeom prst="rect">
             <a:avLst/>
@@ -11014,7 +11014,7 @@
         <p:spPr>
           <a:xfrm>
             <a:off x="6263640" y="2286000"/>
-            <a:ext cx="5486400" cy="1554480"/>
+            <a:ext cx="5486400" cy="1417320"/>
           </a:xfrm>
           <a:prstGeom prst="rect">
             <a:avLst/>
@@ -11095,7 +11095,7 @@
         <p:spPr>
           <a:xfrm>
             <a:off x="6446520" y="2788920"/>
-            <a:ext cx="5120640" cy="914400"/>
+            <a:ext cx="5120640" cy="777240"/>
           </a:xfrm>
           <a:prstGeom prst="rect">
             <a:avLst/>
@@ -11138,8 +11138,8 @@
         </p:nvSpPr>
         <p:spPr>
           <a:xfrm>
-            <a:off x="457200" y="4023360"/>
-            <a:ext cx="5486400" cy="1554480"/>
+            <a:off x="457200" y="3840480"/>
+            <a:ext cx="5486400" cy="1508760"/>
           </a:xfrm>
           <a:prstGeom prst="rect">
             <a:avLst/>
@@ -11183,7 +11183,7 @@
         </p:nvSpPr>
         <p:spPr>
           <a:xfrm>
-            <a:off x="640080" y="4160520"/>
+            <a:off x="640080" y="3977640"/>
             <a:ext cx="5120640" cy="365760"/>
           </a:xfrm>
           <a:prstGeom prst="rect">
@@ -11219,8 +11219,8 @@
         </p:nvSpPr>
         <p:spPr>
           <a:xfrm>
-            <a:off x="640080" y="4526280"/>
-            <a:ext cx="5120640" cy="914400"/>
+            <a:off x="640080" y="4343400"/>
+            <a:ext cx="5120640" cy="868680"/>
           </a:xfrm>
           <a:prstGeom prst="rect">
             <a:avLst/>
@@ -11267,8 +11267,8 @@
         </p:nvSpPr>
         <p:spPr>
           <a:xfrm>
-            <a:off x="6263640" y="4023360"/>
-            <a:ext cx="5486400" cy="1554480"/>
+            <a:off x="6263640" y="3840480"/>
+            <a:ext cx="5486400" cy="1508760"/>
           </a:xfrm>
           <a:prstGeom prst="rect">
             <a:avLst/>
@@ -11312,7 +11312,7 @@
         </p:nvSpPr>
         <p:spPr>
           <a:xfrm>
-            <a:off x="6446520" y="4160520"/>
+            <a:off x="6446520" y="3977640"/>
             <a:ext cx="5120640" cy="365760"/>
           </a:xfrm>
           <a:prstGeom prst="rect">
@@ -11348,8 +11348,8 @@
         </p:nvSpPr>
         <p:spPr>
           <a:xfrm>
-            <a:off x="6446520" y="4526280"/>
-            <a:ext cx="5120640" cy="914400"/>
+            <a:off x="6446520" y="4343400"/>
+            <a:ext cx="5120640" cy="868680"/>
           </a:xfrm>
           <a:prstGeom prst="rect">
             <a:avLst/>
@@ -11392,7 +11392,7 @@
         </p:nvSpPr>
         <p:spPr>
           <a:xfrm>
-            <a:off x="457200" y="5715000"/>
+            <a:off x="457200" y="5577840"/>
             <a:ext cx="54864" cy="685800"/>
           </a:xfrm>
           <a:prstGeom prst="rect">
@@ -11435,7 +11435,7 @@
         </p:nvSpPr>
         <p:spPr>
           <a:xfrm>
-            <a:off x="512064" y="5715000"/>
+            <a:off x="512064" y="5577840"/>
             <a:ext cx="11192256" cy="685800"/>
           </a:xfrm>
           <a:prstGeom prst="rect">
@@ -11478,7 +11478,7 @@
         </p:nvSpPr>
         <p:spPr>
           <a:xfrm>
-            <a:off x="777240" y="5760720"/>
+            <a:off x="777240" y="5623559"/>
             <a:ext cx="10789920" cy="594360"/>
           </a:xfrm>
           <a:prstGeom prst="rect">
@@ -12359,7 +12359,7 @@
         </p:nvSpPr>
         <p:spPr>
           <a:xfrm>
-            <a:off x="457200" y="2194560"/>
+            <a:off x="457200" y="1828800"/>
             <a:ext cx="6583680" cy="411480"/>
           </a:xfrm>
           <a:prstGeom prst="rect">
@@ -12395,7 +12395,7 @@
         </p:nvSpPr>
         <p:spPr>
           <a:xfrm>
-            <a:off x="457200" y="2651760"/>
+            <a:off x="457200" y="2286000"/>
             <a:ext cx="6583680" cy="914400"/>
           </a:xfrm>
           <a:prstGeom prst="rect">
@@ -12431,7 +12431,7 @@
         </p:nvSpPr>
         <p:spPr>
           <a:xfrm>
-            <a:off x="457200" y="3657600"/>
+            <a:off x="457200" y="3291840"/>
             <a:ext cx="6583680" cy="411480"/>
           </a:xfrm>
           <a:prstGeom prst="rect">
@@ -12467,7 +12467,7 @@
         </p:nvSpPr>
         <p:spPr>
           <a:xfrm>
-            <a:off x="457200" y="4114800"/>
+            <a:off x="457200" y="3749039"/>
             <a:ext cx="6583680" cy="914400"/>
           </a:xfrm>
           <a:prstGeom prst="rect">
@@ -12503,7 +12503,7 @@
         </p:nvSpPr>
         <p:spPr>
           <a:xfrm>
-            <a:off x="457200" y="5120640"/>
+            <a:off x="457200" y="4754880"/>
             <a:ext cx="6583680" cy="411480"/>
           </a:xfrm>
           <a:prstGeom prst="rect">
@@ -12539,7 +12539,7 @@
         </p:nvSpPr>
         <p:spPr>
           <a:xfrm>
-            <a:off x="457200" y="5577840"/>
+            <a:off x="457200" y="5212080"/>
             <a:ext cx="6583680" cy="914400"/>
           </a:xfrm>
           <a:prstGeom prst="rect">
@@ -12575,8 +12575,8 @@
         </p:nvSpPr>
         <p:spPr>
           <a:xfrm>
-            <a:off x="7772400" y="2103120"/>
-            <a:ext cx="4023360" cy="4023360"/>
+            <a:off x="7772400" y="1783080"/>
+            <a:ext cx="4023360" cy="4206240"/>
           </a:xfrm>
           <a:prstGeom prst="rect">
             <a:avLst/>
@@ -12618,7 +12618,7 @@
         </p:nvSpPr>
         <p:spPr>
           <a:xfrm>
-            <a:off x="8046720" y="2331720"/>
+            <a:off x="8046720" y="2011680"/>
             <a:ext cx="3566160" cy="274320"/>
           </a:xfrm>
           <a:prstGeom prst="rect">
@@ -12655,7 +12655,7 @@
         </p:nvSpPr>
         <p:spPr>
           <a:xfrm>
-            <a:off x="8046720" y="2743200"/>
+            <a:off x="8046720" y="2423160"/>
             <a:ext cx="3566160" cy="457200"/>
           </a:xfrm>
           <a:prstGeom prst="rect">
@@ -12691,7 +12691,7 @@
         </p:nvSpPr>
         <p:spPr>
           <a:xfrm>
-            <a:off x="8046720" y="3154679"/>
+            <a:off x="8046720" y="2834639"/>
             <a:ext cx="3566160" cy="457200"/>
           </a:xfrm>
           <a:prstGeom prst="rect">
@@ -12727,7 +12727,7 @@
         </p:nvSpPr>
         <p:spPr>
           <a:xfrm>
-            <a:off x="8046720" y="3931920"/>
+            <a:off x="8046720" y="3611880"/>
             <a:ext cx="36576" cy="777240"/>
           </a:xfrm>
           <a:prstGeom prst="rect">
@@ -12770,43 +12770,43 @@
         </p:nvSpPr>
         <p:spPr>
           <a:xfrm>
+            <a:off x="8183880" y="3611880"/>
+            <a:ext cx="3474720" cy="274320"/>
+          </a:xfrm>
+          <a:prstGeom prst="rect">
+            <a:avLst/>
+          </a:prstGeom>
+          <a:noFill/>
+        </p:spPr>
+        <p:txBody>
+          <a:bodyPr wrap="square" lIns="0" rIns="0" tIns="0" bIns="0">
+            <a:spAutoFit/>
+          </a:bodyPr>
+          <a:lstStyle/>
+          <a:p>
+            <a:pPr>
+              <a:defRPr sz="1300" b="1" i="0">
+                <a:solidFill>
+                  <a:srgbClr val="FFFFFF"/>
+                </a:solidFill>
+                <a:latin typeface="Calibri"/>
+              </a:defRPr>
+            </a:pPr>
+            <a:r>
+              <a:t>①  Temporal Covariate Shift</a:t>
+            </a:r>
+          </a:p>
+        </p:txBody>
+      </p:sp>
+      <p:sp>
+        <p:nvSpPr>
+          <p:cNvPr id="16" name="TextBox 15"/>
+          <p:cNvSpPr txBox="1"/>
+          <p:nvPr/>
+        </p:nvSpPr>
+        <p:spPr>
+          <a:xfrm>
             <a:off x="8183880" y="3931920"/>
-            <a:ext cx="3474720" cy="274320"/>
-          </a:xfrm>
-          <a:prstGeom prst="rect">
-            <a:avLst/>
-          </a:prstGeom>
-          <a:noFill/>
-        </p:spPr>
-        <p:txBody>
-          <a:bodyPr wrap="square" lIns="0" rIns="0" tIns="0" bIns="0">
-            <a:spAutoFit/>
-          </a:bodyPr>
-          <a:lstStyle/>
-          <a:p>
-            <a:pPr>
-              <a:defRPr sz="1300" b="1" i="0">
-                <a:solidFill>
-                  <a:srgbClr val="FFFFFF"/>
-                </a:solidFill>
-                <a:latin typeface="Calibri"/>
-              </a:defRPr>
-            </a:pPr>
-            <a:r>
-              <a:t>①  Temporal Covariate Shift</a:t>
-            </a:r>
-          </a:p>
-        </p:txBody>
-      </p:sp>
-      <p:sp>
-        <p:nvSpPr>
-          <p:cNvPr id="16" name="TextBox 15"/>
-          <p:cNvSpPr txBox="1"/>
-          <p:nvPr/>
-        </p:nvSpPr>
-        <p:spPr>
-          <a:xfrm>
-            <a:off x="8183880" y="4251959"/>
             <a:ext cx="3474720" cy="457200"/>
           </a:xfrm>
           <a:prstGeom prst="rect">
@@ -12842,7 +12842,7 @@
         </p:nvSpPr>
         <p:spPr>
           <a:xfrm>
-            <a:off x="8046720" y="5029200"/>
+            <a:off x="8046720" y="4709160"/>
             <a:ext cx="36576" cy="868680"/>
           </a:xfrm>
           <a:prstGeom prst="rect">
@@ -12885,43 +12885,43 @@
         </p:nvSpPr>
         <p:spPr>
           <a:xfrm>
+            <a:off x="8183880" y="4709160"/>
+            <a:ext cx="3474720" cy="274320"/>
+          </a:xfrm>
+          <a:prstGeom prst="rect">
+            <a:avLst/>
+          </a:prstGeom>
+          <a:noFill/>
+        </p:spPr>
+        <p:txBody>
+          <a:bodyPr wrap="square" lIns="0" rIns="0" tIns="0" bIns="0">
+            <a:spAutoFit/>
+          </a:bodyPr>
+          <a:lstStyle/>
+          <a:p>
+            <a:pPr>
+              <a:defRPr sz="1300" b="1" i="0">
+                <a:solidFill>
+                  <a:srgbClr val="FFFFFF"/>
+                </a:solidFill>
+                <a:latin typeface="Calibri"/>
+              </a:defRPr>
+            </a:pPr>
+            <a:r>
+              <a:t>②  Gradient pathology</a:t>
+            </a:r>
+          </a:p>
+        </p:txBody>
+      </p:sp>
+      <p:sp>
+        <p:nvSpPr>
+          <p:cNvPr id="19" name="TextBox 18"/>
+          <p:cNvSpPr txBox="1"/>
+          <p:nvPr/>
+        </p:nvSpPr>
+        <p:spPr>
+          <a:xfrm>
             <a:off x="8183880" y="5029200"/>
-            <a:ext cx="3474720" cy="274320"/>
-          </a:xfrm>
-          <a:prstGeom prst="rect">
-            <a:avLst/>
-          </a:prstGeom>
-          <a:noFill/>
-        </p:spPr>
-        <p:txBody>
-          <a:bodyPr wrap="square" lIns="0" rIns="0" tIns="0" bIns="0">
-            <a:spAutoFit/>
-          </a:bodyPr>
-          <a:lstStyle/>
-          <a:p>
-            <a:pPr>
-              <a:defRPr sz="1300" b="1" i="0">
-                <a:solidFill>
-                  <a:srgbClr val="FFFFFF"/>
-                </a:solidFill>
-                <a:latin typeface="Calibri"/>
-              </a:defRPr>
-            </a:pPr>
-            <a:r>
-              <a:t>②  Gradient pathology</a:t>
-            </a:r>
-          </a:p>
-        </p:txBody>
-      </p:sp>
-      <p:sp>
-        <p:nvSpPr>
-          <p:cNvPr id="19" name="TextBox 18"/>
-          <p:cNvSpPr txBox="1"/>
-          <p:nvPr/>
-        </p:nvSpPr>
-        <p:spPr>
-          <a:xfrm>
-            <a:off x="8183880" y="5349240"/>
             <a:ext cx="3474720" cy="548640"/>
           </a:xfrm>
           <a:prstGeom prst="rect">
@@ -15546,7 +15546,7 @@
                         </a:defRPr>
                       </a:pPr>
                       <a:r>
-                        <a:t>Tsinghua · Nature 2019</a:t>
+                        <a:t>Tsinghua · hybrid arch.</a:t>
                       </a:r>
                     </a:p>
                   </a:txBody>
@@ -20826,11 +20826,15 @@
               </a:defRPr>
             </a:pPr>
             <a:r>
-              <a:t>Use pretrained ReLU CNN; map activations to spike rates.</a:t>
+              <a:t>Pretrained ReLU CNN → spike rates.</a:t>
             </a:r>
             <a:br/>
             <a:r>
-              <a:t>Early: T = 100–2000.  Modern (QCFS '23): T ≤ 8.</a:t>
+              <a:t>Early methods: T = 100–2000.</a:t>
+            </a:r>
+            <a:br/>
+            <a:r>
+              <a:t>Modern (QCFS '23, Hao '23): T ≤ 8.</a:t>
             </a:r>
             <a:br/>
             <a:r>
@@ -24032,7 +24036,7 @@
         </p:nvSpPr>
         <p:spPr>
           <a:xfrm>
-            <a:off x="6858000" y="5760720"/>
+            <a:off x="6858000" y="4617720"/>
             <a:ext cx="4937760" cy="274320"/>
           </a:xfrm>
           <a:prstGeom prst="rect">
@@ -25868,7 +25872,7 @@
         <p:spPr>
           <a:xfrm>
             <a:off x="6766560" y="2697480"/>
-            <a:ext cx="4937760" cy="2468880"/>
+            <a:ext cx="4937760" cy="2743200"/>
           </a:xfrm>
           <a:prstGeom prst="rect">
             <a:avLst/>
@@ -26309,7 +26313,7 @@
               </a:defRPr>
             </a:pPr>
             <a:r>
-              <a:t>MP-Init Works — at Both the Distribution and the Metric</a:t>
+              <a:t>MP-Init Works — in Both Distribution and Metric</a:t>
             </a:r>
           </a:p>
         </p:txBody>
@@ -27862,7 +27866,7 @@
               </a:defRPr>
             </a:pPr>
             <a:r>
-              <a:t>Higher accuracy from stabler training — efficiency-preserving improvements, not accuracy-via-spend.</a:t>
+              <a:t>Higher accuracy from more stable training — efficiency-preserving improvements, not accuracy-via-spend.</a:t>
             </a:r>
           </a:p>
         </p:txBody>

--- a/Hyunho_Kook_Master_Defense.pptx
+++ b/Hyunho_Kook_Master_Defense.pptx
@@ -3966,7 +3966,7 @@
           <a:lstStyle/>
           <a:p>
             <a:pPr>
-              <a:defRPr sz="1100" b="0" i="1">
+              <a:defRPr sz="1200" b="0" i="1">
                 <a:solidFill>
                   <a:srgbClr val="E56945"/>
                 </a:solidFill>
@@ -4119,7 +4119,7 @@
           <a:lstStyle/>
           <a:p>
             <a:pPr>
-              <a:defRPr sz="1100" b="0" i="1">
+              <a:defRPr sz="1200" b="0" i="1">
                 <a:solidFill>
                   <a:srgbClr val="E0B85F"/>
                 </a:solidFill>
@@ -4560,7 +4560,7 @@
           <a:lstStyle/>
           <a:p>
             <a:pPr algn="ctr">
-              <a:defRPr sz="900" b="0" i="1">
+              <a:defRPr sz="1050" b="0" i="1">
                 <a:solidFill>
                   <a:srgbClr val="7A7A7A"/>
                 </a:solidFill>
@@ -7105,7 +7105,7 @@
           <a:lstStyle/>
           <a:p>
             <a:pPr>
-              <a:defRPr sz="900" b="0" i="1">
+              <a:defRPr sz="1050" b="0" i="1">
                 <a:solidFill>
                   <a:srgbClr val="7A7A7A"/>
                 </a:solidFill>
@@ -7258,7 +7258,7 @@
           <a:lstStyle/>
           <a:p>
             <a:pPr>
-              <a:defRPr sz="900" b="0" i="1">
+              <a:defRPr sz="1050" b="0" i="1">
                 <a:solidFill>
                   <a:srgbClr val="7A7A7A"/>
                 </a:solidFill>
@@ -7411,7 +7411,7 @@
           <a:lstStyle/>
           <a:p>
             <a:pPr>
-              <a:defRPr sz="900" b="0" i="1">
+              <a:defRPr sz="1050" b="0" i="1">
                 <a:solidFill>
                   <a:srgbClr val="7A7A7A"/>
                 </a:solidFill>
@@ -8862,7 +8862,7 @@
           <a:lstStyle/>
           <a:p>
             <a:pPr algn="ctr">
-              <a:defRPr sz="1000" b="0" i="1">
+              <a:defRPr sz="1150" b="0" i="1">
                 <a:solidFill>
                   <a:srgbClr val="7A7A7A"/>
                 </a:solidFill>
@@ -8958,7 +8958,7 @@
           <a:lstStyle/>
           <a:p>
             <a:pPr algn="ctr">
-              <a:defRPr sz="1000" b="0" i="1">
+              <a:defRPr sz="1150" b="0" i="1">
                 <a:solidFill>
                   <a:srgbClr val="7A7A7A"/>
                 </a:solidFill>
@@ -8994,7 +8994,7 @@
           <a:lstStyle/>
           <a:p>
             <a:pPr>
-              <a:defRPr sz="1100">
+              <a:defRPr sz="1200">
                 <a:solidFill>
                   <a:srgbClr val="1A1A1A"/>
                 </a:solidFill>
@@ -9010,7 +9010,7 @@
               <a:spcBef>
                 <a:spcPts val="600"/>
               </a:spcBef>
-              <a:defRPr sz="1100">
+              <a:defRPr sz="1200">
                 <a:solidFill>
                   <a:srgbClr val="1A1A1A"/>
                 </a:solidFill>
@@ -10984,7 +10984,7 @@
           <a:lstStyle/>
           <a:p>
             <a:pPr>
-              <a:defRPr sz="1100" b="0" i="0">
+              <a:defRPr sz="1200" b="0" i="0">
                 <a:solidFill>
                   <a:srgbClr val="1A1A1A"/>
                 </a:solidFill>
@@ -11109,7 +11109,7 @@
           <a:lstStyle/>
           <a:p>
             <a:pPr>
-              <a:defRPr sz="1100" b="0" i="0">
+              <a:defRPr sz="1200" b="0" i="0">
                 <a:solidFill>
                   <a:srgbClr val="1A1A1A"/>
                 </a:solidFill>
@@ -11234,7 +11234,7 @@
           <a:lstStyle/>
           <a:p>
             <a:pPr>
-              <a:defRPr sz="1100" b="0" i="0">
+              <a:defRPr sz="1200" b="0" i="0">
                 <a:solidFill>
                   <a:srgbClr val="1A1A1A"/>
                 </a:solidFill>
@@ -11363,7 +11363,7 @@
           <a:lstStyle/>
           <a:p>
             <a:pPr>
-              <a:defRPr sz="1100" b="0" i="0">
+              <a:defRPr sz="1200" b="0" i="0">
                 <a:solidFill>
                   <a:srgbClr val="1A1A1A"/>
                 </a:solidFill>
@@ -11911,7 +11911,7 @@
           <a:lstStyle/>
           <a:p>
             <a:pPr>
-              <a:defRPr sz="1100" b="0" i="0">
+              <a:defRPr sz="1200" b="0" i="0">
                 <a:solidFill>
                   <a:srgbClr val="1A1A1A"/>
                 </a:solidFill>
@@ -12038,7 +12038,7 @@
           <a:lstStyle/>
           <a:p>
             <a:pPr>
-              <a:defRPr sz="1100" b="0" i="0">
+              <a:defRPr sz="1200" b="0" i="0">
                 <a:solidFill>
                   <a:srgbClr val="1A1A1A"/>
                 </a:solidFill>
@@ -12165,7 +12165,7 @@
           <a:lstStyle/>
           <a:p>
             <a:pPr>
-              <a:defRPr sz="1100" b="0" i="0">
+              <a:defRPr sz="1200" b="0" i="0">
                 <a:solidFill>
                   <a:srgbClr val="1A1A1A"/>
                 </a:solidFill>
@@ -14889,7 +14889,7 @@
                     <a:lstStyle/>
                     <a:p>
                       <a:pPr algn="l">
-                        <a:defRPr b="1" sz="1050">
+                        <a:defRPr b="1" sz="1150">
                           <a:solidFill>
                             <a:srgbClr val="0F2540"/>
                           </a:solidFill>
@@ -14913,7 +14913,7 @@
                     <a:lstStyle/>
                     <a:p>
                       <a:pPr algn="ctr">
-                        <a:defRPr sz="1000">
+                        <a:defRPr sz="1150">
                           <a:solidFill>
                             <a:srgbClr val="1A1A1A"/>
                           </a:solidFill>
@@ -14937,7 +14937,7 @@
                     <a:lstStyle/>
                     <a:p>
                       <a:pPr algn="ctr">
-                        <a:defRPr sz="1000">
+                        <a:defRPr sz="1150">
                           <a:solidFill>
                             <a:srgbClr val="1A1A1A"/>
                           </a:solidFill>
@@ -14961,7 +14961,7 @@
                     <a:lstStyle/>
                     <a:p>
                       <a:pPr algn="ctr">
-                        <a:defRPr sz="950">
+                        <a:defRPr sz="1100">
                           <a:solidFill>
                             <a:srgbClr val="1A1A1A"/>
                           </a:solidFill>
@@ -14974,7 +14974,7 @@
                     </a:p>
                     <a:p>
                       <a:pPr algn="ctr">
-                        <a:defRPr sz="950">
+                        <a:defRPr sz="1100">
                           <a:solidFill>
                             <a:srgbClr val="1A1A1A"/>
                           </a:solidFill>
@@ -14998,7 +14998,7 @@
                     <a:lstStyle/>
                     <a:p>
                       <a:pPr algn="ctr">
-                        <a:defRPr sz="950">
+                        <a:defRPr sz="1100">
                           <a:solidFill>
                             <a:srgbClr val="1A1A1A"/>
                           </a:solidFill>
@@ -15024,7 +15024,7 @@
                     <a:lstStyle/>
                     <a:p>
                       <a:pPr algn="l">
-                        <a:defRPr b="1" sz="1050">
+                        <a:defRPr b="1" sz="1150">
                           <a:solidFill>
                             <a:srgbClr val="0F2540"/>
                           </a:solidFill>
@@ -15048,7 +15048,7 @@
                     <a:lstStyle/>
                     <a:p>
                       <a:pPr algn="ctr">
-                        <a:defRPr sz="1000">
+                        <a:defRPr sz="1150">
                           <a:solidFill>
                             <a:srgbClr val="1A1A1A"/>
                           </a:solidFill>
@@ -15072,7 +15072,7 @@
                     <a:lstStyle/>
                     <a:p>
                       <a:pPr algn="ctr">
-                        <a:defRPr sz="1000">
+                        <a:defRPr sz="1150">
                           <a:solidFill>
                             <a:srgbClr val="1A1A1A"/>
                           </a:solidFill>
@@ -15096,7 +15096,7 @@
                     <a:lstStyle/>
                     <a:p>
                       <a:pPr algn="ctr">
-                        <a:defRPr sz="950">
+                        <a:defRPr sz="1100">
                           <a:solidFill>
                             <a:srgbClr val="1A1A1A"/>
                           </a:solidFill>
@@ -15109,7 +15109,7 @@
                     </a:p>
                     <a:p>
                       <a:pPr algn="ctr">
-                        <a:defRPr sz="950">
+                        <a:defRPr sz="1100">
                           <a:solidFill>
                             <a:srgbClr val="1A1A1A"/>
                           </a:solidFill>
@@ -15133,7 +15133,7 @@
                     <a:lstStyle/>
                     <a:p>
                       <a:pPr algn="ctr">
-                        <a:defRPr sz="950">
+                        <a:defRPr sz="1100">
                           <a:solidFill>
                             <a:srgbClr val="1A1A1A"/>
                           </a:solidFill>
@@ -15159,7 +15159,7 @@
                     <a:lstStyle/>
                     <a:p>
                       <a:pPr algn="l">
-                        <a:defRPr b="1" sz="1050">
+                        <a:defRPr b="1" sz="1150">
                           <a:solidFill>
                             <a:srgbClr val="0F2540"/>
                           </a:solidFill>
@@ -15183,7 +15183,7 @@
                     <a:lstStyle/>
                     <a:p>
                       <a:pPr algn="ctr">
-                        <a:defRPr sz="1000">
+                        <a:defRPr sz="1150">
                           <a:solidFill>
                             <a:srgbClr val="1A1A1A"/>
                           </a:solidFill>
@@ -15207,7 +15207,7 @@
                     <a:lstStyle/>
                     <a:p>
                       <a:pPr algn="ctr">
-                        <a:defRPr sz="1000">
+                        <a:defRPr sz="1150">
                           <a:solidFill>
                             <a:srgbClr val="1A1A1A"/>
                           </a:solidFill>
@@ -15231,7 +15231,7 @@
                     <a:lstStyle/>
                     <a:p>
                       <a:pPr algn="ctr">
-                        <a:defRPr sz="950">
+                        <a:defRPr sz="1100">
                           <a:solidFill>
                             <a:srgbClr val="1A1A1A"/>
                           </a:solidFill>
@@ -15244,7 +15244,7 @@
                     </a:p>
                     <a:p>
                       <a:pPr algn="ctr">
-                        <a:defRPr sz="950">
+                        <a:defRPr sz="1100">
                           <a:solidFill>
                             <a:srgbClr val="1A1A1A"/>
                           </a:solidFill>
@@ -15268,7 +15268,7 @@
                     <a:lstStyle/>
                     <a:p>
                       <a:pPr algn="ctr">
-                        <a:defRPr sz="950">
+                        <a:defRPr sz="1100">
                           <a:solidFill>
                             <a:srgbClr val="1A1A1A"/>
                           </a:solidFill>
@@ -15294,7 +15294,7 @@
                     <a:lstStyle/>
                     <a:p>
                       <a:pPr algn="l">
-                        <a:defRPr b="1" sz="1050">
+                        <a:defRPr b="1" sz="1150">
                           <a:solidFill>
                             <a:srgbClr val="0F2540"/>
                           </a:solidFill>
@@ -15318,7 +15318,7 @@
                     <a:lstStyle/>
                     <a:p>
                       <a:pPr algn="ctr">
-                        <a:defRPr sz="1000">
+                        <a:defRPr sz="1150">
                           <a:solidFill>
                             <a:srgbClr val="1A1A1A"/>
                           </a:solidFill>
@@ -15342,7 +15342,7 @@
                     <a:lstStyle/>
                     <a:p>
                       <a:pPr algn="ctr">
-                        <a:defRPr sz="1000">
+                        <a:defRPr sz="1150">
                           <a:solidFill>
                             <a:srgbClr val="1A1A1A"/>
                           </a:solidFill>
@@ -15366,7 +15366,7 @@
                     <a:lstStyle/>
                     <a:p>
                       <a:pPr algn="ctr">
-                        <a:defRPr sz="950">
+                        <a:defRPr sz="1100">
                           <a:solidFill>
                             <a:srgbClr val="1A1A1A"/>
                           </a:solidFill>
@@ -15379,7 +15379,7 @@
                     </a:p>
                     <a:p>
                       <a:pPr algn="ctr">
-                        <a:defRPr sz="950">
+                        <a:defRPr sz="1100">
                           <a:solidFill>
                             <a:srgbClr val="1A1A1A"/>
                           </a:solidFill>
@@ -15403,7 +15403,7 @@
                     <a:lstStyle/>
                     <a:p>
                       <a:pPr algn="ctr">
-                        <a:defRPr sz="950">
+                        <a:defRPr sz="1100">
                           <a:solidFill>
                             <a:srgbClr val="1A1A1A"/>
                           </a:solidFill>
@@ -15429,7 +15429,7 @@
                     <a:lstStyle/>
                     <a:p>
                       <a:pPr algn="l">
-                        <a:defRPr b="1" sz="1050">
+                        <a:defRPr b="1" sz="1150">
                           <a:solidFill>
                             <a:srgbClr val="0F2540"/>
                           </a:solidFill>
@@ -15453,7 +15453,7 @@
                     <a:lstStyle/>
                     <a:p>
                       <a:pPr algn="ctr">
-                        <a:defRPr sz="1000">
+                        <a:defRPr sz="1150">
                           <a:solidFill>
                             <a:srgbClr val="1A1A1A"/>
                           </a:solidFill>
@@ -15477,7 +15477,7 @@
                     <a:lstStyle/>
                     <a:p>
                       <a:pPr algn="ctr">
-                        <a:defRPr sz="1000">
+                        <a:defRPr sz="1150">
                           <a:solidFill>
                             <a:srgbClr val="1A1A1A"/>
                           </a:solidFill>
@@ -15501,7 +15501,7 @@
                     <a:lstStyle/>
                     <a:p>
                       <a:pPr algn="ctr">
-                        <a:defRPr sz="950">
+                        <a:defRPr sz="1100">
                           <a:solidFill>
                             <a:srgbClr val="1A1A1A"/>
                           </a:solidFill>
@@ -15514,7 +15514,7 @@
                     </a:p>
                     <a:p>
                       <a:pPr algn="ctr">
-                        <a:defRPr sz="950">
+                        <a:defRPr sz="1100">
                           <a:solidFill>
                             <a:srgbClr val="1A1A1A"/>
                           </a:solidFill>
@@ -15538,7 +15538,7 @@
                     <a:lstStyle/>
                     <a:p>
                       <a:pPr algn="ctr">
-                        <a:defRPr sz="950">
+                        <a:defRPr sz="1100">
                           <a:solidFill>
                             <a:srgbClr val="1A1A1A"/>
                           </a:solidFill>
@@ -15564,7 +15564,7 @@
                     <a:lstStyle/>
                     <a:p>
                       <a:pPr algn="l">
-                        <a:defRPr b="1" sz="1050">
+                        <a:defRPr b="1" sz="1150">
                           <a:solidFill>
                             <a:srgbClr val="0F2540"/>
                           </a:solidFill>
@@ -15588,7 +15588,7 @@
                     <a:lstStyle/>
                     <a:p>
                       <a:pPr algn="ctr">
-                        <a:defRPr sz="1000">
+                        <a:defRPr sz="1150">
                           <a:solidFill>
                             <a:srgbClr val="1A1A1A"/>
                           </a:solidFill>
@@ -15612,7 +15612,7 @@
                     <a:lstStyle/>
                     <a:p>
                       <a:pPr algn="ctr">
-                        <a:defRPr sz="1000">
+                        <a:defRPr sz="1150">
                           <a:solidFill>
                             <a:srgbClr val="1A1A1A"/>
                           </a:solidFill>
@@ -15636,7 +15636,7 @@
                     <a:lstStyle/>
                     <a:p>
                       <a:pPr algn="ctr">
-                        <a:defRPr sz="950">
+                        <a:defRPr sz="1100">
                           <a:solidFill>
                             <a:srgbClr val="1A1A1A"/>
                           </a:solidFill>
@@ -15649,7 +15649,7 @@
                     </a:p>
                     <a:p>
                       <a:pPr algn="ctr">
-                        <a:defRPr sz="950">
+                        <a:defRPr sz="1100">
                           <a:solidFill>
                             <a:srgbClr val="1A1A1A"/>
                           </a:solidFill>
@@ -15673,7 +15673,7 @@
                     <a:lstStyle/>
                     <a:p>
                       <a:pPr algn="ctr">
-                        <a:defRPr sz="950">
+                        <a:defRPr sz="1100">
                           <a:solidFill>
                             <a:srgbClr val="1A1A1A"/>
                           </a:solidFill>
@@ -15699,7 +15699,7 @@
                     <a:lstStyle/>
                     <a:p>
                       <a:pPr algn="l">
-                        <a:defRPr b="1" sz="1050">
+                        <a:defRPr b="1" sz="1150">
                           <a:solidFill>
                             <a:srgbClr val="0F2540"/>
                           </a:solidFill>
@@ -15723,7 +15723,7 @@
                     <a:lstStyle/>
                     <a:p>
                       <a:pPr algn="ctr">
-                        <a:defRPr sz="1000">
+                        <a:defRPr sz="1150">
                           <a:solidFill>
                             <a:srgbClr val="1A1A1A"/>
                           </a:solidFill>
@@ -15747,7 +15747,7 @@
                     <a:lstStyle/>
                     <a:p>
                       <a:pPr algn="ctr">
-                        <a:defRPr sz="1000">
+                        <a:defRPr sz="1150">
                           <a:solidFill>
                             <a:srgbClr val="1A1A1A"/>
                           </a:solidFill>
@@ -15771,7 +15771,7 @@
                     <a:lstStyle/>
                     <a:p>
                       <a:pPr algn="ctr">
-                        <a:defRPr sz="950">
+                        <a:defRPr sz="1100">
                           <a:solidFill>
                             <a:srgbClr val="1A1A1A"/>
                           </a:solidFill>
@@ -15795,7 +15795,7 @@
                     <a:lstStyle/>
                     <a:p>
                       <a:pPr algn="ctr">
-                        <a:defRPr sz="950">
+                        <a:defRPr sz="1100">
                           <a:solidFill>
                             <a:srgbClr val="1A1A1A"/>
                           </a:solidFill>
@@ -15841,7 +15841,7 @@
           <a:lstStyle/>
           <a:p>
             <a:pPr>
-              <a:defRPr sz="850" b="0" i="1">
+              <a:defRPr sz="1000" b="0" i="1">
                 <a:solidFill>
                   <a:srgbClr val="7A7A7A"/>
                 </a:solidFill>
@@ -16243,7 +16243,7 @@
           <a:lstStyle/>
           <a:p>
             <a:pPr>
-              <a:defRPr sz="1100" b="0" i="0">
+              <a:defRPr sz="1200" b="0" i="0">
                 <a:solidFill>
                   <a:srgbClr val="1A1A1A"/>
                 </a:solidFill>
@@ -16482,7 +16482,7 @@
           <a:lstStyle/>
           <a:p>
             <a:pPr>
-              <a:defRPr sz="1100" b="0" i="0">
+              <a:defRPr sz="1200" b="0" i="0">
                 <a:solidFill>
                   <a:srgbClr val="1A1A1A"/>
                 </a:solidFill>
@@ -16721,7 +16721,7 @@
           <a:lstStyle/>
           <a:p>
             <a:pPr>
-              <a:defRPr sz="1100" b="0" i="0">
+              <a:defRPr sz="1200" b="0" i="0">
                 <a:solidFill>
                   <a:srgbClr val="1A1A1A"/>
                 </a:solidFill>
@@ -16946,7 +16946,7 @@
           <a:lstStyle/>
           <a:p>
             <a:pPr>
-              <a:defRPr sz="1100" b="1">
+              <a:defRPr sz="1200" b="1">
                 <a:solidFill>
                   <a:srgbClr val="E0B85F"/>
                 </a:solidFill>
@@ -16962,7 +16962,7 @@
               <a:spcBef>
                 <a:spcPts val="600"/>
               </a:spcBef>
-              <a:defRPr sz="1000">
+              <a:defRPr sz="1100">
                 <a:solidFill>
                   <a:srgbClr val="FFFFFF"/>
                 </a:solidFill>
@@ -17654,7 +17654,7 @@
           <a:lstStyle/>
           <a:p>
             <a:pPr>
-              <a:defRPr sz="1050" b="1">
+              <a:defRPr sz="1150" b="1">
                 <a:solidFill>
                   <a:srgbClr val="E0B85F"/>
                 </a:solidFill>
@@ -17670,7 +17670,7 @@
               <a:spcBef>
                 <a:spcPts val="600"/>
               </a:spcBef>
-              <a:defRPr sz="950">
+              <a:defRPr sz="1050">
                 <a:solidFill>
                   <a:srgbClr val="FFFFFF"/>
                 </a:solidFill>
@@ -17706,7 +17706,7 @@
           <a:lstStyle/>
           <a:p>
             <a:pPr>
-              <a:defRPr sz="850" b="0" i="1">
+              <a:defRPr sz="1000" b="0" i="1">
                 <a:solidFill>
                   <a:srgbClr val="7A7A7A"/>
                 </a:solidFill>
@@ -18020,7 +18020,7 @@
           <a:lstStyle/>
           <a:p>
             <a:pPr>
-              <a:defRPr sz="1100" b="0" i="0">
+              <a:defRPr sz="1200" b="0" i="0">
                 <a:solidFill>
                   <a:srgbClr val="1A1A1A"/>
                 </a:solidFill>
@@ -18747,7 +18747,7 @@
                     <a:lstStyle/>
                     <a:p>
                       <a:pPr algn="l">
-                        <a:defRPr b="1" sz="1050">
+                        <a:defRPr b="1" sz="1150">
                           <a:solidFill>
                             <a:srgbClr val="1D7E7E"/>
                           </a:solidFill>
@@ -18771,7 +18771,7 @@
                     <a:lstStyle/>
                     <a:p>
                       <a:pPr algn="l">
-                        <a:defRPr sz="1000">
+                        <a:defRPr sz="1150">
                           <a:solidFill>
                             <a:srgbClr val="1A1A1A"/>
                           </a:solidFill>
@@ -18795,7 +18795,7 @@
                     <a:lstStyle/>
                     <a:p>
                       <a:pPr algn="ctr">
-                        <a:defRPr sz="1000">
+                        <a:defRPr sz="1150">
                           <a:solidFill>
                             <a:srgbClr val="1A1A1A"/>
                           </a:solidFill>
@@ -18821,7 +18821,7 @@
                     <a:lstStyle/>
                     <a:p>
                       <a:pPr algn="l">
-                        <a:defRPr b="1" sz="1050">
+                        <a:defRPr b="1" sz="1150">
                           <a:solidFill>
                             <a:srgbClr val="0F2540"/>
                           </a:solidFill>
@@ -18845,7 +18845,7 @@
                     <a:lstStyle/>
                     <a:p>
                       <a:pPr algn="l">
-                        <a:defRPr sz="1000">
+                        <a:defRPr sz="1150">
                           <a:solidFill>
                             <a:srgbClr val="1A1A1A"/>
                           </a:solidFill>
@@ -18869,7 +18869,7 @@
                     <a:lstStyle/>
                     <a:p>
                       <a:pPr algn="ctr">
-                        <a:defRPr sz="1000">
+                        <a:defRPr sz="1150">
                           <a:solidFill>
                             <a:srgbClr val="1A1A1A"/>
                           </a:solidFill>
@@ -18895,7 +18895,7 @@
                     <a:lstStyle/>
                     <a:p>
                       <a:pPr algn="l">
-                        <a:defRPr b="1" sz="1050">
+                        <a:defRPr b="1" sz="1150">
                           <a:solidFill>
                             <a:srgbClr val="0F2540"/>
                           </a:solidFill>
@@ -18919,7 +18919,7 @@
                     <a:lstStyle/>
                     <a:p>
                       <a:pPr algn="l">
-                        <a:defRPr sz="1000">
+                        <a:defRPr sz="1150">
                           <a:solidFill>
                             <a:srgbClr val="1A1A1A"/>
                           </a:solidFill>
@@ -18943,7 +18943,7 @@
                     <a:lstStyle/>
                     <a:p>
                       <a:pPr algn="ctr">
-                        <a:defRPr sz="1000">
+                        <a:defRPr sz="1150">
                           <a:solidFill>
                             <a:srgbClr val="1A1A1A"/>
                           </a:solidFill>
@@ -18969,7 +18969,7 @@
                     <a:lstStyle/>
                     <a:p>
                       <a:pPr algn="l">
-                        <a:defRPr b="1" sz="1050">
+                        <a:defRPr b="1" sz="1150">
                           <a:solidFill>
                             <a:srgbClr val="0F2540"/>
                           </a:solidFill>
@@ -18993,7 +18993,7 @@
                     <a:lstStyle/>
                     <a:p>
                       <a:pPr algn="l">
-                        <a:defRPr sz="1000">
+                        <a:defRPr sz="1150">
                           <a:solidFill>
                             <a:srgbClr val="1A1A1A"/>
                           </a:solidFill>
@@ -19017,7 +19017,7 @@
                     <a:lstStyle/>
                     <a:p>
                       <a:pPr algn="ctr">
-                        <a:defRPr sz="1000">
+                        <a:defRPr sz="1150">
                           <a:solidFill>
                             <a:srgbClr val="1A1A1A"/>
                           </a:solidFill>
@@ -19043,7 +19043,7 @@
                     <a:lstStyle/>
                     <a:p>
                       <a:pPr algn="l">
-                        <a:defRPr b="1" sz="1050">
+                        <a:defRPr b="1" sz="1150">
                           <a:solidFill>
                             <a:srgbClr val="0F2540"/>
                           </a:solidFill>
@@ -19067,7 +19067,7 @@
                     <a:lstStyle/>
                     <a:p>
                       <a:pPr algn="l">
-                        <a:defRPr sz="1000">
+                        <a:defRPr sz="1150">
                           <a:solidFill>
                             <a:srgbClr val="1A1A1A"/>
                           </a:solidFill>
@@ -19091,7 +19091,7 @@
                     <a:lstStyle/>
                     <a:p>
                       <a:pPr algn="ctr">
-                        <a:defRPr sz="1000">
+                        <a:defRPr sz="1150">
                           <a:solidFill>
                             <a:srgbClr val="1A1A1A"/>
                           </a:solidFill>
@@ -19117,7 +19117,7 @@
                     <a:lstStyle/>
                     <a:p>
                       <a:pPr algn="l">
-                        <a:defRPr b="1" sz="1050">
+                        <a:defRPr b="1" sz="1150">
                           <a:solidFill>
                             <a:srgbClr val="0F2540"/>
                           </a:solidFill>
@@ -19141,7 +19141,7 @@
                     <a:lstStyle/>
                     <a:p>
                       <a:pPr algn="l">
-                        <a:defRPr sz="1000">
+                        <a:defRPr sz="1150">
                           <a:solidFill>
                             <a:srgbClr val="1A1A1A"/>
                           </a:solidFill>
@@ -19165,7 +19165,7 @@
                     <a:lstStyle/>
                     <a:p>
                       <a:pPr algn="ctr">
-                        <a:defRPr sz="1000">
+                        <a:defRPr sz="1150">
                           <a:solidFill>
                             <a:srgbClr val="1A1A1A"/>
                           </a:solidFill>
@@ -19191,7 +19191,7 @@
                     <a:lstStyle/>
                     <a:p>
                       <a:pPr algn="l">
-                        <a:defRPr b="1" sz="1050">
+                        <a:defRPr b="1" sz="1150">
                           <a:solidFill>
                             <a:srgbClr val="0F2540"/>
                           </a:solidFill>
@@ -19215,7 +19215,7 @@
                     <a:lstStyle/>
                     <a:p>
                       <a:pPr algn="l">
-                        <a:defRPr sz="1000">
+                        <a:defRPr sz="1150">
                           <a:solidFill>
                             <a:srgbClr val="1A1A1A"/>
                           </a:solidFill>
@@ -19239,7 +19239,7 @@
                     <a:lstStyle/>
                     <a:p>
                       <a:pPr algn="ctr">
-                        <a:defRPr sz="1000">
+                        <a:defRPr sz="1150">
                           <a:solidFill>
                             <a:srgbClr val="1A1A1A"/>
                           </a:solidFill>
@@ -19285,7 +19285,7 @@
           <a:lstStyle/>
           <a:p>
             <a:pPr>
-              <a:defRPr sz="900" b="0" i="1">
+              <a:defRPr sz="1050" b="0" i="1">
                 <a:solidFill>
                   <a:srgbClr val="7A7A7A"/>
                 </a:solidFill>
@@ -20654,7 +20654,7 @@
           <a:lstStyle/>
           <a:p>
             <a:pPr>
-              <a:defRPr sz="850" b="0" i="1">
+              <a:defRPr sz="1000" b="0" i="1">
                 <a:solidFill>
                   <a:srgbClr val="7A7A7A"/>
                 </a:solidFill>
@@ -20866,7 +20866,7 @@
           <a:lstStyle/>
           <a:p>
             <a:pPr>
-              <a:defRPr sz="850" b="0" i="1">
+              <a:defRPr sz="1000" b="0" i="1">
                 <a:solidFill>
                   <a:srgbClr val="7A7A7A"/>
                 </a:solidFill>
@@ -21070,7 +21070,7 @@
           <a:lstStyle/>
           <a:p>
             <a:pPr>
-              <a:defRPr sz="850" b="0" i="1">
+              <a:defRPr sz="1000" b="0" i="1">
                 <a:solidFill>
                   <a:srgbClr val="7A7A7A"/>
                 </a:solidFill>
@@ -21274,7 +21274,7 @@
           <a:lstStyle/>
           <a:p>
             <a:pPr>
-              <a:defRPr sz="850" b="0" i="1">
+              <a:defRPr sz="1000" b="0" i="1">
                 <a:solidFill>
                   <a:srgbClr val="7A7A7A"/>
                 </a:solidFill>
@@ -21599,7 +21599,7 @@
                     <a:lstStyle/>
                     <a:p>
                       <a:pPr algn="l">
-                        <a:defRPr sz="1050" b="1">
+                        <a:defRPr sz="1200" b="1">
                           <a:solidFill>
                             <a:srgbClr val="FFFFFF"/>
                           </a:solidFill>
@@ -21623,7 +21623,7 @@
                     <a:lstStyle/>
                     <a:p>
                       <a:pPr algn="l">
-                        <a:defRPr sz="1050" b="1">
+                        <a:defRPr sz="1200" b="1">
                           <a:solidFill>
                             <a:srgbClr val="FFFFFF"/>
                           </a:solidFill>
@@ -21647,7 +21647,7 @@
                     <a:lstStyle/>
                     <a:p>
                       <a:pPr algn="l">
-                        <a:defRPr sz="1050" b="1">
+                        <a:defRPr sz="1200" b="1">
                           <a:solidFill>
                             <a:srgbClr val="FFFFFF"/>
                           </a:solidFill>
@@ -21673,7 +21673,7 @@
                     <a:lstStyle/>
                     <a:p>
                       <a:pPr algn="l">
-                        <a:defRPr sz="1000" b="1">
+                        <a:defRPr sz="1150" b="1">
                           <a:solidFill>
                             <a:srgbClr val="0F2540"/>
                           </a:solidFill>
@@ -21697,7 +21697,7 @@
                     <a:lstStyle/>
                     <a:p>
                       <a:pPr algn="l">
-                        <a:defRPr sz="950">
+                        <a:defRPr sz="1100">
                           <a:solidFill>
                             <a:srgbClr val="1A1A1A"/>
                           </a:solidFill>
@@ -21721,7 +21721,7 @@
                     <a:lstStyle/>
                     <a:p>
                       <a:pPr algn="l">
-                        <a:defRPr sz="950" i="1">
+                        <a:defRPr sz="1100" i="1">
                           <a:solidFill>
                             <a:srgbClr val="E56945"/>
                           </a:solidFill>
@@ -21747,7 +21747,7 @@
                     <a:lstStyle/>
                     <a:p>
                       <a:pPr algn="l">
-                        <a:defRPr sz="1000" b="1">
+                        <a:defRPr sz="1150" b="1">
                           <a:solidFill>
                             <a:srgbClr val="0F2540"/>
                           </a:solidFill>
@@ -21771,7 +21771,7 @@
                     <a:lstStyle/>
                     <a:p>
                       <a:pPr algn="l">
-                        <a:defRPr sz="950">
+                        <a:defRPr sz="1100">
                           <a:solidFill>
                             <a:srgbClr val="1A1A1A"/>
                           </a:solidFill>
@@ -21795,7 +21795,7 @@
                     <a:lstStyle/>
                     <a:p>
                       <a:pPr algn="l">
-                        <a:defRPr sz="950" i="1">
+                        <a:defRPr sz="1100" i="1">
                           <a:solidFill>
                             <a:srgbClr val="E56945"/>
                           </a:solidFill>
@@ -21821,7 +21821,7 @@
                     <a:lstStyle/>
                     <a:p>
                       <a:pPr algn="l">
-                        <a:defRPr sz="1000" b="1">
+                        <a:defRPr sz="1150" b="1">
                           <a:solidFill>
                             <a:srgbClr val="0F2540"/>
                           </a:solidFill>
@@ -21845,7 +21845,7 @@
                     <a:lstStyle/>
                     <a:p>
                       <a:pPr algn="l">
-                        <a:defRPr sz="950">
+                        <a:defRPr sz="1100">
                           <a:solidFill>
                             <a:srgbClr val="1A1A1A"/>
                           </a:solidFill>
@@ -21869,7 +21869,7 @@
                     <a:lstStyle/>
                     <a:p>
                       <a:pPr algn="l">
-                        <a:defRPr sz="950" i="1">
+                        <a:defRPr sz="1100" i="1">
                           <a:solidFill>
                             <a:srgbClr val="E56945"/>
                           </a:solidFill>
@@ -21895,7 +21895,7 @@
                     <a:lstStyle/>
                     <a:p>
                       <a:pPr algn="l">
-                        <a:defRPr sz="1000" b="1">
+                        <a:defRPr sz="1150" b="1">
                           <a:solidFill>
                             <a:srgbClr val="0F2540"/>
                           </a:solidFill>
@@ -21919,7 +21919,7 @@
                     <a:lstStyle/>
                     <a:p>
                       <a:pPr algn="l">
-                        <a:defRPr sz="950">
+                        <a:defRPr sz="1100">
                           <a:solidFill>
                             <a:srgbClr val="1A1A1A"/>
                           </a:solidFill>
@@ -21943,7 +21943,7 @@
                     <a:lstStyle/>
                     <a:p>
                       <a:pPr algn="l">
-                        <a:defRPr sz="950" i="1">
+                        <a:defRPr sz="1100" i="1">
                           <a:solidFill>
                             <a:srgbClr val="E56945"/>
                           </a:solidFill>
@@ -22075,7 +22075,7 @@
           <a:lstStyle/>
           <a:p>
             <a:pPr>
-              <a:defRPr sz="1100" b="1">
+              <a:defRPr sz="1200" b="1">
                 <a:solidFill>
                   <a:srgbClr val="1D7E7E"/>
                 </a:solidFill>
@@ -22091,7 +22091,7 @@
               <a:spcBef>
                 <a:spcPts val="600"/>
               </a:spcBef>
-              <a:defRPr sz="1000">
+              <a:defRPr sz="1100">
                 <a:solidFill>
                   <a:srgbClr val="1A1A1A"/>
                 </a:solidFill>
@@ -22170,7 +22170,7 @@
                     <a:lstStyle/>
                     <a:p>
                       <a:pPr algn="l">
-                        <a:defRPr sz="1050" b="1">
+                        <a:defRPr sz="1200" b="1">
                           <a:solidFill>
                             <a:srgbClr val="FFFFFF"/>
                           </a:solidFill>
@@ -22194,7 +22194,7 @@
                     <a:lstStyle/>
                     <a:p>
                       <a:pPr algn="l">
-                        <a:defRPr sz="1050" b="1">
+                        <a:defRPr sz="1200" b="1">
                           <a:solidFill>
                             <a:srgbClr val="FFFFFF"/>
                           </a:solidFill>
@@ -22218,7 +22218,7 @@
                     <a:lstStyle/>
                     <a:p>
                       <a:pPr algn="l">
-                        <a:defRPr sz="1050" b="1">
+                        <a:defRPr sz="1200" b="1">
                           <a:solidFill>
                             <a:srgbClr val="FFFFFF"/>
                           </a:solidFill>
@@ -22244,7 +22244,7 @@
                     <a:lstStyle/>
                     <a:p>
                       <a:pPr algn="l">
-                        <a:defRPr sz="1000" b="1">
+                        <a:defRPr sz="1150" b="1">
                           <a:solidFill>
                             <a:srgbClr val="0F2540"/>
                           </a:solidFill>
@@ -22268,7 +22268,7 @@
                     <a:lstStyle/>
                     <a:p>
                       <a:pPr algn="l">
-                        <a:defRPr sz="950">
+                        <a:defRPr sz="1100">
                           <a:solidFill>
                             <a:srgbClr val="1A1A1A"/>
                           </a:solidFill>
@@ -22292,7 +22292,7 @@
                     <a:lstStyle/>
                     <a:p>
                       <a:pPr algn="l">
-                        <a:defRPr sz="950" i="1">
+                        <a:defRPr sz="1100" i="1">
                           <a:solidFill>
                             <a:srgbClr val="E56945"/>
                           </a:solidFill>
@@ -22318,7 +22318,7 @@
                     <a:lstStyle/>
                     <a:p>
                       <a:pPr algn="l">
-                        <a:defRPr sz="1000" b="1">
+                        <a:defRPr sz="1150" b="1">
                           <a:solidFill>
                             <a:srgbClr val="0F2540"/>
                           </a:solidFill>
@@ -22342,7 +22342,7 @@
                     <a:lstStyle/>
                     <a:p>
                       <a:pPr algn="l">
-                        <a:defRPr sz="950">
+                        <a:defRPr sz="1100">
                           <a:solidFill>
                             <a:srgbClr val="1A1A1A"/>
                           </a:solidFill>
@@ -22366,7 +22366,7 @@
                     <a:lstStyle/>
                     <a:p>
                       <a:pPr algn="l">
-                        <a:defRPr sz="950" i="1">
+                        <a:defRPr sz="1100" i="1">
                           <a:solidFill>
                             <a:srgbClr val="E56945"/>
                           </a:solidFill>
@@ -22392,7 +22392,7 @@
                     <a:lstStyle/>
                     <a:p>
                       <a:pPr algn="l">
-                        <a:defRPr sz="1000" b="1">
+                        <a:defRPr sz="1150" b="1">
                           <a:solidFill>
                             <a:srgbClr val="0F2540"/>
                           </a:solidFill>
@@ -22416,7 +22416,7 @@
                     <a:lstStyle/>
                     <a:p>
                       <a:pPr algn="l">
-                        <a:defRPr sz="950">
+                        <a:defRPr sz="1100">
                           <a:solidFill>
                             <a:srgbClr val="1A1A1A"/>
                           </a:solidFill>
@@ -22440,7 +22440,7 @@
                     <a:lstStyle/>
                     <a:p>
                       <a:pPr algn="l">
-                        <a:defRPr sz="950" i="1">
+                        <a:defRPr sz="1100" i="1">
                           <a:solidFill>
                             <a:srgbClr val="E56945"/>
                           </a:solidFill>
@@ -22466,7 +22466,7 @@
                     <a:lstStyle/>
                     <a:p>
                       <a:pPr algn="l">
-                        <a:defRPr sz="1000" b="1">
+                        <a:defRPr sz="1150" b="1">
                           <a:solidFill>
                             <a:srgbClr val="1D7E7E"/>
                           </a:solidFill>
@@ -22490,7 +22490,7 @@
                     <a:lstStyle/>
                     <a:p>
                       <a:pPr algn="l">
-                        <a:defRPr sz="950" b="1">
+                        <a:defRPr sz="1100" b="1">
                           <a:solidFill>
                             <a:srgbClr val="1D7E7E"/>
                           </a:solidFill>
@@ -22646,7 +22646,7 @@
           <a:lstStyle/>
           <a:p>
             <a:pPr>
-              <a:defRPr sz="1100" b="1">
+              <a:defRPr sz="1200" b="1">
                 <a:solidFill>
                   <a:srgbClr val="E0B85F"/>
                 </a:solidFill>
@@ -22662,7 +22662,7 @@
               <a:spcBef>
                 <a:spcPts val="600"/>
               </a:spcBef>
-              <a:defRPr sz="1000">
+              <a:defRPr sz="1100">
                 <a:solidFill>
                   <a:srgbClr val="FFFFFF"/>
                 </a:solidFill>
@@ -23344,7 +23344,7 @@
           <a:lstStyle/>
           <a:p>
             <a:pPr algn="ctr">
-              <a:defRPr sz="1000" b="0" i="1">
+              <a:defRPr sz="1150" b="0" i="1">
                 <a:solidFill>
                   <a:srgbClr val="7A7A7A"/>
                 </a:solidFill>
@@ -23416,7 +23416,7 @@
           <a:lstStyle/>
           <a:p>
             <a:pPr>
-              <a:defRPr sz="1100" b="0" i="0">
+              <a:defRPr sz="1200" b="0" i="0">
                 <a:solidFill>
                   <a:srgbClr val="1A1A1A"/>
                 </a:solidFill>
@@ -24367,7 +24367,7 @@
           <a:lstStyle/>
           <a:p>
             <a:pPr>
-              <a:defRPr sz="1100">
+              <a:defRPr sz="1200">
                 <a:solidFill>
                   <a:srgbClr val="1A1A1A"/>
                 </a:solidFill>
@@ -24383,7 +24383,7 @@
               <a:spcBef>
                 <a:spcPts val="600"/>
               </a:spcBef>
-              <a:defRPr sz="1100">
+              <a:defRPr sz="1200">
                 <a:solidFill>
                   <a:srgbClr val="1A1A1A"/>
                 </a:solidFill>
@@ -24399,7 +24399,7 @@
               <a:spcBef>
                 <a:spcPts val="600"/>
               </a:spcBef>
-              <a:defRPr sz="1100">
+              <a:defRPr sz="1200">
                 <a:solidFill>
                   <a:srgbClr val="1A1A1A"/>
                 </a:solidFill>
@@ -24516,7 +24516,7 @@
           <a:lstStyle/>
           <a:p>
             <a:pPr>
-              <a:defRPr sz="1100">
+              <a:defRPr sz="1200">
                 <a:solidFill>
                   <a:srgbClr val="1A1A1A"/>
                 </a:solidFill>
@@ -24532,7 +24532,7 @@
               <a:spcBef>
                 <a:spcPts val="600"/>
               </a:spcBef>
-              <a:defRPr sz="1100">
+              <a:defRPr sz="1200">
                 <a:solidFill>
                   <a:srgbClr val="1A1A1A"/>
                 </a:solidFill>
@@ -24548,7 +24548,7 @@
               <a:spcBef>
                 <a:spcPts val="600"/>
               </a:spcBef>
-              <a:defRPr sz="1100">
+              <a:defRPr sz="1200">
                 <a:solidFill>
                   <a:srgbClr val="1A1A1A"/>
                 </a:solidFill>
@@ -25246,7 +25246,7 @@
           <a:lstStyle/>
           <a:p>
             <a:pPr>
-              <a:defRPr sz="1100">
+              <a:defRPr sz="1200">
                 <a:solidFill>
                   <a:srgbClr val="1A1A1A"/>
                 </a:solidFill>
@@ -25262,7 +25262,7 @@
               <a:spcBef>
                 <a:spcPts val="600"/>
               </a:spcBef>
-              <a:defRPr sz="1100">
+              <a:defRPr sz="1200">
                 <a:solidFill>
                   <a:srgbClr val="1A1A1A"/>
                 </a:solidFill>
@@ -25278,7 +25278,7 @@
               <a:spcBef>
                 <a:spcPts val="600"/>
               </a:spcBef>
-              <a:defRPr sz="1100">
+              <a:defRPr sz="1200">
                 <a:solidFill>
                   <a:srgbClr val="1A1A1A"/>
                 </a:solidFill>
@@ -25374,7 +25374,7 @@
           <a:lstStyle/>
           <a:p>
             <a:pPr algn="ctr">
-              <a:defRPr sz="1000" b="0" i="1">
+              <a:defRPr sz="1150" b="0" i="1">
                 <a:solidFill>
                   <a:srgbClr val="7A7A7A"/>
                 </a:solidFill>
@@ -25929,7 +25929,7 @@
           <a:lstStyle/>
           <a:p>
             <a:pPr>
-              <a:defRPr sz="1150">
+              <a:defRPr sz="1250">
                 <a:solidFill>
                   <a:srgbClr val="FFFFFF"/>
                 </a:solidFill>
@@ -25942,7 +25942,7 @@
           </a:p>
           <a:p>
             <a:pPr>
-              <a:defRPr sz="1150">
+              <a:defRPr sz="1250">
                 <a:solidFill>
                   <a:srgbClr val="FFFFFF"/>
                 </a:solidFill>
@@ -25952,7 +25952,7 @@
           </a:p>
           <a:p>
             <a:pPr>
-              <a:defRPr sz="1150">
+              <a:defRPr sz="1250">
                 <a:solidFill>
                   <a:srgbClr val="FFFFFF"/>
                 </a:solidFill>
@@ -25965,7 +25965,7 @@
           </a:p>
           <a:p>
             <a:pPr>
-              <a:defRPr sz="1150">
+              <a:defRPr sz="1250">
                 <a:solidFill>
                   <a:srgbClr val="FFFFFF"/>
                 </a:solidFill>
@@ -25978,7 +25978,7 @@
           </a:p>
           <a:p>
             <a:pPr>
-              <a:defRPr sz="1150">
+              <a:defRPr sz="1250">
                 <a:solidFill>
                   <a:srgbClr val="FFFFFF"/>
                 </a:solidFill>
@@ -25991,7 +25991,7 @@
           </a:p>
           <a:p>
             <a:pPr>
-              <a:defRPr sz="1150">
+              <a:defRPr sz="1250">
                 <a:solidFill>
                   <a:srgbClr val="FFFFFF"/>
                 </a:solidFill>
@@ -26004,7 +26004,7 @@
           </a:p>
           <a:p>
             <a:pPr>
-              <a:defRPr sz="1150">
+              <a:defRPr sz="1250">
                 <a:solidFill>
                   <a:srgbClr val="FFFFFF"/>
                 </a:solidFill>
@@ -26473,7 +26473,7 @@
           <a:lstStyle/>
           <a:p>
             <a:pPr algn="ctr">
-              <a:defRPr sz="1000" b="0" i="0">
+              <a:defRPr sz="1300" b="0" i="0">
                 <a:solidFill>
                   <a:srgbClr val="7A7A7A"/>
                 </a:solidFill>
@@ -26509,7 +26509,7 @@
           <a:lstStyle/>
           <a:p>
             <a:pPr algn="ctr">
-              <a:defRPr sz="1000" b="0" i="0">
+              <a:defRPr sz="1300" b="0" i="0">
                 <a:solidFill>
                   <a:srgbClr val="7A7A7A"/>
                 </a:solidFill>
@@ -26545,7 +26545,7 @@
           <a:lstStyle/>
           <a:p>
             <a:pPr algn="ctr">
-              <a:defRPr sz="1000" b="0" i="0">
+              <a:defRPr sz="1300" b="0" i="0">
                 <a:solidFill>
                   <a:srgbClr val="7A7A7A"/>
                 </a:solidFill>
@@ -26581,7 +26581,7 @@
           <a:lstStyle/>
           <a:p>
             <a:pPr algn="ctr">
-              <a:defRPr sz="1000" b="1" i="0">
+              <a:defRPr sz="1300" b="1" i="0">
                 <a:solidFill>
                   <a:srgbClr val="1D7E7E"/>
                 </a:solidFill>
@@ -27504,7 +27504,7 @@
           <a:lstStyle/>
           <a:p>
             <a:pPr algn="ctr">
-              <a:defRPr sz="1000" b="0" i="1">
+              <a:defRPr sz="1150" b="0" i="1">
                 <a:solidFill>
                   <a:srgbClr val="7A7A7A"/>
                 </a:solidFill>
@@ -27540,7 +27540,7 @@
           <a:lstStyle/>
           <a:p>
             <a:pPr>
-              <a:defRPr sz="1100">
+              <a:defRPr sz="1200">
                 <a:solidFill>
                   <a:srgbClr val="1A1A1A"/>
                 </a:solidFill>
@@ -27556,7 +27556,7 @@
               <a:spcBef>
                 <a:spcPts val="600"/>
               </a:spcBef>
-              <a:defRPr sz="1100">
+              <a:defRPr sz="1200">
                 <a:solidFill>
                   <a:srgbClr val="1A1A1A"/>
                 </a:solidFill>
@@ -27572,7 +27572,7 @@
               <a:spcBef>
                 <a:spcPts val="600"/>
               </a:spcBef>
-              <a:defRPr sz="1100">
+              <a:defRPr sz="1200">
                 <a:solidFill>
                   <a:srgbClr val="1A1A1A"/>
                 </a:solidFill>
@@ -27668,7 +27668,7 @@
           <a:lstStyle/>
           <a:p>
             <a:pPr algn="ctr">
-              <a:defRPr sz="1000" b="0" i="1">
+              <a:defRPr sz="1150" b="0" i="1">
                 <a:solidFill>
                   <a:srgbClr val="7A7A7A"/>
                 </a:solidFill>
@@ -27704,7 +27704,7 @@
           <a:lstStyle/>
           <a:p>
             <a:pPr>
-              <a:defRPr sz="1100">
+              <a:defRPr sz="1200">
                 <a:solidFill>
                   <a:srgbClr val="1A1A1A"/>
                 </a:solidFill>
@@ -27720,7 +27720,7 @@
               <a:spcBef>
                 <a:spcPts val="600"/>
               </a:spcBef>
-              <a:defRPr sz="1100">
+              <a:defRPr sz="1200">
                 <a:solidFill>
                   <a:srgbClr val="1A1A1A"/>
                 </a:solidFill>
@@ -27736,7 +27736,7 @@
               <a:spcBef>
                 <a:spcPts val="600"/>
               </a:spcBef>
-              <a:defRPr sz="1100">
+              <a:defRPr sz="1200">
                 <a:solidFill>
                   <a:srgbClr val="1A1A1A"/>
                 </a:solidFill>

--- a/Hyunho_Kook_Master_Defense.pptx
+++ b/Hyunho_Kook_Master_Defense.pptx
@@ -4301,7 +4301,7 @@
           <a:lstStyle/>
           <a:p>
             <a:pPr>
-              <a:defRPr sz="1100" b="1">
+              <a:defRPr sz="1200" b="1">
                 <a:solidFill>
                   <a:srgbClr val="E0B85F"/>
                 </a:solidFill>
@@ -5482,7 +5482,7 @@
         </p:nvSpPr>
         <p:spPr>
           <a:xfrm>
-            <a:off x="1051560" y="2788920"/>
+            <a:off x="1051560" y="2770632"/>
             <a:ext cx="3063239" cy="274320"/>
           </a:xfrm>
           <a:prstGeom prst="rect">
@@ -5497,7 +5497,7 @@
           <a:lstStyle/>
           <a:p>
             <a:pPr>
-              <a:defRPr sz="1100" b="1" i="0">
+              <a:defRPr sz="1300" b="1" i="0">
                 <a:solidFill>
                   <a:srgbClr val="0F2540"/>
                 </a:solidFill>
@@ -5533,7 +5533,7 @@
           <a:lstStyle/>
           <a:p>
             <a:pPr>
-              <a:defRPr sz="1400" b="0" i="0">
+              <a:defRPr sz="1500" b="0" i="0">
                 <a:solidFill>
                   <a:srgbClr val="1A1A1A"/>
                 </a:solidFill>
@@ -5635,7 +5635,7 @@
         </p:nvSpPr>
         <p:spPr>
           <a:xfrm>
-            <a:off x="4846320" y="2788920"/>
+            <a:off x="4846320" y="2770632"/>
             <a:ext cx="3063239" cy="274320"/>
           </a:xfrm>
           <a:prstGeom prst="rect">
@@ -5650,7 +5650,7 @@
           <a:lstStyle/>
           <a:p>
             <a:pPr>
-              <a:defRPr sz="1100" b="1" i="0">
+              <a:defRPr sz="1300" b="1" i="0">
                 <a:solidFill>
                   <a:srgbClr val="0F2540"/>
                 </a:solidFill>
@@ -5686,7 +5686,7 @@
           <a:lstStyle/>
           <a:p>
             <a:pPr>
-              <a:defRPr sz="1400" b="0" i="0">
+              <a:defRPr sz="1500" b="0" i="0">
                 <a:solidFill>
                   <a:srgbClr val="1A1A1A"/>
                 </a:solidFill>
@@ -5788,7 +5788,7 @@
         </p:nvSpPr>
         <p:spPr>
           <a:xfrm>
-            <a:off x="8641080" y="2788920"/>
+            <a:off x="8641080" y="2770632"/>
             <a:ext cx="3063239" cy="274320"/>
           </a:xfrm>
           <a:prstGeom prst="rect">
@@ -5803,7 +5803,7 @@
           <a:lstStyle/>
           <a:p>
             <a:pPr>
-              <a:defRPr sz="1100" b="1" i="0">
+              <a:defRPr sz="1300" b="1" i="0">
                 <a:solidFill>
                   <a:srgbClr val="0F2540"/>
                 </a:solidFill>
@@ -5839,7 +5839,7 @@
           <a:lstStyle/>
           <a:p>
             <a:pPr>
-              <a:defRPr sz="1400" b="0" i="0">
+              <a:defRPr sz="1500" b="0" i="0">
                 <a:solidFill>
                   <a:srgbClr val="1A1A1A"/>
                 </a:solidFill>
@@ -10262,23 +10262,23 @@
         <p:spPr>
           <a:xfrm>
             <a:off x="9829800" y="2788920"/>
-            <a:ext cx="2011680" cy="274320"/>
-          </a:xfrm>
-          <a:prstGeom prst="rect">
-            <a:avLst/>
-          </a:prstGeom>
-          <a:noFill/>
-        </p:spPr>
-        <p:txBody>
-          <a:bodyPr wrap="square" lIns="0" rIns="0" tIns="0" bIns="0">
-            <a:spAutoFit/>
-          </a:bodyPr>
-          <a:lstStyle/>
-          <a:p>
-            <a:pPr>
-              <a:defRPr sz="1000" b="0" i="0">
-                <a:solidFill>
-                  <a:srgbClr val="7A7A7A"/>
+            <a:ext cx="2011680" cy="292608"/>
+          </a:xfrm>
+          <a:prstGeom prst="rect">
+            <a:avLst/>
+          </a:prstGeom>
+          <a:noFill/>
+        </p:spPr>
+        <p:txBody>
+          <a:bodyPr wrap="square" lIns="0" rIns="0" tIns="0" bIns="0">
+            <a:spAutoFit/>
+          </a:bodyPr>
+          <a:lstStyle/>
+          <a:p>
+            <a:pPr>
+              <a:defRPr sz="1200" b="1" i="0">
+                <a:solidFill>
+                  <a:srgbClr val="0F2540"/>
                 </a:solidFill>
                 <a:latin typeface="Calibri"/>
               </a:defRPr>
@@ -10297,7 +10297,7 @@
         </p:nvSpPr>
         <p:spPr>
           <a:xfrm>
-            <a:off x="9829800" y="3063240"/>
+            <a:off x="9829800" y="3081528"/>
             <a:ext cx="2011680" cy="457200"/>
           </a:xfrm>
           <a:prstGeom prst="rect">
@@ -10312,7 +10312,7 @@
           <a:lstStyle/>
           <a:p>
             <a:pPr>
-              <a:defRPr sz="1800" b="1" i="0">
+              <a:defRPr sz="2000" b="1" i="0">
                 <a:solidFill>
                   <a:srgbClr val="1D7E7E"/>
                 </a:solidFill>
@@ -10379,23 +10379,23 @@
         <p:spPr>
           <a:xfrm>
             <a:off x="9829800" y="3794759"/>
-            <a:ext cx="2011680" cy="274320"/>
-          </a:xfrm>
-          <a:prstGeom prst="rect">
-            <a:avLst/>
-          </a:prstGeom>
-          <a:noFill/>
-        </p:spPr>
-        <p:txBody>
-          <a:bodyPr wrap="square" lIns="0" rIns="0" tIns="0" bIns="0">
-            <a:spAutoFit/>
-          </a:bodyPr>
-          <a:lstStyle/>
-          <a:p>
-            <a:pPr>
-              <a:defRPr sz="1000" b="0" i="0">
-                <a:solidFill>
-                  <a:srgbClr val="7A7A7A"/>
+            <a:ext cx="2011680" cy="292608"/>
+          </a:xfrm>
+          <a:prstGeom prst="rect">
+            <a:avLst/>
+          </a:prstGeom>
+          <a:noFill/>
+        </p:spPr>
+        <p:txBody>
+          <a:bodyPr wrap="square" lIns="0" rIns="0" tIns="0" bIns="0">
+            <a:spAutoFit/>
+          </a:bodyPr>
+          <a:lstStyle/>
+          <a:p>
+            <a:pPr>
+              <a:defRPr sz="1200" b="1" i="0">
+                <a:solidFill>
+                  <a:srgbClr val="0F2540"/>
                 </a:solidFill>
                 <a:latin typeface="Calibri"/>
               </a:defRPr>
@@ -10414,7 +10414,7 @@
         </p:nvSpPr>
         <p:spPr>
           <a:xfrm>
-            <a:off x="9829800" y="4069080"/>
+            <a:off x="9829800" y="4087368"/>
             <a:ext cx="2011680" cy="457200"/>
           </a:xfrm>
           <a:prstGeom prst="rect">
@@ -10429,7 +10429,7 @@
           <a:lstStyle/>
           <a:p>
             <a:pPr>
-              <a:defRPr sz="1800" b="1" i="0">
+              <a:defRPr sz="2000" b="1" i="0">
                 <a:solidFill>
                   <a:srgbClr val="E0B85F"/>
                 </a:solidFill>
@@ -10496,23 +10496,23 @@
         <p:spPr>
           <a:xfrm>
             <a:off x="9829800" y="4800600"/>
-            <a:ext cx="2011680" cy="274320"/>
-          </a:xfrm>
-          <a:prstGeom prst="rect">
-            <a:avLst/>
-          </a:prstGeom>
-          <a:noFill/>
-        </p:spPr>
-        <p:txBody>
-          <a:bodyPr wrap="square" lIns="0" rIns="0" tIns="0" bIns="0">
-            <a:spAutoFit/>
-          </a:bodyPr>
-          <a:lstStyle/>
-          <a:p>
-            <a:pPr>
-              <a:defRPr sz="1000" b="0" i="0">
-                <a:solidFill>
-                  <a:srgbClr val="7A7A7A"/>
+            <a:ext cx="2011680" cy="292608"/>
+          </a:xfrm>
+          <a:prstGeom prst="rect">
+            <a:avLst/>
+          </a:prstGeom>
+          <a:noFill/>
+        </p:spPr>
+        <p:txBody>
+          <a:bodyPr wrap="square" lIns="0" rIns="0" tIns="0" bIns="0">
+            <a:spAutoFit/>
+          </a:bodyPr>
+          <a:lstStyle/>
+          <a:p>
+            <a:pPr>
+              <a:defRPr sz="1200" b="1" i="0">
+                <a:solidFill>
+                  <a:srgbClr val="0F2540"/>
                 </a:solidFill>
                 <a:latin typeface="Calibri"/>
               </a:defRPr>
@@ -10531,7 +10531,7 @@
         </p:nvSpPr>
         <p:spPr>
           <a:xfrm>
-            <a:off x="9829800" y="5074920"/>
+            <a:off x="9829800" y="5093208"/>
             <a:ext cx="2011680" cy="457200"/>
           </a:xfrm>
           <a:prstGeom prst="rect">
@@ -10546,7 +10546,7 @@
           <a:lstStyle/>
           <a:p>
             <a:pPr>
-              <a:defRPr sz="1800" b="1" i="0">
+              <a:defRPr sz="2000" b="1" i="0">
                 <a:solidFill>
                   <a:srgbClr val="0E5E5E"/>
                 </a:solidFill>
@@ -12821,7 +12821,7 @@
           <a:lstStyle/>
           <a:p>
             <a:pPr>
-              <a:defRPr sz="1000" b="0" i="0">
+              <a:defRPr sz="1200" b="0" i="0">
                 <a:solidFill>
                   <a:srgbClr val="CBD8E0"/>
                 </a:solidFill>
@@ -12936,7 +12936,7 @@
           <a:lstStyle/>
           <a:p>
             <a:pPr>
-              <a:defRPr sz="1000" b="0" i="0">
+              <a:defRPr sz="1200" b="0" i="0">
                 <a:solidFill>
                   <a:srgbClr val="CBD8E0"/>
                 </a:solidFill>
@@ -13301,7 +13301,7 @@
           <a:lstStyle/>
           <a:p>
             <a:pPr>
-              <a:defRPr sz="1100" b="1" i="0">
+              <a:defRPr sz="1200" b="1" i="0">
                 <a:solidFill>
                   <a:srgbClr val="E0B85F"/>
                 </a:solidFill>
@@ -13382,7 +13382,7 @@
           <a:lstStyle/>
           <a:p>
             <a:pPr>
-              <a:defRPr sz="1100" b="1" i="0">
+              <a:defRPr sz="1200" b="1" i="0">
                 <a:solidFill>
                   <a:srgbClr val="E0B85F"/>
                 </a:solidFill>
@@ -17691,8 +17691,8 @@
         </p:nvSpPr>
         <p:spPr>
           <a:xfrm>
-            <a:off x="457200" y="6400800"/>
-            <a:ext cx="10972800" cy="228600"/>
+            <a:off x="457200" y="5760720"/>
+            <a:ext cx="7040880" cy="365760"/>
           </a:xfrm>
           <a:prstGeom prst="rect">
             <a:avLst/>
@@ -17714,7 +17714,11 @@
               </a:defRPr>
             </a:pPr>
             <a:r>
-              <a:t>Sources: Blouw et al. 2019 (keyword-spotting benchmark); Davies et al. 2021 (LASSO 48× vs CPU); Horowitz ISSCC 2014 (per-op energy).</a:t>
+              <a:t>Sources: Blouw et al. 2019 (keyword-spotting benchmark) ·</a:t>
+            </a:r>
+            <a:br/>
+            <a:r>
+              <a:t>Davies et al. 2021 (LASSO 48× vs CPU) · Horowitz ISSCC 2014 (per-op energy).</a:t>
             </a:r>
           </a:p>
         </p:txBody>

--- a/Hyunho_Kook_Master_Defense.pptx
+++ b/Hyunho_Kook_Master_Defense.pptx
@@ -4363,7 +4363,7 @@
         <p:spPr>
           <a:xfrm>
             <a:off x="457200" y="2194560"/>
-            <a:ext cx="54864" cy="502920"/>
+            <a:ext cx="54864" cy="594360"/>
           </a:xfrm>
           <a:prstGeom prst="rect">
             <a:avLst/>
@@ -4406,7 +4406,7 @@
         <p:spPr>
           <a:xfrm>
             <a:off x="512064" y="2194560"/>
-            <a:ext cx="11192256" cy="502920"/>
+            <a:ext cx="11192256" cy="594360"/>
           </a:xfrm>
           <a:prstGeom prst="rect">
             <a:avLst/>
@@ -4449,7 +4449,7 @@
         <p:spPr>
           <a:xfrm>
             <a:off x="777240" y="2240279"/>
-            <a:ext cx="10789920" cy="411480"/>
+            <a:ext cx="10789920" cy="502920"/>
           </a:xfrm>
           <a:prstGeom prst="rect">
             <a:avLst/>
@@ -4471,7 +4471,7 @@
               </a:defRPr>
             </a:pPr>
             <a:r>
-              <a:t>Recap — peak-normalized SG (max f' = 1, window width γ).  γ controls width;  height comes from chain rule.</a:t>
+              <a:t>∂S/∂M ≈ f'(x)   ·   rectangular f' = 1 on | x | &lt; γ/2  (peak-normalized)   ·   γ = active window width</a:t>
             </a:r>
           </a:p>
         </p:txBody>
@@ -4484,7 +4484,7 @@
         </p:nvSpPr>
         <p:spPr>
           <a:xfrm>
-            <a:off x="457200" y="2880360"/>
+            <a:off x="457200" y="2971800"/>
             <a:ext cx="4754880" cy="1371600"/>
           </a:xfrm>
           <a:prstGeom prst="rect">
@@ -4529,7 +4529,7 @@
         </p:nvSpPr>
         <p:spPr>
           <a:xfrm>
-            <a:off x="640080" y="2944368"/>
+            <a:off x="640080" y="3035808"/>
             <a:ext cx="4389120" cy="320040"/>
           </a:xfrm>
           <a:prstGeom prst="rect">
@@ -4565,7 +4565,7 @@
         </p:nvSpPr>
         <p:spPr>
           <a:xfrm>
-            <a:off x="640080" y="3291840"/>
+            <a:off x="640080" y="3383280"/>
             <a:ext cx="4389120" cy="457200"/>
           </a:xfrm>
           <a:prstGeom prst="rect">
@@ -4601,7 +4601,7 @@
         </p:nvSpPr>
         <p:spPr>
           <a:xfrm>
-            <a:off x="640080" y="3840480"/>
+            <a:off x="640080" y="3931920"/>
             <a:ext cx="4389120" cy="365760"/>
           </a:xfrm>
           <a:prstGeom prst="rect">
@@ -4637,7 +4637,7 @@
         </p:nvSpPr>
         <p:spPr>
           <a:xfrm>
-            <a:off x="457200" y="4389120"/>
+            <a:off x="457200" y="4480560"/>
             <a:ext cx="4754880" cy="1371600"/>
           </a:xfrm>
           <a:prstGeom prst="rect">
@@ -4682,7 +4682,7 @@
         </p:nvSpPr>
         <p:spPr>
           <a:xfrm>
-            <a:off x="640080" y="4453128"/>
+            <a:off x="640080" y="4544568"/>
             <a:ext cx="4389120" cy="320040"/>
           </a:xfrm>
           <a:prstGeom prst="rect">
@@ -4718,7 +4718,7 @@
         </p:nvSpPr>
         <p:spPr>
           <a:xfrm>
-            <a:off x="640080" y="4800600"/>
+            <a:off x="640080" y="4892040"/>
             <a:ext cx="4389120" cy="457200"/>
           </a:xfrm>
           <a:prstGeom prst="rect">
@@ -4754,7 +4754,7 @@
         </p:nvSpPr>
         <p:spPr>
           <a:xfrm>
-            <a:off x="640080" y="5349240"/>
+            <a:off x="640080" y="5440680"/>
             <a:ext cx="4389120" cy="365760"/>
           </a:xfrm>
           <a:prstGeom prst="rect">
@@ -4790,7 +4790,7 @@
         </p:nvSpPr>
         <p:spPr>
           <a:xfrm>
-            <a:off x="5440680" y="2880360"/>
+            <a:off x="5440680" y="2971800"/>
             <a:ext cx="6400800" cy="274320"/>
           </a:xfrm>
           <a:prstGeom prst="rect">
@@ -4834,7 +4834,7 @@
         </p:blipFill>
         <p:spPr>
           <a:xfrm>
-            <a:off x="5440680" y="3200400"/>
+            <a:off x="5440680" y="3291840"/>
             <a:ext cx="6400800" cy="2349661"/>
           </a:xfrm>
           <a:prstGeom prst="rect">
@@ -23451,7 +23451,7 @@
             </a:pPr>
             <a:r>
               <a:rPr spc="300"/>
-              <a:t>BACKGROUND · 1/3</a:t>
+              <a:t>BACKGROUND · 1/2</a:t>
             </a:r>
           </a:p>
         </p:txBody>
@@ -24327,7 +24327,7 @@
             </a:pPr>
             <a:r>
               <a:rPr spc="300"/>
-              <a:t>BACKGROUND · 2/3</a:t>
+              <a:t>BACKGROUND · 2/2</a:t>
             </a:r>
           </a:p>
         </p:txBody>
@@ -25140,7 +25140,7 @@
             </a:pPr>
             <a:r>
               <a:rPr spc="300"/>
-              <a:t>BACKGROUND · 3/3</a:t>
+              <a:t>SETUP · 1/2</a:t>
             </a:r>
           </a:p>
         </p:txBody>
@@ -25653,7 +25653,7 @@
             </a:pPr>
             <a:r>
               <a:rPr spc="300"/>
-              <a:t>SETUP</a:t>
+              <a:t>SETUP · 2/2</a:t>
             </a:r>
           </a:p>
         </p:txBody>

--- a/Hyunho_Kook_Master_Defense.pptx
+++ b/Hyunho_Kook_Master_Defense.pptx
@@ -17480,7 +17480,7 @@
         <p:spPr>
           <a:xfrm>
             <a:off x="457200" y="4709160"/>
-            <a:ext cx="6766560" cy="1794423"/>
+            <a:ext cx="6766560" cy="2055664"/>
           </a:xfrm>
           <a:prstGeom prst="rect">
             <a:avLst/>

--- a/Hyunho_Kook_Master_Defense.pptx
+++ b/Hyunho_Kook_Master_Defense.pptx
@@ -4835,7 +4835,7 @@
         <p:spPr>
           <a:xfrm>
             <a:off x="5440680" y="3291840"/>
-            <a:ext cx="6400800" cy="2349661"/>
+            <a:ext cx="6400800" cy="2467144"/>
           </a:xfrm>
           <a:prstGeom prst="rect">
             <a:avLst/>

--- a/Hyunho_Kook_Master_Defense.pptx
+++ b/Hyunho_Kook_Master_Defense.pptx
@@ -4835,7 +4835,7 @@
         <p:spPr>
           <a:xfrm>
             <a:off x="5440680" y="3291840"/>
-            <a:ext cx="6400800" cy="2467144"/>
+            <a:ext cx="6400800" cy="2345610"/>
           </a:xfrm>
           <a:prstGeom prst="rect">
             <a:avLst/>

--- a/Hyunho_Kook_Master_Defense.pptx
+++ b/Hyunho_Kook_Master_Defense.pptx
@@ -4835,7 +4835,7 @@
         <p:spPr>
           <a:xfrm>
             <a:off x="5440680" y="3291840"/>
-            <a:ext cx="6400800" cy="2345610"/>
+            <a:ext cx="6400800" cy="2487399"/>
           </a:xfrm>
           <a:prstGeom prst="rect">
             <a:avLst/>

--- a/Hyunho_Kook_Master_Defense.pptx
+++ b/Hyunho_Kook_Master_Defense.pptx
@@ -3573,7 +3573,7 @@
               </a:defRPr>
             </a:pPr>
             <a:r>
-              <a:t>Department of Computer Science and Engineering · POSTECH · January 2026</a:t>
+              <a:t>Department of Computer Science and Engineering · POSTECH · May 2026</a:t>
             </a:r>
           </a:p>
         </p:txBody>
